--- a/RH_Stock_Pitch_updated.pptx
+++ b/RH_Stock_Pitch_updated.pptx
@@ -11954,7 +11954,7 @@
                           </a:solidFill>
                           <a:latin typeface="Avenir Next LT Pro Demi"/>
                         </a:rPr>
-                        <a:t>Adj. EPS</a:t>
+                        <a:t>Est. EPS (fwd)</a:t>
                       </a:r>
                     </a:p>
                   </a:txBody>
@@ -12122,7 +12122,7 @@
                           </a:solidFill>
                           <a:latin typeface="Avenir Next LT Pro"/>
                         </a:rPr>
-                        <a:t>~$18–26</a:t>
+                        <a:t>~$22–35</a:t>
                       </a:r>
                     </a:p>
                   </a:txBody>
@@ -12145,7 +12145,7 @@
                           </a:solidFill>
                           <a:latin typeface="Avenir Next LT Pro"/>
                         </a:rPr>
-                        <a:t>6–8×</a:t>
+                        <a:t>~5–7×</a:t>
                       </a:r>
                     </a:p>
                   </a:txBody>
@@ -12290,7 +12290,7 @@
                           </a:solidFill>
                           <a:latin typeface="Avenir Next LT Pro"/>
                         </a:rPr>
-                        <a:t>~$10–14</a:t>
+                        <a:t>~$11–19</a:t>
                       </a:r>
                     </a:p>
                   </a:txBody>
@@ -12313,7 +12313,7 @@
                           </a:solidFill>
                           <a:latin typeface="Avenir Next LT Pro"/>
                         </a:rPr>
-                        <a:t>11–15×</a:t>
+                        <a:t>~9–15×</a:t>
                       </a:r>
                     </a:p>
                   </a:txBody>
@@ -12458,7 +12458,7 @@
                           </a:solidFill>
                           <a:latin typeface="Avenir Next LT Pro"/>
                         </a:rPr>
-                        <a:t>~$4–6</a:t>
+                        <a:t>~$3–6</a:t>
                       </a:r>
                     </a:p>
                   </a:txBody>
@@ -12481,7 +12481,7 @@
                           </a:solidFill>
                           <a:latin typeface="Avenir Next LT Pro"/>
                         </a:rPr>
-                        <a:t>25–37×</a:t>
+                        <a:t>~25–55×</a:t>
                       </a:r>
                     </a:p>
                   </a:txBody>
@@ -12539,6 +12539,40 @@
                 <a:latin typeface="Avenir Next LT Pro"/>
               </a:rPr>
               <a:t>Base case assumes NO recovery — a rate-driven turn is upside, not a requirement</a:t>
+            </a:r>
+          </a:p>
+        </p:txBody>
+      </p:sp>
+      <p:sp>
+        <p:nvSpPr>
+          <p:cNvPr id="8" name="TextBox 7"/>
+          <p:cNvSpPr txBox="1"/>
+          <p:nvPr/>
+        </p:nvSpPr>
+        <p:spPr>
+          <a:xfrm>
+            <a:off x="457200" y="5989320"/>
+            <a:ext cx="8229600" cy="365760"/>
+          </a:xfrm>
+          <a:prstGeom prst="rect">
+            <a:avLst/>
+          </a:prstGeom>
+          <a:noFill/>
+        </p:spPr>
+        <p:txBody>
+          <a:bodyPr wrap="square">
+            <a:spAutoFit/>
+          </a:bodyPr>
+          <a:lstStyle/>
+          <a:p>
+            <a:r>
+              <a:rPr sz="800" i="1">
+                <a:solidFill>
+                  <a:srgbClr val="8A8A8A"/>
+                </a:solidFill>
+                <a:latin typeface="Avenir Next LT Pro"/>
+              </a:rPr>
+              <a:t>EPS ≈ (EBITDA − ~$150M D&amp;A − ~$215M interest) × (1 − 25% tax) ÷ ~19M shares. Illustrative scenario mapping, not a forecast.</a:t>
             </a:r>
           </a:p>
         </p:txBody>

--- a/RH_Stock_Pitch_updated.pptx
+++ b/RH_Stock_Pitch_updated.pptx
@@ -6003,7 +6003,7 @@
                           </a:solidFill>
                           <a:latin typeface="Avenir Next LT Pro"/>
                         </a:rPr>
-                        <a:t>~8.7×</a:t>
+                        <a:t>~9.3×</a:t>
                       </a:r>
                     </a:p>
                   </a:txBody>

--- a/RH_Stock_Pitch_updated.pptx
+++ b/RH_Stock_Pitch_updated.pptx
@@ -7014,6 +7014,114 @@
           <a:p>
             <a:pPr algn="ctr"/>
             <a:endParaRPr/>
+          </a:p>
+        </p:txBody>
+      </p:sp>
+      <p:sp>
+        <p:nvSpPr>
+          <p:cNvPr id="18" name="Rectangle 17"/>
+          <p:cNvSpPr/>
+          <p:nvPr/>
+        </p:nvSpPr>
+        <p:spPr>
+          <a:xfrm>
+            <a:off x="457200" y="4928616"/>
+            <a:ext cx="3977639" cy="960120"/>
+          </a:xfrm>
+          <a:prstGeom prst="rect">
+            <a:avLst/>
+          </a:prstGeom>
+          <a:solidFill>
+            <a:srgbClr val="FFFFFF"/>
+          </a:solidFill>
+          <a:ln w="12700">
+            <a:solidFill>
+              <a:srgbClr val="E8E8E8"/>
+            </a:solidFill>
+          </a:ln>
+        </p:spPr>
+        <p:style>
+          <a:lnRef idx="1">
+            <a:schemeClr val="accent1"/>
+          </a:lnRef>
+          <a:fillRef idx="3">
+            <a:schemeClr val="accent1"/>
+          </a:fillRef>
+          <a:effectRef idx="2">
+            <a:schemeClr val="accent1"/>
+          </a:effectRef>
+          <a:fontRef idx="minor">
+            <a:schemeClr val="lt1"/>
+          </a:fontRef>
+        </p:style>
+        <p:txBody>
+          <a:bodyPr rtlCol="0" anchor="ctr" wrap="square" lIns="182880"/>
+          <a:lstStyle/>
+          <a:p>
+            <a:pPr algn="ctr"/>
+            <a:r>
+              <a:rPr sz="1200" b="1">
+                <a:solidFill>
+                  <a:srgbClr val="0E2841"/>
+                </a:solidFill>
+                <a:latin typeface="Avenir Next LT Pro Demi"/>
+              </a:rPr>
+              <a:t>Fulfillment / delivery execution (moat risk at Estates tier)</a:t>
+            </a:r>
+          </a:p>
+          <a:p>
+            <a:r>
+              <a:rPr sz="950" b="1">
+                <a:solidFill>
+                  <a:srgbClr val="C88A12"/>
+                </a:solidFill>
+                <a:latin typeface="Avenir Next LT Pro"/>
+              </a:rPr>
+              <a:t>Severity: MED   ·   Probability: 30%</a:t>
+            </a:r>
+          </a:p>
+        </p:txBody>
+      </p:sp>
+      <p:sp>
+        <p:nvSpPr>
+          <p:cNvPr id="19" name="Rectangle 18"/>
+          <p:cNvSpPr/>
+          <p:nvPr/>
+        </p:nvSpPr>
+        <p:spPr>
+          <a:xfrm>
+            <a:off x="457200" y="4928616"/>
+            <a:ext cx="73152" cy="960120"/>
+          </a:xfrm>
+          <a:prstGeom prst="rect">
+            <a:avLst/>
+          </a:prstGeom>
+          <a:solidFill>
+            <a:srgbClr val="C88A12"/>
+          </a:solidFill>
+          <a:ln>
+            <a:noFill/>
+          </a:ln>
+        </p:spPr>
+        <p:style>
+          <a:lnRef idx="1">
+            <a:schemeClr val="accent1"/>
+          </a:lnRef>
+          <a:fillRef idx="3">
+            <a:schemeClr val="accent1"/>
+          </a:fillRef>
+          <a:effectRef idx="2">
+            <a:schemeClr val="accent1"/>
+          </a:effectRef>
+          <a:fontRef idx="minor">
+            <a:schemeClr val="lt1"/>
+          </a:fontRef>
+        </p:style>
+        <p:txBody>
+          <a:bodyPr rtlCol="0" anchor="ctr"/>
+          <a:lstStyle/>
+          <a:p>
+            <a:pPr algn="ctr"/>
           </a:p>
         </p:txBody>
       </p:sp>

--- a/RH_Stock_Pitch_updated.pptx
+++ b/RH_Stock_Pitch_updated.pptx
@@ -23,6 +23,10 @@
     <p:sldId id="506" r:id="rId14"/>
     <p:sldId id="511" r:id="rId15"/>
     <p:sldId id="512" r:id="rId16"/>
+    <p:sldId id="513" r:id="rId27"/>
+    <p:sldId id="514" r:id="rId28"/>
+    <p:sldId id="515" r:id="rId29"/>
+    <p:sldId id="516" r:id="rId30"/>
   </p:sldIdLst>
   <p:sldSz cx="9144000" cy="6858000" type="screen4x3"/>
   <p:notesSz cx="7023100" cy="9309100"/>
@@ -7122,6 +7126,2350 @@
           <a:lstStyle/>
           <a:p>
             <a:pPr algn="ctr"/>
+          </a:p>
+        </p:txBody>
+      </p:sp>
+    </p:spTree>
+  </p:cSld>
+  <p:clrMapOvr>
+    <a:masterClrMapping/>
+  </p:clrMapOvr>
+</p:sld>
+</file>
+
+<file path=ppt/slides/slide13.xml><?xml version="1.0" encoding="utf-8"?>
+<p:sld xmlns:a="http://schemas.openxmlformats.org/drawingml/2006/main" xmlns:p="http://schemas.openxmlformats.org/presentationml/2006/main" xmlns:r="http://schemas.openxmlformats.org/officeDocument/2006/relationships">
+  <p:cSld>
+    <p:spTree>
+      <p:nvGrpSpPr>
+        <p:cNvPr id="1" name=""/>
+        <p:cNvGrpSpPr/>
+        <p:nvPr/>
+      </p:nvGrpSpPr>
+      <p:grpSpPr/>
+      <p:sp>
+        <p:nvSpPr>
+          <p:cNvPr id="2" name="TextBox 1"/>
+          <p:cNvSpPr txBox="1"/>
+          <p:nvPr/>
+        </p:nvSpPr>
+        <p:spPr>
+          <a:xfrm>
+            <a:off x="457200" y="320040"/>
+            <a:ext cx="8229600" cy="548640"/>
+          </a:xfrm>
+          <a:prstGeom prst="rect">
+            <a:avLst/>
+          </a:prstGeom>
+          <a:noFill/>
+        </p:spPr>
+        <p:txBody>
+          <a:bodyPr wrap="square">
+            <a:spAutoFit/>
+          </a:bodyPr>
+          <a:lstStyle/>
+          <a:p>
+            <a:r>
+              <a:rPr sz="2200" b="0" i="0">
+                <a:solidFill>
+                  <a:srgbClr val="0E2841"/>
+                </a:solidFill>
+                <a:latin typeface="Avenir Next LT Pro Demi"/>
+              </a:rPr>
+              <a:t>How RH Got Here — From Peak to Self-Inflicted Trough</a:t>
+            </a:r>
+          </a:p>
+        </p:txBody>
+      </p:sp>
+      <p:sp>
+        <p:nvSpPr>
+          <p:cNvPr id="3" name="Rectangle 2"/>
+          <p:cNvSpPr/>
+          <p:nvPr/>
+        </p:nvSpPr>
+        <p:spPr>
+          <a:xfrm>
+            <a:off x="457200" y="914400"/>
+            <a:ext cx="8229600" cy="27432"/>
+          </a:xfrm>
+          <a:prstGeom prst="rect">
+            <a:avLst/>
+          </a:prstGeom>
+          <a:solidFill>
+            <a:srgbClr val="156082"/>
+          </a:solidFill>
+          <a:ln>
+            <a:noFill/>
+          </a:ln>
+        </p:spPr>
+        <p:style>
+          <a:lnRef idx="1">
+            <a:schemeClr val="accent1"/>
+          </a:lnRef>
+          <a:fillRef idx="3">
+            <a:schemeClr val="accent1"/>
+          </a:fillRef>
+          <a:effectRef idx="2">
+            <a:schemeClr val="accent1"/>
+          </a:effectRef>
+          <a:fontRef idx="minor">
+            <a:schemeClr val="lt1"/>
+          </a:fontRef>
+        </p:style>
+        <p:txBody>
+          <a:bodyPr rtlCol="0" anchor="ctr"/>
+          <a:lstStyle/>
+          <a:p>
+            <a:pPr algn="ctr"/>
+          </a:p>
+        </p:txBody>
+      </p:sp>
+      <p:sp>
+        <p:nvSpPr>
+          <p:cNvPr id="4" name="Rectangle 3"/>
+          <p:cNvSpPr/>
+          <p:nvPr/>
+        </p:nvSpPr>
+        <p:spPr>
+          <a:xfrm>
+            <a:off x="457200" y="1188720"/>
+            <a:ext cx="82296" cy="1371600"/>
+          </a:xfrm>
+          <a:prstGeom prst="rect">
+            <a:avLst/>
+          </a:prstGeom>
+          <a:solidFill>
+            <a:srgbClr val="156082"/>
+          </a:solidFill>
+          <a:ln>
+            <a:noFill/>
+          </a:ln>
+        </p:spPr>
+        <p:style>
+          <a:lnRef idx="1">
+            <a:schemeClr val="accent1"/>
+          </a:lnRef>
+          <a:fillRef idx="3">
+            <a:schemeClr val="accent1"/>
+          </a:fillRef>
+          <a:effectRef idx="2">
+            <a:schemeClr val="accent1"/>
+          </a:effectRef>
+          <a:fontRef idx="minor">
+            <a:schemeClr val="lt1"/>
+          </a:fontRef>
+        </p:style>
+        <p:txBody>
+          <a:bodyPr rtlCol="0" anchor="ctr"/>
+          <a:lstStyle/>
+          <a:p>
+            <a:pPr algn="ctr"/>
+          </a:p>
+        </p:txBody>
+      </p:sp>
+      <p:sp>
+        <p:nvSpPr>
+          <p:cNvPr id="5" name="TextBox 4"/>
+          <p:cNvSpPr txBox="1"/>
+          <p:nvPr/>
+        </p:nvSpPr>
+        <p:spPr>
+          <a:xfrm>
+            <a:off x="658368" y="1188720"/>
+            <a:ext cx="2194560" cy="1371600"/>
+          </a:xfrm>
+          <a:prstGeom prst="rect">
+            <a:avLst/>
+          </a:prstGeom>
+          <a:noFill/>
+        </p:spPr>
+        <p:txBody>
+          <a:bodyPr wrap="square" anchor="ctr">
+            <a:spAutoFit/>
+          </a:bodyPr>
+          <a:lstStyle/>
+          <a:p>
+            <a:r>
+              <a:rPr sz="1300" b="1" i="0">
+                <a:solidFill>
+                  <a:srgbClr val="156082"/>
+                </a:solidFill>
+                <a:latin typeface="Avenir Next LT Pro Demi"/>
+              </a:rPr>
+              <a:t>THE BUILD</a:t>
+            </a:r>
+          </a:p>
+          <a:p>
+            <a:r>
+              <a:rPr sz="1100" b="0" i="0">
+                <a:solidFill>
+                  <a:srgbClr val="5A5A5A"/>
+                </a:solidFill>
+                <a:latin typeface="Avenir Next LT Pro"/>
+              </a:rPr>
+              <a:t>Pre-2020</a:t>
+            </a:r>
+          </a:p>
+        </p:txBody>
+      </p:sp>
+      <p:sp>
+        <p:nvSpPr>
+          <p:cNvPr id="6" name="TextBox 5"/>
+          <p:cNvSpPr txBox="1"/>
+          <p:nvPr/>
+        </p:nvSpPr>
+        <p:spPr>
+          <a:xfrm>
+            <a:off x="2971800" y="1188720"/>
+            <a:ext cx="5715000" cy="1371600"/>
+          </a:xfrm>
+          <a:prstGeom prst="rect">
+            <a:avLst/>
+          </a:prstGeom>
+          <a:noFill/>
+        </p:spPr>
+        <p:txBody>
+          <a:bodyPr wrap="square" anchor="ctr">
+            <a:spAutoFit/>
+          </a:bodyPr>
+          <a:lstStyle/>
+          <a:p>
+            <a:r>
+              <a:rPr sz="1150" b="0" i="0">
+                <a:solidFill>
+                  <a:srgbClr val="0E2841"/>
+                </a:solidFill>
+                <a:latin typeface="Avenir Next LT Pro"/>
+              </a:rPr>
+              <a:t>Friedman transforms RH from a near-bankrupt mall retailer into a luxury Gallery brand — large-format design galleries, membership model, soaring AOV.</a:t>
+            </a:r>
+          </a:p>
+        </p:txBody>
+      </p:sp>
+      <p:sp>
+        <p:nvSpPr>
+          <p:cNvPr id="7" name="Rectangle 6"/>
+          <p:cNvSpPr/>
+          <p:nvPr/>
+        </p:nvSpPr>
+        <p:spPr>
+          <a:xfrm>
+            <a:off x="457200" y="2670048"/>
+            <a:ext cx="82296" cy="1371600"/>
+          </a:xfrm>
+          <a:prstGeom prst="rect">
+            <a:avLst/>
+          </a:prstGeom>
+          <a:solidFill>
+            <a:srgbClr val="E97132"/>
+          </a:solidFill>
+          <a:ln>
+            <a:noFill/>
+          </a:ln>
+        </p:spPr>
+        <p:style>
+          <a:lnRef idx="1">
+            <a:schemeClr val="accent1"/>
+          </a:lnRef>
+          <a:fillRef idx="3">
+            <a:schemeClr val="accent1"/>
+          </a:fillRef>
+          <a:effectRef idx="2">
+            <a:schemeClr val="accent1"/>
+          </a:effectRef>
+          <a:fontRef idx="minor">
+            <a:schemeClr val="lt1"/>
+          </a:fontRef>
+        </p:style>
+        <p:txBody>
+          <a:bodyPr rtlCol="0" anchor="ctr"/>
+          <a:lstStyle/>
+          <a:p>
+            <a:pPr algn="ctr"/>
+          </a:p>
+        </p:txBody>
+      </p:sp>
+      <p:sp>
+        <p:nvSpPr>
+          <p:cNvPr id="8" name="TextBox 7"/>
+          <p:cNvSpPr txBox="1"/>
+          <p:nvPr/>
+        </p:nvSpPr>
+        <p:spPr>
+          <a:xfrm>
+            <a:off x="658368" y="2670048"/>
+            <a:ext cx="2194560" cy="1371600"/>
+          </a:xfrm>
+          <a:prstGeom prst="rect">
+            <a:avLst/>
+          </a:prstGeom>
+          <a:noFill/>
+        </p:spPr>
+        <p:txBody>
+          <a:bodyPr wrap="square" anchor="ctr">
+            <a:spAutoFit/>
+          </a:bodyPr>
+          <a:lstStyle/>
+          <a:p>
+            <a:r>
+              <a:rPr sz="1300" b="1" i="0">
+                <a:solidFill>
+                  <a:srgbClr val="E97132"/>
+                </a:solidFill>
+                <a:latin typeface="Avenir Next LT Pro Demi"/>
+              </a:rPr>
+              <a:t>THE PEAK</a:t>
+            </a:r>
+          </a:p>
+          <a:p>
+            <a:r>
+              <a:rPr sz="1100" b="0" i="0">
+                <a:solidFill>
+                  <a:srgbClr val="5A5A5A"/>
+                </a:solidFill>
+                <a:latin typeface="Avenir Next LT Pro"/>
+              </a:rPr>
+              <a:t>FY2022</a:t>
+            </a:r>
+          </a:p>
+        </p:txBody>
+      </p:sp>
+      <p:sp>
+        <p:nvSpPr>
+          <p:cNvPr id="9" name="TextBox 8"/>
+          <p:cNvSpPr txBox="1"/>
+          <p:nvPr/>
+        </p:nvSpPr>
+        <p:spPr>
+          <a:xfrm>
+            <a:off x="2971800" y="2670048"/>
+            <a:ext cx="5715000" cy="1371600"/>
+          </a:xfrm>
+          <a:prstGeom prst="rect">
+            <a:avLst/>
+          </a:prstGeom>
+          <a:noFill/>
+        </p:spPr>
+        <p:txBody>
+          <a:bodyPr wrap="square" anchor="ctr">
+            <a:spAutoFit/>
+          </a:bodyPr>
+          <a:lstStyle/>
+          <a:p>
+            <a:r>
+              <a:rPr sz="1150" b="0" i="0">
+                <a:solidFill>
+                  <a:srgbClr val="0E2841"/>
+                </a:solidFill>
+                <a:latin typeface="Avenir Next LT Pro"/>
+              </a:rPr>
+              <a:t>COVID housing boom drives revenue to a ~$3.6B peak. RH levers up and buys back ~7.6M shares in FY22–23 at ~$269–321 avg (program upsized to $2.45B) — funded largely by term loans.</a:t>
+            </a:r>
+          </a:p>
+        </p:txBody>
+      </p:sp>
+      <p:sp>
+        <p:nvSpPr>
+          <p:cNvPr id="10" name="Rectangle 9"/>
+          <p:cNvSpPr/>
+          <p:nvPr/>
+        </p:nvSpPr>
+        <p:spPr>
+          <a:xfrm>
+            <a:off x="457200" y="4151376"/>
+            <a:ext cx="82296" cy="1371600"/>
+          </a:xfrm>
+          <a:prstGeom prst="rect">
+            <a:avLst/>
+          </a:prstGeom>
+          <a:solidFill>
+            <a:srgbClr val="B03030"/>
+          </a:solidFill>
+          <a:ln>
+            <a:noFill/>
+          </a:ln>
+        </p:spPr>
+        <p:style>
+          <a:lnRef idx="1">
+            <a:schemeClr val="accent1"/>
+          </a:lnRef>
+          <a:fillRef idx="3">
+            <a:schemeClr val="accent1"/>
+          </a:fillRef>
+          <a:effectRef idx="2">
+            <a:schemeClr val="accent1"/>
+          </a:effectRef>
+          <a:fontRef idx="minor">
+            <a:schemeClr val="lt1"/>
+          </a:fontRef>
+        </p:style>
+        <p:txBody>
+          <a:bodyPr rtlCol="0" anchor="ctr"/>
+          <a:lstStyle/>
+          <a:p>
+            <a:pPr algn="ctr"/>
+          </a:p>
+        </p:txBody>
+      </p:sp>
+      <p:sp>
+        <p:nvSpPr>
+          <p:cNvPr id="11" name="TextBox 10"/>
+          <p:cNvSpPr txBox="1"/>
+          <p:nvPr/>
+        </p:nvSpPr>
+        <p:spPr>
+          <a:xfrm>
+            <a:off x="658368" y="4151376"/>
+            <a:ext cx="2194560" cy="1371600"/>
+          </a:xfrm>
+          <a:prstGeom prst="rect">
+            <a:avLst/>
+          </a:prstGeom>
+          <a:noFill/>
+        </p:spPr>
+        <p:txBody>
+          <a:bodyPr wrap="square" anchor="ctr">
+            <a:spAutoFit/>
+          </a:bodyPr>
+          <a:lstStyle/>
+          <a:p>
+            <a:r>
+              <a:rPr sz="1300" b="1" i="0">
+                <a:solidFill>
+                  <a:srgbClr val="B03030"/>
+                </a:solidFill>
+                <a:latin typeface="Avenir Next LT Pro Demi"/>
+              </a:rPr>
+              <a:t>THE FALL</a:t>
+            </a:r>
+          </a:p>
+          <a:p>
+            <a:r>
+              <a:rPr sz="1100" b="0" i="0">
+                <a:solidFill>
+                  <a:srgbClr val="5A5A5A"/>
+                </a:solidFill>
+                <a:latin typeface="Avenir Next LT Pro"/>
+              </a:rPr>
+              <a:t>FY2023–24</a:t>
+            </a:r>
+          </a:p>
+        </p:txBody>
+      </p:sp>
+      <p:sp>
+        <p:nvSpPr>
+          <p:cNvPr id="12" name="TextBox 11"/>
+          <p:cNvSpPr txBox="1"/>
+          <p:nvPr/>
+        </p:nvSpPr>
+        <p:spPr>
+          <a:xfrm>
+            <a:off x="2971800" y="4151376"/>
+            <a:ext cx="5715000" cy="1371600"/>
+          </a:xfrm>
+          <a:prstGeom prst="rect">
+            <a:avLst/>
+          </a:prstGeom>
+          <a:noFill/>
+        </p:spPr>
+        <p:txBody>
+          <a:bodyPr wrap="square" anchor="ctr">
+            <a:spAutoFit/>
+          </a:bodyPr>
+          <a:lstStyle/>
+          <a:p>
+            <a:r>
+              <a:rPr sz="1150" b="0" i="0">
+                <a:solidFill>
+                  <a:srgbClr val="0E2841"/>
+                </a:solidFill>
+                <a:latin typeface="Avenir Next LT Pro"/>
+              </a:rPr>
+              <a:t>Fed rate hikes freeze housing turnover. Revenue falls to a ~$3.03B trough. The buyback debt now sits on a shrunken business → ~$2.4B net debt, ~4× levered.</a:t>
+            </a:r>
+          </a:p>
+        </p:txBody>
+      </p:sp>
+      <p:sp>
+        <p:nvSpPr>
+          <p:cNvPr id="13" name="TextBox 12"/>
+          <p:cNvSpPr txBox="1"/>
+          <p:nvPr/>
+        </p:nvSpPr>
+        <p:spPr>
+          <a:xfrm>
+            <a:off x="457200" y="5806440"/>
+            <a:ext cx="8229600" cy="457200"/>
+          </a:xfrm>
+          <a:prstGeom prst="rect">
+            <a:avLst/>
+          </a:prstGeom>
+          <a:noFill/>
+        </p:spPr>
+        <p:txBody>
+          <a:bodyPr wrap="square">
+            <a:spAutoFit/>
+          </a:bodyPr>
+          <a:lstStyle/>
+          <a:p>
+            <a:r>
+              <a:rPr sz="1100" b="1" i="0">
+                <a:solidFill>
+                  <a:srgbClr val="156082"/>
+                </a:solidFill>
+                <a:latin typeface="Avenir Next LT Pro Demi"/>
+              </a:rPr>
+              <a:t>Takeaway: the wound was partly self-inflicted — leveraged buybacks at the top, then the housing cycle turned.</a:t>
+            </a:r>
+          </a:p>
+        </p:txBody>
+      </p:sp>
+      <p:sp>
+        <p:nvSpPr>
+          <p:cNvPr id="14" name="TextBox 13"/>
+          <p:cNvSpPr txBox="1"/>
+          <p:nvPr/>
+        </p:nvSpPr>
+        <p:spPr>
+          <a:xfrm>
+            <a:off x="457200" y="6355080"/>
+            <a:ext cx="8229600" cy="411480"/>
+          </a:xfrm>
+          <a:prstGeom prst="rect">
+            <a:avLst/>
+          </a:prstGeom>
+          <a:noFill/>
+        </p:spPr>
+        <p:txBody>
+          <a:bodyPr wrap="square">
+            <a:spAutoFit/>
+          </a:bodyPr>
+          <a:lstStyle/>
+          <a:p>
+            <a:r>
+              <a:rPr sz="750" b="0" i="1">
+                <a:solidFill>
+                  <a:srgbClr val="9A9A9A"/>
+                </a:solidFill>
+                <a:latin typeface="Avenir Next LT Pro"/>
+              </a:rPr>
+              <a:t>Source: RH FY2025 Form 10-K (fiscal year ended January 31, 2026)</a:t>
+            </a:r>
+          </a:p>
+        </p:txBody>
+      </p:sp>
+    </p:spTree>
+  </p:cSld>
+  <p:clrMapOvr>
+    <a:masterClrMapping/>
+  </p:clrMapOvr>
+</p:sld>
+</file>
+
+<file path=ppt/slides/slide14.xml><?xml version="1.0" encoding="utf-8"?>
+<p:sld xmlns:a="http://schemas.openxmlformats.org/drawingml/2006/main" xmlns:p="http://schemas.openxmlformats.org/presentationml/2006/main" xmlns:r="http://schemas.openxmlformats.org/officeDocument/2006/relationships">
+  <p:cSld>
+    <p:spTree>
+      <p:nvGrpSpPr>
+        <p:cNvPr id="1" name=""/>
+        <p:cNvGrpSpPr/>
+        <p:nvPr/>
+      </p:nvGrpSpPr>
+      <p:grpSpPr/>
+      <p:sp>
+        <p:nvSpPr>
+          <p:cNvPr id="2" name="TextBox 1"/>
+          <p:cNvSpPr txBox="1"/>
+          <p:nvPr/>
+        </p:nvSpPr>
+        <p:spPr>
+          <a:xfrm>
+            <a:off x="457200" y="320040"/>
+            <a:ext cx="8229600" cy="548640"/>
+          </a:xfrm>
+          <a:prstGeom prst="rect">
+            <a:avLst/>
+          </a:prstGeom>
+          <a:noFill/>
+        </p:spPr>
+        <p:txBody>
+          <a:bodyPr wrap="square">
+            <a:spAutoFit/>
+          </a:bodyPr>
+          <a:lstStyle/>
+          <a:p>
+            <a:r>
+              <a:rPr sz="2200" b="0" i="0">
+                <a:solidFill>
+                  <a:srgbClr val="0E2841"/>
+                </a:solidFill>
+                <a:latin typeface="Avenir Next LT Pro Demi"/>
+              </a:rPr>
+              <a:t>The Recovery Plan — Friedman's Playbook</a:t>
+            </a:r>
+          </a:p>
+        </p:txBody>
+      </p:sp>
+      <p:sp>
+        <p:nvSpPr>
+          <p:cNvPr id="3" name="Rectangle 2"/>
+          <p:cNvSpPr/>
+          <p:nvPr/>
+        </p:nvSpPr>
+        <p:spPr>
+          <a:xfrm>
+            <a:off x="457200" y="914400"/>
+            <a:ext cx="8229600" cy="27432"/>
+          </a:xfrm>
+          <a:prstGeom prst="rect">
+            <a:avLst/>
+          </a:prstGeom>
+          <a:solidFill>
+            <a:srgbClr val="156082"/>
+          </a:solidFill>
+          <a:ln>
+            <a:noFill/>
+          </a:ln>
+        </p:spPr>
+        <p:style>
+          <a:lnRef idx="1">
+            <a:schemeClr val="accent1"/>
+          </a:lnRef>
+          <a:fillRef idx="3">
+            <a:schemeClr val="accent1"/>
+          </a:fillRef>
+          <a:effectRef idx="2">
+            <a:schemeClr val="accent1"/>
+          </a:effectRef>
+          <a:fontRef idx="minor">
+            <a:schemeClr val="lt1"/>
+          </a:fontRef>
+        </p:style>
+        <p:txBody>
+          <a:bodyPr rtlCol="0" anchor="ctr"/>
+          <a:lstStyle/>
+          <a:p>
+            <a:pPr algn="ctr"/>
+          </a:p>
+        </p:txBody>
+      </p:sp>
+      <p:sp>
+        <p:nvSpPr>
+          <p:cNvPr id="4" name="Rectangle 3"/>
+          <p:cNvSpPr/>
+          <p:nvPr/>
+        </p:nvSpPr>
+        <p:spPr>
+          <a:xfrm>
+            <a:off x="457200" y="1234440"/>
+            <a:ext cx="3977639" cy="1965960"/>
+          </a:xfrm>
+          <a:prstGeom prst="rect">
+            <a:avLst/>
+          </a:prstGeom>
+          <a:solidFill>
+            <a:srgbClr val="FFFFFF"/>
+          </a:solidFill>
+          <a:ln w="12700">
+            <a:solidFill>
+              <a:srgbClr val="E8E8E8"/>
+            </a:solidFill>
+          </a:ln>
+        </p:spPr>
+        <p:style>
+          <a:lnRef idx="1">
+            <a:schemeClr val="accent1"/>
+          </a:lnRef>
+          <a:fillRef idx="3">
+            <a:schemeClr val="accent1"/>
+          </a:fillRef>
+          <a:effectRef idx="2">
+            <a:schemeClr val="accent1"/>
+          </a:effectRef>
+          <a:fontRef idx="minor">
+            <a:schemeClr val="lt1"/>
+          </a:fontRef>
+        </p:style>
+        <p:txBody>
+          <a:bodyPr rtlCol="0" anchor="t" wrap="square" lIns="164592" rIns="137160" tIns="146304"/>
+          <a:lstStyle/>
+          <a:p>
+            <a:pPr algn="ctr"/>
+            <a:r>
+              <a:rPr sz="1400" b="1" i="0">
+                <a:solidFill>
+                  <a:srgbClr val="156082"/>
+                </a:solidFill>
+                <a:latin typeface="Avenir Next LT Pro Demi"/>
+              </a:rPr>
+              <a:t>Product transformation</a:t>
+            </a:r>
+          </a:p>
+          <a:p>
+            <a:pPr>
+              <a:spcBef>
+                <a:spcPts val="500"/>
+              </a:spcBef>
+            </a:pPr>
+            <a:r>
+              <a:rPr sz="1100" b="0" i="0">
+                <a:solidFill>
+                  <a:srgbClr val="0E2841"/>
+                </a:solidFill>
+                <a:latin typeface="Avenir Next LT Pro"/>
+              </a:rPr>
+              <a:t>New collections and refreshed Sourcebooks to reignite demand and elevate the assortment.</a:t>
+            </a:r>
+          </a:p>
+        </p:txBody>
+      </p:sp>
+      <p:sp>
+        <p:nvSpPr>
+          <p:cNvPr id="5" name="Rectangle 4"/>
+          <p:cNvSpPr/>
+          <p:nvPr/>
+        </p:nvSpPr>
+        <p:spPr>
+          <a:xfrm>
+            <a:off x="457200" y="1234440"/>
+            <a:ext cx="3977639" cy="82296"/>
+          </a:xfrm>
+          <a:prstGeom prst="rect">
+            <a:avLst/>
+          </a:prstGeom>
+          <a:solidFill>
+            <a:srgbClr val="156082"/>
+          </a:solidFill>
+          <a:ln>
+            <a:noFill/>
+          </a:ln>
+        </p:spPr>
+        <p:style>
+          <a:lnRef idx="1">
+            <a:schemeClr val="accent1"/>
+          </a:lnRef>
+          <a:fillRef idx="3">
+            <a:schemeClr val="accent1"/>
+          </a:fillRef>
+          <a:effectRef idx="2">
+            <a:schemeClr val="accent1"/>
+          </a:effectRef>
+          <a:fontRef idx="minor">
+            <a:schemeClr val="lt1"/>
+          </a:fontRef>
+        </p:style>
+        <p:txBody>
+          <a:bodyPr rtlCol="0" anchor="ctr"/>
+          <a:lstStyle/>
+          <a:p>
+            <a:pPr algn="ctr"/>
+          </a:p>
+        </p:txBody>
+      </p:sp>
+      <p:sp>
+        <p:nvSpPr>
+          <p:cNvPr id="6" name="Rectangle 5"/>
+          <p:cNvSpPr/>
+          <p:nvPr/>
+        </p:nvSpPr>
+        <p:spPr>
+          <a:xfrm>
+            <a:off x="4709159" y="1234440"/>
+            <a:ext cx="3977639" cy="1965960"/>
+          </a:xfrm>
+          <a:prstGeom prst="rect">
+            <a:avLst/>
+          </a:prstGeom>
+          <a:solidFill>
+            <a:srgbClr val="FFFFFF"/>
+          </a:solidFill>
+          <a:ln w="12700">
+            <a:solidFill>
+              <a:srgbClr val="E8E8E8"/>
+            </a:solidFill>
+          </a:ln>
+        </p:spPr>
+        <p:style>
+          <a:lnRef idx="1">
+            <a:schemeClr val="accent1"/>
+          </a:lnRef>
+          <a:fillRef idx="3">
+            <a:schemeClr val="accent1"/>
+          </a:fillRef>
+          <a:effectRef idx="2">
+            <a:schemeClr val="accent1"/>
+          </a:effectRef>
+          <a:fontRef idx="minor">
+            <a:schemeClr val="lt1"/>
+          </a:fontRef>
+        </p:style>
+        <p:txBody>
+          <a:bodyPr rtlCol="0" anchor="t" wrap="square" lIns="164592" rIns="137160" tIns="146304"/>
+          <a:lstStyle/>
+          <a:p>
+            <a:pPr algn="ctr"/>
+            <a:r>
+              <a:rPr sz="1400" b="1" i="0">
+                <a:solidFill>
+                  <a:srgbClr val="0E2841"/>
+                </a:solidFill>
+                <a:latin typeface="Avenir Next LT Pro Demi"/>
+              </a:rPr>
+              <a:t>Gallery expansion</a:t>
+            </a:r>
+          </a:p>
+          <a:p>
+            <a:pPr>
+              <a:spcBef>
+                <a:spcPts val="500"/>
+              </a:spcBef>
+            </a:pPr>
+            <a:r>
+              <a:rPr sz="1100" b="0" i="0">
+                <a:solidFill>
+                  <a:srgbClr val="0E2841"/>
+                </a:solidFill>
+                <a:latin typeface="Avenir Next LT Pro"/>
+              </a:rPr>
+              <a:t>Open Design Galleries in every major U.S. &amp; Canada market — RH's stated ~$5–6B annual revenue opportunity.</a:t>
+            </a:r>
+          </a:p>
+        </p:txBody>
+      </p:sp>
+      <p:sp>
+        <p:nvSpPr>
+          <p:cNvPr id="7" name="Rectangle 6"/>
+          <p:cNvSpPr/>
+          <p:nvPr/>
+        </p:nvSpPr>
+        <p:spPr>
+          <a:xfrm>
+            <a:off x="4709159" y="1234440"/>
+            <a:ext cx="3977639" cy="82296"/>
+          </a:xfrm>
+          <a:prstGeom prst="rect">
+            <a:avLst/>
+          </a:prstGeom>
+          <a:solidFill>
+            <a:srgbClr val="0E2841"/>
+          </a:solidFill>
+          <a:ln>
+            <a:noFill/>
+          </a:ln>
+        </p:spPr>
+        <p:style>
+          <a:lnRef idx="1">
+            <a:schemeClr val="accent1"/>
+          </a:lnRef>
+          <a:fillRef idx="3">
+            <a:schemeClr val="accent1"/>
+          </a:fillRef>
+          <a:effectRef idx="2">
+            <a:schemeClr val="accent1"/>
+          </a:effectRef>
+          <a:fontRef idx="minor">
+            <a:schemeClr val="lt1"/>
+          </a:fontRef>
+        </p:style>
+        <p:txBody>
+          <a:bodyPr rtlCol="0" anchor="ctr"/>
+          <a:lstStyle/>
+          <a:p>
+            <a:pPr algn="ctr"/>
+          </a:p>
+        </p:txBody>
+      </p:sp>
+      <p:sp>
+        <p:nvSpPr>
+          <p:cNvPr id="8" name="Rectangle 7"/>
+          <p:cNvSpPr/>
+          <p:nvPr/>
+        </p:nvSpPr>
+        <p:spPr>
+          <a:xfrm>
+            <a:off x="457200" y="3429000"/>
+            <a:ext cx="3977639" cy="1965960"/>
+          </a:xfrm>
+          <a:prstGeom prst="rect">
+            <a:avLst/>
+          </a:prstGeom>
+          <a:solidFill>
+            <a:srgbClr val="FFFFFF"/>
+          </a:solidFill>
+          <a:ln w="12700">
+            <a:solidFill>
+              <a:srgbClr val="E8E8E8"/>
+            </a:solidFill>
+          </a:ln>
+        </p:spPr>
+        <p:style>
+          <a:lnRef idx="1">
+            <a:schemeClr val="accent1"/>
+          </a:lnRef>
+          <a:fillRef idx="3">
+            <a:schemeClr val="accent1"/>
+          </a:fillRef>
+          <a:effectRef idx="2">
+            <a:schemeClr val="accent1"/>
+          </a:effectRef>
+          <a:fontRef idx="minor">
+            <a:schemeClr val="lt1"/>
+          </a:fontRef>
+        </p:style>
+        <p:txBody>
+          <a:bodyPr rtlCol="0" anchor="t" wrap="square" lIns="164592" rIns="137160" tIns="146304"/>
+          <a:lstStyle/>
+          <a:p>
+            <a:pPr algn="ctr"/>
+            <a:r>
+              <a:rPr sz="1400" b="1" i="0">
+                <a:solidFill>
+                  <a:srgbClr val="E97132"/>
+                </a:solidFill>
+                <a:latin typeface="Avenir Next LT Pro Demi"/>
+              </a:rPr>
+              <a:t>Move upmarket</a:t>
+            </a:r>
+          </a:p>
+          <a:p>
+            <a:pPr>
+              <a:spcBef>
+                <a:spcPts val="500"/>
+              </a:spcBef>
+            </a:pPr>
+            <a:r>
+              <a:rPr sz="1100" b="0" i="0">
+                <a:solidFill>
+                  <a:srgbClr val="0E2841"/>
+                </a:solidFill>
+                <a:latin typeface="Avenir Next LT Pro"/>
+              </a:rPr>
+              <a:t>RH Estates and higher price points target the rate-insensitive cash buyer — reducing housing dependence.</a:t>
+            </a:r>
+          </a:p>
+        </p:txBody>
+      </p:sp>
+      <p:sp>
+        <p:nvSpPr>
+          <p:cNvPr id="9" name="Rectangle 8"/>
+          <p:cNvSpPr/>
+          <p:nvPr/>
+        </p:nvSpPr>
+        <p:spPr>
+          <a:xfrm>
+            <a:off x="457200" y="3429000"/>
+            <a:ext cx="3977639" cy="82296"/>
+          </a:xfrm>
+          <a:prstGeom prst="rect">
+            <a:avLst/>
+          </a:prstGeom>
+          <a:solidFill>
+            <a:srgbClr val="E97132"/>
+          </a:solidFill>
+          <a:ln>
+            <a:noFill/>
+          </a:ln>
+        </p:spPr>
+        <p:style>
+          <a:lnRef idx="1">
+            <a:schemeClr val="accent1"/>
+          </a:lnRef>
+          <a:fillRef idx="3">
+            <a:schemeClr val="accent1"/>
+          </a:fillRef>
+          <a:effectRef idx="2">
+            <a:schemeClr val="accent1"/>
+          </a:effectRef>
+          <a:fontRef idx="minor">
+            <a:schemeClr val="lt1"/>
+          </a:fontRef>
+        </p:style>
+        <p:txBody>
+          <a:bodyPr rtlCol="0" anchor="ctr"/>
+          <a:lstStyle/>
+          <a:p>
+            <a:pPr algn="ctr"/>
+          </a:p>
+        </p:txBody>
+      </p:sp>
+      <p:sp>
+        <p:nvSpPr>
+          <p:cNvPr id="10" name="Rectangle 9"/>
+          <p:cNvSpPr/>
+          <p:nvPr/>
+        </p:nvSpPr>
+        <p:spPr>
+          <a:xfrm>
+            <a:off x="4709159" y="3429000"/>
+            <a:ext cx="3977639" cy="1965960"/>
+          </a:xfrm>
+          <a:prstGeom prst="rect">
+            <a:avLst/>
+          </a:prstGeom>
+          <a:solidFill>
+            <a:srgbClr val="FFFFFF"/>
+          </a:solidFill>
+          <a:ln w="12700">
+            <a:solidFill>
+              <a:srgbClr val="E8E8E8"/>
+            </a:solidFill>
+          </a:ln>
+        </p:spPr>
+        <p:style>
+          <a:lnRef idx="1">
+            <a:schemeClr val="accent1"/>
+          </a:lnRef>
+          <a:fillRef idx="3">
+            <a:schemeClr val="accent1"/>
+          </a:fillRef>
+          <a:effectRef idx="2">
+            <a:schemeClr val="accent1"/>
+          </a:effectRef>
+          <a:fontRef idx="minor">
+            <a:schemeClr val="lt1"/>
+          </a:fontRef>
+        </p:style>
+        <p:txBody>
+          <a:bodyPr rtlCol="0" anchor="t" wrap="square" lIns="164592" rIns="137160" tIns="146304"/>
+          <a:lstStyle/>
+          <a:p>
+            <a:pPr algn="ctr"/>
+            <a:r>
+              <a:rPr sz="1400" b="1" i="0">
+                <a:solidFill>
+                  <a:srgbClr val="196B24"/>
+                </a:solidFill>
+                <a:latin typeface="Avenir Next LT Pro Demi"/>
+              </a:rPr>
+              <a:t>Global + platform</a:t>
+            </a:r>
+          </a:p>
+          <a:p>
+            <a:pPr>
+              <a:spcBef>
+                <a:spcPts val="500"/>
+              </a:spcBef>
+            </a:pPr>
+            <a:r>
+              <a:rPr sz="1100" b="0" i="0">
+                <a:solidFill>
+                  <a:srgbClr val="0E2841"/>
+                </a:solidFill>
+                <a:latin typeface="Avenir Next LT Pro"/>
+              </a:rPr>
+              <a:t>RH England (Aynho Park, Jun 2023) opens European expansion; Guesthouses, hospitality &amp; F&amp;B extend the brand.</a:t>
+            </a:r>
+          </a:p>
+        </p:txBody>
+      </p:sp>
+      <p:sp>
+        <p:nvSpPr>
+          <p:cNvPr id="11" name="Rectangle 10"/>
+          <p:cNvSpPr/>
+          <p:nvPr/>
+        </p:nvSpPr>
+        <p:spPr>
+          <a:xfrm>
+            <a:off x="4709159" y="3429000"/>
+            <a:ext cx="3977639" cy="82296"/>
+          </a:xfrm>
+          <a:prstGeom prst="rect">
+            <a:avLst/>
+          </a:prstGeom>
+          <a:solidFill>
+            <a:srgbClr val="196B24"/>
+          </a:solidFill>
+          <a:ln>
+            <a:noFill/>
+          </a:ln>
+        </p:spPr>
+        <p:style>
+          <a:lnRef idx="1">
+            <a:schemeClr val="accent1"/>
+          </a:lnRef>
+          <a:fillRef idx="3">
+            <a:schemeClr val="accent1"/>
+          </a:fillRef>
+          <a:effectRef idx="2">
+            <a:schemeClr val="accent1"/>
+          </a:effectRef>
+          <a:fontRef idx="minor">
+            <a:schemeClr val="lt1"/>
+          </a:fontRef>
+        </p:style>
+        <p:txBody>
+          <a:bodyPr rtlCol="0" anchor="ctr"/>
+          <a:lstStyle/>
+          <a:p>
+            <a:pPr algn="ctr"/>
+          </a:p>
+        </p:txBody>
+      </p:sp>
+      <p:sp>
+        <p:nvSpPr>
+          <p:cNvPr id="12" name="TextBox 11"/>
+          <p:cNvSpPr txBox="1"/>
+          <p:nvPr/>
+        </p:nvSpPr>
+        <p:spPr>
+          <a:xfrm>
+            <a:off x="457200" y="6355080"/>
+            <a:ext cx="8229600" cy="411480"/>
+          </a:xfrm>
+          <a:prstGeom prst="rect">
+            <a:avLst/>
+          </a:prstGeom>
+          <a:noFill/>
+        </p:spPr>
+        <p:txBody>
+          <a:bodyPr wrap="square">
+            <a:spAutoFit/>
+          </a:bodyPr>
+          <a:lstStyle/>
+          <a:p>
+            <a:r>
+              <a:rPr sz="750" b="0" i="1">
+                <a:solidFill>
+                  <a:srgbClr val="9A9A9A"/>
+                </a:solidFill>
+                <a:latin typeface="Avenir Next LT Pro"/>
+              </a:rPr>
+              <a:t>Source: RH FY2025 Form 10-K</a:t>
+            </a:r>
+          </a:p>
+        </p:txBody>
+      </p:sp>
+    </p:spTree>
+  </p:cSld>
+  <p:clrMapOvr>
+    <a:masterClrMapping/>
+  </p:clrMapOvr>
+</p:sld>
+</file>
+
+<file path=ppt/slides/slide15.xml><?xml version="1.0" encoding="utf-8"?>
+<p:sld xmlns:a="http://schemas.openxmlformats.org/drawingml/2006/main" xmlns:p="http://schemas.openxmlformats.org/presentationml/2006/main" xmlns:r="http://schemas.openxmlformats.org/officeDocument/2006/relationships">
+  <p:cSld>
+    <p:spTree>
+      <p:nvGrpSpPr>
+        <p:cNvPr id="1" name=""/>
+        <p:cNvGrpSpPr/>
+        <p:nvPr/>
+      </p:nvGrpSpPr>
+      <p:grpSpPr/>
+      <p:sp>
+        <p:nvSpPr>
+          <p:cNvPr id="2" name="TextBox 1"/>
+          <p:cNvSpPr txBox="1"/>
+          <p:nvPr/>
+        </p:nvSpPr>
+        <p:spPr>
+          <a:xfrm>
+            <a:off x="457200" y="320040"/>
+            <a:ext cx="8229600" cy="548640"/>
+          </a:xfrm>
+          <a:prstGeom prst="rect">
+            <a:avLst/>
+          </a:prstGeom>
+          <a:noFill/>
+        </p:spPr>
+        <p:txBody>
+          <a:bodyPr wrap="square">
+            <a:spAutoFit/>
+          </a:bodyPr>
+          <a:lstStyle/>
+          <a:p>
+            <a:r>
+              <a:rPr sz="2200" b="0" i="0">
+                <a:solidFill>
+                  <a:srgbClr val="0E2841"/>
+                </a:solidFill>
+                <a:latin typeface="Avenir Next LT Pro Demi"/>
+              </a:rPr>
+              <a:t>Is It Working? — The Early Scorecard</a:t>
+            </a:r>
+          </a:p>
+        </p:txBody>
+      </p:sp>
+      <p:sp>
+        <p:nvSpPr>
+          <p:cNvPr id="3" name="Rectangle 2"/>
+          <p:cNvSpPr/>
+          <p:nvPr/>
+        </p:nvSpPr>
+        <p:spPr>
+          <a:xfrm>
+            <a:off x="457200" y="914400"/>
+            <a:ext cx="8229600" cy="27432"/>
+          </a:xfrm>
+          <a:prstGeom prst="rect">
+            <a:avLst/>
+          </a:prstGeom>
+          <a:solidFill>
+            <a:srgbClr val="156082"/>
+          </a:solidFill>
+          <a:ln>
+            <a:noFill/>
+          </a:ln>
+        </p:spPr>
+        <p:style>
+          <a:lnRef idx="1">
+            <a:schemeClr val="accent1"/>
+          </a:lnRef>
+          <a:fillRef idx="3">
+            <a:schemeClr val="accent1"/>
+          </a:fillRef>
+          <a:effectRef idx="2">
+            <a:schemeClr val="accent1"/>
+          </a:effectRef>
+          <a:fontRef idx="minor">
+            <a:schemeClr val="lt1"/>
+          </a:fontRef>
+        </p:style>
+        <p:txBody>
+          <a:bodyPr rtlCol="0" anchor="ctr"/>
+          <a:lstStyle/>
+          <a:p>
+            <a:pPr algn="ctr"/>
+          </a:p>
+        </p:txBody>
+      </p:sp>
+      <p:sp>
+        <p:nvSpPr>
+          <p:cNvPr id="4" name="Rectangle 3"/>
+          <p:cNvSpPr/>
+          <p:nvPr/>
+        </p:nvSpPr>
+        <p:spPr>
+          <a:xfrm>
+            <a:off x="457200" y="1188720"/>
+            <a:ext cx="3977639" cy="411480"/>
+          </a:xfrm>
+          <a:prstGeom prst="rect">
+            <a:avLst/>
+          </a:prstGeom>
+          <a:solidFill>
+            <a:srgbClr val="196B24"/>
+          </a:solidFill>
+          <a:ln>
+            <a:noFill/>
+          </a:ln>
+        </p:spPr>
+        <p:style>
+          <a:lnRef idx="1">
+            <a:schemeClr val="accent1"/>
+          </a:lnRef>
+          <a:fillRef idx="3">
+            <a:schemeClr val="accent1"/>
+          </a:fillRef>
+          <a:effectRef idx="2">
+            <a:schemeClr val="accent1"/>
+          </a:effectRef>
+          <a:fontRef idx="minor">
+            <a:schemeClr val="lt1"/>
+          </a:fontRef>
+        </p:style>
+        <p:txBody>
+          <a:bodyPr rtlCol="0" anchor="ctr"/>
+          <a:lstStyle/>
+          <a:p>
+            <a:pPr algn="ctr"/>
+          </a:p>
+        </p:txBody>
+      </p:sp>
+      <p:sp>
+        <p:nvSpPr>
+          <p:cNvPr id="5" name="TextBox 4"/>
+          <p:cNvSpPr txBox="1"/>
+          <p:nvPr/>
+        </p:nvSpPr>
+        <p:spPr>
+          <a:xfrm>
+            <a:off x="457200" y="1188720"/>
+            <a:ext cx="3977639" cy="411480"/>
+          </a:xfrm>
+          <a:prstGeom prst="rect">
+            <a:avLst/>
+          </a:prstGeom>
+          <a:noFill/>
+        </p:spPr>
+        <p:txBody>
+          <a:bodyPr wrap="square" anchor="ctr">
+            <a:spAutoFit/>
+          </a:bodyPr>
+          <a:lstStyle/>
+          <a:p>
+            <a:r>
+              <a:rPr sz="1300" b="1" i="0">
+                <a:solidFill>
+                  <a:srgbClr val="FFFFFF"/>
+                </a:solidFill>
+                <a:latin typeface="Avenir Next LT Pro Demi"/>
+              </a:rPr>
+              <a:t>   WORKING</a:t>
+            </a:r>
+          </a:p>
+        </p:txBody>
+      </p:sp>
+      <p:sp>
+        <p:nvSpPr>
+          <p:cNvPr id="6" name="TextBox 5"/>
+          <p:cNvSpPr txBox="1"/>
+          <p:nvPr/>
+        </p:nvSpPr>
+        <p:spPr>
+          <a:xfrm>
+            <a:off x="457200" y="1737360"/>
+            <a:ext cx="3977639" cy="685800"/>
+          </a:xfrm>
+          <a:prstGeom prst="rect">
+            <a:avLst/>
+          </a:prstGeom>
+          <a:noFill/>
+        </p:spPr>
+        <p:txBody>
+          <a:bodyPr wrap="square">
+            <a:spAutoFit/>
+          </a:bodyPr>
+          <a:lstStyle/>
+          <a:p>
+            <a:r>
+              <a:rPr sz="1100" b="1" i="0">
+                <a:solidFill>
+                  <a:srgbClr val="196B24"/>
+                </a:solidFill>
+                <a:latin typeface="Avenir Next LT Pro Demi"/>
+              </a:rPr>
+              <a:t>✓  </a:t>
+            </a:r>
+            <a:r>
+              <a:rPr sz="1050" b="0" i="0">
+                <a:solidFill>
+                  <a:srgbClr val="0E2841"/>
+                </a:solidFill>
+                <a:latin typeface="Avenir Next LT Pro"/>
+              </a:rPr>
+              <a:t>FCF inflected to +$252M in FY2025 (from −$214M a year earlier)</a:t>
+            </a:r>
+          </a:p>
+        </p:txBody>
+      </p:sp>
+      <p:sp>
+        <p:nvSpPr>
+          <p:cNvPr id="7" name="TextBox 6"/>
+          <p:cNvSpPr txBox="1"/>
+          <p:nvPr/>
+        </p:nvSpPr>
+        <p:spPr>
+          <a:xfrm>
+            <a:off x="457200" y="2496312"/>
+            <a:ext cx="3977639" cy="685800"/>
+          </a:xfrm>
+          <a:prstGeom prst="rect">
+            <a:avLst/>
+          </a:prstGeom>
+          <a:noFill/>
+        </p:spPr>
+        <p:txBody>
+          <a:bodyPr wrap="square">
+            <a:spAutoFit/>
+          </a:bodyPr>
+          <a:lstStyle/>
+          <a:p>
+            <a:r>
+              <a:rPr sz="1100" b="1" i="0">
+                <a:solidFill>
+                  <a:srgbClr val="196B24"/>
+                </a:solidFill>
+                <a:latin typeface="Avenir Next LT Pro Demi"/>
+              </a:rPr>
+              <a:t>✓  </a:t>
+            </a:r>
+            <a:r>
+              <a:rPr sz="1050" b="0" i="0">
+                <a:solidFill>
+                  <a:srgbClr val="0E2841"/>
+                </a:solidFill>
+                <a:latin typeface="Avenir Next LT Pro"/>
+              </a:rPr>
+              <a:t>Inventory normalized: $1.02B → $819M, funding debt paydown</a:t>
+            </a:r>
+          </a:p>
+        </p:txBody>
+      </p:sp>
+      <p:sp>
+        <p:nvSpPr>
+          <p:cNvPr id="8" name="TextBox 7"/>
+          <p:cNvSpPr txBox="1"/>
+          <p:nvPr/>
+        </p:nvSpPr>
+        <p:spPr>
+          <a:xfrm>
+            <a:off x="457200" y="3255264"/>
+            <a:ext cx="3977639" cy="685800"/>
+          </a:xfrm>
+          <a:prstGeom prst="rect">
+            <a:avLst/>
+          </a:prstGeom>
+          <a:noFill/>
+        </p:spPr>
+        <p:txBody>
+          <a:bodyPr wrap="square">
+            <a:spAutoFit/>
+          </a:bodyPr>
+          <a:lstStyle/>
+          <a:p>
+            <a:r>
+              <a:rPr sz="1100" b="1" i="0">
+                <a:solidFill>
+                  <a:srgbClr val="196B24"/>
+                </a:solidFill>
+                <a:latin typeface="Avenir Next LT Pro Demi"/>
+              </a:rPr>
+              <a:t>✓  </a:t>
+            </a:r>
+            <a:r>
+              <a:rPr sz="1050" b="0" i="0">
+                <a:solidFill>
+                  <a:srgbClr val="0E2841"/>
+                </a:solidFill>
+                <a:latin typeface="Avenir Next LT Pro"/>
+              </a:rPr>
+              <a:t>Revenue re-accelerated +8.1% in FY2025; adj. EBITDA margin ~17%</a:t>
+            </a:r>
+          </a:p>
+        </p:txBody>
+      </p:sp>
+      <p:sp>
+        <p:nvSpPr>
+          <p:cNvPr id="9" name="TextBox 8"/>
+          <p:cNvSpPr txBox="1"/>
+          <p:nvPr/>
+        </p:nvSpPr>
+        <p:spPr>
+          <a:xfrm>
+            <a:off x="457200" y="4014215"/>
+            <a:ext cx="3977639" cy="685800"/>
+          </a:xfrm>
+          <a:prstGeom prst="rect">
+            <a:avLst/>
+          </a:prstGeom>
+          <a:noFill/>
+        </p:spPr>
+        <p:txBody>
+          <a:bodyPr wrap="square">
+            <a:spAutoFit/>
+          </a:bodyPr>
+          <a:lstStyle/>
+          <a:p>
+            <a:r>
+              <a:rPr sz="1100" b="1" i="0">
+                <a:solidFill>
+                  <a:srgbClr val="196B24"/>
+                </a:solidFill>
+                <a:latin typeface="Avenir Next LT Pro Demi"/>
+              </a:rPr>
+              <a:t>✓  </a:t>
+            </a:r>
+            <a:r>
+              <a:rPr sz="1050" b="0" i="0">
+                <a:solidFill>
+                  <a:srgbClr val="0E2841"/>
+                </a:solidFill>
+                <a:latin typeface="Avenir Next LT Pro"/>
+              </a:rPr>
+              <a:t>Net debt fell ~$210M YoY as ABL was paid down</a:t>
+            </a:r>
+          </a:p>
+        </p:txBody>
+      </p:sp>
+      <p:sp>
+        <p:nvSpPr>
+          <p:cNvPr id="10" name="Rectangle 9"/>
+          <p:cNvSpPr/>
+          <p:nvPr/>
+        </p:nvSpPr>
+        <p:spPr>
+          <a:xfrm>
+            <a:off x="4709160" y="1188720"/>
+            <a:ext cx="3977639" cy="411480"/>
+          </a:xfrm>
+          <a:prstGeom prst="rect">
+            <a:avLst/>
+          </a:prstGeom>
+          <a:solidFill>
+            <a:srgbClr val="B03030"/>
+          </a:solidFill>
+          <a:ln>
+            <a:noFill/>
+          </a:ln>
+        </p:spPr>
+        <p:style>
+          <a:lnRef idx="1">
+            <a:schemeClr val="accent1"/>
+          </a:lnRef>
+          <a:fillRef idx="3">
+            <a:schemeClr val="accent1"/>
+          </a:fillRef>
+          <a:effectRef idx="2">
+            <a:schemeClr val="accent1"/>
+          </a:effectRef>
+          <a:fontRef idx="minor">
+            <a:schemeClr val="lt1"/>
+          </a:fontRef>
+        </p:style>
+        <p:txBody>
+          <a:bodyPr rtlCol="0" anchor="ctr"/>
+          <a:lstStyle/>
+          <a:p>
+            <a:pPr algn="ctr"/>
+          </a:p>
+        </p:txBody>
+      </p:sp>
+      <p:sp>
+        <p:nvSpPr>
+          <p:cNvPr id="11" name="TextBox 10"/>
+          <p:cNvSpPr txBox="1"/>
+          <p:nvPr/>
+        </p:nvSpPr>
+        <p:spPr>
+          <a:xfrm>
+            <a:off x="4709160" y="1188720"/>
+            <a:ext cx="3977639" cy="411480"/>
+          </a:xfrm>
+          <a:prstGeom prst="rect">
+            <a:avLst/>
+          </a:prstGeom>
+          <a:noFill/>
+        </p:spPr>
+        <p:txBody>
+          <a:bodyPr wrap="square" anchor="ctr">
+            <a:spAutoFit/>
+          </a:bodyPr>
+          <a:lstStyle/>
+          <a:p>
+            <a:r>
+              <a:rPr sz="1300" b="1" i="0">
+                <a:solidFill>
+                  <a:srgbClr val="FFFFFF"/>
+                </a:solidFill>
+                <a:latin typeface="Avenir Next LT Pro Demi"/>
+              </a:rPr>
+              <a:t>   WATCH</a:t>
+            </a:r>
+          </a:p>
+        </p:txBody>
+      </p:sp>
+      <p:sp>
+        <p:nvSpPr>
+          <p:cNvPr id="12" name="TextBox 11"/>
+          <p:cNvSpPr txBox="1"/>
+          <p:nvPr/>
+        </p:nvSpPr>
+        <p:spPr>
+          <a:xfrm>
+            <a:off x="4709160" y="1737360"/>
+            <a:ext cx="3977639" cy="685800"/>
+          </a:xfrm>
+          <a:prstGeom prst="rect">
+            <a:avLst/>
+          </a:prstGeom>
+          <a:noFill/>
+        </p:spPr>
+        <p:txBody>
+          <a:bodyPr wrap="square">
+            <a:spAutoFit/>
+          </a:bodyPr>
+          <a:lstStyle/>
+          <a:p>
+            <a:r>
+              <a:rPr sz="1100" b="1" i="0">
+                <a:solidFill>
+                  <a:srgbClr val="B03030"/>
+                </a:solidFill>
+                <a:latin typeface="Avenir Next LT Pro Demi"/>
+              </a:rPr>
+              <a:t>!  </a:t>
+            </a:r>
+            <a:r>
+              <a:rPr sz="1050" b="0" i="0">
+                <a:solidFill>
+                  <a:srgbClr val="0E2841"/>
+                </a:solidFill>
+                <a:latin typeface="Avenir Next LT Pro"/>
+              </a:rPr>
+              <a:t>Q1 FY2026: revenue −1.7% YoY and a net loss of −$13.7M</a:t>
+            </a:r>
+          </a:p>
+        </p:txBody>
+      </p:sp>
+      <p:sp>
+        <p:nvSpPr>
+          <p:cNvPr id="13" name="TextBox 12"/>
+          <p:cNvSpPr txBox="1"/>
+          <p:nvPr/>
+        </p:nvSpPr>
+        <p:spPr>
+          <a:xfrm>
+            <a:off x="4709160" y="2496312"/>
+            <a:ext cx="3977639" cy="685800"/>
+          </a:xfrm>
+          <a:prstGeom prst="rect">
+            <a:avLst/>
+          </a:prstGeom>
+          <a:noFill/>
+        </p:spPr>
+        <p:txBody>
+          <a:bodyPr wrap="square">
+            <a:spAutoFit/>
+          </a:bodyPr>
+          <a:lstStyle/>
+          <a:p>
+            <a:r>
+              <a:rPr sz="1100" b="1" i="0">
+                <a:solidFill>
+                  <a:srgbClr val="B03030"/>
+                </a:solidFill>
+                <a:latin typeface="Avenir Next LT Pro Demi"/>
+              </a:rPr>
+              <a:t>!  </a:t>
+            </a:r>
+            <a:r>
+              <a:rPr sz="1050" b="0" i="0">
+                <a:solidFill>
+                  <a:srgbClr val="0E2841"/>
+                </a:solidFill>
+                <a:latin typeface="Avenir Next LT Pro"/>
+              </a:rPr>
+              <a:t>~$225M/yr interest keeps coverage thin — Q1 interest &gt; operating income</a:t>
+            </a:r>
+          </a:p>
+        </p:txBody>
+      </p:sp>
+      <p:sp>
+        <p:nvSpPr>
+          <p:cNvPr id="14" name="TextBox 13"/>
+          <p:cNvSpPr txBox="1"/>
+          <p:nvPr/>
+        </p:nvSpPr>
+        <p:spPr>
+          <a:xfrm>
+            <a:off x="4709160" y="3255264"/>
+            <a:ext cx="3977639" cy="685800"/>
+          </a:xfrm>
+          <a:prstGeom prst="rect">
+            <a:avLst/>
+          </a:prstGeom>
+          <a:noFill/>
+        </p:spPr>
+        <p:txBody>
+          <a:bodyPr wrap="square">
+            <a:spAutoFit/>
+          </a:bodyPr>
+          <a:lstStyle/>
+          <a:p>
+            <a:r>
+              <a:rPr sz="1100" b="1" i="0">
+                <a:solidFill>
+                  <a:srgbClr val="B03030"/>
+                </a:solidFill>
+                <a:latin typeface="Avenir Next LT Pro Demi"/>
+              </a:rPr>
+              <a:t>!  </a:t>
+            </a:r>
+            <a:r>
+              <a:rPr sz="1050" b="0" i="0">
+                <a:solidFill>
+                  <a:srgbClr val="0E2841"/>
+                </a:solidFill>
+                <a:latin typeface="Avenir Next LT Pro"/>
+              </a:rPr>
+              <a:t>FY2025 FCF was flattered by a one-time inventory unwind (~$214M)</a:t>
+            </a:r>
+          </a:p>
+        </p:txBody>
+      </p:sp>
+      <p:sp>
+        <p:nvSpPr>
+          <p:cNvPr id="15" name="TextBox 14"/>
+          <p:cNvSpPr txBox="1"/>
+          <p:nvPr/>
+        </p:nvSpPr>
+        <p:spPr>
+          <a:xfrm>
+            <a:off x="4709160" y="4014215"/>
+            <a:ext cx="3977639" cy="685800"/>
+          </a:xfrm>
+          <a:prstGeom prst="rect">
+            <a:avLst/>
+          </a:prstGeom>
+          <a:noFill/>
+        </p:spPr>
+        <p:txBody>
+          <a:bodyPr wrap="square">
+            <a:spAutoFit/>
+          </a:bodyPr>
+          <a:lstStyle/>
+          <a:p>
+            <a:r>
+              <a:rPr sz="1100" b="1" i="0">
+                <a:solidFill>
+                  <a:srgbClr val="B03030"/>
+                </a:solidFill>
+                <a:latin typeface="Avenir Next LT Pro Demi"/>
+              </a:rPr>
+              <a:t>!  </a:t>
+            </a:r>
+            <a:r>
+              <a:rPr sz="1050" b="0" i="0">
+                <a:solidFill>
+                  <a:srgbClr val="0E2841"/>
+                </a:solidFill>
+                <a:latin typeface="Avenir Next LT Pro"/>
+              </a:rPr>
+              <a:t>Full-year +9–12% guidance is entirely back-half loaded</a:t>
+            </a:r>
+          </a:p>
+        </p:txBody>
+      </p:sp>
+      <p:sp>
+        <p:nvSpPr>
+          <p:cNvPr id="16" name="TextBox 15"/>
+          <p:cNvSpPr txBox="1"/>
+          <p:nvPr/>
+        </p:nvSpPr>
+        <p:spPr>
+          <a:xfrm>
+            <a:off x="457200" y="5074920"/>
+            <a:ext cx="8229600" cy="548640"/>
+          </a:xfrm>
+          <a:prstGeom prst="rect">
+            <a:avLst/>
+          </a:prstGeom>
+          <a:noFill/>
+        </p:spPr>
+        <p:txBody>
+          <a:bodyPr wrap="square">
+            <a:spAutoFit/>
+          </a:bodyPr>
+          <a:lstStyle/>
+          <a:p>
+            <a:r>
+              <a:rPr sz="1150" b="1" i="0">
+                <a:solidFill>
+                  <a:srgbClr val="156082"/>
+                </a:solidFill>
+                <a:latin typeface="Avenir Next LT Pro Demi"/>
+              </a:rPr>
+              <a:t>Verdict: the turnaround is real but early and fragile — the next two quarters are the tell.</a:t>
+            </a:r>
+          </a:p>
+        </p:txBody>
+      </p:sp>
+      <p:sp>
+        <p:nvSpPr>
+          <p:cNvPr id="17" name="TextBox 16"/>
+          <p:cNvSpPr txBox="1"/>
+          <p:nvPr/>
+        </p:nvSpPr>
+        <p:spPr>
+          <a:xfrm>
+            <a:off x="457200" y="6355080"/>
+            <a:ext cx="8229600" cy="411480"/>
+          </a:xfrm>
+          <a:prstGeom prst="rect">
+            <a:avLst/>
+          </a:prstGeom>
+          <a:noFill/>
+        </p:spPr>
+        <p:txBody>
+          <a:bodyPr wrap="square">
+            <a:spAutoFit/>
+          </a:bodyPr>
+          <a:lstStyle/>
+          <a:p>
+            <a:r>
+              <a:rPr sz="750" b="0" i="1">
+                <a:solidFill>
+                  <a:srgbClr val="9A9A9A"/>
+                </a:solidFill>
+                <a:latin typeface="Avenir Next LT Pro"/>
+              </a:rPr>
+              <a:t>Source: RH FY2025 Form 10-K; RH Q1 FY2026 Form 10-Q (quarter ended May 2, 2026)</a:t>
+            </a:r>
+          </a:p>
+        </p:txBody>
+      </p:sp>
+    </p:spTree>
+  </p:cSld>
+  <p:clrMapOvr>
+    <a:masterClrMapping/>
+  </p:clrMapOvr>
+</p:sld>
+</file>
+
+<file path=ppt/slides/slide16.xml><?xml version="1.0" encoding="utf-8"?>
+<p:sld xmlns:a="http://schemas.openxmlformats.org/drawingml/2006/main" xmlns:p="http://schemas.openxmlformats.org/presentationml/2006/main" xmlns:r="http://schemas.openxmlformats.org/officeDocument/2006/relationships">
+  <p:cSld>
+    <p:spTree>
+      <p:nvGrpSpPr>
+        <p:cNvPr id="1" name=""/>
+        <p:cNvGrpSpPr/>
+        <p:nvPr/>
+      </p:nvGrpSpPr>
+      <p:grpSpPr/>
+      <p:sp>
+        <p:nvSpPr>
+          <p:cNvPr id="2" name="TextBox 1"/>
+          <p:cNvSpPr txBox="1"/>
+          <p:nvPr/>
+        </p:nvSpPr>
+        <p:spPr>
+          <a:xfrm>
+            <a:off x="457200" y="320040"/>
+            <a:ext cx="8229600" cy="548640"/>
+          </a:xfrm>
+          <a:prstGeom prst="rect">
+            <a:avLst/>
+          </a:prstGeom>
+          <a:noFill/>
+        </p:spPr>
+        <p:txBody>
+          <a:bodyPr wrap="square">
+            <a:spAutoFit/>
+          </a:bodyPr>
+          <a:lstStyle/>
+          <a:p>
+            <a:r>
+              <a:rPr sz="2200" b="0" i="0">
+                <a:solidFill>
+                  <a:srgbClr val="0E2841"/>
+                </a:solidFill>
+                <a:latin typeface="Avenir Next LT Pro Demi"/>
+              </a:rPr>
+              <a:t>The Operator — Gary Friedman</a:t>
+            </a:r>
+          </a:p>
+        </p:txBody>
+      </p:sp>
+      <p:sp>
+        <p:nvSpPr>
+          <p:cNvPr id="3" name="Rectangle 2"/>
+          <p:cNvSpPr/>
+          <p:nvPr/>
+        </p:nvSpPr>
+        <p:spPr>
+          <a:xfrm>
+            <a:off x="457200" y="914400"/>
+            <a:ext cx="8229600" cy="27432"/>
+          </a:xfrm>
+          <a:prstGeom prst="rect">
+            <a:avLst/>
+          </a:prstGeom>
+          <a:solidFill>
+            <a:srgbClr val="156082"/>
+          </a:solidFill>
+          <a:ln>
+            <a:noFill/>
+          </a:ln>
+        </p:spPr>
+        <p:style>
+          <a:lnRef idx="1">
+            <a:schemeClr val="accent1"/>
+          </a:lnRef>
+          <a:fillRef idx="3">
+            <a:schemeClr val="accent1"/>
+          </a:fillRef>
+          <a:effectRef idx="2">
+            <a:schemeClr val="accent1"/>
+          </a:effectRef>
+          <a:fontRef idx="minor">
+            <a:schemeClr val="lt1"/>
+          </a:fontRef>
+        </p:style>
+        <p:txBody>
+          <a:bodyPr rtlCol="0" anchor="ctr"/>
+          <a:lstStyle/>
+          <a:p>
+            <a:pPr algn="ctr"/>
+          </a:p>
+        </p:txBody>
+      </p:sp>
+      <p:sp>
+        <p:nvSpPr>
+          <p:cNvPr id="4" name="Rectangle 3"/>
+          <p:cNvSpPr/>
+          <p:nvPr/>
+        </p:nvSpPr>
+        <p:spPr>
+          <a:xfrm>
+            <a:off x="457200" y="1188720"/>
+            <a:ext cx="82296" cy="1078992"/>
+          </a:xfrm>
+          <a:prstGeom prst="rect">
+            <a:avLst/>
+          </a:prstGeom>
+          <a:solidFill>
+            <a:srgbClr val="0E2841"/>
+          </a:solidFill>
+          <a:ln>
+            <a:noFill/>
+          </a:ln>
+        </p:spPr>
+        <p:style>
+          <a:lnRef idx="1">
+            <a:schemeClr val="accent1"/>
+          </a:lnRef>
+          <a:fillRef idx="3">
+            <a:schemeClr val="accent1"/>
+          </a:fillRef>
+          <a:effectRef idx="2">
+            <a:schemeClr val="accent1"/>
+          </a:effectRef>
+          <a:fontRef idx="minor">
+            <a:schemeClr val="lt1"/>
+          </a:fontRef>
+        </p:style>
+        <p:txBody>
+          <a:bodyPr rtlCol="0" anchor="ctr"/>
+          <a:lstStyle/>
+          <a:p>
+            <a:pPr algn="ctr"/>
+          </a:p>
+        </p:txBody>
+      </p:sp>
+      <p:sp>
+        <p:nvSpPr>
+          <p:cNvPr id="5" name="TextBox 4"/>
+          <p:cNvSpPr txBox="1"/>
+          <p:nvPr/>
+        </p:nvSpPr>
+        <p:spPr>
+          <a:xfrm>
+            <a:off x="658368" y="1188720"/>
+            <a:ext cx="1874519" cy="1078992"/>
+          </a:xfrm>
+          <a:prstGeom prst="rect">
+            <a:avLst/>
+          </a:prstGeom>
+          <a:noFill/>
+        </p:spPr>
+        <p:txBody>
+          <a:bodyPr wrap="square" anchor="ctr">
+            <a:spAutoFit/>
+          </a:bodyPr>
+          <a:lstStyle/>
+          <a:p>
+            <a:r>
+              <a:rPr sz="1250" b="1" i="0">
+                <a:solidFill>
+                  <a:srgbClr val="0E2841"/>
+                </a:solidFill>
+                <a:latin typeface="Avenir Next LT Pro Demi"/>
+              </a:rPr>
+              <a:t>Role</a:t>
+            </a:r>
+          </a:p>
+        </p:txBody>
+      </p:sp>
+      <p:sp>
+        <p:nvSpPr>
+          <p:cNvPr id="6" name="TextBox 5"/>
+          <p:cNvSpPr txBox="1"/>
+          <p:nvPr/>
+        </p:nvSpPr>
+        <p:spPr>
+          <a:xfrm>
+            <a:off x="2651760" y="1188720"/>
+            <a:ext cx="6035040" cy="1078992"/>
+          </a:xfrm>
+          <a:prstGeom prst="rect">
+            <a:avLst/>
+          </a:prstGeom>
+          <a:noFill/>
+        </p:spPr>
+        <p:txBody>
+          <a:bodyPr wrap="square" anchor="ctr">
+            <a:spAutoFit/>
+          </a:bodyPr>
+          <a:lstStyle/>
+          <a:p>
+            <a:r>
+              <a:rPr sz="1100" b="0" i="0">
+                <a:solidFill>
+                  <a:srgbClr val="0E2841"/>
+                </a:solidFill>
+                <a:latin typeface="Avenir Next LT Pro"/>
+              </a:rPr>
+              <a:t>Chairman &amp; CEO and the brand's singular creative force. The 10-K names him explicitly as a key-person dependency.</a:t>
+            </a:r>
+          </a:p>
+        </p:txBody>
+      </p:sp>
+      <p:sp>
+        <p:nvSpPr>
+          <p:cNvPr id="7" name="Rectangle 6"/>
+          <p:cNvSpPr/>
+          <p:nvPr/>
+        </p:nvSpPr>
+        <p:spPr>
+          <a:xfrm>
+            <a:off x="457200" y="2377439"/>
+            <a:ext cx="82296" cy="1078992"/>
+          </a:xfrm>
+          <a:prstGeom prst="rect">
+            <a:avLst/>
+          </a:prstGeom>
+          <a:solidFill>
+            <a:srgbClr val="156082"/>
+          </a:solidFill>
+          <a:ln>
+            <a:noFill/>
+          </a:ln>
+        </p:spPr>
+        <p:style>
+          <a:lnRef idx="1">
+            <a:schemeClr val="accent1"/>
+          </a:lnRef>
+          <a:fillRef idx="3">
+            <a:schemeClr val="accent1"/>
+          </a:fillRef>
+          <a:effectRef idx="2">
+            <a:schemeClr val="accent1"/>
+          </a:effectRef>
+          <a:fontRef idx="minor">
+            <a:schemeClr val="lt1"/>
+          </a:fontRef>
+        </p:style>
+        <p:txBody>
+          <a:bodyPr rtlCol="0" anchor="ctr"/>
+          <a:lstStyle/>
+          <a:p>
+            <a:pPr algn="ctr"/>
+          </a:p>
+        </p:txBody>
+      </p:sp>
+      <p:sp>
+        <p:nvSpPr>
+          <p:cNvPr id="8" name="TextBox 7"/>
+          <p:cNvSpPr txBox="1"/>
+          <p:nvPr/>
+        </p:nvSpPr>
+        <p:spPr>
+          <a:xfrm>
+            <a:off x="658368" y="2377439"/>
+            <a:ext cx="1874519" cy="1078992"/>
+          </a:xfrm>
+          <a:prstGeom prst="rect">
+            <a:avLst/>
+          </a:prstGeom>
+          <a:noFill/>
+        </p:spPr>
+        <p:txBody>
+          <a:bodyPr wrap="square" anchor="ctr">
+            <a:spAutoFit/>
+          </a:bodyPr>
+          <a:lstStyle/>
+          <a:p>
+            <a:r>
+              <a:rPr sz="1250" b="1" i="0">
+                <a:solidFill>
+                  <a:srgbClr val="156082"/>
+                </a:solidFill>
+                <a:latin typeface="Avenir Next LT Pro Demi"/>
+              </a:rPr>
+              <a:t>Track record</a:t>
+            </a:r>
+          </a:p>
+        </p:txBody>
+      </p:sp>
+      <p:sp>
+        <p:nvSpPr>
+          <p:cNvPr id="9" name="TextBox 8"/>
+          <p:cNvSpPr txBox="1"/>
+          <p:nvPr/>
+        </p:nvSpPr>
+        <p:spPr>
+          <a:xfrm>
+            <a:off x="2651760" y="2377439"/>
+            <a:ext cx="6035040" cy="1078992"/>
+          </a:xfrm>
+          <a:prstGeom prst="rect">
+            <a:avLst/>
+          </a:prstGeom>
+          <a:noFill/>
+        </p:spPr>
+        <p:txBody>
+          <a:bodyPr wrap="square" anchor="ctr">
+            <a:spAutoFit/>
+          </a:bodyPr>
+          <a:lstStyle/>
+          <a:p>
+            <a:r>
+              <a:rPr sz="1100" b="0" i="0">
+                <a:solidFill>
+                  <a:srgbClr val="0E2841"/>
+                </a:solidFill>
+                <a:latin typeface="Avenir Next LT Pro"/>
+              </a:rPr>
+              <a:t>Transformed Pottery Barn from a ~$50M business into $1B+ at Williams-Sonoma; joined RH in 2001 when it was a ~$350M mall retailer near bankruptcy and rebuilt it into a luxury brand.</a:t>
+            </a:r>
+          </a:p>
+        </p:txBody>
+      </p:sp>
+      <p:sp>
+        <p:nvSpPr>
+          <p:cNvPr id="10" name="Rectangle 9"/>
+          <p:cNvSpPr/>
+          <p:nvPr/>
+        </p:nvSpPr>
+        <p:spPr>
+          <a:xfrm>
+            <a:off x="457200" y="3566159"/>
+            <a:ext cx="82296" cy="1078992"/>
+          </a:xfrm>
+          <a:prstGeom prst="rect">
+            <a:avLst/>
+          </a:prstGeom>
+          <a:solidFill>
+            <a:srgbClr val="196B24"/>
+          </a:solidFill>
+          <a:ln>
+            <a:noFill/>
+          </a:ln>
+        </p:spPr>
+        <p:style>
+          <a:lnRef idx="1">
+            <a:schemeClr val="accent1"/>
+          </a:lnRef>
+          <a:fillRef idx="3">
+            <a:schemeClr val="accent1"/>
+          </a:fillRef>
+          <a:effectRef idx="2">
+            <a:schemeClr val="accent1"/>
+          </a:effectRef>
+          <a:fontRef idx="minor">
+            <a:schemeClr val="lt1"/>
+          </a:fontRef>
+        </p:style>
+        <p:txBody>
+          <a:bodyPr rtlCol="0" anchor="ctr"/>
+          <a:lstStyle/>
+          <a:p>
+            <a:pPr algn="ctr"/>
+          </a:p>
+        </p:txBody>
+      </p:sp>
+      <p:sp>
+        <p:nvSpPr>
+          <p:cNvPr id="11" name="TextBox 10"/>
+          <p:cNvSpPr txBox="1"/>
+          <p:nvPr/>
+        </p:nvSpPr>
+        <p:spPr>
+          <a:xfrm>
+            <a:off x="658368" y="3566159"/>
+            <a:ext cx="1874519" cy="1078992"/>
+          </a:xfrm>
+          <a:prstGeom prst="rect">
+            <a:avLst/>
+          </a:prstGeom>
+          <a:noFill/>
+        </p:spPr>
+        <p:txBody>
+          <a:bodyPr wrap="square" anchor="ctr">
+            <a:spAutoFit/>
+          </a:bodyPr>
+          <a:lstStyle/>
+          <a:p>
+            <a:r>
+              <a:rPr sz="1250" b="1" i="0">
+                <a:solidFill>
+                  <a:srgbClr val="196B24"/>
+                </a:solidFill>
+                <a:latin typeface="Avenir Next LT Pro Demi"/>
+              </a:rPr>
+              <a:t>Skin in the game</a:t>
+            </a:r>
+          </a:p>
+        </p:txBody>
+      </p:sp>
+      <p:sp>
+        <p:nvSpPr>
+          <p:cNvPr id="12" name="TextBox 11"/>
+          <p:cNvSpPr txBox="1"/>
+          <p:nvPr/>
+        </p:nvSpPr>
+        <p:spPr>
+          <a:xfrm>
+            <a:off x="2651760" y="3566159"/>
+            <a:ext cx="6035040" cy="1078992"/>
+          </a:xfrm>
+          <a:prstGeom prst="rect">
+            <a:avLst/>
+          </a:prstGeom>
+          <a:noFill/>
+        </p:spPr>
+        <p:txBody>
+          <a:bodyPr wrap="square" anchor="ctr">
+            <a:spAutoFit/>
+          </a:bodyPr>
+          <a:lstStyle/>
+          <a:p>
+            <a:r>
+              <a:rPr sz="1100" b="0" i="0">
+                <a:solidFill>
+                  <a:srgbClr val="0E2841"/>
+                </a:solidFill>
+                <a:latin typeface="Avenir Next LT Pro"/>
+              </a:rPr>
+              <a:t>Owns ~25% of RH (~5.05M shares); bought ~$10M more in the open market at ~$216/share in June 2024 — a genuine alignment signal.</a:t>
+            </a:r>
+          </a:p>
+        </p:txBody>
+      </p:sp>
+      <p:sp>
+        <p:nvSpPr>
+          <p:cNvPr id="13" name="Rectangle 12"/>
+          <p:cNvSpPr/>
+          <p:nvPr/>
+        </p:nvSpPr>
+        <p:spPr>
+          <a:xfrm>
+            <a:off x="457200" y="4754879"/>
+            <a:ext cx="82296" cy="1078992"/>
+          </a:xfrm>
+          <a:prstGeom prst="rect">
+            <a:avLst/>
+          </a:prstGeom>
+          <a:solidFill>
+            <a:srgbClr val="E97132"/>
+          </a:solidFill>
+          <a:ln>
+            <a:noFill/>
+          </a:ln>
+        </p:spPr>
+        <p:style>
+          <a:lnRef idx="1">
+            <a:schemeClr val="accent1"/>
+          </a:lnRef>
+          <a:fillRef idx="3">
+            <a:schemeClr val="accent1"/>
+          </a:fillRef>
+          <a:effectRef idx="2">
+            <a:schemeClr val="accent1"/>
+          </a:effectRef>
+          <a:fontRef idx="minor">
+            <a:schemeClr val="lt1"/>
+          </a:fontRef>
+        </p:style>
+        <p:txBody>
+          <a:bodyPr rtlCol="0" anchor="ctr"/>
+          <a:lstStyle/>
+          <a:p>
+            <a:pPr algn="ctr"/>
+          </a:p>
+        </p:txBody>
+      </p:sp>
+      <p:sp>
+        <p:nvSpPr>
+          <p:cNvPr id="14" name="TextBox 13"/>
+          <p:cNvSpPr txBox="1"/>
+          <p:nvPr/>
+        </p:nvSpPr>
+        <p:spPr>
+          <a:xfrm>
+            <a:off x="658368" y="4754879"/>
+            <a:ext cx="1874519" cy="1078992"/>
+          </a:xfrm>
+          <a:prstGeom prst="rect">
+            <a:avLst/>
+          </a:prstGeom>
+          <a:noFill/>
+        </p:spPr>
+        <p:txBody>
+          <a:bodyPr wrap="square" anchor="ctr">
+            <a:spAutoFit/>
+          </a:bodyPr>
+          <a:lstStyle/>
+          <a:p>
+            <a:r>
+              <a:rPr sz="1250" b="1" i="0">
+                <a:solidFill>
+                  <a:srgbClr val="E97132"/>
+                </a:solidFill>
+                <a:latin typeface="Avenir Next LT Pro Demi"/>
+              </a:rPr>
+              <a:t>The double edge</a:t>
+            </a:r>
+          </a:p>
+        </p:txBody>
+      </p:sp>
+      <p:sp>
+        <p:nvSpPr>
+          <p:cNvPr id="15" name="TextBox 14"/>
+          <p:cNvSpPr txBox="1"/>
+          <p:nvPr/>
+        </p:nvSpPr>
+        <p:spPr>
+          <a:xfrm>
+            <a:off x="2651760" y="4754879"/>
+            <a:ext cx="6035040" cy="1078992"/>
+          </a:xfrm>
+          <a:prstGeom prst="rect">
+            <a:avLst/>
+          </a:prstGeom>
+          <a:noFill/>
+        </p:spPr>
+        <p:txBody>
+          <a:bodyPr wrap="square" anchor="ctr">
+            <a:spAutoFit/>
+          </a:bodyPr>
+          <a:lstStyle/>
+          <a:p>
+            <a:r>
+              <a:rPr sz="1100" b="0" i="0">
+                <a:solidFill>
+                  <a:srgbClr val="0E2841"/>
+                </a:solidFill>
+                <a:latin typeface="Avenir Next LT Pro"/>
+              </a:rPr>
+              <a:t>A bold, contrarian capital allocator — the same conviction behind the (now underwater) buybacks also drives the Estates bet. High reward, high key-man risk; no obvious successor.</a:t>
+            </a:r>
+          </a:p>
+        </p:txBody>
+      </p:sp>
+      <p:sp>
+        <p:nvSpPr>
+          <p:cNvPr id="16" name="TextBox 15"/>
+          <p:cNvSpPr txBox="1"/>
+          <p:nvPr/>
+        </p:nvSpPr>
+        <p:spPr>
+          <a:xfrm>
+            <a:off x="457200" y="6355080"/>
+            <a:ext cx="8229600" cy="411480"/>
+          </a:xfrm>
+          <a:prstGeom prst="rect">
+            <a:avLst/>
+          </a:prstGeom>
+          <a:noFill/>
+        </p:spPr>
+        <p:txBody>
+          <a:bodyPr wrap="square">
+            <a:spAutoFit/>
+          </a:bodyPr>
+          <a:lstStyle/>
+          <a:p>
+            <a:r>
+              <a:rPr sz="750" b="0" i="1">
+                <a:solidFill>
+                  <a:srgbClr val="9A9A9A"/>
+                </a:solidFill>
+                <a:latin typeface="Avenir Next LT Pro"/>
+              </a:rPr>
+              <a:t>Source: RH FY2025 Form 10-K; RH IR press release &amp; SEC Form 4 (Jun 26, 2024); Williams-Sonoma/RH company bios</a:t>
+            </a:r>
           </a:p>
         </p:txBody>
       </p:sp>

--- a/RH_Stock_Pitch_updated.pptx
+++ b/RH_Stock_Pitch_updated.pptx
@@ -22,11 +22,11 @@
     <p:sldId id="510" r:id="rId13"/>
     <p:sldId id="506" r:id="rId14"/>
     <p:sldId id="511" r:id="rId15"/>
-    <p:sldId id="512" r:id="rId16"/>
-    <p:sldId id="513" r:id="rId27"/>
-    <p:sldId id="514" r:id="rId28"/>
-    <p:sldId id="515" r:id="rId29"/>
-    <p:sldId id="516" r:id="rId30"/>
+    <p:sldId id="513" r:id="rId16"/>
+    <p:sldId id="514" r:id="rId27"/>
+    <p:sldId id="515" r:id="rId28"/>
+    <p:sldId id="516" r:id="rId29"/>
+    <p:sldId id="517" r:id="rId30"/>
   </p:sldIdLst>
   <p:sldSz cx="9144000" cy="6858000" type="screen4x3"/>
   <p:notesSz cx="7023100" cy="9309100"/>
@@ -623,7 +623,7 @@
           <a:p>
             <a:fld id="{128FCA9C-FF92-4024-BDEC-A6D3B663DC09}" type="datetimeFigureOut">
               <a:rPr lang="en-US"/>
-              <a:t>7/1/2026</a:t>
+              <a:t>7/2/2026</a:t>
             </a:fld>
             <a:endParaRPr/>
           </a:p>
@@ -788,7 +788,7 @@
           <a:p>
             <a:fld id="{772AB877-E7B1-4681-847E-D0918612832B}" type="datetimeFigureOut">
               <a:rPr lang="en-US"/>
-              <a:t>7/1/2026</a:t>
+              <a:t>7/2/2026</a:t>
             </a:fld>
             <a:endParaRPr/>
           </a:p>
@@ -5302,50 +5302,6 @@
               </a:rPr>
               <a:t>Competitive Landscape</a:t>
             </a:r>
-          </a:p>
-        </p:txBody>
-      </p:sp>
-      <p:sp>
-        <p:nvSpPr>
-          <p:cNvPr id="3" name="Rectangle 2"/>
-          <p:cNvSpPr/>
-          <p:nvPr/>
-        </p:nvSpPr>
-        <p:spPr>
-          <a:xfrm>
-            <a:off x="457200" y="932688"/>
-            <a:ext cx="8229600" cy="27432"/>
-          </a:xfrm>
-          <a:prstGeom prst="rect">
-            <a:avLst/>
-          </a:prstGeom>
-          <a:solidFill>
-            <a:srgbClr val="156082"/>
-          </a:solidFill>
-          <a:ln>
-            <a:noFill/>
-          </a:ln>
-        </p:spPr>
-        <p:style>
-          <a:lnRef idx="1">
-            <a:schemeClr val="accent1"/>
-          </a:lnRef>
-          <a:fillRef idx="3">
-            <a:schemeClr val="accent1"/>
-          </a:fillRef>
-          <a:effectRef idx="2">
-            <a:schemeClr val="accent1"/>
-          </a:effectRef>
-          <a:fontRef idx="minor">
-            <a:schemeClr val="lt1"/>
-          </a:fontRef>
-        </p:style>
-        <p:txBody>
-          <a:bodyPr rtlCol="0" anchor="ctr"/>
-          <a:lstStyle/>
-          <a:p>
-            <a:pPr algn="ctr"/>
-            <a:endParaRPr/>
           </a:p>
         </p:txBody>
       </p:sp>
@@ -6007,7 +5963,7 @@
                           </a:solidFill>
                           <a:latin typeface="Avenir Next LT Pro"/>
                         </a:rPr>
-                        <a:t>~9.3×</a:t>
+                        <a:t>~8.7×</a:t>
                       </a:r>
                     </a:p>
                   </a:txBody>
@@ -6273,8 +6229,8 @@
         </p:nvSpPr>
         <p:spPr>
           <a:xfrm>
-            <a:off x="457200" y="320040"/>
-            <a:ext cx="8229600" cy="548640"/>
+            <a:off x="457198" y="274320"/>
+            <a:ext cx="8229600" cy="446276"/>
           </a:xfrm>
           <a:prstGeom prst="rect">
             <a:avLst/>
@@ -6288,47 +6244,10 @@
           <a:lstStyle/>
           <a:p>
             <a:r>
-              <a:rPr sz="2300" b="0" i="0">
-                <a:solidFill>
-                  <a:srgbClr val="0E2841"/>
-                </a:solidFill>
+              <a:rPr sz="2300" b="0" i="0" dirty="0">
                 <a:latin typeface="Avenir Next LT Pro Demi"/>
               </a:rPr>
               <a:t>Key Risks — What Has to Go Wrong</a:t>
-            </a:r>
-          </a:p>
-        </p:txBody>
-      </p:sp>
-      <p:sp>
-        <p:nvSpPr>
-          <p:cNvPr id="4" name="TextBox 3"/>
-          <p:cNvSpPr txBox="1"/>
-          <p:nvPr/>
-        </p:nvSpPr>
-        <p:spPr>
-          <a:xfrm>
-            <a:off x="457200" y="6419088"/>
-            <a:ext cx="8229600" cy="365760"/>
-          </a:xfrm>
-          <a:prstGeom prst="rect">
-            <a:avLst/>
-          </a:prstGeom>
-          <a:noFill/>
-        </p:spPr>
-        <p:txBody>
-          <a:bodyPr wrap="none">
-            <a:spAutoFit/>
-          </a:bodyPr>
-          <a:lstStyle/>
-          <a:p>
-            <a:r>
-              <a:rPr sz="700" b="0" i="0">
-                <a:solidFill>
-                  <a:srgbClr val="5A5A5A"/>
-                </a:solidFill>
-                <a:latin typeface="Avenir Next LT Pro"/>
-              </a:rPr>
-              <a:t>Confidential — for discussion purposes only. Not investment advice.</a:t>
             </a:r>
           </a:p>
         </p:txBody>
@@ -7059,7 +6978,7 @@
           </a:fontRef>
         </p:style>
         <p:txBody>
-          <a:bodyPr rtlCol="0" anchor="ctr" wrap="square" lIns="182880"/>
+          <a:bodyPr wrap="square" lIns="182880" rtlCol="0" anchor="ctr"/>
           <a:lstStyle/>
           <a:p>
             <a:pPr algn="ctr"/>
@@ -7126,6 +7045,7 @@
           <a:lstStyle/>
           <a:p>
             <a:pPr algn="ctr"/>
+            <a:endParaRPr/>
           </a:p>
         </p:txBody>
       </p:sp>
@@ -7155,7 +7075,7 @@
         </p:nvSpPr>
         <p:spPr>
           <a:xfrm>
-            <a:off x="457200" y="320040"/>
+            <a:off x="457200" y="365760"/>
             <a:ext cx="8229600" cy="548640"/>
           </a:xfrm>
           <a:prstGeom prst="rect">
@@ -7170,13 +7090,13 @@
           <a:lstStyle/>
           <a:p>
             <a:r>
-              <a:rPr sz="2200" b="0" i="0">
-                <a:solidFill>
-                  <a:srgbClr val="0E2841"/>
+              <a:rPr sz="2200" b="0">
+                <a:solidFill>
+                  <a:srgbClr val="000000"/>
                 </a:solidFill>
                 <a:latin typeface="Avenir Next LT Pro Demi"/>
               </a:rPr>
-              <a:t>How RH Got Here — From Peak to Self-Inflicted Trough</a:t>
+              <a:t>How RH Got Here</a:t>
             </a:r>
           </a:p>
         </p:txBody>
@@ -7189,8 +7109,8 @@
         </p:nvSpPr>
         <p:spPr>
           <a:xfrm>
-            <a:off x="457200" y="914400"/>
-            <a:ext cx="8229600" cy="27432"/>
+            <a:off x="457200" y="960120"/>
+            <a:ext cx="8229600" cy="25603"/>
           </a:xfrm>
           <a:prstGeom prst="rect">
             <a:avLst/>
@@ -7232,8 +7152,8 @@
         </p:nvSpPr>
         <p:spPr>
           <a:xfrm>
-            <a:off x="457200" y="1188720"/>
-            <a:ext cx="82296" cy="1371600"/>
+            <a:off x="457200" y="1371600"/>
+            <a:ext cx="82296" cy="1143000"/>
           </a:xfrm>
           <a:prstGeom prst="rect">
             <a:avLst/>
@@ -7275,8 +7195,8 @@
         </p:nvSpPr>
         <p:spPr>
           <a:xfrm>
-            <a:off x="658368" y="1188720"/>
-            <a:ext cx="2194560" cy="1371600"/>
+            <a:off x="658368" y="1371600"/>
+            <a:ext cx="1920240" cy="1143000"/>
           </a:xfrm>
           <a:prstGeom prst="rect">
             <a:avLst/>
@@ -7290,20 +7210,20 @@
           <a:lstStyle/>
           <a:p>
             <a:r>
-              <a:rPr sz="1300" b="1" i="0">
-                <a:solidFill>
-                  <a:srgbClr val="156082"/>
+              <a:rPr sz="1400" b="1">
+                <a:solidFill>
+                  <a:srgbClr val="000000"/>
                 </a:solidFill>
                 <a:latin typeface="Avenir Next LT Pro Demi"/>
               </a:rPr>
-              <a:t>THE BUILD</a:t>
-            </a:r>
-          </a:p>
-          <a:p>
-            <a:r>
-              <a:rPr sz="1100" b="0" i="0">
-                <a:solidFill>
-                  <a:srgbClr val="5A5A5A"/>
+              <a:t>The Build</a:t>
+            </a:r>
+          </a:p>
+          <a:p>
+            <a:r>
+              <a:rPr sz="1000" b="0">
+                <a:solidFill>
+                  <a:srgbClr val="707070"/>
                 </a:solidFill>
                 <a:latin typeface="Avenir Next LT Pro"/>
               </a:rPr>
@@ -7320,8 +7240,8 @@
         </p:nvSpPr>
         <p:spPr>
           <a:xfrm>
-            <a:off x="2971800" y="1188720"/>
-            <a:ext cx="5715000" cy="1371600"/>
+            <a:off x="2743200" y="1371600"/>
+            <a:ext cx="5943600" cy="1143000"/>
           </a:xfrm>
           <a:prstGeom prst="rect">
             <a:avLst/>
@@ -7335,13 +7255,13 @@
           <a:lstStyle/>
           <a:p>
             <a:r>
-              <a:rPr sz="1150" b="0" i="0">
-                <a:solidFill>
-                  <a:srgbClr val="0E2841"/>
+              <a:rPr sz="1250" b="0">
+                <a:solidFill>
+                  <a:srgbClr val="000000"/>
                 </a:solidFill>
                 <a:latin typeface="Avenir Next LT Pro"/>
               </a:rPr>
-              <a:t>Friedman transforms RH from a near-bankrupt mall retailer into a luxury Gallery brand — large-format design galleries, membership model, soaring AOV.</a:t>
+              <a:t>Friedman turns RH into a luxury Gallery brand.</a:t>
             </a:r>
           </a:p>
         </p:txBody>
@@ -7354,8 +7274,8 @@
         </p:nvSpPr>
         <p:spPr>
           <a:xfrm>
-            <a:off x="457200" y="2670048"/>
-            <a:ext cx="82296" cy="1371600"/>
+            <a:off x="457200" y="2679191"/>
+            <a:ext cx="82296" cy="1143000"/>
           </a:xfrm>
           <a:prstGeom prst="rect">
             <a:avLst/>
@@ -7397,8 +7317,8 @@
         </p:nvSpPr>
         <p:spPr>
           <a:xfrm>
-            <a:off x="658368" y="2670048"/>
-            <a:ext cx="2194560" cy="1371600"/>
+            <a:off x="658368" y="2679191"/>
+            <a:ext cx="1920240" cy="1143000"/>
           </a:xfrm>
           <a:prstGeom prst="rect">
             <a:avLst/>
@@ -7412,20 +7332,20 @@
           <a:lstStyle/>
           <a:p>
             <a:r>
-              <a:rPr sz="1300" b="1" i="0">
-                <a:solidFill>
-                  <a:srgbClr val="E97132"/>
+              <a:rPr sz="1400" b="1">
+                <a:solidFill>
+                  <a:srgbClr val="000000"/>
                 </a:solidFill>
                 <a:latin typeface="Avenir Next LT Pro Demi"/>
               </a:rPr>
-              <a:t>THE PEAK</a:t>
-            </a:r>
-          </a:p>
-          <a:p>
-            <a:r>
-              <a:rPr sz="1100" b="0" i="0">
-                <a:solidFill>
-                  <a:srgbClr val="5A5A5A"/>
+              <a:t>The Peak</a:t>
+            </a:r>
+          </a:p>
+          <a:p>
+            <a:r>
+              <a:rPr sz="1000" b="0">
+                <a:solidFill>
+                  <a:srgbClr val="707070"/>
                 </a:solidFill>
                 <a:latin typeface="Avenir Next LT Pro"/>
               </a:rPr>
@@ -7442,8 +7362,8 @@
         </p:nvSpPr>
         <p:spPr>
           <a:xfrm>
-            <a:off x="2971800" y="2670048"/>
-            <a:ext cx="5715000" cy="1371600"/>
+            <a:off x="2743200" y="2679191"/>
+            <a:ext cx="5943600" cy="1143000"/>
           </a:xfrm>
           <a:prstGeom prst="rect">
             <a:avLst/>
@@ -7457,13 +7377,13 @@
           <a:lstStyle/>
           <a:p>
             <a:r>
-              <a:rPr sz="1150" b="0" i="0">
-                <a:solidFill>
-                  <a:srgbClr val="0E2841"/>
+              <a:rPr sz="1250" b="0">
+                <a:solidFill>
+                  <a:srgbClr val="000000"/>
                 </a:solidFill>
                 <a:latin typeface="Avenir Next LT Pro"/>
               </a:rPr>
-              <a:t>COVID housing boom drives revenue to a ~$3.6B peak. RH levers up and buys back ~7.6M shares in FY22–23 at ~$269–321 avg (program upsized to $2.45B) — funded largely by term loans.</a:t>
+              <a:t>~$3.6B revenue — then buys back ~7.6M shares at ~$269–321, debt-funded.</a:t>
             </a:r>
           </a:p>
         </p:txBody>
@@ -7476,8 +7396,8 @@
         </p:nvSpPr>
         <p:spPr>
           <a:xfrm>
-            <a:off x="457200" y="4151376"/>
-            <a:ext cx="82296" cy="1371600"/>
+            <a:off x="457200" y="3986783"/>
+            <a:ext cx="82296" cy="1143000"/>
           </a:xfrm>
           <a:prstGeom prst="rect">
             <a:avLst/>
@@ -7519,8 +7439,8 @@
         </p:nvSpPr>
         <p:spPr>
           <a:xfrm>
-            <a:off x="658368" y="4151376"/>
-            <a:ext cx="2194560" cy="1371600"/>
+            <a:off x="658368" y="3986783"/>
+            <a:ext cx="1920240" cy="1143000"/>
           </a:xfrm>
           <a:prstGeom prst="rect">
             <a:avLst/>
@@ -7534,24 +7454,24 @@
           <a:lstStyle/>
           <a:p>
             <a:r>
-              <a:rPr sz="1300" b="1" i="0">
-                <a:solidFill>
-                  <a:srgbClr val="B03030"/>
+              <a:rPr sz="1400" b="1">
+                <a:solidFill>
+                  <a:srgbClr val="000000"/>
                 </a:solidFill>
                 <a:latin typeface="Avenir Next LT Pro Demi"/>
               </a:rPr>
-              <a:t>THE FALL</a:t>
-            </a:r>
-          </a:p>
-          <a:p>
-            <a:r>
-              <a:rPr sz="1100" b="0" i="0">
-                <a:solidFill>
-                  <a:srgbClr val="5A5A5A"/>
+              <a:t>The Fall</a:t>
+            </a:r>
+          </a:p>
+          <a:p>
+            <a:r>
+              <a:rPr sz="1000" b="0">
+                <a:solidFill>
+                  <a:srgbClr val="707070"/>
                 </a:solidFill>
                 <a:latin typeface="Avenir Next LT Pro"/>
               </a:rPr>
-              <a:t>FY2023–24</a:t>
+              <a:t>FY23–24</a:t>
             </a:r>
           </a:p>
         </p:txBody>
@@ -7564,8 +7484,8 @@
         </p:nvSpPr>
         <p:spPr>
           <a:xfrm>
-            <a:off x="2971800" y="4151376"/>
-            <a:ext cx="5715000" cy="1371600"/>
+            <a:off x="2743200" y="3986783"/>
+            <a:ext cx="5943600" cy="1143000"/>
           </a:xfrm>
           <a:prstGeom prst="rect">
             <a:avLst/>
@@ -7579,13 +7499,13 @@
           <a:lstStyle/>
           <a:p>
             <a:r>
-              <a:rPr sz="1150" b="0" i="0">
-                <a:solidFill>
-                  <a:srgbClr val="0E2841"/>
+              <a:rPr sz="1250" b="0">
+                <a:solidFill>
+                  <a:srgbClr val="000000"/>
                 </a:solidFill>
                 <a:latin typeface="Avenir Next LT Pro"/>
               </a:rPr>
-              <a:t>Fed rate hikes freeze housing turnover. Revenue falls to a ~$3.03B trough. The buyback debt now sits on a shrunken business → ~$2.4B net debt, ~4× levered.</a:t>
+              <a:t>Housing freezes; revenue falls to ~$3.03B. Debt now ~$2.4B, ~4× levered.</a:t>
             </a:r>
           </a:p>
         </p:txBody>
@@ -7599,7 +7519,7 @@
         <p:spPr>
           <a:xfrm>
             <a:off x="457200" y="5806440"/>
-            <a:ext cx="8229600" cy="457200"/>
+            <a:ext cx="8229600" cy="365760"/>
           </a:xfrm>
           <a:prstGeom prst="rect">
             <a:avLst/>
@@ -7613,13 +7533,13 @@
           <a:lstStyle/>
           <a:p>
             <a:r>
-              <a:rPr sz="1100" b="1" i="0">
-                <a:solidFill>
-                  <a:srgbClr val="156082"/>
+              <a:rPr sz="1100" b="1">
+                <a:solidFill>
+                  <a:srgbClr val="000000"/>
                 </a:solidFill>
                 <a:latin typeface="Avenir Next LT Pro Demi"/>
               </a:rPr>
-              <a:t>Takeaway: the wound was partly self-inflicted — leveraged buybacks at the top, then the housing cycle turned.</a:t>
+              <a:t>Partly self-inflicted: leveraged buybacks at the top, then the cycle turned.</a:t>
             </a:r>
           </a:p>
         </p:txBody>
@@ -7633,7 +7553,7 @@
         <p:spPr>
           <a:xfrm>
             <a:off x="457200" y="6355080"/>
-            <a:ext cx="8229600" cy="411480"/>
+            <a:ext cx="8229600" cy="365760"/>
           </a:xfrm>
           <a:prstGeom prst="rect">
             <a:avLst/>
@@ -7641,7 +7561,7 @@
           <a:noFill/>
         </p:spPr>
         <p:txBody>
-          <a:bodyPr wrap="square">
+          <a:bodyPr wrap="none">
             <a:spAutoFit/>
           </a:bodyPr>
           <a:lstStyle/>
@@ -7649,11 +7569,11 @@
             <a:r>
               <a:rPr sz="750" b="0" i="1">
                 <a:solidFill>
-                  <a:srgbClr val="9A9A9A"/>
+                  <a:srgbClr val="707070"/>
                 </a:solidFill>
                 <a:latin typeface="Avenir Next LT Pro"/>
               </a:rPr>
-              <a:t>Source: RH FY2025 Form 10-K (fiscal year ended January 31, 2026)</a:t>
+              <a:t>Source: RH FY2025 Form 10-K</a:t>
             </a:r>
           </a:p>
         </p:txBody>
@@ -7684,7 +7604,7 @@
         </p:nvSpPr>
         <p:spPr>
           <a:xfrm>
-            <a:off x="457200" y="320040"/>
+            <a:off x="457200" y="365760"/>
             <a:ext cx="8229600" cy="548640"/>
           </a:xfrm>
           <a:prstGeom prst="rect">
@@ -7699,13 +7619,13 @@
           <a:lstStyle/>
           <a:p>
             <a:r>
-              <a:rPr sz="2200" b="0" i="0">
-                <a:solidFill>
-                  <a:srgbClr val="0E2841"/>
+              <a:rPr sz="2200" b="0">
+                <a:solidFill>
+                  <a:srgbClr val="000000"/>
                 </a:solidFill>
                 <a:latin typeface="Avenir Next LT Pro Demi"/>
               </a:rPr>
-              <a:t>The Recovery Plan — Friedman's Playbook</a:t>
+              <a:t>The Recovery Plan</a:t>
             </a:r>
           </a:p>
         </p:txBody>
@@ -7718,8 +7638,8 @@
         </p:nvSpPr>
         <p:spPr>
           <a:xfrm>
-            <a:off x="457200" y="914400"/>
-            <a:ext cx="8229600" cy="27432"/>
+            <a:off x="457200" y="960120"/>
+            <a:ext cx="8229600" cy="25603"/>
           </a:xfrm>
           <a:prstGeom prst="rect">
             <a:avLst/>
@@ -7761,78 +7681,8 @@
         </p:nvSpPr>
         <p:spPr>
           <a:xfrm>
-            <a:off x="457200" y="1234440"/>
-            <a:ext cx="3977639" cy="1965960"/>
-          </a:xfrm>
-          <a:prstGeom prst="rect">
-            <a:avLst/>
-          </a:prstGeom>
-          <a:solidFill>
-            <a:srgbClr val="FFFFFF"/>
-          </a:solidFill>
-          <a:ln w="12700">
-            <a:solidFill>
-              <a:srgbClr val="E8E8E8"/>
-            </a:solidFill>
-          </a:ln>
-        </p:spPr>
-        <p:style>
-          <a:lnRef idx="1">
-            <a:schemeClr val="accent1"/>
-          </a:lnRef>
-          <a:fillRef idx="3">
-            <a:schemeClr val="accent1"/>
-          </a:fillRef>
-          <a:effectRef idx="2">
-            <a:schemeClr val="accent1"/>
-          </a:effectRef>
-          <a:fontRef idx="minor">
-            <a:schemeClr val="lt1"/>
-          </a:fontRef>
-        </p:style>
-        <p:txBody>
-          <a:bodyPr rtlCol="0" anchor="t" wrap="square" lIns="164592" rIns="137160" tIns="146304"/>
-          <a:lstStyle/>
-          <a:p>
-            <a:pPr algn="ctr"/>
-            <a:r>
-              <a:rPr sz="1400" b="1" i="0">
-                <a:solidFill>
-                  <a:srgbClr val="156082"/>
-                </a:solidFill>
-                <a:latin typeface="Avenir Next LT Pro Demi"/>
-              </a:rPr>
-              <a:t>Product transformation</a:t>
-            </a:r>
-          </a:p>
-          <a:p>
-            <a:pPr>
-              <a:spcBef>
-                <a:spcPts val="500"/>
-              </a:spcBef>
-            </a:pPr>
-            <a:r>
-              <a:rPr sz="1100" b="0" i="0">
-                <a:solidFill>
-                  <a:srgbClr val="0E2841"/>
-                </a:solidFill>
-                <a:latin typeface="Avenir Next LT Pro"/>
-              </a:rPr>
-              <a:t>New collections and refreshed Sourcebooks to reignite demand and elevate the assortment.</a:t>
-            </a:r>
-          </a:p>
-        </p:txBody>
-      </p:sp>
-      <p:sp>
-        <p:nvSpPr>
-          <p:cNvPr id="5" name="Rectangle 4"/>
-          <p:cNvSpPr/>
-          <p:nvPr/>
-        </p:nvSpPr>
-        <p:spPr>
-          <a:xfrm>
-            <a:off x="457200" y="1234440"/>
-            <a:ext cx="3977639" cy="82296"/>
+            <a:off x="457200" y="1371600"/>
+            <a:ext cx="82296" cy="960120"/>
           </a:xfrm>
           <a:prstGeom prst="rect">
             <a:avLst/>
@@ -7868,90 +7718,63 @@
       </p:sp>
       <p:sp>
         <p:nvSpPr>
+          <p:cNvPr id="5" name="TextBox 4"/>
+          <p:cNvSpPr txBox="1"/>
+          <p:nvPr/>
+        </p:nvSpPr>
+        <p:spPr>
+          <a:xfrm>
+            <a:off x="658368" y="1371600"/>
+            <a:ext cx="7955279" cy="960120"/>
+          </a:xfrm>
+          <a:prstGeom prst="rect">
+            <a:avLst/>
+          </a:prstGeom>
+          <a:noFill/>
+        </p:spPr>
+        <p:txBody>
+          <a:bodyPr wrap="square" anchor="ctr">
+            <a:spAutoFit/>
+          </a:bodyPr>
+          <a:lstStyle/>
+          <a:p>
+            <a:r>
+              <a:rPr sz="1350" b="1">
+                <a:solidFill>
+                  <a:srgbClr val="000000"/>
+                </a:solidFill>
+                <a:latin typeface="Avenir Next LT Pro Demi"/>
+              </a:rPr>
+              <a:t>Product transformation  —  </a:t>
+            </a:r>
+            <a:r>
+              <a:rPr sz="1250" b="0">
+                <a:solidFill>
+                  <a:srgbClr val="000000"/>
+                </a:solidFill>
+                <a:latin typeface="Avenir Next LT Pro"/>
+              </a:rPr>
+              <a:t>New collections and refreshed Sourcebooks.</a:t>
+            </a:r>
+          </a:p>
+        </p:txBody>
+      </p:sp>
+      <p:sp>
+        <p:nvSpPr>
           <p:cNvPr id="6" name="Rectangle 5"/>
           <p:cNvSpPr/>
           <p:nvPr/>
         </p:nvSpPr>
         <p:spPr>
           <a:xfrm>
-            <a:off x="4709159" y="1234440"/>
-            <a:ext cx="3977639" cy="1965960"/>
+            <a:off x="457200" y="2496312"/>
+            <a:ext cx="82296" cy="960120"/>
           </a:xfrm>
           <a:prstGeom prst="rect">
             <a:avLst/>
           </a:prstGeom>
           <a:solidFill>
-            <a:srgbClr val="FFFFFF"/>
-          </a:solidFill>
-          <a:ln w="12700">
-            <a:solidFill>
-              <a:srgbClr val="E8E8E8"/>
-            </a:solidFill>
-          </a:ln>
-        </p:spPr>
-        <p:style>
-          <a:lnRef idx="1">
-            <a:schemeClr val="accent1"/>
-          </a:lnRef>
-          <a:fillRef idx="3">
-            <a:schemeClr val="accent1"/>
-          </a:fillRef>
-          <a:effectRef idx="2">
-            <a:schemeClr val="accent1"/>
-          </a:effectRef>
-          <a:fontRef idx="minor">
-            <a:schemeClr val="lt1"/>
-          </a:fontRef>
-        </p:style>
-        <p:txBody>
-          <a:bodyPr rtlCol="0" anchor="t" wrap="square" lIns="164592" rIns="137160" tIns="146304"/>
-          <a:lstStyle/>
-          <a:p>
-            <a:pPr algn="ctr"/>
-            <a:r>
-              <a:rPr sz="1400" b="1" i="0">
-                <a:solidFill>
-                  <a:srgbClr val="0E2841"/>
-                </a:solidFill>
-                <a:latin typeface="Avenir Next LT Pro Demi"/>
-              </a:rPr>
-              <a:t>Gallery expansion</a:t>
-            </a:r>
-          </a:p>
-          <a:p>
-            <a:pPr>
-              <a:spcBef>
-                <a:spcPts val="500"/>
-              </a:spcBef>
-            </a:pPr>
-            <a:r>
-              <a:rPr sz="1100" b="0" i="0">
-                <a:solidFill>
-                  <a:srgbClr val="0E2841"/>
-                </a:solidFill>
-                <a:latin typeface="Avenir Next LT Pro"/>
-              </a:rPr>
-              <a:t>Open Design Galleries in every major U.S. &amp; Canada market — RH's stated ~$5–6B annual revenue opportunity.</a:t>
-            </a:r>
-          </a:p>
-        </p:txBody>
-      </p:sp>
-      <p:sp>
-        <p:nvSpPr>
-          <p:cNvPr id="7" name="Rectangle 6"/>
-          <p:cNvSpPr/>
-          <p:nvPr/>
-        </p:nvSpPr>
-        <p:spPr>
-          <a:xfrm>
-            <a:off x="4709159" y="1234440"/>
-            <a:ext cx="3977639" cy="82296"/>
-          </a:xfrm>
-          <a:prstGeom prst="rect">
-            <a:avLst/>
-          </a:prstGeom>
-          <a:solidFill>
-            <a:srgbClr val="0E2841"/>
+            <a:srgbClr val="196B24"/>
           </a:solidFill>
           <a:ln>
             <a:noFill/>
@@ -7981,84 +7804,57 @@
       </p:sp>
       <p:sp>
         <p:nvSpPr>
+          <p:cNvPr id="7" name="TextBox 6"/>
+          <p:cNvSpPr txBox="1"/>
+          <p:nvPr/>
+        </p:nvSpPr>
+        <p:spPr>
+          <a:xfrm>
+            <a:off x="658368" y="2496312"/>
+            <a:ext cx="7955279" cy="960120"/>
+          </a:xfrm>
+          <a:prstGeom prst="rect">
+            <a:avLst/>
+          </a:prstGeom>
+          <a:noFill/>
+        </p:spPr>
+        <p:txBody>
+          <a:bodyPr wrap="square" anchor="ctr">
+            <a:spAutoFit/>
+          </a:bodyPr>
+          <a:lstStyle/>
+          <a:p>
+            <a:r>
+              <a:rPr sz="1350" b="1">
+                <a:solidFill>
+                  <a:srgbClr val="000000"/>
+                </a:solidFill>
+                <a:latin typeface="Avenir Next LT Pro Demi"/>
+              </a:rPr>
+              <a:t>Gallery expansion  —  </a:t>
+            </a:r>
+            <a:r>
+              <a:rPr sz="1250" b="0">
+                <a:solidFill>
+                  <a:srgbClr val="000000"/>
+                </a:solidFill>
+                <a:latin typeface="Avenir Next LT Pro"/>
+              </a:rPr>
+              <a:t>Every major U.S./Canada market — RH's ~$5–6B opportunity.</a:t>
+            </a:r>
+          </a:p>
+        </p:txBody>
+      </p:sp>
+      <p:sp>
+        <p:nvSpPr>
           <p:cNvPr id="8" name="Rectangle 7"/>
           <p:cNvSpPr/>
           <p:nvPr/>
         </p:nvSpPr>
         <p:spPr>
           <a:xfrm>
-            <a:off x="457200" y="3429000"/>
-            <a:ext cx="3977639" cy="1965960"/>
-          </a:xfrm>
-          <a:prstGeom prst="rect">
-            <a:avLst/>
-          </a:prstGeom>
-          <a:solidFill>
-            <a:srgbClr val="FFFFFF"/>
-          </a:solidFill>
-          <a:ln w="12700">
-            <a:solidFill>
-              <a:srgbClr val="E8E8E8"/>
-            </a:solidFill>
-          </a:ln>
-        </p:spPr>
-        <p:style>
-          <a:lnRef idx="1">
-            <a:schemeClr val="accent1"/>
-          </a:lnRef>
-          <a:fillRef idx="3">
-            <a:schemeClr val="accent1"/>
-          </a:fillRef>
-          <a:effectRef idx="2">
-            <a:schemeClr val="accent1"/>
-          </a:effectRef>
-          <a:fontRef idx="minor">
-            <a:schemeClr val="lt1"/>
-          </a:fontRef>
-        </p:style>
-        <p:txBody>
-          <a:bodyPr rtlCol="0" anchor="t" wrap="square" lIns="164592" rIns="137160" tIns="146304"/>
-          <a:lstStyle/>
-          <a:p>
-            <a:pPr algn="ctr"/>
-            <a:r>
-              <a:rPr sz="1400" b="1" i="0">
-                <a:solidFill>
-                  <a:srgbClr val="E97132"/>
-                </a:solidFill>
-                <a:latin typeface="Avenir Next LT Pro Demi"/>
-              </a:rPr>
-              <a:t>Move upmarket</a:t>
-            </a:r>
-          </a:p>
-          <a:p>
-            <a:pPr>
-              <a:spcBef>
-                <a:spcPts val="500"/>
-              </a:spcBef>
-            </a:pPr>
-            <a:r>
-              <a:rPr sz="1100" b="0" i="0">
-                <a:solidFill>
-                  <a:srgbClr val="0E2841"/>
-                </a:solidFill>
-                <a:latin typeface="Avenir Next LT Pro"/>
-              </a:rPr>
-              <a:t>RH Estates and higher price points target the rate-insensitive cash buyer — reducing housing dependence.</a:t>
-            </a:r>
-          </a:p>
-        </p:txBody>
-      </p:sp>
-      <p:sp>
-        <p:nvSpPr>
-          <p:cNvPr id="9" name="Rectangle 8"/>
-          <p:cNvSpPr/>
-          <p:nvPr/>
-        </p:nvSpPr>
-        <p:spPr>
-          <a:xfrm>
-            <a:off x="457200" y="3429000"/>
-            <a:ext cx="3977639" cy="82296"/>
+            <a:off x="457200" y="3621024"/>
+            <a:ext cx="82296" cy="960120"/>
           </a:xfrm>
           <a:prstGeom prst="rect">
             <a:avLst/>
@@ -8094,25 +7890,66 @@
       </p:sp>
       <p:sp>
         <p:nvSpPr>
+          <p:cNvPr id="9" name="TextBox 8"/>
+          <p:cNvSpPr txBox="1"/>
+          <p:nvPr/>
+        </p:nvSpPr>
+        <p:spPr>
+          <a:xfrm>
+            <a:off x="658368" y="3621024"/>
+            <a:ext cx="7955279" cy="960120"/>
+          </a:xfrm>
+          <a:prstGeom prst="rect">
+            <a:avLst/>
+          </a:prstGeom>
+          <a:noFill/>
+        </p:spPr>
+        <p:txBody>
+          <a:bodyPr wrap="square" anchor="ctr">
+            <a:spAutoFit/>
+          </a:bodyPr>
+          <a:lstStyle/>
+          <a:p>
+            <a:r>
+              <a:rPr sz="1350" b="1">
+                <a:solidFill>
+                  <a:srgbClr val="000000"/>
+                </a:solidFill>
+                <a:latin typeface="Avenir Next LT Pro Demi"/>
+              </a:rPr>
+              <a:t>Move upmarket  —  </a:t>
+            </a:r>
+            <a:r>
+              <a:rPr sz="1250" b="0">
+                <a:solidFill>
+                  <a:srgbClr val="000000"/>
+                </a:solidFill>
+                <a:latin typeface="Avenir Next LT Pro"/>
+              </a:rPr>
+              <a:t>Estates targets the rate-immune cash buyer.</a:t>
+            </a:r>
+          </a:p>
+        </p:txBody>
+      </p:sp>
+      <p:sp>
+        <p:nvSpPr>
           <p:cNvPr id="10" name="Rectangle 9"/>
           <p:cNvSpPr/>
           <p:nvPr/>
         </p:nvSpPr>
         <p:spPr>
           <a:xfrm>
-            <a:off x="4709159" y="3429000"/>
-            <a:ext cx="3977639" cy="1965960"/>
+            <a:off x="457200" y="4745736"/>
+            <a:ext cx="82296" cy="960120"/>
           </a:xfrm>
           <a:prstGeom prst="rect">
             <a:avLst/>
           </a:prstGeom>
           <a:solidFill>
-            <a:srgbClr val="FFFFFF"/>
+            <a:srgbClr val="156082"/>
           </a:solidFill>
-          <a:ln w="12700">
-            <a:solidFill>
-              <a:srgbClr val="E8E8E8"/>
-            </a:solidFill>
+          <a:ln>
+            <a:noFill/>
           </a:ln>
         </p:spPr>
         <p:style>
@@ -8130,48 +7967,831 @@
           </a:fontRef>
         </p:style>
         <p:txBody>
-          <a:bodyPr rtlCol="0" anchor="t" wrap="square" lIns="164592" rIns="137160" tIns="146304"/>
+          <a:bodyPr rtlCol="0" anchor="ctr"/>
           <a:lstStyle/>
           <a:p>
             <a:pPr algn="ctr"/>
-            <a:r>
-              <a:rPr sz="1400" b="1" i="0">
-                <a:solidFill>
-                  <a:srgbClr val="196B24"/>
-                </a:solidFill>
-                <a:latin typeface="Avenir Next LT Pro Demi"/>
-              </a:rPr>
-              <a:t>Global + platform</a:t>
-            </a:r>
-          </a:p>
-          <a:p>
-            <a:pPr>
-              <a:spcBef>
-                <a:spcPts val="500"/>
-              </a:spcBef>
-            </a:pPr>
-            <a:r>
-              <a:rPr sz="1100" b="0" i="0">
-                <a:solidFill>
-                  <a:srgbClr val="0E2841"/>
-                </a:solidFill>
-                <a:latin typeface="Avenir Next LT Pro"/>
-              </a:rPr>
-              <a:t>RH England (Aynho Park, Jun 2023) opens European expansion; Guesthouses, hospitality &amp; F&amp;B extend the brand.</a:t>
-            </a:r>
           </a:p>
         </p:txBody>
       </p:sp>
       <p:sp>
         <p:nvSpPr>
-          <p:cNvPr id="11" name="Rectangle 10"/>
+          <p:cNvPr id="11" name="TextBox 10"/>
+          <p:cNvSpPr txBox="1"/>
+          <p:nvPr/>
+        </p:nvSpPr>
+        <p:spPr>
+          <a:xfrm>
+            <a:off x="658368" y="4745736"/>
+            <a:ext cx="7955279" cy="960120"/>
+          </a:xfrm>
+          <a:prstGeom prst="rect">
+            <a:avLst/>
+          </a:prstGeom>
+          <a:noFill/>
+        </p:spPr>
+        <p:txBody>
+          <a:bodyPr wrap="square" anchor="ctr">
+            <a:spAutoFit/>
+          </a:bodyPr>
+          <a:lstStyle/>
+          <a:p>
+            <a:r>
+              <a:rPr sz="1350" b="1">
+                <a:solidFill>
+                  <a:srgbClr val="000000"/>
+                </a:solidFill>
+                <a:latin typeface="Avenir Next LT Pro Demi"/>
+              </a:rPr>
+              <a:t>Global + platform  —  </a:t>
+            </a:r>
+            <a:r>
+              <a:rPr sz="1250" b="0">
+                <a:solidFill>
+                  <a:srgbClr val="000000"/>
+                </a:solidFill>
+                <a:latin typeface="Avenir Next LT Pro"/>
+              </a:rPr>
+              <a:t>RH England, Guesthouses, hospitality &amp; F&amp;B.</a:t>
+            </a:r>
+          </a:p>
+        </p:txBody>
+      </p:sp>
+      <p:sp>
+        <p:nvSpPr>
+          <p:cNvPr id="12" name="TextBox 11"/>
+          <p:cNvSpPr txBox="1"/>
+          <p:nvPr/>
+        </p:nvSpPr>
+        <p:spPr>
+          <a:xfrm>
+            <a:off x="457200" y="6355080"/>
+            <a:ext cx="8229600" cy="365760"/>
+          </a:xfrm>
+          <a:prstGeom prst="rect">
+            <a:avLst/>
+          </a:prstGeom>
+          <a:noFill/>
+        </p:spPr>
+        <p:txBody>
+          <a:bodyPr wrap="none">
+            <a:spAutoFit/>
+          </a:bodyPr>
+          <a:lstStyle/>
+          <a:p>
+            <a:r>
+              <a:rPr sz="750" b="0" i="1">
+                <a:solidFill>
+                  <a:srgbClr val="707070"/>
+                </a:solidFill>
+                <a:latin typeface="Avenir Next LT Pro"/>
+              </a:rPr>
+              <a:t>Source: RH FY2025 Form 10-K</a:t>
+            </a:r>
+          </a:p>
+        </p:txBody>
+      </p:sp>
+    </p:spTree>
+  </p:cSld>
+  <p:clrMapOvr>
+    <a:masterClrMapping/>
+  </p:clrMapOvr>
+</p:sld>
+</file>
+
+<file path=ppt/slides/slide15.xml><?xml version="1.0" encoding="utf-8"?>
+<p:sld xmlns:a="http://schemas.openxmlformats.org/drawingml/2006/main" xmlns:p="http://schemas.openxmlformats.org/presentationml/2006/main" xmlns:r="http://schemas.openxmlformats.org/officeDocument/2006/relationships">
+  <p:cSld>
+    <p:spTree>
+      <p:nvGrpSpPr>
+        <p:cNvPr id="1" name=""/>
+        <p:cNvGrpSpPr/>
+        <p:nvPr/>
+      </p:nvGrpSpPr>
+      <p:grpSpPr/>
+      <p:sp>
+        <p:nvSpPr>
+          <p:cNvPr id="2" name="TextBox 1"/>
+          <p:cNvSpPr txBox="1"/>
+          <p:nvPr/>
+        </p:nvSpPr>
+        <p:spPr>
+          <a:xfrm>
+            <a:off x="457200" y="365760"/>
+            <a:ext cx="8229600" cy="548640"/>
+          </a:xfrm>
+          <a:prstGeom prst="rect">
+            <a:avLst/>
+          </a:prstGeom>
+          <a:noFill/>
+        </p:spPr>
+        <p:txBody>
+          <a:bodyPr wrap="square">
+            <a:spAutoFit/>
+          </a:bodyPr>
+          <a:lstStyle/>
+          <a:p>
+            <a:r>
+              <a:rPr sz="2200" b="0">
+                <a:solidFill>
+                  <a:srgbClr val="000000"/>
+                </a:solidFill>
+                <a:latin typeface="Avenir Next LT Pro Demi"/>
+              </a:rPr>
+              <a:t>Is It Working?</a:t>
+            </a:r>
+          </a:p>
+        </p:txBody>
+      </p:sp>
+      <p:sp>
+        <p:nvSpPr>
+          <p:cNvPr id="3" name="Rectangle 2"/>
           <p:cNvSpPr/>
           <p:nvPr/>
         </p:nvSpPr>
         <p:spPr>
           <a:xfrm>
-            <a:off x="4709159" y="3429000"/>
-            <a:ext cx="3977639" cy="82296"/>
+            <a:off x="457200" y="960120"/>
+            <a:ext cx="8229600" cy="25603"/>
+          </a:xfrm>
+          <a:prstGeom prst="rect">
+            <a:avLst/>
+          </a:prstGeom>
+          <a:solidFill>
+            <a:srgbClr val="156082"/>
+          </a:solidFill>
+          <a:ln>
+            <a:noFill/>
+          </a:ln>
+        </p:spPr>
+        <p:style>
+          <a:lnRef idx="1">
+            <a:schemeClr val="accent1"/>
+          </a:lnRef>
+          <a:fillRef idx="3">
+            <a:schemeClr val="accent1"/>
+          </a:fillRef>
+          <a:effectRef idx="2">
+            <a:schemeClr val="accent1"/>
+          </a:effectRef>
+          <a:fontRef idx="minor">
+            <a:schemeClr val="lt1"/>
+          </a:fontRef>
+        </p:style>
+        <p:txBody>
+          <a:bodyPr rtlCol="0" anchor="ctr"/>
+          <a:lstStyle/>
+          <a:p>
+            <a:pPr algn="ctr"/>
+          </a:p>
+        </p:txBody>
+      </p:sp>
+      <p:sp>
+        <p:nvSpPr>
+          <p:cNvPr id="4" name="Rectangle 3"/>
+          <p:cNvSpPr/>
+          <p:nvPr/>
+        </p:nvSpPr>
+        <p:spPr>
+          <a:xfrm>
+            <a:off x="457200" y="1234440"/>
+            <a:ext cx="3977639" cy="384048"/>
+          </a:xfrm>
+          <a:prstGeom prst="rect">
+            <a:avLst/>
+          </a:prstGeom>
+          <a:solidFill>
+            <a:srgbClr val="196B24"/>
+          </a:solidFill>
+          <a:ln>
+            <a:noFill/>
+          </a:ln>
+        </p:spPr>
+        <p:style>
+          <a:lnRef idx="1">
+            <a:schemeClr val="accent1"/>
+          </a:lnRef>
+          <a:fillRef idx="3">
+            <a:schemeClr val="accent1"/>
+          </a:fillRef>
+          <a:effectRef idx="2">
+            <a:schemeClr val="accent1"/>
+          </a:effectRef>
+          <a:fontRef idx="minor">
+            <a:schemeClr val="lt1"/>
+          </a:fontRef>
+        </p:style>
+        <p:txBody>
+          <a:bodyPr rtlCol="0" anchor="ctr" lIns="137160"/>
+          <a:lstStyle/>
+          <a:p>
+            <a:pPr algn="ctr"/>
+            <a:r>
+              <a:rPr sz="1250" b="1">
+                <a:solidFill>
+                  <a:srgbClr val="FFFFFF"/>
+                </a:solidFill>
+                <a:latin typeface="Avenir Next LT Pro Demi"/>
+              </a:rPr>
+              <a:t>WORKING</a:t>
+            </a:r>
+          </a:p>
+        </p:txBody>
+      </p:sp>
+      <p:sp>
+        <p:nvSpPr>
+          <p:cNvPr id="5" name="Rectangle 4"/>
+          <p:cNvSpPr/>
+          <p:nvPr/>
+        </p:nvSpPr>
+        <p:spPr>
+          <a:xfrm>
+            <a:off x="4709160" y="1234440"/>
+            <a:ext cx="3977639" cy="384048"/>
+          </a:xfrm>
+          <a:prstGeom prst="rect">
+            <a:avLst/>
+          </a:prstGeom>
+          <a:solidFill>
+            <a:srgbClr val="B03030"/>
+          </a:solidFill>
+          <a:ln>
+            <a:noFill/>
+          </a:ln>
+        </p:spPr>
+        <p:style>
+          <a:lnRef idx="1">
+            <a:schemeClr val="accent1"/>
+          </a:lnRef>
+          <a:fillRef idx="3">
+            <a:schemeClr val="accent1"/>
+          </a:fillRef>
+          <a:effectRef idx="2">
+            <a:schemeClr val="accent1"/>
+          </a:effectRef>
+          <a:fontRef idx="minor">
+            <a:schemeClr val="lt1"/>
+          </a:fontRef>
+        </p:style>
+        <p:txBody>
+          <a:bodyPr rtlCol="0" anchor="ctr" lIns="137160"/>
+          <a:lstStyle/>
+          <a:p>
+            <a:pPr algn="ctr"/>
+            <a:r>
+              <a:rPr sz="1250" b="1">
+                <a:solidFill>
+                  <a:srgbClr val="FFFFFF"/>
+                </a:solidFill>
+                <a:latin typeface="Avenir Next LT Pro Demi"/>
+              </a:rPr>
+              <a:t>WATCH</a:t>
+            </a:r>
+          </a:p>
+        </p:txBody>
+      </p:sp>
+      <p:sp>
+        <p:nvSpPr>
+          <p:cNvPr id="6" name="TextBox 5"/>
+          <p:cNvSpPr txBox="1"/>
+          <p:nvPr/>
+        </p:nvSpPr>
+        <p:spPr>
+          <a:xfrm>
+            <a:off x="457200" y="1828800"/>
+            <a:ext cx="3977639" cy="777240"/>
+          </a:xfrm>
+          <a:prstGeom prst="rect">
+            <a:avLst/>
+          </a:prstGeom>
+          <a:noFill/>
+        </p:spPr>
+        <p:txBody>
+          <a:bodyPr wrap="square">
+            <a:spAutoFit/>
+          </a:bodyPr>
+          <a:lstStyle/>
+          <a:p>
+            <a:r>
+              <a:rPr sz="1200" b="1">
+                <a:solidFill>
+                  <a:srgbClr val="196B24"/>
+                </a:solidFill>
+                <a:latin typeface="Avenir Next LT Pro Demi"/>
+              </a:rPr>
+              <a:t>✓  </a:t>
+            </a:r>
+            <a:r>
+              <a:rPr sz="1150" b="0">
+                <a:solidFill>
+                  <a:srgbClr val="000000"/>
+                </a:solidFill>
+                <a:latin typeface="Avenir Next LT Pro"/>
+              </a:rPr>
+              <a:t>FCF inflected to +$252M (from −$214M)</a:t>
+            </a:r>
+          </a:p>
+        </p:txBody>
+      </p:sp>
+      <p:sp>
+        <p:nvSpPr>
+          <p:cNvPr id="7" name="TextBox 6"/>
+          <p:cNvSpPr txBox="1"/>
+          <p:nvPr/>
+        </p:nvSpPr>
+        <p:spPr>
+          <a:xfrm>
+            <a:off x="457200" y="2651760"/>
+            <a:ext cx="3977639" cy="777240"/>
+          </a:xfrm>
+          <a:prstGeom prst="rect">
+            <a:avLst/>
+          </a:prstGeom>
+          <a:noFill/>
+        </p:spPr>
+        <p:txBody>
+          <a:bodyPr wrap="square">
+            <a:spAutoFit/>
+          </a:bodyPr>
+          <a:lstStyle/>
+          <a:p>
+            <a:r>
+              <a:rPr sz="1200" b="1">
+                <a:solidFill>
+                  <a:srgbClr val="196B24"/>
+                </a:solidFill>
+                <a:latin typeface="Avenir Next LT Pro Demi"/>
+              </a:rPr>
+              <a:t>✓  </a:t>
+            </a:r>
+            <a:r>
+              <a:rPr sz="1150" b="0">
+                <a:solidFill>
+                  <a:srgbClr val="000000"/>
+                </a:solidFill>
+                <a:latin typeface="Avenir Next LT Pro"/>
+              </a:rPr>
+              <a:t>Inventory normalized $1.02B → $819M</a:t>
+            </a:r>
+          </a:p>
+        </p:txBody>
+      </p:sp>
+      <p:sp>
+        <p:nvSpPr>
+          <p:cNvPr id="8" name="TextBox 7"/>
+          <p:cNvSpPr txBox="1"/>
+          <p:nvPr/>
+        </p:nvSpPr>
+        <p:spPr>
+          <a:xfrm>
+            <a:off x="457200" y="3474720"/>
+            <a:ext cx="3977639" cy="777240"/>
+          </a:xfrm>
+          <a:prstGeom prst="rect">
+            <a:avLst/>
+          </a:prstGeom>
+          <a:noFill/>
+        </p:spPr>
+        <p:txBody>
+          <a:bodyPr wrap="square">
+            <a:spAutoFit/>
+          </a:bodyPr>
+          <a:lstStyle/>
+          <a:p>
+            <a:r>
+              <a:rPr sz="1200" b="1">
+                <a:solidFill>
+                  <a:srgbClr val="196B24"/>
+                </a:solidFill>
+                <a:latin typeface="Avenir Next LT Pro Demi"/>
+              </a:rPr>
+              <a:t>✓  </a:t>
+            </a:r>
+            <a:r>
+              <a:rPr sz="1150" b="0">
+                <a:solidFill>
+                  <a:srgbClr val="000000"/>
+                </a:solidFill>
+                <a:latin typeface="Avenir Next LT Pro"/>
+              </a:rPr>
+              <a:t>Revenue re-accelerated +8.1% in FY25</a:t>
+            </a:r>
+          </a:p>
+        </p:txBody>
+      </p:sp>
+      <p:sp>
+        <p:nvSpPr>
+          <p:cNvPr id="9" name="TextBox 8"/>
+          <p:cNvSpPr txBox="1"/>
+          <p:nvPr/>
+        </p:nvSpPr>
+        <p:spPr>
+          <a:xfrm>
+            <a:off x="4709160" y="1828800"/>
+            <a:ext cx="3977639" cy="777240"/>
+          </a:xfrm>
+          <a:prstGeom prst="rect">
+            <a:avLst/>
+          </a:prstGeom>
+          <a:noFill/>
+        </p:spPr>
+        <p:txBody>
+          <a:bodyPr wrap="square">
+            <a:spAutoFit/>
+          </a:bodyPr>
+          <a:lstStyle/>
+          <a:p>
+            <a:r>
+              <a:rPr sz="1200" b="1">
+                <a:solidFill>
+                  <a:srgbClr val="B03030"/>
+                </a:solidFill>
+                <a:latin typeface="Avenir Next LT Pro Demi"/>
+              </a:rPr>
+              <a:t>!  </a:t>
+            </a:r>
+            <a:r>
+              <a:rPr sz="1150" b="0">
+                <a:solidFill>
+                  <a:srgbClr val="000000"/>
+                </a:solidFill>
+                <a:latin typeface="Avenir Next LT Pro"/>
+              </a:rPr>
+              <a:t>Q1 FY26: revenue −1.7%, net loss −$14M</a:t>
+            </a:r>
+          </a:p>
+        </p:txBody>
+      </p:sp>
+      <p:sp>
+        <p:nvSpPr>
+          <p:cNvPr id="10" name="TextBox 9"/>
+          <p:cNvSpPr txBox="1"/>
+          <p:nvPr/>
+        </p:nvSpPr>
+        <p:spPr>
+          <a:xfrm>
+            <a:off x="4709160" y="2651760"/>
+            <a:ext cx="3977639" cy="777240"/>
+          </a:xfrm>
+          <a:prstGeom prst="rect">
+            <a:avLst/>
+          </a:prstGeom>
+          <a:noFill/>
+        </p:spPr>
+        <p:txBody>
+          <a:bodyPr wrap="square">
+            <a:spAutoFit/>
+          </a:bodyPr>
+          <a:lstStyle/>
+          <a:p>
+            <a:r>
+              <a:rPr sz="1200" b="1">
+                <a:solidFill>
+                  <a:srgbClr val="B03030"/>
+                </a:solidFill>
+                <a:latin typeface="Avenir Next LT Pro Demi"/>
+              </a:rPr>
+              <a:t>!  </a:t>
+            </a:r>
+            <a:r>
+              <a:rPr sz="1150" b="0">
+                <a:solidFill>
+                  <a:srgbClr val="000000"/>
+                </a:solidFill>
+                <a:latin typeface="Avenir Next LT Pro"/>
+              </a:rPr>
+              <a:t>~$225M/yr interest keeps coverage thin</a:t>
+            </a:r>
+          </a:p>
+        </p:txBody>
+      </p:sp>
+      <p:sp>
+        <p:nvSpPr>
+          <p:cNvPr id="11" name="TextBox 10"/>
+          <p:cNvSpPr txBox="1"/>
+          <p:nvPr/>
+        </p:nvSpPr>
+        <p:spPr>
+          <a:xfrm>
+            <a:off x="4709160" y="3474720"/>
+            <a:ext cx="3977639" cy="777240"/>
+          </a:xfrm>
+          <a:prstGeom prst="rect">
+            <a:avLst/>
+          </a:prstGeom>
+          <a:noFill/>
+        </p:spPr>
+        <p:txBody>
+          <a:bodyPr wrap="square">
+            <a:spAutoFit/>
+          </a:bodyPr>
+          <a:lstStyle/>
+          <a:p>
+            <a:r>
+              <a:rPr sz="1200" b="1">
+                <a:solidFill>
+                  <a:srgbClr val="B03030"/>
+                </a:solidFill>
+                <a:latin typeface="Avenir Next LT Pro Demi"/>
+              </a:rPr>
+              <a:t>!  </a:t>
+            </a:r>
+            <a:r>
+              <a:rPr sz="1150" b="0">
+                <a:solidFill>
+                  <a:srgbClr val="000000"/>
+                </a:solidFill>
+                <a:latin typeface="Avenir Next LT Pro"/>
+              </a:rPr>
+              <a:t>Guidance is back-half loaded</a:t>
+            </a:r>
+          </a:p>
+        </p:txBody>
+      </p:sp>
+      <p:sp>
+        <p:nvSpPr>
+          <p:cNvPr id="12" name="TextBox 11"/>
+          <p:cNvSpPr txBox="1"/>
+          <p:nvPr/>
+        </p:nvSpPr>
+        <p:spPr>
+          <a:xfrm>
+            <a:off x="457200" y="4663440"/>
+            <a:ext cx="8229600" cy="365760"/>
+          </a:xfrm>
+          <a:prstGeom prst="rect">
+            <a:avLst/>
+          </a:prstGeom>
+          <a:noFill/>
+        </p:spPr>
+        <p:txBody>
+          <a:bodyPr wrap="square">
+            <a:spAutoFit/>
+          </a:bodyPr>
+          <a:lstStyle/>
+          <a:p>
+            <a:r>
+              <a:rPr sz="1150" b="1">
+                <a:solidFill>
+                  <a:srgbClr val="000000"/>
+                </a:solidFill>
+                <a:latin typeface="Avenir Next LT Pro Demi"/>
+              </a:rPr>
+              <a:t>Verdict: real but early — the next two quarters are the tell.</a:t>
+            </a:r>
+          </a:p>
+        </p:txBody>
+      </p:sp>
+      <p:sp>
+        <p:nvSpPr>
+          <p:cNvPr id="13" name="TextBox 12"/>
+          <p:cNvSpPr txBox="1"/>
+          <p:nvPr/>
+        </p:nvSpPr>
+        <p:spPr>
+          <a:xfrm>
+            <a:off x="457200" y="6355080"/>
+            <a:ext cx="8229600" cy="365760"/>
+          </a:xfrm>
+          <a:prstGeom prst="rect">
+            <a:avLst/>
+          </a:prstGeom>
+          <a:noFill/>
+        </p:spPr>
+        <p:txBody>
+          <a:bodyPr wrap="none">
+            <a:spAutoFit/>
+          </a:bodyPr>
+          <a:lstStyle/>
+          <a:p>
+            <a:r>
+              <a:rPr sz="750" b="0" i="1">
+                <a:solidFill>
+                  <a:srgbClr val="707070"/>
+                </a:solidFill>
+                <a:latin typeface="Avenir Next LT Pro"/>
+              </a:rPr>
+              <a:t>Source: RH FY2025 10-K; Q1 FY2026 10-Q</a:t>
+            </a:r>
+          </a:p>
+        </p:txBody>
+      </p:sp>
+    </p:spTree>
+  </p:cSld>
+  <p:clrMapOvr>
+    <a:masterClrMapping/>
+  </p:clrMapOvr>
+</p:sld>
+</file>
+
+<file path=ppt/slides/slide16.xml><?xml version="1.0" encoding="utf-8"?>
+<p:sld xmlns:a="http://schemas.openxmlformats.org/drawingml/2006/main" xmlns:p="http://schemas.openxmlformats.org/presentationml/2006/main" xmlns:r="http://schemas.openxmlformats.org/officeDocument/2006/relationships">
+  <p:cSld>
+    <p:spTree>
+      <p:nvGrpSpPr>
+        <p:cNvPr id="1" name=""/>
+        <p:cNvGrpSpPr/>
+        <p:nvPr/>
+      </p:nvGrpSpPr>
+      <p:grpSpPr/>
+      <p:sp>
+        <p:nvSpPr>
+          <p:cNvPr id="2" name="TextBox 1"/>
+          <p:cNvSpPr txBox="1"/>
+          <p:nvPr/>
+        </p:nvSpPr>
+        <p:spPr>
+          <a:xfrm>
+            <a:off x="457200" y="365760"/>
+            <a:ext cx="8229600" cy="548640"/>
+          </a:xfrm>
+          <a:prstGeom prst="rect">
+            <a:avLst/>
+          </a:prstGeom>
+          <a:noFill/>
+        </p:spPr>
+        <p:txBody>
+          <a:bodyPr wrap="square">
+            <a:spAutoFit/>
+          </a:bodyPr>
+          <a:lstStyle/>
+          <a:p>
+            <a:r>
+              <a:rPr sz="2200" b="0">
+                <a:solidFill>
+                  <a:srgbClr val="000000"/>
+                </a:solidFill>
+                <a:latin typeface="Avenir Next LT Pro Demi"/>
+              </a:rPr>
+              <a:t>The Operator — Gary Friedman</a:t>
+            </a:r>
+          </a:p>
+        </p:txBody>
+      </p:sp>
+      <p:sp>
+        <p:nvSpPr>
+          <p:cNvPr id="3" name="Rectangle 2"/>
+          <p:cNvSpPr/>
+          <p:nvPr/>
+        </p:nvSpPr>
+        <p:spPr>
+          <a:xfrm>
+            <a:off x="457200" y="960120"/>
+            <a:ext cx="8229600" cy="25603"/>
+          </a:xfrm>
+          <a:prstGeom prst="rect">
+            <a:avLst/>
+          </a:prstGeom>
+          <a:solidFill>
+            <a:srgbClr val="156082"/>
+          </a:solidFill>
+          <a:ln>
+            <a:noFill/>
+          </a:ln>
+        </p:spPr>
+        <p:style>
+          <a:lnRef idx="1">
+            <a:schemeClr val="accent1"/>
+          </a:lnRef>
+          <a:fillRef idx="3">
+            <a:schemeClr val="accent1"/>
+          </a:fillRef>
+          <a:effectRef idx="2">
+            <a:schemeClr val="accent1"/>
+          </a:effectRef>
+          <a:fontRef idx="minor">
+            <a:schemeClr val="lt1"/>
+          </a:fontRef>
+        </p:style>
+        <p:txBody>
+          <a:bodyPr rtlCol="0" anchor="ctr"/>
+          <a:lstStyle/>
+          <a:p>
+            <a:pPr algn="ctr"/>
+          </a:p>
+        </p:txBody>
+      </p:sp>
+      <p:sp>
+        <p:nvSpPr>
+          <p:cNvPr id="4" name="Rectangle 3"/>
+          <p:cNvSpPr/>
+          <p:nvPr/>
+        </p:nvSpPr>
+        <p:spPr>
+          <a:xfrm>
+            <a:off x="457200" y="1371600"/>
+            <a:ext cx="82296" cy="1051560"/>
+          </a:xfrm>
+          <a:prstGeom prst="rect">
+            <a:avLst/>
+          </a:prstGeom>
+          <a:solidFill>
+            <a:srgbClr val="156082"/>
+          </a:solidFill>
+          <a:ln>
+            <a:noFill/>
+          </a:ln>
+        </p:spPr>
+        <p:style>
+          <a:lnRef idx="1">
+            <a:schemeClr val="accent1"/>
+          </a:lnRef>
+          <a:fillRef idx="3">
+            <a:schemeClr val="accent1"/>
+          </a:fillRef>
+          <a:effectRef idx="2">
+            <a:schemeClr val="accent1"/>
+          </a:effectRef>
+          <a:fontRef idx="minor">
+            <a:schemeClr val="lt1"/>
+          </a:fontRef>
+        </p:style>
+        <p:txBody>
+          <a:bodyPr rtlCol="0" anchor="ctr"/>
+          <a:lstStyle/>
+          <a:p>
+            <a:pPr algn="ctr"/>
+          </a:p>
+        </p:txBody>
+      </p:sp>
+      <p:sp>
+        <p:nvSpPr>
+          <p:cNvPr id="5" name="TextBox 4"/>
+          <p:cNvSpPr txBox="1"/>
+          <p:nvPr/>
+        </p:nvSpPr>
+        <p:spPr>
+          <a:xfrm>
+            <a:off x="658368" y="1371600"/>
+            <a:ext cx="1965960" cy="1051560"/>
+          </a:xfrm>
+          <a:prstGeom prst="rect">
+            <a:avLst/>
+          </a:prstGeom>
+          <a:noFill/>
+        </p:spPr>
+        <p:txBody>
+          <a:bodyPr wrap="square" anchor="ctr">
+            <a:spAutoFit/>
+          </a:bodyPr>
+          <a:lstStyle/>
+          <a:p>
+            <a:r>
+              <a:rPr sz="1250" b="1">
+                <a:solidFill>
+                  <a:srgbClr val="000000"/>
+                </a:solidFill>
+                <a:latin typeface="Avenir Next LT Pro Demi"/>
+              </a:rPr>
+              <a:t>Role</a:t>
+            </a:r>
+          </a:p>
+        </p:txBody>
+      </p:sp>
+      <p:sp>
+        <p:nvSpPr>
+          <p:cNvPr id="6" name="TextBox 5"/>
+          <p:cNvSpPr txBox="1"/>
+          <p:nvPr/>
+        </p:nvSpPr>
+        <p:spPr>
+          <a:xfrm>
+            <a:off x="2697480" y="1371600"/>
+            <a:ext cx="5989320" cy="1051560"/>
+          </a:xfrm>
+          <a:prstGeom prst="rect">
+            <a:avLst/>
+          </a:prstGeom>
+          <a:noFill/>
+        </p:spPr>
+        <p:txBody>
+          <a:bodyPr wrap="square" anchor="ctr">
+            <a:spAutoFit/>
+          </a:bodyPr>
+          <a:lstStyle/>
+          <a:p>
+            <a:r>
+              <a:rPr sz="1200" b="0">
+                <a:solidFill>
+                  <a:srgbClr val="000000"/>
+                </a:solidFill>
+                <a:latin typeface="Avenir Next LT Pro"/>
+              </a:rPr>
+              <a:t>Chairman &amp; CEO and the brand's creative force (10-K key-man).</a:t>
+            </a:r>
+          </a:p>
+        </p:txBody>
+      </p:sp>
+      <p:sp>
+        <p:nvSpPr>
+          <p:cNvPr id="7" name="Rectangle 6"/>
+          <p:cNvSpPr/>
+          <p:nvPr/>
+        </p:nvSpPr>
+        <p:spPr>
+          <a:xfrm>
+            <a:off x="457200" y="2514600"/>
+            <a:ext cx="82296" cy="1051560"/>
           </a:xfrm>
           <a:prstGeom prst="rect">
             <a:avLst/>
@@ -8207,14 +8827,14 @@
       </p:sp>
       <p:sp>
         <p:nvSpPr>
-          <p:cNvPr id="12" name="TextBox 11"/>
+          <p:cNvPr id="8" name="TextBox 7"/>
           <p:cNvSpPr txBox="1"/>
           <p:nvPr/>
         </p:nvSpPr>
         <p:spPr>
           <a:xfrm>
-            <a:off x="457200" y="6355080"/>
-            <a:ext cx="8229600" cy="411480"/>
+            <a:off x="658368" y="2514600"/>
+            <a:ext cx="1965960" cy="1051560"/>
           </a:xfrm>
           <a:prstGeom prst="rect">
             <a:avLst/>
@@ -8222,51 +8842,33 @@
           <a:noFill/>
         </p:spPr>
         <p:txBody>
-          <a:bodyPr wrap="square">
+          <a:bodyPr wrap="square" anchor="ctr">
             <a:spAutoFit/>
           </a:bodyPr>
           <a:lstStyle/>
           <a:p>
             <a:r>
-              <a:rPr sz="750" b="0" i="1">
-                <a:solidFill>
-                  <a:srgbClr val="9A9A9A"/>
-                </a:solidFill>
-                <a:latin typeface="Avenir Next LT Pro"/>
-              </a:rPr>
-              <a:t>Source: RH FY2025 Form 10-K</a:t>
+              <a:rPr sz="1250" b="1">
+                <a:solidFill>
+                  <a:srgbClr val="000000"/>
+                </a:solidFill>
+                <a:latin typeface="Avenir Next LT Pro Demi"/>
+              </a:rPr>
+              <a:t>Track record</a:t>
             </a:r>
           </a:p>
         </p:txBody>
       </p:sp>
-    </p:spTree>
-  </p:cSld>
-  <p:clrMapOvr>
-    <a:masterClrMapping/>
-  </p:clrMapOvr>
-</p:sld>
-</file>
-
-<file path=ppt/slides/slide15.xml><?xml version="1.0" encoding="utf-8"?>
-<p:sld xmlns:a="http://schemas.openxmlformats.org/drawingml/2006/main" xmlns:p="http://schemas.openxmlformats.org/presentationml/2006/main" xmlns:r="http://schemas.openxmlformats.org/officeDocument/2006/relationships">
-  <p:cSld>
-    <p:spTree>
-      <p:nvGrpSpPr>
-        <p:cNvPr id="1" name=""/>
-        <p:cNvGrpSpPr/>
-        <p:nvPr/>
-      </p:nvGrpSpPr>
-      <p:grpSpPr/>
       <p:sp>
         <p:nvSpPr>
-          <p:cNvPr id="2" name="TextBox 1"/>
+          <p:cNvPr id="9" name="TextBox 8"/>
           <p:cNvSpPr txBox="1"/>
           <p:nvPr/>
         </p:nvSpPr>
         <p:spPr>
           <a:xfrm>
-            <a:off x="457200" y="320040"/>
-            <a:ext cx="8229600" cy="548640"/>
+            <a:off x="2697480" y="2514600"/>
+            <a:ext cx="5989320" cy="1051560"/>
           </a:xfrm>
           <a:prstGeom prst="rect">
             <a:avLst/>
@@ -8274,39 +8876,39 @@
           <a:noFill/>
         </p:spPr>
         <p:txBody>
-          <a:bodyPr wrap="square">
+          <a:bodyPr wrap="square" anchor="ctr">
             <a:spAutoFit/>
           </a:bodyPr>
           <a:lstStyle/>
           <a:p>
             <a:r>
-              <a:rPr sz="2200" b="0" i="0">
-                <a:solidFill>
-                  <a:srgbClr val="0E2841"/>
-                </a:solidFill>
-                <a:latin typeface="Avenir Next LT Pro Demi"/>
-              </a:rPr>
-              <a:t>Is It Working? — The Early Scorecard</a:t>
+              <a:rPr sz="1200" b="0">
+                <a:solidFill>
+                  <a:srgbClr val="000000"/>
+                </a:solidFill>
+                <a:latin typeface="Avenir Next LT Pro"/>
+              </a:rPr>
+              <a:t>Grew Pottery Barn $50M → $1B+; joined RH in 2001 near bankruptcy.</a:t>
             </a:r>
           </a:p>
         </p:txBody>
       </p:sp>
       <p:sp>
         <p:nvSpPr>
-          <p:cNvPr id="3" name="Rectangle 2"/>
+          <p:cNvPr id="10" name="Rectangle 9"/>
           <p:cNvSpPr/>
           <p:nvPr/>
         </p:nvSpPr>
         <p:spPr>
           <a:xfrm>
-            <a:off x="457200" y="914400"/>
-            <a:ext cx="8229600" cy="27432"/>
+            <a:off x="457200" y="3657600"/>
+            <a:ext cx="82296" cy="1051560"/>
           </a:xfrm>
           <a:prstGeom prst="rect">
             <a:avLst/>
           </a:prstGeom>
           <a:solidFill>
-            <a:srgbClr val="156082"/>
+            <a:srgbClr val="E97132"/>
           </a:solidFill>
           <a:ln>
             <a:noFill/>
@@ -8336,57 +8938,14 @@
       </p:sp>
       <p:sp>
         <p:nvSpPr>
-          <p:cNvPr id="4" name="Rectangle 3"/>
-          <p:cNvSpPr/>
-          <p:nvPr/>
-        </p:nvSpPr>
-        <p:spPr>
-          <a:xfrm>
-            <a:off x="457200" y="1188720"/>
-            <a:ext cx="3977639" cy="411480"/>
-          </a:xfrm>
-          <a:prstGeom prst="rect">
-            <a:avLst/>
-          </a:prstGeom>
-          <a:solidFill>
-            <a:srgbClr val="196B24"/>
-          </a:solidFill>
-          <a:ln>
-            <a:noFill/>
-          </a:ln>
-        </p:spPr>
-        <p:style>
-          <a:lnRef idx="1">
-            <a:schemeClr val="accent1"/>
-          </a:lnRef>
-          <a:fillRef idx="3">
-            <a:schemeClr val="accent1"/>
-          </a:fillRef>
-          <a:effectRef idx="2">
-            <a:schemeClr val="accent1"/>
-          </a:effectRef>
-          <a:fontRef idx="minor">
-            <a:schemeClr val="lt1"/>
-          </a:fontRef>
-        </p:style>
-        <p:txBody>
-          <a:bodyPr rtlCol="0" anchor="ctr"/>
-          <a:lstStyle/>
-          <a:p>
-            <a:pPr algn="ctr"/>
-          </a:p>
-        </p:txBody>
-      </p:sp>
-      <p:sp>
-        <p:nvSpPr>
-          <p:cNvPr id="5" name="TextBox 4"/>
+          <p:cNvPr id="11" name="TextBox 10"/>
           <p:cNvSpPr txBox="1"/>
           <p:nvPr/>
         </p:nvSpPr>
         <p:spPr>
           <a:xfrm>
-            <a:off x="457200" y="1188720"/>
-            <a:ext cx="3977639" cy="411480"/>
+            <a:off x="658368" y="3657600"/>
+            <a:ext cx="1965960" cy="1051560"/>
           </a:xfrm>
           <a:prstGeom prst="rect">
             <a:avLst/>
@@ -8400,27 +8959,27 @@
           <a:lstStyle/>
           <a:p>
             <a:r>
-              <a:rPr sz="1300" b="1" i="0">
-                <a:solidFill>
-                  <a:srgbClr val="FFFFFF"/>
+              <a:rPr sz="1250" b="1">
+                <a:solidFill>
+                  <a:srgbClr val="000000"/>
                 </a:solidFill>
                 <a:latin typeface="Avenir Next LT Pro Demi"/>
               </a:rPr>
-              <a:t>   WORKING</a:t>
+              <a:t>Skin in the game</a:t>
             </a:r>
           </a:p>
         </p:txBody>
       </p:sp>
       <p:sp>
         <p:nvSpPr>
-          <p:cNvPr id="6" name="TextBox 5"/>
+          <p:cNvPr id="12" name="TextBox 11"/>
           <p:cNvSpPr txBox="1"/>
           <p:nvPr/>
         </p:nvSpPr>
         <p:spPr>
           <a:xfrm>
-            <a:off x="457200" y="1737360"/>
-            <a:ext cx="3977639" cy="685800"/>
+            <a:off x="2697480" y="3657600"/>
+            <a:ext cx="5989320" cy="1051560"/>
           </a:xfrm>
           <a:prstGeom prst="rect">
             <a:avLst/>
@@ -8428,171 +8987,33 @@
           <a:noFill/>
         </p:spPr>
         <p:txBody>
-          <a:bodyPr wrap="square">
+          <a:bodyPr wrap="square" anchor="ctr">
             <a:spAutoFit/>
           </a:bodyPr>
           <a:lstStyle/>
           <a:p>
             <a:r>
-              <a:rPr sz="1100" b="1" i="0">
-                <a:solidFill>
-                  <a:srgbClr val="196B24"/>
-                </a:solidFill>
-                <a:latin typeface="Avenir Next LT Pro Demi"/>
-              </a:rPr>
-              <a:t>✓  </a:t>
-            </a:r>
-            <a:r>
-              <a:rPr sz="1050" b="0" i="0">
-                <a:solidFill>
-                  <a:srgbClr val="0E2841"/>
+              <a:rPr sz="1200" b="0">
+                <a:solidFill>
+                  <a:srgbClr val="000000"/>
                 </a:solidFill>
                 <a:latin typeface="Avenir Next LT Pro"/>
               </a:rPr>
-              <a:t>FCF inflected to +$252M in FY2025 (from −$214M a year earlier)</a:t>
+              <a:t>Owns ~25%; bought ~$10M more at ~$216 in June 2024.</a:t>
             </a:r>
           </a:p>
         </p:txBody>
       </p:sp>
       <p:sp>
         <p:nvSpPr>
-          <p:cNvPr id="7" name="TextBox 6"/>
-          <p:cNvSpPr txBox="1"/>
-          <p:nvPr/>
-        </p:nvSpPr>
-        <p:spPr>
-          <a:xfrm>
-            <a:off x="457200" y="2496312"/>
-            <a:ext cx="3977639" cy="685800"/>
-          </a:xfrm>
-          <a:prstGeom prst="rect">
-            <a:avLst/>
-          </a:prstGeom>
-          <a:noFill/>
-        </p:spPr>
-        <p:txBody>
-          <a:bodyPr wrap="square">
-            <a:spAutoFit/>
-          </a:bodyPr>
-          <a:lstStyle/>
-          <a:p>
-            <a:r>
-              <a:rPr sz="1100" b="1" i="0">
-                <a:solidFill>
-                  <a:srgbClr val="196B24"/>
-                </a:solidFill>
-                <a:latin typeface="Avenir Next LT Pro Demi"/>
-              </a:rPr>
-              <a:t>✓  </a:t>
-            </a:r>
-            <a:r>
-              <a:rPr sz="1050" b="0" i="0">
-                <a:solidFill>
-                  <a:srgbClr val="0E2841"/>
-                </a:solidFill>
-                <a:latin typeface="Avenir Next LT Pro"/>
-              </a:rPr>
-              <a:t>Inventory normalized: $1.02B → $819M, funding debt paydown</a:t>
-            </a:r>
-          </a:p>
-        </p:txBody>
-      </p:sp>
-      <p:sp>
-        <p:nvSpPr>
-          <p:cNvPr id="8" name="TextBox 7"/>
-          <p:cNvSpPr txBox="1"/>
-          <p:nvPr/>
-        </p:nvSpPr>
-        <p:spPr>
-          <a:xfrm>
-            <a:off x="457200" y="3255264"/>
-            <a:ext cx="3977639" cy="685800"/>
-          </a:xfrm>
-          <a:prstGeom prst="rect">
-            <a:avLst/>
-          </a:prstGeom>
-          <a:noFill/>
-        </p:spPr>
-        <p:txBody>
-          <a:bodyPr wrap="square">
-            <a:spAutoFit/>
-          </a:bodyPr>
-          <a:lstStyle/>
-          <a:p>
-            <a:r>
-              <a:rPr sz="1100" b="1" i="0">
-                <a:solidFill>
-                  <a:srgbClr val="196B24"/>
-                </a:solidFill>
-                <a:latin typeface="Avenir Next LT Pro Demi"/>
-              </a:rPr>
-              <a:t>✓  </a:t>
-            </a:r>
-            <a:r>
-              <a:rPr sz="1050" b="0" i="0">
-                <a:solidFill>
-                  <a:srgbClr val="0E2841"/>
-                </a:solidFill>
-                <a:latin typeface="Avenir Next LT Pro"/>
-              </a:rPr>
-              <a:t>Revenue re-accelerated +8.1% in FY2025; adj. EBITDA margin ~17%</a:t>
-            </a:r>
-          </a:p>
-        </p:txBody>
-      </p:sp>
-      <p:sp>
-        <p:nvSpPr>
-          <p:cNvPr id="9" name="TextBox 8"/>
-          <p:cNvSpPr txBox="1"/>
-          <p:nvPr/>
-        </p:nvSpPr>
-        <p:spPr>
-          <a:xfrm>
-            <a:off x="457200" y="4014215"/>
-            <a:ext cx="3977639" cy="685800"/>
-          </a:xfrm>
-          <a:prstGeom prst="rect">
-            <a:avLst/>
-          </a:prstGeom>
-          <a:noFill/>
-        </p:spPr>
-        <p:txBody>
-          <a:bodyPr wrap="square">
-            <a:spAutoFit/>
-          </a:bodyPr>
-          <a:lstStyle/>
-          <a:p>
-            <a:r>
-              <a:rPr sz="1100" b="1" i="0">
-                <a:solidFill>
-                  <a:srgbClr val="196B24"/>
-                </a:solidFill>
-                <a:latin typeface="Avenir Next LT Pro Demi"/>
-              </a:rPr>
-              <a:t>✓  </a:t>
-            </a:r>
-            <a:r>
-              <a:rPr sz="1050" b="0" i="0">
-                <a:solidFill>
-                  <a:srgbClr val="0E2841"/>
-                </a:solidFill>
-                <a:latin typeface="Avenir Next LT Pro"/>
-              </a:rPr>
-              <a:t>Net debt fell ~$210M YoY as ABL was paid down</a:t>
-            </a:r>
-          </a:p>
-        </p:txBody>
-      </p:sp>
-      <p:sp>
-        <p:nvSpPr>
-          <p:cNvPr id="10" name="Rectangle 9"/>
+          <p:cNvPr id="13" name="Rectangle 12"/>
           <p:cNvSpPr/>
           <p:nvPr/>
         </p:nvSpPr>
         <p:spPr>
           <a:xfrm>
-            <a:off x="4709160" y="1188720"/>
-            <a:ext cx="3977639" cy="411480"/>
+            <a:off x="457200" y="4800600"/>
+            <a:ext cx="82296" cy="1051560"/>
           </a:xfrm>
           <a:prstGeom prst="rect">
             <a:avLst/>
@@ -8628,14 +9049,14 @@
       </p:sp>
       <p:sp>
         <p:nvSpPr>
-          <p:cNvPr id="11" name="TextBox 10"/>
+          <p:cNvPr id="14" name="TextBox 13"/>
           <p:cNvSpPr txBox="1"/>
           <p:nvPr/>
         </p:nvSpPr>
         <p:spPr>
           <a:xfrm>
-            <a:off x="4709160" y="1188720"/>
-            <a:ext cx="3977639" cy="411480"/>
+            <a:off x="658368" y="4800600"/>
+            <a:ext cx="1965960" cy="1051560"/>
           </a:xfrm>
           <a:prstGeom prst="rect">
             <a:avLst/>
@@ -8649,142 +9070,13 @@
           <a:lstStyle/>
           <a:p>
             <a:r>
-              <a:rPr sz="1300" b="1" i="0">
-                <a:solidFill>
-                  <a:srgbClr val="FFFFFF"/>
+              <a:rPr sz="1250" b="1">
+                <a:solidFill>
+                  <a:srgbClr val="000000"/>
                 </a:solidFill>
                 <a:latin typeface="Avenir Next LT Pro Demi"/>
               </a:rPr>
-              <a:t>   WATCH</a:t>
-            </a:r>
-          </a:p>
-        </p:txBody>
-      </p:sp>
-      <p:sp>
-        <p:nvSpPr>
-          <p:cNvPr id="12" name="TextBox 11"/>
-          <p:cNvSpPr txBox="1"/>
-          <p:nvPr/>
-        </p:nvSpPr>
-        <p:spPr>
-          <a:xfrm>
-            <a:off x="4709160" y="1737360"/>
-            <a:ext cx="3977639" cy="685800"/>
-          </a:xfrm>
-          <a:prstGeom prst="rect">
-            <a:avLst/>
-          </a:prstGeom>
-          <a:noFill/>
-        </p:spPr>
-        <p:txBody>
-          <a:bodyPr wrap="square">
-            <a:spAutoFit/>
-          </a:bodyPr>
-          <a:lstStyle/>
-          <a:p>
-            <a:r>
-              <a:rPr sz="1100" b="1" i="0">
-                <a:solidFill>
-                  <a:srgbClr val="B03030"/>
-                </a:solidFill>
-                <a:latin typeface="Avenir Next LT Pro Demi"/>
-              </a:rPr>
-              <a:t>!  </a:t>
-            </a:r>
-            <a:r>
-              <a:rPr sz="1050" b="0" i="0">
-                <a:solidFill>
-                  <a:srgbClr val="0E2841"/>
-                </a:solidFill>
-                <a:latin typeface="Avenir Next LT Pro"/>
-              </a:rPr>
-              <a:t>Q1 FY2026: revenue −1.7% YoY and a net loss of −$13.7M</a:t>
-            </a:r>
-          </a:p>
-        </p:txBody>
-      </p:sp>
-      <p:sp>
-        <p:nvSpPr>
-          <p:cNvPr id="13" name="TextBox 12"/>
-          <p:cNvSpPr txBox="1"/>
-          <p:nvPr/>
-        </p:nvSpPr>
-        <p:spPr>
-          <a:xfrm>
-            <a:off x="4709160" y="2496312"/>
-            <a:ext cx="3977639" cy="685800"/>
-          </a:xfrm>
-          <a:prstGeom prst="rect">
-            <a:avLst/>
-          </a:prstGeom>
-          <a:noFill/>
-        </p:spPr>
-        <p:txBody>
-          <a:bodyPr wrap="square">
-            <a:spAutoFit/>
-          </a:bodyPr>
-          <a:lstStyle/>
-          <a:p>
-            <a:r>
-              <a:rPr sz="1100" b="1" i="0">
-                <a:solidFill>
-                  <a:srgbClr val="B03030"/>
-                </a:solidFill>
-                <a:latin typeface="Avenir Next LT Pro Demi"/>
-              </a:rPr>
-              <a:t>!  </a:t>
-            </a:r>
-            <a:r>
-              <a:rPr sz="1050" b="0" i="0">
-                <a:solidFill>
-                  <a:srgbClr val="0E2841"/>
-                </a:solidFill>
-                <a:latin typeface="Avenir Next LT Pro"/>
-              </a:rPr>
-              <a:t>~$225M/yr interest keeps coverage thin — Q1 interest &gt; operating income</a:t>
-            </a:r>
-          </a:p>
-        </p:txBody>
-      </p:sp>
-      <p:sp>
-        <p:nvSpPr>
-          <p:cNvPr id="14" name="TextBox 13"/>
-          <p:cNvSpPr txBox="1"/>
-          <p:nvPr/>
-        </p:nvSpPr>
-        <p:spPr>
-          <a:xfrm>
-            <a:off x="4709160" y="3255264"/>
-            <a:ext cx="3977639" cy="685800"/>
-          </a:xfrm>
-          <a:prstGeom prst="rect">
-            <a:avLst/>
-          </a:prstGeom>
-          <a:noFill/>
-        </p:spPr>
-        <p:txBody>
-          <a:bodyPr wrap="square">
-            <a:spAutoFit/>
-          </a:bodyPr>
-          <a:lstStyle/>
-          <a:p>
-            <a:r>
-              <a:rPr sz="1100" b="1" i="0">
-                <a:solidFill>
-                  <a:srgbClr val="B03030"/>
-                </a:solidFill>
-                <a:latin typeface="Avenir Next LT Pro Demi"/>
-              </a:rPr>
-              <a:t>!  </a:t>
-            </a:r>
-            <a:r>
-              <a:rPr sz="1050" b="0" i="0">
-                <a:solidFill>
-                  <a:srgbClr val="0E2841"/>
-                </a:solidFill>
-                <a:latin typeface="Avenir Next LT Pro"/>
-              </a:rPr>
-              <a:t>FY2025 FCF was flattered by a one-time inventory unwind (~$214M)</a:t>
+              <a:t>The double edge</a:t>
             </a:r>
           </a:p>
         </p:txBody>
@@ -8797,257 +9089,8 @@
         </p:nvSpPr>
         <p:spPr>
           <a:xfrm>
-            <a:off x="4709160" y="4014215"/>
-            <a:ext cx="3977639" cy="685800"/>
-          </a:xfrm>
-          <a:prstGeom prst="rect">
-            <a:avLst/>
-          </a:prstGeom>
-          <a:noFill/>
-        </p:spPr>
-        <p:txBody>
-          <a:bodyPr wrap="square">
-            <a:spAutoFit/>
-          </a:bodyPr>
-          <a:lstStyle/>
-          <a:p>
-            <a:r>
-              <a:rPr sz="1100" b="1" i="0">
-                <a:solidFill>
-                  <a:srgbClr val="B03030"/>
-                </a:solidFill>
-                <a:latin typeface="Avenir Next LT Pro Demi"/>
-              </a:rPr>
-              <a:t>!  </a:t>
-            </a:r>
-            <a:r>
-              <a:rPr sz="1050" b="0" i="0">
-                <a:solidFill>
-                  <a:srgbClr val="0E2841"/>
-                </a:solidFill>
-                <a:latin typeface="Avenir Next LT Pro"/>
-              </a:rPr>
-              <a:t>Full-year +9–12% guidance is entirely back-half loaded</a:t>
-            </a:r>
-          </a:p>
-        </p:txBody>
-      </p:sp>
-      <p:sp>
-        <p:nvSpPr>
-          <p:cNvPr id="16" name="TextBox 15"/>
-          <p:cNvSpPr txBox="1"/>
-          <p:nvPr/>
-        </p:nvSpPr>
-        <p:spPr>
-          <a:xfrm>
-            <a:off x="457200" y="5074920"/>
-            <a:ext cx="8229600" cy="548640"/>
-          </a:xfrm>
-          <a:prstGeom prst="rect">
-            <a:avLst/>
-          </a:prstGeom>
-          <a:noFill/>
-        </p:spPr>
-        <p:txBody>
-          <a:bodyPr wrap="square">
-            <a:spAutoFit/>
-          </a:bodyPr>
-          <a:lstStyle/>
-          <a:p>
-            <a:r>
-              <a:rPr sz="1150" b="1" i="0">
-                <a:solidFill>
-                  <a:srgbClr val="156082"/>
-                </a:solidFill>
-                <a:latin typeface="Avenir Next LT Pro Demi"/>
-              </a:rPr>
-              <a:t>Verdict: the turnaround is real but early and fragile — the next two quarters are the tell.</a:t>
-            </a:r>
-          </a:p>
-        </p:txBody>
-      </p:sp>
-      <p:sp>
-        <p:nvSpPr>
-          <p:cNvPr id="17" name="TextBox 16"/>
-          <p:cNvSpPr txBox="1"/>
-          <p:nvPr/>
-        </p:nvSpPr>
-        <p:spPr>
-          <a:xfrm>
-            <a:off x="457200" y="6355080"/>
-            <a:ext cx="8229600" cy="411480"/>
-          </a:xfrm>
-          <a:prstGeom prst="rect">
-            <a:avLst/>
-          </a:prstGeom>
-          <a:noFill/>
-        </p:spPr>
-        <p:txBody>
-          <a:bodyPr wrap="square">
-            <a:spAutoFit/>
-          </a:bodyPr>
-          <a:lstStyle/>
-          <a:p>
-            <a:r>
-              <a:rPr sz="750" b="0" i="1">
-                <a:solidFill>
-                  <a:srgbClr val="9A9A9A"/>
-                </a:solidFill>
-                <a:latin typeface="Avenir Next LT Pro"/>
-              </a:rPr>
-              <a:t>Source: RH FY2025 Form 10-K; RH Q1 FY2026 Form 10-Q (quarter ended May 2, 2026)</a:t>
-            </a:r>
-          </a:p>
-        </p:txBody>
-      </p:sp>
-    </p:spTree>
-  </p:cSld>
-  <p:clrMapOvr>
-    <a:masterClrMapping/>
-  </p:clrMapOvr>
-</p:sld>
-</file>
-
-<file path=ppt/slides/slide16.xml><?xml version="1.0" encoding="utf-8"?>
-<p:sld xmlns:a="http://schemas.openxmlformats.org/drawingml/2006/main" xmlns:p="http://schemas.openxmlformats.org/presentationml/2006/main" xmlns:r="http://schemas.openxmlformats.org/officeDocument/2006/relationships">
-  <p:cSld>
-    <p:spTree>
-      <p:nvGrpSpPr>
-        <p:cNvPr id="1" name=""/>
-        <p:cNvGrpSpPr/>
-        <p:nvPr/>
-      </p:nvGrpSpPr>
-      <p:grpSpPr/>
-      <p:sp>
-        <p:nvSpPr>
-          <p:cNvPr id="2" name="TextBox 1"/>
-          <p:cNvSpPr txBox="1"/>
-          <p:nvPr/>
-        </p:nvSpPr>
-        <p:spPr>
-          <a:xfrm>
-            <a:off x="457200" y="320040"/>
-            <a:ext cx="8229600" cy="548640"/>
-          </a:xfrm>
-          <a:prstGeom prst="rect">
-            <a:avLst/>
-          </a:prstGeom>
-          <a:noFill/>
-        </p:spPr>
-        <p:txBody>
-          <a:bodyPr wrap="square">
-            <a:spAutoFit/>
-          </a:bodyPr>
-          <a:lstStyle/>
-          <a:p>
-            <a:r>
-              <a:rPr sz="2200" b="0" i="0">
-                <a:solidFill>
-                  <a:srgbClr val="0E2841"/>
-                </a:solidFill>
-                <a:latin typeface="Avenir Next LT Pro Demi"/>
-              </a:rPr>
-              <a:t>The Operator — Gary Friedman</a:t>
-            </a:r>
-          </a:p>
-        </p:txBody>
-      </p:sp>
-      <p:sp>
-        <p:nvSpPr>
-          <p:cNvPr id="3" name="Rectangle 2"/>
-          <p:cNvSpPr/>
-          <p:nvPr/>
-        </p:nvSpPr>
-        <p:spPr>
-          <a:xfrm>
-            <a:off x="457200" y="914400"/>
-            <a:ext cx="8229600" cy="27432"/>
-          </a:xfrm>
-          <a:prstGeom prst="rect">
-            <a:avLst/>
-          </a:prstGeom>
-          <a:solidFill>
-            <a:srgbClr val="156082"/>
-          </a:solidFill>
-          <a:ln>
-            <a:noFill/>
-          </a:ln>
-        </p:spPr>
-        <p:style>
-          <a:lnRef idx="1">
-            <a:schemeClr val="accent1"/>
-          </a:lnRef>
-          <a:fillRef idx="3">
-            <a:schemeClr val="accent1"/>
-          </a:fillRef>
-          <a:effectRef idx="2">
-            <a:schemeClr val="accent1"/>
-          </a:effectRef>
-          <a:fontRef idx="minor">
-            <a:schemeClr val="lt1"/>
-          </a:fontRef>
-        </p:style>
-        <p:txBody>
-          <a:bodyPr rtlCol="0" anchor="ctr"/>
-          <a:lstStyle/>
-          <a:p>
-            <a:pPr algn="ctr"/>
-          </a:p>
-        </p:txBody>
-      </p:sp>
-      <p:sp>
-        <p:nvSpPr>
-          <p:cNvPr id="4" name="Rectangle 3"/>
-          <p:cNvSpPr/>
-          <p:nvPr/>
-        </p:nvSpPr>
-        <p:spPr>
-          <a:xfrm>
-            <a:off x="457200" y="1188720"/>
-            <a:ext cx="82296" cy="1078992"/>
-          </a:xfrm>
-          <a:prstGeom prst="rect">
-            <a:avLst/>
-          </a:prstGeom>
-          <a:solidFill>
-            <a:srgbClr val="0E2841"/>
-          </a:solidFill>
-          <a:ln>
-            <a:noFill/>
-          </a:ln>
-        </p:spPr>
-        <p:style>
-          <a:lnRef idx="1">
-            <a:schemeClr val="accent1"/>
-          </a:lnRef>
-          <a:fillRef idx="3">
-            <a:schemeClr val="accent1"/>
-          </a:fillRef>
-          <a:effectRef idx="2">
-            <a:schemeClr val="accent1"/>
-          </a:effectRef>
-          <a:fontRef idx="minor">
-            <a:schemeClr val="lt1"/>
-          </a:fontRef>
-        </p:style>
-        <p:txBody>
-          <a:bodyPr rtlCol="0" anchor="ctr"/>
-          <a:lstStyle/>
-          <a:p>
-            <a:pPr algn="ctr"/>
-          </a:p>
-        </p:txBody>
-      </p:sp>
-      <p:sp>
-        <p:nvSpPr>
-          <p:cNvPr id="5" name="TextBox 4"/>
-          <p:cNvSpPr txBox="1"/>
-          <p:nvPr/>
-        </p:nvSpPr>
-        <p:spPr>
-          <a:xfrm>
-            <a:off x="658368" y="1188720"/>
-            <a:ext cx="1874519" cy="1078992"/>
+            <a:off x="2697480" y="4800600"/>
+            <a:ext cx="5989320" cy="1051560"/>
           </a:xfrm>
           <a:prstGeom prst="rect">
             <a:avLst/>
@@ -9061,380 +9104,13 @@
           <a:lstStyle/>
           <a:p>
             <a:r>
-              <a:rPr sz="1250" b="1" i="0">
-                <a:solidFill>
-                  <a:srgbClr val="0E2841"/>
-                </a:solidFill>
-                <a:latin typeface="Avenir Next LT Pro Demi"/>
-              </a:rPr>
-              <a:t>Role</a:t>
-            </a:r>
-          </a:p>
-        </p:txBody>
-      </p:sp>
-      <p:sp>
-        <p:nvSpPr>
-          <p:cNvPr id="6" name="TextBox 5"/>
-          <p:cNvSpPr txBox="1"/>
-          <p:nvPr/>
-        </p:nvSpPr>
-        <p:spPr>
-          <a:xfrm>
-            <a:off x="2651760" y="1188720"/>
-            <a:ext cx="6035040" cy="1078992"/>
-          </a:xfrm>
-          <a:prstGeom prst="rect">
-            <a:avLst/>
-          </a:prstGeom>
-          <a:noFill/>
-        </p:spPr>
-        <p:txBody>
-          <a:bodyPr wrap="square" anchor="ctr">
-            <a:spAutoFit/>
-          </a:bodyPr>
-          <a:lstStyle/>
-          <a:p>
-            <a:r>
-              <a:rPr sz="1100" b="0" i="0">
-                <a:solidFill>
-                  <a:srgbClr val="0E2841"/>
+              <a:rPr sz="1200" b="0">
+                <a:solidFill>
+                  <a:srgbClr val="000000"/>
                 </a:solidFill>
                 <a:latin typeface="Avenir Next LT Pro"/>
               </a:rPr>
-              <a:t>Chairman &amp; CEO and the brand's singular creative force. The 10-K names him explicitly as a key-person dependency.</a:t>
-            </a:r>
-          </a:p>
-        </p:txBody>
-      </p:sp>
-      <p:sp>
-        <p:nvSpPr>
-          <p:cNvPr id="7" name="Rectangle 6"/>
-          <p:cNvSpPr/>
-          <p:nvPr/>
-        </p:nvSpPr>
-        <p:spPr>
-          <a:xfrm>
-            <a:off x="457200" y="2377439"/>
-            <a:ext cx="82296" cy="1078992"/>
-          </a:xfrm>
-          <a:prstGeom prst="rect">
-            <a:avLst/>
-          </a:prstGeom>
-          <a:solidFill>
-            <a:srgbClr val="156082"/>
-          </a:solidFill>
-          <a:ln>
-            <a:noFill/>
-          </a:ln>
-        </p:spPr>
-        <p:style>
-          <a:lnRef idx="1">
-            <a:schemeClr val="accent1"/>
-          </a:lnRef>
-          <a:fillRef idx="3">
-            <a:schemeClr val="accent1"/>
-          </a:fillRef>
-          <a:effectRef idx="2">
-            <a:schemeClr val="accent1"/>
-          </a:effectRef>
-          <a:fontRef idx="minor">
-            <a:schemeClr val="lt1"/>
-          </a:fontRef>
-        </p:style>
-        <p:txBody>
-          <a:bodyPr rtlCol="0" anchor="ctr"/>
-          <a:lstStyle/>
-          <a:p>
-            <a:pPr algn="ctr"/>
-          </a:p>
-        </p:txBody>
-      </p:sp>
-      <p:sp>
-        <p:nvSpPr>
-          <p:cNvPr id="8" name="TextBox 7"/>
-          <p:cNvSpPr txBox="1"/>
-          <p:nvPr/>
-        </p:nvSpPr>
-        <p:spPr>
-          <a:xfrm>
-            <a:off x="658368" y="2377439"/>
-            <a:ext cx="1874519" cy="1078992"/>
-          </a:xfrm>
-          <a:prstGeom prst="rect">
-            <a:avLst/>
-          </a:prstGeom>
-          <a:noFill/>
-        </p:spPr>
-        <p:txBody>
-          <a:bodyPr wrap="square" anchor="ctr">
-            <a:spAutoFit/>
-          </a:bodyPr>
-          <a:lstStyle/>
-          <a:p>
-            <a:r>
-              <a:rPr sz="1250" b="1" i="0">
-                <a:solidFill>
-                  <a:srgbClr val="156082"/>
-                </a:solidFill>
-                <a:latin typeface="Avenir Next LT Pro Demi"/>
-              </a:rPr>
-              <a:t>Track record</a:t>
-            </a:r>
-          </a:p>
-        </p:txBody>
-      </p:sp>
-      <p:sp>
-        <p:nvSpPr>
-          <p:cNvPr id="9" name="TextBox 8"/>
-          <p:cNvSpPr txBox="1"/>
-          <p:nvPr/>
-        </p:nvSpPr>
-        <p:spPr>
-          <a:xfrm>
-            <a:off x="2651760" y="2377439"/>
-            <a:ext cx="6035040" cy="1078992"/>
-          </a:xfrm>
-          <a:prstGeom prst="rect">
-            <a:avLst/>
-          </a:prstGeom>
-          <a:noFill/>
-        </p:spPr>
-        <p:txBody>
-          <a:bodyPr wrap="square" anchor="ctr">
-            <a:spAutoFit/>
-          </a:bodyPr>
-          <a:lstStyle/>
-          <a:p>
-            <a:r>
-              <a:rPr sz="1100" b="0" i="0">
-                <a:solidFill>
-                  <a:srgbClr val="0E2841"/>
-                </a:solidFill>
-                <a:latin typeface="Avenir Next LT Pro"/>
-              </a:rPr>
-              <a:t>Transformed Pottery Barn from a ~$50M business into $1B+ at Williams-Sonoma; joined RH in 2001 when it was a ~$350M mall retailer near bankruptcy and rebuilt it into a luxury brand.</a:t>
-            </a:r>
-          </a:p>
-        </p:txBody>
-      </p:sp>
-      <p:sp>
-        <p:nvSpPr>
-          <p:cNvPr id="10" name="Rectangle 9"/>
-          <p:cNvSpPr/>
-          <p:nvPr/>
-        </p:nvSpPr>
-        <p:spPr>
-          <a:xfrm>
-            <a:off x="457200" y="3566159"/>
-            <a:ext cx="82296" cy="1078992"/>
-          </a:xfrm>
-          <a:prstGeom prst="rect">
-            <a:avLst/>
-          </a:prstGeom>
-          <a:solidFill>
-            <a:srgbClr val="196B24"/>
-          </a:solidFill>
-          <a:ln>
-            <a:noFill/>
-          </a:ln>
-        </p:spPr>
-        <p:style>
-          <a:lnRef idx="1">
-            <a:schemeClr val="accent1"/>
-          </a:lnRef>
-          <a:fillRef idx="3">
-            <a:schemeClr val="accent1"/>
-          </a:fillRef>
-          <a:effectRef idx="2">
-            <a:schemeClr val="accent1"/>
-          </a:effectRef>
-          <a:fontRef idx="minor">
-            <a:schemeClr val="lt1"/>
-          </a:fontRef>
-        </p:style>
-        <p:txBody>
-          <a:bodyPr rtlCol="0" anchor="ctr"/>
-          <a:lstStyle/>
-          <a:p>
-            <a:pPr algn="ctr"/>
-          </a:p>
-        </p:txBody>
-      </p:sp>
-      <p:sp>
-        <p:nvSpPr>
-          <p:cNvPr id="11" name="TextBox 10"/>
-          <p:cNvSpPr txBox="1"/>
-          <p:nvPr/>
-        </p:nvSpPr>
-        <p:spPr>
-          <a:xfrm>
-            <a:off x="658368" y="3566159"/>
-            <a:ext cx="1874519" cy="1078992"/>
-          </a:xfrm>
-          <a:prstGeom prst="rect">
-            <a:avLst/>
-          </a:prstGeom>
-          <a:noFill/>
-        </p:spPr>
-        <p:txBody>
-          <a:bodyPr wrap="square" anchor="ctr">
-            <a:spAutoFit/>
-          </a:bodyPr>
-          <a:lstStyle/>
-          <a:p>
-            <a:r>
-              <a:rPr sz="1250" b="1" i="0">
-                <a:solidFill>
-                  <a:srgbClr val="196B24"/>
-                </a:solidFill>
-                <a:latin typeface="Avenir Next LT Pro Demi"/>
-              </a:rPr>
-              <a:t>Skin in the game</a:t>
-            </a:r>
-          </a:p>
-        </p:txBody>
-      </p:sp>
-      <p:sp>
-        <p:nvSpPr>
-          <p:cNvPr id="12" name="TextBox 11"/>
-          <p:cNvSpPr txBox="1"/>
-          <p:nvPr/>
-        </p:nvSpPr>
-        <p:spPr>
-          <a:xfrm>
-            <a:off x="2651760" y="3566159"/>
-            <a:ext cx="6035040" cy="1078992"/>
-          </a:xfrm>
-          <a:prstGeom prst="rect">
-            <a:avLst/>
-          </a:prstGeom>
-          <a:noFill/>
-        </p:spPr>
-        <p:txBody>
-          <a:bodyPr wrap="square" anchor="ctr">
-            <a:spAutoFit/>
-          </a:bodyPr>
-          <a:lstStyle/>
-          <a:p>
-            <a:r>
-              <a:rPr sz="1100" b="0" i="0">
-                <a:solidFill>
-                  <a:srgbClr val="0E2841"/>
-                </a:solidFill>
-                <a:latin typeface="Avenir Next LT Pro"/>
-              </a:rPr>
-              <a:t>Owns ~25% of RH (~5.05M shares); bought ~$10M more in the open market at ~$216/share in June 2024 — a genuine alignment signal.</a:t>
-            </a:r>
-          </a:p>
-        </p:txBody>
-      </p:sp>
-      <p:sp>
-        <p:nvSpPr>
-          <p:cNvPr id="13" name="Rectangle 12"/>
-          <p:cNvSpPr/>
-          <p:nvPr/>
-        </p:nvSpPr>
-        <p:spPr>
-          <a:xfrm>
-            <a:off x="457200" y="4754879"/>
-            <a:ext cx="82296" cy="1078992"/>
-          </a:xfrm>
-          <a:prstGeom prst="rect">
-            <a:avLst/>
-          </a:prstGeom>
-          <a:solidFill>
-            <a:srgbClr val="E97132"/>
-          </a:solidFill>
-          <a:ln>
-            <a:noFill/>
-          </a:ln>
-        </p:spPr>
-        <p:style>
-          <a:lnRef idx="1">
-            <a:schemeClr val="accent1"/>
-          </a:lnRef>
-          <a:fillRef idx="3">
-            <a:schemeClr val="accent1"/>
-          </a:fillRef>
-          <a:effectRef idx="2">
-            <a:schemeClr val="accent1"/>
-          </a:effectRef>
-          <a:fontRef idx="minor">
-            <a:schemeClr val="lt1"/>
-          </a:fontRef>
-        </p:style>
-        <p:txBody>
-          <a:bodyPr rtlCol="0" anchor="ctr"/>
-          <a:lstStyle/>
-          <a:p>
-            <a:pPr algn="ctr"/>
-          </a:p>
-        </p:txBody>
-      </p:sp>
-      <p:sp>
-        <p:nvSpPr>
-          <p:cNvPr id="14" name="TextBox 13"/>
-          <p:cNvSpPr txBox="1"/>
-          <p:nvPr/>
-        </p:nvSpPr>
-        <p:spPr>
-          <a:xfrm>
-            <a:off x="658368" y="4754879"/>
-            <a:ext cx="1874519" cy="1078992"/>
-          </a:xfrm>
-          <a:prstGeom prst="rect">
-            <a:avLst/>
-          </a:prstGeom>
-          <a:noFill/>
-        </p:spPr>
-        <p:txBody>
-          <a:bodyPr wrap="square" anchor="ctr">
-            <a:spAutoFit/>
-          </a:bodyPr>
-          <a:lstStyle/>
-          <a:p>
-            <a:r>
-              <a:rPr sz="1250" b="1" i="0">
-                <a:solidFill>
-                  <a:srgbClr val="E97132"/>
-                </a:solidFill>
-                <a:latin typeface="Avenir Next LT Pro Demi"/>
-              </a:rPr>
-              <a:t>The double edge</a:t>
-            </a:r>
-          </a:p>
-        </p:txBody>
-      </p:sp>
-      <p:sp>
-        <p:nvSpPr>
-          <p:cNvPr id="15" name="TextBox 14"/>
-          <p:cNvSpPr txBox="1"/>
-          <p:nvPr/>
-        </p:nvSpPr>
-        <p:spPr>
-          <a:xfrm>
-            <a:off x="2651760" y="4754879"/>
-            <a:ext cx="6035040" cy="1078992"/>
-          </a:xfrm>
-          <a:prstGeom prst="rect">
-            <a:avLst/>
-          </a:prstGeom>
-          <a:noFill/>
-        </p:spPr>
-        <p:txBody>
-          <a:bodyPr wrap="square" anchor="ctr">
-            <a:spAutoFit/>
-          </a:bodyPr>
-          <a:lstStyle/>
-          <a:p>
-            <a:r>
-              <a:rPr sz="1100" b="0" i="0">
-                <a:solidFill>
-                  <a:srgbClr val="0E2841"/>
-                </a:solidFill>
-                <a:latin typeface="Avenir Next LT Pro"/>
-              </a:rPr>
-              <a:t>A bold, contrarian capital allocator — the same conviction behind the (now underwater) buybacks also drives the Estates bet. High reward, high key-man risk; no obvious successor.</a:t>
+              <a:t>Bold allocator — same conviction drove the buybacks and Estates.</a:t>
             </a:r>
           </a:p>
         </p:txBody>
@@ -9448,7 +9124,7 @@
         <p:spPr>
           <a:xfrm>
             <a:off x="457200" y="6355080"/>
-            <a:ext cx="8229600" cy="411480"/>
+            <a:ext cx="8229600" cy="365760"/>
           </a:xfrm>
           <a:prstGeom prst="rect">
             <a:avLst/>
@@ -9456,7 +9132,7 @@
           <a:noFill/>
         </p:spPr>
         <p:txBody>
-          <a:bodyPr wrap="square">
+          <a:bodyPr wrap="none">
             <a:spAutoFit/>
           </a:bodyPr>
           <a:lstStyle/>
@@ -9464,11 +9140,11 @@
             <a:r>
               <a:rPr sz="750" b="0" i="1">
                 <a:solidFill>
-                  <a:srgbClr val="9A9A9A"/>
+                  <a:srgbClr val="707070"/>
                 </a:solidFill>
                 <a:latin typeface="Avenir Next LT Pro"/>
               </a:rPr>
-              <a:t>Source: RH FY2025 Form 10-K; RH IR press release &amp; SEC Form 4 (Jun 26, 2024); Williams-Sonoma/RH company bios</a:t>
+              <a:t>Source: RH FY2025 10-K; RH IR &amp; SEC Form 4 (Jun 26, 2024); company bios</a:t>
             </a:r>
           </a:p>
         </p:txBody>
@@ -10942,13 +10618,13 @@
               <a:rPr lang="en-US" sz="1050" b="0" dirty="0">
                 <a:latin typeface="Avenir Next LT Pro"/>
               </a:rPr>
-              <a:t>Bought </a:t>
+              <a:t>Owns ~25%; </a:t>
             </a:r>
             <a:r>
               <a:rPr sz="1050" b="0" dirty="0">
                 <a:latin typeface="Avenir Next LT Pro"/>
               </a:rPr>
-              <a:t>his own stock at $134–172 </a:t>
+              <a:t>bought ~$10M more at ~$216 (Jun 2024)</a:t>
             </a:r>
             <a:endParaRPr lang="en-US" sz="1050" b="0" dirty="0">
               <a:latin typeface="Avenir Next LT Pro"/>
@@ -11469,40 +11145,6 @@
       </p:sp>
       <p:sp>
         <p:nvSpPr>
-          <p:cNvPr id="4" name="TextBox 3"/>
-          <p:cNvSpPr txBox="1"/>
-          <p:nvPr/>
-        </p:nvSpPr>
-        <p:spPr>
-          <a:xfrm>
-            <a:off x="457200" y="6419088"/>
-            <a:ext cx="8229600" cy="365760"/>
-          </a:xfrm>
-          <a:prstGeom prst="rect">
-            <a:avLst/>
-          </a:prstGeom>
-          <a:noFill/>
-        </p:spPr>
-        <p:txBody>
-          <a:bodyPr wrap="none">
-            <a:spAutoFit/>
-          </a:bodyPr>
-          <a:lstStyle/>
-          <a:p>
-            <a:r>
-              <a:rPr sz="700" b="0" i="0">
-                <a:solidFill>
-                  <a:srgbClr val="5A5A5A"/>
-                </a:solidFill>
-                <a:latin typeface="Avenir Next LT Pro"/>
-              </a:rPr>
-              <a:t>Confidential — for discussion purposes only. Not investment advice.</a:t>
-            </a:r>
-          </a:p>
-        </p:txBody>
-      </p:sp>
-      <p:sp>
-        <p:nvSpPr>
           <p:cNvPr id="5" name="TextBox 4"/>
           <p:cNvSpPr txBox="1"/>
           <p:nvPr/>
@@ -11544,7 +11186,7 @@
           <p:nvPr>
             <p:extLst>
               <p:ext uri="{D42A27DB-BD31-4B8C-83A1-F6EECF244321}">
-                <p14:modId xmlns:p14="http://schemas.microsoft.com/office/powerpoint/2010/main" val="3351348738"/>
+                <p14:modId xmlns:p14="http://schemas.microsoft.com/office/powerpoint/2010/main" val="4094982956"/>
               </p:ext>
             </p:extLst>
           </p:nvPr>
@@ -11924,13 +11566,31 @@
                     <a:p>
                       <a:pPr algn="ctr"/>
                       <a:r>
-                        <a:rPr sz="1100" b="0" i="0">
+                        <a:rPr sz="1100" b="0" i="0" dirty="0">
                           <a:solidFill>
                             <a:schemeClr val="tx1"/>
                           </a:solidFill>
                           <a:latin typeface="Avenir Next LT Pro"/>
                         </a:rPr>
-                        <a:t>-17.8%</a:t>
+                        <a:t>-1</a:t>
+                      </a:r>
+                      <a:r>
+                        <a:rPr lang="en-US" sz="1100" b="0" i="0" dirty="0">
+                          <a:solidFill>
+                            <a:schemeClr val="tx1"/>
+                          </a:solidFill>
+                          <a:latin typeface="Avenir Next LT Pro"/>
+                        </a:rPr>
+                        <a:t>5.6</a:t>
+                      </a:r>
+                      <a:r>
+                        <a:rPr sz="1100" b="0" i="0" dirty="0">
+                          <a:solidFill>
+                            <a:schemeClr val="tx1"/>
+                          </a:solidFill>
+                          <a:latin typeface="Avenir Next LT Pro"/>
+                        </a:rPr>
+                        <a:t>%</a:t>
                       </a:r>
                     </a:p>
                   </a:txBody>
@@ -12920,8 +12580,8 @@
         </p:nvSpPr>
         <p:spPr>
           <a:xfrm>
-            <a:off x="457200" y="5120640"/>
-            <a:ext cx="8229600" cy="274320"/>
+            <a:off x="218660" y="5041127"/>
+            <a:ext cx="8653669" cy="400110"/>
           </a:xfrm>
           <a:prstGeom prst="rect">
             <a:avLst/>
@@ -12929,7 +12589,7 @@
           <a:noFill/>
         </p:spPr>
         <p:txBody>
-          <a:bodyPr wrap="none">
+          <a:bodyPr wrap="square">
             <a:spAutoFit/>
           </a:bodyPr>
           <a:lstStyle/>
@@ -13442,7 +13102,13 @@
           <p:cNvGraphicFramePr>
             <a:graphicFrameLocks noGrp="1"/>
           </p:cNvGraphicFramePr>
-          <p:nvPr/>
+          <p:nvPr>
+            <p:extLst>
+              <p:ext uri="{D42A27DB-BD31-4B8C-83A1-F6EECF244321}">
+                <p14:modId xmlns:p14="http://schemas.microsoft.com/office/powerpoint/2010/main" val="3973473890"/>
+              </p:ext>
+            </p:extLst>
+          </p:nvPr>
         </p:nvGraphicFramePr>
         <p:xfrm>
           <a:off x="457200" y="2880360"/>
@@ -13506,7 +13172,7 @@
                     <a:p>
                       <a:pPr algn="l"/>
                       <a:r>
-                        <a:rPr sz="1000" b="1" i="0">
+                        <a:rPr sz="1000" b="1" i="0" dirty="0">
                           <a:solidFill>
                             <a:srgbClr val="FFFFFF"/>
                           </a:solidFill>
@@ -13518,7 +13184,7 @@
                   </a:txBody>
                   <a:tcPr marL="73152" marR="73152" marT="18288" marB="18288" anchor="ctr">
                     <a:solidFill>
-                      <a:srgbClr val="0E2841"/>
+                      <a:srgbClr val="AF8C49"/>
                     </a:solidFill>
                   </a:tcPr>
                 </a:tc>
@@ -13529,7 +13195,7 @@
                     <a:p>
                       <a:pPr algn="ctr"/>
                       <a:r>
-                        <a:rPr sz="1000" b="1" i="0">
+                        <a:rPr sz="1000" b="1" i="0" dirty="0">
                           <a:solidFill>
                             <a:srgbClr val="FFFFFF"/>
                           </a:solidFill>
@@ -13541,7 +13207,7 @@
                   </a:txBody>
                   <a:tcPr marL="73152" marR="73152" marT="18288" marB="18288" anchor="ctr">
                     <a:solidFill>
-                      <a:srgbClr val="0E2841"/>
+                      <a:srgbClr val="AF8C49"/>
                     </a:solidFill>
                   </a:tcPr>
                 </a:tc>
@@ -13552,19 +13218,34 @@
                     <a:p>
                       <a:pPr algn="ctr"/>
                       <a:r>
-                        <a:rPr sz="1000" b="1" i="0">
+                        <a:rPr sz="1000" b="1" i="0" dirty="0">
                           <a:solidFill>
                             <a:srgbClr val="FFFFFF"/>
                           </a:solidFill>
                           <a:latin typeface="Avenir Next LT Pro Demi"/>
                         </a:rPr>
-                        <a:t>EBITDA Mgn</a:t>
+                        <a:t>EBITDA </a:t>
                       </a:r>
+                      <a:r>
+                        <a:rPr sz="1000" b="1" i="0" dirty="0" err="1">
+                          <a:solidFill>
+                            <a:srgbClr val="FFFFFF"/>
+                          </a:solidFill>
+                          <a:latin typeface="Avenir Next LT Pro Demi"/>
+                        </a:rPr>
+                        <a:t>Mgn</a:t>
+                      </a:r>
+                      <a:endParaRPr sz="1000" b="1" i="0" dirty="0">
+                        <a:solidFill>
+                          <a:srgbClr val="FFFFFF"/>
+                        </a:solidFill>
+                        <a:latin typeface="Avenir Next LT Pro Demi"/>
+                      </a:endParaRPr>
                     </a:p>
                   </a:txBody>
                   <a:tcPr marL="73152" marR="73152" marT="18288" marB="18288" anchor="ctr">
                     <a:solidFill>
-                      <a:srgbClr val="0E2841"/>
+                      <a:srgbClr val="AF8C49"/>
                     </a:solidFill>
                   </a:tcPr>
                 </a:tc>
@@ -13575,7 +13256,7 @@
                     <a:p>
                       <a:pPr algn="ctr"/>
                       <a:r>
-                        <a:rPr sz="1000" b="1" i="0">
+                        <a:rPr sz="1000" b="1" i="0" dirty="0">
                           <a:solidFill>
                             <a:srgbClr val="FFFFFF"/>
                           </a:solidFill>
@@ -13587,7 +13268,7 @@
                   </a:txBody>
                   <a:tcPr marL="73152" marR="73152" marT="18288" marB="18288" anchor="ctr">
                     <a:solidFill>
-                      <a:srgbClr val="0E2841"/>
+                      <a:srgbClr val="AF8C49"/>
                     </a:solidFill>
                   </a:tcPr>
                 </a:tc>
@@ -13598,7 +13279,7 @@
                     <a:p>
                       <a:pPr algn="ctr"/>
                       <a:r>
-                        <a:rPr sz="1000" b="1" i="0">
+                        <a:rPr sz="1000" b="1" i="0" dirty="0">
                           <a:solidFill>
                             <a:srgbClr val="FFFFFF"/>
                           </a:solidFill>
@@ -13610,7 +13291,7 @@
                   </a:txBody>
                   <a:tcPr marL="73152" marR="73152" marT="18288" marB="18288" anchor="ctr">
                     <a:solidFill>
-                      <a:srgbClr val="0E2841"/>
+                      <a:srgbClr val="AF8C49"/>
                     </a:solidFill>
                   </a:tcPr>
                 </a:tc>
@@ -13621,7 +13302,7 @@
                     <a:p>
                       <a:pPr algn="ctr"/>
                       <a:r>
-                        <a:rPr sz="1000" b="1" i="0">
+                        <a:rPr sz="1000" b="1" i="0" dirty="0">
                           <a:solidFill>
                             <a:srgbClr val="FFFFFF"/>
                           </a:solidFill>
@@ -13633,7 +13314,7 @@
                   </a:txBody>
                   <a:tcPr marL="73152" marR="73152" marT="18288" marB="18288" anchor="ctr">
                     <a:solidFill>
-                      <a:srgbClr val="0E2841"/>
+                      <a:srgbClr val="AF8C49"/>
                     </a:solidFill>
                   </a:tcPr>
                 </a:tc>
@@ -13651,9 +13332,9 @@
                     <a:p>
                       <a:pPr algn="l"/>
                       <a:r>
-                        <a:rPr sz="1100" b="1" i="0">
+                        <a:rPr sz="1100" b="1" i="0" dirty="0">
                           <a:solidFill>
-                            <a:srgbClr val="0E2841"/>
+                            <a:schemeClr val="tx1"/>
                           </a:solidFill>
                           <a:latin typeface="Avenir Next LT Pro Demi"/>
                         </a:rPr>
@@ -13674,9 +13355,9 @@
                     <a:p>
                       <a:pPr algn="ctr"/>
                       <a:r>
-                        <a:rPr sz="1100" b="0" i="0">
+                        <a:rPr sz="1100" b="0" i="0" dirty="0">
                           <a:solidFill>
-                            <a:srgbClr val="5A5A5A"/>
+                            <a:schemeClr val="tx1"/>
                           </a:solidFill>
                           <a:latin typeface="Avenir Next LT Pro"/>
                         </a:rPr>
@@ -13699,7 +13380,7 @@
                       <a:r>
                         <a:rPr sz="1100" b="0" i="0">
                           <a:solidFill>
-                            <a:srgbClr val="5A5A5A"/>
+                            <a:schemeClr val="tx1"/>
                           </a:solidFill>
                           <a:latin typeface="Avenir Next LT Pro"/>
                         </a:rPr>
@@ -13722,7 +13403,7 @@
                       <a:r>
                         <a:rPr sz="1100" b="0" i="0">
                           <a:solidFill>
-                            <a:srgbClr val="5A5A5A"/>
+                            <a:schemeClr val="tx1"/>
                           </a:solidFill>
                           <a:latin typeface="Avenir Next LT Pro"/>
                         </a:rPr>
@@ -13745,7 +13426,7 @@
                       <a:r>
                         <a:rPr sz="1100" b="0" i="0">
                           <a:solidFill>
-                            <a:srgbClr val="5A5A5A"/>
+                            <a:schemeClr val="tx1"/>
                           </a:solidFill>
                           <a:latin typeface="Avenir Next LT Pro"/>
                         </a:rPr>
@@ -13768,7 +13449,7 @@
                       <a:r>
                         <a:rPr sz="1100" b="0" i="0">
                           <a:solidFill>
-                            <a:srgbClr val="5A5A5A"/>
+                            <a:schemeClr val="tx1"/>
                           </a:solidFill>
                           <a:latin typeface="Avenir Next LT Pro"/>
                         </a:rPr>
@@ -13798,7 +13479,7 @@
                       <a:r>
                         <a:rPr sz="1100" b="1" i="0">
                           <a:solidFill>
-                            <a:srgbClr val="0E2841"/>
+                            <a:schemeClr val="tx1"/>
                           </a:solidFill>
                           <a:latin typeface="Avenir Next LT Pro Demi"/>
                         </a:rPr>
@@ -13819,9 +13500,9 @@
                     <a:p>
                       <a:pPr algn="ctr"/>
                       <a:r>
-                        <a:rPr sz="1100" b="0" i="0">
+                        <a:rPr sz="1100" b="0" i="0" dirty="0">
                           <a:solidFill>
-                            <a:srgbClr val="5A5A5A"/>
+                            <a:schemeClr val="tx1"/>
                           </a:solidFill>
                           <a:latin typeface="Avenir Next LT Pro"/>
                         </a:rPr>
@@ -13842,9 +13523,9 @@
                     <a:p>
                       <a:pPr algn="ctr"/>
                       <a:r>
-                        <a:rPr sz="1100" b="0" i="0">
+                        <a:rPr sz="1100" b="0" i="0" dirty="0">
                           <a:solidFill>
-                            <a:srgbClr val="5A5A5A"/>
+                            <a:schemeClr val="tx1"/>
                           </a:solidFill>
                           <a:latin typeface="Avenir Next LT Pro"/>
                         </a:rPr>
@@ -13865,9 +13546,9 @@
                     <a:p>
                       <a:pPr algn="ctr"/>
                       <a:r>
-                        <a:rPr sz="1100" b="0" i="0">
+                        <a:rPr sz="1100" b="0" i="0" dirty="0">
                           <a:solidFill>
-                            <a:srgbClr val="5A5A5A"/>
+                            <a:schemeClr val="tx1"/>
                           </a:solidFill>
                           <a:latin typeface="Avenir Next LT Pro"/>
                         </a:rPr>
@@ -13888,9 +13569,9 @@
                     <a:p>
                       <a:pPr algn="ctr"/>
                       <a:r>
-                        <a:rPr sz="1100" b="0" i="0">
+                        <a:rPr sz="1100" b="0" i="0" dirty="0">
                           <a:solidFill>
-                            <a:srgbClr val="5A5A5A"/>
+                            <a:schemeClr val="tx1"/>
                           </a:solidFill>
                           <a:latin typeface="Avenir Next LT Pro"/>
                         </a:rPr>
@@ -13913,7 +13594,7 @@
                       <a:r>
                         <a:rPr sz="1100" b="0" i="0">
                           <a:solidFill>
-                            <a:srgbClr val="5A5A5A"/>
+                            <a:schemeClr val="tx1"/>
                           </a:solidFill>
                           <a:latin typeface="Avenir Next LT Pro"/>
                         </a:rPr>
@@ -13943,7 +13624,7 @@
                       <a:r>
                         <a:rPr sz="1100" b="1" i="0">
                           <a:solidFill>
-                            <a:srgbClr val="0E2841"/>
+                            <a:schemeClr val="tx1"/>
                           </a:solidFill>
                           <a:latin typeface="Avenir Next LT Pro Demi"/>
                         </a:rPr>
@@ -13966,7 +13647,7 @@
                       <a:r>
                         <a:rPr sz="1100" b="0" i="0">
                           <a:solidFill>
-                            <a:srgbClr val="5A5A5A"/>
+                            <a:schemeClr val="tx1"/>
                           </a:solidFill>
                           <a:latin typeface="Avenir Next LT Pro"/>
                         </a:rPr>
@@ -13989,7 +13670,7 @@
                       <a:r>
                         <a:rPr sz="1100" b="0" i="0">
                           <a:solidFill>
-                            <a:srgbClr val="5A5A5A"/>
+                            <a:schemeClr val="tx1"/>
                           </a:solidFill>
                           <a:latin typeface="Avenir Next LT Pro"/>
                         </a:rPr>
@@ -14012,7 +13693,7 @@
                       <a:r>
                         <a:rPr sz="1100" b="0" i="0">
                           <a:solidFill>
-                            <a:srgbClr val="5A5A5A"/>
+                            <a:schemeClr val="tx1"/>
                           </a:solidFill>
                           <a:latin typeface="Avenir Next LT Pro"/>
                         </a:rPr>
@@ -14035,7 +13716,7 @@
                       <a:r>
                         <a:rPr sz="1100" b="0" i="0">
                           <a:solidFill>
-                            <a:srgbClr val="5A5A5A"/>
+                            <a:schemeClr val="tx1"/>
                           </a:solidFill>
                           <a:latin typeface="Avenir Next LT Pro"/>
                         </a:rPr>
@@ -14056,9 +13737,9 @@
                     <a:p>
                       <a:pPr algn="ctr"/>
                       <a:r>
-                        <a:rPr sz="1100" b="0" i="0">
+                        <a:rPr sz="1100" b="0" i="0" dirty="0">
                           <a:solidFill>
-                            <a:srgbClr val="5A5A5A"/>
+                            <a:schemeClr val="tx1"/>
                           </a:solidFill>
                           <a:latin typeface="Avenir Next LT Pro"/>
                         </a:rPr>
@@ -14410,7 +14091,7 @@
                           </a:solidFill>
                           <a:latin typeface="Avenir Next LT Pro Demi"/>
                         </a:rPr>
-                        <a:t>Est. EPS (fwd)</a:t>
+                        <a:t>Adj. EPS</a:t>
                       </a:r>
                     </a:p>
                   </a:txBody>
@@ -14578,7 +14259,7 @@
                           </a:solidFill>
                           <a:latin typeface="Avenir Next LT Pro"/>
                         </a:rPr>
-                        <a:t>~$22–35</a:t>
+                        <a:t>~$18–26</a:t>
                       </a:r>
                     </a:p>
                   </a:txBody>
@@ -14601,7 +14282,7 @@
                           </a:solidFill>
                           <a:latin typeface="Avenir Next LT Pro"/>
                         </a:rPr>
-                        <a:t>~5–7×</a:t>
+                        <a:t>6–8×</a:t>
                       </a:r>
                     </a:p>
                   </a:txBody>
@@ -14746,7 +14427,7 @@
                           </a:solidFill>
                           <a:latin typeface="Avenir Next LT Pro"/>
                         </a:rPr>
-                        <a:t>~$11–19</a:t>
+                        <a:t>~$10–14</a:t>
                       </a:r>
                     </a:p>
                   </a:txBody>
@@ -14769,7 +14450,7 @@
                           </a:solidFill>
                           <a:latin typeface="Avenir Next LT Pro"/>
                         </a:rPr>
-                        <a:t>~9–15×</a:t>
+                        <a:t>11–15×</a:t>
                       </a:r>
                     </a:p>
                   </a:txBody>
@@ -14914,7 +14595,7 @@
                           </a:solidFill>
                           <a:latin typeface="Avenir Next LT Pro"/>
                         </a:rPr>
-                        <a:t>~$3–6</a:t>
+                        <a:t>~$4–6</a:t>
                       </a:r>
                     </a:p>
                   </a:txBody>
@@ -14937,7 +14618,7 @@
                           </a:solidFill>
                           <a:latin typeface="Avenir Next LT Pro"/>
                         </a:rPr>
-                        <a:t>~25–55×</a:t>
+                        <a:t>25–37×</a:t>
                       </a:r>
                     </a:p>
                   </a:txBody>
@@ -14995,40 +14676,6 @@
                 <a:latin typeface="Avenir Next LT Pro"/>
               </a:rPr>
               <a:t>Base case assumes NO recovery — a rate-driven turn is upside, not a requirement</a:t>
-            </a:r>
-          </a:p>
-        </p:txBody>
-      </p:sp>
-      <p:sp>
-        <p:nvSpPr>
-          <p:cNvPr id="8" name="TextBox 7"/>
-          <p:cNvSpPr txBox="1"/>
-          <p:nvPr/>
-        </p:nvSpPr>
-        <p:spPr>
-          <a:xfrm>
-            <a:off x="457200" y="5989320"/>
-            <a:ext cx="8229600" cy="365760"/>
-          </a:xfrm>
-          <a:prstGeom prst="rect">
-            <a:avLst/>
-          </a:prstGeom>
-          <a:noFill/>
-        </p:spPr>
-        <p:txBody>
-          <a:bodyPr wrap="square">
-            <a:spAutoFit/>
-          </a:bodyPr>
-          <a:lstStyle/>
-          <a:p>
-            <a:r>
-              <a:rPr sz="800" i="1">
-                <a:solidFill>
-                  <a:srgbClr val="8A8A8A"/>
-                </a:solidFill>
-                <a:latin typeface="Avenir Next LT Pro"/>
-              </a:rPr>
-              <a:t>EPS ≈ (EBITDA − ~$150M D&amp;A − ~$215M interest) × (1 − 25% tax) ÷ ~19M shares. Illustrative scenario mapping, not a forecast.</a:t>
             </a:r>
           </a:p>
         </p:txBody>
@@ -15844,26 +15491,6 @@
 </file>
 
 <file path=customXml/item1.xml><?xml version="1.0" encoding="utf-8"?>
-<?mso-contentType ?>
-<FormTemplates xmlns="http://schemas.microsoft.com/sharepoint/v3/contenttype/forms">
-  <Display>DocumentLibraryForm</Display>
-  <Edit>DocumentLibraryForm</Edit>
-  <New>DocumentLibraryForm</New>
-</FormTemplates>
-</file>
-
-<file path=customXml/item2.xml><?xml version="1.0" encoding="utf-8"?>
-<p:properties xmlns:p="http://schemas.microsoft.com/office/2006/metadata/properties" xmlns:pc="http://schemas.microsoft.com/office/infopath/2007/PartnerControls" xmlns:xsi="http://www.w3.org/2001/XMLSchema-instance">
-  <documentManagement>
-    <lcf76f155ced4ddcb4097134ff3c332f xmlns="97990345-9152-4417-8f04-d1350c114d86">
-      <Terms xmlns="http://schemas.microsoft.com/office/infopath/2007/PartnerControls"/>
-    </lcf76f155ced4ddcb4097134ff3c332f>
-    <TaxCatchAll xmlns="60323a4b-ec8c-4870-a04a-4daeb2e428a0" xsi:nil="true"/>
-  </documentManagement>
-</p:properties>
-</file>
-
-<file path=customXml/item3.xml><?xml version="1.0" encoding="utf-8"?>
 <ct:contentTypeSchema xmlns:ct="http://schemas.microsoft.com/office/2006/metadata/contentType" xmlns:ma="http://schemas.microsoft.com/office/2006/metadata/properties/metaAttributes" ct:_="" ma:_="" ma:contentTypeName="Document" ma:contentTypeID="0x010100CF3AA903C02CEB42B8ED53135F8CD172" ma:contentTypeVersion="19" ma:contentTypeDescription="Create a new document." ma:contentTypeScope="" ma:versionID="d26509f8eb1f4bd0cedb37206d7fe58d">
   <xsd:schema xmlns:xsd="http://www.w3.org/2001/XMLSchema" xmlns:xs="http://www.w3.org/2001/XMLSchema" xmlns:p="http://schemas.microsoft.com/office/2006/metadata/properties" xmlns:ns2="97990345-9152-4417-8f04-d1350c114d86" xmlns:ns3="60323a4b-ec8c-4870-a04a-4daeb2e428a0" xmlns:ns4="5684647e-1a6d-4b94-b02a-af0990aec00f" targetNamespace="http://schemas.microsoft.com/office/2006/metadata/properties" ma:root="true" ma:fieldsID="a00cabcfd3e433e5628bc08f43970357" ns2:_="" ns3:_="" ns4:_="">
     <xsd:import namespace="97990345-9152-4417-8f04-d1350c114d86"/>
@@ -16129,33 +15756,27 @@
 </ct:contentTypeSchema>
 </file>
 
-<file path=customXml/itemProps1.xml><?xml version="1.0" encoding="utf-8"?>
-<ds:datastoreItem xmlns:ds="http://schemas.openxmlformats.org/officeDocument/2006/customXml" ds:itemID="{1FB15A05-7974-443B-B2C6-66CA14E10BBE}">
-  <ds:schemaRefs>
-    <ds:schemaRef ds:uri="http://schemas.microsoft.com/sharepoint/v3/contenttype/forms"/>
-  </ds:schemaRefs>
-</ds:datastoreItem>
+<file path=customXml/item2.xml><?xml version="1.0" encoding="utf-8"?>
+<?mso-contentType ?>
+<FormTemplates xmlns="http://schemas.microsoft.com/sharepoint/v3/contenttype/forms">
+  <Display>DocumentLibraryForm</Display>
+  <Edit>DocumentLibraryForm</Edit>
+  <New>DocumentLibraryForm</New>
+</FormTemplates>
 </file>
 
-<file path=customXml/itemProps2.xml><?xml version="1.0" encoding="utf-8"?>
-<ds:datastoreItem xmlns:ds="http://schemas.openxmlformats.org/officeDocument/2006/customXml" ds:itemID="{F45B40EE-95C0-4252-9204-87A3C9A26B20}">
-  <ds:schemaRefs>
-    <ds:schemaRef ds:uri="http://www.w3.org/XML/1998/namespace"/>
-    <ds:schemaRef ds:uri="http://purl.org/dc/elements/1.1/"/>
-    <ds:schemaRef ds:uri="http://purl.org/dc/terms/"/>
-    <ds:schemaRef ds:uri="http://purl.org/dc/dcmitype/"/>
-    <ds:schemaRef ds:uri="5684647e-1a6d-4b94-b02a-af0990aec00f"/>
-    <ds:schemaRef ds:uri="http://schemas.microsoft.com/office/2006/documentManagement/types"/>
-    <ds:schemaRef ds:uri="http://schemas.openxmlformats.org/package/2006/metadata/core-properties"/>
-    <ds:schemaRef ds:uri="http://schemas.microsoft.com/office/infopath/2007/PartnerControls"/>
-    <ds:schemaRef ds:uri="60323a4b-ec8c-4870-a04a-4daeb2e428a0"/>
-    <ds:schemaRef ds:uri="97990345-9152-4417-8f04-d1350c114d86"/>
-    <ds:schemaRef ds:uri="http://schemas.microsoft.com/office/2006/metadata/properties"/>
-  </ds:schemaRefs>
-</ds:datastoreItem>
+<file path=customXml/item3.xml><?xml version="1.0" encoding="utf-8"?>
+<p:properties xmlns:p="http://schemas.microsoft.com/office/2006/metadata/properties" xmlns:pc="http://schemas.microsoft.com/office/infopath/2007/PartnerControls" xmlns:xsi="http://www.w3.org/2001/XMLSchema-instance">
+  <documentManagement>
+    <lcf76f155ced4ddcb4097134ff3c332f xmlns="97990345-9152-4417-8f04-d1350c114d86">
+      <Terms xmlns="http://schemas.microsoft.com/office/infopath/2007/PartnerControls"/>
+    </lcf76f155ced4ddcb4097134ff3c332f>
+    <TaxCatchAll xmlns="60323a4b-ec8c-4870-a04a-4daeb2e428a0" xsi:nil="true"/>
+  </documentManagement>
+</p:properties>
 </file>
 
-<file path=customXml/itemProps3.xml><?xml version="1.0" encoding="utf-8"?>
+<file path=customXml/itemProps1.xml><?xml version="1.0" encoding="utf-8"?>
 <ds:datastoreItem xmlns:ds="http://schemas.openxmlformats.org/officeDocument/2006/customXml" ds:itemID="{595B4667-E460-42B9-B123-AF1C3A04326C}">
   <ds:schemaRefs>
     <ds:schemaRef ds:uri="5684647e-1a6d-4b94-b02a-af0990aec00f"/>
@@ -16175,6 +15796,32 @@
 </ds:datastoreItem>
 </file>
 
+<file path=customXml/itemProps2.xml><?xml version="1.0" encoding="utf-8"?>
+<ds:datastoreItem xmlns:ds="http://schemas.openxmlformats.org/officeDocument/2006/customXml" ds:itemID="{1FB15A05-7974-443B-B2C6-66CA14E10BBE}">
+  <ds:schemaRefs>
+    <ds:schemaRef ds:uri="http://schemas.microsoft.com/sharepoint/v3/contenttype/forms"/>
+  </ds:schemaRefs>
+</ds:datastoreItem>
+</file>
+
+<file path=customXml/itemProps3.xml><?xml version="1.0" encoding="utf-8"?>
+<ds:datastoreItem xmlns:ds="http://schemas.openxmlformats.org/officeDocument/2006/customXml" ds:itemID="{F45B40EE-95C0-4252-9204-87A3C9A26B20}">
+  <ds:schemaRefs>
+    <ds:schemaRef ds:uri="http://www.w3.org/XML/1998/namespace"/>
+    <ds:schemaRef ds:uri="http://purl.org/dc/elements/1.1/"/>
+    <ds:schemaRef ds:uri="http://purl.org/dc/terms/"/>
+    <ds:schemaRef ds:uri="http://purl.org/dc/dcmitype/"/>
+    <ds:schemaRef ds:uri="5684647e-1a6d-4b94-b02a-af0990aec00f"/>
+    <ds:schemaRef ds:uri="http://schemas.microsoft.com/office/2006/documentManagement/types"/>
+    <ds:schemaRef ds:uri="http://schemas.openxmlformats.org/package/2006/metadata/core-properties"/>
+    <ds:schemaRef ds:uri="http://schemas.microsoft.com/office/infopath/2007/PartnerControls"/>
+    <ds:schemaRef ds:uri="60323a4b-ec8c-4870-a04a-4daeb2e428a0"/>
+    <ds:schemaRef ds:uri="97990345-9152-4417-8f04-d1350c114d86"/>
+    <ds:schemaRef ds:uri="http://schemas.microsoft.com/office/2006/metadata/properties"/>
+  </ds:schemaRefs>
+</ds:datastoreItem>
+</file>
+
 <file path=docMetadata/LabelInfo.xml><?xml version="1.0" encoding="utf-8"?>
 <clbl:labelList xmlns:clbl="http://schemas.microsoft.com/office/2020/mipLabelMetadata">
   <clbl:label id="{c327fc46-d125-460c-9dec-2276c3cb8bf4}" enabled="0" method="" siteId="{c327fc46-d125-460c-9dec-2276c3cb8bf4}" removed="1"/>

--- a/RH_Stock_Pitch_updated.pptx
+++ b/RH_Stock_Pitch_updated.pptx
@@ -5963,7 +5963,7 @@
                           </a:solidFill>
                           <a:latin typeface="Avenir Next LT Pro"/>
                         </a:rPr>
-                        <a:t>~8.7×</a:t>
+                        <a:t>~9.3×</a:t>
                       </a:r>
                     </a:p>
                   </a:txBody>
@@ -14091,7 +14091,7 @@
                           </a:solidFill>
                           <a:latin typeface="Avenir Next LT Pro Demi"/>
                         </a:rPr>
-                        <a:t>Adj. EPS</a:t>
+                        <a:t>Est. EPS (fwd)</a:t>
                       </a:r>
                     </a:p>
                   </a:txBody>
@@ -14259,7 +14259,7 @@
                           </a:solidFill>
                           <a:latin typeface="Avenir Next LT Pro"/>
                         </a:rPr>
-                        <a:t>~$18–26</a:t>
+                        <a:t>~$22–35</a:t>
                       </a:r>
                     </a:p>
                   </a:txBody>
@@ -14282,7 +14282,7 @@
                           </a:solidFill>
                           <a:latin typeface="Avenir Next LT Pro"/>
                         </a:rPr>
-                        <a:t>6–8×</a:t>
+                        <a:t>~5–7×</a:t>
                       </a:r>
                     </a:p>
                   </a:txBody>
@@ -14427,7 +14427,7 @@
                           </a:solidFill>
                           <a:latin typeface="Avenir Next LT Pro"/>
                         </a:rPr>
-                        <a:t>~$10–14</a:t>
+                        <a:t>~$11–19</a:t>
                       </a:r>
                     </a:p>
                   </a:txBody>
@@ -14450,7 +14450,7 @@
                           </a:solidFill>
                           <a:latin typeface="Avenir Next LT Pro"/>
                         </a:rPr>
-                        <a:t>11–15×</a:t>
+                        <a:t>~9–15×</a:t>
                       </a:r>
                     </a:p>
                   </a:txBody>
@@ -14595,7 +14595,7 @@
                           </a:solidFill>
                           <a:latin typeface="Avenir Next LT Pro"/>
                         </a:rPr>
-                        <a:t>~$4–6</a:t>
+                        <a:t>~$3–6</a:t>
                       </a:r>
                     </a:p>
                   </a:txBody>
@@ -14618,7 +14618,7 @@
                           </a:solidFill>
                           <a:latin typeface="Avenir Next LT Pro"/>
                         </a:rPr>
-                        <a:t>25–37×</a:t>
+                        <a:t>~25–55×</a:t>
                       </a:r>
                     </a:p>
                   </a:txBody>
@@ -14676,6 +14676,40 @@
                 <a:latin typeface="Avenir Next LT Pro"/>
               </a:rPr>
               <a:t>Base case assumes NO recovery — a rate-driven turn is upside, not a requirement</a:t>
+            </a:r>
+          </a:p>
+        </p:txBody>
+      </p:sp>
+      <p:sp>
+        <p:nvSpPr>
+          <p:cNvPr id="8" name="TextBox 7"/>
+          <p:cNvSpPr txBox="1"/>
+          <p:nvPr/>
+        </p:nvSpPr>
+        <p:spPr>
+          <a:xfrm>
+            <a:off x="457200" y="5989320"/>
+            <a:ext cx="8229600" cy="365760"/>
+          </a:xfrm>
+          <a:prstGeom prst="rect">
+            <a:avLst/>
+          </a:prstGeom>
+          <a:noFill/>
+        </p:spPr>
+        <p:txBody>
+          <a:bodyPr wrap="square">
+            <a:spAutoFit/>
+          </a:bodyPr>
+          <a:lstStyle/>
+          <a:p>
+            <a:r>
+              <a:rPr sz="800" i="1">
+                <a:solidFill>
+                  <a:srgbClr val="707070"/>
+                </a:solidFill>
+                <a:latin typeface="Avenir Next LT Pro"/>
+              </a:rPr>
+              <a:t>EPS ≈ (EBITDA − ~$150M D&amp;A − ~$215M interest) × (1 − 25% tax) ÷ ~19M shares. Illustrative, not a forecast.</a:t>
             </a:r>
           </a:p>
         </p:txBody>

--- a/RH_Stock_Pitch_updated.pptx
+++ b/RH_Stock_Pitch_updated.pptx
@@ -10189,7 +10189,7 @@
                 </a:solidFill>
                 <a:latin typeface="Avenir Next LT Pro"/>
               </a:rPr>
-              <a:t>% upside over 2–3 years   ·   Prob-weighted target ~$</a:t>
+              <a:t>% total upside · ~50% IRR (~2.5-yr base case)   ·   Prob-weighted target ~$</a:t>
             </a:r>
             <a:r>
               <a:rPr lang="en-US" sz="1100" b="0" dirty="0">

--- a/RH_Stock_Pitch_updated.pptx
+++ b/RH_Stock_Pitch_updated.pptx
@@ -10141,7 +10141,7 @@
                 </a:solidFill>
                 <a:latin typeface="Avenir Next LT Pro Demi"/>
               </a:rPr>
-              <a:t>Base Target $477</a:t>
+              <a:t>Fair Value ~$245</a:t>
             </a:r>
             <a:r>
               <a:rPr sz="1200" b="0" dirty="0">
@@ -10159,7 +10159,7 @@
                 </a:solidFill>
                 <a:latin typeface="Avenir Next LT Pro"/>
               </a:rPr>
-              <a:t>(FY2027E)</a:t>
+              <a:t>(today)</a:t>
             </a:r>
           </a:p>
           <a:p>
@@ -10180,7 +10180,7 @@
                 </a:solidFill>
                 <a:latin typeface="Avenir Next LT Pro"/>
               </a:rPr>
-              <a:t>187</a:t>
+              <a:t>48</a:t>
             </a:r>
             <a:r>
               <a:rPr sz="1100" b="0" dirty="0">
@@ -10189,7 +10189,7 @@
                 </a:solidFill>
                 <a:latin typeface="Avenir Next LT Pro"/>
               </a:rPr>
-              <a:t>% total upside · ~50% IRR (~2.5-yr base case)   ·   Prob-weighted target ~$</a:t>
+              <a:t>% upside to fair value   ·   FY2027E base target ~$315 (~29% IRR)   ·   Prob-weighted ~$</a:t>
             </a:r>
             <a:r>
               <a:rPr lang="en-US" sz="1100" b="0" dirty="0">
@@ -10198,7 +10198,7 @@
                 </a:solidFill>
                 <a:latin typeface="Avenir Next LT Pro"/>
               </a:rPr>
-              <a:t>413</a:t>
+              <a:t>288</a:t>
             </a:r>
             <a:endParaRPr sz="1100" b="0" dirty="0">
               <a:solidFill>
@@ -10372,7 +10372,7 @@
                 </a:solidFill>
                 <a:latin typeface="Avenir Next LT Pro Demi"/>
               </a:rPr>
-              <a:t>~$</a:t>
+              <a:t>~$315</a:t>
             </a:r>
             <a:r>
               <a:rPr lang="en-US" sz="2400" b="1" dirty="0">
@@ -10381,7 +10381,7 @@
                 </a:solidFill>
                 <a:latin typeface="Avenir Next LT Pro Demi"/>
               </a:rPr>
-              <a:t>477</a:t>
+              <a:t/>
             </a:r>
             <a:endParaRPr sz="2400" b="1" dirty="0">
               <a:solidFill>
@@ -10471,7 +10471,7 @@
                 </a:solidFill>
                 <a:latin typeface="Avenir Next LT Pro Demi"/>
               </a:rPr>
-              <a:t>~$</a:t>
+              <a:t>~$562</a:t>
             </a:r>
             <a:r>
               <a:rPr lang="en-US" sz="2400" b="1">
@@ -10480,7 +10480,7 @@
                 </a:solidFill>
                 <a:latin typeface="Avenir Next LT Pro Demi"/>
               </a:rPr>
-              <a:t>810</a:t>
+              <a:t/>
             </a:r>
             <a:endParaRPr sz="2400" b="1" dirty="0">
               <a:solidFill>
@@ -11949,7 +11949,7 @@
                           </a:solidFill>
                           <a:latin typeface="Avenir Next LT Pro"/>
                         </a:rPr>
-                        <a:t>680</a:t>
+                        <a:t>605</a:t>
                       </a:r>
                     </a:p>
                   </a:txBody>
@@ -11972,7 +11972,7 @@
                           </a:solidFill>
                           <a:latin typeface="Avenir Next LT Pro"/>
                         </a:rPr>
-                        <a:t>844</a:t>
+                        <a:t>717</a:t>
                       </a:r>
                     </a:p>
                   </a:txBody>
@@ -12094,7 +12094,7 @@
                           </a:solidFill>
                           <a:latin typeface="Avenir Next LT Pro"/>
                         </a:rPr>
-                        <a:t>18.0%</a:t>
+                        <a:t>16.0%</a:t>
                       </a:r>
                     </a:p>
                   </a:txBody>
@@ -12117,7 +12117,7 @@
                           </a:solidFill>
                           <a:latin typeface="Avenir Next LT Pro"/>
                         </a:rPr>
-                        <a:t>20.0%</a:t>
+                        <a:t>17.0%</a:t>
                       </a:r>
                     </a:p>
                   </a:txBody>
@@ -12239,7 +12239,7 @@
                           </a:solidFill>
                           <a:latin typeface="Avenir Next LT Pro"/>
                         </a:rPr>
-                        <a:t>~$12</a:t>
+                        <a:t>~$9</a:t>
                       </a:r>
                     </a:p>
                   </a:txBody>
@@ -12262,7 +12262,7 @@
                           </a:solidFill>
                           <a:latin typeface="Avenir Next LT Pro"/>
                         </a:rPr>
-                        <a:t>~$19</a:t>
+                        <a:t>~$14</a:t>
                       </a:r>
                     </a:p>
                   </a:txBody>
@@ -12601,7 +12601,7 @@
                 </a:solidFill>
                 <a:latin typeface="Avenir Next LT Pro"/>
               </a:rPr>
-              <a:t>Story: revenue recovering &amp; margin re-expanding; FCF inflected to +$252M in FY25 — but ~$2.4B net debt (~4× EBITDA) and ~$225M/yr interest make it a leveraged bet</a:t>
+              <a:t>Story: margins dip near-term (FY26 guide 14–16%) then recover toward ~17%; FCF inflected to +$252M in FY25 — but ~$2.4B net debt (~4× EBITDA) and ~$225M/yr interest make it a leveraged bet</a:t>
             </a:r>
           </a:p>
         </p:txBody>
@@ -12827,7 +12827,7 @@
                 </a:solidFill>
                 <a:latin typeface="Avenir Next LT Pro Demi"/>
               </a:rPr>
-              <a:t>$844M</a:t>
+              <a:t>$717M</a:t>
             </a:r>
           </a:p>
         </p:txBody>
@@ -12893,7 +12893,7 @@
                 </a:solidFill>
                 <a:latin typeface="Avenir Next LT Pro Demi"/>
               </a:rPr>
-              <a:t>13×</a:t>
+              <a:t>11×</a:t>
             </a:r>
           </a:p>
         </p:txBody>
@@ -12959,7 +12959,7 @@
                 </a:solidFill>
                 <a:latin typeface="Avenir Next LT Pro Demi"/>
               </a:rPr>
-              <a:t>~$11.0B</a:t>
+              <a:t>~$7.9B</a:t>
             </a:r>
           </a:p>
         </p:txBody>
@@ -13091,7 +13091,7 @@
                 </a:solidFill>
                 <a:latin typeface="Avenir Next LT Pro Demi"/>
               </a:rPr>
-              <a:t>= ~$477</a:t>
+              <a:t>= ~$315</a:t>
             </a:r>
           </a:p>
         </p:txBody>
@@ -13384,7 +13384,7 @@
                           </a:solidFill>
                           <a:latin typeface="Avenir Next LT Pro"/>
                         </a:rPr>
-                        <a:t>24%</a:t>
+                        <a:t>20%</a:t>
                       </a:r>
                     </a:p>
                   </a:txBody>
@@ -13407,7 +13407,7 @@
                           </a:solidFill>
                           <a:latin typeface="Avenir Next LT Pro"/>
                         </a:rPr>
-                        <a:t>15×</a:t>
+                        <a:t>13×</a:t>
                       </a:r>
                     </a:p>
                   </a:txBody>
@@ -13430,7 +13430,7 @@
                           </a:solidFill>
                           <a:latin typeface="Avenir Next LT Pro"/>
                         </a:rPr>
-                        <a:t>~$810</a:t>
+                        <a:t>~$562</a:t>
                       </a:r>
                     </a:p>
                   </a:txBody>
@@ -13529,7 +13529,7 @@
                           </a:solidFill>
                           <a:latin typeface="Avenir Next LT Pro"/>
                         </a:rPr>
-                        <a:t>20%</a:t>
+                        <a:t>17%</a:t>
                       </a:r>
                     </a:p>
                   </a:txBody>
@@ -13552,7 +13552,7 @@
                           </a:solidFill>
                           <a:latin typeface="Avenir Next LT Pro"/>
                         </a:rPr>
-                        <a:t>13×</a:t>
+                        <a:t>11×</a:t>
                       </a:r>
                     </a:p>
                   </a:txBody>
@@ -13575,7 +13575,7 @@
                           </a:solidFill>
                           <a:latin typeface="Avenir Next LT Pro"/>
                         </a:rPr>
-                        <a:t>~$477</a:t>
+                        <a:t>~$315</a:t>
                       </a:r>
                     </a:p>
                   </a:txBody>
@@ -13792,7 +13792,7 @@
                 </a:solidFill>
                 <a:latin typeface="Avenir Next LT Pro Demi"/>
               </a:rPr>
-              <a:t>Probability-weighted target: ~$413   (~149% upside from ~$166)</a:t>
+              <a:t>Probability-weighted target: ~$288   (~73% upside from ~$166)</a:t>
             </a:r>
           </a:p>
         </p:txBody>

--- a/RH_Stock_Pitch_updated.pptx
+++ b/RH_Stock_Pitch_updated.pptx
@@ -10141,7 +10141,7 @@
                 </a:solidFill>
                 <a:latin typeface="Avenir Next LT Pro Demi"/>
               </a:rPr>
-              <a:t>Fair Value ~$245</a:t>
+              <a:t>Fair Value ~$240</a:t>
             </a:r>
             <a:r>
               <a:rPr sz="1200" b="0" dirty="0">
@@ -10180,7 +10180,7 @@
                 </a:solidFill>
                 <a:latin typeface="Avenir Next LT Pro"/>
               </a:rPr>
-              <a:t>48</a:t>
+              <a:t>45</a:t>
             </a:r>
             <a:r>
               <a:rPr sz="1100" b="0" dirty="0">
@@ -10189,7 +10189,7 @@
                 </a:solidFill>
                 <a:latin typeface="Avenir Next LT Pro"/>
               </a:rPr>
-              <a:t>% upside to fair value   ·   FY2027E base target ~$315 (~29% IRR)   ·   Prob-weighted ~$</a:t>
+              <a:t>% upside to fair value   ·   FY2027E base target ~$310 (~28% IRR)   ·   Prob-weighted ~$</a:t>
             </a:r>
             <a:r>
               <a:rPr lang="en-US" sz="1100" b="0" dirty="0">
@@ -10198,7 +10198,7 @@
                 </a:solidFill>
                 <a:latin typeface="Avenir Next LT Pro"/>
               </a:rPr>
-              <a:t>288</a:t>
+              <a:t>285</a:t>
             </a:r>
             <a:endParaRPr sz="1100" b="0" dirty="0">
               <a:solidFill>
@@ -10372,7 +10372,7 @@
                 </a:solidFill>
                 <a:latin typeface="Avenir Next LT Pro Demi"/>
               </a:rPr>
-              <a:t>~$315</a:t>
+              <a:t>~$310</a:t>
             </a:r>
             <a:r>
               <a:rPr lang="en-US" sz="2400" b="1" dirty="0">
@@ -11519,7 +11519,7 @@
                           </a:solidFill>
                           <a:latin typeface="Avenir Next LT Pro"/>
                         </a:rPr>
-                        <a:t>4,220</a:t>
+                        <a:t>4,165</a:t>
                       </a:r>
                     </a:p>
                   </a:txBody>
@@ -11682,7 +11682,7 @@
                           </a:solidFill>
                           <a:latin typeface="Avenir Next LT Pro"/>
                         </a:rPr>
-                        <a:t>+11.6%</a:t>
+                        <a:t>+10.2%</a:t>
                       </a:r>
                     </a:p>
                   </a:txBody>
@@ -11972,7 +11972,7 @@
                           </a:solidFill>
                           <a:latin typeface="Avenir Next LT Pro"/>
                         </a:rPr>
-                        <a:t>717</a:t>
+                        <a:t>708</a:t>
                       </a:r>
                     </a:p>
                   </a:txBody>
@@ -12827,7 +12827,7 @@
                 </a:solidFill>
                 <a:latin typeface="Avenir Next LT Pro Demi"/>
               </a:rPr>
-              <a:t>$717M</a:t>
+              <a:t>$708M</a:t>
             </a:r>
           </a:p>
         </p:txBody>
@@ -12959,7 +12959,7 @@
                 </a:solidFill>
                 <a:latin typeface="Avenir Next LT Pro Demi"/>
               </a:rPr>
-              <a:t>~$7.9B</a:t>
+              <a:t>~$7.8B</a:t>
             </a:r>
           </a:p>
         </p:txBody>
@@ -13091,7 +13091,7 @@
                 </a:solidFill>
                 <a:latin typeface="Avenir Next LT Pro Demi"/>
               </a:rPr>
-              <a:t>= ~$315</a:t>
+              <a:t>= ~$310</a:t>
             </a:r>
           </a:p>
         </p:txBody>
@@ -13575,7 +13575,7 @@
                           </a:solidFill>
                           <a:latin typeface="Avenir Next LT Pro"/>
                         </a:rPr>
-                        <a:t>~$315</a:t>
+                        <a:t>~$310</a:t>
                       </a:r>
                     </a:p>
                   </a:txBody>
@@ -13792,7 +13792,7 @@
                 </a:solidFill>
                 <a:latin typeface="Avenir Next LT Pro Demi"/>
               </a:rPr>
-              <a:t>Probability-weighted target: ~$288   (~73% upside from ~$166)</a:t>
+              <a:t>Probability-weighted target: ~$285   (~72% upside from ~$166)</a:t>
             </a:r>
           </a:p>
         </p:txBody>

--- a/RH_Stock_Pitch_updated.pptx
+++ b/RH_Stock_Pitch_updated.pptx
@@ -8999,7 +8999,7 @@
                 </a:solidFill>
                 <a:latin typeface="Avenir Next LT Pro"/>
               </a:rPr>
-              <a:t>Owns ~25%; bought ~$10M more at ~$216 in June 2024.</a:t>
+              <a:t>Owns ~18% outright (~25% incl. options); bought ~$10M at ~$216 in June 2024.</a:t>
             </a:r>
           </a:p>
         </p:txBody>
@@ -10618,13 +10618,13 @@
               <a:rPr lang="en-US" sz="1050" b="0" dirty="0">
                 <a:latin typeface="Avenir Next LT Pro"/>
               </a:rPr>
-              <a:t>Owns ~25%; </a:t>
+              <a:t>~18% outright (~25% incl. options); </a:t>
             </a:r>
             <a:r>
               <a:rPr sz="1050" b="0" dirty="0">
                 <a:latin typeface="Avenir Next LT Pro"/>
               </a:rPr>
-              <a:t>bought ~$10M more at ~$216 (Jun 2024)</a:t>
+              <a:t>bought ~$10M at ~$216 (Jun '24)</a:t>
             </a:r>
             <a:endParaRPr lang="en-US" sz="1050" b="0" dirty="0">
               <a:latin typeface="Avenir Next LT Pro"/>

--- a/RH_Stock_Pitch_updated.pptx
+++ b/RH_Stock_Pitch_updated.pptx
@@ -11427,7 +11427,7 @@
                           </a:solidFill>
                           <a:latin typeface="Avenir Next LT Pro"/>
                         </a:rPr>
-                        <a:t>3,032</a:t>
+                        <a:t>3,029</a:t>
                       </a:r>
                     </a:p>
                   </a:txBody>
@@ -11450,7 +11450,7 @@
                           </a:solidFill>
                           <a:latin typeface="Avenir Next LT Pro"/>
                         </a:rPr>
-                        <a:t>3,182</a:t>
+                        <a:t>3,181</a:t>
                       </a:r>
                     </a:p>
                   </a:txBody>
@@ -11496,7 +11496,7 @@
                           </a:solidFill>
                           <a:latin typeface="Avenir Next LT Pro"/>
                         </a:rPr>
-                        <a:t>3,780</a:t>
+                        <a:t>3,680</a:t>
                       </a:r>
                     </a:p>
                   </a:txBody>
@@ -11613,7 +11613,7 @@
                           </a:solidFill>
                           <a:latin typeface="Avenir Next LT Pro"/>
                         </a:rPr>
-                        <a:t>+4.9%</a:t>
+                        <a:t>+5.0%</a:t>
                       </a:r>
                     </a:p>
                   </a:txBody>
@@ -11659,7 +11659,7 @@
                           </a:solidFill>
                           <a:latin typeface="Avenir Next LT Pro"/>
                         </a:rPr>
-                        <a:t>+9.9%</a:t>
+                        <a:t>+7.0%</a:t>
                       </a:r>
                     </a:p>
                   </a:txBody>
@@ -11682,7 +11682,7 @@
                           </a:solidFill>
                           <a:latin typeface="Avenir Next LT Pro"/>
                         </a:rPr>
-                        <a:t>+10.2%</a:t>
+                        <a:t>+13.2%</a:t>
                       </a:r>
                     </a:p>
                   </a:txBody>
@@ -11880,7 +11880,7 @@
                           </a:solidFill>
                           <a:latin typeface="Avenir Next LT Pro"/>
                         </a:rPr>
-                        <a:t>512</a:t>
+                        <a:t>551</a:t>
                       </a:r>
                     </a:p>
                   </a:txBody>
@@ -11903,7 +11903,7 @@
                           </a:solidFill>
                           <a:latin typeface="Avenir Next LT Pro"/>
                         </a:rPr>
-                        <a:t>538</a:t>
+                        <a:t>539</a:t>
                       </a:r>
                     </a:p>
                   </a:txBody>
@@ -11949,7 +11949,7 @@
                           </a:solidFill>
                           <a:latin typeface="Avenir Next LT Pro"/>
                         </a:rPr>
-                        <a:t>605</a:t>
+                        <a:t>589</a:t>
                       </a:r>
                     </a:p>
                   </a:txBody>
@@ -12025,7 +12025,7 @@
                           </a:solidFill>
                           <a:latin typeface="Avenir Next LT Pro"/>
                         </a:rPr>
-                        <a:t>16.9%</a:t>
+                        <a:t>18.2%</a:t>
                       </a:r>
                     </a:p>
                   </a:txBody>

--- a/RH_Stock_Pitch_updated.pptx
+++ b/RH_Stock_Pitch_updated.pptx
@@ -15,6 +15,7 @@
     <p:sldId id="433" r:id="rId6"/>
     <p:sldId id="483" r:id="rId7"/>
     <p:sldId id="507" r:id="rId8"/>
+    <p:sldId id="518" r:id="rId31"/>
     <p:sldId id="481" r:id="rId9"/>
     <p:sldId id="508" r:id="rId10"/>
     <p:sldId id="482" r:id="rId11"/>
@@ -5206,6 +5207,923 @@
       </p:grpSpPr>
       <p:sp>
         <p:nvSpPr>
+          <p:cNvPr id="2" name="TextBox 1"/>
+          <p:cNvSpPr txBox="1"/>
+          <p:nvPr/>
+        </p:nvSpPr>
+        <p:spPr>
+          <a:xfrm>
+            <a:off x="457200" y="320040"/>
+            <a:ext cx="8229600" cy="446276"/>
+          </a:xfrm>
+          <a:prstGeom prst="rect">
+            <a:avLst/>
+          </a:prstGeom>
+          <a:noFill/>
+        </p:spPr>
+        <p:txBody>
+          <a:bodyPr wrap="square">
+            <a:spAutoFit/>
+          </a:bodyPr>
+          <a:lstStyle/>
+          <a:p>
+            <a:r>
+              <a:rPr sz="2300" b="0" i="0" dirty="0">
+                <a:latin typeface="Avenir Next LT Pro Demi"/>
+              </a:rPr>
+              <a:t>Macro Sensitivity — Housing Is Option Value</a:t>
+            </a:r>
+          </a:p>
+        </p:txBody>
+      </p:sp>
+      <p:sp>
+        <p:nvSpPr>
+          <p:cNvPr id="5" name="TextBox 4"/>
+          <p:cNvSpPr txBox="1"/>
+          <p:nvPr/>
+        </p:nvSpPr>
+        <p:spPr>
+          <a:xfrm>
+            <a:off x="457200" y="1051560"/>
+            <a:ext cx="8229600" cy="274320"/>
+          </a:xfrm>
+          <a:prstGeom prst="rect">
+            <a:avLst/>
+          </a:prstGeom>
+          <a:noFill/>
+        </p:spPr>
+        <p:txBody>
+          <a:bodyPr wrap="none">
+            <a:spAutoFit/>
+          </a:bodyPr>
+          <a:lstStyle/>
+          <a:p>
+            <a:r>
+              <a:rPr sz="900" b="0" i="1">
+                <a:solidFill>
+                  <a:srgbClr val="B0B0B0"/>
+                </a:solidFill>
+                <a:latin typeface="Avenir Next LT Pro"/>
+              </a:rPr>
+              <a:t>[ narrative / commentary to be written ]</a:t>
+            </a:r>
+          </a:p>
+        </p:txBody>
+      </p:sp>
+      <p:graphicFrame>
+        <p:nvGraphicFramePr>
+          <p:cNvPr id="6" name="Table 5"/>
+          <p:cNvGraphicFramePr>
+            <a:graphicFrameLocks noGrp="1"/>
+          </p:cNvGraphicFramePr>
+          <p:nvPr>
+            <p:extLst>
+              <p:ext uri="{D42A27DB-BD31-4B8C-83A1-F6EECF244321}">
+                <p14:modId xmlns:p14="http://schemas.microsoft.com/office/powerpoint/2010/main" val="4054062618"/>
+              </p:ext>
+            </p:extLst>
+          </p:nvPr>
+        </p:nvGraphicFramePr>
+        <p:xfrm>
+          <a:off x="228600" y="1577340"/>
+          <a:ext cx="8686800" cy="1828800"/>
+        </p:xfrm>
+        <a:graphic>
+          <a:graphicData uri="http://schemas.openxmlformats.org/drawingml/2006/table">
+            <a:tbl>
+              <a:tblPr>
+                <a:tableStyleId>{5C22544A-7EE6-4342-B048-85BDC9FD1C3A}</a:tableStyleId>
+              </a:tblPr>
+              <a:tblGrid>
+                <a:gridCol w="1691640">
+                  <a:extLst>
+                    <a:ext uri="{9D8B030D-6E8A-4147-A177-3AD203B41FA5}">
+                      <a16:colId xmlns:a16="http://schemas.microsoft.com/office/drawing/2014/main" val="20000"/>
+                    </a:ext>
+                  </a:extLst>
+                </a:gridCol>
+                <a:gridCol w="1143000">
+                  <a:extLst>
+                    <a:ext uri="{9D8B030D-6E8A-4147-A177-3AD203B41FA5}">
+                      <a16:colId xmlns:a16="http://schemas.microsoft.com/office/drawing/2014/main" val="20001"/>
+                    </a:ext>
+                  </a:extLst>
+                </a:gridCol>
+                <a:gridCol w="1417320">
+                  <a:extLst>
+                    <a:ext uri="{9D8B030D-6E8A-4147-A177-3AD203B41FA5}">
+                      <a16:colId xmlns:a16="http://schemas.microsoft.com/office/drawing/2014/main" val="20002"/>
+                    </a:ext>
+                  </a:extLst>
+                </a:gridCol>
+                <a:gridCol w="1234440">
+                  <a:extLst>
+                    <a:ext uri="{9D8B030D-6E8A-4147-A177-3AD203B41FA5}">
+                      <a16:colId xmlns:a16="http://schemas.microsoft.com/office/drawing/2014/main" val="20003"/>
+                    </a:ext>
+                  </a:extLst>
+                </a:gridCol>
+                <a:gridCol w="960120">
+                  <a:extLst>
+                    <a:ext uri="{9D8B030D-6E8A-4147-A177-3AD203B41FA5}">
+                      <a16:colId xmlns:a16="http://schemas.microsoft.com/office/drawing/2014/main" val="20004"/>
+                    </a:ext>
+                  </a:extLst>
+                </a:gridCol>
+                <a:gridCol w="960120">
+                  <a:extLst>
+                    <a:ext uri="{9D8B030D-6E8A-4147-A177-3AD203B41FA5}">
+                      <a16:colId xmlns:a16="http://schemas.microsoft.com/office/drawing/2014/main" val="20005"/>
+                    </a:ext>
+                  </a:extLst>
+                </a:gridCol>
+                <a:gridCol w="1280160">
+                  <a:extLst>
+                    <a:ext uri="{9D8B030D-6E8A-4147-A177-3AD203B41FA5}">
+                      <a16:colId xmlns:a16="http://schemas.microsoft.com/office/drawing/2014/main" val="20006"/>
+                    </a:ext>
+                  </a:extLst>
+                </a:gridCol>
+              </a:tblGrid>
+              <a:tr h="457200">
+                <a:tc>
+                  <a:txBody>
+                    <a:bodyPr/>
+                    <a:lstStyle/>
+                    <a:p>
+                      <a:pPr algn="l"/>
+                      <a:r>
+                        <a:rPr sz="880" b="1" i="0" dirty="0">
+                          <a:solidFill>
+                            <a:srgbClr val="FFFFFF"/>
+                          </a:solidFill>
+                          <a:latin typeface="Avenir Next LT Pro Demi"/>
+                        </a:rPr>
+                        <a:t>Scenario</a:t>
+                      </a:r>
+                    </a:p>
+                  </a:txBody>
+                  <a:tcPr marL="73152" marR="73152" marT="18288" marB="18288" anchor="ctr">
+                    <a:solidFill>
+                      <a:srgbClr val="AF8C49"/>
+                    </a:solidFill>
+                  </a:tcPr>
+                </a:tc>
+                <a:tc>
+                  <a:txBody>
+                    <a:bodyPr/>
+                    <a:lstStyle/>
+                    <a:p>
+                      <a:pPr algn="ctr"/>
+                      <a:r>
+                        <a:rPr sz="880" b="1" i="0" dirty="0">
+                          <a:solidFill>
+                            <a:srgbClr val="FFFFFF"/>
+                          </a:solidFill>
+                          <a:latin typeface="Avenir Next LT Pro Demi"/>
+                        </a:rPr>
+                        <a:t>30Y Mortgage</a:t>
+                      </a:r>
+                    </a:p>
+                  </a:txBody>
+                  <a:tcPr marL="73152" marR="73152" marT="18288" marB="18288" anchor="ctr">
+                    <a:solidFill>
+                      <a:srgbClr val="AF8C49"/>
+                    </a:solidFill>
+                  </a:tcPr>
+                </a:tc>
+                <a:tc>
+                  <a:txBody>
+                    <a:bodyPr/>
+                    <a:lstStyle/>
+                    <a:p>
+                      <a:pPr algn="ctr"/>
+                      <a:r>
+                        <a:rPr sz="880" b="1" i="0" dirty="0">
+                          <a:solidFill>
+                            <a:srgbClr val="FFFFFF"/>
+                          </a:solidFill>
+                          <a:latin typeface="Avenir Next LT Pro Demi"/>
+                        </a:rPr>
+                        <a:t>Existing Home Sales</a:t>
+                      </a:r>
+                    </a:p>
+                  </a:txBody>
+                  <a:tcPr marL="73152" marR="73152" marT="18288" marB="18288" anchor="ctr">
+                    <a:solidFill>
+                      <a:srgbClr val="AF8C49"/>
+                    </a:solidFill>
+                  </a:tcPr>
+                </a:tc>
+                <a:tc>
+                  <a:txBody>
+                    <a:bodyPr/>
+                    <a:lstStyle/>
+                    <a:p>
+                      <a:pPr algn="ctr"/>
+                      <a:r>
+                        <a:rPr sz="880" b="1" i="0" dirty="0">
+                          <a:solidFill>
+                            <a:srgbClr val="FFFFFF"/>
+                          </a:solidFill>
+                          <a:latin typeface="Avenir Next LT Pro Demi"/>
+                        </a:rPr>
+                        <a:t>RH Revenue</a:t>
+                      </a:r>
+                    </a:p>
+                  </a:txBody>
+                  <a:tcPr marL="73152" marR="73152" marT="18288" marB="18288" anchor="ctr">
+                    <a:solidFill>
+                      <a:srgbClr val="AF8C49"/>
+                    </a:solidFill>
+                  </a:tcPr>
+                </a:tc>
+                <a:tc>
+                  <a:txBody>
+                    <a:bodyPr/>
+                    <a:lstStyle/>
+                    <a:p>
+                      <a:pPr algn="ctr"/>
+                      <a:r>
+                        <a:rPr sz="880" b="1" i="0">
+                          <a:solidFill>
+                            <a:srgbClr val="FFFFFF"/>
+                          </a:solidFill>
+                          <a:latin typeface="Avenir Next LT Pro Demi"/>
+                        </a:rPr>
+                        <a:t>EBITDA Mgn</a:t>
+                      </a:r>
+                    </a:p>
+                  </a:txBody>
+                  <a:tcPr marL="73152" marR="73152" marT="18288" marB="18288" anchor="ctr">
+                    <a:solidFill>
+                      <a:srgbClr val="AF8C49"/>
+                    </a:solidFill>
+                  </a:tcPr>
+                </a:tc>
+                <a:tc>
+                  <a:txBody>
+                    <a:bodyPr/>
+                    <a:lstStyle/>
+                    <a:p>
+                      <a:pPr algn="ctr"/>
+                      <a:r>
+                        <a:rPr sz="880" b="1" i="0" dirty="0">
+                          <a:solidFill>
+                            <a:srgbClr val="FFFFFF"/>
+                          </a:solidFill>
+                          <a:latin typeface="Avenir Next LT Pro Demi"/>
+                        </a:rPr>
+                        <a:t>Est. EPS (fwd)</a:t>
+                      </a:r>
+                    </a:p>
+                  </a:txBody>
+                  <a:tcPr marL="73152" marR="73152" marT="18288" marB="18288" anchor="ctr">
+                    <a:solidFill>
+                      <a:srgbClr val="AF8C49"/>
+                    </a:solidFill>
+                  </a:tcPr>
+                </a:tc>
+                <a:tc>
+                  <a:txBody>
+                    <a:bodyPr/>
+                    <a:lstStyle/>
+                    <a:p>
+                      <a:pPr algn="ctr"/>
+                      <a:r>
+                        <a:rPr sz="880" b="1" i="0" dirty="0">
+                          <a:solidFill>
+                            <a:srgbClr val="FFFFFF"/>
+                          </a:solidFill>
+                          <a:latin typeface="Avenir Next LT Pro Demi"/>
+                        </a:rPr>
+                        <a:t>Implied P/E @ $166</a:t>
+                      </a:r>
+                    </a:p>
+                  </a:txBody>
+                  <a:tcPr marL="73152" marR="73152" marT="18288" marB="18288" anchor="ctr">
+                    <a:solidFill>
+                      <a:srgbClr val="AF8C49"/>
+                    </a:solidFill>
+                  </a:tcPr>
+                </a:tc>
+                <a:extLst>
+                  <a:ext uri="{0D108BD9-81ED-4DB2-BD59-A6C34878D82A}">
+                    <a16:rowId xmlns:a16="http://schemas.microsoft.com/office/drawing/2014/main" val="10000"/>
+                  </a:ext>
+                </a:extLst>
+              </a:tr>
+              <a:tr h="457200">
+                <a:tc>
+                  <a:txBody>
+                    <a:bodyPr/>
+                    <a:lstStyle/>
+                    <a:p>
+                      <a:pPr algn="l"/>
+                      <a:r>
+                        <a:rPr sz="950" b="1" i="0" dirty="0">
+                          <a:solidFill>
+                            <a:schemeClr val="tx1"/>
+                          </a:solidFill>
+                          <a:latin typeface="Avenir Next LT Pro Demi"/>
+                        </a:rPr>
+                        <a:t>Bull — rate relief</a:t>
+                      </a:r>
+                    </a:p>
+                  </a:txBody>
+                  <a:tcPr marL="73152" marR="73152" marT="18288" marB="18288" anchor="ctr">
+                    <a:solidFill>
+                      <a:srgbClr val="FFFFFF"/>
+                    </a:solidFill>
+                  </a:tcPr>
+                </a:tc>
+                <a:tc>
+                  <a:txBody>
+                    <a:bodyPr/>
+                    <a:lstStyle/>
+                    <a:p>
+                      <a:pPr algn="ctr"/>
+                      <a:r>
+                        <a:rPr sz="950" b="0" i="0">
+                          <a:solidFill>
+                            <a:schemeClr val="tx1"/>
+                          </a:solidFill>
+                          <a:latin typeface="Avenir Next LT Pro"/>
+                        </a:rPr>
+                        <a:t>&lt;5.5%</a:t>
+                      </a:r>
+                    </a:p>
+                  </a:txBody>
+                  <a:tcPr marL="73152" marR="73152" marT="18288" marB="18288" anchor="ctr">
+                    <a:solidFill>
+                      <a:srgbClr val="FFFFFF"/>
+                    </a:solidFill>
+                  </a:tcPr>
+                </a:tc>
+                <a:tc>
+                  <a:txBody>
+                    <a:bodyPr/>
+                    <a:lstStyle/>
+                    <a:p>
+                      <a:pPr algn="ctr"/>
+                      <a:r>
+                        <a:rPr sz="950" b="0" i="0">
+                          <a:solidFill>
+                            <a:schemeClr val="tx1"/>
+                          </a:solidFill>
+                          <a:latin typeface="Avenir Next LT Pro"/>
+                        </a:rPr>
+                        <a:t>~5.2–5.8M</a:t>
+                      </a:r>
+                    </a:p>
+                  </a:txBody>
+                  <a:tcPr marL="73152" marR="73152" marT="18288" marB="18288" anchor="ctr">
+                    <a:solidFill>
+                      <a:srgbClr val="FFFFFF"/>
+                    </a:solidFill>
+                  </a:tcPr>
+                </a:tc>
+                <a:tc>
+                  <a:txBody>
+                    <a:bodyPr/>
+                    <a:lstStyle/>
+                    <a:p>
+                      <a:pPr algn="ctr"/>
+                      <a:r>
+                        <a:rPr sz="950" b="0" i="0">
+                          <a:solidFill>
+                            <a:schemeClr val="tx1"/>
+                          </a:solidFill>
+                          <a:latin typeface="Avenir Next LT Pro"/>
+                        </a:rPr>
+                        <a:t>~$4.2–4.8B</a:t>
+                      </a:r>
+                    </a:p>
+                  </a:txBody>
+                  <a:tcPr marL="73152" marR="73152" marT="18288" marB="18288" anchor="ctr">
+                    <a:solidFill>
+                      <a:srgbClr val="FFFFFF"/>
+                    </a:solidFill>
+                  </a:tcPr>
+                </a:tc>
+                <a:tc>
+                  <a:txBody>
+                    <a:bodyPr/>
+                    <a:lstStyle/>
+                    <a:p>
+                      <a:pPr algn="ctr"/>
+                      <a:r>
+                        <a:rPr sz="950" b="0" i="0" dirty="0">
+                          <a:solidFill>
+                            <a:schemeClr val="tx1"/>
+                          </a:solidFill>
+                          <a:latin typeface="Avenir Next LT Pro"/>
+                        </a:rPr>
+                        <a:t>22–26%</a:t>
+                      </a:r>
+                    </a:p>
+                  </a:txBody>
+                  <a:tcPr marL="73152" marR="73152" marT="18288" marB="18288" anchor="ctr">
+                    <a:solidFill>
+                      <a:srgbClr val="FFFFFF"/>
+                    </a:solidFill>
+                  </a:tcPr>
+                </a:tc>
+                <a:tc>
+                  <a:txBody>
+                    <a:bodyPr/>
+                    <a:lstStyle/>
+                    <a:p>
+                      <a:pPr algn="ctr"/>
+                      <a:r>
+                        <a:rPr sz="950" b="0" i="0">
+                          <a:solidFill>
+                            <a:schemeClr val="tx1"/>
+                          </a:solidFill>
+                          <a:latin typeface="Avenir Next LT Pro"/>
+                        </a:rPr>
+                        <a:t>~$22–35</a:t>
+                      </a:r>
+                    </a:p>
+                  </a:txBody>
+                  <a:tcPr marL="73152" marR="73152" marT="18288" marB="18288" anchor="ctr">
+                    <a:solidFill>
+                      <a:srgbClr val="FFFFFF"/>
+                    </a:solidFill>
+                  </a:tcPr>
+                </a:tc>
+                <a:tc>
+                  <a:txBody>
+                    <a:bodyPr/>
+                    <a:lstStyle/>
+                    <a:p>
+                      <a:pPr algn="ctr"/>
+                      <a:r>
+                        <a:rPr sz="950" b="0" i="0">
+                          <a:solidFill>
+                            <a:schemeClr val="tx1"/>
+                          </a:solidFill>
+                          <a:latin typeface="Avenir Next LT Pro"/>
+                        </a:rPr>
+                        <a:t>~5–7×</a:t>
+                      </a:r>
+                    </a:p>
+                  </a:txBody>
+                  <a:tcPr marL="73152" marR="73152" marT="18288" marB="18288" anchor="ctr">
+                    <a:solidFill>
+                      <a:srgbClr val="FFFFFF"/>
+                    </a:solidFill>
+                  </a:tcPr>
+                </a:tc>
+                <a:extLst>
+                  <a:ext uri="{0D108BD9-81ED-4DB2-BD59-A6C34878D82A}">
+                    <a16:rowId xmlns:a16="http://schemas.microsoft.com/office/drawing/2014/main" val="10001"/>
+                  </a:ext>
+                </a:extLst>
+              </a:tr>
+              <a:tr h="457200">
+                <a:tc>
+                  <a:txBody>
+                    <a:bodyPr/>
+                    <a:lstStyle/>
+                    <a:p>
+                      <a:pPr algn="l"/>
+                      <a:r>
+                        <a:rPr sz="950" b="1" i="0">
+                          <a:solidFill>
+                            <a:schemeClr val="tx1"/>
+                          </a:solidFill>
+                          <a:latin typeface="Avenir Next LT Pro Demi"/>
+                        </a:rPr>
+                        <a:t>Base — modest easing</a:t>
+                      </a:r>
+                    </a:p>
+                  </a:txBody>
+                  <a:tcPr marL="73152" marR="73152" marT="18288" marB="18288" anchor="ctr">
+                    <a:solidFill>
+                      <a:srgbClr val="F4F6F8"/>
+                    </a:solidFill>
+                  </a:tcPr>
+                </a:tc>
+                <a:tc>
+                  <a:txBody>
+                    <a:bodyPr/>
+                    <a:lstStyle/>
+                    <a:p>
+                      <a:pPr algn="ctr"/>
+                      <a:r>
+                        <a:rPr sz="950" b="0" i="0" dirty="0">
+                          <a:solidFill>
+                            <a:schemeClr val="tx1"/>
+                          </a:solidFill>
+                          <a:latin typeface="Avenir Next LT Pro"/>
+                        </a:rPr>
+                        <a:t>5.75–6.25%</a:t>
+                      </a:r>
+                    </a:p>
+                  </a:txBody>
+                  <a:tcPr marL="73152" marR="73152" marT="18288" marB="18288" anchor="ctr">
+                    <a:solidFill>
+                      <a:srgbClr val="F4F6F8"/>
+                    </a:solidFill>
+                  </a:tcPr>
+                </a:tc>
+                <a:tc>
+                  <a:txBody>
+                    <a:bodyPr/>
+                    <a:lstStyle/>
+                    <a:p>
+                      <a:pPr algn="ctr"/>
+                      <a:r>
+                        <a:rPr sz="950" b="0" i="0">
+                          <a:solidFill>
+                            <a:schemeClr val="tx1"/>
+                          </a:solidFill>
+                          <a:latin typeface="Avenir Next LT Pro"/>
+                        </a:rPr>
+                        <a:t>~4.5–5.0M</a:t>
+                      </a:r>
+                    </a:p>
+                  </a:txBody>
+                  <a:tcPr marL="73152" marR="73152" marT="18288" marB="18288" anchor="ctr">
+                    <a:solidFill>
+                      <a:srgbClr val="F4F6F8"/>
+                    </a:solidFill>
+                  </a:tcPr>
+                </a:tc>
+                <a:tc>
+                  <a:txBody>
+                    <a:bodyPr/>
+                    <a:lstStyle/>
+                    <a:p>
+                      <a:pPr algn="ctr"/>
+                      <a:r>
+                        <a:rPr sz="950" b="0" i="0">
+                          <a:solidFill>
+                            <a:schemeClr val="tx1"/>
+                          </a:solidFill>
+                          <a:latin typeface="Avenir Next LT Pro"/>
+                        </a:rPr>
+                        <a:t>~$3.6–4.0B</a:t>
+                      </a:r>
+                    </a:p>
+                  </a:txBody>
+                  <a:tcPr marL="73152" marR="73152" marT="18288" marB="18288" anchor="ctr">
+                    <a:solidFill>
+                      <a:srgbClr val="F4F6F8"/>
+                    </a:solidFill>
+                  </a:tcPr>
+                </a:tc>
+                <a:tc>
+                  <a:txBody>
+                    <a:bodyPr/>
+                    <a:lstStyle/>
+                    <a:p>
+                      <a:pPr algn="ctr"/>
+                      <a:r>
+                        <a:rPr sz="950" b="0" i="0" dirty="0">
+                          <a:solidFill>
+                            <a:schemeClr val="tx1"/>
+                          </a:solidFill>
+                          <a:latin typeface="Avenir Next LT Pro"/>
+                        </a:rPr>
+                        <a:t>18–21%</a:t>
+                      </a:r>
+                    </a:p>
+                  </a:txBody>
+                  <a:tcPr marL="73152" marR="73152" marT="18288" marB="18288" anchor="ctr">
+                    <a:solidFill>
+                      <a:srgbClr val="F4F6F8"/>
+                    </a:solidFill>
+                  </a:tcPr>
+                </a:tc>
+                <a:tc>
+                  <a:txBody>
+                    <a:bodyPr/>
+                    <a:lstStyle/>
+                    <a:p>
+                      <a:pPr algn="ctr"/>
+                      <a:r>
+                        <a:rPr sz="950" b="0" i="0">
+                          <a:solidFill>
+                            <a:schemeClr val="tx1"/>
+                          </a:solidFill>
+                          <a:latin typeface="Avenir Next LT Pro"/>
+                        </a:rPr>
+                        <a:t>~$11–19</a:t>
+                      </a:r>
+                    </a:p>
+                  </a:txBody>
+                  <a:tcPr marL="73152" marR="73152" marT="18288" marB="18288" anchor="ctr">
+                    <a:solidFill>
+                      <a:srgbClr val="F4F6F8"/>
+                    </a:solidFill>
+                  </a:tcPr>
+                </a:tc>
+                <a:tc>
+                  <a:txBody>
+                    <a:bodyPr/>
+                    <a:lstStyle/>
+                    <a:p>
+                      <a:pPr algn="ctr"/>
+                      <a:r>
+                        <a:rPr sz="950" b="0" i="0">
+                          <a:solidFill>
+                            <a:schemeClr val="tx1"/>
+                          </a:solidFill>
+                          <a:latin typeface="Avenir Next LT Pro"/>
+                        </a:rPr>
+                        <a:t>~9–15×</a:t>
+                      </a:r>
+                    </a:p>
+                  </a:txBody>
+                  <a:tcPr marL="73152" marR="73152" marT="18288" marB="18288" anchor="ctr">
+                    <a:solidFill>
+                      <a:srgbClr val="F4F6F8"/>
+                    </a:solidFill>
+                  </a:tcPr>
+                </a:tc>
+                <a:extLst>
+                  <a:ext uri="{0D108BD9-81ED-4DB2-BD59-A6C34878D82A}">
+                    <a16:rowId xmlns:a16="http://schemas.microsoft.com/office/drawing/2014/main" val="10002"/>
+                  </a:ext>
+                </a:extLst>
+              </a:tr>
+              <a:tr h="457200">
+                <a:tc>
+                  <a:txBody>
+                    <a:bodyPr/>
+                    <a:lstStyle/>
+                    <a:p>
+                      <a:pPr algn="l"/>
+                      <a:r>
+                        <a:rPr sz="950" b="1" i="0">
+                          <a:solidFill>
+                            <a:schemeClr val="tx1"/>
+                          </a:solidFill>
+                          <a:latin typeface="Avenir Next LT Pro Demi"/>
+                        </a:rPr>
+                        <a:t>Bear — rates stay high</a:t>
+                      </a:r>
+                    </a:p>
+                  </a:txBody>
+                  <a:tcPr marL="73152" marR="73152" marT="18288" marB="18288" anchor="ctr">
+                    <a:solidFill>
+                      <a:srgbClr val="FFFFFF"/>
+                    </a:solidFill>
+                  </a:tcPr>
+                </a:tc>
+                <a:tc>
+                  <a:txBody>
+                    <a:bodyPr/>
+                    <a:lstStyle/>
+                    <a:p>
+                      <a:pPr algn="ctr"/>
+                      <a:r>
+                        <a:rPr sz="950" b="0" i="0" dirty="0">
+                          <a:solidFill>
+                            <a:schemeClr val="tx1"/>
+                          </a:solidFill>
+                          <a:latin typeface="Avenir Next LT Pro"/>
+                        </a:rPr>
+                        <a:t>6.75–7.25%</a:t>
+                      </a:r>
+                    </a:p>
+                  </a:txBody>
+                  <a:tcPr marL="73152" marR="73152" marT="18288" marB="18288" anchor="ctr">
+                    <a:solidFill>
+                      <a:srgbClr val="FFFFFF"/>
+                    </a:solidFill>
+                  </a:tcPr>
+                </a:tc>
+                <a:tc>
+                  <a:txBody>
+                    <a:bodyPr/>
+                    <a:lstStyle/>
+                    <a:p>
+                      <a:pPr algn="ctr"/>
+                      <a:r>
+                        <a:rPr sz="950" b="0" i="0" dirty="0">
+                          <a:solidFill>
+                            <a:schemeClr val="tx1"/>
+                          </a:solidFill>
+                          <a:latin typeface="Avenir Next LT Pro"/>
+                        </a:rPr>
+                        <a:t>~3.8–4.0M</a:t>
+                      </a:r>
+                    </a:p>
+                  </a:txBody>
+                  <a:tcPr marL="73152" marR="73152" marT="18288" marB="18288" anchor="ctr">
+                    <a:solidFill>
+                      <a:srgbClr val="FFFFFF"/>
+                    </a:solidFill>
+                  </a:tcPr>
+                </a:tc>
+                <a:tc>
+                  <a:txBody>
+                    <a:bodyPr/>
+                    <a:lstStyle/>
+                    <a:p>
+                      <a:pPr algn="ctr"/>
+                      <a:r>
+                        <a:rPr sz="950" b="0" i="0" dirty="0">
+                          <a:solidFill>
+                            <a:schemeClr val="tx1"/>
+                          </a:solidFill>
+                          <a:latin typeface="Avenir Next LT Pro"/>
+                        </a:rPr>
+                        <a:t>~$3.1–3.3B</a:t>
+                      </a:r>
+                    </a:p>
+                  </a:txBody>
+                  <a:tcPr marL="73152" marR="73152" marT="18288" marB="18288" anchor="ctr">
+                    <a:solidFill>
+                      <a:srgbClr val="FFFFFF"/>
+                    </a:solidFill>
+                  </a:tcPr>
+                </a:tc>
+                <a:tc>
+                  <a:txBody>
+                    <a:bodyPr/>
+                    <a:lstStyle/>
+                    <a:p>
+                      <a:pPr algn="ctr"/>
+                      <a:r>
+                        <a:rPr sz="950" b="0" i="0" dirty="0">
+                          <a:solidFill>
+                            <a:schemeClr val="tx1"/>
+                          </a:solidFill>
+                          <a:latin typeface="Avenir Next LT Pro"/>
+                        </a:rPr>
+                        <a:t>14–16%</a:t>
+                      </a:r>
+                    </a:p>
+                  </a:txBody>
+                  <a:tcPr marL="73152" marR="73152" marT="18288" marB="18288" anchor="ctr">
+                    <a:solidFill>
+                      <a:srgbClr val="FFFFFF"/>
+                    </a:solidFill>
+                  </a:tcPr>
+                </a:tc>
+                <a:tc>
+                  <a:txBody>
+                    <a:bodyPr/>
+                    <a:lstStyle/>
+                    <a:p>
+                      <a:pPr algn="ctr"/>
+                      <a:r>
+                        <a:rPr sz="950" b="0" i="0" dirty="0">
+                          <a:solidFill>
+                            <a:schemeClr val="tx1"/>
+                          </a:solidFill>
+                          <a:latin typeface="Avenir Next LT Pro"/>
+                        </a:rPr>
+                        <a:t>~$3–6</a:t>
+                      </a:r>
+                    </a:p>
+                  </a:txBody>
+                  <a:tcPr marL="73152" marR="73152" marT="18288" marB="18288" anchor="ctr">
+                    <a:solidFill>
+                      <a:srgbClr val="FFFFFF"/>
+                    </a:solidFill>
+                  </a:tcPr>
+                </a:tc>
+                <a:tc>
+                  <a:txBody>
+                    <a:bodyPr/>
+                    <a:lstStyle/>
+                    <a:p>
+                      <a:pPr algn="ctr"/>
+                      <a:r>
+                        <a:rPr sz="950" b="0" i="0" dirty="0">
+                          <a:solidFill>
+                            <a:schemeClr val="tx1"/>
+                          </a:solidFill>
+                          <a:latin typeface="Avenir Next LT Pro"/>
+                        </a:rPr>
+                        <a:t>~25–55×</a:t>
+                      </a:r>
+                    </a:p>
+                  </a:txBody>
+                  <a:tcPr marL="73152" marR="73152" marT="18288" marB="18288" anchor="ctr">
+                    <a:solidFill>
+                      <a:srgbClr val="FFFFFF"/>
+                    </a:solidFill>
+                  </a:tcPr>
+                </a:tc>
+                <a:extLst>
+                  <a:ext uri="{0D108BD9-81ED-4DB2-BD59-A6C34878D82A}">
+                    <a16:rowId xmlns:a16="http://schemas.microsoft.com/office/drawing/2014/main" val="10003"/>
+                  </a:ext>
+                </a:extLst>
+              </a:tr>
+            </a:tbl>
+          </a:graphicData>
+        </a:graphic>
+      </p:graphicFrame>
+      <p:sp>
+        <p:nvSpPr>
+          <p:cNvPr id="7" name="TextBox 6"/>
+          <p:cNvSpPr txBox="1"/>
+          <p:nvPr/>
+        </p:nvSpPr>
+        <p:spPr>
+          <a:xfrm>
+            <a:off x="457200" y="3657600"/>
+            <a:ext cx="8229600" cy="415498"/>
+          </a:xfrm>
+          <a:prstGeom prst="rect">
+            <a:avLst/>
+          </a:prstGeom>
+          <a:noFill/>
+        </p:spPr>
+        <p:txBody>
+          <a:bodyPr wrap="square">
+            <a:spAutoFit/>
+          </a:bodyPr>
+          <a:lstStyle/>
+          <a:p>
+            <a:r>
+              <a:rPr sz="1100" b="1" i="0" dirty="0">
+                <a:latin typeface="Avenir Next LT Pro Demi"/>
+              </a:rPr>
+              <a:t>Key distinction: RH tracks housing TRANSACTIONS (turnover), not prices</a:t>
+            </a:r>
+          </a:p>
+          <a:p>
+            <a:r>
+              <a:rPr sz="1000" b="0" i="0" dirty="0">
+                <a:solidFill>
+                  <a:srgbClr val="5A5A5A"/>
+                </a:solidFill>
+                <a:latin typeface="Avenir Next LT Pro"/>
+              </a:rPr>
+              <a:t>Base case assumes NO recovery — a rate-driven turn is upside, not a requirement</a:t>
+            </a:r>
+          </a:p>
+        </p:txBody>
+      </p:sp>
+      <p:sp>
+        <p:nvSpPr>
+          <p:cNvPr id="8" name="TextBox 7"/>
+          <p:cNvSpPr txBox="1"/>
+          <p:nvPr/>
+        </p:nvSpPr>
+        <p:spPr>
+          <a:xfrm>
+            <a:off x="457200" y="5989320"/>
+            <a:ext cx="8229600" cy="365760"/>
+          </a:xfrm>
+          <a:prstGeom prst="rect">
+            <a:avLst/>
+          </a:prstGeom>
+          <a:noFill/>
+        </p:spPr>
+        <p:txBody>
+          <a:bodyPr wrap="square">
+            <a:spAutoFit/>
+          </a:bodyPr>
+          <a:lstStyle/>
+          <a:p>
+            <a:r>
+              <a:rPr sz="800" i="1">
+                <a:solidFill>
+                  <a:srgbClr val="707070"/>
+                </a:solidFill>
+                <a:latin typeface="Avenir Next LT Pro"/>
+              </a:rPr>
+              <a:t>EPS ≈ (EBITDA − ~$150M D&amp;A − ~$215M interest) × (1 − 25% tax) ÷ ~19M shares. Illustrative, not a forecast.</a:t>
+            </a:r>
+          </a:p>
+        </p:txBody>
+      </p:sp>
+    </p:spTree>
+  </p:cSld>
+  <p:clrMapOvr>
+    <a:masterClrMapping/>
+  </p:clrMapOvr>
+</p:sld>
+</file>
+
+<file path=ppt/slides/slide11.xml><?xml version="1.0" encoding="utf-8"?>
+<p:sld xmlns:a="http://schemas.openxmlformats.org/drawingml/2006/main" xmlns:r="http://schemas.openxmlformats.org/officeDocument/2006/relationships" xmlns:p="http://schemas.openxmlformats.org/presentationml/2006/main">
+  <p:cSld>
+    <p:spTree>
+      <p:nvGrpSpPr>
+        <p:cNvPr id="1" name=""/>
+        <p:cNvGrpSpPr/>
+        <p:nvPr/>
+      </p:nvGrpSpPr>
+      <p:grpSpPr>
+        <a:xfrm>
+          <a:off x="0" y="0"/>
+          <a:ext cx="0" cy="0"/>
+          <a:chOff x="0" y="0"/>
+          <a:chExt cx="0" cy="0"/>
+        </a:xfrm>
+      </p:grpSpPr>
+      <p:sp>
+        <p:nvSpPr>
           <p:cNvPr id="2" name="Title 1">
             <a:extLst>
               <a:ext uri="{FF2B5EF4-FFF2-40B4-BE49-F238E27FC236}">
@@ -5257,7 +6175,7 @@
 </p:sld>
 </file>
 
-<file path=ppt/slides/slide11.xml><?xml version="1.0" encoding="utf-8"?>
+<file path=ppt/slides/slide12.xml><?xml version="1.0" encoding="utf-8"?>
 <p:sld xmlns:a="http://schemas.openxmlformats.org/drawingml/2006/main" xmlns:r="http://schemas.openxmlformats.org/officeDocument/2006/relationships" xmlns:p="http://schemas.openxmlformats.org/presentationml/2006/main">
   <p:cSld>
     <p:spTree>
@@ -6204,7 +7122,7 @@
 </p:sld>
 </file>
 
-<file path=ppt/slides/slide12.xml><?xml version="1.0" encoding="utf-8"?>
+<file path=ppt/slides/slide13.xml><?xml version="1.0" encoding="utf-8"?>
 <p:sld xmlns:a="http://schemas.openxmlformats.org/drawingml/2006/main" xmlns:r="http://schemas.openxmlformats.org/officeDocument/2006/relationships" xmlns:p="http://schemas.openxmlformats.org/presentationml/2006/main">
   <p:cSld>
     <p:spTree>
@@ -7046,535 +7964,6 @@
           <a:p>
             <a:pPr algn="ctr"/>
             <a:endParaRPr/>
-          </a:p>
-        </p:txBody>
-      </p:sp>
-    </p:spTree>
-  </p:cSld>
-  <p:clrMapOvr>
-    <a:masterClrMapping/>
-  </p:clrMapOvr>
-</p:sld>
-</file>
-
-<file path=ppt/slides/slide13.xml><?xml version="1.0" encoding="utf-8"?>
-<p:sld xmlns:a="http://schemas.openxmlformats.org/drawingml/2006/main" xmlns:p="http://schemas.openxmlformats.org/presentationml/2006/main" xmlns:r="http://schemas.openxmlformats.org/officeDocument/2006/relationships">
-  <p:cSld>
-    <p:spTree>
-      <p:nvGrpSpPr>
-        <p:cNvPr id="1" name=""/>
-        <p:cNvGrpSpPr/>
-        <p:nvPr/>
-      </p:nvGrpSpPr>
-      <p:grpSpPr/>
-      <p:sp>
-        <p:nvSpPr>
-          <p:cNvPr id="2" name="TextBox 1"/>
-          <p:cNvSpPr txBox="1"/>
-          <p:nvPr/>
-        </p:nvSpPr>
-        <p:spPr>
-          <a:xfrm>
-            <a:off x="457200" y="365760"/>
-            <a:ext cx="8229600" cy="548640"/>
-          </a:xfrm>
-          <a:prstGeom prst="rect">
-            <a:avLst/>
-          </a:prstGeom>
-          <a:noFill/>
-        </p:spPr>
-        <p:txBody>
-          <a:bodyPr wrap="square">
-            <a:spAutoFit/>
-          </a:bodyPr>
-          <a:lstStyle/>
-          <a:p>
-            <a:r>
-              <a:rPr sz="2200" b="0">
-                <a:solidFill>
-                  <a:srgbClr val="000000"/>
-                </a:solidFill>
-                <a:latin typeface="Avenir Next LT Pro Demi"/>
-              </a:rPr>
-              <a:t>How RH Got Here</a:t>
-            </a:r>
-          </a:p>
-        </p:txBody>
-      </p:sp>
-      <p:sp>
-        <p:nvSpPr>
-          <p:cNvPr id="3" name="Rectangle 2"/>
-          <p:cNvSpPr/>
-          <p:nvPr/>
-        </p:nvSpPr>
-        <p:spPr>
-          <a:xfrm>
-            <a:off x="457200" y="960120"/>
-            <a:ext cx="8229600" cy="25603"/>
-          </a:xfrm>
-          <a:prstGeom prst="rect">
-            <a:avLst/>
-          </a:prstGeom>
-          <a:solidFill>
-            <a:srgbClr val="156082"/>
-          </a:solidFill>
-          <a:ln>
-            <a:noFill/>
-          </a:ln>
-        </p:spPr>
-        <p:style>
-          <a:lnRef idx="1">
-            <a:schemeClr val="accent1"/>
-          </a:lnRef>
-          <a:fillRef idx="3">
-            <a:schemeClr val="accent1"/>
-          </a:fillRef>
-          <a:effectRef idx="2">
-            <a:schemeClr val="accent1"/>
-          </a:effectRef>
-          <a:fontRef idx="minor">
-            <a:schemeClr val="lt1"/>
-          </a:fontRef>
-        </p:style>
-        <p:txBody>
-          <a:bodyPr rtlCol="0" anchor="ctr"/>
-          <a:lstStyle/>
-          <a:p>
-            <a:pPr algn="ctr"/>
-          </a:p>
-        </p:txBody>
-      </p:sp>
-      <p:sp>
-        <p:nvSpPr>
-          <p:cNvPr id="4" name="Rectangle 3"/>
-          <p:cNvSpPr/>
-          <p:nvPr/>
-        </p:nvSpPr>
-        <p:spPr>
-          <a:xfrm>
-            <a:off x="457200" y="1371600"/>
-            <a:ext cx="82296" cy="1143000"/>
-          </a:xfrm>
-          <a:prstGeom prst="rect">
-            <a:avLst/>
-          </a:prstGeom>
-          <a:solidFill>
-            <a:srgbClr val="156082"/>
-          </a:solidFill>
-          <a:ln>
-            <a:noFill/>
-          </a:ln>
-        </p:spPr>
-        <p:style>
-          <a:lnRef idx="1">
-            <a:schemeClr val="accent1"/>
-          </a:lnRef>
-          <a:fillRef idx="3">
-            <a:schemeClr val="accent1"/>
-          </a:fillRef>
-          <a:effectRef idx="2">
-            <a:schemeClr val="accent1"/>
-          </a:effectRef>
-          <a:fontRef idx="minor">
-            <a:schemeClr val="lt1"/>
-          </a:fontRef>
-        </p:style>
-        <p:txBody>
-          <a:bodyPr rtlCol="0" anchor="ctr"/>
-          <a:lstStyle/>
-          <a:p>
-            <a:pPr algn="ctr"/>
-          </a:p>
-        </p:txBody>
-      </p:sp>
-      <p:sp>
-        <p:nvSpPr>
-          <p:cNvPr id="5" name="TextBox 4"/>
-          <p:cNvSpPr txBox="1"/>
-          <p:nvPr/>
-        </p:nvSpPr>
-        <p:spPr>
-          <a:xfrm>
-            <a:off x="658368" y="1371600"/>
-            <a:ext cx="1920240" cy="1143000"/>
-          </a:xfrm>
-          <a:prstGeom prst="rect">
-            <a:avLst/>
-          </a:prstGeom>
-          <a:noFill/>
-        </p:spPr>
-        <p:txBody>
-          <a:bodyPr wrap="square" anchor="ctr">
-            <a:spAutoFit/>
-          </a:bodyPr>
-          <a:lstStyle/>
-          <a:p>
-            <a:r>
-              <a:rPr sz="1400" b="1">
-                <a:solidFill>
-                  <a:srgbClr val="000000"/>
-                </a:solidFill>
-                <a:latin typeface="Avenir Next LT Pro Demi"/>
-              </a:rPr>
-              <a:t>The Build</a:t>
-            </a:r>
-          </a:p>
-          <a:p>
-            <a:r>
-              <a:rPr sz="1000" b="0">
-                <a:solidFill>
-                  <a:srgbClr val="707070"/>
-                </a:solidFill>
-                <a:latin typeface="Avenir Next LT Pro"/>
-              </a:rPr>
-              <a:t>Pre-2020</a:t>
-            </a:r>
-          </a:p>
-        </p:txBody>
-      </p:sp>
-      <p:sp>
-        <p:nvSpPr>
-          <p:cNvPr id="6" name="TextBox 5"/>
-          <p:cNvSpPr txBox="1"/>
-          <p:nvPr/>
-        </p:nvSpPr>
-        <p:spPr>
-          <a:xfrm>
-            <a:off x="2743200" y="1371600"/>
-            <a:ext cx="5943600" cy="1143000"/>
-          </a:xfrm>
-          <a:prstGeom prst="rect">
-            <a:avLst/>
-          </a:prstGeom>
-          <a:noFill/>
-        </p:spPr>
-        <p:txBody>
-          <a:bodyPr wrap="square" anchor="ctr">
-            <a:spAutoFit/>
-          </a:bodyPr>
-          <a:lstStyle/>
-          <a:p>
-            <a:r>
-              <a:rPr sz="1250" b="0">
-                <a:solidFill>
-                  <a:srgbClr val="000000"/>
-                </a:solidFill>
-                <a:latin typeface="Avenir Next LT Pro"/>
-              </a:rPr>
-              <a:t>Friedman turns RH into a luxury Gallery brand.</a:t>
-            </a:r>
-          </a:p>
-        </p:txBody>
-      </p:sp>
-      <p:sp>
-        <p:nvSpPr>
-          <p:cNvPr id="7" name="Rectangle 6"/>
-          <p:cNvSpPr/>
-          <p:nvPr/>
-        </p:nvSpPr>
-        <p:spPr>
-          <a:xfrm>
-            <a:off x="457200" y="2679191"/>
-            <a:ext cx="82296" cy="1143000"/>
-          </a:xfrm>
-          <a:prstGeom prst="rect">
-            <a:avLst/>
-          </a:prstGeom>
-          <a:solidFill>
-            <a:srgbClr val="E97132"/>
-          </a:solidFill>
-          <a:ln>
-            <a:noFill/>
-          </a:ln>
-        </p:spPr>
-        <p:style>
-          <a:lnRef idx="1">
-            <a:schemeClr val="accent1"/>
-          </a:lnRef>
-          <a:fillRef idx="3">
-            <a:schemeClr val="accent1"/>
-          </a:fillRef>
-          <a:effectRef idx="2">
-            <a:schemeClr val="accent1"/>
-          </a:effectRef>
-          <a:fontRef idx="minor">
-            <a:schemeClr val="lt1"/>
-          </a:fontRef>
-        </p:style>
-        <p:txBody>
-          <a:bodyPr rtlCol="0" anchor="ctr"/>
-          <a:lstStyle/>
-          <a:p>
-            <a:pPr algn="ctr"/>
-          </a:p>
-        </p:txBody>
-      </p:sp>
-      <p:sp>
-        <p:nvSpPr>
-          <p:cNvPr id="8" name="TextBox 7"/>
-          <p:cNvSpPr txBox="1"/>
-          <p:nvPr/>
-        </p:nvSpPr>
-        <p:spPr>
-          <a:xfrm>
-            <a:off x="658368" y="2679191"/>
-            <a:ext cx="1920240" cy="1143000"/>
-          </a:xfrm>
-          <a:prstGeom prst="rect">
-            <a:avLst/>
-          </a:prstGeom>
-          <a:noFill/>
-        </p:spPr>
-        <p:txBody>
-          <a:bodyPr wrap="square" anchor="ctr">
-            <a:spAutoFit/>
-          </a:bodyPr>
-          <a:lstStyle/>
-          <a:p>
-            <a:r>
-              <a:rPr sz="1400" b="1">
-                <a:solidFill>
-                  <a:srgbClr val="000000"/>
-                </a:solidFill>
-                <a:latin typeface="Avenir Next LT Pro Demi"/>
-              </a:rPr>
-              <a:t>The Peak</a:t>
-            </a:r>
-          </a:p>
-          <a:p>
-            <a:r>
-              <a:rPr sz="1000" b="0">
-                <a:solidFill>
-                  <a:srgbClr val="707070"/>
-                </a:solidFill>
-                <a:latin typeface="Avenir Next LT Pro"/>
-              </a:rPr>
-              <a:t>FY2022</a:t>
-            </a:r>
-          </a:p>
-        </p:txBody>
-      </p:sp>
-      <p:sp>
-        <p:nvSpPr>
-          <p:cNvPr id="9" name="TextBox 8"/>
-          <p:cNvSpPr txBox="1"/>
-          <p:nvPr/>
-        </p:nvSpPr>
-        <p:spPr>
-          <a:xfrm>
-            <a:off x="2743200" y="2679191"/>
-            <a:ext cx="5943600" cy="1143000"/>
-          </a:xfrm>
-          <a:prstGeom prst="rect">
-            <a:avLst/>
-          </a:prstGeom>
-          <a:noFill/>
-        </p:spPr>
-        <p:txBody>
-          <a:bodyPr wrap="square" anchor="ctr">
-            <a:spAutoFit/>
-          </a:bodyPr>
-          <a:lstStyle/>
-          <a:p>
-            <a:r>
-              <a:rPr sz="1250" b="0">
-                <a:solidFill>
-                  <a:srgbClr val="000000"/>
-                </a:solidFill>
-                <a:latin typeface="Avenir Next LT Pro"/>
-              </a:rPr>
-              <a:t>~$3.6B revenue — then buys back ~7.6M shares at ~$269–321, debt-funded.</a:t>
-            </a:r>
-          </a:p>
-        </p:txBody>
-      </p:sp>
-      <p:sp>
-        <p:nvSpPr>
-          <p:cNvPr id="10" name="Rectangle 9"/>
-          <p:cNvSpPr/>
-          <p:nvPr/>
-        </p:nvSpPr>
-        <p:spPr>
-          <a:xfrm>
-            <a:off x="457200" y="3986783"/>
-            <a:ext cx="82296" cy="1143000"/>
-          </a:xfrm>
-          <a:prstGeom prst="rect">
-            <a:avLst/>
-          </a:prstGeom>
-          <a:solidFill>
-            <a:srgbClr val="B03030"/>
-          </a:solidFill>
-          <a:ln>
-            <a:noFill/>
-          </a:ln>
-        </p:spPr>
-        <p:style>
-          <a:lnRef idx="1">
-            <a:schemeClr val="accent1"/>
-          </a:lnRef>
-          <a:fillRef idx="3">
-            <a:schemeClr val="accent1"/>
-          </a:fillRef>
-          <a:effectRef idx="2">
-            <a:schemeClr val="accent1"/>
-          </a:effectRef>
-          <a:fontRef idx="minor">
-            <a:schemeClr val="lt1"/>
-          </a:fontRef>
-        </p:style>
-        <p:txBody>
-          <a:bodyPr rtlCol="0" anchor="ctr"/>
-          <a:lstStyle/>
-          <a:p>
-            <a:pPr algn="ctr"/>
-          </a:p>
-        </p:txBody>
-      </p:sp>
-      <p:sp>
-        <p:nvSpPr>
-          <p:cNvPr id="11" name="TextBox 10"/>
-          <p:cNvSpPr txBox="1"/>
-          <p:nvPr/>
-        </p:nvSpPr>
-        <p:spPr>
-          <a:xfrm>
-            <a:off x="658368" y="3986783"/>
-            <a:ext cx="1920240" cy="1143000"/>
-          </a:xfrm>
-          <a:prstGeom prst="rect">
-            <a:avLst/>
-          </a:prstGeom>
-          <a:noFill/>
-        </p:spPr>
-        <p:txBody>
-          <a:bodyPr wrap="square" anchor="ctr">
-            <a:spAutoFit/>
-          </a:bodyPr>
-          <a:lstStyle/>
-          <a:p>
-            <a:r>
-              <a:rPr sz="1400" b="1">
-                <a:solidFill>
-                  <a:srgbClr val="000000"/>
-                </a:solidFill>
-                <a:latin typeface="Avenir Next LT Pro Demi"/>
-              </a:rPr>
-              <a:t>The Fall</a:t>
-            </a:r>
-          </a:p>
-          <a:p>
-            <a:r>
-              <a:rPr sz="1000" b="0">
-                <a:solidFill>
-                  <a:srgbClr val="707070"/>
-                </a:solidFill>
-                <a:latin typeface="Avenir Next LT Pro"/>
-              </a:rPr>
-              <a:t>FY23–24</a:t>
-            </a:r>
-          </a:p>
-        </p:txBody>
-      </p:sp>
-      <p:sp>
-        <p:nvSpPr>
-          <p:cNvPr id="12" name="TextBox 11"/>
-          <p:cNvSpPr txBox="1"/>
-          <p:nvPr/>
-        </p:nvSpPr>
-        <p:spPr>
-          <a:xfrm>
-            <a:off x="2743200" y="3986783"/>
-            <a:ext cx="5943600" cy="1143000"/>
-          </a:xfrm>
-          <a:prstGeom prst="rect">
-            <a:avLst/>
-          </a:prstGeom>
-          <a:noFill/>
-        </p:spPr>
-        <p:txBody>
-          <a:bodyPr wrap="square" anchor="ctr">
-            <a:spAutoFit/>
-          </a:bodyPr>
-          <a:lstStyle/>
-          <a:p>
-            <a:r>
-              <a:rPr sz="1250" b="0">
-                <a:solidFill>
-                  <a:srgbClr val="000000"/>
-                </a:solidFill>
-                <a:latin typeface="Avenir Next LT Pro"/>
-              </a:rPr>
-              <a:t>Housing freezes; revenue falls to ~$3.03B. Debt now ~$2.4B, ~4× levered.</a:t>
-            </a:r>
-          </a:p>
-        </p:txBody>
-      </p:sp>
-      <p:sp>
-        <p:nvSpPr>
-          <p:cNvPr id="13" name="TextBox 12"/>
-          <p:cNvSpPr txBox="1"/>
-          <p:nvPr/>
-        </p:nvSpPr>
-        <p:spPr>
-          <a:xfrm>
-            <a:off x="457200" y="5806440"/>
-            <a:ext cx="8229600" cy="365760"/>
-          </a:xfrm>
-          <a:prstGeom prst="rect">
-            <a:avLst/>
-          </a:prstGeom>
-          <a:noFill/>
-        </p:spPr>
-        <p:txBody>
-          <a:bodyPr wrap="square">
-            <a:spAutoFit/>
-          </a:bodyPr>
-          <a:lstStyle/>
-          <a:p>
-            <a:r>
-              <a:rPr sz="1100" b="1">
-                <a:solidFill>
-                  <a:srgbClr val="000000"/>
-                </a:solidFill>
-                <a:latin typeface="Avenir Next LT Pro Demi"/>
-              </a:rPr>
-              <a:t>Partly self-inflicted: leveraged buybacks at the top, then the cycle turned.</a:t>
-            </a:r>
-          </a:p>
-        </p:txBody>
-      </p:sp>
-      <p:sp>
-        <p:nvSpPr>
-          <p:cNvPr id="14" name="TextBox 13"/>
-          <p:cNvSpPr txBox="1"/>
-          <p:nvPr/>
-        </p:nvSpPr>
-        <p:spPr>
-          <a:xfrm>
-            <a:off x="457200" y="6355080"/>
-            <a:ext cx="8229600" cy="365760"/>
-          </a:xfrm>
-          <a:prstGeom prst="rect">
-            <a:avLst/>
-          </a:prstGeom>
-          <a:noFill/>
-        </p:spPr>
-        <p:txBody>
-          <a:bodyPr wrap="none">
-            <a:spAutoFit/>
-          </a:bodyPr>
-          <a:lstStyle/>
-          <a:p>
-            <a:r>
-              <a:rPr sz="750" b="0" i="1">
-                <a:solidFill>
-                  <a:srgbClr val="707070"/>
-                </a:solidFill>
-                <a:latin typeface="Avenir Next LT Pro"/>
-              </a:rPr>
-              <a:t>Source: RH FY2025 Form 10-K</a:t>
-            </a:r>
           </a:p>
         </p:txBody>
       </p:sp>
@@ -7625,7 +8014,7 @@
                 </a:solidFill>
                 <a:latin typeface="Avenir Next LT Pro Demi"/>
               </a:rPr>
-              <a:t>The Recovery Plan</a:t>
+              <a:t>How RH Got Here</a:t>
             </a:r>
           </a:p>
         </p:txBody>
@@ -7682,7 +8071,7 @@
         <p:spPr>
           <a:xfrm>
             <a:off x="457200" y="1371600"/>
-            <a:ext cx="82296" cy="960120"/>
+            <a:ext cx="82296" cy="1143000"/>
           </a:xfrm>
           <a:prstGeom prst="rect">
             <a:avLst/>
@@ -7725,7 +8114,7 @@
         <p:spPr>
           <a:xfrm>
             <a:off x="658368" y="1371600"/>
-            <a:ext cx="7955279" cy="960120"/>
+            <a:ext cx="1920240" cy="1143000"/>
           </a:xfrm>
           <a:prstGeom prst="rect">
             <a:avLst/>
@@ -7739,14 +8128,50 @@
           <a:lstStyle/>
           <a:p>
             <a:r>
-              <a:rPr sz="1350" b="1">
+              <a:rPr sz="1400" b="1">
                 <a:solidFill>
                   <a:srgbClr val="000000"/>
                 </a:solidFill>
                 <a:latin typeface="Avenir Next LT Pro Demi"/>
               </a:rPr>
-              <a:t>Product transformation  —  </a:t>
-            </a:r>
+              <a:t>The Build</a:t>
+            </a:r>
+          </a:p>
+          <a:p>
+            <a:r>
+              <a:rPr sz="1000" b="0">
+                <a:solidFill>
+                  <a:srgbClr val="707070"/>
+                </a:solidFill>
+                <a:latin typeface="Avenir Next LT Pro"/>
+              </a:rPr>
+              <a:t>Pre-2020</a:t>
+            </a:r>
+          </a:p>
+        </p:txBody>
+      </p:sp>
+      <p:sp>
+        <p:nvSpPr>
+          <p:cNvPr id="6" name="TextBox 5"/>
+          <p:cNvSpPr txBox="1"/>
+          <p:nvPr/>
+        </p:nvSpPr>
+        <p:spPr>
+          <a:xfrm>
+            <a:off x="2743200" y="1371600"/>
+            <a:ext cx="5943600" cy="1143000"/>
+          </a:xfrm>
+          <a:prstGeom prst="rect">
+            <a:avLst/>
+          </a:prstGeom>
+          <a:noFill/>
+        </p:spPr>
+        <p:txBody>
+          <a:bodyPr wrap="square" anchor="ctr">
+            <a:spAutoFit/>
+          </a:bodyPr>
+          <a:lstStyle/>
+          <a:p>
             <a:r>
               <a:rPr sz="1250" b="0">
                 <a:solidFill>
@@ -7754,27 +8179,27 @@
                 </a:solidFill>
                 <a:latin typeface="Avenir Next LT Pro"/>
               </a:rPr>
-              <a:t>New collections and refreshed Sourcebooks.</a:t>
-            </a:r>
-          </a:p>
-        </p:txBody>
-      </p:sp>
-      <p:sp>
-        <p:nvSpPr>
-          <p:cNvPr id="6" name="Rectangle 5"/>
+              <a:t>Friedman turns RH into a luxury Gallery brand.</a:t>
+            </a:r>
+          </a:p>
+        </p:txBody>
+      </p:sp>
+      <p:sp>
+        <p:nvSpPr>
+          <p:cNvPr id="7" name="Rectangle 6"/>
           <p:cNvSpPr/>
           <p:nvPr/>
         </p:nvSpPr>
         <p:spPr>
           <a:xfrm>
-            <a:off x="457200" y="2496312"/>
-            <a:ext cx="82296" cy="960120"/>
+            <a:off x="457200" y="2679191"/>
+            <a:ext cx="82296" cy="1143000"/>
           </a:xfrm>
           <a:prstGeom prst="rect">
             <a:avLst/>
           </a:prstGeom>
           <a:solidFill>
-            <a:srgbClr val="196B24"/>
+            <a:srgbClr val="E97132"/>
           </a:solidFill>
           <a:ln>
             <a:noFill/>
@@ -7804,14 +8229,14 @@
       </p:sp>
       <p:sp>
         <p:nvSpPr>
-          <p:cNvPr id="7" name="TextBox 6"/>
+          <p:cNvPr id="8" name="TextBox 7"/>
           <p:cNvSpPr txBox="1"/>
           <p:nvPr/>
         </p:nvSpPr>
         <p:spPr>
           <a:xfrm>
-            <a:off x="658368" y="2496312"/>
-            <a:ext cx="7955279" cy="960120"/>
+            <a:off x="658368" y="2679191"/>
+            <a:ext cx="1920240" cy="1143000"/>
           </a:xfrm>
           <a:prstGeom prst="rect">
             <a:avLst/>
@@ -7825,14 +8250,50 @@
           <a:lstStyle/>
           <a:p>
             <a:r>
-              <a:rPr sz="1350" b="1">
+              <a:rPr sz="1400" b="1">
                 <a:solidFill>
                   <a:srgbClr val="000000"/>
                 </a:solidFill>
                 <a:latin typeface="Avenir Next LT Pro Demi"/>
               </a:rPr>
-              <a:t>Gallery expansion  —  </a:t>
-            </a:r>
+              <a:t>The Peak</a:t>
+            </a:r>
+          </a:p>
+          <a:p>
+            <a:r>
+              <a:rPr sz="1000" b="0">
+                <a:solidFill>
+                  <a:srgbClr val="707070"/>
+                </a:solidFill>
+                <a:latin typeface="Avenir Next LT Pro"/>
+              </a:rPr>
+              <a:t>FY2022</a:t>
+            </a:r>
+          </a:p>
+        </p:txBody>
+      </p:sp>
+      <p:sp>
+        <p:nvSpPr>
+          <p:cNvPr id="9" name="TextBox 8"/>
+          <p:cNvSpPr txBox="1"/>
+          <p:nvPr/>
+        </p:nvSpPr>
+        <p:spPr>
+          <a:xfrm>
+            <a:off x="2743200" y="2679191"/>
+            <a:ext cx="5943600" cy="1143000"/>
+          </a:xfrm>
+          <a:prstGeom prst="rect">
+            <a:avLst/>
+          </a:prstGeom>
+          <a:noFill/>
+        </p:spPr>
+        <p:txBody>
+          <a:bodyPr wrap="square" anchor="ctr">
+            <a:spAutoFit/>
+          </a:bodyPr>
+          <a:lstStyle/>
+          <a:p>
             <a:r>
               <a:rPr sz="1250" b="0">
                 <a:solidFill>
@@ -7840,27 +8301,27 @@
                 </a:solidFill>
                 <a:latin typeface="Avenir Next LT Pro"/>
               </a:rPr>
-              <a:t>Every major U.S./Canada market — RH's ~$5–6B opportunity.</a:t>
-            </a:r>
-          </a:p>
-        </p:txBody>
-      </p:sp>
-      <p:sp>
-        <p:nvSpPr>
-          <p:cNvPr id="8" name="Rectangle 7"/>
+              <a:t>~$3.6B revenue — then buys back ~7.6M shares at ~$269–321, debt-funded.</a:t>
+            </a:r>
+          </a:p>
+        </p:txBody>
+      </p:sp>
+      <p:sp>
+        <p:nvSpPr>
+          <p:cNvPr id="10" name="Rectangle 9"/>
           <p:cNvSpPr/>
           <p:nvPr/>
         </p:nvSpPr>
         <p:spPr>
           <a:xfrm>
-            <a:off x="457200" y="3621024"/>
-            <a:ext cx="82296" cy="960120"/>
+            <a:off x="457200" y="3986783"/>
+            <a:ext cx="82296" cy="1143000"/>
           </a:xfrm>
           <a:prstGeom prst="rect">
             <a:avLst/>
           </a:prstGeom>
           <a:solidFill>
-            <a:srgbClr val="E97132"/>
+            <a:srgbClr val="B03030"/>
           </a:solidFill>
           <a:ln>
             <a:noFill/>
@@ -7890,14 +8351,14 @@
       </p:sp>
       <p:sp>
         <p:nvSpPr>
-          <p:cNvPr id="9" name="TextBox 8"/>
+          <p:cNvPr id="11" name="TextBox 10"/>
           <p:cNvSpPr txBox="1"/>
           <p:nvPr/>
         </p:nvSpPr>
         <p:spPr>
           <a:xfrm>
-            <a:off x="658368" y="3621024"/>
-            <a:ext cx="7955279" cy="960120"/>
+            <a:off x="658368" y="3986783"/>
+            <a:ext cx="1920240" cy="1143000"/>
           </a:xfrm>
           <a:prstGeom prst="rect">
             <a:avLst/>
@@ -7911,79 +8372,38 @@
           <a:lstStyle/>
           <a:p>
             <a:r>
-              <a:rPr sz="1350" b="1">
+              <a:rPr sz="1400" b="1">
                 <a:solidFill>
                   <a:srgbClr val="000000"/>
                 </a:solidFill>
                 <a:latin typeface="Avenir Next LT Pro Demi"/>
               </a:rPr>
-              <a:t>Move upmarket  —  </a:t>
-            </a:r>
-            <a:r>
-              <a:rPr sz="1250" b="0">
-                <a:solidFill>
-                  <a:srgbClr val="000000"/>
+              <a:t>The Fall</a:t>
+            </a:r>
+          </a:p>
+          <a:p>
+            <a:r>
+              <a:rPr sz="1000" b="0">
+                <a:solidFill>
+                  <a:srgbClr val="707070"/>
                 </a:solidFill>
                 <a:latin typeface="Avenir Next LT Pro"/>
               </a:rPr>
-              <a:t>Estates targets the rate-immune cash buyer.</a:t>
-            </a:r>
-          </a:p>
-        </p:txBody>
-      </p:sp>
-      <p:sp>
-        <p:nvSpPr>
-          <p:cNvPr id="10" name="Rectangle 9"/>
-          <p:cNvSpPr/>
-          <p:nvPr/>
-        </p:nvSpPr>
-        <p:spPr>
-          <a:xfrm>
-            <a:off x="457200" y="4745736"/>
-            <a:ext cx="82296" cy="960120"/>
-          </a:xfrm>
-          <a:prstGeom prst="rect">
-            <a:avLst/>
-          </a:prstGeom>
-          <a:solidFill>
-            <a:srgbClr val="156082"/>
-          </a:solidFill>
-          <a:ln>
-            <a:noFill/>
-          </a:ln>
-        </p:spPr>
-        <p:style>
-          <a:lnRef idx="1">
-            <a:schemeClr val="accent1"/>
-          </a:lnRef>
-          <a:fillRef idx="3">
-            <a:schemeClr val="accent1"/>
-          </a:fillRef>
-          <a:effectRef idx="2">
-            <a:schemeClr val="accent1"/>
-          </a:effectRef>
-          <a:fontRef idx="minor">
-            <a:schemeClr val="lt1"/>
-          </a:fontRef>
-        </p:style>
-        <p:txBody>
-          <a:bodyPr rtlCol="0" anchor="ctr"/>
-          <a:lstStyle/>
-          <a:p>
-            <a:pPr algn="ctr"/>
-          </a:p>
-        </p:txBody>
-      </p:sp>
-      <p:sp>
-        <p:nvSpPr>
-          <p:cNvPr id="11" name="TextBox 10"/>
+              <a:t>FY23–24</a:t>
+            </a:r>
+          </a:p>
+        </p:txBody>
+      </p:sp>
+      <p:sp>
+        <p:nvSpPr>
+          <p:cNvPr id="12" name="TextBox 11"/>
           <p:cNvSpPr txBox="1"/>
           <p:nvPr/>
         </p:nvSpPr>
         <p:spPr>
           <a:xfrm>
-            <a:off x="658368" y="4745736"/>
-            <a:ext cx="7955279" cy="960120"/>
+            <a:off x="2743200" y="3986783"/>
+            <a:ext cx="5943600" cy="1143000"/>
           </a:xfrm>
           <a:prstGeom prst="rect">
             <a:avLst/>
@@ -7997,29 +8417,54 @@
           <a:lstStyle/>
           <a:p>
             <a:r>
-              <a:rPr sz="1350" b="1">
+              <a:rPr sz="1250" b="0">
                 <a:solidFill>
                   <a:srgbClr val="000000"/>
                 </a:solidFill>
+                <a:latin typeface="Avenir Next LT Pro"/>
+              </a:rPr>
+              <a:t>Housing freezes; revenue falls to ~$3.03B. Debt now ~$2.4B, ~4× levered.</a:t>
+            </a:r>
+          </a:p>
+        </p:txBody>
+      </p:sp>
+      <p:sp>
+        <p:nvSpPr>
+          <p:cNvPr id="13" name="TextBox 12"/>
+          <p:cNvSpPr txBox="1"/>
+          <p:nvPr/>
+        </p:nvSpPr>
+        <p:spPr>
+          <a:xfrm>
+            <a:off x="457200" y="5806440"/>
+            <a:ext cx="8229600" cy="365760"/>
+          </a:xfrm>
+          <a:prstGeom prst="rect">
+            <a:avLst/>
+          </a:prstGeom>
+          <a:noFill/>
+        </p:spPr>
+        <p:txBody>
+          <a:bodyPr wrap="square">
+            <a:spAutoFit/>
+          </a:bodyPr>
+          <a:lstStyle/>
+          <a:p>
+            <a:r>
+              <a:rPr sz="1100" b="1">
+                <a:solidFill>
+                  <a:srgbClr val="000000"/>
+                </a:solidFill>
                 <a:latin typeface="Avenir Next LT Pro Demi"/>
               </a:rPr>
-              <a:t>Global + platform  —  </a:t>
-            </a:r>
-            <a:r>
-              <a:rPr sz="1250" b="0">
-                <a:solidFill>
-                  <a:srgbClr val="000000"/>
-                </a:solidFill>
-                <a:latin typeface="Avenir Next LT Pro"/>
-              </a:rPr>
-              <a:t>RH England, Guesthouses, hospitality &amp; F&amp;B.</a:t>
-            </a:r>
-          </a:p>
-        </p:txBody>
-      </p:sp>
-      <p:sp>
-        <p:nvSpPr>
-          <p:cNvPr id="12" name="TextBox 11"/>
+              <a:t>Partly self-inflicted: leveraged buybacks at the top, then the cycle turned.</a:t>
+            </a:r>
+          </a:p>
+        </p:txBody>
+      </p:sp>
+      <p:sp>
+        <p:nvSpPr>
+          <p:cNvPr id="14" name="TextBox 13"/>
           <p:cNvSpPr txBox="1"/>
           <p:nvPr/>
         </p:nvSpPr>
@@ -8098,7 +8543,7 @@
                 </a:solidFill>
                 <a:latin typeface="Avenir Next LT Pro Demi"/>
               </a:rPr>
-              <a:t>Is It Working?</a:t>
+              <a:t>The Recovery Plan</a:t>
             </a:r>
           </a:p>
         </p:txBody>
@@ -8154,14 +8599,14 @@
         </p:nvSpPr>
         <p:spPr>
           <a:xfrm>
-            <a:off x="457200" y="1234440"/>
-            <a:ext cx="3977639" cy="384048"/>
+            <a:off x="457200" y="1371600"/>
+            <a:ext cx="82296" cy="960120"/>
           </a:xfrm>
           <a:prstGeom prst="rect">
             <a:avLst/>
           </a:prstGeom>
           <a:solidFill>
-            <a:srgbClr val="196B24"/>
+            <a:srgbClr val="156082"/>
           </a:solidFill>
           <a:ln>
             <a:noFill/>
@@ -8182,38 +8627,72 @@
           </a:fontRef>
         </p:style>
         <p:txBody>
-          <a:bodyPr rtlCol="0" anchor="ctr" lIns="137160"/>
+          <a:bodyPr rtlCol="0" anchor="ctr"/>
           <a:lstStyle/>
           <a:p>
             <a:pPr algn="ctr"/>
-            <a:r>
-              <a:rPr sz="1250" b="1">
-                <a:solidFill>
-                  <a:srgbClr val="FFFFFF"/>
+          </a:p>
+        </p:txBody>
+      </p:sp>
+      <p:sp>
+        <p:nvSpPr>
+          <p:cNvPr id="5" name="TextBox 4"/>
+          <p:cNvSpPr txBox="1"/>
+          <p:nvPr/>
+        </p:nvSpPr>
+        <p:spPr>
+          <a:xfrm>
+            <a:off x="658368" y="1371600"/>
+            <a:ext cx="7955279" cy="960120"/>
+          </a:xfrm>
+          <a:prstGeom prst="rect">
+            <a:avLst/>
+          </a:prstGeom>
+          <a:noFill/>
+        </p:spPr>
+        <p:txBody>
+          <a:bodyPr wrap="square" anchor="ctr">
+            <a:spAutoFit/>
+          </a:bodyPr>
+          <a:lstStyle/>
+          <a:p>
+            <a:r>
+              <a:rPr sz="1350" b="1">
+                <a:solidFill>
+                  <a:srgbClr val="000000"/>
                 </a:solidFill>
                 <a:latin typeface="Avenir Next LT Pro Demi"/>
               </a:rPr>
-              <a:t>WORKING</a:t>
-            </a:r>
-          </a:p>
-        </p:txBody>
-      </p:sp>
-      <p:sp>
-        <p:nvSpPr>
-          <p:cNvPr id="5" name="Rectangle 4"/>
+              <a:t>Product transformation  —  </a:t>
+            </a:r>
+            <a:r>
+              <a:rPr sz="1250" b="0">
+                <a:solidFill>
+                  <a:srgbClr val="000000"/>
+                </a:solidFill>
+                <a:latin typeface="Avenir Next LT Pro"/>
+              </a:rPr>
+              <a:t>New collections and refreshed Sourcebooks.</a:t>
+            </a:r>
+          </a:p>
+        </p:txBody>
+      </p:sp>
+      <p:sp>
+        <p:nvSpPr>
+          <p:cNvPr id="6" name="Rectangle 5"/>
           <p:cNvSpPr/>
           <p:nvPr/>
         </p:nvSpPr>
         <p:spPr>
           <a:xfrm>
-            <a:off x="4709160" y="1234440"/>
-            <a:ext cx="3977639" cy="384048"/>
+            <a:off x="457200" y="2496312"/>
+            <a:ext cx="82296" cy="960120"/>
           </a:xfrm>
           <a:prstGeom prst="rect">
             <a:avLst/>
           </a:prstGeom>
           <a:solidFill>
-            <a:srgbClr val="B03030"/>
+            <a:srgbClr val="196B24"/>
           </a:solidFill>
           <a:ln>
             <a:noFill/>
@@ -8234,32 +8713,23 @@
           </a:fontRef>
         </p:style>
         <p:txBody>
-          <a:bodyPr rtlCol="0" anchor="ctr" lIns="137160"/>
+          <a:bodyPr rtlCol="0" anchor="ctr"/>
           <a:lstStyle/>
           <a:p>
             <a:pPr algn="ctr"/>
-            <a:r>
-              <a:rPr sz="1250" b="1">
-                <a:solidFill>
-                  <a:srgbClr val="FFFFFF"/>
-                </a:solidFill>
-                <a:latin typeface="Avenir Next LT Pro Demi"/>
-              </a:rPr>
-              <a:t>WATCH</a:t>
-            </a:r>
-          </a:p>
-        </p:txBody>
-      </p:sp>
-      <p:sp>
-        <p:nvSpPr>
-          <p:cNvPr id="6" name="TextBox 5"/>
+          </a:p>
+        </p:txBody>
+      </p:sp>
+      <p:sp>
+        <p:nvSpPr>
+          <p:cNvPr id="7" name="TextBox 6"/>
           <p:cNvSpPr txBox="1"/>
           <p:nvPr/>
         </p:nvSpPr>
         <p:spPr>
           <a:xfrm>
-            <a:off x="457200" y="1828800"/>
-            <a:ext cx="3977639" cy="777240"/>
+            <a:off x="658368" y="2496312"/>
+            <a:ext cx="7955279" cy="960120"/>
           </a:xfrm>
           <a:prstGeom prst="rect">
             <a:avLst/>
@@ -8267,42 +8737,85 @@
           <a:noFill/>
         </p:spPr>
         <p:txBody>
-          <a:bodyPr wrap="square">
+          <a:bodyPr wrap="square" anchor="ctr">
             <a:spAutoFit/>
           </a:bodyPr>
           <a:lstStyle/>
           <a:p>
             <a:r>
-              <a:rPr sz="1200" b="1">
-                <a:solidFill>
-                  <a:srgbClr val="196B24"/>
+              <a:rPr sz="1350" b="1">
+                <a:solidFill>
+                  <a:srgbClr val="000000"/>
                 </a:solidFill>
                 <a:latin typeface="Avenir Next LT Pro Demi"/>
               </a:rPr>
-              <a:t>✓  </a:t>
-            </a:r>
-            <a:r>
-              <a:rPr sz="1150" b="0">
+              <a:t>Gallery expansion  —  </a:t>
+            </a:r>
+            <a:r>
+              <a:rPr sz="1250" b="0">
                 <a:solidFill>
                   <a:srgbClr val="000000"/>
                 </a:solidFill>
                 <a:latin typeface="Avenir Next LT Pro"/>
               </a:rPr>
-              <a:t>FCF inflected to +$252M (from −$214M)</a:t>
-            </a:r>
-          </a:p>
-        </p:txBody>
-      </p:sp>
-      <p:sp>
-        <p:nvSpPr>
-          <p:cNvPr id="7" name="TextBox 6"/>
+              <a:t>Every major U.S./Canada market — RH's ~$5–6B opportunity.</a:t>
+            </a:r>
+          </a:p>
+        </p:txBody>
+      </p:sp>
+      <p:sp>
+        <p:nvSpPr>
+          <p:cNvPr id="8" name="Rectangle 7"/>
+          <p:cNvSpPr/>
+          <p:nvPr/>
+        </p:nvSpPr>
+        <p:spPr>
+          <a:xfrm>
+            <a:off x="457200" y="3621024"/>
+            <a:ext cx="82296" cy="960120"/>
+          </a:xfrm>
+          <a:prstGeom prst="rect">
+            <a:avLst/>
+          </a:prstGeom>
+          <a:solidFill>
+            <a:srgbClr val="E97132"/>
+          </a:solidFill>
+          <a:ln>
+            <a:noFill/>
+          </a:ln>
+        </p:spPr>
+        <p:style>
+          <a:lnRef idx="1">
+            <a:schemeClr val="accent1"/>
+          </a:lnRef>
+          <a:fillRef idx="3">
+            <a:schemeClr val="accent1"/>
+          </a:fillRef>
+          <a:effectRef idx="2">
+            <a:schemeClr val="accent1"/>
+          </a:effectRef>
+          <a:fontRef idx="minor">
+            <a:schemeClr val="lt1"/>
+          </a:fontRef>
+        </p:style>
+        <p:txBody>
+          <a:bodyPr rtlCol="0" anchor="ctr"/>
+          <a:lstStyle/>
+          <a:p>
+            <a:pPr algn="ctr"/>
+          </a:p>
+        </p:txBody>
+      </p:sp>
+      <p:sp>
+        <p:nvSpPr>
+          <p:cNvPr id="9" name="TextBox 8"/>
           <p:cNvSpPr txBox="1"/>
           <p:nvPr/>
         </p:nvSpPr>
         <p:spPr>
           <a:xfrm>
-            <a:off x="457200" y="2651760"/>
-            <a:ext cx="3977639" cy="777240"/>
+            <a:off x="658368" y="3621024"/>
+            <a:ext cx="7955279" cy="960120"/>
           </a:xfrm>
           <a:prstGeom prst="rect">
             <a:avLst/>
@@ -8310,42 +8823,85 @@
           <a:noFill/>
         </p:spPr>
         <p:txBody>
-          <a:bodyPr wrap="square">
+          <a:bodyPr wrap="square" anchor="ctr">
             <a:spAutoFit/>
           </a:bodyPr>
           <a:lstStyle/>
           <a:p>
             <a:r>
-              <a:rPr sz="1200" b="1">
-                <a:solidFill>
-                  <a:srgbClr val="196B24"/>
+              <a:rPr sz="1350" b="1">
+                <a:solidFill>
+                  <a:srgbClr val="000000"/>
                 </a:solidFill>
                 <a:latin typeface="Avenir Next LT Pro Demi"/>
               </a:rPr>
-              <a:t>✓  </a:t>
-            </a:r>
-            <a:r>
-              <a:rPr sz="1150" b="0">
+              <a:t>Move upmarket  —  </a:t>
+            </a:r>
+            <a:r>
+              <a:rPr sz="1250" b="0">
                 <a:solidFill>
                   <a:srgbClr val="000000"/>
                 </a:solidFill>
                 <a:latin typeface="Avenir Next LT Pro"/>
               </a:rPr>
-              <a:t>Inventory normalized $1.02B → $819M</a:t>
-            </a:r>
-          </a:p>
-        </p:txBody>
-      </p:sp>
-      <p:sp>
-        <p:nvSpPr>
-          <p:cNvPr id="8" name="TextBox 7"/>
+              <a:t>Estates targets the rate-immune cash buyer.</a:t>
+            </a:r>
+          </a:p>
+        </p:txBody>
+      </p:sp>
+      <p:sp>
+        <p:nvSpPr>
+          <p:cNvPr id="10" name="Rectangle 9"/>
+          <p:cNvSpPr/>
+          <p:nvPr/>
+        </p:nvSpPr>
+        <p:spPr>
+          <a:xfrm>
+            <a:off x="457200" y="4745736"/>
+            <a:ext cx="82296" cy="960120"/>
+          </a:xfrm>
+          <a:prstGeom prst="rect">
+            <a:avLst/>
+          </a:prstGeom>
+          <a:solidFill>
+            <a:srgbClr val="156082"/>
+          </a:solidFill>
+          <a:ln>
+            <a:noFill/>
+          </a:ln>
+        </p:spPr>
+        <p:style>
+          <a:lnRef idx="1">
+            <a:schemeClr val="accent1"/>
+          </a:lnRef>
+          <a:fillRef idx="3">
+            <a:schemeClr val="accent1"/>
+          </a:fillRef>
+          <a:effectRef idx="2">
+            <a:schemeClr val="accent1"/>
+          </a:effectRef>
+          <a:fontRef idx="minor">
+            <a:schemeClr val="lt1"/>
+          </a:fontRef>
+        </p:style>
+        <p:txBody>
+          <a:bodyPr rtlCol="0" anchor="ctr"/>
+          <a:lstStyle/>
+          <a:p>
+            <a:pPr algn="ctr"/>
+          </a:p>
+        </p:txBody>
+      </p:sp>
+      <p:sp>
+        <p:nvSpPr>
+          <p:cNvPr id="11" name="TextBox 10"/>
           <p:cNvSpPr txBox="1"/>
           <p:nvPr/>
         </p:nvSpPr>
         <p:spPr>
           <a:xfrm>
-            <a:off x="457200" y="3474720"/>
-            <a:ext cx="3977639" cy="777240"/>
+            <a:off x="658368" y="4745736"/>
+            <a:ext cx="7955279" cy="960120"/>
           </a:xfrm>
           <a:prstGeom prst="rect">
             <a:avLst/>
@@ -8353,42 +8909,42 @@
           <a:noFill/>
         </p:spPr>
         <p:txBody>
-          <a:bodyPr wrap="square">
+          <a:bodyPr wrap="square" anchor="ctr">
             <a:spAutoFit/>
           </a:bodyPr>
           <a:lstStyle/>
           <a:p>
             <a:r>
-              <a:rPr sz="1200" b="1">
-                <a:solidFill>
-                  <a:srgbClr val="196B24"/>
+              <a:rPr sz="1350" b="1">
+                <a:solidFill>
+                  <a:srgbClr val="000000"/>
                 </a:solidFill>
                 <a:latin typeface="Avenir Next LT Pro Demi"/>
               </a:rPr>
-              <a:t>✓  </a:t>
-            </a:r>
-            <a:r>
-              <a:rPr sz="1150" b="0">
+              <a:t>Global + platform  —  </a:t>
+            </a:r>
+            <a:r>
+              <a:rPr sz="1250" b="0">
                 <a:solidFill>
                   <a:srgbClr val="000000"/>
                 </a:solidFill>
                 <a:latin typeface="Avenir Next LT Pro"/>
               </a:rPr>
-              <a:t>Revenue re-accelerated +8.1% in FY25</a:t>
-            </a:r>
-          </a:p>
-        </p:txBody>
-      </p:sp>
-      <p:sp>
-        <p:nvSpPr>
-          <p:cNvPr id="9" name="TextBox 8"/>
+              <a:t>RH England, Guesthouses, hospitality &amp; F&amp;B.</a:t>
+            </a:r>
+          </a:p>
+        </p:txBody>
+      </p:sp>
+      <p:sp>
+        <p:nvSpPr>
+          <p:cNvPr id="12" name="TextBox 11"/>
           <p:cNvSpPr txBox="1"/>
           <p:nvPr/>
         </p:nvSpPr>
         <p:spPr>
           <a:xfrm>
-            <a:off x="4709160" y="1828800"/>
-            <a:ext cx="3977639" cy="777240"/>
+            <a:off x="457200" y="6355080"/>
+            <a:ext cx="8229600" cy="365760"/>
           </a:xfrm>
           <a:prstGeom prst="rect">
             <a:avLst/>
@@ -8396,169 +8952,6 @@
           <a:noFill/>
         </p:spPr>
         <p:txBody>
-          <a:bodyPr wrap="square">
-            <a:spAutoFit/>
-          </a:bodyPr>
-          <a:lstStyle/>
-          <a:p>
-            <a:r>
-              <a:rPr sz="1200" b="1">
-                <a:solidFill>
-                  <a:srgbClr val="B03030"/>
-                </a:solidFill>
-                <a:latin typeface="Avenir Next LT Pro Demi"/>
-              </a:rPr>
-              <a:t>!  </a:t>
-            </a:r>
-            <a:r>
-              <a:rPr sz="1150" b="0">
-                <a:solidFill>
-                  <a:srgbClr val="000000"/>
-                </a:solidFill>
-                <a:latin typeface="Avenir Next LT Pro"/>
-              </a:rPr>
-              <a:t>Q1 FY26: revenue −1.7%, net loss −$14M</a:t>
-            </a:r>
-          </a:p>
-        </p:txBody>
-      </p:sp>
-      <p:sp>
-        <p:nvSpPr>
-          <p:cNvPr id="10" name="TextBox 9"/>
-          <p:cNvSpPr txBox="1"/>
-          <p:nvPr/>
-        </p:nvSpPr>
-        <p:spPr>
-          <a:xfrm>
-            <a:off x="4709160" y="2651760"/>
-            <a:ext cx="3977639" cy="777240"/>
-          </a:xfrm>
-          <a:prstGeom prst="rect">
-            <a:avLst/>
-          </a:prstGeom>
-          <a:noFill/>
-        </p:spPr>
-        <p:txBody>
-          <a:bodyPr wrap="square">
-            <a:spAutoFit/>
-          </a:bodyPr>
-          <a:lstStyle/>
-          <a:p>
-            <a:r>
-              <a:rPr sz="1200" b="1">
-                <a:solidFill>
-                  <a:srgbClr val="B03030"/>
-                </a:solidFill>
-                <a:latin typeface="Avenir Next LT Pro Demi"/>
-              </a:rPr>
-              <a:t>!  </a:t>
-            </a:r>
-            <a:r>
-              <a:rPr sz="1150" b="0">
-                <a:solidFill>
-                  <a:srgbClr val="000000"/>
-                </a:solidFill>
-                <a:latin typeface="Avenir Next LT Pro"/>
-              </a:rPr>
-              <a:t>~$225M/yr interest keeps coverage thin</a:t>
-            </a:r>
-          </a:p>
-        </p:txBody>
-      </p:sp>
-      <p:sp>
-        <p:nvSpPr>
-          <p:cNvPr id="11" name="TextBox 10"/>
-          <p:cNvSpPr txBox="1"/>
-          <p:nvPr/>
-        </p:nvSpPr>
-        <p:spPr>
-          <a:xfrm>
-            <a:off x="4709160" y="3474720"/>
-            <a:ext cx="3977639" cy="777240"/>
-          </a:xfrm>
-          <a:prstGeom prst="rect">
-            <a:avLst/>
-          </a:prstGeom>
-          <a:noFill/>
-        </p:spPr>
-        <p:txBody>
-          <a:bodyPr wrap="square">
-            <a:spAutoFit/>
-          </a:bodyPr>
-          <a:lstStyle/>
-          <a:p>
-            <a:r>
-              <a:rPr sz="1200" b="1">
-                <a:solidFill>
-                  <a:srgbClr val="B03030"/>
-                </a:solidFill>
-                <a:latin typeface="Avenir Next LT Pro Demi"/>
-              </a:rPr>
-              <a:t>!  </a:t>
-            </a:r>
-            <a:r>
-              <a:rPr sz="1150" b="0">
-                <a:solidFill>
-                  <a:srgbClr val="000000"/>
-                </a:solidFill>
-                <a:latin typeface="Avenir Next LT Pro"/>
-              </a:rPr>
-              <a:t>Guidance is back-half loaded</a:t>
-            </a:r>
-          </a:p>
-        </p:txBody>
-      </p:sp>
-      <p:sp>
-        <p:nvSpPr>
-          <p:cNvPr id="12" name="TextBox 11"/>
-          <p:cNvSpPr txBox="1"/>
-          <p:nvPr/>
-        </p:nvSpPr>
-        <p:spPr>
-          <a:xfrm>
-            <a:off x="457200" y="4663440"/>
-            <a:ext cx="8229600" cy="365760"/>
-          </a:xfrm>
-          <a:prstGeom prst="rect">
-            <a:avLst/>
-          </a:prstGeom>
-          <a:noFill/>
-        </p:spPr>
-        <p:txBody>
-          <a:bodyPr wrap="square">
-            <a:spAutoFit/>
-          </a:bodyPr>
-          <a:lstStyle/>
-          <a:p>
-            <a:r>
-              <a:rPr sz="1150" b="1">
-                <a:solidFill>
-                  <a:srgbClr val="000000"/>
-                </a:solidFill>
-                <a:latin typeface="Avenir Next LT Pro Demi"/>
-              </a:rPr>
-              <a:t>Verdict: real but early — the next two quarters are the tell.</a:t>
-            </a:r>
-          </a:p>
-        </p:txBody>
-      </p:sp>
-      <p:sp>
-        <p:nvSpPr>
-          <p:cNvPr id="13" name="TextBox 12"/>
-          <p:cNvSpPr txBox="1"/>
-          <p:nvPr/>
-        </p:nvSpPr>
-        <p:spPr>
-          <a:xfrm>
-            <a:off x="457200" y="6355080"/>
-            <a:ext cx="8229600" cy="365760"/>
-          </a:xfrm>
-          <a:prstGeom prst="rect">
-            <a:avLst/>
-          </a:prstGeom>
-          <a:noFill/>
-        </p:spPr>
-        <p:txBody>
           <a:bodyPr wrap="none">
             <a:spAutoFit/>
           </a:bodyPr>
@@ -8571,7 +8964,7 @@
                 </a:solidFill>
                 <a:latin typeface="Avenir Next LT Pro"/>
               </a:rPr>
-              <a:t>Source: RH FY2025 10-K; Q1 FY2026 10-Q</a:t>
+              <a:t>Source: RH FY2025 Form 10-K</a:t>
             </a:r>
           </a:p>
         </p:txBody>
@@ -8585,6 +8978,531 @@
 </file>
 
 <file path=ppt/slides/slide16.xml><?xml version="1.0" encoding="utf-8"?>
+<p:sld xmlns:a="http://schemas.openxmlformats.org/drawingml/2006/main" xmlns:p="http://schemas.openxmlformats.org/presentationml/2006/main" xmlns:r="http://schemas.openxmlformats.org/officeDocument/2006/relationships">
+  <p:cSld>
+    <p:spTree>
+      <p:nvGrpSpPr>
+        <p:cNvPr id="1" name=""/>
+        <p:cNvGrpSpPr/>
+        <p:nvPr/>
+      </p:nvGrpSpPr>
+      <p:grpSpPr/>
+      <p:sp>
+        <p:nvSpPr>
+          <p:cNvPr id="2" name="TextBox 1"/>
+          <p:cNvSpPr txBox="1"/>
+          <p:nvPr/>
+        </p:nvSpPr>
+        <p:spPr>
+          <a:xfrm>
+            <a:off x="457200" y="365760"/>
+            <a:ext cx="8229600" cy="548640"/>
+          </a:xfrm>
+          <a:prstGeom prst="rect">
+            <a:avLst/>
+          </a:prstGeom>
+          <a:noFill/>
+        </p:spPr>
+        <p:txBody>
+          <a:bodyPr wrap="square">
+            <a:spAutoFit/>
+          </a:bodyPr>
+          <a:lstStyle/>
+          <a:p>
+            <a:r>
+              <a:rPr sz="2200" b="0">
+                <a:solidFill>
+                  <a:srgbClr val="000000"/>
+                </a:solidFill>
+                <a:latin typeface="Avenir Next LT Pro Demi"/>
+              </a:rPr>
+              <a:t>Is It Working?</a:t>
+            </a:r>
+          </a:p>
+        </p:txBody>
+      </p:sp>
+      <p:sp>
+        <p:nvSpPr>
+          <p:cNvPr id="3" name="Rectangle 2"/>
+          <p:cNvSpPr/>
+          <p:nvPr/>
+        </p:nvSpPr>
+        <p:spPr>
+          <a:xfrm>
+            <a:off x="457200" y="960120"/>
+            <a:ext cx="8229600" cy="25603"/>
+          </a:xfrm>
+          <a:prstGeom prst="rect">
+            <a:avLst/>
+          </a:prstGeom>
+          <a:solidFill>
+            <a:srgbClr val="156082"/>
+          </a:solidFill>
+          <a:ln>
+            <a:noFill/>
+          </a:ln>
+        </p:spPr>
+        <p:style>
+          <a:lnRef idx="1">
+            <a:schemeClr val="accent1"/>
+          </a:lnRef>
+          <a:fillRef idx="3">
+            <a:schemeClr val="accent1"/>
+          </a:fillRef>
+          <a:effectRef idx="2">
+            <a:schemeClr val="accent1"/>
+          </a:effectRef>
+          <a:fontRef idx="minor">
+            <a:schemeClr val="lt1"/>
+          </a:fontRef>
+        </p:style>
+        <p:txBody>
+          <a:bodyPr rtlCol="0" anchor="ctr"/>
+          <a:lstStyle/>
+          <a:p>
+            <a:pPr algn="ctr"/>
+          </a:p>
+        </p:txBody>
+      </p:sp>
+      <p:sp>
+        <p:nvSpPr>
+          <p:cNvPr id="4" name="Rectangle 3"/>
+          <p:cNvSpPr/>
+          <p:nvPr/>
+        </p:nvSpPr>
+        <p:spPr>
+          <a:xfrm>
+            <a:off x="457200" y="1234440"/>
+            <a:ext cx="3977639" cy="384048"/>
+          </a:xfrm>
+          <a:prstGeom prst="rect">
+            <a:avLst/>
+          </a:prstGeom>
+          <a:solidFill>
+            <a:srgbClr val="196B24"/>
+          </a:solidFill>
+          <a:ln>
+            <a:noFill/>
+          </a:ln>
+        </p:spPr>
+        <p:style>
+          <a:lnRef idx="1">
+            <a:schemeClr val="accent1"/>
+          </a:lnRef>
+          <a:fillRef idx="3">
+            <a:schemeClr val="accent1"/>
+          </a:fillRef>
+          <a:effectRef idx="2">
+            <a:schemeClr val="accent1"/>
+          </a:effectRef>
+          <a:fontRef idx="minor">
+            <a:schemeClr val="lt1"/>
+          </a:fontRef>
+        </p:style>
+        <p:txBody>
+          <a:bodyPr rtlCol="0" anchor="ctr" lIns="137160"/>
+          <a:lstStyle/>
+          <a:p>
+            <a:pPr algn="ctr"/>
+            <a:r>
+              <a:rPr sz="1250" b="1">
+                <a:solidFill>
+                  <a:srgbClr val="FFFFFF"/>
+                </a:solidFill>
+                <a:latin typeface="Avenir Next LT Pro Demi"/>
+              </a:rPr>
+              <a:t>WORKING</a:t>
+            </a:r>
+          </a:p>
+        </p:txBody>
+      </p:sp>
+      <p:sp>
+        <p:nvSpPr>
+          <p:cNvPr id="5" name="Rectangle 4"/>
+          <p:cNvSpPr/>
+          <p:nvPr/>
+        </p:nvSpPr>
+        <p:spPr>
+          <a:xfrm>
+            <a:off x="4709160" y="1234440"/>
+            <a:ext cx="3977639" cy="384048"/>
+          </a:xfrm>
+          <a:prstGeom prst="rect">
+            <a:avLst/>
+          </a:prstGeom>
+          <a:solidFill>
+            <a:srgbClr val="B03030"/>
+          </a:solidFill>
+          <a:ln>
+            <a:noFill/>
+          </a:ln>
+        </p:spPr>
+        <p:style>
+          <a:lnRef idx="1">
+            <a:schemeClr val="accent1"/>
+          </a:lnRef>
+          <a:fillRef idx="3">
+            <a:schemeClr val="accent1"/>
+          </a:fillRef>
+          <a:effectRef idx="2">
+            <a:schemeClr val="accent1"/>
+          </a:effectRef>
+          <a:fontRef idx="minor">
+            <a:schemeClr val="lt1"/>
+          </a:fontRef>
+        </p:style>
+        <p:txBody>
+          <a:bodyPr rtlCol="0" anchor="ctr" lIns="137160"/>
+          <a:lstStyle/>
+          <a:p>
+            <a:pPr algn="ctr"/>
+            <a:r>
+              <a:rPr sz="1250" b="1">
+                <a:solidFill>
+                  <a:srgbClr val="FFFFFF"/>
+                </a:solidFill>
+                <a:latin typeface="Avenir Next LT Pro Demi"/>
+              </a:rPr>
+              <a:t>WATCH</a:t>
+            </a:r>
+          </a:p>
+        </p:txBody>
+      </p:sp>
+      <p:sp>
+        <p:nvSpPr>
+          <p:cNvPr id="6" name="TextBox 5"/>
+          <p:cNvSpPr txBox="1"/>
+          <p:nvPr/>
+        </p:nvSpPr>
+        <p:spPr>
+          <a:xfrm>
+            <a:off x="457200" y="1828800"/>
+            <a:ext cx="3977639" cy="777240"/>
+          </a:xfrm>
+          <a:prstGeom prst="rect">
+            <a:avLst/>
+          </a:prstGeom>
+          <a:noFill/>
+        </p:spPr>
+        <p:txBody>
+          <a:bodyPr wrap="square">
+            <a:spAutoFit/>
+          </a:bodyPr>
+          <a:lstStyle/>
+          <a:p>
+            <a:r>
+              <a:rPr sz="1200" b="1">
+                <a:solidFill>
+                  <a:srgbClr val="196B24"/>
+                </a:solidFill>
+                <a:latin typeface="Avenir Next LT Pro Demi"/>
+              </a:rPr>
+              <a:t>✓  </a:t>
+            </a:r>
+            <a:r>
+              <a:rPr sz="1150" b="0">
+                <a:solidFill>
+                  <a:srgbClr val="000000"/>
+                </a:solidFill>
+                <a:latin typeface="Avenir Next LT Pro"/>
+              </a:rPr>
+              <a:t>FCF inflected to +$252M (from −$214M)</a:t>
+            </a:r>
+          </a:p>
+        </p:txBody>
+      </p:sp>
+      <p:sp>
+        <p:nvSpPr>
+          <p:cNvPr id="7" name="TextBox 6"/>
+          <p:cNvSpPr txBox="1"/>
+          <p:nvPr/>
+        </p:nvSpPr>
+        <p:spPr>
+          <a:xfrm>
+            <a:off x="457200" y="2651760"/>
+            <a:ext cx="3977639" cy="777240"/>
+          </a:xfrm>
+          <a:prstGeom prst="rect">
+            <a:avLst/>
+          </a:prstGeom>
+          <a:noFill/>
+        </p:spPr>
+        <p:txBody>
+          <a:bodyPr wrap="square">
+            <a:spAutoFit/>
+          </a:bodyPr>
+          <a:lstStyle/>
+          <a:p>
+            <a:r>
+              <a:rPr sz="1200" b="1">
+                <a:solidFill>
+                  <a:srgbClr val="196B24"/>
+                </a:solidFill>
+                <a:latin typeface="Avenir Next LT Pro Demi"/>
+              </a:rPr>
+              <a:t>✓  </a:t>
+            </a:r>
+            <a:r>
+              <a:rPr sz="1150" b="0">
+                <a:solidFill>
+                  <a:srgbClr val="000000"/>
+                </a:solidFill>
+                <a:latin typeface="Avenir Next LT Pro"/>
+              </a:rPr>
+              <a:t>Inventory normalized $1.02B → $819M</a:t>
+            </a:r>
+          </a:p>
+        </p:txBody>
+      </p:sp>
+      <p:sp>
+        <p:nvSpPr>
+          <p:cNvPr id="8" name="TextBox 7"/>
+          <p:cNvSpPr txBox="1"/>
+          <p:nvPr/>
+        </p:nvSpPr>
+        <p:spPr>
+          <a:xfrm>
+            <a:off x="457200" y="3474720"/>
+            <a:ext cx="3977639" cy="777240"/>
+          </a:xfrm>
+          <a:prstGeom prst="rect">
+            <a:avLst/>
+          </a:prstGeom>
+          <a:noFill/>
+        </p:spPr>
+        <p:txBody>
+          <a:bodyPr wrap="square">
+            <a:spAutoFit/>
+          </a:bodyPr>
+          <a:lstStyle/>
+          <a:p>
+            <a:r>
+              <a:rPr sz="1200" b="1">
+                <a:solidFill>
+                  <a:srgbClr val="196B24"/>
+                </a:solidFill>
+                <a:latin typeface="Avenir Next LT Pro Demi"/>
+              </a:rPr>
+              <a:t>✓  </a:t>
+            </a:r>
+            <a:r>
+              <a:rPr sz="1150" b="0">
+                <a:solidFill>
+                  <a:srgbClr val="000000"/>
+                </a:solidFill>
+                <a:latin typeface="Avenir Next LT Pro"/>
+              </a:rPr>
+              <a:t>Revenue re-accelerated +8.1% in FY25</a:t>
+            </a:r>
+          </a:p>
+        </p:txBody>
+      </p:sp>
+      <p:sp>
+        <p:nvSpPr>
+          <p:cNvPr id="9" name="TextBox 8"/>
+          <p:cNvSpPr txBox="1"/>
+          <p:nvPr/>
+        </p:nvSpPr>
+        <p:spPr>
+          <a:xfrm>
+            <a:off x="4709160" y="1828800"/>
+            <a:ext cx="3977639" cy="777240"/>
+          </a:xfrm>
+          <a:prstGeom prst="rect">
+            <a:avLst/>
+          </a:prstGeom>
+          <a:noFill/>
+        </p:spPr>
+        <p:txBody>
+          <a:bodyPr wrap="square">
+            <a:spAutoFit/>
+          </a:bodyPr>
+          <a:lstStyle/>
+          <a:p>
+            <a:r>
+              <a:rPr sz="1200" b="1">
+                <a:solidFill>
+                  <a:srgbClr val="B03030"/>
+                </a:solidFill>
+                <a:latin typeface="Avenir Next LT Pro Demi"/>
+              </a:rPr>
+              <a:t>!  </a:t>
+            </a:r>
+            <a:r>
+              <a:rPr sz="1150" b="0">
+                <a:solidFill>
+                  <a:srgbClr val="000000"/>
+                </a:solidFill>
+                <a:latin typeface="Avenir Next LT Pro"/>
+              </a:rPr>
+              <a:t>Q1 FY26: revenue −1.7%, net loss −$14M</a:t>
+            </a:r>
+          </a:p>
+        </p:txBody>
+      </p:sp>
+      <p:sp>
+        <p:nvSpPr>
+          <p:cNvPr id="10" name="TextBox 9"/>
+          <p:cNvSpPr txBox="1"/>
+          <p:nvPr/>
+        </p:nvSpPr>
+        <p:spPr>
+          <a:xfrm>
+            <a:off x="4709160" y="2651760"/>
+            <a:ext cx="3977639" cy="777240"/>
+          </a:xfrm>
+          <a:prstGeom prst="rect">
+            <a:avLst/>
+          </a:prstGeom>
+          <a:noFill/>
+        </p:spPr>
+        <p:txBody>
+          <a:bodyPr wrap="square">
+            <a:spAutoFit/>
+          </a:bodyPr>
+          <a:lstStyle/>
+          <a:p>
+            <a:r>
+              <a:rPr sz="1200" b="1">
+                <a:solidFill>
+                  <a:srgbClr val="B03030"/>
+                </a:solidFill>
+                <a:latin typeface="Avenir Next LT Pro Demi"/>
+              </a:rPr>
+              <a:t>!  </a:t>
+            </a:r>
+            <a:r>
+              <a:rPr sz="1150" b="0">
+                <a:solidFill>
+                  <a:srgbClr val="000000"/>
+                </a:solidFill>
+                <a:latin typeface="Avenir Next LT Pro"/>
+              </a:rPr>
+              <a:t>~$225M/yr interest keeps coverage thin</a:t>
+            </a:r>
+          </a:p>
+        </p:txBody>
+      </p:sp>
+      <p:sp>
+        <p:nvSpPr>
+          <p:cNvPr id="11" name="TextBox 10"/>
+          <p:cNvSpPr txBox="1"/>
+          <p:nvPr/>
+        </p:nvSpPr>
+        <p:spPr>
+          <a:xfrm>
+            <a:off x="4709160" y="3474720"/>
+            <a:ext cx="3977639" cy="777240"/>
+          </a:xfrm>
+          <a:prstGeom prst="rect">
+            <a:avLst/>
+          </a:prstGeom>
+          <a:noFill/>
+        </p:spPr>
+        <p:txBody>
+          <a:bodyPr wrap="square">
+            <a:spAutoFit/>
+          </a:bodyPr>
+          <a:lstStyle/>
+          <a:p>
+            <a:r>
+              <a:rPr sz="1200" b="1">
+                <a:solidFill>
+                  <a:srgbClr val="B03030"/>
+                </a:solidFill>
+                <a:latin typeface="Avenir Next LT Pro Demi"/>
+              </a:rPr>
+              <a:t>!  </a:t>
+            </a:r>
+            <a:r>
+              <a:rPr sz="1150" b="0">
+                <a:solidFill>
+                  <a:srgbClr val="000000"/>
+                </a:solidFill>
+                <a:latin typeface="Avenir Next LT Pro"/>
+              </a:rPr>
+              <a:t>Guidance is back-half loaded</a:t>
+            </a:r>
+          </a:p>
+        </p:txBody>
+      </p:sp>
+      <p:sp>
+        <p:nvSpPr>
+          <p:cNvPr id="12" name="TextBox 11"/>
+          <p:cNvSpPr txBox="1"/>
+          <p:nvPr/>
+        </p:nvSpPr>
+        <p:spPr>
+          <a:xfrm>
+            <a:off x="457200" y="4663440"/>
+            <a:ext cx="8229600" cy="365760"/>
+          </a:xfrm>
+          <a:prstGeom prst="rect">
+            <a:avLst/>
+          </a:prstGeom>
+          <a:noFill/>
+        </p:spPr>
+        <p:txBody>
+          <a:bodyPr wrap="square">
+            <a:spAutoFit/>
+          </a:bodyPr>
+          <a:lstStyle/>
+          <a:p>
+            <a:r>
+              <a:rPr sz="1150" b="1">
+                <a:solidFill>
+                  <a:srgbClr val="000000"/>
+                </a:solidFill>
+                <a:latin typeface="Avenir Next LT Pro Demi"/>
+              </a:rPr>
+              <a:t>Verdict: real but early — the next two quarters are the tell.</a:t>
+            </a:r>
+          </a:p>
+        </p:txBody>
+      </p:sp>
+      <p:sp>
+        <p:nvSpPr>
+          <p:cNvPr id="13" name="TextBox 12"/>
+          <p:cNvSpPr txBox="1"/>
+          <p:nvPr/>
+        </p:nvSpPr>
+        <p:spPr>
+          <a:xfrm>
+            <a:off x="457200" y="6355080"/>
+            <a:ext cx="8229600" cy="365760"/>
+          </a:xfrm>
+          <a:prstGeom prst="rect">
+            <a:avLst/>
+          </a:prstGeom>
+          <a:noFill/>
+        </p:spPr>
+        <p:txBody>
+          <a:bodyPr wrap="none">
+            <a:spAutoFit/>
+          </a:bodyPr>
+          <a:lstStyle/>
+          <a:p>
+            <a:r>
+              <a:rPr sz="750" b="0" i="1">
+                <a:solidFill>
+                  <a:srgbClr val="707070"/>
+                </a:solidFill>
+                <a:latin typeface="Avenir Next LT Pro"/>
+              </a:rPr>
+              <a:t>Source: RH FY2025 10-K; Q1 FY2026 10-Q</a:t>
+            </a:r>
+          </a:p>
+        </p:txBody>
+      </p:sp>
+    </p:spTree>
+  </p:cSld>
+  <p:clrMapOvr>
+    <a:masterClrMapping/>
+  </p:clrMapOvr>
+</p:sld>
+</file>
+
+<file path=ppt/slides/slide17.xml><?xml version="1.0" encoding="utf-8"?>
 <p:sld xmlns:a="http://schemas.openxmlformats.org/drawingml/2006/main" xmlns:p="http://schemas.openxmlformats.org/presentationml/2006/main" xmlns:r="http://schemas.openxmlformats.org/officeDocument/2006/relationships">
   <p:cSld>
     <p:spTree>
@@ -10062,7 +10980,7 @@
               <a:rPr sz="2600" b="0" dirty="0">
                 <a:latin typeface="Avenir Next LT Pro Demi"/>
               </a:rPr>
-              <a:t>Recommendation: Buy</a:t>
+              <a:t>Recommendation: Hold — Not Yet</a:t>
             </a:r>
           </a:p>
         </p:txBody>
@@ -10132,7 +11050,7 @@
                 </a:solidFill>
                 <a:latin typeface="Avenir Next LT Pro"/>
               </a:rPr>
-              <a:t>     →     </a:t>
+              <a:t>     ·     </a:t>
             </a:r>
             <a:r>
               <a:rPr sz="1700" b="1" dirty="0">
@@ -10141,7 +11059,7 @@
                 </a:solidFill>
                 <a:latin typeface="Avenir Next LT Pro Demi"/>
               </a:rPr>
-              <a:t>Fair Value ~$240</a:t>
+              <a:t>Fair Value ~$240 if the thesis proves out</a:t>
             </a:r>
             <a:r>
               <a:rPr sz="1200" b="0" dirty="0">
@@ -10159,7 +11077,7 @@
                 </a:solidFill>
                 <a:latin typeface="Avenir Next LT Pro"/>
               </a:rPr>
-              <a:t>(today)</a:t>
+              <a:t>(~45% upside — the prize, not the call)</a:t>
             </a:r>
           </a:p>
           <a:p>
@@ -10171,7 +11089,7 @@
                 </a:solidFill>
                 <a:latin typeface="Avenir Next LT Pro"/>
               </a:rPr>
-              <a:t>~</a:t>
+              <a:t/>
             </a:r>
             <a:r>
               <a:rPr lang="en-US" sz="1100" b="0" dirty="0">
@@ -10180,7 +11098,7 @@
                 </a:solidFill>
                 <a:latin typeface="Avenir Next LT Pro"/>
               </a:rPr>
-              <a:t>45</a:t>
+              <a:t/>
             </a:r>
             <a:r>
               <a:rPr sz="1100" b="0" dirty="0">
@@ -10189,7 +11107,7 @@
                 </a:solidFill>
                 <a:latin typeface="Avenir Next LT Pro"/>
               </a:rPr>
-              <a:t>% upside to fair value   ·   FY2027E base target ~$310 (~28% IRR)   ·   Prob-weighted ~$</a:t>
+              <a:t>Not yet actionable — the key catalyst (Estates) is unproven and the balance sheet is ~4× levered. Buy on proof, not hope.</a:t>
             </a:r>
             <a:r>
               <a:rPr lang="en-US" sz="1100" b="0" dirty="0">
@@ -10198,7 +11116,7 @@
                 </a:solidFill>
                 <a:latin typeface="Avenir Next LT Pro"/>
               </a:rPr>
-              <a:t>285</a:t>
+              <a:t/>
             </a:r>
             <a:endParaRPr sz="1100" b="0" dirty="0">
               <a:solidFill>
@@ -10723,13 +11641,13 @@
               <a:rPr sz="1350" b="1" dirty="0">
                 <a:latin typeface="Avenir Next LT Pro Demi"/>
               </a:rPr>
-              <a:t>Estates </a:t>
+              <a:t>Estates — promising but unproven</a:t>
             </a:r>
             <a:r>
               <a:rPr lang="en-US" sz="1350" b="1" dirty="0">
                 <a:latin typeface="Avenir Next LT Pro Demi"/>
               </a:rPr>
-              <a:t>targets the rate-immune buyer</a:t>
+              <a:t/>
             </a:r>
             <a:endParaRPr sz="1350" b="1" dirty="0">
               <a:latin typeface="Avenir Next LT Pro Demi"/>
@@ -11013,6 +11931,536 @@
 </file>
 
 <file path=ppt/slides/slide5.xml><?xml version="1.0" encoding="utf-8"?>
+<p:sld xmlns:a="http://schemas.openxmlformats.org/drawingml/2006/main" xmlns:p="http://schemas.openxmlformats.org/presentationml/2006/main" xmlns:r="http://schemas.openxmlformats.org/officeDocument/2006/relationships">
+  <p:cSld>
+    <p:spTree>
+      <p:nvGrpSpPr>
+        <p:cNvPr id="1" name=""/>
+        <p:cNvGrpSpPr/>
+        <p:nvPr/>
+      </p:nvGrpSpPr>
+      <p:grpSpPr/>
+      <p:sp>
+        <p:nvSpPr>
+          <p:cNvPr id="2" name="TextBox 1"/>
+          <p:cNvSpPr txBox="1"/>
+          <p:nvPr/>
+        </p:nvSpPr>
+        <p:spPr>
+          <a:xfrm>
+            <a:off x="457200" y="365760"/>
+            <a:ext cx="8229600" cy="548640"/>
+          </a:xfrm>
+          <a:prstGeom prst="rect">
+            <a:avLst/>
+          </a:prstGeom>
+          <a:noFill/>
+        </p:spPr>
+        <p:txBody>
+          <a:bodyPr wrap="square">
+            <a:spAutoFit/>
+          </a:bodyPr>
+          <a:lstStyle/>
+          <a:p>
+            <a:r>
+              <a:rPr sz="2200">
+                <a:solidFill>
+                  <a:srgbClr val="000000"/>
+                </a:solidFill>
+                <a:latin typeface="Avenir Next LT Pro Demi"/>
+              </a:rPr>
+              <a:t>What Would Make Me a Buyer</a:t>
+            </a:r>
+          </a:p>
+        </p:txBody>
+      </p:sp>
+      <p:sp>
+        <p:nvSpPr>
+          <p:cNvPr id="3" name="Rectangle 2"/>
+          <p:cNvSpPr/>
+          <p:nvPr/>
+        </p:nvSpPr>
+        <p:spPr>
+          <a:xfrm>
+            <a:off x="457200" y="960120"/>
+            <a:ext cx="8229600" cy="25603"/>
+          </a:xfrm>
+          <a:prstGeom prst="rect">
+            <a:avLst/>
+          </a:prstGeom>
+          <a:solidFill>
+            <a:srgbClr val="156082"/>
+          </a:solidFill>
+          <a:ln>
+            <a:noFill/>
+          </a:ln>
+        </p:spPr>
+        <p:style>
+          <a:lnRef idx="1">
+            <a:schemeClr val="accent1"/>
+          </a:lnRef>
+          <a:fillRef idx="3">
+            <a:schemeClr val="accent1"/>
+          </a:fillRef>
+          <a:effectRef idx="2">
+            <a:schemeClr val="accent1"/>
+          </a:effectRef>
+          <a:fontRef idx="minor">
+            <a:schemeClr val="lt1"/>
+          </a:fontRef>
+        </p:style>
+        <p:txBody>
+          <a:bodyPr rtlCol="0" anchor="ctr"/>
+          <a:lstStyle/>
+          <a:p>
+            <a:pPr algn="ctr"/>
+          </a:p>
+        </p:txBody>
+      </p:sp>
+      <p:sp>
+        <p:nvSpPr>
+          <p:cNvPr id="4" name="TextBox 3"/>
+          <p:cNvSpPr txBox="1"/>
+          <p:nvPr/>
+        </p:nvSpPr>
+        <p:spPr>
+          <a:xfrm>
+            <a:off x="457200" y="1097280"/>
+            <a:ext cx="8229600" cy="457200"/>
+          </a:xfrm>
+          <a:prstGeom prst="rect">
+            <a:avLst/>
+          </a:prstGeom>
+          <a:noFill/>
+        </p:spPr>
+        <p:txBody>
+          <a:bodyPr wrap="square">
+            <a:spAutoFit/>
+          </a:bodyPr>
+          <a:lstStyle/>
+          <a:p>
+            <a:r>
+              <a:rPr sz="1200" i="1">
+                <a:solidFill>
+                  <a:srgbClr val="707070"/>
+                </a:solidFill>
+                <a:latin typeface="Avenir Next LT Pro"/>
+              </a:rPr>
+              <a:t>Hold today. Three proofs would flip it to Buy — even at a higher price, because the risk would be lower.</a:t>
+            </a:r>
+          </a:p>
+        </p:txBody>
+      </p:sp>
+      <p:sp>
+        <p:nvSpPr>
+          <p:cNvPr id="5" name="Rectangle 4"/>
+          <p:cNvSpPr/>
+          <p:nvPr/>
+        </p:nvSpPr>
+        <p:spPr>
+          <a:xfrm>
+            <a:off x="457200" y="1691640"/>
+            <a:ext cx="82296" cy="1143000"/>
+          </a:xfrm>
+          <a:prstGeom prst="rect">
+            <a:avLst/>
+          </a:prstGeom>
+          <a:solidFill>
+            <a:srgbClr val="156082"/>
+          </a:solidFill>
+          <a:ln>
+            <a:noFill/>
+          </a:ln>
+        </p:spPr>
+        <p:style>
+          <a:lnRef idx="1">
+            <a:schemeClr val="accent1"/>
+          </a:lnRef>
+          <a:fillRef idx="3">
+            <a:schemeClr val="accent1"/>
+          </a:fillRef>
+          <a:effectRef idx="2">
+            <a:schemeClr val="accent1"/>
+          </a:effectRef>
+          <a:fontRef idx="minor">
+            <a:schemeClr val="lt1"/>
+          </a:fontRef>
+        </p:style>
+        <p:txBody>
+          <a:bodyPr rtlCol="0" anchor="ctr"/>
+          <a:lstStyle/>
+          <a:p>
+            <a:pPr algn="ctr"/>
+          </a:p>
+        </p:txBody>
+      </p:sp>
+      <p:sp>
+        <p:nvSpPr>
+          <p:cNvPr id="6" name="TextBox 5"/>
+          <p:cNvSpPr txBox="1"/>
+          <p:nvPr/>
+        </p:nvSpPr>
+        <p:spPr>
+          <a:xfrm>
+            <a:off x="658368" y="1691640"/>
+            <a:ext cx="2331720" cy="1143000"/>
+          </a:xfrm>
+          <a:prstGeom prst="rect">
+            <a:avLst/>
+          </a:prstGeom>
+          <a:noFill/>
+        </p:spPr>
+        <p:txBody>
+          <a:bodyPr wrap="square" anchor="ctr">
+            <a:spAutoFit/>
+          </a:bodyPr>
+          <a:lstStyle/>
+          <a:p>
+            <a:r>
+              <a:rPr sz="1300" b="1">
+                <a:solidFill>
+                  <a:srgbClr val="000000"/>
+                </a:solidFill>
+                <a:latin typeface="Avenir Next LT Pro Demi"/>
+              </a:rPr>
+              <a:t>1 — Two clean quarters</a:t>
+            </a:r>
+          </a:p>
+        </p:txBody>
+      </p:sp>
+      <p:sp>
+        <p:nvSpPr>
+          <p:cNvPr id="7" name="TextBox 6"/>
+          <p:cNvSpPr txBox="1"/>
+          <p:nvPr/>
+        </p:nvSpPr>
+        <p:spPr>
+          <a:xfrm>
+            <a:off x="3063240" y="1691640"/>
+            <a:ext cx="5623560" cy="1143000"/>
+          </a:xfrm>
+          <a:prstGeom prst="rect">
+            <a:avLst/>
+          </a:prstGeom>
+          <a:noFill/>
+        </p:spPr>
+        <p:txBody>
+          <a:bodyPr wrap="square" anchor="ctr">
+            <a:spAutoFit/>
+          </a:bodyPr>
+          <a:lstStyle/>
+          <a:p>
+            <a:r>
+              <a:rPr sz="1150">
+                <a:solidFill>
+                  <a:srgbClr val="000000"/>
+                </a:solidFill>
+                <a:latin typeface="Avenir Next LT Pro"/>
+              </a:rPr>
+              <a:t>Revenue in or above the 4.5–8% FY26 guide and a return to profitability. Q2 FY26 guides to just +0.5–2.5% — the back-half acceleration has to show up.</a:t>
+            </a:r>
+          </a:p>
+        </p:txBody>
+      </p:sp>
+      <p:sp>
+        <p:nvSpPr>
+          <p:cNvPr id="8" name="Rectangle 7"/>
+          <p:cNvSpPr/>
+          <p:nvPr/>
+        </p:nvSpPr>
+        <p:spPr>
+          <a:xfrm>
+            <a:off x="457200" y="2999232"/>
+            <a:ext cx="82296" cy="1143000"/>
+          </a:xfrm>
+          <a:prstGeom prst="rect">
+            <a:avLst/>
+          </a:prstGeom>
+          <a:solidFill>
+            <a:srgbClr val="E97132"/>
+          </a:solidFill>
+          <a:ln>
+            <a:noFill/>
+          </a:ln>
+        </p:spPr>
+        <p:style>
+          <a:lnRef idx="1">
+            <a:schemeClr val="accent1"/>
+          </a:lnRef>
+          <a:fillRef idx="3">
+            <a:schemeClr val="accent1"/>
+          </a:fillRef>
+          <a:effectRef idx="2">
+            <a:schemeClr val="accent1"/>
+          </a:effectRef>
+          <a:fontRef idx="minor">
+            <a:schemeClr val="lt1"/>
+          </a:fontRef>
+        </p:style>
+        <p:txBody>
+          <a:bodyPr rtlCol="0" anchor="ctr"/>
+          <a:lstStyle/>
+          <a:p>
+            <a:pPr algn="ctr"/>
+          </a:p>
+        </p:txBody>
+      </p:sp>
+      <p:sp>
+        <p:nvSpPr>
+          <p:cNvPr id="9" name="TextBox 8"/>
+          <p:cNvSpPr txBox="1"/>
+          <p:nvPr/>
+        </p:nvSpPr>
+        <p:spPr>
+          <a:xfrm>
+            <a:off x="658368" y="2999232"/>
+            <a:ext cx="2331720" cy="1143000"/>
+          </a:xfrm>
+          <a:prstGeom prst="rect">
+            <a:avLst/>
+          </a:prstGeom>
+          <a:noFill/>
+        </p:spPr>
+        <p:txBody>
+          <a:bodyPr wrap="square" anchor="ctr">
+            <a:spAutoFit/>
+          </a:bodyPr>
+          <a:lstStyle/>
+          <a:p>
+            <a:r>
+              <a:rPr sz="1300" b="1">
+                <a:solidFill>
+                  <a:srgbClr val="000000"/>
+                </a:solidFill>
+                <a:latin typeface="Avenir Next LT Pro Demi"/>
+              </a:rPr>
+              <a:t>2 — Evidence Estates is working</a:t>
+            </a:r>
+          </a:p>
+        </p:txBody>
+      </p:sp>
+      <p:sp>
+        <p:nvSpPr>
+          <p:cNvPr id="10" name="TextBox 9"/>
+          <p:cNvSpPr txBox="1"/>
+          <p:nvPr/>
+        </p:nvSpPr>
+        <p:spPr>
+          <a:xfrm>
+            <a:off x="3063240" y="2999232"/>
+            <a:ext cx="5623560" cy="1143000"/>
+          </a:xfrm>
+          <a:prstGeom prst="rect">
+            <a:avLst/>
+          </a:prstGeom>
+          <a:noFill/>
+        </p:spPr>
+        <p:txBody>
+          <a:bodyPr wrap="square" anchor="ctr">
+            <a:spAutoFit/>
+          </a:bodyPr>
+          <a:lstStyle/>
+          <a:p>
+            <a:r>
+              <a:rPr sz="1150">
+                <a:solidFill>
+                  <a:srgbClr val="000000"/>
+                </a:solidFill>
+                <a:latin typeface="Avenir Next LT Pro"/>
+              </a:rPr>
+              <a:t>Actual revenue contribution and gallery traction. Estates launched Jun 2026 — there is zero results data yet. First read: Q2 FY2026.</a:t>
+            </a:r>
+          </a:p>
+        </p:txBody>
+      </p:sp>
+      <p:sp>
+        <p:nvSpPr>
+          <p:cNvPr id="11" name="Rectangle 10"/>
+          <p:cNvSpPr/>
+          <p:nvPr/>
+        </p:nvSpPr>
+        <p:spPr>
+          <a:xfrm>
+            <a:off x="457200" y="4306824"/>
+            <a:ext cx="82296" cy="1143000"/>
+          </a:xfrm>
+          <a:prstGeom prst="rect">
+            <a:avLst/>
+          </a:prstGeom>
+          <a:solidFill>
+            <a:srgbClr val="196B24"/>
+          </a:solidFill>
+          <a:ln>
+            <a:noFill/>
+          </a:ln>
+        </p:spPr>
+        <p:style>
+          <a:lnRef idx="1">
+            <a:schemeClr val="accent1"/>
+          </a:lnRef>
+          <a:fillRef idx="3">
+            <a:schemeClr val="accent1"/>
+          </a:fillRef>
+          <a:effectRef idx="2">
+            <a:schemeClr val="accent1"/>
+          </a:effectRef>
+          <a:fontRef idx="minor">
+            <a:schemeClr val="lt1"/>
+          </a:fontRef>
+        </p:style>
+        <p:txBody>
+          <a:bodyPr rtlCol="0" anchor="ctr"/>
+          <a:lstStyle/>
+          <a:p>
+            <a:pPr algn="ctr"/>
+          </a:p>
+        </p:txBody>
+      </p:sp>
+      <p:sp>
+        <p:nvSpPr>
+          <p:cNvPr id="12" name="TextBox 11"/>
+          <p:cNvSpPr txBox="1"/>
+          <p:nvPr/>
+        </p:nvSpPr>
+        <p:spPr>
+          <a:xfrm>
+            <a:off x="658368" y="4306824"/>
+            <a:ext cx="2331720" cy="1143000"/>
+          </a:xfrm>
+          <a:prstGeom prst="rect">
+            <a:avLst/>
+          </a:prstGeom>
+          <a:noFill/>
+        </p:spPr>
+        <p:txBody>
+          <a:bodyPr wrap="square" anchor="ctr">
+            <a:spAutoFit/>
+          </a:bodyPr>
+          <a:lstStyle/>
+          <a:p>
+            <a:r>
+              <a:rPr sz="1300" b="1">
+                <a:solidFill>
+                  <a:srgbClr val="000000"/>
+                </a:solidFill>
+                <a:latin typeface="Avenir Next LT Pro Demi"/>
+              </a:rPr>
+              <a:t>3 — Durable debt reduction</a:t>
+            </a:r>
+          </a:p>
+        </p:txBody>
+      </p:sp>
+      <p:sp>
+        <p:nvSpPr>
+          <p:cNvPr id="13" name="TextBox 12"/>
+          <p:cNvSpPr txBox="1"/>
+          <p:nvPr/>
+        </p:nvSpPr>
+        <p:spPr>
+          <a:xfrm>
+            <a:off x="3063240" y="4306824"/>
+            <a:ext cx="5623560" cy="1143000"/>
+          </a:xfrm>
+          <a:prstGeom prst="rect">
+            <a:avLst/>
+          </a:prstGeom>
+          <a:noFill/>
+        </p:spPr>
+        <p:txBody>
+          <a:bodyPr wrap="square" anchor="ctr">
+            <a:spAutoFit/>
+          </a:bodyPr>
+          <a:lstStyle/>
+          <a:p>
+            <a:r>
+              <a:rPr sz="1150">
+                <a:solidFill>
+                  <a:srgbClr val="000000"/>
+                </a:solidFill>
+                <a:latin typeface="Avenir Next LT Pro"/>
+              </a:rPr>
+              <a:t>Net debt falling on real free cash flow — not the one-time inventory unwind that drove FY25. Leverage trending toward ~3×.</a:t>
+            </a:r>
+          </a:p>
+        </p:txBody>
+      </p:sp>
+      <p:sp>
+        <p:nvSpPr>
+          <p:cNvPr id="14" name="TextBox 13"/>
+          <p:cNvSpPr txBox="1"/>
+          <p:nvPr/>
+        </p:nvSpPr>
+        <p:spPr>
+          <a:xfrm>
+            <a:off x="457200" y="5532120"/>
+            <a:ext cx="8229600" cy="457200"/>
+          </a:xfrm>
+          <a:prstGeom prst="rect">
+            <a:avLst/>
+          </a:prstGeom>
+          <a:noFill/>
+        </p:spPr>
+        <p:txBody>
+          <a:bodyPr wrap="square">
+            <a:spAutoFit/>
+          </a:bodyPr>
+          <a:lstStyle/>
+          <a:p>
+            <a:r>
+              <a:rPr sz="1200" b="1">
+                <a:solidFill>
+                  <a:srgbClr val="000000"/>
+                </a:solidFill>
+                <a:latin typeface="Avenir Next LT Pro Demi"/>
+              </a:rPr>
+              <a:t>First real read: Q2 FY2026 results (Estates' debut quarter). Until then — watch, don't own.</a:t>
+            </a:r>
+          </a:p>
+        </p:txBody>
+      </p:sp>
+      <p:sp>
+        <p:nvSpPr>
+          <p:cNvPr id="15" name="TextBox 14"/>
+          <p:cNvSpPr txBox="1"/>
+          <p:nvPr/>
+        </p:nvSpPr>
+        <p:spPr>
+          <a:xfrm>
+            <a:off x="457200" y="6355080"/>
+            <a:ext cx="8229600" cy="365760"/>
+          </a:xfrm>
+          <a:prstGeom prst="rect">
+            <a:avLst/>
+          </a:prstGeom>
+          <a:noFill/>
+        </p:spPr>
+        <p:txBody>
+          <a:bodyPr wrap="none">
+            <a:spAutoFit/>
+          </a:bodyPr>
+          <a:lstStyle/>
+          <a:p>
+            <a:r>
+              <a:rPr sz="750" i="1">
+                <a:solidFill>
+                  <a:srgbClr val="707070"/>
+                </a:solidFill>
+                <a:latin typeface="Avenir Next LT Pro"/>
+              </a:rPr>
+              <a:t>Source: RH FY2025 10-K, Q1 FY2026 10-Q, company guidance.</a:t>
+            </a:r>
+          </a:p>
+        </p:txBody>
+      </p:sp>
+    </p:spTree>
+  </p:cSld>
+  <p:clrMapOvr>
+    <a:masterClrMapping/>
+  </p:clrMapOvr>
+</p:sld>
+</file>
+
+<file path=ppt/slides/slide6.xml><?xml version="1.0" encoding="utf-8"?>
 <p:sld xmlns:a="http://schemas.openxmlformats.org/drawingml/2006/main" xmlns:r="http://schemas.openxmlformats.org/officeDocument/2006/relationships" xmlns:p="http://schemas.openxmlformats.org/presentationml/2006/main">
   <p:cSld>
     <p:spTree>
@@ -11095,7 +12543,7 @@
 </p:sld>
 </file>
 
-<file path=ppt/slides/slide6.xml><?xml version="1.0" encoding="utf-8"?>
+<file path=ppt/slides/slide7.xml><?xml version="1.0" encoding="utf-8"?>
 <p:sld xmlns:a="http://schemas.openxmlformats.org/drawingml/2006/main" xmlns:r="http://schemas.openxmlformats.org/officeDocument/2006/relationships" xmlns:p="http://schemas.openxmlformats.org/presentationml/2006/main">
   <p:cSld>
     <p:spTree>
@@ -12614,7 +14062,7 @@
 </p:sld>
 </file>
 
-<file path=ppt/slides/slide7.xml><?xml version="1.0" encoding="utf-8"?>
+<file path=ppt/slides/slide8.xml><?xml version="1.0" encoding="utf-8"?>
 <p:sld xmlns:a="http://schemas.openxmlformats.org/drawingml/2006/main" xmlns:r="http://schemas.openxmlformats.org/officeDocument/2006/relationships" xmlns:p="http://schemas.openxmlformats.org/presentationml/2006/main">
   <p:cSld>
     <p:spTree>
@@ -12684,7 +14132,7 @@
 </p:sld>
 </file>
 
-<file path=ppt/slides/slide8.xml><?xml version="1.0" encoding="utf-8"?>
+<file path=ppt/slides/slide9.xml><?xml version="1.0" encoding="utf-8"?>
 <p:sld xmlns:a="http://schemas.openxmlformats.org/drawingml/2006/main" xmlns:r="http://schemas.openxmlformats.org/officeDocument/2006/relationships" xmlns:p="http://schemas.openxmlformats.org/presentationml/2006/main">
   <p:cSld>
     <p:spTree>
@@ -13793,923 +15241,6 @@
                 <a:latin typeface="Avenir Next LT Pro Demi"/>
               </a:rPr>
               <a:t>Probability-weighted target: ~$285   (~72% upside from ~$166)</a:t>
-            </a:r>
-          </a:p>
-        </p:txBody>
-      </p:sp>
-    </p:spTree>
-  </p:cSld>
-  <p:clrMapOvr>
-    <a:masterClrMapping/>
-  </p:clrMapOvr>
-</p:sld>
-</file>
-
-<file path=ppt/slides/slide9.xml><?xml version="1.0" encoding="utf-8"?>
-<p:sld xmlns:a="http://schemas.openxmlformats.org/drawingml/2006/main" xmlns:r="http://schemas.openxmlformats.org/officeDocument/2006/relationships" xmlns:p="http://schemas.openxmlformats.org/presentationml/2006/main">
-  <p:cSld>
-    <p:spTree>
-      <p:nvGrpSpPr>
-        <p:cNvPr id="1" name=""/>
-        <p:cNvGrpSpPr/>
-        <p:nvPr/>
-      </p:nvGrpSpPr>
-      <p:grpSpPr>
-        <a:xfrm>
-          <a:off x="0" y="0"/>
-          <a:ext cx="0" cy="0"/>
-          <a:chOff x="0" y="0"/>
-          <a:chExt cx="0" cy="0"/>
-        </a:xfrm>
-      </p:grpSpPr>
-      <p:sp>
-        <p:nvSpPr>
-          <p:cNvPr id="2" name="TextBox 1"/>
-          <p:cNvSpPr txBox="1"/>
-          <p:nvPr/>
-        </p:nvSpPr>
-        <p:spPr>
-          <a:xfrm>
-            <a:off x="457200" y="320040"/>
-            <a:ext cx="8229600" cy="446276"/>
-          </a:xfrm>
-          <a:prstGeom prst="rect">
-            <a:avLst/>
-          </a:prstGeom>
-          <a:noFill/>
-        </p:spPr>
-        <p:txBody>
-          <a:bodyPr wrap="square">
-            <a:spAutoFit/>
-          </a:bodyPr>
-          <a:lstStyle/>
-          <a:p>
-            <a:r>
-              <a:rPr sz="2300" b="0" i="0" dirty="0">
-                <a:latin typeface="Avenir Next LT Pro Demi"/>
-              </a:rPr>
-              <a:t>Macro Sensitivity — Housing Is Option Value</a:t>
-            </a:r>
-          </a:p>
-        </p:txBody>
-      </p:sp>
-      <p:sp>
-        <p:nvSpPr>
-          <p:cNvPr id="5" name="TextBox 4"/>
-          <p:cNvSpPr txBox="1"/>
-          <p:nvPr/>
-        </p:nvSpPr>
-        <p:spPr>
-          <a:xfrm>
-            <a:off x="457200" y="1051560"/>
-            <a:ext cx="8229600" cy="274320"/>
-          </a:xfrm>
-          <a:prstGeom prst="rect">
-            <a:avLst/>
-          </a:prstGeom>
-          <a:noFill/>
-        </p:spPr>
-        <p:txBody>
-          <a:bodyPr wrap="none">
-            <a:spAutoFit/>
-          </a:bodyPr>
-          <a:lstStyle/>
-          <a:p>
-            <a:r>
-              <a:rPr sz="900" b="0" i="1">
-                <a:solidFill>
-                  <a:srgbClr val="B0B0B0"/>
-                </a:solidFill>
-                <a:latin typeface="Avenir Next LT Pro"/>
-              </a:rPr>
-              <a:t>[ narrative / commentary to be written ]</a:t>
-            </a:r>
-          </a:p>
-        </p:txBody>
-      </p:sp>
-      <p:graphicFrame>
-        <p:nvGraphicFramePr>
-          <p:cNvPr id="6" name="Table 5"/>
-          <p:cNvGraphicFramePr>
-            <a:graphicFrameLocks noGrp="1"/>
-          </p:cNvGraphicFramePr>
-          <p:nvPr>
-            <p:extLst>
-              <p:ext uri="{D42A27DB-BD31-4B8C-83A1-F6EECF244321}">
-                <p14:modId xmlns:p14="http://schemas.microsoft.com/office/powerpoint/2010/main" val="4054062618"/>
-              </p:ext>
-            </p:extLst>
-          </p:nvPr>
-        </p:nvGraphicFramePr>
-        <p:xfrm>
-          <a:off x="228600" y="1577340"/>
-          <a:ext cx="8686800" cy="1828800"/>
-        </p:xfrm>
-        <a:graphic>
-          <a:graphicData uri="http://schemas.openxmlformats.org/drawingml/2006/table">
-            <a:tbl>
-              <a:tblPr>
-                <a:tableStyleId>{5C22544A-7EE6-4342-B048-85BDC9FD1C3A}</a:tableStyleId>
-              </a:tblPr>
-              <a:tblGrid>
-                <a:gridCol w="1691640">
-                  <a:extLst>
-                    <a:ext uri="{9D8B030D-6E8A-4147-A177-3AD203B41FA5}">
-                      <a16:colId xmlns:a16="http://schemas.microsoft.com/office/drawing/2014/main" val="20000"/>
-                    </a:ext>
-                  </a:extLst>
-                </a:gridCol>
-                <a:gridCol w="1143000">
-                  <a:extLst>
-                    <a:ext uri="{9D8B030D-6E8A-4147-A177-3AD203B41FA5}">
-                      <a16:colId xmlns:a16="http://schemas.microsoft.com/office/drawing/2014/main" val="20001"/>
-                    </a:ext>
-                  </a:extLst>
-                </a:gridCol>
-                <a:gridCol w="1417320">
-                  <a:extLst>
-                    <a:ext uri="{9D8B030D-6E8A-4147-A177-3AD203B41FA5}">
-                      <a16:colId xmlns:a16="http://schemas.microsoft.com/office/drawing/2014/main" val="20002"/>
-                    </a:ext>
-                  </a:extLst>
-                </a:gridCol>
-                <a:gridCol w="1234440">
-                  <a:extLst>
-                    <a:ext uri="{9D8B030D-6E8A-4147-A177-3AD203B41FA5}">
-                      <a16:colId xmlns:a16="http://schemas.microsoft.com/office/drawing/2014/main" val="20003"/>
-                    </a:ext>
-                  </a:extLst>
-                </a:gridCol>
-                <a:gridCol w="960120">
-                  <a:extLst>
-                    <a:ext uri="{9D8B030D-6E8A-4147-A177-3AD203B41FA5}">
-                      <a16:colId xmlns:a16="http://schemas.microsoft.com/office/drawing/2014/main" val="20004"/>
-                    </a:ext>
-                  </a:extLst>
-                </a:gridCol>
-                <a:gridCol w="960120">
-                  <a:extLst>
-                    <a:ext uri="{9D8B030D-6E8A-4147-A177-3AD203B41FA5}">
-                      <a16:colId xmlns:a16="http://schemas.microsoft.com/office/drawing/2014/main" val="20005"/>
-                    </a:ext>
-                  </a:extLst>
-                </a:gridCol>
-                <a:gridCol w="1280160">
-                  <a:extLst>
-                    <a:ext uri="{9D8B030D-6E8A-4147-A177-3AD203B41FA5}">
-                      <a16:colId xmlns:a16="http://schemas.microsoft.com/office/drawing/2014/main" val="20006"/>
-                    </a:ext>
-                  </a:extLst>
-                </a:gridCol>
-              </a:tblGrid>
-              <a:tr h="457200">
-                <a:tc>
-                  <a:txBody>
-                    <a:bodyPr/>
-                    <a:lstStyle/>
-                    <a:p>
-                      <a:pPr algn="l"/>
-                      <a:r>
-                        <a:rPr sz="880" b="1" i="0" dirty="0">
-                          <a:solidFill>
-                            <a:srgbClr val="FFFFFF"/>
-                          </a:solidFill>
-                          <a:latin typeface="Avenir Next LT Pro Demi"/>
-                        </a:rPr>
-                        <a:t>Scenario</a:t>
-                      </a:r>
-                    </a:p>
-                  </a:txBody>
-                  <a:tcPr marL="73152" marR="73152" marT="18288" marB="18288" anchor="ctr">
-                    <a:solidFill>
-                      <a:srgbClr val="AF8C49"/>
-                    </a:solidFill>
-                  </a:tcPr>
-                </a:tc>
-                <a:tc>
-                  <a:txBody>
-                    <a:bodyPr/>
-                    <a:lstStyle/>
-                    <a:p>
-                      <a:pPr algn="ctr"/>
-                      <a:r>
-                        <a:rPr sz="880" b="1" i="0" dirty="0">
-                          <a:solidFill>
-                            <a:srgbClr val="FFFFFF"/>
-                          </a:solidFill>
-                          <a:latin typeface="Avenir Next LT Pro Demi"/>
-                        </a:rPr>
-                        <a:t>30Y Mortgage</a:t>
-                      </a:r>
-                    </a:p>
-                  </a:txBody>
-                  <a:tcPr marL="73152" marR="73152" marT="18288" marB="18288" anchor="ctr">
-                    <a:solidFill>
-                      <a:srgbClr val="AF8C49"/>
-                    </a:solidFill>
-                  </a:tcPr>
-                </a:tc>
-                <a:tc>
-                  <a:txBody>
-                    <a:bodyPr/>
-                    <a:lstStyle/>
-                    <a:p>
-                      <a:pPr algn="ctr"/>
-                      <a:r>
-                        <a:rPr sz="880" b="1" i="0" dirty="0">
-                          <a:solidFill>
-                            <a:srgbClr val="FFFFFF"/>
-                          </a:solidFill>
-                          <a:latin typeface="Avenir Next LT Pro Demi"/>
-                        </a:rPr>
-                        <a:t>Existing Home Sales</a:t>
-                      </a:r>
-                    </a:p>
-                  </a:txBody>
-                  <a:tcPr marL="73152" marR="73152" marT="18288" marB="18288" anchor="ctr">
-                    <a:solidFill>
-                      <a:srgbClr val="AF8C49"/>
-                    </a:solidFill>
-                  </a:tcPr>
-                </a:tc>
-                <a:tc>
-                  <a:txBody>
-                    <a:bodyPr/>
-                    <a:lstStyle/>
-                    <a:p>
-                      <a:pPr algn="ctr"/>
-                      <a:r>
-                        <a:rPr sz="880" b="1" i="0" dirty="0">
-                          <a:solidFill>
-                            <a:srgbClr val="FFFFFF"/>
-                          </a:solidFill>
-                          <a:latin typeface="Avenir Next LT Pro Demi"/>
-                        </a:rPr>
-                        <a:t>RH Revenue</a:t>
-                      </a:r>
-                    </a:p>
-                  </a:txBody>
-                  <a:tcPr marL="73152" marR="73152" marT="18288" marB="18288" anchor="ctr">
-                    <a:solidFill>
-                      <a:srgbClr val="AF8C49"/>
-                    </a:solidFill>
-                  </a:tcPr>
-                </a:tc>
-                <a:tc>
-                  <a:txBody>
-                    <a:bodyPr/>
-                    <a:lstStyle/>
-                    <a:p>
-                      <a:pPr algn="ctr"/>
-                      <a:r>
-                        <a:rPr sz="880" b="1" i="0">
-                          <a:solidFill>
-                            <a:srgbClr val="FFFFFF"/>
-                          </a:solidFill>
-                          <a:latin typeface="Avenir Next LT Pro Demi"/>
-                        </a:rPr>
-                        <a:t>EBITDA Mgn</a:t>
-                      </a:r>
-                    </a:p>
-                  </a:txBody>
-                  <a:tcPr marL="73152" marR="73152" marT="18288" marB="18288" anchor="ctr">
-                    <a:solidFill>
-                      <a:srgbClr val="AF8C49"/>
-                    </a:solidFill>
-                  </a:tcPr>
-                </a:tc>
-                <a:tc>
-                  <a:txBody>
-                    <a:bodyPr/>
-                    <a:lstStyle/>
-                    <a:p>
-                      <a:pPr algn="ctr"/>
-                      <a:r>
-                        <a:rPr sz="880" b="1" i="0" dirty="0">
-                          <a:solidFill>
-                            <a:srgbClr val="FFFFFF"/>
-                          </a:solidFill>
-                          <a:latin typeface="Avenir Next LT Pro Demi"/>
-                        </a:rPr>
-                        <a:t>Est. EPS (fwd)</a:t>
-                      </a:r>
-                    </a:p>
-                  </a:txBody>
-                  <a:tcPr marL="73152" marR="73152" marT="18288" marB="18288" anchor="ctr">
-                    <a:solidFill>
-                      <a:srgbClr val="AF8C49"/>
-                    </a:solidFill>
-                  </a:tcPr>
-                </a:tc>
-                <a:tc>
-                  <a:txBody>
-                    <a:bodyPr/>
-                    <a:lstStyle/>
-                    <a:p>
-                      <a:pPr algn="ctr"/>
-                      <a:r>
-                        <a:rPr sz="880" b="1" i="0" dirty="0">
-                          <a:solidFill>
-                            <a:srgbClr val="FFFFFF"/>
-                          </a:solidFill>
-                          <a:latin typeface="Avenir Next LT Pro Demi"/>
-                        </a:rPr>
-                        <a:t>Implied P/E @ $166</a:t>
-                      </a:r>
-                    </a:p>
-                  </a:txBody>
-                  <a:tcPr marL="73152" marR="73152" marT="18288" marB="18288" anchor="ctr">
-                    <a:solidFill>
-                      <a:srgbClr val="AF8C49"/>
-                    </a:solidFill>
-                  </a:tcPr>
-                </a:tc>
-                <a:extLst>
-                  <a:ext uri="{0D108BD9-81ED-4DB2-BD59-A6C34878D82A}">
-                    <a16:rowId xmlns:a16="http://schemas.microsoft.com/office/drawing/2014/main" val="10000"/>
-                  </a:ext>
-                </a:extLst>
-              </a:tr>
-              <a:tr h="457200">
-                <a:tc>
-                  <a:txBody>
-                    <a:bodyPr/>
-                    <a:lstStyle/>
-                    <a:p>
-                      <a:pPr algn="l"/>
-                      <a:r>
-                        <a:rPr sz="950" b="1" i="0" dirty="0">
-                          <a:solidFill>
-                            <a:schemeClr val="tx1"/>
-                          </a:solidFill>
-                          <a:latin typeface="Avenir Next LT Pro Demi"/>
-                        </a:rPr>
-                        <a:t>Bull — rate relief</a:t>
-                      </a:r>
-                    </a:p>
-                  </a:txBody>
-                  <a:tcPr marL="73152" marR="73152" marT="18288" marB="18288" anchor="ctr">
-                    <a:solidFill>
-                      <a:srgbClr val="FFFFFF"/>
-                    </a:solidFill>
-                  </a:tcPr>
-                </a:tc>
-                <a:tc>
-                  <a:txBody>
-                    <a:bodyPr/>
-                    <a:lstStyle/>
-                    <a:p>
-                      <a:pPr algn="ctr"/>
-                      <a:r>
-                        <a:rPr sz="950" b="0" i="0">
-                          <a:solidFill>
-                            <a:schemeClr val="tx1"/>
-                          </a:solidFill>
-                          <a:latin typeface="Avenir Next LT Pro"/>
-                        </a:rPr>
-                        <a:t>&lt;5.5%</a:t>
-                      </a:r>
-                    </a:p>
-                  </a:txBody>
-                  <a:tcPr marL="73152" marR="73152" marT="18288" marB="18288" anchor="ctr">
-                    <a:solidFill>
-                      <a:srgbClr val="FFFFFF"/>
-                    </a:solidFill>
-                  </a:tcPr>
-                </a:tc>
-                <a:tc>
-                  <a:txBody>
-                    <a:bodyPr/>
-                    <a:lstStyle/>
-                    <a:p>
-                      <a:pPr algn="ctr"/>
-                      <a:r>
-                        <a:rPr sz="950" b="0" i="0">
-                          <a:solidFill>
-                            <a:schemeClr val="tx1"/>
-                          </a:solidFill>
-                          <a:latin typeface="Avenir Next LT Pro"/>
-                        </a:rPr>
-                        <a:t>~5.2–5.8M</a:t>
-                      </a:r>
-                    </a:p>
-                  </a:txBody>
-                  <a:tcPr marL="73152" marR="73152" marT="18288" marB="18288" anchor="ctr">
-                    <a:solidFill>
-                      <a:srgbClr val="FFFFFF"/>
-                    </a:solidFill>
-                  </a:tcPr>
-                </a:tc>
-                <a:tc>
-                  <a:txBody>
-                    <a:bodyPr/>
-                    <a:lstStyle/>
-                    <a:p>
-                      <a:pPr algn="ctr"/>
-                      <a:r>
-                        <a:rPr sz="950" b="0" i="0">
-                          <a:solidFill>
-                            <a:schemeClr val="tx1"/>
-                          </a:solidFill>
-                          <a:latin typeface="Avenir Next LT Pro"/>
-                        </a:rPr>
-                        <a:t>~$4.2–4.8B</a:t>
-                      </a:r>
-                    </a:p>
-                  </a:txBody>
-                  <a:tcPr marL="73152" marR="73152" marT="18288" marB="18288" anchor="ctr">
-                    <a:solidFill>
-                      <a:srgbClr val="FFFFFF"/>
-                    </a:solidFill>
-                  </a:tcPr>
-                </a:tc>
-                <a:tc>
-                  <a:txBody>
-                    <a:bodyPr/>
-                    <a:lstStyle/>
-                    <a:p>
-                      <a:pPr algn="ctr"/>
-                      <a:r>
-                        <a:rPr sz="950" b="0" i="0" dirty="0">
-                          <a:solidFill>
-                            <a:schemeClr val="tx1"/>
-                          </a:solidFill>
-                          <a:latin typeface="Avenir Next LT Pro"/>
-                        </a:rPr>
-                        <a:t>22–26%</a:t>
-                      </a:r>
-                    </a:p>
-                  </a:txBody>
-                  <a:tcPr marL="73152" marR="73152" marT="18288" marB="18288" anchor="ctr">
-                    <a:solidFill>
-                      <a:srgbClr val="FFFFFF"/>
-                    </a:solidFill>
-                  </a:tcPr>
-                </a:tc>
-                <a:tc>
-                  <a:txBody>
-                    <a:bodyPr/>
-                    <a:lstStyle/>
-                    <a:p>
-                      <a:pPr algn="ctr"/>
-                      <a:r>
-                        <a:rPr sz="950" b="0" i="0">
-                          <a:solidFill>
-                            <a:schemeClr val="tx1"/>
-                          </a:solidFill>
-                          <a:latin typeface="Avenir Next LT Pro"/>
-                        </a:rPr>
-                        <a:t>~$22–35</a:t>
-                      </a:r>
-                    </a:p>
-                  </a:txBody>
-                  <a:tcPr marL="73152" marR="73152" marT="18288" marB="18288" anchor="ctr">
-                    <a:solidFill>
-                      <a:srgbClr val="FFFFFF"/>
-                    </a:solidFill>
-                  </a:tcPr>
-                </a:tc>
-                <a:tc>
-                  <a:txBody>
-                    <a:bodyPr/>
-                    <a:lstStyle/>
-                    <a:p>
-                      <a:pPr algn="ctr"/>
-                      <a:r>
-                        <a:rPr sz="950" b="0" i="0">
-                          <a:solidFill>
-                            <a:schemeClr val="tx1"/>
-                          </a:solidFill>
-                          <a:latin typeface="Avenir Next LT Pro"/>
-                        </a:rPr>
-                        <a:t>~5–7×</a:t>
-                      </a:r>
-                    </a:p>
-                  </a:txBody>
-                  <a:tcPr marL="73152" marR="73152" marT="18288" marB="18288" anchor="ctr">
-                    <a:solidFill>
-                      <a:srgbClr val="FFFFFF"/>
-                    </a:solidFill>
-                  </a:tcPr>
-                </a:tc>
-                <a:extLst>
-                  <a:ext uri="{0D108BD9-81ED-4DB2-BD59-A6C34878D82A}">
-                    <a16:rowId xmlns:a16="http://schemas.microsoft.com/office/drawing/2014/main" val="10001"/>
-                  </a:ext>
-                </a:extLst>
-              </a:tr>
-              <a:tr h="457200">
-                <a:tc>
-                  <a:txBody>
-                    <a:bodyPr/>
-                    <a:lstStyle/>
-                    <a:p>
-                      <a:pPr algn="l"/>
-                      <a:r>
-                        <a:rPr sz="950" b="1" i="0">
-                          <a:solidFill>
-                            <a:schemeClr val="tx1"/>
-                          </a:solidFill>
-                          <a:latin typeface="Avenir Next LT Pro Demi"/>
-                        </a:rPr>
-                        <a:t>Base — modest easing</a:t>
-                      </a:r>
-                    </a:p>
-                  </a:txBody>
-                  <a:tcPr marL="73152" marR="73152" marT="18288" marB="18288" anchor="ctr">
-                    <a:solidFill>
-                      <a:srgbClr val="F4F6F8"/>
-                    </a:solidFill>
-                  </a:tcPr>
-                </a:tc>
-                <a:tc>
-                  <a:txBody>
-                    <a:bodyPr/>
-                    <a:lstStyle/>
-                    <a:p>
-                      <a:pPr algn="ctr"/>
-                      <a:r>
-                        <a:rPr sz="950" b="0" i="0" dirty="0">
-                          <a:solidFill>
-                            <a:schemeClr val="tx1"/>
-                          </a:solidFill>
-                          <a:latin typeface="Avenir Next LT Pro"/>
-                        </a:rPr>
-                        <a:t>5.75–6.25%</a:t>
-                      </a:r>
-                    </a:p>
-                  </a:txBody>
-                  <a:tcPr marL="73152" marR="73152" marT="18288" marB="18288" anchor="ctr">
-                    <a:solidFill>
-                      <a:srgbClr val="F4F6F8"/>
-                    </a:solidFill>
-                  </a:tcPr>
-                </a:tc>
-                <a:tc>
-                  <a:txBody>
-                    <a:bodyPr/>
-                    <a:lstStyle/>
-                    <a:p>
-                      <a:pPr algn="ctr"/>
-                      <a:r>
-                        <a:rPr sz="950" b="0" i="0">
-                          <a:solidFill>
-                            <a:schemeClr val="tx1"/>
-                          </a:solidFill>
-                          <a:latin typeface="Avenir Next LT Pro"/>
-                        </a:rPr>
-                        <a:t>~4.5–5.0M</a:t>
-                      </a:r>
-                    </a:p>
-                  </a:txBody>
-                  <a:tcPr marL="73152" marR="73152" marT="18288" marB="18288" anchor="ctr">
-                    <a:solidFill>
-                      <a:srgbClr val="F4F6F8"/>
-                    </a:solidFill>
-                  </a:tcPr>
-                </a:tc>
-                <a:tc>
-                  <a:txBody>
-                    <a:bodyPr/>
-                    <a:lstStyle/>
-                    <a:p>
-                      <a:pPr algn="ctr"/>
-                      <a:r>
-                        <a:rPr sz="950" b="0" i="0">
-                          <a:solidFill>
-                            <a:schemeClr val="tx1"/>
-                          </a:solidFill>
-                          <a:latin typeface="Avenir Next LT Pro"/>
-                        </a:rPr>
-                        <a:t>~$3.6–4.0B</a:t>
-                      </a:r>
-                    </a:p>
-                  </a:txBody>
-                  <a:tcPr marL="73152" marR="73152" marT="18288" marB="18288" anchor="ctr">
-                    <a:solidFill>
-                      <a:srgbClr val="F4F6F8"/>
-                    </a:solidFill>
-                  </a:tcPr>
-                </a:tc>
-                <a:tc>
-                  <a:txBody>
-                    <a:bodyPr/>
-                    <a:lstStyle/>
-                    <a:p>
-                      <a:pPr algn="ctr"/>
-                      <a:r>
-                        <a:rPr sz="950" b="0" i="0" dirty="0">
-                          <a:solidFill>
-                            <a:schemeClr val="tx1"/>
-                          </a:solidFill>
-                          <a:latin typeface="Avenir Next LT Pro"/>
-                        </a:rPr>
-                        <a:t>18–21%</a:t>
-                      </a:r>
-                    </a:p>
-                  </a:txBody>
-                  <a:tcPr marL="73152" marR="73152" marT="18288" marB="18288" anchor="ctr">
-                    <a:solidFill>
-                      <a:srgbClr val="F4F6F8"/>
-                    </a:solidFill>
-                  </a:tcPr>
-                </a:tc>
-                <a:tc>
-                  <a:txBody>
-                    <a:bodyPr/>
-                    <a:lstStyle/>
-                    <a:p>
-                      <a:pPr algn="ctr"/>
-                      <a:r>
-                        <a:rPr sz="950" b="0" i="0">
-                          <a:solidFill>
-                            <a:schemeClr val="tx1"/>
-                          </a:solidFill>
-                          <a:latin typeface="Avenir Next LT Pro"/>
-                        </a:rPr>
-                        <a:t>~$11–19</a:t>
-                      </a:r>
-                    </a:p>
-                  </a:txBody>
-                  <a:tcPr marL="73152" marR="73152" marT="18288" marB="18288" anchor="ctr">
-                    <a:solidFill>
-                      <a:srgbClr val="F4F6F8"/>
-                    </a:solidFill>
-                  </a:tcPr>
-                </a:tc>
-                <a:tc>
-                  <a:txBody>
-                    <a:bodyPr/>
-                    <a:lstStyle/>
-                    <a:p>
-                      <a:pPr algn="ctr"/>
-                      <a:r>
-                        <a:rPr sz="950" b="0" i="0">
-                          <a:solidFill>
-                            <a:schemeClr val="tx1"/>
-                          </a:solidFill>
-                          <a:latin typeface="Avenir Next LT Pro"/>
-                        </a:rPr>
-                        <a:t>~9–15×</a:t>
-                      </a:r>
-                    </a:p>
-                  </a:txBody>
-                  <a:tcPr marL="73152" marR="73152" marT="18288" marB="18288" anchor="ctr">
-                    <a:solidFill>
-                      <a:srgbClr val="F4F6F8"/>
-                    </a:solidFill>
-                  </a:tcPr>
-                </a:tc>
-                <a:extLst>
-                  <a:ext uri="{0D108BD9-81ED-4DB2-BD59-A6C34878D82A}">
-                    <a16:rowId xmlns:a16="http://schemas.microsoft.com/office/drawing/2014/main" val="10002"/>
-                  </a:ext>
-                </a:extLst>
-              </a:tr>
-              <a:tr h="457200">
-                <a:tc>
-                  <a:txBody>
-                    <a:bodyPr/>
-                    <a:lstStyle/>
-                    <a:p>
-                      <a:pPr algn="l"/>
-                      <a:r>
-                        <a:rPr sz="950" b="1" i="0">
-                          <a:solidFill>
-                            <a:schemeClr val="tx1"/>
-                          </a:solidFill>
-                          <a:latin typeface="Avenir Next LT Pro Demi"/>
-                        </a:rPr>
-                        <a:t>Bear — rates stay high</a:t>
-                      </a:r>
-                    </a:p>
-                  </a:txBody>
-                  <a:tcPr marL="73152" marR="73152" marT="18288" marB="18288" anchor="ctr">
-                    <a:solidFill>
-                      <a:srgbClr val="FFFFFF"/>
-                    </a:solidFill>
-                  </a:tcPr>
-                </a:tc>
-                <a:tc>
-                  <a:txBody>
-                    <a:bodyPr/>
-                    <a:lstStyle/>
-                    <a:p>
-                      <a:pPr algn="ctr"/>
-                      <a:r>
-                        <a:rPr sz="950" b="0" i="0" dirty="0">
-                          <a:solidFill>
-                            <a:schemeClr val="tx1"/>
-                          </a:solidFill>
-                          <a:latin typeface="Avenir Next LT Pro"/>
-                        </a:rPr>
-                        <a:t>6.75–7.25%</a:t>
-                      </a:r>
-                    </a:p>
-                  </a:txBody>
-                  <a:tcPr marL="73152" marR="73152" marT="18288" marB="18288" anchor="ctr">
-                    <a:solidFill>
-                      <a:srgbClr val="FFFFFF"/>
-                    </a:solidFill>
-                  </a:tcPr>
-                </a:tc>
-                <a:tc>
-                  <a:txBody>
-                    <a:bodyPr/>
-                    <a:lstStyle/>
-                    <a:p>
-                      <a:pPr algn="ctr"/>
-                      <a:r>
-                        <a:rPr sz="950" b="0" i="0" dirty="0">
-                          <a:solidFill>
-                            <a:schemeClr val="tx1"/>
-                          </a:solidFill>
-                          <a:latin typeface="Avenir Next LT Pro"/>
-                        </a:rPr>
-                        <a:t>~3.8–4.0M</a:t>
-                      </a:r>
-                    </a:p>
-                  </a:txBody>
-                  <a:tcPr marL="73152" marR="73152" marT="18288" marB="18288" anchor="ctr">
-                    <a:solidFill>
-                      <a:srgbClr val="FFFFFF"/>
-                    </a:solidFill>
-                  </a:tcPr>
-                </a:tc>
-                <a:tc>
-                  <a:txBody>
-                    <a:bodyPr/>
-                    <a:lstStyle/>
-                    <a:p>
-                      <a:pPr algn="ctr"/>
-                      <a:r>
-                        <a:rPr sz="950" b="0" i="0" dirty="0">
-                          <a:solidFill>
-                            <a:schemeClr val="tx1"/>
-                          </a:solidFill>
-                          <a:latin typeface="Avenir Next LT Pro"/>
-                        </a:rPr>
-                        <a:t>~$3.1–3.3B</a:t>
-                      </a:r>
-                    </a:p>
-                  </a:txBody>
-                  <a:tcPr marL="73152" marR="73152" marT="18288" marB="18288" anchor="ctr">
-                    <a:solidFill>
-                      <a:srgbClr val="FFFFFF"/>
-                    </a:solidFill>
-                  </a:tcPr>
-                </a:tc>
-                <a:tc>
-                  <a:txBody>
-                    <a:bodyPr/>
-                    <a:lstStyle/>
-                    <a:p>
-                      <a:pPr algn="ctr"/>
-                      <a:r>
-                        <a:rPr sz="950" b="0" i="0" dirty="0">
-                          <a:solidFill>
-                            <a:schemeClr val="tx1"/>
-                          </a:solidFill>
-                          <a:latin typeface="Avenir Next LT Pro"/>
-                        </a:rPr>
-                        <a:t>14–16%</a:t>
-                      </a:r>
-                    </a:p>
-                  </a:txBody>
-                  <a:tcPr marL="73152" marR="73152" marT="18288" marB="18288" anchor="ctr">
-                    <a:solidFill>
-                      <a:srgbClr val="FFFFFF"/>
-                    </a:solidFill>
-                  </a:tcPr>
-                </a:tc>
-                <a:tc>
-                  <a:txBody>
-                    <a:bodyPr/>
-                    <a:lstStyle/>
-                    <a:p>
-                      <a:pPr algn="ctr"/>
-                      <a:r>
-                        <a:rPr sz="950" b="0" i="0" dirty="0">
-                          <a:solidFill>
-                            <a:schemeClr val="tx1"/>
-                          </a:solidFill>
-                          <a:latin typeface="Avenir Next LT Pro"/>
-                        </a:rPr>
-                        <a:t>~$3–6</a:t>
-                      </a:r>
-                    </a:p>
-                  </a:txBody>
-                  <a:tcPr marL="73152" marR="73152" marT="18288" marB="18288" anchor="ctr">
-                    <a:solidFill>
-                      <a:srgbClr val="FFFFFF"/>
-                    </a:solidFill>
-                  </a:tcPr>
-                </a:tc>
-                <a:tc>
-                  <a:txBody>
-                    <a:bodyPr/>
-                    <a:lstStyle/>
-                    <a:p>
-                      <a:pPr algn="ctr"/>
-                      <a:r>
-                        <a:rPr sz="950" b="0" i="0" dirty="0">
-                          <a:solidFill>
-                            <a:schemeClr val="tx1"/>
-                          </a:solidFill>
-                          <a:latin typeface="Avenir Next LT Pro"/>
-                        </a:rPr>
-                        <a:t>~25–55×</a:t>
-                      </a:r>
-                    </a:p>
-                  </a:txBody>
-                  <a:tcPr marL="73152" marR="73152" marT="18288" marB="18288" anchor="ctr">
-                    <a:solidFill>
-                      <a:srgbClr val="FFFFFF"/>
-                    </a:solidFill>
-                  </a:tcPr>
-                </a:tc>
-                <a:extLst>
-                  <a:ext uri="{0D108BD9-81ED-4DB2-BD59-A6C34878D82A}">
-                    <a16:rowId xmlns:a16="http://schemas.microsoft.com/office/drawing/2014/main" val="10003"/>
-                  </a:ext>
-                </a:extLst>
-              </a:tr>
-            </a:tbl>
-          </a:graphicData>
-        </a:graphic>
-      </p:graphicFrame>
-      <p:sp>
-        <p:nvSpPr>
-          <p:cNvPr id="7" name="TextBox 6"/>
-          <p:cNvSpPr txBox="1"/>
-          <p:nvPr/>
-        </p:nvSpPr>
-        <p:spPr>
-          <a:xfrm>
-            <a:off x="457200" y="3657600"/>
-            <a:ext cx="8229600" cy="415498"/>
-          </a:xfrm>
-          <a:prstGeom prst="rect">
-            <a:avLst/>
-          </a:prstGeom>
-          <a:noFill/>
-        </p:spPr>
-        <p:txBody>
-          <a:bodyPr wrap="square">
-            <a:spAutoFit/>
-          </a:bodyPr>
-          <a:lstStyle/>
-          <a:p>
-            <a:r>
-              <a:rPr sz="1100" b="1" i="0" dirty="0">
-                <a:latin typeface="Avenir Next LT Pro Demi"/>
-              </a:rPr>
-              <a:t>Key distinction: RH tracks housing TRANSACTIONS (turnover), not prices</a:t>
-            </a:r>
-          </a:p>
-          <a:p>
-            <a:r>
-              <a:rPr sz="1000" b="0" i="0" dirty="0">
-                <a:solidFill>
-                  <a:srgbClr val="5A5A5A"/>
-                </a:solidFill>
-                <a:latin typeface="Avenir Next LT Pro"/>
-              </a:rPr>
-              <a:t>Base case assumes NO recovery — a rate-driven turn is upside, not a requirement</a:t>
-            </a:r>
-          </a:p>
-        </p:txBody>
-      </p:sp>
-      <p:sp>
-        <p:nvSpPr>
-          <p:cNvPr id="8" name="TextBox 7"/>
-          <p:cNvSpPr txBox="1"/>
-          <p:nvPr/>
-        </p:nvSpPr>
-        <p:spPr>
-          <a:xfrm>
-            <a:off x="457200" y="5989320"/>
-            <a:ext cx="8229600" cy="365760"/>
-          </a:xfrm>
-          <a:prstGeom prst="rect">
-            <a:avLst/>
-          </a:prstGeom>
-          <a:noFill/>
-        </p:spPr>
-        <p:txBody>
-          <a:bodyPr wrap="square">
-            <a:spAutoFit/>
-          </a:bodyPr>
-          <a:lstStyle/>
-          <a:p>
-            <a:r>
-              <a:rPr sz="800" i="1">
-                <a:solidFill>
-                  <a:srgbClr val="707070"/>
-                </a:solidFill>
-                <a:latin typeface="Avenir Next LT Pro"/>
-              </a:rPr>
-              <a:t>EPS ≈ (EBITDA − ~$150M D&amp;A − ~$215M interest) × (1 − 25% tax) ÷ ~19M shares. Illustrative, not a forecast.</a:t>
             </a:r>
           </a:p>
         </p:txBody>

--- a/RH_Stock_Pitch_updated.pptx
+++ b/RH_Stock_Pitch_updated.pptx
@@ -12123,7 +12123,7 @@
                 </a:solidFill>
                 <a:latin typeface="Avenir Next LT Pro Demi"/>
               </a:rPr>
-              <a:t>1 — Two clean quarters</a:t>
+              <a:t>1 — Core recovery</a:t>
             </a:r>
           </a:p>
         </p:txBody>
@@ -12157,7 +12157,7 @@
                 </a:solidFill>
                 <a:latin typeface="Avenir Next LT Pro"/>
               </a:rPr>
-              <a:t>Revenue in or above the 4.5–8% FY26 guide and a return to profitability. Q2 FY26 guides to just +0.5–2.5% — the back-half acceleration has to show up.</a:t>
+              <a:t>Core revenue re-accelerating in or above the 4.5–8% FY26 guide and a return to profitability — a trend, not one quarter. Q2 FY26 guides to just +0.5–2.5%, so the back-half acceleration has to show up.</a:t>
             </a:r>
           </a:p>
         </p:txBody>

--- a/RH_Stock_Pitch_updated.pptx
+++ b/RH_Stock_Pitch_updated.pptx
@@ -15,6 +15,7 @@
     <p:sldId id="433" r:id="rId6"/>
     <p:sldId id="483" r:id="rId7"/>
     <p:sldId id="507" r:id="rId8"/>
+    <p:sldId id="519" r:id="rId32"/>
     <p:sldId id="518" r:id="rId31"/>
     <p:sldId id="481" r:id="rId9"/>
     <p:sldId id="508" r:id="rId10"/>
@@ -10075,6 +10076,638 @@
 </p:sld>
 </file>
 
+<file path=ppt/slides/slide18.xml><?xml version="1.0" encoding="utf-8"?>
+<p:sld xmlns:a="http://schemas.openxmlformats.org/drawingml/2006/main" xmlns:p="http://schemas.openxmlformats.org/presentationml/2006/main" xmlns:r="http://schemas.openxmlformats.org/officeDocument/2006/relationships">
+  <p:cSld>
+    <p:spTree>
+      <p:nvGrpSpPr>
+        <p:cNvPr id="1" name=""/>
+        <p:cNvGrpSpPr/>
+        <p:nvPr/>
+      </p:nvGrpSpPr>
+      <p:grpSpPr/>
+      <p:sp>
+        <p:nvSpPr>
+          <p:cNvPr id="2" name="TextBox 1"/>
+          <p:cNvSpPr txBox="1"/>
+          <p:nvPr/>
+        </p:nvSpPr>
+        <p:spPr>
+          <a:xfrm>
+            <a:off x="457200" y="365760"/>
+            <a:ext cx="8229600" cy="548640"/>
+          </a:xfrm>
+          <a:prstGeom prst="rect">
+            <a:avLst/>
+          </a:prstGeom>
+          <a:noFill/>
+        </p:spPr>
+        <p:txBody>
+          <a:bodyPr wrap="square">
+            <a:spAutoFit/>
+          </a:bodyPr>
+          <a:lstStyle/>
+          <a:p>
+            <a:r>
+              <a:rPr sz="2200">
+                <a:solidFill>
+                  <a:srgbClr val="000000"/>
+                </a:solidFill>
+                <a:latin typeface="Avenir Next LT Pro Demi"/>
+              </a:rPr>
+              <a:t>Where the Street Values RH — vs. My Verdict</a:t>
+            </a:r>
+          </a:p>
+        </p:txBody>
+      </p:sp>
+      <p:sp>
+        <p:nvSpPr>
+          <p:cNvPr id="3" name="Rectangle 2"/>
+          <p:cNvSpPr/>
+          <p:nvPr/>
+        </p:nvSpPr>
+        <p:spPr>
+          <a:xfrm>
+            <a:off x="457200" y="960120"/>
+            <a:ext cx="8229600" cy="25603"/>
+          </a:xfrm>
+          <a:prstGeom prst="rect">
+            <a:avLst/>
+          </a:prstGeom>
+          <a:solidFill>
+            <a:srgbClr val="156082"/>
+          </a:solidFill>
+          <a:ln>
+            <a:noFill/>
+          </a:ln>
+        </p:spPr>
+        <p:style>
+          <a:lnRef idx="1">
+            <a:schemeClr val="accent1"/>
+          </a:lnRef>
+          <a:fillRef idx="3">
+            <a:schemeClr val="accent1"/>
+          </a:fillRef>
+          <a:effectRef idx="2">
+            <a:schemeClr val="accent1"/>
+          </a:effectRef>
+          <a:fontRef idx="minor">
+            <a:schemeClr val="lt1"/>
+          </a:fontRef>
+        </p:style>
+        <p:txBody>
+          <a:bodyPr rtlCol="0" anchor="ctr"/>
+          <a:lstStyle/>
+          <a:p>
+            <a:pPr algn="ctr"/>
+          </a:p>
+        </p:txBody>
+      </p:sp>
+      <p:graphicFrame>
+        <p:nvGraphicFramePr>
+          <p:cNvPr id="4" name="Table 3"/>
+          <p:cNvGraphicFramePr>
+            <a:graphicFrameLocks noGrp="1"/>
+          </p:cNvGraphicFramePr>
+          <p:nvPr/>
+        </p:nvGraphicFramePr>
+        <p:xfrm>
+          <a:off x="457200" y="1371600"/>
+          <a:ext cx="8229600" cy="2743200"/>
+        </p:xfrm>
+        <a:graphic>
+          <a:graphicData uri="http://schemas.openxmlformats.org/drawingml/2006/table">
+            <a:tbl>
+              <a:tblPr>
+                <a:tableStyleId>{5C22544A-7EE6-4342-B048-85BDC9FD1C3A}</a:tableStyleId>
+              </a:tblPr>
+              <a:tblGrid>
+                <a:gridCol w="3291840"/>
+                <a:gridCol w="2011680"/>
+                <a:gridCol w="2926080"/>
+              </a:tblGrid>
+              <a:tr h="457200">
+                <a:tc>
+                  <a:txBody>
+                    <a:bodyPr/>
+                    <a:lstStyle/>
+                    <a:p>
+                      <a:pPr algn="l"/>
+                      <a:r>
+                        <a:rPr sz="1100" b="1">
+                          <a:solidFill>
+                            <a:srgbClr val="FFFFFF"/>
+                          </a:solidFill>
+                          <a:latin typeface="Avenir Next LT Pro Demi"/>
+                        </a:rPr>
+                        <a:t>Benchmark</a:t>
+                      </a:r>
+                    </a:p>
+                  </a:txBody>
+                  <a:tcPr marL="91440" marT="27432" marB="27432" anchor="ctr">
+                    <a:solidFill>
+                      <a:srgbClr val="0E2841"/>
+                    </a:solidFill>
+                  </a:tcPr>
+                </a:tc>
+                <a:tc>
+                  <a:txBody>
+                    <a:bodyPr/>
+                    <a:lstStyle/>
+                    <a:p>
+                      <a:pPr algn="ctr"/>
+                      <a:r>
+                        <a:rPr sz="1100" b="1">
+                          <a:solidFill>
+                            <a:srgbClr val="FFFFFF"/>
+                          </a:solidFill>
+                          <a:latin typeface="Avenir Next LT Pro Demi"/>
+                        </a:rPr>
+                        <a:t>Value</a:t>
+                      </a:r>
+                    </a:p>
+                  </a:txBody>
+                  <a:tcPr marL="91440" marT="27432" marB="27432" anchor="ctr">
+                    <a:solidFill>
+                      <a:srgbClr val="0E2841"/>
+                    </a:solidFill>
+                  </a:tcPr>
+                </a:tc>
+                <a:tc>
+                  <a:txBody>
+                    <a:bodyPr/>
+                    <a:lstStyle/>
+                    <a:p>
+                      <a:pPr algn="l"/>
+                      <a:r>
+                        <a:rPr sz="1100" b="1">
+                          <a:solidFill>
+                            <a:srgbClr val="FFFFFF"/>
+                          </a:solidFill>
+                          <a:latin typeface="Avenir Next LT Pro Demi"/>
+                        </a:rPr>
+                        <a:t>Implied read</a:t>
+                      </a:r>
+                    </a:p>
+                  </a:txBody>
+                  <a:tcPr marL="91440" marT="27432" marB="27432" anchor="ctr">
+                    <a:solidFill>
+                      <a:srgbClr val="0E2841"/>
+                    </a:solidFill>
+                  </a:tcPr>
+                </a:tc>
+              </a:tr>
+              <a:tr h="457200">
+                <a:tc>
+                  <a:txBody>
+                    <a:bodyPr/>
+                    <a:lstStyle/>
+                    <a:p>
+                      <a:pPr algn="l"/>
+                      <a:r>
+                        <a:rPr sz="1100" b="1">
+                          <a:solidFill>
+                            <a:srgbClr val="000000"/>
+                          </a:solidFill>
+                          <a:latin typeface="Avenir Next LT Pro"/>
+                        </a:rPr>
+                        <a:t>Current price</a:t>
+                      </a:r>
+                    </a:p>
+                  </a:txBody>
+                  <a:tcPr marL="91440" marT="27432" marB="27432" anchor="ctr">
+                    <a:solidFill>
+                      <a:srgbClr val="FFFFFF"/>
+                    </a:solidFill>
+                  </a:tcPr>
+                </a:tc>
+                <a:tc>
+                  <a:txBody>
+                    <a:bodyPr/>
+                    <a:lstStyle/>
+                    <a:p>
+                      <a:pPr algn="ctr"/>
+                      <a:r>
+                        <a:rPr sz="1100" b="0">
+                          <a:solidFill>
+                            <a:srgbClr val="000000"/>
+                          </a:solidFill>
+                          <a:latin typeface="Avenir Next LT Pro"/>
+                        </a:rPr>
+                        <a:t>~$166</a:t>
+                      </a:r>
+                    </a:p>
+                  </a:txBody>
+                  <a:tcPr marL="91440" marT="27432" marB="27432" anchor="ctr">
+                    <a:solidFill>
+                      <a:srgbClr val="FFFFFF"/>
+                    </a:solidFill>
+                  </a:tcPr>
+                </a:tc>
+                <a:tc>
+                  <a:txBody>
+                    <a:bodyPr/>
+                    <a:lstStyle/>
+                    <a:p>
+                      <a:pPr algn="l"/>
+                      <a:r>
+                        <a:rPr sz="1100" b="0">
+                          <a:solidFill>
+                            <a:srgbClr val="000000"/>
+                          </a:solidFill>
+                          <a:latin typeface="Avenir Next LT Pro"/>
+                        </a:rPr>
+                        <a:t>—</a:t>
+                      </a:r>
+                    </a:p>
+                  </a:txBody>
+                  <a:tcPr marL="91440" marT="27432" marB="27432" anchor="ctr">
+                    <a:solidFill>
+                      <a:srgbClr val="FFFFFF"/>
+                    </a:solidFill>
+                  </a:tcPr>
+                </a:tc>
+              </a:tr>
+              <a:tr h="457200">
+                <a:tc>
+                  <a:txBody>
+                    <a:bodyPr/>
+                    <a:lstStyle/>
+                    <a:p>
+                      <a:pPr algn="l"/>
+                      <a:r>
+                        <a:rPr sz="1100" b="1">
+                          <a:solidFill>
+                            <a:srgbClr val="000000"/>
+                          </a:solidFill>
+                          <a:latin typeface="Avenir Next LT Pro"/>
+                        </a:rPr>
+                        <a:t>Sell-side price targets</a:t>
+                      </a:r>
+                    </a:p>
+                  </a:txBody>
+                  <a:tcPr marL="91440" marT="27432" marB="27432" anchor="ctr">
+                    <a:solidFill>
+                      <a:srgbClr val="F4F6F8"/>
+                    </a:solidFill>
+                  </a:tcPr>
+                </a:tc>
+                <a:tc>
+                  <a:txBody>
+                    <a:bodyPr/>
+                    <a:lstStyle/>
+                    <a:p>
+                      <a:pPr algn="ctr"/>
+                      <a:r>
+                        <a:rPr sz="1100" b="0">
+                          <a:solidFill>
+                            <a:srgbClr val="000000"/>
+                          </a:solidFill>
+                          <a:latin typeface="Avenir Next LT Pro"/>
+                        </a:rPr>
+                        <a:t>$130–175</a:t>
+                      </a:r>
+                    </a:p>
+                  </a:txBody>
+                  <a:tcPr marL="91440" marT="27432" marB="27432" anchor="ctr">
+                    <a:solidFill>
+                      <a:srgbClr val="F4F6F8"/>
+                    </a:solidFill>
+                  </a:tcPr>
+                </a:tc>
+                <a:tc>
+                  <a:txBody>
+                    <a:bodyPr/>
+                    <a:lstStyle/>
+                    <a:p>
+                      <a:pPr algn="l"/>
+                      <a:r>
+                        <a:rPr sz="1100" b="0">
+                          <a:solidFill>
+                            <a:srgbClr val="000000"/>
+                          </a:solidFill>
+                          <a:latin typeface="Avenir Next LT Pro"/>
+                        </a:rPr>
+                        <a:t>Limited upside; ~fairly valued</a:t>
+                      </a:r>
+                    </a:p>
+                  </a:txBody>
+                  <a:tcPr marL="91440" marT="27432" marB="27432" anchor="ctr">
+                    <a:solidFill>
+                      <a:srgbClr val="F4F6F8"/>
+                    </a:solidFill>
+                  </a:tcPr>
+                </a:tc>
+              </a:tr>
+              <a:tr h="457200">
+                <a:tc>
+                  <a:txBody>
+                    <a:bodyPr/>
+                    <a:lstStyle/>
+                    <a:p>
+                      <a:pPr algn="l"/>
+                      <a:r>
+                        <a:rPr sz="1100" b="1">
+                          <a:solidFill>
+                            <a:srgbClr val="000000"/>
+                          </a:solidFill>
+                          <a:latin typeface="Avenir Next LT Pro"/>
+                        </a:rPr>
+                        <a:t>Simply Wall St models</a:t>
+                      </a:r>
+                    </a:p>
+                  </a:txBody>
+                  <a:tcPr marL="91440" marT="27432" marB="27432" anchor="ctr">
+                    <a:solidFill>
+                      <a:srgbClr val="FFFFFF"/>
+                    </a:solidFill>
+                  </a:tcPr>
+                </a:tc>
+                <a:tc>
+                  <a:txBody>
+                    <a:bodyPr/>
+                    <a:lstStyle/>
+                    <a:p>
+                      <a:pPr algn="ctr"/>
+                      <a:r>
+                        <a:rPr sz="1100" b="0">
+                          <a:solidFill>
+                            <a:srgbClr val="000000"/>
+                          </a:solidFill>
+                          <a:latin typeface="Avenir Next LT Pro"/>
+                        </a:rPr>
+                        <a:t>~$165–264</a:t>
+                      </a:r>
+                    </a:p>
+                  </a:txBody>
+                  <a:tcPr marL="91440" marT="27432" marB="27432" anchor="ctr">
+                    <a:solidFill>
+                      <a:srgbClr val="FFFFFF"/>
+                    </a:solidFill>
+                  </a:tcPr>
+                </a:tc>
+                <a:tc>
+                  <a:txBody>
+                    <a:bodyPr/>
+                    <a:lstStyle/>
+                    <a:p>
+                      <a:pPr algn="l"/>
+                      <a:r>
+                        <a:rPr sz="1100" b="0">
+                          <a:solidFill>
+                            <a:srgbClr val="000000"/>
+                          </a:solidFill>
+                          <a:latin typeface="Avenir Next LT Pro"/>
+                        </a:rPr>
+                        <a:t>Fairly valued to bullish</a:t>
+                      </a:r>
+                    </a:p>
+                  </a:txBody>
+                  <a:tcPr marL="91440" marT="27432" marB="27432" anchor="ctr">
+                    <a:solidFill>
+                      <a:srgbClr val="FFFFFF"/>
+                    </a:solidFill>
+                  </a:tcPr>
+                </a:tc>
+              </a:tr>
+              <a:tr h="457200">
+                <a:tc>
+                  <a:txBody>
+                    <a:bodyPr/>
+                    <a:lstStyle/>
+                    <a:p>
+                      <a:pPr algn="l"/>
+                      <a:r>
+                        <a:rPr sz="1100" b="1">
+                          <a:solidFill>
+                            <a:srgbClr val="156082"/>
+                          </a:solidFill>
+                          <a:latin typeface="Avenir Next LT Pro Demi"/>
+                        </a:rPr>
+                        <a:t>My fair value — proven today</a:t>
+                      </a:r>
+                    </a:p>
+                  </a:txBody>
+                  <a:tcPr marL="91440" marT="27432" marB="27432" anchor="ctr">
+                    <a:solidFill>
+                      <a:srgbClr val="F4F6F8"/>
+                    </a:solidFill>
+                  </a:tcPr>
+                </a:tc>
+                <a:tc>
+                  <a:txBody>
+                    <a:bodyPr/>
+                    <a:lstStyle/>
+                    <a:p>
+                      <a:pPr algn="ctr"/>
+                      <a:r>
+                        <a:rPr sz="1100" b="1">
+                          <a:solidFill>
+                            <a:srgbClr val="156082"/>
+                          </a:solidFill>
+                          <a:latin typeface="Avenir Next LT Pro"/>
+                        </a:rPr>
+                        <a:t>~$165</a:t>
+                      </a:r>
+                    </a:p>
+                  </a:txBody>
+                  <a:tcPr marL="91440" marT="27432" marB="27432" anchor="ctr">
+                    <a:solidFill>
+                      <a:srgbClr val="F4F6F8"/>
+                    </a:solidFill>
+                  </a:tcPr>
+                </a:tc>
+                <a:tc>
+                  <a:txBody>
+                    <a:bodyPr/>
+                    <a:lstStyle/>
+                    <a:p>
+                      <a:pPr algn="l"/>
+                      <a:r>
+                        <a:rPr sz="1100" b="1">
+                          <a:solidFill>
+                            <a:srgbClr val="000000"/>
+                          </a:solidFill>
+                          <a:latin typeface="Avenir Next LT Pro"/>
+                        </a:rPr>
+                        <a:t>In line with Street → Hold</a:t>
+                      </a:r>
+                    </a:p>
+                  </a:txBody>
+                  <a:tcPr marL="91440" marT="27432" marB="27432" anchor="ctr">
+                    <a:solidFill>
+                      <a:srgbClr val="F4F6F8"/>
+                    </a:solidFill>
+                  </a:tcPr>
+                </a:tc>
+              </a:tr>
+              <a:tr h="457200">
+                <a:tc>
+                  <a:txBody>
+                    <a:bodyPr/>
+                    <a:lstStyle/>
+                    <a:p>
+                      <a:pPr algn="l"/>
+                      <a:r>
+                        <a:rPr sz="1100" b="1">
+                          <a:solidFill>
+                            <a:srgbClr val="156082"/>
+                          </a:solidFill>
+                          <a:latin typeface="Avenir Next LT Pro Demi"/>
+                        </a:rPr>
+                        <a:t>My upside case — if de-risked</a:t>
+                      </a:r>
+                    </a:p>
+                  </a:txBody>
+                  <a:tcPr marL="91440" marT="27432" marB="27432" anchor="ctr">
+                    <a:solidFill>
+                      <a:srgbClr val="FFFFFF"/>
+                    </a:solidFill>
+                  </a:tcPr>
+                </a:tc>
+                <a:tc>
+                  <a:txBody>
+                    <a:bodyPr/>
+                    <a:lstStyle/>
+                    <a:p>
+                      <a:pPr algn="ctr"/>
+                      <a:r>
+                        <a:rPr sz="1100" b="1">
+                          <a:solidFill>
+                            <a:srgbClr val="156082"/>
+                          </a:solidFill>
+                          <a:latin typeface="Avenir Next LT Pro"/>
+                        </a:rPr>
+                        <a:t>~$240 FV / ~$310 tgt</a:t>
+                      </a:r>
+                    </a:p>
+                  </a:txBody>
+                  <a:tcPr marL="91440" marT="27432" marB="27432" anchor="ctr">
+                    <a:solidFill>
+                      <a:srgbClr val="FFFFFF"/>
+                    </a:solidFill>
+                  </a:tcPr>
+                </a:tc>
+                <a:tc>
+                  <a:txBody>
+                    <a:bodyPr/>
+                    <a:lstStyle/>
+                    <a:p>
+                      <a:pPr algn="l"/>
+                      <a:r>
+                        <a:rPr sz="1100" b="1">
+                          <a:solidFill>
+                            <a:srgbClr val="000000"/>
+                          </a:solidFill>
+                          <a:latin typeface="Avenir Next LT Pro"/>
+                        </a:rPr>
+                        <a:t>The prize (~45–90%) if triggers hit</a:t>
+                      </a:r>
+                    </a:p>
+                  </a:txBody>
+                  <a:tcPr marL="91440" marT="27432" marB="27432" anchor="ctr">
+                    <a:solidFill>
+                      <a:srgbClr val="FFFFFF"/>
+                    </a:solidFill>
+                  </a:tcPr>
+                </a:tc>
+              </a:tr>
+            </a:tbl>
+          </a:graphicData>
+        </a:graphic>
+      </p:graphicFrame>
+      <p:sp>
+        <p:nvSpPr>
+          <p:cNvPr id="5" name="TextBox 4"/>
+          <p:cNvSpPr txBox="1"/>
+          <p:nvPr/>
+        </p:nvSpPr>
+        <p:spPr>
+          <a:xfrm>
+            <a:off x="457200" y="4572000"/>
+            <a:ext cx="8229600" cy="1005840"/>
+          </a:xfrm>
+          <a:prstGeom prst="rect">
+            <a:avLst/>
+          </a:prstGeom>
+          <a:noFill/>
+        </p:spPr>
+        <p:txBody>
+          <a:bodyPr wrap="square">
+            <a:spAutoFit/>
+          </a:bodyPr>
+          <a:lstStyle/>
+          <a:p>
+            <a:r>
+              <a:rPr sz="1200">
+                <a:solidFill>
+                  <a:srgbClr val="000000"/>
+                </a:solidFill>
+                <a:latin typeface="Avenir Next LT Pro"/>
+              </a:rPr>
+              <a:t>Takeaway: I agree with the Street on what's proven (~$165 ≈ the price). My differentiation isn't a higher "today" value — it's a defined view on the conditional upside (~$240–310) that the Street won't credit until Estates and margins prove out.</a:t>
+            </a:r>
+          </a:p>
+          <a:p>
+            <a:pPr>
+              <a:spcBef>
+                <a:spcPts val="800"/>
+              </a:spcBef>
+            </a:pPr>
+            <a:r>
+              <a:rPr sz="1200" b="1">
+                <a:solidFill>
+                  <a:srgbClr val="000000"/>
+                </a:solidFill>
+                <a:latin typeface="Avenir Next LT Pro Demi"/>
+              </a:rPr>
+              <a:t>The Hold is the discipline: I won't pay for that upside on hope — I wait for the triggers, then buy even higher.</a:t>
+            </a:r>
+          </a:p>
+        </p:txBody>
+      </p:sp>
+      <p:sp>
+        <p:nvSpPr>
+          <p:cNvPr id="6" name="TextBox 5"/>
+          <p:cNvSpPr txBox="1"/>
+          <p:nvPr/>
+        </p:nvSpPr>
+        <p:spPr>
+          <a:xfrm>
+            <a:off x="457200" y="6355080"/>
+            <a:ext cx="8229600" cy="365760"/>
+          </a:xfrm>
+          <a:prstGeom prst="rect">
+            <a:avLst/>
+          </a:prstGeom>
+          <a:noFill/>
+        </p:spPr>
+        <p:txBody>
+          <a:bodyPr wrap="none">
+            <a:spAutoFit/>
+          </a:bodyPr>
+          <a:lstStyle/>
+          <a:p>
+            <a:r>
+              <a:rPr sz="750" i="1">
+                <a:solidFill>
+                  <a:srgbClr val="707070"/>
+                </a:solidFill>
+                <a:latin typeface="Avenir Next LT Pro"/>
+              </a:rPr>
+              <a:t>Sources: sell-side price-target range &amp; Simply Wall St narrative fair values (per recent research); author's estimates.</a:t>
+            </a:r>
+          </a:p>
+        </p:txBody>
+      </p:sp>
+    </p:spTree>
+  </p:cSld>
+  <p:clrMapOvr>
+    <a:masterClrMapping/>
+  </p:clrMapOvr>
+</p:sld>
+</file>
+
 <file path=ppt/slides/slide2.xml><?xml version="1.0" encoding="utf-8"?>
 <p:sld xmlns:a="http://schemas.openxmlformats.org/drawingml/2006/main" xmlns:r="http://schemas.openxmlformats.org/officeDocument/2006/relationships" xmlns:p="http://schemas.openxmlformats.org/presentationml/2006/main">
   <p:cSld>
@@ -10980,7 +11613,7 @@
               <a:rPr sz="2600" b="0" dirty="0">
                 <a:latin typeface="Avenir Next LT Pro Demi"/>
               </a:rPr>
-              <a:t>Recommendation: Hold — Not Yet</a:t>
+              <a:t>Recommendation: Hold</a:t>
             </a:r>
           </a:p>
         </p:txBody>
@@ -11059,7 +11692,7 @@
                 </a:solidFill>
                 <a:latin typeface="Avenir Next LT Pro Demi"/>
               </a:rPr>
-              <a:t>Fair Value ~$240 if the thesis proves out</a:t>
+              <a:t>Fair value today ~$165 (proven fundamentals)</a:t>
             </a:r>
             <a:r>
               <a:rPr sz="1200" b="0" dirty="0">
@@ -11068,7 +11701,7 @@
                 </a:solidFill>
                 <a:latin typeface="Avenir Next LT Pro"/>
               </a:rPr>
-              <a:t>  </a:t>
+              <a:t>  →  </a:t>
             </a:r>
             <a:r>
               <a:rPr sz="1200" b="0" dirty="0">
@@ -11077,7 +11710,7 @@
                 </a:solidFill>
                 <a:latin typeface="Avenir Next LT Pro"/>
               </a:rPr>
-              <a:t>(~45% upside — the prize, not the call)</a:t>
+              <a:t>fairly valued</a:t>
             </a:r>
           </a:p>
           <a:p>
@@ -11107,7 +11740,7 @@
                 </a:solidFill>
                 <a:latin typeface="Avenir Next LT Pro"/>
               </a:rPr>
-              <a:t>Not yet actionable — the key catalyst (Estates) is unproven and the balance sheet is ~4× levered. Buy on proof, not hope.</a:t>
+              <a:t>Upside if the thesis de-risks: ~$240 FV / ~$310 target (~45–90%). Not yet actionable — Estates unproven, ~4× levered. Buy on proof.</a:t>
             </a:r>
             <a:r>
               <a:rPr lang="en-US" sz="1100" b="0" dirty="0">

--- a/RH_Stock_Pitch_updated.pptx
+++ b/RH_Stock_Pitch_updated.pptx
@@ -18,6 +18,10 @@
     <p:sldId id="519" r:id="rId32"/>
     <p:sldId id="518" r:id="rId31"/>
     <p:sldId id="481" r:id="rId9"/>
+    <p:sldId id="514" r:id="rId27"/>
+    <p:sldId id="515" r:id="rId28"/>
+    <p:sldId id="517" r:id="rId30"/>
+    <p:sldId id="516" r:id="rId29"/>
     <p:sldId id="508" r:id="rId10"/>
     <p:sldId id="482" r:id="rId11"/>
     <p:sldId id="509" r:id="rId12"/>
@@ -25,10 +29,6 @@
     <p:sldId id="506" r:id="rId14"/>
     <p:sldId id="511" r:id="rId15"/>
     <p:sldId id="513" r:id="rId16"/>
-    <p:sldId id="514" r:id="rId27"/>
-    <p:sldId id="515" r:id="rId28"/>
-    <p:sldId id="516" r:id="rId29"/>
-    <p:sldId id="517" r:id="rId30"/>
   </p:sldIdLst>
   <p:sldSz cx="9144000" cy="6858000" type="screen4x3"/>
   <p:notesSz cx="7023100" cy="9309100"/>
@@ -5232,6 +5232,1127 @@
               <a:rPr sz="2300" b="0" i="0" dirty="0">
                 <a:latin typeface="Avenir Next LT Pro Demi"/>
               </a:rPr>
+              <a:t>Valuation — EV/EBITDA, FY2027E</a:t>
+            </a:r>
+          </a:p>
+        </p:txBody>
+      </p:sp>
+      <p:sp>
+        <p:nvSpPr>
+          <p:cNvPr id="5" name="TextBox 4"/>
+          <p:cNvSpPr txBox="1"/>
+          <p:nvPr/>
+        </p:nvSpPr>
+        <p:spPr>
+          <a:xfrm>
+            <a:off x="457200" y="1051560"/>
+            <a:ext cx="8229600" cy="274320"/>
+          </a:xfrm>
+          <a:prstGeom prst="rect">
+            <a:avLst/>
+          </a:prstGeom>
+          <a:noFill/>
+        </p:spPr>
+        <p:txBody>
+          <a:bodyPr wrap="none">
+            <a:spAutoFit/>
+          </a:bodyPr>
+          <a:lstStyle/>
+          <a:p>
+            <a:r>
+              <a:rPr sz="900" b="0" i="1">
+                <a:solidFill>
+                  <a:srgbClr val="B0B0B0"/>
+                </a:solidFill>
+                <a:latin typeface="Avenir Next LT Pro"/>
+              </a:rPr>
+              <a:t>[ narrative / commentary to be written ]</a:t>
+            </a:r>
+          </a:p>
+        </p:txBody>
+      </p:sp>
+      <p:sp>
+        <p:nvSpPr>
+          <p:cNvPr id="6" name="Rectangle 5"/>
+          <p:cNvSpPr/>
+          <p:nvPr/>
+        </p:nvSpPr>
+        <p:spPr>
+          <a:xfrm>
+            <a:off x="457200" y="1508760"/>
+            <a:ext cx="1572768" cy="914400"/>
+          </a:xfrm>
+          <a:prstGeom prst="rect">
+            <a:avLst/>
+          </a:prstGeom>
+          <a:solidFill>
+            <a:srgbClr val="E8E8E8"/>
+          </a:solidFill>
+          <a:ln w="15875">
+            <a:solidFill>
+              <a:srgbClr val="0E2841"/>
+            </a:solidFill>
+          </a:ln>
+        </p:spPr>
+        <p:style>
+          <a:lnRef idx="1">
+            <a:schemeClr val="accent1"/>
+          </a:lnRef>
+          <a:fillRef idx="3">
+            <a:schemeClr val="accent1"/>
+          </a:fillRef>
+          <a:effectRef idx="2">
+            <a:schemeClr val="accent1"/>
+          </a:effectRef>
+          <a:fontRef idx="minor">
+            <a:schemeClr val="lt1"/>
+          </a:fontRef>
+        </p:style>
+        <p:txBody>
+          <a:bodyPr wrap="square" rtlCol="0" anchor="ctr"/>
+          <a:lstStyle/>
+          <a:p>
+            <a:pPr algn="ctr"/>
+            <a:r>
+              <a:rPr sz="900" b="1" i="0">
+                <a:solidFill>
+                  <a:srgbClr val="5A5A5A"/>
+                </a:solidFill>
+                <a:latin typeface="Avenir Next LT Pro Demi"/>
+              </a:rPr>
+              <a:t>FY27E EBITDA</a:t>
+            </a:r>
+          </a:p>
+          <a:p>
+            <a:pPr algn="ctr"/>
+            <a:r>
+              <a:rPr sz="1700" b="1" i="0">
+                <a:solidFill>
+                  <a:srgbClr val="0E2841"/>
+                </a:solidFill>
+                <a:latin typeface="Avenir Next LT Pro Demi"/>
+              </a:rPr>
+              <a:t>$708M</a:t>
+            </a:r>
+          </a:p>
+        </p:txBody>
+      </p:sp>
+      <p:sp>
+        <p:nvSpPr>
+          <p:cNvPr id="7" name="Rectangle 6"/>
+          <p:cNvSpPr/>
+          <p:nvPr/>
+        </p:nvSpPr>
+        <p:spPr>
+          <a:xfrm>
+            <a:off x="2084832" y="1508760"/>
+            <a:ext cx="1572768" cy="914400"/>
+          </a:xfrm>
+          <a:prstGeom prst="rect">
+            <a:avLst/>
+          </a:prstGeom>
+          <a:solidFill>
+            <a:srgbClr val="E8E8E8"/>
+          </a:solidFill>
+          <a:ln w="15875">
+            <a:solidFill>
+              <a:srgbClr val="156082"/>
+            </a:solidFill>
+          </a:ln>
+        </p:spPr>
+        <p:style>
+          <a:lnRef idx="1">
+            <a:schemeClr val="accent1"/>
+          </a:lnRef>
+          <a:fillRef idx="3">
+            <a:schemeClr val="accent1"/>
+          </a:fillRef>
+          <a:effectRef idx="2">
+            <a:schemeClr val="accent1"/>
+          </a:effectRef>
+          <a:fontRef idx="minor">
+            <a:schemeClr val="lt1"/>
+          </a:fontRef>
+        </p:style>
+        <p:txBody>
+          <a:bodyPr wrap="square" rtlCol="0" anchor="ctr"/>
+          <a:lstStyle/>
+          <a:p>
+            <a:pPr algn="ctr"/>
+            <a:r>
+              <a:rPr sz="900" b="1" i="0">
+                <a:solidFill>
+                  <a:srgbClr val="5A5A5A"/>
+                </a:solidFill>
+                <a:latin typeface="Avenir Next LT Pro Demi"/>
+              </a:rPr>
+              <a:t>× Exit Multiple</a:t>
+            </a:r>
+          </a:p>
+          <a:p>
+            <a:pPr algn="ctr"/>
+            <a:r>
+              <a:rPr sz="1700" b="1" i="0">
+                <a:solidFill>
+                  <a:srgbClr val="156082"/>
+                </a:solidFill>
+                <a:latin typeface="Avenir Next LT Pro Demi"/>
+              </a:rPr>
+              <a:t>11×</a:t>
+            </a:r>
+          </a:p>
+        </p:txBody>
+      </p:sp>
+      <p:sp>
+        <p:nvSpPr>
+          <p:cNvPr id="8" name="Rectangle 7"/>
+          <p:cNvSpPr/>
+          <p:nvPr/>
+        </p:nvSpPr>
+        <p:spPr>
+          <a:xfrm>
+            <a:off x="3712464" y="1508760"/>
+            <a:ext cx="1572768" cy="914400"/>
+          </a:xfrm>
+          <a:prstGeom prst="rect">
+            <a:avLst/>
+          </a:prstGeom>
+          <a:solidFill>
+            <a:srgbClr val="E8E8E8"/>
+          </a:solidFill>
+          <a:ln w="15875">
+            <a:solidFill>
+              <a:srgbClr val="0E2841"/>
+            </a:solidFill>
+          </a:ln>
+        </p:spPr>
+        <p:style>
+          <a:lnRef idx="1">
+            <a:schemeClr val="accent1"/>
+          </a:lnRef>
+          <a:fillRef idx="3">
+            <a:schemeClr val="accent1"/>
+          </a:fillRef>
+          <a:effectRef idx="2">
+            <a:schemeClr val="accent1"/>
+          </a:effectRef>
+          <a:fontRef idx="minor">
+            <a:schemeClr val="lt1"/>
+          </a:fontRef>
+        </p:style>
+        <p:txBody>
+          <a:bodyPr wrap="square" rtlCol="0" anchor="ctr"/>
+          <a:lstStyle/>
+          <a:p>
+            <a:pPr algn="ctr"/>
+            <a:r>
+              <a:rPr sz="900" b="1" i="0">
+                <a:solidFill>
+                  <a:srgbClr val="5A5A5A"/>
+                </a:solidFill>
+                <a:latin typeface="Avenir Next LT Pro Demi"/>
+              </a:rPr>
+              <a:t>= Enterprise Value</a:t>
+            </a:r>
+          </a:p>
+          <a:p>
+            <a:pPr algn="ctr"/>
+            <a:r>
+              <a:rPr sz="1700" b="1" i="0">
+                <a:solidFill>
+                  <a:srgbClr val="0E2841"/>
+                </a:solidFill>
+                <a:latin typeface="Avenir Next LT Pro Demi"/>
+              </a:rPr>
+              <a:t>~$7.8B</a:t>
+            </a:r>
+          </a:p>
+        </p:txBody>
+      </p:sp>
+      <p:sp>
+        <p:nvSpPr>
+          <p:cNvPr id="9" name="Rectangle 8"/>
+          <p:cNvSpPr/>
+          <p:nvPr/>
+        </p:nvSpPr>
+        <p:spPr>
+          <a:xfrm>
+            <a:off x="5340096" y="1508760"/>
+            <a:ext cx="1572768" cy="914400"/>
+          </a:xfrm>
+          <a:prstGeom prst="rect">
+            <a:avLst/>
+          </a:prstGeom>
+          <a:solidFill>
+            <a:srgbClr val="E8E8E8"/>
+          </a:solidFill>
+          <a:ln w="15875">
+            <a:solidFill>
+              <a:srgbClr val="E97132"/>
+            </a:solidFill>
+          </a:ln>
+        </p:spPr>
+        <p:style>
+          <a:lnRef idx="1">
+            <a:schemeClr val="accent1"/>
+          </a:lnRef>
+          <a:fillRef idx="3">
+            <a:schemeClr val="accent1"/>
+          </a:fillRef>
+          <a:effectRef idx="2">
+            <a:schemeClr val="accent1"/>
+          </a:effectRef>
+          <a:fontRef idx="minor">
+            <a:schemeClr val="lt1"/>
+          </a:fontRef>
+        </p:style>
+        <p:txBody>
+          <a:bodyPr wrap="square" rtlCol="0" anchor="ctr"/>
+          <a:lstStyle/>
+          <a:p>
+            <a:pPr algn="ctr"/>
+            <a:r>
+              <a:rPr sz="900" b="1" i="0">
+                <a:solidFill>
+                  <a:srgbClr val="5A5A5A"/>
+                </a:solidFill>
+                <a:latin typeface="Avenir Next LT Pro Demi"/>
+              </a:rPr>
+              <a:t>− Net Debt</a:t>
+            </a:r>
+          </a:p>
+          <a:p>
+            <a:pPr algn="ctr"/>
+            <a:r>
+              <a:rPr sz="1700" b="1" i="0">
+                <a:solidFill>
+                  <a:srgbClr val="E97132"/>
+                </a:solidFill>
+                <a:latin typeface="Avenir Next LT Pro Demi"/>
+              </a:rPr>
+              <a:t>$1.9B</a:t>
+            </a:r>
+          </a:p>
+        </p:txBody>
+      </p:sp>
+      <p:sp>
+        <p:nvSpPr>
+          <p:cNvPr id="10" name="Rectangle 9"/>
+          <p:cNvSpPr/>
+          <p:nvPr/>
+        </p:nvSpPr>
+        <p:spPr>
+          <a:xfrm>
+            <a:off x="6967728" y="1508760"/>
+            <a:ext cx="1572768" cy="914400"/>
+          </a:xfrm>
+          <a:prstGeom prst="rect">
+            <a:avLst/>
+          </a:prstGeom>
+          <a:solidFill>
+            <a:srgbClr val="E8E8E8"/>
+          </a:solidFill>
+          <a:ln w="15875">
+            <a:solidFill>
+              <a:srgbClr val="196B24"/>
+            </a:solidFill>
+          </a:ln>
+        </p:spPr>
+        <p:style>
+          <a:lnRef idx="1">
+            <a:schemeClr val="accent1"/>
+          </a:lnRef>
+          <a:fillRef idx="3">
+            <a:schemeClr val="accent1"/>
+          </a:fillRef>
+          <a:effectRef idx="2">
+            <a:schemeClr val="accent1"/>
+          </a:effectRef>
+          <a:fontRef idx="minor">
+            <a:schemeClr val="lt1"/>
+          </a:fontRef>
+        </p:style>
+        <p:txBody>
+          <a:bodyPr wrap="square" rtlCol="0" anchor="ctr"/>
+          <a:lstStyle/>
+          <a:p>
+            <a:pPr algn="ctr"/>
+            <a:r>
+              <a:rPr sz="900" b="1" i="0">
+                <a:solidFill>
+                  <a:srgbClr val="5A5A5A"/>
+                </a:solidFill>
+                <a:latin typeface="Avenir Next LT Pro Demi"/>
+              </a:rPr>
+              <a:t>÷ Shares (19M)</a:t>
+            </a:r>
+          </a:p>
+          <a:p>
+            <a:pPr algn="ctr"/>
+            <a:r>
+              <a:rPr sz="1700" b="1" i="0">
+                <a:solidFill>
+                  <a:srgbClr val="196B24"/>
+                </a:solidFill>
+                <a:latin typeface="Avenir Next LT Pro Demi"/>
+              </a:rPr>
+              <a:t>= ~$310</a:t>
+            </a:r>
+          </a:p>
+        </p:txBody>
+      </p:sp>
+      <p:graphicFrame>
+        <p:nvGraphicFramePr>
+          <p:cNvPr id="11" name="Table 10"/>
+          <p:cNvGraphicFramePr>
+            <a:graphicFrameLocks noGrp="1"/>
+          </p:cNvGraphicFramePr>
+          <p:nvPr>
+            <p:extLst>
+              <p:ext uri="{D42A27DB-BD31-4B8C-83A1-F6EECF244321}">
+                <p14:modId xmlns:p14="http://schemas.microsoft.com/office/powerpoint/2010/main" val="3973473890"/>
+              </p:ext>
+            </p:extLst>
+          </p:nvPr>
+        </p:nvGraphicFramePr>
+        <p:xfrm>
+          <a:off x="457200" y="2880360"/>
+          <a:ext cx="8229600" cy="1536192"/>
+        </p:xfrm>
+        <a:graphic>
+          <a:graphicData uri="http://schemas.openxmlformats.org/drawingml/2006/table">
+            <a:tbl>
+              <a:tblPr>
+                <a:tableStyleId>{5C22544A-7EE6-4342-B048-85BDC9FD1C3A}</a:tableStyleId>
+              </a:tblPr>
+              <a:tblGrid>
+                <a:gridCol w="1554480">
+                  <a:extLst>
+                    <a:ext uri="{9D8B030D-6E8A-4147-A177-3AD203B41FA5}">
+                      <a16:colId xmlns:a16="http://schemas.microsoft.com/office/drawing/2014/main" val="20000"/>
+                    </a:ext>
+                  </a:extLst>
+                </a:gridCol>
+                <a:gridCol w="1335024">
+                  <a:extLst>
+                    <a:ext uri="{9D8B030D-6E8A-4147-A177-3AD203B41FA5}">
+                      <a16:colId xmlns:a16="http://schemas.microsoft.com/office/drawing/2014/main" val="20001"/>
+                    </a:ext>
+                  </a:extLst>
+                </a:gridCol>
+                <a:gridCol w="1335024">
+                  <a:extLst>
+                    <a:ext uri="{9D8B030D-6E8A-4147-A177-3AD203B41FA5}">
+                      <a16:colId xmlns:a16="http://schemas.microsoft.com/office/drawing/2014/main" val="20002"/>
+                    </a:ext>
+                  </a:extLst>
+                </a:gridCol>
+                <a:gridCol w="1335024">
+                  <a:extLst>
+                    <a:ext uri="{9D8B030D-6E8A-4147-A177-3AD203B41FA5}">
+                      <a16:colId xmlns:a16="http://schemas.microsoft.com/office/drawing/2014/main" val="20003"/>
+                    </a:ext>
+                  </a:extLst>
+                </a:gridCol>
+                <a:gridCol w="1335024">
+                  <a:extLst>
+                    <a:ext uri="{9D8B030D-6E8A-4147-A177-3AD203B41FA5}">
+                      <a16:colId xmlns:a16="http://schemas.microsoft.com/office/drawing/2014/main" val="20004"/>
+                    </a:ext>
+                  </a:extLst>
+                </a:gridCol>
+                <a:gridCol w="1335024">
+                  <a:extLst>
+                    <a:ext uri="{9D8B030D-6E8A-4147-A177-3AD203B41FA5}">
+                      <a16:colId xmlns:a16="http://schemas.microsoft.com/office/drawing/2014/main" val="20005"/>
+                    </a:ext>
+                  </a:extLst>
+                </a:gridCol>
+              </a:tblGrid>
+              <a:tr h="384048">
+                <a:tc>
+                  <a:txBody>
+                    <a:bodyPr/>
+                    <a:lstStyle/>
+                    <a:p>
+                      <a:pPr algn="l"/>
+                      <a:r>
+                        <a:rPr sz="1000" b="1" i="0" dirty="0">
+                          <a:solidFill>
+                            <a:srgbClr val="FFFFFF"/>
+                          </a:solidFill>
+                          <a:latin typeface="Avenir Next LT Pro Demi"/>
+                        </a:rPr>
+                        <a:t>Scenario</a:t>
+                      </a:r>
+                    </a:p>
+                  </a:txBody>
+                  <a:tcPr marL="73152" marR="73152" marT="18288" marB="18288" anchor="ctr">
+                    <a:solidFill>
+                      <a:srgbClr val="AF8C49"/>
+                    </a:solidFill>
+                  </a:tcPr>
+                </a:tc>
+                <a:tc>
+                  <a:txBody>
+                    <a:bodyPr/>
+                    <a:lstStyle/>
+                    <a:p>
+                      <a:pPr algn="ctr"/>
+                      <a:r>
+                        <a:rPr sz="1000" b="1" i="0" dirty="0">
+                          <a:solidFill>
+                            <a:srgbClr val="FFFFFF"/>
+                          </a:solidFill>
+                          <a:latin typeface="Avenir Next LT Pro Demi"/>
+                        </a:rPr>
+                        <a:t>Rev CAGR</a:t>
+                      </a:r>
+                    </a:p>
+                  </a:txBody>
+                  <a:tcPr marL="73152" marR="73152" marT="18288" marB="18288" anchor="ctr">
+                    <a:solidFill>
+                      <a:srgbClr val="AF8C49"/>
+                    </a:solidFill>
+                  </a:tcPr>
+                </a:tc>
+                <a:tc>
+                  <a:txBody>
+                    <a:bodyPr/>
+                    <a:lstStyle/>
+                    <a:p>
+                      <a:pPr algn="ctr"/>
+                      <a:r>
+                        <a:rPr sz="1000" b="1" i="0" dirty="0">
+                          <a:solidFill>
+                            <a:srgbClr val="FFFFFF"/>
+                          </a:solidFill>
+                          <a:latin typeface="Avenir Next LT Pro Demi"/>
+                        </a:rPr>
+                        <a:t>EBITDA </a:t>
+                      </a:r>
+                      <a:r>
+                        <a:rPr sz="1000" b="1" i="0" dirty="0" err="1">
+                          <a:solidFill>
+                            <a:srgbClr val="FFFFFF"/>
+                          </a:solidFill>
+                          <a:latin typeface="Avenir Next LT Pro Demi"/>
+                        </a:rPr>
+                        <a:t>Mgn</a:t>
+                      </a:r>
+                      <a:endParaRPr sz="1000" b="1" i="0" dirty="0">
+                        <a:solidFill>
+                          <a:srgbClr val="FFFFFF"/>
+                        </a:solidFill>
+                        <a:latin typeface="Avenir Next LT Pro Demi"/>
+                      </a:endParaRPr>
+                    </a:p>
+                  </a:txBody>
+                  <a:tcPr marL="73152" marR="73152" marT="18288" marB="18288" anchor="ctr">
+                    <a:solidFill>
+                      <a:srgbClr val="AF8C49"/>
+                    </a:solidFill>
+                  </a:tcPr>
+                </a:tc>
+                <a:tc>
+                  <a:txBody>
+                    <a:bodyPr/>
+                    <a:lstStyle/>
+                    <a:p>
+                      <a:pPr algn="ctr"/>
+                      <a:r>
+                        <a:rPr sz="1000" b="1" i="0" dirty="0">
+                          <a:solidFill>
+                            <a:srgbClr val="FFFFFF"/>
+                          </a:solidFill>
+                          <a:latin typeface="Avenir Next LT Pro Demi"/>
+                        </a:rPr>
+                        <a:t>Exit Mult</a:t>
+                      </a:r>
+                    </a:p>
+                  </a:txBody>
+                  <a:tcPr marL="73152" marR="73152" marT="18288" marB="18288" anchor="ctr">
+                    <a:solidFill>
+                      <a:srgbClr val="AF8C49"/>
+                    </a:solidFill>
+                  </a:tcPr>
+                </a:tc>
+                <a:tc>
+                  <a:txBody>
+                    <a:bodyPr/>
+                    <a:lstStyle/>
+                    <a:p>
+                      <a:pPr algn="ctr"/>
+                      <a:r>
+                        <a:rPr sz="1000" b="1" i="0" dirty="0">
+                          <a:solidFill>
+                            <a:srgbClr val="FFFFFF"/>
+                          </a:solidFill>
+                          <a:latin typeface="Avenir Next LT Pro Demi"/>
+                        </a:rPr>
+                        <a:t>Implied Price</a:t>
+                      </a:r>
+                    </a:p>
+                  </a:txBody>
+                  <a:tcPr marL="73152" marR="73152" marT="18288" marB="18288" anchor="ctr">
+                    <a:solidFill>
+                      <a:srgbClr val="AF8C49"/>
+                    </a:solidFill>
+                  </a:tcPr>
+                </a:tc>
+                <a:tc>
+                  <a:txBody>
+                    <a:bodyPr/>
+                    <a:lstStyle/>
+                    <a:p>
+                      <a:pPr algn="ctr"/>
+                      <a:r>
+                        <a:rPr sz="1000" b="1" i="0" dirty="0">
+                          <a:solidFill>
+                            <a:srgbClr val="FFFFFF"/>
+                          </a:solidFill>
+                          <a:latin typeface="Avenir Next LT Pro Demi"/>
+                        </a:rPr>
+                        <a:t>Prob.</a:t>
+                      </a:r>
+                    </a:p>
+                  </a:txBody>
+                  <a:tcPr marL="73152" marR="73152" marT="18288" marB="18288" anchor="ctr">
+                    <a:solidFill>
+                      <a:srgbClr val="AF8C49"/>
+                    </a:solidFill>
+                  </a:tcPr>
+                </a:tc>
+                <a:extLst>
+                  <a:ext uri="{0D108BD9-81ED-4DB2-BD59-A6C34878D82A}">
+                    <a16:rowId xmlns:a16="http://schemas.microsoft.com/office/drawing/2014/main" val="10000"/>
+                  </a:ext>
+                </a:extLst>
+              </a:tr>
+              <a:tr h="384048">
+                <a:tc>
+                  <a:txBody>
+                    <a:bodyPr/>
+                    <a:lstStyle/>
+                    <a:p>
+                      <a:pPr algn="l"/>
+                      <a:r>
+                        <a:rPr sz="1100" b="1" i="0" dirty="0">
+                          <a:solidFill>
+                            <a:schemeClr val="tx1"/>
+                          </a:solidFill>
+                          <a:latin typeface="Avenir Next LT Pro Demi"/>
+                        </a:rPr>
+                        <a:t>Bull</a:t>
+                      </a:r>
+                    </a:p>
+                  </a:txBody>
+                  <a:tcPr marL="73152" marR="73152" marT="18288" marB="18288" anchor="ctr">
+                    <a:solidFill>
+                      <a:srgbClr val="FFFFFF"/>
+                    </a:solidFill>
+                  </a:tcPr>
+                </a:tc>
+                <a:tc>
+                  <a:txBody>
+                    <a:bodyPr/>
+                    <a:lstStyle/>
+                    <a:p>
+                      <a:pPr algn="ctr"/>
+                      <a:r>
+                        <a:rPr sz="1100" b="0" i="0" dirty="0">
+                          <a:solidFill>
+                            <a:schemeClr val="tx1"/>
+                          </a:solidFill>
+                          <a:latin typeface="Avenir Next LT Pro"/>
+                        </a:rPr>
+                        <a:t>10%</a:t>
+                      </a:r>
+                    </a:p>
+                  </a:txBody>
+                  <a:tcPr marL="73152" marR="73152" marT="18288" marB="18288" anchor="ctr">
+                    <a:solidFill>
+                      <a:srgbClr val="FFFFFF"/>
+                    </a:solidFill>
+                  </a:tcPr>
+                </a:tc>
+                <a:tc>
+                  <a:txBody>
+                    <a:bodyPr/>
+                    <a:lstStyle/>
+                    <a:p>
+                      <a:pPr algn="ctr"/>
+                      <a:r>
+                        <a:rPr sz="1100" b="0" i="0">
+                          <a:solidFill>
+                            <a:schemeClr val="tx1"/>
+                          </a:solidFill>
+                          <a:latin typeface="Avenir Next LT Pro"/>
+                        </a:rPr>
+                        <a:t>20%</a:t>
+                      </a:r>
+                    </a:p>
+                  </a:txBody>
+                  <a:tcPr marL="73152" marR="73152" marT="18288" marB="18288" anchor="ctr">
+                    <a:solidFill>
+                      <a:srgbClr val="FFFFFF"/>
+                    </a:solidFill>
+                  </a:tcPr>
+                </a:tc>
+                <a:tc>
+                  <a:txBody>
+                    <a:bodyPr/>
+                    <a:lstStyle/>
+                    <a:p>
+                      <a:pPr algn="ctr"/>
+                      <a:r>
+                        <a:rPr sz="1100" b="0" i="0">
+                          <a:solidFill>
+                            <a:schemeClr val="tx1"/>
+                          </a:solidFill>
+                          <a:latin typeface="Avenir Next LT Pro"/>
+                        </a:rPr>
+                        <a:t>13×</a:t>
+                      </a:r>
+                    </a:p>
+                  </a:txBody>
+                  <a:tcPr marL="73152" marR="73152" marT="18288" marB="18288" anchor="ctr">
+                    <a:solidFill>
+                      <a:srgbClr val="FFFFFF"/>
+                    </a:solidFill>
+                  </a:tcPr>
+                </a:tc>
+                <a:tc>
+                  <a:txBody>
+                    <a:bodyPr/>
+                    <a:lstStyle/>
+                    <a:p>
+                      <a:pPr algn="ctr"/>
+                      <a:r>
+                        <a:rPr sz="1100" b="0" i="0">
+                          <a:solidFill>
+                            <a:schemeClr val="tx1"/>
+                          </a:solidFill>
+                          <a:latin typeface="Avenir Next LT Pro"/>
+                        </a:rPr>
+                        <a:t>~$562</a:t>
+                      </a:r>
+                    </a:p>
+                  </a:txBody>
+                  <a:tcPr marL="73152" marR="73152" marT="18288" marB="18288" anchor="ctr">
+                    <a:solidFill>
+                      <a:srgbClr val="FFFFFF"/>
+                    </a:solidFill>
+                  </a:tcPr>
+                </a:tc>
+                <a:tc>
+                  <a:txBody>
+                    <a:bodyPr/>
+                    <a:lstStyle/>
+                    <a:p>
+                      <a:pPr algn="ctr"/>
+                      <a:r>
+                        <a:rPr sz="1100" b="0" i="0">
+                          <a:solidFill>
+                            <a:schemeClr val="tx1"/>
+                          </a:solidFill>
+                          <a:latin typeface="Avenir Next LT Pro"/>
+                        </a:rPr>
+                        <a:t>15%</a:t>
+                      </a:r>
+                    </a:p>
+                  </a:txBody>
+                  <a:tcPr marL="73152" marR="73152" marT="18288" marB="18288" anchor="ctr">
+                    <a:solidFill>
+                      <a:srgbClr val="FFFFFF"/>
+                    </a:solidFill>
+                  </a:tcPr>
+                </a:tc>
+                <a:extLst>
+                  <a:ext uri="{0D108BD9-81ED-4DB2-BD59-A6C34878D82A}">
+                    <a16:rowId xmlns:a16="http://schemas.microsoft.com/office/drawing/2014/main" val="10001"/>
+                  </a:ext>
+                </a:extLst>
+              </a:tr>
+              <a:tr h="384048">
+                <a:tc>
+                  <a:txBody>
+                    <a:bodyPr/>
+                    <a:lstStyle/>
+                    <a:p>
+                      <a:pPr algn="l"/>
+                      <a:r>
+                        <a:rPr sz="1100" b="1" i="0">
+                          <a:solidFill>
+                            <a:schemeClr val="tx1"/>
+                          </a:solidFill>
+                          <a:latin typeface="Avenir Next LT Pro Demi"/>
+                        </a:rPr>
+                        <a:t>Base</a:t>
+                      </a:r>
+                    </a:p>
+                  </a:txBody>
+                  <a:tcPr marL="73152" marR="73152" marT="18288" marB="18288" anchor="ctr">
+                    <a:solidFill>
+                      <a:srgbClr val="F4F6F8"/>
+                    </a:solidFill>
+                  </a:tcPr>
+                </a:tc>
+                <a:tc>
+                  <a:txBody>
+                    <a:bodyPr/>
+                    <a:lstStyle/>
+                    <a:p>
+                      <a:pPr algn="ctr"/>
+                      <a:r>
+                        <a:rPr sz="1100" b="0" i="0" dirty="0">
+                          <a:solidFill>
+                            <a:schemeClr val="tx1"/>
+                          </a:solidFill>
+                          <a:latin typeface="Avenir Next LT Pro"/>
+                        </a:rPr>
+                        <a:t>6%</a:t>
+                      </a:r>
+                    </a:p>
+                  </a:txBody>
+                  <a:tcPr marL="73152" marR="73152" marT="18288" marB="18288" anchor="ctr">
+                    <a:solidFill>
+                      <a:srgbClr val="F4F6F8"/>
+                    </a:solidFill>
+                  </a:tcPr>
+                </a:tc>
+                <a:tc>
+                  <a:txBody>
+                    <a:bodyPr/>
+                    <a:lstStyle/>
+                    <a:p>
+                      <a:pPr algn="ctr"/>
+                      <a:r>
+                        <a:rPr sz="1100" b="0" i="0" dirty="0">
+                          <a:solidFill>
+                            <a:schemeClr val="tx1"/>
+                          </a:solidFill>
+                          <a:latin typeface="Avenir Next LT Pro"/>
+                        </a:rPr>
+                        <a:t>17%</a:t>
+                      </a:r>
+                    </a:p>
+                  </a:txBody>
+                  <a:tcPr marL="73152" marR="73152" marT="18288" marB="18288" anchor="ctr">
+                    <a:solidFill>
+                      <a:srgbClr val="F4F6F8"/>
+                    </a:solidFill>
+                  </a:tcPr>
+                </a:tc>
+                <a:tc>
+                  <a:txBody>
+                    <a:bodyPr/>
+                    <a:lstStyle/>
+                    <a:p>
+                      <a:pPr algn="ctr"/>
+                      <a:r>
+                        <a:rPr sz="1100" b="0" i="0" dirty="0">
+                          <a:solidFill>
+                            <a:schemeClr val="tx1"/>
+                          </a:solidFill>
+                          <a:latin typeface="Avenir Next LT Pro"/>
+                        </a:rPr>
+                        <a:t>11×</a:t>
+                      </a:r>
+                    </a:p>
+                  </a:txBody>
+                  <a:tcPr marL="73152" marR="73152" marT="18288" marB="18288" anchor="ctr">
+                    <a:solidFill>
+                      <a:srgbClr val="F4F6F8"/>
+                    </a:solidFill>
+                  </a:tcPr>
+                </a:tc>
+                <a:tc>
+                  <a:txBody>
+                    <a:bodyPr/>
+                    <a:lstStyle/>
+                    <a:p>
+                      <a:pPr algn="ctr"/>
+                      <a:r>
+                        <a:rPr sz="1100" b="0" i="0" dirty="0">
+                          <a:solidFill>
+                            <a:schemeClr val="tx1"/>
+                          </a:solidFill>
+                          <a:latin typeface="Avenir Next LT Pro"/>
+                        </a:rPr>
+                        <a:t>~$310</a:t>
+                      </a:r>
+                    </a:p>
+                  </a:txBody>
+                  <a:tcPr marL="73152" marR="73152" marT="18288" marB="18288" anchor="ctr">
+                    <a:solidFill>
+                      <a:srgbClr val="F4F6F8"/>
+                    </a:solidFill>
+                  </a:tcPr>
+                </a:tc>
+                <a:tc>
+                  <a:txBody>
+                    <a:bodyPr/>
+                    <a:lstStyle/>
+                    <a:p>
+                      <a:pPr algn="ctr"/>
+                      <a:r>
+                        <a:rPr sz="1100" b="0" i="0">
+                          <a:solidFill>
+                            <a:schemeClr val="tx1"/>
+                          </a:solidFill>
+                          <a:latin typeface="Avenir Next LT Pro"/>
+                        </a:rPr>
+                        <a:t>55%</a:t>
+                      </a:r>
+                    </a:p>
+                  </a:txBody>
+                  <a:tcPr marL="73152" marR="73152" marT="18288" marB="18288" anchor="ctr">
+                    <a:solidFill>
+                      <a:srgbClr val="F4F6F8"/>
+                    </a:solidFill>
+                  </a:tcPr>
+                </a:tc>
+                <a:extLst>
+                  <a:ext uri="{0D108BD9-81ED-4DB2-BD59-A6C34878D82A}">
+                    <a16:rowId xmlns:a16="http://schemas.microsoft.com/office/drawing/2014/main" val="10002"/>
+                  </a:ext>
+                </a:extLst>
+              </a:tr>
+              <a:tr h="384048">
+                <a:tc>
+                  <a:txBody>
+                    <a:bodyPr/>
+                    <a:lstStyle/>
+                    <a:p>
+                      <a:pPr algn="l"/>
+                      <a:r>
+                        <a:rPr sz="1100" b="1" i="0">
+                          <a:solidFill>
+                            <a:schemeClr val="tx1"/>
+                          </a:solidFill>
+                          <a:latin typeface="Avenir Next LT Pro Demi"/>
+                        </a:rPr>
+                        <a:t>Bear</a:t>
+                      </a:r>
+                    </a:p>
+                  </a:txBody>
+                  <a:tcPr marL="73152" marR="73152" marT="18288" marB="18288" anchor="ctr">
+                    <a:solidFill>
+                      <a:srgbClr val="FFFFFF"/>
+                    </a:solidFill>
+                  </a:tcPr>
+                </a:tc>
+                <a:tc>
+                  <a:txBody>
+                    <a:bodyPr/>
+                    <a:lstStyle/>
+                    <a:p>
+                      <a:pPr algn="ctr"/>
+                      <a:r>
+                        <a:rPr sz="1100" b="0" i="0">
+                          <a:solidFill>
+                            <a:schemeClr val="tx1"/>
+                          </a:solidFill>
+                          <a:latin typeface="Avenir Next LT Pro"/>
+                        </a:rPr>
+                        <a:t>2%</a:t>
+                      </a:r>
+                    </a:p>
+                  </a:txBody>
+                  <a:tcPr marL="73152" marR="73152" marT="18288" marB="18288" anchor="ctr">
+                    <a:solidFill>
+                      <a:srgbClr val="FFFFFF"/>
+                    </a:solidFill>
+                  </a:tcPr>
+                </a:tc>
+                <a:tc>
+                  <a:txBody>
+                    <a:bodyPr/>
+                    <a:lstStyle/>
+                    <a:p>
+                      <a:pPr algn="ctr"/>
+                      <a:r>
+                        <a:rPr sz="1100" b="0" i="0">
+                          <a:solidFill>
+                            <a:schemeClr val="tx1"/>
+                          </a:solidFill>
+                          <a:latin typeface="Avenir Next LT Pro"/>
+                        </a:rPr>
+                        <a:t>14%</a:t>
+                      </a:r>
+                    </a:p>
+                  </a:txBody>
+                  <a:tcPr marL="73152" marR="73152" marT="18288" marB="18288" anchor="ctr">
+                    <a:solidFill>
+                      <a:srgbClr val="FFFFFF"/>
+                    </a:solidFill>
+                  </a:tcPr>
+                </a:tc>
+                <a:tc>
+                  <a:txBody>
+                    <a:bodyPr/>
+                    <a:lstStyle/>
+                    <a:p>
+                      <a:pPr algn="ctr"/>
+                      <a:r>
+                        <a:rPr sz="1100" b="0" i="0">
+                          <a:solidFill>
+                            <a:schemeClr val="tx1"/>
+                          </a:solidFill>
+                          <a:latin typeface="Avenir Next LT Pro"/>
+                        </a:rPr>
+                        <a:t>8×</a:t>
+                      </a:r>
+                    </a:p>
+                  </a:txBody>
+                  <a:tcPr marL="73152" marR="73152" marT="18288" marB="18288" anchor="ctr">
+                    <a:solidFill>
+                      <a:srgbClr val="FFFFFF"/>
+                    </a:solidFill>
+                  </a:tcPr>
+                </a:tc>
+                <a:tc>
+                  <a:txBody>
+                    <a:bodyPr/>
+                    <a:lstStyle/>
+                    <a:p>
+                      <a:pPr algn="ctr"/>
+                      <a:r>
+                        <a:rPr sz="1100" b="0" i="0">
+                          <a:solidFill>
+                            <a:schemeClr val="tx1"/>
+                          </a:solidFill>
+                          <a:latin typeface="Avenir Next LT Pro"/>
+                        </a:rPr>
+                        <a:t>~$100</a:t>
+                      </a:r>
+                    </a:p>
+                  </a:txBody>
+                  <a:tcPr marL="73152" marR="73152" marT="18288" marB="18288" anchor="ctr">
+                    <a:solidFill>
+                      <a:srgbClr val="FFFFFF"/>
+                    </a:solidFill>
+                  </a:tcPr>
+                </a:tc>
+                <a:tc>
+                  <a:txBody>
+                    <a:bodyPr/>
+                    <a:lstStyle/>
+                    <a:p>
+                      <a:pPr algn="ctr"/>
+                      <a:r>
+                        <a:rPr sz="1100" b="0" i="0" dirty="0">
+                          <a:solidFill>
+                            <a:schemeClr val="tx1"/>
+                          </a:solidFill>
+                          <a:latin typeface="Avenir Next LT Pro"/>
+                        </a:rPr>
+                        <a:t>30%</a:t>
+                      </a:r>
+                    </a:p>
+                  </a:txBody>
+                  <a:tcPr marL="73152" marR="73152" marT="18288" marB="18288" anchor="ctr">
+                    <a:solidFill>
+                      <a:srgbClr val="FFFFFF"/>
+                    </a:solidFill>
+                  </a:tcPr>
+                </a:tc>
+                <a:extLst>
+                  <a:ext uri="{0D108BD9-81ED-4DB2-BD59-A6C34878D82A}">
+                    <a16:rowId xmlns:a16="http://schemas.microsoft.com/office/drawing/2014/main" val="10003"/>
+                  </a:ext>
+                </a:extLst>
+              </a:tr>
+            </a:tbl>
+          </a:graphicData>
+        </a:graphic>
+      </p:graphicFrame>
+      <p:sp>
+        <p:nvSpPr>
+          <p:cNvPr id="12" name="TextBox 11"/>
+          <p:cNvSpPr txBox="1"/>
+          <p:nvPr/>
+        </p:nvSpPr>
+        <p:spPr>
+          <a:xfrm>
+            <a:off x="457200" y="4572000"/>
+            <a:ext cx="8229600" cy="365760"/>
+          </a:xfrm>
+          <a:prstGeom prst="rect">
+            <a:avLst/>
+          </a:prstGeom>
+          <a:noFill/>
+        </p:spPr>
+        <p:txBody>
+          <a:bodyPr wrap="none">
+            <a:spAutoFit/>
+          </a:bodyPr>
+          <a:lstStyle/>
+          <a:p>
+            <a:r>
+              <a:rPr sz="1300" b="1" i="0">
+                <a:solidFill>
+                  <a:srgbClr val="156082"/>
+                </a:solidFill>
+                <a:latin typeface="Avenir Next LT Pro Demi"/>
+              </a:rPr>
+              <a:t>Probability-weighted target: ~$285   (~72% upside from ~$166)</a:t>
+            </a:r>
+          </a:p>
+        </p:txBody>
+      </p:sp>
+    </p:spTree>
+  </p:cSld>
+  <p:clrMapOvr>
+    <a:masterClrMapping/>
+  </p:clrMapOvr>
+</p:sld>
+</file>
+
+<file path=ppt/slides/slide11.xml><?xml version="1.0" encoding="utf-8"?>
+<p:sld xmlns:a="http://schemas.openxmlformats.org/drawingml/2006/main" xmlns:r="http://schemas.openxmlformats.org/officeDocument/2006/relationships" xmlns:p="http://schemas.openxmlformats.org/presentationml/2006/main">
+  <p:cSld>
+    <p:spTree>
+      <p:nvGrpSpPr>
+        <p:cNvPr id="1" name=""/>
+        <p:cNvGrpSpPr/>
+        <p:nvPr/>
+      </p:nvGrpSpPr>
+      <p:grpSpPr>
+        <a:xfrm>
+          <a:off x="0" y="0"/>
+          <a:ext cx="0" cy="0"/>
+          <a:chOff x="0" y="0"/>
+          <a:chExt cx="0" cy="0"/>
+        </a:xfrm>
+      </p:grpSpPr>
+      <p:sp>
+        <p:nvSpPr>
+          <p:cNvPr id="2" name="TextBox 1"/>
+          <p:cNvSpPr txBox="1"/>
+          <p:nvPr/>
+        </p:nvSpPr>
+        <p:spPr>
+          <a:xfrm>
+            <a:off x="457200" y="320040"/>
+            <a:ext cx="8229600" cy="446276"/>
+          </a:xfrm>
+          <a:prstGeom prst="rect">
+            <a:avLst/>
+          </a:prstGeom>
+          <a:noFill/>
+        </p:spPr>
+        <p:txBody>
+          <a:bodyPr wrap="square">
+            <a:spAutoFit/>
+          </a:bodyPr>
+          <a:lstStyle/>
+          <a:p>
+            <a:r>
+              <a:rPr sz="2300" b="0" i="0" dirty="0">
+                <a:latin typeface="Avenir Next LT Pro Demi"/>
+              </a:rPr>
               <a:t>Macro Sensitivity — Housing Is Option Value</a:t>
             </a:r>
           </a:p>
@@ -6106,7 +7227,7 @@
 </p:sld>
 </file>
 
-<file path=ppt/slides/slide11.xml><?xml version="1.0" encoding="utf-8"?>
+<file path=ppt/slides/slide12.xml><?xml version="1.0" encoding="utf-8"?>
 <p:sld xmlns:a="http://schemas.openxmlformats.org/drawingml/2006/main" xmlns:r="http://schemas.openxmlformats.org/officeDocument/2006/relationships" xmlns:p="http://schemas.openxmlformats.org/presentationml/2006/main">
   <p:cSld>
     <p:spTree>
@@ -6176,7 +7297,7 @@
 </p:sld>
 </file>
 
-<file path=ppt/slides/slide12.xml><?xml version="1.0" encoding="utf-8"?>
+<file path=ppt/slides/slide13.xml><?xml version="1.0" encoding="utf-8"?>
 <p:sld xmlns:a="http://schemas.openxmlformats.org/drawingml/2006/main" xmlns:r="http://schemas.openxmlformats.org/officeDocument/2006/relationships" xmlns:p="http://schemas.openxmlformats.org/presentationml/2006/main">
   <p:cSld>
     <p:spTree>
@@ -7123,7 +8244,7 @@
 </p:sld>
 </file>
 
-<file path=ppt/slides/slide13.xml><?xml version="1.0" encoding="utf-8"?>
+<file path=ppt/slides/slide14.xml><?xml version="1.0" encoding="utf-8"?>
 <p:sld xmlns:a="http://schemas.openxmlformats.org/drawingml/2006/main" xmlns:r="http://schemas.openxmlformats.org/officeDocument/2006/relationships" xmlns:p="http://schemas.openxmlformats.org/presentationml/2006/main">
   <p:cSld>
     <p:spTree>
@@ -7965,535 +9086,6 @@
           <a:p>
             <a:pPr algn="ctr"/>
             <a:endParaRPr/>
-          </a:p>
-        </p:txBody>
-      </p:sp>
-    </p:spTree>
-  </p:cSld>
-  <p:clrMapOvr>
-    <a:masterClrMapping/>
-  </p:clrMapOvr>
-</p:sld>
-</file>
-
-<file path=ppt/slides/slide14.xml><?xml version="1.0" encoding="utf-8"?>
-<p:sld xmlns:a="http://schemas.openxmlformats.org/drawingml/2006/main" xmlns:p="http://schemas.openxmlformats.org/presentationml/2006/main" xmlns:r="http://schemas.openxmlformats.org/officeDocument/2006/relationships">
-  <p:cSld>
-    <p:spTree>
-      <p:nvGrpSpPr>
-        <p:cNvPr id="1" name=""/>
-        <p:cNvGrpSpPr/>
-        <p:nvPr/>
-      </p:nvGrpSpPr>
-      <p:grpSpPr/>
-      <p:sp>
-        <p:nvSpPr>
-          <p:cNvPr id="2" name="TextBox 1"/>
-          <p:cNvSpPr txBox="1"/>
-          <p:nvPr/>
-        </p:nvSpPr>
-        <p:spPr>
-          <a:xfrm>
-            <a:off x="457200" y="365760"/>
-            <a:ext cx="8229600" cy="548640"/>
-          </a:xfrm>
-          <a:prstGeom prst="rect">
-            <a:avLst/>
-          </a:prstGeom>
-          <a:noFill/>
-        </p:spPr>
-        <p:txBody>
-          <a:bodyPr wrap="square">
-            <a:spAutoFit/>
-          </a:bodyPr>
-          <a:lstStyle/>
-          <a:p>
-            <a:r>
-              <a:rPr sz="2200" b="0">
-                <a:solidFill>
-                  <a:srgbClr val="000000"/>
-                </a:solidFill>
-                <a:latin typeface="Avenir Next LT Pro Demi"/>
-              </a:rPr>
-              <a:t>How RH Got Here</a:t>
-            </a:r>
-          </a:p>
-        </p:txBody>
-      </p:sp>
-      <p:sp>
-        <p:nvSpPr>
-          <p:cNvPr id="3" name="Rectangle 2"/>
-          <p:cNvSpPr/>
-          <p:nvPr/>
-        </p:nvSpPr>
-        <p:spPr>
-          <a:xfrm>
-            <a:off x="457200" y="960120"/>
-            <a:ext cx="8229600" cy="25603"/>
-          </a:xfrm>
-          <a:prstGeom prst="rect">
-            <a:avLst/>
-          </a:prstGeom>
-          <a:solidFill>
-            <a:srgbClr val="156082"/>
-          </a:solidFill>
-          <a:ln>
-            <a:noFill/>
-          </a:ln>
-        </p:spPr>
-        <p:style>
-          <a:lnRef idx="1">
-            <a:schemeClr val="accent1"/>
-          </a:lnRef>
-          <a:fillRef idx="3">
-            <a:schemeClr val="accent1"/>
-          </a:fillRef>
-          <a:effectRef idx="2">
-            <a:schemeClr val="accent1"/>
-          </a:effectRef>
-          <a:fontRef idx="minor">
-            <a:schemeClr val="lt1"/>
-          </a:fontRef>
-        </p:style>
-        <p:txBody>
-          <a:bodyPr rtlCol="0" anchor="ctr"/>
-          <a:lstStyle/>
-          <a:p>
-            <a:pPr algn="ctr"/>
-          </a:p>
-        </p:txBody>
-      </p:sp>
-      <p:sp>
-        <p:nvSpPr>
-          <p:cNvPr id="4" name="Rectangle 3"/>
-          <p:cNvSpPr/>
-          <p:nvPr/>
-        </p:nvSpPr>
-        <p:spPr>
-          <a:xfrm>
-            <a:off x="457200" y="1371600"/>
-            <a:ext cx="82296" cy="1143000"/>
-          </a:xfrm>
-          <a:prstGeom prst="rect">
-            <a:avLst/>
-          </a:prstGeom>
-          <a:solidFill>
-            <a:srgbClr val="156082"/>
-          </a:solidFill>
-          <a:ln>
-            <a:noFill/>
-          </a:ln>
-        </p:spPr>
-        <p:style>
-          <a:lnRef idx="1">
-            <a:schemeClr val="accent1"/>
-          </a:lnRef>
-          <a:fillRef idx="3">
-            <a:schemeClr val="accent1"/>
-          </a:fillRef>
-          <a:effectRef idx="2">
-            <a:schemeClr val="accent1"/>
-          </a:effectRef>
-          <a:fontRef idx="minor">
-            <a:schemeClr val="lt1"/>
-          </a:fontRef>
-        </p:style>
-        <p:txBody>
-          <a:bodyPr rtlCol="0" anchor="ctr"/>
-          <a:lstStyle/>
-          <a:p>
-            <a:pPr algn="ctr"/>
-          </a:p>
-        </p:txBody>
-      </p:sp>
-      <p:sp>
-        <p:nvSpPr>
-          <p:cNvPr id="5" name="TextBox 4"/>
-          <p:cNvSpPr txBox="1"/>
-          <p:nvPr/>
-        </p:nvSpPr>
-        <p:spPr>
-          <a:xfrm>
-            <a:off x="658368" y="1371600"/>
-            <a:ext cx="1920240" cy="1143000"/>
-          </a:xfrm>
-          <a:prstGeom prst="rect">
-            <a:avLst/>
-          </a:prstGeom>
-          <a:noFill/>
-        </p:spPr>
-        <p:txBody>
-          <a:bodyPr wrap="square" anchor="ctr">
-            <a:spAutoFit/>
-          </a:bodyPr>
-          <a:lstStyle/>
-          <a:p>
-            <a:r>
-              <a:rPr sz="1400" b="1">
-                <a:solidFill>
-                  <a:srgbClr val="000000"/>
-                </a:solidFill>
-                <a:latin typeface="Avenir Next LT Pro Demi"/>
-              </a:rPr>
-              <a:t>The Build</a:t>
-            </a:r>
-          </a:p>
-          <a:p>
-            <a:r>
-              <a:rPr sz="1000" b="0">
-                <a:solidFill>
-                  <a:srgbClr val="707070"/>
-                </a:solidFill>
-                <a:latin typeface="Avenir Next LT Pro"/>
-              </a:rPr>
-              <a:t>Pre-2020</a:t>
-            </a:r>
-          </a:p>
-        </p:txBody>
-      </p:sp>
-      <p:sp>
-        <p:nvSpPr>
-          <p:cNvPr id="6" name="TextBox 5"/>
-          <p:cNvSpPr txBox="1"/>
-          <p:nvPr/>
-        </p:nvSpPr>
-        <p:spPr>
-          <a:xfrm>
-            <a:off x="2743200" y="1371600"/>
-            <a:ext cx="5943600" cy="1143000"/>
-          </a:xfrm>
-          <a:prstGeom prst="rect">
-            <a:avLst/>
-          </a:prstGeom>
-          <a:noFill/>
-        </p:spPr>
-        <p:txBody>
-          <a:bodyPr wrap="square" anchor="ctr">
-            <a:spAutoFit/>
-          </a:bodyPr>
-          <a:lstStyle/>
-          <a:p>
-            <a:r>
-              <a:rPr sz="1250" b="0">
-                <a:solidFill>
-                  <a:srgbClr val="000000"/>
-                </a:solidFill>
-                <a:latin typeface="Avenir Next LT Pro"/>
-              </a:rPr>
-              <a:t>Friedman turns RH into a luxury Gallery brand.</a:t>
-            </a:r>
-          </a:p>
-        </p:txBody>
-      </p:sp>
-      <p:sp>
-        <p:nvSpPr>
-          <p:cNvPr id="7" name="Rectangle 6"/>
-          <p:cNvSpPr/>
-          <p:nvPr/>
-        </p:nvSpPr>
-        <p:spPr>
-          <a:xfrm>
-            <a:off x="457200" y="2679191"/>
-            <a:ext cx="82296" cy="1143000"/>
-          </a:xfrm>
-          <a:prstGeom prst="rect">
-            <a:avLst/>
-          </a:prstGeom>
-          <a:solidFill>
-            <a:srgbClr val="E97132"/>
-          </a:solidFill>
-          <a:ln>
-            <a:noFill/>
-          </a:ln>
-        </p:spPr>
-        <p:style>
-          <a:lnRef idx="1">
-            <a:schemeClr val="accent1"/>
-          </a:lnRef>
-          <a:fillRef idx="3">
-            <a:schemeClr val="accent1"/>
-          </a:fillRef>
-          <a:effectRef idx="2">
-            <a:schemeClr val="accent1"/>
-          </a:effectRef>
-          <a:fontRef idx="minor">
-            <a:schemeClr val="lt1"/>
-          </a:fontRef>
-        </p:style>
-        <p:txBody>
-          <a:bodyPr rtlCol="0" anchor="ctr"/>
-          <a:lstStyle/>
-          <a:p>
-            <a:pPr algn="ctr"/>
-          </a:p>
-        </p:txBody>
-      </p:sp>
-      <p:sp>
-        <p:nvSpPr>
-          <p:cNvPr id="8" name="TextBox 7"/>
-          <p:cNvSpPr txBox="1"/>
-          <p:nvPr/>
-        </p:nvSpPr>
-        <p:spPr>
-          <a:xfrm>
-            <a:off x="658368" y="2679191"/>
-            <a:ext cx="1920240" cy="1143000"/>
-          </a:xfrm>
-          <a:prstGeom prst="rect">
-            <a:avLst/>
-          </a:prstGeom>
-          <a:noFill/>
-        </p:spPr>
-        <p:txBody>
-          <a:bodyPr wrap="square" anchor="ctr">
-            <a:spAutoFit/>
-          </a:bodyPr>
-          <a:lstStyle/>
-          <a:p>
-            <a:r>
-              <a:rPr sz="1400" b="1">
-                <a:solidFill>
-                  <a:srgbClr val="000000"/>
-                </a:solidFill>
-                <a:latin typeface="Avenir Next LT Pro Demi"/>
-              </a:rPr>
-              <a:t>The Peak</a:t>
-            </a:r>
-          </a:p>
-          <a:p>
-            <a:r>
-              <a:rPr sz="1000" b="0">
-                <a:solidFill>
-                  <a:srgbClr val="707070"/>
-                </a:solidFill>
-                <a:latin typeface="Avenir Next LT Pro"/>
-              </a:rPr>
-              <a:t>FY2022</a:t>
-            </a:r>
-          </a:p>
-        </p:txBody>
-      </p:sp>
-      <p:sp>
-        <p:nvSpPr>
-          <p:cNvPr id="9" name="TextBox 8"/>
-          <p:cNvSpPr txBox="1"/>
-          <p:nvPr/>
-        </p:nvSpPr>
-        <p:spPr>
-          <a:xfrm>
-            <a:off x="2743200" y="2679191"/>
-            <a:ext cx="5943600" cy="1143000"/>
-          </a:xfrm>
-          <a:prstGeom prst="rect">
-            <a:avLst/>
-          </a:prstGeom>
-          <a:noFill/>
-        </p:spPr>
-        <p:txBody>
-          <a:bodyPr wrap="square" anchor="ctr">
-            <a:spAutoFit/>
-          </a:bodyPr>
-          <a:lstStyle/>
-          <a:p>
-            <a:r>
-              <a:rPr sz="1250" b="0">
-                <a:solidFill>
-                  <a:srgbClr val="000000"/>
-                </a:solidFill>
-                <a:latin typeface="Avenir Next LT Pro"/>
-              </a:rPr>
-              <a:t>~$3.6B revenue — then buys back ~7.6M shares at ~$269–321, debt-funded.</a:t>
-            </a:r>
-          </a:p>
-        </p:txBody>
-      </p:sp>
-      <p:sp>
-        <p:nvSpPr>
-          <p:cNvPr id="10" name="Rectangle 9"/>
-          <p:cNvSpPr/>
-          <p:nvPr/>
-        </p:nvSpPr>
-        <p:spPr>
-          <a:xfrm>
-            <a:off x="457200" y="3986783"/>
-            <a:ext cx="82296" cy="1143000"/>
-          </a:xfrm>
-          <a:prstGeom prst="rect">
-            <a:avLst/>
-          </a:prstGeom>
-          <a:solidFill>
-            <a:srgbClr val="B03030"/>
-          </a:solidFill>
-          <a:ln>
-            <a:noFill/>
-          </a:ln>
-        </p:spPr>
-        <p:style>
-          <a:lnRef idx="1">
-            <a:schemeClr val="accent1"/>
-          </a:lnRef>
-          <a:fillRef idx="3">
-            <a:schemeClr val="accent1"/>
-          </a:fillRef>
-          <a:effectRef idx="2">
-            <a:schemeClr val="accent1"/>
-          </a:effectRef>
-          <a:fontRef idx="minor">
-            <a:schemeClr val="lt1"/>
-          </a:fontRef>
-        </p:style>
-        <p:txBody>
-          <a:bodyPr rtlCol="0" anchor="ctr"/>
-          <a:lstStyle/>
-          <a:p>
-            <a:pPr algn="ctr"/>
-          </a:p>
-        </p:txBody>
-      </p:sp>
-      <p:sp>
-        <p:nvSpPr>
-          <p:cNvPr id="11" name="TextBox 10"/>
-          <p:cNvSpPr txBox="1"/>
-          <p:nvPr/>
-        </p:nvSpPr>
-        <p:spPr>
-          <a:xfrm>
-            <a:off x="658368" y="3986783"/>
-            <a:ext cx="1920240" cy="1143000"/>
-          </a:xfrm>
-          <a:prstGeom prst="rect">
-            <a:avLst/>
-          </a:prstGeom>
-          <a:noFill/>
-        </p:spPr>
-        <p:txBody>
-          <a:bodyPr wrap="square" anchor="ctr">
-            <a:spAutoFit/>
-          </a:bodyPr>
-          <a:lstStyle/>
-          <a:p>
-            <a:r>
-              <a:rPr sz="1400" b="1">
-                <a:solidFill>
-                  <a:srgbClr val="000000"/>
-                </a:solidFill>
-                <a:latin typeface="Avenir Next LT Pro Demi"/>
-              </a:rPr>
-              <a:t>The Fall</a:t>
-            </a:r>
-          </a:p>
-          <a:p>
-            <a:r>
-              <a:rPr sz="1000" b="0">
-                <a:solidFill>
-                  <a:srgbClr val="707070"/>
-                </a:solidFill>
-                <a:latin typeface="Avenir Next LT Pro"/>
-              </a:rPr>
-              <a:t>FY23–24</a:t>
-            </a:r>
-          </a:p>
-        </p:txBody>
-      </p:sp>
-      <p:sp>
-        <p:nvSpPr>
-          <p:cNvPr id="12" name="TextBox 11"/>
-          <p:cNvSpPr txBox="1"/>
-          <p:nvPr/>
-        </p:nvSpPr>
-        <p:spPr>
-          <a:xfrm>
-            <a:off x="2743200" y="3986783"/>
-            <a:ext cx="5943600" cy="1143000"/>
-          </a:xfrm>
-          <a:prstGeom prst="rect">
-            <a:avLst/>
-          </a:prstGeom>
-          <a:noFill/>
-        </p:spPr>
-        <p:txBody>
-          <a:bodyPr wrap="square" anchor="ctr">
-            <a:spAutoFit/>
-          </a:bodyPr>
-          <a:lstStyle/>
-          <a:p>
-            <a:r>
-              <a:rPr sz="1250" b="0">
-                <a:solidFill>
-                  <a:srgbClr val="000000"/>
-                </a:solidFill>
-                <a:latin typeface="Avenir Next LT Pro"/>
-              </a:rPr>
-              <a:t>Housing freezes; revenue falls to ~$3.03B. Debt now ~$2.4B, ~4× levered.</a:t>
-            </a:r>
-          </a:p>
-        </p:txBody>
-      </p:sp>
-      <p:sp>
-        <p:nvSpPr>
-          <p:cNvPr id="13" name="TextBox 12"/>
-          <p:cNvSpPr txBox="1"/>
-          <p:nvPr/>
-        </p:nvSpPr>
-        <p:spPr>
-          <a:xfrm>
-            <a:off x="457200" y="5806440"/>
-            <a:ext cx="8229600" cy="365760"/>
-          </a:xfrm>
-          <a:prstGeom prst="rect">
-            <a:avLst/>
-          </a:prstGeom>
-          <a:noFill/>
-        </p:spPr>
-        <p:txBody>
-          <a:bodyPr wrap="square">
-            <a:spAutoFit/>
-          </a:bodyPr>
-          <a:lstStyle/>
-          <a:p>
-            <a:r>
-              <a:rPr sz="1100" b="1">
-                <a:solidFill>
-                  <a:srgbClr val="000000"/>
-                </a:solidFill>
-                <a:latin typeface="Avenir Next LT Pro Demi"/>
-              </a:rPr>
-              <a:t>Partly self-inflicted: leveraged buybacks at the top, then the cycle turned.</a:t>
-            </a:r>
-          </a:p>
-        </p:txBody>
-      </p:sp>
-      <p:sp>
-        <p:nvSpPr>
-          <p:cNvPr id="14" name="TextBox 13"/>
-          <p:cNvSpPr txBox="1"/>
-          <p:nvPr/>
-        </p:nvSpPr>
-        <p:spPr>
-          <a:xfrm>
-            <a:off x="457200" y="6355080"/>
-            <a:ext cx="8229600" cy="365760"/>
-          </a:xfrm>
-          <a:prstGeom prst="rect">
-            <a:avLst/>
-          </a:prstGeom>
-          <a:noFill/>
-        </p:spPr>
-        <p:txBody>
-          <a:bodyPr wrap="none">
-            <a:spAutoFit/>
-          </a:bodyPr>
-          <a:lstStyle/>
-          <a:p>
-            <a:r>
-              <a:rPr sz="750" b="0" i="1">
-                <a:solidFill>
-                  <a:srgbClr val="707070"/>
-                </a:solidFill>
-                <a:latin typeface="Avenir Next LT Pro"/>
-              </a:rPr>
-              <a:t>Source: RH FY2025 Form 10-K</a:t>
-            </a:r>
           </a:p>
         </p:txBody>
       </p:sp>
@@ -8544,7 +9136,7 @@
                 </a:solidFill>
                 <a:latin typeface="Avenir Next LT Pro Demi"/>
               </a:rPr>
-              <a:t>The Recovery Plan</a:t>
+              <a:t>How RH Got Here</a:t>
             </a:r>
           </a:p>
         </p:txBody>
@@ -8601,7 +9193,7 @@
         <p:spPr>
           <a:xfrm>
             <a:off x="457200" y="1371600"/>
-            <a:ext cx="82296" cy="960120"/>
+            <a:ext cx="82296" cy="1143000"/>
           </a:xfrm>
           <a:prstGeom prst="rect">
             <a:avLst/>
@@ -8644,7 +9236,7 @@
         <p:spPr>
           <a:xfrm>
             <a:off x="658368" y="1371600"/>
-            <a:ext cx="7955279" cy="960120"/>
+            <a:ext cx="1920240" cy="1143000"/>
           </a:xfrm>
           <a:prstGeom prst="rect">
             <a:avLst/>
@@ -8658,42 +9250,78 @@
           <a:lstStyle/>
           <a:p>
             <a:r>
-              <a:rPr sz="1350" b="1">
+              <a:rPr sz="1400" b="1">
                 <a:solidFill>
                   <a:srgbClr val="000000"/>
                 </a:solidFill>
                 <a:latin typeface="Avenir Next LT Pro Demi"/>
               </a:rPr>
-              <a:t>Product transformation  —  </a:t>
-            </a:r>
-            <a:r>
-              <a:rPr sz="1250" b="0">
-                <a:solidFill>
-                  <a:srgbClr val="000000"/>
+              <a:t>The Build</a:t>
+            </a:r>
+          </a:p>
+          <a:p>
+            <a:r>
+              <a:rPr sz="1000" b="0">
+                <a:solidFill>
+                  <a:srgbClr val="707070"/>
                 </a:solidFill>
                 <a:latin typeface="Avenir Next LT Pro"/>
               </a:rPr>
-              <a:t>New collections and refreshed Sourcebooks.</a:t>
+              <a:t>Pre-2020</a:t>
             </a:r>
           </a:p>
         </p:txBody>
       </p:sp>
       <p:sp>
         <p:nvSpPr>
-          <p:cNvPr id="6" name="Rectangle 5"/>
+          <p:cNvPr id="6" name="TextBox 5"/>
+          <p:cNvSpPr txBox="1"/>
+          <p:nvPr/>
+        </p:nvSpPr>
+        <p:spPr>
+          <a:xfrm>
+            <a:off x="2743200" y="1371600"/>
+            <a:ext cx="5943600" cy="1143000"/>
+          </a:xfrm>
+          <a:prstGeom prst="rect">
+            <a:avLst/>
+          </a:prstGeom>
+          <a:noFill/>
+        </p:spPr>
+        <p:txBody>
+          <a:bodyPr wrap="square" anchor="ctr">
+            <a:spAutoFit/>
+          </a:bodyPr>
+          <a:lstStyle/>
+          <a:p>
+            <a:r>
+              <a:rPr sz="1250" b="0">
+                <a:solidFill>
+                  <a:srgbClr val="000000"/>
+                </a:solidFill>
+                <a:latin typeface="Avenir Next LT Pro"/>
+              </a:rPr>
+              <a:t>Friedman turns RH into a luxury Gallery brand.</a:t>
+            </a:r>
+          </a:p>
+        </p:txBody>
+      </p:sp>
+      <p:sp>
+        <p:nvSpPr>
+          <p:cNvPr id="7" name="Rectangle 6"/>
           <p:cNvSpPr/>
           <p:nvPr/>
         </p:nvSpPr>
         <p:spPr>
           <a:xfrm>
-            <a:off x="457200" y="2496312"/>
-            <a:ext cx="82296" cy="960120"/>
+            <a:off x="457200" y="2679191"/>
+            <a:ext cx="82296" cy="1143000"/>
           </a:xfrm>
           <a:prstGeom prst="rect">
             <a:avLst/>
           </a:prstGeom>
           <a:solidFill>
-            <a:srgbClr val="196B24"/>
+            <a:srgbClr val="E97132"/>
           </a:solidFill>
           <a:ln>
             <a:noFill/>
@@ -8723,14 +9351,14 @@
       </p:sp>
       <p:sp>
         <p:nvSpPr>
-          <p:cNvPr id="7" name="TextBox 6"/>
+          <p:cNvPr id="8" name="TextBox 7"/>
           <p:cNvSpPr txBox="1"/>
           <p:nvPr/>
         </p:nvSpPr>
         <p:spPr>
           <a:xfrm>
-            <a:off x="658368" y="2496312"/>
-            <a:ext cx="7955279" cy="960120"/>
+            <a:off x="658368" y="2679191"/>
+            <a:ext cx="1920240" cy="1143000"/>
           </a:xfrm>
           <a:prstGeom prst="rect">
             <a:avLst/>
@@ -8744,42 +9372,78 @@
           <a:lstStyle/>
           <a:p>
             <a:r>
-              <a:rPr sz="1350" b="1">
+              <a:rPr sz="1400" b="1">
                 <a:solidFill>
                   <a:srgbClr val="000000"/>
                 </a:solidFill>
                 <a:latin typeface="Avenir Next LT Pro Demi"/>
               </a:rPr>
-              <a:t>Gallery expansion  —  </a:t>
-            </a:r>
-            <a:r>
-              <a:rPr sz="1250" b="0">
-                <a:solidFill>
-                  <a:srgbClr val="000000"/>
+              <a:t>The Peak</a:t>
+            </a:r>
+          </a:p>
+          <a:p>
+            <a:r>
+              <a:rPr sz="1000" b="0">
+                <a:solidFill>
+                  <a:srgbClr val="707070"/>
                 </a:solidFill>
                 <a:latin typeface="Avenir Next LT Pro"/>
               </a:rPr>
-              <a:t>Every major U.S./Canada market — RH's ~$5–6B opportunity.</a:t>
+              <a:t>FY2022</a:t>
             </a:r>
           </a:p>
         </p:txBody>
       </p:sp>
       <p:sp>
         <p:nvSpPr>
-          <p:cNvPr id="8" name="Rectangle 7"/>
+          <p:cNvPr id="9" name="TextBox 8"/>
+          <p:cNvSpPr txBox="1"/>
+          <p:nvPr/>
+        </p:nvSpPr>
+        <p:spPr>
+          <a:xfrm>
+            <a:off x="2743200" y="2679191"/>
+            <a:ext cx="5943600" cy="1143000"/>
+          </a:xfrm>
+          <a:prstGeom prst="rect">
+            <a:avLst/>
+          </a:prstGeom>
+          <a:noFill/>
+        </p:spPr>
+        <p:txBody>
+          <a:bodyPr wrap="square" anchor="ctr">
+            <a:spAutoFit/>
+          </a:bodyPr>
+          <a:lstStyle/>
+          <a:p>
+            <a:r>
+              <a:rPr sz="1250" b="0">
+                <a:solidFill>
+                  <a:srgbClr val="000000"/>
+                </a:solidFill>
+                <a:latin typeface="Avenir Next LT Pro"/>
+              </a:rPr>
+              <a:t>~$3.6B revenue — then buys back ~7.6M shares at ~$269–321, debt-funded.</a:t>
+            </a:r>
+          </a:p>
+        </p:txBody>
+      </p:sp>
+      <p:sp>
+        <p:nvSpPr>
+          <p:cNvPr id="10" name="Rectangle 9"/>
           <p:cNvSpPr/>
           <p:nvPr/>
         </p:nvSpPr>
         <p:spPr>
           <a:xfrm>
-            <a:off x="457200" y="3621024"/>
-            <a:ext cx="82296" cy="960120"/>
+            <a:off x="457200" y="3986783"/>
+            <a:ext cx="82296" cy="1143000"/>
           </a:xfrm>
           <a:prstGeom prst="rect">
             <a:avLst/>
           </a:prstGeom>
           <a:solidFill>
-            <a:srgbClr val="E97132"/>
+            <a:srgbClr val="B03030"/>
           </a:solidFill>
           <a:ln>
             <a:noFill/>
@@ -8809,14 +9473,14 @@
       </p:sp>
       <p:sp>
         <p:nvSpPr>
-          <p:cNvPr id="9" name="TextBox 8"/>
+          <p:cNvPr id="11" name="TextBox 10"/>
           <p:cNvSpPr txBox="1"/>
           <p:nvPr/>
         </p:nvSpPr>
         <p:spPr>
           <a:xfrm>
-            <a:off x="658368" y="3621024"/>
-            <a:ext cx="7955279" cy="960120"/>
+            <a:off x="658368" y="3986783"/>
+            <a:ext cx="1920240" cy="1143000"/>
           </a:xfrm>
           <a:prstGeom prst="rect">
             <a:avLst/>
@@ -8830,79 +9494,38 @@
           <a:lstStyle/>
           <a:p>
             <a:r>
-              <a:rPr sz="1350" b="1">
+              <a:rPr sz="1400" b="1">
                 <a:solidFill>
                   <a:srgbClr val="000000"/>
                 </a:solidFill>
                 <a:latin typeface="Avenir Next LT Pro Demi"/>
               </a:rPr>
-              <a:t>Move upmarket  —  </a:t>
-            </a:r>
-            <a:r>
-              <a:rPr sz="1250" b="0">
-                <a:solidFill>
-                  <a:srgbClr val="000000"/>
+              <a:t>The Fall</a:t>
+            </a:r>
+          </a:p>
+          <a:p>
+            <a:r>
+              <a:rPr sz="1000" b="0">
+                <a:solidFill>
+                  <a:srgbClr val="707070"/>
                 </a:solidFill>
                 <a:latin typeface="Avenir Next LT Pro"/>
               </a:rPr>
-              <a:t>Estates targets the rate-immune cash buyer.</a:t>
+              <a:t>FY23–24</a:t>
             </a:r>
           </a:p>
         </p:txBody>
       </p:sp>
       <p:sp>
         <p:nvSpPr>
-          <p:cNvPr id="10" name="Rectangle 9"/>
-          <p:cNvSpPr/>
-          <p:nvPr/>
-        </p:nvSpPr>
-        <p:spPr>
-          <a:xfrm>
-            <a:off x="457200" y="4745736"/>
-            <a:ext cx="82296" cy="960120"/>
-          </a:xfrm>
-          <a:prstGeom prst="rect">
-            <a:avLst/>
-          </a:prstGeom>
-          <a:solidFill>
-            <a:srgbClr val="156082"/>
-          </a:solidFill>
-          <a:ln>
-            <a:noFill/>
-          </a:ln>
-        </p:spPr>
-        <p:style>
-          <a:lnRef idx="1">
-            <a:schemeClr val="accent1"/>
-          </a:lnRef>
-          <a:fillRef idx="3">
-            <a:schemeClr val="accent1"/>
-          </a:fillRef>
-          <a:effectRef idx="2">
-            <a:schemeClr val="accent1"/>
-          </a:effectRef>
-          <a:fontRef idx="minor">
-            <a:schemeClr val="lt1"/>
-          </a:fontRef>
-        </p:style>
-        <p:txBody>
-          <a:bodyPr rtlCol="0" anchor="ctr"/>
-          <a:lstStyle/>
-          <a:p>
-            <a:pPr algn="ctr"/>
-          </a:p>
-        </p:txBody>
-      </p:sp>
-      <p:sp>
-        <p:nvSpPr>
-          <p:cNvPr id="11" name="TextBox 10"/>
+          <p:cNvPr id="12" name="TextBox 11"/>
           <p:cNvSpPr txBox="1"/>
           <p:nvPr/>
         </p:nvSpPr>
         <p:spPr>
           <a:xfrm>
-            <a:off x="658368" y="4745736"/>
-            <a:ext cx="7955279" cy="960120"/>
+            <a:off x="2743200" y="3986783"/>
+            <a:ext cx="5943600" cy="1143000"/>
           </a:xfrm>
           <a:prstGeom prst="rect">
             <a:avLst/>
@@ -8916,29 +9539,54 @@
           <a:lstStyle/>
           <a:p>
             <a:r>
-              <a:rPr sz="1350" b="1">
-                <a:solidFill>
-                  <a:srgbClr val="000000"/>
-                </a:solidFill>
-                <a:latin typeface="Avenir Next LT Pro Demi"/>
-              </a:rPr>
-              <a:t>Global + platform  —  </a:t>
-            </a:r>
-            <a:r>
               <a:rPr sz="1250" b="0">
                 <a:solidFill>
                   <a:srgbClr val="000000"/>
                 </a:solidFill>
                 <a:latin typeface="Avenir Next LT Pro"/>
               </a:rPr>
-              <a:t>RH England, Guesthouses, hospitality &amp; F&amp;B.</a:t>
+              <a:t>Housing freezes; revenue falls to ~$3.03B. Debt now ~$2.4B, ~4× levered.</a:t>
             </a:r>
           </a:p>
         </p:txBody>
       </p:sp>
       <p:sp>
         <p:nvSpPr>
-          <p:cNvPr id="12" name="TextBox 11"/>
+          <p:cNvPr id="13" name="TextBox 12"/>
+          <p:cNvSpPr txBox="1"/>
+          <p:nvPr/>
+        </p:nvSpPr>
+        <p:spPr>
+          <a:xfrm>
+            <a:off x="457200" y="5806440"/>
+            <a:ext cx="8229600" cy="365760"/>
+          </a:xfrm>
+          <a:prstGeom prst="rect">
+            <a:avLst/>
+          </a:prstGeom>
+          <a:noFill/>
+        </p:spPr>
+        <p:txBody>
+          <a:bodyPr wrap="square">
+            <a:spAutoFit/>
+          </a:bodyPr>
+          <a:lstStyle/>
+          <a:p>
+            <a:r>
+              <a:rPr sz="1100" b="1">
+                <a:solidFill>
+                  <a:srgbClr val="000000"/>
+                </a:solidFill>
+                <a:latin typeface="Avenir Next LT Pro Demi"/>
+              </a:rPr>
+              <a:t>Partly self-inflicted: leveraged buybacks at the top, then the cycle turned.</a:t>
+            </a:r>
+          </a:p>
+        </p:txBody>
+      </p:sp>
+      <p:sp>
+        <p:nvSpPr>
+          <p:cNvPr id="14" name="TextBox 13"/>
           <p:cNvSpPr txBox="1"/>
           <p:nvPr/>
         </p:nvSpPr>
@@ -9017,7 +9665,7 @@
                 </a:solidFill>
                 <a:latin typeface="Avenir Next LT Pro Demi"/>
               </a:rPr>
-              <a:t>Is It Working?</a:t>
+              <a:t>The Recovery Plan</a:t>
             </a:r>
           </a:p>
         </p:txBody>
@@ -9073,14 +9721,14 @@
         </p:nvSpPr>
         <p:spPr>
           <a:xfrm>
-            <a:off x="457200" y="1234440"/>
-            <a:ext cx="3977639" cy="384048"/>
+            <a:off x="457200" y="1371600"/>
+            <a:ext cx="82296" cy="960120"/>
           </a:xfrm>
           <a:prstGeom prst="rect">
             <a:avLst/>
           </a:prstGeom>
           <a:solidFill>
-            <a:srgbClr val="196B24"/>
+            <a:srgbClr val="156082"/>
           </a:solidFill>
           <a:ln>
             <a:noFill/>
@@ -9101,38 +9749,72 @@
           </a:fontRef>
         </p:style>
         <p:txBody>
-          <a:bodyPr rtlCol="0" anchor="ctr" lIns="137160"/>
+          <a:bodyPr rtlCol="0" anchor="ctr"/>
           <a:lstStyle/>
           <a:p>
             <a:pPr algn="ctr"/>
-            <a:r>
-              <a:rPr sz="1250" b="1">
-                <a:solidFill>
-                  <a:srgbClr val="FFFFFF"/>
-                </a:solidFill>
-                <a:latin typeface="Avenir Next LT Pro Demi"/>
-              </a:rPr>
-              <a:t>WORKING</a:t>
-            </a:r>
           </a:p>
         </p:txBody>
       </p:sp>
       <p:sp>
         <p:nvSpPr>
-          <p:cNvPr id="5" name="Rectangle 4"/>
+          <p:cNvPr id="5" name="TextBox 4"/>
+          <p:cNvSpPr txBox="1"/>
+          <p:nvPr/>
+        </p:nvSpPr>
+        <p:spPr>
+          <a:xfrm>
+            <a:off x="658368" y="1371600"/>
+            <a:ext cx="7955279" cy="960120"/>
+          </a:xfrm>
+          <a:prstGeom prst="rect">
+            <a:avLst/>
+          </a:prstGeom>
+          <a:noFill/>
+        </p:spPr>
+        <p:txBody>
+          <a:bodyPr wrap="square" anchor="ctr">
+            <a:spAutoFit/>
+          </a:bodyPr>
+          <a:lstStyle/>
+          <a:p>
+            <a:r>
+              <a:rPr sz="1350" b="1">
+                <a:solidFill>
+                  <a:srgbClr val="000000"/>
+                </a:solidFill>
+                <a:latin typeface="Avenir Next LT Pro Demi"/>
+              </a:rPr>
+              <a:t>Product transformation  —  </a:t>
+            </a:r>
+            <a:r>
+              <a:rPr sz="1250" b="0">
+                <a:solidFill>
+                  <a:srgbClr val="000000"/>
+                </a:solidFill>
+                <a:latin typeface="Avenir Next LT Pro"/>
+              </a:rPr>
+              <a:t>New collections and refreshed Sourcebooks.</a:t>
+            </a:r>
+          </a:p>
+        </p:txBody>
+      </p:sp>
+      <p:sp>
+        <p:nvSpPr>
+          <p:cNvPr id="6" name="Rectangle 5"/>
           <p:cNvSpPr/>
           <p:nvPr/>
         </p:nvSpPr>
         <p:spPr>
           <a:xfrm>
-            <a:off x="4709160" y="1234440"/>
-            <a:ext cx="3977639" cy="384048"/>
+            <a:off x="457200" y="2496312"/>
+            <a:ext cx="82296" cy="960120"/>
           </a:xfrm>
           <a:prstGeom prst="rect">
             <a:avLst/>
           </a:prstGeom>
           <a:solidFill>
-            <a:srgbClr val="B03030"/>
+            <a:srgbClr val="196B24"/>
           </a:solidFill>
           <a:ln>
             <a:noFill/>
@@ -9153,62 +9835,10 @@
           </a:fontRef>
         </p:style>
         <p:txBody>
-          <a:bodyPr rtlCol="0" anchor="ctr" lIns="137160"/>
+          <a:bodyPr rtlCol="0" anchor="ctr"/>
           <a:lstStyle/>
           <a:p>
             <a:pPr algn="ctr"/>
-            <a:r>
-              <a:rPr sz="1250" b="1">
-                <a:solidFill>
-                  <a:srgbClr val="FFFFFF"/>
-                </a:solidFill>
-                <a:latin typeface="Avenir Next LT Pro Demi"/>
-              </a:rPr>
-              <a:t>WATCH</a:t>
-            </a:r>
-          </a:p>
-        </p:txBody>
-      </p:sp>
-      <p:sp>
-        <p:nvSpPr>
-          <p:cNvPr id="6" name="TextBox 5"/>
-          <p:cNvSpPr txBox="1"/>
-          <p:nvPr/>
-        </p:nvSpPr>
-        <p:spPr>
-          <a:xfrm>
-            <a:off x="457200" y="1828800"/>
-            <a:ext cx="3977639" cy="777240"/>
-          </a:xfrm>
-          <a:prstGeom prst="rect">
-            <a:avLst/>
-          </a:prstGeom>
-          <a:noFill/>
-        </p:spPr>
-        <p:txBody>
-          <a:bodyPr wrap="square">
-            <a:spAutoFit/>
-          </a:bodyPr>
-          <a:lstStyle/>
-          <a:p>
-            <a:r>
-              <a:rPr sz="1200" b="1">
-                <a:solidFill>
-                  <a:srgbClr val="196B24"/>
-                </a:solidFill>
-                <a:latin typeface="Avenir Next LT Pro Demi"/>
-              </a:rPr>
-              <a:t>✓  </a:t>
-            </a:r>
-            <a:r>
-              <a:rPr sz="1150" b="0">
-                <a:solidFill>
-                  <a:srgbClr val="000000"/>
-                </a:solidFill>
-                <a:latin typeface="Avenir Next LT Pro"/>
-              </a:rPr>
-              <a:t>FCF inflected to +$252M (from −$214M)</a:t>
-            </a:r>
           </a:p>
         </p:txBody>
       </p:sp>
@@ -9220,8 +9850,8 @@
         </p:nvSpPr>
         <p:spPr>
           <a:xfrm>
-            <a:off x="457200" y="2651760"/>
-            <a:ext cx="3977639" cy="777240"/>
+            <a:off x="658368" y="2496312"/>
+            <a:ext cx="7955279" cy="960120"/>
           </a:xfrm>
           <a:prstGeom prst="rect">
             <a:avLst/>
@@ -9229,72 +9859,72 @@
           <a:noFill/>
         </p:spPr>
         <p:txBody>
-          <a:bodyPr wrap="square">
+          <a:bodyPr wrap="square" anchor="ctr">
             <a:spAutoFit/>
           </a:bodyPr>
           <a:lstStyle/>
           <a:p>
             <a:r>
-              <a:rPr sz="1200" b="1">
-                <a:solidFill>
-                  <a:srgbClr val="196B24"/>
+              <a:rPr sz="1350" b="1">
+                <a:solidFill>
+                  <a:srgbClr val="000000"/>
                 </a:solidFill>
                 <a:latin typeface="Avenir Next LT Pro Demi"/>
               </a:rPr>
-              <a:t>✓  </a:t>
-            </a:r>
-            <a:r>
-              <a:rPr sz="1150" b="0">
+              <a:t>Gallery expansion  —  </a:t>
+            </a:r>
+            <a:r>
+              <a:rPr sz="1250" b="0">
                 <a:solidFill>
                   <a:srgbClr val="000000"/>
                 </a:solidFill>
                 <a:latin typeface="Avenir Next LT Pro"/>
               </a:rPr>
-              <a:t>Inventory normalized $1.02B → $819M</a:t>
+              <a:t>Every major U.S./Canada market — RH's ~$5–6B opportunity.</a:t>
             </a:r>
           </a:p>
         </p:txBody>
       </p:sp>
       <p:sp>
         <p:nvSpPr>
-          <p:cNvPr id="8" name="TextBox 7"/>
-          <p:cNvSpPr txBox="1"/>
+          <p:cNvPr id="8" name="Rectangle 7"/>
+          <p:cNvSpPr/>
           <p:nvPr/>
         </p:nvSpPr>
         <p:spPr>
           <a:xfrm>
-            <a:off x="457200" y="3474720"/>
-            <a:ext cx="3977639" cy="777240"/>
+            <a:off x="457200" y="3621024"/>
+            <a:ext cx="82296" cy="960120"/>
           </a:xfrm>
           <a:prstGeom prst="rect">
             <a:avLst/>
           </a:prstGeom>
-          <a:noFill/>
-        </p:spPr>
+          <a:solidFill>
+            <a:srgbClr val="E97132"/>
+          </a:solidFill>
+          <a:ln>
+            <a:noFill/>
+          </a:ln>
+        </p:spPr>
+        <p:style>
+          <a:lnRef idx="1">
+            <a:schemeClr val="accent1"/>
+          </a:lnRef>
+          <a:fillRef idx="3">
+            <a:schemeClr val="accent1"/>
+          </a:fillRef>
+          <a:effectRef idx="2">
+            <a:schemeClr val="accent1"/>
+          </a:effectRef>
+          <a:fontRef idx="minor">
+            <a:schemeClr val="lt1"/>
+          </a:fontRef>
+        </p:style>
         <p:txBody>
-          <a:bodyPr wrap="square">
-            <a:spAutoFit/>
-          </a:bodyPr>
+          <a:bodyPr rtlCol="0" anchor="ctr"/>
           <a:lstStyle/>
           <a:p>
-            <a:r>
-              <a:rPr sz="1200" b="1">
-                <a:solidFill>
-                  <a:srgbClr val="196B24"/>
-                </a:solidFill>
-                <a:latin typeface="Avenir Next LT Pro Demi"/>
-              </a:rPr>
-              <a:t>✓  </a:t>
-            </a:r>
-            <a:r>
-              <a:rPr sz="1150" b="0">
-                <a:solidFill>
-                  <a:srgbClr val="000000"/>
-                </a:solidFill>
-                <a:latin typeface="Avenir Next LT Pro"/>
-              </a:rPr>
-              <a:t>Revenue re-accelerated +8.1% in FY25</a:t>
-            </a:r>
+            <a:pPr algn="ctr"/>
           </a:p>
         </p:txBody>
       </p:sp>
@@ -9306,8 +9936,8 @@
         </p:nvSpPr>
         <p:spPr>
           <a:xfrm>
-            <a:off x="4709160" y="1828800"/>
-            <a:ext cx="3977639" cy="777240"/>
+            <a:off x="658368" y="3621024"/>
+            <a:ext cx="7955279" cy="960120"/>
           </a:xfrm>
           <a:prstGeom prst="rect">
             <a:avLst/>
@@ -9315,72 +9945,72 @@
           <a:noFill/>
         </p:spPr>
         <p:txBody>
-          <a:bodyPr wrap="square">
+          <a:bodyPr wrap="square" anchor="ctr">
             <a:spAutoFit/>
           </a:bodyPr>
           <a:lstStyle/>
           <a:p>
             <a:r>
-              <a:rPr sz="1200" b="1">
-                <a:solidFill>
-                  <a:srgbClr val="B03030"/>
+              <a:rPr sz="1350" b="1">
+                <a:solidFill>
+                  <a:srgbClr val="000000"/>
                 </a:solidFill>
                 <a:latin typeface="Avenir Next LT Pro Demi"/>
               </a:rPr>
-              <a:t>!  </a:t>
-            </a:r>
-            <a:r>
-              <a:rPr sz="1150" b="0">
+              <a:t>Move upmarket  —  </a:t>
+            </a:r>
+            <a:r>
+              <a:rPr sz="1250" b="0">
                 <a:solidFill>
                   <a:srgbClr val="000000"/>
                 </a:solidFill>
                 <a:latin typeface="Avenir Next LT Pro"/>
               </a:rPr>
-              <a:t>Q1 FY26: revenue −1.7%, net loss −$14M</a:t>
+              <a:t>Estates targets the rate-immune cash buyer.</a:t>
             </a:r>
           </a:p>
         </p:txBody>
       </p:sp>
       <p:sp>
         <p:nvSpPr>
-          <p:cNvPr id="10" name="TextBox 9"/>
-          <p:cNvSpPr txBox="1"/>
+          <p:cNvPr id="10" name="Rectangle 9"/>
+          <p:cNvSpPr/>
           <p:nvPr/>
         </p:nvSpPr>
         <p:spPr>
           <a:xfrm>
-            <a:off x="4709160" y="2651760"/>
-            <a:ext cx="3977639" cy="777240"/>
+            <a:off x="457200" y="4745736"/>
+            <a:ext cx="82296" cy="960120"/>
           </a:xfrm>
           <a:prstGeom prst="rect">
             <a:avLst/>
           </a:prstGeom>
-          <a:noFill/>
-        </p:spPr>
+          <a:solidFill>
+            <a:srgbClr val="156082"/>
+          </a:solidFill>
+          <a:ln>
+            <a:noFill/>
+          </a:ln>
+        </p:spPr>
+        <p:style>
+          <a:lnRef idx="1">
+            <a:schemeClr val="accent1"/>
+          </a:lnRef>
+          <a:fillRef idx="3">
+            <a:schemeClr val="accent1"/>
+          </a:fillRef>
+          <a:effectRef idx="2">
+            <a:schemeClr val="accent1"/>
+          </a:effectRef>
+          <a:fontRef idx="minor">
+            <a:schemeClr val="lt1"/>
+          </a:fontRef>
+        </p:style>
         <p:txBody>
-          <a:bodyPr wrap="square">
-            <a:spAutoFit/>
-          </a:bodyPr>
+          <a:bodyPr rtlCol="0" anchor="ctr"/>
           <a:lstStyle/>
           <a:p>
-            <a:r>
-              <a:rPr sz="1200" b="1">
-                <a:solidFill>
-                  <a:srgbClr val="B03030"/>
-                </a:solidFill>
-                <a:latin typeface="Avenir Next LT Pro Demi"/>
-              </a:rPr>
-              <a:t>!  </a:t>
-            </a:r>
-            <a:r>
-              <a:rPr sz="1150" b="0">
-                <a:solidFill>
-                  <a:srgbClr val="000000"/>
-                </a:solidFill>
-                <a:latin typeface="Avenir Next LT Pro"/>
-              </a:rPr>
-              <a:t>~$225M/yr interest keeps coverage thin</a:t>
-            </a:r>
+            <a:pPr algn="ctr"/>
           </a:p>
         </p:txBody>
       </p:sp>
@@ -9392,8 +10022,8 @@
         </p:nvSpPr>
         <p:spPr>
           <a:xfrm>
-            <a:off x="4709160" y="3474720"/>
-            <a:ext cx="3977639" cy="777240"/>
+            <a:off x="658368" y="4745736"/>
+            <a:ext cx="7955279" cy="960120"/>
           </a:xfrm>
           <a:prstGeom prst="rect">
             <a:avLst/>
@@ -9401,28 +10031,28 @@
           <a:noFill/>
         </p:spPr>
         <p:txBody>
-          <a:bodyPr wrap="square">
+          <a:bodyPr wrap="square" anchor="ctr">
             <a:spAutoFit/>
           </a:bodyPr>
           <a:lstStyle/>
           <a:p>
             <a:r>
-              <a:rPr sz="1200" b="1">
-                <a:solidFill>
-                  <a:srgbClr val="B03030"/>
+              <a:rPr sz="1350" b="1">
+                <a:solidFill>
+                  <a:srgbClr val="000000"/>
                 </a:solidFill>
                 <a:latin typeface="Avenir Next LT Pro Demi"/>
               </a:rPr>
-              <a:t>!  </a:t>
-            </a:r>
-            <a:r>
-              <a:rPr sz="1150" b="0">
+              <a:t>Global + platform  —  </a:t>
+            </a:r>
+            <a:r>
+              <a:rPr sz="1250" b="0">
                 <a:solidFill>
                   <a:srgbClr val="000000"/>
                 </a:solidFill>
                 <a:latin typeface="Avenir Next LT Pro"/>
               </a:rPr>
-              <a:t>Guidance is back-half loaded</a:t>
+              <a:t>RH England, Guesthouses, hospitality &amp; F&amp;B.</a:t>
             </a:r>
           </a:p>
         </p:txBody>
@@ -9435,40 +10065,6 @@
         </p:nvSpPr>
         <p:spPr>
           <a:xfrm>
-            <a:off x="457200" y="4663440"/>
-            <a:ext cx="8229600" cy="365760"/>
-          </a:xfrm>
-          <a:prstGeom prst="rect">
-            <a:avLst/>
-          </a:prstGeom>
-          <a:noFill/>
-        </p:spPr>
-        <p:txBody>
-          <a:bodyPr wrap="square">
-            <a:spAutoFit/>
-          </a:bodyPr>
-          <a:lstStyle/>
-          <a:p>
-            <a:r>
-              <a:rPr sz="1150" b="1">
-                <a:solidFill>
-                  <a:srgbClr val="000000"/>
-                </a:solidFill>
-                <a:latin typeface="Avenir Next LT Pro Demi"/>
-              </a:rPr>
-              <a:t>Verdict: real but early — the next two quarters are the tell.</a:t>
-            </a:r>
-          </a:p>
-        </p:txBody>
-      </p:sp>
-      <p:sp>
-        <p:nvSpPr>
-          <p:cNvPr id="13" name="TextBox 12"/>
-          <p:cNvSpPr txBox="1"/>
-          <p:nvPr/>
-        </p:nvSpPr>
-        <p:spPr>
-          <a:xfrm>
             <a:off x="457200" y="6355080"/>
             <a:ext cx="8229600" cy="365760"/>
           </a:xfrm>
@@ -9490,7 +10086,7 @@
                 </a:solidFill>
                 <a:latin typeface="Avenir Next LT Pro"/>
               </a:rPr>
-              <a:t>Source: RH FY2025 10-K; Q1 FY2026 10-Q</a:t>
+              <a:t>Source: RH FY2025 Form 10-K</a:t>
             </a:r>
           </a:p>
         </p:txBody>
@@ -9542,7 +10138,7 @@
                 </a:solidFill>
                 <a:latin typeface="Avenir Next LT Pro Demi"/>
               </a:rPr>
-              <a:t>The Operator — Gary Friedman</a:t>
+              <a:t>Is It Working?</a:t>
             </a:r>
           </a:p>
         </p:txBody>
@@ -9598,14 +10194,14 @@
         </p:nvSpPr>
         <p:spPr>
           <a:xfrm>
-            <a:off x="457200" y="1371600"/>
-            <a:ext cx="82296" cy="1051560"/>
+            <a:off x="457200" y="1234440"/>
+            <a:ext cx="3977639" cy="384048"/>
           </a:xfrm>
           <a:prstGeom prst="rect">
             <a:avLst/>
           </a:prstGeom>
           <a:solidFill>
-            <a:srgbClr val="156082"/>
+            <a:srgbClr val="196B24"/>
           </a:solidFill>
           <a:ln>
             <a:noFill/>
@@ -9626,97 +10222,38 @@
           </a:fontRef>
         </p:style>
         <p:txBody>
-          <a:bodyPr rtlCol="0" anchor="ctr"/>
+          <a:bodyPr rtlCol="0" anchor="ctr" lIns="137160"/>
           <a:lstStyle/>
           <a:p>
             <a:pPr algn="ctr"/>
+            <a:r>
+              <a:rPr sz="1250" b="1">
+                <a:solidFill>
+                  <a:srgbClr val="FFFFFF"/>
+                </a:solidFill>
+                <a:latin typeface="Avenir Next LT Pro Demi"/>
+              </a:rPr>
+              <a:t>WORKING</a:t>
+            </a:r>
           </a:p>
         </p:txBody>
       </p:sp>
       <p:sp>
         <p:nvSpPr>
-          <p:cNvPr id="5" name="TextBox 4"/>
-          <p:cNvSpPr txBox="1"/>
-          <p:nvPr/>
-        </p:nvSpPr>
-        <p:spPr>
-          <a:xfrm>
-            <a:off x="658368" y="1371600"/>
-            <a:ext cx="1965960" cy="1051560"/>
-          </a:xfrm>
-          <a:prstGeom prst="rect">
-            <a:avLst/>
-          </a:prstGeom>
-          <a:noFill/>
-        </p:spPr>
-        <p:txBody>
-          <a:bodyPr wrap="square" anchor="ctr">
-            <a:spAutoFit/>
-          </a:bodyPr>
-          <a:lstStyle/>
-          <a:p>
-            <a:r>
-              <a:rPr sz="1250" b="1">
-                <a:solidFill>
-                  <a:srgbClr val="000000"/>
-                </a:solidFill>
-                <a:latin typeface="Avenir Next LT Pro Demi"/>
-              </a:rPr>
-              <a:t>Role</a:t>
-            </a:r>
-          </a:p>
-        </p:txBody>
-      </p:sp>
-      <p:sp>
-        <p:nvSpPr>
-          <p:cNvPr id="6" name="TextBox 5"/>
-          <p:cNvSpPr txBox="1"/>
-          <p:nvPr/>
-        </p:nvSpPr>
-        <p:spPr>
-          <a:xfrm>
-            <a:off x="2697480" y="1371600"/>
-            <a:ext cx="5989320" cy="1051560"/>
-          </a:xfrm>
-          <a:prstGeom prst="rect">
-            <a:avLst/>
-          </a:prstGeom>
-          <a:noFill/>
-        </p:spPr>
-        <p:txBody>
-          <a:bodyPr wrap="square" anchor="ctr">
-            <a:spAutoFit/>
-          </a:bodyPr>
-          <a:lstStyle/>
-          <a:p>
-            <a:r>
-              <a:rPr sz="1200" b="0">
-                <a:solidFill>
-                  <a:srgbClr val="000000"/>
-                </a:solidFill>
-                <a:latin typeface="Avenir Next LT Pro"/>
-              </a:rPr>
-              <a:t>Chairman &amp; CEO and the brand's creative force (10-K key-man).</a:t>
-            </a:r>
-          </a:p>
-        </p:txBody>
-      </p:sp>
-      <p:sp>
-        <p:nvSpPr>
-          <p:cNvPr id="7" name="Rectangle 6"/>
+          <p:cNvPr id="5" name="Rectangle 4"/>
           <p:cNvSpPr/>
           <p:nvPr/>
         </p:nvSpPr>
         <p:spPr>
           <a:xfrm>
-            <a:off x="457200" y="2514600"/>
-            <a:ext cx="82296" cy="1051560"/>
+            <a:off x="4709160" y="1234440"/>
+            <a:ext cx="3977639" cy="384048"/>
           </a:xfrm>
           <a:prstGeom prst="rect">
             <a:avLst/>
           </a:prstGeom>
           <a:solidFill>
-            <a:srgbClr val="196B24"/>
+            <a:srgbClr val="B03030"/>
           </a:solidFill>
           <a:ln>
             <a:noFill/>
@@ -9737,10 +10274,105 @@
           </a:fontRef>
         </p:style>
         <p:txBody>
-          <a:bodyPr rtlCol="0" anchor="ctr"/>
+          <a:bodyPr rtlCol="0" anchor="ctr" lIns="137160"/>
           <a:lstStyle/>
           <a:p>
             <a:pPr algn="ctr"/>
+            <a:r>
+              <a:rPr sz="1250" b="1">
+                <a:solidFill>
+                  <a:srgbClr val="FFFFFF"/>
+                </a:solidFill>
+                <a:latin typeface="Avenir Next LT Pro Demi"/>
+              </a:rPr>
+              <a:t>WATCH</a:t>
+            </a:r>
+          </a:p>
+        </p:txBody>
+      </p:sp>
+      <p:sp>
+        <p:nvSpPr>
+          <p:cNvPr id="6" name="TextBox 5"/>
+          <p:cNvSpPr txBox="1"/>
+          <p:nvPr/>
+        </p:nvSpPr>
+        <p:spPr>
+          <a:xfrm>
+            <a:off x="457200" y="1828800"/>
+            <a:ext cx="3977639" cy="777240"/>
+          </a:xfrm>
+          <a:prstGeom prst="rect">
+            <a:avLst/>
+          </a:prstGeom>
+          <a:noFill/>
+        </p:spPr>
+        <p:txBody>
+          <a:bodyPr wrap="square">
+            <a:spAutoFit/>
+          </a:bodyPr>
+          <a:lstStyle/>
+          <a:p>
+            <a:r>
+              <a:rPr sz="1200" b="1">
+                <a:solidFill>
+                  <a:srgbClr val="196B24"/>
+                </a:solidFill>
+                <a:latin typeface="Avenir Next LT Pro Demi"/>
+              </a:rPr>
+              <a:t>✓  </a:t>
+            </a:r>
+            <a:r>
+              <a:rPr sz="1150" b="0">
+                <a:solidFill>
+                  <a:srgbClr val="000000"/>
+                </a:solidFill>
+                <a:latin typeface="Avenir Next LT Pro"/>
+              </a:rPr>
+              <a:t>FCF inflected to +$252M (from −$214M)</a:t>
+            </a:r>
+          </a:p>
+        </p:txBody>
+      </p:sp>
+      <p:sp>
+        <p:nvSpPr>
+          <p:cNvPr id="7" name="TextBox 6"/>
+          <p:cNvSpPr txBox="1"/>
+          <p:nvPr/>
+        </p:nvSpPr>
+        <p:spPr>
+          <a:xfrm>
+            <a:off x="457200" y="2651760"/>
+            <a:ext cx="3977639" cy="777240"/>
+          </a:xfrm>
+          <a:prstGeom prst="rect">
+            <a:avLst/>
+          </a:prstGeom>
+          <a:noFill/>
+        </p:spPr>
+        <p:txBody>
+          <a:bodyPr wrap="square">
+            <a:spAutoFit/>
+          </a:bodyPr>
+          <a:lstStyle/>
+          <a:p>
+            <a:r>
+              <a:rPr sz="1200" b="1">
+                <a:solidFill>
+                  <a:srgbClr val="196B24"/>
+                </a:solidFill>
+                <a:latin typeface="Avenir Next LT Pro Demi"/>
+              </a:rPr>
+              <a:t>✓  </a:t>
+            </a:r>
+            <a:r>
+              <a:rPr sz="1150" b="0">
+                <a:solidFill>
+                  <a:srgbClr val="000000"/>
+                </a:solidFill>
+                <a:latin typeface="Avenir Next LT Pro"/>
+              </a:rPr>
+              <a:t>Inventory normalized $1.02B → $819M</a:t>
+            </a:r>
           </a:p>
         </p:txBody>
       </p:sp>
@@ -9752,8 +10384,8 @@
         </p:nvSpPr>
         <p:spPr>
           <a:xfrm>
-            <a:off x="658368" y="2514600"/>
-            <a:ext cx="1965960" cy="1051560"/>
+            <a:off x="457200" y="3474720"/>
+            <a:ext cx="3977639" cy="777240"/>
           </a:xfrm>
           <a:prstGeom prst="rect">
             <a:avLst/>
@@ -9761,19 +10393,28 @@
           <a:noFill/>
         </p:spPr>
         <p:txBody>
-          <a:bodyPr wrap="square" anchor="ctr">
+          <a:bodyPr wrap="square">
             <a:spAutoFit/>
           </a:bodyPr>
           <a:lstStyle/>
           <a:p>
             <a:r>
-              <a:rPr sz="1250" b="1">
-                <a:solidFill>
-                  <a:srgbClr val="000000"/>
+              <a:rPr sz="1200" b="1">
+                <a:solidFill>
+                  <a:srgbClr val="196B24"/>
                 </a:solidFill>
                 <a:latin typeface="Avenir Next LT Pro Demi"/>
               </a:rPr>
-              <a:t>Track record</a:t>
+              <a:t>✓  </a:t>
+            </a:r>
+            <a:r>
+              <a:rPr sz="1150" b="0">
+                <a:solidFill>
+                  <a:srgbClr val="000000"/>
+                </a:solidFill>
+                <a:latin typeface="Avenir Next LT Pro"/>
+              </a:rPr>
+              <a:t>Revenue re-accelerated +8.1% in FY25</a:t>
             </a:r>
           </a:p>
         </p:txBody>
@@ -9786,8 +10427,8 @@
         </p:nvSpPr>
         <p:spPr>
           <a:xfrm>
-            <a:off x="2697480" y="2514600"/>
-            <a:ext cx="5989320" cy="1051560"/>
+            <a:off x="4709160" y="1828800"/>
+            <a:ext cx="3977639" cy="777240"/>
           </a:xfrm>
           <a:prstGeom prst="rect">
             <a:avLst/>
@@ -9795,63 +10436,72 @@
           <a:noFill/>
         </p:spPr>
         <p:txBody>
-          <a:bodyPr wrap="square" anchor="ctr">
+          <a:bodyPr wrap="square">
             <a:spAutoFit/>
           </a:bodyPr>
           <a:lstStyle/>
           <a:p>
             <a:r>
-              <a:rPr sz="1200" b="0">
+              <a:rPr sz="1200" b="1">
+                <a:solidFill>
+                  <a:srgbClr val="B03030"/>
+                </a:solidFill>
+                <a:latin typeface="Avenir Next LT Pro Demi"/>
+              </a:rPr>
+              <a:t>!  </a:t>
+            </a:r>
+            <a:r>
+              <a:rPr sz="1150" b="0">
                 <a:solidFill>
                   <a:srgbClr val="000000"/>
                 </a:solidFill>
                 <a:latin typeface="Avenir Next LT Pro"/>
               </a:rPr>
-              <a:t>Grew Pottery Barn $50M → $1B+; joined RH in 2001 near bankruptcy.</a:t>
+              <a:t>Q1 FY26: revenue −1.7%, net loss −$14M</a:t>
             </a:r>
           </a:p>
         </p:txBody>
       </p:sp>
       <p:sp>
         <p:nvSpPr>
-          <p:cNvPr id="10" name="Rectangle 9"/>
-          <p:cNvSpPr/>
+          <p:cNvPr id="10" name="TextBox 9"/>
+          <p:cNvSpPr txBox="1"/>
           <p:nvPr/>
         </p:nvSpPr>
         <p:spPr>
           <a:xfrm>
-            <a:off x="457200" y="3657600"/>
-            <a:ext cx="82296" cy="1051560"/>
+            <a:off x="4709160" y="2651760"/>
+            <a:ext cx="3977639" cy="777240"/>
           </a:xfrm>
           <a:prstGeom prst="rect">
             <a:avLst/>
           </a:prstGeom>
-          <a:solidFill>
-            <a:srgbClr val="E97132"/>
-          </a:solidFill>
-          <a:ln>
-            <a:noFill/>
-          </a:ln>
-        </p:spPr>
-        <p:style>
-          <a:lnRef idx="1">
-            <a:schemeClr val="accent1"/>
-          </a:lnRef>
-          <a:fillRef idx="3">
-            <a:schemeClr val="accent1"/>
-          </a:fillRef>
-          <a:effectRef idx="2">
-            <a:schemeClr val="accent1"/>
-          </a:effectRef>
-          <a:fontRef idx="minor">
-            <a:schemeClr val="lt1"/>
-          </a:fontRef>
-        </p:style>
+          <a:noFill/>
+        </p:spPr>
         <p:txBody>
-          <a:bodyPr rtlCol="0" anchor="ctr"/>
+          <a:bodyPr wrap="square">
+            <a:spAutoFit/>
+          </a:bodyPr>
           <a:lstStyle/>
           <a:p>
-            <a:pPr algn="ctr"/>
+            <a:r>
+              <a:rPr sz="1200" b="1">
+                <a:solidFill>
+                  <a:srgbClr val="B03030"/>
+                </a:solidFill>
+                <a:latin typeface="Avenir Next LT Pro Demi"/>
+              </a:rPr>
+              <a:t>!  </a:t>
+            </a:r>
+            <a:r>
+              <a:rPr sz="1150" b="0">
+                <a:solidFill>
+                  <a:srgbClr val="000000"/>
+                </a:solidFill>
+                <a:latin typeface="Avenir Next LT Pro"/>
+              </a:rPr>
+              <a:t>~$225M/yr interest keeps coverage thin</a:t>
+            </a:r>
           </a:p>
         </p:txBody>
       </p:sp>
@@ -9863,8 +10513,8 @@
         </p:nvSpPr>
         <p:spPr>
           <a:xfrm>
-            <a:off x="658368" y="3657600"/>
-            <a:ext cx="1965960" cy="1051560"/>
+            <a:off x="4709160" y="3474720"/>
+            <a:ext cx="3977639" cy="777240"/>
           </a:xfrm>
           <a:prstGeom prst="rect">
             <a:avLst/>
@@ -9872,19 +10522,28 @@
           <a:noFill/>
         </p:spPr>
         <p:txBody>
-          <a:bodyPr wrap="square" anchor="ctr">
+          <a:bodyPr wrap="square">
             <a:spAutoFit/>
           </a:bodyPr>
           <a:lstStyle/>
           <a:p>
             <a:r>
-              <a:rPr sz="1250" b="1">
-                <a:solidFill>
-                  <a:srgbClr val="000000"/>
+              <a:rPr sz="1200" b="1">
+                <a:solidFill>
+                  <a:srgbClr val="B03030"/>
                 </a:solidFill>
                 <a:latin typeface="Avenir Next LT Pro Demi"/>
               </a:rPr>
-              <a:t>Skin in the game</a:t>
+              <a:t>!  </a:t>
+            </a:r>
+            <a:r>
+              <a:rPr sz="1150" b="0">
+                <a:solidFill>
+                  <a:srgbClr val="000000"/>
+                </a:solidFill>
+                <a:latin typeface="Avenir Next LT Pro"/>
+              </a:rPr>
+              <a:t>Guidance is back-half loaded</a:t>
             </a:r>
           </a:p>
         </p:txBody>
@@ -9897,8 +10556,8 @@
         </p:nvSpPr>
         <p:spPr>
           <a:xfrm>
-            <a:off x="2697480" y="3657600"/>
-            <a:ext cx="5989320" cy="1051560"/>
+            <a:off x="457200" y="4663440"/>
+            <a:ext cx="8229600" cy="365760"/>
           </a:xfrm>
           <a:prstGeom prst="rect">
             <a:avLst/>
@@ -9906,137 +10565,26 @@
           <a:noFill/>
         </p:spPr>
         <p:txBody>
-          <a:bodyPr wrap="square" anchor="ctr">
+          <a:bodyPr wrap="square">
             <a:spAutoFit/>
           </a:bodyPr>
           <a:lstStyle/>
           <a:p>
             <a:r>
-              <a:rPr sz="1200" b="0">
+              <a:rPr sz="1150" b="1">
                 <a:solidFill>
                   <a:srgbClr val="000000"/>
                 </a:solidFill>
-                <a:latin typeface="Avenir Next LT Pro"/>
+                <a:latin typeface="Avenir Next LT Pro Demi"/>
               </a:rPr>
-              <a:t>Owns ~18% outright (~25% incl. options); bought ~$10M at ~$216 in June 2024.</a:t>
+              <a:t>Verdict: real but early — the next two quarters are the tell.</a:t>
             </a:r>
           </a:p>
         </p:txBody>
       </p:sp>
       <p:sp>
         <p:nvSpPr>
-          <p:cNvPr id="13" name="Rectangle 12"/>
-          <p:cNvSpPr/>
-          <p:nvPr/>
-        </p:nvSpPr>
-        <p:spPr>
-          <a:xfrm>
-            <a:off x="457200" y="4800600"/>
-            <a:ext cx="82296" cy="1051560"/>
-          </a:xfrm>
-          <a:prstGeom prst="rect">
-            <a:avLst/>
-          </a:prstGeom>
-          <a:solidFill>
-            <a:srgbClr val="B03030"/>
-          </a:solidFill>
-          <a:ln>
-            <a:noFill/>
-          </a:ln>
-        </p:spPr>
-        <p:style>
-          <a:lnRef idx="1">
-            <a:schemeClr val="accent1"/>
-          </a:lnRef>
-          <a:fillRef idx="3">
-            <a:schemeClr val="accent1"/>
-          </a:fillRef>
-          <a:effectRef idx="2">
-            <a:schemeClr val="accent1"/>
-          </a:effectRef>
-          <a:fontRef idx="minor">
-            <a:schemeClr val="lt1"/>
-          </a:fontRef>
-        </p:style>
-        <p:txBody>
-          <a:bodyPr rtlCol="0" anchor="ctr"/>
-          <a:lstStyle/>
-          <a:p>
-            <a:pPr algn="ctr"/>
-          </a:p>
-        </p:txBody>
-      </p:sp>
-      <p:sp>
-        <p:nvSpPr>
-          <p:cNvPr id="14" name="TextBox 13"/>
-          <p:cNvSpPr txBox="1"/>
-          <p:nvPr/>
-        </p:nvSpPr>
-        <p:spPr>
-          <a:xfrm>
-            <a:off x="658368" y="4800600"/>
-            <a:ext cx="1965960" cy="1051560"/>
-          </a:xfrm>
-          <a:prstGeom prst="rect">
-            <a:avLst/>
-          </a:prstGeom>
-          <a:noFill/>
-        </p:spPr>
-        <p:txBody>
-          <a:bodyPr wrap="square" anchor="ctr">
-            <a:spAutoFit/>
-          </a:bodyPr>
-          <a:lstStyle/>
-          <a:p>
-            <a:r>
-              <a:rPr sz="1250" b="1">
-                <a:solidFill>
-                  <a:srgbClr val="000000"/>
-                </a:solidFill>
-                <a:latin typeface="Avenir Next LT Pro Demi"/>
-              </a:rPr>
-              <a:t>The double edge</a:t>
-            </a:r>
-          </a:p>
-        </p:txBody>
-      </p:sp>
-      <p:sp>
-        <p:nvSpPr>
-          <p:cNvPr id="15" name="TextBox 14"/>
-          <p:cNvSpPr txBox="1"/>
-          <p:nvPr/>
-        </p:nvSpPr>
-        <p:spPr>
-          <a:xfrm>
-            <a:off x="2697480" y="4800600"/>
-            <a:ext cx="5989320" cy="1051560"/>
-          </a:xfrm>
-          <a:prstGeom prst="rect">
-            <a:avLst/>
-          </a:prstGeom>
-          <a:noFill/>
-        </p:spPr>
-        <p:txBody>
-          <a:bodyPr wrap="square" anchor="ctr">
-            <a:spAutoFit/>
-          </a:bodyPr>
-          <a:lstStyle/>
-          <a:p>
-            <a:r>
-              <a:rPr sz="1200" b="0">
-                <a:solidFill>
-                  <a:srgbClr val="000000"/>
-                </a:solidFill>
-                <a:latin typeface="Avenir Next LT Pro"/>
-              </a:rPr>
-              <a:t>Bold allocator — same conviction drove the buybacks and Estates.</a:t>
-            </a:r>
-          </a:p>
-        </p:txBody>
-      </p:sp>
-      <p:sp>
-        <p:nvSpPr>
-          <p:cNvPr id="16" name="TextBox 15"/>
+          <p:cNvPr id="13" name="TextBox 12"/>
           <p:cNvSpPr txBox="1"/>
           <p:nvPr/>
         </p:nvSpPr>
@@ -10063,7 +10611,7 @@
                 </a:solidFill>
                 <a:latin typeface="Avenir Next LT Pro"/>
               </a:rPr>
-              <a:t>Source: RH FY2025 10-K; RH IR &amp; SEC Form 4 (Jun 26, 2024); company bios</a:t>
+              <a:t>Source: RH FY2025 10-K; Q1 FY2026 10-Q</a:t>
             </a:r>
           </a:p>
         </p:txBody>
@@ -10109,13 +10657,13 @@
           <a:lstStyle/>
           <a:p>
             <a:r>
-              <a:rPr sz="2200">
+              <a:rPr sz="2200" b="0">
                 <a:solidFill>
                   <a:srgbClr val="000000"/>
                 </a:solidFill>
                 <a:latin typeface="Avenir Next LT Pro Demi"/>
               </a:rPr>
-              <a:t>Where the Street Values RH — vs. My Verdict</a:t>
+              <a:t>The Operator — Gary Friedman</a:t>
             </a:r>
           </a:p>
         </p:txBody>
@@ -10163,459 +10711,49 @@
           </a:p>
         </p:txBody>
       </p:sp>
-      <p:graphicFrame>
-        <p:nvGraphicFramePr>
-          <p:cNvPr id="4" name="Table 3"/>
-          <p:cNvGraphicFramePr>
-            <a:graphicFrameLocks noGrp="1"/>
-          </p:cNvGraphicFramePr>
+      <p:sp>
+        <p:nvSpPr>
+          <p:cNvPr id="4" name="Rectangle 3"/>
+          <p:cNvSpPr/>
           <p:nvPr/>
-        </p:nvGraphicFramePr>
-        <p:xfrm>
-          <a:off x="457200" y="1371600"/>
-          <a:ext cx="8229600" cy="2743200"/>
-        </p:xfrm>
-        <a:graphic>
-          <a:graphicData uri="http://schemas.openxmlformats.org/drawingml/2006/table">
-            <a:tbl>
-              <a:tblPr>
-                <a:tableStyleId>{5C22544A-7EE6-4342-B048-85BDC9FD1C3A}</a:tableStyleId>
-              </a:tblPr>
-              <a:tblGrid>
-                <a:gridCol w="3291840"/>
-                <a:gridCol w="2011680"/>
-                <a:gridCol w="2926080"/>
-              </a:tblGrid>
-              <a:tr h="457200">
-                <a:tc>
-                  <a:txBody>
-                    <a:bodyPr/>
-                    <a:lstStyle/>
-                    <a:p>
-                      <a:pPr algn="l"/>
-                      <a:r>
-                        <a:rPr sz="1100" b="1">
-                          <a:solidFill>
-                            <a:srgbClr val="FFFFFF"/>
-                          </a:solidFill>
-                          <a:latin typeface="Avenir Next LT Pro Demi"/>
-                        </a:rPr>
-                        <a:t>Benchmark</a:t>
-                      </a:r>
-                    </a:p>
-                  </a:txBody>
-                  <a:tcPr marL="91440" marT="27432" marB="27432" anchor="ctr">
-                    <a:solidFill>
-                      <a:srgbClr val="0E2841"/>
-                    </a:solidFill>
-                  </a:tcPr>
-                </a:tc>
-                <a:tc>
-                  <a:txBody>
-                    <a:bodyPr/>
-                    <a:lstStyle/>
-                    <a:p>
-                      <a:pPr algn="ctr"/>
-                      <a:r>
-                        <a:rPr sz="1100" b="1">
-                          <a:solidFill>
-                            <a:srgbClr val="FFFFFF"/>
-                          </a:solidFill>
-                          <a:latin typeface="Avenir Next LT Pro Demi"/>
-                        </a:rPr>
-                        <a:t>Value</a:t>
-                      </a:r>
-                    </a:p>
-                  </a:txBody>
-                  <a:tcPr marL="91440" marT="27432" marB="27432" anchor="ctr">
-                    <a:solidFill>
-                      <a:srgbClr val="0E2841"/>
-                    </a:solidFill>
-                  </a:tcPr>
-                </a:tc>
-                <a:tc>
-                  <a:txBody>
-                    <a:bodyPr/>
-                    <a:lstStyle/>
-                    <a:p>
-                      <a:pPr algn="l"/>
-                      <a:r>
-                        <a:rPr sz="1100" b="1">
-                          <a:solidFill>
-                            <a:srgbClr val="FFFFFF"/>
-                          </a:solidFill>
-                          <a:latin typeface="Avenir Next LT Pro Demi"/>
-                        </a:rPr>
-                        <a:t>Implied read</a:t>
-                      </a:r>
-                    </a:p>
-                  </a:txBody>
-                  <a:tcPr marL="91440" marT="27432" marB="27432" anchor="ctr">
-                    <a:solidFill>
-                      <a:srgbClr val="0E2841"/>
-                    </a:solidFill>
-                  </a:tcPr>
-                </a:tc>
-              </a:tr>
-              <a:tr h="457200">
-                <a:tc>
-                  <a:txBody>
-                    <a:bodyPr/>
-                    <a:lstStyle/>
-                    <a:p>
-                      <a:pPr algn="l"/>
-                      <a:r>
-                        <a:rPr sz="1100" b="1">
-                          <a:solidFill>
-                            <a:srgbClr val="000000"/>
-                          </a:solidFill>
-                          <a:latin typeface="Avenir Next LT Pro"/>
-                        </a:rPr>
-                        <a:t>Current price</a:t>
-                      </a:r>
-                    </a:p>
-                  </a:txBody>
-                  <a:tcPr marL="91440" marT="27432" marB="27432" anchor="ctr">
-                    <a:solidFill>
-                      <a:srgbClr val="FFFFFF"/>
-                    </a:solidFill>
-                  </a:tcPr>
-                </a:tc>
-                <a:tc>
-                  <a:txBody>
-                    <a:bodyPr/>
-                    <a:lstStyle/>
-                    <a:p>
-                      <a:pPr algn="ctr"/>
-                      <a:r>
-                        <a:rPr sz="1100" b="0">
-                          <a:solidFill>
-                            <a:srgbClr val="000000"/>
-                          </a:solidFill>
-                          <a:latin typeface="Avenir Next LT Pro"/>
-                        </a:rPr>
-                        <a:t>~$166</a:t>
-                      </a:r>
-                    </a:p>
-                  </a:txBody>
-                  <a:tcPr marL="91440" marT="27432" marB="27432" anchor="ctr">
-                    <a:solidFill>
-                      <a:srgbClr val="FFFFFF"/>
-                    </a:solidFill>
-                  </a:tcPr>
-                </a:tc>
-                <a:tc>
-                  <a:txBody>
-                    <a:bodyPr/>
-                    <a:lstStyle/>
-                    <a:p>
-                      <a:pPr algn="l"/>
-                      <a:r>
-                        <a:rPr sz="1100" b="0">
-                          <a:solidFill>
-                            <a:srgbClr val="000000"/>
-                          </a:solidFill>
-                          <a:latin typeface="Avenir Next LT Pro"/>
-                        </a:rPr>
-                        <a:t>—</a:t>
-                      </a:r>
-                    </a:p>
-                  </a:txBody>
-                  <a:tcPr marL="91440" marT="27432" marB="27432" anchor="ctr">
-                    <a:solidFill>
-                      <a:srgbClr val="FFFFFF"/>
-                    </a:solidFill>
-                  </a:tcPr>
-                </a:tc>
-              </a:tr>
-              <a:tr h="457200">
-                <a:tc>
-                  <a:txBody>
-                    <a:bodyPr/>
-                    <a:lstStyle/>
-                    <a:p>
-                      <a:pPr algn="l"/>
-                      <a:r>
-                        <a:rPr sz="1100" b="1">
-                          <a:solidFill>
-                            <a:srgbClr val="000000"/>
-                          </a:solidFill>
-                          <a:latin typeface="Avenir Next LT Pro"/>
-                        </a:rPr>
-                        <a:t>Sell-side price targets</a:t>
-                      </a:r>
-                    </a:p>
-                  </a:txBody>
-                  <a:tcPr marL="91440" marT="27432" marB="27432" anchor="ctr">
-                    <a:solidFill>
-                      <a:srgbClr val="F4F6F8"/>
-                    </a:solidFill>
-                  </a:tcPr>
-                </a:tc>
-                <a:tc>
-                  <a:txBody>
-                    <a:bodyPr/>
-                    <a:lstStyle/>
-                    <a:p>
-                      <a:pPr algn="ctr"/>
-                      <a:r>
-                        <a:rPr sz="1100" b="0">
-                          <a:solidFill>
-                            <a:srgbClr val="000000"/>
-                          </a:solidFill>
-                          <a:latin typeface="Avenir Next LT Pro"/>
-                        </a:rPr>
-                        <a:t>$130–175</a:t>
-                      </a:r>
-                    </a:p>
-                  </a:txBody>
-                  <a:tcPr marL="91440" marT="27432" marB="27432" anchor="ctr">
-                    <a:solidFill>
-                      <a:srgbClr val="F4F6F8"/>
-                    </a:solidFill>
-                  </a:tcPr>
-                </a:tc>
-                <a:tc>
-                  <a:txBody>
-                    <a:bodyPr/>
-                    <a:lstStyle/>
-                    <a:p>
-                      <a:pPr algn="l"/>
-                      <a:r>
-                        <a:rPr sz="1100" b="0">
-                          <a:solidFill>
-                            <a:srgbClr val="000000"/>
-                          </a:solidFill>
-                          <a:latin typeface="Avenir Next LT Pro"/>
-                        </a:rPr>
-                        <a:t>Limited upside; ~fairly valued</a:t>
-                      </a:r>
-                    </a:p>
-                  </a:txBody>
-                  <a:tcPr marL="91440" marT="27432" marB="27432" anchor="ctr">
-                    <a:solidFill>
-                      <a:srgbClr val="F4F6F8"/>
-                    </a:solidFill>
-                  </a:tcPr>
-                </a:tc>
-              </a:tr>
-              <a:tr h="457200">
-                <a:tc>
-                  <a:txBody>
-                    <a:bodyPr/>
-                    <a:lstStyle/>
-                    <a:p>
-                      <a:pPr algn="l"/>
-                      <a:r>
-                        <a:rPr sz="1100" b="1">
-                          <a:solidFill>
-                            <a:srgbClr val="000000"/>
-                          </a:solidFill>
-                          <a:latin typeface="Avenir Next LT Pro"/>
-                        </a:rPr>
-                        <a:t>Simply Wall St models</a:t>
-                      </a:r>
-                    </a:p>
-                  </a:txBody>
-                  <a:tcPr marL="91440" marT="27432" marB="27432" anchor="ctr">
-                    <a:solidFill>
-                      <a:srgbClr val="FFFFFF"/>
-                    </a:solidFill>
-                  </a:tcPr>
-                </a:tc>
-                <a:tc>
-                  <a:txBody>
-                    <a:bodyPr/>
-                    <a:lstStyle/>
-                    <a:p>
-                      <a:pPr algn="ctr"/>
-                      <a:r>
-                        <a:rPr sz="1100" b="0">
-                          <a:solidFill>
-                            <a:srgbClr val="000000"/>
-                          </a:solidFill>
-                          <a:latin typeface="Avenir Next LT Pro"/>
-                        </a:rPr>
-                        <a:t>~$165–264</a:t>
-                      </a:r>
-                    </a:p>
-                  </a:txBody>
-                  <a:tcPr marL="91440" marT="27432" marB="27432" anchor="ctr">
-                    <a:solidFill>
-                      <a:srgbClr val="FFFFFF"/>
-                    </a:solidFill>
-                  </a:tcPr>
-                </a:tc>
-                <a:tc>
-                  <a:txBody>
-                    <a:bodyPr/>
-                    <a:lstStyle/>
-                    <a:p>
-                      <a:pPr algn="l"/>
-                      <a:r>
-                        <a:rPr sz="1100" b="0">
-                          <a:solidFill>
-                            <a:srgbClr val="000000"/>
-                          </a:solidFill>
-                          <a:latin typeface="Avenir Next LT Pro"/>
-                        </a:rPr>
-                        <a:t>Fairly valued to bullish</a:t>
-                      </a:r>
-                    </a:p>
-                  </a:txBody>
-                  <a:tcPr marL="91440" marT="27432" marB="27432" anchor="ctr">
-                    <a:solidFill>
-                      <a:srgbClr val="FFFFFF"/>
-                    </a:solidFill>
-                  </a:tcPr>
-                </a:tc>
-              </a:tr>
-              <a:tr h="457200">
-                <a:tc>
-                  <a:txBody>
-                    <a:bodyPr/>
-                    <a:lstStyle/>
-                    <a:p>
-                      <a:pPr algn="l"/>
-                      <a:r>
-                        <a:rPr sz="1100" b="1">
-                          <a:solidFill>
-                            <a:srgbClr val="156082"/>
-                          </a:solidFill>
-                          <a:latin typeface="Avenir Next LT Pro Demi"/>
-                        </a:rPr>
-                        <a:t>My fair value — proven today</a:t>
-                      </a:r>
-                    </a:p>
-                  </a:txBody>
-                  <a:tcPr marL="91440" marT="27432" marB="27432" anchor="ctr">
-                    <a:solidFill>
-                      <a:srgbClr val="F4F6F8"/>
-                    </a:solidFill>
-                  </a:tcPr>
-                </a:tc>
-                <a:tc>
-                  <a:txBody>
-                    <a:bodyPr/>
-                    <a:lstStyle/>
-                    <a:p>
-                      <a:pPr algn="ctr"/>
-                      <a:r>
-                        <a:rPr sz="1100" b="1">
-                          <a:solidFill>
-                            <a:srgbClr val="156082"/>
-                          </a:solidFill>
-                          <a:latin typeface="Avenir Next LT Pro"/>
-                        </a:rPr>
-                        <a:t>~$165</a:t>
-                      </a:r>
-                    </a:p>
-                  </a:txBody>
-                  <a:tcPr marL="91440" marT="27432" marB="27432" anchor="ctr">
-                    <a:solidFill>
-                      <a:srgbClr val="F4F6F8"/>
-                    </a:solidFill>
-                  </a:tcPr>
-                </a:tc>
-                <a:tc>
-                  <a:txBody>
-                    <a:bodyPr/>
-                    <a:lstStyle/>
-                    <a:p>
-                      <a:pPr algn="l"/>
-                      <a:r>
-                        <a:rPr sz="1100" b="1">
-                          <a:solidFill>
-                            <a:srgbClr val="000000"/>
-                          </a:solidFill>
-                          <a:latin typeface="Avenir Next LT Pro"/>
-                        </a:rPr>
-                        <a:t>In line with Street → Hold</a:t>
-                      </a:r>
-                    </a:p>
-                  </a:txBody>
-                  <a:tcPr marL="91440" marT="27432" marB="27432" anchor="ctr">
-                    <a:solidFill>
-                      <a:srgbClr val="F4F6F8"/>
-                    </a:solidFill>
-                  </a:tcPr>
-                </a:tc>
-              </a:tr>
-              <a:tr h="457200">
-                <a:tc>
-                  <a:txBody>
-                    <a:bodyPr/>
-                    <a:lstStyle/>
-                    <a:p>
-                      <a:pPr algn="l"/>
-                      <a:r>
-                        <a:rPr sz="1100" b="1">
-                          <a:solidFill>
-                            <a:srgbClr val="156082"/>
-                          </a:solidFill>
-                          <a:latin typeface="Avenir Next LT Pro Demi"/>
-                        </a:rPr>
-                        <a:t>My upside case — if de-risked</a:t>
-                      </a:r>
-                    </a:p>
-                  </a:txBody>
-                  <a:tcPr marL="91440" marT="27432" marB="27432" anchor="ctr">
-                    <a:solidFill>
-                      <a:srgbClr val="FFFFFF"/>
-                    </a:solidFill>
-                  </a:tcPr>
-                </a:tc>
-                <a:tc>
-                  <a:txBody>
-                    <a:bodyPr/>
-                    <a:lstStyle/>
-                    <a:p>
-                      <a:pPr algn="ctr"/>
-                      <a:r>
-                        <a:rPr sz="1100" b="1">
-                          <a:solidFill>
-                            <a:srgbClr val="156082"/>
-                          </a:solidFill>
-                          <a:latin typeface="Avenir Next LT Pro"/>
-                        </a:rPr>
-                        <a:t>~$240 FV / ~$310 tgt</a:t>
-                      </a:r>
-                    </a:p>
-                  </a:txBody>
-                  <a:tcPr marL="91440" marT="27432" marB="27432" anchor="ctr">
-                    <a:solidFill>
-                      <a:srgbClr val="FFFFFF"/>
-                    </a:solidFill>
-                  </a:tcPr>
-                </a:tc>
-                <a:tc>
-                  <a:txBody>
-                    <a:bodyPr/>
-                    <a:lstStyle/>
-                    <a:p>
-                      <a:pPr algn="l"/>
-                      <a:r>
-                        <a:rPr sz="1100" b="1">
-                          <a:solidFill>
-                            <a:srgbClr val="000000"/>
-                          </a:solidFill>
-                          <a:latin typeface="Avenir Next LT Pro"/>
-                        </a:rPr>
-                        <a:t>The prize (~45–90%) if triggers hit</a:t>
-                      </a:r>
-                    </a:p>
-                  </a:txBody>
-                  <a:tcPr marL="91440" marT="27432" marB="27432" anchor="ctr">
-                    <a:solidFill>
-                      <a:srgbClr val="FFFFFF"/>
-                    </a:solidFill>
-                  </a:tcPr>
-                </a:tc>
-              </a:tr>
-            </a:tbl>
-          </a:graphicData>
-        </a:graphic>
-      </p:graphicFrame>
+        </p:nvSpPr>
+        <p:spPr>
+          <a:xfrm>
+            <a:off x="457200" y="1371600"/>
+            <a:ext cx="82296" cy="1051560"/>
+          </a:xfrm>
+          <a:prstGeom prst="rect">
+            <a:avLst/>
+          </a:prstGeom>
+          <a:solidFill>
+            <a:srgbClr val="156082"/>
+          </a:solidFill>
+          <a:ln>
+            <a:noFill/>
+          </a:ln>
+        </p:spPr>
+        <p:style>
+          <a:lnRef idx="1">
+            <a:schemeClr val="accent1"/>
+          </a:lnRef>
+          <a:fillRef idx="3">
+            <a:schemeClr val="accent1"/>
+          </a:fillRef>
+          <a:effectRef idx="2">
+            <a:schemeClr val="accent1"/>
+          </a:effectRef>
+          <a:fontRef idx="minor">
+            <a:schemeClr val="lt1"/>
+          </a:fontRef>
+        </p:style>
+        <p:txBody>
+          <a:bodyPr rtlCol="0" anchor="ctr"/>
+          <a:lstStyle/>
+          <a:p>
+            <a:pPr algn="ctr"/>
+          </a:p>
+        </p:txBody>
+      </p:sp>
       <p:sp>
         <p:nvSpPr>
           <p:cNvPr id="5" name="TextBox 4"/>
@@ -10624,8 +10762,8 @@
         </p:nvSpPr>
         <p:spPr>
           <a:xfrm>
-            <a:off x="457200" y="4572000"/>
-            <a:ext cx="8229600" cy="1005840"/>
+            <a:off x="658368" y="1371600"/>
+            <a:ext cx="1965960" cy="1051560"/>
           </a:xfrm>
           <a:prstGeom prst="rect">
             <a:avLst/>
@@ -10633,35 +10771,19 @@
           <a:noFill/>
         </p:spPr>
         <p:txBody>
-          <a:bodyPr wrap="square">
+          <a:bodyPr wrap="square" anchor="ctr">
             <a:spAutoFit/>
           </a:bodyPr>
           <a:lstStyle/>
           <a:p>
             <a:r>
-              <a:rPr sz="1200">
-                <a:solidFill>
-                  <a:srgbClr val="000000"/>
-                </a:solidFill>
-                <a:latin typeface="Avenir Next LT Pro"/>
-              </a:rPr>
-              <a:t>Takeaway: I agree with the Street on what's proven (~$165 ≈ the price). My differentiation isn't a higher "today" value — it's a defined view on the conditional upside (~$240–310) that the Street won't credit until Estates and margins prove out.</a:t>
-            </a:r>
-          </a:p>
-          <a:p>
-            <a:pPr>
-              <a:spcBef>
-                <a:spcPts val="800"/>
-              </a:spcBef>
-            </a:pPr>
-            <a:r>
-              <a:rPr sz="1200" b="1">
+              <a:rPr sz="1250" b="1">
                 <a:solidFill>
                   <a:srgbClr val="000000"/>
                 </a:solidFill>
                 <a:latin typeface="Avenir Next LT Pro Demi"/>
               </a:rPr>
-              <a:t>The Hold is the discipline: I won't pay for that upside on hope — I wait for the triggers, then buy even higher.</a:t>
+              <a:t>Role</a:t>
             </a:r>
           </a:p>
         </p:txBody>
@@ -10674,6 +10796,373 @@
         </p:nvSpPr>
         <p:spPr>
           <a:xfrm>
+            <a:off x="2697480" y="1371600"/>
+            <a:ext cx="5989320" cy="1051560"/>
+          </a:xfrm>
+          <a:prstGeom prst="rect">
+            <a:avLst/>
+          </a:prstGeom>
+          <a:noFill/>
+        </p:spPr>
+        <p:txBody>
+          <a:bodyPr wrap="square" anchor="ctr">
+            <a:spAutoFit/>
+          </a:bodyPr>
+          <a:lstStyle/>
+          <a:p>
+            <a:r>
+              <a:rPr sz="1200" b="0">
+                <a:solidFill>
+                  <a:srgbClr val="000000"/>
+                </a:solidFill>
+                <a:latin typeface="Avenir Next LT Pro"/>
+              </a:rPr>
+              <a:t>Chairman &amp; CEO and the brand's creative force (10-K key-man).</a:t>
+            </a:r>
+          </a:p>
+        </p:txBody>
+      </p:sp>
+      <p:sp>
+        <p:nvSpPr>
+          <p:cNvPr id="7" name="Rectangle 6"/>
+          <p:cNvSpPr/>
+          <p:nvPr/>
+        </p:nvSpPr>
+        <p:spPr>
+          <a:xfrm>
+            <a:off x="457200" y="2514600"/>
+            <a:ext cx="82296" cy="1051560"/>
+          </a:xfrm>
+          <a:prstGeom prst="rect">
+            <a:avLst/>
+          </a:prstGeom>
+          <a:solidFill>
+            <a:srgbClr val="196B24"/>
+          </a:solidFill>
+          <a:ln>
+            <a:noFill/>
+          </a:ln>
+        </p:spPr>
+        <p:style>
+          <a:lnRef idx="1">
+            <a:schemeClr val="accent1"/>
+          </a:lnRef>
+          <a:fillRef idx="3">
+            <a:schemeClr val="accent1"/>
+          </a:fillRef>
+          <a:effectRef idx="2">
+            <a:schemeClr val="accent1"/>
+          </a:effectRef>
+          <a:fontRef idx="minor">
+            <a:schemeClr val="lt1"/>
+          </a:fontRef>
+        </p:style>
+        <p:txBody>
+          <a:bodyPr rtlCol="0" anchor="ctr"/>
+          <a:lstStyle/>
+          <a:p>
+            <a:pPr algn="ctr"/>
+          </a:p>
+        </p:txBody>
+      </p:sp>
+      <p:sp>
+        <p:nvSpPr>
+          <p:cNvPr id="8" name="TextBox 7"/>
+          <p:cNvSpPr txBox="1"/>
+          <p:nvPr/>
+        </p:nvSpPr>
+        <p:spPr>
+          <a:xfrm>
+            <a:off x="658368" y="2514600"/>
+            <a:ext cx="1965960" cy="1051560"/>
+          </a:xfrm>
+          <a:prstGeom prst="rect">
+            <a:avLst/>
+          </a:prstGeom>
+          <a:noFill/>
+        </p:spPr>
+        <p:txBody>
+          <a:bodyPr wrap="square" anchor="ctr">
+            <a:spAutoFit/>
+          </a:bodyPr>
+          <a:lstStyle/>
+          <a:p>
+            <a:r>
+              <a:rPr sz="1250" b="1">
+                <a:solidFill>
+                  <a:srgbClr val="000000"/>
+                </a:solidFill>
+                <a:latin typeface="Avenir Next LT Pro Demi"/>
+              </a:rPr>
+              <a:t>Track record</a:t>
+            </a:r>
+          </a:p>
+        </p:txBody>
+      </p:sp>
+      <p:sp>
+        <p:nvSpPr>
+          <p:cNvPr id="9" name="TextBox 8"/>
+          <p:cNvSpPr txBox="1"/>
+          <p:nvPr/>
+        </p:nvSpPr>
+        <p:spPr>
+          <a:xfrm>
+            <a:off x="2697480" y="2514600"/>
+            <a:ext cx="5989320" cy="1051560"/>
+          </a:xfrm>
+          <a:prstGeom prst="rect">
+            <a:avLst/>
+          </a:prstGeom>
+          <a:noFill/>
+        </p:spPr>
+        <p:txBody>
+          <a:bodyPr wrap="square" anchor="ctr">
+            <a:spAutoFit/>
+          </a:bodyPr>
+          <a:lstStyle/>
+          <a:p>
+            <a:r>
+              <a:rPr sz="1200" b="0">
+                <a:solidFill>
+                  <a:srgbClr val="000000"/>
+                </a:solidFill>
+                <a:latin typeface="Avenir Next LT Pro"/>
+              </a:rPr>
+              <a:t>Grew Pottery Barn $50M → $1B+; joined RH in 2001 near bankruptcy.</a:t>
+            </a:r>
+          </a:p>
+        </p:txBody>
+      </p:sp>
+      <p:sp>
+        <p:nvSpPr>
+          <p:cNvPr id="10" name="Rectangle 9"/>
+          <p:cNvSpPr/>
+          <p:nvPr/>
+        </p:nvSpPr>
+        <p:spPr>
+          <a:xfrm>
+            <a:off x="457200" y="3657600"/>
+            <a:ext cx="82296" cy="1051560"/>
+          </a:xfrm>
+          <a:prstGeom prst="rect">
+            <a:avLst/>
+          </a:prstGeom>
+          <a:solidFill>
+            <a:srgbClr val="E97132"/>
+          </a:solidFill>
+          <a:ln>
+            <a:noFill/>
+          </a:ln>
+        </p:spPr>
+        <p:style>
+          <a:lnRef idx="1">
+            <a:schemeClr val="accent1"/>
+          </a:lnRef>
+          <a:fillRef idx="3">
+            <a:schemeClr val="accent1"/>
+          </a:fillRef>
+          <a:effectRef idx="2">
+            <a:schemeClr val="accent1"/>
+          </a:effectRef>
+          <a:fontRef idx="minor">
+            <a:schemeClr val="lt1"/>
+          </a:fontRef>
+        </p:style>
+        <p:txBody>
+          <a:bodyPr rtlCol="0" anchor="ctr"/>
+          <a:lstStyle/>
+          <a:p>
+            <a:pPr algn="ctr"/>
+          </a:p>
+        </p:txBody>
+      </p:sp>
+      <p:sp>
+        <p:nvSpPr>
+          <p:cNvPr id="11" name="TextBox 10"/>
+          <p:cNvSpPr txBox="1"/>
+          <p:nvPr/>
+        </p:nvSpPr>
+        <p:spPr>
+          <a:xfrm>
+            <a:off x="658368" y="3657600"/>
+            <a:ext cx="1965960" cy="1051560"/>
+          </a:xfrm>
+          <a:prstGeom prst="rect">
+            <a:avLst/>
+          </a:prstGeom>
+          <a:noFill/>
+        </p:spPr>
+        <p:txBody>
+          <a:bodyPr wrap="square" anchor="ctr">
+            <a:spAutoFit/>
+          </a:bodyPr>
+          <a:lstStyle/>
+          <a:p>
+            <a:r>
+              <a:rPr sz="1250" b="1">
+                <a:solidFill>
+                  <a:srgbClr val="000000"/>
+                </a:solidFill>
+                <a:latin typeface="Avenir Next LT Pro Demi"/>
+              </a:rPr>
+              <a:t>Skin in the game</a:t>
+            </a:r>
+          </a:p>
+        </p:txBody>
+      </p:sp>
+      <p:sp>
+        <p:nvSpPr>
+          <p:cNvPr id="12" name="TextBox 11"/>
+          <p:cNvSpPr txBox="1"/>
+          <p:nvPr/>
+        </p:nvSpPr>
+        <p:spPr>
+          <a:xfrm>
+            <a:off x="2697480" y="3657600"/>
+            <a:ext cx="5989320" cy="1051560"/>
+          </a:xfrm>
+          <a:prstGeom prst="rect">
+            <a:avLst/>
+          </a:prstGeom>
+          <a:noFill/>
+        </p:spPr>
+        <p:txBody>
+          <a:bodyPr wrap="square" anchor="ctr">
+            <a:spAutoFit/>
+          </a:bodyPr>
+          <a:lstStyle/>
+          <a:p>
+            <a:r>
+              <a:rPr sz="1200" b="0">
+                <a:solidFill>
+                  <a:srgbClr val="000000"/>
+                </a:solidFill>
+                <a:latin typeface="Avenir Next LT Pro"/>
+              </a:rPr>
+              <a:t>Owns ~18% outright (~25% incl. options); bought ~$10M at ~$216 in June 2024.</a:t>
+            </a:r>
+          </a:p>
+        </p:txBody>
+      </p:sp>
+      <p:sp>
+        <p:nvSpPr>
+          <p:cNvPr id="13" name="Rectangle 12"/>
+          <p:cNvSpPr/>
+          <p:nvPr/>
+        </p:nvSpPr>
+        <p:spPr>
+          <a:xfrm>
+            <a:off x="457200" y="4800600"/>
+            <a:ext cx="82296" cy="1051560"/>
+          </a:xfrm>
+          <a:prstGeom prst="rect">
+            <a:avLst/>
+          </a:prstGeom>
+          <a:solidFill>
+            <a:srgbClr val="B03030"/>
+          </a:solidFill>
+          <a:ln>
+            <a:noFill/>
+          </a:ln>
+        </p:spPr>
+        <p:style>
+          <a:lnRef idx="1">
+            <a:schemeClr val="accent1"/>
+          </a:lnRef>
+          <a:fillRef idx="3">
+            <a:schemeClr val="accent1"/>
+          </a:fillRef>
+          <a:effectRef idx="2">
+            <a:schemeClr val="accent1"/>
+          </a:effectRef>
+          <a:fontRef idx="minor">
+            <a:schemeClr val="lt1"/>
+          </a:fontRef>
+        </p:style>
+        <p:txBody>
+          <a:bodyPr rtlCol="0" anchor="ctr"/>
+          <a:lstStyle/>
+          <a:p>
+            <a:pPr algn="ctr"/>
+          </a:p>
+        </p:txBody>
+      </p:sp>
+      <p:sp>
+        <p:nvSpPr>
+          <p:cNvPr id="14" name="TextBox 13"/>
+          <p:cNvSpPr txBox="1"/>
+          <p:nvPr/>
+        </p:nvSpPr>
+        <p:spPr>
+          <a:xfrm>
+            <a:off x="658368" y="4800600"/>
+            <a:ext cx="1965960" cy="1051560"/>
+          </a:xfrm>
+          <a:prstGeom prst="rect">
+            <a:avLst/>
+          </a:prstGeom>
+          <a:noFill/>
+        </p:spPr>
+        <p:txBody>
+          <a:bodyPr wrap="square" anchor="ctr">
+            <a:spAutoFit/>
+          </a:bodyPr>
+          <a:lstStyle/>
+          <a:p>
+            <a:r>
+              <a:rPr sz="1250" b="1">
+                <a:solidFill>
+                  <a:srgbClr val="000000"/>
+                </a:solidFill>
+                <a:latin typeface="Avenir Next LT Pro Demi"/>
+              </a:rPr>
+              <a:t>The double edge</a:t>
+            </a:r>
+          </a:p>
+        </p:txBody>
+      </p:sp>
+      <p:sp>
+        <p:nvSpPr>
+          <p:cNvPr id="15" name="TextBox 14"/>
+          <p:cNvSpPr txBox="1"/>
+          <p:nvPr/>
+        </p:nvSpPr>
+        <p:spPr>
+          <a:xfrm>
+            <a:off x="2697480" y="4800600"/>
+            <a:ext cx="5989320" cy="1051560"/>
+          </a:xfrm>
+          <a:prstGeom prst="rect">
+            <a:avLst/>
+          </a:prstGeom>
+          <a:noFill/>
+        </p:spPr>
+        <p:txBody>
+          <a:bodyPr wrap="square" anchor="ctr">
+            <a:spAutoFit/>
+          </a:bodyPr>
+          <a:lstStyle/>
+          <a:p>
+            <a:r>
+              <a:rPr sz="1200" b="0">
+                <a:solidFill>
+                  <a:srgbClr val="000000"/>
+                </a:solidFill>
+                <a:latin typeface="Avenir Next LT Pro"/>
+              </a:rPr>
+              <a:t>Bold allocator — same conviction drove the buybacks and Estates.</a:t>
+            </a:r>
+          </a:p>
+        </p:txBody>
+      </p:sp>
+      <p:sp>
+        <p:nvSpPr>
+          <p:cNvPr id="16" name="TextBox 15"/>
+          <p:cNvSpPr txBox="1"/>
+          <p:nvPr/>
+        </p:nvSpPr>
+        <p:spPr>
+          <a:xfrm>
             <a:off x="457200" y="6355080"/>
             <a:ext cx="8229600" cy="365760"/>
           </a:xfrm>
@@ -10689,13 +11178,13 @@
           <a:lstStyle/>
           <a:p>
             <a:r>
-              <a:rPr sz="750" i="1">
+              <a:rPr sz="750" b="0" i="1">
                 <a:solidFill>
                   <a:srgbClr val="707070"/>
                 </a:solidFill>
                 <a:latin typeface="Avenir Next LT Pro"/>
               </a:rPr>
-              <a:t>Sources: sell-side price-target range &amp; Simply Wall St narrative fair values (per recent research); author's estimates.</a:t>
+              <a:t>Source: RH FY2025 10-K; RH IR &amp; SEC Form 4 (Jun 26, 2024); company bios</a:t>
             </a:r>
           </a:p>
         </p:txBody>
@@ -11088,7 +11577,7 @@
                           <a:ea typeface="+mn-ea"/>
                           <a:cs typeface="+mn-cs"/>
                         </a:rPr>
-                        <a:t>6</a:t>
+                        <a:t>7</a:t>
                       </a:r>
                     </a:p>
                   </a:txBody>
@@ -11438,7 +11927,7 @@
                           <a:ea typeface="+mn-ea"/>
                           <a:cs typeface="+mn-cs"/>
                         </a:rPr>
-                        <a:t>17</a:t>
+                        <a:t>16</a:t>
                       </a:r>
                     </a:p>
                   </a:txBody>
@@ -12051,7 +12540,7 @@
         <p:spPr>
           <a:xfrm>
             <a:off x="457200" y="3429000"/>
-            <a:ext cx="64008" cy="1115568"/>
+            <a:ext cx="82296" cy="2240280"/>
           </a:xfrm>
           <a:prstGeom prst="rect">
             <a:avLst/>
@@ -12082,7 +12571,6 @@
           <a:lstStyle/>
           <a:p>
             <a:pPr algn="ctr"/>
-            <a:endParaRPr/>
           </a:p>
         </p:txBody>
       </p:sp>
@@ -12094,8 +12582,8 @@
         </p:nvSpPr>
         <p:spPr>
           <a:xfrm>
-            <a:off x="621792" y="3410712"/>
-            <a:ext cx="3776472" cy="1049005"/>
+            <a:off x="640080" y="3429000"/>
+            <a:ext cx="3794760" cy="2240280"/>
           </a:xfrm>
           <a:prstGeom prst="rect">
             <a:avLst/>
@@ -12109,97 +12597,88 @@
           <a:lstStyle/>
           <a:p>
             <a:r>
-              <a:rPr sz="1350" b="1" dirty="0">
+              <a:rPr sz="1300" b="1">
+                <a:solidFill>
+                  <a:srgbClr val="156082"/>
+                </a:solidFill>
                 <a:latin typeface="Avenir Next LT Pro Demi"/>
               </a:rPr>
-              <a:t>Bet on the operator</a:t>
-            </a:r>
-          </a:p>
-          <a:p>
-            <a:pPr marL="171450" indent="-171450">
+              <a:t>Why it's interesting</a:t>
+            </a:r>
+          </a:p>
+          <a:p>
+            <a:pPr>
               <a:spcBef>
-                <a:spcPts val="200"/>
+                <a:spcPts val="600"/>
               </a:spcBef>
-              <a:buFont typeface="Arial" panose="020B0604020202020204" pitchFamily="34" charset="0"/>
-              <a:buChar char="•"/>
             </a:pPr>
             <a:r>
-              <a:rPr sz="1050" b="0" dirty="0">
+              <a:rPr sz="1100">
+                <a:solidFill>
+                  <a:srgbClr val="156082"/>
+                </a:solidFill>
                 <a:latin typeface="Avenir Next LT Pro"/>
               </a:rPr>
-              <a:t>Friedman took Pottery Barn from $50M to $1B+ </a:t>
-            </a:r>
-            <a:endParaRPr lang="en-US" sz="1050" b="0" dirty="0">
-              <a:latin typeface="Avenir Next LT Pro"/>
-            </a:endParaRPr>
-          </a:p>
-          <a:p>
-            <a:pPr marL="171450" indent="-171450">
-              <a:spcBef>
-                <a:spcPts val="200"/>
-              </a:spcBef>
-              <a:buFont typeface="Arial" panose="020B0604020202020204" pitchFamily="34" charset="0"/>
-              <a:buChar char="•"/>
-            </a:pPr>
-            <a:r>
-              <a:rPr lang="en-US" sz="1050" dirty="0">
+              <a:t>•  </a:t>
+            </a:r>
+            <a:r>
+              <a:rPr sz="1100">
+                <a:solidFill>
+                  <a:srgbClr val="000000"/>
+                </a:solidFill>
                 <a:latin typeface="Avenir Next LT Pro"/>
               </a:rPr>
-              <a:t>B</a:t>
-            </a:r>
-            <a:r>
-              <a:rPr sz="1050" b="0" dirty="0">
+              <a:t>Proven operator — Friedman (~18–25% owner) rebuilt RH from near-bankruptcy</a:t>
+            </a:r>
+          </a:p>
+          <a:p>
+            <a:pPr>
+              <a:spcBef>
+                <a:spcPts val="600"/>
+              </a:spcBef>
+            </a:pPr>
+            <a:r>
+              <a:rPr sz="1100">
+                <a:solidFill>
+                  <a:srgbClr val="156082"/>
+                </a:solidFill>
                 <a:latin typeface="Avenir Next LT Pro"/>
               </a:rPr>
-              <a:t>uilt the Gallery model</a:t>
-            </a:r>
-            <a:endParaRPr lang="en-US" sz="1050" b="0" dirty="0">
-              <a:latin typeface="Avenir Next LT Pro"/>
-            </a:endParaRPr>
-          </a:p>
-          <a:p>
-            <a:pPr marL="171450" indent="-171450">
-              <a:spcBef>
-                <a:spcPts val="200"/>
-              </a:spcBef>
-              <a:buFont typeface="Arial" panose="020B0604020202020204" pitchFamily="34" charset="0"/>
-              <a:buChar char="•"/>
-            </a:pPr>
-            <a:r>
-              <a:rPr lang="en-US" sz="1050" b="0" dirty="0">
+              <a:t>•  </a:t>
+            </a:r>
+            <a:r>
+              <a:rPr sz="1100">
+                <a:solidFill>
+                  <a:srgbClr val="000000"/>
+                </a:solidFill>
                 <a:latin typeface="Avenir Next LT Pro"/>
               </a:rPr>
-              <a:t>~18% outright (~25% incl. options); </a:t>
-            </a:r>
-            <a:r>
-              <a:rPr sz="1050" b="0" dirty="0">
+              <a:t>Differentiated, fully-DTC luxury brand with real pricing power</a:t>
+            </a:r>
+          </a:p>
+          <a:p>
+            <a:pPr>
+              <a:spcBef>
+                <a:spcPts val="600"/>
+              </a:spcBef>
+            </a:pPr>
+            <a:r>
+              <a:rPr sz="1100">
+                <a:solidFill>
+                  <a:srgbClr val="156082"/>
+                </a:solidFill>
                 <a:latin typeface="Avenir Next LT Pro"/>
               </a:rPr>
-              <a:t>bought ~$10M at ~$216 (Jun '24)</a:t>
-            </a:r>
-            <a:endParaRPr lang="en-US" sz="1050" b="0" dirty="0">
-              <a:latin typeface="Avenir Next LT Pro"/>
-            </a:endParaRPr>
-          </a:p>
-          <a:p>
-            <a:pPr marL="171450" indent="-171450">
-              <a:spcBef>
-                <a:spcPts val="200"/>
-              </a:spcBef>
-              <a:buFont typeface="Arial" panose="020B0604020202020204" pitchFamily="34" charset="0"/>
-              <a:buChar char="•"/>
-            </a:pPr>
-            <a:r>
-              <a:rPr lang="en-US" sz="1050" dirty="0">
+              <a:t>•  </a:t>
+            </a:r>
+            <a:r>
+              <a:rPr sz="1100">
+                <a:solidFill>
+                  <a:srgbClr val="000000"/>
+                </a:solidFill>
                 <a:latin typeface="Avenir Next LT Pro"/>
               </a:rPr>
-              <a:t>O</a:t>
-            </a:r>
-            <a:r>
-              <a:rPr sz="1050" b="0" dirty="0">
-                <a:latin typeface="Avenir Next LT Pro"/>
-              </a:rPr>
-              <a:t>perator bet, not a macro bet</a:t>
+              <a:t>Large optionality — ~45–90% upside if Estates + margins prove out</a:t>
             </a:r>
           </a:p>
         </p:txBody>
@@ -12212,14 +12691,14 @@
         </p:nvSpPr>
         <p:spPr>
           <a:xfrm>
-            <a:off x="4709159" y="3429000"/>
-            <a:ext cx="64008" cy="1115568"/>
+            <a:off x="4709160" y="3429000"/>
+            <a:ext cx="82296" cy="2240280"/>
           </a:xfrm>
           <a:prstGeom prst="rect">
             <a:avLst/>
           </a:prstGeom>
           <a:solidFill>
-            <a:srgbClr val="156082"/>
+            <a:srgbClr val="B03030"/>
           </a:solidFill>
           <a:ln>
             <a:noFill/>
@@ -12244,7 +12723,6 @@
           <a:lstStyle/>
           <a:p>
             <a:pPr algn="ctr"/>
-            <a:endParaRPr/>
           </a:p>
         </p:txBody>
       </p:sp>
@@ -12256,8 +12734,8 @@
         </p:nvSpPr>
         <p:spPr>
           <a:xfrm>
-            <a:off x="4873751" y="3410712"/>
-            <a:ext cx="3776472" cy="836126"/>
+            <a:off x="4892040" y="3429000"/>
+            <a:ext cx="3794760" cy="2240280"/>
           </a:xfrm>
           <a:prstGeom prst="rect">
             <a:avLst/>
@@ -12271,286 +12749,88 @@
           <a:lstStyle/>
           <a:p>
             <a:r>
-              <a:rPr sz="1350" b="1" dirty="0">
+              <a:rPr sz="1300" b="1">
+                <a:solidFill>
+                  <a:srgbClr val="B03030"/>
+                </a:solidFill>
                 <a:latin typeface="Avenir Next LT Pro Demi"/>
               </a:rPr>
-              <a:t>Estates — promising but unproven</a:t>
-            </a:r>
-            <a:r>
-              <a:rPr lang="en-US" sz="1350" b="1" dirty="0">
-                <a:latin typeface="Avenir Next LT Pro Demi"/>
-              </a:rPr>
-              <a:t/>
-            </a:r>
-            <a:endParaRPr sz="1350" b="1" dirty="0">
-              <a:latin typeface="Avenir Next LT Pro Demi"/>
-            </a:endParaRPr>
-          </a:p>
-          <a:p>
-            <a:pPr marL="171450" indent="-171450">
+              <a:t>Why I'm holding — not yet</a:t>
+            </a:r>
+          </a:p>
+          <a:p>
+            <a:pPr>
               <a:spcBef>
-                <a:spcPts val="200"/>
+                <a:spcPts val="600"/>
               </a:spcBef>
-              <a:buFont typeface="Arial" panose="020B0604020202020204" pitchFamily="34" charset="0"/>
-              <a:buChar char="•"/>
             </a:pPr>
             <a:r>
-              <a:rPr sz="1050" b="0" dirty="0">
+              <a:rPr sz="1100">
+                <a:solidFill>
+                  <a:srgbClr val="B03030"/>
+                </a:solidFill>
                 <a:latin typeface="Avenir Next LT Pro"/>
               </a:rPr>
-              <a:t>Targets rate-insensitive cash buyers at $20K+ pieces</a:t>
-            </a:r>
-            <a:endParaRPr lang="en-US" sz="1050" b="0" dirty="0">
-              <a:latin typeface="Avenir Next LT Pro"/>
-            </a:endParaRPr>
-          </a:p>
-          <a:p>
-            <a:pPr marL="171450" indent="-171450">
-              <a:spcBef>
-                <a:spcPts val="200"/>
-              </a:spcBef>
-              <a:buFont typeface="Arial" panose="020B0604020202020204" pitchFamily="34" charset="0"/>
-              <a:buChar char="•"/>
-            </a:pPr>
-            <a:r>
-              <a:rPr sz="1050" b="0" dirty="0">
+              <a:t>•  </a:t>
+            </a:r>
+            <a:r>
+              <a:rPr sz="1100">
+                <a:solidFill>
+                  <a:srgbClr val="000000"/>
+                </a:solidFill>
                 <a:latin typeface="Avenir Next LT Pro"/>
               </a:rPr>
-              <a:t>In galleries covering 60–65% of the business by Sept 2026</a:t>
-            </a:r>
-          </a:p>
-        </p:txBody>
-      </p:sp>
-      <p:sp>
-        <p:nvSpPr>
-          <p:cNvPr id="12" name="Rectangle 11"/>
-          <p:cNvSpPr/>
-          <p:nvPr/>
-        </p:nvSpPr>
-        <p:spPr>
-          <a:xfrm>
-            <a:off x="457200" y="4727448"/>
-            <a:ext cx="64008" cy="1115568"/>
-          </a:xfrm>
-          <a:prstGeom prst="rect">
-            <a:avLst/>
-          </a:prstGeom>
-          <a:solidFill>
-            <a:srgbClr val="156082"/>
-          </a:solidFill>
-          <a:ln>
-            <a:noFill/>
-          </a:ln>
-        </p:spPr>
-        <p:style>
-          <a:lnRef idx="1">
-            <a:schemeClr val="accent1"/>
-          </a:lnRef>
-          <a:fillRef idx="3">
-            <a:schemeClr val="accent1"/>
-          </a:fillRef>
-          <a:effectRef idx="2">
-            <a:schemeClr val="accent1"/>
-          </a:effectRef>
-          <a:fontRef idx="minor">
-            <a:schemeClr val="lt1"/>
-          </a:fontRef>
-        </p:style>
-        <p:txBody>
-          <a:bodyPr rtlCol="0" anchor="ctr"/>
-          <a:lstStyle/>
-          <a:p>
-            <a:pPr algn="ctr"/>
-            <a:endParaRPr/>
-          </a:p>
-        </p:txBody>
-      </p:sp>
-      <p:sp>
-        <p:nvSpPr>
-          <p:cNvPr id="13" name="TextBox 12"/>
-          <p:cNvSpPr txBox="1"/>
-          <p:nvPr/>
-        </p:nvSpPr>
-        <p:spPr>
-          <a:xfrm>
-            <a:off x="621792" y="4709160"/>
-            <a:ext cx="3776472" cy="836126"/>
-          </a:xfrm>
-          <a:prstGeom prst="rect">
-            <a:avLst/>
-          </a:prstGeom>
-          <a:noFill/>
-        </p:spPr>
-        <p:txBody>
-          <a:bodyPr wrap="square">
-            <a:spAutoFit/>
-          </a:bodyPr>
-          <a:lstStyle/>
-          <a:p>
-            <a:r>
-              <a:rPr sz="1350" b="1" dirty="0">
-                <a:latin typeface="Avenir Next LT Pro Demi"/>
-              </a:rPr>
-              <a:t>Housing recovery = free upside</a:t>
-            </a:r>
-          </a:p>
-          <a:p>
-            <a:pPr marL="171450" indent="-171450">
+              <a:t>Estates unproven — zero results data (launched Jun 2026)</a:t>
+            </a:r>
+          </a:p>
+          <a:p>
+            <a:pPr>
               <a:spcBef>
-                <a:spcPts val="200"/>
+                <a:spcPts val="600"/>
               </a:spcBef>
-              <a:buFont typeface="Arial" panose="020B0604020202020204" pitchFamily="34" charset="0"/>
-              <a:buChar char="•"/>
             </a:pPr>
             <a:r>
-              <a:rPr sz="1050" b="0" dirty="0">
+              <a:rPr sz="1100">
+                <a:solidFill>
+                  <a:srgbClr val="B03030"/>
+                </a:solidFill>
                 <a:latin typeface="Avenir Next LT Pro"/>
               </a:rPr>
-              <a:t>Base case assumes no recovery</a:t>
-            </a:r>
-            <a:endParaRPr lang="en-US" sz="1050" dirty="0">
-              <a:latin typeface="Avenir Next LT Pro"/>
-            </a:endParaRPr>
-          </a:p>
-          <a:p>
-            <a:pPr marL="171450" indent="-171450">
-              <a:spcBef>
-                <a:spcPts val="200"/>
-              </a:spcBef>
-              <a:buFont typeface="Arial" panose="020B0604020202020204" pitchFamily="34" charset="0"/>
-              <a:buChar char="•"/>
-            </a:pPr>
-            <a:r>
-              <a:rPr sz="1050" b="0" dirty="0">
+              <a:t>•  </a:t>
+            </a:r>
+            <a:r>
+              <a:rPr sz="1100">
+                <a:solidFill>
+                  <a:srgbClr val="000000"/>
+                </a:solidFill>
                 <a:latin typeface="Avenir Next LT Pro"/>
               </a:rPr>
-              <a:t>If rates ease, a fixed cost base drives an earnings inflection that isn't priced in</a:t>
-            </a:r>
-          </a:p>
-        </p:txBody>
-      </p:sp>
-      <p:sp>
-        <p:nvSpPr>
-          <p:cNvPr id="14" name="Rectangle 13"/>
-          <p:cNvSpPr/>
-          <p:nvPr/>
-        </p:nvSpPr>
-        <p:spPr>
-          <a:xfrm>
-            <a:off x="4709159" y="4727448"/>
-            <a:ext cx="64008" cy="1115568"/>
-          </a:xfrm>
-          <a:prstGeom prst="rect">
-            <a:avLst/>
-          </a:prstGeom>
-          <a:solidFill>
-            <a:srgbClr val="156082"/>
-          </a:solidFill>
-          <a:ln>
-            <a:noFill/>
-          </a:ln>
-        </p:spPr>
-        <p:style>
-          <a:lnRef idx="1">
-            <a:schemeClr val="accent1"/>
-          </a:lnRef>
-          <a:fillRef idx="3">
-            <a:schemeClr val="accent1"/>
-          </a:fillRef>
-          <a:effectRef idx="2">
-            <a:schemeClr val="accent1"/>
-          </a:effectRef>
-          <a:fontRef idx="minor">
-            <a:schemeClr val="lt1"/>
-          </a:fontRef>
-        </p:style>
-        <p:txBody>
-          <a:bodyPr rtlCol="0" anchor="ctr"/>
-          <a:lstStyle/>
-          <a:p>
-            <a:pPr algn="ctr"/>
-            <a:endParaRPr/>
-          </a:p>
-        </p:txBody>
-      </p:sp>
-      <p:sp>
-        <p:nvSpPr>
-          <p:cNvPr id="15" name="TextBox 14"/>
-          <p:cNvSpPr txBox="1"/>
-          <p:nvPr/>
-        </p:nvSpPr>
-        <p:spPr>
-          <a:xfrm>
-            <a:off x="4873751" y="4709160"/>
-            <a:ext cx="3776472" cy="946413"/>
-          </a:xfrm>
-          <a:prstGeom prst="rect">
-            <a:avLst/>
-          </a:prstGeom>
-          <a:noFill/>
-        </p:spPr>
-        <p:txBody>
-          <a:bodyPr wrap="square">
-            <a:spAutoFit/>
-          </a:bodyPr>
-          <a:lstStyle/>
-          <a:p>
-            <a:r>
-              <a:rPr sz="1350" b="1" dirty="0">
-                <a:latin typeface="Avenir Next LT Pro Demi"/>
-              </a:rPr>
-              <a:t>Debt is the risk</a:t>
-            </a:r>
-            <a:endParaRPr lang="en-US" sz="1350" b="1" dirty="0">
-              <a:latin typeface="Avenir Next LT Pro Demi"/>
-            </a:endParaRPr>
-          </a:p>
-          <a:p>
-            <a:pPr marL="171450" indent="-171450">
-              <a:buFont typeface="Arial" panose="020B0604020202020204" pitchFamily="34" charset="0"/>
-              <a:buChar char="•"/>
+              <a:t>Core still soft — Q1 net loss; Q2 guides just +0.5–2.5%</a:t>
+            </a:r>
+          </a:p>
+          <a:p>
+            <a:pPr>
+              <a:spcBef>
+                <a:spcPts val="600"/>
+              </a:spcBef>
             </a:pPr>
             <a:r>
-              <a:rPr sz="1050" b="0" dirty="0">
+              <a:rPr sz="1100">
+                <a:solidFill>
+                  <a:srgbClr val="B03030"/>
+                </a:solidFill>
                 <a:latin typeface="Avenir Next LT Pro"/>
               </a:rPr>
-              <a:t>~$2.4B net debt at ~4.0× EBITDA, ~$225M/yr interest</a:t>
-            </a:r>
-            <a:endParaRPr lang="en-US" sz="1050" dirty="0">
-              <a:latin typeface="Avenir Next LT Pro"/>
-            </a:endParaRPr>
-          </a:p>
-          <a:p>
-            <a:pPr marL="171450" indent="-171450">
-              <a:buFont typeface="Arial" panose="020B0604020202020204" pitchFamily="34" charset="0"/>
-              <a:buChar char="•"/>
-            </a:pPr>
-            <a:r>
-              <a:rPr sz="1050" b="0" dirty="0">
+              <a:t>•  </a:t>
+            </a:r>
+            <a:r>
+              <a:rPr sz="1100">
+                <a:solidFill>
+                  <a:srgbClr val="000000"/>
+                </a:solidFill>
                 <a:latin typeface="Avenir Next LT Pro"/>
               </a:rPr>
-              <a:t>FCF inflected to +$252M in FY25</a:t>
-            </a:r>
-            <a:endParaRPr lang="en-US" sz="1050" b="0" dirty="0">
-              <a:latin typeface="Avenir Next LT Pro"/>
-            </a:endParaRPr>
-          </a:p>
-          <a:p>
-            <a:pPr marL="171450" indent="-171450">
-              <a:buFont typeface="Arial" panose="020B0604020202020204" pitchFamily="34" charset="0"/>
-              <a:buChar char="•"/>
-            </a:pPr>
-            <a:r>
-              <a:rPr lang="en-US" sz="1050" dirty="0">
-                <a:latin typeface="Avenir Next LT Pro"/>
-              </a:rPr>
-              <a:t>P</a:t>
-            </a:r>
-            <a:r>
-              <a:rPr sz="1050" b="0" dirty="0">
-                <a:latin typeface="Avenir Next LT Pro"/>
-              </a:rPr>
-              <a:t>rolonged freeze tightens the balance sheet — size accordingly</a:t>
+              <a:t>~4× levered; debt reduction one-time (inventory) and stalling</a:t>
             </a:r>
           </a:p>
         </p:txBody>
@@ -12602,7 +12882,7 @@
                 </a:solidFill>
                 <a:latin typeface="Avenir Next LT Pro Demi"/>
               </a:rPr>
-              <a:t>What Would Make Me a Buyer</a:t>
+              <a:t>Where the Street Values RH — vs. My Verdict</a:t>
             </a:r>
           </a:p>
         </p:txBody>
@@ -12650,16 +12930,469 @@
           </a:p>
         </p:txBody>
       </p:sp>
+      <p:graphicFrame>
+        <p:nvGraphicFramePr>
+          <p:cNvPr id="4" name="Table 3"/>
+          <p:cNvGraphicFramePr>
+            <a:graphicFrameLocks noGrp="1"/>
+          </p:cNvGraphicFramePr>
+          <p:nvPr/>
+        </p:nvGraphicFramePr>
+        <p:xfrm>
+          <a:off x="457200" y="1371600"/>
+          <a:ext cx="8229600" cy="2743200"/>
+        </p:xfrm>
+        <a:graphic>
+          <a:graphicData uri="http://schemas.openxmlformats.org/drawingml/2006/table">
+            <a:tbl>
+              <a:tblPr>
+                <a:tableStyleId>{5C22544A-7EE6-4342-B048-85BDC9FD1C3A}</a:tableStyleId>
+              </a:tblPr>
+              <a:tblGrid>
+                <a:gridCol w="3291840"/>
+                <a:gridCol w="2011680"/>
+                <a:gridCol w="2926080"/>
+              </a:tblGrid>
+              <a:tr h="457200">
+                <a:tc>
+                  <a:txBody>
+                    <a:bodyPr/>
+                    <a:lstStyle/>
+                    <a:p>
+                      <a:pPr algn="l"/>
+                      <a:r>
+                        <a:rPr sz="1100" b="1">
+                          <a:solidFill>
+                            <a:srgbClr val="FFFFFF"/>
+                          </a:solidFill>
+                          <a:latin typeface="Avenir Next LT Pro Demi"/>
+                        </a:rPr>
+                        <a:t>Benchmark</a:t>
+                      </a:r>
+                    </a:p>
+                  </a:txBody>
+                  <a:tcPr marL="91440" marT="27432" marB="27432" anchor="ctr">
+                    <a:solidFill>
+                      <a:srgbClr val="0E2841"/>
+                    </a:solidFill>
+                  </a:tcPr>
+                </a:tc>
+                <a:tc>
+                  <a:txBody>
+                    <a:bodyPr/>
+                    <a:lstStyle/>
+                    <a:p>
+                      <a:pPr algn="ctr"/>
+                      <a:r>
+                        <a:rPr sz="1100" b="1">
+                          <a:solidFill>
+                            <a:srgbClr val="FFFFFF"/>
+                          </a:solidFill>
+                          <a:latin typeface="Avenir Next LT Pro Demi"/>
+                        </a:rPr>
+                        <a:t>Value</a:t>
+                      </a:r>
+                    </a:p>
+                  </a:txBody>
+                  <a:tcPr marL="91440" marT="27432" marB="27432" anchor="ctr">
+                    <a:solidFill>
+                      <a:srgbClr val="0E2841"/>
+                    </a:solidFill>
+                  </a:tcPr>
+                </a:tc>
+                <a:tc>
+                  <a:txBody>
+                    <a:bodyPr/>
+                    <a:lstStyle/>
+                    <a:p>
+                      <a:pPr algn="l"/>
+                      <a:r>
+                        <a:rPr sz="1100" b="1">
+                          <a:solidFill>
+                            <a:srgbClr val="FFFFFF"/>
+                          </a:solidFill>
+                          <a:latin typeface="Avenir Next LT Pro Demi"/>
+                        </a:rPr>
+                        <a:t>Implied read</a:t>
+                      </a:r>
+                    </a:p>
+                  </a:txBody>
+                  <a:tcPr marL="91440" marT="27432" marB="27432" anchor="ctr">
+                    <a:solidFill>
+                      <a:srgbClr val="0E2841"/>
+                    </a:solidFill>
+                  </a:tcPr>
+                </a:tc>
+              </a:tr>
+              <a:tr h="457200">
+                <a:tc>
+                  <a:txBody>
+                    <a:bodyPr/>
+                    <a:lstStyle/>
+                    <a:p>
+                      <a:pPr algn="l"/>
+                      <a:r>
+                        <a:rPr sz="1100" b="1">
+                          <a:solidFill>
+                            <a:srgbClr val="000000"/>
+                          </a:solidFill>
+                          <a:latin typeface="Avenir Next LT Pro"/>
+                        </a:rPr>
+                        <a:t>Current price</a:t>
+                      </a:r>
+                    </a:p>
+                  </a:txBody>
+                  <a:tcPr marL="91440" marT="27432" marB="27432" anchor="ctr">
+                    <a:solidFill>
+                      <a:srgbClr val="FFFFFF"/>
+                    </a:solidFill>
+                  </a:tcPr>
+                </a:tc>
+                <a:tc>
+                  <a:txBody>
+                    <a:bodyPr/>
+                    <a:lstStyle/>
+                    <a:p>
+                      <a:pPr algn="ctr"/>
+                      <a:r>
+                        <a:rPr sz="1100" b="0">
+                          <a:solidFill>
+                            <a:srgbClr val="000000"/>
+                          </a:solidFill>
+                          <a:latin typeface="Avenir Next LT Pro"/>
+                        </a:rPr>
+                        <a:t>~$166</a:t>
+                      </a:r>
+                    </a:p>
+                  </a:txBody>
+                  <a:tcPr marL="91440" marT="27432" marB="27432" anchor="ctr">
+                    <a:solidFill>
+                      <a:srgbClr val="FFFFFF"/>
+                    </a:solidFill>
+                  </a:tcPr>
+                </a:tc>
+                <a:tc>
+                  <a:txBody>
+                    <a:bodyPr/>
+                    <a:lstStyle/>
+                    <a:p>
+                      <a:pPr algn="l"/>
+                      <a:r>
+                        <a:rPr sz="1100" b="0">
+                          <a:solidFill>
+                            <a:srgbClr val="000000"/>
+                          </a:solidFill>
+                          <a:latin typeface="Avenir Next LT Pro"/>
+                        </a:rPr>
+                        <a:t>—</a:t>
+                      </a:r>
+                    </a:p>
+                  </a:txBody>
+                  <a:tcPr marL="91440" marT="27432" marB="27432" anchor="ctr">
+                    <a:solidFill>
+                      <a:srgbClr val="FFFFFF"/>
+                    </a:solidFill>
+                  </a:tcPr>
+                </a:tc>
+              </a:tr>
+              <a:tr h="457200">
+                <a:tc>
+                  <a:txBody>
+                    <a:bodyPr/>
+                    <a:lstStyle/>
+                    <a:p>
+                      <a:pPr algn="l"/>
+                      <a:r>
+                        <a:rPr sz="1100" b="1">
+                          <a:solidFill>
+                            <a:srgbClr val="000000"/>
+                          </a:solidFill>
+                          <a:latin typeface="Avenir Next LT Pro"/>
+                        </a:rPr>
+                        <a:t>Sell-side price targets</a:t>
+                      </a:r>
+                    </a:p>
+                  </a:txBody>
+                  <a:tcPr marL="91440" marT="27432" marB="27432" anchor="ctr">
+                    <a:solidFill>
+                      <a:srgbClr val="F4F6F8"/>
+                    </a:solidFill>
+                  </a:tcPr>
+                </a:tc>
+                <a:tc>
+                  <a:txBody>
+                    <a:bodyPr/>
+                    <a:lstStyle/>
+                    <a:p>
+                      <a:pPr algn="ctr"/>
+                      <a:r>
+                        <a:rPr sz="1100" b="0">
+                          <a:solidFill>
+                            <a:srgbClr val="000000"/>
+                          </a:solidFill>
+                          <a:latin typeface="Avenir Next LT Pro"/>
+                        </a:rPr>
+                        <a:t>$130–175</a:t>
+                      </a:r>
+                    </a:p>
+                  </a:txBody>
+                  <a:tcPr marL="91440" marT="27432" marB="27432" anchor="ctr">
+                    <a:solidFill>
+                      <a:srgbClr val="F4F6F8"/>
+                    </a:solidFill>
+                  </a:tcPr>
+                </a:tc>
+                <a:tc>
+                  <a:txBody>
+                    <a:bodyPr/>
+                    <a:lstStyle/>
+                    <a:p>
+                      <a:pPr algn="l"/>
+                      <a:r>
+                        <a:rPr sz="1100" b="0">
+                          <a:solidFill>
+                            <a:srgbClr val="000000"/>
+                          </a:solidFill>
+                          <a:latin typeface="Avenir Next LT Pro"/>
+                        </a:rPr>
+                        <a:t>Limited upside; ~fairly valued</a:t>
+                      </a:r>
+                    </a:p>
+                  </a:txBody>
+                  <a:tcPr marL="91440" marT="27432" marB="27432" anchor="ctr">
+                    <a:solidFill>
+                      <a:srgbClr val="F4F6F8"/>
+                    </a:solidFill>
+                  </a:tcPr>
+                </a:tc>
+              </a:tr>
+              <a:tr h="457200">
+                <a:tc>
+                  <a:txBody>
+                    <a:bodyPr/>
+                    <a:lstStyle/>
+                    <a:p>
+                      <a:pPr algn="l"/>
+                      <a:r>
+                        <a:rPr sz="1100" b="1">
+                          <a:solidFill>
+                            <a:srgbClr val="000000"/>
+                          </a:solidFill>
+                          <a:latin typeface="Avenir Next LT Pro"/>
+                        </a:rPr>
+                        <a:t>Simply Wall St models</a:t>
+                      </a:r>
+                    </a:p>
+                  </a:txBody>
+                  <a:tcPr marL="91440" marT="27432" marB="27432" anchor="ctr">
+                    <a:solidFill>
+                      <a:srgbClr val="FFFFFF"/>
+                    </a:solidFill>
+                  </a:tcPr>
+                </a:tc>
+                <a:tc>
+                  <a:txBody>
+                    <a:bodyPr/>
+                    <a:lstStyle/>
+                    <a:p>
+                      <a:pPr algn="ctr"/>
+                      <a:r>
+                        <a:rPr sz="1100" b="0">
+                          <a:solidFill>
+                            <a:srgbClr val="000000"/>
+                          </a:solidFill>
+                          <a:latin typeface="Avenir Next LT Pro"/>
+                        </a:rPr>
+                        <a:t>~$165–264</a:t>
+                      </a:r>
+                    </a:p>
+                  </a:txBody>
+                  <a:tcPr marL="91440" marT="27432" marB="27432" anchor="ctr">
+                    <a:solidFill>
+                      <a:srgbClr val="FFFFFF"/>
+                    </a:solidFill>
+                  </a:tcPr>
+                </a:tc>
+                <a:tc>
+                  <a:txBody>
+                    <a:bodyPr/>
+                    <a:lstStyle/>
+                    <a:p>
+                      <a:pPr algn="l"/>
+                      <a:r>
+                        <a:rPr sz="1100" b="0">
+                          <a:solidFill>
+                            <a:srgbClr val="000000"/>
+                          </a:solidFill>
+                          <a:latin typeface="Avenir Next LT Pro"/>
+                        </a:rPr>
+                        <a:t>Fairly valued to bullish</a:t>
+                      </a:r>
+                    </a:p>
+                  </a:txBody>
+                  <a:tcPr marL="91440" marT="27432" marB="27432" anchor="ctr">
+                    <a:solidFill>
+                      <a:srgbClr val="FFFFFF"/>
+                    </a:solidFill>
+                  </a:tcPr>
+                </a:tc>
+              </a:tr>
+              <a:tr h="457200">
+                <a:tc>
+                  <a:txBody>
+                    <a:bodyPr/>
+                    <a:lstStyle/>
+                    <a:p>
+                      <a:pPr algn="l"/>
+                      <a:r>
+                        <a:rPr sz="1100" b="1">
+                          <a:solidFill>
+                            <a:srgbClr val="156082"/>
+                          </a:solidFill>
+                          <a:latin typeface="Avenir Next LT Pro Demi"/>
+                        </a:rPr>
+                        <a:t>My fair value — proven today</a:t>
+                      </a:r>
+                    </a:p>
+                  </a:txBody>
+                  <a:tcPr marL="91440" marT="27432" marB="27432" anchor="ctr">
+                    <a:solidFill>
+                      <a:srgbClr val="F4F6F8"/>
+                    </a:solidFill>
+                  </a:tcPr>
+                </a:tc>
+                <a:tc>
+                  <a:txBody>
+                    <a:bodyPr/>
+                    <a:lstStyle/>
+                    <a:p>
+                      <a:pPr algn="ctr"/>
+                      <a:r>
+                        <a:rPr sz="1100" b="1">
+                          <a:solidFill>
+                            <a:srgbClr val="156082"/>
+                          </a:solidFill>
+                          <a:latin typeface="Avenir Next LT Pro"/>
+                        </a:rPr>
+                        <a:t>~$165</a:t>
+                      </a:r>
+                    </a:p>
+                  </a:txBody>
+                  <a:tcPr marL="91440" marT="27432" marB="27432" anchor="ctr">
+                    <a:solidFill>
+                      <a:srgbClr val="F4F6F8"/>
+                    </a:solidFill>
+                  </a:tcPr>
+                </a:tc>
+                <a:tc>
+                  <a:txBody>
+                    <a:bodyPr/>
+                    <a:lstStyle/>
+                    <a:p>
+                      <a:pPr algn="l"/>
+                      <a:r>
+                        <a:rPr sz="1100" b="1">
+                          <a:solidFill>
+                            <a:srgbClr val="000000"/>
+                          </a:solidFill>
+                          <a:latin typeface="Avenir Next LT Pro"/>
+                        </a:rPr>
+                        <a:t>In line with Street → Hold</a:t>
+                      </a:r>
+                    </a:p>
+                  </a:txBody>
+                  <a:tcPr marL="91440" marT="27432" marB="27432" anchor="ctr">
+                    <a:solidFill>
+                      <a:srgbClr val="F4F6F8"/>
+                    </a:solidFill>
+                  </a:tcPr>
+                </a:tc>
+              </a:tr>
+              <a:tr h="457200">
+                <a:tc>
+                  <a:txBody>
+                    <a:bodyPr/>
+                    <a:lstStyle/>
+                    <a:p>
+                      <a:pPr algn="l"/>
+                      <a:r>
+                        <a:rPr sz="1100" b="1">
+                          <a:solidFill>
+                            <a:srgbClr val="156082"/>
+                          </a:solidFill>
+                          <a:latin typeface="Avenir Next LT Pro Demi"/>
+                        </a:rPr>
+                        <a:t>My upside case — if de-risked</a:t>
+                      </a:r>
+                    </a:p>
+                  </a:txBody>
+                  <a:tcPr marL="91440" marT="27432" marB="27432" anchor="ctr">
+                    <a:solidFill>
+                      <a:srgbClr val="FFFFFF"/>
+                    </a:solidFill>
+                  </a:tcPr>
+                </a:tc>
+                <a:tc>
+                  <a:txBody>
+                    <a:bodyPr/>
+                    <a:lstStyle/>
+                    <a:p>
+                      <a:pPr algn="ctr"/>
+                      <a:r>
+                        <a:rPr sz="1100" b="1">
+                          <a:solidFill>
+                            <a:srgbClr val="156082"/>
+                          </a:solidFill>
+                          <a:latin typeface="Avenir Next LT Pro"/>
+                        </a:rPr>
+                        <a:t>~$240 FV / ~$310 tgt</a:t>
+                      </a:r>
+                    </a:p>
+                  </a:txBody>
+                  <a:tcPr marL="91440" marT="27432" marB="27432" anchor="ctr">
+                    <a:solidFill>
+                      <a:srgbClr val="FFFFFF"/>
+                    </a:solidFill>
+                  </a:tcPr>
+                </a:tc>
+                <a:tc>
+                  <a:txBody>
+                    <a:bodyPr/>
+                    <a:lstStyle/>
+                    <a:p>
+                      <a:pPr algn="l"/>
+                      <a:r>
+                        <a:rPr sz="1100" b="1">
+                          <a:solidFill>
+                            <a:srgbClr val="000000"/>
+                          </a:solidFill>
+                          <a:latin typeface="Avenir Next LT Pro"/>
+                        </a:rPr>
+                        <a:t>The prize (~45–90%) if triggers hit</a:t>
+                      </a:r>
+                    </a:p>
+                  </a:txBody>
+                  <a:tcPr marL="91440" marT="27432" marB="27432" anchor="ctr">
+                    <a:solidFill>
+                      <a:srgbClr val="FFFFFF"/>
+                    </a:solidFill>
+                  </a:tcPr>
+                </a:tc>
+              </a:tr>
+            </a:tbl>
+          </a:graphicData>
+        </a:graphic>
+      </p:graphicFrame>
       <p:sp>
         <p:nvSpPr>
-          <p:cNvPr id="4" name="TextBox 3"/>
+          <p:cNvPr id="5" name="TextBox 4"/>
           <p:cNvSpPr txBox="1"/>
           <p:nvPr/>
         </p:nvSpPr>
         <p:spPr>
           <a:xfrm>
-            <a:off x="457200" y="1097280"/>
-            <a:ext cx="8229600" cy="457200"/>
+            <a:off x="457200" y="4572000"/>
+            <a:ext cx="8229600" cy="1005840"/>
           </a:xfrm>
           <a:prstGeom prst="rect">
             <a:avLst/>
@@ -12673,27 +13406,129 @@
           <a:lstStyle/>
           <a:p>
             <a:r>
-              <a:rPr sz="1200" i="1">
-                <a:solidFill>
-                  <a:srgbClr val="707070"/>
+              <a:rPr sz="1200">
+                <a:solidFill>
+                  <a:srgbClr val="000000"/>
                 </a:solidFill>
                 <a:latin typeface="Avenir Next LT Pro"/>
               </a:rPr>
-              <a:t>Hold today. Three proofs would flip it to Buy — even at a higher price, because the risk would be lower.</a:t>
+              <a:t>Takeaway: I agree with the Street on what's proven (~$165 ≈ the price). My differentiation isn't a higher "today" value — it's a defined view on the conditional upside (~$240–310) that the Street won't credit until Estates and margins prove out.</a:t>
+            </a:r>
+          </a:p>
+          <a:p>
+            <a:pPr>
+              <a:spcBef>
+                <a:spcPts val="800"/>
+              </a:spcBef>
+            </a:pPr>
+            <a:r>
+              <a:rPr sz="1200" b="1">
+                <a:solidFill>
+                  <a:srgbClr val="000000"/>
+                </a:solidFill>
+                <a:latin typeface="Avenir Next LT Pro Demi"/>
+              </a:rPr>
+              <a:t>The Hold is the discipline: I won't pay for that upside on hope — I wait for the triggers, then buy even higher.</a:t>
             </a:r>
           </a:p>
         </p:txBody>
       </p:sp>
       <p:sp>
         <p:nvSpPr>
-          <p:cNvPr id="5" name="Rectangle 4"/>
+          <p:cNvPr id="6" name="TextBox 5"/>
+          <p:cNvSpPr txBox="1"/>
+          <p:nvPr/>
+        </p:nvSpPr>
+        <p:spPr>
+          <a:xfrm>
+            <a:off x="457200" y="6355080"/>
+            <a:ext cx="8229600" cy="365760"/>
+          </a:xfrm>
+          <a:prstGeom prst="rect">
+            <a:avLst/>
+          </a:prstGeom>
+          <a:noFill/>
+        </p:spPr>
+        <p:txBody>
+          <a:bodyPr wrap="none">
+            <a:spAutoFit/>
+          </a:bodyPr>
+          <a:lstStyle/>
+          <a:p>
+            <a:r>
+              <a:rPr sz="750" i="1">
+                <a:solidFill>
+                  <a:srgbClr val="707070"/>
+                </a:solidFill>
+                <a:latin typeface="Avenir Next LT Pro"/>
+              </a:rPr>
+              <a:t>Sources: sell-side price-target range &amp; Simply Wall St narrative fair values (per recent research); author's estimates.</a:t>
+            </a:r>
+          </a:p>
+        </p:txBody>
+      </p:sp>
+    </p:spTree>
+  </p:cSld>
+  <p:clrMapOvr>
+    <a:masterClrMapping/>
+  </p:clrMapOvr>
+</p:sld>
+</file>
+
+<file path=ppt/slides/slide6.xml><?xml version="1.0" encoding="utf-8"?>
+<p:sld xmlns:a="http://schemas.openxmlformats.org/drawingml/2006/main" xmlns:p="http://schemas.openxmlformats.org/presentationml/2006/main" xmlns:r="http://schemas.openxmlformats.org/officeDocument/2006/relationships">
+  <p:cSld>
+    <p:spTree>
+      <p:nvGrpSpPr>
+        <p:cNvPr id="1" name=""/>
+        <p:cNvGrpSpPr/>
+        <p:nvPr/>
+      </p:nvGrpSpPr>
+      <p:grpSpPr/>
+      <p:sp>
+        <p:nvSpPr>
+          <p:cNvPr id="2" name="TextBox 1"/>
+          <p:cNvSpPr txBox="1"/>
+          <p:nvPr/>
+        </p:nvSpPr>
+        <p:spPr>
+          <a:xfrm>
+            <a:off x="457200" y="365760"/>
+            <a:ext cx="8229600" cy="548640"/>
+          </a:xfrm>
+          <a:prstGeom prst="rect">
+            <a:avLst/>
+          </a:prstGeom>
+          <a:noFill/>
+        </p:spPr>
+        <p:txBody>
+          <a:bodyPr wrap="square">
+            <a:spAutoFit/>
+          </a:bodyPr>
+          <a:lstStyle/>
+          <a:p>
+            <a:r>
+              <a:rPr sz="2200">
+                <a:solidFill>
+                  <a:srgbClr val="000000"/>
+                </a:solidFill>
+                <a:latin typeface="Avenir Next LT Pro Demi"/>
+              </a:rPr>
+              <a:t>What Would Make Me a Buyer</a:t>
+            </a:r>
+          </a:p>
+        </p:txBody>
+      </p:sp>
+      <p:sp>
+        <p:nvSpPr>
+          <p:cNvPr id="3" name="Rectangle 2"/>
           <p:cNvSpPr/>
           <p:nvPr/>
         </p:nvSpPr>
         <p:spPr>
           <a:xfrm>
-            <a:off x="457200" y="1691640"/>
-            <a:ext cx="82296" cy="1143000"/>
+            <a:off x="457200" y="960120"/>
+            <a:ext cx="8229600" cy="25603"/>
           </a:xfrm>
           <a:prstGeom prst="rect">
             <a:avLst/>
@@ -12729,14 +13564,14 @@
       </p:sp>
       <p:sp>
         <p:nvSpPr>
-          <p:cNvPr id="6" name="TextBox 5"/>
+          <p:cNvPr id="4" name="TextBox 3"/>
           <p:cNvSpPr txBox="1"/>
           <p:nvPr/>
         </p:nvSpPr>
         <p:spPr>
           <a:xfrm>
-            <a:off x="658368" y="1691640"/>
-            <a:ext cx="2331720" cy="1143000"/>
+            <a:off x="457200" y="1097280"/>
+            <a:ext cx="8229600" cy="457200"/>
           </a:xfrm>
           <a:prstGeom prst="rect">
             <a:avLst/>
@@ -12744,73 +13579,39 @@
           <a:noFill/>
         </p:spPr>
         <p:txBody>
-          <a:bodyPr wrap="square" anchor="ctr">
+          <a:bodyPr wrap="square">
             <a:spAutoFit/>
           </a:bodyPr>
           <a:lstStyle/>
           <a:p>
             <a:r>
-              <a:rPr sz="1300" b="1">
-                <a:solidFill>
-                  <a:srgbClr val="000000"/>
-                </a:solidFill>
-                <a:latin typeface="Avenir Next LT Pro Demi"/>
+              <a:rPr sz="1200" i="1">
+                <a:solidFill>
+                  <a:srgbClr val="707070"/>
+                </a:solidFill>
+                <a:latin typeface="Avenir Next LT Pro"/>
               </a:rPr>
-              <a:t>1 — Core recovery</a:t>
+              <a:t>Hold today. Three proofs would flip it to Buy — even at a higher price, because the risk would be lower.</a:t>
             </a:r>
           </a:p>
         </p:txBody>
       </p:sp>
       <p:sp>
         <p:nvSpPr>
-          <p:cNvPr id="7" name="TextBox 6"/>
-          <p:cNvSpPr txBox="1"/>
-          <p:nvPr/>
-        </p:nvSpPr>
-        <p:spPr>
-          <a:xfrm>
-            <a:off x="3063240" y="1691640"/>
-            <a:ext cx="5623560" cy="1143000"/>
-          </a:xfrm>
-          <a:prstGeom prst="rect">
-            <a:avLst/>
-          </a:prstGeom>
-          <a:noFill/>
-        </p:spPr>
-        <p:txBody>
-          <a:bodyPr wrap="square" anchor="ctr">
-            <a:spAutoFit/>
-          </a:bodyPr>
-          <a:lstStyle/>
-          <a:p>
-            <a:r>
-              <a:rPr sz="1150">
-                <a:solidFill>
-                  <a:srgbClr val="000000"/>
-                </a:solidFill>
-                <a:latin typeface="Avenir Next LT Pro"/>
-              </a:rPr>
-              <a:t>Core revenue re-accelerating in or above the 4.5–8% FY26 guide and a return to profitability — a trend, not one quarter. Q2 FY26 guides to just +0.5–2.5%, so the back-half acceleration has to show up.</a:t>
-            </a:r>
-          </a:p>
-        </p:txBody>
-      </p:sp>
-      <p:sp>
-        <p:nvSpPr>
-          <p:cNvPr id="8" name="Rectangle 7"/>
+          <p:cNvPr id="5" name="Rectangle 4"/>
           <p:cNvSpPr/>
           <p:nvPr/>
         </p:nvSpPr>
         <p:spPr>
           <a:xfrm>
-            <a:off x="457200" y="2999232"/>
+            <a:off x="457200" y="1691640"/>
             <a:ext cx="82296" cy="1143000"/>
           </a:xfrm>
           <a:prstGeom prst="rect">
             <a:avLst/>
           </a:prstGeom>
           <a:solidFill>
-            <a:srgbClr val="E97132"/>
+            <a:srgbClr val="156082"/>
           </a:solidFill>
           <a:ln>
             <a:noFill/>
@@ -12840,13 +13641,13 @@
       </p:sp>
       <p:sp>
         <p:nvSpPr>
-          <p:cNvPr id="9" name="TextBox 8"/>
+          <p:cNvPr id="6" name="TextBox 5"/>
           <p:cNvSpPr txBox="1"/>
           <p:nvPr/>
         </p:nvSpPr>
         <p:spPr>
           <a:xfrm>
-            <a:off x="658368" y="2999232"/>
+            <a:off x="658368" y="1691640"/>
             <a:ext cx="2331720" cy="1143000"/>
           </a:xfrm>
           <a:prstGeom prst="rect">
@@ -12867,20 +13668,20 @@
                 </a:solidFill>
                 <a:latin typeface="Avenir Next LT Pro Demi"/>
               </a:rPr>
-              <a:t>2 — Evidence Estates is working</a:t>
+              <a:t>1 — Core recovery</a:t>
             </a:r>
           </a:p>
         </p:txBody>
       </p:sp>
       <p:sp>
         <p:nvSpPr>
-          <p:cNvPr id="10" name="TextBox 9"/>
+          <p:cNvPr id="7" name="TextBox 6"/>
           <p:cNvSpPr txBox="1"/>
           <p:nvPr/>
         </p:nvSpPr>
         <p:spPr>
           <a:xfrm>
-            <a:off x="3063240" y="2999232"/>
+            <a:off x="3063240" y="1691640"/>
             <a:ext cx="5623560" cy="1143000"/>
           </a:xfrm>
           <a:prstGeom prst="rect">
@@ -12901,27 +13702,27 @@
                 </a:solidFill>
                 <a:latin typeface="Avenir Next LT Pro"/>
               </a:rPr>
-              <a:t>Actual revenue contribution and gallery traction. Estates launched Jun 2026 — there is zero results data yet. First read: Q2 FY2026.</a:t>
+              <a:t>Core revenue re-accelerating in or above the 4.5–8% FY26 guide and a return to profitability — a trend, not one quarter. Q2 FY26 guides to just +0.5–2.5%, so the back-half acceleration has to show up.</a:t>
             </a:r>
           </a:p>
         </p:txBody>
       </p:sp>
       <p:sp>
         <p:nvSpPr>
-          <p:cNvPr id="11" name="Rectangle 10"/>
+          <p:cNvPr id="8" name="Rectangle 7"/>
           <p:cNvSpPr/>
           <p:nvPr/>
         </p:nvSpPr>
         <p:spPr>
           <a:xfrm>
-            <a:off x="457200" y="4306824"/>
+            <a:off x="457200" y="2999232"/>
             <a:ext cx="82296" cy="1143000"/>
           </a:xfrm>
           <a:prstGeom prst="rect">
             <a:avLst/>
           </a:prstGeom>
           <a:solidFill>
-            <a:srgbClr val="196B24"/>
+            <a:srgbClr val="E97132"/>
           </a:solidFill>
           <a:ln>
             <a:noFill/>
@@ -12951,6 +13752,117 @@
       </p:sp>
       <p:sp>
         <p:nvSpPr>
+          <p:cNvPr id="9" name="TextBox 8"/>
+          <p:cNvSpPr txBox="1"/>
+          <p:nvPr/>
+        </p:nvSpPr>
+        <p:spPr>
+          <a:xfrm>
+            <a:off x="658368" y="2999232"/>
+            <a:ext cx="2331720" cy="1143000"/>
+          </a:xfrm>
+          <a:prstGeom prst="rect">
+            <a:avLst/>
+          </a:prstGeom>
+          <a:noFill/>
+        </p:spPr>
+        <p:txBody>
+          <a:bodyPr wrap="square" anchor="ctr">
+            <a:spAutoFit/>
+          </a:bodyPr>
+          <a:lstStyle/>
+          <a:p>
+            <a:r>
+              <a:rPr sz="1300" b="1">
+                <a:solidFill>
+                  <a:srgbClr val="000000"/>
+                </a:solidFill>
+                <a:latin typeface="Avenir Next LT Pro Demi"/>
+              </a:rPr>
+              <a:t>2 — Evidence Estates is working</a:t>
+            </a:r>
+          </a:p>
+        </p:txBody>
+      </p:sp>
+      <p:sp>
+        <p:nvSpPr>
+          <p:cNvPr id="10" name="TextBox 9"/>
+          <p:cNvSpPr txBox="1"/>
+          <p:nvPr/>
+        </p:nvSpPr>
+        <p:spPr>
+          <a:xfrm>
+            <a:off x="3063240" y="2999232"/>
+            <a:ext cx="5623560" cy="1143000"/>
+          </a:xfrm>
+          <a:prstGeom prst="rect">
+            <a:avLst/>
+          </a:prstGeom>
+          <a:noFill/>
+        </p:spPr>
+        <p:txBody>
+          <a:bodyPr wrap="square" anchor="ctr">
+            <a:spAutoFit/>
+          </a:bodyPr>
+          <a:lstStyle/>
+          <a:p>
+            <a:r>
+              <a:rPr sz="1150">
+                <a:solidFill>
+                  <a:srgbClr val="000000"/>
+                </a:solidFill>
+                <a:latin typeface="Avenir Next LT Pro"/>
+              </a:rPr>
+              <a:t>Actual revenue contribution and gallery traction. Estates launched Jun 2026 — there is zero results data yet. First read: Q2 FY2026.</a:t>
+            </a:r>
+          </a:p>
+        </p:txBody>
+      </p:sp>
+      <p:sp>
+        <p:nvSpPr>
+          <p:cNvPr id="11" name="Rectangle 10"/>
+          <p:cNvSpPr/>
+          <p:nvPr/>
+        </p:nvSpPr>
+        <p:spPr>
+          <a:xfrm>
+            <a:off x="457200" y="4306824"/>
+            <a:ext cx="82296" cy="1143000"/>
+          </a:xfrm>
+          <a:prstGeom prst="rect">
+            <a:avLst/>
+          </a:prstGeom>
+          <a:solidFill>
+            <a:srgbClr val="196B24"/>
+          </a:solidFill>
+          <a:ln>
+            <a:noFill/>
+          </a:ln>
+        </p:spPr>
+        <p:style>
+          <a:lnRef idx="1">
+            <a:schemeClr val="accent1"/>
+          </a:lnRef>
+          <a:fillRef idx="3">
+            <a:schemeClr val="accent1"/>
+          </a:fillRef>
+          <a:effectRef idx="2">
+            <a:schemeClr val="accent1"/>
+          </a:effectRef>
+          <a:fontRef idx="minor">
+            <a:schemeClr val="lt1"/>
+          </a:fontRef>
+        </p:style>
+        <p:txBody>
+          <a:bodyPr rtlCol="0" anchor="ctr"/>
+          <a:lstStyle/>
+          <a:p>
+            <a:pPr algn="ctr"/>
+          </a:p>
+        </p:txBody>
+      </p:sp>
+      <p:sp>
+        <p:nvSpPr>
           <p:cNvPr id="12" name="TextBox 11"/>
           <p:cNvSpPr txBox="1"/>
           <p:nvPr/>
@@ -13093,7 +14005,7 @@
 </p:sld>
 </file>
 
-<file path=ppt/slides/slide6.xml><?xml version="1.0" encoding="utf-8"?>
+<file path=ppt/slides/slide7.xml><?xml version="1.0" encoding="utf-8"?>
 <p:sld xmlns:a="http://schemas.openxmlformats.org/drawingml/2006/main" xmlns:r="http://schemas.openxmlformats.org/officeDocument/2006/relationships" xmlns:p="http://schemas.openxmlformats.org/presentationml/2006/main">
   <p:cSld>
     <p:spTree>
@@ -13176,7 +14088,7 @@
 </p:sld>
 </file>
 
-<file path=ppt/slides/slide7.xml><?xml version="1.0" encoding="utf-8"?>
+<file path=ppt/slides/slide8.xml><?xml version="1.0" encoding="utf-8"?>
 <p:sld xmlns:a="http://schemas.openxmlformats.org/drawingml/2006/main" xmlns:r="http://schemas.openxmlformats.org/officeDocument/2006/relationships" xmlns:p="http://schemas.openxmlformats.org/presentationml/2006/main">
   <p:cSld>
     <p:spTree>
@@ -14695,7 +15607,7 @@
 </p:sld>
 </file>
 
-<file path=ppt/slides/slide8.xml><?xml version="1.0" encoding="utf-8"?>
+<file path=ppt/slides/slide9.xml><?xml version="1.0" encoding="utf-8"?>
 <p:sld xmlns:a="http://schemas.openxmlformats.org/drawingml/2006/main" xmlns:r="http://schemas.openxmlformats.org/officeDocument/2006/relationships" xmlns:p="http://schemas.openxmlformats.org/presentationml/2006/main">
   <p:cSld>
     <p:spTree>
@@ -14762,1127 +15674,6 @@
       </p:transition>
     </mc:Fallback>
   </mc:AlternateContent>
-</p:sld>
-</file>
-
-<file path=ppt/slides/slide9.xml><?xml version="1.0" encoding="utf-8"?>
-<p:sld xmlns:a="http://schemas.openxmlformats.org/drawingml/2006/main" xmlns:r="http://schemas.openxmlformats.org/officeDocument/2006/relationships" xmlns:p="http://schemas.openxmlformats.org/presentationml/2006/main">
-  <p:cSld>
-    <p:spTree>
-      <p:nvGrpSpPr>
-        <p:cNvPr id="1" name=""/>
-        <p:cNvGrpSpPr/>
-        <p:nvPr/>
-      </p:nvGrpSpPr>
-      <p:grpSpPr>
-        <a:xfrm>
-          <a:off x="0" y="0"/>
-          <a:ext cx="0" cy="0"/>
-          <a:chOff x="0" y="0"/>
-          <a:chExt cx="0" cy="0"/>
-        </a:xfrm>
-      </p:grpSpPr>
-      <p:sp>
-        <p:nvSpPr>
-          <p:cNvPr id="2" name="TextBox 1"/>
-          <p:cNvSpPr txBox="1"/>
-          <p:nvPr/>
-        </p:nvSpPr>
-        <p:spPr>
-          <a:xfrm>
-            <a:off x="457200" y="320040"/>
-            <a:ext cx="8229600" cy="446276"/>
-          </a:xfrm>
-          <a:prstGeom prst="rect">
-            <a:avLst/>
-          </a:prstGeom>
-          <a:noFill/>
-        </p:spPr>
-        <p:txBody>
-          <a:bodyPr wrap="square">
-            <a:spAutoFit/>
-          </a:bodyPr>
-          <a:lstStyle/>
-          <a:p>
-            <a:r>
-              <a:rPr sz="2300" b="0" i="0" dirty="0">
-                <a:latin typeface="Avenir Next LT Pro Demi"/>
-              </a:rPr>
-              <a:t>Valuation — EV/EBITDA, FY2027E</a:t>
-            </a:r>
-          </a:p>
-        </p:txBody>
-      </p:sp>
-      <p:sp>
-        <p:nvSpPr>
-          <p:cNvPr id="5" name="TextBox 4"/>
-          <p:cNvSpPr txBox="1"/>
-          <p:nvPr/>
-        </p:nvSpPr>
-        <p:spPr>
-          <a:xfrm>
-            <a:off x="457200" y="1051560"/>
-            <a:ext cx="8229600" cy="274320"/>
-          </a:xfrm>
-          <a:prstGeom prst="rect">
-            <a:avLst/>
-          </a:prstGeom>
-          <a:noFill/>
-        </p:spPr>
-        <p:txBody>
-          <a:bodyPr wrap="none">
-            <a:spAutoFit/>
-          </a:bodyPr>
-          <a:lstStyle/>
-          <a:p>
-            <a:r>
-              <a:rPr sz="900" b="0" i="1">
-                <a:solidFill>
-                  <a:srgbClr val="B0B0B0"/>
-                </a:solidFill>
-                <a:latin typeface="Avenir Next LT Pro"/>
-              </a:rPr>
-              <a:t>[ narrative / commentary to be written ]</a:t>
-            </a:r>
-          </a:p>
-        </p:txBody>
-      </p:sp>
-      <p:sp>
-        <p:nvSpPr>
-          <p:cNvPr id="6" name="Rectangle 5"/>
-          <p:cNvSpPr/>
-          <p:nvPr/>
-        </p:nvSpPr>
-        <p:spPr>
-          <a:xfrm>
-            <a:off x="457200" y="1508760"/>
-            <a:ext cx="1572768" cy="914400"/>
-          </a:xfrm>
-          <a:prstGeom prst="rect">
-            <a:avLst/>
-          </a:prstGeom>
-          <a:solidFill>
-            <a:srgbClr val="E8E8E8"/>
-          </a:solidFill>
-          <a:ln w="15875">
-            <a:solidFill>
-              <a:srgbClr val="0E2841"/>
-            </a:solidFill>
-          </a:ln>
-        </p:spPr>
-        <p:style>
-          <a:lnRef idx="1">
-            <a:schemeClr val="accent1"/>
-          </a:lnRef>
-          <a:fillRef idx="3">
-            <a:schemeClr val="accent1"/>
-          </a:fillRef>
-          <a:effectRef idx="2">
-            <a:schemeClr val="accent1"/>
-          </a:effectRef>
-          <a:fontRef idx="minor">
-            <a:schemeClr val="lt1"/>
-          </a:fontRef>
-        </p:style>
-        <p:txBody>
-          <a:bodyPr wrap="square" rtlCol="0" anchor="ctr"/>
-          <a:lstStyle/>
-          <a:p>
-            <a:pPr algn="ctr"/>
-            <a:r>
-              <a:rPr sz="900" b="1" i="0">
-                <a:solidFill>
-                  <a:srgbClr val="5A5A5A"/>
-                </a:solidFill>
-                <a:latin typeface="Avenir Next LT Pro Demi"/>
-              </a:rPr>
-              <a:t>FY27E EBITDA</a:t>
-            </a:r>
-          </a:p>
-          <a:p>
-            <a:pPr algn="ctr"/>
-            <a:r>
-              <a:rPr sz="1700" b="1" i="0">
-                <a:solidFill>
-                  <a:srgbClr val="0E2841"/>
-                </a:solidFill>
-                <a:latin typeface="Avenir Next LT Pro Demi"/>
-              </a:rPr>
-              <a:t>$708M</a:t>
-            </a:r>
-          </a:p>
-        </p:txBody>
-      </p:sp>
-      <p:sp>
-        <p:nvSpPr>
-          <p:cNvPr id="7" name="Rectangle 6"/>
-          <p:cNvSpPr/>
-          <p:nvPr/>
-        </p:nvSpPr>
-        <p:spPr>
-          <a:xfrm>
-            <a:off x="2084832" y="1508760"/>
-            <a:ext cx="1572768" cy="914400"/>
-          </a:xfrm>
-          <a:prstGeom prst="rect">
-            <a:avLst/>
-          </a:prstGeom>
-          <a:solidFill>
-            <a:srgbClr val="E8E8E8"/>
-          </a:solidFill>
-          <a:ln w="15875">
-            <a:solidFill>
-              <a:srgbClr val="156082"/>
-            </a:solidFill>
-          </a:ln>
-        </p:spPr>
-        <p:style>
-          <a:lnRef idx="1">
-            <a:schemeClr val="accent1"/>
-          </a:lnRef>
-          <a:fillRef idx="3">
-            <a:schemeClr val="accent1"/>
-          </a:fillRef>
-          <a:effectRef idx="2">
-            <a:schemeClr val="accent1"/>
-          </a:effectRef>
-          <a:fontRef idx="minor">
-            <a:schemeClr val="lt1"/>
-          </a:fontRef>
-        </p:style>
-        <p:txBody>
-          <a:bodyPr wrap="square" rtlCol="0" anchor="ctr"/>
-          <a:lstStyle/>
-          <a:p>
-            <a:pPr algn="ctr"/>
-            <a:r>
-              <a:rPr sz="900" b="1" i="0">
-                <a:solidFill>
-                  <a:srgbClr val="5A5A5A"/>
-                </a:solidFill>
-                <a:latin typeface="Avenir Next LT Pro Demi"/>
-              </a:rPr>
-              <a:t>× Exit Multiple</a:t>
-            </a:r>
-          </a:p>
-          <a:p>
-            <a:pPr algn="ctr"/>
-            <a:r>
-              <a:rPr sz="1700" b="1" i="0">
-                <a:solidFill>
-                  <a:srgbClr val="156082"/>
-                </a:solidFill>
-                <a:latin typeface="Avenir Next LT Pro Demi"/>
-              </a:rPr>
-              <a:t>11×</a:t>
-            </a:r>
-          </a:p>
-        </p:txBody>
-      </p:sp>
-      <p:sp>
-        <p:nvSpPr>
-          <p:cNvPr id="8" name="Rectangle 7"/>
-          <p:cNvSpPr/>
-          <p:nvPr/>
-        </p:nvSpPr>
-        <p:spPr>
-          <a:xfrm>
-            <a:off x="3712464" y="1508760"/>
-            <a:ext cx="1572768" cy="914400"/>
-          </a:xfrm>
-          <a:prstGeom prst="rect">
-            <a:avLst/>
-          </a:prstGeom>
-          <a:solidFill>
-            <a:srgbClr val="E8E8E8"/>
-          </a:solidFill>
-          <a:ln w="15875">
-            <a:solidFill>
-              <a:srgbClr val="0E2841"/>
-            </a:solidFill>
-          </a:ln>
-        </p:spPr>
-        <p:style>
-          <a:lnRef idx="1">
-            <a:schemeClr val="accent1"/>
-          </a:lnRef>
-          <a:fillRef idx="3">
-            <a:schemeClr val="accent1"/>
-          </a:fillRef>
-          <a:effectRef idx="2">
-            <a:schemeClr val="accent1"/>
-          </a:effectRef>
-          <a:fontRef idx="minor">
-            <a:schemeClr val="lt1"/>
-          </a:fontRef>
-        </p:style>
-        <p:txBody>
-          <a:bodyPr wrap="square" rtlCol="0" anchor="ctr"/>
-          <a:lstStyle/>
-          <a:p>
-            <a:pPr algn="ctr"/>
-            <a:r>
-              <a:rPr sz="900" b="1" i="0">
-                <a:solidFill>
-                  <a:srgbClr val="5A5A5A"/>
-                </a:solidFill>
-                <a:latin typeface="Avenir Next LT Pro Demi"/>
-              </a:rPr>
-              <a:t>= Enterprise Value</a:t>
-            </a:r>
-          </a:p>
-          <a:p>
-            <a:pPr algn="ctr"/>
-            <a:r>
-              <a:rPr sz="1700" b="1" i="0">
-                <a:solidFill>
-                  <a:srgbClr val="0E2841"/>
-                </a:solidFill>
-                <a:latin typeface="Avenir Next LT Pro Demi"/>
-              </a:rPr>
-              <a:t>~$7.8B</a:t>
-            </a:r>
-          </a:p>
-        </p:txBody>
-      </p:sp>
-      <p:sp>
-        <p:nvSpPr>
-          <p:cNvPr id="9" name="Rectangle 8"/>
-          <p:cNvSpPr/>
-          <p:nvPr/>
-        </p:nvSpPr>
-        <p:spPr>
-          <a:xfrm>
-            <a:off x="5340096" y="1508760"/>
-            <a:ext cx="1572768" cy="914400"/>
-          </a:xfrm>
-          <a:prstGeom prst="rect">
-            <a:avLst/>
-          </a:prstGeom>
-          <a:solidFill>
-            <a:srgbClr val="E8E8E8"/>
-          </a:solidFill>
-          <a:ln w="15875">
-            <a:solidFill>
-              <a:srgbClr val="E97132"/>
-            </a:solidFill>
-          </a:ln>
-        </p:spPr>
-        <p:style>
-          <a:lnRef idx="1">
-            <a:schemeClr val="accent1"/>
-          </a:lnRef>
-          <a:fillRef idx="3">
-            <a:schemeClr val="accent1"/>
-          </a:fillRef>
-          <a:effectRef idx="2">
-            <a:schemeClr val="accent1"/>
-          </a:effectRef>
-          <a:fontRef idx="minor">
-            <a:schemeClr val="lt1"/>
-          </a:fontRef>
-        </p:style>
-        <p:txBody>
-          <a:bodyPr wrap="square" rtlCol="0" anchor="ctr"/>
-          <a:lstStyle/>
-          <a:p>
-            <a:pPr algn="ctr"/>
-            <a:r>
-              <a:rPr sz="900" b="1" i="0">
-                <a:solidFill>
-                  <a:srgbClr val="5A5A5A"/>
-                </a:solidFill>
-                <a:latin typeface="Avenir Next LT Pro Demi"/>
-              </a:rPr>
-              <a:t>− Net Debt</a:t>
-            </a:r>
-          </a:p>
-          <a:p>
-            <a:pPr algn="ctr"/>
-            <a:r>
-              <a:rPr sz="1700" b="1" i="0">
-                <a:solidFill>
-                  <a:srgbClr val="E97132"/>
-                </a:solidFill>
-                <a:latin typeface="Avenir Next LT Pro Demi"/>
-              </a:rPr>
-              <a:t>$1.9B</a:t>
-            </a:r>
-          </a:p>
-        </p:txBody>
-      </p:sp>
-      <p:sp>
-        <p:nvSpPr>
-          <p:cNvPr id="10" name="Rectangle 9"/>
-          <p:cNvSpPr/>
-          <p:nvPr/>
-        </p:nvSpPr>
-        <p:spPr>
-          <a:xfrm>
-            <a:off x="6967728" y="1508760"/>
-            <a:ext cx="1572768" cy="914400"/>
-          </a:xfrm>
-          <a:prstGeom prst="rect">
-            <a:avLst/>
-          </a:prstGeom>
-          <a:solidFill>
-            <a:srgbClr val="E8E8E8"/>
-          </a:solidFill>
-          <a:ln w="15875">
-            <a:solidFill>
-              <a:srgbClr val="196B24"/>
-            </a:solidFill>
-          </a:ln>
-        </p:spPr>
-        <p:style>
-          <a:lnRef idx="1">
-            <a:schemeClr val="accent1"/>
-          </a:lnRef>
-          <a:fillRef idx="3">
-            <a:schemeClr val="accent1"/>
-          </a:fillRef>
-          <a:effectRef idx="2">
-            <a:schemeClr val="accent1"/>
-          </a:effectRef>
-          <a:fontRef idx="minor">
-            <a:schemeClr val="lt1"/>
-          </a:fontRef>
-        </p:style>
-        <p:txBody>
-          <a:bodyPr wrap="square" rtlCol="0" anchor="ctr"/>
-          <a:lstStyle/>
-          <a:p>
-            <a:pPr algn="ctr"/>
-            <a:r>
-              <a:rPr sz="900" b="1" i="0">
-                <a:solidFill>
-                  <a:srgbClr val="5A5A5A"/>
-                </a:solidFill>
-                <a:latin typeface="Avenir Next LT Pro Demi"/>
-              </a:rPr>
-              <a:t>÷ Shares (19M)</a:t>
-            </a:r>
-          </a:p>
-          <a:p>
-            <a:pPr algn="ctr"/>
-            <a:r>
-              <a:rPr sz="1700" b="1" i="0">
-                <a:solidFill>
-                  <a:srgbClr val="196B24"/>
-                </a:solidFill>
-                <a:latin typeface="Avenir Next LT Pro Demi"/>
-              </a:rPr>
-              <a:t>= ~$310</a:t>
-            </a:r>
-          </a:p>
-        </p:txBody>
-      </p:sp>
-      <p:graphicFrame>
-        <p:nvGraphicFramePr>
-          <p:cNvPr id="11" name="Table 10"/>
-          <p:cNvGraphicFramePr>
-            <a:graphicFrameLocks noGrp="1"/>
-          </p:cNvGraphicFramePr>
-          <p:nvPr>
-            <p:extLst>
-              <p:ext uri="{D42A27DB-BD31-4B8C-83A1-F6EECF244321}">
-                <p14:modId xmlns:p14="http://schemas.microsoft.com/office/powerpoint/2010/main" val="3973473890"/>
-              </p:ext>
-            </p:extLst>
-          </p:nvPr>
-        </p:nvGraphicFramePr>
-        <p:xfrm>
-          <a:off x="457200" y="2880360"/>
-          <a:ext cx="8229600" cy="1536192"/>
-        </p:xfrm>
-        <a:graphic>
-          <a:graphicData uri="http://schemas.openxmlformats.org/drawingml/2006/table">
-            <a:tbl>
-              <a:tblPr>
-                <a:tableStyleId>{5C22544A-7EE6-4342-B048-85BDC9FD1C3A}</a:tableStyleId>
-              </a:tblPr>
-              <a:tblGrid>
-                <a:gridCol w="1554480">
-                  <a:extLst>
-                    <a:ext uri="{9D8B030D-6E8A-4147-A177-3AD203B41FA5}">
-                      <a16:colId xmlns:a16="http://schemas.microsoft.com/office/drawing/2014/main" val="20000"/>
-                    </a:ext>
-                  </a:extLst>
-                </a:gridCol>
-                <a:gridCol w="1335024">
-                  <a:extLst>
-                    <a:ext uri="{9D8B030D-6E8A-4147-A177-3AD203B41FA5}">
-                      <a16:colId xmlns:a16="http://schemas.microsoft.com/office/drawing/2014/main" val="20001"/>
-                    </a:ext>
-                  </a:extLst>
-                </a:gridCol>
-                <a:gridCol w="1335024">
-                  <a:extLst>
-                    <a:ext uri="{9D8B030D-6E8A-4147-A177-3AD203B41FA5}">
-                      <a16:colId xmlns:a16="http://schemas.microsoft.com/office/drawing/2014/main" val="20002"/>
-                    </a:ext>
-                  </a:extLst>
-                </a:gridCol>
-                <a:gridCol w="1335024">
-                  <a:extLst>
-                    <a:ext uri="{9D8B030D-6E8A-4147-A177-3AD203B41FA5}">
-                      <a16:colId xmlns:a16="http://schemas.microsoft.com/office/drawing/2014/main" val="20003"/>
-                    </a:ext>
-                  </a:extLst>
-                </a:gridCol>
-                <a:gridCol w="1335024">
-                  <a:extLst>
-                    <a:ext uri="{9D8B030D-6E8A-4147-A177-3AD203B41FA5}">
-                      <a16:colId xmlns:a16="http://schemas.microsoft.com/office/drawing/2014/main" val="20004"/>
-                    </a:ext>
-                  </a:extLst>
-                </a:gridCol>
-                <a:gridCol w="1335024">
-                  <a:extLst>
-                    <a:ext uri="{9D8B030D-6E8A-4147-A177-3AD203B41FA5}">
-                      <a16:colId xmlns:a16="http://schemas.microsoft.com/office/drawing/2014/main" val="20005"/>
-                    </a:ext>
-                  </a:extLst>
-                </a:gridCol>
-              </a:tblGrid>
-              <a:tr h="384048">
-                <a:tc>
-                  <a:txBody>
-                    <a:bodyPr/>
-                    <a:lstStyle/>
-                    <a:p>
-                      <a:pPr algn="l"/>
-                      <a:r>
-                        <a:rPr sz="1000" b="1" i="0" dirty="0">
-                          <a:solidFill>
-                            <a:srgbClr val="FFFFFF"/>
-                          </a:solidFill>
-                          <a:latin typeface="Avenir Next LT Pro Demi"/>
-                        </a:rPr>
-                        <a:t>Scenario</a:t>
-                      </a:r>
-                    </a:p>
-                  </a:txBody>
-                  <a:tcPr marL="73152" marR="73152" marT="18288" marB="18288" anchor="ctr">
-                    <a:solidFill>
-                      <a:srgbClr val="AF8C49"/>
-                    </a:solidFill>
-                  </a:tcPr>
-                </a:tc>
-                <a:tc>
-                  <a:txBody>
-                    <a:bodyPr/>
-                    <a:lstStyle/>
-                    <a:p>
-                      <a:pPr algn="ctr"/>
-                      <a:r>
-                        <a:rPr sz="1000" b="1" i="0" dirty="0">
-                          <a:solidFill>
-                            <a:srgbClr val="FFFFFF"/>
-                          </a:solidFill>
-                          <a:latin typeface="Avenir Next LT Pro Demi"/>
-                        </a:rPr>
-                        <a:t>Rev CAGR</a:t>
-                      </a:r>
-                    </a:p>
-                  </a:txBody>
-                  <a:tcPr marL="73152" marR="73152" marT="18288" marB="18288" anchor="ctr">
-                    <a:solidFill>
-                      <a:srgbClr val="AF8C49"/>
-                    </a:solidFill>
-                  </a:tcPr>
-                </a:tc>
-                <a:tc>
-                  <a:txBody>
-                    <a:bodyPr/>
-                    <a:lstStyle/>
-                    <a:p>
-                      <a:pPr algn="ctr"/>
-                      <a:r>
-                        <a:rPr sz="1000" b="1" i="0" dirty="0">
-                          <a:solidFill>
-                            <a:srgbClr val="FFFFFF"/>
-                          </a:solidFill>
-                          <a:latin typeface="Avenir Next LT Pro Demi"/>
-                        </a:rPr>
-                        <a:t>EBITDA </a:t>
-                      </a:r>
-                      <a:r>
-                        <a:rPr sz="1000" b="1" i="0" dirty="0" err="1">
-                          <a:solidFill>
-                            <a:srgbClr val="FFFFFF"/>
-                          </a:solidFill>
-                          <a:latin typeface="Avenir Next LT Pro Demi"/>
-                        </a:rPr>
-                        <a:t>Mgn</a:t>
-                      </a:r>
-                      <a:endParaRPr sz="1000" b="1" i="0" dirty="0">
-                        <a:solidFill>
-                          <a:srgbClr val="FFFFFF"/>
-                        </a:solidFill>
-                        <a:latin typeface="Avenir Next LT Pro Demi"/>
-                      </a:endParaRPr>
-                    </a:p>
-                  </a:txBody>
-                  <a:tcPr marL="73152" marR="73152" marT="18288" marB="18288" anchor="ctr">
-                    <a:solidFill>
-                      <a:srgbClr val="AF8C49"/>
-                    </a:solidFill>
-                  </a:tcPr>
-                </a:tc>
-                <a:tc>
-                  <a:txBody>
-                    <a:bodyPr/>
-                    <a:lstStyle/>
-                    <a:p>
-                      <a:pPr algn="ctr"/>
-                      <a:r>
-                        <a:rPr sz="1000" b="1" i="0" dirty="0">
-                          <a:solidFill>
-                            <a:srgbClr val="FFFFFF"/>
-                          </a:solidFill>
-                          <a:latin typeface="Avenir Next LT Pro Demi"/>
-                        </a:rPr>
-                        <a:t>Exit Mult</a:t>
-                      </a:r>
-                    </a:p>
-                  </a:txBody>
-                  <a:tcPr marL="73152" marR="73152" marT="18288" marB="18288" anchor="ctr">
-                    <a:solidFill>
-                      <a:srgbClr val="AF8C49"/>
-                    </a:solidFill>
-                  </a:tcPr>
-                </a:tc>
-                <a:tc>
-                  <a:txBody>
-                    <a:bodyPr/>
-                    <a:lstStyle/>
-                    <a:p>
-                      <a:pPr algn="ctr"/>
-                      <a:r>
-                        <a:rPr sz="1000" b="1" i="0" dirty="0">
-                          <a:solidFill>
-                            <a:srgbClr val="FFFFFF"/>
-                          </a:solidFill>
-                          <a:latin typeface="Avenir Next LT Pro Demi"/>
-                        </a:rPr>
-                        <a:t>Implied Price</a:t>
-                      </a:r>
-                    </a:p>
-                  </a:txBody>
-                  <a:tcPr marL="73152" marR="73152" marT="18288" marB="18288" anchor="ctr">
-                    <a:solidFill>
-                      <a:srgbClr val="AF8C49"/>
-                    </a:solidFill>
-                  </a:tcPr>
-                </a:tc>
-                <a:tc>
-                  <a:txBody>
-                    <a:bodyPr/>
-                    <a:lstStyle/>
-                    <a:p>
-                      <a:pPr algn="ctr"/>
-                      <a:r>
-                        <a:rPr sz="1000" b="1" i="0" dirty="0">
-                          <a:solidFill>
-                            <a:srgbClr val="FFFFFF"/>
-                          </a:solidFill>
-                          <a:latin typeface="Avenir Next LT Pro Demi"/>
-                        </a:rPr>
-                        <a:t>Prob.</a:t>
-                      </a:r>
-                    </a:p>
-                  </a:txBody>
-                  <a:tcPr marL="73152" marR="73152" marT="18288" marB="18288" anchor="ctr">
-                    <a:solidFill>
-                      <a:srgbClr val="AF8C49"/>
-                    </a:solidFill>
-                  </a:tcPr>
-                </a:tc>
-                <a:extLst>
-                  <a:ext uri="{0D108BD9-81ED-4DB2-BD59-A6C34878D82A}">
-                    <a16:rowId xmlns:a16="http://schemas.microsoft.com/office/drawing/2014/main" val="10000"/>
-                  </a:ext>
-                </a:extLst>
-              </a:tr>
-              <a:tr h="384048">
-                <a:tc>
-                  <a:txBody>
-                    <a:bodyPr/>
-                    <a:lstStyle/>
-                    <a:p>
-                      <a:pPr algn="l"/>
-                      <a:r>
-                        <a:rPr sz="1100" b="1" i="0" dirty="0">
-                          <a:solidFill>
-                            <a:schemeClr val="tx1"/>
-                          </a:solidFill>
-                          <a:latin typeface="Avenir Next LT Pro Demi"/>
-                        </a:rPr>
-                        <a:t>Bull</a:t>
-                      </a:r>
-                    </a:p>
-                  </a:txBody>
-                  <a:tcPr marL="73152" marR="73152" marT="18288" marB="18288" anchor="ctr">
-                    <a:solidFill>
-                      <a:srgbClr val="FFFFFF"/>
-                    </a:solidFill>
-                  </a:tcPr>
-                </a:tc>
-                <a:tc>
-                  <a:txBody>
-                    <a:bodyPr/>
-                    <a:lstStyle/>
-                    <a:p>
-                      <a:pPr algn="ctr"/>
-                      <a:r>
-                        <a:rPr sz="1100" b="0" i="0" dirty="0">
-                          <a:solidFill>
-                            <a:schemeClr val="tx1"/>
-                          </a:solidFill>
-                          <a:latin typeface="Avenir Next LT Pro"/>
-                        </a:rPr>
-                        <a:t>10%</a:t>
-                      </a:r>
-                    </a:p>
-                  </a:txBody>
-                  <a:tcPr marL="73152" marR="73152" marT="18288" marB="18288" anchor="ctr">
-                    <a:solidFill>
-                      <a:srgbClr val="FFFFFF"/>
-                    </a:solidFill>
-                  </a:tcPr>
-                </a:tc>
-                <a:tc>
-                  <a:txBody>
-                    <a:bodyPr/>
-                    <a:lstStyle/>
-                    <a:p>
-                      <a:pPr algn="ctr"/>
-                      <a:r>
-                        <a:rPr sz="1100" b="0" i="0">
-                          <a:solidFill>
-                            <a:schemeClr val="tx1"/>
-                          </a:solidFill>
-                          <a:latin typeface="Avenir Next LT Pro"/>
-                        </a:rPr>
-                        <a:t>20%</a:t>
-                      </a:r>
-                    </a:p>
-                  </a:txBody>
-                  <a:tcPr marL="73152" marR="73152" marT="18288" marB="18288" anchor="ctr">
-                    <a:solidFill>
-                      <a:srgbClr val="FFFFFF"/>
-                    </a:solidFill>
-                  </a:tcPr>
-                </a:tc>
-                <a:tc>
-                  <a:txBody>
-                    <a:bodyPr/>
-                    <a:lstStyle/>
-                    <a:p>
-                      <a:pPr algn="ctr"/>
-                      <a:r>
-                        <a:rPr sz="1100" b="0" i="0">
-                          <a:solidFill>
-                            <a:schemeClr val="tx1"/>
-                          </a:solidFill>
-                          <a:latin typeface="Avenir Next LT Pro"/>
-                        </a:rPr>
-                        <a:t>13×</a:t>
-                      </a:r>
-                    </a:p>
-                  </a:txBody>
-                  <a:tcPr marL="73152" marR="73152" marT="18288" marB="18288" anchor="ctr">
-                    <a:solidFill>
-                      <a:srgbClr val="FFFFFF"/>
-                    </a:solidFill>
-                  </a:tcPr>
-                </a:tc>
-                <a:tc>
-                  <a:txBody>
-                    <a:bodyPr/>
-                    <a:lstStyle/>
-                    <a:p>
-                      <a:pPr algn="ctr"/>
-                      <a:r>
-                        <a:rPr sz="1100" b="0" i="0">
-                          <a:solidFill>
-                            <a:schemeClr val="tx1"/>
-                          </a:solidFill>
-                          <a:latin typeface="Avenir Next LT Pro"/>
-                        </a:rPr>
-                        <a:t>~$562</a:t>
-                      </a:r>
-                    </a:p>
-                  </a:txBody>
-                  <a:tcPr marL="73152" marR="73152" marT="18288" marB="18288" anchor="ctr">
-                    <a:solidFill>
-                      <a:srgbClr val="FFFFFF"/>
-                    </a:solidFill>
-                  </a:tcPr>
-                </a:tc>
-                <a:tc>
-                  <a:txBody>
-                    <a:bodyPr/>
-                    <a:lstStyle/>
-                    <a:p>
-                      <a:pPr algn="ctr"/>
-                      <a:r>
-                        <a:rPr sz="1100" b="0" i="0">
-                          <a:solidFill>
-                            <a:schemeClr val="tx1"/>
-                          </a:solidFill>
-                          <a:latin typeface="Avenir Next LT Pro"/>
-                        </a:rPr>
-                        <a:t>15%</a:t>
-                      </a:r>
-                    </a:p>
-                  </a:txBody>
-                  <a:tcPr marL="73152" marR="73152" marT="18288" marB="18288" anchor="ctr">
-                    <a:solidFill>
-                      <a:srgbClr val="FFFFFF"/>
-                    </a:solidFill>
-                  </a:tcPr>
-                </a:tc>
-                <a:extLst>
-                  <a:ext uri="{0D108BD9-81ED-4DB2-BD59-A6C34878D82A}">
-                    <a16:rowId xmlns:a16="http://schemas.microsoft.com/office/drawing/2014/main" val="10001"/>
-                  </a:ext>
-                </a:extLst>
-              </a:tr>
-              <a:tr h="384048">
-                <a:tc>
-                  <a:txBody>
-                    <a:bodyPr/>
-                    <a:lstStyle/>
-                    <a:p>
-                      <a:pPr algn="l"/>
-                      <a:r>
-                        <a:rPr sz="1100" b="1" i="0">
-                          <a:solidFill>
-                            <a:schemeClr val="tx1"/>
-                          </a:solidFill>
-                          <a:latin typeface="Avenir Next LT Pro Demi"/>
-                        </a:rPr>
-                        <a:t>Base</a:t>
-                      </a:r>
-                    </a:p>
-                  </a:txBody>
-                  <a:tcPr marL="73152" marR="73152" marT="18288" marB="18288" anchor="ctr">
-                    <a:solidFill>
-                      <a:srgbClr val="F4F6F8"/>
-                    </a:solidFill>
-                  </a:tcPr>
-                </a:tc>
-                <a:tc>
-                  <a:txBody>
-                    <a:bodyPr/>
-                    <a:lstStyle/>
-                    <a:p>
-                      <a:pPr algn="ctr"/>
-                      <a:r>
-                        <a:rPr sz="1100" b="0" i="0" dirty="0">
-                          <a:solidFill>
-                            <a:schemeClr val="tx1"/>
-                          </a:solidFill>
-                          <a:latin typeface="Avenir Next LT Pro"/>
-                        </a:rPr>
-                        <a:t>6%</a:t>
-                      </a:r>
-                    </a:p>
-                  </a:txBody>
-                  <a:tcPr marL="73152" marR="73152" marT="18288" marB="18288" anchor="ctr">
-                    <a:solidFill>
-                      <a:srgbClr val="F4F6F8"/>
-                    </a:solidFill>
-                  </a:tcPr>
-                </a:tc>
-                <a:tc>
-                  <a:txBody>
-                    <a:bodyPr/>
-                    <a:lstStyle/>
-                    <a:p>
-                      <a:pPr algn="ctr"/>
-                      <a:r>
-                        <a:rPr sz="1100" b="0" i="0" dirty="0">
-                          <a:solidFill>
-                            <a:schemeClr val="tx1"/>
-                          </a:solidFill>
-                          <a:latin typeface="Avenir Next LT Pro"/>
-                        </a:rPr>
-                        <a:t>17%</a:t>
-                      </a:r>
-                    </a:p>
-                  </a:txBody>
-                  <a:tcPr marL="73152" marR="73152" marT="18288" marB="18288" anchor="ctr">
-                    <a:solidFill>
-                      <a:srgbClr val="F4F6F8"/>
-                    </a:solidFill>
-                  </a:tcPr>
-                </a:tc>
-                <a:tc>
-                  <a:txBody>
-                    <a:bodyPr/>
-                    <a:lstStyle/>
-                    <a:p>
-                      <a:pPr algn="ctr"/>
-                      <a:r>
-                        <a:rPr sz="1100" b="0" i="0" dirty="0">
-                          <a:solidFill>
-                            <a:schemeClr val="tx1"/>
-                          </a:solidFill>
-                          <a:latin typeface="Avenir Next LT Pro"/>
-                        </a:rPr>
-                        <a:t>11×</a:t>
-                      </a:r>
-                    </a:p>
-                  </a:txBody>
-                  <a:tcPr marL="73152" marR="73152" marT="18288" marB="18288" anchor="ctr">
-                    <a:solidFill>
-                      <a:srgbClr val="F4F6F8"/>
-                    </a:solidFill>
-                  </a:tcPr>
-                </a:tc>
-                <a:tc>
-                  <a:txBody>
-                    <a:bodyPr/>
-                    <a:lstStyle/>
-                    <a:p>
-                      <a:pPr algn="ctr"/>
-                      <a:r>
-                        <a:rPr sz="1100" b="0" i="0" dirty="0">
-                          <a:solidFill>
-                            <a:schemeClr val="tx1"/>
-                          </a:solidFill>
-                          <a:latin typeface="Avenir Next LT Pro"/>
-                        </a:rPr>
-                        <a:t>~$310</a:t>
-                      </a:r>
-                    </a:p>
-                  </a:txBody>
-                  <a:tcPr marL="73152" marR="73152" marT="18288" marB="18288" anchor="ctr">
-                    <a:solidFill>
-                      <a:srgbClr val="F4F6F8"/>
-                    </a:solidFill>
-                  </a:tcPr>
-                </a:tc>
-                <a:tc>
-                  <a:txBody>
-                    <a:bodyPr/>
-                    <a:lstStyle/>
-                    <a:p>
-                      <a:pPr algn="ctr"/>
-                      <a:r>
-                        <a:rPr sz="1100" b="0" i="0">
-                          <a:solidFill>
-                            <a:schemeClr val="tx1"/>
-                          </a:solidFill>
-                          <a:latin typeface="Avenir Next LT Pro"/>
-                        </a:rPr>
-                        <a:t>55%</a:t>
-                      </a:r>
-                    </a:p>
-                  </a:txBody>
-                  <a:tcPr marL="73152" marR="73152" marT="18288" marB="18288" anchor="ctr">
-                    <a:solidFill>
-                      <a:srgbClr val="F4F6F8"/>
-                    </a:solidFill>
-                  </a:tcPr>
-                </a:tc>
-                <a:extLst>
-                  <a:ext uri="{0D108BD9-81ED-4DB2-BD59-A6C34878D82A}">
-                    <a16:rowId xmlns:a16="http://schemas.microsoft.com/office/drawing/2014/main" val="10002"/>
-                  </a:ext>
-                </a:extLst>
-              </a:tr>
-              <a:tr h="384048">
-                <a:tc>
-                  <a:txBody>
-                    <a:bodyPr/>
-                    <a:lstStyle/>
-                    <a:p>
-                      <a:pPr algn="l"/>
-                      <a:r>
-                        <a:rPr sz="1100" b="1" i="0">
-                          <a:solidFill>
-                            <a:schemeClr val="tx1"/>
-                          </a:solidFill>
-                          <a:latin typeface="Avenir Next LT Pro Demi"/>
-                        </a:rPr>
-                        <a:t>Bear</a:t>
-                      </a:r>
-                    </a:p>
-                  </a:txBody>
-                  <a:tcPr marL="73152" marR="73152" marT="18288" marB="18288" anchor="ctr">
-                    <a:solidFill>
-                      <a:srgbClr val="FFFFFF"/>
-                    </a:solidFill>
-                  </a:tcPr>
-                </a:tc>
-                <a:tc>
-                  <a:txBody>
-                    <a:bodyPr/>
-                    <a:lstStyle/>
-                    <a:p>
-                      <a:pPr algn="ctr"/>
-                      <a:r>
-                        <a:rPr sz="1100" b="0" i="0">
-                          <a:solidFill>
-                            <a:schemeClr val="tx1"/>
-                          </a:solidFill>
-                          <a:latin typeface="Avenir Next LT Pro"/>
-                        </a:rPr>
-                        <a:t>2%</a:t>
-                      </a:r>
-                    </a:p>
-                  </a:txBody>
-                  <a:tcPr marL="73152" marR="73152" marT="18288" marB="18288" anchor="ctr">
-                    <a:solidFill>
-                      <a:srgbClr val="FFFFFF"/>
-                    </a:solidFill>
-                  </a:tcPr>
-                </a:tc>
-                <a:tc>
-                  <a:txBody>
-                    <a:bodyPr/>
-                    <a:lstStyle/>
-                    <a:p>
-                      <a:pPr algn="ctr"/>
-                      <a:r>
-                        <a:rPr sz="1100" b="0" i="0">
-                          <a:solidFill>
-                            <a:schemeClr val="tx1"/>
-                          </a:solidFill>
-                          <a:latin typeface="Avenir Next LT Pro"/>
-                        </a:rPr>
-                        <a:t>14%</a:t>
-                      </a:r>
-                    </a:p>
-                  </a:txBody>
-                  <a:tcPr marL="73152" marR="73152" marT="18288" marB="18288" anchor="ctr">
-                    <a:solidFill>
-                      <a:srgbClr val="FFFFFF"/>
-                    </a:solidFill>
-                  </a:tcPr>
-                </a:tc>
-                <a:tc>
-                  <a:txBody>
-                    <a:bodyPr/>
-                    <a:lstStyle/>
-                    <a:p>
-                      <a:pPr algn="ctr"/>
-                      <a:r>
-                        <a:rPr sz="1100" b="0" i="0">
-                          <a:solidFill>
-                            <a:schemeClr val="tx1"/>
-                          </a:solidFill>
-                          <a:latin typeface="Avenir Next LT Pro"/>
-                        </a:rPr>
-                        <a:t>8×</a:t>
-                      </a:r>
-                    </a:p>
-                  </a:txBody>
-                  <a:tcPr marL="73152" marR="73152" marT="18288" marB="18288" anchor="ctr">
-                    <a:solidFill>
-                      <a:srgbClr val="FFFFFF"/>
-                    </a:solidFill>
-                  </a:tcPr>
-                </a:tc>
-                <a:tc>
-                  <a:txBody>
-                    <a:bodyPr/>
-                    <a:lstStyle/>
-                    <a:p>
-                      <a:pPr algn="ctr"/>
-                      <a:r>
-                        <a:rPr sz="1100" b="0" i="0">
-                          <a:solidFill>
-                            <a:schemeClr val="tx1"/>
-                          </a:solidFill>
-                          <a:latin typeface="Avenir Next LT Pro"/>
-                        </a:rPr>
-                        <a:t>~$100</a:t>
-                      </a:r>
-                    </a:p>
-                  </a:txBody>
-                  <a:tcPr marL="73152" marR="73152" marT="18288" marB="18288" anchor="ctr">
-                    <a:solidFill>
-                      <a:srgbClr val="FFFFFF"/>
-                    </a:solidFill>
-                  </a:tcPr>
-                </a:tc>
-                <a:tc>
-                  <a:txBody>
-                    <a:bodyPr/>
-                    <a:lstStyle/>
-                    <a:p>
-                      <a:pPr algn="ctr"/>
-                      <a:r>
-                        <a:rPr sz="1100" b="0" i="0" dirty="0">
-                          <a:solidFill>
-                            <a:schemeClr val="tx1"/>
-                          </a:solidFill>
-                          <a:latin typeface="Avenir Next LT Pro"/>
-                        </a:rPr>
-                        <a:t>30%</a:t>
-                      </a:r>
-                    </a:p>
-                  </a:txBody>
-                  <a:tcPr marL="73152" marR="73152" marT="18288" marB="18288" anchor="ctr">
-                    <a:solidFill>
-                      <a:srgbClr val="FFFFFF"/>
-                    </a:solidFill>
-                  </a:tcPr>
-                </a:tc>
-                <a:extLst>
-                  <a:ext uri="{0D108BD9-81ED-4DB2-BD59-A6C34878D82A}">
-                    <a16:rowId xmlns:a16="http://schemas.microsoft.com/office/drawing/2014/main" val="10003"/>
-                  </a:ext>
-                </a:extLst>
-              </a:tr>
-            </a:tbl>
-          </a:graphicData>
-        </a:graphic>
-      </p:graphicFrame>
-      <p:sp>
-        <p:nvSpPr>
-          <p:cNvPr id="12" name="TextBox 11"/>
-          <p:cNvSpPr txBox="1"/>
-          <p:nvPr/>
-        </p:nvSpPr>
-        <p:spPr>
-          <a:xfrm>
-            <a:off x="457200" y="4572000"/>
-            <a:ext cx="8229600" cy="365760"/>
-          </a:xfrm>
-          <a:prstGeom prst="rect">
-            <a:avLst/>
-          </a:prstGeom>
-          <a:noFill/>
-        </p:spPr>
-        <p:txBody>
-          <a:bodyPr wrap="none">
-            <a:spAutoFit/>
-          </a:bodyPr>
-          <a:lstStyle/>
-          <a:p>
-            <a:r>
-              <a:rPr sz="1300" b="1" i="0">
-                <a:solidFill>
-                  <a:srgbClr val="156082"/>
-                </a:solidFill>
-                <a:latin typeface="Avenir Next LT Pro Demi"/>
-              </a:rPr>
-              <a:t>Probability-weighted target: ~$285   (~72% upside from ~$166)</a:t>
-            </a:r>
-          </a:p>
-        </p:txBody>
-      </p:sp>
-    </p:spTree>
-  </p:cSld>
-  <p:clrMapOvr>
-    <a:masterClrMapping/>
-  </p:clrMapOvr>
 </p:sld>
 </file>
 

--- a/RH_Stock_Pitch_updated.pptx
+++ b/RH_Stock_Pitch_updated.pptx
@@ -5015,6 +5015,7 @@
             </a:pPr>
             <a:r>
               <a:rPr lang="en-US" sz="650" i="1">
+                <a:solidFill/>
                 <a:latin typeface="Avenir Next LT Pro" panose="020B0504020202020204" pitchFamily="34" charset="0"/>
               </a:rPr>
               <a:t>The contents of this presentation are confidential and for discussion purposes only. The delivery of this presentation and its contents do not constitute an offer of securities in any existing or to-be-formed issuer or a solicitation of an offer to purchase any such securities by any person.  Offers of securities will only be made by delivery of a Confidential Private Placement Memorandum.  </a:t>
@@ -5024,6 +5025,7 @@
             <a:pPr algn="just" eaLnBrk="0" hangingPunct="0"/>
             <a:r>
               <a:rPr lang="en-US" sz="650" i="1">
+                <a:solidFill/>
                 <a:latin typeface="Avenir Next LT Pro" panose="020B0504020202020204" pitchFamily="34" charset="0"/>
               </a:rPr>
               <a:t>The materials herein are confidential and proprietary.  Accordingly, this presentation is to be treated as strictly confidential and not disclosed, directly or indirectly, to any party other than the person to whom it has been delivered and such person’s professional advisors.  Any distribution of this presentation, in whole or in part, or the divulgence of any of its contents, is unauthorized. Past performance is not an indication of future results, and no representation or warranty is made as to the returns which may be experienced by an investor.</a:t>
@@ -5039,6 +5041,7 @@
             <a:pPr algn="just" eaLnBrk="0" hangingPunct="0"/>
             <a:r>
               <a:rPr lang="en-US" sz="650" i="1">
+                <a:solidFill/>
                 <a:latin typeface="Avenir Next LT Pro" panose="020B0504020202020204" pitchFamily="34" charset="0"/>
               </a:rPr>
               <a:t>The information in this presentation contains forward-looking statements regarding future events, targets or expectations. The commercial real estate market is volatile and unpredictable. There are no guarantees that the historical performance of an investment, Portfolio, or asset class will have a direct correlation with its future performance. The information in this presentation is based on current market conditions, which will fluctuate and may be superseded by subsequent market events or for other reasons.</a:t>
@@ -5109,18 +5112,21 @@
             <a:pPr algn="ctr"/>
             <a:r>
               <a:rPr lang="en-US" sz="2400" dirty="0">
+                <a:solidFill/>
                 <a:latin typeface="Avenir Next LT Pro Demi" panose="020B0704020202020204" pitchFamily="34" charset="0"/>
               </a:rPr>
               <a:t>Restoration Hardware </a:t>
             </a:r>
             <a:r>
               <a:rPr lang="en-US" sz="2400">
+                <a:solidFill/>
                 <a:latin typeface="Avenir Next LT Pro Demi" panose="020B0704020202020204" pitchFamily="34" charset="0"/>
               </a:rPr>
               <a:t>(RH) Stock </a:t>
             </a:r>
             <a:r>
               <a:rPr lang="en-US" sz="2400" dirty="0">
+                <a:solidFill/>
                 <a:latin typeface="Avenir Next LT Pro Demi" panose="020B0704020202020204" pitchFamily="34" charset="0"/>
               </a:rPr>
               <a:t>Pitch</a:t>
@@ -5190,6 +5196,1104 @@
 </file>
 
 <file path=ppt/slides/slide10.xml><?xml version="1.0" encoding="utf-8"?>
+<p:sld xmlns:a="http://schemas.openxmlformats.org/drawingml/2006/main" xmlns:p="http://schemas.openxmlformats.org/presentationml/2006/main" xmlns:r="http://schemas.openxmlformats.org/officeDocument/2006/relationships">
+  <p:cSld>
+    <p:spTree>
+      <p:nvGrpSpPr>
+        <p:cNvPr id="1" name=""/>
+        <p:cNvGrpSpPr/>
+        <p:nvPr/>
+      </p:nvGrpSpPr>
+      <p:grpSpPr/>
+      <p:sp>
+        <p:nvSpPr>
+          <p:cNvPr id="2" name="TextBox 1"/>
+          <p:cNvSpPr txBox="1"/>
+          <p:nvPr/>
+        </p:nvSpPr>
+        <p:spPr>
+          <a:xfrm>
+            <a:off x="457200" y="365760"/>
+            <a:ext cx="8229600" cy="548640"/>
+          </a:xfrm>
+          <a:prstGeom prst="rect">
+            <a:avLst/>
+          </a:prstGeom>
+          <a:noFill/>
+        </p:spPr>
+        <p:txBody>
+          <a:bodyPr wrap="square">
+            <a:spAutoFit/>
+          </a:bodyPr>
+          <a:lstStyle/>
+          <a:p>
+            <a:r>
+              <a:rPr sz="2200" b="0">
+                <a:solidFill>
+                  <a:srgbClr val="000000"/>
+                </a:solidFill>
+                <a:latin typeface="Avenir Next LT Pro Demi"/>
+              </a:rPr>
+              <a:t>The Operator — Gary Friedman</a:t>
+            </a:r>
+          </a:p>
+        </p:txBody>
+      </p:sp>
+      <p:sp>
+        <p:nvSpPr>
+          <p:cNvPr id="3" name="Rectangle 2"/>
+          <p:cNvSpPr/>
+          <p:nvPr/>
+        </p:nvSpPr>
+        <p:spPr>
+          <a:xfrm>
+            <a:off x="457200" y="960120"/>
+            <a:ext cx="8229600" cy="25603"/>
+          </a:xfrm>
+          <a:prstGeom prst="rect">
+            <a:avLst/>
+          </a:prstGeom>
+          <a:solidFill>
+            <a:srgbClr val="9A7B44"/>
+          </a:solidFill>
+          <a:ln>
+            <a:noFill/>
+          </a:ln>
+        </p:spPr>
+        <p:style>
+          <a:lnRef idx="1">
+            <a:schemeClr val="accent1"/>
+          </a:lnRef>
+          <a:fillRef idx="3">
+            <a:schemeClr val="accent1"/>
+          </a:fillRef>
+          <a:effectRef idx="2">
+            <a:schemeClr val="accent1"/>
+          </a:effectRef>
+          <a:fontRef idx="minor">
+            <a:schemeClr val="lt1"/>
+          </a:fontRef>
+        </p:style>
+        <p:txBody>
+          <a:bodyPr rtlCol="0" anchor="ctr"/>
+          <a:lstStyle/>
+          <a:p>
+            <a:pPr algn="ctr"/>
+          </a:p>
+        </p:txBody>
+      </p:sp>
+      <p:sp>
+        <p:nvSpPr>
+          <p:cNvPr id="4" name="Rectangle 3"/>
+          <p:cNvSpPr/>
+          <p:nvPr/>
+        </p:nvSpPr>
+        <p:spPr>
+          <a:xfrm>
+            <a:off x="457200" y="1371600"/>
+            <a:ext cx="82296" cy="1051560"/>
+          </a:xfrm>
+          <a:prstGeom prst="rect">
+            <a:avLst/>
+          </a:prstGeom>
+          <a:solidFill>
+            <a:srgbClr val="9A7B44"/>
+          </a:solidFill>
+          <a:ln>
+            <a:noFill/>
+          </a:ln>
+        </p:spPr>
+        <p:style>
+          <a:lnRef idx="1">
+            <a:schemeClr val="accent1"/>
+          </a:lnRef>
+          <a:fillRef idx="3">
+            <a:schemeClr val="accent1"/>
+          </a:fillRef>
+          <a:effectRef idx="2">
+            <a:schemeClr val="accent1"/>
+          </a:effectRef>
+          <a:fontRef idx="minor">
+            <a:schemeClr val="lt1"/>
+          </a:fontRef>
+        </p:style>
+        <p:txBody>
+          <a:bodyPr rtlCol="0" anchor="ctr"/>
+          <a:lstStyle/>
+          <a:p>
+            <a:pPr algn="ctr"/>
+          </a:p>
+        </p:txBody>
+      </p:sp>
+      <p:sp>
+        <p:nvSpPr>
+          <p:cNvPr id="5" name="TextBox 4"/>
+          <p:cNvSpPr txBox="1"/>
+          <p:nvPr/>
+        </p:nvSpPr>
+        <p:spPr>
+          <a:xfrm>
+            <a:off x="658368" y="1371600"/>
+            <a:ext cx="1965960" cy="1051560"/>
+          </a:xfrm>
+          <a:prstGeom prst="rect">
+            <a:avLst/>
+          </a:prstGeom>
+          <a:noFill/>
+        </p:spPr>
+        <p:txBody>
+          <a:bodyPr wrap="square" anchor="ctr">
+            <a:spAutoFit/>
+          </a:bodyPr>
+          <a:lstStyle/>
+          <a:p>
+            <a:r>
+              <a:rPr sz="1250" b="1">
+                <a:solidFill>
+                  <a:srgbClr val="000000"/>
+                </a:solidFill>
+                <a:latin typeface="Avenir Next LT Pro Demi"/>
+              </a:rPr>
+              <a:t>Role</a:t>
+            </a:r>
+          </a:p>
+        </p:txBody>
+      </p:sp>
+      <p:sp>
+        <p:nvSpPr>
+          <p:cNvPr id="6" name="TextBox 5"/>
+          <p:cNvSpPr txBox="1"/>
+          <p:nvPr/>
+        </p:nvSpPr>
+        <p:spPr>
+          <a:xfrm>
+            <a:off x="2697480" y="1371600"/>
+            <a:ext cx="5989320" cy="1051560"/>
+          </a:xfrm>
+          <a:prstGeom prst="rect">
+            <a:avLst/>
+          </a:prstGeom>
+          <a:noFill/>
+        </p:spPr>
+        <p:txBody>
+          <a:bodyPr wrap="square" anchor="ctr">
+            <a:spAutoFit/>
+          </a:bodyPr>
+          <a:lstStyle/>
+          <a:p>
+            <a:r>
+              <a:rPr sz="1200" b="0">
+                <a:solidFill>
+                  <a:srgbClr val="000000"/>
+                </a:solidFill>
+                <a:latin typeface="Avenir Next LT Pro"/>
+              </a:rPr>
+              <a:t>Chairman &amp; CEO and the brand's creative force (10-K key-man).</a:t>
+            </a:r>
+          </a:p>
+        </p:txBody>
+      </p:sp>
+      <p:sp>
+        <p:nvSpPr>
+          <p:cNvPr id="7" name="Rectangle 6"/>
+          <p:cNvSpPr/>
+          <p:nvPr/>
+        </p:nvSpPr>
+        <p:spPr>
+          <a:xfrm>
+            <a:off x="457200" y="2514600"/>
+            <a:ext cx="82296" cy="1051560"/>
+          </a:xfrm>
+          <a:prstGeom prst="rect">
+            <a:avLst/>
+          </a:prstGeom>
+          <a:solidFill>
+            <a:srgbClr val="196B24"/>
+          </a:solidFill>
+          <a:ln>
+            <a:noFill/>
+          </a:ln>
+        </p:spPr>
+        <p:style>
+          <a:lnRef idx="1">
+            <a:schemeClr val="accent1"/>
+          </a:lnRef>
+          <a:fillRef idx="3">
+            <a:schemeClr val="accent1"/>
+          </a:fillRef>
+          <a:effectRef idx="2">
+            <a:schemeClr val="accent1"/>
+          </a:effectRef>
+          <a:fontRef idx="minor">
+            <a:schemeClr val="lt1"/>
+          </a:fontRef>
+        </p:style>
+        <p:txBody>
+          <a:bodyPr rtlCol="0" anchor="ctr"/>
+          <a:lstStyle/>
+          <a:p>
+            <a:pPr algn="ctr"/>
+          </a:p>
+        </p:txBody>
+      </p:sp>
+      <p:sp>
+        <p:nvSpPr>
+          <p:cNvPr id="8" name="TextBox 7"/>
+          <p:cNvSpPr txBox="1"/>
+          <p:nvPr/>
+        </p:nvSpPr>
+        <p:spPr>
+          <a:xfrm>
+            <a:off x="658368" y="2514600"/>
+            <a:ext cx="1965960" cy="1051560"/>
+          </a:xfrm>
+          <a:prstGeom prst="rect">
+            <a:avLst/>
+          </a:prstGeom>
+          <a:noFill/>
+        </p:spPr>
+        <p:txBody>
+          <a:bodyPr wrap="square" anchor="ctr">
+            <a:spAutoFit/>
+          </a:bodyPr>
+          <a:lstStyle/>
+          <a:p>
+            <a:r>
+              <a:rPr sz="1250" b="1">
+                <a:solidFill>
+                  <a:srgbClr val="000000"/>
+                </a:solidFill>
+                <a:latin typeface="Avenir Next LT Pro Demi"/>
+              </a:rPr>
+              <a:t>Track record</a:t>
+            </a:r>
+          </a:p>
+        </p:txBody>
+      </p:sp>
+      <p:sp>
+        <p:nvSpPr>
+          <p:cNvPr id="9" name="TextBox 8"/>
+          <p:cNvSpPr txBox="1"/>
+          <p:nvPr/>
+        </p:nvSpPr>
+        <p:spPr>
+          <a:xfrm>
+            <a:off x="2697480" y="2514600"/>
+            <a:ext cx="5989320" cy="1051560"/>
+          </a:xfrm>
+          <a:prstGeom prst="rect">
+            <a:avLst/>
+          </a:prstGeom>
+          <a:noFill/>
+        </p:spPr>
+        <p:txBody>
+          <a:bodyPr wrap="square" anchor="ctr">
+            <a:spAutoFit/>
+          </a:bodyPr>
+          <a:lstStyle/>
+          <a:p>
+            <a:r>
+              <a:rPr sz="1200" b="0">
+                <a:solidFill>
+                  <a:srgbClr val="000000"/>
+                </a:solidFill>
+                <a:latin typeface="Avenir Next LT Pro"/>
+              </a:rPr>
+              <a:t>Grew Pottery Barn $50M → $1B+; joined RH in 2001 near bankruptcy.</a:t>
+            </a:r>
+          </a:p>
+        </p:txBody>
+      </p:sp>
+      <p:sp>
+        <p:nvSpPr>
+          <p:cNvPr id="10" name="Rectangle 9"/>
+          <p:cNvSpPr/>
+          <p:nvPr/>
+        </p:nvSpPr>
+        <p:spPr>
+          <a:xfrm>
+            <a:off x="457200" y="3657600"/>
+            <a:ext cx="82296" cy="1051560"/>
+          </a:xfrm>
+          <a:prstGeom prst="rect">
+            <a:avLst/>
+          </a:prstGeom>
+          <a:solidFill>
+            <a:srgbClr val="E97132"/>
+          </a:solidFill>
+          <a:ln>
+            <a:noFill/>
+          </a:ln>
+        </p:spPr>
+        <p:style>
+          <a:lnRef idx="1">
+            <a:schemeClr val="accent1"/>
+          </a:lnRef>
+          <a:fillRef idx="3">
+            <a:schemeClr val="accent1"/>
+          </a:fillRef>
+          <a:effectRef idx="2">
+            <a:schemeClr val="accent1"/>
+          </a:effectRef>
+          <a:fontRef idx="minor">
+            <a:schemeClr val="lt1"/>
+          </a:fontRef>
+        </p:style>
+        <p:txBody>
+          <a:bodyPr rtlCol="0" anchor="ctr"/>
+          <a:lstStyle/>
+          <a:p>
+            <a:pPr algn="ctr"/>
+          </a:p>
+        </p:txBody>
+      </p:sp>
+      <p:sp>
+        <p:nvSpPr>
+          <p:cNvPr id="11" name="TextBox 10"/>
+          <p:cNvSpPr txBox="1"/>
+          <p:nvPr/>
+        </p:nvSpPr>
+        <p:spPr>
+          <a:xfrm>
+            <a:off x="658368" y="3657600"/>
+            <a:ext cx="1965960" cy="1051560"/>
+          </a:xfrm>
+          <a:prstGeom prst="rect">
+            <a:avLst/>
+          </a:prstGeom>
+          <a:noFill/>
+        </p:spPr>
+        <p:txBody>
+          <a:bodyPr wrap="square" anchor="ctr">
+            <a:spAutoFit/>
+          </a:bodyPr>
+          <a:lstStyle/>
+          <a:p>
+            <a:r>
+              <a:rPr sz="1250" b="1">
+                <a:solidFill>
+                  <a:srgbClr val="000000"/>
+                </a:solidFill>
+                <a:latin typeface="Avenir Next LT Pro Demi"/>
+              </a:rPr>
+              <a:t>Skin in the game</a:t>
+            </a:r>
+          </a:p>
+        </p:txBody>
+      </p:sp>
+      <p:sp>
+        <p:nvSpPr>
+          <p:cNvPr id="12" name="TextBox 11"/>
+          <p:cNvSpPr txBox="1"/>
+          <p:nvPr/>
+        </p:nvSpPr>
+        <p:spPr>
+          <a:xfrm>
+            <a:off x="2697480" y="3657600"/>
+            <a:ext cx="5989320" cy="1051560"/>
+          </a:xfrm>
+          <a:prstGeom prst="rect">
+            <a:avLst/>
+          </a:prstGeom>
+          <a:noFill/>
+        </p:spPr>
+        <p:txBody>
+          <a:bodyPr wrap="square" anchor="ctr">
+            <a:spAutoFit/>
+          </a:bodyPr>
+          <a:lstStyle/>
+          <a:p>
+            <a:r>
+              <a:rPr sz="1200" b="0">
+                <a:solidFill>
+                  <a:srgbClr val="000000"/>
+                </a:solidFill>
+                <a:latin typeface="Avenir Next LT Pro"/>
+              </a:rPr>
+              <a:t>Owns ~18% outright (~25% incl. options); bought ~$10M at ~$216 in June 2024.</a:t>
+            </a:r>
+          </a:p>
+        </p:txBody>
+      </p:sp>
+      <p:sp>
+        <p:nvSpPr>
+          <p:cNvPr id="13" name="Rectangle 12"/>
+          <p:cNvSpPr/>
+          <p:nvPr/>
+        </p:nvSpPr>
+        <p:spPr>
+          <a:xfrm>
+            <a:off x="457200" y="4800600"/>
+            <a:ext cx="82296" cy="1051560"/>
+          </a:xfrm>
+          <a:prstGeom prst="rect">
+            <a:avLst/>
+          </a:prstGeom>
+          <a:solidFill>
+            <a:srgbClr val="B03030"/>
+          </a:solidFill>
+          <a:ln>
+            <a:noFill/>
+          </a:ln>
+        </p:spPr>
+        <p:style>
+          <a:lnRef idx="1">
+            <a:schemeClr val="accent1"/>
+          </a:lnRef>
+          <a:fillRef idx="3">
+            <a:schemeClr val="accent1"/>
+          </a:fillRef>
+          <a:effectRef idx="2">
+            <a:schemeClr val="accent1"/>
+          </a:effectRef>
+          <a:fontRef idx="minor">
+            <a:schemeClr val="lt1"/>
+          </a:fontRef>
+        </p:style>
+        <p:txBody>
+          <a:bodyPr rtlCol="0" anchor="ctr"/>
+          <a:lstStyle/>
+          <a:p>
+            <a:pPr algn="ctr"/>
+          </a:p>
+        </p:txBody>
+      </p:sp>
+      <p:sp>
+        <p:nvSpPr>
+          <p:cNvPr id="14" name="TextBox 13"/>
+          <p:cNvSpPr txBox="1"/>
+          <p:nvPr/>
+        </p:nvSpPr>
+        <p:spPr>
+          <a:xfrm>
+            <a:off x="658368" y="4800600"/>
+            <a:ext cx="1965960" cy="1051560"/>
+          </a:xfrm>
+          <a:prstGeom prst="rect">
+            <a:avLst/>
+          </a:prstGeom>
+          <a:noFill/>
+        </p:spPr>
+        <p:txBody>
+          <a:bodyPr wrap="square" anchor="ctr">
+            <a:spAutoFit/>
+          </a:bodyPr>
+          <a:lstStyle/>
+          <a:p>
+            <a:r>
+              <a:rPr sz="1250" b="1">
+                <a:solidFill>
+                  <a:srgbClr val="000000"/>
+                </a:solidFill>
+                <a:latin typeface="Avenir Next LT Pro Demi"/>
+              </a:rPr>
+              <a:t>The double edge</a:t>
+            </a:r>
+          </a:p>
+        </p:txBody>
+      </p:sp>
+      <p:sp>
+        <p:nvSpPr>
+          <p:cNvPr id="15" name="TextBox 14"/>
+          <p:cNvSpPr txBox="1"/>
+          <p:nvPr/>
+        </p:nvSpPr>
+        <p:spPr>
+          <a:xfrm>
+            <a:off x="2697480" y="4800600"/>
+            <a:ext cx="5989320" cy="1051560"/>
+          </a:xfrm>
+          <a:prstGeom prst="rect">
+            <a:avLst/>
+          </a:prstGeom>
+          <a:noFill/>
+        </p:spPr>
+        <p:txBody>
+          <a:bodyPr wrap="square" anchor="ctr">
+            <a:spAutoFit/>
+          </a:bodyPr>
+          <a:lstStyle/>
+          <a:p>
+            <a:r>
+              <a:rPr sz="1200" b="0">
+                <a:solidFill>
+                  <a:srgbClr val="000000"/>
+                </a:solidFill>
+                <a:latin typeface="Avenir Next LT Pro"/>
+              </a:rPr>
+              <a:t>Bold allocator — same conviction drove the buybacks and Estates.</a:t>
+            </a:r>
+          </a:p>
+        </p:txBody>
+      </p:sp>
+      <p:sp>
+        <p:nvSpPr>
+          <p:cNvPr id="16" name="TextBox 15"/>
+          <p:cNvSpPr txBox="1"/>
+          <p:nvPr/>
+        </p:nvSpPr>
+        <p:spPr>
+          <a:xfrm>
+            <a:off x="457200" y="6172200"/>
+            <a:ext cx="8229600" cy="274320"/>
+          </a:xfrm>
+          <a:prstGeom prst="rect">
+            <a:avLst/>
+          </a:prstGeom>
+          <a:noFill/>
+        </p:spPr>
+        <p:txBody>
+          <a:bodyPr wrap="none">
+            <a:spAutoFit/>
+          </a:bodyPr>
+          <a:lstStyle/>
+          <a:p>
+            <a:r>
+              <a:rPr sz="750" b="0" i="1">
+                <a:solidFill>
+                  <a:srgbClr val="707070"/>
+                </a:solidFill>
+                <a:latin typeface="Avenir Next LT Pro"/>
+              </a:rPr>
+              <a:t>Source: RH FY2025 10-K; RH IR &amp; SEC Form 4 (Jun 26, 2024); company bios</a:t>
+            </a:r>
+          </a:p>
+        </p:txBody>
+      </p:sp>
+    </p:spTree>
+  </p:cSld>
+  <p:clrMapOvr>
+    <a:masterClrMapping/>
+  </p:clrMapOvr>
+</p:sld>
+</file>
+
+<file path=ppt/slides/slide11.xml><?xml version="1.0" encoding="utf-8"?>
+<p:sld xmlns:a="http://schemas.openxmlformats.org/drawingml/2006/main" xmlns:p="http://schemas.openxmlformats.org/presentationml/2006/main" xmlns:r="http://schemas.openxmlformats.org/officeDocument/2006/relationships">
+  <p:cSld>
+    <p:spTree>
+      <p:nvGrpSpPr>
+        <p:cNvPr id="1" name=""/>
+        <p:cNvGrpSpPr/>
+        <p:nvPr/>
+      </p:nvGrpSpPr>
+      <p:grpSpPr/>
+      <p:sp>
+        <p:nvSpPr>
+          <p:cNvPr id="2" name="TextBox 1"/>
+          <p:cNvSpPr txBox="1"/>
+          <p:nvPr/>
+        </p:nvSpPr>
+        <p:spPr>
+          <a:xfrm>
+            <a:off x="457200" y="365760"/>
+            <a:ext cx="8229600" cy="548640"/>
+          </a:xfrm>
+          <a:prstGeom prst="rect">
+            <a:avLst/>
+          </a:prstGeom>
+          <a:noFill/>
+        </p:spPr>
+        <p:txBody>
+          <a:bodyPr wrap="square">
+            <a:spAutoFit/>
+          </a:bodyPr>
+          <a:lstStyle/>
+          <a:p>
+            <a:r>
+              <a:rPr sz="2200" b="0">
+                <a:solidFill>
+                  <a:srgbClr val="000000"/>
+                </a:solidFill>
+                <a:latin typeface="Avenir Next LT Pro Demi"/>
+              </a:rPr>
+              <a:t>Is It Working?</a:t>
+            </a:r>
+          </a:p>
+        </p:txBody>
+      </p:sp>
+      <p:sp>
+        <p:nvSpPr>
+          <p:cNvPr id="3" name="Rectangle 2"/>
+          <p:cNvSpPr/>
+          <p:nvPr/>
+        </p:nvSpPr>
+        <p:spPr>
+          <a:xfrm>
+            <a:off x="457200" y="960120"/>
+            <a:ext cx="8229600" cy="25603"/>
+          </a:xfrm>
+          <a:prstGeom prst="rect">
+            <a:avLst/>
+          </a:prstGeom>
+          <a:solidFill>
+            <a:srgbClr val="9A7B44"/>
+          </a:solidFill>
+          <a:ln>
+            <a:noFill/>
+          </a:ln>
+        </p:spPr>
+        <p:style>
+          <a:lnRef idx="1">
+            <a:schemeClr val="accent1"/>
+          </a:lnRef>
+          <a:fillRef idx="3">
+            <a:schemeClr val="accent1"/>
+          </a:fillRef>
+          <a:effectRef idx="2">
+            <a:schemeClr val="accent1"/>
+          </a:effectRef>
+          <a:fontRef idx="minor">
+            <a:schemeClr val="lt1"/>
+          </a:fontRef>
+        </p:style>
+        <p:txBody>
+          <a:bodyPr rtlCol="0" anchor="ctr"/>
+          <a:lstStyle/>
+          <a:p>
+            <a:pPr algn="ctr"/>
+          </a:p>
+        </p:txBody>
+      </p:sp>
+      <p:sp>
+        <p:nvSpPr>
+          <p:cNvPr id="4" name="Rectangle 3"/>
+          <p:cNvSpPr/>
+          <p:nvPr/>
+        </p:nvSpPr>
+        <p:spPr>
+          <a:xfrm>
+            <a:off x="457200" y="1234440"/>
+            <a:ext cx="3977639" cy="384048"/>
+          </a:xfrm>
+          <a:prstGeom prst="rect">
+            <a:avLst/>
+          </a:prstGeom>
+          <a:solidFill>
+            <a:srgbClr val="196B24"/>
+          </a:solidFill>
+          <a:ln>
+            <a:noFill/>
+          </a:ln>
+        </p:spPr>
+        <p:style>
+          <a:lnRef idx="1">
+            <a:schemeClr val="accent1"/>
+          </a:lnRef>
+          <a:fillRef idx="3">
+            <a:schemeClr val="accent1"/>
+          </a:fillRef>
+          <a:effectRef idx="2">
+            <a:schemeClr val="accent1"/>
+          </a:effectRef>
+          <a:fontRef idx="minor">
+            <a:schemeClr val="lt1"/>
+          </a:fontRef>
+        </p:style>
+        <p:txBody>
+          <a:bodyPr rtlCol="0" anchor="ctr" lIns="137160"/>
+          <a:lstStyle/>
+          <a:p>
+            <a:pPr algn="ctr"/>
+            <a:r>
+              <a:rPr sz="1250" b="1">
+                <a:solidFill>
+                  <a:srgbClr val="FFFFFF"/>
+                </a:solidFill>
+                <a:latin typeface="Avenir Next LT Pro Demi"/>
+              </a:rPr>
+              <a:t>WORKING</a:t>
+            </a:r>
+          </a:p>
+        </p:txBody>
+      </p:sp>
+      <p:sp>
+        <p:nvSpPr>
+          <p:cNvPr id="5" name="Rectangle 4"/>
+          <p:cNvSpPr/>
+          <p:nvPr/>
+        </p:nvSpPr>
+        <p:spPr>
+          <a:xfrm>
+            <a:off x="4709160" y="1234440"/>
+            <a:ext cx="3977639" cy="384048"/>
+          </a:xfrm>
+          <a:prstGeom prst="rect">
+            <a:avLst/>
+          </a:prstGeom>
+          <a:solidFill>
+            <a:srgbClr val="B03030"/>
+          </a:solidFill>
+          <a:ln>
+            <a:noFill/>
+          </a:ln>
+        </p:spPr>
+        <p:style>
+          <a:lnRef idx="1">
+            <a:schemeClr val="accent1"/>
+          </a:lnRef>
+          <a:fillRef idx="3">
+            <a:schemeClr val="accent1"/>
+          </a:fillRef>
+          <a:effectRef idx="2">
+            <a:schemeClr val="accent1"/>
+          </a:effectRef>
+          <a:fontRef idx="minor">
+            <a:schemeClr val="lt1"/>
+          </a:fontRef>
+        </p:style>
+        <p:txBody>
+          <a:bodyPr rtlCol="0" anchor="ctr" lIns="137160"/>
+          <a:lstStyle/>
+          <a:p>
+            <a:pPr algn="ctr"/>
+            <a:r>
+              <a:rPr sz="1250" b="1">
+                <a:solidFill>
+                  <a:srgbClr val="FFFFFF"/>
+                </a:solidFill>
+                <a:latin typeface="Avenir Next LT Pro Demi"/>
+              </a:rPr>
+              <a:t>WATCH</a:t>
+            </a:r>
+          </a:p>
+        </p:txBody>
+      </p:sp>
+      <p:sp>
+        <p:nvSpPr>
+          <p:cNvPr id="6" name="TextBox 5"/>
+          <p:cNvSpPr txBox="1"/>
+          <p:nvPr/>
+        </p:nvSpPr>
+        <p:spPr>
+          <a:xfrm>
+            <a:off x="457200" y="1828800"/>
+            <a:ext cx="3977639" cy="777240"/>
+          </a:xfrm>
+          <a:prstGeom prst="rect">
+            <a:avLst/>
+          </a:prstGeom>
+          <a:noFill/>
+        </p:spPr>
+        <p:txBody>
+          <a:bodyPr wrap="square">
+            <a:spAutoFit/>
+          </a:bodyPr>
+          <a:lstStyle/>
+          <a:p>
+            <a:r>
+              <a:rPr sz="1200" b="1">
+                <a:solidFill>
+                  <a:srgbClr val="196B24"/>
+                </a:solidFill>
+                <a:latin typeface="Avenir Next LT Pro Demi"/>
+              </a:rPr>
+              <a:t>✓  </a:t>
+            </a:r>
+            <a:r>
+              <a:rPr sz="1150" b="0">
+                <a:solidFill>
+                  <a:srgbClr val="000000"/>
+                </a:solidFill>
+                <a:latin typeface="Avenir Next LT Pro"/>
+              </a:rPr>
+              <a:t>FCF inflected to +$252M (from −$214M)</a:t>
+            </a:r>
+          </a:p>
+        </p:txBody>
+      </p:sp>
+      <p:sp>
+        <p:nvSpPr>
+          <p:cNvPr id="7" name="TextBox 6"/>
+          <p:cNvSpPr txBox="1"/>
+          <p:nvPr/>
+        </p:nvSpPr>
+        <p:spPr>
+          <a:xfrm>
+            <a:off x="457200" y="2651760"/>
+            <a:ext cx="3977639" cy="777240"/>
+          </a:xfrm>
+          <a:prstGeom prst="rect">
+            <a:avLst/>
+          </a:prstGeom>
+          <a:noFill/>
+        </p:spPr>
+        <p:txBody>
+          <a:bodyPr wrap="square">
+            <a:spAutoFit/>
+          </a:bodyPr>
+          <a:lstStyle/>
+          <a:p>
+            <a:r>
+              <a:rPr sz="1200" b="1">
+                <a:solidFill>
+                  <a:srgbClr val="196B24"/>
+                </a:solidFill>
+                <a:latin typeface="Avenir Next LT Pro Demi"/>
+              </a:rPr>
+              <a:t>✓  </a:t>
+            </a:r>
+            <a:r>
+              <a:rPr sz="1150" b="0">
+                <a:solidFill>
+                  <a:srgbClr val="000000"/>
+                </a:solidFill>
+                <a:latin typeface="Avenir Next LT Pro"/>
+              </a:rPr>
+              <a:t>Inventory normalized $1.02B → $819M</a:t>
+            </a:r>
+          </a:p>
+        </p:txBody>
+      </p:sp>
+      <p:sp>
+        <p:nvSpPr>
+          <p:cNvPr id="8" name="TextBox 7"/>
+          <p:cNvSpPr txBox="1"/>
+          <p:nvPr/>
+        </p:nvSpPr>
+        <p:spPr>
+          <a:xfrm>
+            <a:off x="457200" y="3474720"/>
+            <a:ext cx="3977639" cy="777240"/>
+          </a:xfrm>
+          <a:prstGeom prst="rect">
+            <a:avLst/>
+          </a:prstGeom>
+          <a:noFill/>
+        </p:spPr>
+        <p:txBody>
+          <a:bodyPr wrap="square">
+            <a:spAutoFit/>
+          </a:bodyPr>
+          <a:lstStyle/>
+          <a:p>
+            <a:r>
+              <a:rPr sz="1200" b="1">
+                <a:solidFill>
+                  <a:srgbClr val="196B24"/>
+                </a:solidFill>
+                <a:latin typeface="Avenir Next LT Pro Demi"/>
+              </a:rPr>
+              <a:t>✓  </a:t>
+            </a:r>
+            <a:r>
+              <a:rPr sz="1150" b="0">
+                <a:solidFill>
+                  <a:srgbClr val="000000"/>
+                </a:solidFill>
+                <a:latin typeface="Avenir Next LT Pro"/>
+              </a:rPr>
+              <a:t>Revenue re-accelerated +8.1% in FY25</a:t>
+            </a:r>
+          </a:p>
+        </p:txBody>
+      </p:sp>
+      <p:sp>
+        <p:nvSpPr>
+          <p:cNvPr id="9" name="TextBox 8"/>
+          <p:cNvSpPr txBox="1"/>
+          <p:nvPr/>
+        </p:nvSpPr>
+        <p:spPr>
+          <a:xfrm>
+            <a:off x="4709160" y="1828800"/>
+            <a:ext cx="3977639" cy="777240"/>
+          </a:xfrm>
+          <a:prstGeom prst="rect">
+            <a:avLst/>
+          </a:prstGeom>
+          <a:noFill/>
+        </p:spPr>
+        <p:txBody>
+          <a:bodyPr wrap="square">
+            <a:spAutoFit/>
+          </a:bodyPr>
+          <a:lstStyle/>
+          <a:p>
+            <a:r>
+              <a:rPr sz="1200" b="1">
+                <a:solidFill>
+                  <a:srgbClr val="B03030"/>
+                </a:solidFill>
+                <a:latin typeface="Avenir Next LT Pro Demi"/>
+              </a:rPr>
+              <a:t>!  </a:t>
+            </a:r>
+            <a:r>
+              <a:rPr sz="1150" b="0">
+                <a:solidFill>
+                  <a:srgbClr val="000000"/>
+                </a:solidFill>
+                <a:latin typeface="Avenir Next LT Pro"/>
+              </a:rPr>
+              <a:t>Q1 FY26: revenue −1.7%, net loss −$14M</a:t>
+            </a:r>
+          </a:p>
+        </p:txBody>
+      </p:sp>
+      <p:sp>
+        <p:nvSpPr>
+          <p:cNvPr id="10" name="TextBox 9"/>
+          <p:cNvSpPr txBox="1"/>
+          <p:nvPr/>
+        </p:nvSpPr>
+        <p:spPr>
+          <a:xfrm>
+            <a:off x="4709160" y="2651760"/>
+            <a:ext cx="3977639" cy="777240"/>
+          </a:xfrm>
+          <a:prstGeom prst="rect">
+            <a:avLst/>
+          </a:prstGeom>
+          <a:noFill/>
+        </p:spPr>
+        <p:txBody>
+          <a:bodyPr wrap="square">
+            <a:spAutoFit/>
+          </a:bodyPr>
+          <a:lstStyle/>
+          <a:p>
+            <a:r>
+              <a:rPr sz="1200" b="1">
+                <a:solidFill>
+                  <a:srgbClr val="B03030"/>
+                </a:solidFill>
+                <a:latin typeface="Avenir Next LT Pro Demi"/>
+              </a:rPr>
+              <a:t>!  </a:t>
+            </a:r>
+            <a:r>
+              <a:rPr sz="1150" b="0">
+                <a:solidFill>
+                  <a:srgbClr val="000000"/>
+                </a:solidFill>
+                <a:latin typeface="Avenir Next LT Pro"/>
+              </a:rPr>
+              <a:t>~$225M/yr interest keeps coverage thin</a:t>
+            </a:r>
+          </a:p>
+        </p:txBody>
+      </p:sp>
+      <p:sp>
+        <p:nvSpPr>
+          <p:cNvPr id="11" name="TextBox 10"/>
+          <p:cNvSpPr txBox="1"/>
+          <p:nvPr/>
+        </p:nvSpPr>
+        <p:spPr>
+          <a:xfrm>
+            <a:off x="4709160" y="3474720"/>
+            <a:ext cx="3977639" cy="777240"/>
+          </a:xfrm>
+          <a:prstGeom prst="rect">
+            <a:avLst/>
+          </a:prstGeom>
+          <a:noFill/>
+        </p:spPr>
+        <p:txBody>
+          <a:bodyPr wrap="square">
+            <a:spAutoFit/>
+          </a:bodyPr>
+          <a:lstStyle/>
+          <a:p>
+            <a:r>
+              <a:rPr sz="1200" b="1">
+                <a:solidFill>
+                  <a:srgbClr val="B03030"/>
+                </a:solidFill>
+                <a:latin typeface="Avenir Next LT Pro Demi"/>
+              </a:rPr>
+              <a:t>!  </a:t>
+            </a:r>
+            <a:r>
+              <a:rPr sz="1150" b="0">
+                <a:solidFill>
+                  <a:srgbClr val="000000"/>
+                </a:solidFill>
+                <a:latin typeface="Avenir Next LT Pro"/>
+              </a:rPr>
+              <a:t>Guidance is back-half loaded</a:t>
+            </a:r>
+          </a:p>
+        </p:txBody>
+      </p:sp>
+      <p:sp>
+        <p:nvSpPr>
+          <p:cNvPr id="12" name="TextBox 11"/>
+          <p:cNvSpPr txBox="1"/>
+          <p:nvPr/>
+        </p:nvSpPr>
+        <p:spPr>
+          <a:xfrm>
+            <a:off x="457200" y="4663440"/>
+            <a:ext cx="8229600" cy="365760"/>
+          </a:xfrm>
+          <a:prstGeom prst="rect">
+            <a:avLst/>
+          </a:prstGeom>
+          <a:noFill/>
+        </p:spPr>
+        <p:txBody>
+          <a:bodyPr wrap="square">
+            <a:spAutoFit/>
+          </a:bodyPr>
+          <a:lstStyle/>
+          <a:p>
+            <a:r>
+              <a:rPr sz="1150" b="1">
+                <a:solidFill>
+                  <a:srgbClr val="000000"/>
+                </a:solidFill>
+                <a:latin typeface="Avenir Next LT Pro Demi"/>
+              </a:rPr>
+              <a:t>Verdict: real but early — the next two quarters are the tell.</a:t>
+            </a:r>
+          </a:p>
+        </p:txBody>
+      </p:sp>
+      <p:sp>
+        <p:nvSpPr>
+          <p:cNvPr id="13" name="TextBox 12"/>
+          <p:cNvSpPr txBox="1"/>
+          <p:nvPr/>
+        </p:nvSpPr>
+        <p:spPr>
+          <a:xfrm>
+            <a:off x="457200" y="6172200"/>
+            <a:ext cx="8229600" cy="274320"/>
+          </a:xfrm>
+          <a:prstGeom prst="rect">
+            <a:avLst/>
+          </a:prstGeom>
+          <a:noFill/>
+        </p:spPr>
+        <p:txBody>
+          <a:bodyPr wrap="none">
+            <a:spAutoFit/>
+          </a:bodyPr>
+          <a:lstStyle/>
+          <a:p>
+            <a:r>
+              <a:rPr sz="750" b="0" i="1">
+                <a:solidFill>
+                  <a:srgbClr val="707070"/>
+                </a:solidFill>
+                <a:latin typeface="Avenir Next LT Pro"/>
+              </a:rPr>
+              <a:t>Source: RH FY2025 10-K; Q1 FY2026 10-Q</a:t>
+            </a:r>
+          </a:p>
+        </p:txBody>
+      </p:sp>
+    </p:spTree>
+  </p:cSld>
+  <p:clrMapOvr>
+    <a:masterClrMapping/>
+  </p:clrMapOvr>
+</p:sld>
+</file>
+
+<file path=ppt/slides/slide12.xml><?xml version="1.0" encoding="utf-8"?>
 <p:sld xmlns:a="http://schemas.openxmlformats.org/drawingml/2006/main" xmlns:r="http://schemas.openxmlformats.org/officeDocument/2006/relationships" xmlns:p="http://schemas.openxmlformats.org/presentationml/2006/main">
   <p:cSld>
     <p:spTree>
@@ -5230,6 +6334,1599 @@
           <a:p>
             <a:r>
               <a:rPr sz="2300" b="0" i="0" dirty="0">
+                <a:solidFill/>
+                <a:latin typeface="Avenir Next LT Pro Demi"/>
+              </a:rPr>
+              <a:t>Financial Performance — Trough to Recovery</a:t>
+            </a:r>
+          </a:p>
+        </p:txBody>
+      </p:sp>
+      <p:sp>
+        <p:nvSpPr>
+          <p:cNvPr id="5" name="TextBox 4"/>
+          <p:cNvSpPr txBox="1"/>
+          <p:nvPr/>
+        </p:nvSpPr>
+        <p:spPr>
+          <a:xfrm>
+            <a:off x="457200" y="1051560"/>
+            <a:ext cx="8229600" cy="274320"/>
+          </a:xfrm>
+          <a:prstGeom prst="rect">
+            <a:avLst/>
+          </a:prstGeom>
+          <a:noFill/>
+        </p:spPr>
+        <p:txBody>
+          <a:bodyPr wrap="none">
+            <a:spAutoFit/>
+          </a:bodyPr>
+          <a:lstStyle/>
+          <a:p>
+            <a:r>
+              <a:rPr sz="900" b="0" i="1">
+                <a:solidFill>
+                  <a:srgbClr val="B0B0B0"/>
+                </a:solidFill>
+                <a:latin typeface="Avenir Next LT Pro"/>
+              </a:rPr>
+              <a:t>[ narrative / commentary to be written ]</a:t>
+            </a:r>
+          </a:p>
+        </p:txBody>
+      </p:sp>
+      <p:graphicFrame>
+        <p:nvGraphicFramePr>
+          <p:cNvPr id="6" name="Table 5"/>
+          <p:cNvGraphicFramePr>
+            <a:graphicFrameLocks noGrp="1"/>
+          </p:cNvGraphicFramePr>
+          <p:nvPr>
+            <p:extLst>
+              <p:ext uri="{D42A27DB-BD31-4B8C-83A1-F6EECF244321}">
+                <p14:modId xmlns:p14="http://schemas.microsoft.com/office/powerpoint/2010/main" val="4094982956"/>
+              </p:ext>
+            </p:extLst>
+          </p:nvPr>
+        </p:nvGraphicFramePr>
+        <p:xfrm>
+          <a:off x="457200" y="1417320"/>
+          <a:ext cx="8229600" cy="3456432"/>
+        </p:xfrm>
+        <a:graphic>
+          <a:graphicData uri="http://schemas.openxmlformats.org/drawingml/2006/table">
+            <a:tbl>
+              <a:tblPr>
+                <a:tableStyleId>{5C22544A-7EE6-4342-B048-85BDC9FD1C3A}</a:tableStyleId>
+              </a:tblPr>
+              <a:tblGrid>
+                <a:gridCol w="2377440">
+                  <a:extLst>
+                    <a:ext uri="{9D8B030D-6E8A-4147-A177-3AD203B41FA5}">
+                      <a16:colId xmlns:a16="http://schemas.microsoft.com/office/drawing/2014/main" val="20000"/>
+                    </a:ext>
+                  </a:extLst>
+                </a:gridCol>
+                <a:gridCol w="1170432">
+                  <a:extLst>
+                    <a:ext uri="{9D8B030D-6E8A-4147-A177-3AD203B41FA5}">
+                      <a16:colId xmlns:a16="http://schemas.microsoft.com/office/drawing/2014/main" val="20001"/>
+                    </a:ext>
+                  </a:extLst>
+                </a:gridCol>
+                <a:gridCol w="1170432">
+                  <a:extLst>
+                    <a:ext uri="{9D8B030D-6E8A-4147-A177-3AD203B41FA5}">
+                      <a16:colId xmlns:a16="http://schemas.microsoft.com/office/drawing/2014/main" val="20002"/>
+                    </a:ext>
+                  </a:extLst>
+                </a:gridCol>
+                <a:gridCol w="1170432">
+                  <a:extLst>
+                    <a:ext uri="{9D8B030D-6E8A-4147-A177-3AD203B41FA5}">
+                      <a16:colId xmlns:a16="http://schemas.microsoft.com/office/drawing/2014/main" val="20003"/>
+                    </a:ext>
+                  </a:extLst>
+                </a:gridCol>
+                <a:gridCol w="1170432">
+                  <a:extLst>
+                    <a:ext uri="{9D8B030D-6E8A-4147-A177-3AD203B41FA5}">
+                      <a16:colId xmlns:a16="http://schemas.microsoft.com/office/drawing/2014/main" val="20004"/>
+                    </a:ext>
+                  </a:extLst>
+                </a:gridCol>
+                <a:gridCol w="1170432">
+                  <a:extLst>
+                    <a:ext uri="{9D8B030D-6E8A-4147-A177-3AD203B41FA5}">
+                      <a16:colId xmlns:a16="http://schemas.microsoft.com/office/drawing/2014/main" val="20005"/>
+                    </a:ext>
+                  </a:extLst>
+                </a:gridCol>
+              </a:tblGrid>
+              <a:tr h="384048">
+                <a:tc>
+                  <a:txBody>
+                    <a:bodyPr/>
+                    <a:lstStyle/>
+                    <a:p>
+                      <a:pPr algn="l"/>
+                      <a:r>
+                        <a:rPr sz="1050" b="1" i="0" dirty="0">
+                          <a:solidFill>
+                            <a:srgbClr val="FFFFFF"/>
+                          </a:solidFill>
+                          <a:latin typeface="Avenir Next LT Pro Demi"/>
+                        </a:rPr>
+                        <a:t>Metric ($M unless noted)</a:t>
+                      </a:r>
+                    </a:p>
+                  </a:txBody>
+                  <a:tcPr marL="73152" marR="73152" marT="18288" marB="18288" anchor="ctr">
+                    <a:solidFill>
+                      <a:srgbClr val="9A7B44"/>
+                    </a:solidFill>
+                  </a:tcPr>
+                </a:tc>
+                <a:tc>
+                  <a:txBody>
+                    <a:bodyPr/>
+                    <a:lstStyle/>
+                    <a:p>
+                      <a:pPr algn="ctr"/>
+                      <a:r>
+                        <a:rPr sz="1050" b="1" i="0" dirty="0">
+                          <a:solidFill>
+                            <a:srgbClr val="FFFFFF"/>
+                          </a:solidFill>
+                          <a:latin typeface="Avenir Next LT Pro Demi"/>
+                        </a:rPr>
+                        <a:t>FY23</a:t>
+                      </a:r>
+                    </a:p>
+                  </a:txBody>
+                  <a:tcPr marL="73152" marR="73152" marT="18288" marB="18288" anchor="ctr">
+                    <a:solidFill>
+                      <a:srgbClr val="9A7B44"/>
+                    </a:solidFill>
+                  </a:tcPr>
+                </a:tc>
+                <a:tc>
+                  <a:txBody>
+                    <a:bodyPr/>
+                    <a:lstStyle/>
+                    <a:p>
+                      <a:pPr algn="ctr"/>
+                      <a:r>
+                        <a:rPr sz="1050" b="1" i="0" dirty="0">
+                          <a:solidFill>
+                            <a:srgbClr val="FFFFFF"/>
+                          </a:solidFill>
+                          <a:latin typeface="Avenir Next LT Pro Demi"/>
+                        </a:rPr>
+                        <a:t>FY24</a:t>
+                      </a:r>
+                    </a:p>
+                  </a:txBody>
+                  <a:tcPr marL="73152" marR="73152" marT="18288" marB="18288" anchor="ctr">
+                    <a:solidFill>
+                      <a:srgbClr val="9A7B44"/>
+                    </a:solidFill>
+                  </a:tcPr>
+                </a:tc>
+                <a:tc>
+                  <a:txBody>
+                    <a:bodyPr/>
+                    <a:lstStyle/>
+                    <a:p>
+                      <a:pPr algn="ctr"/>
+                      <a:r>
+                        <a:rPr sz="1050" b="1" i="0" dirty="0">
+                          <a:solidFill>
+                            <a:srgbClr val="FFFFFF"/>
+                          </a:solidFill>
+                          <a:latin typeface="Avenir Next LT Pro Demi"/>
+                        </a:rPr>
+                        <a:t>FY25</a:t>
+                      </a:r>
+                    </a:p>
+                  </a:txBody>
+                  <a:tcPr marL="73152" marR="73152" marT="18288" marB="18288" anchor="ctr">
+                    <a:solidFill>
+                      <a:srgbClr val="9A7B44"/>
+                    </a:solidFill>
+                  </a:tcPr>
+                </a:tc>
+                <a:tc>
+                  <a:txBody>
+                    <a:bodyPr/>
+                    <a:lstStyle/>
+                    <a:p>
+                      <a:pPr algn="ctr"/>
+                      <a:r>
+                        <a:rPr sz="1050" b="1" i="0" dirty="0">
+                          <a:solidFill>
+                            <a:srgbClr val="FFFFFF"/>
+                          </a:solidFill>
+                          <a:latin typeface="Avenir Next LT Pro Demi"/>
+                        </a:rPr>
+                        <a:t>FY26E</a:t>
+                      </a:r>
+                    </a:p>
+                  </a:txBody>
+                  <a:tcPr marL="73152" marR="73152" marT="18288" marB="18288" anchor="ctr">
+                    <a:solidFill>
+                      <a:srgbClr val="9A7B44"/>
+                    </a:solidFill>
+                  </a:tcPr>
+                </a:tc>
+                <a:tc>
+                  <a:txBody>
+                    <a:bodyPr/>
+                    <a:lstStyle/>
+                    <a:p>
+                      <a:pPr algn="ctr"/>
+                      <a:r>
+                        <a:rPr sz="1050" b="1" i="0" dirty="0">
+                          <a:solidFill>
+                            <a:srgbClr val="FFFFFF"/>
+                          </a:solidFill>
+                          <a:latin typeface="Avenir Next LT Pro Demi"/>
+                        </a:rPr>
+                        <a:t>FY27E</a:t>
+                      </a:r>
+                    </a:p>
+                  </a:txBody>
+                  <a:tcPr marL="73152" marR="73152" marT="18288" marB="18288" anchor="ctr">
+                    <a:solidFill>
+                      <a:srgbClr val="9A7B44"/>
+                    </a:solidFill>
+                  </a:tcPr>
+                </a:tc>
+                <a:extLst>
+                  <a:ext uri="{0D108BD9-81ED-4DB2-BD59-A6C34878D82A}">
+                    <a16:rowId xmlns:a16="http://schemas.microsoft.com/office/drawing/2014/main" val="10000"/>
+                  </a:ext>
+                </a:extLst>
+              </a:tr>
+              <a:tr h="384048">
+                <a:tc>
+                  <a:txBody>
+                    <a:bodyPr/>
+                    <a:lstStyle/>
+                    <a:p>
+                      <a:pPr algn="l"/>
+                      <a:r>
+                        <a:rPr sz="1100" b="1" i="0" dirty="0">
+                          <a:solidFill>
+                            <a:schemeClr val="tx1"/>
+                          </a:solidFill>
+                          <a:latin typeface="Avenir Next LT Pro Demi"/>
+                        </a:rPr>
+                        <a:t>Revenue</a:t>
+                      </a:r>
+                    </a:p>
+                  </a:txBody>
+                  <a:tcPr marL="73152" marR="73152" marT="18288" marB="18288" anchor="ctr">
+                    <a:solidFill>
+                      <a:srgbClr val="FFFFFF"/>
+                    </a:solidFill>
+                  </a:tcPr>
+                </a:tc>
+                <a:tc>
+                  <a:txBody>
+                    <a:bodyPr/>
+                    <a:lstStyle/>
+                    <a:p>
+                      <a:pPr algn="ctr"/>
+                      <a:r>
+                        <a:rPr sz="1100" b="0" i="0">
+                          <a:solidFill>
+                            <a:schemeClr val="tx1"/>
+                          </a:solidFill>
+                          <a:latin typeface="Avenir Next LT Pro"/>
+                        </a:rPr>
+                        <a:t>3,029</a:t>
+                      </a:r>
+                    </a:p>
+                  </a:txBody>
+                  <a:tcPr marL="73152" marR="73152" marT="18288" marB="18288" anchor="ctr">
+                    <a:solidFill>
+                      <a:srgbClr val="FFFFFF"/>
+                    </a:solidFill>
+                  </a:tcPr>
+                </a:tc>
+                <a:tc>
+                  <a:txBody>
+                    <a:bodyPr/>
+                    <a:lstStyle/>
+                    <a:p>
+                      <a:pPr algn="ctr"/>
+                      <a:r>
+                        <a:rPr sz="1100" b="0" i="0">
+                          <a:solidFill>
+                            <a:schemeClr val="tx1"/>
+                          </a:solidFill>
+                          <a:latin typeface="Avenir Next LT Pro"/>
+                        </a:rPr>
+                        <a:t>3,181</a:t>
+                      </a:r>
+                    </a:p>
+                  </a:txBody>
+                  <a:tcPr marL="73152" marR="73152" marT="18288" marB="18288" anchor="ctr">
+                    <a:solidFill>
+                      <a:srgbClr val="FFFFFF"/>
+                    </a:solidFill>
+                  </a:tcPr>
+                </a:tc>
+                <a:tc>
+                  <a:txBody>
+                    <a:bodyPr/>
+                    <a:lstStyle/>
+                    <a:p>
+                      <a:pPr algn="ctr"/>
+                      <a:r>
+                        <a:rPr sz="1100" b="0" i="0">
+                          <a:solidFill>
+                            <a:schemeClr val="tx1"/>
+                          </a:solidFill>
+                          <a:latin typeface="Avenir Next LT Pro"/>
+                        </a:rPr>
+                        <a:t>3,440</a:t>
+                      </a:r>
+                    </a:p>
+                  </a:txBody>
+                  <a:tcPr marL="73152" marR="73152" marT="18288" marB="18288" anchor="ctr">
+                    <a:solidFill>
+                      <a:srgbClr val="FFFFFF"/>
+                    </a:solidFill>
+                  </a:tcPr>
+                </a:tc>
+                <a:tc>
+                  <a:txBody>
+                    <a:bodyPr/>
+                    <a:lstStyle/>
+                    <a:p>
+                      <a:pPr algn="ctr"/>
+                      <a:r>
+                        <a:rPr sz="1100" b="0" i="0">
+                          <a:solidFill>
+                            <a:schemeClr val="tx1"/>
+                          </a:solidFill>
+                          <a:latin typeface="Avenir Next LT Pro"/>
+                        </a:rPr>
+                        <a:t>3,680</a:t>
+                      </a:r>
+                    </a:p>
+                  </a:txBody>
+                  <a:tcPr marL="73152" marR="73152" marT="18288" marB="18288" anchor="ctr">
+                    <a:solidFill>
+                      <a:srgbClr val="FFFFFF"/>
+                    </a:solidFill>
+                  </a:tcPr>
+                </a:tc>
+                <a:tc>
+                  <a:txBody>
+                    <a:bodyPr/>
+                    <a:lstStyle/>
+                    <a:p>
+                      <a:pPr algn="ctr"/>
+                      <a:r>
+                        <a:rPr sz="1100" b="0" i="0">
+                          <a:solidFill>
+                            <a:schemeClr val="tx1"/>
+                          </a:solidFill>
+                          <a:latin typeface="Avenir Next LT Pro"/>
+                        </a:rPr>
+                        <a:t>4,165</a:t>
+                      </a:r>
+                    </a:p>
+                  </a:txBody>
+                  <a:tcPr marL="73152" marR="73152" marT="18288" marB="18288" anchor="ctr">
+                    <a:solidFill>
+                      <a:srgbClr val="FFFFFF"/>
+                    </a:solidFill>
+                  </a:tcPr>
+                </a:tc>
+                <a:extLst>
+                  <a:ext uri="{0D108BD9-81ED-4DB2-BD59-A6C34878D82A}">
+                    <a16:rowId xmlns:a16="http://schemas.microsoft.com/office/drawing/2014/main" val="10001"/>
+                  </a:ext>
+                </a:extLst>
+              </a:tr>
+              <a:tr h="384048">
+                <a:tc>
+                  <a:txBody>
+                    <a:bodyPr/>
+                    <a:lstStyle/>
+                    <a:p>
+                      <a:pPr algn="l"/>
+                      <a:r>
+                        <a:rPr sz="1100" b="1" i="0" dirty="0">
+                          <a:solidFill>
+                            <a:schemeClr val="tx1"/>
+                          </a:solidFill>
+                          <a:latin typeface="Avenir Next LT Pro Demi"/>
+                        </a:rPr>
+                        <a:t>YoY Growth</a:t>
+                      </a:r>
+                    </a:p>
+                  </a:txBody>
+                  <a:tcPr marL="73152" marR="73152" marT="18288" marB="18288" anchor="ctr">
+                    <a:solidFill>
+                      <a:srgbClr val="F4F6F8"/>
+                    </a:solidFill>
+                  </a:tcPr>
+                </a:tc>
+                <a:tc>
+                  <a:txBody>
+                    <a:bodyPr/>
+                    <a:lstStyle/>
+                    <a:p>
+                      <a:pPr algn="ctr"/>
+                      <a:r>
+                        <a:rPr sz="1100" b="0" i="0" dirty="0">
+                          <a:solidFill>
+                            <a:schemeClr val="tx1"/>
+                          </a:solidFill>
+                          <a:latin typeface="Avenir Next LT Pro"/>
+                        </a:rPr>
+                        <a:t>-1</a:t>
+                      </a:r>
+                      <a:r>
+                        <a:rPr lang="en-US" sz="1100" b="0" i="0" dirty="0">
+                          <a:solidFill>
+                            <a:schemeClr val="tx1"/>
+                          </a:solidFill>
+                          <a:latin typeface="Avenir Next LT Pro"/>
+                        </a:rPr>
+                        <a:t>5.6</a:t>
+                      </a:r>
+                      <a:r>
+                        <a:rPr sz="1100" b="0" i="0" dirty="0">
+                          <a:solidFill>
+                            <a:schemeClr val="tx1"/>
+                          </a:solidFill>
+                          <a:latin typeface="Avenir Next LT Pro"/>
+                        </a:rPr>
+                        <a:t>%</a:t>
+                      </a:r>
+                    </a:p>
+                  </a:txBody>
+                  <a:tcPr marL="73152" marR="73152" marT="18288" marB="18288" anchor="ctr">
+                    <a:solidFill>
+                      <a:srgbClr val="F4F6F8"/>
+                    </a:solidFill>
+                  </a:tcPr>
+                </a:tc>
+                <a:tc>
+                  <a:txBody>
+                    <a:bodyPr/>
+                    <a:lstStyle/>
+                    <a:p>
+                      <a:pPr algn="ctr"/>
+                      <a:r>
+                        <a:rPr sz="1100" b="0" i="0">
+                          <a:solidFill>
+                            <a:schemeClr val="tx1"/>
+                          </a:solidFill>
+                          <a:latin typeface="Avenir Next LT Pro"/>
+                        </a:rPr>
+                        <a:t>+5.0%</a:t>
+                      </a:r>
+                    </a:p>
+                  </a:txBody>
+                  <a:tcPr marL="73152" marR="73152" marT="18288" marB="18288" anchor="ctr">
+                    <a:solidFill>
+                      <a:srgbClr val="F4F6F8"/>
+                    </a:solidFill>
+                  </a:tcPr>
+                </a:tc>
+                <a:tc>
+                  <a:txBody>
+                    <a:bodyPr/>
+                    <a:lstStyle/>
+                    <a:p>
+                      <a:pPr algn="ctr"/>
+                      <a:r>
+                        <a:rPr sz="1100" b="0" i="0">
+                          <a:solidFill>
+                            <a:schemeClr val="tx1"/>
+                          </a:solidFill>
+                          <a:latin typeface="Avenir Next LT Pro"/>
+                        </a:rPr>
+                        <a:t>+8.1%</a:t>
+                      </a:r>
+                    </a:p>
+                  </a:txBody>
+                  <a:tcPr marL="73152" marR="73152" marT="18288" marB="18288" anchor="ctr">
+                    <a:solidFill>
+                      <a:srgbClr val="F4F6F8"/>
+                    </a:solidFill>
+                  </a:tcPr>
+                </a:tc>
+                <a:tc>
+                  <a:txBody>
+                    <a:bodyPr/>
+                    <a:lstStyle/>
+                    <a:p>
+                      <a:pPr algn="ctr"/>
+                      <a:r>
+                        <a:rPr sz="1100" b="0" i="0">
+                          <a:solidFill>
+                            <a:schemeClr val="tx1"/>
+                          </a:solidFill>
+                          <a:latin typeface="Avenir Next LT Pro"/>
+                        </a:rPr>
+                        <a:t>+7.0%</a:t>
+                      </a:r>
+                    </a:p>
+                  </a:txBody>
+                  <a:tcPr marL="73152" marR="73152" marT="18288" marB="18288" anchor="ctr">
+                    <a:solidFill>
+                      <a:srgbClr val="F4F6F8"/>
+                    </a:solidFill>
+                  </a:tcPr>
+                </a:tc>
+                <a:tc>
+                  <a:txBody>
+                    <a:bodyPr/>
+                    <a:lstStyle/>
+                    <a:p>
+                      <a:pPr algn="ctr"/>
+                      <a:r>
+                        <a:rPr sz="1100" b="0" i="0">
+                          <a:solidFill>
+                            <a:schemeClr val="tx1"/>
+                          </a:solidFill>
+                          <a:latin typeface="Avenir Next LT Pro"/>
+                        </a:rPr>
+                        <a:t>+13.2%</a:t>
+                      </a:r>
+                    </a:p>
+                  </a:txBody>
+                  <a:tcPr marL="73152" marR="73152" marT="18288" marB="18288" anchor="ctr">
+                    <a:solidFill>
+                      <a:srgbClr val="F4F6F8"/>
+                    </a:solidFill>
+                  </a:tcPr>
+                </a:tc>
+                <a:extLst>
+                  <a:ext uri="{0D108BD9-81ED-4DB2-BD59-A6C34878D82A}">
+                    <a16:rowId xmlns:a16="http://schemas.microsoft.com/office/drawing/2014/main" val="10002"/>
+                  </a:ext>
+                </a:extLst>
+              </a:tr>
+              <a:tr h="384048">
+                <a:tc>
+                  <a:txBody>
+                    <a:bodyPr/>
+                    <a:lstStyle/>
+                    <a:p>
+                      <a:pPr algn="l"/>
+                      <a:r>
+                        <a:rPr sz="1100" b="1" i="0" dirty="0">
+                          <a:solidFill>
+                            <a:schemeClr val="tx1"/>
+                          </a:solidFill>
+                          <a:latin typeface="Avenir Next LT Pro Demi"/>
+                        </a:rPr>
+                        <a:t>Gross Margin</a:t>
+                      </a:r>
+                    </a:p>
+                  </a:txBody>
+                  <a:tcPr marL="73152" marR="73152" marT="18288" marB="18288" anchor="ctr">
+                    <a:solidFill>
+                      <a:srgbClr val="FFFFFF"/>
+                    </a:solidFill>
+                  </a:tcPr>
+                </a:tc>
+                <a:tc>
+                  <a:txBody>
+                    <a:bodyPr/>
+                    <a:lstStyle/>
+                    <a:p>
+                      <a:pPr algn="ctr"/>
+                      <a:r>
+                        <a:rPr sz="1100" b="0" i="0">
+                          <a:solidFill>
+                            <a:schemeClr val="tx1"/>
+                          </a:solidFill>
+                          <a:latin typeface="Avenir Next LT Pro"/>
+                        </a:rPr>
+                        <a:t>45.9%</a:t>
+                      </a:r>
+                    </a:p>
+                  </a:txBody>
+                  <a:tcPr marL="73152" marR="73152" marT="18288" marB="18288" anchor="ctr">
+                    <a:solidFill>
+                      <a:srgbClr val="FFFFFF"/>
+                    </a:solidFill>
+                  </a:tcPr>
+                </a:tc>
+                <a:tc>
+                  <a:txBody>
+                    <a:bodyPr/>
+                    <a:lstStyle/>
+                    <a:p>
+                      <a:pPr algn="ctr"/>
+                      <a:r>
+                        <a:rPr sz="1100" b="0" i="0">
+                          <a:solidFill>
+                            <a:schemeClr val="tx1"/>
+                          </a:solidFill>
+                          <a:latin typeface="Avenir Next LT Pro"/>
+                        </a:rPr>
+                        <a:t>44.5%</a:t>
+                      </a:r>
+                    </a:p>
+                  </a:txBody>
+                  <a:tcPr marL="73152" marR="73152" marT="18288" marB="18288" anchor="ctr">
+                    <a:solidFill>
+                      <a:srgbClr val="FFFFFF"/>
+                    </a:solidFill>
+                  </a:tcPr>
+                </a:tc>
+                <a:tc>
+                  <a:txBody>
+                    <a:bodyPr/>
+                    <a:lstStyle/>
+                    <a:p>
+                      <a:pPr algn="ctr"/>
+                      <a:r>
+                        <a:rPr sz="1100" b="0" i="0">
+                          <a:solidFill>
+                            <a:schemeClr val="tx1"/>
+                          </a:solidFill>
+                          <a:latin typeface="Avenir Next LT Pro"/>
+                        </a:rPr>
+                        <a:t>44.1%</a:t>
+                      </a:r>
+                    </a:p>
+                  </a:txBody>
+                  <a:tcPr marL="73152" marR="73152" marT="18288" marB="18288" anchor="ctr">
+                    <a:solidFill>
+                      <a:srgbClr val="FFFFFF"/>
+                    </a:solidFill>
+                  </a:tcPr>
+                </a:tc>
+                <a:tc>
+                  <a:txBody>
+                    <a:bodyPr/>
+                    <a:lstStyle/>
+                    <a:p>
+                      <a:pPr algn="ctr"/>
+                      <a:r>
+                        <a:rPr sz="1100" b="0" i="0">
+                          <a:solidFill>
+                            <a:schemeClr val="tx1"/>
+                          </a:solidFill>
+                          <a:latin typeface="Avenir Next LT Pro"/>
+                        </a:rPr>
+                        <a:t>~45%</a:t>
+                      </a:r>
+                    </a:p>
+                  </a:txBody>
+                  <a:tcPr marL="73152" marR="73152" marT="18288" marB="18288" anchor="ctr">
+                    <a:solidFill>
+                      <a:srgbClr val="FFFFFF"/>
+                    </a:solidFill>
+                  </a:tcPr>
+                </a:tc>
+                <a:tc>
+                  <a:txBody>
+                    <a:bodyPr/>
+                    <a:lstStyle/>
+                    <a:p>
+                      <a:pPr algn="ctr"/>
+                      <a:r>
+                        <a:rPr sz="1100" b="0" i="0">
+                          <a:solidFill>
+                            <a:schemeClr val="tx1"/>
+                          </a:solidFill>
+                          <a:latin typeface="Avenir Next LT Pro"/>
+                        </a:rPr>
+                        <a:t>~46%</a:t>
+                      </a:r>
+                    </a:p>
+                  </a:txBody>
+                  <a:tcPr marL="73152" marR="73152" marT="18288" marB="18288" anchor="ctr">
+                    <a:solidFill>
+                      <a:srgbClr val="FFFFFF"/>
+                    </a:solidFill>
+                  </a:tcPr>
+                </a:tc>
+                <a:extLst>
+                  <a:ext uri="{0D108BD9-81ED-4DB2-BD59-A6C34878D82A}">
+                    <a16:rowId xmlns:a16="http://schemas.microsoft.com/office/drawing/2014/main" val="10003"/>
+                  </a:ext>
+                </a:extLst>
+              </a:tr>
+              <a:tr h="384048">
+                <a:tc>
+                  <a:txBody>
+                    <a:bodyPr/>
+                    <a:lstStyle/>
+                    <a:p>
+                      <a:pPr algn="l"/>
+                      <a:r>
+                        <a:rPr sz="1100" b="1" i="0" dirty="0">
+                          <a:solidFill>
+                            <a:schemeClr val="tx1"/>
+                          </a:solidFill>
+                          <a:latin typeface="Avenir Next LT Pro Demi"/>
+                        </a:rPr>
+                        <a:t>Adj. EBITDA</a:t>
+                      </a:r>
+                    </a:p>
+                  </a:txBody>
+                  <a:tcPr marL="73152" marR="73152" marT="18288" marB="18288" anchor="ctr">
+                    <a:solidFill>
+                      <a:srgbClr val="F4F6F8"/>
+                    </a:solidFill>
+                  </a:tcPr>
+                </a:tc>
+                <a:tc>
+                  <a:txBody>
+                    <a:bodyPr/>
+                    <a:lstStyle/>
+                    <a:p>
+                      <a:pPr algn="ctr"/>
+                      <a:r>
+                        <a:rPr sz="1100" b="0" i="0" dirty="0">
+                          <a:solidFill>
+                            <a:schemeClr val="tx1"/>
+                          </a:solidFill>
+                          <a:latin typeface="Avenir Next LT Pro"/>
+                        </a:rPr>
+                        <a:t>551</a:t>
+                      </a:r>
+                    </a:p>
+                  </a:txBody>
+                  <a:tcPr marL="73152" marR="73152" marT="18288" marB="18288" anchor="ctr">
+                    <a:solidFill>
+                      <a:srgbClr val="F4F6F8"/>
+                    </a:solidFill>
+                  </a:tcPr>
+                </a:tc>
+                <a:tc>
+                  <a:txBody>
+                    <a:bodyPr/>
+                    <a:lstStyle/>
+                    <a:p>
+                      <a:pPr algn="ctr"/>
+                      <a:r>
+                        <a:rPr sz="1100" b="0" i="0">
+                          <a:solidFill>
+                            <a:schemeClr val="tx1"/>
+                          </a:solidFill>
+                          <a:latin typeface="Avenir Next LT Pro"/>
+                        </a:rPr>
+                        <a:t>539</a:t>
+                      </a:r>
+                    </a:p>
+                  </a:txBody>
+                  <a:tcPr marL="73152" marR="73152" marT="18288" marB="18288" anchor="ctr">
+                    <a:solidFill>
+                      <a:srgbClr val="F4F6F8"/>
+                    </a:solidFill>
+                  </a:tcPr>
+                </a:tc>
+                <a:tc>
+                  <a:txBody>
+                    <a:bodyPr/>
+                    <a:lstStyle/>
+                    <a:p>
+                      <a:pPr algn="ctr"/>
+                      <a:r>
+                        <a:rPr sz="1100" b="0" i="0">
+                          <a:solidFill>
+                            <a:schemeClr val="tx1"/>
+                          </a:solidFill>
+                          <a:latin typeface="Avenir Next LT Pro"/>
+                        </a:rPr>
+                        <a:t>597</a:t>
+                      </a:r>
+                    </a:p>
+                  </a:txBody>
+                  <a:tcPr marL="73152" marR="73152" marT="18288" marB="18288" anchor="ctr">
+                    <a:solidFill>
+                      <a:srgbClr val="F4F6F8"/>
+                    </a:solidFill>
+                  </a:tcPr>
+                </a:tc>
+                <a:tc>
+                  <a:txBody>
+                    <a:bodyPr/>
+                    <a:lstStyle/>
+                    <a:p>
+                      <a:pPr algn="ctr"/>
+                      <a:r>
+                        <a:rPr sz="1100" b="0" i="0">
+                          <a:solidFill>
+                            <a:schemeClr val="tx1"/>
+                          </a:solidFill>
+                          <a:latin typeface="Avenir Next LT Pro"/>
+                        </a:rPr>
+                        <a:t>589</a:t>
+                      </a:r>
+                    </a:p>
+                  </a:txBody>
+                  <a:tcPr marL="73152" marR="73152" marT="18288" marB="18288" anchor="ctr">
+                    <a:solidFill>
+                      <a:srgbClr val="F4F6F8"/>
+                    </a:solidFill>
+                  </a:tcPr>
+                </a:tc>
+                <a:tc>
+                  <a:txBody>
+                    <a:bodyPr/>
+                    <a:lstStyle/>
+                    <a:p>
+                      <a:pPr algn="ctr"/>
+                      <a:r>
+                        <a:rPr sz="1100" b="0" i="0">
+                          <a:solidFill>
+                            <a:schemeClr val="tx1"/>
+                          </a:solidFill>
+                          <a:latin typeface="Avenir Next LT Pro"/>
+                        </a:rPr>
+                        <a:t>708</a:t>
+                      </a:r>
+                    </a:p>
+                  </a:txBody>
+                  <a:tcPr marL="73152" marR="73152" marT="18288" marB="18288" anchor="ctr">
+                    <a:solidFill>
+                      <a:srgbClr val="F4F6F8"/>
+                    </a:solidFill>
+                  </a:tcPr>
+                </a:tc>
+                <a:extLst>
+                  <a:ext uri="{0D108BD9-81ED-4DB2-BD59-A6C34878D82A}">
+                    <a16:rowId xmlns:a16="http://schemas.microsoft.com/office/drawing/2014/main" val="10004"/>
+                  </a:ext>
+                </a:extLst>
+              </a:tr>
+              <a:tr h="384048">
+                <a:tc>
+                  <a:txBody>
+                    <a:bodyPr/>
+                    <a:lstStyle/>
+                    <a:p>
+                      <a:pPr algn="l"/>
+                      <a:r>
+                        <a:rPr sz="1100" b="1" i="0">
+                          <a:solidFill>
+                            <a:schemeClr val="tx1"/>
+                          </a:solidFill>
+                          <a:latin typeface="Avenir Next LT Pro Demi"/>
+                        </a:rPr>
+                        <a:t>EBITDA Margin</a:t>
+                      </a:r>
+                    </a:p>
+                  </a:txBody>
+                  <a:tcPr marL="73152" marR="73152" marT="18288" marB="18288" anchor="ctr">
+                    <a:solidFill>
+                      <a:srgbClr val="FFFFFF"/>
+                    </a:solidFill>
+                  </a:tcPr>
+                </a:tc>
+                <a:tc>
+                  <a:txBody>
+                    <a:bodyPr/>
+                    <a:lstStyle/>
+                    <a:p>
+                      <a:pPr algn="ctr"/>
+                      <a:r>
+                        <a:rPr sz="1100" b="0" i="0" dirty="0">
+                          <a:solidFill>
+                            <a:schemeClr val="tx1"/>
+                          </a:solidFill>
+                          <a:latin typeface="Avenir Next LT Pro"/>
+                        </a:rPr>
+                        <a:t>18.2%</a:t>
+                      </a:r>
+                    </a:p>
+                  </a:txBody>
+                  <a:tcPr marL="73152" marR="73152" marT="18288" marB="18288" anchor="ctr">
+                    <a:solidFill>
+                      <a:srgbClr val="FFFFFF"/>
+                    </a:solidFill>
+                  </a:tcPr>
+                </a:tc>
+                <a:tc>
+                  <a:txBody>
+                    <a:bodyPr/>
+                    <a:lstStyle/>
+                    <a:p>
+                      <a:pPr algn="ctr"/>
+                      <a:r>
+                        <a:rPr sz="1100" b="0" i="0">
+                          <a:solidFill>
+                            <a:schemeClr val="tx1"/>
+                          </a:solidFill>
+                          <a:latin typeface="Avenir Next LT Pro"/>
+                        </a:rPr>
+                        <a:t>16.9%</a:t>
+                      </a:r>
+                    </a:p>
+                  </a:txBody>
+                  <a:tcPr marL="73152" marR="73152" marT="18288" marB="18288" anchor="ctr">
+                    <a:solidFill>
+                      <a:srgbClr val="FFFFFF"/>
+                    </a:solidFill>
+                  </a:tcPr>
+                </a:tc>
+                <a:tc>
+                  <a:txBody>
+                    <a:bodyPr/>
+                    <a:lstStyle/>
+                    <a:p>
+                      <a:pPr algn="ctr"/>
+                      <a:r>
+                        <a:rPr sz="1100" b="0" i="0">
+                          <a:solidFill>
+                            <a:schemeClr val="tx1"/>
+                          </a:solidFill>
+                          <a:latin typeface="Avenir Next LT Pro"/>
+                        </a:rPr>
+                        <a:t>17.3%</a:t>
+                      </a:r>
+                    </a:p>
+                  </a:txBody>
+                  <a:tcPr marL="73152" marR="73152" marT="18288" marB="18288" anchor="ctr">
+                    <a:solidFill>
+                      <a:srgbClr val="FFFFFF"/>
+                    </a:solidFill>
+                  </a:tcPr>
+                </a:tc>
+                <a:tc>
+                  <a:txBody>
+                    <a:bodyPr/>
+                    <a:lstStyle/>
+                    <a:p>
+                      <a:pPr algn="ctr"/>
+                      <a:r>
+                        <a:rPr sz="1100" b="0" i="0">
+                          <a:solidFill>
+                            <a:schemeClr val="tx1"/>
+                          </a:solidFill>
+                          <a:latin typeface="Avenir Next LT Pro"/>
+                        </a:rPr>
+                        <a:t>16.0%</a:t>
+                      </a:r>
+                    </a:p>
+                  </a:txBody>
+                  <a:tcPr marL="73152" marR="73152" marT="18288" marB="18288" anchor="ctr">
+                    <a:solidFill>
+                      <a:srgbClr val="FFFFFF"/>
+                    </a:solidFill>
+                  </a:tcPr>
+                </a:tc>
+                <a:tc>
+                  <a:txBody>
+                    <a:bodyPr/>
+                    <a:lstStyle/>
+                    <a:p>
+                      <a:pPr algn="ctr"/>
+                      <a:r>
+                        <a:rPr sz="1100" b="0" i="0">
+                          <a:solidFill>
+                            <a:schemeClr val="tx1"/>
+                          </a:solidFill>
+                          <a:latin typeface="Avenir Next LT Pro"/>
+                        </a:rPr>
+                        <a:t>17.0%</a:t>
+                      </a:r>
+                    </a:p>
+                  </a:txBody>
+                  <a:tcPr marL="73152" marR="73152" marT="18288" marB="18288" anchor="ctr">
+                    <a:solidFill>
+                      <a:srgbClr val="FFFFFF"/>
+                    </a:solidFill>
+                  </a:tcPr>
+                </a:tc>
+                <a:extLst>
+                  <a:ext uri="{0D108BD9-81ED-4DB2-BD59-A6C34878D82A}">
+                    <a16:rowId xmlns:a16="http://schemas.microsoft.com/office/drawing/2014/main" val="10005"/>
+                  </a:ext>
+                </a:extLst>
+              </a:tr>
+              <a:tr h="384048">
+                <a:tc>
+                  <a:txBody>
+                    <a:bodyPr/>
+                    <a:lstStyle/>
+                    <a:p>
+                      <a:pPr algn="l"/>
+                      <a:r>
+                        <a:rPr sz="1100" b="1" i="0">
+                          <a:solidFill>
+                            <a:schemeClr val="tx1"/>
+                          </a:solidFill>
+                          <a:latin typeface="Avenir Next LT Pro Demi"/>
+                        </a:rPr>
+                        <a:t>Diluted EPS (GAAP)</a:t>
+                      </a:r>
+                    </a:p>
+                  </a:txBody>
+                  <a:tcPr marL="73152" marR="73152" marT="18288" marB="18288" anchor="ctr">
+                    <a:solidFill>
+                      <a:srgbClr val="F4F6F8"/>
+                    </a:solidFill>
+                  </a:tcPr>
+                </a:tc>
+                <a:tc>
+                  <a:txBody>
+                    <a:bodyPr/>
+                    <a:lstStyle/>
+                    <a:p>
+                      <a:pPr algn="ctr"/>
+                      <a:r>
+                        <a:rPr sz="1100" b="0" i="0">
+                          <a:solidFill>
+                            <a:schemeClr val="tx1"/>
+                          </a:solidFill>
+                          <a:latin typeface="Avenir Next LT Pro"/>
+                        </a:rPr>
+                        <a:t>$5.91</a:t>
+                      </a:r>
+                    </a:p>
+                  </a:txBody>
+                  <a:tcPr marL="73152" marR="73152" marT="18288" marB="18288" anchor="ctr">
+                    <a:solidFill>
+                      <a:srgbClr val="F4F6F8"/>
+                    </a:solidFill>
+                  </a:tcPr>
+                </a:tc>
+                <a:tc>
+                  <a:txBody>
+                    <a:bodyPr/>
+                    <a:lstStyle/>
+                    <a:p>
+                      <a:pPr algn="ctr"/>
+                      <a:r>
+                        <a:rPr sz="1100" b="0" i="0" dirty="0">
+                          <a:solidFill>
+                            <a:schemeClr val="tx1"/>
+                          </a:solidFill>
+                          <a:latin typeface="Avenir Next LT Pro"/>
+                        </a:rPr>
+                        <a:t>$3.62</a:t>
+                      </a:r>
+                    </a:p>
+                  </a:txBody>
+                  <a:tcPr marL="73152" marR="73152" marT="18288" marB="18288" anchor="ctr">
+                    <a:solidFill>
+                      <a:srgbClr val="F4F6F8"/>
+                    </a:solidFill>
+                  </a:tcPr>
+                </a:tc>
+                <a:tc>
+                  <a:txBody>
+                    <a:bodyPr/>
+                    <a:lstStyle/>
+                    <a:p>
+                      <a:pPr algn="ctr"/>
+                      <a:r>
+                        <a:rPr sz="1100" b="0" i="0">
+                          <a:solidFill>
+                            <a:schemeClr val="tx1"/>
+                          </a:solidFill>
+                          <a:latin typeface="Avenir Next LT Pro"/>
+                        </a:rPr>
+                        <a:t>$6.31</a:t>
+                      </a:r>
+                    </a:p>
+                  </a:txBody>
+                  <a:tcPr marL="73152" marR="73152" marT="18288" marB="18288" anchor="ctr">
+                    <a:solidFill>
+                      <a:srgbClr val="F4F6F8"/>
+                    </a:solidFill>
+                  </a:tcPr>
+                </a:tc>
+                <a:tc>
+                  <a:txBody>
+                    <a:bodyPr/>
+                    <a:lstStyle/>
+                    <a:p>
+                      <a:pPr algn="ctr"/>
+                      <a:r>
+                        <a:rPr sz="1100" b="0" i="0">
+                          <a:solidFill>
+                            <a:schemeClr val="tx1"/>
+                          </a:solidFill>
+                          <a:latin typeface="Avenir Next LT Pro"/>
+                        </a:rPr>
+                        <a:t>~$9</a:t>
+                      </a:r>
+                    </a:p>
+                  </a:txBody>
+                  <a:tcPr marL="73152" marR="73152" marT="18288" marB="18288" anchor="ctr">
+                    <a:solidFill>
+                      <a:srgbClr val="F4F6F8"/>
+                    </a:solidFill>
+                  </a:tcPr>
+                </a:tc>
+                <a:tc>
+                  <a:txBody>
+                    <a:bodyPr/>
+                    <a:lstStyle/>
+                    <a:p>
+                      <a:pPr algn="ctr"/>
+                      <a:r>
+                        <a:rPr sz="1100" b="0" i="0">
+                          <a:solidFill>
+                            <a:schemeClr val="tx1"/>
+                          </a:solidFill>
+                          <a:latin typeface="Avenir Next LT Pro"/>
+                        </a:rPr>
+                        <a:t>~$14</a:t>
+                      </a:r>
+                    </a:p>
+                  </a:txBody>
+                  <a:tcPr marL="73152" marR="73152" marT="18288" marB="18288" anchor="ctr">
+                    <a:solidFill>
+                      <a:srgbClr val="F4F6F8"/>
+                    </a:solidFill>
+                  </a:tcPr>
+                </a:tc>
+                <a:extLst>
+                  <a:ext uri="{0D108BD9-81ED-4DB2-BD59-A6C34878D82A}">
+                    <a16:rowId xmlns:a16="http://schemas.microsoft.com/office/drawing/2014/main" val="10006"/>
+                  </a:ext>
+                </a:extLst>
+              </a:tr>
+              <a:tr h="384048">
+                <a:tc>
+                  <a:txBody>
+                    <a:bodyPr/>
+                    <a:lstStyle/>
+                    <a:p>
+                      <a:pPr algn="l"/>
+                      <a:r>
+                        <a:rPr sz="1100" b="1" i="0">
+                          <a:solidFill>
+                            <a:schemeClr val="tx1"/>
+                          </a:solidFill>
+                          <a:latin typeface="Avenir Next LT Pro Demi"/>
+                        </a:rPr>
+                        <a:t>Free Cash Flow</a:t>
+                      </a:r>
+                    </a:p>
+                  </a:txBody>
+                  <a:tcPr marL="73152" marR="73152" marT="18288" marB="18288" anchor="ctr">
+                    <a:solidFill>
+                      <a:srgbClr val="FFFFFF"/>
+                    </a:solidFill>
+                  </a:tcPr>
+                </a:tc>
+                <a:tc>
+                  <a:txBody>
+                    <a:bodyPr/>
+                    <a:lstStyle/>
+                    <a:p>
+                      <a:pPr algn="ctr"/>
+                      <a:r>
+                        <a:rPr sz="1100" b="0" i="0">
+                          <a:solidFill>
+                            <a:schemeClr val="tx1"/>
+                          </a:solidFill>
+                          <a:latin typeface="Avenir Next LT Pro"/>
+                        </a:rPr>
+                        <a:t>-67</a:t>
+                      </a:r>
+                    </a:p>
+                  </a:txBody>
+                  <a:tcPr marL="73152" marR="73152" marT="18288" marB="18288" anchor="ctr">
+                    <a:solidFill>
+                      <a:srgbClr val="FFFFFF"/>
+                    </a:solidFill>
+                  </a:tcPr>
+                </a:tc>
+                <a:tc>
+                  <a:txBody>
+                    <a:bodyPr/>
+                    <a:lstStyle/>
+                    <a:p>
+                      <a:pPr algn="ctr"/>
+                      <a:r>
+                        <a:rPr sz="1100" b="0" i="0">
+                          <a:solidFill>
+                            <a:schemeClr val="tx1"/>
+                          </a:solidFill>
+                          <a:latin typeface="Avenir Next LT Pro"/>
+                        </a:rPr>
+                        <a:t>-214</a:t>
+                      </a:r>
+                    </a:p>
+                  </a:txBody>
+                  <a:tcPr marL="73152" marR="73152" marT="18288" marB="18288" anchor="ctr">
+                    <a:solidFill>
+                      <a:srgbClr val="FFFFFF"/>
+                    </a:solidFill>
+                  </a:tcPr>
+                </a:tc>
+                <a:tc>
+                  <a:txBody>
+                    <a:bodyPr/>
+                    <a:lstStyle/>
+                    <a:p>
+                      <a:pPr algn="ctr"/>
+                      <a:r>
+                        <a:rPr sz="1100" b="0" i="0" dirty="0">
+                          <a:solidFill>
+                            <a:schemeClr val="tx1"/>
+                          </a:solidFill>
+                          <a:latin typeface="Avenir Next LT Pro"/>
+                        </a:rPr>
+                        <a:t>252</a:t>
+                      </a:r>
+                    </a:p>
+                  </a:txBody>
+                  <a:tcPr marL="73152" marR="73152" marT="18288" marB="18288" anchor="ctr">
+                    <a:solidFill>
+                      <a:srgbClr val="FFFFFF"/>
+                    </a:solidFill>
+                  </a:tcPr>
+                </a:tc>
+                <a:tc>
+                  <a:txBody>
+                    <a:bodyPr/>
+                    <a:lstStyle/>
+                    <a:p>
+                      <a:pPr algn="ctr"/>
+                      <a:r>
+                        <a:rPr sz="1100" b="0" i="0">
+                          <a:solidFill>
+                            <a:schemeClr val="tx1"/>
+                          </a:solidFill>
+                          <a:latin typeface="Avenir Next LT Pro"/>
+                        </a:rPr>
+                        <a:t>~350</a:t>
+                      </a:r>
+                    </a:p>
+                  </a:txBody>
+                  <a:tcPr marL="73152" marR="73152" marT="18288" marB="18288" anchor="ctr">
+                    <a:solidFill>
+                      <a:srgbClr val="FFFFFF"/>
+                    </a:solidFill>
+                  </a:tcPr>
+                </a:tc>
+                <a:tc>
+                  <a:txBody>
+                    <a:bodyPr/>
+                    <a:lstStyle/>
+                    <a:p>
+                      <a:pPr algn="ctr"/>
+                      <a:r>
+                        <a:rPr sz="1100" b="0" i="0">
+                          <a:solidFill>
+                            <a:schemeClr val="tx1"/>
+                          </a:solidFill>
+                          <a:latin typeface="Avenir Next LT Pro"/>
+                        </a:rPr>
+                        <a:t>~450</a:t>
+                      </a:r>
+                    </a:p>
+                  </a:txBody>
+                  <a:tcPr marL="73152" marR="73152" marT="18288" marB="18288" anchor="ctr">
+                    <a:solidFill>
+                      <a:srgbClr val="FFFFFF"/>
+                    </a:solidFill>
+                  </a:tcPr>
+                </a:tc>
+                <a:extLst>
+                  <a:ext uri="{0D108BD9-81ED-4DB2-BD59-A6C34878D82A}">
+                    <a16:rowId xmlns:a16="http://schemas.microsoft.com/office/drawing/2014/main" val="10007"/>
+                  </a:ext>
+                </a:extLst>
+              </a:tr>
+              <a:tr h="384048">
+                <a:tc>
+                  <a:txBody>
+                    <a:bodyPr/>
+                    <a:lstStyle/>
+                    <a:p>
+                      <a:pPr algn="l"/>
+                      <a:r>
+                        <a:rPr sz="1100" b="1" i="0">
+                          <a:solidFill>
+                            <a:schemeClr val="tx1"/>
+                          </a:solidFill>
+                          <a:latin typeface="Avenir Next LT Pro Demi"/>
+                        </a:rPr>
+                        <a:t>Net Debt</a:t>
+                      </a:r>
+                    </a:p>
+                  </a:txBody>
+                  <a:tcPr marL="73152" marR="73152" marT="18288" marB="18288" anchor="ctr">
+                    <a:solidFill>
+                      <a:srgbClr val="F4F6F8"/>
+                    </a:solidFill>
+                  </a:tcPr>
+                </a:tc>
+                <a:tc>
+                  <a:txBody>
+                    <a:bodyPr/>
+                    <a:lstStyle/>
+                    <a:p>
+                      <a:pPr algn="ctr"/>
+                      <a:r>
+                        <a:rPr sz="1100" b="0" i="0">
+                          <a:solidFill>
+                            <a:schemeClr val="tx1"/>
+                          </a:solidFill>
+                          <a:latin typeface="Avenir Next LT Pro"/>
+                        </a:rPr>
+                        <a:t>~2,600</a:t>
+                      </a:r>
+                    </a:p>
+                  </a:txBody>
+                  <a:tcPr marL="73152" marR="73152" marT="18288" marB="18288" anchor="ctr">
+                    <a:solidFill>
+                      <a:srgbClr val="F4F6F8"/>
+                    </a:solidFill>
+                  </a:tcPr>
+                </a:tc>
+                <a:tc>
+                  <a:txBody>
+                    <a:bodyPr/>
+                    <a:lstStyle/>
+                    <a:p>
+                      <a:pPr algn="ctr"/>
+                      <a:r>
+                        <a:rPr sz="1100" b="0" i="0">
+                          <a:solidFill>
+                            <a:schemeClr val="tx1"/>
+                          </a:solidFill>
+                          <a:latin typeface="Avenir Next LT Pro"/>
+                        </a:rPr>
+                        <a:t>2,594</a:t>
+                      </a:r>
+                    </a:p>
+                  </a:txBody>
+                  <a:tcPr marL="73152" marR="73152" marT="18288" marB="18288" anchor="ctr">
+                    <a:solidFill>
+                      <a:srgbClr val="F4F6F8"/>
+                    </a:solidFill>
+                  </a:tcPr>
+                </a:tc>
+                <a:tc>
+                  <a:txBody>
+                    <a:bodyPr/>
+                    <a:lstStyle/>
+                    <a:p>
+                      <a:pPr algn="ctr"/>
+                      <a:r>
+                        <a:rPr sz="1100" b="0" i="0">
+                          <a:solidFill>
+                            <a:schemeClr val="tx1"/>
+                          </a:solidFill>
+                          <a:latin typeface="Avenir Next LT Pro"/>
+                        </a:rPr>
+                        <a:t>2,378</a:t>
+                      </a:r>
+                    </a:p>
+                  </a:txBody>
+                  <a:tcPr marL="73152" marR="73152" marT="18288" marB="18288" anchor="ctr">
+                    <a:solidFill>
+                      <a:srgbClr val="F4F6F8"/>
+                    </a:solidFill>
+                  </a:tcPr>
+                </a:tc>
+                <a:tc>
+                  <a:txBody>
+                    <a:bodyPr/>
+                    <a:lstStyle/>
+                    <a:p>
+                      <a:pPr algn="ctr"/>
+                      <a:r>
+                        <a:rPr sz="1100" b="0" i="0" dirty="0">
+                          <a:solidFill>
+                            <a:schemeClr val="tx1"/>
+                          </a:solidFill>
+                          <a:latin typeface="Avenir Next LT Pro"/>
+                        </a:rPr>
+                        <a:t>~2,180</a:t>
+                      </a:r>
+                    </a:p>
+                  </a:txBody>
+                  <a:tcPr marL="73152" marR="73152" marT="18288" marB="18288" anchor="ctr">
+                    <a:solidFill>
+                      <a:srgbClr val="F4F6F8"/>
+                    </a:solidFill>
+                  </a:tcPr>
+                </a:tc>
+                <a:tc>
+                  <a:txBody>
+                    <a:bodyPr/>
+                    <a:lstStyle/>
+                    <a:p>
+                      <a:pPr algn="ctr"/>
+                      <a:r>
+                        <a:rPr sz="1100" b="0" i="0" dirty="0">
+                          <a:solidFill>
+                            <a:schemeClr val="tx1"/>
+                          </a:solidFill>
+                          <a:latin typeface="Avenir Next LT Pro"/>
+                        </a:rPr>
+                        <a:t>~1,900</a:t>
+                      </a:r>
+                    </a:p>
+                  </a:txBody>
+                  <a:tcPr marL="73152" marR="73152" marT="18288" marB="18288" anchor="ctr">
+                    <a:solidFill>
+                      <a:srgbClr val="F4F6F8"/>
+                    </a:solidFill>
+                  </a:tcPr>
+                </a:tc>
+                <a:extLst>
+                  <a:ext uri="{0D108BD9-81ED-4DB2-BD59-A6C34878D82A}">
+                    <a16:rowId xmlns:a16="http://schemas.microsoft.com/office/drawing/2014/main" val="10008"/>
+                  </a:ext>
+                </a:extLst>
+              </a:tr>
+            </a:tbl>
+          </a:graphicData>
+        </a:graphic>
+      </p:graphicFrame>
+      <p:sp>
+        <p:nvSpPr>
+          <p:cNvPr id="7" name="TextBox 6"/>
+          <p:cNvSpPr txBox="1"/>
+          <p:nvPr/>
+        </p:nvSpPr>
+        <p:spPr>
+          <a:xfrm>
+            <a:off x="218660" y="5041127"/>
+            <a:ext cx="8653669" cy="400110"/>
+          </a:xfrm>
+          <a:prstGeom prst="rect">
+            <a:avLst/>
+          </a:prstGeom>
+          <a:noFill/>
+        </p:spPr>
+        <p:txBody>
+          <a:bodyPr wrap="square">
+            <a:spAutoFit/>
+          </a:bodyPr>
+          <a:lstStyle/>
+          <a:p>
+            <a:r>
+              <a:rPr sz="1000" b="1" i="0" dirty="0">
+                <a:solidFill>
+                  <a:srgbClr val="9A7B44"/>
+                </a:solidFill>
+                <a:latin typeface="Avenir Next LT Pro"/>
+              </a:rPr>
+              <a:t>Story: margins dip near-term (FY26 guide 14–16%) then recover toward ~17%; FCF inflected to +$252M in FY25 — but ~$2.4B net debt (~4× EBITDA) and ~$225M/yr interest make it a leveraged bet</a:t>
+            </a:r>
+          </a:p>
+        </p:txBody>
+      </p:sp>
+    </p:spTree>
+  </p:cSld>
+  <p:clrMapOvr>
+    <a:masterClrMapping/>
+  </p:clrMapOvr>
+</p:sld>
+</file>
+
+<file path=ppt/slides/slide13.xml><?xml version="1.0" encoding="utf-8"?>
+<p:sld xmlns:a="http://schemas.openxmlformats.org/drawingml/2006/main" xmlns:r="http://schemas.openxmlformats.org/officeDocument/2006/relationships" xmlns:p="http://schemas.openxmlformats.org/presentationml/2006/main">
+  <p:cSld>
+    <p:spTree>
+      <p:nvGrpSpPr>
+        <p:cNvPr id="1" name=""/>
+        <p:cNvGrpSpPr/>
+        <p:nvPr/>
+      </p:nvGrpSpPr>
+      <p:grpSpPr>
+        <a:xfrm>
+          <a:off x="0" y="0"/>
+          <a:ext cx="0" cy="0"/>
+          <a:chOff x="0" y="0"/>
+          <a:chExt cx="0" cy="0"/>
+        </a:xfrm>
+      </p:grpSpPr>
+      <p:sp>
+        <p:nvSpPr>
+          <p:cNvPr id="2" name="Title 1">
+            <a:extLst>
+              <a:ext uri="{FF2B5EF4-FFF2-40B4-BE49-F238E27FC236}">
+                <a16:creationId xmlns:a16="http://schemas.microsoft.com/office/drawing/2014/main" id="{F36EAD30-CEA1-8508-C4C6-5800B2CA8846}"/>
+              </a:ext>
+            </a:extLst>
+          </p:cNvPr>
+          <p:cNvSpPr>
+            <a:spLocks noGrp="1"/>
+          </p:cNvSpPr>
+          <p:nvPr>
+            <p:ph type="title"/>
+          </p:nvPr>
+        </p:nvSpPr>
+        <p:spPr/>
+        <p:txBody>
+          <a:bodyPr/>
+          <a:lstStyle/>
+          <a:p>
+            <a:r>
+              <a:rPr lang="en-US">
+                <a:solidFill/>
+              </a:rPr>
+              <a:t>Valuation &amp; returns</a:t>
+            </a:r>
+          </a:p>
+        </p:txBody>
+      </p:sp>
+    </p:spTree>
+    <p:extLst>
+      <p:ext uri="{BB962C8B-B14F-4D97-AF65-F5344CB8AC3E}">
+        <p14:creationId xmlns:p14="http://schemas.microsoft.com/office/powerpoint/2010/main" val="1202939706"/>
+      </p:ext>
+    </p:extLst>
+  </p:cSld>
+  <p:clrMapOvr>
+    <a:masterClrMapping/>
+  </p:clrMapOvr>
+  <mc:AlternateContent xmlns:mc="http://schemas.openxmlformats.org/markup-compatibility/2006" xmlns:p14="http://schemas.microsoft.com/office/powerpoint/2010/main">
+    <mc:Choice Requires="p14">
+      <p:transition spd="med" p14:dur="700">
+        <p:fade/>
+      </p:transition>
+    </mc:Choice>
+    <mc:Fallback xmlns="">
+      <p:transition spd="med">
+        <p:fade/>
+      </p:transition>
+    </mc:Fallback>
+  </mc:AlternateContent>
+</p:sld>
+</file>
+
+<file path=ppt/slides/slide14.xml><?xml version="1.0" encoding="utf-8"?>
+<p:sld xmlns:a="http://schemas.openxmlformats.org/drawingml/2006/main" xmlns:r="http://schemas.openxmlformats.org/officeDocument/2006/relationships" xmlns:p="http://schemas.openxmlformats.org/presentationml/2006/main">
+  <p:cSld>
+    <p:spTree>
+      <p:nvGrpSpPr>
+        <p:cNvPr id="1" name=""/>
+        <p:cNvGrpSpPr/>
+        <p:nvPr/>
+      </p:nvGrpSpPr>
+      <p:grpSpPr>
+        <a:xfrm>
+          <a:off x="0" y="0"/>
+          <a:ext cx="0" cy="0"/>
+          <a:chOff x="0" y="0"/>
+          <a:chExt cx="0" cy="0"/>
+        </a:xfrm>
+      </p:grpSpPr>
+      <p:sp>
+        <p:nvSpPr>
+          <p:cNvPr id="2" name="TextBox 1"/>
+          <p:cNvSpPr txBox="1"/>
+          <p:nvPr/>
+        </p:nvSpPr>
+        <p:spPr>
+          <a:xfrm>
+            <a:off x="457200" y="320040"/>
+            <a:ext cx="8229600" cy="446276"/>
+          </a:xfrm>
+          <a:prstGeom prst="rect">
+            <a:avLst/>
+          </a:prstGeom>
+          <a:noFill/>
+        </p:spPr>
+        <p:txBody>
+          <a:bodyPr wrap="square">
+            <a:spAutoFit/>
+          </a:bodyPr>
+          <a:lstStyle/>
+          <a:p>
+            <a:r>
+              <a:rPr sz="2300" b="0" i="0" dirty="0">
+                <a:solidFill/>
                 <a:latin typeface="Avenir Next LT Pro Demi"/>
               </a:rPr>
               <a:t>Valuation — EV/EBITDA, FY2027E</a:t>
@@ -5394,7 +8091,7 @@
             <a:r>
               <a:rPr sz="1700" b="1" i="0">
                 <a:solidFill>
-                  <a:srgbClr val="156082"/>
+                  <a:srgbClr val="9A7B44"/>
                 </a:solidFill>
                 <a:latin typeface="Avenir Next LT Pro Demi"/>
               </a:rPr>
@@ -5689,7 +8386,7 @@
                   </a:txBody>
                   <a:tcPr marL="73152" marR="73152" marT="18288" marB="18288" anchor="ctr">
                     <a:solidFill>
-                      <a:srgbClr val="AF8C49"/>
+                      <a:srgbClr val="9A7B44"/>
                     </a:solidFill>
                   </a:tcPr>
                 </a:tc>
@@ -5712,7 +8409,7 @@
                   </a:txBody>
                   <a:tcPr marL="73152" marR="73152" marT="18288" marB="18288" anchor="ctr">
                     <a:solidFill>
-                      <a:srgbClr val="AF8C49"/>
+                      <a:srgbClr val="9A7B44"/>
                     </a:solidFill>
                   </a:tcPr>
                 </a:tc>
@@ -5750,7 +8447,7 @@
                   </a:txBody>
                   <a:tcPr marL="73152" marR="73152" marT="18288" marB="18288" anchor="ctr">
                     <a:solidFill>
-                      <a:srgbClr val="AF8C49"/>
+                      <a:srgbClr val="9A7B44"/>
                     </a:solidFill>
                   </a:tcPr>
                 </a:tc>
@@ -5773,7 +8470,7 @@
                   </a:txBody>
                   <a:tcPr marL="73152" marR="73152" marT="18288" marB="18288" anchor="ctr">
                     <a:solidFill>
-                      <a:srgbClr val="AF8C49"/>
+                      <a:srgbClr val="9A7B44"/>
                     </a:solidFill>
                   </a:tcPr>
                 </a:tc>
@@ -5796,7 +8493,7 @@
                   </a:txBody>
                   <a:tcPr marL="73152" marR="73152" marT="18288" marB="18288" anchor="ctr">
                     <a:solidFill>
-                      <a:srgbClr val="AF8C49"/>
+                      <a:srgbClr val="9A7B44"/>
                     </a:solidFill>
                   </a:tcPr>
                 </a:tc>
@@ -5819,7 +8516,7 @@
                   </a:txBody>
                   <a:tcPr marL="73152" marR="73152" marT="18288" marB="18288" anchor="ctr">
                     <a:solidFill>
-                      <a:srgbClr val="AF8C49"/>
+                      <a:srgbClr val="9A7B44"/>
                     </a:solidFill>
                   </a:tcPr>
                 </a:tc>
@@ -6293,7 +8990,7 @@
             <a:r>
               <a:rPr sz="1300" b="1" i="0">
                 <a:solidFill>
-                  <a:srgbClr val="156082"/>
+                  <a:srgbClr val="9A7B44"/>
                 </a:solidFill>
                 <a:latin typeface="Avenir Next LT Pro Demi"/>
               </a:rPr>
@@ -6310,7 +9007,7 @@
 </p:sld>
 </file>
 
-<file path=ppt/slides/slide11.xml><?xml version="1.0" encoding="utf-8"?>
+<file path=ppt/slides/slide15.xml><?xml version="1.0" encoding="utf-8"?>
 <p:sld xmlns:a="http://schemas.openxmlformats.org/drawingml/2006/main" xmlns:r="http://schemas.openxmlformats.org/officeDocument/2006/relationships" xmlns:p="http://schemas.openxmlformats.org/presentationml/2006/main">
   <p:cSld>
     <p:spTree>
@@ -6351,6 +9048,7 @@
           <a:p>
             <a:r>
               <a:rPr sz="2300" b="0" i="0" dirty="0">
+                <a:solidFill/>
                 <a:latin typeface="Avenir Next LT Pro Demi"/>
               </a:rPr>
               <a:t>Macro Sensitivity — Housing Is Option Value</a:t>
@@ -6487,7 +9185,7 @@
                   </a:txBody>
                   <a:tcPr marL="73152" marR="73152" marT="18288" marB="18288" anchor="ctr">
                     <a:solidFill>
-                      <a:srgbClr val="AF8C49"/>
+                      <a:srgbClr val="9A7B44"/>
                     </a:solidFill>
                   </a:tcPr>
                 </a:tc>
@@ -6510,7 +9208,7 @@
                   </a:txBody>
                   <a:tcPr marL="73152" marR="73152" marT="18288" marB="18288" anchor="ctr">
                     <a:solidFill>
-                      <a:srgbClr val="AF8C49"/>
+                      <a:srgbClr val="9A7B44"/>
                     </a:solidFill>
                   </a:tcPr>
                 </a:tc>
@@ -6533,7 +9231,7 @@
                   </a:txBody>
                   <a:tcPr marL="73152" marR="73152" marT="18288" marB="18288" anchor="ctr">
                     <a:solidFill>
-                      <a:srgbClr val="AF8C49"/>
+                      <a:srgbClr val="9A7B44"/>
                     </a:solidFill>
                   </a:tcPr>
                 </a:tc>
@@ -6556,7 +9254,7 @@
                   </a:txBody>
                   <a:tcPr marL="73152" marR="73152" marT="18288" marB="18288" anchor="ctr">
                     <a:solidFill>
-                      <a:srgbClr val="AF8C49"/>
+                      <a:srgbClr val="9A7B44"/>
                     </a:solidFill>
                   </a:tcPr>
                 </a:tc>
@@ -6579,7 +9277,7 @@
                   </a:txBody>
                   <a:tcPr marL="73152" marR="73152" marT="18288" marB="18288" anchor="ctr">
                     <a:solidFill>
-                      <a:srgbClr val="AF8C49"/>
+                      <a:srgbClr val="9A7B44"/>
                     </a:solidFill>
                   </a:tcPr>
                 </a:tc>
@@ -6602,7 +9300,7 @@
                   </a:txBody>
                   <a:tcPr marL="73152" marR="73152" marT="18288" marB="18288" anchor="ctr">
                     <a:solidFill>
-                      <a:srgbClr val="AF8C49"/>
+                      <a:srgbClr val="9A7B44"/>
                     </a:solidFill>
                   </a:tcPr>
                 </a:tc>
@@ -6625,7 +9323,7 @@
                   </a:txBody>
                   <a:tcPr marL="73152" marR="73152" marT="18288" marB="18288" anchor="ctr">
                     <a:solidFill>
-                      <a:srgbClr val="AF8C49"/>
+                      <a:srgbClr val="9A7B44"/>
                     </a:solidFill>
                   </a:tcPr>
                 </a:tc>
@@ -7167,6 +9865,7 @@
           <a:p>
             <a:r>
               <a:rPr sz="1100" b="1" i="0" dirty="0">
+                <a:solidFill/>
                 <a:latin typeface="Avenir Next LT Pro Demi"/>
               </a:rPr>
               <a:t>Key distinction: RH tracks housing TRANSACTIONS (turnover), not prices</a:t>
@@ -7227,7 +9926,7 @@
 </p:sld>
 </file>
 
-<file path=ppt/slides/slide12.xml><?xml version="1.0" encoding="utf-8"?>
+<file path=ppt/slides/slide16.xml><?xml version="1.0" encoding="utf-8"?>
 <p:sld xmlns:a="http://schemas.openxmlformats.org/drawingml/2006/main" xmlns:r="http://schemas.openxmlformats.org/officeDocument/2006/relationships" xmlns:p="http://schemas.openxmlformats.org/presentationml/2006/main">
   <p:cSld>
     <p:spTree>
@@ -7266,7 +9965,9 @@
           <a:lstStyle/>
           <a:p>
             <a:r>
-              <a:rPr lang="en-US"/>
+              <a:rPr lang="en-US">
+                <a:solidFill/>
+              </a:rPr>
               <a:t>Competitive landscape</a:t>
             </a:r>
           </a:p>
@@ -7297,7 +9998,7 @@
 </p:sld>
 </file>
 
-<file path=ppt/slides/slide13.xml><?xml version="1.0" encoding="utf-8"?>
+<file path=ppt/slides/slide17.xml><?xml version="1.0" encoding="utf-8"?>
 <p:sld xmlns:a="http://schemas.openxmlformats.org/drawingml/2006/main" xmlns:r="http://schemas.openxmlformats.org/officeDocument/2006/relationships" xmlns:p="http://schemas.openxmlformats.org/presentationml/2006/main">
   <p:cSld>
     <p:spTree>
@@ -7338,6 +10039,7 @@
           <a:p>
             <a:r>
               <a:rPr sz="2300" b="0" i="0" dirty="0">
+                <a:solidFill/>
                 <a:latin typeface="Avenir Next LT Pro Demi"/>
               </a:rPr>
               <a:t>Competitive Landscape</a:t>
@@ -7467,7 +10169,7 @@
                   </a:txBody>
                   <a:tcPr marL="73152" marR="73152" marT="18288" marB="18288" anchor="ctr">
                     <a:solidFill>
-                      <a:srgbClr val="AF8C49"/>
+                      <a:srgbClr val="9A7B44"/>
                     </a:solidFill>
                   </a:tcPr>
                 </a:tc>
@@ -7490,7 +10192,7 @@
                   </a:txBody>
                   <a:tcPr marL="73152" marR="73152" marT="18288" marB="18288" anchor="ctr">
                     <a:solidFill>
-                      <a:srgbClr val="AF8C49"/>
+                      <a:srgbClr val="9A7B44"/>
                     </a:solidFill>
                   </a:tcPr>
                 </a:tc>
@@ -7513,7 +10215,7 @@
                   </a:txBody>
                   <a:tcPr marL="73152" marR="73152" marT="18288" marB="18288" anchor="ctr">
                     <a:solidFill>
-                      <a:srgbClr val="AF8C49"/>
+                      <a:srgbClr val="9A7B44"/>
                     </a:solidFill>
                   </a:tcPr>
                 </a:tc>
@@ -7551,7 +10253,7 @@
                   </a:txBody>
                   <a:tcPr marL="73152" marR="73152" marT="18288" marB="18288" anchor="ctr">
                     <a:solidFill>
-                      <a:srgbClr val="AF8C49"/>
+                      <a:srgbClr val="9A7B44"/>
                     </a:solidFill>
                   </a:tcPr>
                 </a:tc>
@@ -7574,7 +10276,7 @@
                   </a:txBody>
                   <a:tcPr marL="73152" marR="73152" marT="18288" marB="18288" anchor="ctr">
                     <a:solidFill>
-                      <a:srgbClr val="AF8C49"/>
+                      <a:srgbClr val="9A7B44"/>
                     </a:solidFill>
                   </a:tcPr>
                 </a:tc>
@@ -7597,7 +10299,7 @@
                   </a:txBody>
                   <a:tcPr marL="73152" marR="73152" marT="18288" marB="18288" anchor="ctr">
                     <a:solidFill>
-                      <a:srgbClr val="AF8C49"/>
+                      <a:srgbClr val="9A7B44"/>
                     </a:solidFill>
                   </a:tcPr>
                 </a:tc>
@@ -8215,6 +10917,7 @@
           <a:p>
             <a:r>
               <a:rPr sz="1100" b="1" i="0" dirty="0">
+                <a:solidFill/>
                 <a:latin typeface="Avenir Next LT Pro Demi"/>
               </a:rPr>
               <a:t>The real competitor is Arhaus, not European luxury.</a:t>
@@ -8223,6 +10926,7 @@
           <a:p>
             <a:r>
               <a:rPr sz="1000" b="0" i="0" dirty="0">
+                <a:solidFill/>
                 <a:latin typeface="Avenir Next LT Pro"/>
               </a:rPr>
               <a:t>RH's negative CAGR is self-inflicted + housing — not lost share. Estates moves RH up, out of Arhaus's tier</a:t>
@@ -8244,7 +10948,7 @@
 </p:sld>
 </file>
 
-<file path=ppt/slides/slide14.xml><?xml version="1.0" encoding="utf-8"?>
+<file path=ppt/slides/slide18.xml><?xml version="1.0" encoding="utf-8"?>
 <p:sld xmlns:a="http://schemas.openxmlformats.org/drawingml/2006/main" xmlns:r="http://schemas.openxmlformats.org/officeDocument/2006/relationships" xmlns:p="http://schemas.openxmlformats.org/presentationml/2006/main">
   <p:cSld>
     <p:spTree>
@@ -8285,6 +10989,7 @@
           <a:p>
             <a:r>
               <a:rPr sz="2300" b="0" i="0" dirty="0">
+                <a:solidFill/>
                 <a:latin typeface="Avenir Next LT Pro Demi"/>
               </a:rPr>
               <a:t>Key Risks — What Has to Go Wrong</a:t>
@@ -9086,2106 +11791,6 @@
           <a:p>
             <a:pPr algn="ctr"/>
             <a:endParaRPr/>
-          </a:p>
-        </p:txBody>
-      </p:sp>
-    </p:spTree>
-  </p:cSld>
-  <p:clrMapOvr>
-    <a:masterClrMapping/>
-  </p:clrMapOvr>
-</p:sld>
-</file>
-
-<file path=ppt/slides/slide15.xml><?xml version="1.0" encoding="utf-8"?>
-<p:sld xmlns:a="http://schemas.openxmlformats.org/drawingml/2006/main" xmlns:p="http://schemas.openxmlformats.org/presentationml/2006/main" xmlns:r="http://schemas.openxmlformats.org/officeDocument/2006/relationships">
-  <p:cSld>
-    <p:spTree>
-      <p:nvGrpSpPr>
-        <p:cNvPr id="1" name=""/>
-        <p:cNvGrpSpPr/>
-        <p:nvPr/>
-      </p:nvGrpSpPr>
-      <p:grpSpPr/>
-      <p:sp>
-        <p:nvSpPr>
-          <p:cNvPr id="2" name="TextBox 1"/>
-          <p:cNvSpPr txBox="1"/>
-          <p:nvPr/>
-        </p:nvSpPr>
-        <p:spPr>
-          <a:xfrm>
-            <a:off x="457200" y="365760"/>
-            <a:ext cx="8229600" cy="548640"/>
-          </a:xfrm>
-          <a:prstGeom prst="rect">
-            <a:avLst/>
-          </a:prstGeom>
-          <a:noFill/>
-        </p:spPr>
-        <p:txBody>
-          <a:bodyPr wrap="square">
-            <a:spAutoFit/>
-          </a:bodyPr>
-          <a:lstStyle/>
-          <a:p>
-            <a:r>
-              <a:rPr sz="2200" b="0">
-                <a:solidFill>
-                  <a:srgbClr val="000000"/>
-                </a:solidFill>
-                <a:latin typeface="Avenir Next LT Pro Demi"/>
-              </a:rPr>
-              <a:t>How RH Got Here</a:t>
-            </a:r>
-          </a:p>
-        </p:txBody>
-      </p:sp>
-      <p:sp>
-        <p:nvSpPr>
-          <p:cNvPr id="3" name="Rectangle 2"/>
-          <p:cNvSpPr/>
-          <p:nvPr/>
-        </p:nvSpPr>
-        <p:spPr>
-          <a:xfrm>
-            <a:off x="457200" y="960120"/>
-            <a:ext cx="8229600" cy="25603"/>
-          </a:xfrm>
-          <a:prstGeom prst="rect">
-            <a:avLst/>
-          </a:prstGeom>
-          <a:solidFill>
-            <a:srgbClr val="156082"/>
-          </a:solidFill>
-          <a:ln>
-            <a:noFill/>
-          </a:ln>
-        </p:spPr>
-        <p:style>
-          <a:lnRef idx="1">
-            <a:schemeClr val="accent1"/>
-          </a:lnRef>
-          <a:fillRef idx="3">
-            <a:schemeClr val="accent1"/>
-          </a:fillRef>
-          <a:effectRef idx="2">
-            <a:schemeClr val="accent1"/>
-          </a:effectRef>
-          <a:fontRef idx="minor">
-            <a:schemeClr val="lt1"/>
-          </a:fontRef>
-        </p:style>
-        <p:txBody>
-          <a:bodyPr rtlCol="0" anchor="ctr"/>
-          <a:lstStyle/>
-          <a:p>
-            <a:pPr algn="ctr"/>
-          </a:p>
-        </p:txBody>
-      </p:sp>
-      <p:sp>
-        <p:nvSpPr>
-          <p:cNvPr id="4" name="Rectangle 3"/>
-          <p:cNvSpPr/>
-          <p:nvPr/>
-        </p:nvSpPr>
-        <p:spPr>
-          <a:xfrm>
-            <a:off x="457200" y="1371600"/>
-            <a:ext cx="82296" cy="1143000"/>
-          </a:xfrm>
-          <a:prstGeom prst="rect">
-            <a:avLst/>
-          </a:prstGeom>
-          <a:solidFill>
-            <a:srgbClr val="156082"/>
-          </a:solidFill>
-          <a:ln>
-            <a:noFill/>
-          </a:ln>
-        </p:spPr>
-        <p:style>
-          <a:lnRef idx="1">
-            <a:schemeClr val="accent1"/>
-          </a:lnRef>
-          <a:fillRef idx="3">
-            <a:schemeClr val="accent1"/>
-          </a:fillRef>
-          <a:effectRef idx="2">
-            <a:schemeClr val="accent1"/>
-          </a:effectRef>
-          <a:fontRef idx="minor">
-            <a:schemeClr val="lt1"/>
-          </a:fontRef>
-        </p:style>
-        <p:txBody>
-          <a:bodyPr rtlCol="0" anchor="ctr"/>
-          <a:lstStyle/>
-          <a:p>
-            <a:pPr algn="ctr"/>
-          </a:p>
-        </p:txBody>
-      </p:sp>
-      <p:sp>
-        <p:nvSpPr>
-          <p:cNvPr id="5" name="TextBox 4"/>
-          <p:cNvSpPr txBox="1"/>
-          <p:nvPr/>
-        </p:nvSpPr>
-        <p:spPr>
-          <a:xfrm>
-            <a:off x="658368" y="1371600"/>
-            <a:ext cx="1920240" cy="1143000"/>
-          </a:xfrm>
-          <a:prstGeom prst="rect">
-            <a:avLst/>
-          </a:prstGeom>
-          <a:noFill/>
-        </p:spPr>
-        <p:txBody>
-          <a:bodyPr wrap="square" anchor="ctr">
-            <a:spAutoFit/>
-          </a:bodyPr>
-          <a:lstStyle/>
-          <a:p>
-            <a:r>
-              <a:rPr sz="1400" b="1">
-                <a:solidFill>
-                  <a:srgbClr val="000000"/>
-                </a:solidFill>
-                <a:latin typeface="Avenir Next LT Pro Demi"/>
-              </a:rPr>
-              <a:t>The Build</a:t>
-            </a:r>
-          </a:p>
-          <a:p>
-            <a:r>
-              <a:rPr sz="1000" b="0">
-                <a:solidFill>
-                  <a:srgbClr val="707070"/>
-                </a:solidFill>
-                <a:latin typeface="Avenir Next LT Pro"/>
-              </a:rPr>
-              <a:t>Pre-2020</a:t>
-            </a:r>
-          </a:p>
-        </p:txBody>
-      </p:sp>
-      <p:sp>
-        <p:nvSpPr>
-          <p:cNvPr id="6" name="TextBox 5"/>
-          <p:cNvSpPr txBox="1"/>
-          <p:nvPr/>
-        </p:nvSpPr>
-        <p:spPr>
-          <a:xfrm>
-            <a:off x="2743200" y="1371600"/>
-            <a:ext cx="5943600" cy="1143000"/>
-          </a:xfrm>
-          <a:prstGeom prst="rect">
-            <a:avLst/>
-          </a:prstGeom>
-          <a:noFill/>
-        </p:spPr>
-        <p:txBody>
-          <a:bodyPr wrap="square" anchor="ctr">
-            <a:spAutoFit/>
-          </a:bodyPr>
-          <a:lstStyle/>
-          <a:p>
-            <a:r>
-              <a:rPr sz="1250" b="0">
-                <a:solidFill>
-                  <a:srgbClr val="000000"/>
-                </a:solidFill>
-                <a:latin typeface="Avenir Next LT Pro"/>
-              </a:rPr>
-              <a:t>Friedman turns RH into a luxury Gallery brand.</a:t>
-            </a:r>
-          </a:p>
-        </p:txBody>
-      </p:sp>
-      <p:sp>
-        <p:nvSpPr>
-          <p:cNvPr id="7" name="Rectangle 6"/>
-          <p:cNvSpPr/>
-          <p:nvPr/>
-        </p:nvSpPr>
-        <p:spPr>
-          <a:xfrm>
-            <a:off x="457200" y="2679191"/>
-            <a:ext cx="82296" cy="1143000"/>
-          </a:xfrm>
-          <a:prstGeom prst="rect">
-            <a:avLst/>
-          </a:prstGeom>
-          <a:solidFill>
-            <a:srgbClr val="E97132"/>
-          </a:solidFill>
-          <a:ln>
-            <a:noFill/>
-          </a:ln>
-        </p:spPr>
-        <p:style>
-          <a:lnRef idx="1">
-            <a:schemeClr val="accent1"/>
-          </a:lnRef>
-          <a:fillRef idx="3">
-            <a:schemeClr val="accent1"/>
-          </a:fillRef>
-          <a:effectRef idx="2">
-            <a:schemeClr val="accent1"/>
-          </a:effectRef>
-          <a:fontRef idx="minor">
-            <a:schemeClr val="lt1"/>
-          </a:fontRef>
-        </p:style>
-        <p:txBody>
-          <a:bodyPr rtlCol="0" anchor="ctr"/>
-          <a:lstStyle/>
-          <a:p>
-            <a:pPr algn="ctr"/>
-          </a:p>
-        </p:txBody>
-      </p:sp>
-      <p:sp>
-        <p:nvSpPr>
-          <p:cNvPr id="8" name="TextBox 7"/>
-          <p:cNvSpPr txBox="1"/>
-          <p:nvPr/>
-        </p:nvSpPr>
-        <p:spPr>
-          <a:xfrm>
-            <a:off x="658368" y="2679191"/>
-            <a:ext cx="1920240" cy="1143000"/>
-          </a:xfrm>
-          <a:prstGeom prst="rect">
-            <a:avLst/>
-          </a:prstGeom>
-          <a:noFill/>
-        </p:spPr>
-        <p:txBody>
-          <a:bodyPr wrap="square" anchor="ctr">
-            <a:spAutoFit/>
-          </a:bodyPr>
-          <a:lstStyle/>
-          <a:p>
-            <a:r>
-              <a:rPr sz="1400" b="1">
-                <a:solidFill>
-                  <a:srgbClr val="000000"/>
-                </a:solidFill>
-                <a:latin typeface="Avenir Next LT Pro Demi"/>
-              </a:rPr>
-              <a:t>The Peak</a:t>
-            </a:r>
-          </a:p>
-          <a:p>
-            <a:r>
-              <a:rPr sz="1000" b="0">
-                <a:solidFill>
-                  <a:srgbClr val="707070"/>
-                </a:solidFill>
-                <a:latin typeface="Avenir Next LT Pro"/>
-              </a:rPr>
-              <a:t>FY2022</a:t>
-            </a:r>
-          </a:p>
-        </p:txBody>
-      </p:sp>
-      <p:sp>
-        <p:nvSpPr>
-          <p:cNvPr id="9" name="TextBox 8"/>
-          <p:cNvSpPr txBox="1"/>
-          <p:nvPr/>
-        </p:nvSpPr>
-        <p:spPr>
-          <a:xfrm>
-            <a:off x="2743200" y="2679191"/>
-            <a:ext cx="5943600" cy="1143000"/>
-          </a:xfrm>
-          <a:prstGeom prst="rect">
-            <a:avLst/>
-          </a:prstGeom>
-          <a:noFill/>
-        </p:spPr>
-        <p:txBody>
-          <a:bodyPr wrap="square" anchor="ctr">
-            <a:spAutoFit/>
-          </a:bodyPr>
-          <a:lstStyle/>
-          <a:p>
-            <a:r>
-              <a:rPr sz="1250" b="0">
-                <a:solidFill>
-                  <a:srgbClr val="000000"/>
-                </a:solidFill>
-                <a:latin typeface="Avenir Next LT Pro"/>
-              </a:rPr>
-              <a:t>~$3.6B revenue — then buys back ~7.6M shares at ~$269–321, debt-funded.</a:t>
-            </a:r>
-          </a:p>
-        </p:txBody>
-      </p:sp>
-      <p:sp>
-        <p:nvSpPr>
-          <p:cNvPr id="10" name="Rectangle 9"/>
-          <p:cNvSpPr/>
-          <p:nvPr/>
-        </p:nvSpPr>
-        <p:spPr>
-          <a:xfrm>
-            <a:off x="457200" y="3986783"/>
-            <a:ext cx="82296" cy="1143000"/>
-          </a:xfrm>
-          <a:prstGeom prst="rect">
-            <a:avLst/>
-          </a:prstGeom>
-          <a:solidFill>
-            <a:srgbClr val="B03030"/>
-          </a:solidFill>
-          <a:ln>
-            <a:noFill/>
-          </a:ln>
-        </p:spPr>
-        <p:style>
-          <a:lnRef idx="1">
-            <a:schemeClr val="accent1"/>
-          </a:lnRef>
-          <a:fillRef idx="3">
-            <a:schemeClr val="accent1"/>
-          </a:fillRef>
-          <a:effectRef idx="2">
-            <a:schemeClr val="accent1"/>
-          </a:effectRef>
-          <a:fontRef idx="minor">
-            <a:schemeClr val="lt1"/>
-          </a:fontRef>
-        </p:style>
-        <p:txBody>
-          <a:bodyPr rtlCol="0" anchor="ctr"/>
-          <a:lstStyle/>
-          <a:p>
-            <a:pPr algn="ctr"/>
-          </a:p>
-        </p:txBody>
-      </p:sp>
-      <p:sp>
-        <p:nvSpPr>
-          <p:cNvPr id="11" name="TextBox 10"/>
-          <p:cNvSpPr txBox="1"/>
-          <p:nvPr/>
-        </p:nvSpPr>
-        <p:spPr>
-          <a:xfrm>
-            <a:off x="658368" y="3986783"/>
-            <a:ext cx="1920240" cy="1143000"/>
-          </a:xfrm>
-          <a:prstGeom prst="rect">
-            <a:avLst/>
-          </a:prstGeom>
-          <a:noFill/>
-        </p:spPr>
-        <p:txBody>
-          <a:bodyPr wrap="square" anchor="ctr">
-            <a:spAutoFit/>
-          </a:bodyPr>
-          <a:lstStyle/>
-          <a:p>
-            <a:r>
-              <a:rPr sz="1400" b="1">
-                <a:solidFill>
-                  <a:srgbClr val="000000"/>
-                </a:solidFill>
-                <a:latin typeface="Avenir Next LT Pro Demi"/>
-              </a:rPr>
-              <a:t>The Fall</a:t>
-            </a:r>
-          </a:p>
-          <a:p>
-            <a:r>
-              <a:rPr sz="1000" b="0">
-                <a:solidFill>
-                  <a:srgbClr val="707070"/>
-                </a:solidFill>
-                <a:latin typeface="Avenir Next LT Pro"/>
-              </a:rPr>
-              <a:t>FY23–24</a:t>
-            </a:r>
-          </a:p>
-        </p:txBody>
-      </p:sp>
-      <p:sp>
-        <p:nvSpPr>
-          <p:cNvPr id="12" name="TextBox 11"/>
-          <p:cNvSpPr txBox="1"/>
-          <p:nvPr/>
-        </p:nvSpPr>
-        <p:spPr>
-          <a:xfrm>
-            <a:off x="2743200" y="3986783"/>
-            <a:ext cx="5943600" cy="1143000"/>
-          </a:xfrm>
-          <a:prstGeom prst="rect">
-            <a:avLst/>
-          </a:prstGeom>
-          <a:noFill/>
-        </p:spPr>
-        <p:txBody>
-          <a:bodyPr wrap="square" anchor="ctr">
-            <a:spAutoFit/>
-          </a:bodyPr>
-          <a:lstStyle/>
-          <a:p>
-            <a:r>
-              <a:rPr sz="1250" b="0">
-                <a:solidFill>
-                  <a:srgbClr val="000000"/>
-                </a:solidFill>
-                <a:latin typeface="Avenir Next LT Pro"/>
-              </a:rPr>
-              <a:t>Housing freezes; revenue falls to ~$3.03B. Debt now ~$2.4B, ~4× levered.</a:t>
-            </a:r>
-          </a:p>
-        </p:txBody>
-      </p:sp>
-      <p:sp>
-        <p:nvSpPr>
-          <p:cNvPr id="13" name="TextBox 12"/>
-          <p:cNvSpPr txBox="1"/>
-          <p:nvPr/>
-        </p:nvSpPr>
-        <p:spPr>
-          <a:xfrm>
-            <a:off x="457200" y="5806440"/>
-            <a:ext cx="8229600" cy="365760"/>
-          </a:xfrm>
-          <a:prstGeom prst="rect">
-            <a:avLst/>
-          </a:prstGeom>
-          <a:noFill/>
-        </p:spPr>
-        <p:txBody>
-          <a:bodyPr wrap="square">
-            <a:spAutoFit/>
-          </a:bodyPr>
-          <a:lstStyle/>
-          <a:p>
-            <a:r>
-              <a:rPr sz="1100" b="1">
-                <a:solidFill>
-                  <a:srgbClr val="000000"/>
-                </a:solidFill>
-                <a:latin typeface="Avenir Next LT Pro Demi"/>
-              </a:rPr>
-              <a:t>Partly self-inflicted: leveraged buybacks at the top, then the cycle turned.</a:t>
-            </a:r>
-          </a:p>
-        </p:txBody>
-      </p:sp>
-      <p:sp>
-        <p:nvSpPr>
-          <p:cNvPr id="14" name="TextBox 13"/>
-          <p:cNvSpPr txBox="1"/>
-          <p:nvPr/>
-        </p:nvSpPr>
-        <p:spPr>
-          <a:xfrm>
-            <a:off x="457200" y="6355080"/>
-            <a:ext cx="8229600" cy="365760"/>
-          </a:xfrm>
-          <a:prstGeom prst="rect">
-            <a:avLst/>
-          </a:prstGeom>
-          <a:noFill/>
-        </p:spPr>
-        <p:txBody>
-          <a:bodyPr wrap="none">
-            <a:spAutoFit/>
-          </a:bodyPr>
-          <a:lstStyle/>
-          <a:p>
-            <a:r>
-              <a:rPr sz="750" b="0" i="1">
-                <a:solidFill>
-                  <a:srgbClr val="707070"/>
-                </a:solidFill>
-                <a:latin typeface="Avenir Next LT Pro"/>
-              </a:rPr>
-              <a:t>Source: RH FY2025 Form 10-K</a:t>
-            </a:r>
-          </a:p>
-        </p:txBody>
-      </p:sp>
-    </p:spTree>
-  </p:cSld>
-  <p:clrMapOvr>
-    <a:masterClrMapping/>
-  </p:clrMapOvr>
-</p:sld>
-</file>
-
-<file path=ppt/slides/slide16.xml><?xml version="1.0" encoding="utf-8"?>
-<p:sld xmlns:a="http://schemas.openxmlformats.org/drawingml/2006/main" xmlns:p="http://schemas.openxmlformats.org/presentationml/2006/main" xmlns:r="http://schemas.openxmlformats.org/officeDocument/2006/relationships">
-  <p:cSld>
-    <p:spTree>
-      <p:nvGrpSpPr>
-        <p:cNvPr id="1" name=""/>
-        <p:cNvGrpSpPr/>
-        <p:nvPr/>
-      </p:nvGrpSpPr>
-      <p:grpSpPr/>
-      <p:sp>
-        <p:nvSpPr>
-          <p:cNvPr id="2" name="TextBox 1"/>
-          <p:cNvSpPr txBox="1"/>
-          <p:nvPr/>
-        </p:nvSpPr>
-        <p:spPr>
-          <a:xfrm>
-            <a:off x="457200" y="365760"/>
-            <a:ext cx="8229600" cy="548640"/>
-          </a:xfrm>
-          <a:prstGeom prst="rect">
-            <a:avLst/>
-          </a:prstGeom>
-          <a:noFill/>
-        </p:spPr>
-        <p:txBody>
-          <a:bodyPr wrap="square">
-            <a:spAutoFit/>
-          </a:bodyPr>
-          <a:lstStyle/>
-          <a:p>
-            <a:r>
-              <a:rPr sz="2200" b="0">
-                <a:solidFill>
-                  <a:srgbClr val="000000"/>
-                </a:solidFill>
-                <a:latin typeface="Avenir Next LT Pro Demi"/>
-              </a:rPr>
-              <a:t>The Recovery Plan</a:t>
-            </a:r>
-          </a:p>
-        </p:txBody>
-      </p:sp>
-      <p:sp>
-        <p:nvSpPr>
-          <p:cNvPr id="3" name="Rectangle 2"/>
-          <p:cNvSpPr/>
-          <p:nvPr/>
-        </p:nvSpPr>
-        <p:spPr>
-          <a:xfrm>
-            <a:off x="457200" y="960120"/>
-            <a:ext cx="8229600" cy="25603"/>
-          </a:xfrm>
-          <a:prstGeom prst="rect">
-            <a:avLst/>
-          </a:prstGeom>
-          <a:solidFill>
-            <a:srgbClr val="156082"/>
-          </a:solidFill>
-          <a:ln>
-            <a:noFill/>
-          </a:ln>
-        </p:spPr>
-        <p:style>
-          <a:lnRef idx="1">
-            <a:schemeClr val="accent1"/>
-          </a:lnRef>
-          <a:fillRef idx="3">
-            <a:schemeClr val="accent1"/>
-          </a:fillRef>
-          <a:effectRef idx="2">
-            <a:schemeClr val="accent1"/>
-          </a:effectRef>
-          <a:fontRef idx="minor">
-            <a:schemeClr val="lt1"/>
-          </a:fontRef>
-        </p:style>
-        <p:txBody>
-          <a:bodyPr rtlCol="0" anchor="ctr"/>
-          <a:lstStyle/>
-          <a:p>
-            <a:pPr algn="ctr"/>
-          </a:p>
-        </p:txBody>
-      </p:sp>
-      <p:sp>
-        <p:nvSpPr>
-          <p:cNvPr id="4" name="Rectangle 3"/>
-          <p:cNvSpPr/>
-          <p:nvPr/>
-        </p:nvSpPr>
-        <p:spPr>
-          <a:xfrm>
-            <a:off x="457200" y="1371600"/>
-            <a:ext cx="82296" cy="960120"/>
-          </a:xfrm>
-          <a:prstGeom prst="rect">
-            <a:avLst/>
-          </a:prstGeom>
-          <a:solidFill>
-            <a:srgbClr val="156082"/>
-          </a:solidFill>
-          <a:ln>
-            <a:noFill/>
-          </a:ln>
-        </p:spPr>
-        <p:style>
-          <a:lnRef idx="1">
-            <a:schemeClr val="accent1"/>
-          </a:lnRef>
-          <a:fillRef idx="3">
-            <a:schemeClr val="accent1"/>
-          </a:fillRef>
-          <a:effectRef idx="2">
-            <a:schemeClr val="accent1"/>
-          </a:effectRef>
-          <a:fontRef idx="minor">
-            <a:schemeClr val="lt1"/>
-          </a:fontRef>
-        </p:style>
-        <p:txBody>
-          <a:bodyPr rtlCol="0" anchor="ctr"/>
-          <a:lstStyle/>
-          <a:p>
-            <a:pPr algn="ctr"/>
-          </a:p>
-        </p:txBody>
-      </p:sp>
-      <p:sp>
-        <p:nvSpPr>
-          <p:cNvPr id="5" name="TextBox 4"/>
-          <p:cNvSpPr txBox="1"/>
-          <p:nvPr/>
-        </p:nvSpPr>
-        <p:spPr>
-          <a:xfrm>
-            <a:off x="658368" y="1371600"/>
-            <a:ext cx="7955279" cy="960120"/>
-          </a:xfrm>
-          <a:prstGeom prst="rect">
-            <a:avLst/>
-          </a:prstGeom>
-          <a:noFill/>
-        </p:spPr>
-        <p:txBody>
-          <a:bodyPr wrap="square" anchor="ctr">
-            <a:spAutoFit/>
-          </a:bodyPr>
-          <a:lstStyle/>
-          <a:p>
-            <a:r>
-              <a:rPr sz="1350" b="1">
-                <a:solidFill>
-                  <a:srgbClr val="000000"/>
-                </a:solidFill>
-                <a:latin typeface="Avenir Next LT Pro Demi"/>
-              </a:rPr>
-              <a:t>Product transformation  —  </a:t>
-            </a:r>
-            <a:r>
-              <a:rPr sz="1250" b="0">
-                <a:solidFill>
-                  <a:srgbClr val="000000"/>
-                </a:solidFill>
-                <a:latin typeface="Avenir Next LT Pro"/>
-              </a:rPr>
-              <a:t>New collections and refreshed Sourcebooks.</a:t>
-            </a:r>
-          </a:p>
-        </p:txBody>
-      </p:sp>
-      <p:sp>
-        <p:nvSpPr>
-          <p:cNvPr id="6" name="Rectangle 5"/>
-          <p:cNvSpPr/>
-          <p:nvPr/>
-        </p:nvSpPr>
-        <p:spPr>
-          <a:xfrm>
-            <a:off x="457200" y="2496312"/>
-            <a:ext cx="82296" cy="960120"/>
-          </a:xfrm>
-          <a:prstGeom prst="rect">
-            <a:avLst/>
-          </a:prstGeom>
-          <a:solidFill>
-            <a:srgbClr val="196B24"/>
-          </a:solidFill>
-          <a:ln>
-            <a:noFill/>
-          </a:ln>
-        </p:spPr>
-        <p:style>
-          <a:lnRef idx="1">
-            <a:schemeClr val="accent1"/>
-          </a:lnRef>
-          <a:fillRef idx="3">
-            <a:schemeClr val="accent1"/>
-          </a:fillRef>
-          <a:effectRef idx="2">
-            <a:schemeClr val="accent1"/>
-          </a:effectRef>
-          <a:fontRef idx="minor">
-            <a:schemeClr val="lt1"/>
-          </a:fontRef>
-        </p:style>
-        <p:txBody>
-          <a:bodyPr rtlCol="0" anchor="ctr"/>
-          <a:lstStyle/>
-          <a:p>
-            <a:pPr algn="ctr"/>
-          </a:p>
-        </p:txBody>
-      </p:sp>
-      <p:sp>
-        <p:nvSpPr>
-          <p:cNvPr id="7" name="TextBox 6"/>
-          <p:cNvSpPr txBox="1"/>
-          <p:nvPr/>
-        </p:nvSpPr>
-        <p:spPr>
-          <a:xfrm>
-            <a:off x="658368" y="2496312"/>
-            <a:ext cx="7955279" cy="960120"/>
-          </a:xfrm>
-          <a:prstGeom prst="rect">
-            <a:avLst/>
-          </a:prstGeom>
-          <a:noFill/>
-        </p:spPr>
-        <p:txBody>
-          <a:bodyPr wrap="square" anchor="ctr">
-            <a:spAutoFit/>
-          </a:bodyPr>
-          <a:lstStyle/>
-          <a:p>
-            <a:r>
-              <a:rPr sz="1350" b="1">
-                <a:solidFill>
-                  <a:srgbClr val="000000"/>
-                </a:solidFill>
-                <a:latin typeface="Avenir Next LT Pro Demi"/>
-              </a:rPr>
-              <a:t>Gallery expansion  —  </a:t>
-            </a:r>
-            <a:r>
-              <a:rPr sz="1250" b="0">
-                <a:solidFill>
-                  <a:srgbClr val="000000"/>
-                </a:solidFill>
-                <a:latin typeface="Avenir Next LT Pro"/>
-              </a:rPr>
-              <a:t>Every major U.S./Canada market — RH's ~$5–6B opportunity.</a:t>
-            </a:r>
-          </a:p>
-        </p:txBody>
-      </p:sp>
-      <p:sp>
-        <p:nvSpPr>
-          <p:cNvPr id="8" name="Rectangle 7"/>
-          <p:cNvSpPr/>
-          <p:nvPr/>
-        </p:nvSpPr>
-        <p:spPr>
-          <a:xfrm>
-            <a:off x="457200" y="3621024"/>
-            <a:ext cx="82296" cy="960120"/>
-          </a:xfrm>
-          <a:prstGeom prst="rect">
-            <a:avLst/>
-          </a:prstGeom>
-          <a:solidFill>
-            <a:srgbClr val="E97132"/>
-          </a:solidFill>
-          <a:ln>
-            <a:noFill/>
-          </a:ln>
-        </p:spPr>
-        <p:style>
-          <a:lnRef idx="1">
-            <a:schemeClr val="accent1"/>
-          </a:lnRef>
-          <a:fillRef idx="3">
-            <a:schemeClr val="accent1"/>
-          </a:fillRef>
-          <a:effectRef idx="2">
-            <a:schemeClr val="accent1"/>
-          </a:effectRef>
-          <a:fontRef idx="minor">
-            <a:schemeClr val="lt1"/>
-          </a:fontRef>
-        </p:style>
-        <p:txBody>
-          <a:bodyPr rtlCol="0" anchor="ctr"/>
-          <a:lstStyle/>
-          <a:p>
-            <a:pPr algn="ctr"/>
-          </a:p>
-        </p:txBody>
-      </p:sp>
-      <p:sp>
-        <p:nvSpPr>
-          <p:cNvPr id="9" name="TextBox 8"/>
-          <p:cNvSpPr txBox="1"/>
-          <p:nvPr/>
-        </p:nvSpPr>
-        <p:spPr>
-          <a:xfrm>
-            <a:off x="658368" y="3621024"/>
-            <a:ext cx="7955279" cy="960120"/>
-          </a:xfrm>
-          <a:prstGeom prst="rect">
-            <a:avLst/>
-          </a:prstGeom>
-          <a:noFill/>
-        </p:spPr>
-        <p:txBody>
-          <a:bodyPr wrap="square" anchor="ctr">
-            <a:spAutoFit/>
-          </a:bodyPr>
-          <a:lstStyle/>
-          <a:p>
-            <a:r>
-              <a:rPr sz="1350" b="1">
-                <a:solidFill>
-                  <a:srgbClr val="000000"/>
-                </a:solidFill>
-                <a:latin typeface="Avenir Next LT Pro Demi"/>
-              </a:rPr>
-              <a:t>Move upmarket  —  </a:t>
-            </a:r>
-            <a:r>
-              <a:rPr sz="1250" b="0">
-                <a:solidFill>
-                  <a:srgbClr val="000000"/>
-                </a:solidFill>
-                <a:latin typeface="Avenir Next LT Pro"/>
-              </a:rPr>
-              <a:t>Estates targets the rate-immune cash buyer.</a:t>
-            </a:r>
-          </a:p>
-        </p:txBody>
-      </p:sp>
-      <p:sp>
-        <p:nvSpPr>
-          <p:cNvPr id="10" name="Rectangle 9"/>
-          <p:cNvSpPr/>
-          <p:nvPr/>
-        </p:nvSpPr>
-        <p:spPr>
-          <a:xfrm>
-            <a:off x="457200" y="4745736"/>
-            <a:ext cx="82296" cy="960120"/>
-          </a:xfrm>
-          <a:prstGeom prst="rect">
-            <a:avLst/>
-          </a:prstGeom>
-          <a:solidFill>
-            <a:srgbClr val="156082"/>
-          </a:solidFill>
-          <a:ln>
-            <a:noFill/>
-          </a:ln>
-        </p:spPr>
-        <p:style>
-          <a:lnRef idx="1">
-            <a:schemeClr val="accent1"/>
-          </a:lnRef>
-          <a:fillRef idx="3">
-            <a:schemeClr val="accent1"/>
-          </a:fillRef>
-          <a:effectRef idx="2">
-            <a:schemeClr val="accent1"/>
-          </a:effectRef>
-          <a:fontRef idx="minor">
-            <a:schemeClr val="lt1"/>
-          </a:fontRef>
-        </p:style>
-        <p:txBody>
-          <a:bodyPr rtlCol="0" anchor="ctr"/>
-          <a:lstStyle/>
-          <a:p>
-            <a:pPr algn="ctr"/>
-          </a:p>
-        </p:txBody>
-      </p:sp>
-      <p:sp>
-        <p:nvSpPr>
-          <p:cNvPr id="11" name="TextBox 10"/>
-          <p:cNvSpPr txBox="1"/>
-          <p:nvPr/>
-        </p:nvSpPr>
-        <p:spPr>
-          <a:xfrm>
-            <a:off x="658368" y="4745736"/>
-            <a:ext cx="7955279" cy="960120"/>
-          </a:xfrm>
-          <a:prstGeom prst="rect">
-            <a:avLst/>
-          </a:prstGeom>
-          <a:noFill/>
-        </p:spPr>
-        <p:txBody>
-          <a:bodyPr wrap="square" anchor="ctr">
-            <a:spAutoFit/>
-          </a:bodyPr>
-          <a:lstStyle/>
-          <a:p>
-            <a:r>
-              <a:rPr sz="1350" b="1">
-                <a:solidFill>
-                  <a:srgbClr val="000000"/>
-                </a:solidFill>
-                <a:latin typeface="Avenir Next LT Pro Demi"/>
-              </a:rPr>
-              <a:t>Global + platform  —  </a:t>
-            </a:r>
-            <a:r>
-              <a:rPr sz="1250" b="0">
-                <a:solidFill>
-                  <a:srgbClr val="000000"/>
-                </a:solidFill>
-                <a:latin typeface="Avenir Next LT Pro"/>
-              </a:rPr>
-              <a:t>RH England, Guesthouses, hospitality &amp; F&amp;B.</a:t>
-            </a:r>
-          </a:p>
-        </p:txBody>
-      </p:sp>
-      <p:sp>
-        <p:nvSpPr>
-          <p:cNvPr id="12" name="TextBox 11"/>
-          <p:cNvSpPr txBox="1"/>
-          <p:nvPr/>
-        </p:nvSpPr>
-        <p:spPr>
-          <a:xfrm>
-            <a:off x="457200" y="6355080"/>
-            <a:ext cx="8229600" cy="365760"/>
-          </a:xfrm>
-          <a:prstGeom prst="rect">
-            <a:avLst/>
-          </a:prstGeom>
-          <a:noFill/>
-        </p:spPr>
-        <p:txBody>
-          <a:bodyPr wrap="none">
-            <a:spAutoFit/>
-          </a:bodyPr>
-          <a:lstStyle/>
-          <a:p>
-            <a:r>
-              <a:rPr sz="750" b="0" i="1">
-                <a:solidFill>
-                  <a:srgbClr val="707070"/>
-                </a:solidFill>
-                <a:latin typeface="Avenir Next LT Pro"/>
-              </a:rPr>
-              <a:t>Source: RH FY2025 Form 10-K</a:t>
-            </a:r>
-          </a:p>
-        </p:txBody>
-      </p:sp>
-    </p:spTree>
-  </p:cSld>
-  <p:clrMapOvr>
-    <a:masterClrMapping/>
-  </p:clrMapOvr>
-</p:sld>
-</file>
-
-<file path=ppt/slides/slide17.xml><?xml version="1.0" encoding="utf-8"?>
-<p:sld xmlns:a="http://schemas.openxmlformats.org/drawingml/2006/main" xmlns:p="http://schemas.openxmlformats.org/presentationml/2006/main" xmlns:r="http://schemas.openxmlformats.org/officeDocument/2006/relationships">
-  <p:cSld>
-    <p:spTree>
-      <p:nvGrpSpPr>
-        <p:cNvPr id="1" name=""/>
-        <p:cNvGrpSpPr/>
-        <p:nvPr/>
-      </p:nvGrpSpPr>
-      <p:grpSpPr/>
-      <p:sp>
-        <p:nvSpPr>
-          <p:cNvPr id="2" name="TextBox 1"/>
-          <p:cNvSpPr txBox="1"/>
-          <p:nvPr/>
-        </p:nvSpPr>
-        <p:spPr>
-          <a:xfrm>
-            <a:off x="457200" y="365760"/>
-            <a:ext cx="8229600" cy="548640"/>
-          </a:xfrm>
-          <a:prstGeom prst="rect">
-            <a:avLst/>
-          </a:prstGeom>
-          <a:noFill/>
-        </p:spPr>
-        <p:txBody>
-          <a:bodyPr wrap="square">
-            <a:spAutoFit/>
-          </a:bodyPr>
-          <a:lstStyle/>
-          <a:p>
-            <a:r>
-              <a:rPr sz="2200" b="0">
-                <a:solidFill>
-                  <a:srgbClr val="000000"/>
-                </a:solidFill>
-                <a:latin typeface="Avenir Next LT Pro Demi"/>
-              </a:rPr>
-              <a:t>Is It Working?</a:t>
-            </a:r>
-          </a:p>
-        </p:txBody>
-      </p:sp>
-      <p:sp>
-        <p:nvSpPr>
-          <p:cNvPr id="3" name="Rectangle 2"/>
-          <p:cNvSpPr/>
-          <p:nvPr/>
-        </p:nvSpPr>
-        <p:spPr>
-          <a:xfrm>
-            <a:off x="457200" y="960120"/>
-            <a:ext cx="8229600" cy="25603"/>
-          </a:xfrm>
-          <a:prstGeom prst="rect">
-            <a:avLst/>
-          </a:prstGeom>
-          <a:solidFill>
-            <a:srgbClr val="156082"/>
-          </a:solidFill>
-          <a:ln>
-            <a:noFill/>
-          </a:ln>
-        </p:spPr>
-        <p:style>
-          <a:lnRef idx="1">
-            <a:schemeClr val="accent1"/>
-          </a:lnRef>
-          <a:fillRef idx="3">
-            <a:schemeClr val="accent1"/>
-          </a:fillRef>
-          <a:effectRef idx="2">
-            <a:schemeClr val="accent1"/>
-          </a:effectRef>
-          <a:fontRef idx="minor">
-            <a:schemeClr val="lt1"/>
-          </a:fontRef>
-        </p:style>
-        <p:txBody>
-          <a:bodyPr rtlCol="0" anchor="ctr"/>
-          <a:lstStyle/>
-          <a:p>
-            <a:pPr algn="ctr"/>
-          </a:p>
-        </p:txBody>
-      </p:sp>
-      <p:sp>
-        <p:nvSpPr>
-          <p:cNvPr id="4" name="Rectangle 3"/>
-          <p:cNvSpPr/>
-          <p:nvPr/>
-        </p:nvSpPr>
-        <p:spPr>
-          <a:xfrm>
-            <a:off x="457200" y="1234440"/>
-            <a:ext cx="3977639" cy="384048"/>
-          </a:xfrm>
-          <a:prstGeom prst="rect">
-            <a:avLst/>
-          </a:prstGeom>
-          <a:solidFill>
-            <a:srgbClr val="196B24"/>
-          </a:solidFill>
-          <a:ln>
-            <a:noFill/>
-          </a:ln>
-        </p:spPr>
-        <p:style>
-          <a:lnRef idx="1">
-            <a:schemeClr val="accent1"/>
-          </a:lnRef>
-          <a:fillRef idx="3">
-            <a:schemeClr val="accent1"/>
-          </a:fillRef>
-          <a:effectRef idx="2">
-            <a:schemeClr val="accent1"/>
-          </a:effectRef>
-          <a:fontRef idx="minor">
-            <a:schemeClr val="lt1"/>
-          </a:fontRef>
-        </p:style>
-        <p:txBody>
-          <a:bodyPr rtlCol="0" anchor="ctr" lIns="137160"/>
-          <a:lstStyle/>
-          <a:p>
-            <a:pPr algn="ctr"/>
-            <a:r>
-              <a:rPr sz="1250" b="1">
-                <a:solidFill>
-                  <a:srgbClr val="FFFFFF"/>
-                </a:solidFill>
-                <a:latin typeface="Avenir Next LT Pro Demi"/>
-              </a:rPr>
-              <a:t>WORKING</a:t>
-            </a:r>
-          </a:p>
-        </p:txBody>
-      </p:sp>
-      <p:sp>
-        <p:nvSpPr>
-          <p:cNvPr id="5" name="Rectangle 4"/>
-          <p:cNvSpPr/>
-          <p:nvPr/>
-        </p:nvSpPr>
-        <p:spPr>
-          <a:xfrm>
-            <a:off x="4709160" y="1234440"/>
-            <a:ext cx="3977639" cy="384048"/>
-          </a:xfrm>
-          <a:prstGeom prst="rect">
-            <a:avLst/>
-          </a:prstGeom>
-          <a:solidFill>
-            <a:srgbClr val="B03030"/>
-          </a:solidFill>
-          <a:ln>
-            <a:noFill/>
-          </a:ln>
-        </p:spPr>
-        <p:style>
-          <a:lnRef idx="1">
-            <a:schemeClr val="accent1"/>
-          </a:lnRef>
-          <a:fillRef idx="3">
-            <a:schemeClr val="accent1"/>
-          </a:fillRef>
-          <a:effectRef idx="2">
-            <a:schemeClr val="accent1"/>
-          </a:effectRef>
-          <a:fontRef idx="minor">
-            <a:schemeClr val="lt1"/>
-          </a:fontRef>
-        </p:style>
-        <p:txBody>
-          <a:bodyPr rtlCol="0" anchor="ctr" lIns="137160"/>
-          <a:lstStyle/>
-          <a:p>
-            <a:pPr algn="ctr"/>
-            <a:r>
-              <a:rPr sz="1250" b="1">
-                <a:solidFill>
-                  <a:srgbClr val="FFFFFF"/>
-                </a:solidFill>
-                <a:latin typeface="Avenir Next LT Pro Demi"/>
-              </a:rPr>
-              <a:t>WATCH</a:t>
-            </a:r>
-          </a:p>
-        </p:txBody>
-      </p:sp>
-      <p:sp>
-        <p:nvSpPr>
-          <p:cNvPr id="6" name="TextBox 5"/>
-          <p:cNvSpPr txBox="1"/>
-          <p:nvPr/>
-        </p:nvSpPr>
-        <p:spPr>
-          <a:xfrm>
-            <a:off x="457200" y="1828800"/>
-            <a:ext cx="3977639" cy="777240"/>
-          </a:xfrm>
-          <a:prstGeom prst="rect">
-            <a:avLst/>
-          </a:prstGeom>
-          <a:noFill/>
-        </p:spPr>
-        <p:txBody>
-          <a:bodyPr wrap="square">
-            <a:spAutoFit/>
-          </a:bodyPr>
-          <a:lstStyle/>
-          <a:p>
-            <a:r>
-              <a:rPr sz="1200" b="1">
-                <a:solidFill>
-                  <a:srgbClr val="196B24"/>
-                </a:solidFill>
-                <a:latin typeface="Avenir Next LT Pro Demi"/>
-              </a:rPr>
-              <a:t>✓  </a:t>
-            </a:r>
-            <a:r>
-              <a:rPr sz="1150" b="0">
-                <a:solidFill>
-                  <a:srgbClr val="000000"/>
-                </a:solidFill>
-                <a:latin typeface="Avenir Next LT Pro"/>
-              </a:rPr>
-              <a:t>FCF inflected to +$252M (from −$214M)</a:t>
-            </a:r>
-          </a:p>
-        </p:txBody>
-      </p:sp>
-      <p:sp>
-        <p:nvSpPr>
-          <p:cNvPr id="7" name="TextBox 6"/>
-          <p:cNvSpPr txBox="1"/>
-          <p:nvPr/>
-        </p:nvSpPr>
-        <p:spPr>
-          <a:xfrm>
-            <a:off x="457200" y="2651760"/>
-            <a:ext cx="3977639" cy="777240"/>
-          </a:xfrm>
-          <a:prstGeom prst="rect">
-            <a:avLst/>
-          </a:prstGeom>
-          <a:noFill/>
-        </p:spPr>
-        <p:txBody>
-          <a:bodyPr wrap="square">
-            <a:spAutoFit/>
-          </a:bodyPr>
-          <a:lstStyle/>
-          <a:p>
-            <a:r>
-              <a:rPr sz="1200" b="1">
-                <a:solidFill>
-                  <a:srgbClr val="196B24"/>
-                </a:solidFill>
-                <a:latin typeface="Avenir Next LT Pro Demi"/>
-              </a:rPr>
-              <a:t>✓  </a:t>
-            </a:r>
-            <a:r>
-              <a:rPr sz="1150" b="0">
-                <a:solidFill>
-                  <a:srgbClr val="000000"/>
-                </a:solidFill>
-                <a:latin typeface="Avenir Next LT Pro"/>
-              </a:rPr>
-              <a:t>Inventory normalized $1.02B → $819M</a:t>
-            </a:r>
-          </a:p>
-        </p:txBody>
-      </p:sp>
-      <p:sp>
-        <p:nvSpPr>
-          <p:cNvPr id="8" name="TextBox 7"/>
-          <p:cNvSpPr txBox="1"/>
-          <p:nvPr/>
-        </p:nvSpPr>
-        <p:spPr>
-          <a:xfrm>
-            <a:off x="457200" y="3474720"/>
-            <a:ext cx="3977639" cy="777240"/>
-          </a:xfrm>
-          <a:prstGeom prst="rect">
-            <a:avLst/>
-          </a:prstGeom>
-          <a:noFill/>
-        </p:spPr>
-        <p:txBody>
-          <a:bodyPr wrap="square">
-            <a:spAutoFit/>
-          </a:bodyPr>
-          <a:lstStyle/>
-          <a:p>
-            <a:r>
-              <a:rPr sz="1200" b="1">
-                <a:solidFill>
-                  <a:srgbClr val="196B24"/>
-                </a:solidFill>
-                <a:latin typeface="Avenir Next LT Pro Demi"/>
-              </a:rPr>
-              <a:t>✓  </a:t>
-            </a:r>
-            <a:r>
-              <a:rPr sz="1150" b="0">
-                <a:solidFill>
-                  <a:srgbClr val="000000"/>
-                </a:solidFill>
-                <a:latin typeface="Avenir Next LT Pro"/>
-              </a:rPr>
-              <a:t>Revenue re-accelerated +8.1% in FY25</a:t>
-            </a:r>
-          </a:p>
-        </p:txBody>
-      </p:sp>
-      <p:sp>
-        <p:nvSpPr>
-          <p:cNvPr id="9" name="TextBox 8"/>
-          <p:cNvSpPr txBox="1"/>
-          <p:nvPr/>
-        </p:nvSpPr>
-        <p:spPr>
-          <a:xfrm>
-            <a:off x="4709160" y="1828800"/>
-            <a:ext cx="3977639" cy="777240"/>
-          </a:xfrm>
-          <a:prstGeom prst="rect">
-            <a:avLst/>
-          </a:prstGeom>
-          <a:noFill/>
-        </p:spPr>
-        <p:txBody>
-          <a:bodyPr wrap="square">
-            <a:spAutoFit/>
-          </a:bodyPr>
-          <a:lstStyle/>
-          <a:p>
-            <a:r>
-              <a:rPr sz="1200" b="1">
-                <a:solidFill>
-                  <a:srgbClr val="B03030"/>
-                </a:solidFill>
-                <a:latin typeface="Avenir Next LT Pro Demi"/>
-              </a:rPr>
-              <a:t>!  </a:t>
-            </a:r>
-            <a:r>
-              <a:rPr sz="1150" b="0">
-                <a:solidFill>
-                  <a:srgbClr val="000000"/>
-                </a:solidFill>
-                <a:latin typeface="Avenir Next LT Pro"/>
-              </a:rPr>
-              <a:t>Q1 FY26: revenue −1.7%, net loss −$14M</a:t>
-            </a:r>
-          </a:p>
-        </p:txBody>
-      </p:sp>
-      <p:sp>
-        <p:nvSpPr>
-          <p:cNvPr id="10" name="TextBox 9"/>
-          <p:cNvSpPr txBox="1"/>
-          <p:nvPr/>
-        </p:nvSpPr>
-        <p:spPr>
-          <a:xfrm>
-            <a:off x="4709160" y="2651760"/>
-            <a:ext cx="3977639" cy="777240"/>
-          </a:xfrm>
-          <a:prstGeom prst="rect">
-            <a:avLst/>
-          </a:prstGeom>
-          <a:noFill/>
-        </p:spPr>
-        <p:txBody>
-          <a:bodyPr wrap="square">
-            <a:spAutoFit/>
-          </a:bodyPr>
-          <a:lstStyle/>
-          <a:p>
-            <a:r>
-              <a:rPr sz="1200" b="1">
-                <a:solidFill>
-                  <a:srgbClr val="B03030"/>
-                </a:solidFill>
-                <a:latin typeface="Avenir Next LT Pro Demi"/>
-              </a:rPr>
-              <a:t>!  </a:t>
-            </a:r>
-            <a:r>
-              <a:rPr sz="1150" b="0">
-                <a:solidFill>
-                  <a:srgbClr val="000000"/>
-                </a:solidFill>
-                <a:latin typeface="Avenir Next LT Pro"/>
-              </a:rPr>
-              <a:t>~$225M/yr interest keeps coverage thin</a:t>
-            </a:r>
-          </a:p>
-        </p:txBody>
-      </p:sp>
-      <p:sp>
-        <p:nvSpPr>
-          <p:cNvPr id="11" name="TextBox 10"/>
-          <p:cNvSpPr txBox="1"/>
-          <p:nvPr/>
-        </p:nvSpPr>
-        <p:spPr>
-          <a:xfrm>
-            <a:off x="4709160" y="3474720"/>
-            <a:ext cx="3977639" cy="777240"/>
-          </a:xfrm>
-          <a:prstGeom prst="rect">
-            <a:avLst/>
-          </a:prstGeom>
-          <a:noFill/>
-        </p:spPr>
-        <p:txBody>
-          <a:bodyPr wrap="square">
-            <a:spAutoFit/>
-          </a:bodyPr>
-          <a:lstStyle/>
-          <a:p>
-            <a:r>
-              <a:rPr sz="1200" b="1">
-                <a:solidFill>
-                  <a:srgbClr val="B03030"/>
-                </a:solidFill>
-                <a:latin typeface="Avenir Next LT Pro Demi"/>
-              </a:rPr>
-              <a:t>!  </a:t>
-            </a:r>
-            <a:r>
-              <a:rPr sz="1150" b="0">
-                <a:solidFill>
-                  <a:srgbClr val="000000"/>
-                </a:solidFill>
-                <a:latin typeface="Avenir Next LT Pro"/>
-              </a:rPr>
-              <a:t>Guidance is back-half loaded</a:t>
-            </a:r>
-          </a:p>
-        </p:txBody>
-      </p:sp>
-      <p:sp>
-        <p:nvSpPr>
-          <p:cNvPr id="12" name="TextBox 11"/>
-          <p:cNvSpPr txBox="1"/>
-          <p:nvPr/>
-        </p:nvSpPr>
-        <p:spPr>
-          <a:xfrm>
-            <a:off x="457200" y="4663440"/>
-            <a:ext cx="8229600" cy="365760"/>
-          </a:xfrm>
-          <a:prstGeom prst="rect">
-            <a:avLst/>
-          </a:prstGeom>
-          <a:noFill/>
-        </p:spPr>
-        <p:txBody>
-          <a:bodyPr wrap="square">
-            <a:spAutoFit/>
-          </a:bodyPr>
-          <a:lstStyle/>
-          <a:p>
-            <a:r>
-              <a:rPr sz="1150" b="1">
-                <a:solidFill>
-                  <a:srgbClr val="000000"/>
-                </a:solidFill>
-                <a:latin typeface="Avenir Next LT Pro Demi"/>
-              </a:rPr>
-              <a:t>Verdict: real but early — the next two quarters are the tell.</a:t>
-            </a:r>
-          </a:p>
-        </p:txBody>
-      </p:sp>
-      <p:sp>
-        <p:nvSpPr>
-          <p:cNvPr id="13" name="TextBox 12"/>
-          <p:cNvSpPr txBox="1"/>
-          <p:nvPr/>
-        </p:nvSpPr>
-        <p:spPr>
-          <a:xfrm>
-            <a:off x="457200" y="6355080"/>
-            <a:ext cx="8229600" cy="365760"/>
-          </a:xfrm>
-          <a:prstGeom prst="rect">
-            <a:avLst/>
-          </a:prstGeom>
-          <a:noFill/>
-        </p:spPr>
-        <p:txBody>
-          <a:bodyPr wrap="none">
-            <a:spAutoFit/>
-          </a:bodyPr>
-          <a:lstStyle/>
-          <a:p>
-            <a:r>
-              <a:rPr sz="750" b="0" i="1">
-                <a:solidFill>
-                  <a:srgbClr val="707070"/>
-                </a:solidFill>
-                <a:latin typeface="Avenir Next LT Pro"/>
-              </a:rPr>
-              <a:t>Source: RH FY2025 10-K; Q1 FY2026 10-Q</a:t>
-            </a:r>
-          </a:p>
-        </p:txBody>
-      </p:sp>
-    </p:spTree>
-  </p:cSld>
-  <p:clrMapOvr>
-    <a:masterClrMapping/>
-  </p:clrMapOvr>
-</p:sld>
-</file>
-
-<file path=ppt/slides/slide18.xml><?xml version="1.0" encoding="utf-8"?>
-<p:sld xmlns:a="http://schemas.openxmlformats.org/drawingml/2006/main" xmlns:p="http://schemas.openxmlformats.org/presentationml/2006/main" xmlns:r="http://schemas.openxmlformats.org/officeDocument/2006/relationships">
-  <p:cSld>
-    <p:spTree>
-      <p:nvGrpSpPr>
-        <p:cNvPr id="1" name=""/>
-        <p:cNvGrpSpPr/>
-        <p:nvPr/>
-      </p:nvGrpSpPr>
-      <p:grpSpPr/>
-      <p:sp>
-        <p:nvSpPr>
-          <p:cNvPr id="2" name="TextBox 1"/>
-          <p:cNvSpPr txBox="1"/>
-          <p:nvPr/>
-        </p:nvSpPr>
-        <p:spPr>
-          <a:xfrm>
-            <a:off x="457200" y="365760"/>
-            <a:ext cx="8229600" cy="548640"/>
-          </a:xfrm>
-          <a:prstGeom prst="rect">
-            <a:avLst/>
-          </a:prstGeom>
-          <a:noFill/>
-        </p:spPr>
-        <p:txBody>
-          <a:bodyPr wrap="square">
-            <a:spAutoFit/>
-          </a:bodyPr>
-          <a:lstStyle/>
-          <a:p>
-            <a:r>
-              <a:rPr sz="2200" b="0">
-                <a:solidFill>
-                  <a:srgbClr val="000000"/>
-                </a:solidFill>
-                <a:latin typeface="Avenir Next LT Pro Demi"/>
-              </a:rPr>
-              <a:t>The Operator — Gary Friedman</a:t>
-            </a:r>
-          </a:p>
-        </p:txBody>
-      </p:sp>
-      <p:sp>
-        <p:nvSpPr>
-          <p:cNvPr id="3" name="Rectangle 2"/>
-          <p:cNvSpPr/>
-          <p:nvPr/>
-        </p:nvSpPr>
-        <p:spPr>
-          <a:xfrm>
-            <a:off x="457200" y="960120"/>
-            <a:ext cx="8229600" cy="25603"/>
-          </a:xfrm>
-          <a:prstGeom prst="rect">
-            <a:avLst/>
-          </a:prstGeom>
-          <a:solidFill>
-            <a:srgbClr val="156082"/>
-          </a:solidFill>
-          <a:ln>
-            <a:noFill/>
-          </a:ln>
-        </p:spPr>
-        <p:style>
-          <a:lnRef idx="1">
-            <a:schemeClr val="accent1"/>
-          </a:lnRef>
-          <a:fillRef idx="3">
-            <a:schemeClr val="accent1"/>
-          </a:fillRef>
-          <a:effectRef idx="2">
-            <a:schemeClr val="accent1"/>
-          </a:effectRef>
-          <a:fontRef idx="minor">
-            <a:schemeClr val="lt1"/>
-          </a:fontRef>
-        </p:style>
-        <p:txBody>
-          <a:bodyPr rtlCol="0" anchor="ctr"/>
-          <a:lstStyle/>
-          <a:p>
-            <a:pPr algn="ctr"/>
-          </a:p>
-        </p:txBody>
-      </p:sp>
-      <p:sp>
-        <p:nvSpPr>
-          <p:cNvPr id="4" name="Rectangle 3"/>
-          <p:cNvSpPr/>
-          <p:nvPr/>
-        </p:nvSpPr>
-        <p:spPr>
-          <a:xfrm>
-            <a:off x="457200" y="1371600"/>
-            <a:ext cx="82296" cy="1051560"/>
-          </a:xfrm>
-          <a:prstGeom prst="rect">
-            <a:avLst/>
-          </a:prstGeom>
-          <a:solidFill>
-            <a:srgbClr val="156082"/>
-          </a:solidFill>
-          <a:ln>
-            <a:noFill/>
-          </a:ln>
-        </p:spPr>
-        <p:style>
-          <a:lnRef idx="1">
-            <a:schemeClr val="accent1"/>
-          </a:lnRef>
-          <a:fillRef idx="3">
-            <a:schemeClr val="accent1"/>
-          </a:fillRef>
-          <a:effectRef idx="2">
-            <a:schemeClr val="accent1"/>
-          </a:effectRef>
-          <a:fontRef idx="minor">
-            <a:schemeClr val="lt1"/>
-          </a:fontRef>
-        </p:style>
-        <p:txBody>
-          <a:bodyPr rtlCol="0" anchor="ctr"/>
-          <a:lstStyle/>
-          <a:p>
-            <a:pPr algn="ctr"/>
-          </a:p>
-        </p:txBody>
-      </p:sp>
-      <p:sp>
-        <p:nvSpPr>
-          <p:cNvPr id="5" name="TextBox 4"/>
-          <p:cNvSpPr txBox="1"/>
-          <p:nvPr/>
-        </p:nvSpPr>
-        <p:spPr>
-          <a:xfrm>
-            <a:off x="658368" y="1371600"/>
-            <a:ext cx="1965960" cy="1051560"/>
-          </a:xfrm>
-          <a:prstGeom prst="rect">
-            <a:avLst/>
-          </a:prstGeom>
-          <a:noFill/>
-        </p:spPr>
-        <p:txBody>
-          <a:bodyPr wrap="square" anchor="ctr">
-            <a:spAutoFit/>
-          </a:bodyPr>
-          <a:lstStyle/>
-          <a:p>
-            <a:r>
-              <a:rPr sz="1250" b="1">
-                <a:solidFill>
-                  <a:srgbClr val="000000"/>
-                </a:solidFill>
-                <a:latin typeface="Avenir Next LT Pro Demi"/>
-              </a:rPr>
-              <a:t>Role</a:t>
-            </a:r>
-          </a:p>
-        </p:txBody>
-      </p:sp>
-      <p:sp>
-        <p:nvSpPr>
-          <p:cNvPr id="6" name="TextBox 5"/>
-          <p:cNvSpPr txBox="1"/>
-          <p:nvPr/>
-        </p:nvSpPr>
-        <p:spPr>
-          <a:xfrm>
-            <a:off x="2697480" y="1371600"/>
-            <a:ext cx="5989320" cy="1051560"/>
-          </a:xfrm>
-          <a:prstGeom prst="rect">
-            <a:avLst/>
-          </a:prstGeom>
-          <a:noFill/>
-        </p:spPr>
-        <p:txBody>
-          <a:bodyPr wrap="square" anchor="ctr">
-            <a:spAutoFit/>
-          </a:bodyPr>
-          <a:lstStyle/>
-          <a:p>
-            <a:r>
-              <a:rPr sz="1200" b="0">
-                <a:solidFill>
-                  <a:srgbClr val="000000"/>
-                </a:solidFill>
-                <a:latin typeface="Avenir Next LT Pro"/>
-              </a:rPr>
-              <a:t>Chairman &amp; CEO and the brand's creative force (10-K key-man).</a:t>
-            </a:r>
-          </a:p>
-        </p:txBody>
-      </p:sp>
-      <p:sp>
-        <p:nvSpPr>
-          <p:cNvPr id="7" name="Rectangle 6"/>
-          <p:cNvSpPr/>
-          <p:nvPr/>
-        </p:nvSpPr>
-        <p:spPr>
-          <a:xfrm>
-            <a:off x="457200" y="2514600"/>
-            <a:ext cx="82296" cy="1051560"/>
-          </a:xfrm>
-          <a:prstGeom prst="rect">
-            <a:avLst/>
-          </a:prstGeom>
-          <a:solidFill>
-            <a:srgbClr val="196B24"/>
-          </a:solidFill>
-          <a:ln>
-            <a:noFill/>
-          </a:ln>
-        </p:spPr>
-        <p:style>
-          <a:lnRef idx="1">
-            <a:schemeClr val="accent1"/>
-          </a:lnRef>
-          <a:fillRef idx="3">
-            <a:schemeClr val="accent1"/>
-          </a:fillRef>
-          <a:effectRef idx="2">
-            <a:schemeClr val="accent1"/>
-          </a:effectRef>
-          <a:fontRef idx="minor">
-            <a:schemeClr val="lt1"/>
-          </a:fontRef>
-        </p:style>
-        <p:txBody>
-          <a:bodyPr rtlCol="0" anchor="ctr"/>
-          <a:lstStyle/>
-          <a:p>
-            <a:pPr algn="ctr"/>
-          </a:p>
-        </p:txBody>
-      </p:sp>
-      <p:sp>
-        <p:nvSpPr>
-          <p:cNvPr id="8" name="TextBox 7"/>
-          <p:cNvSpPr txBox="1"/>
-          <p:nvPr/>
-        </p:nvSpPr>
-        <p:spPr>
-          <a:xfrm>
-            <a:off x="658368" y="2514600"/>
-            <a:ext cx="1965960" cy="1051560"/>
-          </a:xfrm>
-          <a:prstGeom prst="rect">
-            <a:avLst/>
-          </a:prstGeom>
-          <a:noFill/>
-        </p:spPr>
-        <p:txBody>
-          <a:bodyPr wrap="square" anchor="ctr">
-            <a:spAutoFit/>
-          </a:bodyPr>
-          <a:lstStyle/>
-          <a:p>
-            <a:r>
-              <a:rPr sz="1250" b="1">
-                <a:solidFill>
-                  <a:srgbClr val="000000"/>
-                </a:solidFill>
-                <a:latin typeface="Avenir Next LT Pro Demi"/>
-              </a:rPr>
-              <a:t>Track record</a:t>
-            </a:r>
-          </a:p>
-        </p:txBody>
-      </p:sp>
-      <p:sp>
-        <p:nvSpPr>
-          <p:cNvPr id="9" name="TextBox 8"/>
-          <p:cNvSpPr txBox="1"/>
-          <p:nvPr/>
-        </p:nvSpPr>
-        <p:spPr>
-          <a:xfrm>
-            <a:off x="2697480" y="2514600"/>
-            <a:ext cx="5989320" cy="1051560"/>
-          </a:xfrm>
-          <a:prstGeom prst="rect">
-            <a:avLst/>
-          </a:prstGeom>
-          <a:noFill/>
-        </p:spPr>
-        <p:txBody>
-          <a:bodyPr wrap="square" anchor="ctr">
-            <a:spAutoFit/>
-          </a:bodyPr>
-          <a:lstStyle/>
-          <a:p>
-            <a:r>
-              <a:rPr sz="1200" b="0">
-                <a:solidFill>
-                  <a:srgbClr val="000000"/>
-                </a:solidFill>
-                <a:latin typeface="Avenir Next LT Pro"/>
-              </a:rPr>
-              <a:t>Grew Pottery Barn $50M → $1B+; joined RH in 2001 near bankruptcy.</a:t>
-            </a:r>
-          </a:p>
-        </p:txBody>
-      </p:sp>
-      <p:sp>
-        <p:nvSpPr>
-          <p:cNvPr id="10" name="Rectangle 9"/>
-          <p:cNvSpPr/>
-          <p:nvPr/>
-        </p:nvSpPr>
-        <p:spPr>
-          <a:xfrm>
-            <a:off x="457200" y="3657600"/>
-            <a:ext cx="82296" cy="1051560"/>
-          </a:xfrm>
-          <a:prstGeom prst="rect">
-            <a:avLst/>
-          </a:prstGeom>
-          <a:solidFill>
-            <a:srgbClr val="E97132"/>
-          </a:solidFill>
-          <a:ln>
-            <a:noFill/>
-          </a:ln>
-        </p:spPr>
-        <p:style>
-          <a:lnRef idx="1">
-            <a:schemeClr val="accent1"/>
-          </a:lnRef>
-          <a:fillRef idx="3">
-            <a:schemeClr val="accent1"/>
-          </a:fillRef>
-          <a:effectRef idx="2">
-            <a:schemeClr val="accent1"/>
-          </a:effectRef>
-          <a:fontRef idx="minor">
-            <a:schemeClr val="lt1"/>
-          </a:fontRef>
-        </p:style>
-        <p:txBody>
-          <a:bodyPr rtlCol="0" anchor="ctr"/>
-          <a:lstStyle/>
-          <a:p>
-            <a:pPr algn="ctr"/>
-          </a:p>
-        </p:txBody>
-      </p:sp>
-      <p:sp>
-        <p:nvSpPr>
-          <p:cNvPr id="11" name="TextBox 10"/>
-          <p:cNvSpPr txBox="1"/>
-          <p:nvPr/>
-        </p:nvSpPr>
-        <p:spPr>
-          <a:xfrm>
-            <a:off x="658368" y="3657600"/>
-            <a:ext cx="1965960" cy="1051560"/>
-          </a:xfrm>
-          <a:prstGeom prst="rect">
-            <a:avLst/>
-          </a:prstGeom>
-          <a:noFill/>
-        </p:spPr>
-        <p:txBody>
-          <a:bodyPr wrap="square" anchor="ctr">
-            <a:spAutoFit/>
-          </a:bodyPr>
-          <a:lstStyle/>
-          <a:p>
-            <a:r>
-              <a:rPr sz="1250" b="1">
-                <a:solidFill>
-                  <a:srgbClr val="000000"/>
-                </a:solidFill>
-                <a:latin typeface="Avenir Next LT Pro Demi"/>
-              </a:rPr>
-              <a:t>Skin in the game</a:t>
-            </a:r>
-          </a:p>
-        </p:txBody>
-      </p:sp>
-      <p:sp>
-        <p:nvSpPr>
-          <p:cNvPr id="12" name="TextBox 11"/>
-          <p:cNvSpPr txBox="1"/>
-          <p:nvPr/>
-        </p:nvSpPr>
-        <p:spPr>
-          <a:xfrm>
-            <a:off x="2697480" y="3657600"/>
-            <a:ext cx="5989320" cy="1051560"/>
-          </a:xfrm>
-          <a:prstGeom prst="rect">
-            <a:avLst/>
-          </a:prstGeom>
-          <a:noFill/>
-        </p:spPr>
-        <p:txBody>
-          <a:bodyPr wrap="square" anchor="ctr">
-            <a:spAutoFit/>
-          </a:bodyPr>
-          <a:lstStyle/>
-          <a:p>
-            <a:r>
-              <a:rPr sz="1200" b="0">
-                <a:solidFill>
-                  <a:srgbClr val="000000"/>
-                </a:solidFill>
-                <a:latin typeface="Avenir Next LT Pro"/>
-              </a:rPr>
-              <a:t>Owns ~18% outright (~25% incl. options); bought ~$10M at ~$216 in June 2024.</a:t>
-            </a:r>
-          </a:p>
-        </p:txBody>
-      </p:sp>
-      <p:sp>
-        <p:nvSpPr>
-          <p:cNvPr id="13" name="Rectangle 12"/>
-          <p:cNvSpPr/>
-          <p:nvPr/>
-        </p:nvSpPr>
-        <p:spPr>
-          <a:xfrm>
-            <a:off x="457200" y="4800600"/>
-            <a:ext cx="82296" cy="1051560"/>
-          </a:xfrm>
-          <a:prstGeom prst="rect">
-            <a:avLst/>
-          </a:prstGeom>
-          <a:solidFill>
-            <a:srgbClr val="B03030"/>
-          </a:solidFill>
-          <a:ln>
-            <a:noFill/>
-          </a:ln>
-        </p:spPr>
-        <p:style>
-          <a:lnRef idx="1">
-            <a:schemeClr val="accent1"/>
-          </a:lnRef>
-          <a:fillRef idx="3">
-            <a:schemeClr val="accent1"/>
-          </a:fillRef>
-          <a:effectRef idx="2">
-            <a:schemeClr val="accent1"/>
-          </a:effectRef>
-          <a:fontRef idx="minor">
-            <a:schemeClr val="lt1"/>
-          </a:fontRef>
-        </p:style>
-        <p:txBody>
-          <a:bodyPr rtlCol="0" anchor="ctr"/>
-          <a:lstStyle/>
-          <a:p>
-            <a:pPr algn="ctr"/>
-          </a:p>
-        </p:txBody>
-      </p:sp>
-      <p:sp>
-        <p:nvSpPr>
-          <p:cNvPr id="14" name="TextBox 13"/>
-          <p:cNvSpPr txBox="1"/>
-          <p:nvPr/>
-        </p:nvSpPr>
-        <p:spPr>
-          <a:xfrm>
-            <a:off x="658368" y="4800600"/>
-            <a:ext cx="1965960" cy="1051560"/>
-          </a:xfrm>
-          <a:prstGeom prst="rect">
-            <a:avLst/>
-          </a:prstGeom>
-          <a:noFill/>
-        </p:spPr>
-        <p:txBody>
-          <a:bodyPr wrap="square" anchor="ctr">
-            <a:spAutoFit/>
-          </a:bodyPr>
-          <a:lstStyle/>
-          <a:p>
-            <a:r>
-              <a:rPr sz="1250" b="1">
-                <a:solidFill>
-                  <a:srgbClr val="000000"/>
-                </a:solidFill>
-                <a:latin typeface="Avenir Next LT Pro Demi"/>
-              </a:rPr>
-              <a:t>The double edge</a:t>
-            </a:r>
-          </a:p>
-        </p:txBody>
-      </p:sp>
-      <p:sp>
-        <p:nvSpPr>
-          <p:cNvPr id="15" name="TextBox 14"/>
-          <p:cNvSpPr txBox="1"/>
-          <p:nvPr/>
-        </p:nvSpPr>
-        <p:spPr>
-          <a:xfrm>
-            <a:off x="2697480" y="4800600"/>
-            <a:ext cx="5989320" cy="1051560"/>
-          </a:xfrm>
-          <a:prstGeom prst="rect">
-            <a:avLst/>
-          </a:prstGeom>
-          <a:noFill/>
-        </p:spPr>
-        <p:txBody>
-          <a:bodyPr wrap="square" anchor="ctr">
-            <a:spAutoFit/>
-          </a:bodyPr>
-          <a:lstStyle/>
-          <a:p>
-            <a:r>
-              <a:rPr sz="1200" b="0">
-                <a:solidFill>
-                  <a:srgbClr val="000000"/>
-                </a:solidFill>
-                <a:latin typeface="Avenir Next LT Pro"/>
-              </a:rPr>
-              <a:t>Bold allocator — same conviction drove the buybacks and Estates.</a:t>
-            </a:r>
-          </a:p>
-        </p:txBody>
-      </p:sp>
-      <p:sp>
-        <p:nvSpPr>
-          <p:cNvPr id="16" name="TextBox 15"/>
-          <p:cNvSpPr txBox="1"/>
-          <p:nvPr/>
-        </p:nvSpPr>
-        <p:spPr>
-          <a:xfrm>
-            <a:off x="457200" y="6355080"/>
-            <a:ext cx="8229600" cy="365760"/>
-          </a:xfrm>
-          <a:prstGeom prst="rect">
-            <a:avLst/>
-          </a:prstGeom>
-          <a:noFill/>
-        </p:spPr>
-        <p:txBody>
-          <a:bodyPr wrap="none">
-            <a:spAutoFit/>
-          </a:bodyPr>
-          <a:lstStyle/>
-          <a:p>
-            <a:r>
-              <a:rPr sz="750" b="0" i="1">
-                <a:solidFill>
-                  <a:srgbClr val="707070"/>
-                </a:solidFill>
-                <a:latin typeface="Avenir Next LT Pro"/>
-              </a:rPr>
-              <a:t>Source: RH FY2025 10-K; RH IR &amp; SEC Form 4 (Jun 26, 2024); company bios</a:t>
-            </a:r>
           </a:p>
         </p:txBody>
       </p:sp>
@@ -11242,7 +11847,9 @@
           <a:lstStyle/>
           <a:p>
             <a:r>
-              <a:rPr lang="en-US"/>
+              <a:rPr lang="en-US">
+                <a:solidFill/>
+              </a:rPr>
               <a:t>Table of Contents</a:t>
             </a:r>
           </a:p>
@@ -11303,7 +11910,7 @@
                       <a:r>
                         <a:rPr lang="en-US" sz="1400" b="1">
                           <a:solidFill>
-                            <a:schemeClr val="tx1"/>
+                            <a:srgbClr val="FFFFFF"/>
                           </a:solidFill>
                         </a:rPr>
                         <a:t>Section</a:t>
@@ -11331,6 +11938,9 @@
                       <a:noFill/>
                       <a:prstDash val="solid"/>
                     </a:lnBlToTr>
+                    <a:solidFill>
+                      <a:srgbClr val="9A7B44"/>
+                    </a:solidFill>
                   </a:tcPr>
                 </a:tc>
                 <a:tc>
@@ -11342,7 +11952,7 @@
                       <a:r>
                         <a:rPr lang="en-US" sz="1400" b="1">
                           <a:solidFill>
-                            <a:schemeClr val="tx1"/>
+                            <a:srgbClr val="FFFFFF"/>
                           </a:solidFill>
                         </a:rPr>
                         <a:t>Page</a:t>
@@ -11370,6 +11980,9 @@
                       <a:noFill/>
                       <a:prstDash val="solid"/>
                     </a:lnBlToTr>
+                    <a:solidFill>
+                      <a:srgbClr val="9A7B44"/>
+                    </a:solidFill>
                   </a:tcPr>
                 </a:tc>
                 <a:extLst>
@@ -12028,7 +12641,9 @@
           <a:lstStyle/>
           <a:p>
             <a:r>
-              <a:rPr lang="en-US"/>
+              <a:rPr lang="en-US">
+                <a:solidFill/>
+              </a:rPr>
               <a:t>Investment thesis</a:t>
             </a:r>
           </a:p>
@@ -12100,6 +12715,7 @@
           <a:p>
             <a:r>
               <a:rPr sz="2600" b="0" dirty="0">
+                <a:solidFill/>
                 <a:latin typeface="Avenir Next LT Pro Demi"/>
               </a:rPr>
               <a:t>Recommendation: Hold</a:t>
@@ -12408,7 +13024,7 @@
             <a:r>
               <a:rPr sz="2400" b="1" dirty="0">
                 <a:solidFill>
-                  <a:srgbClr val="156082"/>
+                  <a:srgbClr val="9A7B44"/>
                 </a:solidFill>
                 <a:latin typeface="Avenir Next LT Pro Demi"/>
               </a:rPr>
@@ -12417,7 +13033,7 @@
             <a:r>
               <a:rPr lang="en-US" sz="2400" b="1" dirty="0">
                 <a:solidFill>
-                  <a:srgbClr val="156082"/>
+                  <a:srgbClr val="9A7B44"/>
                 </a:solidFill>
                 <a:latin typeface="Avenir Next LT Pro Demi"/>
               </a:rPr>
@@ -12546,7 +13162,7 @@
             <a:avLst/>
           </a:prstGeom>
           <a:solidFill>
-            <a:srgbClr val="156082"/>
+            <a:srgbClr val="9A7B44"/>
           </a:solidFill>
           <a:ln>
             <a:noFill/>
@@ -12599,7 +13215,7 @@
             <a:r>
               <a:rPr sz="1300" b="1">
                 <a:solidFill>
-                  <a:srgbClr val="156082"/>
+                  <a:srgbClr val="9A7B44"/>
                 </a:solidFill>
                 <a:latin typeface="Avenir Next LT Pro Demi"/>
               </a:rPr>
@@ -12615,7 +13231,7 @@
             <a:r>
               <a:rPr sz="1100">
                 <a:solidFill>
-                  <a:srgbClr val="156082"/>
+                  <a:srgbClr val="9A7B44"/>
                 </a:solidFill>
                 <a:latin typeface="Avenir Next LT Pro"/>
               </a:rPr>
@@ -12640,7 +13256,7 @@
             <a:r>
               <a:rPr sz="1100">
                 <a:solidFill>
-                  <a:srgbClr val="156082"/>
+                  <a:srgbClr val="9A7B44"/>
                 </a:solidFill>
                 <a:latin typeface="Avenir Next LT Pro"/>
               </a:rPr>
@@ -12665,7 +13281,7 @@
             <a:r>
               <a:rPr sz="1100">
                 <a:solidFill>
-                  <a:srgbClr val="156082"/>
+                  <a:srgbClr val="9A7B44"/>
                 </a:solidFill>
                 <a:latin typeface="Avenir Next LT Pro"/>
               </a:rPr>
@@ -12902,7 +13518,7 @@
             <a:avLst/>
           </a:prstGeom>
           <a:solidFill>
-            <a:srgbClr val="156082"/>
+            <a:srgbClr val="9A7B44"/>
           </a:solidFill>
           <a:ln>
             <a:noFill/>
@@ -12973,7 +13589,7 @@
                   </a:txBody>
                   <a:tcPr marL="91440" marT="27432" marB="27432" anchor="ctr">
                     <a:solidFill>
-                      <a:srgbClr val="0E2841"/>
+                      <a:srgbClr val="9A7B44"/>
                     </a:solidFill>
                   </a:tcPr>
                 </a:tc>
@@ -12996,7 +13612,7 @@
                   </a:txBody>
                   <a:tcPr marL="91440" marT="27432" marB="27432" anchor="ctr">
                     <a:solidFill>
-                      <a:srgbClr val="0E2841"/>
+                      <a:srgbClr val="9A7B44"/>
                     </a:solidFill>
                   </a:tcPr>
                 </a:tc>
@@ -13019,7 +13635,7 @@
                   </a:txBody>
                   <a:tcPr marL="91440" marT="27432" marB="27432" anchor="ctr">
                     <a:solidFill>
-                      <a:srgbClr val="0E2841"/>
+                      <a:srgbClr val="9A7B44"/>
                     </a:solidFill>
                   </a:tcPr>
                 </a:tc>
@@ -13247,7 +13863,7 @@
                       <a:r>
                         <a:rPr sz="1100" b="1">
                           <a:solidFill>
-                            <a:srgbClr val="156082"/>
+                            <a:srgbClr val="9A7B44"/>
                           </a:solidFill>
                           <a:latin typeface="Avenir Next LT Pro Demi"/>
                         </a:rPr>
@@ -13270,7 +13886,7 @@
                       <a:r>
                         <a:rPr sz="1100" b="1">
                           <a:solidFill>
-                            <a:srgbClr val="156082"/>
+                            <a:srgbClr val="9A7B44"/>
                           </a:solidFill>
                           <a:latin typeface="Avenir Next LT Pro"/>
                         </a:rPr>
@@ -13318,7 +13934,7 @@
                       <a:r>
                         <a:rPr sz="1100" b="1">
                           <a:solidFill>
-                            <a:srgbClr val="156082"/>
+                            <a:srgbClr val="9A7B44"/>
                           </a:solidFill>
                           <a:latin typeface="Avenir Next LT Pro Demi"/>
                         </a:rPr>
@@ -13341,7 +13957,7 @@
                       <a:r>
                         <a:rPr sz="1100" b="1">
                           <a:solidFill>
-                            <a:srgbClr val="156082"/>
+                            <a:srgbClr val="9A7B44"/>
                           </a:solidFill>
                           <a:latin typeface="Avenir Next LT Pro"/>
                         </a:rPr>
@@ -13412,7 +14028,7 @@
                 </a:solidFill>
                 <a:latin typeface="Avenir Next LT Pro"/>
               </a:rPr>
-              <a:t>Takeaway: I agree with the Street on what's proven (~$165 ≈ the price). My differentiation isn't a higher "today" value — it's a defined view on the conditional upside (~$240–310) that the Street won't credit until Estates and margins prove out.</a:t>
+              <a:t>Takeaway: I match the Street on proven value (~$165 ≈ price).</a:t>
             </a:r>
           </a:p>
           <a:p>
@@ -13428,7 +14044,7 @@
                 </a:solidFill>
                 <a:latin typeface="Avenir Next LT Pro Demi"/>
               </a:rPr>
-              <a:t>The Hold is the discipline: I won't pay for that upside on hope — I wait for the triggers, then buy even higher.</a:t>
+              <a:t>My edge is the conditional upside (~$240–310) — and the discipline to wait for proof before paying for it.</a:t>
             </a:r>
           </a:p>
         </p:txBody>
@@ -13441,8 +14057,8 @@
         </p:nvSpPr>
         <p:spPr>
           <a:xfrm>
-            <a:off x="457200" y="6355080"/>
-            <a:ext cx="8229600" cy="365760"/>
+            <a:off x="457200" y="6172200"/>
+            <a:ext cx="8229600" cy="274320"/>
           </a:xfrm>
           <a:prstGeom prst="rect">
             <a:avLst/>
@@ -13534,7 +14150,7 @@
             <a:avLst/>
           </a:prstGeom>
           <a:solidFill>
-            <a:srgbClr val="156082"/>
+            <a:srgbClr val="9A7B44"/>
           </a:solidFill>
           <a:ln>
             <a:noFill/>
@@ -13611,7 +14227,7 @@
             <a:avLst/>
           </a:prstGeom>
           <a:solidFill>
-            <a:srgbClr val="156082"/>
+            <a:srgbClr val="9A7B44"/>
           </a:solidFill>
           <a:ln>
             <a:noFill/>
@@ -13702,7 +14318,7 @@
                 </a:solidFill>
                 <a:latin typeface="Avenir Next LT Pro"/>
               </a:rPr>
-              <a:t>Core revenue re-accelerating in or above the 4.5–8% FY26 guide and a return to profitability — a trend, not one quarter. Q2 FY26 guides to just +0.5–2.5%, so the back-half acceleration has to show up.</a:t>
+              <a:t>Revenue back in/above the 4.5–8% guide and a return to profit — a trend, not one quarter.</a:t>
             </a:r>
           </a:p>
         </p:txBody>
@@ -13813,7 +14429,7 @@
                 </a:solidFill>
                 <a:latin typeface="Avenir Next LT Pro"/>
               </a:rPr>
-              <a:t>Actual revenue contribution and gallery traction. Estates launched Jun 2026 — there is zero results data yet. First read: Q2 FY2026.</a:t>
+              <a:t>Real revenue and gallery traction. Launched Jun 2026 — no data yet; first read Q2 FY2026.</a:t>
             </a:r>
           </a:p>
         </p:txBody>
@@ -13924,7 +14540,7 @@
                 </a:solidFill>
                 <a:latin typeface="Avenir Next LT Pro"/>
               </a:rPr>
-              <a:t>Net debt falling on real free cash flow — not the one-time inventory unwind that drove FY25. Leverage trending toward ~3×.</a:t>
+              <a:t>Net debt falling on real FCF — not the one-time inventory unwind. Leverage toward ~3×.</a:t>
             </a:r>
           </a:p>
         </p:txBody>
@@ -13971,8 +14587,8 @@
         </p:nvSpPr>
         <p:spPr>
           <a:xfrm>
-            <a:off x="457200" y="6355080"/>
-            <a:ext cx="8229600" cy="365760"/>
+            <a:off x="457200" y="6172200"/>
+            <a:ext cx="8229600" cy="274320"/>
           </a:xfrm>
           <a:prstGeom prst="rect">
             <a:avLst/>
@@ -14050,14 +14666,18 @@
           <a:lstStyle/>
           <a:p>
             <a:r>
-              <a:rPr lang="en-US"/>
+              <a:rPr lang="en-US">
+                <a:solidFill/>
+              </a:rPr>
               <a:t>Stock</a:t>
             </a:r>
             <a:br>
               <a:rPr lang="en-US"/>
             </a:br>
             <a:r>
-              <a:rPr lang="en-US" sz="1800"/>
+              <a:rPr lang="en-US" sz="1800">
+                <a:solidFill/>
+              </a:rPr>
               <a:t>Overview</a:t>
             </a:r>
           </a:p>
@@ -14089,7 +14709,7 @@
 </file>
 
 <file path=ppt/slides/slide8.xml><?xml version="1.0" encoding="utf-8"?>
-<p:sld xmlns:a="http://schemas.openxmlformats.org/drawingml/2006/main" xmlns:r="http://schemas.openxmlformats.org/officeDocument/2006/relationships" xmlns:p="http://schemas.openxmlformats.org/presentationml/2006/main">
+<p:sld xmlns:a="http://schemas.openxmlformats.org/drawingml/2006/main" xmlns:p="http://schemas.openxmlformats.org/presentationml/2006/main" xmlns:r="http://schemas.openxmlformats.org/officeDocument/2006/relationships">
   <p:cSld>
     <p:spTree>
       <p:nvGrpSpPr>
@@ -14097,14 +14717,7 @@
         <p:cNvGrpSpPr/>
         <p:nvPr/>
       </p:nvGrpSpPr>
-      <p:grpSpPr>
-        <a:xfrm>
-          <a:off x="0" y="0"/>
-          <a:ext cx="0" cy="0"/>
-          <a:chOff x="0" y="0"/>
-          <a:chExt cx="0" cy="0"/>
-        </a:xfrm>
-      </p:grpSpPr>
+      <p:grpSpPr/>
       <p:sp>
         <p:nvSpPr>
           <p:cNvPr id="2" name="TextBox 1"/>
@@ -14113,8 +14726,8 @@
         </p:nvSpPr>
         <p:spPr>
           <a:xfrm>
-            <a:off x="457200" y="320040"/>
-            <a:ext cx="8229600" cy="446276"/>
+            <a:off x="457200" y="365760"/>
+            <a:ext cx="8229600" cy="548640"/>
           </a:xfrm>
           <a:prstGeom prst="rect">
             <a:avLst/>
@@ -14128,11 +14741,100 @@
           <a:lstStyle/>
           <a:p>
             <a:r>
-              <a:rPr sz="2300" b="0" i="0" dirty="0">
+              <a:rPr sz="2200" b="0">
+                <a:solidFill>
+                  <a:srgbClr val="000000"/>
+                </a:solidFill>
                 <a:latin typeface="Avenir Next LT Pro Demi"/>
               </a:rPr>
-              <a:t>Financial Performance — Trough to Recovery</a:t>
-            </a:r>
+              <a:t>How RH Got Here</a:t>
+            </a:r>
+          </a:p>
+        </p:txBody>
+      </p:sp>
+      <p:sp>
+        <p:nvSpPr>
+          <p:cNvPr id="3" name="Rectangle 2"/>
+          <p:cNvSpPr/>
+          <p:nvPr/>
+        </p:nvSpPr>
+        <p:spPr>
+          <a:xfrm>
+            <a:off x="457200" y="960120"/>
+            <a:ext cx="8229600" cy="25603"/>
+          </a:xfrm>
+          <a:prstGeom prst="rect">
+            <a:avLst/>
+          </a:prstGeom>
+          <a:solidFill>
+            <a:srgbClr val="9A7B44"/>
+          </a:solidFill>
+          <a:ln>
+            <a:noFill/>
+          </a:ln>
+        </p:spPr>
+        <p:style>
+          <a:lnRef idx="1">
+            <a:schemeClr val="accent1"/>
+          </a:lnRef>
+          <a:fillRef idx="3">
+            <a:schemeClr val="accent1"/>
+          </a:fillRef>
+          <a:effectRef idx="2">
+            <a:schemeClr val="accent1"/>
+          </a:effectRef>
+          <a:fontRef idx="minor">
+            <a:schemeClr val="lt1"/>
+          </a:fontRef>
+        </p:style>
+        <p:txBody>
+          <a:bodyPr rtlCol="0" anchor="ctr"/>
+          <a:lstStyle/>
+          <a:p>
+            <a:pPr algn="ctr"/>
+          </a:p>
+        </p:txBody>
+      </p:sp>
+      <p:sp>
+        <p:nvSpPr>
+          <p:cNvPr id="4" name="Rectangle 3"/>
+          <p:cNvSpPr/>
+          <p:nvPr/>
+        </p:nvSpPr>
+        <p:spPr>
+          <a:xfrm>
+            <a:off x="457200" y="1371600"/>
+            <a:ext cx="82296" cy="1143000"/>
+          </a:xfrm>
+          <a:prstGeom prst="rect">
+            <a:avLst/>
+          </a:prstGeom>
+          <a:solidFill>
+            <a:srgbClr val="9A7B44"/>
+          </a:solidFill>
+          <a:ln>
+            <a:noFill/>
+          </a:ln>
+        </p:spPr>
+        <p:style>
+          <a:lnRef idx="1">
+            <a:schemeClr val="accent1"/>
+          </a:lnRef>
+          <a:fillRef idx="3">
+            <a:schemeClr val="accent1"/>
+          </a:fillRef>
+          <a:effectRef idx="2">
+            <a:schemeClr val="accent1"/>
+          </a:effectRef>
+          <a:fontRef idx="minor">
+            <a:schemeClr val="lt1"/>
+          </a:fontRef>
+        </p:style>
+        <p:txBody>
+          <a:bodyPr rtlCol="0" anchor="ctr"/>
+          <a:lstStyle/>
+          <a:p>
+            <a:pPr algn="ctr"/>
           </a:p>
         </p:txBody>
       </p:sp>
@@ -14144,7 +14846,364 @@
         </p:nvSpPr>
         <p:spPr>
           <a:xfrm>
-            <a:off x="457200" y="1051560"/>
+            <a:off x="658368" y="1371600"/>
+            <a:ext cx="1920240" cy="1143000"/>
+          </a:xfrm>
+          <a:prstGeom prst="rect">
+            <a:avLst/>
+          </a:prstGeom>
+          <a:noFill/>
+        </p:spPr>
+        <p:txBody>
+          <a:bodyPr wrap="square" anchor="ctr">
+            <a:spAutoFit/>
+          </a:bodyPr>
+          <a:lstStyle/>
+          <a:p>
+            <a:r>
+              <a:rPr sz="1400" b="1">
+                <a:solidFill>
+                  <a:srgbClr val="000000"/>
+                </a:solidFill>
+                <a:latin typeface="Avenir Next LT Pro Demi"/>
+              </a:rPr>
+              <a:t>The Build</a:t>
+            </a:r>
+          </a:p>
+          <a:p>
+            <a:r>
+              <a:rPr sz="1000" b="0">
+                <a:solidFill>
+                  <a:srgbClr val="707070"/>
+                </a:solidFill>
+                <a:latin typeface="Avenir Next LT Pro"/>
+              </a:rPr>
+              <a:t>Pre-2020</a:t>
+            </a:r>
+          </a:p>
+        </p:txBody>
+      </p:sp>
+      <p:sp>
+        <p:nvSpPr>
+          <p:cNvPr id="6" name="TextBox 5"/>
+          <p:cNvSpPr txBox="1"/>
+          <p:nvPr/>
+        </p:nvSpPr>
+        <p:spPr>
+          <a:xfrm>
+            <a:off x="2743200" y="1371600"/>
+            <a:ext cx="5943600" cy="1143000"/>
+          </a:xfrm>
+          <a:prstGeom prst="rect">
+            <a:avLst/>
+          </a:prstGeom>
+          <a:noFill/>
+        </p:spPr>
+        <p:txBody>
+          <a:bodyPr wrap="square" anchor="ctr">
+            <a:spAutoFit/>
+          </a:bodyPr>
+          <a:lstStyle/>
+          <a:p>
+            <a:r>
+              <a:rPr sz="1250" b="0">
+                <a:solidFill>
+                  <a:srgbClr val="000000"/>
+                </a:solidFill>
+                <a:latin typeface="Avenir Next LT Pro"/>
+              </a:rPr>
+              <a:t>Friedman turns RH into a luxury Gallery brand.</a:t>
+            </a:r>
+          </a:p>
+        </p:txBody>
+      </p:sp>
+      <p:sp>
+        <p:nvSpPr>
+          <p:cNvPr id="7" name="Rectangle 6"/>
+          <p:cNvSpPr/>
+          <p:nvPr/>
+        </p:nvSpPr>
+        <p:spPr>
+          <a:xfrm>
+            <a:off x="457200" y="2679191"/>
+            <a:ext cx="82296" cy="1143000"/>
+          </a:xfrm>
+          <a:prstGeom prst="rect">
+            <a:avLst/>
+          </a:prstGeom>
+          <a:solidFill>
+            <a:srgbClr val="E97132"/>
+          </a:solidFill>
+          <a:ln>
+            <a:noFill/>
+          </a:ln>
+        </p:spPr>
+        <p:style>
+          <a:lnRef idx="1">
+            <a:schemeClr val="accent1"/>
+          </a:lnRef>
+          <a:fillRef idx="3">
+            <a:schemeClr val="accent1"/>
+          </a:fillRef>
+          <a:effectRef idx="2">
+            <a:schemeClr val="accent1"/>
+          </a:effectRef>
+          <a:fontRef idx="minor">
+            <a:schemeClr val="lt1"/>
+          </a:fontRef>
+        </p:style>
+        <p:txBody>
+          <a:bodyPr rtlCol="0" anchor="ctr"/>
+          <a:lstStyle/>
+          <a:p>
+            <a:pPr algn="ctr"/>
+          </a:p>
+        </p:txBody>
+      </p:sp>
+      <p:sp>
+        <p:nvSpPr>
+          <p:cNvPr id="8" name="TextBox 7"/>
+          <p:cNvSpPr txBox="1"/>
+          <p:nvPr/>
+        </p:nvSpPr>
+        <p:spPr>
+          <a:xfrm>
+            <a:off x="658368" y="2679191"/>
+            <a:ext cx="1920240" cy="1143000"/>
+          </a:xfrm>
+          <a:prstGeom prst="rect">
+            <a:avLst/>
+          </a:prstGeom>
+          <a:noFill/>
+        </p:spPr>
+        <p:txBody>
+          <a:bodyPr wrap="square" anchor="ctr">
+            <a:spAutoFit/>
+          </a:bodyPr>
+          <a:lstStyle/>
+          <a:p>
+            <a:r>
+              <a:rPr sz="1400" b="1">
+                <a:solidFill>
+                  <a:srgbClr val="000000"/>
+                </a:solidFill>
+                <a:latin typeface="Avenir Next LT Pro Demi"/>
+              </a:rPr>
+              <a:t>The Peak</a:t>
+            </a:r>
+          </a:p>
+          <a:p>
+            <a:r>
+              <a:rPr sz="1000" b="0">
+                <a:solidFill>
+                  <a:srgbClr val="707070"/>
+                </a:solidFill>
+                <a:latin typeface="Avenir Next LT Pro"/>
+              </a:rPr>
+              <a:t>FY2022</a:t>
+            </a:r>
+          </a:p>
+        </p:txBody>
+      </p:sp>
+      <p:sp>
+        <p:nvSpPr>
+          <p:cNvPr id="9" name="TextBox 8"/>
+          <p:cNvSpPr txBox="1"/>
+          <p:nvPr/>
+        </p:nvSpPr>
+        <p:spPr>
+          <a:xfrm>
+            <a:off x="2743200" y="2679191"/>
+            <a:ext cx="5943600" cy="1143000"/>
+          </a:xfrm>
+          <a:prstGeom prst="rect">
+            <a:avLst/>
+          </a:prstGeom>
+          <a:noFill/>
+        </p:spPr>
+        <p:txBody>
+          <a:bodyPr wrap="square" anchor="ctr">
+            <a:spAutoFit/>
+          </a:bodyPr>
+          <a:lstStyle/>
+          <a:p>
+            <a:r>
+              <a:rPr sz="1250" b="0">
+                <a:solidFill>
+                  <a:srgbClr val="000000"/>
+                </a:solidFill>
+                <a:latin typeface="Avenir Next LT Pro"/>
+              </a:rPr>
+              <a:t>~$3.6B revenue — then buys back ~7.6M shares at ~$269–321, debt-funded.</a:t>
+            </a:r>
+          </a:p>
+        </p:txBody>
+      </p:sp>
+      <p:sp>
+        <p:nvSpPr>
+          <p:cNvPr id="10" name="Rectangle 9"/>
+          <p:cNvSpPr/>
+          <p:nvPr/>
+        </p:nvSpPr>
+        <p:spPr>
+          <a:xfrm>
+            <a:off x="457200" y="3986783"/>
+            <a:ext cx="82296" cy="1143000"/>
+          </a:xfrm>
+          <a:prstGeom prst="rect">
+            <a:avLst/>
+          </a:prstGeom>
+          <a:solidFill>
+            <a:srgbClr val="B03030"/>
+          </a:solidFill>
+          <a:ln>
+            <a:noFill/>
+          </a:ln>
+        </p:spPr>
+        <p:style>
+          <a:lnRef idx="1">
+            <a:schemeClr val="accent1"/>
+          </a:lnRef>
+          <a:fillRef idx="3">
+            <a:schemeClr val="accent1"/>
+          </a:fillRef>
+          <a:effectRef idx="2">
+            <a:schemeClr val="accent1"/>
+          </a:effectRef>
+          <a:fontRef idx="minor">
+            <a:schemeClr val="lt1"/>
+          </a:fontRef>
+        </p:style>
+        <p:txBody>
+          <a:bodyPr rtlCol="0" anchor="ctr"/>
+          <a:lstStyle/>
+          <a:p>
+            <a:pPr algn="ctr"/>
+          </a:p>
+        </p:txBody>
+      </p:sp>
+      <p:sp>
+        <p:nvSpPr>
+          <p:cNvPr id="11" name="TextBox 10"/>
+          <p:cNvSpPr txBox="1"/>
+          <p:nvPr/>
+        </p:nvSpPr>
+        <p:spPr>
+          <a:xfrm>
+            <a:off x="658368" y="3986783"/>
+            <a:ext cx="1920240" cy="1143000"/>
+          </a:xfrm>
+          <a:prstGeom prst="rect">
+            <a:avLst/>
+          </a:prstGeom>
+          <a:noFill/>
+        </p:spPr>
+        <p:txBody>
+          <a:bodyPr wrap="square" anchor="ctr">
+            <a:spAutoFit/>
+          </a:bodyPr>
+          <a:lstStyle/>
+          <a:p>
+            <a:r>
+              <a:rPr sz="1400" b="1">
+                <a:solidFill>
+                  <a:srgbClr val="000000"/>
+                </a:solidFill>
+                <a:latin typeface="Avenir Next LT Pro Demi"/>
+              </a:rPr>
+              <a:t>The Fall</a:t>
+            </a:r>
+          </a:p>
+          <a:p>
+            <a:r>
+              <a:rPr sz="1000" b="0">
+                <a:solidFill>
+                  <a:srgbClr val="707070"/>
+                </a:solidFill>
+                <a:latin typeface="Avenir Next LT Pro"/>
+              </a:rPr>
+              <a:t>FY23–24</a:t>
+            </a:r>
+          </a:p>
+        </p:txBody>
+      </p:sp>
+      <p:sp>
+        <p:nvSpPr>
+          <p:cNvPr id="12" name="TextBox 11"/>
+          <p:cNvSpPr txBox="1"/>
+          <p:nvPr/>
+        </p:nvSpPr>
+        <p:spPr>
+          <a:xfrm>
+            <a:off x="2743200" y="3986783"/>
+            <a:ext cx="5943600" cy="1143000"/>
+          </a:xfrm>
+          <a:prstGeom prst="rect">
+            <a:avLst/>
+          </a:prstGeom>
+          <a:noFill/>
+        </p:spPr>
+        <p:txBody>
+          <a:bodyPr wrap="square" anchor="ctr">
+            <a:spAutoFit/>
+          </a:bodyPr>
+          <a:lstStyle/>
+          <a:p>
+            <a:r>
+              <a:rPr sz="1250" b="0">
+                <a:solidFill>
+                  <a:srgbClr val="000000"/>
+                </a:solidFill>
+                <a:latin typeface="Avenir Next LT Pro"/>
+              </a:rPr>
+              <a:t>Housing freezes; revenue falls to ~$3.03B. Debt now ~$2.4B, ~4× levered.</a:t>
+            </a:r>
+          </a:p>
+        </p:txBody>
+      </p:sp>
+      <p:sp>
+        <p:nvSpPr>
+          <p:cNvPr id="13" name="TextBox 12"/>
+          <p:cNvSpPr txBox="1"/>
+          <p:nvPr/>
+        </p:nvSpPr>
+        <p:spPr>
+          <a:xfrm>
+            <a:off x="457200" y="5532120"/>
+            <a:ext cx="8229600" cy="411480"/>
+          </a:xfrm>
+          <a:prstGeom prst="rect">
+            <a:avLst/>
+          </a:prstGeom>
+          <a:noFill/>
+        </p:spPr>
+        <p:txBody>
+          <a:bodyPr wrap="square">
+            <a:spAutoFit/>
+          </a:bodyPr>
+          <a:lstStyle/>
+          <a:p>
+            <a:r>
+              <a:rPr sz="1100" b="1">
+                <a:solidFill>
+                  <a:srgbClr val="000000"/>
+                </a:solidFill>
+                <a:latin typeface="Avenir Next LT Pro Demi"/>
+              </a:rPr>
+              <a:t>Partly self-inflicted: leveraged buybacks at the top, then the cycle turned.</a:t>
+            </a:r>
+          </a:p>
+        </p:txBody>
+      </p:sp>
+      <p:sp>
+        <p:nvSpPr>
+          <p:cNvPr id="14" name="TextBox 13"/>
+          <p:cNvSpPr txBox="1"/>
+          <p:nvPr/>
+        </p:nvSpPr>
+        <p:spPr>
+          <a:xfrm>
+            <a:off x="457200" y="6172200"/>
             <a:ext cx="8229600" cy="274320"/>
           </a:xfrm>
           <a:prstGeom prst="rect">
@@ -14159,1442 +15218,13 @@
           <a:lstStyle/>
           <a:p>
             <a:r>
-              <a:rPr sz="900" b="0" i="1">
-                <a:solidFill>
-                  <a:srgbClr val="B0B0B0"/>
+              <a:rPr sz="750" b="0" i="1">
+                <a:solidFill>
+                  <a:srgbClr val="707070"/>
                 </a:solidFill>
                 <a:latin typeface="Avenir Next LT Pro"/>
               </a:rPr>
-              <a:t>[ narrative / commentary to be written ]</a:t>
-            </a:r>
-          </a:p>
-        </p:txBody>
-      </p:sp>
-      <p:graphicFrame>
-        <p:nvGraphicFramePr>
-          <p:cNvPr id="6" name="Table 5"/>
-          <p:cNvGraphicFramePr>
-            <a:graphicFrameLocks noGrp="1"/>
-          </p:cNvGraphicFramePr>
-          <p:nvPr>
-            <p:extLst>
-              <p:ext uri="{D42A27DB-BD31-4B8C-83A1-F6EECF244321}">
-                <p14:modId xmlns:p14="http://schemas.microsoft.com/office/powerpoint/2010/main" val="4094982956"/>
-              </p:ext>
-            </p:extLst>
-          </p:nvPr>
-        </p:nvGraphicFramePr>
-        <p:xfrm>
-          <a:off x="457200" y="1417320"/>
-          <a:ext cx="8229600" cy="3456432"/>
-        </p:xfrm>
-        <a:graphic>
-          <a:graphicData uri="http://schemas.openxmlformats.org/drawingml/2006/table">
-            <a:tbl>
-              <a:tblPr>
-                <a:tableStyleId>{5C22544A-7EE6-4342-B048-85BDC9FD1C3A}</a:tableStyleId>
-              </a:tblPr>
-              <a:tblGrid>
-                <a:gridCol w="2377440">
-                  <a:extLst>
-                    <a:ext uri="{9D8B030D-6E8A-4147-A177-3AD203B41FA5}">
-                      <a16:colId xmlns:a16="http://schemas.microsoft.com/office/drawing/2014/main" val="20000"/>
-                    </a:ext>
-                  </a:extLst>
-                </a:gridCol>
-                <a:gridCol w="1170432">
-                  <a:extLst>
-                    <a:ext uri="{9D8B030D-6E8A-4147-A177-3AD203B41FA5}">
-                      <a16:colId xmlns:a16="http://schemas.microsoft.com/office/drawing/2014/main" val="20001"/>
-                    </a:ext>
-                  </a:extLst>
-                </a:gridCol>
-                <a:gridCol w="1170432">
-                  <a:extLst>
-                    <a:ext uri="{9D8B030D-6E8A-4147-A177-3AD203B41FA5}">
-                      <a16:colId xmlns:a16="http://schemas.microsoft.com/office/drawing/2014/main" val="20002"/>
-                    </a:ext>
-                  </a:extLst>
-                </a:gridCol>
-                <a:gridCol w="1170432">
-                  <a:extLst>
-                    <a:ext uri="{9D8B030D-6E8A-4147-A177-3AD203B41FA5}">
-                      <a16:colId xmlns:a16="http://schemas.microsoft.com/office/drawing/2014/main" val="20003"/>
-                    </a:ext>
-                  </a:extLst>
-                </a:gridCol>
-                <a:gridCol w="1170432">
-                  <a:extLst>
-                    <a:ext uri="{9D8B030D-6E8A-4147-A177-3AD203B41FA5}">
-                      <a16:colId xmlns:a16="http://schemas.microsoft.com/office/drawing/2014/main" val="20004"/>
-                    </a:ext>
-                  </a:extLst>
-                </a:gridCol>
-                <a:gridCol w="1170432">
-                  <a:extLst>
-                    <a:ext uri="{9D8B030D-6E8A-4147-A177-3AD203B41FA5}">
-                      <a16:colId xmlns:a16="http://schemas.microsoft.com/office/drawing/2014/main" val="20005"/>
-                    </a:ext>
-                  </a:extLst>
-                </a:gridCol>
-              </a:tblGrid>
-              <a:tr h="384048">
-                <a:tc>
-                  <a:txBody>
-                    <a:bodyPr/>
-                    <a:lstStyle/>
-                    <a:p>
-                      <a:pPr algn="l"/>
-                      <a:r>
-                        <a:rPr sz="1050" b="1" i="0" dirty="0">
-                          <a:solidFill>
-                            <a:srgbClr val="FFFFFF"/>
-                          </a:solidFill>
-                          <a:latin typeface="Avenir Next LT Pro Demi"/>
-                        </a:rPr>
-                        <a:t>Metric ($M unless noted)</a:t>
-                      </a:r>
-                    </a:p>
-                  </a:txBody>
-                  <a:tcPr marL="73152" marR="73152" marT="18288" marB="18288" anchor="ctr">
-                    <a:solidFill>
-                      <a:srgbClr val="AF8C49"/>
-                    </a:solidFill>
-                  </a:tcPr>
-                </a:tc>
-                <a:tc>
-                  <a:txBody>
-                    <a:bodyPr/>
-                    <a:lstStyle/>
-                    <a:p>
-                      <a:pPr algn="ctr"/>
-                      <a:r>
-                        <a:rPr sz="1050" b="1" i="0" dirty="0">
-                          <a:solidFill>
-                            <a:srgbClr val="FFFFFF"/>
-                          </a:solidFill>
-                          <a:latin typeface="Avenir Next LT Pro Demi"/>
-                        </a:rPr>
-                        <a:t>FY23</a:t>
-                      </a:r>
-                    </a:p>
-                  </a:txBody>
-                  <a:tcPr marL="73152" marR="73152" marT="18288" marB="18288" anchor="ctr">
-                    <a:solidFill>
-                      <a:srgbClr val="AF8C49"/>
-                    </a:solidFill>
-                  </a:tcPr>
-                </a:tc>
-                <a:tc>
-                  <a:txBody>
-                    <a:bodyPr/>
-                    <a:lstStyle/>
-                    <a:p>
-                      <a:pPr algn="ctr"/>
-                      <a:r>
-                        <a:rPr sz="1050" b="1" i="0" dirty="0">
-                          <a:solidFill>
-                            <a:srgbClr val="FFFFFF"/>
-                          </a:solidFill>
-                          <a:latin typeface="Avenir Next LT Pro Demi"/>
-                        </a:rPr>
-                        <a:t>FY24</a:t>
-                      </a:r>
-                    </a:p>
-                  </a:txBody>
-                  <a:tcPr marL="73152" marR="73152" marT="18288" marB="18288" anchor="ctr">
-                    <a:solidFill>
-                      <a:srgbClr val="AF8C49"/>
-                    </a:solidFill>
-                  </a:tcPr>
-                </a:tc>
-                <a:tc>
-                  <a:txBody>
-                    <a:bodyPr/>
-                    <a:lstStyle/>
-                    <a:p>
-                      <a:pPr algn="ctr"/>
-                      <a:r>
-                        <a:rPr sz="1050" b="1" i="0" dirty="0">
-                          <a:solidFill>
-                            <a:srgbClr val="FFFFFF"/>
-                          </a:solidFill>
-                          <a:latin typeface="Avenir Next LT Pro Demi"/>
-                        </a:rPr>
-                        <a:t>FY25</a:t>
-                      </a:r>
-                    </a:p>
-                  </a:txBody>
-                  <a:tcPr marL="73152" marR="73152" marT="18288" marB="18288" anchor="ctr">
-                    <a:solidFill>
-                      <a:srgbClr val="AF8C49"/>
-                    </a:solidFill>
-                  </a:tcPr>
-                </a:tc>
-                <a:tc>
-                  <a:txBody>
-                    <a:bodyPr/>
-                    <a:lstStyle/>
-                    <a:p>
-                      <a:pPr algn="ctr"/>
-                      <a:r>
-                        <a:rPr sz="1050" b="1" i="0" dirty="0">
-                          <a:solidFill>
-                            <a:srgbClr val="FFFFFF"/>
-                          </a:solidFill>
-                          <a:latin typeface="Avenir Next LT Pro Demi"/>
-                        </a:rPr>
-                        <a:t>FY26E</a:t>
-                      </a:r>
-                    </a:p>
-                  </a:txBody>
-                  <a:tcPr marL="73152" marR="73152" marT="18288" marB="18288" anchor="ctr">
-                    <a:solidFill>
-                      <a:srgbClr val="AF8C49"/>
-                    </a:solidFill>
-                  </a:tcPr>
-                </a:tc>
-                <a:tc>
-                  <a:txBody>
-                    <a:bodyPr/>
-                    <a:lstStyle/>
-                    <a:p>
-                      <a:pPr algn="ctr"/>
-                      <a:r>
-                        <a:rPr sz="1050" b="1" i="0" dirty="0">
-                          <a:solidFill>
-                            <a:srgbClr val="FFFFFF"/>
-                          </a:solidFill>
-                          <a:latin typeface="Avenir Next LT Pro Demi"/>
-                        </a:rPr>
-                        <a:t>FY27E</a:t>
-                      </a:r>
-                    </a:p>
-                  </a:txBody>
-                  <a:tcPr marL="73152" marR="73152" marT="18288" marB="18288" anchor="ctr">
-                    <a:solidFill>
-                      <a:srgbClr val="AF8C49"/>
-                    </a:solidFill>
-                  </a:tcPr>
-                </a:tc>
-                <a:extLst>
-                  <a:ext uri="{0D108BD9-81ED-4DB2-BD59-A6C34878D82A}">
-                    <a16:rowId xmlns:a16="http://schemas.microsoft.com/office/drawing/2014/main" val="10000"/>
-                  </a:ext>
-                </a:extLst>
-              </a:tr>
-              <a:tr h="384048">
-                <a:tc>
-                  <a:txBody>
-                    <a:bodyPr/>
-                    <a:lstStyle/>
-                    <a:p>
-                      <a:pPr algn="l"/>
-                      <a:r>
-                        <a:rPr sz="1100" b="1" i="0" dirty="0">
-                          <a:solidFill>
-                            <a:schemeClr val="tx1"/>
-                          </a:solidFill>
-                          <a:latin typeface="Avenir Next LT Pro Demi"/>
-                        </a:rPr>
-                        <a:t>Revenue</a:t>
-                      </a:r>
-                    </a:p>
-                  </a:txBody>
-                  <a:tcPr marL="73152" marR="73152" marT="18288" marB="18288" anchor="ctr">
-                    <a:solidFill>
-                      <a:srgbClr val="FFFFFF"/>
-                    </a:solidFill>
-                  </a:tcPr>
-                </a:tc>
-                <a:tc>
-                  <a:txBody>
-                    <a:bodyPr/>
-                    <a:lstStyle/>
-                    <a:p>
-                      <a:pPr algn="ctr"/>
-                      <a:r>
-                        <a:rPr sz="1100" b="0" i="0">
-                          <a:solidFill>
-                            <a:schemeClr val="tx1"/>
-                          </a:solidFill>
-                          <a:latin typeface="Avenir Next LT Pro"/>
-                        </a:rPr>
-                        <a:t>3,029</a:t>
-                      </a:r>
-                    </a:p>
-                  </a:txBody>
-                  <a:tcPr marL="73152" marR="73152" marT="18288" marB="18288" anchor="ctr">
-                    <a:solidFill>
-                      <a:srgbClr val="FFFFFF"/>
-                    </a:solidFill>
-                  </a:tcPr>
-                </a:tc>
-                <a:tc>
-                  <a:txBody>
-                    <a:bodyPr/>
-                    <a:lstStyle/>
-                    <a:p>
-                      <a:pPr algn="ctr"/>
-                      <a:r>
-                        <a:rPr sz="1100" b="0" i="0">
-                          <a:solidFill>
-                            <a:schemeClr val="tx1"/>
-                          </a:solidFill>
-                          <a:latin typeface="Avenir Next LT Pro"/>
-                        </a:rPr>
-                        <a:t>3,181</a:t>
-                      </a:r>
-                    </a:p>
-                  </a:txBody>
-                  <a:tcPr marL="73152" marR="73152" marT="18288" marB="18288" anchor="ctr">
-                    <a:solidFill>
-                      <a:srgbClr val="FFFFFF"/>
-                    </a:solidFill>
-                  </a:tcPr>
-                </a:tc>
-                <a:tc>
-                  <a:txBody>
-                    <a:bodyPr/>
-                    <a:lstStyle/>
-                    <a:p>
-                      <a:pPr algn="ctr"/>
-                      <a:r>
-                        <a:rPr sz="1100" b="0" i="0">
-                          <a:solidFill>
-                            <a:schemeClr val="tx1"/>
-                          </a:solidFill>
-                          <a:latin typeface="Avenir Next LT Pro"/>
-                        </a:rPr>
-                        <a:t>3,440</a:t>
-                      </a:r>
-                    </a:p>
-                  </a:txBody>
-                  <a:tcPr marL="73152" marR="73152" marT="18288" marB="18288" anchor="ctr">
-                    <a:solidFill>
-                      <a:srgbClr val="FFFFFF"/>
-                    </a:solidFill>
-                  </a:tcPr>
-                </a:tc>
-                <a:tc>
-                  <a:txBody>
-                    <a:bodyPr/>
-                    <a:lstStyle/>
-                    <a:p>
-                      <a:pPr algn="ctr"/>
-                      <a:r>
-                        <a:rPr sz="1100" b="0" i="0">
-                          <a:solidFill>
-                            <a:schemeClr val="tx1"/>
-                          </a:solidFill>
-                          <a:latin typeface="Avenir Next LT Pro"/>
-                        </a:rPr>
-                        <a:t>3,680</a:t>
-                      </a:r>
-                    </a:p>
-                  </a:txBody>
-                  <a:tcPr marL="73152" marR="73152" marT="18288" marB="18288" anchor="ctr">
-                    <a:solidFill>
-                      <a:srgbClr val="FFFFFF"/>
-                    </a:solidFill>
-                  </a:tcPr>
-                </a:tc>
-                <a:tc>
-                  <a:txBody>
-                    <a:bodyPr/>
-                    <a:lstStyle/>
-                    <a:p>
-                      <a:pPr algn="ctr"/>
-                      <a:r>
-                        <a:rPr sz="1100" b="0" i="0">
-                          <a:solidFill>
-                            <a:schemeClr val="tx1"/>
-                          </a:solidFill>
-                          <a:latin typeface="Avenir Next LT Pro"/>
-                        </a:rPr>
-                        <a:t>4,165</a:t>
-                      </a:r>
-                    </a:p>
-                  </a:txBody>
-                  <a:tcPr marL="73152" marR="73152" marT="18288" marB="18288" anchor="ctr">
-                    <a:solidFill>
-                      <a:srgbClr val="FFFFFF"/>
-                    </a:solidFill>
-                  </a:tcPr>
-                </a:tc>
-                <a:extLst>
-                  <a:ext uri="{0D108BD9-81ED-4DB2-BD59-A6C34878D82A}">
-                    <a16:rowId xmlns:a16="http://schemas.microsoft.com/office/drawing/2014/main" val="10001"/>
-                  </a:ext>
-                </a:extLst>
-              </a:tr>
-              <a:tr h="384048">
-                <a:tc>
-                  <a:txBody>
-                    <a:bodyPr/>
-                    <a:lstStyle/>
-                    <a:p>
-                      <a:pPr algn="l"/>
-                      <a:r>
-                        <a:rPr sz="1100" b="1" i="0" dirty="0">
-                          <a:solidFill>
-                            <a:schemeClr val="tx1"/>
-                          </a:solidFill>
-                          <a:latin typeface="Avenir Next LT Pro Demi"/>
-                        </a:rPr>
-                        <a:t>YoY Growth</a:t>
-                      </a:r>
-                    </a:p>
-                  </a:txBody>
-                  <a:tcPr marL="73152" marR="73152" marT="18288" marB="18288" anchor="ctr">
-                    <a:solidFill>
-                      <a:srgbClr val="F4F6F8"/>
-                    </a:solidFill>
-                  </a:tcPr>
-                </a:tc>
-                <a:tc>
-                  <a:txBody>
-                    <a:bodyPr/>
-                    <a:lstStyle/>
-                    <a:p>
-                      <a:pPr algn="ctr"/>
-                      <a:r>
-                        <a:rPr sz="1100" b="0" i="0" dirty="0">
-                          <a:solidFill>
-                            <a:schemeClr val="tx1"/>
-                          </a:solidFill>
-                          <a:latin typeface="Avenir Next LT Pro"/>
-                        </a:rPr>
-                        <a:t>-1</a:t>
-                      </a:r>
-                      <a:r>
-                        <a:rPr lang="en-US" sz="1100" b="0" i="0" dirty="0">
-                          <a:solidFill>
-                            <a:schemeClr val="tx1"/>
-                          </a:solidFill>
-                          <a:latin typeface="Avenir Next LT Pro"/>
-                        </a:rPr>
-                        <a:t>5.6</a:t>
-                      </a:r>
-                      <a:r>
-                        <a:rPr sz="1100" b="0" i="0" dirty="0">
-                          <a:solidFill>
-                            <a:schemeClr val="tx1"/>
-                          </a:solidFill>
-                          <a:latin typeface="Avenir Next LT Pro"/>
-                        </a:rPr>
-                        <a:t>%</a:t>
-                      </a:r>
-                    </a:p>
-                  </a:txBody>
-                  <a:tcPr marL="73152" marR="73152" marT="18288" marB="18288" anchor="ctr">
-                    <a:solidFill>
-                      <a:srgbClr val="F4F6F8"/>
-                    </a:solidFill>
-                  </a:tcPr>
-                </a:tc>
-                <a:tc>
-                  <a:txBody>
-                    <a:bodyPr/>
-                    <a:lstStyle/>
-                    <a:p>
-                      <a:pPr algn="ctr"/>
-                      <a:r>
-                        <a:rPr sz="1100" b="0" i="0">
-                          <a:solidFill>
-                            <a:schemeClr val="tx1"/>
-                          </a:solidFill>
-                          <a:latin typeface="Avenir Next LT Pro"/>
-                        </a:rPr>
-                        <a:t>+5.0%</a:t>
-                      </a:r>
-                    </a:p>
-                  </a:txBody>
-                  <a:tcPr marL="73152" marR="73152" marT="18288" marB="18288" anchor="ctr">
-                    <a:solidFill>
-                      <a:srgbClr val="F4F6F8"/>
-                    </a:solidFill>
-                  </a:tcPr>
-                </a:tc>
-                <a:tc>
-                  <a:txBody>
-                    <a:bodyPr/>
-                    <a:lstStyle/>
-                    <a:p>
-                      <a:pPr algn="ctr"/>
-                      <a:r>
-                        <a:rPr sz="1100" b="0" i="0">
-                          <a:solidFill>
-                            <a:schemeClr val="tx1"/>
-                          </a:solidFill>
-                          <a:latin typeface="Avenir Next LT Pro"/>
-                        </a:rPr>
-                        <a:t>+8.1%</a:t>
-                      </a:r>
-                    </a:p>
-                  </a:txBody>
-                  <a:tcPr marL="73152" marR="73152" marT="18288" marB="18288" anchor="ctr">
-                    <a:solidFill>
-                      <a:srgbClr val="F4F6F8"/>
-                    </a:solidFill>
-                  </a:tcPr>
-                </a:tc>
-                <a:tc>
-                  <a:txBody>
-                    <a:bodyPr/>
-                    <a:lstStyle/>
-                    <a:p>
-                      <a:pPr algn="ctr"/>
-                      <a:r>
-                        <a:rPr sz="1100" b="0" i="0">
-                          <a:solidFill>
-                            <a:schemeClr val="tx1"/>
-                          </a:solidFill>
-                          <a:latin typeface="Avenir Next LT Pro"/>
-                        </a:rPr>
-                        <a:t>+7.0%</a:t>
-                      </a:r>
-                    </a:p>
-                  </a:txBody>
-                  <a:tcPr marL="73152" marR="73152" marT="18288" marB="18288" anchor="ctr">
-                    <a:solidFill>
-                      <a:srgbClr val="F4F6F8"/>
-                    </a:solidFill>
-                  </a:tcPr>
-                </a:tc>
-                <a:tc>
-                  <a:txBody>
-                    <a:bodyPr/>
-                    <a:lstStyle/>
-                    <a:p>
-                      <a:pPr algn="ctr"/>
-                      <a:r>
-                        <a:rPr sz="1100" b="0" i="0">
-                          <a:solidFill>
-                            <a:schemeClr val="tx1"/>
-                          </a:solidFill>
-                          <a:latin typeface="Avenir Next LT Pro"/>
-                        </a:rPr>
-                        <a:t>+13.2%</a:t>
-                      </a:r>
-                    </a:p>
-                  </a:txBody>
-                  <a:tcPr marL="73152" marR="73152" marT="18288" marB="18288" anchor="ctr">
-                    <a:solidFill>
-                      <a:srgbClr val="F4F6F8"/>
-                    </a:solidFill>
-                  </a:tcPr>
-                </a:tc>
-                <a:extLst>
-                  <a:ext uri="{0D108BD9-81ED-4DB2-BD59-A6C34878D82A}">
-                    <a16:rowId xmlns:a16="http://schemas.microsoft.com/office/drawing/2014/main" val="10002"/>
-                  </a:ext>
-                </a:extLst>
-              </a:tr>
-              <a:tr h="384048">
-                <a:tc>
-                  <a:txBody>
-                    <a:bodyPr/>
-                    <a:lstStyle/>
-                    <a:p>
-                      <a:pPr algn="l"/>
-                      <a:r>
-                        <a:rPr sz="1100" b="1" i="0" dirty="0">
-                          <a:solidFill>
-                            <a:schemeClr val="tx1"/>
-                          </a:solidFill>
-                          <a:latin typeface="Avenir Next LT Pro Demi"/>
-                        </a:rPr>
-                        <a:t>Gross Margin</a:t>
-                      </a:r>
-                    </a:p>
-                  </a:txBody>
-                  <a:tcPr marL="73152" marR="73152" marT="18288" marB="18288" anchor="ctr">
-                    <a:solidFill>
-                      <a:srgbClr val="FFFFFF"/>
-                    </a:solidFill>
-                  </a:tcPr>
-                </a:tc>
-                <a:tc>
-                  <a:txBody>
-                    <a:bodyPr/>
-                    <a:lstStyle/>
-                    <a:p>
-                      <a:pPr algn="ctr"/>
-                      <a:r>
-                        <a:rPr sz="1100" b="0" i="0">
-                          <a:solidFill>
-                            <a:schemeClr val="tx1"/>
-                          </a:solidFill>
-                          <a:latin typeface="Avenir Next LT Pro"/>
-                        </a:rPr>
-                        <a:t>45.9%</a:t>
-                      </a:r>
-                    </a:p>
-                  </a:txBody>
-                  <a:tcPr marL="73152" marR="73152" marT="18288" marB="18288" anchor="ctr">
-                    <a:solidFill>
-                      <a:srgbClr val="FFFFFF"/>
-                    </a:solidFill>
-                  </a:tcPr>
-                </a:tc>
-                <a:tc>
-                  <a:txBody>
-                    <a:bodyPr/>
-                    <a:lstStyle/>
-                    <a:p>
-                      <a:pPr algn="ctr"/>
-                      <a:r>
-                        <a:rPr sz="1100" b="0" i="0">
-                          <a:solidFill>
-                            <a:schemeClr val="tx1"/>
-                          </a:solidFill>
-                          <a:latin typeface="Avenir Next LT Pro"/>
-                        </a:rPr>
-                        <a:t>44.5%</a:t>
-                      </a:r>
-                    </a:p>
-                  </a:txBody>
-                  <a:tcPr marL="73152" marR="73152" marT="18288" marB="18288" anchor="ctr">
-                    <a:solidFill>
-                      <a:srgbClr val="FFFFFF"/>
-                    </a:solidFill>
-                  </a:tcPr>
-                </a:tc>
-                <a:tc>
-                  <a:txBody>
-                    <a:bodyPr/>
-                    <a:lstStyle/>
-                    <a:p>
-                      <a:pPr algn="ctr"/>
-                      <a:r>
-                        <a:rPr sz="1100" b="0" i="0">
-                          <a:solidFill>
-                            <a:schemeClr val="tx1"/>
-                          </a:solidFill>
-                          <a:latin typeface="Avenir Next LT Pro"/>
-                        </a:rPr>
-                        <a:t>44.1%</a:t>
-                      </a:r>
-                    </a:p>
-                  </a:txBody>
-                  <a:tcPr marL="73152" marR="73152" marT="18288" marB="18288" anchor="ctr">
-                    <a:solidFill>
-                      <a:srgbClr val="FFFFFF"/>
-                    </a:solidFill>
-                  </a:tcPr>
-                </a:tc>
-                <a:tc>
-                  <a:txBody>
-                    <a:bodyPr/>
-                    <a:lstStyle/>
-                    <a:p>
-                      <a:pPr algn="ctr"/>
-                      <a:r>
-                        <a:rPr sz="1100" b="0" i="0">
-                          <a:solidFill>
-                            <a:schemeClr val="tx1"/>
-                          </a:solidFill>
-                          <a:latin typeface="Avenir Next LT Pro"/>
-                        </a:rPr>
-                        <a:t>~45%</a:t>
-                      </a:r>
-                    </a:p>
-                  </a:txBody>
-                  <a:tcPr marL="73152" marR="73152" marT="18288" marB="18288" anchor="ctr">
-                    <a:solidFill>
-                      <a:srgbClr val="FFFFFF"/>
-                    </a:solidFill>
-                  </a:tcPr>
-                </a:tc>
-                <a:tc>
-                  <a:txBody>
-                    <a:bodyPr/>
-                    <a:lstStyle/>
-                    <a:p>
-                      <a:pPr algn="ctr"/>
-                      <a:r>
-                        <a:rPr sz="1100" b="0" i="0">
-                          <a:solidFill>
-                            <a:schemeClr val="tx1"/>
-                          </a:solidFill>
-                          <a:latin typeface="Avenir Next LT Pro"/>
-                        </a:rPr>
-                        <a:t>~46%</a:t>
-                      </a:r>
-                    </a:p>
-                  </a:txBody>
-                  <a:tcPr marL="73152" marR="73152" marT="18288" marB="18288" anchor="ctr">
-                    <a:solidFill>
-                      <a:srgbClr val="FFFFFF"/>
-                    </a:solidFill>
-                  </a:tcPr>
-                </a:tc>
-                <a:extLst>
-                  <a:ext uri="{0D108BD9-81ED-4DB2-BD59-A6C34878D82A}">
-                    <a16:rowId xmlns:a16="http://schemas.microsoft.com/office/drawing/2014/main" val="10003"/>
-                  </a:ext>
-                </a:extLst>
-              </a:tr>
-              <a:tr h="384048">
-                <a:tc>
-                  <a:txBody>
-                    <a:bodyPr/>
-                    <a:lstStyle/>
-                    <a:p>
-                      <a:pPr algn="l"/>
-                      <a:r>
-                        <a:rPr sz="1100" b="1" i="0" dirty="0">
-                          <a:solidFill>
-                            <a:schemeClr val="tx1"/>
-                          </a:solidFill>
-                          <a:latin typeface="Avenir Next LT Pro Demi"/>
-                        </a:rPr>
-                        <a:t>Adj. EBITDA</a:t>
-                      </a:r>
-                    </a:p>
-                  </a:txBody>
-                  <a:tcPr marL="73152" marR="73152" marT="18288" marB="18288" anchor="ctr">
-                    <a:solidFill>
-                      <a:srgbClr val="F4F6F8"/>
-                    </a:solidFill>
-                  </a:tcPr>
-                </a:tc>
-                <a:tc>
-                  <a:txBody>
-                    <a:bodyPr/>
-                    <a:lstStyle/>
-                    <a:p>
-                      <a:pPr algn="ctr"/>
-                      <a:r>
-                        <a:rPr sz="1100" b="0" i="0" dirty="0">
-                          <a:solidFill>
-                            <a:schemeClr val="tx1"/>
-                          </a:solidFill>
-                          <a:latin typeface="Avenir Next LT Pro"/>
-                        </a:rPr>
-                        <a:t>551</a:t>
-                      </a:r>
-                    </a:p>
-                  </a:txBody>
-                  <a:tcPr marL="73152" marR="73152" marT="18288" marB="18288" anchor="ctr">
-                    <a:solidFill>
-                      <a:srgbClr val="F4F6F8"/>
-                    </a:solidFill>
-                  </a:tcPr>
-                </a:tc>
-                <a:tc>
-                  <a:txBody>
-                    <a:bodyPr/>
-                    <a:lstStyle/>
-                    <a:p>
-                      <a:pPr algn="ctr"/>
-                      <a:r>
-                        <a:rPr sz="1100" b="0" i="0">
-                          <a:solidFill>
-                            <a:schemeClr val="tx1"/>
-                          </a:solidFill>
-                          <a:latin typeface="Avenir Next LT Pro"/>
-                        </a:rPr>
-                        <a:t>539</a:t>
-                      </a:r>
-                    </a:p>
-                  </a:txBody>
-                  <a:tcPr marL="73152" marR="73152" marT="18288" marB="18288" anchor="ctr">
-                    <a:solidFill>
-                      <a:srgbClr val="F4F6F8"/>
-                    </a:solidFill>
-                  </a:tcPr>
-                </a:tc>
-                <a:tc>
-                  <a:txBody>
-                    <a:bodyPr/>
-                    <a:lstStyle/>
-                    <a:p>
-                      <a:pPr algn="ctr"/>
-                      <a:r>
-                        <a:rPr sz="1100" b="0" i="0">
-                          <a:solidFill>
-                            <a:schemeClr val="tx1"/>
-                          </a:solidFill>
-                          <a:latin typeface="Avenir Next LT Pro"/>
-                        </a:rPr>
-                        <a:t>597</a:t>
-                      </a:r>
-                    </a:p>
-                  </a:txBody>
-                  <a:tcPr marL="73152" marR="73152" marT="18288" marB="18288" anchor="ctr">
-                    <a:solidFill>
-                      <a:srgbClr val="F4F6F8"/>
-                    </a:solidFill>
-                  </a:tcPr>
-                </a:tc>
-                <a:tc>
-                  <a:txBody>
-                    <a:bodyPr/>
-                    <a:lstStyle/>
-                    <a:p>
-                      <a:pPr algn="ctr"/>
-                      <a:r>
-                        <a:rPr sz="1100" b="0" i="0">
-                          <a:solidFill>
-                            <a:schemeClr val="tx1"/>
-                          </a:solidFill>
-                          <a:latin typeface="Avenir Next LT Pro"/>
-                        </a:rPr>
-                        <a:t>589</a:t>
-                      </a:r>
-                    </a:p>
-                  </a:txBody>
-                  <a:tcPr marL="73152" marR="73152" marT="18288" marB="18288" anchor="ctr">
-                    <a:solidFill>
-                      <a:srgbClr val="F4F6F8"/>
-                    </a:solidFill>
-                  </a:tcPr>
-                </a:tc>
-                <a:tc>
-                  <a:txBody>
-                    <a:bodyPr/>
-                    <a:lstStyle/>
-                    <a:p>
-                      <a:pPr algn="ctr"/>
-                      <a:r>
-                        <a:rPr sz="1100" b="0" i="0">
-                          <a:solidFill>
-                            <a:schemeClr val="tx1"/>
-                          </a:solidFill>
-                          <a:latin typeface="Avenir Next LT Pro"/>
-                        </a:rPr>
-                        <a:t>708</a:t>
-                      </a:r>
-                    </a:p>
-                  </a:txBody>
-                  <a:tcPr marL="73152" marR="73152" marT="18288" marB="18288" anchor="ctr">
-                    <a:solidFill>
-                      <a:srgbClr val="F4F6F8"/>
-                    </a:solidFill>
-                  </a:tcPr>
-                </a:tc>
-                <a:extLst>
-                  <a:ext uri="{0D108BD9-81ED-4DB2-BD59-A6C34878D82A}">
-                    <a16:rowId xmlns:a16="http://schemas.microsoft.com/office/drawing/2014/main" val="10004"/>
-                  </a:ext>
-                </a:extLst>
-              </a:tr>
-              <a:tr h="384048">
-                <a:tc>
-                  <a:txBody>
-                    <a:bodyPr/>
-                    <a:lstStyle/>
-                    <a:p>
-                      <a:pPr algn="l"/>
-                      <a:r>
-                        <a:rPr sz="1100" b="1" i="0">
-                          <a:solidFill>
-                            <a:schemeClr val="tx1"/>
-                          </a:solidFill>
-                          <a:latin typeface="Avenir Next LT Pro Demi"/>
-                        </a:rPr>
-                        <a:t>EBITDA Margin</a:t>
-                      </a:r>
-                    </a:p>
-                  </a:txBody>
-                  <a:tcPr marL="73152" marR="73152" marT="18288" marB="18288" anchor="ctr">
-                    <a:solidFill>
-                      <a:srgbClr val="FFFFFF"/>
-                    </a:solidFill>
-                  </a:tcPr>
-                </a:tc>
-                <a:tc>
-                  <a:txBody>
-                    <a:bodyPr/>
-                    <a:lstStyle/>
-                    <a:p>
-                      <a:pPr algn="ctr"/>
-                      <a:r>
-                        <a:rPr sz="1100" b="0" i="0" dirty="0">
-                          <a:solidFill>
-                            <a:schemeClr val="tx1"/>
-                          </a:solidFill>
-                          <a:latin typeface="Avenir Next LT Pro"/>
-                        </a:rPr>
-                        <a:t>18.2%</a:t>
-                      </a:r>
-                    </a:p>
-                  </a:txBody>
-                  <a:tcPr marL="73152" marR="73152" marT="18288" marB="18288" anchor="ctr">
-                    <a:solidFill>
-                      <a:srgbClr val="FFFFFF"/>
-                    </a:solidFill>
-                  </a:tcPr>
-                </a:tc>
-                <a:tc>
-                  <a:txBody>
-                    <a:bodyPr/>
-                    <a:lstStyle/>
-                    <a:p>
-                      <a:pPr algn="ctr"/>
-                      <a:r>
-                        <a:rPr sz="1100" b="0" i="0">
-                          <a:solidFill>
-                            <a:schemeClr val="tx1"/>
-                          </a:solidFill>
-                          <a:latin typeface="Avenir Next LT Pro"/>
-                        </a:rPr>
-                        <a:t>16.9%</a:t>
-                      </a:r>
-                    </a:p>
-                  </a:txBody>
-                  <a:tcPr marL="73152" marR="73152" marT="18288" marB="18288" anchor="ctr">
-                    <a:solidFill>
-                      <a:srgbClr val="FFFFFF"/>
-                    </a:solidFill>
-                  </a:tcPr>
-                </a:tc>
-                <a:tc>
-                  <a:txBody>
-                    <a:bodyPr/>
-                    <a:lstStyle/>
-                    <a:p>
-                      <a:pPr algn="ctr"/>
-                      <a:r>
-                        <a:rPr sz="1100" b="0" i="0">
-                          <a:solidFill>
-                            <a:schemeClr val="tx1"/>
-                          </a:solidFill>
-                          <a:latin typeface="Avenir Next LT Pro"/>
-                        </a:rPr>
-                        <a:t>17.3%</a:t>
-                      </a:r>
-                    </a:p>
-                  </a:txBody>
-                  <a:tcPr marL="73152" marR="73152" marT="18288" marB="18288" anchor="ctr">
-                    <a:solidFill>
-                      <a:srgbClr val="FFFFFF"/>
-                    </a:solidFill>
-                  </a:tcPr>
-                </a:tc>
-                <a:tc>
-                  <a:txBody>
-                    <a:bodyPr/>
-                    <a:lstStyle/>
-                    <a:p>
-                      <a:pPr algn="ctr"/>
-                      <a:r>
-                        <a:rPr sz="1100" b="0" i="0">
-                          <a:solidFill>
-                            <a:schemeClr val="tx1"/>
-                          </a:solidFill>
-                          <a:latin typeface="Avenir Next LT Pro"/>
-                        </a:rPr>
-                        <a:t>16.0%</a:t>
-                      </a:r>
-                    </a:p>
-                  </a:txBody>
-                  <a:tcPr marL="73152" marR="73152" marT="18288" marB="18288" anchor="ctr">
-                    <a:solidFill>
-                      <a:srgbClr val="FFFFFF"/>
-                    </a:solidFill>
-                  </a:tcPr>
-                </a:tc>
-                <a:tc>
-                  <a:txBody>
-                    <a:bodyPr/>
-                    <a:lstStyle/>
-                    <a:p>
-                      <a:pPr algn="ctr"/>
-                      <a:r>
-                        <a:rPr sz="1100" b="0" i="0">
-                          <a:solidFill>
-                            <a:schemeClr val="tx1"/>
-                          </a:solidFill>
-                          <a:latin typeface="Avenir Next LT Pro"/>
-                        </a:rPr>
-                        <a:t>17.0%</a:t>
-                      </a:r>
-                    </a:p>
-                  </a:txBody>
-                  <a:tcPr marL="73152" marR="73152" marT="18288" marB="18288" anchor="ctr">
-                    <a:solidFill>
-                      <a:srgbClr val="FFFFFF"/>
-                    </a:solidFill>
-                  </a:tcPr>
-                </a:tc>
-                <a:extLst>
-                  <a:ext uri="{0D108BD9-81ED-4DB2-BD59-A6C34878D82A}">
-                    <a16:rowId xmlns:a16="http://schemas.microsoft.com/office/drawing/2014/main" val="10005"/>
-                  </a:ext>
-                </a:extLst>
-              </a:tr>
-              <a:tr h="384048">
-                <a:tc>
-                  <a:txBody>
-                    <a:bodyPr/>
-                    <a:lstStyle/>
-                    <a:p>
-                      <a:pPr algn="l"/>
-                      <a:r>
-                        <a:rPr sz="1100" b="1" i="0">
-                          <a:solidFill>
-                            <a:schemeClr val="tx1"/>
-                          </a:solidFill>
-                          <a:latin typeface="Avenir Next LT Pro Demi"/>
-                        </a:rPr>
-                        <a:t>Diluted EPS (GAAP)</a:t>
-                      </a:r>
-                    </a:p>
-                  </a:txBody>
-                  <a:tcPr marL="73152" marR="73152" marT="18288" marB="18288" anchor="ctr">
-                    <a:solidFill>
-                      <a:srgbClr val="F4F6F8"/>
-                    </a:solidFill>
-                  </a:tcPr>
-                </a:tc>
-                <a:tc>
-                  <a:txBody>
-                    <a:bodyPr/>
-                    <a:lstStyle/>
-                    <a:p>
-                      <a:pPr algn="ctr"/>
-                      <a:r>
-                        <a:rPr sz="1100" b="0" i="0">
-                          <a:solidFill>
-                            <a:schemeClr val="tx1"/>
-                          </a:solidFill>
-                          <a:latin typeface="Avenir Next LT Pro"/>
-                        </a:rPr>
-                        <a:t>$5.91</a:t>
-                      </a:r>
-                    </a:p>
-                  </a:txBody>
-                  <a:tcPr marL="73152" marR="73152" marT="18288" marB="18288" anchor="ctr">
-                    <a:solidFill>
-                      <a:srgbClr val="F4F6F8"/>
-                    </a:solidFill>
-                  </a:tcPr>
-                </a:tc>
-                <a:tc>
-                  <a:txBody>
-                    <a:bodyPr/>
-                    <a:lstStyle/>
-                    <a:p>
-                      <a:pPr algn="ctr"/>
-                      <a:r>
-                        <a:rPr sz="1100" b="0" i="0" dirty="0">
-                          <a:solidFill>
-                            <a:schemeClr val="tx1"/>
-                          </a:solidFill>
-                          <a:latin typeface="Avenir Next LT Pro"/>
-                        </a:rPr>
-                        <a:t>$3.62</a:t>
-                      </a:r>
-                    </a:p>
-                  </a:txBody>
-                  <a:tcPr marL="73152" marR="73152" marT="18288" marB="18288" anchor="ctr">
-                    <a:solidFill>
-                      <a:srgbClr val="F4F6F8"/>
-                    </a:solidFill>
-                  </a:tcPr>
-                </a:tc>
-                <a:tc>
-                  <a:txBody>
-                    <a:bodyPr/>
-                    <a:lstStyle/>
-                    <a:p>
-                      <a:pPr algn="ctr"/>
-                      <a:r>
-                        <a:rPr sz="1100" b="0" i="0">
-                          <a:solidFill>
-                            <a:schemeClr val="tx1"/>
-                          </a:solidFill>
-                          <a:latin typeface="Avenir Next LT Pro"/>
-                        </a:rPr>
-                        <a:t>$6.31</a:t>
-                      </a:r>
-                    </a:p>
-                  </a:txBody>
-                  <a:tcPr marL="73152" marR="73152" marT="18288" marB="18288" anchor="ctr">
-                    <a:solidFill>
-                      <a:srgbClr val="F4F6F8"/>
-                    </a:solidFill>
-                  </a:tcPr>
-                </a:tc>
-                <a:tc>
-                  <a:txBody>
-                    <a:bodyPr/>
-                    <a:lstStyle/>
-                    <a:p>
-                      <a:pPr algn="ctr"/>
-                      <a:r>
-                        <a:rPr sz="1100" b="0" i="0">
-                          <a:solidFill>
-                            <a:schemeClr val="tx1"/>
-                          </a:solidFill>
-                          <a:latin typeface="Avenir Next LT Pro"/>
-                        </a:rPr>
-                        <a:t>~$9</a:t>
-                      </a:r>
-                    </a:p>
-                  </a:txBody>
-                  <a:tcPr marL="73152" marR="73152" marT="18288" marB="18288" anchor="ctr">
-                    <a:solidFill>
-                      <a:srgbClr val="F4F6F8"/>
-                    </a:solidFill>
-                  </a:tcPr>
-                </a:tc>
-                <a:tc>
-                  <a:txBody>
-                    <a:bodyPr/>
-                    <a:lstStyle/>
-                    <a:p>
-                      <a:pPr algn="ctr"/>
-                      <a:r>
-                        <a:rPr sz="1100" b="0" i="0">
-                          <a:solidFill>
-                            <a:schemeClr val="tx1"/>
-                          </a:solidFill>
-                          <a:latin typeface="Avenir Next LT Pro"/>
-                        </a:rPr>
-                        <a:t>~$14</a:t>
-                      </a:r>
-                    </a:p>
-                  </a:txBody>
-                  <a:tcPr marL="73152" marR="73152" marT="18288" marB="18288" anchor="ctr">
-                    <a:solidFill>
-                      <a:srgbClr val="F4F6F8"/>
-                    </a:solidFill>
-                  </a:tcPr>
-                </a:tc>
-                <a:extLst>
-                  <a:ext uri="{0D108BD9-81ED-4DB2-BD59-A6C34878D82A}">
-                    <a16:rowId xmlns:a16="http://schemas.microsoft.com/office/drawing/2014/main" val="10006"/>
-                  </a:ext>
-                </a:extLst>
-              </a:tr>
-              <a:tr h="384048">
-                <a:tc>
-                  <a:txBody>
-                    <a:bodyPr/>
-                    <a:lstStyle/>
-                    <a:p>
-                      <a:pPr algn="l"/>
-                      <a:r>
-                        <a:rPr sz="1100" b="1" i="0">
-                          <a:solidFill>
-                            <a:schemeClr val="tx1"/>
-                          </a:solidFill>
-                          <a:latin typeface="Avenir Next LT Pro Demi"/>
-                        </a:rPr>
-                        <a:t>Free Cash Flow</a:t>
-                      </a:r>
-                    </a:p>
-                  </a:txBody>
-                  <a:tcPr marL="73152" marR="73152" marT="18288" marB="18288" anchor="ctr">
-                    <a:solidFill>
-                      <a:srgbClr val="FFFFFF"/>
-                    </a:solidFill>
-                  </a:tcPr>
-                </a:tc>
-                <a:tc>
-                  <a:txBody>
-                    <a:bodyPr/>
-                    <a:lstStyle/>
-                    <a:p>
-                      <a:pPr algn="ctr"/>
-                      <a:r>
-                        <a:rPr sz="1100" b="0" i="0">
-                          <a:solidFill>
-                            <a:schemeClr val="tx1"/>
-                          </a:solidFill>
-                          <a:latin typeface="Avenir Next LT Pro"/>
-                        </a:rPr>
-                        <a:t>-67</a:t>
-                      </a:r>
-                    </a:p>
-                  </a:txBody>
-                  <a:tcPr marL="73152" marR="73152" marT="18288" marB="18288" anchor="ctr">
-                    <a:solidFill>
-                      <a:srgbClr val="FFFFFF"/>
-                    </a:solidFill>
-                  </a:tcPr>
-                </a:tc>
-                <a:tc>
-                  <a:txBody>
-                    <a:bodyPr/>
-                    <a:lstStyle/>
-                    <a:p>
-                      <a:pPr algn="ctr"/>
-                      <a:r>
-                        <a:rPr sz="1100" b="0" i="0">
-                          <a:solidFill>
-                            <a:schemeClr val="tx1"/>
-                          </a:solidFill>
-                          <a:latin typeface="Avenir Next LT Pro"/>
-                        </a:rPr>
-                        <a:t>-214</a:t>
-                      </a:r>
-                    </a:p>
-                  </a:txBody>
-                  <a:tcPr marL="73152" marR="73152" marT="18288" marB="18288" anchor="ctr">
-                    <a:solidFill>
-                      <a:srgbClr val="FFFFFF"/>
-                    </a:solidFill>
-                  </a:tcPr>
-                </a:tc>
-                <a:tc>
-                  <a:txBody>
-                    <a:bodyPr/>
-                    <a:lstStyle/>
-                    <a:p>
-                      <a:pPr algn="ctr"/>
-                      <a:r>
-                        <a:rPr sz="1100" b="0" i="0" dirty="0">
-                          <a:solidFill>
-                            <a:schemeClr val="tx1"/>
-                          </a:solidFill>
-                          <a:latin typeface="Avenir Next LT Pro"/>
-                        </a:rPr>
-                        <a:t>252</a:t>
-                      </a:r>
-                    </a:p>
-                  </a:txBody>
-                  <a:tcPr marL="73152" marR="73152" marT="18288" marB="18288" anchor="ctr">
-                    <a:solidFill>
-                      <a:srgbClr val="FFFFFF"/>
-                    </a:solidFill>
-                  </a:tcPr>
-                </a:tc>
-                <a:tc>
-                  <a:txBody>
-                    <a:bodyPr/>
-                    <a:lstStyle/>
-                    <a:p>
-                      <a:pPr algn="ctr"/>
-                      <a:r>
-                        <a:rPr sz="1100" b="0" i="0">
-                          <a:solidFill>
-                            <a:schemeClr val="tx1"/>
-                          </a:solidFill>
-                          <a:latin typeface="Avenir Next LT Pro"/>
-                        </a:rPr>
-                        <a:t>~350</a:t>
-                      </a:r>
-                    </a:p>
-                  </a:txBody>
-                  <a:tcPr marL="73152" marR="73152" marT="18288" marB="18288" anchor="ctr">
-                    <a:solidFill>
-                      <a:srgbClr val="FFFFFF"/>
-                    </a:solidFill>
-                  </a:tcPr>
-                </a:tc>
-                <a:tc>
-                  <a:txBody>
-                    <a:bodyPr/>
-                    <a:lstStyle/>
-                    <a:p>
-                      <a:pPr algn="ctr"/>
-                      <a:r>
-                        <a:rPr sz="1100" b="0" i="0">
-                          <a:solidFill>
-                            <a:schemeClr val="tx1"/>
-                          </a:solidFill>
-                          <a:latin typeface="Avenir Next LT Pro"/>
-                        </a:rPr>
-                        <a:t>~450</a:t>
-                      </a:r>
-                    </a:p>
-                  </a:txBody>
-                  <a:tcPr marL="73152" marR="73152" marT="18288" marB="18288" anchor="ctr">
-                    <a:solidFill>
-                      <a:srgbClr val="FFFFFF"/>
-                    </a:solidFill>
-                  </a:tcPr>
-                </a:tc>
-                <a:extLst>
-                  <a:ext uri="{0D108BD9-81ED-4DB2-BD59-A6C34878D82A}">
-                    <a16:rowId xmlns:a16="http://schemas.microsoft.com/office/drawing/2014/main" val="10007"/>
-                  </a:ext>
-                </a:extLst>
-              </a:tr>
-              <a:tr h="384048">
-                <a:tc>
-                  <a:txBody>
-                    <a:bodyPr/>
-                    <a:lstStyle/>
-                    <a:p>
-                      <a:pPr algn="l"/>
-                      <a:r>
-                        <a:rPr sz="1100" b="1" i="0">
-                          <a:solidFill>
-                            <a:schemeClr val="tx1"/>
-                          </a:solidFill>
-                          <a:latin typeface="Avenir Next LT Pro Demi"/>
-                        </a:rPr>
-                        <a:t>Net Debt</a:t>
-                      </a:r>
-                    </a:p>
-                  </a:txBody>
-                  <a:tcPr marL="73152" marR="73152" marT="18288" marB="18288" anchor="ctr">
-                    <a:solidFill>
-                      <a:srgbClr val="F4F6F8"/>
-                    </a:solidFill>
-                  </a:tcPr>
-                </a:tc>
-                <a:tc>
-                  <a:txBody>
-                    <a:bodyPr/>
-                    <a:lstStyle/>
-                    <a:p>
-                      <a:pPr algn="ctr"/>
-                      <a:r>
-                        <a:rPr sz="1100" b="0" i="0">
-                          <a:solidFill>
-                            <a:schemeClr val="tx1"/>
-                          </a:solidFill>
-                          <a:latin typeface="Avenir Next LT Pro"/>
-                        </a:rPr>
-                        <a:t>~2,600</a:t>
-                      </a:r>
-                    </a:p>
-                  </a:txBody>
-                  <a:tcPr marL="73152" marR="73152" marT="18288" marB="18288" anchor="ctr">
-                    <a:solidFill>
-                      <a:srgbClr val="F4F6F8"/>
-                    </a:solidFill>
-                  </a:tcPr>
-                </a:tc>
-                <a:tc>
-                  <a:txBody>
-                    <a:bodyPr/>
-                    <a:lstStyle/>
-                    <a:p>
-                      <a:pPr algn="ctr"/>
-                      <a:r>
-                        <a:rPr sz="1100" b="0" i="0">
-                          <a:solidFill>
-                            <a:schemeClr val="tx1"/>
-                          </a:solidFill>
-                          <a:latin typeface="Avenir Next LT Pro"/>
-                        </a:rPr>
-                        <a:t>2,594</a:t>
-                      </a:r>
-                    </a:p>
-                  </a:txBody>
-                  <a:tcPr marL="73152" marR="73152" marT="18288" marB="18288" anchor="ctr">
-                    <a:solidFill>
-                      <a:srgbClr val="F4F6F8"/>
-                    </a:solidFill>
-                  </a:tcPr>
-                </a:tc>
-                <a:tc>
-                  <a:txBody>
-                    <a:bodyPr/>
-                    <a:lstStyle/>
-                    <a:p>
-                      <a:pPr algn="ctr"/>
-                      <a:r>
-                        <a:rPr sz="1100" b="0" i="0">
-                          <a:solidFill>
-                            <a:schemeClr val="tx1"/>
-                          </a:solidFill>
-                          <a:latin typeface="Avenir Next LT Pro"/>
-                        </a:rPr>
-                        <a:t>2,378</a:t>
-                      </a:r>
-                    </a:p>
-                  </a:txBody>
-                  <a:tcPr marL="73152" marR="73152" marT="18288" marB="18288" anchor="ctr">
-                    <a:solidFill>
-                      <a:srgbClr val="F4F6F8"/>
-                    </a:solidFill>
-                  </a:tcPr>
-                </a:tc>
-                <a:tc>
-                  <a:txBody>
-                    <a:bodyPr/>
-                    <a:lstStyle/>
-                    <a:p>
-                      <a:pPr algn="ctr"/>
-                      <a:r>
-                        <a:rPr sz="1100" b="0" i="0" dirty="0">
-                          <a:solidFill>
-                            <a:schemeClr val="tx1"/>
-                          </a:solidFill>
-                          <a:latin typeface="Avenir Next LT Pro"/>
-                        </a:rPr>
-                        <a:t>~2,180</a:t>
-                      </a:r>
-                    </a:p>
-                  </a:txBody>
-                  <a:tcPr marL="73152" marR="73152" marT="18288" marB="18288" anchor="ctr">
-                    <a:solidFill>
-                      <a:srgbClr val="F4F6F8"/>
-                    </a:solidFill>
-                  </a:tcPr>
-                </a:tc>
-                <a:tc>
-                  <a:txBody>
-                    <a:bodyPr/>
-                    <a:lstStyle/>
-                    <a:p>
-                      <a:pPr algn="ctr"/>
-                      <a:r>
-                        <a:rPr sz="1100" b="0" i="0" dirty="0">
-                          <a:solidFill>
-                            <a:schemeClr val="tx1"/>
-                          </a:solidFill>
-                          <a:latin typeface="Avenir Next LT Pro"/>
-                        </a:rPr>
-                        <a:t>~1,900</a:t>
-                      </a:r>
-                    </a:p>
-                  </a:txBody>
-                  <a:tcPr marL="73152" marR="73152" marT="18288" marB="18288" anchor="ctr">
-                    <a:solidFill>
-                      <a:srgbClr val="F4F6F8"/>
-                    </a:solidFill>
-                  </a:tcPr>
-                </a:tc>
-                <a:extLst>
-                  <a:ext uri="{0D108BD9-81ED-4DB2-BD59-A6C34878D82A}">
-                    <a16:rowId xmlns:a16="http://schemas.microsoft.com/office/drawing/2014/main" val="10008"/>
-                  </a:ext>
-                </a:extLst>
-              </a:tr>
-            </a:tbl>
-          </a:graphicData>
-        </a:graphic>
-      </p:graphicFrame>
-      <p:sp>
-        <p:nvSpPr>
-          <p:cNvPr id="7" name="TextBox 6"/>
-          <p:cNvSpPr txBox="1"/>
-          <p:nvPr/>
-        </p:nvSpPr>
-        <p:spPr>
-          <a:xfrm>
-            <a:off x="218660" y="5041127"/>
-            <a:ext cx="8653669" cy="400110"/>
-          </a:xfrm>
-          <a:prstGeom prst="rect">
-            <a:avLst/>
-          </a:prstGeom>
-          <a:noFill/>
-        </p:spPr>
-        <p:txBody>
-          <a:bodyPr wrap="square">
-            <a:spAutoFit/>
-          </a:bodyPr>
-          <a:lstStyle/>
-          <a:p>
-            <a:r>
-              <a:rPr sz="1000" b="1" i="0" dirty="0">
-                <a:solidFill>
-                  <a:srgbClr val="156082"/>
-                </a:solidFill>
-                <a:latin typeface="Avenir Next LT Pro"/>
-              </a:rPr>
-              <a:t>Story: margins dip near-term (FY26 guide 14–16%) then recover toward ~17%; FCF inflected to +$252M in FY25 — but ~$2.4B net debt (~4× EBITDA) and ~$225M/yr interest make it a leveraged bet</a:t>
+              <a:t>Source: RH FY2025 Form 10-K</a:t>
             </a:r>
           </a:p>
         </p:txBody>
@@ -15608,7 +15238,7 @@
 </file>
 
 <file path=ppt/slides/slide9.xml><?xml version="1.0" encoding="utf-8"?>
-<p:sld xmlns:a="http://schemas.openxmlformats.org/drawingml/2006/main" xmlns:r="http://schemas.openxmlformats.org/officeDocument/2006/relationships" xmlns:p="http://schemas.openxmlformats.org/presentationml/2006/main">
+<p:sld xmlns:a="http://schemas.openxmlformats.org/drawingml/2006/main" xmlns:p="http://schemas.openxmlformats.org/presentationml/2006/main" xmlns:r="http://schemas.openxmlformats.org/officeDocument/2006/relationships">
   <p:cSld>
     <p:spTree>
       <p:nvGrpSpPr>
@@ -15616,64 +15246,467 @@
         <p:cNvGrpSpPr/>
         <p:nvPr/>
       </p:nvGrpSpPr>
-      <p:grpSpPr>
-        <a:xfrm>
-          <a:off x="0" y="0"/>
-          <a:ext cx="0" cy="0"/>
-          <a:chOff x="0" y="0"/>
-          <a:chExt cx="0" cy="0"/>
-        </a:xfrm>
-      </p:grpSpPr>
+      <p:grpSpPr/>
       <p:sp>
         <p:nvSpPr>
-          <p:cNvPr id="2" name="Title 1">
-            <a:extLst>
-              <a:ext uri="{FF2B5EF4-FFF2-40B4-BE49-F238E27FC236}">
-                <a16:creationId xmlns:a16="http://schemas.microsoft.com/office/drawing/2014/main" id="{F36EAD30-CEA1-8508-C4C6-5800B2CA8846}"/>
-              </a:ext>
-            </a:extLst>
-          </p:cNvPr>
-          <p:cNvSpPr>
-            <a:spLocks noGrp="1"/>
-          </p:cNvSpPr>
-          <p:nvPr>
-            <p:ph type="title"/>
-          </p:nvPr>
+          <p:cNvPr id="2" name="TextBox 1"/>
+          <p:cNvSpPr txBox="1"/>
+          <p:nvPr/>
         </p:nvSpPr>
-        <p:spPr/>
+        <p:spPr>
+          <a:xfrm>
+            <a:off x="457200" y="365760"/>
+            <a:ext cx="8229600" cy="548640"/>
+          </a:xfrm>
+          <a:prstGeom prst="rect">
+            <a:avLst/>
+          </a:prstGeom>
+          <a:noFill/>
+        </p:spPr>
         <p:txBody>
-          <a:bodyPr/>
+          <a:bodyPr wrap="square">
+            <a:spAutoFit/>
+          </a:bodyPr>
           <a:lstStyle/>
           <a:p>
             <a:r>
-              <a:rPr lang="en-US"/>
-              <a:t>Valuation &amp; returns</a:t>
+              <a:rPr sz="2200" b="0">
+                <a:solidFill>
+                  <a:srgbClr val="000000"/>
+                </a:solidFill>
+                <a:latin typeface="Avenir Next LT Pro Demi"/>
+              </a:rPr>
+              <a:t>The Recovery Plan</a:t>
+            </a:r>
+          </a:p>
+        </p:txBody>
+      </p:sp>
+      <p:sp>
+        <p:nvSpPr>
+          <p:cNvPr id="3" name="Rectangle 2"/>
+          <p:cNvSpPr/>
+          <p:nvPr/>
+        </p:nvSpPr>
+        <p:spPr>
+          <a:xfrm>
+            <a:off x="457200" y="960120"/>
+            <a:ext cx="8229600" cy="25603"/>
+          </a:xfrm>
+          <a:prstGeom prst="rect">
+            <a:avLst/>
+          </a:prstGeom>
+          <a:solidFill>
+            <a:srgbClr val="9A7B44"/>
+          </a:solidFill>
+          <a:ln>
+            <a:noFill/>
+          </a:ln>
+        </p:spPr>
+        <p:style>
+          <a:lnRef idx="1">
+            <a:schemeClr val="accent1"/>
+          </a:lnRef>
+          <a:fillRef idx="3">
+            <a:schemeClr val="accent1"/>
+          </a:fillRef>
+          <a:effectRef idx="2">
+            <a:schemeClr val="accent1"/>
+          </a:effectRef>
+          <a:fontRef idx="minor">
+            <a:schemeClr val="lt1"/>
+          </a:fontRef>
+        </p:style>
+        <p:txBody>
+          <a:bodyPr rtlCol="0" anchor="ctr"/>
+          <a:lstStyle/>
+          <a:p>
+            <a:pPr algn="ctr"/>
+          </a:p>
+        </p:txBody>
+      </p:sp>
+      <p:sp>
+        <p:nvSpPr>
+          <p:cNvPr id="4" name="Rectangle 3"/>
+          <p:cNvSpPr/>
+          <p:nvPr/>
+        </p:nvSpPr>
+        <p:spPr>
+          <a:xfrm>
+            <a:off x="457200" y="1371600"/>
+            <a:ext cx="82296" cy="960120"/>
+          </a:xfrm>
+          <a:prstGeom prst="rect">
+            <a:avLst/>
+          </a:prstGeom>
+          <a:solidFill>
+            <a:srgbClr val="9A7B44"/>
+          </a:solidFill>
+          <a:ln>
+            <a:noFill/>
+          </a:ln>
+        </p:spPr>
+        <p:style>
+          <a:lnRef idx="1">
+            <a:schemeClr val="accent1"/>
+          </a:lnRef>
+          <a:fillRef idx="3">
+            <a:schemeClr val="accent1"/>
+          </a:fillRef>
+          <a:effectRef idx="2">
+            <a:schemeClr val="accent1"/>
+          </a:effectRef>
+          <a:fontRef idx="minor">
+            <a:schemeClr val="lt1"/>
+          </a:fontRef>
+        </p:style>
+        <p:txBody>
+          <a:bodyPr rtlCol="0" anchor="ctr"/>
+          <a:lstStyle/>
+          <a:p>
+            <a:pPr algn="ctr"/>
+          </a:p>
+        </p:txBody>
+      </p:sp>
+      <p:sp>
+        <p:nvSpPr>
+          <p:cNvPr id="5" name="TextBox 4"/>
+          <p:cNvSpPr txBox="1"/>
+          <p:nvPr/>
+        </p:nvSpPr>
+        <p:spPr>
+          <a:xfrm>
+            <a:off x="658368" y="1371600"/>
+            <a:ext cx="7955279" cy="960120"/>
+          </a:xfrm>
+          <a:prstGeom prst="rect">
+            <a:avLst/>
+          </a:prstGeom>
+          <a:noFill/>
+        </p:spPr>
+        <p:txBody>
+          <a:bodyPr wrap="square" anchor="ctr">
+            <a:spAutoFit/>
+          </a:bodyPr>
+          <a:lstStyle/>
+          <a:p>
+            <a:r>
+              <a:rPr sz="1350" b="1">
+                <a:solidFill>
+                  <a:srgbClr val="000000"/>
+                </a:solidFill>
+                <a:latin typeface="Avenir Next LT Pro Demi"/>
+              </a:rPr>
+              <a:t>Product transformation  —  </a:t>
+            </a:r>
+            <a:r>
+              <a:rPr sz="1250" b="0">
+                <a:solidFill>
+                  <a:srgbClr val="000000"/>
+                </a:solidFill>
+                <a:latin typeface="Avenir Next LT Pro"/>
+              </a:rPr>
+              <a:t>New collections and refreshed Sourcebooks.</a:t>
+            </a:r>
+          </a:p>
+        </p:txBody>
+      </p:sp>
+      <p:sp>
+        <p:nvSpPr>
+          <p:cNvPr id="6" name="Rectangle 5"/>
+          <p:cNvSpPr/>
+          <p:nvPr/>
+        </p:nvSpPr>
+        <p:spPr>
+          <a:xfrm>
+            <a:off x="457200" y="2496312"/>
+            <a:ext cx="82296" cy="960120"/>
+          </a:xfrm>
+          <a:prstGeom prst="rect">
+            <a:avLst/>
+          </a:prstGeom>
+          <a:solidFill>
+            <a:srgbClr val="196B24"/>
+          </a:solidFill>
+          <a:ln>
+            <a:noFill/>
+          </a:ln>
+        </p:spPr>
+        <p:style>
+          <a:lnRef idx="1">
+            <a:schemeClr val="accent1"/>
+          </a:lnRef>
+          <a:fillRef idx="3">
+            <a:schemeClr val="accent1"/>
+          </a:fillRef>
+          <a:effectRef idx="2">
+            <a:schemeClr val="accent1"/>
+          </a:effectRef>
+          <a:fontRef idx="minor">
+            <a:schemeClr val="lt1"/>
+          </a:fontRef>
+        </p:style>
+        <p:txBody>
+          <a:bodyPr rtlCol="0" anchor="ctr"/>
+          <a:lstStyle/>
+          <a:p>
+            <a:pPr algn="ctr"/>
+          </a:p>
+        </p:txBody>
+      </p:sp>
+      <p:sp>
+        <p:nvSpPr>
+          <p:cNvPr id="7" name="TextBox 6"/>
+          <p:cNvSpPr txBox="1"/>
+          <p:nvPr/>
+        </p:nvSpPr>
+        <p:spPr>
+          <a:xfrm>
+            <a:off x="658368" y="2496312"/>
+            <a:ext cx="7955279" cy="960120"/>
+          </a:xfrm>
+          <a:prstGeom prst="rect">
+            <a:avLst/>
+          </a:prstGeom>
+          <a:noFill/>
+        </p:spPr>
+        <p:txBody>
+          <a:bodyPr wrap="square" anchor="ctr">
+            <a:spAutoFit/>
+          </a:bodyPr>
+          <a:lstStyle/>
+          <a:p>
+            <a:r>
+              <a:rPr sz="1350" b="1">
+                <a:solidFill>
+                  <a:srgbClr val="000000"/>
+                </a:solidFill>
+                <a:latin typeface="Avenir Next LT Pro Demi"/>
+              </a:rPr>
+              <a:t>Gallery expansion  —  </a:t>
+            </a:r>
+            <a:r>
+              <a:rPr sz="1250" b="0">
+                <a:solidFill>
+                  <a:srgbClr val="000000"/>
+                </a:solidFill>
+                <a:latin typeface="Avenir Next LT Pro"/>
+              </a:rPr>
+              <a:t>Every major U.S./Canada market — RH's ~$5–6B opportunity.</a:t>
+            </a:r>
+          </a:p>
+        </p:txBody>
+      </p:sp>
+      <p:sp>
+        <p:nvSpPr>
+          <p:cNvPr id="8" name="Rectangle 7"/>
+          <p:cNvSpPr/>
+          <p:nvPr/>
+        </p:nvSpPr>
+        <p:spPr>
+          <a:xfrm>
+            <a:off x="457200" y="3621024"/>
+            <a:ext cx="82296" cy="960120"/>
+          </a:xfrm>
+          <a:prstGeom prst="rect">
+            <a:avLst/>
+          </a:prstGeom>
+          <a:solidFill>
+            <a:srgbClr val="E97132"/>
+          </a:solidFill>
+          <a:ln>
+            <a:noFill/>
+          </a:ln>
+        </p:spPr>
+        <p:style>
+          <a:lnRef idx="1">
+            <a:schemeClr val="accent1"/>
+          </a:lnRef>
+          <a:fillRef idx="3">
+            <a:schemeClr val="accent1"/>
+          </a:fillRef>
+          <a:effectRef idx="2">
+            <a:schemeClr val="accent1"/>
+          </a:effectRef>
+          <a:fontRef idx="minor">
+            <a:schemeClr val="lt1"/>
+          </a:fontRef>
+        </p:style>
+        <p:txBody>
+          <a:bodyPr rtlCol="0" anchor="ctr"/>
+          <a:lstStyle/>
+          <a:p>
+            <a:pPr algn="ctr"/>
+          </a:p>
+        </p:txBody>
+      </p:sp>
+      <p:sp>
+        <p:nvSpPr>
+          <p:cNvPr id="9" name="TextBox 8"/>
+          <p:cNvSpPr txBox="1"/>
+          <p:nvPr/>
+        </p:nvSpPr>
+        <p:spPr>
+          <a:xfrm>
+            <a:off x="658368" y="3621024"/>
+            <a:ext cx="7955279" cy="960120"/>
+          </a:xfrm>
+          <a:prstGeom prst="rect">
+            <a:avLst/>
+          </a:prstGeom>
+          <a:noFill/>
+        </p:spPr>
+        <p:txBody>
+          <a:bodyPr wrap="square" anchor="ctr">
+            <a:spAutoFit/>
+          </a:bodyPr>
+          <a:lstStyle/>
+          <a:p>
+            <a:r>
+              <a:rPr sz="1350" b="1">
+                <a:solidFill>
+                  <a:srgbClr val="000000"/>
+                </a:solidFill>
+                <a:latin typeface="Avenir Next LT Pro Demi"/>
+              </a:rPr>
+              <a:t>Move upmarket  —  </a:t>
+            </a:r>
+            <a:r>
+              <a:rPr sz="1250" b="0">
+                <a:solidFill>
+                  <a:srgbClr val="000000"/>
+                </a:solidFill>
+                <a:latin typeface="Avenir Next LT Pro"/>
+              </a:rPr>
+              <a:t>Estates targets the rate-immune cash buyer.</a:t>
+            </a:r>
+          </a:p>
+        </p:txBody>
+      </p:sp>
+      <p:sp>
+        <p:nvSpPr>
+          <p:cNvPr id="10" name="Rectangle 9"/>
+          <p:cNvSpPr/>
+          <p:nvPr/>
+        </p:nvSpPr>
+        <p:spPr>
+          <a:xfrm>
+            <a:off x="457200" y="4745736"/>
+            <a:ext cx="82296" cy="960120"/>
+          </a:xfrm>
+          <a:prstGeom prst="rect">
+            <a:avLst/>
+          </a:prstGeom>
+          <a:solidFill>
+            <a:srgbClr val="9A7B44"/>
+          </a:solidFill>
+          <a:ln>
+            <a:noFill/>
+          </a:ln>
+        </p:spPr>
+        <p:style>
+          <a:lnRef idx="1">
+            <a:schemeClr val="accent1"/>
+          </a:lnRef>
+          <a:fillRef idx="3">
+            <a:schemeClr val="accent1"/>
+          </a:fillRef>
+          <a:effectRef idx="2">
+            <a:schemeClr val="accent1"/>
+          </a:effectRef>
+          <a:fontRef idx="minor">
+            <a:schemeClr val="lt1"/>
+          </a:fontRef>
+        </p:style>
+        <p:txBody>
+          <a:bodyPr rtlCol="0" anchor="ctr"/>
+          <a:lstStyle/>
+          <a:p>
+            <a:pPr algn="ctr"/>
+          </a:p>
+        </p:txBody>
+      </p:sp>
+      <p:sp>
+        <p:nvSpPr>
+          <p:cNvPr id="11" name="TextBox 10"/>
+          <p:cNvSpPr txBox="1"/>
+          <p:nvPr/>
+        </p:nvSpPr>
+        <p:spPr>
+          <a:xfrm>
+            <a:off x="658368" y="4745736"/>
+            <a:ext cx="7955279" cy="960120"/>
+          </a:xfrm>
+          <a:prstGeom prst="rect">
+            <a:avLst/>
+          </a:prstGeom>
+          <a:noFill/>
+        </p:spPr>
+        <p:txBody>
+          <a:bodyPr wrap="square" anchor="ctr">
+            <a:spAutoFit/>
+          </a:bodyPr>
+          <a:lstStyle/>
+          <a:p>
+            <a:r>
+              <a:rPr sz="1350" b="1">
+                <a:solidFill>
+                  <a:srgbClr val="000000"/>
+                </a:solidFill>
+                <a:latin typeface="Avenir Next LT Pro Demi"/>
+              </a:rPr>
+              <a:t>Global + platform  —  </a:t>
+            </a:r>
+            <a:r>
+              <a:rPr sz="1250" b="0">
+                <a:solidFill>
+                  <a:srgbClr val="000000"/>
+                </a:solidFill>
+                <a:latin typeface="Avenir Next LT Pro"/>
+              </a:rPr>
+              <a:t>RH England, Guesthouses, hospitality &amp; F&amp;B.</a:t>
+            </a:r>
+          </a:p>
+        </p:txBody>
+      </p:sp>
+      <p:sp>
+        <p:nvSpPr>
+          <p:cNvPr id="12" name="TextBox 11"/>
+          <p:cNvSpPr txBox="1"/>
+          <p:nvPr/>
+        </p:nvSpPr>
+        <p:spPr>
+          <a:xfrm>
+            <a:off x="457200" y="6172200"/>
+            <a:ext cx="8229600" cy="274320"/>
+          </a:xfrm>
+          <a:prstGeom prst="rect">
+            <a:avLst/>
+          </a:prstGeom>
+          <a:noFill/>
+        </p:spPr>
+        <p:txBody>
+          <a:bodyPr wrap="none">
+            <a:spAutoFit/>
+          </a:bodyPr>
+          <a:lstStyle/>
+          <a:p>
+            <a:r>
+              <a:rPr sz="750" b="0" i="1">
+                <a:solidFill>
+                  <a:srgbClr val="707070"/>
+                </a:solidFill>
+                <a:latin typeface="Avenir Next LT Pro"/>
+              </a:rPr>
+              <a:t>Source: RH FY2025 Form 10-K</a:t>
             </a:r>
           </a:p>
         </p:txBody>
       </p:sp>
     </p:spTree>
-    <p:extLst>
-      <p:ext uri="{BB962C8B-B14F-4D97-AF65-F5344CB8AC3E}">
-        <p14:creationId xmlns:p14="http://schemas.microsoft.com/office/powerpoint/2010/main" val="1202939706"/>
-      </p:ext>
-    </p:extLst>
   </p:cSld>
   <p:clrMapOvr>
     <a:masterClrMapping/>
   </p:clrMapOvr>
-  <mc:AlternateContent xmlns:mc="http://schemas.openxmlformats.org/markup-compatibility/2006" xmlns:p14="http://schemas.microsoft.com/office/powerpoint/2010/main">
-    <mc:Choice Requires="p14">
-      <p:transition spd="med" p14:dur="700">
-        <p:fade/>
-      </p:transition>
-    </mc:Choice>
-    <mc:Fallback xmlns="">
-      <p:transition spd="med">
-        <p:fade/>
-      </p:transition>
-    </mc:Fallback>
-  </mc:AlternateContent>
 </p:sld>
 </file>
 

--- a/RH_Stock_Pitch_updated.pptx
+++ b/RH_Stock_Pitch_updated.pptx
@@ -20,6 +20,7 @@
     <p:sldId id="481" r:id="rId9"/>
     <p:sldId id="514" r:id="rId27"/>
     <p:sldId id="515" r:id="rId28"/>
+    <p:sldId id="520" r:id="rId33"/>
     <p:sldId id="517" r:id="rId30"/>
     <p:sldId id="516" r:id="rId29"/>
     <p:sldId id="508" r:id="rId10"/>
@@ -11802,6 +11803,496 @@
 </p:sld>
 </file>
 
+<file path=ppt/slides/slide19.xml><?xml version="1.0" encoding="utf-8"?>
+<p:sld xmlns:a="http://schemas.openxmlformats.org/drawingml/2006/main" xmlns:p="http://schemas.openxmlformats.org/presentationml/2006/main" xmlns:r="http://schemas.openxmlformats.org/officeDocument/2006/relationships">
+  <p:cSld>
+    <p:spTree>
+      <p:nvGrpSpPr>
+        <p:cNvPr id="1" name=""/>
+        <p:cNvGrpSpPr/>
+        <p:nvPr/>
+      </p:nvGrpSpPr>
+      <p:grpSpPr/>
+      <p:sp>
+        <p:nvSpPr>
+          <p:cNvPr id="2" name="TextBox 1"/>
+          <p:cNvSpPr txBox="1"/>
+          <p:nvPr/>
+        </p:nvSpPr>
+        <p:spPr>
+          <a:xfrm>
+            <a:off x="457200" y="365760"/>
+            <a:ext cx="8229600" cy="548640"/>
+          </a:xfrm>
+          <a:prstGeom prst="rect">
+            <a:avLst/>
+          </a:prstGeom>
+          <a:noFill/>
+        </p:spPr>
+        <p:txBody>
+          <a:bodyPr wrap="square">
+            <a:spAutoFit/>
+          </a:bodyPr>
+          <a:lstStyle/>
+          <a:p>
+            <a:r>
+              <a:rPr sz="2000">
+                <a:solidFill>
+                  <a:srgbClr val="000000"/>
+                </a:solidFill>
+                <a:latin typeface="Avenir Next LT Pro Demi"/>
+              </a:rPr>
+              <a:t>Recent Developments — Strategy in Action (and What to Watch)</a:t>
+            </a:r>
+          </a:p>
+        </p:txBody>
+      </p:sp>
+      <p:sp>
+        <p:nvSpPr>
+          <p:cNvPr id="3" name="Rectangle 2"/>
+          <p:cNvSpPr/>
+          <p:nvPr/>
+        </p:nvSpPr>
+        <p:spPr>
+          <a:xfrm>
+            <a:off x="457200" y="960120"/>
+            <a:ext cx="8229600" cy="25603"/>
+          </a:xfrm>
+          <a:prstGeom prst="rect">
+            <a:avLst/>
+          </a:prstGeom>
+          <a:solidFill>
+            <a:srgbClr val="9A7B44"/>
+          </a:solidFill>
+          <a:ln>
+            <a:noFill/>
+          </a:ln>
+        </p:spPr>
+        <p:style>
+          <a:lnRef idx="1">
+            <a:schemeClr val="accent1"/>
+          </a:lnRef>
+          <a:fillRef idx="3">
+            <a:schemeClr val="accent1"/>
+          </a:fillRef>
+          <a:effectRef idx="2">
+            <a:schemeClr val="accent1"/>
+          </a:effectRef>
+          <a:fontRef idx="minor">
+            <a:schemeClr val="lt1"/>
+          </a:fontRef>
+        </p:style>
+        <p:txBody>
+          <a:bodyPr rtlCol="0" anchor="ctr"/>
+          <a:lstStyle/>
+          <a:p>
+            <a:pPr algn="ctr"/>
+          </a:p>
+        </p:txBody>
+      </p:sp>
+      <p:sp>
+        <p:nvSpPr>
+          <p:cNvPr id="4" name="Rectangle 3"/>
+          <p:cNvSpPr/>
+          <p:nvPr/>
+        </p:nvSpPr>
+        <p:spPr>
+          <a:xfrm>
+            <a:off x="457200" y="1280160"/>
+            <a:ext cx="82296" cy="1325880"/>
+          </a:xfrm>
+          <a:prstGeom prst="rect">
+            <a:avLst/>
+          </a:prstGeom>
+          <a:solidFill>
+            <a:srgbClr val="9A7B44"/>
+          </a:solidFill>
+          <a:ln>
+            <a:noFill/>
+          </a:ln>
+        </p:spPr>
+        <p:style>
+          <a:lnRef idx="1">
+            <a:schemeClr val="accent1"/>
+          </a:lnRef>
+          <a:fillRef idx="3">
+            <a:schemeClr val="accent1"/>
+          </a:fillRef>
+          <a:effectRef idx="2">
+            <a:schemeClr val="accent1"/>
+          </a:effectRef>
+          <a:fontRef idx="minor">
+            <a:schemeClr val="lt1"/>
+          </a:fontRef>
+        </p:style>
+        <p:txBody>
+          <a:bodyPr rtlCol="0" anchor="ctr"/>
+          <a:lstStyle/>
+          <a:p>
+            <a:pPr algn="ctr"/>
+          </a:p>
+        </p:txBody>
+      </p:sp>
+      <p:sp>
+        <p:nvSpPr>
+          <p:cNvPr id="5" name="TextBox 4"/>
+          <p:cNvSpPr txBox="1"/>
+          <p:nvPr/>
+        </p:nvSpPr>
+        <p:spPr>
+          <a:xfrm>
+            <a:off x="658368" y="1280160"/>
+            <a:ext cx="8001000" cy="1325880"/>
+          </a:xfrm>
+          <a:prstGeom prst="rect">
+            <a:avLst/>
+          </a:prstGeom>
+          <a:noFill/>
+        </p:spPr>
+        <p:txBody>
+          <a:bodyPr wrap="square" anchor="ctr">
+            <a:spAutoFit/>
+          </a:bodyPr>
+          <a:lstStyle/>
+          <a:p>
+            <a:r>
+              <a:rPr sz="1350" b="1">
+                <a:solidFill>
+                  <a:srgbClr val="000000"/>
+                </a:solidFill>
+                <a:latin typeface="Avenir Next LT Pro Demi"/>
+              </a:rPr>
+              <a:t>RH Estates — unveiled</a:t>
+            </a:r>
+          </a:p>
+          <a:p>
+            <a:pPr>
+              <a:spcBef>
+                <a:spcPts val="300"/>
+              </a:spcBef>
+            </a:pPr>
+            <a:r>
+              <a:rPr sz="1100">
+                <a:solidFill>
+                  <a:srgbClr val="000000"/>
+                </a:solidFill>
+                <a:latin typeface="Avenir Next LT Pro"/>
+              </a:rPr>
+              <a:t>Acquired legendary ateliers — Michael Taylor, Dennis &amp; Leen, Dmitriy &amp; Co., Formations.</a:t>
+            </a:r>
+          </a:p>
+          <a:p>
+            <a:pPr>
+              <a:spcBef>
+                <a:spcPts val="200"/>
+              </a:spcBef>
+            </a:pPr>
+            <a:r>
+              <a:rPr sz="1050" i="1">
+                <a:solidFill>
+                  <a:srgbClr val="9A7B44"/>
+                </a:solidFill>
+                <a:latin typeface="Avenir Next LT Pro"/>
+              </a:rPr>
+              <a:t>Watch: Owned exclusivity rivals can't copy — a real moat. Commercially unproven; first read Q2 FY2026.</a:t>
+            </a:r>
+          </a:p>
+        </p:txBody>
+      </p:sp>
+      <p:sp>
+        <p:nvSpPr>
+          <p:cNvPr id="6" name="Rectangle 5"/>
+          <p:cNvSpPr/>
+          <p:nvPr/>
+        </p:nvSpPr>
+        <p:spPr>
+          <a:xfrm>
+            <a:off x="457200" y="2743200"/>
+            <a:ext cx="82296" cy="1325880"/>
+          </a:xfrm>
+          <a:prstGeom prst="rect">
+            <a:avLst/>
+          </a:prstGeom>
+          <a:solidFill>
+            <a:srgbClr val="9A7B44"/>
+          </a:solidFill>
+          <a:ln>
+            <a:noFill/>
+          </a:ln>
+        </p:spPr>
+        <p:style>
+          <a:lnRef idx="1">
+            <a:schemeClr val="accent1"/>
+          </a:lnRef>
+          <a:fillRef idx="3">
+            <a:schemeClr val="accent1"/>
+          </a:fillRef>
+          <a:effectRef idx="2">
+            <a:schemeClr val="accent1"/>
+          </a:effectRef>
+          <a:fontRef idx="minor">
+            <a:schemeClr val="lt1"/>
+          </a:fontRef>
+        </p:style>
+        <p:txBody>
+          <a:bodyPr rtlCol="0" anchor="ctr"/>
+          <a:lstStyle/>
+          <a:p>
+            <a:pPr algn="ctr"/>
+          </a:p>
+        </p:txBody>
+      </p:sp>
+      <p:sp>
+        <p:nvSpPr>
+          <p:cNvPr id="7" name="TextBox 6"/>
+          <p:cNvSpPr txBox="1"/>
+          <p:nvPr/>
+        </p:nvSpPr>
+        <p:spPr>
+          <a:xfrm>
+            <a:off x="658368" y="2743200"/>
+            <a:ext cx="8001000" cy="1325880"/>
+          </a:xfrm>
+          <a:prstGeom prst="rect">
+            <a:avLst/>
+          </a:prstGeom>
+          <a:noFill/>
+        </p:spPr>
+        <p:txBody>
+          <a:bodyPr wrap="square" anchor="ctr">
+            <a:spAutoFit/>
+          </a:bodyPr>
+          <a:lstStyle/>
+          <a:p>
+            <a:r>
+              <a:rPr sz="1350" b="1">
+                <a:solidFill>
+                  <a:srgbClr val="000000"/>
+                </a:solidFill>
+                <a:latin typeface="Avenir Next LT Pro Demi"/>
+              </a:rPr>
+              <a:t>Mercedes-AMG F1 partnership</a:t>
+            </a:r>
+          </a:p>
+          <a:p>
+            <a:pPr>
+              <a:spcBef>
+                <a:spcPts val="300"/>
+              </a:spcBef>
+            </a:pPr>
+            <a:r>
+              <a:rPr sz="1100">
+                <a:solidFill>
+                  <a:srgbClr val="000000"/>
+                </a:solidFill>
+                <a:latin typeface="Avenir Next LT Pro"/>
+              </a:rPr>
+              <a:t>RH to design the team's global hospitality (Abu Dhabi, Miami, Monaco, Silverstone) from late 2026.</a:t>
+            </a:r>
+          </a:p>
+          <a:p>
+            <a:pPr>
+              <a:spcBef>
+                <a:spcPts val="200"/>
+              </a:spcBef>
+            </a:pPr>
+            <a:r>
+              <a:rPr sz="1050" i="1">
+                <a:solidFill>
+                  <a:srgbClr val="9A7B44"/>
+                </a:solidFill>
+                <a:latin typeface="Avenir Next LT Pro"/>
+              </a:rPr>
+              <a:t>Watch: Elite brand halo, on-strategy — but immaterial to near-term financials.</a:t>
+            </a:r>
+          </a:p>
+        </p:txBody>
+      </p:sp>
+      <p:sp>
+        <p:nvSpPr>
+          <p:cNvPr id="8" name="Rectangle 7"/>
+          <p:cNvSpPr/>
+          <p:nvPr/>
+        </p:nvSpPr>
+        <p:spPr>
+          <a:xfrm>
+            <a:off x="457200" y="4206240"/>
+            <a:ext cx="82296" cy="1325880"/>
+          </a:xfrm>
+          <a:prstGeom prst="rect">
+            <a:avLst/>
+          </a:prstGeom>
+          <a:solidFill>
+            <a:srgbClr val="9A7B44"/>
+          </a:solidFill>
+          <a:ln>
+            <a:noFill/>
+          </a:ln>
+        </p:spPr>
+        <p:style>
+          <a:lnRef idx="1">
+            <a:schemeClr val="accent1"/>
+          </a:lnRef>
+          <a:fillRef idx="3">
+            <a:schemeClr val="accent1"/>
+          </a:fillRef>
+          <a:effectRef idx="2">
+            <a:schemeClr val="accent1"/>
+          </a:effectRef>
+          <a:fontRef idx="minor">
+            <a:schemeClr val="lt1"/>
+          </a:fontRef>
+        </p:style>
+        <p:txBody>
+          <a:bodyPr rtlCol="0" anchor="ctr"/>
+          <a:lstStyle/>
+          <a:p>
+            <a:pPr algn="ctr"/>
+          </a:p>
+        </p:txBody>
+      </p:sp>
+      <p:sp>
+        <p:nvSpPr>
+          <p:cNvPr id="9" name="TextBox 8"/>
+          <p:cNvSpPr txBox="1"/>
+          <p:nvPr/>
+        </p:nvSpPr>
+        <p:spPr>
+          <a:xfrm>
+            <a:off x="658368" y="4206240"/>
+            <a:ext cx="8001000" cy="1325880"/>
+          </a:xfrm>
+          <a:prstGeom prst="rect">
+            <a:avLst/>
+          </a:prstGeom>
+          <a:noFill/>
+        </p:spPr>
+        <p:txBody>
+          <a:bodyPr wrap="square" anchor="ctr">
+            <a:spAutoFit/>
+          </a:bodyPr>
+          <a:lstStyle/>
+          <a:p>
+            <a:r>
+              <a:rPr sz="1350" b="1">
+                <a:solidFill>
+                  <a:srgbClr val="000000"/>
+                </a:solidFill>
+                <a:latin typeface="Avenir Next LT Pro Demi"/>
+              </a:rPr>
+              <a:t>RH London — Mayfair flagship</a:t>
+            </a:r>
+          </a:p>
+          <a:p>
+            <a:pPr>
+              <a:spcBef>
+                <a:spcPts val="300"/>
+              </a:spcBef>
+            </a:pPr>
+            <a:r>
+              <a:rPr sz="1100">
+                <a:solidFill>
+                  <a:srgbClr val="000000"/>
+                </a:solidFill>
+                <a:latin typeface="Avenir Next LT Pro"/>
+              </a:rPr>
+              <a:t>Five-level gallery in London's luxury core (New Bond St / Savile Row).</a:t>
+            </a:r>
+          </a:p>
+          <a:p>
+            <a:pPr>
+              <a:spcBef>
+                <a:spcPts val="200"/>
+              </a:spcBef>
+            </a:pPr>
+            <a:r>
+              <a:rPr sz="1050" i="1">
+                <a:solidFill>
+                  <a:srgbClr val="9A7B44"/>
+                </a:solidFill>
+                <a:latin typeface="Avenir Next LT Pro"/>
+              </a:rPr>
+              <a:t>Watch: Doubles down on Europe — capital-intensive and unproven. Watch productivity vs. margin drag.</a:t>
+            </a:r>
+          </a:p>
+        </p:txBody>
+      </p:sp>
+      <p:sp>
+        <p:nvSpPr>
+          <p:cNvPr id="10" name="TextBox 9"/>
+          <p:cNvSpPr txBox="1"/>
+          <p:nvPr/>
+        </p:nvSpPr>
+        <p:spPr>
+          <a:xfrm>
+            <a:off x="457200" y="5532120"/>
+            <a:ext cx="8229600" cy="457200"/>
+          </a:xfrm>
+          <a:prstGeom prst="rect">
+            <a:avLst/>
+          </a:prstGeom>
+          <a:noFill/>
+        </p:spPr>
+        <p:txBody>
+          <a:bodyPr wrap="square">
+            <a:spAutoFit/>
+          </a:bodyPr>
+          <a:lstStyle/>
+          <a:p>
+            <a:r>
+              <a:rPr sz="1100" b="1">
+                <a:solidFill>
+                  <a:srgbClr val="000000"/>
+                </a:solidFill>
+                <a:latin typeface="Avenir Next LT Pro Demi"/>
+              </a:rPr>
+              <a:t>Expanding on all fronts — differentiated (Estates) and brand-elevating (F1, Mayfair) — but unproven and/or capital-intensive during a levered stretch. Watch items, not yet catalysts.</a:t>
+            </a:r>
+          </a:p>
+        </p:txBody>
+      </p:sp>
+      <p:sp>
+        <p:nvSpPr>
+          <p:cNvPr id="11" name="TextBox 10"/>
+          <p:cNvSpPr txBox="1"/>
+          <p:nvPr/>
+        </p:nvSpPr>
+        <p:spPr>
+          <a:xfrm>
+            <a:off x="457200" y="6172200"/>
+            <a:ext cx="8229600" cy="274320"/>
+          </a:xfrm>
+          <a:prstGeom prst="rect">
+            <a:avLst/>
+          </a:prstGeom>
+          <a:noFill/>
+        </p:spPr>
+        <p:txBody>
+          <a:bodyPr wrap="none">
+            <a:spAutoFit/>
+          </a:bodyPr>
+          <a:lstStyle/>
+          <a:p>
+            <a:r>
+              <a:rPr sz="750" i="1">
+                <a:solidFill>
+                  <a:srgbClr val="707070"/>
+                </a:solidFill>
+                <a:latin typeface="Avenir Next LT Pro"/>
+              </a:rPr>
+              <a:t>Sources: RH company announcements (Business Wire), 2026.</a:t>
+            </a:r>
+          </a:p>
+        </p:txBody>
+      </p:sp>
+    </p:spTree>
+  </p:cSld>
+  <p:clrMapOvr>
+    <a:masterClrMapping/>
+  </p:clrMapOvr>
+</p:sld>
+</file>
+
 <file path=ppt/slides/slide2.xml><?xml version="1.0" encoding="utf-8"?>
 <p:sld xmlns:a="http://schemas.openxmlformats.org/drawingml/2006/main" xmlns:r="http://schemas.openxmlformats.org/officeDocument/2006/relationships" xmlns:p="http://schemas.openxmlformats.org/presentationml/2006/main">
   <p:cSld>

--- a/RH_Stock_Pitch_updated.pptx
+++ b/RH_Stock_Pitch_updated.pptx
@@ -5002,6 +5002,9 @@
           <a:prstGeom prst="rect">
             <a:avLst/>
           </a:prstGeom>
+          <a:ln>
+            <a:solidFill/>
+          </a:ln>
         </p:spPr>
         <p:txBody>
           <a:bodyPr wrap="square">
@@ -5065,6 +5068,9 @@
             <a:off x="158338" y="4735007"/>
             <a:ext cx="8839200" cy="533400"/>
           </a:xfrm>
+          <a:ln>
+            <a:solidFill/>
+          </a:ln>
         </p:spPr>
         <p:txBody>
           <a:bodyPr>
@@ -5100,7 +5106,7 @@
           </a:prstGeom>
           <a:noFill/>
           <a:ln w="6350">
-            <a:noFill/>
+            <a:solidFill/>
           </a:ln>
           <a:effectLst/>
         </p:spPr>
@@ -5169,6 +5175,9 @@
           <a:prstGeom prst="rect">
             <a:avLst/>
           </a:prstGeom>
+          <a:ln>
+            <a:solidFill/>
+          </a:ln>
         </p:spPr>
       </p:pic>
     </p:spTree>
@@ -5221,6 +5230,9 @@
             <a:avLst/>
           </a:prstGeom>
           <a:noFill/>
+          <a:ln>
+            <a:solidFill/>
+          </a:ln>
         </p:spPr>
         <p:txBody>
           <a:bodyPr wrap="square">
@@ -5229,13 +5241,13 @@
           <a:lstStyle/>
           <a:p>
             <a:r>
-              <a:rPr sz="2200" b="0">
+              <a:rPr sz="2000">
                 <a:solidFill>
                   <a:srgbClr val="000000"/>
                 </a:solidFill>
                 <a:latin typeface="Avenir Next LT Pro Demi"/>
               </a:rPr>
-              <a:t>The Operator — Gary Friedman</a:t>
+              <a:t>Recent Developments — Strategy in Action (and What to Watch)</a:t>
             </a:r>
           </a:p>
         </p:txBody>
@@ -5255,10 +5267,10 @@
             <a:avLst/>
           </a:prstGeom>
           <a:solidFill>
-            <a:srgbClr val="9A7B44"/>
+            <a:srgbClr val="000000"/>
           </a:solidFill>
           <a:ln>
-            <a:noFill/>
+            <a:solidFill/>
           </a:ln>
         </p:spPr>
         <p:style>
@@ -5291,17 +5303,17 @@
         </p:nvSpPr>
         <p:spPr>
           <a:xfrm>
-            <a:off x="457200" y="1371600"/>
-            <a:ext cx="82296" cy="1051560"/>
+            <a:off x="457200" y="1280160"/>
+            <a:ext cx="82296" cy="1325880"/>
           </a:xfrm>
           <a:prstGeom prst="rect">
             <a:avLst/>
           </a:prstGeom>
           <a:solidFill>
-            <a:srgbClr val="9A7B44"/>
+            <a:srgbClr val="000000"/>
           </a:solidFill>
           <a:ln>
-            <a:noFill/>
+            <a:solidFill/>
           </a:ln>
         </p:spPr>
         <p:style>
@@ -5334,13 +5346,16 @@
         </p:nvSpPr>
         <p:spPr>
           <a:xfrm>
-            <a:off x="658368" y="1371600"/>
-            <a:ext cx="1965960" cy="1051560"/>
+            <a:off x="658368" y="1280160"/>
+            <a:ext cx="8001000" cy="1325880"/>
           </a:xfrm>
           <a:prstGeom prst="rect">
             <a:avLst/>
           </a:prstGeom>
           <a:noFill/>
+          <a:ln>
+            <a:solidFill/>
+          </a:ln>
         </p:spPr>
         <p:txBody>
           <a:bodyPr wrap="square" anchor="ctr">
@@ -5349,70 +5364,68 @@
           <a:lstStyle/>
           <a:p>
             <a:r>
-              <a:rPr sz="1250" b="1">
+              <a:rPr sz="1350" b="1">
                 <a:solidFill>
                   <a:srgbClr val="000000"/>
                 </a:solidFill>
                 <a:latin typeface="Avenir Next LT Pro Demi"/>
               </a:rPr>
-              <a:t>Role</a:t>
-            </a:r>
-          </a:p>
-        </p:txBody>
-      </p:sp>
-      <p:sp>
-        <p:nvSpPr>
-          <p:cNvPr id="6" name="TextBox 5"/>
-          <p:cNvSpPr txBox="1"/>
-          <p:nvPr/>
-        </p:nvSpPr>
-        <p:spPr>
-          <a:xfrm>
-            <a:off x="2697480" y="1371600"/>
-            <a:ext cx="5989320" cy="1051560"/>
-          </a:xfrm>
-          <a:prstGeom prst="rect">
-            <a:avLst/>
-          </a:prstGeom>
-          <a:noFill/>
-        </p:spPr>
-        <p:txBody>
-          <a:bodyPr wrap="square" anchor="ctr">
-            <a:spAutoFit/>
-          </a:bodyPr>
-          <a:lstStyle/>
-          <a:p>
-            <a:r>
-              <a:rPr sz="1200" b="0">
+              <a:t>RH Estates — unveiled</a:t>
+            </a:r>
+          </a:p>
+          <a:p>
+            <a:pPr>
+              <a:spcBef>
+                <a:spcPts val="300"/>
+              </a:spcBef>
+            </a:pPr>
+            <a:r>
+              <a:rPr sz="1100">
                 <a:solidFill>
                   <a:srgbClr val="000000"/>
                 </a:solidFill>
                 <a:latin typeface="Avenir Next LT Pro"/>
               </a:rPr>
-              <a:t>Chairman &amp; CEO and the brand's creative force (10-K key-man).</a:t>
-            </a:r>
-          </a:p>
-        </p:txBody>
-      </p:sp>
-      <p:sp>
-        <p:nvSpPr>
-          <p:cNvPr id="7" name="Rectangle 6"/>
+              <a:t>Acquired legendary ateliers — Michael Taylor, Dennis &amp; Leen, Dmitriy &amp; Co., Formations.</a:t>
+            </a:r>
+          </a:p>
+          <a:p>
+            <a:pPr>
+              <a:spcBef>
+                <a:spcPts val="200"/>
+              </a:spcBef>
+            </a:pPr>
+            <a:r>
+              <a:rPr sz="1050" i="1">
+                <a:solidFill>
+                  <a:srgbClr val="000000"/>
+                </a:solidFill>
+                <a:latin typeface="Avenir Next LT Pro"/>
+              </a:rPr>
+              <a:t>Watch: Owned exclusivity rivals can't copy — a real moat. Commercially unproven; first read Q2 FY2026.</a:t>
+            </a:r>
+          </a:p>
+        </p:txBody>
+      </p:sp>
+      <p:sp>
+        <p:nvSpPr>
+          <p:cNvPr id="6" name="Rectangle 5"/>
           <p:cNvSpPr/>
           <p:nvPr/>
         </p:nvSpPr>
         <p:spPr>
           <a:xfrm>
-            <a:off x="457200" y="2514600"/>
-            <a:ext cx="82296" cy="1051560"/>
+            <a:off x="457200" y="2743200"/>
+            <a:ext cx="82296" cy="1325880"/>
           </a:xfrm>
           <a:prstGeom prst="rect">
             <a:avLst/>
           </a:prstGeom>
           <a:solidFill>
-            <a:srgbClr val="196B24"/>
+            <a:srgbClr val="000000"/>
           </a:solidFill>
           <a:ln>
-            <a:noFill/>
+            <a:solidFill/>
           </a:ln>
         </p:spPr>
         <p:style>
@@ -5439,19 +5452,22 @@
       </p:sp>
       <p:sp>
         <p:nvSpPr>
-          <p:cNvPr id="8" name="TextBox 7"/>
+          <p:cNvPr id="7" name="TextBox 6"/>
           <p:cNvSpPr txBox="1"/>
           <p:nvPr/>
         </p:nvSpPr>
         <p:spPr>
           <a:xfrm>
-            <a:off x="658368" y="2514600"/>
-            <a:ext cx="1965960" cy="1051560"/>
+            <a:off x="658368" y="2743200"/>
+            <a:ext cx="8001000" cy="1325880"/>
           </a:xfrm>
           <a:prstGeom prst="rect">
             <a:avLst/>
           </a:prstGeom>
           <a:noFill/>
+          <a:ln>
+            <a:solidFill/>
+          </a:ln>
         </p:spPr>
         <p:txBody>
           <a:bodyPr wrap="square" anchor="ctr">
@@ -5460,70 +5476,68 @@
           <a:lstStyle/>
           <a:p>
             <a:r>
-              <a:rPr sz="1250" b="1">
+              <a:rPr sz="1350" b="1">
                 <a:solidFill>
                   <a:srgbClr val="000000"/>
                 </a:solidFill>
                 <a:latin typeface="Avenir Next LT Pro Demi"/>
               </a:rPr>
-              <a:t>Track record</a:t>
-            </a:r>
-          </a:p>
-        </p:txBody>
-      </p:sp>
-      <p:sp>
-        <p:nvSpPr>
-          <p:cNvPr id="9" name="TextBox 8"/>
-          <p:cNvSpPr txBox="1"/>
-          <p:nvPr/>
-        </p:nvSpPr>
-        <p:spPr>
-          <a:xfrm>
-            <a:off x="2697480" y="2514600"/>
-            <a:ext cx="5989320" cy="1051560"/>
-          </a:xfrm>
-          <a:prstGeom prst="rect">
-            <a:avLst/>
-          </a:prstGeom>
-          <a:noFill/>
-        </p:spPr>
-        <p:txBody>
-          <a:bodyPr wrap="square" anchor="ctr">
-            <a:spAutoFit/>
-          </a:bodyPr>
-          <a:lstStyle/>
-          <a:p>
-            <a:r>
-              <a:rPr sz="1200" b="0">
+              <a:t>Mercedes-AMG F1 partnership</a:t>
+            </a:r>
+          </a:p>
+          <a:p>
+            <a:pPr>
+              <a:spcBef>
+                <a:spcPts val="300"/>
+              </a:spcBef>
+            </a:pPr>
+            <a:r>
+              <a:rPr sz="1100">
                 <a:solidFill>
                   <a:srgbClr val="000000"/>
                 </a:solidFill>
                 <a:latin typeface="Avenir Next LT Pro"/>
               </a:rPr>
-              <a:t>Grew Pottery Barn $50M → $1B+; joined RH in 2001 near bankruptcy.</a:t>
-            </a:r>
-          </a:p>
-        </p:txBody>
-      </p:sp>
-      <p:sp>
-        <p:nvSpPr>
-          <p:cNvPr id="10" name="Rectangle 9"/>
+              <a:t>RH to design the team's global hospitality (Abu Dhabi, Miami, Monaco, Silverstone) from late 2026.</a:t>
+            </a:r>
+          </a:p>
+          <a:p>
+            <a:pPr>
+              <a:spcBef>
+                <a:spcPts val="200"/>
+              </a:spcBef>
+            </a:pPr>
+            <a:r>
+              <a:rPr sz="1050" i="1">
+                <a:solidFill>
+                  <a:srgbClr val="000000"/>
+                </a:solidFill>
+                <a:latin typeface="Avenir Next LT Pro"/>
+              </a:rPr>
+              <a:t>Watch: Elite brand halo, on-strategy — but immaterial to near-term financials.</a:t>
+            </a:r>
+          </a:p>
+        </p:txBody>
+      </p:sp>
+      <p:sp>
+        <p:nvSpPr>
+          <p:cNvPr id="8" name="Rectangle 7"/>
           <p:cNvSpPr/>
           <p:nvPr/>
         </p:nvSpPr>
         <p:spPr>
           <a:xfrm>
-            <a:off x="457200" y="3657600"/>
-            <a:ext cx="82296" cy="1051560"/>
+            <a:off x="457200" y="4206240"/>
+            <a:ext cx="82296" cy="1325880"/>
           </a:xfrm>
           <a:prstGeom prst="rect">
             <a:avLst/>
           </a:prstGeom>
           <a:solidFill>
-            <a:srgbClr val="E97132"/>
+            <a:srgbClr val="000000"/>
           </a:solidFill>
           <a:ln>
-            <a:noFill/>
+            <a:solidFill/>
           </a:ln>
         </p:spPr>
         <p:style>
@@ -5550,19 +5564,22 @@
       </p:sp>
       <p:sp>
         <p:nvSpPr>
-          <p:cNvPr id="11" name="TextBox 10"/>
+          <p:cNvPr id="9" name="TextBox 8"/>
           <p:cNvSpPr txBox="1"/>
           <p:nvPr/>
         </p:nvSpPr>
         <p:spPr>
           <a:xfrm>
-            <a:off x="658368" y="3657600"/>
-            <a:ext cx="1965960" cy="1051560"/>
+            <a:off x="658368" y="4206240"/>
+            <a:ext cx="8001000" cy="1325880"/>
           </a:xfrm>
           <a:prstGeom prst="rect">
             <a:avLst/>
           </a:prstGeom>
           <a:noFill/>
+          <a:ln>
+            <a:solidFill/>
+          </a:ln>
         </p:spPr>
         <p:txBody>
           <a:bodyPr wrap="square" anchor="ctr">
@@ -5571,177 +5588,104 @@
           <a:lstStyle/>
           <a:p>
             <a:r>
-              <a:rPr sz="1250" b="1">
+              <a:rPr sz="1350" b="1">
                 <a:solidFill>
                   <a:srgbClr val="000000"/>
                 </a:solidFill>
                 <a:latin typeface="Avenir Next LT Pro Demi"/>
               </a:rPr>
-              <a:t>Skin in the game</a:t>
-            </a:r>
-          </a:p>
-        </p:txBody>
-      </p:sp>
-      <p:sp>
-        <p:nvSpPr>
-          <p:cNvPr id="12" name="TextBox 11"/>
+              <a:t>RH London — Mayfair flagship</a:t>
+            </a:r>
+          </a:p>
+          <a:p>
+            <a:pPr>
+              <a:spcBef>
+                <a:spcPts val="300"/>
+              </a:spcBef>
+            </a:pPr>
+            <a:r>
+              <a:rPr sz="1100">
+                <a:solidFill>
+                  <a:srgbClr val="000000"/>
+                </a:solidFill>
+                <a:latin typeface="Avenir Next LT Pro"/>
+              </a:rPr>
+              <a:t>Five-level gallery in London's luxury core (New Bond St / Savile Row).</a:t>
+            </a:r>
+          </a:p>
+          <a:p>
+            <a:pPr>
+              <a:spcBef>
+                <a:spcPts val="200"/>
+              </a:spcBef>
+            </a:pPr>
+            <a:r>
+              <a:rPr sz="1050" i="1">
+                <a:solidFill>
+                  <a:srgbClr val="000000"/>
+                </a:solidFill>
+                <a:latin typeface="Avenir Next LT Pro"/>
+              </a:rPr>
+              <a:t>Watch: Doubles down on Europe — capital-intensive and unproven. Watch productivity vs. margin drag.</a:t>
+            </a:r>
+          </a:p>
+        </p:txBody>
+      </p:sp>
+      <p:sp>
+        <p:nvSpPr>
+          <p:cNvPr id="10" name="TextBox 9"/>
           <p:cNvSpPr txBox="1"/>
           <p:nvPr/>
         </p:nvSpPr>
         <p:spPr>
           <a:xfrm>
-            <a:off x="2697480" y="3657600"/>
-            <a:ext cx="5989320" cy="1051560"/>
+            <a:off x="457200" y="5532120"/>
+            <a:ext cx="8229600" cy="457200"/>
           </a:xfrm>
           <a:prstGeom prst="rect">
             <a:avLst/>
           </a:prstGeom>
           <a:noFill/>
-        </p:spPr>
-        <p:txBody>
-          <a:bodyPr wrap="square" anchor="ctr">
+          <a:ln>
+            <a:solidFill/>
+          </a:ln>
+        </p:spPr>
+        <p:txBody>
+          <a:bodyPr wrap="square">
             <a:spAutoFit/>
           </a:bodyPr>
           <a:lstStyle/>
           <a:p>
             <a:r>
-              <a:rPr sz="1200" b="0">
+              <a:rPr sz="1100" b="1">
                 <a:solidFill>
                   <a:srgbClr val="000000"/>
                 </a:solidFill>
-                <a:latin typeface="Avenir Next LT Pro"/>
-              </a:rPr>
-              <a:t>Owns ~18% outright (~25% incl. options); bought ~$10M at ~$216 in June 2024.</a:t>
-            </a:r>
-          </a:p>
-        </p:txBody>
-      </p:sp>
-      <p:sp>
-        <p:nvSpPr>
-          <p:cNvPr id="13" name="Rectangle 12"/>
-          <p:cNvSpPr/>
-          <p:nvPr/>
-        </p:nvSpPr>
-        <p:spPr>
-          <a:xfrm>
-            <a:off x="457200" y="4800600"/>
-            <a:ext cx="82296" cy="1051560"/>
-          </a:xfrm>
-          <a:prstGeom prst="rect">
-            <a:avLst/>
-          </a:prstGeom>
-          <a:solidFill>
-            <a:srgbClr val="B03030"/>
-          </a:solidFill>
-          <a:ln>
-            <a:noFill/>
-          </a:ln>
-        </p:spPr>
-        <p:style>
-          <a:lnRef idx="1">
-            <a:schemeClr val="accent1"/>
-          </a:lnRef>
-          <a:fillRef idx="3">
-            <a:schemeClr val="accent1"/>
-          </a:fillRef>
-          <a:effectRef idx="2">
-            <a:schemeClr val="accent1"/>
-          </a:effectRef>
-          <a:fontRef idx="minor">
-            <a:schemeClr val="lt1"/>
-          </a:fontRef>
-        </p:style>
-        <p:txBody>
-          <a:bodyPr rtlCol="0" anchor="ctr"/>
-          <a:lstStyle/>
-          <a:p>
-            <a:pPr algn="ctr"/>
-          </a:p>
-        </p:txBody>
-      </p:sp>
-      <p:sp>
-        <p:nvSpPr>
-          <p:cNvPr id="14" name="TextBox 13"/>
+                <a:latin typeface="Avenir Next LT Pro Demi"/>
+              </a:rPr>
+              <a:t>Expanding on all fronts — differentiated (Estates) and brand-elevating (F1, Mayfair) — but unproven and/or capital-intensive during a levered stretch. Watch items, not yet catalysts.</a:t>
+            </a:r>
+          </a:p>
+        </p:txBody>
+      </p:sp>
+      <p:sp>
+        <p:nvSpPr>
+          <p:cNvPr id="11" name="TextBox 10"/>
           <p:cNvSpPr txBox="1"/>
           <p:nvPr/>
         </p:nvSpPr>
         <p:spPr>
           <a:xfrm>
-            <a:off x="658368" y="4800600"/>
-            <a:ext cx="1965960" cy="1051560"/>
+            <a:off x="457200" y="6172200"/>
+            <a:ext cx="8229600" cy="274320"/>
           </a:xfrm>
           <a:prstGeom prst="rect">
             <a:avLst/>
           </a:prstGeom>
           <a:noFill/>
-        </p:spPr>
-        <p:txBody>
-          <a:bodyPr wrap="square" anchor="ctr">
-            <a:spAutoFit/>
-          </a:bodyPr>
-          <a:lstStyle/>
-          <a:p>
-            <a:r>
-              <a:rPr sz="1250" b="1">
-                <a:solidFill>
-                  <a:srgbClr val="000000"/>
-                </a:solidFill>
-                <a:latin typeface="Avenir Next LT Pro Demi"/>
-              </a:rPr>
-              <a:t>The double edge</a:t>
-            </a:r>
-          </a:p>
-        </p:txBody>
-      </p:sp>
-      <p:sp>
-        <p:nvSpPr>
-          <p:cNvPr id="15" name="TextBox 14"/>
-          <p:cNvSpPr txBox="1"/>
-          <p:nvPr/>
-        </p:nvSpPr>
-        <p:spPr>
-          <a:xfrm>
-            <a:off x="2697480" y="4800600"/>
-            <a:ext cx="5989320" cy="1051560"/>
-          </a:xfrm>
-          <a:prstGeom prst="rect">
-            <a:avLst/>
-          </a:prstGeom>
-          <a:noFill/>
-        </p:spPr>
-        <p:txBody>
-          <a:bodyPr wrap="square" anchor="ctr">
-            <a:spAutoFit/>
-          </a:bodyPr>
-          <a:lstStyle/>
-          <a:p>
-            <a:r>
-              <a:rPr sz="1200" b="0">
-                <a:solidFill>
-                  <a:srgbClr val="000000"/>
-                </a:solidFill>
-                <a:latin typeface="Avenir Next LT Pro"/>
-              </a:rPr>
-              <a:t>Bold allocator — same conviction drove the buybacks and Estates.</a:t>
-            </a:r>
-          </a:p>
-        </p:txBody>
-      </p:sp>
-      <p:sp>
-        <p:nvSpPr>
-          <p:cNvPr id="16" name="TextBox 15"/>
-          <p:cNvSpPr txBox="1"/>
-          <p:nvPr/>
-        </p:nvSpPr>
-        <p:spPr>
-          <a:xfrm>
-            <a:off x="457200" y="6172200"/>
-            <a:ext cx="8229600" cy="274320"/>
-          </a:xfrm>
-          <a:prstGeom prst="rect">
-            <a:avLst/>
-          </a:prstGeom>
-          <a:noFill/>
+          <a:ln>
+            <a:solidFill/>
+          </a:ln>
         </p:spPr>
         <p:txBody>
           <a:bodyPr wrap="none">
@@ -5750,13 +5694,13 @@
           <a:lstStyle/>
           <a:p>
             <a:r>
-              <a:rPr sz="750" b="0" i="1">
+              <a:rPr sz="750" i="1">
                 <a:solidFill>
                   <a:srgbClr val="707070"/>
                 </a:solidFill>
                 <a:latin typeface="Avenir Next LT Pro"/>
               </a:rPr>
-              <a:t>Source: RH FY2025 10-K; RH IR &amp; SEC Form 4 (Jun 26, 2024); company bios</a:t>
+              <a:t>Sources: RH company announcements (Business Wire), 2026.</a:t>
             </a:r>
           </a:p>
         </p:txBody>
@@ -5794,6 +5738,9 @@
             <a:avLst/>
           </a:prstGeom>
           <a:noFill/>
+          <a:ln>
+            <a:solidFill/>
+          </a:ln>
         </p:spPr>
         <p:txBody>
           <a:bodyPr wrap="square">
@@ -5808,7 +5755,7 @@
                 </a:solidFill>
                 <a:latin typeface="Avenir Next LT Pro Demi"/>
               </a:rPr>
-              <a:t>Is It Working?</a:t>
+              <a:t>The Operator — Gary Friedman</a:t>
             </a:r>
           </a:p>
         </p:txBody>
@@ -5828,10 +5775,10 @@
             <a:avLst/>
           </a:prstGeom>
           <a:solidFill>
-            <a:srgbClr val="9A7B44"/>
+            <a:srgbClr val="000000"/>
           </a:solidFill>
           <a:ln>
-            <a:noFill/>
+            <a:solidFill/>
           </a:ln>
         </p:spPr>
         <p:style>
@@ -5864,17 +5811,17 @@
         </p:nvSpPr>
         <p:spPr>
           <a:xfrm>
-            <a:off x="457200" y="1234440"/>
-            <a:ext cx="3977639" cy="384048"/>
+            <a:off x="457200" y="1371600"/>
+            <a:ext cx="82296" cy="1051560"/>
           </a:xfrm>
           <a:prstGeom prst="rect">
             <a:avLst/>
           </a:prstGeom>
           <a:solidFill>
-            <a:srgbClr val="196B24"/>
+            <a:srgbClr val="000000"/>
           </a:solidFill>
           <a:ln>
-            <a:noFill/>
+            <a:solidFill/>
           </a:ln>
         </p:spPr>
         <p:style>
@@ -5892,41 +5839,106 @@
           </a:fontRef>
         </p:style>
         <p:txBody>
-          <a:bodyPr rtlCol="0" anchor="ctr" lIns="137160"/>
+          <a:bodyPr rtlCol="0" anchor="ctr"/>
           <a:lstStyle/>
           <a:p>
             <a:pPr algn="ctr"/>
+          </a:p>
+        </p:txBody>
+      </p:sp>
+      <p:sp>
+        <p:nvSpPr>
+          <p:cNvPr id="5" name="TextBox 4"/>
+          <p:cNvSpPr txBox="1"/>
+          <p:nvPr/>
+        </p:nvSpPr>
+        <p:spPr>
+          <a:xfrm>
+            <a:off x="658368" y="1371600"/>
+            <a:ext cx="1965960" cy="1051560"/>
+          </a:xfrm>
+          <a:prstGeom prst="rect">
+            <a:avLst/>
+          </a:prstGeom>
+          <a:noFill/>
+          <a:ln>
+            <a:solidFill/>
+          </a:ln>
+        </p:spPr>
+        <p:txBody>
+          <a:bodyPr wrap="square" anchor="ctr">
+            <a:spAutoFit/>
+          </a:bodyPr>
+          <a:lstStyle/>
+          <a:p>
             <a:r>
               <a:rPr sz="1250" b="1">
                 <a:solidFill>
-                  <a:srgbClr val="FFFFFF"/>
+                  <a:srgbClr val="000000"/>
                 </a:solidFill>
                 <a:latin typeface="Avenir Next LT Pro Demi"/>
               </a:rPr>
-              <a:t>WORKING</a:t>
-            </a:r>
-          </a:p>
-        </p:txBody>
-      </p:sp>
-      <p:sp>
-        <p:nvSpPr>
-          <p:cNvPr id="5" name="Rectangle 4"/>
+              <a:t>Role</a:t>
+            </a:r>
+          </a:p>
+        </p:txBody>
+      </p:sp>
+      <p:sp>
+        <p:nvSpPr>
+          <p:cNvPr id="6" name="TextBox 5"/>
+          <p:cNvSpPr txBox="1"/>
+          <p:nvPr/>
+        </p:nvSpPr>
+        <p:spPr>
+          <a:xfrm>
+            <a:off x="2697480" y="1371600"/>
+            <a:ext cx="5989320" cy="1051560"/>
+          </a:xfrm>
+          <a:prstGeom prst="rect">
+            <a:avLst/>
+          </a:prstGeom>
+          <a:noFill/>
+          <a:ln>
+            <a:solidFill/>
+          </a:ln>
+        </p:spPr>
+        <p:txBody>
+          <a:bodyPr wrap="square" anchor="ctr">
+            <a:spAutoFit/>
+          </a:bodyPr>
+          <a:lstStyle/>
+          <a:p>
+            <a:r>
+              <a:rPr sz="1200" b="0">
+                <a:solidFill>
+                  <a:srgbClr val="000000"/>
+                </a:solidFill>
+                <a:latin typeface="Avenir Next LT Pro"/>
+              </a:rPr>
+              <a:t>Chairman &amp; CEO and the brand's creative force (10-K key-man).</a:t>
+            </a:r>
+          </a:p>
+        </p:txBody>
+      </p:sp>
+      <p:sp>
+        <p:nvSpPr>
+          <p:cNvPr id="7" name="Rectangle 6"/>
           <p:cNvSpPr/>
           <p:nvPr/>
         </p:nvSpPr>
         <p:spPr>
           <a:xfrm>
-            <a:off x="4709160" y="1234440"/>
-            <a:ext cx="3977639" cy="384048"/>
+            <a:off x="457200" y="2514600"/>
+            <a:ext cx="82296" cy="1051560"/>
           </a:xfrm>
           <a:prstGeom prst="rect">
             <a:avLst/>
           </a:prstGeom>
           <a:solidFill>
-            <a:srgbClr val="B03030"/>
+            <a:srgbClr val="196B24"/>
           </a:solidFill>
           <a:ln>
-            <a:noFill/>
+            <a:solidFill/>
           </a:ln>
         </p:spPr>
         <p:style>
@@ -5944,329 +5956,339 @@
           </a:fontRef>
         </p:style>
         <p:txBody>
-          <a:bodyPr rtlCol="0" anchor="ctr" lIns="137160"/>
+          <a:bodyPr rtlCol="0" anchor="ctr"/>
           <a:lstStyle/>
           <a:p>
             <a:pPr algn="ctr"/>
-            <a:r>
-              <a:rPr sz="1250" b="1">
-                <a:solidFill>
-                  <a:srgbClr val="FFFFFF"/>
-                </a:solidFill>
-                <a:latin typeface="Avenir Next LT Pro Demi"/>
-              </a:rPr>
-              <a:t>WATCH</a:t>
-            </a:r>
-          </a:p>
-        </p:txBody>
-      </p:sp>
-      <p:sp>
-        <p:nvSpPr>
-          <p:cNvPr id="6" name="TextBox 5"/>
+          </a:p>
+        </p:txBody>
+      </p:sp>
+      <p:sp>
+        <p:nvSpPr>
+          <p:cNvPr id="8" name="TextBox 7"/>
           <p:cNvSpPr txBox="1"/>
           <p:nvPr/>
         </p:nvSpPr>
         <p:spPr>
           <a:xfrm>
-            <a:off x="457200" y="1828800"/>
-            <a:ext cx="3977639" cy="777240"/>
+            <a:off x="658368" y="2514600"/>
+            <a:ext cx="1965960" cy="1051560"/>
           </a:xfrm>
           <a:prstGeom prst="rect">
             <a:avLst/>
           </a:prstGeom>
           <a:noFill/>
-        </p:spPr>
-        <p:txBody>
-          <a:bodyPr wrap="square">
+          <a:ln>
+            <a:solidFill/>
+          </a:ln>
+        </p:spPr>
+        <p:txBody>
+          <a:bodyPr wrap="square" anchor="ctr">
             <a:spAutoFit/>
           </a:bodyPr>
           <a:lstStyle/>
           <a:p>
             <a:r>
-              <a:rPr sz="1200" b="1">
-                <a:solidFill>
-                  <a:srgbClr val="196B24"/>
+              <a:rPr sz="1250" b="1">
+                <a:solidFill>
+                  <a:srgbClr val="000000"/>
                 </a:solidFill>
                 <a:latin typeface="Avenir Next LT Pro Demi"/>
               </a:rPr>
-              <a:t>✓  </a:t>
-            </a:r>
-            <a:r>
-              <a:rPr sz="1150" b="0">
-                <a:solidFill>
-                  <a:srgbClr val="000000"/>
-                </a:solidFill>
-                <a:latin typeface="Avenir Next LT Pro"/>
-              </a:rPr>
-              <a:t>FCF inflected to +$252M (from −$214M)</a:t>
-            </a:r>
-          </a:p>
-        </p:txBody>
-      </p:sp>
-      <p:sp>
-        <p:nvSpPr>
-          <p:cNvPr id="7" name="TextBox 6"/>
+              <a:t>Track record</a:t>
+            </a:r>
+          </a:p>
+        </p:txBody>
+      </p:sp>
+      <p:sp>
+        <p:nvSpPr>
+          <p:cNvPr id="9" name="TextBox 8"/>
           <p:cNvSpPr txBox="1"/>
           <p:nvPr/>
         </p:nvSpPr>
         <p:spPr>
           <a:xfrm>
-            <a:off x="457200" y="2651760"/>
-            <a:ext cx="3977639" cy="777240"/>
+            <a:off x="2697480" y="2514600"/>
+            <a:ext cx="5989320" cy="1051560"/>
           </a:xfrm>
           <a:prstGeom prst="rect">
             <a:avLst/>
           </a:prstGeom>
           <a:noFill/>
-        </p:spPr>
-        <p:txBody>
-          <a:bodyPr wrap="square">
+          <a:ln>
+            <a:solidFill/>
+          </a:ln>
+        </p:spPr>
+        <p:txBody>
+          <a:bodyPr wrap="square" anchor="ctr">
             <a:spAutoFit/>
           </a:bodyPr>
           <a:lstStyle/>
           <a:p>
             <a:r>
-              <a:rPr sz="1200" b="1">
-                <a:solidFill>
-                  <a:srgbClr val="196B24"/>
-                </a:solidFill>
-                <a:latin typeface="Avenir Next LT Pro Demi"/>
-              </a:rPr>
-              <a:t>✓  </a:t>
-            </a:r>
-            <a:r>
-              <a:rPr sz="1150" b="0">
+              <a:rPr sz="1200" b="0">
                 <a:solidFill>
                   <a:srgbClr val="000000"/>
                 </a:solidFill>
                 <a:latin typeface="Avenir Next LT Pro"/>
               </a:rPr>
-              <a:t>Inventory normalized $1.02B → $819M</a:t>
-            </a:r>
-          </a:p>
-        </p:txBody>
-      </p:sp>
-      <p:sp>
-        <p:nvSpPr>
-          <p:cNvPr id="8" name="TextBox 7"/>
+              <a:t>Grew Pottery Barn $50M → $1B+; joined RH in 2001 near bankruptcy.</a:t>
+            </a:r>
+          </a:p>
+        </p:txBody>
+      </p:sp>
+      <p:sp>
+        <p:nvSpPr>
+          <p:cNvPr id="10" name="Rectangle 9"/>
+          <p:cNvSpPr/>
+          <p:nvPr/>
+        </p:nvSpPr>
+        <p:spPr>
+          <a:xfrm>
+            <a:off x="457200" y="3657600"/>
+            <a:ext cx="82296" cy="1051560"/>
+          </a:xfrm>
+          <a:prstGeom prst="rect">
+            <a:avLst/>
+          </a:prstGeom>
+          <a:solidFill>
+            <a:srgbClr val="E97132"/>
+          </a:solidFill>
+          <a:ln>
+            <a:solidFill/>
+          </a:ln>
+        </p:spPr>
+        <p:style>
+          <a:lnRef idx="1">
+            <a:schemeClr val="accent1"/>
+          </a:lnRef>
+          <a:fillRef idx="3">
+            <a:schemeClr val="accent1"/>
+          </a:fillRef>
+          <a:effectRef idx="2">
+            <a:schemeClr val="accent1"/>
+          </a:effectRef>
+          <a:fontRef idx="minor">
+            <a:schemeClr val="lt1"/>
+          </a:fontRef>
+        </p:style>
+        <p:txBody>
+          <a:bodyPr rtlCol="0" anchor="ctr"/>
+          <a:lstStyle/>
+          <a:p>
+            <a:pPr algn="ctr"/>
+          </a:p>
+        </p:txBody>
+      </p:sp>
+      <p:sp>
+        <p:nvSpPr>
+          <p:cNvPr id="11" name="TextBox 10"/>
           <p:cNvSpPr txBox="1"/>
           <p:nvPr/>
         </p:nvSpPr>
         <p:spPr>
           <a:xfrm>
-            <a:off x="457200" y="3474720"/>
-            <a:ext cx="3977639" cy="777240"/>
+            <a:off x="658368" y="3657600"/>
+            <a:ext cx="1965960" cy="1051560"/>
           </a:xfrm>
           <a:prstGeom prst="rect">
             <a:avLst/>
           </a:prstGeom>
           <a:noFill/>
-        </p:spPr>
-        <p:txBody>
-          <a:bodyPr wrap="square">
+          <a:ln>
+            <a:solidFill/>
+          </a:ln>
+        </p:spPr>
+        <p:txBody>
+          <a:bodyPr wrap="square" anchor="ctr">
             <a:spAutoFit/>
           </a:bodyPr>
           <a:lstStyle/>
           <a:p>
             <a:r>
-              <a:rPr sz="1200" b="1">
-                <a:solidFill>
-                  <a:srgbClr val="196B24"/>
+              <a:rPr sz="1250" b="1">
+                <a:solidFill>
+                  <a:srgbClr val="000000"/>
                 </a:solidFill>
                 <a:latin typeface="Avenir Next LT Pro Demi"/>
               </a:rPr>
-              <a:t>✓  </a:t>
-            </a:r>
-            <a:r>
-              <a:rPr sz="1150" b="0">
-                <a:solidFill>
-                  <a:srgbClr val="000000"/>
-                </a:solidFill>
-                <a:latin typeface="Avenir Next LT Pro"/>
-              </a:rPr>
-              <a:t>Revenue re-accelerated +8.1% in FY25</a:t>
-            </a:r>
-          </a:p>
-        </p:txBody>
-      </p:sp>
-      <p:sp>
-        <p:nvSpPr>
-          <p:cNvPr id="9" name="TextBox 8"/>
+              <a:t>Skin in the game</a:t>
+            </a:r>
+          </a:p>
+        </p:txBody>
+      </p:sp>
+      <p:sp>
+        <p:nvSpPr>
+          <p:cNvPr id="12" name="TextBox 11"/>
           <p:cNvSpPr txBox="1"/>
           <p:nvPr/>
         </p:nvSpPr>
         <p:spPr>
           <a:xfrm>
-            <a:off x="4709160" y="1828800"/>
-            <a:ext cx="3977639" cy="777240"/>
+            <a:off x="2697480" y="3657600"/>
+            <a:ext cx="5989320" cy="1051560"/>
           </a:xfrm>
           <a:prstGeom prst="rect">
             <a:avLst/>
           </a:prstGeom>
           <a:noFill/>
-        </p:spPr>
-        <p:txBody>
-          <a:bodyPr wrap="square">
+          <a:ln>
+            <a:solidFill/>
+          </a:ln>
+        </p:spPr>
+        <p:txBody>
+          <a:bodyPr wrap="square" anchor="ctr">
             <a:spAutoFit/>
           </a:bodyPr>
           <a:lstStyle/>
           <a:p>
             <a:r>
-              <a:rPr sz="1200" b="1">
-                <a:solidFill>
-                  <a:srgbClr val="B03030"/>
-                </a:solidFill>
-                <a:latin typeface="Avenir Next LT Pro Demi"/>
-              </a:rPr>
-              <a:t>!  </a:t>
-            </a:r>
-            <a:r>
-              <a:rPr sz="1150" b="0">
+              <a:rPr sz="1200" b="0">
                 <a:solidFill>
                   <a:srgbClr val="000000"/>
                 </a:solidFill>
                 <a:latin typeface="Avenir Next LT Pro"/>
               </a:rPr>
-              <a:t>Q1 FY26: revenue −1.7%, net loss −$14M</a:t>
-            </a:r>
-          </a:p>
-        </p:txBody>
-      </p:sp>
-      <p:sp>
-        <p:nvSpPr>
-          <p:cNvPr id="10" name="TextBox 9"/>
+              <a:t>Owns ~18% outright (~25% incl. options); bought ~$10M at ~$216 in June 2024.</a:t>
+            </a:r>
+          </a:p>
+        </p:txBody>
+      </p:sp>
+      <p:sp>
+        <p:nvSpPr>
+          <p:cNvPr id="13" name="Rectangle 12"/>
+          <p:cNvSpPr/>
+          <p:nvPr/>
+        </p:nvSpPr>
+        <p:spPr>
+          <a:xfrm>
+            <a:off x="457200" y="4800600"/>
+            <a:ext cx="82296" cy="1051560"/>
+          </a:xfrm>
+          <a:prstGeom prst="rect">
+            <a:avLst/>
+          </a:prstGeom>
+          <a:solidFill>
+            <a:srgbClr val="B03030"/>
+          </a:solidFill>
+          <a:ln>
+            <a:solidFill/>
+          </a:ln>
+        </p:spPr>
+        <p:style>
+          <a:lnRef idx="1">
+            <a:schemeClr val="accent1"/>
+          </a:lnRef>
+          <a:fillRef idx="3">
+            <a:schemeClr val="accent1"/>
+          </a:fillRef>
+          <a:effectRef idx="2">
+            <a:schemeClr val="accent1"/>
+          </a:effectRef>
+          <a:fontRef idx="minor">
+            <a:schemeClr val="lt1"/>
+          </a:fontRef>
+        </p:style>
+        <p:txBody>
+          <a:bodyPr rtlCol="0" anchor="ctr"/>
+          <a:lstStyle/>
+          <a:p>
+            <a:pPr algn="ctr"/>
+          </a:p>
+        </p:txBody>
+      </p:sp>
+      <p:sp>
+        <p:nvSpPr>
+          <p:cNvPr id="14" name="TextBox 13"/>
           <p:cNvSpPr txBox="1"/>
           <p:nvPr/>
         </p:nvSpPr>
         <p:spPr>
           <a:xfrm>
-            <a:off x="4709160" y="2651760"/>
-            <a:ext cx="3977639" cy="777240"/>
+            <a:off x="658368" y="4800600"/>
+            <a:ext cx="1965960" cy="1051560"/>
           </a:xfrm>
           <a:prstGeom prst="rect">
             <a:avLst/>
           </a:prstGeom>
           <a:noFill/>
-        </p:spPr>
-        <p:txBody>
-          <a:bodyPr wrap="square">
+          <a:ln>
+            <a:solidFill/>
+          </a:ln>
+        </p:spPr>
+        <p:txBody>
+          <a:bodyPr wrap="square" anchor="ctr">
             <a:spAutoFit/>
           </a:bodyPr>
           <a:lstStyle/>
           <a:p>
             <a:r>
-              <a:rPr sz="1200" b="1">
-                <a:solidFill>
-                  <a:srgbClr val="B03030"/>
+              <a:rPr sz="1250" b="1">
+                <a:solidFill>
+                  <a:srgbClr val="000000"/>
                 </a:solidFill>
                 <a:latin typeface="Avenir Next LT Pro Demi"/>
               </a:rPr>
-              <a:t>!  </a:t>
-            </a:r>
-            <a:r>
-              <a:rPr sz="1150" b="0">
-                <a:solidFill>
-                  <a:srgbClr val="000000"/>
-                </a:solidFill>
-                <a:latin typeface="Avenir Next LT Pro"/>
-              </a:rPr>
-              <a:t>~$225M/yr interest keeps coverage thin</a:t>
-            </a:r>
-          </a:p>
-        </p:txBody>
-      </p:sp>
-      <p:sp>
-        <p:nvSpPr>
-          <p:cNvPr id="11" name="TextBox 10"/>
+              <a:t>The double edge</a:t>
+            </a:r>
+          </a:p>
+        </p:txBody>
+      </p:sp>
+      <p:sp>
+        <p:nvSpPr>
+          <p:cNvPr id="15" name="TextBox 14"/>
           <p:cNvSpPr txBox="1"/>
           <p:nvPr/>
         </p:nvSpPr>
         <p:spPr>
           <a:xfrm>
-            <a:off x="4709160" y="3474720"/>
-            <a:ext cx="3977639" cy="777240"/>
+            <a:off x="2697480" y="4800600"/>
+            <a:ext cx="5989320" cy="1051560"/>
           </a:xfrm>
           <a:prstGeom prst="rect">
             <a:avLst/>
           </a:prstGeom>
           <a:noFill/>
-        </p:spPr>
-        <p:txBody>
-          <a:bodyPr wrap="square">
+          <a:ln>
+            <a:solidFill/>
+          </a:ln>
+        </p:spPr>
+        <p:txBody>
+          <a:bodyPr wrap="square" anchor="ctr">
             <a:spAutoFit/>
           </a:bodyPr>
           <a:lstStyle/>
           <a:p>
             <a:r>
-              <a:rPr sz="1200" b="1">
-                <a:solidFill>
-                  <a:srgbClr val="B03030"/>
-                </a:solidFill>
-                <a:latin typeface="Avenir Next LT Pro Demi"/>
-              </a:rPr>
-              <a:t>!  </a:t>
-            </a:r>
-            <a:r>
-              <a:rPr sz="1150" b="0">
+              <a:rPr sz="1200" b="0">
                 <a:solidFill>
                   <a:srgbClr val="000000"/>
                 </a:solidFill>
                 <a:latin typeface="Avenir Next LT Pro"/>
               </a:rPr>
-              <a:t>Guidance is back-half loaded</a:t>
-            </a:r>
-          </a:p>
-        </p:txBody>
-      </p:sp>
-      <p:sp>
-        <p:nvSpPr>
-          <p:cNvPr id="12" name="TextBox 11"/>
+              <a:t>Bold allocator — same conviction drove the buybacks and Estates.</a:t>
+            </a:r>
+          </a:p>
+        </p:txBody>
+      </p:sp>
+      <p:sp>
+        <p:nvSpPr>
+          <p:cNvPr id="16" name="TextBox 15"/>
           <p:cNvSpPr txBox="1"/>
           <p:nvPr/>
         </p:nvSpPr>
         <p:spPr>
           <a:xfrm>
-            <a:off x="457200" y="4663440"/>
-            <a:ext cx="8229600" cy="365760"/>
+            <a:off x="457200" y="6172200"/>
+            <a:ext cx="8229600" cy="274320"/>
           </a:xfrm>
           <a:prstGeom prst="rect">
             <a:avLst/>
           </a:prstGeom>
           <a:noFill/>
-        </p:spPr>
-        <p:txBody>
-          <a:bodyPr wrap="square">
-            <a:spAutoFit/>
-          </a:bodyPr>
-          <a:lstStyle/>
-          <a:p>
-            <a:r>
-              <a:rPr sz="1150" b="1">
-                <a:solidFill>
-                  <a:srgbClr val="000000"/>
-                </a:solidFill>
-                <a:latin typeface="Avenir Next LT Pro Demi"/>
-              </a:rPr>
-              <a:t>Verdict: real but early — the next two quarters are the tell.</a:t>
-            </a:r>
-          </a:p>
-        </p:txBody>
-      </p:sp>
-      <p:sp>
-        <p:nvSpPr>
-          <p:cNvPr id="13" name="TextBox 12"/>
-          <p:cNvSpPr txBox="1"/>
-          <p:nvPr/>
-        </p:nvSpPr>
-        <p:spPr>
-          <a:xfrm>
-            <a:off x="457200" y="6172200"/>
-            <a:ext cx="8229600" cy="274320"/>
-          </a:xfrm>
-          <a:prstGeom prst="rect">
-            <a:avLst/>
-          </a:prstGeom>
-          <a:noFill/>
+          <a:ln>
+            <a:solidFill/>
+          </a:ln>
         </p:spPr>
         <p:txBody>
           <a:bodyPr wrap="none">
@@ -6281,7 +6303,7 @@
                 </a:solidFill>
                 <a:latin typeface="Avenir Next LT Pro"/>
               </a:rPr>
-              <a:t>Source: RH FY2025 10-K; Q1 FY2026 10-Q</a:t>
+              <a:t>Source: RH FY2025 10-K; RH IR &amp; SEC Form 4 (Jun 26, 2024); company bios</a:t>
             </a:r>
           </a:p>
         </p:txBody>
@@ -6295,6 +6317,558 @@
 </file>
 
 <file path=ppt/slides/slide12.xml><?xml version="1.0" encoding="utf-8"?>
+<p:sld xmlns:a="http://schemas.openxmlformats.org/drawingml/2006/main" xmlns:p="http://schemas.openxmlformats.org/presentationml/2006/main" xmlns:r="http://schemas.openxmlformats.org/officeDocument/2006/relationships">
+  <p:cSld>
+    <p:spTree>
+      <p:nvGrpSpPr>
+        <p:cNvPr id="1" name=""/>
+        <p:cNvGrpSpPr/>
+        <p:nvPr/>
+      </p:nvGrpSpPr>
+      <p:grpSpPr/>
+      <p:sp>
+        <p:nvSpPr>
+          <p:cNvPr id="2" name="TextBox 1"/>
+          <p:cNvSpPr txBox="1"/>
+          <p:nvPr/>
+        </p:nvSpPr>
+        <p:spPr>
+          <a:xfrm>
+            <a:off x="457200" y="365760"/>
+            <a:ext cx="8229600" cy="548640"/>
+          </a:xfrm>
+          <a:prstGeom prst="rect">
+            <a:avLst/>
+          </a:prstGeom>
+          <a:noFill/>
+          <a:ln>
+            <a:solidFill/>
+          </a:ln>
+        </p:spPr>
+        <p:txBody>
+          <a:bodyPr wrap="square">
+            <a:spAutoFit/>
+          </a:bodyPr>
+          <a:lstStyle/>
+          <a:p>
+            <a:r>
+              <a:rPr sz="2200" b="0">
+                <a:solidFill>
+                  <a:srgbClr val="000000"/>
+                </a:solidFill>
+                <a:latin typeface="Avenir Next LT Pro Demi"/>
+              </a:rPr>
+              <a:t>Is It Working?</a:t>
+            </a:r>
+          </a:p>
+        </p:txBody>
+      </p:sp>
+      <p:sp>
+        <p:nvSpPr>
+          <p:cNvPr id="3" name="Rectangle 2"/>
+          <p:cNvSpPr/>
+          <p:nvPr/>
+        </p:nvSpPr>
+        <p:spPr>
+          <a:xfrm>
+            <a:off x="457200" y="960120"/>
+            <a:ext cx="8229600" cy="25603"/>
+          </a:xfrm>
+          <a:prstGeom prst="rect">
+            <a:avLst/>
+          </a:prstGeom>
+          <a:solidFill>
+            <a:srgbClr val="000000"/>
+          </a:solidFill>
+          <a:ln>
+            <a:solidFill/>
+          </a:ln>
+        </p:spPr>
+        <p:style>
+          <a:lnRef idx="1">
+            <a:schemeClr val="accent1"/>
+          </a:lnRef>
+          <a:fillRef idx="3">
+            <a:schemeClr val="accent1"/>
+          </a:fillRef>
+          <a:effectRef idx="2">
+            <a:schemeClr val="accent1"/>
+          </a:effectRef>
+          <a:fontRef idx="minor">
+            <a:schemeClr val="lt1"/>
+          </a:fontRef>
+        </p:style>
+        <p:txBody>
+          <a:bodyPr rtlCol="0" anchor="ctr"/>
+          <a:lstStyle/>
+          <a:p>
+            <a:pPr algn="ctr"/>
+          </a:p>
+        </p:txBody>
+      </p:sp>
+      <p:sp>
+        <p:nvSpPr>
+          <p:cNvPr id="4" name="Rectangle 3"/>
+          <p:cNvSpPr/>
+          <p:nvPr/>
+        </p:nvSpPr>
+        <p:spPr>
+          <a:xfrm>
+            <a:off x="457200" y="1234440"/>
+            <a:ext cx="3977639" cy="384048"/>
+          </a:xfrm>
+          <a:prstGeom prst="rect">
+            <a:avLst/>
+          </a:prstGeom>
+          <a:solidFill>
+            <a:srgbClr val="196B24"/>
+          </a:solidFill>
+          <a:ln>
+            <a:solidFill/>
+          </a:ln>
+        </p:spPr>
+        <p:style>
+          <a:lnRef idx="1">
+            <a:schemeClr val="accent1"/>
+          </a:lnRef>
+          <a:fillRef idx="3">
+            <a:schemeClr val="accent1"/>
+          </a:fillRef>
+          <a:effectRef idx="2">
+            <a:schemeClr val="accent1"/>
+          </a:effectRef>
+          <a:fontRef idx="minor">
+            <a:schemeClr val="lt1"/>
+          </a:fontRef>
+        </p:style>
+        <p:txBody>
+          <a:bodyPr rtlCol="0" anchor="ctr" lIns="137160"/>
+          <a:lstStyle/>
+          <a:p>
+            <a:pPr algn="ctr"/>
+            <a:r>
+              <a:rPr sz="1250" b="1">
+                <a:solidFill>
+                  <a:srgbClr val="FFFFFF"/>
+                </a:solidFill>
+                <a:latin typeface="Avenir Next LT Pro Demi"/>
+              </a:rPr>
+              <a:t>WORKING</a:t>
+            </a:r>
+          </a:p>
+        </p:txBody>
+      </p:sp>
+      <p:sp>
+        <p:nvSpPr>
+          <p:cNvPr id="5" name="Rectangle 4"/>
+          <p:cNvSpPr/>
+          <p:nvPr/>
+        </p:nvSpPr>
+        <p:spPr>
+          <a:xfrm>
+            <a:off x="4709160" y="1234440"/>
+            <a:ext cx="3977639" cy="384048"/>
+          </a:xfrm>
+          <a:prstGeom prst="rect">
+            <a:avLst/>
+          </a:prstGeom>
+          <a:solidFill>
+            <a:srgbClr val="B03030"/>
+          </a:solidFill>
+          <a:ln>
+            <a:solidFill/>
+          </a:ln>
+        </p:spPr>
+        <p:style>
+          <a:lnRef idx="1">
+            <a:schemeClr val="accent1"/>
+          </a:lnRef>
+          <a:fillRef idx="3">
+            <a:schemeClr val="accent1"/>
+          </a:fillRef>
+          <a:effectRef idx="2">
+            <a:schemeClr val="accent1"/>
+          </a:effectRef>
+          <a:fontRef idx="minor">
+            <a:schemeClr val="lt1"/>
+          </a:fontRef>
+        </p:style>
+        <p:txBody>
+          <a:bodyPr rtlCol="0" anchor="ctr" lIns="137160"/>
+          <a:lstStyle/>
+          <a:p>
+            <a:pPr algn="ctr"/>
+            <a:r>
+              <a:rPr sz="1250" b="1">
+                <a:solidFill>
+                  <a:srgbClr val="FFFFFF"/>
+                </a:solidFill>
+                <a:latin typeface="Avenir Next LT Pro Demi"/>
+              </a:rPr>
+              <a:t>WATCH</a:t>
+            </a:r>
+          </a:p>
+        </p:txBody>
+      </p:sp>
+      <p:sp>
+        <p:nvSpPr>
+          <p:cNvPr id="6" name="TextBox 5"/>
+          <p:cNvSpPr txBox="1"/>
+          <p:nvPr/>
+        </p:nvSpPr>
+        <p:spPr>
+          <a:xfrm>
+            <a:off x="457200" y="1828800"/>
+            <a:ext cx="3977639" cy="777240"/>
+          </a:xfrm>
+          <a:prstGeom prst="rect">
+            <a:avLst/>
+          </a:prstGeom>
+          <a:noFill/>
+          <a:ln>
+            <a:solidFill/>
+          </a:ln>
+        </p:spPr>
+        <p:txBody>
+          <a:bodyPr wrap="square">
+            <a:spAutoFit/>
+          </a:bodyPr>
+          <a:lstStyle/>
+          <a:p>
+            <a:r>
+              <a:rPr sz="1200" b="1">
+                <a:solidFill>
+                  <a:srgbClr val="196B24"/>
+                </a:solidFill>
+                <a:latin typeface="Avenir Next LT Pro Demi"/>
+              </a:rPr>
+              <a:t>✓  </a:t>
+            </a:r>
+            <a:r>
+              <a:rPr sz="1150" b="0">
+                <a:solidFill>
+                  <a:srgbClr val="000000"/>
+                </a:solidFill>
+                <a:latin typeface="Avenir Next LT Pro"/>
+              </a:rPr>
+              <a:t>FCF inflected to +$252M (from −$214M)</a:t>
+            </a:r>
+          </a:p>
+        </p:txBody>
+      </p:sp>
+      <p:sp>
+        <p:nvSpPr>
+          <p:cNvPr id="7" name="TextBox 6"/>
+          <p:cNvSpPr txBox="1"/>
+          <p:nvPr/>
+        </p:nvSpPr>
+        <p:spPr>
+          <a:xfrm>
+            <a:off x="457200" y="2651760"/>
+            <a:ext cx="3977639" cy="777240"/>
+          </a:xfrm>
+          <a:prstGeom prst="rect">
+            <a:avLst/>
+          </a:prstGeom>
+          <a:noFill/>
+          <a:ln>
+            <a:solidFill/>
+          </a:ln>
+        </p:spPr>
+        <p:txBody>
+          <a:bodyPr wrap="square">
+            <a:spAutoFit/>
+          </a:bodyPr>
+          <a:lstStyle/>
+          <a:p>
+            <a:r>
+              <a:rPr sz="1200" b="1">
+                <a:solidFill>
+                  <a:srgbClr val="196B24"/>
+                </a:solidFill>
+                <a:latin typeface="Avenir Next LT Pro Demi"/>
+              </a:rPr>
+              <a:t>✓  </a:t>
+            </a:r>
+            <a:r>
+              <a:rPr sz="1150" b="0">
+                <a:solidFill>
+                  <a:srgbClr val="000000"/>
+                </a:solidFill>
+                <a:latin typeface="Avenir Next LT Pro"/>
+              </a:rPr>
+              <a:t>Inventory normalized $1.02B → $819M</a:t>
+            </a:r>
+          </a:p>
+        </p:txBody>
+      </p:sp>
+      <p:sp>
+        <p:nvSpPr>
+          <p:cNvPr id="8" name="TextBox 7"/>
+          <p:cNvSpPr txBox="1"/>
+          <p:nvPr/>
+        </p:nvSpPr>
+        <p:spPr>
+          <a:xfrm>
+            <a:off x="457200" y="3474720"/>
+            <a:ext cx="3977639" cy="777240"/>
+          </a:xfrm>
+          <a:prstGeom prst="rect">
+            <a:avLst/>
+          </a:prstGeom>
+          <a:noFill/>
+          <a:ln>
+            <a:solidFill/>
+          </a:ln>
+        </p:spPr>
+        <p:txBody>
+          <a:bodyPr wrap="square">
+            <a:spAutoFit/>
+          </a:bodyPr>
+          <a:lstStyle/>
+          <a:p>
+            <a:r>
+              <a:rPr sz="1200" b="1">
+                <a:solidFill>
+                  <a:srgbClr val="196B24"/>
+                </a:solidFill>
+                <a:latin typeface="Avenir Next LT Pro Demi"/>
+              </a:rPr>
+              <a:t>✓  </a:t>
+            </a:r>
+            <a:r>
+              <a:rPr sz="1150" b="0">
+                <a:solidFill>
+                  <a:srgbClr val="000000"/>
+                </a:solidFill>
+                <a:latin typeface="Avenir Next LT Pro"/>
+              </a:rPr>
+              <a:t>Revenue re-accelerated +8.1% in FY25</a:t>
+            </a:r>
+          </a:p>
+        </p:txBody>
+      </p:sp>
+      <p:sp>
+        <p:nvSpPr>
+          <p:cNvPr id="9" name="TextBox 8"/>
+          <p:cNvSpPr txBox="1"/>
+          <p:nvPr/>
+        </p:nvSpPr>
+        <p:spPr>
+          <a:xfrm>
+            <a:off x="4709160" y="1828800"/>
+            <a:ext cx="3977639" cy="777240"/>
+          </a:xfrm>
+          <a:prstGeom prst="rect">
+            <a:avLst/>
+          </a:prstGeom>
+          <a:noFill/>
+          <a:ln>
+            <a:solidFill/>
+          </a:ln>
+        </p:spPr>
+        <p:txBody>
+          <a:bodyPr wrap="square">
+            <a:spAutoFit/>
+          </a:bodyPr>
+          <a:lstStyle/>
+          <a:p>
+            <a:r>
+              <a:rPr sz="1200" b="1">
+                <a:solidFill>
+                  <a:srgbClr val="B03030"/>
+                </a:solidFill>
+                <a:latin typeface="Avenir Next LT Pro Demi"/>
+              </a:rPr>
+              <a:t>!  </a:t>
+            </a:r>
+            <a:r>
+              <a:rPr sz="1150" b="0">
+                <a:solidFill>
+                  <a:srgbClr val="000000"/>
+                </a:solidFill>
+                <a:latin typeface="Avenir Next LT Pro"/>
+              </a:rPr>
+              <a:t>Q1 FY26: revenue −1.7%, net loss −$14M</a:t>
+            </a:r>
+          </a:p>
+        </p:txBody>
+      </p:sp>
+      <p:sp>
+        <p:nvSpPr>
+          <p:cNvPr id="10" name="TextBox 9"/>
+          <p:cNvSpPr txBox="1"/>
+          <p:nvPr/>
+        </p:nvSpPr>
+        <p:spPr>
+          <a:xfrm>
+            <a:off x="4709160" y="2651760"/>
+            <a:ext cx="3977639" cy="777240"/>
+          </a:xfrm>
+          <a:prstGeom prst="rect">
+            <a:avLst/>
+          </a:prstGeom>
+          <a:noFill/>
+          <a:ln>
+            <a:solidFill/>
+          </a:ln>
+        </p:spPr>
+        <p:txBody>
+          <a:bodyPr wrap="square">
+            <a:spAutoFit/>
+          </a:bodyPr>
+          <a:lstStyle/>
+          <a:p>
+            <a:r>
+              <a:rPr sz="1200" b="1">
+                <a:solidFill>
+                  <a:srgbClr val="B03030"/>
+                </a:solidFill>
+                <a:latin typeface="Avenir Next LT Pro Demi"/>
+              </a:rPr>
+              <a:t>!  </a:t>
+            </a:r>
+            <a:r>
+              <a:rPr sz="1150" b="0">
+                <a:solidFill>
+                  <a:srgbClr val="000000"/>
+                </a:solidFill>
+                <a:latin typeface="Avenir Next LT Pro"/>
+              </a:rPr>
+              <a:t>~$225M/yr interest keeps coverage thin</a:t>
+            </a:r>
+          </a:p>
+        </p:txBody>
+      </p:sp>
+      <p:sp>
+        <p:nvSpPr>
+          <p:cNvPr id="11" name="TextBox 10"/>
+          <p:cNvSpPr txBox="1"/>
+          <p:nvPr/>
+        </p:nvSpPr>
+        <p:spPr>
+          <a:xfrm>
+            <a:off x="4709160" y="3474720"/>
+            <a:ext cx="3977639" cy="777240"/>
+          </a:xfrm>
+          <a:prstGeom prst="rect">
+            <a:avLst/>
+          </a:prstGeom>
+          <a:noFill/>
+          <a:ln>
+            <a:solidFill/>
+          </a:ln>
+        </p:spPr>
+        <p:txBody>
+          <a:bodyPr wrap="square">
+            <a:spAutoFit/>
+          </a:bodyPr>
+          <a:lstStyle/>
+          <a:p>
+            <a:r>
+              <a:rPr sz="1200" b="1">
+                <a:solidFill>
+                  <a:srgbClr val="B03030"/>
+                </a:solidFill>
+                <a:latin typeface="Avenir Next LT Pro Demi"/>
+              </a:rPr>
+              <a:t>!  </a:t>
+            </a:r>
+            <a:r>
+              <a:rPr sz="1150" b="0">
+                <a:solidFill>
+                  <a:srgbClr val="000000"/>
+                </a:solidFill>
+                <a:latin typeface="Avenir Next LT Pro"/>
+              </a:rPr>
+              <a:t>Guidance is back-half loaded</a:t>
+            </a:r>
+          </a:p>
+        </p:txBody>
+      </p:sp>
+      <p:sp>
+        <p:nvSpPr>
+          <p:cNvPr id="12" name="TextBox 11"/>
+          <p:cNvSpPr txBox="1"/>
+          <p:nvPr/>
+        </p:nvSpPr>
+        <p:spPr>
+          <a:xfrm>
+            <a:off x="457200" y="4663440"/>
+            <a:ext cx="8229600" cy="365760"/>
+          </a:xfrm>
+          <a:prstGeom prst="rect">
+            <a:avLst/>
+          </a:prstGeom>
+          <a:noFill/>
+          <a:ln>
+            <a:solidFill/>
+          </a:ln>
+        </p:spPr>
+        <p:txBody>
+          <a:bodyPr wrap="square">
+            <a:spAutoFit/>
+          </a:bodyPr>
+          <a:lstStyle/>
+          <a:p>
+            <a:r>
+              <a:rPr sz="1150" b="1">
+                <a:solidFill>
+                  <a:srgbClr val="000000"/>
+                </a:solidFill>
+                <a:latin typeface="Avenir Next LT Pro Demi"/>
+              </a:rPr>
+              <a:t>Verdict: real but early — the next two quarters are the tell.</a:t>
+            </a:r>
+          </a:p>
+        </p:txBody>
+      </p:sp>
+      <p:sp>
+        <p:nvSpPr>
+          <p:cNvPr id="13" name="TextBox 12"/>
+          <p:cNvSpPr txBox="1"/>
+          <p:nvPr/>
+        </p:nvSpPr>
+        <p:spPr>
+          <a:xfrm>
+            <a:off x="457200" y="6172200"/>
+            <a:ext cx="8229600" cy="274320"/>
+          </a:xfrm>
+          <a:prstGeom prst="rect">
+            <a:avLst/>
+          </a:prstGeom>
+          <a:noFill/>
+          <a:ln>
+            <a:solidFill/>
+          </a:ln>
+        </p:spPr>
+        <p:txBody>
+          <a:bodyPr wrap="none">
+            <a:spAutoFit/>
+          </a:bodyPr>
+          <a:lstStyle/>
+          <a:p>
+            <a:r>
+              <a:rPr sz="750" b="0" i="1">
+                <a:solidFill>
+                  <a:srgbClr val="707070"/>
+                </a:solidFill>
+                <a:latin typeface="Avenir Next LT Pro"/>
+              </a:rPr>
+              <a:t>Source: RH FY2025 10-K; Q1 FY2026 10-Q</a:t>
+            </a:r>
+          </a:p>
+        </p:txBody>
+      </p:sp>
+    </p:spTree>
+  </p:cSld>
+  <p:clrMapOvr>
+    <a:masterClrMapping/>
+  </p:clrMapOvr>
+</p:sld>
+</file>
+
+<file path=ppt/slides/slide13.xml><?xml version="1.0" encoding="utf-8"?>
 <p:sld xmlns:a="http://schemas.openxmlformats.org/drawingml/2006/main" xmlns:r="http://schemas.openxmlformats.org/officeDocument/2006/relationships" xmlns:p="http://schemas.openxmlformats.org/presentationml/2006/main">
   <p:cSld>
     <p:spTree>
@@ -6326,6 +6900,9 @@
             <a:avLst/>
           </a:prstGeom>
           <a:noFill/>
+          <a:ln>
+            <a:solidFill/>
+          </a:ln>
         </p:spPr>
         <p:txBody>
           <a:bodyPr wrap="square">
@@ -6358,6 +6935,9 @@
             <a:avLst/>
           </a:prstGeom>
           <a:noFill/>
+          <a:ln>
+            <a:solidFill/>
+          </a:ln>
         </p:spPr>
         <p:txBody>
           <a:bodyPr wrap="none">
@@ -7787,6 +8367,9 @@
             <a:avLst/>
           </a:prstGeom>
           <a:noFill/>
+          <a:ln>
+            <a:solidFill/>
+          </a:ln>
         </p:spPr>
         <p:txBody>
           <a:bodyPr wrap="square">
@@ -7797,7 +8380,7 @@
             <a:r>
               <a:rPr sz="1000" b="1" i="0" dirty="0">
                 <a:solidFill>
-                  <a:srgbClr val="9A7B44"/>
+                  <a:srgbClr val="000000"/>
                 </a:solidFill>
                 <a:latin typeface="Avenir Next LT Pro"/>
               </a:rPr>
@@ -7814,7 +8397,7 @@
 </p:sld>
 </file>
 
-<file path=ppt/slides/slide13.xml><?xml version="1.0" encoding="utf-8"?>
+<file path=ppt/slides/slide14.xml><?xml version="1.0" encoding="utf-8"?>
 <p:sld xmlns:a="http://schemas.openxmlformats.org/drawingml/2006/main" xmlns:r="http://schemas.openxmlformats.org/officeDocument/2006/relationships" xmlns:p="http://schemas.openxmlformats.org/presentationml/2006/main">
   <p:cSld>
     <p:spTree>
@@ -7847,7 +8430,11 @@
             <p:ph type="title"/>
           </p:nvPr>
         </p:nvSpPr>
-        <p:spPr/>
+        <p:spPr>
+          <a:ln>
+            <a:solidFill/>
+          </a:ln>
+        </p:spPr>
         <p:txBody>
           <a:bodyPr/>
           <a:lstStyle/>
@@ -7886,7 +8473,7 @@
 </p:sld>
 </file>
 
-<file path=ppt/slides/slide14.xml><?xml version="1.0" encoding="utf-8"?>
+<file path=ppt/slides/slide15.xml><?xml version="1.0" encoding="utf-8"?>
 <p:sld xmlns:a="http://schemas.openxmlformats.org/drawingml/2006/main" xmlns:r="http://schemas.openxmlformats.org/officeDocument/2006/relationships" xmlns:p="http://schemas.openxmlformats.org/presentationml/2006/main">
   <p:cSld>
     <p:spTree>
@@ -7918,6 +8505,9 @@
             <a:avLst/>
           </a:prstGeom>
           <a:noFill/>
+          <a:ln>
+            <a:solidFill/>
+          </a:ln>
         </p:spPr>
         <p:txBody>
           <a:bodyPr wrap="square">
@@ -7950,6 +8540,9 @@
             <a:avLst/>
           </a:prstGeom>
           <a:noFill/>
+          <a:ln>
+            <a:solidFill/>
+          </a:ln>
         </p:spPr>
         <p:txBody>
           <a:bodyPr wrap="none">
@@ -8092,7 +8685,7 @@
             <a:r>
               <a:rPr sz="1700" b="1" i="0">
                 <a:solidFill>
-                  <a:srgbClr val="9A7B44"/>
+                  <a:srgbClr val="000000"/>
                 </a:solidFill>
                 <a:latin typeface="Avenir Next LT Pro Demi"/>
               </a:rPr>
@@ -8981,6 +9574,9 @@
             <a:avLst/>
           </a:prstGeom>
           <a:noFill/>
+          <a:ln>
+            <a:solidFill/>
+          </a:ln>
         </p:spPr>
         <p:txBody>
           <a:bodyPr wrap="none">
@@ -8991,7 +9587,7 @@
             <a:r>
               <a:rPr sz="1300" b="1" i="0">
                 <a:solidFill>
-                  <a:srgbClr val="9A7B44"/>
+                  <a:srgbClr val="000000"/>
                 </a:solidFill>
                 <a:latin typeface="Avenir Next LT Pro Demi"/>
               </a:rPr>
@@ -9008,7 +9604,7 @@
 </p:sld>
 </file>
 
-<file path=ppt/slides/slide15.xml><?xml version="1.0" encoding="utf-8"?>
+<file path=ppt/slides/slide16.xml><?xml version="1.0" encoding="utf-8"?>
 <p:sld xmlns:a="http://schemas.openxmlformats.org/drawingml/2006/main" xmlns:r="http://schemas.openxmlformats.org/officeDocument/2006/relationships" xmlns:p="http://schemas.openxmlformats.org/presentationml/2006/main">
   <p:cSld>
     <p:spTree>
@@ -9040,6 +9636,9 @@
             <a:avLst/>
           </a:prstGeom>
           <a:noFill/>
+          <a:ln>
+            <a:solidFill/>
+          </a:ln>
         </p:spPr>
         <p:txBody>
           <a:bodyPr wrap="square">
@@ -9072,6 +9671,9 @@
             <a:avLst/>
           </a:prstGeom>
           <a:noFill/>
+          <a:ln>
+            <a:solidFill/>
+          </a:ln>
         </p:spPr>
         <p:txBody>
           <a:bodyPr wrap="none">
@@ -9857,6 +10459,9 @@
             <a:avLst/>
           </a:prstGeom>
           <a:noFill/>
+          <a:ln>
+            <a:solidFill/>
+          </a:ln>
         </p:spPr>
         <p:txBody>
           <a:bodyPr wrap="square">
@@ -9900,6 +10505,9 @@
             <a:avLst/>
           </a:prstGeom>
           <a:noFill/>
+          <a:ln>
+            <a:solidFill/>
+          </a:ln>
         </p:spPr>
         <p:txBody>
           <a:bodyPr wrap="square">
@@ -9927,7 +10535,7 @@
 </p:sld>
 </file>
 
-<file path=ppt/slides/slide16.xml><?xml version="1.0" encoding="utf-8"?>
+<file path=ppt/slides/slide17.xml><?xml version="1.0" encoding="utf-8"?>
 <p:sld xmlns:a="http://schemas.openxmlformats.org/drawingml/2006/main" xmlns:r="http://schemas.openxmlformats.org/officeDocument/2006/relationships" xmlns:p="http://schemas.openxmlformats.org/presentationml/2006/main">
   <p:cSld>
     <p:spTree>
@@ -9960,7 +10568,11 @@
             <p:ph type="title"/>
           </p:nvPr>
         </p:nvSpPr>
-        <p:spPr/>
+        <p:spPr>
+          <a:ln>
+            <a:solidFill/>
+          </a:ln>
+        </p:spPr>
         <p:txBody>
           <a:bodyPr/>
           <a:lstStyle/>
@@ -9999,7 +10611,7 @@
 </p:sld>
 </file>
 
-<file path=ppt/slides/slide17.xml><?xml version="1.0" encoding="utf-8"?>
+<file path=ppt/slides/slide18.xml><?xml version="1.0" encoding="utf-8"?>
 <p:sld xmlns:a="http://schemas.openxmlformats.org/drawingml/2006/main" xmlns:r="http://schemas.openxmlformats.org/officeDocument/2006/relationships" xmlns:p="http://schemas.openxmlformats.org/presentationml/2006/main">
   <p:cSld>
     <p:spTree>
@@ -10031,6 +10643,9 @@
             <a:avLst/>
           </a:prstGeom>
           <a:noFill/>
+          <a:ln>
+            <a:solidFill/>
+          </a:ln>
         </p:spPr>
         <p:txBody>
           <a:bodyPr wrap="square">
@@ -10063,6 +10678,9 @@
             <a:avLst/>
           </a:prstGeom>
           <a:noFill/>
+          <a:ln>
+            <a:solidFill/>
+          </a:ln>
         </p:spPr>
         <p:txBody>
           <a:bodyPr wrap="none">
@@ -10909,6 +11527,9 @@
             <a:avLst/>
           </a:prstGeom>
           <a:noFill/>
+          <a:ln>
+            <a:solidFill/>
+          </a:ln>
         </p:spPr>
         <p:txBody>
           <a:bodyPr wrap="square">
@@ -10949,7 +11570,7 @@
 </p:sld>
 </file>
 
-<file path=ppt/slides/slide18.xml><?xml version="1.0" encoding="utf-8"?>
+<file path=ppt/slides/slide19.xml><?xml version="1.0" encoding="utf-8"?>
 <p:sld xmlns:a="http://schemas.openxmlformats.org/drawingml/2006/main" xmlns:r="http://schemas.openxmlformats.org/officeDocument/2006/relationships" xmlns:p="http://schemas.openxmlformats.org/presentationml/2006/main">
   <p:cSld>
     <p:spTree>
@@ -10981,6 +11602,9 @@
             <a:avLst/>
           </a:prstGeom>
           <a:noFill/>
+          <a:ln>
+            <a:solidFill/>
+          </a:ln>
         </p:spPr>
         <p:txBody>
           <a:bodyPr wrap="square">
@@ -11013,6 +11637,9 @@
             <a:avLst/>
           </a:prstGeom>
           <a:noFill/>
+          <a:ln>
+            <a:solidFill/>
+          </a:ln>
         </p:spPr>
         <p:txBody>
           <a:bodyPr wrap="none">
@@ -11115,7 +11742,7 @@
             <a:srgbClr val="B03030"/>
           </a:solidFill>
           <a:ln>
-            <a:noFill/>
+            <a:solidFill/>
           </a:ln>
         </p:spPr>
         <p:style>
@@ -11224,7 +11851,7 @@
             <a:srgbClr val="B03030"/>
           </a:solidFill>
           <a:ln>
-            <a:noFill/>
+            <a:solidFill/>
           </a:ln>
         </p:spPr>
         <p:style>
@@ -11333,7 +11960,7 @@
             <a:srgbClr val="C88A12"/>
           </a:solidFill>
           <a:ln>
-            <a:noFill/>
+            <a:solidFill/>
           </a:ln>
         </p:spPr>
         <p:style>
@@ -11442,7 +12069,7 @@
             <a:srgbClr val="C88A12"/>
           </a:solidFill>
           <a:ln>
-            <a:noFill/>
+            <a:solidFill/>
           </a:ln>
         </p:spPr>
         <p:style>
@@ -11551,7 +12178,7 @@
             <a:srgbClr val="B03030"/>
           </a:solidFill>
           <a:ln>
-            <a:noFill/>
+            <a:solidFill/>
           </a:ln>
         </p:spPr>
         <p:style>
@@ -11660,7 +12287,7 @@
             <a:srgbClr val="C88A12"/>
           </a:solidFill>
           <a:ln>
-            <a:noFill/>
+            <a:solidFill/>
           </a:ln>
         </p:spPr>
         <p:style>
@@ -11769,7 +12396,7 @@
             <a:srgbClr val="C88A12"/>
           </a:solidFill>
           <a:ln>
-            <a:noFill/>
+            <a:solidFill/>
           </a:ln>
         </p:spPr>
         <p:style>
@@ -11792,496 +12419,6 @@
           <a:p>
             <a:pPr algn="ctr"/>
             <a:endParaRPr/>
-          </a:p>
-        </p:txBody>
-      </p:sp>
-    </p:spTree>
-  </p:cSld>
-  <p:clrMapOvr>
-    <a:masterClrMapping/>
-  </p:clrMapOvr>
-</p:sld>
-</file>
-
-<file path=ppt/slides/slide19.xml><?xml version="1.0" encoding="utf-8"?>
-<p:sld xmlns:a="http://schemas.openxmlformats.org/drawingml/2006/main" xmlns:p="http://schemas.openxmlformats.org/presentationml/2006/main" xmlns:r="http://schemas.openxmlformats.org/officeDocument/2006/relationships">
-  <p:cSld>
-    <p:spTree>
-      <p:nvGrpSpPr>
-        <p:cNvPr id="1" name=""/>
-        <p:cNvGrpSpPr/>
-        <p:nvPr/>
-      </p:nvGrpSpPr>
-      <p:grpSpPr/>
-      <p:sp>
-        <p:nvSpPr>
-          <p:cNvPr id="2" name="TextBox 1"/>
-          <p:cNvSpPr txBox="1"/>
-          <p:nvPr/>
-        </p:nvSpPr>
-        <p:spPr>
-          <a:xfrm>
-            <a:off x="457200" y="365760"/>
-            <a:ext cx="8229600" cy="548640"/>
-          </a:xfrm>
-          <a:prstGeom prst="rect">
-            <a:avLst/>
-          </a:prstGeom>
-          <a:noFill/>
-        </p:spPr>
-        <p:txBody>
-          <a:bodyPr wrap="square">
-            <a:spAutoFit/>
-          </a:bodyPr>
-          <a:lstStyle/>
-          <a:p>
-            <a:r>
-              <a:rPr sz="2000">
-                <a:solidFill>
-                  <a:srgbClr val="000000"/>
-                </a:solidFill>
-                <a:latin typeface="Avenir Next LT Pro Demi"/>
-              </a:rPr>
-              <a:t>Recent Developments — Strategy in Action (and What to Watch)</a:t>
-            </a:r>
-          </a:p>
-        </p:txBody>
-      </p:sp>
-      <p:sp>
-        <p:nvSpPr>
-          <p:cNvPr id="3" name="Rectangle 2"/>
-          <p:cNvSpPr/>
-          <p:nvPr/>
-        </p:nvSpPr>
-        <p:spPr>
-          <a:xfrm>
-            <a:off x="457200" y="960120"/>
-            <a:ext cx="8229600" cy="25603"/>
-          </a:xfrm>
-          <a:prstGeom prst="rect">
-            <a:avLst/>
-          </a:prstGeom>
-          <a:solidFill>
-            <a:srgbClr val="9A7B44"/>
-          </a:solidFill>
-          <a:ln>
-            <a:noFill/>
-          </a:ln>
-        </p:spPr>
-        <p:style>
-          <a:lnRef idx="1">
-            <a:schemeClr val="accent1"/>
-          </a:lnRef>
-          <a:fillRef idx="3">
-            <a:schemeClr val="accent1"/>
-          </a:fillRef>
-          <a:effectRef idx="2">
-            <a:schemeClr val="accent1"/>
-          </a:effectRef>
-          <a:fontRef idx="minor">
-            <a:schemeClr val="lt1"/>
-          </a:fontRef>
-        </p:style>
-        <p:txBody>
-          <a:bodyPr rtlCol="0" anchor="ctr"/>
-          <a:lstStyle/>
-          <a:p>
-            <a:pPr algn="ctr"/>
-          </a:p>
-        </p:txBody>
-      </p:sp>
-      <p:sp>
-        <p:nvSpPr>
-          <p:cNvPr id="4" name="Rectangle 3"/>
-          <p:cNvSpPr/>
-          <p:nvPr/>
-        </p:nvSpPr>
-        <p:spPr>
-          <a:xfrm>
-            <a:off x="457200" y="1280160"/>
-            <a:ext cx="82296" cy="1325880"/>
-          </a:xfrm>
-          <a:prstGeom prst="rect">
-            <a:avLst/>
-          </a:prstGeom>
-          <a:solidFill>
-            <a:srgbClr val="9A7B44"/>
-          </a:solidFill>
-          <a:ln>
-            <a:noFill/>
-          </a:ln>
-        </p:spPr>
-        <p:style>
-          <a:lnRef idx="1">
-            <a:schemeClr val="accent1"/>
-          </a:lnRef>
-          <a:fillRef idx="3">
-            <a:schemeClr val="accent1"/>
-          </a:fillRef>
-          <a:effectRef idx="2">
-            <a:schemeClr val="accent1"/>
-          </a:effectRef>
-          <a:fontRef idx="minor">
-            <a:schemeClr val="lt1"/>
-          </a:fontRef>
-        </p:style>
-        <p:txBody>
-          <a:bodyPr rtlCol="0" anchor="ctr"/>
-          <a:lstStyle/>
-          <a:p>
-            <a:pPr algn="ctr"/>
-          </a:p>
-        </p:txBody>
-      </p:sp>
-      <p:sp>
-        <p:nvSpPr>
-          <p:cNvPr id="5" name="TextBox 4"/>
-          <p:cNvSpPr txBox="1"/>
-          <p:nvPr/>
-        </p:nvSpPr>
-        <p:spPr>
-          <a:xfrm>
-            <a:off x="658368" y="1280160"/>
-            <a:ext cx="8001000" cy="1325880"/>
-          </a:xfrm>
-          <a:prstGeom prst="rect">
-            <a:avLst/>
-          </a:prstGeom>
-          <a:noFill/>
-        </p:spPr>
-        <p:txBody>
-          <a:bodyPr wrap="square" anchor="ctr">
-            <a:spAutoFit/>
-          </a:bodyPr>
-          <a:lstStyle/>
-          <a:p>
-            <a:r>
-              <a:rPr sz="1350" b="1">
-                <a:solidFill>
-                  <a:srgbClr val="000000"/>
-                </a:solidFill>
-                <a:latin typeface="Avenir Next LT Pro Demi"/>
-              </a:rPr>
-              <a:t>RH Estates — unveiled</a:t>
-            </a:r>
-          </a:p>
-          <a:p>
-            <a:pPr>
-              <a:spcBef>
-                <a:spcPts val="300"/>
-              </a:spcBef>
-            </a:pPr>
-            <a:r>
-              <a:rPr sz="1100">
-                <a:solidFill>
-                  <a:srgbClr val="000000"/>
-                </a:solidFill>
-                <a:latin typeface="Avenir Next LT Pro"/>
-              </a:rPr>
-              <a:t>Acquired legendary ateliers — Michael Taylor, Dennis &amp; Leen, Dmitriy &amp; Co., Formations.</a:t>
-            </a:r>
-          </a:p>
-          <a:p>
-            <a:pPr>
-              <a:spcBef>
-                <a:spcPts val="200"/>
-              </a:spcBef>
-            </a:pPr>
-            <a:r>
-              <a:rPr sz="1050" i="1">
-                <a:solidFill>
-                  <a:srgbClr val="9A7B44"/>
-                </a:solidFill>
-                <a:latin typeface="Avenir Next LT Pro"/>
-              </a:rPr>
-              <a:t>Watch: Owned exclusivity rivals can't copy — a real moat. Commercially unproven; first read Q2 FY2026.</a:t>
-            </a:r>
-          </a:p>
-        </p:txBody>
-      </p:sp>
-      <p:sp>
-        <p:nvSpPr>
-          <p:cNvPr id="6" name="Rectangle 5"/>
-          <p:cNvSpPr/>
-          <p:nvPr/>
-        </p:nvSpPr>
-        <p:spPr>
-          <a:xfrm>
-            <a:off x="457200" y="2743200"/>
-            <a:ext cx="82296" cy="1325880"/>
-          </a:xfrm>
-          <a:prstGeom prst="rect">
-            <a:avLst/>
-          </a:prstGeom>
-          <a:solidFill>
-            <a:srgbClr val="9A7B44"/>
-          </a:solidFill>
-          <a:ln>
-            <a:noFill/>
-          </a:ln>
-        </p:spPr>
-        <p:style>
-          <a:lnRef idx="1">
-            <a:schemeClr val="accent1"/>
-          </a:lnRef>
-          <a:fillRef idx="3">
-            <a:schemeClr val="accent1"/>
-          </a:fillRef>
-          <a:effectRef idx="2">
-            <a:schemeClr val="accent1"/>
-          </a:effectRef>
-          <a:fontRef idx="minor">
-            <a:schemeClr val="lt1"/>
-          </a:fontRef>
-        </p:style>
-        <p:txBody>
-          <a:bodyPr rtlCol="0" anchor="ctr"/>
-          <a:lstStyle/>
-          <a:p>
-            <a:pPr algn="ctr"/>
-          </a:p>
-        </p:txBody>
-      </p:sp>
-      <p:sp>
-        <p:nvSpPr>
-          <p:cNvPr id="7" name="TextBox 6"/>
-          <p:cNvSpPr txBox="1"/>
-          <p:nvPr/>
-        </p:nvSpPr>
-        <p:spPr>
-          <a:xfrm>
-            <a:off x="658368" y="2743200"/>
-            <a:ext cx="8001000" cy="1325880"/>
-          </a:xfrm>
-          <a:prstGeom prst="rect">
-            <a:avLst/>
-          </a:prstGeom>
-          <a:noFill/>
-        </p:spPr>
-        <p:txBody>
-          <a:bodyPr wrap="square" anchor="ctr">
-            <a:spAutoFit/>
-          </a:bodyPr>
-          <a:lstStyle/>
-          <a:p>
-            <a:r>
-              <a:rPr sz="1350" b="1">
-                <a:solidFill>
-                  <a:srgbClr val="000000"/>
-                </a:solidFill>
-                <a:latin typeface="Avenir Next LT Pro Demi"/>
-              </a:rPr>
-              <a:t>Mercedes-AMG F1 partnership</a:t>
-            </a:r>
-          </a:p>
-          <a:p>
-            <a:pPr>
-              <a:spcBef>
-                <a:spcPts val="300"/>
-              </a:spcBef>
-            </a:pPr>
-            <a:r>
-              <a:rPr sz="1100">
-                <a:solidFill>
-                  <a:srgbClr val="000000"/>
-                </a:solidFill>
-                <a:latin typeface="Avenir Next LT Pro"/>
-              </a:rPr>
-              <a:t>RH to design the team's global hospitality (Abu Dhabi, Miami, Monaco, Silverstone) from late 2026.</a:t>
-            </a:r>
-          </a:p>
-          <a:p>
-            <a:pPr>
-              <a:spcBef>
-                <a:spcPts val="200"/>
-              </a:spcBef>
-            </a:pPr>
-            <a:r>
-              <a:rPr sz="1050" i="1">
-                <a:solidFill>
-                  <a:srgbClr val="9A7B44"/>
-                </a:solidFill>
-                <a:latin typeface="Avenir Next LT Pro"/>
-              </a:rPr>
-              <a:t>Watch: Elite brand halo, on-strategy — but immaterial to near-term financials.</a:t>
-            </a:r>
-          </a:p>
-        </p:txBody>
-      </p:sp>
-      <p:sp>
-        <p:nvSpPr>
-          <p:cNvPr id="8" name="Rectangle 7"/>
-          <p:cNvSpPr/>
-          <p:nvPr/>
-        </p:nvSpPr>
-        <p:spPr>
-          <a:xfrm>
-            <a:off x="457200" y="4206240"/>
-            <a:ext cx="82296" cy="1325880"/>
-          </a:xfrm>
-          <a:prstGeom prst="rect">
-            <a:avLst/>
-          </a:prstGeom>
-          <a:solidFill>
-            <a:srgbClr val="9A7B44"/>
-          </a:solidFill>
-          <a:ln>
-            <a:noFill/>
-          </a:ln>
-        </p:spPr>
-        <p:style>
-          <a:lnRef idx="1">
-            <a:schemeClr val="accent1"/>
-          </a:lnRef>
-          <a:fillRef idx="3">
-            <a:schemeClr val="accent1"/>
-          </a:fillRef>
-          <a:effectRef idx="2">
-            <a:schemeClr val="accent1"/>
-          </a:effectRef>
-          <a:fontRef idx="minor">
-            <a:schemeClr val="lt1"/>
-          </a:fontRef>
-        </p:style>
-        <p:txBody>
-          <a:bodyPr rtlCol="0" anchor="ctr"/>
-          <a:lstStyle/>
-          <a:p>
-            <a:pPr algn="ctr"/>
-          </a:p>
-        </p:txBody>
-      </p:sp>
-      <p:sp>
-        <p:nvSpPr>
-          <p:cNvPr id="9" name="TextBox 8"/>
-          <p:cNvSpPr txBox="1"/>
-          <p:nvPr/>
-        </p:nvSpPr>
-        <p:spPr>
-          <a:xfrm>
-            <a:off x="658368" y="4206240"/>
-            <a:ext cx="8001000" cy="1325880"/>
-          </a:xfrm>
-          <a:prstGeom prst="rect">
-            <a:avLst/>
-          </a:prstGeom>
-          <a:noFill/>
-        </p:spPr>
-        <p:txBody>
-          <a:bodyPr wrap="square" anchor="ctr">
-            <a:spAutoFit/>
-          </a:bodyPr>
-          <a:lstStyle/>
-          <a:p>
-            <a:r>
-              <a:rPr sz="1350" b="1">
-                <a:solidFill>
-                  <a:srgbClr val="000000"/>
-                </a:solidFill>
-                <a:latin typeface="Avenir Next LT Pro Demi"/>
-              </a:rPr>
-              <a:t>RH London — Mayfair flagship</a:t>
-            </a:r>
-          </a:p>
-          <a:p>
-            <a:pPr>
-              <a:spcBef>
-                <a:spcPts val="300"/>
-              </a:spcBef>
-            </a:pPr>
-            <a:r>
-              <a:rPr sz="1100">
-                <a:solidFill>
-                  <a:srgbClr val="000000"/>
-                </a:solidFill>
-                <a:latin typeface="Avenir Next LT Pro"/>
-              </a:rPr>
-              <a:t>Five-level gallery in London's luxury core (New Bond St / Savile Row).</a:t>
-            </a:r>
-          </a:p>
-          <a:p>
-            <a:pPr>
-              <a:spcBef>
-                <a:spcPts val="200"/>
-              </a:spcBef>
-            </a:pPr>
-            <a:r>
-              <a:rPr sz="1050" i="1">
-                <a:solidFill>
-                  <a:srgbClr val="9A7B44"/>
-                </a:solidFill>
-                <a:latin typeface="Avenir Next LT Pro"/>
-              </a:rPr>
-              <a:t>Watch: Doubles down on Europe — capital-intensive and unproven. Watch productivity vs. margin drag.</a:t>
-            </a:r>
-          </a:p>
-        </p:txBody>
-      </p:sp>
-      <p:sp>
-        <p:nvSpPr>
-          <p:cNvPr id="10" name="TextBox 9"/>
-          <p:cNvSpPr txBox="1"/>
-          <p:nvPr/>
-        </p:nvSpPr>
-        <p:spPr>
-          <a:xfrm>
-            <a:off x="457200" y="5532120"/>
-            <a:ext cx="8229600" cy="457200"/>
-          </a:xfrm>
-          <a:prstGeom prst="rect">
-            <a:avLst/>
-          </a:prstGeom>
-          <a:noFill/>
-        </p:spPr>
-        <p:txBody>
-          <a:bodyPr wrap="square">
-            <a:spAutoFit/>
-          </a:bodyPr>
-          <a:lstStyle/>
-          <a:p>
-            <a:r>
-              <a:rPr sz="1100" b="1">
-                <a:solidFill>
-                  <a:srgbClr val="000000"/>
-                </a:solidFill>
-                <a:latin typeface="Avenir Next LT Pro Demi"/>
-              </a:rPr>
-              <a:t>Expanding on all fronts — differentiated (Estates) and brand-elevating (F1, Mayfair) — but unproven and/or capital-intensive during a levered stretch. Watch items, not yet catalysts.</a:t>
-            </a:r>
-          </a:p>
-        </p:txBody>
-      </p:sp>
-      <p:sp>
-        <p:nvSpPr>
-          <p:cNvPr id="11" name="TextBox 10"/>
-          <p:cNvSpPr txBox="1"/>
-          <p:nvPr/>
-        </p:nvSpPr>
-        <p:spPr>
-          <a:xfrm>
-            <a:off x="457200" y="6172200"/>
-            <a:ext cx="8229600" cy="274320"/>
-          </a:xfrm>
-          <a:prstGeom prst="rect">
-            <a:avLst/>
-          </a:prstGeom>
-          <a:noFill/>
-        </p:spPr>
-        <p:txBody>
-          <a:bodyPr wrap="none">
-            <a:spAutoFit/>
-          </a:bodyPr>
-          <a:lstStyle/>
-          <a:p>
-            <a:r>
-              <a:rPr sz="750" i="1">
-                <a:solidFill>
-                  <a:srgbClr val="707070"/>
-                </a:solidFill>
-                <a:latin typeface="Avenir Next LT Pro"/>
-              </a:rPr>
-              <a:t>Sources: RH company announcements (Business Wire), 2026.</a:t>
-            </a:r>
           </a:p>
         </p:txBody>
       </p:sp>
@@ -12332,7 +12469,11 @@
             <p:ph type="title"/>
           </p:nvPr>
         </p:nvSpPr>
-        <p:spPr/>
+        <p:spPr>
+          <a:ln>
+            <a:solidFill/>
+          </a:ln>
+        </p:spPr>
         <p:txBody>
           <a:bodyPr/>
           <a:lstStyle/>
@@ -13126,7 +13267,11 @@
             <p:ph type="title"/>
           </p:nvPr>
         </p:nvSpPr>
-        <p:spPr/>
+        <p:spPr>
+          <a:ln>
+            <a:solidFill/>
+          </a:ln>
+        </p:spPr>
         <p:txBody>
           <a:bodyPr/>
           <a:lstStyle/>
@@ -13197,6 +13342,9 @@
             <a:avLst/>
           </a:prstGeom>
           <a:noFill/>
+          <a:ln>
+            <a:solidFill/>
+          </a:ln>
         </p:spPr>
         <p:txBody>
           <a:bodyPr wrap="square">
@@ -13232,7 +13380,7 @@
             <a:srgbClr val="AF8C49"/>
           </a:solidFill>
           <a:ln>
-            <a:noFill/>
+            <a:solidFill/>
           </a:ln>
         </p:spPr>
         <p:style>
@@ -13515,7 +13663,7 @@
             <a:r>
               <a:rPr sz="2400" b="1" dirty="0">
                 <a:solidFill>
-                  <a:srgbClr val="9A7B44"/>
+                  <a:srgbClr val="000000"/>
                 </a:solidFill>
                 <a:latin typeface="Avenir Next LT Pro Demi"/>
               </a:rPr>
@@ -13524,7 +13672,7 @@
             <a:r>
               <a:rPr lang="en-US" sz="2400" b="1" dirty="0">
                 <a:solidFill>
-                  <a:srgbClr val="9A7B44"/>
+                  <a:srgbClr val="000000"/>
                 </a:solidFill>
                 <a:latin typeface="Avenir Next LT Pro Demi"/>
               </a:rPr>
@@ -13653,10 +13801,10 @@
             <a:avLst/>
           </a:prstGeom>
           <a:solidFill>
-            <a:srgbClr val="9A7B44"/>
+            <a:srgbClr val="000000"/>
           </a:solidFill>
           <a:ln>
-            <a:noFill/>
+            <a:solidFill/>
           </a:ln>
         </p:spPr>
         <p:style>
@@ -13696,6 +13844,9 @@
             <a:avLst/>
           </a:prstGeom>
           <a:noFill/>
+          <a:ln>
+            <a:solidFill/>
+          </a:ln>
         </p:spPr>
         <p:txBody>
           <a:bodyPr wrap="square">
@@ -13706,7 +13857,7 @@
             <a:r>
               <a:rPr sz="1300" b="1">
                 <a:solidFill>
-                  <a:srgbClr val="9A7B44"/>
+                  <a:srgbClr val="000000"/>
                 </a:solidFill>
                 <a:latin typeface="Avenir Next LT Pro Demi"/>
               </a:rPr>
@@ -13722,7 +13873,7 @@
             <a:r>
               <a:rPr sz="1100">
                 <a:solidFill>
-                  <a:srgbClr val="9A7B44"/>
+                  <a:srgbClr val="000000"/>
                 </a:solidFill>
                 <a:latin typeface="Avenir Next LT Pro"/>
               </a:rPr>
@@ -13747,7 +13898,7 @@
             <a:r>
               <a:rPr sz="1100">
                 <a:solidFill>
-                  <a:srgbClr val="9A7B44"/>
+                  <a:srgbClr val="000000"/>
                 </a:solidFill>
                 <a:latin typeface="Avenir Next LT Pro"/>
               </a:rPr>
@@ -13772,7 +13923,7 @@
             <a:r>
               <a:rPr sz="1100">
                 <a:solidFill>
-                  <a:srgbClr val="9A7B44"/>
+                  <a:srgbClr val="000000"/>
                 </a:solidFill>
                 <a:latin typeface="Avenir Next LT Pro"/>
               </a:rPr>
@@ -13808,7 +13959,7 @@
             <a:srgbClr val="B03030"/>
           </a:solidFill>
           <a:ln>
-            <a:noFill/>
+            <a:solidFill/>
           </a:ln>
         </p:spPr>
         <p:style>
@@ -13848,6 +13999,9 @@
             <a:avLst/>
           </a:prstGeom>
           <a:noFill/>
+          <a:ln>
+            <a:solidFill/>
+          </a:ln>
         </p:spPr>
         <p:txBody>
           <a:bodyPr wrap="square">
@@ -13975,6 +14129,9 @@
             <a:avLst/>
           </a:prstGeom>
           <a:noFill/>
+          <a:ln>
+            <a:solidFill/>
+          </a:ln>
         </p:spPr>
         <p:txBody>
           <a:bodyPr wrap="square">
@@ -14009,10 +14166,10 @@
             <a:avLst/>
           </a:prstGeom>
           <a:solidFill>
-            <a:srgbClr val="9A7B44"/>
+            <a:srgbClr val="000000"/>
           </a:solidFill>
           <a:ln>
-            <a:noFill/>
+            <a:solidFill/>
           </a:ln>
         </p:spPr>
         <p:style>
@@ -14354,7 +14511,7 @@
                       <a:r>
                         <a:rPr sz="1100" b="1">
                           <a:solidFill>
-                            <a:srgbClr val="9A7B44"/>
+                            <a:srgbClr val="000000"/>
                           </a:solidFill>
                           <a:latin typeface="Avenir Next LT Pro Demi"/>
                         </a:rPr>
@@ -14377,7 +14534,7 @@
                       <a:r>
                         <a:rPr sz="1100" b="1">
                           <a:solidFill>
-                            <a:srgbClr val="9A7B44"/>
+                            <a:srgbClr val="000000"/>
                           </a:solidFill>
                           <a:latin typeface="Avenir Next LT Pro"/>
                         </a:rPr>
@@ -14425,7 +14582,7 @@
                       <a:r>
                         <a:rPr sz="1100" b="1">
                           <a:solidFill>
-                            <a:srgbClr val="9A7B44"/>
+                            <a:srgbClr val="000000"/>
                           </a:solidFill>
                           <a:latin typeface="Avenir Next LT Pro Demi"/>
                         </a:rPr>
@@ -14448,7 +14605,7 @@
                       <a:r>
                         <a:rPr sz="1100" b="1">
                           <a:solidFill>
-                            <a:srgbClr val="9A7B44"/>
+                            <a:srgbClr val="000000"/>
                           </a:solidFill>
                           <a:latin typeface="Avenir Next LT Pro"/>
                         </a:rPr>
@@ -14505,6 +14662,9 @@
             <a:avLst/>
           </a:prstGeom>
           <a:noFill/>
+          <a:ln>
+            <a:solidFill/>
+          </a:ln>
         </p:spPr>
         <p:txBody>
           <a:bodyPr wrap="square">
@@ -14555,6 +14715,9 @@
             <a:avLst/>
           </a:prstGeom>
           <a:noFill/>
+          <a:ln>
+            <a:solidFill/>
+          </a:ln>
         </p:spPr>
         <p:txBody>
           <a:bodyPr wrap="none">
@@ -14607,6 +14770,9 @@
             <a:avLst/>
           </a:prstGeom>
           <a:noFill/>
+          <a:ln>
+            <a:solidFill/>
+          </a:ln>
         </p:spPr>
         <p:txBody>
           <a:bodyPr wrap="square">
@@ -14641,10 +14807,10 @@
             <a:avLst/>
           </a:prstGeom>
           <a:solidFill>
-            <a:srgbClr val="9A7B44"/>
+            <a:srgbClr val="000000"/>
           </a:solidFill>
           <a:ln>
-            <a:noFill/>
+            <a:solidFill/>
           </a:ln>
         </p:spPr>
         <p:style>
@@ -14684,6 +14850,9 @@
             <a:avLst/>
           </a:prstGeom>
           <a:noFill/>
+          <a:ln>
+            <a:solidFill/>
+          </a:ln>
         </p:spPr>
         <p:txBody>
           <a:bodyPr wrap="square">
@@ -14718,10 +14887,10 @@
             <a:avLst/>
           </a:prstGeom>
           <a:solidFill>
-            <a:srgbClr val="9A7B44"/>
+            <a:srgbClr val="000000"/>
           </a:solidFill>
           <a:ln>
-            <a:noFill/>
+            <a:solidFill/>
           </a:ln>
         </p:spPr>
         <p:style>
@@ -14761,6 +14930,9 @@
             <a:avLst/>
           </a:prstGeom>
           <a:noFill/>
+          <a:ln>
+            <a:solidFill/>
+          </a:ln>
         </p:spPr>
         <p:txBody>
           <a:bodyPr wrap="square" anchor="ctr">
@@ -14795,6 +14967,9 @@
             <a:avLst/>
           </a:prstGeom>
           <a:noFill/>
+          <a:ln>
+            <a:solidFill/>
+          </a:ln>
         </p:spPr>
         <p:txBody>
           <a:bodyPr wrap="square" anchor="ctr">
@@ -14832,7 +15007,7 @@
             <a:srgbClr val="E97132"/>
           </a:solidFill>
           <a:ln>
-            <a:noFill/>
+            <a:solidFill/>
           </a:ln>
         </p:spPr>
         <p:style>
@@ -14872,6 +15047,9 @@
             <a:avLst/>
           </a:prstGeom>
           <a:noFill/>
+          <a:ln>
+            <a:solidFill/>
+          </a:ln>
         </p:spPr>
         <p:txBody>
           <a:bodyPr wrap="square" anchor="ctr">
@@ -14906,6 +15084,9 @@
             <a:avLst/>
           </a:prstGeom>
           <a:noFill/>
+          <a:ln>
+            <a:solidFill/>
+          </a:ln>
         </p:spPr>
         <p:txBody>
           <a:bodyPr wrap="square" anchor="ctr">
@@ -14943,7 +15124,7 @@
             <a:srgbClr val="196B24"/>
           </a:solidFill>
           <a:ln>
-            <a:noFill/>
+            <a:solidFill/>
           </a:ln>
         </p:spPr>
         <p:style>
@@ -14983,6 +15164,9 @@
             <a:avLst/>
           </a:prstGeom>
           <a:noFill/>
+          <a:ln>
+            <a:solidFill/>
+          </a:ln>
         </p:spPr>
         <p:txBody>
           <a:bodyPr wrap="square" anchor="ctr">
@@ -15017,6 +15201,9 @@
             <a:avLst/>
           </a:prstGeom>
           <a:noFill/>
+          <a:ln>
+            <a:solidFill/>
+          </a:ln>
         </p:spPr>
         <p:txBody>
           <a:bodyPr wrap="square" anchor="ctr">
@@ -15051,6 +15238,9 @@
             <a:avLst/>
           </a:prstGeom>
           <a:noFill/>
+          <a:ln>
+            <a:solidFill/>
+          </a:ln>
         </p:spPr>
         <p:txBody>
           <a:bodyPr wrap="square">
@@ -15085,6 +15275,9 @@
             <a:avLst/>
           </a:prstGeom>
           <a:noFill/>
+          <a:ln>
+            <a:solidFill/>
+          </a:ln>
         </p:spPr>
         <p:txBody>
           <a:bodyPr wrap="none">
@@ -15151,7 +15344,11 @@
             <p:ph type="title"/>
           </p:nvPr>
         </p:nvSpPr>
-        <p:spPr/>
+        <p:spPr>
+          <a:ln>
+            <a:solidFill/>
+          </a:ln>
+        </p:spPr>
         <p:txBody>
           <a:bodyPr/>
           <a:lstStyle/>
@@ -15224,6 +15421,9 @@
             <a:avLst/>
           </a:prstGeom>
           <a:noFill/>
+          <a:ln>
+            <a:solidFill/>
+          </a:ln>
         </p:spPr>
         <p:txBody>
           <a:bodyPr wrap="square">
@@ -15258,10 +15458,10 @@
             <a:avLst/>
           </a:prstGeom>
           <a:solidFill>
-            <a:srgbClr val="9A7B44"/>
+            <a:srgbClr val="000000"/>
           </a:solidFill>
           <a:ln>
-            <a:noFill/>
+            <a:solidFill/>
           </a:ln>
         </p:spPr>
         <p:style>
@@ -15301,10 +15501,10 @@
             <a:avLst/>
           </a:prstGeom>
           <a:solidFill>
-            <a:srgbClr val="9A7B44"/>
+            <a:srgbClr val="000000"/>
           </a:solidFill>
           <a:ln>
-            <a:noFill/>
+            <a:solidFill/>
           </a:ln>
         </p:spPr>
         <p:style>
@@ -15344,6 +15544,9 @@
             <a:avLst/>
           </a:prstGeom>
           <a:noFill/>
+          <a:ln>
+            <a:solidFill/>
+          </a:ln>
         </p:spPr>
         <p:txBody>
           <a:bodyPr wrap="square" anchor="ctr">
@@ -15389,6 +15592,9 @@
             <a:avLst/>
           </a:prstGeom>
           <a:noFill/>
+          <a:ln>
+            <a:solidFill/>
+          </a:ln>
         </p:spPr>
         <p:txBody>
           <a:bodyPr wrap="square" anchor="ctr">
@@ -15426,7 +15632,7 @@
             <a:srgbClr val="E97132"/>
           </a:solidFill>
           <a:ln>
-            <a:noFill/>
+            <a:solidFill/>
           </a:ln>
         </p:spPr>
         <p:style>
@@ -15466,6 +15672,9 @@
             <a:avLst/>
           </a:prstGeom>
           <a:noFill/>
+          <a:ln>
+            <a:solidFill/>
+          </a:ln>
         </p:spPr>
         <p:txBody>
           <a:bodyPr wrap="square" anchor="ctr">
@@ -15511,6 +15720,9 @@
             <a:avLst/>
           </a:prstGeom>
           <a:noFill/>
+          <a:ln>
+            <a:solidFill/>
+          </a:ln>
         </p:spPr>
         <p:txBody>
           <a:bodyPr wrap="square" anchor="ctr">
@@ -15548,7 +15760,7 @@
             <a:srgbClr val="B03030"/>
           </a:solidFill>
           <a:ln>
-            <a:noFill/>
+            <a:solidFill/>
           </a:ln>
         </p:spPr>
         <p:style>
@@ -15588,6 +15800,9 @@
             <a:avLst/>
           </a:prstGeom>
           <a:noFill/>
+          <a:ln>
+            <a:solidFill/>
+          </a:ln>
         </p:spPr>
         <p:txBody>
           <a:bodyPr wrap="square" anchor="ctr">
@@ -15633,6 +15848,9 @@
             <a:avLst/>
           </a:prstGeom>
           <a:noFill/>
+          <a:ln>
+            <a:solidFill/>
+          </a:ln>
         </p:spPr>
         <p:txBody>
           <a:bodyPr wrap="square" anchor="ctr">
@@ -15667,6 +15885,9 @@
             <a:avLst/>
           </a:prstGeom>
           <a:noFill/>
+          <a:ln>
+            <a:solidFill/>
+          </a:ln>
         </p:spPr>
         <p:txBody>
           <a:bodyPr wrap="square">
@@ -15701,6 +15922,9 @@
             <a:avLst/>
           </a:prstGeom>
           <a:noFill/>
+          <a:ln>
+            <a:solidFill/>
+          </a:ln>
         </p:spPr>
         <p:txBody>
           <a:bodyPr wrap="none">
@@ -15753,6 +15977,9 @@
             <a:avLst/>
           </a:prstGeom>
           <a:noFill/>
+          <a:ln>
+            <a:solidFill/>
+          </a:ln>
         </p:spPr>
         <p:txBody>
           <a:bodyPr wrap="square">
@@ -15787,10 +16014,10 @@
             <a:avLst/>
           </a:prstGeom>
           <a:solidFill>
-            <a:srgbClr val="9A7B44"/>
+            <a:srgbClr val="000000"/>
           </a:solidFill>
           <a:ln>
-            <a:noFill/>
+            <a:solidFill/>
           </a:ln>
         </p:spPr>
         <p:style>
@@ -15830,10 +16057,10 @@
             <a:avLst/>
           </a:prstGeom>
           <a:solidFill>
-            <a:srgbClr val="9A7B44"/>
+            <a:srgbClr val="000000"/>
           </a:solidFill>
           <a:ln>
-            <a:noFill/>
+            <a:solidFill/>
           </a:ln>
         </p:spPr>
         <p:style>
@@ -15873,6 +16100,9 @@
             <a:avLst/>
           </a:prstGeom>
           <a:noFill/>
+          <a:ln>
+            <a:solidFill/>
+          </a:ln>
         </p:spPr>
         <p:txBody>
           <a:bodyPr wrap="square" anchor="ctr">
@@ -15919,7 +16149,7 @@
             <a:srgbClr val="196B24"/>
           </a:solidFill>
           <a:ln>
-            <a:noFill/>
+            <a:solidFill/>
           </a:ln>
         </p:spPr>
         <p:style>
@@ -15959,6 +16189,9 @@
             <a:avLst/>
           </a:prstGeom>
           <a:noFill/>
+          <a:ln>
+            <a:solidFill/>
+          </a:ln>
         </p:spPr>
         <p:txBody>
           <a:bodyPr wrap="square" anchor="ctr">
@@ -16005,7 +16238,7 @@
             <a:srgbClr val="E97132"/>
           </a:solidFill>
           <a:ln>
-            <a:noFill/>
+            <a:solidFill/>
           </a:ln>
         </p:spPr>
         <p:style>
@@ -16045,6 +16278,9 @@
             <a:avLst/>
           </a:prstGeom>
           <a:noFill/>
+          <a:ln>
+            <a:solidFill/>
+          </a:ln>
         </p:spPr>
         <p:txBody>
           <a:bodyPr wrap="square" anchor="ctr">
@@ -16088,10 +16324,10 @@
             <a:avLst/>
           </a:prstGeom>
           <a:solidFill>
-            <a:srgbClr val="9A7B44"/>
+            <a:srgbClr val="000000"/>
           </a:solidFill>
           <a:ln>
-            <a:noFill/>
+            <a:solidFill/>
           </a:ln>
         </p:spPr>
         <p:style>
@@ -16131,6 +16367,9 @@
             <a:avLst/>
           </a:prstGeom>
           <a:noFill/>
+          <a:ln>
+            <a:solidFill/>
+          </a:ln>
         </p:spPr>
         <p:txBody>
           <a:bodyPr wrap="square" anchor="ctr">
@@ -16174,6 +16413,9 @@
             <a:avLst/>
           </a:prstGeom>
           <a:noFill/>
+          <a:ln>
+            <a:solidFill/>
+          </a:ln>
         </p:spPr>
         <p:txBody>
           <a:bodyPr wrap="none">

--- a/RH_Stock_Pitch_updated.pptx
+++ b/RH_Stock_Pitch_updated.pptx
@@ -22,6 +22,7 @@
     <p:sldId id="515" r:id="rId28"/>
     <p:sldId id="520" r:id="rId33"/>
     <p:sldId id="517" r:id="rId30"/>
+    <p:sldId id="521" r:id="rId34"/>
     <p:sldId id="516" r:id="rId29"/>
     <p:sldId id="508" r:id="rId10"/>
     <p:sldId id="482" r:id="rId11"/>
@@ -13231,6 +13232,551 @@
       </p:transition>
     </mc:Fallback>
   </mc:AlternateContent>
+</p:sld>
+</file>
+
+<file path=ppt/slides/slide20.xml><?xml version="1.0" encoding="utf-8"?>
+<p:sld xmlns:a="http://schemas.openxmlformats.org/drawingml/2006/main" xmlns:p="http://schemas.openxmlformats.org/presentationml/2006/main" xmlns:r="http://schemas.openxmlformats.org/officeDocument/2006/relationships">
+  <p:cSld>
+    <p:spTree>
+      <p:nvGrpSpPr>
+        <p:cNvPr id="1" name=""/>
+        <p:cNvGrpSpPr/>
+        <p:nvPr/>
+      </p:nvGrpSpPr>
+      <p:grpSpPr/>
+      <p:sp>
+        <p:nvSpPr>
+          <p:cNvPr id="2" name="TextBox 1"/>
+          <p:cNvSpPr txBox="1"/>
+          <p:nvPr/>
+        </p:nvSpPr>
+        <p:spPr>
+          <a:xfrm>
+            <a:off x="457200" y="365760"/>
+            <a:ext cx="8229600" cy="548640"/>
+          </a:xfrm>
+          <a:prstGeom prst="rect">
+            <a:avLst/>
+          </a:prstGeom>
+          <a:noFill/>
+        </p:spPr>
+        <p:txBody>
+          <a:bodyPr wrap="square">
+            <a:spAutoFit/>
+          </a:bodyPr>
+          <a:lstStyle/>
+          <a:p>
+            <a:r>
+              <a:rPr sz="2200">
+                <a:solidFill>
+                  <a:srgbClr val="000000"/>
+                </a:solidFill>
+                <a:latin typeface="Avenir Next LT Pro Demi"/>
+              </a:rPr>
+              <a:t>Insider &amp; Governance Signals</a:t>
+            </a:r>
+          </a:p>
+        </p:txBody>
+      </p:sp>
+      <p:sp>
+        <p:nvSpPr>
+          <p:cNvPr id="3" name="Rectangle 2"/>
+          <p:cNvSpPr/>
+          <p:nvPr/>
+        </p:nvSpPr>
+        <p:spPr>
+          <a:xfrm>
+            <a:off x="457200" y="960120"/>
+            <a:ext cx="8229600" cy="25603"/>
+          </a:xfrm>
+          <a:prstGeom prst="rect">
+            <a:avLst/>
+          </a:prstGeom>
+          <a:solidFill>
+            <a:srgbClr val="000000"/>
+          </a:solidFill>
+          <a:ln>
+            <a:noFill/>
+          </a:ln>
+        </p:spPr>
+        <p:style>
+          <a:lnRef idx="1">
+            <a:schemeClr val="accent1"/>
+          </a:lnRef>
+          <a:fillRef idx="3">
+            <a:schemeClr val="accent1"/>
+          </a:fillRef>
+          <a:effectRef idx="2">
+            <a:schemeClr val="accent1"/>
+          </a:effectRef>
+          <a:fontRef idx="minor">
+            <a:schemeClr val="lt1"/>
+          </a:fontRef>
+        </p:style>
+        <p:txBody>
+          <a:bodyPr rtlCol="0" anchor="ctr"/>
+          <a:lstStyle/>
+          <a:p>
+            <a:pPr algn="ctr"/>
+          </a:p>
+        </p:txBody>
+      </p:sp>
+      <p:graphicFrame>
+        <p:nvGraphicFramePr>
+          <p:cNvPr id="4" name="Table 3"/>
+          <p:cNvGraphicFramePr>
+            <a:graphicFrameLocks noGrp="1"/>
+          </p:cNvGraphicFramePr>
+          <p:nvPr/>
+        </p:nvGraphicFramePr>
+        <p:xfrm>
+          <a:off x="457200" y="1325880"/>
+          <a:ext cx="8229600" cy="4114800"/>
+        </p:xfrm>
+        <a:graphic>
+          <a:graphicData uri="http://schemas.openxmlformats.org/drawingml/2006/table">
+            <a:tbl>
+              <a:tblPr>
+                <a:tableStyleId>{5C22544A-7EE6-4342-B048-85BDC9FD1C3A}</a:tableStyleId>
+              </a:tblPr>
+              <a:tblGrid>
+                <a:gridCol w="2148840"/>
+                <a:gridCol w="3703320"/>
+                <a:gridCol w="2377440"/>
+              </a:tblGrid>
+              <a:tr h="822960">
+                <a:tc>
+                  <a:txBody>
+                    <a:bodyPr/>
+                    <a:lstStyle/>
+                    <a:p>
+                      <a:pPr algn="l"/>
+                      <a:r>
+                        <a:rPr sz="1100" b="1">
+                          <a:solidFill>
+                            <a:srgbClr val="FFFFFF"/>
+                          </a:solidFill>
+                          <a:latin typeface="Avenir Next LT Pro Demi"/>
+                        </a:rPr>
+                        <a:t>Signal</a:t>
+                      </a:r>
+                    </a:p>
+                  </a:txBody>
+                  <a:tcPr marL="82296" marT="36576" marB="36576" anchor="ctr">
+                    <a:solidFill>
+                      <a:srgbClr val="9A7B44"/>
+                    </a:solidFill>
+                  </a:tcPr>
+                </a:tc>
+                <a:tc>
+                  <a:txBody>
+                    <a:bodyPr/>
+                    <a:lstStyle/>
+                    <a:p>
+                      <a:pPr algn="l"/>
+                      <a:r>
+                        <a:rPr sz="1100" b="1">
+                          <a:solidFill>
+                            <a:srgbClr val="FFFFFF"/>
+                          </a:solidFill>
+                          <a:latin typeface="Avenir Next LT Pro Demi"/>
+                        </a:rPr>
+                        <a:t>What we see</a:t>
+                      </a:r>
+                    </a:p>
+                  </a:txBody>
+                  <a:tcPr marL="82296" marT="36576" marB="36576" anchor="ctr">
+                    <a:solidFill>
+                      <a:srgbClr val="9A7B44"/>
+                    </a:solidFill>
+                  </a:tcPr>
+                </a:tc>
+                <a:tc>
+                  <a:txBody>
+                    <a:bodyPr/>
+                    <a:lstStyle/>
+                    <a:p>
+                      <a:pPr algn="l"/>
+                      <a:r>
+                        <a:rPr sz="1100" b="1">
+                          <a:solidFill>
+                            <a:srgbClr val="FFFFFF"/>
+                          </a:solidFill>
+                          <a:latin typeface="Avenir Next LT Pro Demi"/>
+                        </a:rPr>
+                        <a:t>Read</a:t>
+                      </a:r>
+                    </a:p>
+                  </a:txBody>
+                  <a:tcPr marL="82296" marT="36576" marB="36576" anchor="ctr">
+                    <a:solidFill>
+                      <a:srgbClr val="9A7B44"/>
+                    </a:solidFill>
+                  </a:tcPr>
+                </a:tc>
+              </a:tr>
+              <a:tr h="822960">
+                <a:tc>
+                  <a:txBody>
+                    <a:bodyPr/>
+                    <a:lstStyle/>
+                    <a:p>
+                      <a:pPr algn="l"/>
+                      <a:r>
+                        <a:rPr sz="1050" b="1">
+                          <a:solidFill>
+                            <a:srgbClr val="000000"/>
+                          </a:solidFill>
+                          <a:latin typeface="Avenir Next LT Pro Demi"/>
+                        </a:rPr>
+                        <a:t>Founder ownership</a:t>
+                      </a:r>
+                    </a:p>
+                  </a:txBody>
+                  <a:tcPr marL="82296" marT="36576" marB="36576" anchor="ctr">
+                    <a:solidFill>
+                      <a:srgbClr val="FFFFFF"/>
+                    </a:solidFill>
+                  </a:tcPr>
+                </a:tc>
+                <a:tc>
+                  <a:txBody>
+                    <a:bodyPr/>
+                    <a:lstStyle/>
+                    <a:p>
+                      <a:pPr algn="l"/>
+                      <a:r>
+                        <a:rPr sz="1050" b="0">
+                          <a:solidFill>
+                            <a:srgbClr val="000000"/>
+                          </a:solidFill>
+                          <a:latin typeface="Avenir Next LT Pro"/>
+                        </a:rPr>
+                        <a:t>Friedman owns ~18% outright (~25% incl. options); bought ~$10M at ~$216 (Jun 2024)</a:t>
+                      </a:r>
+                    </a:p>
+                  </a:txBody>
+                  <a:tcPr marL="82296" marT="36576" marB="36576" anchor="ctr">
+                    <a:solidFill>
+                      <a:srgbClr val="FFFFFF"/>
+                    </a:solidFill>
+                  </a:tcPr>
+                </a:tc>
+                <a:tc>
+                  <a:txBody>
+                    <a:bodyPr/>
+                    <a:lstStyle/>
+                    <a:p>
+                      <a:pPr algn="l"/>
+                      <a:r>
+                        <a:rPr sz="1050" b="0">
+                          <a:solidFill>
+                            <a:srgbClr val="000000"/>
+                          </a:solidFill>
+                          <a:latin typeface="Avenir Next LT Pro"/>
+                        </a:rPr>
+                        <a:t>Deep alignment</a:t>
+                      </a:r>
+                    </a:p>
+                  </a:txBody>
+                  <a:tcPr marL="82296" marT="36576" marB="36576" anchor="ctr">
+                    <a:solidFill>
+                      <a:srgbClr val="FFFFFF"/>
+                    </a:solidFill>
+                  </a:tcPr>
+                </a:tc>
+              </a:tr>
+              <a:tr h="822960">
+                <a:tc>
+                  <a:txBody>
+                    <a:bodyPr/>
+                    <a:lstStyle/>
+                    <a:p>
+                      <a:pPr algn="l"/>
+                      <a:r>
+                        <a:rPr sz="1050" b="1">
+                          <a:solidFill>
+                            <a:srgbClr val="000000"/>
+                          </a:solidFill>
+                          <a:latin typeface="Avenir Next LT Pro Demi"/>
+                        </a:rPr>
+                        <a:t>Recent insider activity</a:t>
+                      </a:r>
+                    </a:p>
+                  </a:txBody>
+                  <a:tcPr marL="82296" marT="36576" marB="36576" anchor="ctr">
+                    <a:solidFill>
+                      <a:srgbClr val="F4F6F8"/>
+                    </a:solidFill>
+                  </a:tcPr>
+                </a:tc>
+                <a:tc>
+                  <a:txBody>
+                    <a:bodyPr/>
+                    <a:lstStyle/>
+                    <a:p>
+                      <a:pPr algn="l"/>
+                      <a:r>
+                        <a:rPr sz="1050" b="0">
+                          <a:solidFill>
+                            <a:srgbClr val="000000"/>
+                          </a:solidFill>
+                          <a:latin typeface="Avenir Next LT Pro"/>
+                        </a:rPr>
+                        <a:t>Net selling over the past ~6 months (CEO + several execs); no open-market buys</a:t>
+                      </a:r>
+                    </a:p>
+                  </a:txBody>
+                  <a:tcPr marL="82296" marT="36576" marB="36576" anchor="ctr">
+                    <a:solidFill>
+                      <a:srgbClr val="F4F6F8"/>
+                    </a:solidFill>
+                  </a:tcPr>
+                </a:tc>
+                <a:tc>
+                  <a:txBody>
+                    <a:bodyPr/>
+                    <a:lstStyle/>
+                    <a:p>
+                      <a:pPr algn="l"/>
+                      <a:r>
+                        <a:rPr sz="1050" b="0">
+                          <a:solidFill>
+                            <a:srgbClr val="000000"/>
+                          </a:solidFill>
+                          <a:latin typeface="Avenir Next LT Pro"/>
+                        </a:rPr>
+                        <a:t>Mixed — largely option/tax-driven, but not a “buy here” signal</a:t>
+                      </a:r>
+                    </a:p>
+                  </a:txBody>
+                  <a:tcPr marL="82296" marT="36576" marB="36576" anchor="ctr">
+                    <a:solidFill>
+                      <a:srgbClr val="F4F6F8"/>
+                    </a:solidFill>
+                  </a:tcPr>
+                </a:tc>
+              </a:tr>
+              <a:tr h="822960">
+                <a:tc>
+                  <a:txBody>
+                    <a:bodyPr/>
+                    <a:lstStyle/>
+                    <a:p>
+                      <a:pPr algn="l"/>
+                      <a:r>
+                        <a:rPr sz="1050" b="1">
+                          <a:solidFill>
+                            <a:srgbClr val="000000"/>
+                          </a:solidFill>
+                          <a:latin typeface="Avenir Next LT Pro Demi"/>
+                        </a:rPr>
+                        <a:t>Board &amp; governance</a:t>
+                      </a:r>
+                    </a:p>
+                  </a:txBody>
+                  <a:tcPr marL="82296" marT="36576" marB="36576" anchor="ctr">
+                    <a:solidFill>
+                      <a:srgbClr val="FFFFFF"/>
+                    </a:solidFill>
+                  </a:tcPr>
+                </a:tc>
+                <a:tc>
+                  <a:txBody>
+                    <a:bodyPr/>
+                    <a:lstStyle/>
+                    <a:p>
+                      <a:pPr algn="l"/>
+                      <a:r>
+                        <a:rPr sz="1050" b="0">
+                          <a:solidFill>
+                            <a:srgbClr val="000000"/>
+                          </a:solidFill>
+                          <a:latin typeface="Avenir Next LT Pro"/>
+                        </a:rPr>
+                        <a:t>Jun 2026 annual meeting: directors re-elected; say-on-pay &amp; PwC ratified</a:t>
+                      </a:r>
+                    </a:p>
+                  </a:txBody>
+                  <a:tcPr marL="82296" marT="36576" marB="36576" anchor="ctr">
+                    <a:solidFill>
+                      <a:srgbClr val="FFFFFF"/>
+                    </a:solidFill>
+                  </a:tcPr>
+                </a:tc>
+                <a:tc>
+                  <a:txBody>
+                    <a:bodyPr/>
+                    <a:lstStyle/>
+                    <a:p>
+                      <a:pPr algn="l"/>
+                      <a:r>
+                        <a:rPr sz="1050" b="0">
+                          <a:solidFill>
+                            <a:srgbClr val="000000"/>
+                          </a:solidFill>
+                          <a:latin typeface="Avenir Next LT Pro"/>
+                        </a:rPr>
+                        <a:t>Stable, founder-led; no activist involvement</a:t>
+                      </a:r>
+                    </a:p>
+                  </a:txBody>
+                  <a:tcPr marL="82296" marT="36576" marB="36576" anchor="ctr">
+                    <a:solidFill>
+                      <a:srgbClr val="FFFFFF"/>
+                    </a:solidFill>
+                  </a:tcPr>
+                </a:tc>
+              </a:tr>
+              <a:tr h="822960">
+                <a:tc>
+                  <a:txBody>
+                    <a:bodyPr/>
+                    <a:lstStyle/>
+                    <a:p>
+                      <a:pPr algn="l"/>
+                      <a:r>
+                        <a:rPr sz="1050" b="1">
+                          <a:solidFill>
+                            <a:srgbClr val="000000"/>
+                          </a:solidFill>
+                          <a:latin typeface="Avenir Next LT Pro Demi"/>
+                        </a:rPr>
+                        <a:t>Management intent</a:t>
+                      </a:r>
+                    </a:p>
+                  </a:txBody>
+                  <a:tcPr marL="82296" marT="36576" marB="36576" anchor="ctr">
+                    <a:solidFill>
+                      <a:srgbClr val="F4F6F8"/>
+                    </a:solidFill>
+                  </a:tcPr>
+                </a:tc>
+                <a:tc>
+                  <a:txBody>
+                    <a:bodyPr/>
+                    <a:lstStyle/>
+                    <a:p>
+                      <a:pPr algn="l"/>
+                      <a:r>
+                        <a:rPr sz="1050" b="0">
+                          <a:solidFill>
+                            <a:srgbClr val="000000"/>
+                          </a:solidFill>
+                          <a:latin typeface="Avenir Next LT Pro"/>
+                        </a:rPr>
+                        <a:t>Stated goal: debt-free by 2029 (FCF + asset sales); Estates upmarket push</a:t>
+                      </a:r>
+                    </a:p>
+                  </a:txBody>
+                  <a:tcPr marL="82296" marT="36576" marB="36576" anchor="ctr">
+                    <a:solidFill>
+                      <a:srgbClr val="F4F6F8"/>
+                    </a:solidFill>
+                  </a:tcPr>
+                </a:tc>
+                <a:tc>
+                  <a:txBody>
+                    <a:bodyPr/>
+                    <a:lstStyle/>
+                    <a:p>
+                      <a:pPr algn="l"/>
+                      <a:r>
+                        <a:rPr sz="1050" b="0">
+                          <a:solidFill>
+                            <a:srgbClr val="000000"/>
+                          </a:solidFill>
+                          <a:latin typeface="Avenir Next LT Pro"/>
+                        </a:rPr>
+                        <a:t>Addressing leverage, but expansion spend continues</a:t>
+                      </a:r>
+                    </a:p>
+                  </a:txBody>
+                  <a:tcPr marL="82296" marT="36576" marB="36576" anchor="ctr">
+                    <a:solidFill>
+                      <a:srgbClr val="F4F6F8"/>
+                    </a:solidFill>
+                  </a:tcPr>
+                </a:tc>
+              </a:tr>
+            </a:tbl>
+          </a:graphicData>
+        </a:graphic>
+      </p:graphicFrame>
+      <p:sp>
+        <p:nvSpPr>
+          <p:cNvPr id="5" name="TextBox 4"/>
+          <p:cNvSpPr txBox="1"/>
+          <p:nvPr/>
+        </p:nvSpPr>
+        <p:spPr>
+          <a:xfrm>
+            <a:off x="457200" y="5623560"/>
+            <a:ext cx="8229600" cy="457200"/>
+          </a:xfrm>
+          <a:prstGeom prst="rect">
+            <a:avLst/>
+          </a:prstGeom>
+          <a:noFill/>
+        </p:spPr>
+        <p:txBody>
+          <a:bodyPr wrap="square">
+            <a:spAutoFit/>
+          </a:bodyPr>
+          <a:lstStyle/>
+          <a:p>
+            <a:r>
+              <a:rPr sz="1100" b="1">
+                <a:solidFill>
+                  <a:srgbClr val="000000"/>
+                </a:solidFill>
+                <a:latin typeface="Avenir Next LT Pro Demi"/>
+              </a:rPr>
+              <a:t>Net: founder alignment is real, but insiders aren't signaling “buy here” — recent activity is net selling and expansion spend continues. Governance is stable and founder-controlled (no activist catalyst). Consistent with Hold.</a:t>
+            </a:r>
+          </a:p>
+        </p:txBody>
+      </p:sp>
+      <p:sp>
+        <p:nvSpPr>
+          <p:cNvPr id="6" name="TextBox 5"/>
+          <p:cNvSpPr txBox="1"/>
+          <p:nvPr/>
+        </p:nvSpPr>
+        <p:spPr>
+          <a:xfrm>
+            <a:off x="457200" y="6309360"/>
+            <a:ext cx="8229600" cy="320040"/>
+          </a:xfrm>
+          <a:prstGeom prst="rect">
+            <a:avLst/>
+          </a:prstGeom>
+          <a:noFill/>
+        </p:spPr>
+        <p:txBody>
+          <a:bodyPr wrap="none">
+            <a:spAutoFit/>
+          </a:bodyPr>
+          <a:lstStyle/>
+          <a:p>
+            <a:r>
+              <a:rPr sz="750" i="1">
+                <a:solidFill>
+                  <a:srgbClr val="707070"/>
+                </a:solidFill>
+                <a:latin typeface="Avenir Next LT Pro"/>
+              </a:rPr>
+              <a:t>Sources: RH DEF 14A proxy; SEC Form 4 filings; RH 8-K (Jun 2026 annual meeting); company guidance.</a:t>
+            </a:r>
+          </a:p>
+        </p:txBody>
+      </p:sp>
+    </p:spTree>
+  </p:cSld>
+  <p:clrMapOvr>
+    <a:masterClrMapping/>
+  </p:clrMapOvr>
 </p:sld>
 </file>
 

--- a/RH_Stock_Pitch_updated.pptx
+++ b/RH_Stock_Pitch_updated.pptx
@@ -6342,9 +6342,6 @@
             <a:avLst/>
           </a:prstGeom>
           <a:noFill/>
-          <a:ln>
-            <a:solidFill/>
-          </a:ln>
         </p:spPr>
         <p:txBody>
           <a:bodyPr wrap="square">
@@ -6353,13 +6350,13 @@
           <a:lstStyle/>
           <a:p>
             <a:r>
-              <a:rPr sz="2200" b="0">
+              <a:rPr sz="2200">
                 <a:solidFill>
                   <a:srgbClr val="000000"/>
                 </a:solidFill>
                 <a:latin typeface="Avenir Next LT Pro Demi"/>
               </a:rPr>
-              <a:t>Is It Working?</a:t>
+              <a:t>Insider &amp; Governance Signals</a:t>
             </a:r>
           </a:p>
         </p:txBody>
@@ -6382,7 +6379,7 @@
             <a:srgbClr val="000000"/>
           </a:solidFill>
           <a:ln>
-            <a:solidFill/>
+            <a:noFill/>
           </a:ln>
         </p:spPr>
         <p:style>
@@ -6407,6 +6404,554 @@
           </a:p>
         </p:txBody>
       </p:sp>
+      <p:graphicFrame>
+        <p:nvGraphicFramePr>
+          <p:cNvPr id="4" name="Table 3"/>
+          <p:cNvGraphicFramePr>
+            <a:graphicFrameLocks noGrp="1"/>
+          </p:cNvGraphicFramePr>
+          <p:nvPr/>
+        </p:nvGraphicFramePr>
+        <p:xfrm>
+          <a:off x="457200" y="1325880"/>
+          <a:ext cx="8229600" cy="4114800"/>
+        </p:xfrm>
+        <a:graphic>
+          <a:graphicData uri="http://schemas.openxmlformats.org/drawingml/2006/table">
+            <a:tbl>
+              <a:tblPr>
+                <a:tableStyleId>{5C22544A-7EE6-4342-B048-85BDC9FD1C3A}</a:tableStyleId>
+              </a:tblPr>
+              <a:tblGrid>
+                <a:gridCol w="2148840"/>
+                <a:gridCol w="3703320"/>
+                <a:gridCol w="2377440"/>
+              </a:tblGrid>
+              <a:tr h="822960">
+                <a:tc>
+                  <a:txBody>
+                    <a:bodyPr/>
+                    <a:lstStyle/>
+                    <a:p>
+                      <a:pPr algn="l"/>
+                      <a:r>
+                        <a:rPr sz="1100" b="1">
+                          <a:solidFill>
+                            <a:srgbClr val="FFFFFF"/>
+                          </a:solidFill>
+                          <a:latin typeface="Avenir Next LT Pro Demi"/>
+                        </a:rPr>
+                        <a:t>Signal</a:t>
+                      </a:r>
+                    </a:p>
+                  </a:txBody>
+                  <a:tcPr marL="82296" marT="36576" marB="36576" anchor="ctr">
+                    <a:solidFill>
+                      <a:srgbClr val="9A7B44"/>
+                    </a:solidFill>
+                  </a:tcPr>
+                </a:tc>
+                <a:tc>
+                  <a:txBody>
+                    <a:bodyPr/>
+                    <a:lstStyle/>
+                    <a:p>
+                      <a:pPr algn="l"/>
+                      <a:r>
+                        <a:rPr sz="1100" b="1">
+                          <a:solidFill>
+                            <a:srgbClr val="FFFFFF"/>
+                          </a:solidFill>
+                          <a:latin typeface="Avenir Next LT Pro Demi"/>
+                        </a:rPr>
+                        <a:t>What we see</a:t>
+                      </a:r>
+                    </a:p>
+                  </a:txBody>
+                  <a:tcPr marL="82296" marT="36576" marB="36576" anchor="ctr">
+                    <a:solidFill>
+                      <a:srgbClr val="9A7B44"/>
+                    </a:solidFill>
+                  </a:tcPr>
+                </a:tc>
+                <a:tc>
+                  <a:txBody>
+                    <a:bodyPr/>
+                    <a:lstStyle/>
+                    <a:p>
+                      <a:pPr algn="l"/>
+                      <a:r>
+                        <a:rPr sz="1100" b="1">
+                          <a:solidFill>
+                            <a:srgbClr val="FFFFFF"/>
+                          </a:solidFill>
+                          <a:latin typeface="Avenir Next LT Pro Demi"/>
+                        </a:rPr>
+                        <a:t>Read</a:t>
+                      </a:r>
+                    </a:p>
+                  </a:txBody>
+                  <a:tcPr marL="82296" marT="36576" marB="36576" anchor="ctr">
+                    <a:solidFill>
+                      <a:srgbClr val="9A7B44"/>
+                    </a:solidFill>
+                  </a:tcPr>
+                </a:tc>
+              </a:tr>
+              <a:tr h="822960">
+                <a:tc>
+                  <a:txBody>
+                    <a:bodyPr/>
+                    <a:lstStyle/>
+                    <a:p>
+                      <a:pPr algn="l"/>
+                      <a:r>
+                        <a:rPr sz="1050" b="1">
+                          <a:solidFill>
+                            <a:srgbClr val="000000"/>
+                          </a:solidFill>
+                          <a:latin typeface="Avenir Next LT Pro Demi"/>
+                        </a:rPr>
+                        <a:t>Founder ownership</a:t>
+                      </a:r>
+                    </a:p>
+                  </a:txBody>
+                  <a:tcPr marL="82296" marT="36576" marB="36576" anchor="ctr">
+                    <a:solidFill>
+                      <a:srgbClr val="FFFFFF"/>
+                    </a:solidFill>
+                  </a:tcPr>
+                </a:tc>
+                <a:tc>
+                  <a:txBody>
+                    <a:bodyPr/>
+                    <a:lstStyle/>
+                    <a:p>
+                      <a:pPr algn="l"/>
+                      <a:r>
+                        <a:rPr sz="1050" b="0">
+                          <a:solidFill>
+                            <a:srgbClr val="000000"/>
+                          </a:solidFill>
+                          <a:latin typeface="Avenir Next LT Pro"/>
+                        </a:rPr>
+                        <a:t>Friedman owns ~18% outright (~25% incl. options); bought ~$10M at ~$216 (Jun 2024)</a:t>
+                      </a:r>
+                    </a:p>
+                  </a:txBody>
+                  <a:tcPr marL="82296" marT="36576" marB="36576" anchor="ctr">
+                    <a:solidFill>
+                      <a:srgbClr val="FFFFFF"/>
+                    </a:solidFill>
+                  </a:tcPr>
+                </a:tc>
+                <a:tc>
+                  <a:txBody>
+                    <a:bodyPr/>
+                    <a:lstStyle/>
+                    <a:p>
+                      <a:pPr algn="l"/>
+                      <a:r>
+                        <a:rPr sz="1050" b="0">
+                          <a:solidFill>
+                            <a:srgbClr val="000000"/>
+                          </a:solidFill>
+                          <a:latin typeface="Avenir Next LT Pro"/>
+                        </a:rPr>
+                        <a:t>Deep alignment</a:t>
+                      </a:r>
+                    </a:p>
+                  </a:txBody>
+                  <a:tcPr marL="82296" marT="36576" marB="36576" anchor="ctr">
+                    <a:solidFill>
+                      <a:srgbClr val="FFFFFF"/>
+                    </a:solidFill>
+                  </a:tcPr>
+                </a:tc>
+              </a:tr>
+              <a:tr h="822960">
+                <a:tc>
+                  <a:txBody>
+                    <a:bodyPr/>
+                    <a:lstStyle/>
+                    <a:p>
+                      <a:pPr algn="l"/>
+                      <a:r>
+                        <a:rPr sz="1050" b="1">
+                          <a:solidFill>
+                            <a:srgbClr val="000000"/>
+                          </a:solidFill>
+                          <a:latin typeface="Avenir Next LT Pro Demi"/>
+                        </a:rPr>
+                        <a:t>Recent insider activity</a:t>
+                      </a:r>
+                    </a:p>
+                  </a:txBody>
+                  <a:tcPr marL="82296" marT="36576" marB="36576" anchor="ctr">
+                    <a:solidFill>
+                      <a:srgbClr val="F4F6F8"/>
+                    </a:solidFill>
+                  </a:tcPr>
+                </a:tc>
+                <a:tc>
+                  <a:txBody>
+                    <a:bodyPr/>
+                    <a:lstStyle/>
+                    <a:p>
+                      <a:pPr algn="l"/>
+                      <a:r>
+                        <a:rPr sz="1050" b="0">
+                          <a:solidFill>
+                            <a:srgbClr val="000000"/>
+                          </a:solidFill>
+                          <a:latin typeface="Avenir Next LT Pro"/>
+                        </a:rPr>
+                        <a:t>Mixed — mostly sales (partly option/tax-driven), plus a recent director open-market buy (~$1.8M, Jul 2026)</a:t>
+                      </a:r>
+                    </a:p>
+                  </a:txBody>
+                  <a:tcPr marL="82296" marT="36576" marB="36576" anchor="ctr">
+                    <a:solidFill>
+                      <a:srgbClr val="F4F6F8"/>
+                    </a:solidFill>
+                  </a:tcPr>
+                </a:tc>
+                <a:tc>
+                  <a:txBody>
+                    <a:bodyPr/>
+                    <a:lstStyle/>
+                    <a:p>
+                      <a:pPr algn="l"/>
+                      <a:r>
+                        <a:rPr sz="1050" b="0">
+                          <a:solidFill>
+                            <a:srgbClr val="000000"/>
+                          </a:solidFill>
+                          <a:latin typeface="Avenir Next LT Pro"/>
+                        </a:rPr>
+                        <a:t>No strong insider signal either way</a:t>
+                      </a:r>
+                    </a:p>
+                  </a:txBody>
+                  <a:tcPr marL="82296" marT="36576" marB="36576" anchor="ctr">
+                    <a:solidFill>
+                      <a:srgbClr val="F4F6F8"/>
+                    </a:solidFill>
+                  </a:tcPr>
+                </a:tc>
+              </a:tr>
+              <a:tr h="822960">
+                <a:tc>
+                  <a:txBody>
+                    <a:bodyPr/>
+                    <a:lstStyle/>
+                    <a:p>
+                      <a:pPr algn="l"/>
+                      <a:r>
+                        <a:rPr sz="1050" b="1">
+                          <a:solidFill>
+                            <a:srgbClr val="000000"/>
+                          </a:solidFill>
+                          <a:latin typeface="Avenir Next LT Pro Demi"/>
+                        </a:rPr>
+                        <a:t>Board &amp; governance</a:t>
+                      </a:r>
+                    </a:p>
+                  </a:txBody>
+                  <a:tcPr marL="82296" marT="36576" marB="36576" anchor="ctr">
+                    <a:solidFill>
+                      <a:srgbClr val="FFFFFF"/>
+                    </a:solidFill>
+                  </a:tcPr>
+                </a:tc>
+                <a:tc>
+                  <a:txBody>
+                    <a:bodyPr/>
+                    <a:lstStyle/>
+                    <a:p>
+                      <a:pPr algn="l"/>
+                      <a:r>
+                        <a:rPr sz="1050" b="0">
+                          <a:solidFill>
+                            <a:srgbClr val="000000"/>
+                          </a:solidFill>
+                          <a:latin typeface="Avenir Next LT Pro"/>
+                        </a:rPr>
+                        <a:t>Jun 2026 annual meeting: directors re-elected; say-on-pay &amp; PwC ratified</a:t>
+                      </a:r>
+                    </a:p>
+                  </a:txBody>
+                  <a:tcPr marL="82296" marT="36576" marB="36576" anchor="ctr">
+                    <a:solidFill>
+                      <a:srgbClr val="FFFFFF"/>
+                    </a:solidFill>
+                  </a:tcPr>
+                </a:tc>
+                <a:tc>
+                  <a:txBody>
+                    <a:bodyPr/>
+                    <a:lstStyle/>
+                    <a:p>
+                      <a:pPr algn="l"/>
+                      <a:r>
+                        <a:rPr sz="1050" b="0">
+                          <a:solidFill>
+                            <a:srgbClr val="000000"/>
+                          </a:solidFill>
+                          <a:latin typeface="Avenir Next LT Pro"/>
+                        </a:rPr>
+                        <a:t>Stable, founder-led; no activist involvement</a:t>
+                      </a:r>
+                    </a:p>
+                  </a:txBody>
+                  <a:tcPr marL="82296" marT="36576" marB="36576" anchor="ctr">
+                    <a:solidFill>
+                      <a:srgbClr val="FFFFFF"/>
+                    </a:solidFill>
+                  </a:tcPr>
+                </a:tc>
+              </a:tr>
+              <a:tr h="822960">
+                <a:tc>
+                  <a:txBody>
+                    <a:bodyPr/>
+                    <a:lstStyle/>
+                    <a:p>
+                      <a:pPr algn="l"/>
+                      <a:r>
+                        <a:rPr sz="1050" b="1">
+                          <a:solidFill>
+                            <a:srgbClr val="000000"/>
+                          </a:solidFill>
+                          <a:latin typeface="Avenir Next LT Pro Demi"/>
+                        </a:rPr>
+                        <a:t>Management intent</a:t>
+                      </a:r>
+                    </a:p>
+                  </a:txBody>
+                  <a:tcPr marL="82296" marT="36576" marB="36576" anchor="ctr">
+                    <a:solidFill>
+                      <a:srgbClr val="F4F6F8"/>
+                    </a:solidFill>
+                  </a:tcPr>
+                </a:tc>
+                <a:tc>
+                  <a:txBody>
+                    <a:bodyPr/>
+                    <a:lstStyle/>
+                    <a:p>
+                      <a:pPr algn="l"/>
+                      <a:r>
+                        <a:rPr sz="1050" b="0">
+                          <a:solidFill>
+                            <a:srgbClr val="000000"/>
+                          </a:solidFill>
+                          <a:latin typeface="Avenir Next LT Pro"/>
+                        </a:rPr>
+                        <a:t>Stated goal: debt-free by 2029 (FCF + asset sales); Estates upmarket push</a:t>
+                      </a:r>
+                    </a:p>
+                  </a:txBody>
+                  <a:tcPr marL="82296" marT="36576" marB="36576" anchor="ctr">
+                    <a:solidFill>
+                      <a:srgbClr val="F4F6F8"/>
+                    </a:solidFill>
+                  </a:tcPr>
+                </a:tc>
+                <a:tc>
+                  <a:txBody>
+                    <a:bodyPr/>
+                    <a:lstStyle/>
+                    <a:p>
+                      <a:pPr algn="l"/>
+                      <a:r>
+                        <a:rPr sz="1050" b="0">
+                          <a:solidFill>
+                            <a:srgbClr val="000000"/>
+                          </a:solidFill>
+                          <a:latin typeface="Avenir Next LT Pro"/>
+                        </a:rPr>
+                        <a:t>Addressing leverage, but expansion spend continues</a:t>
+                      </a:r>
+                    </a:p>
+                  </a:txBody>
+                  <a:tcPr marL="82296" marT="36576" marB="36576" anchor="ctr">
+                    <a:solidFill>
+                      <a:srgbClr val="F4F6F8"/>
+                    </a:solidFill>
+                  </a:tcPr>
+                </a:tc>
+              </a:tr>
+            </a:tbl>
+          </a:graphicData>
+        </a:graphic>
+      </p:graphicFrame>
+      <p:sp>
+        <p:nvSpPr>
+          <p:cNvPr id="5" name="TextBox 4"/>
+          <p:cNvSpPr txBox="1"/>
+          <p:nvPr/>
+        </p:nvSpPr>
+        <p:spPr>
+          <a:xfrm>
+            <a:off x="457200" y="5623560"/>
+            <a:ext cx="8229600" cy="457200"/>
+          </a:xfrm>
+          <a:prstGeom prst="rect">
+            <a:avLst/>
+          </a:prstGeom>
+          <a:noFill/>
+        </p:spPr>
+        <p:txBody>
+          <a:bodyPr wrap="square">
+            <a:spAutoFit/>
+          </a:bodyPr>
+          <a:lstStyle/>
+          <a:p>
+            <a:r>
+              <a:rPr sz="1100" b="1">
+                <a:solidFill>
+                  <a:srgbClr val="000000"/>
+                </a:solidFill>
+                <a:latin typeface="Avenir Next LT Pro Demi"/>
+              </a:rPr>
+              <a:t>Net: founder alignment is real, but recent insider activity is mixed (mostly sales, one recent director buy) — no strong signal either way. Governance is stable and founder-controlled (no activist catalyst). Consistent with Hold.</a:t>
+            </a:r>
+          </a:p>
+        </p:txBody>
+      </p:sp>
+      <p:sp>
+        <p:nvSpPr>
+          <p:cNvPr id="6" name="TextBox 5"/>
+          <p:cNvSpPr txBox="1"/>
+          <p:nvPr/>
+        </p:nvSpPr>
+        <p:spPr>
+          <a:xfrm>
+            <a:off x="457200" y="6309360"/>
+            <a:ext cx="8229600" cy="320040"/>
+          </a:xfrm>
+          <a:prstGeom prst="rect">
+            <a:avLst/>
+          </a:prstGeom>
+          <a:noFill/>
+        </p:spPr>
+        <p:txBody>
+          <a:bodyPr wrap="none">
+            <a:spAutoFit/>
+          </a:bodyPr>
+          <a:lstStyle/>
+          <a:p>
+            <a:r>
+              <a:rPr sz="750" i="1">
+                <a:solidFill>
+                  <a:srgbClr val="707070"/>
+                </a:solidFill>
+                <a:latin typeface="Avenir Next LT Pro"/>
+              </a:rPr>
+              <a:t>Sources: RH DEF 14A proxy; SEC Form 4 filings; RH 8-K (Jun 2026 annual meeting); company guidance.</a:t>
+            </a:r>
+          </a:p>
+        </p:txBody>
+      </p:sp>
+    </p:spTree>
+  </p:cSld>
+  <p:clrMapOvr>
+    <a:masterClrMapping/>
+  </p:clrMapOvr>
+</p:sld>
+</file>
+
+<file path=ppt/slides/slide13.xml><?xml version="1.0" encoding="utf-8"?>
+<p:sld xmlns:a="http://schemas.openxmlformats.org/drawingml/2006/main" xmlns:p="http://schemas.openxmlformats.org/presentationml/2006/main" xmlns:r="http://schemas.openxmlformats.org/officeDocument/2006/relationships">
+  <p:cSld>
+    <p:spTree>
+      <p:nvGrpSpPr>
+        <p:cNvPr id="1" name=""/>
+        <p:cNvGrpSpPr/>
+        <p:nvPr/>
+      </p:nvGrpSpPr>
+      <p:grpSpPr/>
+      <p:sp>
+        <p:nvSpPr>
+          <p:cNvPr id="2" name="TextBox 1"/>
+          <p:cNvSpPr txBox="1"/>
+          <p:nvPr/>
+        </p:nvSpPr>
+        <p:spPr>
+          <a:xfrm>
+            <a:off x="457200" y="365760"/>
+            <a:ext cx="8229600" cy="548640"/>
+          </a:xfrm>
+          <a:prstGeom prst="rect">
+            <a:avLst/>
+          </a:prstGeom>
+          <a:noFill/>
+          <a:ln>
+            <a:solidFill/>
+          </a:ln>
+        </p:spPr>
+        <p:txBody>
+          <a:bodyPr wrap="square">
+            <a:spAutoFit/>
+          </a:bodyPr>
+          <a:lstStyle/>
+          <a:p>
+            <a:r>
+              <a:rPr sz="2200" b="0">
+                <a:solidFill>
+                  <a:srgbClr val="000000"/>
+                </a:solidFill>
+                <a:latin typeface="Avenir Next LT Pro Demi"/>
+              </a:rPr>
+              <a:t>Is It Working?</a:t>
+            </a:r>
+          </a:p>
+        </p:txBody>
+      </p:sp>
+      <p:sp>
+        <p:nvSpPr>
+          <p:cNvPr id="3" name="Rectangle 2"/>
+          <p:cNvSpPr/>
+          <p:nvPr/>
+        </p:nvSpPr>
+        <p:spPr>
+          <a:xfrm>
+            <a:off x="457200" y="960120"/>
+            <a:ext cx="8229600" cy="25603"/>
+          </a:xfrm>
+          <a:prstGeom prst="rect">
+            <a:avLst/>
+          </a:prstGeom>
+          <a:solidFill>
+            <a:srgbClr val="000000"/>
+          </a:solidFill>
+          <a:ln>
+            <a:solidFill/>
+          </a:ln>
+        </p:spPr>
+        <p:style>
+          <a:lnRef idx="1">
+            <a:schemeClr val="accent1"/>
+          </a:lnRef>
+          <a:fillRef idx="3">
+            <a:schemeClr val="accent1"/>
+          </a:fillRef>
+          <a:effectRef idx="2">
+            <a:schemeClr val="accent1"/>
+          </a:effectRef>
+          <a:fontRef idx="minor">
+            <a:schemeClr val="lt1"/>
+          </a:fontRef>
+        </p:style>
+        <p:txBody>
+          <a:bodyPr rtlCol="0" anchor="ctr"/>
+          <a:lstStyle/>
+          <a:p>
+            <a:pPr algn="ctr"/>
+          </a:p>
+        </p:txBody>
+      </p:sp>
       <p:sp>
         <p:nvSpPr>
           <p:cNvPr id="4" name="Rectangle 3"/>
@@ -6869,7 +7414,7 @@
 </p:sld>
 </file>
 
-<file path=ppt/slides/slide13.xml><?xml version="1.0" encoding="utf-8"?>
+<file path=ppt/slides/slide14.xml><?xml version="1.0" encoding="utf-8"?>
 <p:sld xmlns:a="http://schemas.openxmlformats.org/drawingml/2006/main" xmlns:r="http://schemas.openxmlformats.org/officeDocument/2006/relationships" xmlns:p="http://schemas.openxmlformats.org/presentationml/2006/main">
   <p:cSld>
     <p:spTree>
@@ -8398,7 +8943,7 @@
 </p:sld>
 </file>
 
-<file path=ppt/slides/slide14.xml><?xml version="1.0" encoding="utf-8"?>
+<file path=ppt/slides/slide15.xml><?xml version="1.0" encoding="utf-8"?>
 <p:sld xmlns:a="http://schemas.openxmlformats.org/drawingml/2006/main" xmlns:r="http://schemas.openxmlformats.org/officeDocument/2006/relationships" xmlns:p="http://schemas.openxmlformats.org/presentationml/2006/main">
   <p:cSld>
     <p:spTree>
@@ -8474,7 +9019,7 @@
 </p:sld>
 </file>
 
-<file path=ppt/slides/slide15.xml><?xml version="1.0" encoding="utf-8"?>
+<file path=ppt/slides/slide16.xml><?xml version="1.0" encoding="utf-8"?>
 <p:sld xmlns:a="http://schemas.openxmlformats.org/drawingml/2006/main" xmlns:r="http://schemas.openxmlformats.org/officeDocument/2006/relationships" xmlns:p="http://schemas.openxmlformats.org/presentationml/2006/main">
   <p:cSld>
     <p:spTree>
@@ -9605,7 +10150,7 @@
 </p:sld>
 </file>
 
-<file path=ppt/slides/slide16.xml><?xml version="1.0" encoding="utf-8"?>
+<file path=ppt/slides/slide17.xml><?xml version="1.0" encoding="utf-8"?>
 <p:sld xmlns:a="http://schemas.openxmlformats.org/drawingml/2006/main" xmlns:r="http://schemas.openxmlformats.org/officeDocument/2006/relationships" xmlns:p="http://schemas.openxmlformats.org/presentationml/2006/main">
   <p:cSld>
     <p:spTree>
@@ -10536,7 +11081,7 @@
 </p:sld>
 </file>
 
-<file path=ppt/slides/slide17.xml><?xml version="1.0" encoding="utf-8"?>
+<file path=ppt/slides/slide18.xml><?xml version="1.0" encoding="utf-8"?>
 <p:sld xmlns:a="http://schemas.openxmlformats.org/drawingml/2006/main" xmlns:r="http://schemas.openxmlformats.org/officeDocument/2006/relationships" xmlns:p="http://schemas.openxmlformats.org/presentationml/2006/main">
   <p:cSld>
     <p:spTree>
@@ -10612,7 +11157,7 @@
 </p:sld>
 </file>
 
-<file path=ppt/slides/slide18.xml><?xml version="1.0" encoding="utf-8"?>
+<file path=ppt/slides/slide19.xml><?xml version="1.0" encoding="utf-8"?>
 <p:sld xmlns:a="http://schemas.openxmlformats.org/drawingml/2006/main" xmlns:r="http://schemas.openxmlformats.org/officeDocument/2006/relationships" xmlns:p="http://schemas.openxmlformats.org/presentationml/2006/main">
   <p:cSld>
     <p:spTree>
@@ -11571,866 +12116,6 @@
 </p:sld>
 </file>
 
-<file path=ppt/slides/slide19.xml><?xml version="1.0" encoding="utf-8"?>
-<p:sld xmlns:a="http://schemas.openxmlformats.org/drawingml/2006/main" xmlns:r="http://schemas.openxmlformats.org/officeDocument/2006/relationships" xmlns:p="http://schemas.openxmlformats.org/presentationml/2006/main">
-  <p:cSld>
-    <p:spTree>
-      <p:nvGrpSpPr>
-        <p:cNvPr id="1" name=""/>
-        <p:cNvGrpSpPr/>
-        <p:nvPr/>
-      </p:nvGrpSpPr>
-      <p:grpSpPr>
-        <a:xfrm>
-          <a:off x="0" y="0"/>
-          <a:ext cx="0" cy="0"/>
-          <a:chOff x="0" y="0"/>
-          <a:chExt cx="0" cy="0"/>
-        </a:xfrm>
-      </p:grpSpPr>
-      <p:sp>
-        <p:nvSpPr>
-          <p:cNvPr id="2" name="TextBox 1"/>
-          <p:cNvSpPr txBox="1"/>
-          <p:nvPr/>
-        </p:nvSpPr>
-        <p:spPr>
-          <a:xfrm>
-            <a:off x="457198" y="274320"/>
-            <a:ext cx="8229600" cy="446276"/>
-          </a:xfrm>
-          <a:prstGeom prst="rect">
-            <a:avLst/>
-          </a:prstGeom>
-          <a:noFill/>
-          <a:ln>
-            <a:solidFill/>
-          </a:ln>
-        </p:spPr>
-        <p:txBody>
-          <a:bodyPr wrap="square">
-            <a:spAutoFit/>
-          </a:bodyPr>
-          <a:lstStyle/>
-          <a:p>
-            <a:r>
-              <a:rPr sz="2300" b="0" i="0" dirty="0">
-                <a:solidFill/>
-                <a:latin typeface="Avenir Next LT Pro Demi"/>
-              </a:rPr>
-              <a:t>Key Risks — What Has to Go Wrong</a:t>
-            </a:r>
-          </a:p>
-        </p:txBody>
-      </p:sp>
-      <p:sp>
-        <p:nvSpPr>
-          <p:cNvPr id="5" name="TextBox 4"/>
-          <p:cNvSpPr txBox="1"/>
-          <p:nvPr/>
-        </p:nvSpPr>
-        <p:spPr>
-          <a:xfrm>
-            <a:off x="457200" y="1051560"/>
-            <a:ext cx="8229600" cy="274320"/>
-          </a:xfrm>
-          <a:prstGeom prst="rect">
-            <a:avLst/>
-          </a:prstGeom>
-          <a:noFill/>
-          <a:ln>
-            <a:solidFill/>
-          </a:ln>
-        </p:spPr>
-        <p:txBody>
-          <a:bodyPr wrap="none">
-            <a:spAutoFit/>
-          </a:bodyPr>
-          <a:lstStyle/>
-          <a:p>
-            <a:r>
-              <a:rPr sz="900" b="0" i="1">
-                <a:solidFill>
-                  <a:srgbClr val="B0B0B0"/>
-                </a:solidFill>
-                <a:latin typeface="Avenir Next LT Pro"/>
-              </a:rPr>
-              <a:t>[ narrative / commentary to be written ]</a:t>
-            </a:r>
-          </a:p>
-        </p:txBody>
-      </p:sp>
-      <p:sp>
-        <p:nvSpPr>
-          <p:cNvPr id="6" name="Rectangle 5"/>
-          <p:cNvSpPr/>
-          <p:nvPr/>
-        </p:nvSpPr>
-        <p:spPr>
-          <a:xfrm>
-            <a:off x="457200" y="1554480"/>
-            <a:ext cx="3977639" cy="960120"/>
-          </a:xfrm>
-          <a:prstGeom prst="rect">
-            <a:avLst/>
-          </a:prstGeom>
-          <a:solidFill>
-            <a:srgbClr val="FFFFFF"/>
-          </a:solidFill>
-          <a:ln w="12700">
-            <a:solidFill>
-              <a:srgbClr val="E8E8E8"/>
-            </a:solidFill>
-          </a:ln>
-        </p:spPr>
-        <p:style>
-          <a:lnRef idx="1">
-            <a:schemeClr val="accent1"/>
-          </a:lnRef>
-          <a:fillRef idx="3">
-            <a:schemeClr val="accent1"/>
-          </a:fillRef>
-          <a:effectRef idx="2">
-            <a:schemeClr val="accent1"/>
-          </a:effectRef>
-          <a:fontRef idx="minor">
-            <a:schemeClr val="lt1"/>
-          </a:fontRef>
-        </p:style>
-        <p:txBody>
-          <a:bodyPr wrap="square" lIns="182880" rtlCol="0" anchor="ctr"/>
-          <a:lstStyle/>
-          <a:p>
-            <a:pPr algn="ctr"/>
-            <a:r>
-              <a:rPr sz="1200" b="1" i="0" dirty="0">
-                <a:solidFill>
-                  <a:srgbClr val="0E2841"/>
-                </a:solidFill>
-                <a:latin typeface="Avenir Next LT Pro Demi"/>
-              </a:rPr>
-              <a:t>Housing stays depressed through 2027</a:t>
-            </a:r>
-          </a:p>
-          <a:p>
-            <a:r>
-              <a:rPr sz="950" b="1" i="0" dirty="0">
-                <a:solidFill>
-                  <a:srgbClr val="B03030"/>
-                </a:solidFill>
-                <a:latin typeface="Avenir Next LT Pro"/>
-              </a:rPr>
-              <a:t>Severity: HIGH   ·   Probability:</a:t>
-            </a:r>
-          </a:p>
-        </p:txBody>
-      </p:sp>
-      <p:sp>
-        <p:nvSpPr>
-          <p:cNvPr id="7" name="Rectangle 6"/>
-          <p:cNvSpPr/>
-          <p:nvPr/>
-        </p:nvSpPr>
-        <p:spPr>
-          <a:xfrm>
-            <a:off x="457200" y="1554480"/>
-            <a:ext cx="73152" cy="960120"/>
-          </a:xfrm>
-          <a:prstGeom prst="rect">
-            <a:avLst/>
-          </a:prstGeom>
-          <a:solidFill>
-            <a:srgbClr val="B03030"/>
-          </a:solidFill>
-          <a:ln>
-            <a:solidFill/>
-          </a:ln>
-        </p:spPr>
-        <p:style>
-          <a:lnRef idx="1">
-            <a:schemeClr val="accent1"/>
-          </a:lnRef>
-          <a:fillRef idx="3">
-            <a:schemeClr val="accent1"/>
-          </a:fillRef>
-          <a:effectRef idx="2">
-            <a:schemeClr val="accent1"/>
-          </a:effectRef>
-          <a:fontRef idx="minor">
-            <a:schemeClr val="lt1"/>
-          </a:fontRef>
-        </p:style>
-        <p:txBody>
-          <a:bodyPr rtlCol="0" anchor="ctr"/>
-          <a:lstStyle/>
-          <a:p>
-            <a:pPr algn="ctr"/>
-            <a:endParaRPr/>
-          </a:p>
-        </p:txBody>
-      </p:sp>
-      <p:sp>
-        <p:nvSpPr>
-          <p:cNvPr id="8" name="Rectangle 7"/>
-          <p:cNvSpPr/>
-          <p:nvPr/>
-        </p:nvSpPr>
-        <p:spPr>
-          <a:xfrm>
-            <a:off x="4709159" y="1554480"/>
-            <a:ext cx="3977639" cy="960120"/>
-          </a:xfrm>
-          <a:prstGeom prst="rect">
-            <a:avLst/>
-          </a:prstGeom>
-          <a:solidFill>
-            <a:srgbClr val="FFFFFF"/>
-          </a:solidFill>
-          <a:ln w="12700">
-            <a:solidFill>
-              <a:srgbClr val="E8E8E8"/>
-            </a:solidFill>
-          </a:ln>
-        </p:spPr>
-        <p:style>
-          <a:lnRef idx="1">
-            <a:schemeClr val="accent1"/>
-          </a:lnRef>
-          <a:fillRef idx="3">
-            <a:schemeClr val="accent1"/>
-          </a:fillRef>
-          <a:effectRef idx="2">
-            <a:schemeClr val="accent1"/>
-          </a:effectRef>
-          <a:fontRef idx="minor">
-            <a:schemeClr val="lt1"/>
-          </a:fontRef>
-        </p:style>
-        <p:txBody>
-          <a:bodyPr wrap="square" lIns="182880" rtlCol="0" anchor="ctr"/>
-          <a:lstStyle/>
-          <a:p>
-            <a:pPr algn="ctr"/>
-            <a:r>
-              <a:rPr sz="1200" b="1" i="0" dirty="0">
-                <a:solidFill>
-                  <a:srgbClr val="0E2841"/>
-                </a:solidFill>
-                <a:latin typeface="Avenir Next LT Pro Demi"/>
-              </a:rPr>
-              <a:t>Balance-sheet stress — ~4.0× levered, ~$225M/yr interest</a:t>
-            </a:r>
-          </a:p>
-          <a:p>
-            <a:r>
-              <a:rPr sz="950" b="1" i="0" dirty="0">
-                <a:solidFill>
-                  <a:srgbClr val="B03030"/>
-                </a:solidFill>
-                <a:latin typeface="Avenir Next LT Pro"/>
-              </a:rPr>
-              <a:t>Severity: HIGH   ·   Probability:</a:t>
-            </a:r>
-          </a:p>
-        </p:txBody>
-      </p:sp>
-      <p:sp>
-        <p:nvSpPr>
-          <p:cNvPr id="9" name="Rectangle 8"/>
-          <p:cNvSpPr/>
-          <p:nvPr/>
-        </p:nvSpPr>
-        <p:spPr>
-          <a:xfrm>
-            <a:off x="4709159" y="1554480"/>
-            <a:ext cx="73152" cy="960120"/>
-          </a:xfrm>
-          <a:prstGeom prst="rect">
-            <a:avLst/>
-          </a:prstGeom>
-          <a:solidFill>
-            <a:srgbClr val="B03030"/>
-          </a:solidFill>
-          <a:ln>
-            <a:solidFill/>
-          </a:ln>
-        </p:spPr>
-        <p:style>
-          <a:lnRef idx="1">
-            <a:schemeClr val="accent1"/>
-          </a:lnRef>
-          <a:fillRef idx="3">
-            <a:schemeClr val="accent1"/>
-          </a:fillRef>
-          <a:effectRef idx="2">
-            <a:schemeClr val="accent1"/>
-          </a:effectRef>
-          <a:fontRef idx="minor">
-            <a:schemeClr val="lt1"/>
-          </a:fontRef>
-        </p:style>
-        <p:txBody>
-          <a:bodyPr rtlCol="0" anchor="ctr"/>
-          <a:lstStyle/>
-          <a:p>
-            <a:pPr algn="ctr"/>
-            <a:endParaRPr/>
-          </a:p>
-        </p:txBody>
-      </p:sp>
-      <p:sp>
-        <p:nvSpPr>
-          <p:cNvPr id="10" name="Rectangle 9"/>
-          <p:cNvSpPr/>
-          <p:nvPr/>
-        </p:nvSpPr>
-        <p:spPr>
-          <a:xfrm>
-            <a:off x="457200" y="2679191"/>
-            <a:ext cx="3977639" cy="960120"/>
-          </a:xfrm>
-          <a:prstGeom prst="rect">
-            <a:avLst/>
-          </a:prstGeom>
-          <a:solidFill>
-            <a:srgbClr val="FFFFFF"/>
-          </a:solidFill>
-          <a:ln w="12700">
-            <a:solidFill>
-              <a:srgbClr val="E8E8E8"/>
-            </a:solidFill>
-          </a:ln>
-        </p:spPr>
-        <p:style>
-          <a:lnRef idx="1">
-            <a:schemeClr val="accent1"/>
-          </a:lnRef>
-          <a:fillRef idx="3">
-            <a:schemeClr val="accent1"/>
-          </a:fillRef>
-          <a:effectRef idx="2">
-            <a:schemeClr val="accent1"/>
-          </a:effectRef>
-          <a:fontRef idx="minor">
-            <a:schemeClr val="lt1"/>
-          </a:fontRef>
-        </p:style>
-        <p:txBody>
-          <a:bodyPr wrap="square" lIns="182880" rtlCol="0" anchor="ctr"/>
-          <a:lstStyle/>
-          <a:p>
-            <a:pPr algn="ctr"/>
-            <a:r>
-              <a:rPr sz="1200" b="1" i="0" dirty="0">
-                <a:solidFill>
-                  <a:srgbClr val="0E2841"/>
-                </a:solidFill>
-                <a:latin typeface="Avenir Next LT Pro Demi"/>
-              </a:rPr>
-              <a:t>International execution failure</a:t>
-            </a:r>
-          </a:p>
-          <a:p>
-            <a:r>
-              <a:rPr sz="950" b="1" i="0" dirty="0">
-                <a:solidFill>
-                  <a:srgbClr val="C88A12"/>
-                </a:solidFill>
-                <a:latin typeface="Avenir Next LT Pro"/>
-              </a:rPr>
-              <a:t>Severity: MED   ·   Probability:</a:t>
-            </a:r>
-          </a:p>
-        </p:txBody>
-      </p:sp>
-      <p:sp>
-        <p:nvSpPr>
-          <p:cNvPr id="11" name="Rectangle 10"/>
-          <p:cNvSpPr/>
-          <p:nvPr/>
-        </p:nvSpPr>
-        <p:spPr>
-          <a:xfrm>
-            <a:off x="457200" y="2679191"/>
-            <a:ext cx="73152" cy="960120"/>
-          </a:xfrm>
-          <a:prstGeom prst="rect">
-            <a:avLst/>
-          </a:prstGeom>
-          <a:solidFill>
-            <a:srgbClr val="C88A12"/>
-          </a:solidFill>
-          <a:ln>
-            <a:solidFill/>
-          </a:ln>
-        </p:spPr>
-        <p:style>
-          <a:lnRef idx="1">
-            <a:schemeClr val="accent1"/>
-          </a:lnRef>
-          <a:fillRef idx="3">
-            <a:schemeClr val="accent1"/>
-          </a:fillRef>
-          <a:effectRef idx="2">
-            <a:schemeClr val="accent1"/>
-          </a:effectRef>
-          <a:fontRef idx="minor">
-            <a:schemeClr val="lt1"/>
-          </a:fontRef>
-        </p:style>
-        <p:txBody>
-          <a:bodyPr rtlCol="0" anchor="ctr"/>
-          <a:lstStyle/>
-          <a:p>
-            <a:pPr algn="ctr"/>
-            <a:endParaRPr/>
-          </a:p>
-        </p:txBody>
-      </p:sp>
-      <p:sp>
-        <p:nvSpPr>
-          <p:cNvPr id="12" name="Rectangle 11"/>
-          <p:cNvSpPr/>
-          <p:nvPr/>
-        </p:nvSpPr>
-        <p:spPr>
-          <a:xfrm>
-            <a:off x="4709159" y="2679191"/>
-            <a:ext cx="3977639" cy="960120"/>
-          </a:xfrm>
-          <a:prstGeom prst="rect">
-            <a:avLst/>
-          </a:prstGeom>
-          <a:solidFill>
-            <a:srgbClr val="FFFFFF"/>
-          </a:solidFill>
-          <a:ln w="12700">
-            <a:solidFill>
-              <a:srgbClr val="E8E8E8"/>
-            </a:solidFill>
-          </a:ln>
-        </p:spPr>
-        <p:style>
-          <a:lnRef idx="1">
-            <a:schemeClr val="accent1"/>
-          </a:lnRef>
-          <a:fillRef idx="3">
-            <a:schemeClr val="accent1"/>
-          </a:fillRef>
-          <a:effectRef idx="2">
-            <a:schemeClr val="accent1"/>
-          </a:effectRef>
-          <a:fontRef idx="minor">
-            <a:schemeClr val="lt1"/>
-          </a:fontRef>
-        </p:style>
-        <p:txBody>
-          <a:bodyPr wrap="square" lIns="182880" rtlCol="0" anchor="ctr"/>
-          <a:lstStyle/>
-          <a:p>
-            <a:pPr algn="ctr"/>
-            <a:r>
-              <a:rPr sz="1200" b="1" i="0" dirty="0">
-                <a:solidFill>
-                  <a:srgbClr val="0E2841"/>
-                </a:solidFill>
-                <a:latin typeface="Avenir Next LT Pro Demi"/>
-              </a:rPr>
-              <a:t>Tariff / supply-chain disruption</a:t>
-            </a:r>
-          </a:p>
-          <a:p>
-            <a:r>
-              <a:rPr sz="950" b="1" i="0" dirty="0">
-                <a:solidFill>
-                  <a:srgbClr val="C88A12"/>
-                </a:solidFill>
-                <a:latin typeface="Avenir Next LT Pro"/>
-              </a:rPr>
-              <a:t>Severity: MED   ·   Probability:</a:t>
-            </a:r>
-          </a:p>
-        </p:txBody>
-      </p:sp>
-      <p:sp>
-        <p:nvSpPr>
-          <p:cNvPr id="13" name="Rectangle 12"/>
-          <p:cNvSpPr/>
-          <p:nvPr/>
-        </p:nvSpPr>
-        <p:spPr>
-          <a:xfrm>
-            <a:off x="4709159" y="2679191"/>
-            <a:ext cx="73152" cy="960120"/>
-          </a:xfrm>
-          <a:prstGeom prst="rect">
-            <a:avLst/>
-          </a:prstGeom>
-          <a:solidFill>
-            <a:srgbClr val="C88A12"/>
-          </a:solidFill>
-          <a:ln>
-            <a:solidFill/>
-          </a:ln>
-        </p:spPr>
-        <p:style>
-          <a:lnRef idx="1">
-            <a:schemeClr val="accent1"/>
-          </a:lnRef>
-          <a:fillRef idx="3">
-            <a:schemeClr val="accent1"/>
-          </a:fillRef>
-          <a:effectRef idx="2">
-            <a:schemeClr val="accent1"/>
-          </a:effectRef>
-          <a:fontRef idx="minor">
-            <a:schemeClr val="lt1"/>
-          </a:fontRef>
-        </p:style>
-        <p:txBody>
-          <a:bodyPr rtlCol="0" anchor="ctr"/>
-          <a:lstStyle/>
-          <a:p>
-            <a:pPr algn="ctr"/>
-            <a:endParaRPr/>
-          </a:p>
-        </p:txBody>
-      </p:sp>
-      <p:sp>
-        <p:nvSpPr>
-          <p:cNvPr id="14" name="Rectangle 13"/>
-          <p:cNvSpPr/>
-          <p:nvPr/>
-        </p:nvSpPr>
-        <p:spPr>
-          <a:xfrm>
-            <a:off x="457200" y="3803904"/>
-            <a:ext cx="3977639" cy="960120"/>
-          </a:xfrm>
-          <a:prstGeom prst="rect">
-            <a:avLst/>
-          </a:prstGeom>
-          <a:solidFill>
-            <a:srgbClr val="FFFFFF"/>
-          </a:solidFill>
-          <a:ln w="12700">
-            <a:solidFill>
-              <a:srgbClr val="E8E8E8"/>
-            </a:solidFill>
-          </a:ln>
-        </p:spPr>
-        <p:style>
-          <a:lnRef idx="1">
-            <a:schemeClr val="accent1"/>
-          </a:lnRef>
-          <a:fillRef idx="3">
-            <a:schemeClr val="accent1"/>
-          </a:fillRef>
-          <a:effectRef idx="2">
-            <a:schemeClr val="accent1"/>
-          </a:effectRef>
-          <a:fontRef idx="minor">
-            <a:schemeClr val="lt1"/>
-          </a:fontRef>
-        </p:style>
-        <p:txBody>
-          <a:bodyPr wrap="square" lIns="182880" rtlCol="0" anchor="ctr"/>
-          <a:lstStyle/>
-          <a:p>
-            <a:pPr algn="ctr"/>
-            <a:r>
-              <a:rPr sz="1200" b="1" i="0" dirty="0">
-                <a:solidFill>
-                  <a:srgbClr val="0E2841"/>
-                </a:solidFill>
-                <a:latin typeface="Avenir Next LT Pro Demi"/>
-              </a:rPr>
-              <a:t>Friedman key-man dependency</a:t>
-            </a:r>
-          </a:p>
-          <a:p>
-            <a:r>
-              <a:rPr sz="950" b="1" i="0" dirty="0">
-                <a:solidFill>
-                  <a:srgbClr val="B03030"/>
-                </a:solidFill>
-                <a:latin typeface="Avenir Next LT Pro"/>
-              </a:rPr>
-              <a:t>Severity: HIGH   ·   Probability:</a:t>
-            </a:r>
-          </a:p>
-        </p:txBody>
-      </p:sp>
-      <p:sp>
-        <p:nvSpPr>
-          <p:cNvPr id="15" name="Rectangle 14"/>
-          <p:cNvSpPr/>
-          <p:nvPr/>
-        </p:nvSpPr>
-        <p:spPr>
-          <a:xfrm>
-            <a:off x="457200" y="3803904"/>
-            <a:ext cx="73152" cy="960120"/>
-          </a:xfrm>
-          <a:prstGeom prst="rect">
-            <a:avLst/>
-          </a:prstGeom>
-          <a:solidFill>
-            <a:srgbClr val="B03030"/>
-          </a:solidFill>
-          <a:ln>
-            <a:solidFill/>
-          </a:ln>
-        </p:spPr>
-        <p:style>
-          <a:lnRef idx="1">
-            <a:schemeClr val="accent1"/>
-          </a:lnRef>
-          <a:fillRef idx="3">
-            <a:schemeClr val="accent1"/>
-          </a:fillRef>
-          <a:effectRef idx="2">
-            <a:schemeClr val="accent1"/>
-          </a:effectRef>
-          <a:fontRef idx="minor">
-            <a:schemeClr val="lt1"/>
-          </a:fontRef>
-        </p:style>
-        <p:txBody>
-          <a:bodyPr rtlCol="0" anchor="ctr"/>
-          <a:lstStyle/>
-          <a:p>
-            <a:pPr algn="ctr"/>
-            <a:endParaRPr/>
-          </a:p>
-        </p:txBody>
-      </p:sp>
-      <p:sp>
-        <p:nvSpPr>
-          <p:cNvPr id="16" name="Rectangle 15"/>
-          <p:cNvSpPr/>
-          <p:nvPr/>
-        </p:nvSpPr>
-        <p:spPr>
-          <a:xfrm>
-            <a:off x="4709159" y="3803904"/>
-            <a:ext cx="3977639" cy="960120"/>
-          </a:xfrm>
-          <a:prstGeom prst="rect">
-            <a:avLst/>
-          </a:prstGeom>
-          <a:solidFill>
-            <a:srgbClr val="FFFFFF"/>
-          </a:solidFill>
-          <a:ln w="12700">
-            <a:solidFill>
-              <a:srgbClr val="E8E8E8"/>
-            </a:solidFill>
-          </a:ln>
-        </p:spPr>
-        <p:style>
-          <a:lnRef idx="1">
-            <a:schemeClr val="accent1"/>
-          </a:lnRef>
-          <a:fillRef idx="3">
-            <a:schemeClr val="accent1"/>
-          </a:fillRef>
-          <a:effectRef idx="2">
-            <a:schemeClr val="accent1"/>
-          </a:effectRef>
-          <a:fontRef idx="minor">
-            <a:schemeClr val="lt1"/>
-          </a:fontRef>
-        </p:style>
-        <p:txBody>
-          <a:bodyPr wrap="square" lIns="182880" rtlCol="0" anchor="ctr"/>
-          <a:lstStyle/>
-          <a:p>
-            <a:pPr algn="ctr"/>
-            <a:r>
-              <a:rPr sz="1200" b="1" i="0" dirty="0">
-                <a:solidFill>
-                  <a:srgbClr val="0E2841"/>
-                </a:solidFill>
-                <a:latin typeface="Avenir Next LT Pro Demi"/>
-              </a:rPr>
-              <a:t>Broad consumer / discretionary recession</a:t>
-            </a:r>
-          </a:p>
-          <a:p>
-            <a:r>
-              <a:rPr sz="950" b="1" i="0" dirty="0">
-                <a:solidFill>
-                  <a:srgbClr val="C88A12"/>
-                </a:solidFill>
-                <a:latin typeface="Avenir Next LT Pro"/>
-              </a:rPr>
-              <a:t>Severity: MED   ·   Probability:</a:t>
-            </a:r>
-          </a:p>
-        </p:txBody>
-      </p:sp>
-      <p:sp>
-        <p:nvSpPr>
-          <p:cNvPr id="17" name="Rectangle 16"/>
-          <p:cNvSpPr/>
-          <p:nvPr/>
-        </p:nvSpPr>
-        <p:spPr>
-          <a:xfrm>
-            <a:off x="4709159" y="3803904"/>
-            <a:ext cx="73152" cy="960120"/>
-          </a:xfrm>
-          <a:prstGeom prst="rect">
-            <a:avLst/>
-          </a:prstGeom>
-          <a:solidFill>
-            <a:srgbClr val="C88A12"/>
-          </a:solidFill>
-          <a:ln>
-            <a:solidFill/>
-          </a:ln>
-        </p:spPr>
-        <p:style>
-          <a:lnRef idx="1">
-            <a:schemeClr val="accent1"/>
-          </a:lnRef>
-          <a:fillRef idx="3">
-            <a:schemeClr val="accent1"/>
-          </a:fillRef>
-          <a:effectRef idx="2">
-            <a:schemeClr val="accent1"/>
-          </a:effectRef>
-          <a:fontRef idx="minor">
-            <a:schemeClr val="lt1"/>
-          </a:fontRef>
-        </p:style>
-        <p:txBody>
-          <a:bodyPr rtlCol="0" anchor="ctr"/>
-          <a:lstStyle/>
-          <a:p>
-            <a:pPr algn="ctr"/>
-            <a:endParaRPr/>
-          </a:p>
-        </p:txBody>
-      </p:sp>
-      <p:sp>
-        <p:nvSpPr>
-          <p:cNvPr id="18" name="Rectangle 17"/>
-          <p:cNvSpPr/>
-          <p:nvPr/>
-        </p:nvSpPr>
-        <p:spPr>
-          <a:xfrm>
-            <a:off x="457200" y="4928616"/>
-            <a:ext cx="3977639" cy="960120"/>
-          </a:xfrm>
-          <a:prstGeom prst="rect">
-            <a:avLst/>
-          </a:prstGeom>
-          <a:solidFill>
-            <a:srgbClr val="FFFFFF"/>
-          </a:solidFill>
-          <a:ln w="12700">
-            <a:solidFill>
-              <a:srgbClr val="E8E8E8"/>
-            </a:solidFill>
-          </a:ln>
-        </p:spPr>
-        <p:style>
-          <a:lnRef idx="1">
-            <a:schemeClr val="accent1"/>
-          </a:lnRef>
-          <a:fillRef idx="3">
-            <a:schemeClr val="accent1"/>
-          </a:fillRef>
-          <a:effectRef idx="2">
-            <a:schemeClr val="accent1"/>
-          </a:effectRef>
-          <a:fontRef idx="minor">
-            <a:schemeClr val="lt1"/>
-          </a:fontRef>
-        </p:style>
-        <p:txBody>
-          <a:bodyPr wrap="square" lIns="182880" rtlCol="0" anchor="ctr"/>
-          <a:lstStyle/>
-          <a:p>
-            <a:pPr algn="ctr"/>
-            <a:r>
-              <a:rPr sz="1200" b="1">
-                <a:solidFill>
-                  <a:srgbClr val="0E2841"/>
-                </a:solidFill>
-                <a:latin typeface="Avenir Next LT Pro Demi"/>
-              </a:rPr>
-              <a:t>Fulfillment / delivery execution (moat risk at Estates tier)</a:t>
-            </a:r>
-          </a:p>
-          <a:p>
-            <a:r>
-              <a:rPr sz="950" b="1">
-                <a:solidFill>
-                  <a:srgbClr val="C88A12"/>
-                </a:solidFill>
-                <a:latin typeface="Avenir Next LT Pro"/>
-              </a:rPr>
-              <a:t>Severity: MED   ·   Probability: 30%</a:t>
-            </a:r>
-          </a:p>
-        </p:txBody>
-      </p:sp>
-      <p:sp>
-        <p:nvSpPr>
-          <p:cNvPr id="19" name="Rectangle 18"/>
-          <p:cNvSpPr/>
-          <p:nvPr/>
-        </p:nvSpPr>
-        <p:spPr>
-          <a:xfrm>
-            <a:off x="457200" y="4928616"/>
-            <a:ext cx="73152" cy="960120"/>
-          </a:xfrm>
-          <a:prstGeom prst="rect">
-            <a:avLst/>
-          </a:prstGeom>
-          <a:solidFill>
-            <a:srgbClr val="C88A12"/>
-          </a:solidFill>
-          <a:ln>
-            <a:solidFill/>
-          </a:ln>
-        </p:spPr>
-        <p:style>
-          <a:lnRef idx="1">
-            <a:schemeClr val="accent1"/>
-          </a:lnRef>
-          <a:fillRef idx="3">
-            <a:schemeClr val="accent1"/>
-          </a:fillRef>
-          <a:effectRef idx="2">
-            <a:schemeClr val="accent1"/>
-          </a:effectRef>
-          <a:fontRef idx="minor">
-            <a:schemeClr val="lt1"/>
-          </a:fontRef>
-        </p:style>
-        <p:txBody>
-          <a:bodyPr rtlCol="0" anchor="ctr"/>
-          <a:lstStyle/>
-          <a:p>
-            <a:pPr algn="ctr"/>
-            <a:endParaRPr/>
-          </a:p>
-        </p:txBody>
-      </p:sp>
-    </p:spTree>
-  </p:cSld>
-  <p:clrMapOvr>
-    <a:masterClrMapping/>
-  </p:clrMapOvr>
-</p:sld>
-</file>
-
 <file path=ppt/slides/slide2.xml><?xml version="1.0" encoding="utf-8"?>
 <p:sld xmlns:a="http://schemas.openxmlformats.org/drawingml/2006/main" xmlns:r="http://schemas.openxmlformats.org/officeDocument/2006/relationships" xmlns:p="http://schemas.openxmlformats.org/presentationml/2006/main">
   <p:cSld>
@@ -13236,7 +12921,7 @@
 </file>
 
 <file path=ppt/slides/slide20.xml><?xml version="1.0" encoding="utf-8"?>
-<p:sld xmlns:a="http://schemas.openxmlformats.org/drawingml/2006/main" xmlns:p="http://schemas.openxmlformats.org/presentationml/2006/main" xmlns:r="http://schemas.openxmlformats.org/officeDocument/2006/relationships">
+<p:sld xmlns:a="http://schemas.openxmlformats.org/drawingml/2006/main" xmlns:r="http://schemas.openxmlformats.org/officeDocument/2006/relationships" xmlns:p="http://schemas.openxmlformats.org/presentationml/2006/main">
   <p:cSld>
     <p:spTree>
       <p:nvGrpSpPr>
@@ -13244,7 +12929,14 @@
         <p:cNvGrpSpPr/>
         <p:nvPr/>
       </p:nvGrpSpPr>
-      <p:grpSpPr/>
+      <p:grpSpPr>
+        <a:xfrm>
+          <a:off x="0" y="0"/>
+          <a:ext cx="0" cy="0"/>
+          <a:chOff x="0" y="0"/>
+          <a:chExt cx="0" cy="0"/>
+        </a:xfrm>
+      </p:grpSpPr>
       <p:sp>
         <p:nvSpPr>
           <p:cNvPr id="2" name="TextBox 1"/>
@@ -13253,13 +12945,16 @@
         </p:nvSpPr>
         <p:spPr>
           <a:xfrm>
-            <a:off x="457200" y="365760"/>
-            <a:ext cx="8229600" cy="548640"/>
+            <a:off x="457198" y="274320"/>
+            <a:ext cx="8229600" cy="446276"/>
           </a:xfrm>
           <a:prstGeom prst="rect">
             <a:avLst/>
           </a:prstGeom>
           <a:noFill/>
+          <a:ln>
+            <a:solidFill/>
+          </a:ln>
         </p:spPr>
         <p:txBody>
           <a:bodyPr wrap="square">
@@ -13268,36 +12963,136 @@
           <a:lstStyle/>
           <a:p>
             <a:r>
-              <a:rPr sz="2200">
-                <a:solidFill>
-                  <a:srgbClr val="000000"/>
-                </a:solidFill>
+              <a:rPr sz="2300" b="0" i="0" dirty="0">
+                <a:solidFill/>
                 <a:latin typeface="Avenir Next LT Pro Demi"/>
               </a:rPr>
-              <a:t>Insider &amp; Governance Signals</a:t>
+              <a:t>Key Risks — What Has to Go Wrong</a:t>
             </a:r>
           </a:p>
         </p:txBody>
       </p:sp>
       <p:sp>
         <p:nvSpPr>
-          <p:cNvPr id="3" name="Rectangle 2"/>
+          <p:cNvPr id="5" name="TextBox 4"/>
+          <p:cNvSpPr txBox="1"/>
+          <p:nvPr/>
+        </p:nvSpPr>
+        <p:spPr>
+          <a:xfrm>
+            <a:off x="457200" y="1051560"/>
+            <a:ext cx="8229600" cy="274320"/>
+          </a:xfrm>
+          <a:prstGeom prst="rect">
+            <a:avLst/>
+          </a:prstGeom>
+          <a:noFill/>
+          <a:ln>
+            <a:solidFill/>
+          </a:ln>
+        </p:spPr>
+        <p:txBody>
+          <a:bodyPr wrap="none">
+            <a:spAutoFit/>
+          </a:bodyPr>
+          <a:lstStyle/>
+          <a:p>
+            <a:r>
+              <a:rPr sz="900" b="0" i="1">
+                <a:solidFill>
+                  <a:srgbClr val="B0B0B0"/>
+                </a:solidFill>
+                <a:latin typeface="Avenir Next LT Pro"/>
+              </a:rPr>
+              <a:t>[ narrative / commentary to be written ]</a:t>
+            </a:r>
+          </a:p>
+        </p:txBody>
+      </p:sp>
+      <p:sp>
+        <p:nvSpPr>
+          <p:cNvPr id="6" name="Rectangle 5"/>
           <p:cNvSpPr/>
           <p:nvPr/>
         </p:nvSpPr>
         <p:spPr>
           <a:xfrm>
-            <a:off x="457200" y="960120"/>
-            <a:ext cx="8229600" cy="25603"/>
+            <a:off x="457200" y="1554480"/>
+            <a:ext cx="3977639" cy="960120"/>
           </a:xfrm>
           <a:prstGeom prst="rect">
             <a:avLst/>
           </a:prstGeom>
           <a:solidFill>
-            <a:srgbClr val="000000"/>
+            <a:srgbClr val="FFFFFF"/>
+          </a:solidFill>
+          <a:ln w="12700">
+            <a:solidFill>
+              <a:srgbClr val="E8E8E8"/>
+            </a:solidFill>
+          </a:ln>
+        </p:spPr>
+        <p:style>
+          <a:lnRef idx="1">
+            <a:schemeClr val="accent1"/>
+          </a:lnRef>
+          <a:fillRef idx="3">
+            <a:schemeClr val="accent1"/>
+          </a:fillRef>
+          <a:effectRef idx="2">
+            <a:schemeClr val="accent1"/>
+          </a:effectRef>
+          <a:fontRef idx="minor">
+            <a:schemeClr val="lt1"/>
+          </a:fontRef>
+        </p:style>
+        <p:txBody>
+          <a:bodyPr wrap="square" lIns="182880" rtlCol="0" anchor="ctr"/>
+          <a:lstStyle/>
+          <a:p>
+            <a:pPr algn="ctr"/>
+            <a:r>
+              <a:rPr sz="1200" b="1" i="0" dirty="0">
+                <a:solidFill>
+                  <a:srgbClr val="0E2841"/>
+                </a:solidFill>
+                <a:latin typeface="Avenir Next LT Pro Demi"/>
+              </a:rPr>
+              <a:t>Housing stays depressed through 2027</a:t>
+            </a:r>
+          </a:p>
+          <a:p>
+            <a:r>
+              <a:rPr sz="950" b="1" i="0" dirty="0">
+                <a:solidFill>
+                  <a:srgbClr val="B03030"/>
+                </a:solidFill>
+                <a:latin typeface="Avenir Next LT Pro"/>
+              </a:rPr>
+              <a:t>Severity: HIGH   ·   Probability:</a:t>
+            </a:r>
+          </a:p>
+        </p:txBody>
+      </p:sp>
+      <p:sp>
+        <p:nvSpPr>
+          <p:cNvPr id="7" name="Rectangle 6"/>
+          <p:cNvSpPr/>
+          <p:nvPr/>
+        </p:nvSpPr>
+        <p:spPr>
+          <a:xfrm>
+            <a:off x="457200" y="1554480"/>
+            <a:ext cx="73152" cy="960120"/>
+          </a:xfrm>
+          <a:prstGeom prst="rect">
+            <a:avLst/>
+          </a:prstGeom>
+          <a:solidFill>
+            <a:srgbClr val="B03030"/>
           </a:solidFill>
           <a:ln>
-            <a:noFill/>
+            <a:solidFill/>
           </a:ln>
         </p:spPr>
         <p:style>
@@ -13319,456 +13114,661 @@
           <a:lstStyle/>
           <a:p>
             <a:pPr algn="ctr"/>
+            <a:endParaRPr/>
           </a:p>
         </p:txBody>
       </p:sp>
-      <p:graphicFrame>
-        <p:nvGraphicFramePr>
-          <p:cNvPr id="4" name="Table 3"/>
-          <p:cNvGraphicFramePr>
-            <a:graphicFrameLocks noGrp="1"/>
-          </p:cNvGraphicFramePr>
+      <p:sp>
+        <p:nvSpPr>
+          <p:cNvPr id="8" name="Rectangle 7"/>
+          <p:cNvSpPr/>
           <p:nvPr/>
-        </p:nvGraphicFramePr>
-        <p:xfrm>
-          <a:off x="457200" y="1325880"/>
-          <a:ext cx="8229600" cy="4114800"/>
-        </p:xfrm>
-        <a:graphic>
-          <a:graphicData uri="http://schemas.openxmlformats.org/drawingml/2006/table">
-            <a:tbl>
-              <a:tblPr>
-                <a:tableStyleId>{5C22544A-7EE6-4342-B048-85BDC9FD1C3A}</a:tableStyleId>
-              </a:tblPr>
-              <a:tblGrid>
-                <a:gridCol w="2148840"/>
-                <a:gridCol w="3703320"/>
-                <a:gridCol w="2377440"/>
-              </a:tblGrid>
-              <a:tr h="822960">
-                <a:tc>
-                  <a:txBody>
-                    <a:bodyPr/>
-                    <a:lstStyle/>
-                    <a:p>
-                      <a:pPr algn="l"/>
-                      <a:r>
-                        <a:rPr sz="1100" b="1">
-                          <a:solidFill>
-                            <a:srgbClr val="FFFFFF"/>
-                          </a:solidFill>
-                          <a:latin typeface="Avenir Next LT Pro Demi"/>
-                        </a:rPr>
-                        <a:t>Signal</a:t>
-                      </a:r>
-                    </a:p>
-                  </a:txBody>
-                  <a:tcPr marL="82296" marT="36576" marB="36576" anchor="ctr">
-                    <a:solidFill>
-                      <a:srgbClr val="9A7B44"/>
-                    </a:solidFill>
-                  </a:tcPr>
-                </a:tc>
-                <a:tc>
-                  <a:txBody>
-                    <a:bodyPr/>
-                    <a:lstStyle/>
-                    <a:p>
-                      <a:pPr algn="l"/>
-                      <a:r>
-                        <a:rPr sz="1100" b="1">
-                          <a:solidFill>
-                            <a:srgbClr val="FFFFFF"/>
-                          </a:solidFill>
-                          <a:latin typeface="Avenir Next LT Pro Demi"/>
-                        </a:rPr>
-                        <a:t>What we see</a:t>
-                      </a:r>
-                    </a:p>
-                  </a:txBody>
-                  <a:tcPr marL="82296" marT="36576" marB="36576" anchor="ctr">
-                    <a:solidFill>
-                      <a:srgbClr val="9A7B44"/>
-                    </a:solidFill>
-                  </a:tcPr>
-                </a:tc>
-                <a:tc>
-                  <a:txBody>
-                    <a:bodyPr/>
-                    <a:lstStyle/>
-                    <a:p>
-                      <a:pPr algn="l"/>
-                      <a:r>
-                        <a:rPr sz="1100" b="1">
-                          <a:solidFill>
-                            <a:srgbClr val="FFFFFF"/>
-                          </a:solidFill>
-                          <a:latin typeface="Avenir Next LT Pro Demi"/>
-                        </a:rPr>
-                        <a:t>Read</a:t>
-                      </a:r>
-                    </a:p>
-                  </a:txBody>
-                  <a:tcPr marL="82296" marT="36576" marB="36576" anchor="ctr">
-                    <a:solidFill>
-                      <a:srgbClr val="9A7B44"/>
-                    </a:solidFill>
-                  </a:tcPr>
-                </a:tc>
-              </a:tr>
-              <a:tr h="822960">
-                <a:tc>
-                  <a:txBody>
-                    <a:bodyPr/>
-                    <a:lstStyle/>
-                    <a:p>
-                      <a:pPr algn="l"/>
-                      <a:r>
-                        <a:rPr sz="1050" b="1">
-                          <a:solidFill>
-                            <a:srgbClr val="000000"/>
-                          </a:solidFill>
-                          <a:latin typeface="Avenir Next LT Pro Demi"/>
-                        </a:rPr>
-                        <a:t>Founder ownership</a:t>
-                      </a:r>
-                    </a:p>
-                  </a:txBody>
-                  <a:tcPr marL="82296" marT="36576" marB="36576" anchor="ctr">
-                    <a:solidFill>
-                      <a:srgbClr val="FFFFFF"/>
-                    </a:solidFill>
-                  </a:tcPr>
-                </a:tc>
-                <a:tc>
-                  <a:txBody>
-                    <a:bodyPr/>
-                    <a:lstStyle/>
-                    <a:p>
-                      <a:pPr algn="l"/>
-                      <a:r>
-                        <a:rPr sz="1050" b="0">
-                          <a:solidFill>
-                            <a:srgbClr val="000000"/>
-                          </a:solidFill>
-                          <a:latin typeface="Avenir Next LT Pro"/>
-                        </a:rPr>
-                        <a:t>Friedman owns ~18% outright (~25% incl. options); bought ~$10M at ~$216 (Jun 2024)</a:t>
-                      </a:r>
-                    </a:p>
-                  </a:txBody>
-                  <a:tcPr marL="82296" marT="36576" marB="36576" anchor="ctr">
-                    <a:solidFill>
-                      <a:srgbClr val="FFFFFF"/>
-                    </a:solidFill>
-                  </a:tcPr>
-                </a:tc>
-                <a:tc>
-                  <a:txBody>
-                    <a:bodyPr/>
-                    <a:lstStyle/>
-                    <a:p>
-                      <a:pPr algn="l"/>
-                      <a:r>
-                        <a:rPr sz="1050" b="0">
-                          <a:solidFill>
-                            <a:srgbClr val="000000"/>
-                          </a:solidFill>
-                          <a:latin typeface="Avenir Next LT Pro"/>
-                        </a:rPr>
-                        <a:t>Deep alignment</a:t>
-                      </a:r>
-                    </a:p>
-                  </a:txBody>
-                  <a:tcPr marL="82296" marT="36576" marB="36576" anchor="ctr">
-                    <a:solidFill>
-                      <a:srgbClr val="FFFFFF"/>
-                    </a:solidFill>
-                  </a:tcPr>
-                </a:tc>
-              </a:tr>
-              <a:tr h="822960">
-                <a:tc>
-                  <a:txBody>
-                    <a:bodyPr/>
-                    <a:lstStyle/>
-                    <a:p>
-                      <a:pPr algn="l"/>
-                      <a:r>
-                        <a:rPr sz="1050" b="1">
-                          <a:solidFill>
-                            <a:srgbClr val="000000"/>
-                          </a:solidFill>
-                          <a:latin typeface="Avenir Next LT Pro Demi"/>
-                        </a:rPr>
-                        <a:t>Recent insider activity</a:t>
-                      </a:r>
-                    </a:p>
-                  </a:txBody>
-                  <a:tcPr marL="82296" marT="36576" marB="36576" anchor="ctr">
-                    <a:solidFill>
-                      <a:srgbClr val="F4F6F8"/>
-                    </a:solidFill>
-                  </a:tcPr>
-                </a:tc>
-                <a:tc>
-                  <a:txBody>
-                    <a:bodyPr/>
-                    <a:lstStyle/>
-                    <a:p>
-                      <a:pPr algn="l"/>
-                      <a:r>
-                        <a:rPr sz="1050" b="0">
-                          <a:solidFill>
-                            <a:srgbClr val="000000"/>
-                          </a:solidFill>
-                          <a:latin typeface="Avenir Next LT Pro"/>
-                        </a:rPr>
-                        <a:t>Net selling over the past ~6 months (CEO + several execs); no open-market buys</a:t>
-                      </a:r>
-                    </a:p>
-                  </a:txBody>
-                  <a:tcPr marL="82296" marT="36576" marB="36576" anchor="ctr">
-                    <a:solidFill>
-                      <a:srgbClr val="F4F6F8"/>
-                    </a:solidFill>
-                  </a:tcPr>
-                </a:tc>
-                <a:tc>
-                  <a:txBody>
-                    <a:bodyPr/>
-                    <a:lstStyle/>
-                    <a:p>
-                      <a:pPr algn="l"/>
-                      <a:r>
-                        <a:rPr sz="1050" b="0">
-                          <a:solidFill>
-                            <a:srgbClr val="000000"/>
-                          </a:solidFill>
-                          <a:latin typeface="Avenir Next LT Pro"/>
-                        </a:rPr>
-                        <a:t>Mixed — largely option/tax-driven, but not a “buy here” signal</a:t>
-                      </a:r>
-                    </a:p>
-                  </a:txBody>
-                  <a:tcPr marL="82296" marT="36576" marB="36576" anchor="ctr">
-                    <a:solidFill>
-                      <a:srgbClr val="F4F6F8"/>
-                    </a:solidFill>
-                  </a:tcPr>
-                </a:tc>
-              </a:tr>
-              <a:tr h="822960">
-                <a:tc>
-                  <a:txBody>
-                    <a:bodyPr/>
-                    <a:lstStyle/>
-                    <a:p>
-                      <a:pPr algn="l"/>
-                      <a:r>
-                        <a:rPr sz="1050" b="1">
-                          <a:solidFill>
-                            <a:srgbClr val="000000"/>
-                          </a:solidFill>
-                          <a:latin typeface="Avenir Next LT Pro Demi"/>
-                        </a:rPr>
-                        <a:t>Board &amp; governance</a:t>
-                      </a:r>
-                    </a:p>
-                  </a:txBody>
-                  <a:tcPr marL="82296" marT="36576" marB="36576" anchor="ctr">
-                    <a:solidFill>
-                      <a:srgbClr val="FFFFFF"/>
-                    </a:solidFill>
-                  </a:tcPr>
-                </a:tc>
-                <a:tc>
-                  <a:txBody>
-                    <a:bodyPr/>
-                    <a:lstStyle/>
-                    <a:p>
-                      <a:pPr algn="l"/>
-                      <a:r>
-                        <a:rPr sz="1050" b="0">
-                          <a:solidFill>
-                            <a:srgbClr val="000000"/>
-                          </a:solidFill>
-                          <a:latin typeface="Avenir Next LT Pro"/>
-                        </a:rPr>
-                        <a:t>Jun 2026 annual meeting: directors re-elected; say-on-pay &amp; PwC ratified</a:t>
-                      </a:r>
-                    </a:p>
-                  </a:txBody>
-                  <a:tcPr marL="82296" marT="36576" marB="36576" anchor="ctr">
-                    <a:solidFill>
-                      <a:srgbClr val="FFFFFF"/>
-                    </a:solidFill>
-                  </a:tcPr>
-                </a:tc>
-                <a:tc>
-                  <a:txBody>
-                    <a:bodyPr/>
-                    <a:lstStyle/>
-                    <a:p>
-                      <a:pPr algn="l"/>
-                      <a:r>
-                        <a:rPr sz="1050" b="0">
-                          <a:solidFill>
-                            <a:srgbClr val="000000"/>
-                          </a:solidFill>
-                          <a:latin typeface="Avenir Next LT Pro"/>
-                        </a:rPr>
-                        <a:t>Stable, founder-led; no activist involvement</a:t>
-                      </a:r>
-                    </a:p>
-                  </a:txBody>
-                  <a:tcPr marL="82296" marT="36576" marB="36576" anchor="ctr">
-                    <a:solidFill>
-                      <a:srgbClr val="FFFFFF"/>
-                    </a:solidFill>
-                  </a:tcPr>
-                </a:tc>
-              </a:tr>
-              <a:tr h="822960">
-                <a:tc>
-                  <a:txBody>
-                    <a:bodyPr/>
-                    <a:lstStyle/>
-                    <a:p>
-                      <a:pPr algn="l"/>
-                      <a:r>
-                        <a:rPr sz="1050" b="1">
-                          <a:solidFill>
-                            <a:srgbClr val="000000"/>
-                          </a:solidFill>
-                          <a:latin typeface="Avenir Next LT Pro Demi"/>
-                        </a:rPr>
-                        <a:t>Management intent</a:t>
-                      </a:r>
-                    </a:p>
-                  </a:txBody>
-                  <a:tcPr marL="82296" marT="36576" marB="36576" anchor="ctr">
-                    <a:solidFill>
-                      <a:srgbClr val="F4F6F8"/>
-                    </a:solidFill>
-                  </a:tcPr>
-                </a:tc>
-                <a:tc>
-                  <a:txBody>
-                    <a:bodyPr/>
-                    <a:lstStyle/>
-                    <a:p>
-                      <a:pPr algn="l"/>
-                      <a:r>
-                        <a:rPr sz="1050" b="0">
-                          <a:solidFill>
-                            <a:srgbClr val="000000"/>
-                          </a:solidFill>
-                          <a:latin typeface="Avenir Next LT Pro"/>
-                        </a:rPr>
-                        <a:t>Stated goal: debt-free by 2029 (FCF + asset sales); Estates upmarket push</a:t>
-                      </a:r>
-                    </a:p>
-                  </a:txBody>
-                  <a:tcPr marL="82296" marT="36576" marB="36576" anchor="ctr">
-                    <a:solidFill>
-                      <a:srgbClr val="F4F6F8"/>
-                    </a:solidFill>
-                  </a:tcPr>
-                </a:tc>
-                <a:tc>
-                  <a:txBody>
-                    <a:bodyPr/>
-                    <a:lstStyle/>
-                    <a:p>
-                      <a:pPr algn="l"/>
-                      <a:r>
-                        <a:rPr sz="1050" b="0">
-                          <a:solidFill>
-                            <a:srgbClr val="000000"/>
-                          </a:solidFill>
-                          <a:latin typeface="Avenir Next LT Pro"/>
-                        </a:rPr>
-                        <a:t>Addressing leverage, but expansion spend continues</a:t>
-                      </a:r>
-                    </a:p>
-                  </a:txBody>
-                  <a:tcPr marL="82296" marT="36576" marB="36576" anchor="ctr">
-                    <a:solidFill>
-                      <a:srgbClr val="F4F6F8"/>
-                    </a:solidFill>
-                  </a:tcPr>
-                </a:tc>
-              </a:tr>
-            </a:tbl>
-          </a:graphicData>
-        </a:graphic>
-      </p:graphicFrame>
-      <p:sp>
-        <p:nvSpPr>
-          <p:cNvPr id="5" name="TextBox 4"/>
-          <p:cNvSpPr txBox="1"/>
-          <p:nvPr/>
-        </p:nvSpPr>
-        <p:spPr>
-          <a:xfrm>
-            <a:off x="457200" y="5623560"/>
-            <a:ext cx="8229600" cy="457200"/>
+        </p:nvSpPr>
+        <p:spPr>
+          <a:xfrm>
+            <a:off x="4709159" y="1554480"/>
+            <a:ext cx="3977639" cy="960120"/>
           </a:xfrm>
           <a:prstGeom prst="rect">
             <a:avLst/>
           </a:prstGeom>
-          <a:noFill/>
-        </p:spPr>
+          <a:solidFill>
+            <a:srgbClr val="FFFFFF"/>
+          </a:solidFill>
+          <a:ln w="12700">
+            <a:solidFill>
+              <a:srgbClr val="E8E8E8"/>
+            </a:solidFill>
+          </a:ln>
+        </p:spPr>
+        <p:style>
+          <a:lnRef idx="1">
+            <a:schemeClr val="accent1"/>
+          </a:lnRef>
+          <a:fillRef idx="3">
+            <a:schemeClr val="accent1"/>
+          </a:fillRef>
+          <a:effectRef idx="2">
+            <a:schemeClr val="accent1"/>
+          </a:effectRef>
+          <a:fontRef idx="minor">
+            <a:schemeClr val="lt1"/>
+          </a:fontRef>
+        </p:style>
         <p:txBody>
-          <a:bodyPr wrap="square">
-            <a:spAutoFit/>
-          </a:bodyPr>
+          <a:bodyPr wrap="square" lIns="182880" rtlCol="0" anchor="ctr"/>
           <a:lstStyle/>
           <a:p>
-            <a:r>
-              <a:rPr sz="1100" b="1">
-                <a:solidFill>
-                  <a:srgbClr val="000000"/>
+            <a:pPr algn="ctr"/>
+            <a:r>
+              <a:rPr sz="1200" b="1" i="0" dirty="0">
+                <a:solidFill>
+                  <a:srgbClr val="0E2841"/>
                 </a:solidFill>
                 <a:latin typeface="Avenir Next LT Pro Demi"/>
               </a:rPr>
-              <a:t>Net: founder alignment is real, but insiders aren't signaling “buy here” — recent activity is net selling and expansion spend continues. Governance is stable and founder-controlled (no activist catalyst). Consistent with Hold.</a:t>
+              <a:t>Balance-sheet stress — ~4.0× levered, ~$225M/yr interest</a:t>
+            </a:r>
+          </a:p>
+          <a:p>
+            <a:r>
+              <a:rPr sz="950" b="1" i="0" dirty="0">
+                <a:solidFill>
+                  <a:srgbClr val="B03030"/>
+                </a:solidFill>
+                <a:latin typeface="Avenir Next LT Pro"/>
+              </a:rPr>
+              <a:t>Severity: HIGH   ·   Probability:</a:t>
             </a:r>
           </a:p>
         </p:txBody>
       </p:sp>
       <p:sp>
         <p:nvSpPr>
-          <p:cNvPr id="6" name="TextBox 5"/>
-          <p:cNvSpPr txBox="1"/>
+          <p:cNvPr id="9" name="Rectangle 8"/>
+          <p:cNvSpPr/>
           <p:nvPr/>
         </p:nvSpPr>
         <p:spPr>
           <a:xfrm>
-            <a:off x="457200" y="6309360"/>
-            <a:ext cx="8229600" cy="320040"/>
+            <a:off x="4709159" y="1554480"/>
+            <a:ext cx="73152" cy="960120"/>
           </a:xfrm>
           <a:prstGeom prst="rect">
             <a:avLst/>
           </a:prstGeom>
-          <a:noFill/>
-        </p:spPr>
+          <a:solidFill>
+            <a:srgbClr val="B03030"/>
+          </a:solidFill>
+          <a:ln>
+            <a:solidFill/>
+          </a:ln>
+        </p:spPr>
+        <p:style>
+          <a:lnRef idx="1">
+            <a:schemeClr val="accent1"/>
+          </a:lnRef>
+          <a:fillRef idx="3">
+            <a:schemeClr val="accent1"/>
+          </a:fillRef>
+          <a:effectRef idx="2">
+            <a:schemeClr val="accent1"/>
+          </a:effectRef>
+          <a:fontRef idx="minor">
+            <a:schemeClr val="lt1"/>
+          </a:fontRef>
+        </p:style>
         <p:txBody>
-          <a:bodyPr wrap="none">
-            <a:spAutoFit/>
-          </a:bodyPr>
+          <a:bodyPr rtlCol="0" anchor="ctr"/>
           <a:lstStyle/>
           <a:p>
-            <a:r>
-              <a:rPr sz="750" i="1">
-                <a:solidFill>
-                  <a:srgbClr val="707070"/>
+            <a:pPr algn="ctr"/>
+            <a:endParaRPr/>
+          </a:p>
+        </p:txBody>
+      </p:sp>
+      <p:sp>
+        <p:nvSpPr>
+          <p:cNvPr id="10" name="Rectangle 9"/>
+          <p:cNvSpPr/>
+          <p:nvPr/>
+        </p:nvSpPr>
+        <p:spPr>
+          <a:xfrm>
+            <a:off x="457200" y="2679191"/>
+            <a:ext cx="3977639" cy="960120"/>
+          </a:xfrm>
+          <a:prstGeom prst="rect">
+            <a:avLst/>
+          </a:prstGeom>
+          <a:solidFill>
+            <a:srgbClr val="FFFFFF"/>
+          </a:solidFill>
+          <a:ln w="12700">
+            <a:solidFill>
+              <a:srgbClr val="E8E8E8"/>
+            </a:solidFill>
+          </a:ln>
+        </p:spPr>
+        <p:style>
+          <a:lnRef idx="1">
+            <a:schemeClr val="accent1"/>
+          </a:lnRef>
+          <a:fillRef idx="3">
+            <a:schemeClr val="accent1"/>
+          </a:fillRef>
+          <a:effectRef idx="2">
+            <a:schemeClr val="accent1"/>
+          </a:effectRef>
+          <a:fontRef idx="minor">
+            <a:schemeClr val="lt1"/>
+          </a:fontRef>
+        </p:style>
+        <p:txBody>
+          <a:bodyPr wrap="square" lIns="182880" rtlCol="0" anchor="ctr"/>
+          <a:lstStyle/>
+          <a:p>
+            <a:pPr algn="ctr"/>
+            <a:r>
+              <a:rPr sz="1200" b="1" i="0" dirty="0">
+                <a:solidFill>
+                  <a:srgbClr val="0E2841"/>
+                </a:solidFill>
+                <a:latin typeface="Avenir Next LT Pro Demi"/>
+              </a:rPr>
+              <a:t>International execution failure</a:t>
+            </a:r>
+          </a:p>
+          <a:p>
+            <a:r>
+              <a:rPr sz="950" b="1" i="0" dirty="0">
+                <a:solidFill>
+                  <a:srgbClr val="C88A12"/>
                 </a:solidFill>
                 <a:latin typeface="Avenir Next LT Pro"/>
               </a:rPr>
-              <a:t>Sources: RH DEF 14A proxy; SEC Form 4 filings; RH 8-K (Jun 2026 annual meeting); company guidance.</a:t>
-            </a:r>
+              <a:t>Severity: MED   ·   Probability:</a:t>
+            </a:r>
+          </a:p>
+        </p:txBody>
+      </p:sp>
+      <p:sp>
+        <p:nvSpPr>
+          <p:cNvPr id="11" name="Rectangle 10"/>
+          <p:cNvSpPr/>
+          <p:nvPr/>
+        </p:nvSpPr>
+        <p:spPr>
+          <a:xfrm>
+            <a:off x="457200" y="2679191"/>
+            <a:ext cx="73152" cy="960120"/>
+          </a:xfrm>
+          <a:prstGeom prst="rect">
+            <a:avLst/>
+          </a:prstGeom>
+          <a:solidFill>
+            <a:srgbClr val="C88A12"/>
+          </a:solidFill>
+          <a:ln>
+            <a:solidFill/>
+          </a:ln>
+        </p:spPr>
+        <p:style>
+          <a:lnRef idx="1">
+            <a:schemeClr val="accent1"/>
+          </a:lnRef>
+          <a:fillRef idx="3">
+            <a:schemeClr val="accent1"/>
+          </a:fillRef>
+          <a:effectRef idx="2">
+            <a:schemeClr val="accent1"/>
+          </a:effectRef>
+          <a:fontRef idx="minor">
+            <a:schemeClr val="lt1"/>
+          </a:fontRef>
+        </p:style>
+        <p:txBody>
+          <a:bodyPr rtlCol="0" anchor="ctr"/>
+          <a:lstStyle/>
+          <a:p>
+            <a:pPr algn="ctr"/>
+            <a:endParaRPr/>
+          </a:p>
+        </p:txBody>
+      </p:sp>
+      <p:sp>
+        <p:nvSpPr>
+          <p:cNvPr id="12" name="Rectangle 11"/>
+          <p:cNvSpPr/>
+          <p:nvPr/>
+        </p:nvSpPr>
+        <p:spPr>
+          <a:xfrm>
+            <a:off x="4709159" y="2679191"/>
+            <a:ext cx="3977639" cy="960120"/>
+          </a:xfrm>
+          <a:prstGeom prst="rect">
+            <a:avLst/>
+          </a:prstGeom>
+          <a:solidFill>
+            <a:srgbClr val="FFFFFF"/>
+          </a:solidFill>
+          <a:ln w="12700">
+            <a:solidFill>
+              <a:srgbClr val="E8E8E8"/>
+            </a:solidFill>
+          </a:ln>
+        </p:spPr>
+        <p:style>
+          <a:lnRef idx="1">
+            <a:schemeClr val="accent1"/>
+          </a:lnRef>
+          <a:fillRef idx="3">
+            <a:schemeClr val="accent1"/>
+          </a:fillRef>
+          <a:effectRef idx="2">
+            <a:schemeClr val="accent1"/>
+          </a:effectRef>
+          <a:fontRef idx="minor">
+            <a:schemeClr val="lt1"/>
+          </a:fontRef>
+        </p:style>
+        <p:txBody>
+          <a:bodyPr wrap="square" lIns="182880" rtlCol="0" anchor="ctr"/>
+          <a:lstStyle/>
+          <a:p>
+            <a:pPr algn="ctr"/>
+            <a:r>
+              <a:rPr sz="1200" b="1" i="0" dirty="0">
+                <a:solidFill>
+                  <a:srgbClr val="0E2841"/>
+                </a:solidFill>
+                <a:latin typeface="Avenir Next LT Pro Demi"/>
+              </a:rPr>
+              <a:t>Tariff / supply-chain disruption</a:t>
+            </a:r>
+          </a:p>
+          <a:p>
+            <a:r>
+              <a:rPr sz="950" b="1" i="0" dirty="0">
+                <a:solidFill>
+                  <a:srgbClr val="C88A12"/>
+                </a:solidFill>
+                <a:latin typeface="Avenir Next LT Pro"/>
+              </a:rPr>
+              <a:t>Severity: MED   ·   Probability:</a:t>
+            </a:r>
+          </a:p>
+        </p:txBody>
+      </p:sp>
+      <p:sp>
+        <p:nvSpPr>
+          <p:cNvPr id="13" name="Rectangle 12"/>
+          <p:cNvSpPr/>
+          <p:nvPr/>
+        </p:nvSpPr>
+        <p:spPr>
+          <a:xfrm>
+            <a:off x="4709159" y="2679191"/>
+            <a:ext cx="73152" cy="960120"/>
+          </a:xfrm>
+          <a:prstGeom prst="rect">
+            <a:avLst/>
+          </a:prstGeom>
+          <a:solidFill>
+            <a:srgbClr val="C88A12"/>
+          </a:solidFill>
+          <a:ln>
+            <a:solidFill/>
+          </a:ln>
+        </p:spPr>
+        <p:style>
+          <a:lnRef idx="1">
+            <a:schemeClr val="accent1"/>
+          </a:lnRef>
+          <a:fillRef idx="3">
+            <a:schemeClr val="accent1"/>
+          </a:fillRef>
+          <a:effectRef idx="2">
+            <a:schemeClr val="accent1"/>
+          </a:effectRef>
+          <a:fontRef idx="minor">
+            <a:schemeClr val="lt1"/>
+          </a:fontRef>
+        </p:style>
+        <p:txBody>
+          <a:bodyPr rtlCol="0" anchor="ctr"/>
+          <a:lstStyle/>
+          <a:p>
+            <a:pPr algn="ctr"/>
+            <a:endParaRPr/>
+          </a:p>
+        </p:txBody>
+      </p:sp>
+      <p:sp>
+        <p:nvSpPr>
+          <p:cNvPr id="14" name="Rectangle 13"/>
+          <p:cNvSpPr/>
+          <p:nvPr/>
+        </p:nvSpPr>
+        <p:spPr>
+          <a:xfrm>
+            <a:off x="457200" y="3803904"/>
+            <a:ext cx="3977639" cy="960120"/>
+          </a:xfrm>
+          <a:prstGeom prst="rect">
+            <a:avLst/>
+          </a:prstGeom>
+          <a:solidFill>
+            <a:srgbClr val="FFFFFF"/>
+          </a:solidFill>
+          <a:ln w="12700">
+            <a:solidFill>
+              <a:srgbClr val="E8E8E8"/>
+            </a:solidFill>
+          </a:ln>
+        </p:spPr>
+        <p:style>
+          <a:lnRef idx="1">
+            <a:schemeClr val="accent1"/>
+          </a:lnRef>
+          <a:fillRef idx="3">
+            <a:schemeClr val="accent1"/>
+          </a:fillRef>
+          <a:effectRef idx="2">
+            <a:schemeClr val="accent1"/>
+          </a:effectRef>
+          <a:fontRef idx="minor">
+            <a:schemeClr val="lt1"/>
+          </a:fontRef>
+        </p:style>
+        <p:txBody>
+          <a:bodyPr wrap="square" lIns="182880" rtlCol="0" anchor="ctr"/>
+          <a:lstStyle/>
+          <a:p>
+            <a:pPr algn="ctr"/>
+            <a:r>
+              <a:rPr sz="1200" b="1" i="0" dirty="0">
+                <a:solidFill>
+                  <a:srgbClr val="0E2841"/>
+                </a:solidFill>
+                <a:latin typeface="Avenir Next LT Pro Demi"/>
+              </a:rPr>
+              <a:t>Friedman key-man dependency</a:t>
+            </a:r>
+          </a:p>
+          <a:p>
+            <a:r>
+              <a:rPr sz="950" b="1" i="0" dirty="0">
+                <a:solidFill>
+                  <a:srgbClr val="B03030"/>
+                </a:solidFill>
+                <a:latin typeface="Avenir Next LT Pro"/>
+              </a:rPr>
+              <a:t>Severity: HIGH   ·   Probability:</a:t>
+            </a:r>
+          </a:p>
+        </p:txBody>
+      </p:sp>
+      <p:sp>
+        <p:nvSpPr>
+          <p:cNvPr id="15" name="Rectangle 14"/>
+          <p:cNvSpPr/>
+          <p:nvPr/>
+        </p:nvSpPr>
+        <p:spPr>
+          <a:xfrm>
+            <a:off x="457200" y="3803904"/>
+            <a:ext cx="73152" cy="960120"/>
+          </a:xfrm>
+          <a:prstGeom prst="rect">
+            <a:avLst/>
+          </a:prstGeom>
+          <a:solidFill>
+            <a:srgbClr val="B03030"/>
+          </a:solidFill>
+          <a:ln>
+            <a:solidFill/>
+          </a:ln>
+        </p:spPr>
+        <p:style>
+          <a:lnRef idx="1">
+            <a:schemeClr val="accent1"/>
+          </a:lnRef>
+          <a:fillRef idx="3">
+            <a:schemeClr val="accent1"/>
+          </a:fillRef>
+          <a:effectRef idx="2">
+            <a:schemeClr val="accent1"/>
+          </a:effectRef>
+          <a:fontRef idx="minor">
+            <a:schemeClr val="lt1"/>
+          </a:fontRef>
+        </p:style>
+        <p:txBody>
+          <a:bodyPr rtlCol="0" anchor="ctr"/>
+          <a:lstStyle/>
+          <a:p>
+            <a:pPr algn="ctr"/>
+            <a:endParaRPr/>
+          </a:p>
+        </p:txBody>
+      </p:sp>
+      <p:sp>
+        <p:nvSpPr>
+          <p:cNvPr id="16" name="Rectangle 15"/>
+          <p:cNvSpPr/>
+          <p:nvPr/>
+        </p:nvSpPr>
+        <p:spPr>
+          <a:xfrm>
+            <a:off x="4709159" y="3803904"/>
+            <a:ext cx="3977639" cy="960120"/>
+          </a:xfrm>
+          <a:prstGeom prst="rect">
+            <a:avLst/>
+          </a:prstGeom>
+          <a:solidFill>
+            <a:srgbClr val="FFFFFF"/>
+          </a:solidFill>
+          <a:ln w="12700">
+            <a:solidFill>
+              <a:srgbClr val="E8E8E8"/>
+            </a:solidFill>
+          </a:ln>
+        </p:spPr>
+        <p:style>
+          <a:lnRef idx="1">
+            <a:schemeClr val="accent1"/>
+          </a:lnRef>
+          <a:fillRef idx="3">
+            <a:schemeClr val="accent1"/>
+          </a:fillRef>
+          <a:effectRef idx="2">
+            <a:schemeClr val="accent1"/>
+          </a:effectRef>
+          <a:fontRef idx="minor">
+            <a:schemeClr val="lt1"/>
+          </a:fontRef>
+        </p:style>
+        <p:txBody>
+          <a:bodyPr wrap="square" lIns="182880" rtlCol="0" anchor="ctr"/>
+          <a:lstStyle/>
+          <a:p>
+            <a:pPr algn="ctr"/>
+            <a:r>
+              <a:rPr sz="1200" b="1" i="0" dirty="0">
+                <a:solidFill>
+                  <a:srgbClr val="0E2841"/>
+                </a:solidFill>
+                <a:latin typeface="Avenir Next LT Pro Demi"/>
+              </a:rPr>
+              <a:t>Broad consumer / discretionary recession</a:t>
+            </a:r>
+          </a:p>
+          <a:p>
+            <a:r>
+              <a:rPr sz="950" b="1" i="0" dirty="0">
+                <a:solidFill>
+                  <a:srgbClr val="C88A12"/>
+                </a:solidFill>
+                <a:latin typeface="Avenir Next LT Pro"/>
+              </a:rPr>
+              <a:t>Severity: MED   ·   Probability:</a:t>
+            </a:r>
+          </a:p>
+        </p:txBody>
+      </p:sp>
+      <p:sp>
+        <p:nvSpPr>
+          <p:cNvPr id="17" name="Rectangle 16"/>
+          <p:cNvSpPr/>
+          <p:nvPr/>
+        </p:nvSpPr>
+        <p:spPr>
+          <a:xfrm>
+            <a:off x="4709159" y="3803904"/>
+            <a:ext cx="73152" cy="960120"/>
+          </a:xfrm>
+          <a:prstGeom prst="rect">
+            <a:avLst/>
+          </a:prstGeom>
+          <a:solidFill>
+            <a:srgbClr val="C88A12"/>
+          </a:solidFill>
+          <a:ln>
+            <a:solidFill/>
+          </a:ln>
+        </p:spPr>
+        <p:style>
+          <a:lnRef idx="1">
+            <a:schemeClr val="accent1"/>
+          </a:lnRef>
+          <a:fillRef idx="3">
+            <a:schemeClr val="accent1"/>
+          </a:fillRef>
+          <a:effectRef idx="2">
+            <a:schemeClr val="accent1"/>
+          </a:effectRef>
+          <a:fontRef idx="minor">
+            <a:schemeClr val="lt1"/>
+          </a:fontRef>
+        </p:style>
+        <p:txBody>
+          <a:bodyPr rtlCol="0" anchor="ctr"/>
+          <a:lstStyle/>
+          <a:p>
+            <a:pPr algn="ctr"/>
+            <a:endParaRPr/>
+          </a:p>
+        </p:txBody>
+      </p:sp>
+      <p:sp>
+        <p:nvSpPr>
+          <p:cNvPr id="18" name="Rectangle 17"/>
+          <p:cNvSpPr/>
+          <p:nvPr/>
+        </p:nvSpPr>
+        <p:spPr>
+          <a:xfrm>
+            <a:off x="457200" y="4928616"/>
+            <a:ext cx="3977639" cy="960120"/>
+          </a:xfrm>
+          <a:prstGeom prst="rect">
+            <a:avLst/>
+          </a:prstGeom>
+          <a:solidFill>
+            <a:srgbClr val="FFFFFF"/>
+          </a:solidFill>
+          <a:ln w="12700">
+            <a:solidFill>
+              <a:srgbClr val="E8E8E8"/>
+            </a:solidFill>
+          </a:ln>
+        </p:spPr>
+        <p:style>
+          <a:lnRef idx="1">
+            <a:schemeClr val="accent1"/>
+          </a:lnRef>
+          <a:fillRef idx="3">
+            <a:schemeClr val="accent1"/>
+          </a:fillRef>
+          <a:effectRef idx="2">
+            <a:schemeClr val="accent1"/>
+          </a:effectRef>
+          <a:fontRef idx="minor">
+            <a:schemeClr val="lt1"/>
+          </a:fontRef>
+        </p:style>
+        <p:txBody>
+          <a:bodyPr wrap="square" lIns="182880" rtlCol="0" anchor="ctr"/>
+          <a:lstStyle/>
+          <a:p>
+            <a:pPr algn="ctr"/>
+            <a:r>
+              <a:rPr sz="1200" b="1">
+                <a:solidFill>
+                  <a:srgbClr val="0E2841"/>
+                </a:solidFill>
+                <a:latin typeface="Avenir Next LT Pro Demi"/>
+              </a:rPr>
+              <a:t>Fulfillment / delivery execution (moat risk at Estates tier)</a:t>
+            </a:r>
+          </a:p>
+          <a:p>
+            <a:r>
+              <a:rPr sz="950" b="1">
+                <a:solidFill>
+                  <a:srgbClr val="C88A12"/>
+                </a:solidFill>
+                <a:latin typeface="Avenir Next LT Pro"/>
+              </a:rPr>
+              <a:t>Severity: MED   ·   Probability: 30%</a:t>
+            </a:r>
+          </a:p>
+        </p:txBody>
+      </p:sp>
+      <p:sp>
+        <p:nvSpPr>
+          <p:cNvPr id="19" name="Rectangle 18"/>
+          <p:cNvSpPr/>
+          <p:nvPr/>
+        </p:nvSpPr>
+        <p:spPr>
+          <a:xfrm>
+            <a:off x="457200" y="4928616"/>
+            <a:ext cx="73152" cy="960120"/>
+          </a:xfrm>
+          <a:prstGeom prst="rect">
+            <a:avLst/>
+          </a:prstGeom>
+          <a:solidFill>
+            <a:srgbClr val="C88A12"/>
+          </a:solidFill>
+          <a:ln>
+            <a:solidFill/>
+          </a:ln>
+        </p:spPr>
+        <p:style>
+          <a:lnRef idx="1">
+            <a:schemeClr val="accent1"/>
+          </a:lnRef>
+          <a:fillRef idx="3">
+            <a:schemeClr val="accent1"/>
+          </a:fillRef>
+          <a:effectRef idx="2">
+            <a:schemeClr val="accent1"/>
+          </a:effectRef>
+          <a:fontRef idx="minor">
+            <a:schemeClr val="lt1"/>
+          </a:fontRef>
+        </p:style>
+        <p:txBody>
+          <a:bodyPr rtlCol="0" anchor="ctr"/>
+          <a:lstStyle/>
+          <a:p>
+            <a:pPr algn="ctr"/>
+            <a:endParaRPr/>
           </a:p>
         </p:txBody>
       </p:sp>

--- a/RH_Stock_Pitch_updated.pptx
+++ b/RH_Stock_Pitch_updated.pptx
@@ -5107,7 +5107,7 @@
           </a:prstGeom>
           <a:noFill/>
           <a:ln w="6350">
-            <a:solidFill/>
+            <a:noFill/>
           </a:ln>
           <a:effectLst/>
         </p:spPr>
@@ -5232,7 +5232,7 @@
           </a:prstGeom>
           <a:noFill/>
           <a:ln>
-            <a:solidFill/>
+            <a:noFill/>
           </a:ln>
         </p:spPr>
         <p:txBody>
@@ -5355,7 +5355,7 @@
           </a:prstGeom>
           <a:noFill/>
           <a:ln>
-            <a:solidFill/>
+            <a:noFill/>
           </a:ln>
         </p:spPr>
         <p:txBody>
@@ -5467,7 +5467,7 @@
           </a:prstGeom>
           <a:noFill/>
           <a:ln>
-            <a:solidFill/>
+            <a:noFill/>
           </a:ln>
         </p:spPr>
         <p:txBody>
@@ -5579,7 +5579,7 @@
           </a:prstGeom>
           <a:noFill/>
           <a:ln>
-            <a:solidFill/>
+            <a:noFill/>
           </a:ln>
         </p:spPr>
         <p:txBody>
@@ -5648,7 +5648,7 @@
           </a:prstGeom>
           <a:noFill/>
           <a:ln>
-            <a:solidFill/>
+            <a:noFill/>
           </a:ln>
         </p:spPr>
         <p:txBody>
@@ -5685,7 +5685,7 @@
           </a:prstGeom>
           <a:noFill/>
           <a:ln>
-            <a:solidFill/>
+            <a:noFill/>
           </a:ln>
         </p:spPr>
         <p:txBody>
@@ -5740,7 +5740,7 @@
           </a:prstGeom>
           <a:noFill/>
           <a:ln>
-            <a:solidFill/>
+            <a:noFill/>
           </a:ln>
         </p:spPr>
         <p:txBody>
@@ -5863,7 +5863,7 @@
           </a:prstGeom>
           <a:noFill/>
           <a:ln>
-            <a:solidFill/>
+            <a:noFill/>
           </a:ln>
         </p:spPr>
         <p:txBody>
@@ -5900,7 +5900,7 @@
           </a:prstGeom>
           <a:noFill/>
           <a:ln>
-            <a:solidFill/>
+            <a:noFill/>
           </a:ln>
         </p:spPr>
         <p:txBody>
@@ -5980,7 +5980,7 @@
           </a:prstGeom>
           <a:noFill/>
           <a:ln>
-            <a:solidFill/>
+            <a:noFill/>
           </a:ln>
         </p:spPr>
         <p:txBody>
@@ -6017,7 +6017,7 @@
           </a:prstGeom>
           <a:noFill/>
           <a:ln>
-            <a:solidFill/>
+            <a:noFill/>
           </a:ln>
         </p:spPr>
         <p:txBody>
@@ -6097,7 +6097,7 @@
           </a:prstGeom>
           <a:noFill/>
           <a:ln>
-            <a:solidFill/>
+            <a:noFill/>
           </a:ln>
         </p:spPr>
         <p:txBody>
@@ -6134,7 +6134,7 @@
           </a:prstGeom>
           <a:noFill/>
           <a:ln>
-            <a:solidFill/>
+            <a:noFill/>
           </a:ln>
         </p:spPr>
         <p:txBody>
@@ -6214,7 +6214,7 @@
           </a:prstGeom>
           <a:noFill/>
           <a:ln>
-            <a:solidFill/>
+            <a:noFill/>
           </a:ln>
         </p:spPr>
         <p:txBody>
@@ -6251,7 +6251,7 @@
           </a:prstGeom>
           <a:noFill/>
           <a:ln>
-            <a:solidFill/>
+            <a:noFill/>
           </a:ln>
         </p:spPr>
         <p:txBody>
@@ -6288,7 +6288,7 @@
           </a:prstGeom>
           <a:noFill/>
           <a:ln>
-            <a:solidFill/>
+            <a:noFill/>
           </a:ln>
         </p:spPr>
         <p:txBody>
@@ -6342,6 +6342,9 @@
             <a:avLst/>
           </a:prstGeom>
           <a:noFill/>
+          <a:ln>
+            <a:noFill/>
+          </a:ln>
         </p:spPr>
         <p:txBody>
           <a:bodyPr wrap="square">
@@ -6801,6 +6804,9 @@
             <a:avLst/>
           </a:prstGeom>
           <a:noFill/>
+          <a:ln>
+            <a:noFill/>
+          </a:ln>
         </p:spPr>
         <p:txBody>
           <a:bodyPr wrap="square">
@@ -6835,6 +6841,9 @@
             <a:avLst/>
           </a:prstGeom>
           <a:noFill/>
+          <a:ln>
+            <a:noFill/>
+          </a:ln>
         </p:spPr>
         <p:txBody>
           <a:bodyPr wrap="none">
@@ -6888,7 +6897,7 @@
           </a:prstGeom>
           <a:noFill/>
           <a:ln>
-            <a:solidFill/>
+            <a:noFill/>
           </a:ln>
         </p:spPr>
         <p:txBody>
@@ -7072,7 +7081,7 @@
           </a:prstGeom>
           <a:noFill/>
           <a:ln>
-            <a:solidFill/>
+            <a:noFill/>
           </a:ln>
         </p:spPr>
         <p:txBody>
@@ -7118,7 +7127,7 @@
           </a:prstGeom>
           <a:noFill/>
           <a:ln>
-            <a:solidFill/>
+            <a:noFill/>
           </a:ln>
         </p:spPr>
         <p:txBody>
@@ -7164,7 +7173,7 @@
           </a:prstGeom>
           <a:noFill/>
           <a:ln>
-            <a:solidFill/>
+            <a:noFill/>
           </a:ln>
         </p:spPr>
         <p:txBody>
@@ -7210,7 +7219,7 @@
           </a:prstGeom>
           <a:noFill/>
           <a:ln>
-            <a:solidFill/>
+            <a:noFill/>
           </a:ln>
         </p:spPr>
         <p:txBody>
@@ -7256,7 +7265,7 @@
           </a:prstGeom>
           <a:noFill/>
           <a:ln>
-            <a:solidFill/>
+            <a:noFill/>
           </a:ln>
         </p:spPr>
         <p:txBody>
@@ -7302,7 +7311,7 @@
           </a:prstGeom>
           <a:noFill/>
           <a:ln>
-            <a:solidFill/>
+            <a:noFill/>
           </a:ln>
         </p:spPr>
         <p:txBody>
@@ -7348,7 +7357,7 @@
           </a:prstGeom>
           <a:noFill/>
           <a:ln>
-            <a:solidFill/>
+            <a:noFill/>
           </a:ln>
         </p:spPr>
         <p:txBody>
@@ -7385,7 +7394,7 @@
           </a:prstGeom>
           <a:noFill/>
           <a:ln>
-            <a:solidFill/>
+            <a:noFill/>
           </a:ln>
         </p:spPr>
         <p:txBody>
@@ -7447,7 +7456,7 @@
           </a:prstGeom>
           <a:noFill/>
           <a:ln>
-            <a:solidFill/>
+            <a:noFill/>
           </a:ln>
         </p:spPr>
         <p:txBody>
@@ -7482,7 +7491,7 @@
           </a:prstGeom>
           <a:noFill/>
           <a:ln>
-            <a:solidFill/>
+            <a:noFill/>
           </a:ln>
         </p:spPr>
         <p:txBody>
@@ -8914,7 +8923,7 @@
           </a:prstGeom>
           <a:noFill/>
           <a:ln>
-            <a:solidFill/>
+            <a:noFill/>
           </a:ln>
         </p:spPr>
         <p:txBody>
@@ -9052,7 +9061,7 @@
           </a:prstGeom>
           <a:noFill/>
           <a:ln>
-            <a:solidFill/>
+            <a:noFill/>
           </a:ln>
         </p:spPr>
         <p:txBody>
@@ -9087,7 +9096,7 @@
           </a:prstGeom>
           <a:noFill/>
           <a:ln>
-            <a:solidFill/>
+            <a:noFill/>
           </a:ln>
         </p:spPr>
         <p:txBody>
@@ -10121,7 +10130,7 @@
           </a:prstGeom>
           <a:noFill/>
           <a:ln>
-            <a:solidFill/>
+            <a:noFill/>
           </a:ln>
         </p:spPr>
         <p:txBody>
@@ -10183,7 +10192,7 @@
           </a:prstGeom>
           <a:noFill/>
           <a:ln>
-            <a:solidFill/>
+            <a:noFill/>
           </a:ln>
         </p:spPr>
         <p:txBody>
@@ -10218,7 +10227,7 @@
           </a:prstGeom>
           <a:noFill/>
           <a:ln>
-            <a:solidFill/>
+            <a:noFill/>
           </a:ln>
         </p:spPr>
         <p:txBody>
@@ -11006,7 +11015,7 @@
           </a:prstGeom>
           <a:noFill/>
           <a:ln>
-            <a:solidFill/>
+            <a:noFill/>
           </a:ln>
         </p:spPr>
         <p:txBody>
@@ -11052,7 +11061,7 @@
           </a:prstGeom>
           <a:noFill/>
           <a:ln>
-            <a:solidFill/>
+            <a:noFill/>
           </a:ln>
         </p:spPr>
         <p:txBody>
@@ -11190,7 +11199,7 @@
           </a:prstGeom>
           <a:noFill/>
           <a:ln>
-            <a:solidFill/>
+            <a:noFill/>
           </a:ln>
         </p:spPr>
         <p:txBody>
@@ -11225,7 +11234,7 @@
           </a:prstGeom>
           <a:noFill/>
           <a:ln>
-            <a:solidFill/>
+            <a:noFill/>
           </a:ln>
         </p:spPr>
         <p:txBody>
@@ -12074,7 +12083,7 @@
           </a:prstGeom>
           <a:noFill/>
           <a:ln>
-            <a:solidFill/>
+            <a:noFill/>
           </a:ln>
         </p:spPr>
         <p:txBody>
@@ -12953,7 +12962,7 @@
           </a:prstGeom>
           <a:noFill/>
           <a:ln>
-            <a:solidFill/>
+            <a:noFill/>
           </a:ln>
         </p:spPr>
         <p:txBody>
@@ -12988,7 +12997,7 @@
           </a:prstGeom>
           <a:noFill/>
           <a:ln>
-            <a:solidFill/>
+            <a:noFill/>
           </a:ln>
         </p:spPr>
         <p:txBody>
@@ -13889,7 +13898,7 @@
           </a:prstGeom>
           <a:noFill/>
           <a:ln>
-            <a:solidFill/>
+            <a:noFill/>
           </a:ln>
         </p:spPr>
         <p:txBody>
@@ -14391,7 +14400,7 @@
           </a:prstGeom>
           <a:noFill/>
           <a:ln>
-            <a:solidFill/>
+            <a:noFill/>
           </a:ln>
         </p:spPr>
         <p:txBody>
@@ -14546,7 +14555,7 @@
           </a:prstGeom>
           <a:noFill/>
           <a:ln>
-            <a:solidFill/>
+            <a:noFill/>
           </a:ln>
         </p:spPr>
         <p:txBody>
@@ -14676,7 +14685,7 @@
           </a:prstGeom>
           <a:noFill/>
           <a:ln>
-            <a:solidFill/>
+            <a:noFill/>
           </a:ln>
         </p:spPr>
         <p:txBody>
@@ -15209,7 +15218,7 @@
           </a:prstGeom>
           <a:noFill/>
           <a:ln>
-            <a:solidFill/>
+            <a:noFill/>
           </a:ln>
         </p:spPr>
         <p:txBody>
@@ -15262,7 +15271,7 @@
           </a:prstGeom>
           <a:noFill/>
           <a:ln>
-            <a:solidFill/>
+            <a:noFill/>
           </a:ln>
         </p:spPr>
         <p:txBody>
@@ -15317,7 +15326,7 @@
           </a:prstGeom>
           <a:noFill/>
           <a:ln>
-            <a:solidFill/>
+            <a:noFill/>
           </a:ln>
         </p:spPr>
         <p:txBody>
@@ -15397,7 +15406,7 @@
           </a:prstGeom>
           <a:noFill/>
           <a:ln>
-            <a:solidFill/>
+            <a:noFill/>
           </a:ln>
         </p:spPr>
         <p:txBody>
@@ -15477,7 +15486,7 @@
           </a:prstGeom>
           <a:noFill/>
           <a:ln>
-            <a:solidFill/>
+            <a:noFill/>
           </a:ln>
         </p:spPr>
         <p:txBody>
@@ -15514,7 +15523,7 @@
           </a:prstGeom>
           <a:noFill/>
           <a:ln>
-            <a:solidFill/>
+            <a:noFill/>
           </a:ln>
         </p:spPr>
         <p:txBody>
@@ -15594,7 +15603,7 @@
           </a:prstGeom>
           <a:noFill/>
           <a:ln>
-            <a:solidFill/>
+            <a:noFill/>
           </a:ln>
         </p:spPr>
         <p:txBody>
@@ -15631,7 +15640,7 @@
           </a:prstGeom>
           <a:noFill/>
           <a:ln>
-            <a:solidFill/>
+            <a:noFill/>
           </a:ln>
         </p:spPr>
         <p:txBody>
@@ -15711,7 +15720,7 @@
           </a:prstGeom>
           <a:noFill/>
           <a:ln>
-            <a:solidFill/>
+            <a:noFill/>
           </a:ln>
         </p:spPr>
         <p:txBody>
@@ -15748,7 +15757,7 @@
           </a:prstGeom>
           <a:noFill/>
           <a:ln>
-            <a:solidFill/>
+            <a:noFill/>
           </a:ln>
         </p:spPr>
         <p:txBody>
@@ -15785,7 +15794,7 @@
           </a:prstGeom>
           <a:noFill/>
           <a:ln>
-            <a:solidFill/>
+            <a:noFill/>
           </a:ln>
         </p:spPr>
         <p:txBody>
@@ -15822,7 +15831,7 @@
           </a:prstGeom>
           <a:noFill/>
           <a:ln>
-            <a:solidFill/>
+            <a:noFill/>
           </a:ln>
         </p:spPr>
         <p:txBody>
@@ -15968,7 +15977,7 @@
           </a:prstGeom>
           <a:noFill/>
           <a:ln>
-            <a:solidFill/>
+            <a:noFill/>
           </a:ln>
         </p:spPr>
         <p:txBody>
@@ -16091,7 +16100,7 @@
           </a:prstGeom>
           <a:noFill/>
           <a:ln>
-            <a:solidFill/>
+            <a:noFill/>
           </a:ln>
         </p:spPr>
         <p:txBody>
@@ -16139,7 +16148,7 @@
           </a:prstGeom>
           <a:noFill/>
           <a:ln>
-            <a:solidFill/>
+            <a:noFill/>
           </a:ln>
         </p:spPr>
         <p:txBody>
@@ -16219,7 +16228,7 @@
           </a:prstGeom>
           <a:noFill/>
           <a:ln>
-            <a:solidFill/>
+            <a:noFill/>
           </a:ln>
         </p:spPr>
         <p:txBody>
@@ -16267,7 +16276,7 @@
           </a:prstGeom>
           <a:noFill/>
           <a:ln>
-            <a:solidFill/>
+            <a:noFill/>
           </a:ln>
         </p:spPr>
         <p:txBody>
@@ -16347,7 +16356,7 @@
           </a:prstGeom>
           <a:noFill/>
           <a:ln>
-            <a:solidFill/>
+            <a:noFill/>
           </a:ln>
         </p:spPr>
         <p:txBody>
@@ -16395,7 +16404,7 @@
           </a:prstGeom>
           <a:noFill/>
           <a:ln>
-            <a:solidFill/>
+            <a:noFill/>
           </a:ln>
         </p:spPr>
         <p:txBody>
@@ -16432,7 +16441,7 @@
           </a:prstGeom>
           <a:noFill/>
           <a:ln>
-            <a:solidFill/>
+            <a:noFill/>
           </a:ln>
         </p:spPr>
         <p:txBody>
@@ -16469,7 +16478,7 @@
           </a:prstGeom>
           <a:noFill/>
           <a:ln>
-            <a:solidFill/>
+            <a:noFill/>
           </a:ln>
         </p:spPr>
         <p:txBody>
@@ -16524,7 +16533,7 @@
           </a:prstGeom>
           <a:noFill/>
           <a:ln>
-            <a:solidFill/>
+            <a:noFill/>
           </a:ln>
         </p:spPr>
         <p:txBody>
@@ -16647,7 +16656,7 @@
           </a:prstGeom>
           <a:noFill/>
           <a:ln>
-            <a:solidFill/>
+            <a:noFill/>
           </a:ln>
         </p:spPr>
         <p:txBody>
@@ -16736,7 +16745,7 @@
           </a:prstGeom>
           <a:noFill/>
           <a:ln>
-            <a:solidFill/>
+            <a:noFill/>
           </a:ln>
         </p:spPr>
         <p:txBody>
@@ -16825,7 +16834,7 @@
           </a:prstGeom>
           <a:noFill/>
           <a:ln>
-            <a:solidFill/>
+            <a:noFill/>
           </a:ln>
         </p:spPr>
         <p:txBody>
@@ -16914,7 +16923,7 @@
           </a:prstGeom>
           <a:noFill/>
           <a:ln>
-            <a:solidFill/>
+            <a:noFill/>
           </a:ln>
         </p:spPr>
         <p:txBody>
@@ -16960,7 +16969,7 @@
           </a:prstGeom>
           <a:noFill/>
           <a:ln>
-            <a:solidFill/>
+            <a:noFill/>
           </a:ln>
         </p:spPr>
         <p:txBody>

--- a/RH_Stock_Pitch_updated.pptx
+++ b/RH_Stock_Pitch_updated.pptx
@@ -18,19 +18,17 @@
     <p:sldId id="519" r:id="rId32"/>
     <p:sldId id="518" r:id="rId31"/>
     <p:sldId id="481" r:id="rId9"/>
-    <p:sldId id="514" r:id="rId27"/>
-    <p:sldId id="515" r:id="rId28"/>
-    <p:sldId id="520" r:id="rId33"/>
-    <p:sldId id="517" r:id="rId30"/>
-    <p:sldId id="521" r:id="rId34"/>
-    <p:sldId id="516" r:id="rId29"/>
+    <p:sldId id="522" r:id="rId35"/>
+    <p:sldId id="523" r:id="rId36"/>
+    <p:sldId id="524" r:id="rId37"/>
     <p:sldId id="508" r:id="rId10"/>
     <p:sldId id="482" r:id="rId11"/>
     <p:sldId id="509" r:id="rId12"/>
-    <p:sldId id="510" r:id="rId13"/>
     <p:sldId id="506" r:id="rId14"/>
     <p:sldId id="511" r:id="rId15"/>
     <p:sldId id="513" r:id="rId16"/>
+    <p:sldId id="525" r:id="rId38"/>
+    <p:sldId id="510" r:id="rId13"/>
   </p:sldIdLst>
   <p:sldSz cx="9144000" cy="6858000" type="screen4x3"/>
   <p:notesSz cx="7023100" cy="9309100"/>
@@ -13778,6 +13776,1741 @@
           <a:p>
             <a:pPr algn="ctr"/>
             <a:endParaRPr/>
+          </a:p>
+        </p:txBody>
+      </p:sp>
+    </p:spTree>
+  </p:cSld>
+  <p:clrMapOvr>
+    <a:masterClrMapping/>
+  </p:clrMapOvr>
+</p:sld>
+</file>
+
+<file path=ppt/slides/slide21.xml><?xml version="1.0" encoding="utf-8"?>
+<p:sld xmlns:a="http://schemas.openxmlformats.org/drawingml/2006/main" xmlns:p="http://schemas.openxmlformats.org/presentationml/2006/main" xmlns:r="http://schemas.openxmlformats.org/officeDocument/2006/relationships">
+  <p:cSld>
+    <p:spTree>
+      <p:nvGrpSpPr>
+        <p:cNvPr id="1" name=""/>
+        <p:cNvGrpSpPr/>
+        <p:nvPr/>
+      </p:nvGrpSpPr>
+      <p:grpSpPr/>
+      <p:sp>
+        <p:nvSpPr>
+          <p:cNvPr id="2" name="TextBox 1"/>
+          <p:cNvSpPr txBox="1"/>
+          <p:nvPr/>
+        </p:nvSpPr>
+        <p:spPr>
+          <a:xfrm>
+            <a:off x="457200" y="365760"/>
+            <a:ext cx="8229600" cy="548640"/>
+          </a:xfrm>
+          <a:prstGeom prst="rect">
+            <a:avLst/>
+          </a:prstGeom>
+          <a:noFill/>
+          <a:ln>
+            <a:noFill/>
+          </a:ln>
+        </p:spPr>
+        <p:txBody>
+          <a:bodyPr wrap="square">
+            <a:spAutoFit/>
+          </a:bodyPr>
+          <a:lstStyle/>
+          <a:p>
+            <a:r>
+              <a:rPr sz="2100">
+                <a:solidFill>
+                  <a:srgbClr val="000000"/>
+                </a:solidFill>
+                <a:latin typeface="Avenir Next LT Pro Demi"/>
+              </a:rPr>
+              <a:t>Trough → Recovery: Where RH Stands</a:t>
+            </a:r>
+          </a:p>
+        </p:txBody>
+      </p:sp>
+      <p:sp>
+        <p:nvSpPr>
+          <p:cNvPr id="3" name="Rectangle 2"/>
+          <p:cNvSpPr/>
+          <p:nvPr/>
+        </p:nvSpPr>
+        <p:spPr>
+          <a:xfrm>
+            <a:off x="457200" y="960120"/>
+            <a:ext cx="8229600" cy="25603"/>
+          </a:xfrm>
+          <a:prstGeom prst="rect">
+            <a:avLst/>
+          </a:prstGeom>
+          <a:solidFill>
+            <a:srgbClr val="000000"/>
+          </a:solidFill>
+          <a:ln>
+            <a:noFill/>
+          </a:ln>
+        </p:spPr>
+        <p:style>
+          <a:lnRef idx="1">
+            <a:schemeClr val="accent1"/>
+          </a:lnRef>
+          <a:fillRef idx="3">
+            <a:schemeClr val="accent1"/>
+          </a:fillRef>
+          <a:effectRef idx="2">
+            <a:schemeClr val="accent1"/>
+          </a:effectRef>
+          <a:fontRef idx="minor">
+            <a:schemeClr val="lt1"/>
+          </a:fontRef>
+        </p:style>
+        <p:txBody>
+          <a:bodyPr rtlCol="0" anchor="ctr"/>
+          <a:lstStyle/>
+          <a:p>
+            <a:pPr algn="ctr"/>
+          </a:p>
+        </p:txBody>
+      </p:sp>
+      <p:sp>
+        <p:nvSpPr>
+          <p:cNvPr id="4" name="TextBox 3"/>
+          <p:cNvSpPr txBox="1"/>
+          <p:nvPr/>
+        </p:nvSpPr>
+        <p:spPr>
+          <a:xfrm>
+            <a:off x="457200" y="1143000"/>
+            <a:ext cx="8229600" cy="548640"/>
+          </a:xfrm>
+          <a:prstGeom prst="rect">
+            <a:avLst/>
+          </a:prstGeom>
+          <a:noFill/>
+          <a:ln>
+            <a:noFill/>
+          </a:ln>
+        </p:spPr>
+        <p:txBody>
+          <a:bodyPr wrap="square">
+            <a:spAutoFit/>
+          </a:bodyPr>
+          <a:lstStyle/>
+          <a:p>
+            <a:r>
+              <a:rPr sz="1100" b="0" i="0">
+                <a:solidFill>
+                  <a:srgbClr val="000000"/>
+                </a:solidFill>
+                <a:latin typeface="Avenir Next LT Pro"/>
+              </a:rPr>
+              <a:t>Peaked ~$3.6B (FY22) on a housing boom + debt-funded buybacks; housing then froze — revenue fell to a ~$3.0B trough with ~$2.4B net debt.</a:t>
+            </a:r>
+          </a:p>
+        </p:txBody>
+      </p:sp>
+      <p:sp>
+        <p:nvSpPr>
+          <p:cNvPr id="5" name="Rectangle 4"/>
+          <p:cNvSpPr/>
+          <p:nvPr/>
+        </p:nvSpPr>
+        <p:spPr>
+          <a:xfrm>
+            <a:off x="457200" y="1874519"/>
+            <a:ext cx="3977639" cy="384048"/>
+          </a:xfrm>
+          <a:prstGeom prst="rect">
+            <a:avLst/>
+          </a:prstGeom>
+          <a:solidFill>
+            <a:srgbClr val="196B24"/>
+          </a:solidFill>
+          <a:ln>
+            <a:noFill/>
+          </a:ln>
+        </p:spPr>
+        <p:style>
+          <a:lnRef idx="1">
+            <a:schemeClr val="accent1"/>
+          </a:lnRef>
+          <a:fillRef idx="3">
+            <a:schemeClr val="accent1"/>
+          </a:fillRef>
+          <a:effectRef idx="2">
+            <a:schemeClr val="accent1"/>
+          </a:effectRef>
+          <a:fontRef idx="minor">
+            <a:schemeClr val="lt1"/>
+          </a:fontRef>
+        </p:style>
+        <p:txBody>
+          <a:bodyPr rtlCol="0" anchor="ctr" lIns="137160"/>
+          <a:lstStyle/>
+          <a:p>
+            <a:pPr algn="ctr"/>
+            <a:r>
+              <a:rPr sz="1250" b="1" i="0">
+                <a:solidFill>
+                  <a:srgbClr val="FFFFFF"/>
+                </a:solidFill>
+                <a:latin typeface="Avenir Next LT Pro Demi"/>
+              </a:rPr>
+              <a:t>WORKING</a:t>
+            </a:r>
+          </a:p>
+        </p:txBody>
+      </p:sp>
+      <p:sp>
+        <p:nvSpPr>
+          <p:cNvPr id="6" name="Rectangle 5"/>
+          <p:cNvSpPr/>
+          <p:nvPr/>
+        </p:nvSpPr>
+        <p:spPr>
+          <a:xfrm>
+            <a:off x="4709160" y="1874519"/>
+            <a:ext cx="3977639" cy="384048"/>
+          </a:xfrm>
+          <a:prstGeom prst="rect">
+            <a:avLst/>
+          </a:prstGeom>
+          <a:solidFill>
+            <a:srgbClr val="B03030"/>
+          </a:solidFill>
+          <a:ln>
+            <a:noFill/>
+          </a:ln>
+        </p:spPr>
+        <p:style>
+          <a:lnRef idx="1">
+            <a:schemeClr val="accent1"/>
+          </a:lnRef>
+          <a:fillRef idx="3">
+            <a:schemeClr val="accent1"/>
+          </a:fillRef>
+          <a:effectRef idx="2">
+            <a:schemeClr val="accent1"/>
+          </a:effectRef>
+          <a:fontRef idx="minor">
+            <a:schemeClr val="lt1"/>
+          </a:fontRef>
+        </p:style>
+        <p:txBody>
+          <a:bodyPr rtlCol="0" anchor="ctr" lIns="137160"/>
+          <a:lstStyle/>
+          <a:p>
+            <a:pPr algn="ctr"/>
+            <a:r>
+              <a:rPr sz="1250" b="1" i="0">
+                <a:solidFill>
+                  <a:srgbClr val="FFFFFF"/>
+                </a:solidFill>
+                <a:latin typeface="Avenir Next LT Pro Demi"/>
+              </a:rPr>
+              <a:t>WATCH</a:t>
+            </a:r>
+          </a:p>
+        </p:txBody>
+      </p:sp>
+      <p:sp>
+        <p:nvSpPr>
+          <p:cNvPr id="7" name="TextBox 6"/>
+          <p:cNvSpPr txBox="1"/>
+          <p:nvPr/>
+        </p:nvSpPr>
+        <p:spPr>
+          <a:xfrm>
+            <a:off x="457200" y="2423160"/>
+            <a:ext cx="3977639" cy="640080"/>
+          </a:xfrm>
+          <a:prstGeom prst="rect">
+            <a:avLst/>
+          </a:prstGeom>
+          <a:noFill/>
+          <a:ln>
+            <a:noFill/>
+          </a:ln>
+        </p:spPr>
+        <p:txBody>
+          <a:bodyPr wrap="square">
+            <a:spAutoFit/>
+          </a:bodyPr>
+          <a:lstStyle/>
+          <a:p>
+            <a:r>
+              <a:rPr sz="1200" b="1" i="0">
+                <a:solidFill>
+                  <a:srgbClr val="196B24"/>
+                </a:solidFill>
+                <a:latin typeface="Avenir Next LT Pro Demi"/>
+              </a:rPr>
+              <a:t>✓  </a:t>
+            </a:r>
+            <a:r>
+              <a:rPr sz="1100" b="0" i="0">
+                <a:solidFill>
+                  <a:srgbClr val="000000"/>
+                </a:solidFill>
+                <a:latin typeface="Avenir Next LT Pro"/>
+              </a:rPr>
+              <a:t>FCF inflected to +$252M in FY25 (from −$214M)</a:t>
+            </a:r>
+          </a:p>
+        </p:txBody>
+      </p:sp>
+      <p:sp>
+        <p:nvSpPr>
+          <p:cNvPr id="8" name="TextBox 7"/>
+          <p:cNvSpPr txBox="1"/>
+          <p:nvPr/>
+        </p:nvSpPr>
+        <p:spPr>
+          <a:xfrm>
+            <a:off x="457200" y="3081528"/>
+            <a:ext cx="3977639" cy="640080"/>
+          </a:xfrm>
+          <a:prstGeom prst="rect">
+            <a:avLst/>
+          </a:prstGeom>
+          <a:noFill/>
+          <a:ln>
+            <a:noFill/>
+          </a:ln>
+        </p:spPr>
+        <p:txBody>
+          <a:bodyPr wrap="square">
+            <a:spAutoFit/>
+          </a:bodyPr>
+          <a:lstStyle/>
+          <a:p>
+            <a:r>
+              <a:rPr sz="1200" b="1" i="0">
+                <a:solidFill>
+                  <a:srgbClr val="196B24"/>
+                </a:solidFill>
+                <a:latin typeface="Avenir Next LT Pro Demi"/>
+              </a:rPr>
+              <a:t>✓  </a:t>
+            </a:r>
+            <a:r>
+              <a:rPr sz="1100" b="0" i="0">
+                <a:solidFill>
+                  <a:srgbClr val="000000"/>
+                </a:solidFill>
+                <a:latin typeface="Avenir Next LT Pro"/>
+              </a:rPr>
+              <a:t>Inventory normalized $1.02B → $819M</a:t>
+            </a:r>
+          </a:p>
+        </p:txBody>
+      </p:sp>
+      <p:sp>
+        <p:nvSpPr>
+          <p:cNvPr id="9" name="TextBox 8"/>
+          <p:cNvSpPr txBox="1"/>
+          <p:nvPr/>
+        </p:nvSpPr>
+        <p:spPr>
+          <a:xfrm>
+            <a:off x="457200" y="3739896"/>
+            <a:ext cx="3977639" cy="640080"/>
+          </a:xfrm>
+          <a:prstGeom prst="rect">
+            <a:avLst/>
+          </a:prstGeom>
+          <a:noFill/>
+          <a:ln>
+            <a:noFill/>
+          </a:ln>
+        </p:spPr>
+        <p:txBody>
+          <a:bodyPr wrap="square">
+            <a:spAutoFit/>
+          </a:bodyPr>
+          <a:lstStyle/>
+          <a:p>
+            <a:r>
+              <a:rPr sz="1200" b="1" i="0">
+                <a:solidFill>
+                  <a:srgbClr val="196B24"/>
+                </a:solidFill>
+                <a:latin typeface="Avenir Next LT Pro Demi"/>
+              </a:rPr>
+              <a:t>✓  </a:t>
+            </a:r>
+            <a:r>
+              <a:rPr sz="1100" b="0" i="0">
+                <a:solidFill>
+                  <a:srgbClr val="000000"/>
+                </a:solidFill>
+                <a:latin typeface="Avenir Next LT Pro"/>
+              </a:rPr>
+              <a:t>Revenue re-accelerated +8.1% in FY25</a:t>
+            </a:r>
+          </a:p>
+        </p:txBody>
+      </p:sp>
+      <p:sp>
+        <p:nvSpPr>
+          <p:cNvPr id="10" name="TextBox 9"/>
+          <p:cNvSpPr txBox="1"/>
+          <p:nvPr/>
+        </p:nvSpPr>
+        <p:spPr>
+          <a:xfrm>
+            <a:off x="4709160" y="2423160"/>
+            <a:ext cx="3977639" cy="640080"/>
+          </a:xfrm>
+          <a:prstGeom prst="rect">
+            <a:avLst/>
+          </a:prstGeom>
+          <a:noFill/>
+          <a:ln>
+            <a:noFill/>
+          </a:ln>
+        </p:spPr>
+        <p:txBody>
+          <a:bodyPr wrap="square">
+            <a:spAutoFit/>
+          </a:bodyPr>
+          <a:lstStyle/>
+          <a:p>
+            <a:r>
+              <a:rPr sz="1200" b="1" i="0">
+                <a:solidFill>
+                  <a:srgbClr val="B03030"/>
+                </a:solidFill>
+                <a:latin typeface="Avenir Next LT Pro Demi"/>
+              </a:rPr>
+              <a:t>!  </a:t>
+            </a:r>
+            <a:r>
+              <a:rPr sz="1100" b="0" i="0">
+                <a:solidFill>
+                  <a:srgbClr val="000000"/>
+                </a:solidFill>
+                <a:latin typeface="Avenir Next LT Pro"/>
+              </a:rPr>
+              <a:t>Q1 FY26: revenue −1.7%, net loss</a:t>
+            </a:r>
+          </a:p>
+        </p:txBody>
+      </p:sp>
+      <p:sp>
+        <p:nvSpPr>
+          <p:cNvPr id="11" name="TextBox 10"/>
+          <p:cNvSpPr txBox="1"/>
+          <p:nvPr/>
+        </p:nvSpPr>
+        <p:spPr>
+          <a:xfrm>
+            <a:off x="4709160" y="3081528"/>
+            <a:ext cx="3977639" cy="640080"/>
+          </a:xfrm>
+          <a:prstGeom prst="rect">
+            <a:avLst/>
+          </a:prstGeom>
+          <a:noFill/>
+          <a:ln>
+            <a:noFill/>
+          </a:ln>
+        </p:spPr>
+        <p:txBody>
+          <a:bodyPr wrap="square">
+            <a:spAutoFit/>
+          </a:bodyPr>
+          <a:lstStyle/>
+          <a:p>
+            <a:r>
+              <a:rPr sz="1200" b="1" i="0">
+                <a:solidFill>
+                  <a:srgbClr val="B03030"/>
+                </a:solidFill>
+                <a:latin typeface="Avenir Next LT Pro Demi"/>
+              </a:rPr>
+              <a:t>!  </a:t>
+            </a:r>
+            <a:r>
+              <a:rPr sz="1100" b="0" i="0">
+                <a:solidFill>
+                  <a:srgbClr val="000000"/>
+                </a:solidFill>
+                <a:latin typeface="Avenir Next LT Pro"/>
+              </a:rPr>
+              <a:t>~$225M/yr interest keeps coverage thin</a:t>
+            </a:r>
+          </a:p>
+        </p:txBody>
+      </p:sp>
+      <p:sp>
+        <p:nvSpPr>
+          <p:cNvPr id="12" name="TextBox 11"/>
+          <p:cNvSpPr txBox="1"/>
+          <p:nvPr/>
+        </p:nvSpPr>
+        <p:spPr>
+          <a:xfrm>
+            <a:off x="4709160" y="3739896"/>
+            <a:ext cx="3977639" cy="640080"/>
+          </a:xfrm>
+          <a:prstGeom prst="rect">
+            <a:avLst/>
+          </a:prstGeom>
+          <a:noFill/>
+          <a:ln>
+            <a:noFill/>
+          </a:ln>
+        </p:spPr>
+        <p:txBody>
+          <a:bodyPr wrap="square">
+            <a:spAutoFit/>
+          </a:bodyPr>
+          <a:lstStyle/>
+          <a:p>
+            <a:r>
+              <a:rPr sz="1200" b="1" i="0">
+                <a:solidFill>
+                  <a:srgbClr val="B03030"/>
+                </a:solidFill>
+                <a:latin typeface="Avenir Next LT Pro Demi"/>
+              </a:rPr>
+              <a:t>!  </a:t>
+            </a:r>
+            <a:r>
+              <a:rPr sz="1100" b="0" i="0">
+                <a:solidFill>
+                  <a:srgbClr val="000000"/>
+                </a:solidFill>
+                <a:latin typeface="Avenir Next LT Pro"/>
+              </a:rPr>
+              <a:t>Guidance is back-half loaded</a:t>
+            </a:r>
+          </a:p>
+        </p:txBody>
+      </p:sp>
+      <p:sp>
+        <p:nvSpPr>
+          <p:cNvPr id="13" name="TextBox 12"/>
+          <p:cNvSpPr txBox="1"/>
+          <p:nvPr/>
+        </p:nvSpPr>
+        <p:spPr>
+          <a:xfrm>
+            <a:off x="457200" y="4663440"/>
+            <a:ext cx="8229600" cy="365760"/>
+          </a:xfrm>
+          <a:prstGeom prst="rect">
+            <a:avLst/>
+          </a:prstGeom>
+          <a:noFill/>
+          <a:ln>
+            <a:noFill/>
+          </a:ln>
+        </p:spPr>
+        <p:txBody>
+          <a:bodyPr wrap="square">
+            <a:spAutoFit/>
+          </a:bodyPr>
+          <a:lstStyle/>
+          <a:p>
+            <a:r>
+              <a:rPr sz="1150" b="1" i="0">
+                <a:solidFill>
+                  <a:srgbClr val="000000"/>
+                </a:solidFill>
+                <a:latin typeface="Avenir Next LT Pro Demi"/>
+              </a:rPr>
+              <a:t>Recovery is real but early — the next two quarters are the tell.</a:t>
+            </a:r>
+          </a:p>
+        </p:txBody>
+      </p:sp>
+      <p:sp>
+        <p:nvSpPr>
+          <p:cNvPr id="14" name="TextBox 13"/>
+          <p:cNvSpPr txBox="1"/>
+          <p:nvPr/>
+        </p:nvSpPr>
+        <p:spPr>
+          <a:xfrm>
+            <a:off x="457200" y="6309360"/>
+            <a:ext cx="8229600" cy="274320"/>
+          </a:xfrm>
+          <a:prstGeom prst="rect">
+            <a:avLst/>
+          </a:prstGeom>
+          <a:noFill/>
+          <a:ln>
+            <a:noFill/>
+          </a:ln>
+        </p:spPr>
+        <p:txBody>
+          <a:bodyPr wrap="square">
+            <a:spAutoFit/>
+          </a:bodyPr>
+          <a:lstStyle/>
+          <a:p>
+            <a:r>
+              <a:rPr sz="750" b="0" i="1">
+                <a:solidFill>
+                  <a:srgbClr val="707070"/>
+                </a:solidFill>
+                <a:latin typeface="Avenir Next LT Pro"/>
+              </a:rPr>
+              <a:t>Sources: RH FY2025 10-K; Q1 FY2026 10-Q.</a:t>
+            </a:r>
+          </a:p>
+        </p:txBody>
+      </p:sp>
+    </p:spTree>
+  </p:cSld>
+  <p:clrMapOvr>
+    <a:masterClrMapping/>
+  </p:clrMapOvr>
+</p:sld>
+</file>
+
+<file path=ppt/slides/slide22.xml><?xml version="1.0" encoding="utf-8"?>
+<p:sld xmlns:a="http://schemas.openxmlformats.org/drawingml/2006/main" xmlns:p="http://schemas.openxmlformats.org/presentationml/2006/main" xmlns:r="http://schemas.openxmlformats.org/officeDocument/2006/relationships">
+  <p:cSld>
+    <p:spTree>
+      <p:nvGrpSpPr>
+        <p:cNvPr id="1" name=""/>
+        <p:cNvGrpSpPr/>
+        <p:nvPr/>
+      </p:nvGrpSpPr>
+      <p:grpSpPr/>
+      <p:sp>
+        <p:nvSpPr>
+          <p:cNvPr id="2" name="TextBox 1"/>
+          <p:cNvSpPr txBox="1"/>
+          <p:nvPr/>
+        </p:nvSpPr>
+        <p:spPr>
+          <a:xfrm>
+            <a:off x="457200" y="365760"/>
+            <a:ext cx="8229600" cy="548640"/>
+          </a:xfrm>
+          <a:prstGeom prst="rect">
+            <a:avLst/>
+          </a:prstGeom>
+          <a:noFill/>
+          <a:ln>
+            <a:noFill/>
+          </a:ln>
+        </p:spPr>
+        <p:txBody>
+          <a:bodyPr wrap="square">
+            <a:spAutoFit/>
+          </a:bodyPr>
+          <a:lstStyle/>
+          <a:p>
+            <a:r>
+              <a:rPr sz="2100">
+                <a:solidFill>
+                  <a:srgbClr val="000000"/>
+                </a:solidFill>
+                <a:latin typeface="Avenir Next LT Pro Demi"/>
+              </a:rPr>
+              <a:t>Strategy &amp; Recent Execution</a:t>
+            </a:r>
+          </a:p>
+        </p:txBody>
+      </p:sp>
+      <p:sp>
+        <p:nvSpPr>
+          <p:cNvPr id="3" name="Rectangle 2"/>
+          <p:cNvSpPr/>
+          <p:nvPr/>
+        </p:nvSpPr>
+        <p:spPr>
+          <a:xfrm>
+            <a:off x="457200" y="960120"/>
+            <a:ext cx="8229600" cy="25603"/>
+          </a:xfrm>
+          <a:prstGeom prst="rect">
+            <a:avLst/>
+          </a:prstGeom>
+          <a:solidFill>
+            <a:srgbClr val="000000"/>
+          </a:solidFill>
+          <a:ln>
+            <a:noFill/>
+          </a:ln>
+        </p:spPr>
+        <p:style>
+          <a:lnRef idx="1">
+            <a:schemeClr val="accent1"/>
+          </a:lnRef>
+          <a:fillRef idx="3">
+            <a:schemeClr val="accent1"/>
+          </a:fillRef>
+          <a:effectRef idx="2">
+            <a:schemeClr val="accent1"/>
+          </a:effectRef>
+          <a:fontRef idx="minor">
+            <a:schemeClr val="lt1"/>
+          </a:fontRef>
+        </p:style>
+        <p:txBody>
+          <a:bodyPr rtlCol="0" anchor="ctr"/>
+          <a:lstStyle/>
+          <a:p>
+            <a:pPr algn="ctr"/>
+          </a:p>
+        </p:txBody>
+      </p:sp>
+      <p:sp>
+        <p:nvSpPr>
+          <p:cNvPr id="4" name="TextBox 3"/>
+          <p:cNvSpPr txBox="1"/>
+          <p:nvPr/>
+        </p:nvSpPr>
+        <p:spPr>
+          <a:xfrm>
+            <a:off x="457200" y="1143000"/>
+            <a:ext cx="3977639" cy="365760"/>
+          </a:xfrm>
+          <a:prstGeom prst="rect">
+            <a:avLst/>
+          </a:prstGeom>
+          <a:noFill/>
+          <a:ln>
+            <a:noFill/>
+          </a:ln>
+        </p:spPr>
+        <p:txBody>
+          <a:bodyPr wrap="square">
+            <a:spAutoFit/>
+          </a:bodyPr>
+          <a:lstStyle/>
+          <a:p>
+            <a:r>
+              <a:rPr sz="1100" b="1" i="0">
+                <a:solidFill>
+                  <a:srgbClr val="000000"/>
+                </a:solidFill>
+                <a:latin typeface="Avenir Next LT Pro Demi"/>
+              </a:rPr>
+              <a:t>THE PLAN</a:t>
+            </a:r>
+          </a:p>
+        </p:txBody>
+      </p:sp>
+      <p:sp>
+        <p:nvSpPr>
+          <p:cNvPr id="5" name="TextBox 4"/>
+          <p:cNvSpPr txBox="1"/>
+          <p:nvPr/>
+        </p:nvSpPr>
+        <p:spPr>
+          <a:xfrm>
+            <a:off x="457200" y="1554480"/>
+            <a:ext cx="3977639" cy="640080"/>
+          </a:xfrm>
+          <a:prstGeom prst="rect">
+            <a:avLst/>
+          </a:prstGeom>
+          <a:noFill/>
+          <a:ln>
+            <a:noFill/>
+          </a:ln>
+        </p:spPr>
+        <p:txBody>
+          <a:bodyPr wrap="square">
+            <a:spAutoFit/>
+          </a:bodyPr>
+          <a:lstStyle/>
+          <a:p>
+            <a:r>
+              <a:rPr sz="1100" b="1" i="0">
+                <a:solidFill>
+                  <a:srgbClr val="000000"/>
+                </a:solidFill>
+                <a:latin typeface="Avenir Next LT Pro"/>
+              </a:rPr>
+              <a:t>•  </a:t>
+            </a:r>
+            <a:r>
+              <a:rPr sz="1100" b="0" i="0">
+                <a:solidFill>
+                  <a:srgbClr val="000000"/>
+                </a:solidFill>
+                <a:latin typeface="Avenir Next LT Pro"/>
+              </a:rPr>
+              <a:t>Product transformation — new collections</a:t>
+            </a:r>
+          </a:p>
+        </p:txBody>
+      </p:sp>
+      <p:sp>
+        <p:nvSpPr>
+          <p:cNvPr id="6" name="TextBox 5"/>
+          <p:cNvSpPr txBox="1"/>
+          <p:nvPr/>
+        </p:nvSpPr>
+        <p:spPr>
+          <a:xfrm>
+            <a:off x="457200" y="2212848"/>
+            <a:ext cx="3977639" cy="640080"/>
+          </a:xfrm>
+          <a:prstGeom prst="rect">
+            <a:avLst/>
+          </a:prstGeom>
+          <a:noFill/>
+          <a:ln>
+            <a:noFill/>
+          </a:ln>
+        </p:spPr>
+        <p:txBody>
+          <a:bodyPr wrap="square">
+            <a:spAutoFit/>
+          </a:bodyPr>
+          <a:lstStyle/>
+          <a:p>
+            <a:r>
+              <a:rPr sz="1100" b="1" i="0">
+                <a:solidFill>
+                  <a:srgbClr val="000000"/>
+                </a:solidFill>
+                <a:latin typeface="Avenir Next LT Pro"/>
+              </a:rPr>
+              <a:t>•  </a:t>
+            </a:r>
+            <a:r>
+              <a:rPr sz="1100" b="0" i="0">
+                <a:solidFill>
+                  <a:srgbClr val="000000"/>
+                </a:solidFill>
+                <a:latin typeface="Avenir Next LT Pro"/>
+              </a:rPr>
+              <a:t>Gallery expansion → RH's ~$5–6B opportunity</a:t>
+            </a:r>
+          </a:p>
+        </p:txBody>
+      </p:sp>
+      <p:sp>
+        <p:nvSpPr>
+          <p:cNvPr id="7" name="TextBox 6"/>
+          <p:cNvSpPr txBox="1"/>
+          <p:nvPr/>
+        </p:nvSpPr>
+        <p:spPr>
+          <a:xfrm>
+            <a:off x="457200" y="2871215"/>
+            <a:ext cx="3977639" cy="640080"/>
+          </a:xfrm>
+          <a:prstGeom prst="rect">
+            <a:avLst/>
+          </a:prstGeom>
+          <a:noFill/>
+          <a:ln>
+            <a:noFill/>
+          </a:ln>
+        </p:spPr>
+        <p:txBody>
+          <a:bodyPr wrap="square">
+            <a:spAutoFit/>
+          </a:bodyPr>
+          <a:lstStyle/>
+          <a:p>
+            <a:r>
+              <a:rPr sz="1100" b="1" i="0">
+                <a:solidFill>
+                  <a:srgbClr val="000000"/>
+                </a:solidFill>
+                <a:latin typeface="Avenir Next LT Pro"/>
+              </a:rPr>
+              <a:t>•  </a:t>
+            </a:r>
+            <a:r>
+              <a:rPr sz="1100" b="0" i="0">
+                <a:solidFill>
+                  <a:srgbClr val="000000"/>
+                </a:solidFill>
+                <a:latin typeface="Avenir Next LT Pro"/>
+              </a:rPr>
+              <a:t>Move upmarket — Estates targets the rate-immune buyer</a:t>
+            </a:r>
+          </a:p>
+        </p:txBody>
+      </p:sp>
+      <p:sp>
+        <p:nvSpPr>
+          <p:cNvPr id="8" name="TextBox 7"/>
+          <p:cNvSpPr txBox="1"/>
+          <p:nvPr/>
+        </p:nvSpPr>
+        <p:spPr>
+          <a:xfrm>
+            <a:off x="457200" y="3529584"/>
+            <a:ext cx="3977639" cy="640080"/>
+          </a:xfrm>
+          <a:prstGeom prst="rect">
+            <a:avLst/>
+          </a:prstGeom>
+          <a:noFill/>
+          <a:ln>
+            <a:noFill/>
+          </a:ln>
+        </p:spPr>
+        <p:txBody>
+          <a:bodyPr wrap="square">
+            <a:spAutoFit/>
+          </a:bodyPr>
+          <a:lstStyle/>
+          <a:p>
+            <a:r>
+              <a:rPr sz="1100" b="1" i="0">
+                <a:solidFill>
+                  <a:srgbClr val="000000"/>
+                </a:solidFill>
+                <a:latin typeface="Avenir Next LT Pro"/>
+              </a:rPr>
+              <a:t>•  </a:t>
+            </a:r>
+            <a:r>
+              <a:rPr sz="1100" b="0" i="0">
+                <a:solidFill>
+                  <a:srgbClr val="000000"/>
+                </a:solidFill>
+                <a:latin typeface="Avenir Next LT Pro"/>
+              </a:rPr>
+              <a:t>Global + platform — hospitality, F&amp;B</a:t>
+            </a:r>
+          </a:p>
+        </p:txBody>
+      </p:sp>
+      <p:sp>
+        <p:nvSpPr>
+          <p:cNvPr id="9" name="TextBox 8"/>
+          <p:cNvSpPr txBox="1"/>
+          <p:nvPr/>
+        </p:nvSpPr>
+        <p:spPr>
+          <a:xfrm>
+            <a:off x="4709160" y="1143000"/>
+            <a:ext cx="3977639" cy="365760"/>
+          </a:xfrm>
+          <a:prstGeom prst="rect">
+            <a:avLst/>
+          </a:prstGeom>
+          <a:noFill/>
+          <a:ln>
+            <a:noFill/>
+          </a:ln>
+        </p:spPr>
+        <p:txBody>
+          <a:bodyPr wrap="square">
+            <a:spAutoFit/>
+          </a:bodyPr>
+          <a:lstStyle/>
+          <a:p>
+            <a:r>
+              <a:rPr sz="1100" b="1" i="0">
+                <a:solidFill>
+                  <a:srgbClr val="000000"/>
+                </a:solidFill>
+                <a:latin typeface="Avenir Next LT Pro Demi"/>
+              </a:rPr>
+              <a:t>RECENT MOVES  (watch, not yet catalysts)</a:t>
+            </a:r>
+          </a:p>
+        </p:txBody>
+      </p:sp>
+      <p:sp>
+        <p:nvSpPr>
+          <p:cNvPr id="10" name="TextBox 9"/>
+          <p:cNvSpPr txBox="1"/>
+          <p:nvPr/>
+        </p:nvSpPr>
+        <p:spPr>
+          <a:xfrm>
+            <a:off x="4709160" y="1554480"/>
+            <a:ext cx="3977639" cy="822960"/>
+          </a:xfrm>
+          <a:prstGeom prst="rect">
+            <a:avLst/>
+          </a:prstGeom>
+          <a:noFill/>
+          <a:ln>
+            <a:noFill/>
+          </a:ln>
+        </p:spPr>
+        <p:txBody>
+          <a:bodyPr wrap="square">
+            <a:spAutoFit/>
+          </a:bodyPr>
+          <a:lstStyle/>
+          <a:p>
+            <a:r>
+              <a:rPr sz="1100" b="1" i="0">
+                <a:solidFill>
+                  <a:srgbClr val="000000"/>
+                </a:solidFill>
+                <a:latin typeface="Avenir Next LT Pro"/>
+              </a:rPr>
+              <a:t>•  </a:t>
+            </a:r>
+            <a:r>
+              <a:rPr sz="1100" b="0" i="0">
+                <a:solidFill>
+                  <a:srgbClr val="000000"/>
+                </a:solidFill>
+                <a:latin typeface="Avenir Next LT Pro"/>
+              </a:rPr>
+              <a:t>Estates unveiled — acquired legendary ateliers (owned exclusivity); commercially unproven</a:t>
+            </a:r>
+          </a:p>
+        </p:txBody>
+      </p:sp>
+      <p:sp>
+        <p:nvSpPr>
+          <p:cNvPr id="11" name="TextBox 10"/>
+          <p:cNvSpPr txBox="1"/>
+          <p:nvPr/>
+        </p:nvSpPr>
+        <p:spPr>
+          <a:xfrm>
+            <a:off x="4709160" y="2395728"/>
+            <a:ext cx="3977639" cy="822960"/>
+          </a:xfrm>
+          <a:prstGeom prst="rect">
+            <a:avLst/>
+          </a:prstGeom>
+          <a:noFill/>
+          <a:ln>
+            <a:noFill/>
+          </a:ln>
+        </p:spPr>
+        <p:txBody>
+          <a:bodyPr wrap="square">
+            <a:spAutoFit/>
+          </a:bodyPr>
+          <a:lstStyle/>
+          <a:p>
+            <a:r>
+              <a:rPr sz="1100" b="1" i="0">
+                <a:solidFill>
+                  <a:srgbClr val="000000"/>
+                </a:solidFill>
+                <a:latin typeface="Avenir Next LT Pro"/>
+              </a:rPr>
+              <a:t>•  </a:t>
+            </a:r>
+            <a:r>
+              <a:rPr sz="1100" b="0" i="0">
+                <a:solidFill>
+                  <a:srgbClr val="000000"/>
+                </a:solidFill>
+                <a:latin typeface="Avenir Next LT Pro"/>
+              </a:rPr>
+              <a:t>Mercedes-AMG F1 hospitality partnership — brand halo</a:t>
+            </a:r>
+          </a:p>
+        </p:txBody>
+      </p:sp>
+      <p:sp>
+        <p:nvSpPr>
+          <p:cNvPr id="12" name="TextBox 11"/>
+          <p:cNvSpPr txBox="1"/>
+          <p:nvPr/>
+        </p:nvSpPr>
+        <p:spPr>
+          <a:xfrm>
+            <a:off x="4709160" y="3236976"/>
+            <a:ext cx="3977639" cy="822960"/>
+          </a:xfrm>
+          <a:prstGeom prst="rect">
+            <a:avLst/>
+          </a:prstGeom>
+          <a:noFill/>
+          <a:ln>
+            <a:noFill/>
+          </a:ln>
+        </p:spPr>
+        <p:txBody>
+          <a:bodyPr wrap="square">
+            <a:spAutoFit/>
+          </a:bodyPr>
+          <a:lstStyle/>
+          <a:p>
+            <a:r>
+              <a:rPr sz="1100" b="1" i="0">
+                <a:solidFill>
+                  <a:srgbClr val="000000"/>
+                </a:solidFill>
+                <a:latin typeface="Avenir Next LT Pro"/>
+              </a:rPr>
+              <a:t>•  </a:t>
+            </a:r>
+            <a:r>
+              <a:rPr sz="1100" b="0" i="0">
+                <a:solidFill>
+                  <a:srgbClr val="000000"/>
+                </a:solidFill>
+                <a:latin typeface="Avenir Next LT Pro"/>
+              </a:rPr>
+              <a:t>RH London Mayfair flagship — Europe doubling-down</a:t>
+            </a:r>
+          </a:p>
+        </p:txBody>
+      </p:sp>
+      <p:sp>
+        <p:nvSpPr>
+          <p:cNvPr id="13" name="TextBox 12"/>
+          <p:cNvSpPr txBox="1"/>
+          <p:nvPr/>
+        </p:nvSpPr>
+        <p:spPr>
+          <a:xfrm>
+            <a:off x="457200" y="4663440"/>
+            <a:ext cx="8229600" cy="457200"/>
+          </a:xfrm>
+          <a:prstGeom prst="rect">
+            <a:avLst/>
+          </a:prstGeom>
+          <a:noFill/>
+          <a:ln>
+            <a:noFill/>
+          </a:ln>
+        </p:spPr>
+        <p:txBody>
+          <a:bodyPr wrap="square">
+            <a:spAutoFit/>
+          </a:bodyPr>
+          <a:lstStyle/>
+          <a:p>
+            <a:r>
+              <a:rPr sz="1150" b="1" i="0">
+                <a:solidFill>
+                  <a:srgbClr val="000000"/>
+                </a:solidFill>
+                <a:latin typeface="Avenir Next LT Pro Demi"/>
+              </a:rPr>
+              <a:t>Differentiated and expanding — but unproven and capital-intensive during a levered stretch.</a:t>
+            </a:r>
+          </a:p>
+        </p:txBody>
+      </p:sp>
+      <p:sp>
+        <p:nvSpPr>
+          <p:cNvPr id="14" name="TextBox 13"/>
+          <p:cNvSpPr txBox="1"/>
+          <p:nvPr/>
+        </p:nvSpPr>
+        <p:spPr>
+          <a:xfrm>
+            <a:off x="457200" y="6309360"/>
+            <a:ext cx="8229600" cy="274320"/>
+          </a:xfrm>
+          <a:prstGeom prst="rect">
+            <a:avLst/>
+          </a:prstGeom>
+          <a:noFill/>
+          <a:ln>
+            <a:noFill/>
+          </a:ln>
+        </p:spPr>
+        <p:txBody>
+          <a:bodyPr wrap="square">
+            <a:spAutoFit/>
+          </a:bodyPr>
+          <a:lstStyle/>
+          <a:p>
+            <a:r>
+              <a:rPr sz="750" b="0" i="1">
+                <a:solidFill>
+                  <a:srgbClr val="707070"/>
+                </a:solidFill>
+                <a:latin typeface="Avenir Next LT Pro"/>
+              </a:rPr>
+              <a:t>Sources: RH FY2025 10-K; company announcements (2026).</a:t>
+            </a:r>
+          </a:p>
+        </p:txBody>
+      </p:sp>
+    </p:spTree>
+  </p:cSld>
+  <p:clrMapOvr>
+    <a:masterClrMapping/>
+  </p:clrMapOvr>
+</p:sld>
+</file>
+
+<file path=ppt/slides/slide23.xml><?xml version="1.0" encoding="utf-8"?>
+<p:sld xmlns:a="http://schemas.openxmlformats.org/drawingml/2006/main" xmlns:p="http://schemas.openxmlformats.org/presentationml/2006/main" xmlns:r="http://schemas.openxmlformats.org/officeDocument/2006/relationships">
+  <p:cSld>
+    <p:spTree>
+      <p:nvGrpSpPr>
+        <p:cNvPr id="1" name=""/>
+        <p:cNvGrpSpPr/>
+        <p:nvPr/>
+      </p:nvGrpSpPr>
+      <p:grpSpPr/>
+      <p:sp>
+        <p:nvSpPr>
+          <p:cNvPr id="2" name="TextBox 1"/>
+          <p:cNvSpPr txBox="1"/>
+          <p:nvPr/>
+        </p:nvSpPr>
+        <p:spPr>
+          <a:xfrm>
+            <a:off x="457200" y="365760"/>
+            <a:ext cx="8229600" cy="548640"/>
+          </a:xfrm>
+          <a:prstGeom prst="rect">
+            <a:avLst/>
+          </a:prstGeom>
+          <a:noFill/>
+          <a:ln>
+            <a:noFill/>
+          </a:ln>
+        </p:spPr>
+        <p:txBody>
+          <a:bodyPr wrap="square">
+            <a:spAutoFit/>
+          </a:bodyPr>
+          <a:lstStyle/>
+          <a:p>
+            <a:r>
+              <a:rPr sz="2100">
+                <a:solidFill>
+                  <a:srgbClr val="000000"/>
+                </a:solidFill>
+                <a:latin typeface="Avenir Next LT Pro Demi"/>
+              </a:rPr>
+              <a:t>Management &amp; Ownership</a:t>
+            </a:r>
+          </a:p>
+        </p:txBody>
+      </p:sp>
+      <p:sp>
+        <p:nvSpPr>
+          <p:cNvPr id="3" name="Rectangle 2"/>
+          <p:cNvSpPr/>
+          <p:nvPr/>
+        </p:nvSpPr>
+        <p:spPr>
+          <a:xfrm>
+            <a:off x="457200" y="960120"/>
+            <a:ext cx="8229600" cy="25603"/>
+          </a:xfrm>
+          <a:prstGeom prst="rect">
+            <a:avLst/>
+          </a:prstGeom>
+          <a:solidFill>
+            <a:srgbClr val="000000"/>
+          </a:solidFill>
+          <a:ln>
+            <a:noFill/>
+          </a:ln>
+        </p:spPr>
+        <p:style>
+          <a:lnRef idx="1">
+            <a:schemeClr val="accent1"/>
+          </a:lnRef>
+          <a:fillRef idx="3">
+            <a:schemeClr val="accent1"/>
+          </a:fillRef>
+          <a:effectRef idx="2">
+            <a:schemeClr val="accent1"/>
+          </a:effectRef>
+          <a:fontRef idx="minor">
+            <a:schemeClr val="lt1"/>
+          </a:fontRef>
+        </p:style>
+        <p:txBody>
+          <a:bodyPr rtlCol="0" anchor="ctr"/>
+          <a:lstStyle/>
+          <a:p>
+            <a:pPr algn="ctr"/>
+          </a:p>
+        </p:txBody>
+      </p:sp>
+      <p:graphicFrame>
+        <p:nvGraphicFramePr>
+          <p:cNvPr id="4" name="Table 3"/>
+          <p:cNvGraphicFramePr>
+            <a:graphicFrameLocks noGrp="1"/>
+          </p:cNvGraphicFramePr>
+          <p:nvPr/>
+        </p:nvGraphicFramePr>
+        <p:xfrm>
+          <a:off x="457200" y="1325880"/>
+          <a:ext cx="8229599" cy="4114800"/>
+        </p:xfrm>
+        <a:graphic>
+          <a:graphicData uri="http://schemas.openxmlformats.org/drawingml/2006/table">
+            <a:tbl>
+              <a:tblPr>
+                <a:tableStyleId>{5C22544A-7EE6-4342-B048-85BDC9FD1C3A}</a:tableStyleId>
+              </a:tblPr>
+              <a:tblGrid>
+                <a:gridCol w="1920240"/>
+                <a:gridCol w="3977639"/>
+                <a:gridCol w="2331720"/>
+              </a:tblGrid>
+              <a:tr h="822960">
+                <a:tc>
+                  <a:txBody>
+                    <a:bodyPr/>
+                    <a:lstStyle/>
+                    <a:p>
+                      <a:r>
+                        <a:rPr sz="1050" b="1">
+                          <a:solidFill>
+                            <a:srgbClr val="FFFFFF"/>
+                          </a:solidFill>
+                          <a:latin typeface="Avenir Next LT Pro Demi"/>
+                        </a:rPr>
+                        <a:t>Item</a:t>
+                      </a:r>
+                    </a:p>
+                  </a:txBody>
+                  <a:tcPr marL="82296" anchor="ctr">
+                    <a:solidFill>
+                      <a:srgbClr val="9A7B44"/>
+                    </a:solidFill>
+                  </a:tcPr>
+                </a:tc>
+                <a:tc>
+                  <a:txBody>
+                    <a:bodyPr/>
+                    <a:lstStyle/>
+                    <a:p>
+                      <a:r>
+                        <a:rPr sz="1050" b="1">
+                          <a:solidFill>
+                            <a:srgbClr val="FFFFFF"/>
+                          </a:solidFill>
+                          <a:latin typeface="Avenir Next LT Pro"/>
+                        </a:rPr>
+                        <a:t>Detail</a:t>
+                      </a:r>
+                    </a:p>
+                  </a:txBody>
+                  <a:tcPr marL="82296" anchor="ctr">
+                    <a:solidFill>
+                      <a:srgbClr val="9A7B44"/>
+                    </a:solidFill>
+                  </a:tcPr>
+                </a:tc>
+                <a:tc>
+                  <a:txBody>
+                    <a:bodyPr/>
+                    <a:lstStyle/>
+                    <a:p>
+                      <a:r>
+                        <a:rPr sz="1050" b="1">
+                          <a:solidFill>
+                            <a:srgbClr val="FFFFFF"/>
+                          </a:solidFill>
+                          <a:latin typeface="Avenir Next LT Pro"/>
+                        </a:rPr>
+                        <a:t>Read</a:t>
+                      </a:r>
+                    </a:p>
+                  </a:txBody>
+                  <a:tcPr marL="82296" anchor="ctr">
+                    <a:solidFill>
+                      <a:srgbClr val="9A7B44"/>
+                    </a:solidFill>
+                  </a:tcPr>
+                </a:tc>
+              </a:tr>
+              <a:tr h="822960">
+                <a:tc>
+                  <a:txBody>
+                    <a:bodyPr/>
+                    <a:lstStyle/>
+                    <a:p>
+                      <a:r>
+                        <a:rPr sz="1050" b="1">
+                          <a:solidFill>
+                            <a:srgbClr val="000000"/>
+                          </a:solidFill>
+                          <a:latin typeface="Avenir Next LT Pro Demi"/>
+                        </a:rPr>
+                        <a:t>Operator</a:t>
+                      </a:r>
+                    </a:p>
+                  </a:txBody>
+                  <a:tcPr marL="82296" anchor="ctr">
+                    <a:solidFill>
+                      <a:srgbClr val="FFFFFF"/>
+                    </a:solidFill>
+                  </a:tcPr>
+                </a:tc>
+                <a:tc>
+                  <a:txBody>
+                    <a:bodyPr/>
+                    <a:lstStyle/>
+                    <a:p>
+                      <a:r>
+                        <a:rPr sz="1050" b="0">
+                          <a:solidFill>
+                            <a:srgbClr val="000000"/>
+                          </a:solidFill>
+                          <a:latin typeface="Avenir Next LT Pro"/>
+                        </a:rPr>
+                        <a:t>Friedman (Chair/CEO): grew Pottery Barn $50M→$1B; rebuilt RH from near-bankruptcy (2001)</a:t>
+                      </a:r>
+                    </a:p>
+                  </a:txBody>
+                  <a:tcPr marL="82296" anchor="ctr">
+                    <a:solidFill>
+                      <a:srgbClr val="FFFFFF"/>
+                    </a:solidFill>
+                  </a:tcPr>
+                </a:tc>
+                <a:tc>
+                  <a:txBody>
+                    <a:bodyPr/>
+                    <a:lstStyle/>
+                    <a:p>
+                      <a:r>
+                        <a:rPr sz="1050" b="0">
+                          <a:solidFill>
+                            <a:srgbClr val="000000"/>
+                          </a:solidFill>
+                          <a:latin typeface="Avenir Next LT Pro"/>
+                        </a:rPr>
+                        <a:t>Proven; key-man risk</a:t>
+                      </a:r>
+                    </a:p>
+                  </a:txBody>
+                  <a:tcPr marL="82296" anchor="ctr">
+                    <a:solidFill>
+                      <a:srgbClr val="FFFFFF"/>
+                    </a:solidFill>
+                  </a:tcPr>
+                </a:tc>
+              </a:tr>
+              <a:tr h="822960">
+                <a:tc>
+                  <a:txBody>
+                    <a:bodyPr/>
+                    <a:lstStyle/>
+                    <a:p>
+                      <a:r>
+                        <a:rPr sz="1050" b="1">
+                          <a:solidFill>
+                            <a:srgbClr val="000000"/>
+                          </a:solidFill>
+                          <a:latin typeface="Avenir Next LT Pro Demi"/>
+                        </a:rPr>
+                        <a:t>Ownership</a:t>
+                      </a:r>
+                    </a:p>
+                  </a:txBody>
+                  <a:tcPr marL="82296" anchor="ctr">
+                    <a:solidFill>
+                      <a:srgbClr val="F4F6F8"/>
+                    </a:solidFill>
+                  </a:tcPr>
+                </a:tc>
+                <a:tc>
+                  <a:txBody>
+                    <a:bodyPr/>
+                    <a:lstStyle/>
+                    <a:p>
+                      <a:r>
+                        <a:rPr sz="1050" b="0">
+                          <a:solidFill>
+                            <a:srgbClr val="000000"/>
+                          </a:solidFill>
+                          <a:latin typeface="Avenir Next LT Pro"/>
+                        </a:rPr>
+                        <a:t>~18% outright (~25% incl. options); bought ~$10M at ~$216 (Jun 2024)</a:t>
+                      </a:r>
+                    </a:p>
+                  </a:txBody>
+                  <a:tcPr marL="82296" anchor="ctr">
+                    <a:solidFill>
+                      <a:srgbClr val="F4F6F8"/>
+                    </a:solidFill>
+                  </a:tcPr>
+                </a:tc>
+                <a:tc>
+                  <a:txBody>
+                    <a:bodyPr/>
+                    <a:lstStyle/>
+                    <a:p>
+                      <a:r>
+                        <a:rPr sz="1050" b="0">
+                          <a:solidFill>
+                            <a:srgbClr val="000000"/>
+                          </a:solidFill>
+                          <a:latin typeface="Avenir Next LT Pro"/>
+                        </a:rPr>
+                        <a:t>Deep alignment</a:t>
+                      </a:r>
+                    </a:p>
+                  </a:txBody>
+                  <a:tcPr marL="82296" anchor="ctr">
+                    <a:solidFill>
+                      <a:srgbClr val="F4F6F8"/>
+                    </a:solidFill>
+                  </a:tcPr>
+                </a:tc>
+              </a:tr>
+              <a:tr h="822960">
+                <a:tc>
+                  <a:txBody>
+                    <a:bodyPr/>
+                    <a:lstStyle/>
+                    <a:p>
+                      <a:r>
+                        <a:rPr sz="1050" b="1">
+                          <a:solidFill>
+                            <a:srgbClr val="000000"/>
+                          </a:solidFill>
+                          <a:latin typeface="Avenir Next LT Pro Demi"/>
+                        </a:rPr>
+                        <a:t>Recent insider activity</a:t>
+                      </a:r>
+                    </a:p>
+                  </a:txBody>
+                  <a:tcPr marL="82296" anchor="ctr">
+                    <a:solidFill>
+                      <a:srgbClr val="FFFFFF"/>
+                    </a:solidFill>
+                  </a:tcPr>
+                </a:tc>
+                <a:tc>
+                  <a:txBody>
+                    <a:bodyPr/>
+                    <a:lstStyle/>
+                    <a:p>
+                      <a:r>
+                        <a:rPr sz="1050" b="0">
+                          <a:solidFill>
+                            <a:srgbClr val="000000"/>
+                          </a:solidFill>
+                          <a:latin typeface="Avenir Next LT Pro"/>
+                        </a:rPr>
+                        <a:t>Mixed — mostly sales (option/tax) + a recent director open-market buy</a:t>
+                      </a:r>
+                    </a:p>
+                  </a:txBody>
+                  <a:tcPr marL="82296" anchor="ctr">
+                    <a:solidFill>
+                      <a:srgbClr val="FFFFFF"/>
+                    </a:solidFill>
+                  </a:tcPr>
+                </a:tc>
+                <a:tc>
+                  <a:txBody>
+                    <a:bodyPr/>
+                    <a:lstStyle/>
+                    <a:p>
+                      <a:r>
+                        <a:rPr sz="1050" b="0">
+                          <a:solidFill>
+                            <a:srgbClr val="000000"/>
+                          </a:solidFill>
+                          <a:latin typeface="Avenir Next LT Pro"/>
+                        </a:rPr>
+                        <a:t>No strong signal</a:t>
+                      </a:r>
+                    </a:p>
+                  </a:txBody>
+                  <a:tcPr marL="82296" anchor="ctr">
+                    <a:solidFill>
+                      <a:srgbClr val="FFFFFF"/>
+                    </a:solidFill>
+                  </a:tcPr>
+                </a:tc>
+              </a:tr>
+              <a:tr h="822960">
+                <a:tc>
+                  <a:txBody>
+                    <a:bodyPr/>
+                    <a:lstStyle/>
+                    <a:p>
+                      <a:r>
+                        <a:rPr sz="1050" b="1">
+                          <a:solidFill>
+                            <a:srgbClr val="000000"/>
+                          </a:solidFill>
+                          <a:latin typeface="Avenir Next LT Pro Demi"/>
+                        </a:rPr>
+                        <a:t>Governance</a:t>
+                      </a:r>
+                    </a:p>
+                  </a:txBody>
+                  <a:tcPr marL="82296" anchor="ctr">
+                    <a:solidFill>
+                      <a:srgbClr val="F4F6F8"/>
+                    </a:solidFill>
+                  </a:tcPr>
+                </a:tc>
+                <a:tc>
+                  <a:txBody>
+                    <a:bodyPr/>
+                    <a:lstStyle/>
+                    <a:p>
+                      <a:r>
+                        <a:rPr sz="1050" b="0">
+                          <a:solidFill>
+                            <a:srgbClr val="000000"/>
+                          </a:solidFill>
+                          <a:latin typeface="Avenir Next LT Pro"/>
+                        </a:rPr>
+                        <a:t>Founder-led; Jun 2026 annual meeting routine; no activist involvement</a:t>
+                      </a:r>
+                    </a:p>
+                  </a:txBody>
+                  <a:tcPr marL="82296" anchor="ctr">
+                    <a:solidFill>
+                      <a:srgbClr val="F4F6F8"/>
+                    </a:solidFill>
+                  </a:tcPr>
+                </a:tc>
+                <a:tc>
+                  <a:txBody>
+                    <a:bodyPr/>
+                    <a:lstStyle/>
+                    <a:p>
+                      <a:r>
+                        <a:rPr sz="1050" b="0">
+                          <a:solidFill>
+                            <a:srgbClr val="000000"/>
+                          </a:solidFill>
+                          <a:latin typeface="Avenir Next LT Pro"/>
+                        </a:rPr>
+                        <a:t>Stable; no catalyst</a:t>
+                      </a:r>
+                    </a:p>
+                  </a:txBody>
+                  <a:tcPr marL="82296" anchor="ctr">
+                    <a:solidFill>
+                      <a:srgbClr val="F4F6F8"/>
+                    </a:solidFill>
+                  </a:tcPr>
+                </a:tc>
+              </a:tr>
+            </a:tbl>
+          </a:graphicData>
+        </a:graphic>
+      </p:graphicFrame>
+      <p:sp>
+        <p:nvSpPr>
+          <p:cNvPr id="5" name="TextBox 4"/>
+          <p:cNvSpPr txBox="1"/>
+          <p:nvPr/>
+        </p:nvSpPr>
+        <p:spPr>
+          <a:xfrm>
+            <a:off x="457200" y="5669280"/>
+            <a:ext cx="8229600" cy="365760"/>
+          </a:xfrm>
+          <a:prstGeom prst="rect">
+            <a:avLst/>
+          </a:prstGeom>
+          <a:noFill/>
+          <a:ln>
+            <a:noFill/>
+          </a:ln>
+        </p:spPr>
+        <p:txBody>
+          <a:bodyPr wrap="square">
+            <a:spAutoFit/>
+          </a:bodyPr>
+          <a:lstStyle/>
+          <a:p>
+            <a:r>
+              <a:rPr sz="1150" b="1" i="0">
+                <a:solidFill>
+                  <a:srgbClr val="000000"/>
+                </a:solidFill>
+                <a:latin typeface="Avenir Next LT Pro Demi"/>
+              </a:rPr>
+              <a:t>Aligned, proven operator — but no activist catalyst and no strong insider “buy” signal.</a:t>
+            </a:r>
+          </a:p>
+        </p:txBody>
+      </p:sp>
+      <p:sp>
+        <p:nvSpPr>
+          <p:cNvPr id="6" name="TextBox 5"/>
+          <p:cNvSpPr txBox="1"/>
+          <p:nvPr/>
+        </p:nvSpPr>
+        <p:spPr>
+          <a:xfrm>
+            <a:off x="457200" y="6309360"/>
+            <a:ext cx="8229600" cy="274320"/>
+          </a:xfrm>
+          <a:prstGeom prst="rect">
+            <a:avLst/>
+          </a:prstGeom>
+          <a:noFill/>
+          <a:ln>
+            <a:noFill/>
+          </a:ln>
+        </p:spPr>
+        <p:txBody>
+          <a:bodyPr wrap="square">
+            <a:spAutoFit/>
+          </a:bodyPr>
+          <a:lstStyle/>
+          <a:p>
+            <a:r>
+              <a:rPr sz="750" b="0" i="1">
+                <a:solidFill>
+                  <a:srgbClr val="707070"/>
+                </a:solidFill>
+                <a:latin typeface="Avenir Next LT Pro"/>
+              </a:rPr>
+              <a:t>Sources: RH DEF 14A proxy; SEC Form 4; RH 8-K (Jun 2026).</a:t>
+            </a:r>
+          </a:p>
+        </p:txBody>
+      </p:sp>
+    </p:spTree>
+  </p:cSld>
+  <p:clrMapOvr>
+    <a:masterClrMapping/>
+  </p:clrMapOvr>
+</p:sld>
+</file>
+
+<file path=ppt/slides/slide24.xml><?xml version="1.0" encoding="utf-8"?>
+<p:sld xmlns:a="http://schemas.openxmlformats.org/drawingml/2006/main" xmlns:p="http://schemas.openxmlformats.org/presentationml/2006/main" xmlns:r="http://schemas.openxmlformats.org/officeDocument/2006/relationships">
+  <p:cSld>
+    <p:spTree>
+      <p:nvGrpSpPr>
+        <p:cNvPr id="1" name=""/>
+        <p:cNvGrpSpPr/>
+        <p:nvPr/>
+      </p:nvGrpSpPr>
+      <p:grpSpPr/>
+      <p:sp>
+        <p:nvSpPr>
+          <p:cNvPr id="2" name="Title 1"/>
+          <p:cNvSpPr>
+            <a:spLocks noGrp="1"/>
+          </p:cNvSpPr>
+          <p:nvPr>
+            <p:ph type="title"/>
+          </p:nvPr>
+        </p:nvSpPr>
+        <p:spPr/>
+        <p:txBody>
+          <a:bodyPr/>
+          <a:lstStyle/>
+          <a:p>
+            <a:r>
+              <a:t>Appendix</a:t>
+            </a:r>
           </a:p>
         </p:txBody>
       </p:sp>

--- a/RH_Stock_Pitch_updated.pptx
+++ b/RH_Stock_Pitch_updated.pptx
@@ -5204,2223 +5204,6 @@
 </p:sld>
 </file>
 
-<file path=ppt/slides/slide10.xml><?xml version="1.0" encoding="utf-8"?>
-<p:sld xmlns:a="http://schemas.openxmlformats.org/drawingml/2006/main" xmlns:p="http://schemas.openxmlformats.org/presentationml/2006/main" xmlns:r="http://schemas.openxmlformats.org/officeDocument/2006/relationships">
-  <p:cSld>
-    <p:spTree>
-      <p:nvGrpSpPr>
-        <p:cNvPr id="1" name=""/>
-        <p:cNvGrpSpPr/>
-        <p:nvPr/>
-      </p:nvGrpSpPr>
-      <p:grpSpPr/>
-      <p:sp>
-        <p:nvSpPr>
-          <p:cNvPr id="2" name="TextBox 1"/>
-          <p:cNvSpPr txBox="1"/>
-          <p:nvPr/>
-        </p:nvSpPr>
-        <p:spPr>
-          <a:xfrm>
-            <a:off x="457200" y="365760"/>
-            <a:ext cx="8229600" cy="548640"/>
-          </a:xfrm>
-          <a:prstGeom prst="rect">
-            <a:avLst/>
-          </a:prstGeom>
-          <a:noFill/>
-          <a:ln>
-            <a:noFill/>
-          </a:ln>
-        </p:spPr>
-        <p:txBody>
-          <a:bodyPr wrap="square">
-            <a:spAutoFit/>
-          </a:bodyPr>
-          <a:lstStyle/>
-          <a:p>
-            <a:r>
-              <a:rPr sz="2000">
-                <a:solidFill>
-                  <a:srgbClr val="000000"/>
-                </a:solidFill>
-                <a:latin typeface="Avenir Next LT Pro Demi"/>
-              </a:rPr>
-              <a:t>Recent Developments — Strategy in Action (and What to Watch)</a:t>
-            </a:r>
-          </a:p>
-        </p:txBody>
-      </p:sp>
-      <p:sp>
-        <p:nvSpPr>
-          <p:cNvPr id="3" name="Rectangle 2"/>
-          <p:cNvSpPr/>
-          <p:nvPr/>
-        </p:nvSpPr>
-        <p:spPr>
-          <a:xfrm>
-            <a:off x="457200" y="960120"/>
-            <a:ext cx="8229600" cy="25603"/>
-          </a:xfrm>
-          <a:prstGeom prst="rect">
-            <a:avLst/>
-          </a:prstGeom>
-          <a:solidFill>
-            <a:srgbClr val="000000"/>
-          </a:solidFill>
-          <a:ln>
-            <a:solidFill/>
-          </a:ln>
-        </p:spPr>
-        <p:style>
-          <a:lnRef idx="1">
-            <a:schemeClr val="accent1"/>
-          </a:lnRef>
-          <a:fillRef idx="3">
-            <a:schemeClr val="accent1"/>
-          </a:fillRef>
-          <a:effectRef idx="2">
-            <a:schemeClr val="accent1"/>
-          </a:effectRef>
-          <a:fontRef idx="minor">
-            <a:schemeClr val="lt1"/>
-          </a:fontRef>
-        </p:style>
-        <p:txBody>
-          <a:bodyPr rtlCol="0" anchor="ctr"/>
-          <a:lstStyle/>
-          <a:p>
-            <a:pPr algn="ctr"/>
-          </a:p>
-        </p:txBody>
-      </p:sp>
-      <p:sp>
-        <p:nvSpPr>
-          <p:cNvPr id="4" name="Rectangle 3"/>
-          <p:cNvSpPr/>
-          <p:nvPr/>
-        </p:nvSpPr>
-        <p:spPr>
-          <a:xfrm>
-            <a:off x="457200" y="1280160"/>
-            <a:ext cx="82296" cy="1325880"/>
-          </a:xfrm>
-          <a:prstGeom prst="rect">
-            <a:avLst/>
-          </a:prstGeom>
-          <a:solidFill>
-            <a:srgbClr val="000000"/>
-          </a:solidFill>
-          <a:ln>
-            <a:solidFill/>
-          </a:ln>
-        </p:spPr>
-        <p:style>
-          <a:lnRef idx="1">
-            <a:schemeClr val="accent1"/>
-          </a:lnRef>
-          <a:fillRef idx="3">
-            <a:schemeClr val="accent1"/>
-          </a:fillRef>
-          <a:effectRef idx="2">
-            <a:schemeClr val="accent1"/>
-          </a:effectRef>
-          <a:fontRef idx="minor">
-            <a:schemeClr val="lt1"/>
-          </a:fontRef>
-        </p:style>
-        <p:txBody>
-          <a:bodyPr rtlCol="0" anchor="ctr"/>
-          <a:lstStyle/>
-          <a:p>
-            <a:pPr algn="ctr"/>
-          </a:p>
-        </p:txBody>
-      </p:sp>
-      <p:sp>
-        <p:nvSpPr>
-          <p:cNvPr id="5" name="TextBox 4"/>
-          <p:cNvSpPr txBox="1"/>
-          <p:nvPr/>
-        </p:nvSpPr>
-        <p:spPr>
-          <a:xfrm>
-            <a:off x="658368" y="1280160"/>
-            <a:ext cx="8001000" cy="1325880"/>
-          </a:xfrm>
-          <a:prstGeom prst="rect">
-            <a:avLst/>
-          </a:prstGeom>
-          <a:noFill/>
-          <a:ln>
-            <a:noFill/>
-          </a:ln>
-        </p:spPr>
-        <p:txBody>
-          <a:bodyPr wrap="square" anchor="ctr">
-            <a:spAutoFit/>
-          </a:bodyPr>
-          <a:lstStyle/>
-          <a:p>
-            <a:r>
-              <a:rPr sz="1350" b="1">
-                <a:solidFill>
-                  <a:srgbClr val="000000"/>
-                </a:solidFill>
-                <a:latin typeface="Avenir Next LT Pro Demi"/>
-              </a:rPr>
-              <a:t>RH Estates — unveiled</a:t>
-            </a:r>
-          </a:p>
-          <a:p>
-            <a:pPr>
-              <a:spcBef>
-                <a:spcPts val="300"/>
-              </a:spcBef>
-            </a:pPr>
-            <a:r>
-              <a:rPr sz="1100">
-                <a:solidFill>
-                  <a:srgbClr val="000000"/>
-                </a:solidFill>
-                <a:latin typeface="Avenir Next LT Pro"/>
-              </a:rPr>
-              <a:t>Acquired legendary ateliers — Michael Taylor, Dennis &amp; Leen, Dmitriy &amp; Co., Formations.</a:t>
-            </a:r>
-          </a:p>
-          <a:p>
-            <a:pPr>
-              <a:spcBef>
-                <a:spcPts val="200"/>
-              </a:spcBef>
-            </a:pPr>
-            <a:r>
-              <a:rPr sz="1050" i="1">
-                <a:solidFill>
-                  <a:srgbClr val="000000"/>
-                </a:solidFill>
-                <a:latin typeface="Avenir Next LT Pro"/>
-              </a:rPr>
-              <a:t>Watch: Owned exclusivity rivals can't copy — a real moat. Commercially unproven; first read Q2 FY2026.</a:t>
-            </a:r>
-          </a:p>
-        </p:txBody>
-      </p:sp>
-      <p:sp>
-        <p:nvSpPr>
-          <p:cNvPr id="6" name="Rectangle 5"/>
-          <p:cNvSpPr/>
-          <p:nvPr/>
-        </p:nvSpPr>
-        <p:spPr>
-          <a:xfrm>
-            <a:off x="457200" y="2743200"/>
-            <a:ext cx="82296" cy="1325880"/>
-          </a:xfrm>
-          <a:prstGeom prst="rect">
-            <a:avLst/>
-          </a:prstGeom>
-          <a:solidFill>
-            <a:srgbClr val="000000"/>
-          </a:solidFill>
-          <a:ln>
-            <a:solidFill/>
-          </a:ln>
-        </p:spPr>
-        <p:style>
-          <a:lnRef idx="1">
-            <a:schemeClr val="accent1"/>
-          </a:lnRef>
-          <a:fillRef idx="3">
-            <a:schemeClr val="accent1"/>
-          </a:fillRef>
-          <a:effectRef idx="2">
-            <a:schemeClr val="accent1"/>
-          </a:effectRef>
-          <a:fontRef idx="minor">
-            <a:schemeClr val="lt1"/>
-          </a:fontRef>
-        </p:style>
-        <p:txBody>
-          <a:bodyPr rtlCol="0" anchor="ctr"/>
-          <a:lstStyle/>
-          <a:p>
-            <a:pPr algn="ctr"/>
-          </a:p>
-        </p:txBody>
-      </p:sp>
-      <p:sp>
-        <p:nvSpPr>
-          <p:cNvPr id="7" name="TextBox 6"/>
-          <p:cNvSpPr txBox="1"/>
-          <p:nvPr/>
-        </p:nvSpPr>
-        <p:spPr>
-          <a:xfrm>
-            <a:off x="658368" y="2743200"/>
-            <a:ext cx="8001000" cy="1325880"/>
-          </a:xfrm>
-          <a:prstGeom prst="rect">
-            <a:avLst/>
-          </a:prstGeom>
-          <a:noFill/>
-          <a:ln>
-            <a:noFill/>
-          </a:ln>
-        </p:spPr>
-        <p:txBody>
-          <a:bodyPr wrap="square" anchor="ctr">
-            <a:spAutoFit/>
-          </a:bodyPr>
-          <a:lstStyle/>
-          <a:p>
-            <a:r>
-              <a:rPr sz="1350" b="1">
-                <a:solidFill>
-                  <a:srgbClr val="000000"/>
-                </a:solidFill>
-                <a:latin typeface="Avenir Next LT Pro Demi"/>
-              </a:rPr>
-              <a:t>Mercedes-AMG F1 partnership</a:t>
-            </a:r>
-          </a:p>
-          <a:p>
-            <a:pPr>
-              <a:spcBef>
-                <a:spcPts val="300"/>
-              </a:spcBef>
-            </a:pPr>
-            <a:r>
-              <a:rPr sz="1100">
-                <a:solidFill>
-                  <a:srgbClr val="000000"/>
-                </a:solidFill>
-                <a:latin typeface="Avenir Next LT Pro"/>
-              </a:rPr>
-              <a:t>RH to design the team's global hospitality (Abu Dhabi, Miami, Monaco, Silverstone) from late 2026.</a:t>
-            </a:r>
-          </a:p>
-          <a:p>
-            <a:pPr>
-              <a:spcBef>
-                <a:spcPts val="200"/>
-              </a:spcBef>
-            </a:pPr>
-            <a:r>
-              <a:rPr sz="1050" i="1">
-                <a:solidFill>
-                  <a:srgbClr val="000000"/>
-                </a:solidFill>
-                <a:latin typeface="Avenir Next LT Pro"/>
-              </a:rPr>
-              <a:t>Watch: Elite brand halo, on-strategy — but immaterial to near-term financials.</a:t>
-            </a:r>
-          </a:p>
-        </p:txBody>
-      </p:sp>
-      <p:sp>
-        <p:nvSpPr>
-          <p:cNvPr id="8" name="Rectangle 7"/>
-          <p:cNvSpPr/>
-          <p:nvPr/>
-        </p:nvSpPr>
-        <p:spPr>
-          <a:xfrm>
-            <a:off x="457200" y="4206240"/>
-            <a:ext cx="82296" cy="1325880"/>
-          </a:xfrm>
-          <a:prstGeom prst="rect">
-            <a:avLst/>
-          </a:prstGeom>
-          <a:solidFill>
-            <a:srgbClr val="000000"/>
-          </a:solidFill>
-          <a:ln>
-            <a:solidFill/>
-          </a:ln>
-        </p:spPr>
-        <p:style>
-          <a:lnRef idx="1">
-            <a:schemeClr val="accent1"/>
-          </a:lnRef>
-          <a:fillRef idx="3">
-            <a:schemeClr val="accent1"/>
-          </a:fillRef>
-          <a:effectRef idx="2">
-            <a:schemeClr val="accent1"/>
-          </a:effectRef>
-          <a:fontRef idx="minor">
-            <a:schemeClr val="lt1"/>
-          </a:fontRef>
-        </p:style>
-        <p:txBody>
-          <a:bodyPr rtlCol="0" anchor="ctr"/>
-          <a:lstStyle/>
-          <a:p>
-            <a:pPr algn="ctr"/>
-          </a:p>
-        </p:txBody>
-      </p:sp>
-      <p:sp>
-        <p:nvSpPr>
-          <p:cNvPr id="9" name="TextBox 8"/>
-          <p:cNvSpPr txBox="1"/>
-          <p:nvPr/>
-        </p:nvSpPr>
-        <p:spPr>
-          <a:xfrm>
-            <a:off x="658368" y="4206240"/>
-            <a:ext cx="8001000" cy="1325880"/>
-          </a:xfrm>
-          <a:prstGeom prst="rect">
-            <a:avLst/>
-          </a:prstGeom>
-          <a:noFill/>
-          <a:ln>
-            <a:noFill/>
-          </a:ln>
-        </p:spPr>
-        <p:txBody>
-          <a:bodyPr wrap="square" anchor="ctr">
-            <a:spAutoFit/>
-          </a:bodyPr>
-          <a:lstStyle/>
-          <a:p>
-            <a:r>
-              <a:rPr sz="1350" b="1">
-                <a:solidFill>
-                  <a:srgbClr val="000000"/>
-                </a:solidFill>
-                <a:latin typeface="Avenir Next LT Pro Demi"/>
-              </a:rPr>
-              <a:t>RH London — Mayfair flagship</a:t>
-            </a:r>
-          </a:p>
-          <a:p>
-            <a:pPr>
-              <a:spcBef>
-                <a:spcPts val="300"/>
-              </a:spcBef>
-            </a:pPr>
-            <a:r>
-              <a:rPr sz="1100">
-                <a:solidFill>
-                  <a:srgbClr val="000000"/>
-                </a:solidFill>
-                <a:latin typeface="Avenir Next LT Pro"/>
-              </a:rPr>
-              <a:t>Five-level gallery in London's luxury core (New Bond St / Savile Row).</a:t>
-            </a:r>
-          </a:p>
-          <a:p>
-            <a:pPr>
-              <a:spcBef>
-                <a:spcPts val="200"/>
-              </a:spcBef>
-            </a:pPr>
-            <a:r>
-              <a:rPr sz="1050" i="1">
-                <a:solidFill>
-                  <a:srgbClr val="000000"/>
-                </a:solidFill>
-                <a:latin typeface="Avenir Next LT Pro"/>
-              </a:rPr>
-              <a:t>Watch: Doubles down on Europe — capital-intensive and unproven. Watch productivity vs. margin drag.</a:t>
-            </a:r>
-          </a:p>
-        </p:txBody>
-      </p:sp>
-      <p:sp>
-        <p:nvSpPr>
-          <p:cNvPr id="10" name="TextBox 9"/>
-          <p:cNvSpPr txBox="1"/>
-          <p:nvPr/>
-        </p:nvSpPr>
-        <p:spPr>
-          <a:xfrm>
-            <a:off x="457200" y="5532120"/>
-            <a:ext cx="8229600" cy="457200"/>
-          </a:xfrm>
-          <a:prstGeom prst="rect">
-            <a:avLst/>
-          </a:prstGeom>
-          <a:noFill/>
-          <a:ln>
-            <a:noFill/>
-          </a:ln>
-        </p:spPr>
-        <p:txBody>
-          <a:bodyPr wrap="square">
-            <a:spAutoFit/>
-          </a:bodyPr>
-          <a:lstStyle/>
-          <a:p>
-            <a:r>
-              <a:rPr sz="1100" b="1">
-                <a:solidFill>
-                  <a:srgbClr val="000000"/>
-                </a:solidFill>
-                <a:latin typeface="Avenir Next LT Pro Demi"/>
-              </a:rPr>
-              <a:t>Expanding on all fronts — differentiated (Estates) and brand-elevating (F1, Mayfair) — but unproven and/or capital-intensive during a levered stretch. Watch items, not yet catalysts.</a:t>
-            </a:r>
-          </a:p>
-        </p:txBody>
-      </p:sp>
-      <p:sp>
-        <p:nvSpPr>
-          <p:cNvPr id="11" name="TextBox 10"/>
-          <p:cNvSpPr txBox="1"/>
-          <p:nvPr/>
-        </p:nvSpPr>
-        <p:spPr>
-          <a:xfrm>
-            <a:off x="457200" y="6172200"/>
-            <a:ext cx="8229600" cy="274320"/>
-          </a:xfrm>
-          <a:prstGeom prst="rect">
-            <a:avLst/>
-          </a:prstGeom>
-          <a:noFill/>
-          <a:ln>
-            <a:noFill/>
-          </a:ln>
-        </p:spPr>
-        <p:txBody>
-          <a:bodyPr wrap="none">
-            <a:spAutoFit/>
-          </a:bodyPr>
-          <a:lstStyle/>
-          <a:p>
-            <a:r>
-              <a:rPr sz="750" i="1">
-                <a:solidFill>
-                  <a:srgbClr val="707070"/>
-                </a:solidFill>
-                <a:latin typeface="Avenir Next LT Pro"/>
-              </a:rPr>
-              <a:t>Sources: RH company announcements (Business Wire), 2026.</a:t>
-            </a:r>
-          </a:p>
-        </p:txBody>
-      </p:sp>
-    </p:spTree>
-  </p:cSld>
-  <p:clrMapOvr>
-    <a:masterClrMapping/>
-  </p:clrMapOvr>
-</p:sld>
-</file>
-
-<file path=ppt/slides/slide11.xml><?xml version="1.0" encoding="utf-8"?>
-<p:sld xmlns:a="http://schemas.openxmlformats.org/drawingml/2006/main" xmlns:p="http://schemas.openxmlformats.org/presentationml/2006/main" xmlns:r="http://schemas.openxmlformats.org/officeDocument/2006/relationships">
-  <p:cSld>
-    <p:spTree>
-      <p:nvGrpSpPr>
-        <p:cNvPr id="1" name=""/>
-        <p:cNvGrpSpPr/>
-        <p:nvPr/>
-      </p:nvGrpSpPr>
-      <p:grpSpPr/>
-      <p:sp>
-        <p:nvSpPr>
-          <p:cNvPr id="2" name="TextBox 1"/>
-          <p:cNvSpPr txBox="1"/>
-          <p:nvPr/>
-        </p:nvSpPr>
-        <p:spPr>
-          <a:xfrm>
-            <a:off x="457200" y="365760"/>
-            <a:ext cx="8229600" cy="548640"/>
-          </a:xfrm>
-          <a:prstGeom prst="rect">
-            <a:avLst/>
-          </a:prstGeom>
-          <a:noFill/>
-          <a:ln>
-            <a:noFill/>
-          </a:ln>
-        </p:spPr>
-        <p:txBody>
-          <a:bodyPr wrap="square">
-            <a:spAutoFit/>
-          </a:bodyPr>
-          <a:lstStyle/>
-          <a:p>
-            <a:r>
-              <a:rPr sz="2200" b="0">
-                <a:solidFill>
-                  <a:srgbClr val="000000"/>
-                </a:solidFill>
-                <a:latin typeface="Avenir Next LT Pro Demi"/>
-              </a:rPr>
-              <a:t>The Operator — Gary Friedman</a:t>
-            </a:r>
-          </a:p>
-        </p:txBody>
-      </p:sp>
-      <p:sp>
-        <p:nvSpPr>
-          <p:cNvPr id="3" name="Rectangle 2"/>
-          <p:cNvSpPr/>
-          <p:nvPr/>
-        </p:nvSpPr>
-        <p:spPr>
-          <a:xfrm>
-            <a:off x="457200" y="960120"/>
-            <a:ext cx="8229600" cy="25603"/>
-          </a:xfrm>
-          <a:prstGeom prst="rect">
-            <a:avLst/>
-          </a:prstGeom>
-          <a:solidFill>
-            <a:srgbClr val="000000"/>
-          </a:solidFill>
-          <a:ln>
-            <a:solidFill/>
-          </a:ln>
-        </p:spPr>
-        <p:style>
-          <a:lnRef idx="1">
-            <a:schemeClr val="accent1"/>
-          </a:lnRef>
-          <a:fillRef idx="3">
-            <a:schemeClr val="accent1"/>
-          </a:fillRef>
-          <a:effectRef idx="2">
-            <a:schemeClr val="accent1"/>
-          </a:effectRef>
-          <a:fontRef idx="minor">
-            <a:schemeClr val="lt1"/>
-          </a:fontRef>
-        </p:style>
-        <p:txBody>
-          <a:bodyPr rtlCol="0" anchor="ctr"/>
-          <a:lstStyle/>
-          <a:p>
-            <a:pPr algn="ctr"/>
-          </a:p>
-        </p:txBody>
-      </p:sp>
-      <p:sp>
-        <p:nvSpPr>
-          <p:cNvPr id="4" name="Rectangle 3"/>
-          <p:cNvSpPr/>
-          <p:nvPr/>
-        </p:nvSpPr>
-        <p:spPr>
-          <a:xfrm>
-            <a:off x="457200" y="1371600"/>
-            <a:ext cx="82296" cy="1051560"/>
-          </a:xfrm>
-          <a:prstGeom prst="rect">
-            <a:avLst/>
-          </a:prstGeom>
-          <a:solidFill>
-            <a:srgbClr val="000000"/>
-          </a:solidFill>
-          <a:ln>
-            <a:solidFill/>
-          </a:ln>
-        </p:spPr>
-        <p:style>
-          <a:lnRef idx="1">
-            <a:schemeClr val="accent1"/>
-          </a:lnRef>
-          <a:fillRef idx="3">
-            <a:schemeClr val="accent1"/>
-          </a:fillRef>
-          <a:effectRef idx="2">
-            <a:schemeClr val="accent1"/>
-          </a:effectRef>
-          <a:fontRef idx="minor">
-            <a:schemeClr val="lt1"/>
-          </a:fontRef>
-        </p:style>
-        <p:txBody>
-          <a:bodyPr rtlCol="0" anchor="ctr"/>
-          <a:lstStyle/>
-          <a:p>
-            <a:pPr algn="ctr"/>
-          </a:p>
-        </p:txBody>
-      </p:sp>
-      <p:sp>
-        <p:nvSpPr>
-          <p:cNvPr id="5" name="TextBox 4"/>
-          <p:cNvSpPr txBox="1"/>
-          <p:nvPr/>
-        </p:nvSpPr>
-        <p:spPr>
-          <a:xfrm>
-            <a:off x="658368" y="1371600"/>
-            <a:ext cx="1965960" cy="1051560"/>
-          </a:xfrm>
-          <a:prstGeom prst="rect">
-            <a:avLst/>
-          </a:prstGeom>
-          <a:noFill/>
-          <a:ln>
-            <a:noFill/>
-          </a:ln>
-        </p:spPr>
-        <p:txBody>
-          <a:bodyPr wrap="square" anchor="ctr">
-            <a:spAutoFit/>
-          </a:bodyPr>
-          <a:lstStyle/>
-          <a:p>
-            <a:r>
-              <a:rPr sz="1250" b="1">
-                <a:solidFill>
-                  <a:srgbClr val="000000"/>
-                </a:solidFill>
-                <a:latin typeface="Avenir Next LT Pro Demi"/>
-              </a:rPr>
-              <a:t>Role</a:t>
-            </a:r>
-          </a:p>
-        </p:txBody>
-      </p:sp>
-      <p:sp>
-        <p:nvSpPr>
-          <p:cNvPr id="6" name="TextBox 5"/>
-          <p:cNvSpPr txBox="1"/>
-          <p:nvPr/>
-        </p:nvSpPr>
-        <p:spPr>
-          <a:xfrm>
-            <a:off x="2697480" y="1371600"/>
-            <a:ext cx="5989320" cy="1051560"/>
-          </a:xfrm>
-          <a:prstGeom prst="rect">
-            <a:avLst/>
-          </a:prstGeom>
-          <a:noFill/>
-          <a:ln>
-            <a:noFill/>
-          </a:ln>
-        </p:spPr>
-        <p:txBody>
-          <a:bodyPr wrap="square" anchor="ctr">
-            <a:spAutoFit/>
-          </a:bodyPr>
-          <a:lstStyle/>
-          <a:p>
-            <a:r>
-              <a:rPr sz="1200" b="0">
-                <a:solidFill>
-                  <a:srgbClr val="000000"/>
-                </a:solidFill>
-                <a:latin typeface="Avenir Next LT Pro"/>
-              </a:rPr>
-              <a:t>Chairman &amp; CEO and the brand's creative force (10-K key-man).</a:t>
-            </a:r>
-          </a:p>
-        </p:txBody>
-      </p:sp>
-      <p:sp>
-        <p:nvSpPr>
-          <p:cNvPr id="7" name="Rectangle 6"/>
-          <p:cNvSpPr/>
-          <p:nvPr/>
-        </p:nvSpPr>
-        <p:spPr>
-          <a:xfrm>
-            <a:off x="457200" y="2514600"/>
-            <a:ext cx="82296" cy="1051560"/>
-          </a:xfrm>
-          <a:prstGeom prst="rect">
-            <a:avLst/>
-          </a:prstGeom>
-          <a:solidFill>
-            <a:srgbClr val="196B24"/>
-          </a:solidFill>
-          <a:ln>
-            <a:solidFill/>
-          </a:ln>
-        </p:spPr>
-        <p:style>
-          <a:lnRef idx="1">
-            <a:schemeClr val="accent1"/>
-          </a:lnRef>
-          <a:fillRef idx="3">
-            <a:schemeClr val="accent1"/>
-          </a:fillRef>
-          <a:effectRef idx="2">
-            <a:schemeClr val="accent1"/>
-          </a:effectRef>
-          <a:fontRef idx="minor">
-            <a:schemeClr val="lt1"/>
-          </a:fontRef>
-        </p:style>
-        <p:txBody>
-          <a:bodyPr rtlCol="0" anchor="ctr"/>
-          <a:lstStyle/>
-          <a:p>
-            <a:pPr algn="ctr"/>
-          </a:p>
-        </p:txBody>
-      </p:sp>
-      <p:sp>
-        <p:nvSpPr>
-          <p:cNvPr id="8" name="TextBox 7"/>
-          <p:cNvSpPr txBox="1"/>
-          <p:nvPr/>
-        </p:nvSpPr>
-        <p:spPr>
-          <a:xfrm>
-            <a:off x="658368" y="2514600"/>
-            <a:ext cx="1965960" cy="1051560"/>
-          </a:xfrm>
-          <a:prstGeom prst="rect">
-            <a:avLst/>
-          </a:prstGeom>
-          <a:noFill/>
-          <a:ln>
-            <a:noFill/>
-          </a:ln>
-        </p:spPr>
-        <p:txBody>
-          <a:bodyPr wrap="square" anchor="ctr">
-            <a:spAutoFit/>
-          </a:bodyPr>
-          <a:lstStyle/>
-          <a:p>
-            <a:r>
-              <a:rPr sz="1250" b="1">
-                <a:solidFill>
-                  <a:srgbClr val="000000"/>
-                </a:solidFill>
-                <a:latin typeface="Avenir Next LT Pro Demi"/>
-              </a:rPr>
-              <a:t>Track record</a:t>
-            </a:r>
-          </a:p>
-        </p:txBody>
-      </p:sp>
-      <p:sp>
-        <p:nvSpPr>
-          <p:cNvPr id="9" name="TextBox 8"/>
-          <p:cNvSpPr txBox="1"/>
-          <p:nvPr/>
-        </p:nvSpPr>
-        <p:spPr>
-          <a:xfrm>
-            <a:off x="2697480" y="2514600"/>
-            <a:ext cx="5989320" cy="1051560"/>
-          </a:xfrm>
-          <a:prstGeom prst="rect">
-            <a:avLst/>
-          </a:prstGeom>
-          <a:noFill/>
-          <a:ln>
-            <a:noFill/>
-          </a:ln>
-        </p:spPr>
-        <p:txBody>
-          <a:bodyPr wrap="square" anchor="ctr">
-            <a:spAutoFit/>
-          </a:bodyPr>
-          <a:lstStyle/>
-          <a:p>
-            <a:r>
-              <a:rPr sz="1200" b="0">
-                <a:solidFill>
-                  <a:srgbClr val="000000"/>
-                </a:solidFill>
-                <a:latin typeface="Avenir Next LT Pro"/>
-              </a:rPr>
-              <a:t>Grew Pottery Barn $50M → $1B+; joined RH in 2001 near bankruptcy.</a:t>
-            </a:r>
-          </a:p>
-        </p:txBody>
-      </p:sp>
-      <p:sp>
-        <p:nvSpPr>
-          <p:cNvPr id="10" name="Rectangle 9"/>
-          <p:cNvSpPr/>
-          <p:nvPr/>
-        </p:nvSpPr>
-        <p:spPr>
-          <a:xfrm>
-            <a:off x="457200" y="3657600"/>
-            <a:ext cx="82296" cy="1051560"/>
-          </a:xfrm>
-          <a:prstGeom prst="rect">
-            <a:avLst/>
-          </a:prstGeom>
-          <a:solidFill>
-            <a:srgbClr val="E97132"/>
-          </a:solidFill>
-          <a:ln>
-            <a:solidFill/>
-          </a:ln>
-        </p:spPr>
-        <p:style>
-          <a:lnRef idx="1">
-            <a:schemeClr val="accent1"/>
-          </a:lnRef>
-          <a:fillRef idx="3">
-            <a:schemeClr val="accent1"/>
-          </a:fillRef>
-          <a:effectRef idx="2">
-            <a:schemeClr val="accent1"/>
-          </a:effectRef>
-          <a:fontRef idx="minor">
-            <a:schemeClr val="lt1"/>
-          </a:fontRef>
-        </p:style>
-        <p:txBody>
-          <a:bodyPr rtlCol="0" anchor="ctr"/>
-          <a:lstStyle/>
-          <a:p>
-            <a:pPr algn="ctr"/>
-          </a:p>
-        </p:txBody>
-      </p:sp>
-      <p:sp>
-        <p:nvSpPr>
-          <p:cNvPr id="11" name="TextBox 10"/>
-          <p:cNvSpPr txBox="1"/>
-          <p:nvPr/>
-        </p:nvSpPr>
-        <p:spPr>
-          <a:xfrm>
-            <a:off x="658368" y="3657600"/>
-            <a:ext cx="1965960" cy="1051560"/>
-          </a:xfrm>
-          <a:prstGeom prst="rect">
-            <a:avLst/>
-          </a:prstGeom>
-          <a:noFill/>
-          <a:ln>
-            <a:noFill/>
-          </a:ln>
-        </p:spPr>
-        <p:txBody>
-          <a:bodyPr wrap="square" anchor="ctr">
-            <a:spAutoFit/>
-          </a:bodyPr>
-          <a:lstStyle/>
-          <a:p>
-            <a:r>
-              <a:rPr sz="1250" b="1">
-                <a:solidFill>
-                  <a:srgbClr val="000000"/>
-                </a:solidFill>
-                <a:latin typeface="Avenir Next LT Pro Demi"/>
-              </a:rPr>
-              <a:t>Skin in the game</a:t>
-            </a:r>
-          </a:p>
-        </p:txBody>
-      </p:sp>
-      <p:sp>
-        <p:nvSpPr>
-          <p:cNvPr id="12" name="TextBox 11"/>
-          <p:cNvSpPr txBox="1"/>
-          <p:nvPr/>
-        </p:nvSpPr>
-        <p:spPr>
-          <a:xfrm>
-            <a:off x="2697480" y="3657600"/>
-            <a:ext cx="5989320" cy="1051560"/>
-          </a:xfrm>
-          <a:prstGeom prst="rect">
-            <a:avLst/>
-          </a:prstGeom>
-          <a:noFill/>
-          <a:ln>
-            <a:noFill/>
-          </a:ln>
-        </p:spPr>
-        <p:txBody>
-          <a:bodyPr wrap="square" anchor="ctr">
-            <a:spAutoFit/>
-          </a:bodyPr>
-          <a:lstStyle/>
-          <a:p>
-            <a:r>
-              <a:rPr sz="1200" b="0">
-                <a:solidFill>
-                  <a:srgbClr val="000000"/>
-                </a:solidFill>
-                <a:latin typeface="Avenir Next LT Pro"/>
-              </a:rPr>
-              <a:t>Owns ~18% outright (~25% incl. options); bought ~$10M at ~$216 in June 2024.</a:t>
-            </a:r>
-          </a:p>
-        </p:txBody>
-      </p:sp>
-      <p:sp>
-        <p:nvSpPr>
-          <p:cNvPr id="13" name="Rectangle 12"/>
-          <p:cNvSpPr/>
-          <p:nvPr/>
-        </p:nvSpPr>
-        <p:spPr>
-          <a:xfrm>
-            <a:off x="457200" y="4800600"/>
-            <a:ext cx="82296" cy="1051560"/>
-          </a:xfrm>
-          <a:prstGeom prst="rect">
-            <a:avLst/>
-          </a:prstGeom>
-          <a:solidFill>
-            <a:srgbClr val="B03030"/>
-          </a:solidFill>
-          <a:ln>
-            <a:solidFill/>
-          </a:ln>
-        </p:spPr>
-        <p:style>
-          <a:lnRef idx="1">
-            <a:schemeClr val="accent1"/>
-          </a:lnRef>
-          <a:fillRef idx="3">
-            <a:schemeClr val="accent1"/>
-          </a:fillRef>
-          <a:effectRef idx="2">
-            <a:schemeClr val="accent1"/>
-          </a:effectRef>
-          <a:fontRef idx="minor">
-            <a:schemeClr val="lt1"/>
-          </a:fontRef>
-        </p:style>
-        <p:txBody>
-          <a:bodyPr rtlCol="0" anchor="ctr"/>
-          <a:lstStyle/>
-          <a:p>
-            <a:pPr algn="ctr"/>
-          </a:p>
-        </p:txBody>
-      </p:sp>
-      <p:sp>
-        <p:nvSpPr>
-          <p:cNvPr id="14" name="TextBox 13"/>
-          <p:cNvSpPr txBox="1"/>
-          <p:nvPr/>
-        </p:nvSpPr>
-        <p:spPr>
-          <a:xfrm>
-            <a:off x="658368" y="4800600"/>
-            <a:ext cx="1965960" cy="1051560"/>
-          </a:xfrm>
-          <a:prstGeom prst="rect">
-            <a:avLst/>
-          </a:prstGeom>
-          <a:noFill/>
-          <a:ln>
-            <a:noFill/>
-          </a:ln>
-        </p:spPr>
-        <p:txBody>
-          <a:bodyPr wrap="square" anchor="ctr">
-            <a:spAutoFit/>
-          </a:bodyPr>
-          <a:lstStyle/>
-          <a:p>
-            <a:r>
-              <a:rPr sz="1250" b="1">
-                <a:solidFill>
-                  <a:srgbClr val="000000"/>
-                </a:solidFill>
-                <a:latin typeface="Avenir Next LT Pro Demi"/>
-              </a:rPr>
-              <a:t>The double edge</a:t>
-            </a:r>
-          </a:p>
-        </p:txBody>
-      </p:sp>
-      <p:sp>
-        <p:nvSpPr>
-          <p:cNvPr id="15" name="TextBox 14"/>
-          <p:cNvSpPr txBox="1"/>
-          <p:nvPr/>
-        </p:nvSpPr>
-        <p:spPr>
-          <a:xfrm>
-            <a:off x="2697480" y="4800600"/>
-            <a:ext cx="5989320" cy="1051560"/>
-          </a:xfrm>
-          <a:prstGeom prst="rect">
-            <a:avLst/>
-          </a:prstGeom>
-          <a:noFill/>
-          <a:ln>
-            <a:noFill/>
-          </a:ln>
-        </p:spPr>
-        <p:txBody>
-          <a:bodyPr wrap="square" anchor="ctr">
-            <a:spAutoFit/>
-          </a:bodyPr>
-          <a:lstStyle/>
-          <a:p>
-            <a:r>
-              <a:rPr sz="1200" b="0">
-                <a:solidFill>
-                  <a:srgbClr val="000000"/>
-                </a:solidFill>
-                <a:latin typeface="Avenir Next LT Pro"/>
-              </a:rPr>
-              <a:t>Bold allocator — same conviction drove the buybacks and Estates.</a:t>
-            </a:r>
-          </a:p>
-        </p:txBody>
-      </p:sp>
-      <p:sp>
-        <p:nvSpPr>
-          <p:cNvPr id="16" name="TextBox 15"/>
-          <p:cNvSpPr txBox="1"/>
-          <p:nvPr/>
-        </p:nvSpPr>
-        <p:spPr>
-          <a:xfrm>
-            <a:off x="457200" y="6172200"/>
-            <a:ext cx="8229600" cy="274320"/>
-          </a:xfrm>
-          <a:prstGeom prst="rect">
-            <a:avLst/>
-          </a:prstGeom>
-          <a:noFill/>
-          <a:ln>
-            <a:noFill/>
-          </a:ln>
-        </p:spPr>
-        <p:txBody>
-          <a:bodyPr wrap="none">
-            <a:spAutoFit/>
-          </a:bodyPr>
-          <a:lstStyle/>
-          <a:p>
-            <a:r>
-              <a:rPr sz="750" b="0" i="1">
-                <a:solidFill>
-                  <a:srgbClr val="707070"/>
-                </a:solidFill>
-                <a:latin typeface="Avenir Next LT Pro"/>
-              </a:rPr>
-              <a:t>Source: RH FY2025 10-K; RH IR &amp; SEC Form 4 (Jun 26, 2024); company bios</a:t>
-            </a:r>
-          </a:p>
-        </p:txBody>
-      </p:sp>
-    </p:spTree>
-  </p:cSld>
-  <p:clrMapOvr>
-    <a:masterClrMapping/>
-  </p:clrMapOvr>
-</p:sld>
-</file>
-
-<file path=ppt/slides/slide12.xml><?xml version="1.0" encoding="utf-8"?>
-<p:sld xmlns:a="http://schemas.openxmlformats.org/drawingml/2006/main" xmlns:p="http://schemas.openxmlformats.org/presentationml/2006/main" xmlns:r="http://schemas.openxmlformats.org/officeDocument/2006/relationships">
-  <p:cSld>
-    <p:spTree>
-      <p:nvGrpSpPr>
-        <p:cNvPr id="1" name=""/>
-        <p:cNvGrpSpPr/>
-        <p:nvPr/>
-      </p:nvGrpSpPr>
-      <p:grpSpPr/>
-      <p:sp>
-        <p:nvSpPr>
-          <p:cNvPr id="2" name="TextBox 1"/>
-          <p:cNvSpPr txBox="1"/>
-          <p:nvPr/>
-        </p:nvSpPr>
-        <p:spPr>
-          <a:xfrm>
-            <a:off x="457200" y="365760"/>
-            <a:ext cx="8229600" cy="548640"/>
-          </a:xfrm>
-          <a:prstGeom prst="rect">
-            <a:avLst/>
-          </a:prstGeom>
-          <a:noFill/>
-          <a:ln>
-            <a:noFill/>
-          </a:ln>
-        </p:spPr>
-        <p:txBody>
-          <a:bodyPr wrap="square">
-            <a:spAutoFit/>
-          </a:bodyPr>
-          <a:lstStyle/>
-          <a:p>
-            <a:r>
-              <a:rPr sz="2200">
-                <a:solidFill>
-                  <a:srgbClr val="000000"/>
-                </a:solidFill>
-                <a:latin typeface="Avenir Next LT Pro Demi"/>
-              </a:rPr>
-              <a:t>Insider &amp; Governance Signals</a:t>
-            </a:r>
-          </a:p>
-        </p:txBody>
-      </p:sp>
-      <p:sp>
-        <p:nvSpPr>
-          <p:cNvPr id="3" name="Rectangle 2"/>
-          <p:cNvSpPr/>
-          <p:nvPr/>
-        </p:nvSpPr>
-        <p:spPr>
-          <a:xfrm>
-            <a:off x="457200" y="960120"/>
-            <a:ext cx="8229600" cy="25603"/>
-          </a:xfrm>
-          <a:prstGeom prst="rect">
-            <a:avLst/>
-          </a:prstGeom>
-          <a:solidFill>
-            <a:srgbClr val="000000"/>
-          </a:solidFill>
-          <a:ln>
-            <a:noFill/>
-          </a:ln>
-        </p:spPr>
-        <p:style>
-          <a:lnRef idx="1">
-            <a:schemeClr val="accent1"/>
-          </a:lnRef>
-          <a:fillRef idx="3">
-            <a:schemeClr val="accent1"/>
-          </a:fillRef>
-          <a:effectRef idx="2">
-            <a:schemeClr val="accent1"/>
-          </a:effectRef>
-          <a:fontRef idx="minor">
-            <a:schemeClr val="lt1"/>
-          </a:fontRef>
-        </p:style>
-        <p:txBody>
-          <a:bodyPr rtlCol="0" anchor="ctr"/>
-          <a:lstStyle/>
-          <a:p>
-            <a:pPr algn="ctr"/>
-          </a:p>
-        </p:txBody>
-      </p:sp>
-      <p:graphicFrame>
-        <p:nvGraphicFramePr>
-          <p:cNvPr id="4" name="Table 3"/>
-          <p:cNvGraphicFramePr>
-            <a:graphicFrameLocks noGrp="1"/>
-          </p:cNvGraphicFramePr>
-          <p:nvPr/>
-        </p:nvGraphicFramePr>
-        <p:xfrm>
-          <a:off x="457200" y="1325880"/>
-          <a:ext cx="8229600" cy="4114800"/>
-        </p:xfrm>
-        <a:graphic>
-          <a:graphicData uri="http://schemas.openxmlformats.org/drawingml/2006/table">
-            <a:tbl>
-              <a:tblPr>
-                <a:tableStyleId>{5C22544A-7EE6-4342-B048-85BDC9FD1C3A}</a:tableStyleId>
-              </a:tblPr>
-              <a:tblGrid>
-                <a:gridCol w="2148840"/>
-                <a:gridCol w="3703320"/>
-                <a:gridCol w="2377440"/>
-              </a:tblGrid>
-              <a:tr h="822960">
-                <a:tc>
-                  <a:txBody>
-                    <a:bodyPr/>
-                    <a:lstStyle/>
-                    <a:p>
-                      <a:pPr algn="l"/>
-                      <a:r>
-                        <a:rPr sz="1100" b="1">
-                          <a:solidFill>
-                            <a:srgbClr val="FFFFFF"/>
-                          </a:solidFill>
-                          <a:latin typeface="Avenir Next LT Pro Demi"/>
-                        </a:rPr>
-                        <a:t>Signal</a:t>
-                      </a:r>
-                    </a:p>
-                  </a:txBody>
-                  <a:tcPr marL="82296" marT="36576" marB="36576" anchor="ctr">
-                    <a:solidFill>
-                      <a:srgbClr val="9A7B44"/>
-                    </a:solidFill>
-                  </a:tcPr>
-                </a:tc>
-                <a:tc>
-                  <a:txBody>
-                    <a:bodyPr/>
-                    <a:lstStyle/>
-                    <a:p>
-                      <a:pPr algn="l"/>
-                      <a:r>
-                        <a:rPr sz="1100" b="1">
-                          <a:solidFill>
-                            <a:srgbClr val="FFFFFF"/>
-                          </a:solidFill>
-                          <a:latin typeface="Avenir Next LT Pro Demi"/>
-                        </a:rPr>
-                        <a:t>What we see</a:t>
-                      </a:r>
-                    </a:p>
-                  </a:txBody>
-                  <a:tcPr marL="82296" marT="36576" marB="36576" anchor="ctr">
-                    <a:solidFill>
-                      <a:srgbClr val="9A7B44"/>
-                    </a:solidFill>
-                  </a:tcPr>
-                </a:tc>
-                <a:tc>
-                  <a:txBody>
-                    <a:bodyPr/>
-                    <a:lstStyle/>
-                    <a:p>
-                      <a:pPr algn="l"/>
-                      <a:r>
-                        <a:rPr sz="1100" b="1">
-                          <a:solidFill>
-                            <a:srgbClr val="FFFFFF"/>
-                          </a:solidFill>
-                          <a:latin typeface="Avenir Next LT Pro Demi"/>
-                        </a:rPr>
-                        <a:t>Read</a:t>
-                      </a:r>
-                    </a:p>
-                  </a:txBody>
-                  <a:tcPr marL="82296" marT="36576" marB="36576" anchor="ctr">
-                    <a:solidFill>
-                      <a:srgbClr val="9A7B44"/>
-                    </a:solidFill>
-                  </a:tcPr>
-                </a:tc>
-              </a:tr>
-              <a:tr h="822960">
-                <a:tc>
-                  <a:txBody>
-                    <a:bodyPr/>
-                    <a:lstStyle/>
-                    <a:p>
-                      <a:pPr algn="l"/>
-                      <a:r>
-                        <a:rPr sz="1050" b="1">
-                          <a:solidFill>
-                            <a:srgbClr val="000000"/>
-                          </a:solidFill>
-                          <a:latin typeface="Avenir Next LT Pro Demi"/>
-                        </a:rPr>
-                        <a:t>Founder ownership</a:t>
-                      </a:r>
-                    </a:p>
-                  </a:txBody>
-                  <a:tcPr marL="82296" marT="36576" marB="36576" anchor="ctr">
-                    <a:solidFill>
-                      <a:srgbClr val="FFFFFF"/>
-                    </a:solidFill>
-                  </a:tcPr>
-                </a:tc>
-                <a:tc>
-                  <a:txBody>
-                    <a:bodyPr/>
-                    <a:lstStyle/>
-                    <a:p>
-                      <a:pPr algn="l"/>
-                      <a:r>
-                        <a:rPr sz="1050" b="0">
-                          <a:solidFill>
-                            <a:srgbClr val="000000"/>
-                          </a:solidFill>
-                          <a:latin typeface="Avenir Next LT Pro"/>
-                        </a:rPr>
-                        <a:t>Friedman owns ~18% outright (~25% incl. options); bought ~$10M at ~$216 (Jun 2024)</a:t>
-                      </a:r>
-                    </a:p>
-                  </a:txBody>
-                  <a:tcPr marL="82296" marT="36576" marB="36576" anchor="ctr">
-                    <a:solidFill>
-                      <a:srgbClr val="FFFFFF"/>
-                    </a:solidFill>
-                  </a:tcPr>
-                </a:tc>
-                <a:tc>
-                  <a:txBody>
-                    <a:bodyPr/>
-                    <a:lstStyle/>
-                    <a:p>
-                      <a:pPr algn="l"/>
-                      <a:r>
-                        <a:rPr sz="1050" b="0">
-                          <a:solidFill>
-                            <a:srgbClr val="000000"/>
-                          </a:solidFill>
-                          <a:latin typeface="Avenir Next LT Pro"/>
-                        </a:rPr>
-                        <a:t>Deep alignment</a:t>
-                      </a:r>
-                    </a:p>
-                  </a:txBody>
-                  <a:tcPr marL="82296" marT="36576" marB="36576" anchor="ctr">
-                    <a:solidFill>
-                      <a:srgbClr val="FFFFFF"/>
-                    </a:solidFill>
-                  </a:tcPr>
-                </a:tc>
-              </a:tr>
-              <a:tr h="822960">
-                <a:tc>
-                  <a:txBody>
-                    <a:bodyPr/>
-                    <a:lstStyle/>
-                    <a:p>
-                      <a:pPr algn="l"/>
-                      <a:r>
-                        <a:rPr sz="1050" b="1">
-                          <a:solidFill>
-                            <a:srgbClr val="000000"/>
-                          </a:solidFill>
-                          <a:latin typeface="Avenir Next LT Pro Demi"/>
-                        </a:rPr>
-                        <a:t>Recent insider activity</a:t>
-                      </a:r>
-                    </a:p>
-                  </a:txBody>
-                  <a:tcPr marL="82296" marT="36576" marB="36576" anchor="ctr">
-                    <a:solidFill>
-                      <a:srgbClr val="F4F6F8"/>
-                    </a:solidFill>
-                  </a:tcPr>
-                </a:tc>
-                <a:tc>
-                  <a:txBody>
-                    <a:bodyPr/>
-                    <a:lstStyle/>
-                    <a:p>
-                      <a:pPr algn="l"/>
-                      <a:r>
-                        <a:rPr sz="1050" b="0">
-                          <a:solidFill>
-                            <a:srgbClr val="000000"/>
-                          </a:solidFill>
-                          <a:latin typeface="Avenir Next LT Pro"/>
-                        </a:rPr>
-                        <a:t>Mixed — mostly sales (partly option/tax-driven), plus a recent director open-market buy (~$1.8M, Jul 2026)</a:t>
-                      </a:r>
-                    </a:p>
-                  </a:txBody>
-                  <a:tcPr marL="82296" marT="36576" marB="36576" anchor="ctr">
-                    <a:solidFill>
-                      <a:srgbClr val="F4F6F8"/>
-                    </a:solidFill>
-                  </a:tcPr>
-                </a:tc>
-                <a:tc>
-                  <a:txBody>
-                    <a:bodyPr/>
-                    <a:lstStyle/>
-                    <a:p>
-                      <a:pPr algn="l"/>
-                      <a:r>
-                        <a:rPr sz="1050" b="0">
-                          <a:solidFill>
-                            <a:srgbClr val="000000"/>
-                          </a:solidFill>
-                          <a:latin typeface="Avenir Next LT Pro"/>
-                        </a:rPr>
-                        <a:t>No strong insider signal either way</a:t>
-                      </a:r>
-                    </a:p>
-                  </a:txBody>
-                  <a:tcPr marL="82296" marT="36576" marB="36576" anchor="ctr">
-                    <a:solidFill>
-                      <a:srgbClr val="F4F6F8"/>
-                    </a:solidFill>
-                  </a:tcPr>
-                </a:tc>
-              </a:tr>
-              <a:tr h="822960">
-                <a:tc>
-                  <a:txBody>
-                    <a:bodyPr/>
-                    <a:lstStyle/>
-                    <a:p>
-                      <a:pPr algn="l"/>
-                      <a:r>
-                        <a:rPr sz="1050" b="1">
-                          <a:solidFill>
-                            <a:srgbClr val="000000"/>
-                          </a:solidFill>
-                          <a:latin typeface="Avenir Next LT Pro Demi"/>
-                        </a:rPr>
-                        <a:t>Board &amp; governance</a:t>
-                      </a:r>
-                    </a:p>
-                  </a:txBody>
-                  <a:tcPr marL="82296" marT="36576" marB="36576" anchor="ctr">
-                    <a:solidFill>
-                      <a:srgbClr val="FFFFFF"/>
-                    </a:solidFill>
-                  </a:tcPr>
-                </a:tc>
-                <a:tc>
-                  <a:txBody>
-                    <a:bodyPr/>
-                    <a:lstStyle/>
-                    <a:p>
-                      <a:pPr algn="l"/>
-                      <a:r>
-                        <a:rPr sz="1050" b="0">
-                          <a:solidFill>
-                            <a:srgbClr val="000000"/>
-                          </a:solidFill>
-                          <a:latin typeface="Avenir Next LT Pro"/>
-                        </a:rPr>
-                        <a:t>Jun 2026 annual meeting: directors re-elected; say-on-pay &amp; PwC ratified</a:t>
-                      </a:r>
-                    </a:p>
-                  </a:txBody>
-                  <a:tcPr marL="82296" marT="36576" marB="36576" anchor="ctr">
-                    <a:solidFill>
-                      <a:srgbClr val="FFFFFF"/>
-                    </a:solidFill>
-                  </a:tcPr>
-                </a:tc>
-                <a:tc>
-                  <a:txBody>
-                    <a:bodyPr/>
-                    <a:lstStyle/>
-                    <a:p>
-                      <a:pPr algn="l"/>
-                      <a:r>
-                        <a:rPr sz="1050" b="0">
-                          <a:solidFill>
-                            <a:srgbClr val="000000"/>
-                          </a:solidFill>
-                          <a:latin typeface="Avenir Next LT Pro"/>
-                        </a:rPr>
-                        <a:t>Stable, founder-led; no activist involvement</a:t>
-                      </a:r>
-                    </a:p>
-                  </a:txBody>
-                  <a:tcPr marL="82296" marT="36576" marB="36576" anchor="ctr">
-                    <a:solidFill>
-                      <a:srgbClr val="FFFFFF"/>
-                    </a:solidFill>
-                  </a:tcPr>
-                </a:tc>
-              </a:tr>
-              <a:tr h="822960">
-                <a:tc>
-                  <a:txBody>
-                    <a:bodyPr/>
-                    <a:lstStyle/>
-                    <a:p>
-                      <a:pPr algn="l"/>
-                      <a:r>
-                        <a:rPr sz="1050" b="1">
-                          <a:solidFill>
-                            <a:srgbClr val="000000"/>
-                          </a:solidFill>
-                          <a:latin typeface="Avenir Next LT Pro Demi"/>
-                        </a:rPr>
-                        <a:t>Management intent</a:t>
-                      </a:r>
-                    </a:p>
-                  </a:txBody>
-                  <a:tcPr marL="82296" marT="36576" marB="36576" anchor="ctr">
-                    <a:solidFill>
-                      <a:srgbClr val="F4F6F8"/>
-                    </a:solidFill>
-                  </a:tcPr>
-                </a:tc>
-                <a:tc>
-                  <a:txBody>
-                    <a:bodyPr/>
-                    <a:lstStyle/>
-                    <a:p>
-                      <a:pPr algn="l"/>
-                      <a:r>
-                        <a:rPr sz="1050" b="0">
-                          <a:solidFill>
-                            <a:srgbClr val="000000"/>
-                          </a:solidFill>
-                          <a:latin typeface="Avenir Next LT Pro"/>
-                        </a:rPr>
-                        <a:t>Stated goal: debt-free by 2029 (FCF + asset sales); Estates upmarket push</a:t>
-                      </a:r>
-                    </a:p>
-                  </a:txBody>
-                  <a:tcPr marL="82296" marT="36576" marB="36576" anchor="ctr">
-                    <a:solidFill>
-                      <a:srgbClr val="F4F6F8"/>
-                    </a:solidFill>
-                  </a:tcPr>
-                </a:tc>
-                <a:tc>
-                  <a:txBody>
-                    <a:bodyPr/>
-                    <a:lstStyle/>
-                    <a:p>
-                      <a:pPr algn="l"/>
-                      <a:r>
-                        <a:rPr sz="1050" b="0">
-                          <a:solidFill>
-                            <a:srgbClr val="000000"/>
-                          </a:solidFill>
-                          <a:latin typeface="Avenir Next LT Pro"/>
-                        </a:rPr>
-                        <a:t>Addressing leverage, but expansion spend continues</a:t>
-                      </a:r>
-                    </a:p>
-                  </a:txBody>
-                  <a:tcPr marL="82296" marT="36576" marB="36576" anchor="ctr">
-                    <a:solidFill>
-                      <a:srgbClr val="F4F6F8"/>
-                    </a:solidFill>
-                  </a:tcPr>
-                </a:tc>
-              </a:tr>
-            </a:tbl>
-          </a:graphicData>
-        </a:graphic>
-      </p:graphicFrame>
-      <p:sp>
-        <p:nvSpPr>
-          <p:cNvPr id="5" name="TextBox 4"/>
-          <p:cNvSpPr txBox="1"/>
-          <p:nvPr/>
-        </p:nvSpPr>
-        <p:spPr>
-          <a:xfrm>
-            <a:off x="457200" y="5623560"/>
-            <a:ext cx="8229600" cy="457200"/>
-          </a:xfrm>
-          <a:prstGeom prst="rect">
-            <a:avLst/>
-          </a:prstGeom>
-          <a:noFill/>
-          <a:ln>
-            <a:noFill/>
-          </a:ln>
-        </p:spPr>
-        <p:txBody>
-          <a:bodyPr wrap="square">
-            <a:spAutoFit/>
-          </a:bodyPr>
-          <a:lstStyle/>
-          <a:p>
-            <a:r>
-              <a:rPr sz="1100" b="1">
-                <a:solidFill>
-                  <a:srgbClr val="000000"/>
-                </a:solidFill>
-                <a:latin typeface="Avenir Next LT Pro Demi"/>
-              </a:rPr>
-              <a:t>Net: founder alignment is real, but recent insider activity is mixed (mostly sales, one recent director buy) — no strong signal either way. Governance is stable and founder-controlled (no activist catalyst). Consistent with Hold.</a:t>
-            </a:r>
-          </a:p>
-        </p:txBody>
-      </p:sp>
-      <p:sp>
-        <p:nvSpPr>
-          <p:cNvPr id="6" name="TextBox 5"/>
-          <p:cNvSpPr txBox="1"/>
-          <p:nvPr/>
-        </p:nvSpPr>
-        <p:spPr>
-          <a:xfrm>
-            <a:off x="457200" y="6309360"/>
-            <a:ext cx="8229600" cy="320040"/>
-          </a:xfrm>
-          <a:prstGeom prst="rect">
-            <a:avLst/>
-          </a:prstGeom>
-          <a:noFill/>
-          <a:ln>
-            <a:noFill/>
-          </a:ln>
-        </p:spPr>
-        <p:txBody>
-          <a:bodyPr wrap="none">
-            <a:spAutoFit/>
-          </a:bodyPr>
-          <a:lstStyle/>
-          <a:p>
-            <a:r>
-              <a:rPr sz="750" i="1">
-                <a:solidFill>
-                  <a:srgbClr val="707070"/>
-                </a:solidFill>
-                <a:latin typeface="Avenir Next LT Pro"/>
-              </a:rPr>
-              <a:t>Sources: RH DEF 14A proxy; SEC Form 4 filings; RH 8-K (Jun 2026 annual meeting); company guidance.</a:t>
-            </a:r>
-          </a:p>
-        </p:txBody>
-      </p:sp>
-    </p:spTree>
-  </p:cSld>
-  <p:clrMapOvr>
-    <a:masterClrMapping/>
-  </p:clrMapOvr>
-</p:sld>
-</file>
-
-<file path=ppt/slides/slide13.xml><?xml version="1.0" encoding="utf-8"?>
-<p:sld xmlns:a="http://schemas.openxmlformats.org/drawingml/2006/main" xmlns:p="http://schemas.openxmlformats.org/presentationml/2006/main" xmlns:r="http://schemas.openxmlformats.org/officeDocument/2006/relationships">
-  <p:cSld>
-    <p:spTree>
-      <p:nvGrpSpPr>
-        <p:cNvPr id="1" name=""/>
-        <p:cNvGrpSpPr/>
-        <p:nvPr/>
-      </p:nvGrpSpPr>
-      <p:grpSpPr/>
-      <p:sp>
-        <p:nvSpPr>
-          <p:cNvPr id="2" name="TextBox 1"/>
-          <p:cNvSpPr txBox="1"/>
-          <p:nvPr/>
-        </p:nvSpPr>
-        <p:spPr>
-          <a:xfrm>
-            <a:off x="457200" y="365760"/>
-            <a:ext cx="8229600" cy="548640"/>
-          </a:xfrm>
-          <a:prstGeom prst="rect">
-            <a:avLst/>
-          </a:prstGeom>
-          <a:noFill/>
-          <a:ln>
-            <a:noFill/>
-          </a:ln>
-        </p:spPr>
-        <p:txBody>
-          <a:bodyPr wrap="square">
-            <a:spAutoFit/>
-          </a:bodyPr>
-          <a:lstStyle/>
-          <a:p>
-            <a:r>
-              <a:rPr sz="2200" b="0">
-                <a:solidFill>
-                  <a:srgbClr val="000000"/>
-                </a:solidFill>
-                <a:latin typeface="Avenir Next LT Pro Demi"/>
-              </a:rPr>
-              <a:t>Is It Working?</a:t>
-            </a:r>
-          </a:p>
-        </p:txBody>
-      </p:sp>
-      <p:sp>
-        <p:nvSpPr>
-          <p:cNvPr id="3" name="Rectangle 2"/>
-          <p:cNvSpPr/>
-          <p:nvPr/>
-        </p:nvSpPr>
-        <p:spPr>
-          <a:xfrm>
-            <a:off x="457200" y="960120"/>
-            <a:ext cx="8229600" cy="25603"/>
-          </a:xfrm>
-          <a:prstGeom prst="rect">
-            <a:avLst/>
-          </a:prstGeom>
-          <a:solidFill>
-            <a:srgbClr val="000000"/>
-          </a:solidFill>
-          <a:ln>
-            <a:solidFill/>
-          </a:ln>
-        </p:spPr>
-        <p:style>
-          <a:lnRef idx="1">
-            <a:schemeClr val="accent1"/>
-          </a:lnRef>
-          <a:fillRef idx="3">
-            <a:schemeClr val="accent1"/>
-          </a:fillRef>
-          <a:effectRef idx="2">
-            <a:schemeClr val="accent1"/>
-          </a:effectRef>
-          <a:fontRef idx="minor">
-            <a:schemeClr val="lt1"/>
-          </a:fontRef>
-        </p:style>
-        <p:txBody>
-          <a:bodyPr rtlCol="0" anchor="ctr"/>
-          <a:lstStyle/>
-          <a:p>
-            <a:pPr algn="ctr"/>
-          </a:p>
-        </p:txBody>
-      </p:sp>
-      <p:sp>
-        <p:nvSpPr>
-          <p:cNvPr id="4" name="Rectangle 3"/>
-          <p:cNvSpPr/>
-          <p:nvPr/>
-        </p:nvSpPr>
-        <p:spPr>
-          <a:xfrm>
-            <a:off x="457200" y="1234440"/>
-            <a:ext cx="3977639" cy="384048"/>
-          </a:xfrm>
-          <a:prstGeom prst="rect">
-            <a:avLst/>
-          </a:prstGeom>
-          <a:solidFill>
-            <a:srgbClr val="196B24"/>
-          </a:solidFill>
-          <a:ln>
-            <a:solidFill/>
-          </a:ln>
-        </p:spPr>
-        <p:style>
-          <a:lnRef idx="1">
-            <a:schemeClr val="accent1"/>
-          </a:lnRef>
-          <a:fillRef idx="3">
-            <a:schemeClr val="accent1"/>
-          </a:fillRef>
-          <a:effectRef idx="2">
-            <a:schemeClr val="accent1"/>
-          </a:effectRef>
-          <a:fontRef idx="minor">
-            <a:schemeClr val="lt1"/>
-          </a:fontRef>
-        </p:style>
-        <p:txBody>
-          <a:bodyPr rtlCol="0" anchor="ctr" lIns="137160"/>
-          <a:lstStyle/>
-          <a:p>
-            <a:pPr algn="ctr"/>
-            <a:r>
-              <a:rPr sz="1250" b="1">
-                <a:solidFill>
-                  <a:srgbClr val="FFFFFF"/>
-                </a:solidFill>
-                <a:latin typeface="Avenir Next LT Pro Demi"/>
-              </a:rPr>
-              <a:t>WORKING</a:t>
-            </a:r>
-          </a:p>
-        </p:txBody>
-      </p:sp>
-      <p:sp>
-        <p:nvSpPr>
-          <p:cNvPr id="5" name="Rectangle 4"/>
-          <p:cNvSpPr/>
-          <p:nvPr/>
-        </p:nvSpPr>
-        <p:spPr>
-          <a:xfrm>
-            <a:off x="4709160" y="1234440"/>
-            <a:ext cx="3977639" cy="384048"/>
-          </a:xfrm>
-          <a:prstGeom prst="rect">
-            <a:avLst/>
-          </a:prstGeom>
-          <a:solidFill>
-            <a:srgbClr val="B03030"/>
-          </a:solidFill>
-          <a:ln>
-            <a:solidFill/>
-          </a:ln>
-        </p:spPr>
-        <p:style>
-          <a:lnRef idx="1">
-            <a:schemeClr val="accent1"/>
-          </a:lnRef>
-          <a:fillRef idx="3">
-            <a:schemeClr val="accent1"/>
-          </a:fillRef>
-          <a:effectRef idx="2">
-            <a:schemeClr val="accent1"/>
-          </a:effectRef>
-          <a:fontRef idx="minor">
-            <a:schemeClr val="lt1"/>
-          </a:fontRef>
-        </p:style>
-        <p:txBody>
-          <a:bodyPr rtlCol="0" anchor="ctr" lIns="137160"/>
-          <a:lstStyle/>
-          <a:p>
-            <a:pPr algn="ctr"/>
-            <a:r>
-              <a:rPr sz="1250" b="1">
-                <a:solidFill>
-                  <a:srgbClr val="FFFFFF"/>
-                </a:solidFill>
-                <a:latin typeface="Avenir Next LT Pro Demi"/>
-              </a:rPr>
-              <a:t>WATCH</a:t>
-            </a:r>
-          </a:p>
-        </p:txBody>
-      </p:sp>
-      <p:sp>
-        <p:nvSpPr>
-          <p:cNvPr id="6" name="TextBox 5"/>
-          <p:cNvSpPr txBox="1"/>
-          <p:nvPr/>
-        </p:nvSpPr>
-        <p:spPr>
-          <a:xfrm>
-            <a:off x="457200" y="1828800"/>
-            <a:ext cx="3977639" cy="777240"/>
-          </a:xfrm>
-          <a:prstGeom prst="rect">
-            <a:avLst/>
-          </a:prstGeom>
-          <a:noFill/>
-          <a:ln>
-            <a:noFill/>
-          </a:ln>
-        </p:spPr>
-        <p:txBody>
-          <a:bodyPr wrap="square">
-            <a:spAutoFit/>
-          </a:bodyPr>
-          <a:lstStyle/>
-          <a:p>
-            <a:r>
-              <a:rPr sz="1200" b="1">
-                <a:solidFill>
-                  <a:srgbClr val="196B24"/>
-                </a:solidFill>
-                <a:latin typeface="Avenir Next LT Pro Demi"/>
-              </a:rPr>
-              <a:t>✓  </a:t>
-            </a:r>
-            <a:r>
-              <a:rPr sz="1150" b="0">
-                <a:solidFill>
-                  <a:srgbClr val="000000"/>
-                </a:solidFill>
-                <a:latin typeface="Avenir Next LT Pro"/>
-              </a:rPr>
-              <a:t>FCF inflected to +$252M (from −$214M)</a:t>
-            </a:r>
-          </a:p>
-        </p:txBody>
-      </p:sp>
-      <p:sp>
-        <p:nvSpPr>
-          <p:cNvPr id="7" name="TextBox 6"/>
-          <p:cNvSpPr txBox="1"/>
-          <p:nvPr/>
-        </p:nvSpPr>
-        <p:spPr>
-          <a:xfrm>
-            <a:off x="457200" y="2651760"/>
-            <a:ext cx="3977639" cy="777240"/>
-          </a:xfrm>
-          <a:prstGeom prst="rect">
-            <a:avLst/>
-          </a:prstGeom>
-          <a:noFill/>
-          <a:ln>
-            <a:noFill/>
-          </a:ln>
-        </p:spPr>
-        <p:txBody>
-          <a:bodyPr wrap="square">
-            <a:spAutoFit/>
-          </a:bodyPr>
-          <a:lstStyle/>
-          <a:p>
-            <a:r>
-              <a:rPr sz="1200" b="1">
-                <a:solidFill>
-                  <a:srgbClr val="196B24"/>
-                </a:solidFill>
-                <a:latin typeface="Avenir Next LT Pro Demi"/>
-              </a:rPr>
-              <a:t>✓  </a:t>
-            </a:r>
-            <a:r>
-              <a:rPr sz="1150" b="0">
-                <a:solidFill>
-                  <a:srgbClr val="000000"/>
-                </a:solidFill>
-                <a:latin typeface="Avenir Next LT Pro"/>
-              </a:rPr>
-              <a:t>Inventory normalized $1.02B → $819M</a:t>
-            </a:r>
-          </a:p>
-        </p:txBody>
-      </p:sp>
-      <p:sp>
-        <p:nvSpPr>
-          <p:cNvPr id="8" name="TextBox 7"/>
-          <p:cNvSpPr txBox="1"/>
-          <p:nvPr/>
-        </p:nvSpPr>
-        <p:spPr>
-          <a:xfrm>
-            <a:off x="457200" y="3474720"/>
-            <a:ext cx="3977639" cy="777240"/>
-          </a:xfrm>
-          <a:prstGeom prst="rect">
-            <a:avLst/>
-          </a:prstGeom>
-          <a:noFill/>
-          <a:ln>
-            <a:noFill/>
-          </a:ln>
-        </p:spPr>
-        <p:txBody>
-          <a:bodyPr wrap="square">
-            <a:spAutoFit/>
-          </a:bodyPr>
-          <a:lstStyle/>
-          <a:p>
-            <a:r>
-              <a:rPr sz="1200" b="1">
-                <a:solidFill>
-                  <a:srgbClr val="196B24"/>
-                </a:solidFill>
-                <a:latin typeface="Avenir Next LT Pro Demi"/>
-              </a:rPr>
-              <a:t>✓  </a:t>
-            </a:r>
-            <a:r>
-              <a:rPr sz="1150" b="0">
-                <a:solidFill>
-                  <a:srgbClr val="000000"/>
-                </a:solidFill>
-                <a:latin typeface="Avenir Next LT Pro"/>
-              </a:rPr>
-              <a:t>Revenue re-accelerated +8.1% in FY25</a:t>
-            </a:r>
-          </a:p>
-        </p:txBody>
-      </p:sp>
-      <p:sp>
-        <p:nvSpPr>
-          <p:cNvPr id="9" name="TextBox 8"/>
-          <p:cNvSpPr txBox="1"/>
-          <p:nvPr/>
-        </p:nvSpPr>
-        <p:spPr>
-          <a:xfrm>
-            <a:off x="4709160" y="1828800"/>
-            <a:ext cx="3977639" cy="777240"/>
-          </a:xfrm>
-          <a:prstGeom prst="rect">
-            <a:avLst/>
-          </a:prstGeom>
-          <a:noFill/>
-          <a:ln>
-            <a:noFill/>
-          </a:ln>
-        </p:spPr>
-        <p:txBody>
-          <a:bodyPr wrap="square">
-            <a:spAutoFit/>
-          </a:bodyPr>
-          <a:lstStyle/>
-          <a:p>
-            <a:r>
-              <a:rPr sz="1200" b="1">
-                <a:solidFill>
-                  <a:srgbClr val="B03030"/>
-                </a:solidFill>
-                <a:latin typeface="Avenir Next LT Pro Demi"/>
-              </a:rPr>
-              <a:t>!  </a:t>
-            </a:r>
-            <a:r>
-              <a:rPr sz="1150" b="0">
-                <a:solidFill>
-                  <a:srgbClr val="000000"/>
-                </a:solidFill>
-                <a:latin typeface="Avenir Next LT Pro"/>
-              </a:rPr>
-              <a:t>Q1 FY26: revenue −1.7%, net loss −$14M</a:t>
-            </a:r>
-          </a:p>
-        </p:txBody>
-      </p:sp>
-      <p:sp>
-        <p:nvSpPr>
-          <p:cNvPr id="10" name="TextBox 9"/>
-          <p:cNvSpPr txBox="1"/>
-          <p:nvPr/>
-        </p:nvSpPr>
-        <p:spPr>
-          <a:xfrm>
-            <a:off x="4709160" y="2651760"/>
-            <a:ext cx="3977639" cy="777240"/>
-          </a:xfrm>
-          <a:prstGeom prst="rect">
-            <a:avLst/>
-          </a:prstGeom>
-          <a:noFill/>
-          <a:ln>
-            <a:noFill/>
-          </a:ln>
-        </p:spPr>
-        <p:txBody>
-          <a:bodyPr wrap="square">
-            <a:spAutoFit/>
-          </a:bodyPr>
-          <a:lstStyle/>
-          <a:p>
-            <a:r>
-              <a:rPr sz="1200" b="1">
-                <a:solidFill>
-                  <a:srgbClr val="B03030"/>
-                </a:solidFill>
-                <a:latin typeface="Avenir Next LT Pro Demi"/>
-              </a:rPr>
-              <a:t>!  </a:t>
-            </a:r>
-            <a:r>
-              <a:rPr sz="1150" b="0">
-                <a:solidFill>
-                  <a:srgbClr val="000000"/>
-                </a:solidFill>
-                <a:latin typeface="Avenir Next LT Pro"/>
-              </a:rPr>
-              <a:t>~$225M/yr interest keeps coverage thin</a:t>
-            </a:r>
-          </a:p>
-        </p:txBody>
-      </p:sp>
-      <p:sp>
-        <p:nvSpPr>
-          <p:cNvPr id="11" name="TextBox 10"/>
-          <p:cNvSpPr txBox="1"/>
-          <p:nvPr/>
-        </p:nvSpPr>
-        <p:spPr>
-          <a:xfrm>
-            <a:off x="4709160" y="3474720"/>
-            <a:ext cx="3977639" cy="777240"/>
-          </a:xfrm>
-          <a:prstGeom prst="rect">
-            <a:avLst/>
-          </a:prstGeom>
-          <a:noFill/>
-          <a:ln>
-            <a:noFill/>
-          </a:ln>
-        </p:spPr>
-        <p:txBody>
-          <a:bodyPr wrap="square">
-            <a:spAutoFit/>
-          </a:bodyPr>
-          <a:lstStyle/>
-          <a:p>
-            <a:r>
-              <a:rPr sz="1200" b="1">
-                <a:solidFill>
-                  <a:srgbClr val="B03030"/>
-                </a:solidFill>
-                <a:latin typeface="Avenir Next LT Pro Demi"/>
-              </a:rPr>
-              <a:t>!  </a:t>
-            </a:r>
-            <a:r>
-              <a:rPr sz="1150" b="0">
-                <a:solidFill>
-                  <a:srgbClr val="000000"/>
-                </a:solidFill>
-                <a:latin typeface="Avenir Next LT Pro"/>
-              </a:rPr>
-              <a:t>Guidance is back-half loaded</a:t>
-            </a:r>
-          </a:p>
-        </p:txBody>
-      </p:sp>
-      <p:sp>
-        <p:nvSpPr>
-          <p:cNvPr id="12" name="TextBox 11"/>
-          <p:cNvSpPr txBox="1"/>
-          <p:nvPr/>
-        </p:nvSpPr>
-        <p:spPr>
-          <a:xfrm>
-            <a:off x="457200" y="4663440"/>
-            <a:ext cx="8229600" cy="365760"/>
-          </a:xfrm>
-          <a:prstGeom prst="rect">
-            <a:avLst/>
-          </a:prstGeom>
-          <a:noFill/>
-          <a:ln>
-            <a:noFill/>
-          </a:ln>
-        </p:spPr>
-        <p:txBody>
-          <a:bodyPr wrap="square">
-            <a:spAutoFit/>
-          </a:bodyPr>
-          <a:lstStyle/>
-          <a:p>
-            <a:r>
-              <a:rPr sz="1150" b="1">
-                <a:solidFill>
-                  <a:srgbClr val="000000"/>
-                </a:solidFill>
-                <a:latin typeface="Avenir Next LT Pro Demi"/>
-              </a:rPr>
-              <a:t>Verdict: real but early — the next two quarters are the tell.</a:t>
-            </a:r>
-          </a:p>
-        </p:txBody>
-      </p:sp>
-      <p:sp>
-        <p:nvSpPr>
-          <p:cNvPr id="13" name="TextBox 12"/>
-          <p:cNvSpPr txBox="1"/>
-          <p:nvPr/>
-        </p:nvSpPr>
-        <p:spPr>
-          <a:xfrm>
-            <a:off x="457200" y="6172200"/>
-            <a:ext cx="8229600" cy="274320"/>
-          </a:xfrm>
-          <a:prstGeom prst="rect">
-            <a:avLst/>
-          </a:prstGeom>
-          <a:noFill/>
-          <a:ln>
-            <a:noFill/>
-          </a:ln>
-        </p:spPr>
-        <p:txBody>
-          <a:bodyPr wrap="none">
-            <a:spAutoFit/>
-          </a:bodyPr>
-          <a:lstStyle/>
-          <a:p>
-            <a:r>
-              <a:rPr sz="750" b="0" i="1">
-                <a:solidFill>
-                  <a:srgbClr val="707070"/>
-                </a:solidFill>
-                <a:latin typeface="Avenir Next LT Pro"/>
-              </a:rPr>
-              <a:t>Source: RH FY2025 10-K; Q1 FY2026 10-Q</a:t>
-            </a:r>
-          </a:p>
-        </p:txBody>
-      </p:sp>
-    </p:spTree>
-  </p:cSld>
-  <p:clrMapOvr>
-    <a:masterClrMapping/>
-  </p:clrMapOvr>
-</p:sld>
-</file>
-
 <file path=ppt/slides/slide14.xml><?xml version="1.0" encoding="utf-8"?>
 <p:sld xmlns:a="http://schemas.openxmlformats.org/drawingml/2006/main" xmlns:r="http://schemas.openxmlformats.org/officeDocument/2006/relationships" xmlns:p="http://schemas.openxmlformats.org/presentationml/2006/main">
   <p:cSld>
@@ -15841,7 +13624,7 @@
                 </a:solidFill>
                 <a:latin typeface="Avenir Next LT Pro Demi"/>
               </a:rPr>
-              <a:t>BEAR · </a:t>
+              <a:t>BEAR</a:t>
             </a:r>
             <a:r>
               <a:rPr lang="en-US" sz="1000" b="1" dirty="0">
@@ -15850,7 +13633,7 @@
                 </a:solidFill>
                 <a:latin typeface="Avenir Next LT Pro Demi"/>
               </a:rPr>
-              <a:t>30</a:t>
+              <a:t/>
             </a:r>
             <a:r>
               <a:rPr sz="1000" b="1" dirty="0">
@@ -15859,7 +13642,7 @@
                 </a:solidFill>
                 <a:latin typeface="Avenir Next LT Pro Demi"/>
               </a:rPr>
-              <a:t>%</a:t>
+              <a:t/>
             </a:r>
           </a:p>
           <a:p>
@@ -15925,7 +13708,7 @@
                 </a:solidFill>
                 <a:latin typeface="Avenir Next LT Pro Demi"/>
               </a:rPr>
-              <a:t>BASE · 5</a:t>
+              <a:t>BASE</a:t>
             </a:r>
             <a:r>
               <a:rPr lang="en-US" sz="1000" b="1" dirty="0">
@@ -15934,7 +13717,7 @@
                 </a:solidFill>
                 <a:latin typeface="Avenir Next LT Pro Demi"/>
               </a:rPr>
-              <a:t>5</a:t>
+              <a:t/>
             </a:r>
             <a:r>
               <a:rPr sz="1000" b="1" dirty="0">
@@ -15943,7 +13726,7 @@
                 </a:solidFill>
                 <a:latin typeface="Avenir Next LT Pro Demi"/>
               </a:rPr>
-              <a:t>%</a:t>
+              <a:t/>
             </a:r>
           </a:p>
           <a:p>
@@ -16024,7 +13807,7 @@
                 </a:solidFill>
                 <a:latin typeface="Avenir Next LT Pro Demi"/>
               </a:rPr>
-              <a:t>BULL · </a:t>
+              <a:t>BULL</a:t>
             </a:r>
             <a:r>
               <a:rPr lang="en-US" sz="1000" b="1" dirty="0">
@@ -16033,7 +13816,7 @@
                 </a:solidFill>
                 <a:latin typeface="Avenir Next LT Pro Demi"/>
               </a:rPr>
-              <a:t>15</a:t>
+              <a:t/>
             </a:r>
             <a:r>
               <a:rPr sz="1000" b="1" dirty="0">
@@ -16042,7 +13825,7 @@
                 </a:solidFill>
                 <a:latin typeface="Avenir Next LT Pro Demi"/>
               </a:rPr>
-              <a:t>%</a:t>
+              <a:t/>
             </a:r>
           </a:p>
           <a:p>
@@ -16380,6 +14163,43 @@
                 <a:latin typeface="Avenir Next LT Pro"/>
               </a:rPr>
               <a:t>~4× levered; debt reduction one-time (inventory) and stalling</a:t>
+            </a:r>
+          </a:p>
+        </p:txBody>
+      </p:sp>
+      <p:sp>
+        <p:nvSpPr>
+          <p:cNvPr id="12" name="TextBox 11"/>
+          <p:cNvSpPr txBox="1"/>
+          <p:nvPr/>
+        </p:nvSpPr>
+        <p:spPr>
+          <a:xfrm>
+            <a:off x="457200" y="1965960"/>
+            <a:ext cx="8229600" cy="256032"/>
+          </a:xfrm>
+          <a:prstGeom prst="rect">
+            <a:avLst/>
+          </a:prstGeom>
+          <a:noFill/>
+          <a:ln>
+            <a:noFill/>
+          </a:ln>
+        </p:spPr>
+        <p:txBody>
+          <a:bodyPr wrap="square">
+            <a:spAutoFit/>
+          </a:bodyPr>
+          <a:lstStyle/>
+          <a:p>
+            <a:r>
+              <a:rPr sz="900" b="0" i="1">
+                <a:solidFill>
+                  <a:srgbClr val="707070"/>
+                </a:solidFill>
+                <a:latin typeface="Avenir Next LT Pro"/>
+              </a:rPr>
+              <a:t>2–3 yr outcome range if the thesis plays out (not probability-weighted):</a:t>
             </a:r>
           </a:p>
         </p:txBody>
@@ -17681,1053 +15501,6 @@
       </p:transition>
     </mc:Fallback>
   </mc:AlternateContent>
-</p:sld>
-</file>
-
-<file path=ppt/slides/slide8.xml><?xml version="1.0" encoding="utf-8"?>
-<p:sld xmlns:a="http://schemas.openxmlformats.org/drawingml/2006/main" xmlns:p="http://schemas.openxmlformats.org/presentationml/2006/main" xmlns:r="http://schemas.openxmlformats.org/officeDocument/2006/relationships">
-  <p:cSld>
-    <p:spTree>
-      <p:nvGrpSpPr>
-        <p:cNvPr id="1" name=""/>
-        <p:cNvGrpSpPr/>
-        <p:nvPr/>
-      </p:nvGrpSpPr>
-      <p:grpSpPr/>
-      <p:sp>
-        <p:nvSpPr>
-          <p:cNvPr id="2" name="TextBox 1"/>
-          <p:cNvSpPr txBox="1"/>
-          <p:nvPr/>
-        </p:nvSpPr>
-        <p:spPr>
-          <a:xfrm>
-            <a:off x="457200" y="365760"/>
-            <a:ext cx="8229600" cy="548640"/>
-          </a:xfrm>
-          <a:prstGeom prst="rect">
-            <a:avLst/>
-          </a:prstGeom>
-          <a:noFill/>
-          <a:ln>
-            <a:noFill/>
-          </a:ln>
-        </p:spPr>
-        <p:txBody>
-          <a:bodyPr wrap="square">
-            <a:spAutoFit/>
-          </a:bodyPr>
-          <a:lstStyle/>
-          <a:p>
-            <a:r>
-              <a:rPr sz="2200" b="0">
-                <a:solidFill>
-                  <a:srgbClr val="000000"/>
-                </a:solidFill>
-                <a:latin typeface="Avenir Next LT Pro Demi"/>
-              </a:rPr>
-              <a:t>How RH Got Here</a:t>
-            </a:r>
-          </a:p>
-        </p:txBody>
-      </p:sp>
-      <p:sp>
-        <p:nvSpPr>
-          <p:cNvPr id="3" name="Rectangle 2"/>
-          <p:cNvSpPr/>
-          <p:nvPr/>
-        </p:nvSpPr>
-        <p:spPr>
-          <a:xfrm>
-            <a:off x="457200" y="960120"/>
-            <a:ext cx="8229600" cy="25603"/>
-          </a:xfrm>
-          <a:prstGeom prst="rect">
-            <a:avLst/>
-          </a:prstGeom>
-          <a:solidFill>
-            <a:srgbClr val="000000"/>
-          </a:solidFill>
-          <a:ln>
-            <a:solidFill/>
-          </a:ln>
-        </p:spPr>
-        <p:style>
-          <a:lnRef idx="1">
-            <a:schemeClr val="accent1"/>
-          </a:lnRef>
-          <a:fillRef idx="3">
-            <a:schemeClr val="accent1"/>
-          </a:fillRef>
-          <a:effectRef idx="2">
-            <a:schemeClr val="accent1"/>
-          </a:effectRef>
-          <a:fontRef idx="minor">
-            <a:schemeClr val="lt1"/>
-          </a:fontRef>
-        </p:style>
-        <p:txBody>
-          <a:bodyPr rtlCol="0" anchor="ctr"/>
-          <a:lstStyle/>
-          <a:p>
-            <a:pPr algn="ctr"/>
-          </a:p>
-        </p:txBody>
-      </p:sp>
-      <p:sp>
-        <p:nvSpPr>
-          <p:cNvPr id="4" name="Rectangle 3"/>
-          <p:cNvSpPr/>
-          <p:nvPr/>
-        </p:nvSpPr>
-        <p:spPr>
-          <a:xfrm>
-            <a:off x="457200" y="1371600"/>
-            <a:ext cx="82296" cy="1143000"/>
-          </a:xfrm>
-          <a:prstGeom prst="rect">
-            <a:avLst/>
-          </a:prstGeom>
-          <a:solidFill>
-            <a:srgbClr val="000000"/>
-          </a:solidFill>
-          <a:ln>
-            <a:solidFill/>
-          </a:ln>
-        </p:spPr>
-        <p:style>
-          <a:lnRef idx="1">
-            <a:schemeClr val="accent1"/>
-          </a:lnRef>
-          <a:fillRef idx="3">
-            <a:schemeClr val="accent1"/>
-          </a:fillRef>
-          <a:effectRef idx="2">
-            <a:schemeClr val="accent1"/>
-          </a:effectRef>
-          <a:fontRef idx="minor">
-            <a:schemeClr val="lt1"/>
-          </a:fontRef>
-        </p:style>
-        <p:txBody>
-          <a:bodyPr rtlCol="0" anchor="ctr"/>
-          <a:lstStyle/>
-          <a:p>
-            <a:pPr algn="ctr"/>
-          </a:p>
-        </p:txBody>
-      </p:sp>
-      <p:sp>
-        <p:nvSpPr>
-          <p:cNvPr id="5" name="TextBox 4"/>
-          <p:cNvSpPr txBox="1"/>
-          <p:nvPr/>
-        </p:nvSpPr>
-        <p:spPr>
-          <a:xfrm>
-            <a:off x="658368" y="1371600"/>
-            <a:ext cx="1920240" cy="1143000"/>
-          </a:xfrm>
-          <a:prstGeom prst="rect">
-            <a:avLst/>
-          </a:prstGeom>
-          <a:noFill/>
-          <a:ln>
-            <a:noFill/>
-          </a:ln>
-        </p:spPr>
-        <p:txBody>
-          <a:bodyPr wrap="square" anchor="ctr">
-            <a:spAutoFit/>
-          </a:bodyPr>
-          <a:lstStyle/>
-          <a:p>
-            <a:r>
-              <a:rPr sz="1400" b="1">
-                <a:solidFill>
-                  <a:srgbClr val="000000"/>
-                </a:solidFill>
-                <a:latin typeface="Avenir Next LT Pro Demi"/>
-              </a:rPr>
-              <a:t>The Build</a:t>
-            </a:r>
-          </a:p>
-          <a:p>
-            <a:r>
-              <a:rPr sz="1000" b="0">
-                <a:solidFill>
-                  <a:srgbClr val="707070"/>
-                </a:solidFill>
-                <a:latin typeface="Avenir Next LT Pro"/>
-              </a:rPr>
-              <a:t>Pre-2020</a:t>
-            </a:r>
-          </a:p>
-        </p:txBody>
-      </p:sp>
-      <p:sp>
-        <p:nvSpPr>
-          <p:cNvPr id="6" name="TextBox 5"/>
-          <p:cNvSpPr txBox="1"/>
-          <p:nvPr/>
-        </p:nvSpPr>
-        <p:spPr>
-          <a:xfrm>
-            <a:off x="2743200" y="1371600"/>
-            <a:ext cx="5943600" cy="1143000"/>
-          </a:xfrm>
-          <a:prstGeom prst="rect">
-            <a:avLst/>
-          </a:prstGeom>
-          <a:noFill/>
-          <a:ln>
-            <a:noFill/>
-          </a:ln>
-        </p:spPr>
-        <p:txBody>
-          <a:bodyPr wrap="square" anchor="ctr">
-            <a:spAutoFit/>
-          </a:bodyPr>
-          <a:lstStyle/>
-          <a:p>
-            <a:r>
-              <a:rPr sz="1250" b="0">
-                <a:solidFill>
-                  <a:srgbClr val="000000"/>
-                </a:solidFill>
-                <a:latin typeface="Avenir Next LT Pro"/>
-              </a:rPr>
-              <a:t>Friedman turns RH into a luxury Gallery brand.</a:t>
-            </a:r>
-          </a:p>
-        </p:txBody>
-      </p:sp>
-      <p:sp>
-        <p:nvSpPr>
-          <p:cNvPr id="7" name="Rectangle 6"/>
-          <p:cNvSpPr/>
-          <p:nvPr/>
-        </p:nvSpPr>
-        <p:spPr>
-          <a:xfrm>
-            <a:off x="457200" y="2679191"/>
-            <a:ext cx="82296" cy="1143000"/>
-          </a:xfrm>
-          <a:prstGeom prst="rect">
-            <a:avLst/>
-          </a:prstGeom>
-          <a:solidFill>
-            <a:srgbClr val="E97132"/>
-          </a:solidFill>
-          <a:ln>
-            <a:solidFill/>
-          </a:ln>
-        </p:spPr>
-        <p:style>
-          <a:lnRef idx="1">
-            <a:schemeClr val="accent1"/>
-          </a:lnRef>
-          <a:fillRef idx="3">
-            <a:schemeClr val="accent1"/>
-          </a:fillRef>
-          <a:effectRef idx="2">
-            <a:schemeClr val="accent1"/>
-          </a:effectRef>
-          <a:fontRef idx="minor">
-            <a:schemeClr val="lt1"/>
-          </a:fontRef>
-        </p:style>
-        <p:txBody>
-          <a:bodyPr rtlCol="0" anchor="ctr"/>
-          <a:lstStyle/>
-          <a:p>
-            <a:pPr algn="ctr"/>
-          </a:p>
-        </p:txBody>
-      </p:sp>
-      <p:sp>
-        <p:nvSpPr>
-          <p:cNvPr id="8" name="TextBox 7"/>
-          <p:cNvSpPr txBox="1"/>
-          <p:nvPr/>
-        </p:nvSpPr>
-        <p:spPr>
-          <a:xfrm>
-            <a:off x="658368" y="2679191"/>
-            <a:ext cx="1920240" cy="1143000"/>
-          </a:xfrm>
-          <a:prstGeom prst="rect">
-            <a:avLst/>
-          </a:prstGeom>
-          <a:noFill/>
-          <a:ln>
-            <a:noFill/>
-          </a:ln>
-        </p:spPr>
-        <p:txBody>
-          <a:bodyPr wrap="square" anchor="ctr">
-            <a:spAutoFit/>
-          </a:bodyPr>
-          <a:lstStyle/>
-          <a:p>
-            <a:r>
-              <a:rPr sz="1400" b="1">
-                <a:solidFill>
-                  <a:srgbClr val="000000"/>
-                </a:solidFill>
-                <a:latin typeface="Avenir Next LT Pro Demi"/>
-              </a:rPr>
-              <a:t>The Peak</a:t>
-            </a:r>
-          </a:p>
-          <a:p>
-            <a:r>
-              <a:rPr sz="1000" b="0">
-                <a:solidFill>
-                  <a:srgbClr val="707070"/>
-                </a:solidFill>
-                <a:latin typeface="Avenir Next LT Pro"/>
-              </a:rPr>
-              <a:t>FY2022</a:t>
-            </a:r>
-          </a:p>
-        </p:txBody>
-      </p:sp>
-      <p:sp>
-        <p:nvSpPr>
-          <p:cNvPr id="9" name="TextBox 8"/>
-          <p:cNvSpPr txBox="1"/>
-          <p:nvPr/>
-        </p:nvSpPr>
-        <p:spPr>
-          <a:xfrm>
-            <a:off x="2743200" y="2679191"/>
-            <a:ext cx="5943600" cy="1143000"/>
-          </a:xfrm>
-          <a:prstGeom prst="rect">
-            <a:avLst/>
-          </a:prstGeom>
-          <a:noFill/>
-          <a:ln>
-            <a:noFill/>
-          </a:ln>
-        </p:spPr>
-        <p:txBody>
-          <a:bodyPr wrap="square" anchor="ctr">
-            <a:spAutoFit/>
-          </a:bodyPr>
-          <a:lstStyle/>
-          <a:p>
-            <a:r>
-              <a:rPr sz="1250" b="0">
-                <a:solidFill>
-                  <a:srgbClr val="000000"/>
-                </a:solidFill>
-                <a:latin typeface="Avenir Next LT Pro"/>
-              </a:rPr>
-              <a:t>~$3.6B revenue — then buys back ~7.6M shares at ~$269–321, debt-funded.</a:t>
-            </a:r>
-          </a:p>
-        </p:txBody>
-      </p:sp>
-      <p:sp>
-        <p:nvSpPr>
-          <p:cNvPr id="10" name="Rectangle 9"/>
-          <p:cNvSpPr/>
-          <p:nvPr/>
-        </p:nvSpPr>
-        <p:spPr>
-          <a:xfrm>
-            <a:off x="457200" y="3986783"/>
-            <a:ext cx="82296" cy="1143000"/>
-          </a:xfrm>
-          <a:prstGeom prst="rect">
-            <a:avLst/>
-          </a:prstGeom>
-          <a:solidFill>
-            <a:srgbClr val="B03030"/>
-          </a:solidFill>
-          <a:ln>
-            <a:solidFill/>
-          </a:ln>
-        </p:spPr>
-        <p:style>
-          <a:lnRef idx="1">
-            <a:schemeClr val="accent1"/>
-          </a:lnRef>
-          <a:fillRef idx="3">
-            <a:schemeClr val="accent1"/>
-          </a:fillRef>
-          <a:effectRef idx="2">
-            <a:schemeClr val="accent1"/>
-          </a:effectRef>
-          <a:fontRef idx="minor">
-            <a:schemeClr val="lt1"/>
-          </a:fontRef>
-        </p:style>
-        <p:txBody>
-          <a:bodyPr rtlCol="0" anchor="ctr"/>
-          <a:lstStyle/>
-          <a:p>
-            <a:pPr algn="ctr"/>
-          </a:p>
-        </p:txBody>
-      </p:sp>
-      <p:sp>
-        <p:nvSpPr>
-          <p:cNvPr id="11" name="TextBox 10"/>
-          <p:cNvSpPr txBox="1"/>
-          <p:nvPr/>
-        </p:nvSpPr>
-        <p:spPr>
-          <a:xfrm>
-            <a:off x="658368" y="3986783"/>
-            <a:ext cx="1920240" cy="1143000"/>
-          </a:xfrm>
-          <a:prstGeom prst="rect">
-            <a:avLst/>
-          </a:prstGeom>
-          <a:noFill/>
-          <a:ln>
-            <a:noFill/>
-          </a:ln>
-        </p:spPr>
-        <p:txBody>
-          <a:bodyPr wrap="square" anchor="ctr">
-            <a:spAutoFit/>
-          </a:bodyPr>
-          <a:lstStyle/>
-          <a:p>
-            <a:r>
-              <a:rPr sz="1400" b="1">
-                <a:solidFill>
-                  <a:srgbClr val="000000"/>
-                </a:solidFill>
-                <a:latin typeface="Avenir Next LT Pro Demi"/>
-              </a:rPr>
-              <a:t>The Fall</a:t>
-            </a:r>
-          </a:p>
-          <a:p>
-            <a:r>
-              <a:rPr sz="1000" b="0">
-                <a:solidFill>
-                  <a:srgbClr val="707070"/>
-                </a:solidFill>
-                <a:latin typeface="Avenir Next LT Pro"/>
-              </a:rPr>
-              <a:t>FY23–24</a:t>
-            </a:r>
-          </a:p>
-        </p:txBody>
-      </p:sp>
-      <p:sp>
-        <p:nvSpPr>
-          <p:cNvPr id="12" name="TextBox 11"/>
-          <p:cNvSpPr txBox="1"/>
-          <p:nvPr/>
-        </p:nvSpPr>
-        <p:spPr>
-          <a:xfrm>
-            <a:off x="2743200" y="3986783"/>
-            <a:ext cx="5943600" cy="1143000"/>
-          </a:xfrm>
-          <a:prstGeom prst="rect">
-            <a:avLst/>
-          </a:prstGeom>
-          <a:noFill/>
-          <a:ln>
-            <a:noFill/>
-          </a:ln>
-        </p:spPr>
-        <p:txBody>
-          <a:bodyPr wrap="square" anchor="ctr">
-            <a:spAutoFit/>
-          </a:bodyPr>
-          <a:lstStyle/>
-          <a:p>
-            <a:r>
-              <a:rPr sz="1250" b="0">
-                <a:solidFill>
-                  <a:srgbClr val="000000"/>
-                </a:solidFill>
-                <a:latin typeface="Avenir Next LT Pro"/>
-              </a:rPr>
-              <a:t>Housing freezes; revenue falls to ~$3.03B. Debt now ~$2.4B, ~4× levered.</a:t>
-            </a:r>
-          </a:p>
-        </p:txBody>
-      </p:sp>
-      <p:sp>
-        <p:nvSpPr>
-          <p:cNvPr id="13" name="TextBox 12"/>
-          <p:cNvSpPr txBox="1"/>
-          <p:nvPr/>
-        </p:nvSpPr>
-        <p:spPr>
-          <a:xfrm>
-            <a:off x="457200" y="5532120"/>
-            <a:ext cx="8229600" cy="411480"/>
-          </a:xfrm>
-          <a:prstGeom prst="rect">
-            <a:avLst/>
-          </a:prstGeom>
-          <a:noFill/>
-          <a:ln>
-            <a:noFill/>
-          </a:ln>
-        </p:spPr>
-        <p:txBody>
-          <a:bodyPr wrap="square">
-            <a:spAutoFit/>
-          </a:bodyPr>
-          <a:lstStyle/>
-          <a:p>
-            <a:r>
-              <a:rPr sz="1100" b="1">
-                <a:solidFill>
-                  <a:srgbClr val="000000"/>
-                </a:solidFill>
-                <a:latin typeface="Avenir Next LT Pro Demi"/>
-              </a:rPr>
-              <a:t>Partly self-inflicted: leveraged buybacks at the top, then the cycle turned.</a:t>
-            </a:r>
-          </a:p>
-        </p:txBody>
-      </p:sp>
-      <p:sp>
-        <p:nvSpPr>
-          <p:cNvPr id="14" name="TextBox 13"/>
-          <p:cNvSpPr txBox="1"/>
-          <p:nvPr/>
-        </p:nvSpPr>
-        <p:spPr>
-          <a:xfrm>
-            <a:off x="457200" y="6172200"/>
-            <a:ext cx="8229600" cy="274320"/>
-          </a:xfrm>
-          <a:prstGeom prst="rect">
-            <a:avLst/>
-          </a:prstGeom>
-          <a:noFill/>
-          <a:ln>
-            <a:noFill/>
-          </a:ln>
-        </p:spPr>
-        <p:txBody>
-          <a:bodyPr wrap="none">
-            <a:spAutoFit/>
-          </a:bodyPr>
-          <a:lstStyle/>
-          <a:p>
-            <a:r>
-              <a:rPr sz="750" b="0" i="1">
-                <a:solidFill>
-                  <a:srgbClr val="707070"/>
-                </a:solidFill>
-                <a:latin typeface="Avenir Next LT Pro"/>
-              </a:rPr>
-              <a:t>Source: RH FY2025 Form 10-K</a:t>
-            </a:r>
-          </a:p>
-        </p:txBody>
-      </p:sp>
-    </p:spTree>
-  </p:cSld>
-  <p:clrMapOvr>
-    <a:masterClrMapping/>
-  </p:clrMapOvr>
-</p:sld>
-</file>
-
-<file path=ppt/slides/slide9.xml><?xml version="1.0" encoding="utf-8"?>
-<p:sld xmlns:a="http://schemas.openxmlformats.org/drawingml/2006/main" xmlns:p="http://schemas.openxmlformats.org/presentationml/2006/main" xmlns:r="http://schemas.openxmlformats.org/officeDocument/2006/relationships">
-  <p:cSld>
-    <p:spTree>
-      <p:nvGrpSpPr>
-        <p:cNvPr id="1" name=""/>
-        <p:cNvGrpSpPr/>
-        <p:nvPr/>
-      </p:nvGrpSpPr>
-      <p:grpSpPr/>
-      <p:sp>
-        <p:nvSpPr>
-          <p:cNvPr id="2" name="TextBox 1"/>
-          <p:cNvSpPr txBox="1"/>
-          <p:nvPr/>
-        </p:nvSpPr>
-        <p:spPr>
-          <a:xfrm>
-            <a:off x="457200" y="365760"/>
-            <a:ext cx="8229600" cy="548640"/>
-          </a:xfrm>
-          <a:prstGeom prst="rect">
-            <a:avLst/>
-          </a:prstGeom>
-          <a:noFill/>
-          <a:ln>
-            <a:noFill/>
-          </a:ln>
-        </p:spPr>
-        <p:txBody>
-          <a:bodyPr wrap="square">
-            <a:spAutoFit/>
-          </a:bodyPr>
-          <a:lstStyle/>
-          <a:p>
-            <a:r>
-              <a:rPr sz="2200" b="0">
-                <a:solidFill>
-                  <a:srgbClr val="000000"/>
-                </a:solidFill>
-                <a:latin typeface="Avenir Next LT Pro Demi"/>
-              </a:rPr>
-              <a:t>The Recovery Plan</a:t>
-            </a:r>
-          </a:p>
-        </p:txBody>
-      </p:sp>
-      <p:sp>
-        <p:nvSpPr>
-          <p:cNvPr id="3" name="Rectangle 2"/>
-          <p:cNvSpPr/>
-          <p:nvPr/>
-        </p:nvSpPr>
-        <p:spPr>
-          <a:xfrm>
-            <a:off x="457200" y="960120"/>
-            <a:ext cx="8229600" cy="25603"/>
-          </a:xfrm>
-          <a:prstGeom prst="rect">
-            <a:avLst/>
-          </a:prstGeom>
-          <a:solidFill>
-            <a:srgbClr val="000000"/>
-          </a:solidFill>
-          <a:ln>
-            <a:solidFill/>
-          </a:ln>
-        </p:spPr>
-        <p:style>
-          <a:lnRef idx="1">
-            <a:schemeClr val="accent1"/>
-          </a:lnRef>
-          <a:fillRef idx="3">
-            <a:schemeClr val="accent1"/>
-          </a:fillRef>
-          <a:effectRef idx="2">
-            <a:schemeClr val="accent1"/>
-          </a:effectRef>
-          <a:fontRef idx="minor">
-            <a:schemeClr val="lt1"/>
-          </a:fontRef>
-        </p:style>
-        <p:txBody>
-          <a:bodyPr rtlCol="0" anchor="ctr"/>
-          <a:lstStyle/>
-          <a:p>
-            <a:pPr algn="ctr"/>
-          </a:p>
-        </p:txBody>
-      </p:sp>
-      <p:sp>
-        <p:nvSpPr>
-          <p:cNvPr id="4" name="Rectangle 3"/>
-          <p:cNvSpPr/>
-          <p:nvPr/>
-        </p:nvSpPr>
-        <p:spPr>
-          <a:xfrm>
-            <a:off x="457200" y="1371600"/>
-            <a:ext cx="82296" cy="960120"/>
-          </a:xfrm>
-          <a:prstGeom prst="rect">
-            <a:avLst/>
-          </a:prstGeom>
-          <a:solidFill>
-            <a:srgbClr val="000000"/>
-          </a:solidFill>
-          <a:ln>
-            <a:solidFill/>
-          </a:ln>
-        </p:spPr>
-        <p:style>
-          <a:lnRef idx="1">
-            <a:schemeClr val="accent1"/>
-          </a:lnRef>
-          <a:fillRef idx="3">
-            <a:schemeClr val="accent1"/>
-          </a:fillRef>
-          <a:effectRef idx="2">
-            <a:schemeClr val="accent1"/>
-          </a:effectRef>
-          <a:fontRef idx="minor">
-            <a:schemeClr val="lt1"/>
-          </a:fontRef>
-        </p:style>
-        <p:txBody>
-          <a:bodyPr rtlCol="0" anchor="ctr"/>
-          <a:lstStyle/>
-          <a:p>
-            <a:pPr algn="ctr"/>
-          </a:p>
-        </p:txBody>
-      </p:sp>
-      <p:sp>
-        <p:nvSpPr>
-          <p:cNvPr id="5" name="TextBox 4"/>
-          <p:cNvSpPr txBox="1"/>
-          <p:nvPr/>
-        </p:nvSpPr>
-        <p:spPr>
-          <a:xfrm>
-            <a:off x="658368" y="1371600"/>
-            <a:ext cx="7955279" cy="960120"/>
-          </a:xfrm>
-          <a:prstGeom prst="rect">
-            <a:avLst/>
-          </a:prstGeom>
-          <a:noFill/>
-          <a:ln>
-            <a:noFill/>
-          </a:ln>
-        </p:spPr>
-        <p:txBody>
-          <a:bodyPr wrap="square" anchor="ctr">
-            <a:spAutoFit/>
-          </a:bodyPr>
-          <a:lstStyle/>
-          <a:p>
-            <a:r>
-              <a:rPr sz="1350" b="1">
-                <a:solidFill>
-                  <a:srgbClr val="000000"/>
-                </a:solidFill>
-                <a:latin typeface="Avenir Next LT Pro Demi"/>
-              </a:rPr>
-              <a:t>Product transformation  —  </a:t>
-            </a:r>
-            <a:r>
-              <a:rPr sz="1250" b="0">
-                <a:solidFill>
-                  <a:srgbClr val="000000"/>
-                </a:solidFill>
-                <a:latin typeface="Avenir Next LT Pro"/>
-              </a:rPr>
-              <a:t>New collections and refreshed Sourcebooks.</a:t>
-            </a:r>
-          </a:p>
-        </p:txBody>
-      </p:sp>
-      <p:sp>
-        <p:nvSpPr>
-          <p:cNvPr id="6" name="Rectangle 5"/>
-          <p:cNvSpPr/>
-          <p:nvPr/>
-        </p:nvSpPr>
-        <p:spPr>
-          <a:xfrm>
-            <a:off x="457200" y="2496312"/>
-            <a:ext cx="82296" cy="960120"/>
-          </a:xfrm>
-          <a:prstGeom prst="rect">
-            <a:avLst/>
-          </a:prstGeom>
-          <a:solidFill>
-            <a:srgbClr val="196B24"/>
-          </a:solidFill>
-          <a:ln>
-            <a:solidFill/>
-          </a:ln>
-        </p:spPr>
-        <p:style>
-          <a:lnRef idx="1">
-            <a:schemeClr val="accent1"/>
-          </a:lnRef>
-          <a:fillRef idx="3">
-            <a:schemeClr val="accent1"/>
-          </a:fillRef>
-          <a:effectRef idx="2">
-            <a:schemeClr val="accent1"/>
-          </a:effectRef>
-          <a:fontRef idx="minor">
-            <a:schemeClr val="lt1"/>
-          </a:fontRef>
-        </p:style>
-        <p:txBody>
-          <a:bodyPr rtlCol="0" anchor="ctr"/>
-          <a:lstStyle/>
-          <a:p>
-            <a:pPr algn="ctr"/>
-          </a:p>
-        </p:txBody>
-      </p:sp>
-      <p:sp>
-        <p:nvSpPr>
-          <p:cNvPr id="7" name="TextBox 6"/>
-          <p:cNvSpPr txBox="1"/>
-          <p:nvPr/>
-        </p:nvSpPr>
-        <p:spPr>
-          <a:xfrm>
-            <a:off x="658368" y="2496312"/>
-            <a:ext cx="7955279" cy="960120"/>
-          </a:xfrm>
-          <a:prstGeom prst="rect">
-            <a:avLst/>
-          </a:prstGeom>
-          <a:noFill/>
-          <a:ln>
-            <a:noFill/>
-          </a:ln>
-        </p:spPr>
-        <p:txBody>
-          <a:bodyPr wrap="square" anchor="ctr">
-            <a:spAutoFit/>
-          </a:bodyPr>
-          <a:lstStyle/>
-          <a:p>
-            <a:r>
-              <a:rPr sz="1350" b="1">
-                <a:solidFill>
-                  <a:srgbClr val="000000"/>
-                </a:solidFill>
-                <a:latin typeface="Avenir Next LT Pro Demi"/>
-              </a:rPr>
-              <a:t>Gallery expansion  —  </a:t>
-            </a:r>
-            <a:r>
-              <a:rPr sz="1250" b="0">
-                <a:solidFill>
-                  <a:srgbClr val="000000"/>
-                </a:solidFill>
-                <a:latin typeface="Avenir Next LT Pro"/>
-              </a:rPr>
-              <a:t>Every major U.S./Canada market — RH's ~$5–6B opportunity.</a:t>
-            </a:r>
-          </a:p>
-        </p:txBody>
-      </p:sp>
-      <p:sp>
-        <p:nvSpPr>
-          <p:cNvPr id="8" name="Rectangle 7"/>
-          <p:cNvSpPr/>
-          <p:nvPr/>
-        </p:nvSpPr>
-        <p:spPr>
-          <a:xfrm>
-            <a:off x="457200" y="3621024"/>
-            <a:ext cx="82296" cy="960120"/>
-          </a:xfrm>
-          <a:prstGeom prst="rect">
-            <a:avLst/>
-          </a:prstGeom>
-          <a:solidFill>
-            <a:srgbClr val="E97132"/>
-          </a:solidFill>
-          <a:ln>
-            <a:solidFill/>
-          </a:ln>
-        </p:spPr>
-        <p:style>
-          <a:lnRef idx="1">
-            <a:schemeClr val="accent1"/>
-          </a:lnRef>
-          <a:fillRef idx="3">
-            <a:schemeClr val="accent1"/>
-          </a:fillRef>
-          <a:effectRef idx="2">
-            <a:schemeClr val="accent1"/>
-          </a:effectRef>
-          <a:fontRef idx="minor">
-            <a:schemeClr val="lt1"/>
-          </a:fontRef>
-        </p:style>
-        <p:txBody>
-          <a:bodyPr rtlCol="0" anchor="ctr"/>
-          <a:lstStyle/>
-          <a:p>
-            <a:pPr algn="ctr"/>
-          </a:p>
-        </p:txBody>
-      </p:sp>
-      <p:sp>
-        <p:nvSpPr>
-          <p:cNvPr id="9" name="TextBox 8"/>
-          <p:cNvSpPr txBox="1"/>
-          <p:nvPr/>
-        </p:nvSpPr>
-        <p:spPr>
-          <a:xfrm>
-            <a:off x="658368" y="3621024"/>
-            <a:ext cx="7955279" cy="960120"/>
-          </a:xfrm>
-          <a:prstGeom prst="rect">
-            <a:avLst/>
-          </a:prstGeom>
-          <a:noFill/>
-          <a:ln>
-            <a:noFill/>
-          </a:ln>
-        </p:spPr>
-        <p:txBody>
-          <a:bodyPr wrap="square" anchor="ctr">
-            <a:spAutoFit/>
-          </a:bodyPr>
-          <a:lstStyle/>
-          <a:p>
-            <a:r>
-              <a:rPr sz="1350" b="1">
-                <a:solidFill>
-                  <a:srgbClr val="000000"/>
-                </a:solidFill>
-                <a:latin typeface="Avenir Next LT Pro Demi"/>
-              </a:rPr>
-              <a:t>Move upmarket  —  </a:t>
-            </a:r>
-            <a:r>
-              <a:rPr sz="1250" b="0">
-                <a:solidFill>
-                  <a:srgbClr val="000000"/>
-                </a:solidFill>
-                <a:latin typeface="Avenir Next LT Pro"/>
-              </a:rPr>
-              <a:t>Estates targets the rate-immune cash buyer.</a:t>
-            </a:r>
-          </a:p>
-        </p:txBody>
-      </p:sp>
-      <p:sp>
-        <p:nvSpPr>
-          <p:cNvPr id="10" name="Rectangle 9"/>
-          <p:cNvSpPr/>
-          <p:nvPr/>
-        </p:nvSpPr>
-        <p:spPr>
-          <a:xfrm>
-            <a:off x="457200" y="4745736"/>
-            <a:ext cx="82296" cy="960120"/>
-          </a:xfrm>
-          <a:prstGeom prst="rect">
-            <a:avLst/>
-          </a:prstGeom>
-          <a:solidFill>
-            <a:srgbClr val="000000"/>
-          </a:solidFill>
-          <a:ln>
-            <a:solidFill/>
-          </a:ln>
-        </p:spPr>
-        <p:style>
-          <a:lnRef idx="1">
-            <a:schemeClr val="accent1"/>
-          </a:lnRef>
-          <a:fillRef idx="3">
-            <a:schemeClr val="accent1"/>
-          </a:fillRef>
-          <a:effectRef idx="2">
-            <a:schemeClr val="accent1"/>
-          </a:effectRef>
-          <a:fontRef idx="minor">
-            <a:schemeClr val="lt1"/>
-          </a:fontRef>
-        </p:style>
-        <p:txBody>
-          <a:bodyPr rtlCol="0" anchor="ctr"/>
-          <a:lstStyle/>
-          <a:p>
-            <a:pPr algn="ctr"/>
-          </a:p>
-        </p:txBody>
-      </p:sp>
-      <p:sp>
-        <p:nvSpPr>
-          <p:cNvPr id="11" name="TextBox 10"/>
-          <p:cNvSpPr txBox="1"/>
-          <p:nvPr/>
-        </p:nvSpPr>
-        <p:spPr>
-          <a:xfrm>
-            <a:off x="658368" y="4745736"/>
-            <a:ext cx="7955279" cy="960120"/>
-          </a:xfrm>
-          <a:prstGeom prst="rect">
-            <a:avLst/>
-          </a:prstGeom>
-          <a:noFill/>
-          <a:ln>
-            <a:noFill/>
-          </a:ln>
-        </p:spPr>
-        <p:txBody>
-          <a:bodyPr wrap="square" anchor="ctr">
-            <a:spAutoFit/>
-          </a:bodyPr>
-          <a:lstStyle/>
-          <a:p>
-            <a:r>
-              <a:rPr sz="1350" b="1">
-                <a:solidFill>
-                  <a:srgbClr val="000000"/>
-                </a:solidFill>
-                <a:latin typeface="Avenir Next LT Pro Demi"/>
-              </a:rPr>
-              <a:t>Global + platform  —  </a:t>
-            </a:r>
-            <a:r>
-              <a:rPr sz="1250" b="0">
-                <a:solidFill>
-                  <a:srgbClr val="000000"/>
-                </a:solidFill>
-                <a:latin typeface="Avenir Next LT Pro"/>
-              </a:rPr>
-              <a:t>RH England, Guesthouses, hospitality &amp; F&amp;B.</a:t>
-            </a:r>
-          </a:p>
-        </p:txBody>
-      </p:sp>
-      <p:sp>
-        <p:nvSpPr>
-          <p:cNvPr id="12" name="TextBox 11"/>
-          <p:cNvSpPr txBox="1"/>
-          <p:nvPr/>
-        </p:nvSpPr>
-        <p:spPr>
-          <a:xfrm>
-            <a:off x="457200" y="6172200"/>
-            <a:ext cx="8229600" cy="274320"/>
-          </a:xfrm>
-          <a:prstGeom prst="rect">
-            <a:avLst/>
-          </a:prstGeom>
-          <a:noFill/>
-          <a:ln>
-            <a:noFill/>
-          </a:ln>
-        </p:spPr>
-        <p:txBody>
-          <a:bodyPr wrap="none">
-            <a:spAutoFit/>
-          </a:bodyPr>
-          <a:lstStyle/>
-          <a:p>
-            <a:r>
-              <a:rPr sz="750" b="0" i="1">
-                <a:solidFill>
-                  <a:srgbClr val="707070"/>
-                </a:solidFill>
-                <a:latin typeface="Avenir Next LT Pro"/>
-              </a:rPr>
-              <a:t>Source: RH FY2025 Form 10-K</a:t>
-            </a:r>
-          </a:p>
-        </p:txBody>
-      </p:sp>
-    </p:spTree>
-  </p:cSld>
-  <p:clrMapOvr>
-    <a:masterClrMapping/>
-  </p:clrMapOvr>
 </p:sld>
 </file>
 

--- a/RH_Stock_Pitch_updated.pptx
+++ b/RH_Stock_Pitch_updated.pptx
@@ -18,6 +18,7 @@
     <p:sldId id="519" r:id="rId32"/>
     <p:sldId id="518" r:id="rId31"/>
     <p:sldId id="481" r:id="rId9"/>
+    <p:sldId id="526" r:id="rId33"/>
     <p:sldId id="522" r:id="rId35"/>
     <p:sldId id="523" r:id="rId36"/>
     <p:sldId id="524" r:id="rId37"/>
@@ -5204,7 +5205,546 @@
 </p:sld>
 </file>
 
-<file path=ppt/slides/slide14.xml><?xml version="1.0" encoding="utf-8"?>
+<file path=ppt/slides/slide10.xml><?xml version="1.0" encoding="utf-8"?>
+<p:sld xmlns:a="http://schemas.openxmlformats.org/drawingml/2006/main" xmlns:p="http://schemas.openxmlformats.org/presentationml/2006/main" xmlns:r="http://schemas.openxmlformats.org/officeDocument/2006/relationships">
+  <p:cSld>
+    <p:spTree>
+      <p:nvGrpSpPr>
+        <p:cNvPr id="1" name=""/>
+        <p:cNvGrpSpPr/>
+        <p:nvPr/>
+      </p:nvGrpSpPr>
+      <p:grpSpPr/>
+      <p:sp>
+        <p:nvSpPr>
+          <p:cNvPr id="2" name="TextBox 1"/>
+          <p:cNvSpPr txBox="1"/>
+          <p:nvPr/>
+        </p:nvSpPr>
+        <p:spPr>
+          <a:xfrm>
+            <a:off x="457200" y="365760"/>
+            <a:ext cx="8229600" cy="548640"/>
+          </a:xfrm>
+          <a:prstGeom prst="rect">
+            <a:avLst/>
+          </a:prstGeom>
+          <a:noFill/>
+          <a:ln>
+            <a:noFill/>
+          </a:ln>
+        </p:spPr>
+        <p:txBody>
+          <a:bodyPr wrap="square">
+            <a:spAutoFit/>
+          </a:bodyPr>
+          <a:lstStyle/>
+          <a:p>
+            <a:r>
+              <a:rPr sz="2100">
+                <a:solidFill>
+                  <a:srgbClr val="000000"/>
+                </a:solidFill>
+                <a:latin typeface="Avenir Next LT Pro Demi"/>
+              </a:rPr>
+              <a:t>Management &amp; Ownership</a:t>
+            </a:r>
+          </a:p>
+        </p:txBody>
+      </p:sp>
+      <p:sp>
+        <p:nvSpPr>
+          <p:cNvPr id="3" name="Rectangle 2"/>
+          <p:cNvSpPr/>
+          <p:nvPr/>
+        </p:nvSpPr>
+        <p:spPr>
+          <a:xfrm>
+            <a:off x="457200" y="960120"/>
+            <a:ext cx="8229600" cy="25603"/>
+          </a:xfrm>
+          <a:prstGeom prst="rect">
+            <a:avLst/>
+          </a:prstGeom>
+          <a:solidFill>
+            <a:srgbClr val="000000"/>
+          </a:solidFill>
+          <a:ln>
+            <a:noFill/>
+          </a:ln>
+        </p:spPr>
+        <p:style>
+          <a:lnRef idx="1">
+            <a:schemeClr val="accent1"/>
+          </a:lnRef>
+          <a:fillRef idx="3">
+            <a:schemeClr val="accent1"/>
+          </a:fillRef>
+          <a:effectRef idx="2">
+            <a:schemeClr val="accent1"/>
+          </a:effectRef>
+          <a:fontRef idx="minor">
+            <a:schemeClr val="lt1"/>
+          </a:fontRef>
+        </p:style>
+        <p:txBody>
+          <a:bodyPr rtlCol="0" anchor="ctr"/>
+          <a:lstStyle/>
+          <a:p>
+            <a:pPr algn="ctr"/>
+          </a:p>
+        </p:txBody>
+      </p:sp>
+      <p:graphicFrame>
+        <p:nvGraphicFramePr>
+          <p:cNvPr id="4" name="Table 3"/>
+          <p:cNvGraphicFramePr>
+            <a:graphicFrameLocks noGrp="1"/>
+          </p:cNvGraphicFramePr>
+          <p:nvPr/>
+        </p:nvGraphicFramePr>
+        <p:xfrm>
+          <a:off x="457200" y="1325880"/>
+          <a:ext cx="8229599" cy="4114800"/>
+        </p:xfrm>
+        <a:graphic>
+          <a:graphicData uri="http://schemas.openxmlformats.org/drawingml/2006/table">
+            <a:tbl>
+              <a:tblPr>
+                <a:tableStyleId>{5C22544A-7EE6-4342-B048-85BDC9FD1C3A}</a:tableStyleId>
+              </a:tblPr>
+              <a:tblGrid>
+                <a:gridCol w="1920240"/>
+                <a:gridCol w="3977639"/>
+                <a:gridCol w="2331720"/>
+              </a:tblGrid>
+              <a:tr h="822960">
+                <a:tc>
+                  <a:txBody>
+                    <a:bodyPr/>
+                    <a:lstStyle/>
+                    <a:p>
+                      <a:r>
+                        <a:rPr sz="1050" b="1">
+                          <a:solidFill>
+                            <a:srgbClr val="FFFFFF"/>
+                          </a:solidFill>
+                          <a:latin typeface="Avenir Next LT Pro Demi"/>
+                        </a:rPr>
+                        <a:t>Item</a:t>
+                      </a:r>
+                    </a:p>
+                  </a:txBody>
+                  <a:tcPr marL="82296" anchor="ctr">
+                    <a:solidFill>
+                      <a:srgbClr val="9A7B44"/>
+                    </a:solidFill>
+                  </a:tcPr>
+                </a:tc>
+                <a:tc>
+                  <a:txBody>
+                    <a:bodyPr/>
+                    <a:lstStyle/>
+                    <a:p>
+                      <a:r>
+                        <a:rPr sz="1050" b="1">
+                          <a:solidFill>
+                            <a:srgbClr val="FFFFFF"/>
+                          </a:solidFill>
+                          <a:latin typeface="Avenir Next LT Pro"/>
+                        </a:rPr>
+                        <a:t>Detail</a:t>
+                      </a:r>
+                    </a:p>
+                  </a:txBody>
+                  <a:tcPr marL="82296" anchor="ctr">
+                    <a:solidFill>
+                      <a:srgbClr val="9A7B44"/>
+                    </a:solidFill>
+                  </a:tcPr>
+                </a:tc>
+                <a:tc>
+                  <a:txBody>
+                    <a:bodyPr/>
+                    <a:lstStyle/>
+                    <a:p>
+                      <a:r>
+                        <a:rPr sz="1050" b="1">
+                          <a:solidFill>
+                            <a:srgbClr val="FFFFFF"/>
+                          </a:solidFill>
+                          <a:latin typeface="Avenir Next LT Pro"/>
+                        </a:rPr>
+                        <a:t>Read</a:t>
+                      </a:r>
+                    </a:p>
+                  </a:txBody>
+                  <a:tcPr marL="82296" anchor="ctr">
+                    <a:solidFill>
+                      <a:srgbClr val="9A7B44"/>
+                    </a:solidFill>
+                  </a:tcPr>
+                </a:tc>
+              </a:tr>
+              <a:tr h="822960">
+                <a:tc>
+                  <a:txBody>
+                    <a:bodyPr/>
+                    <a:lstStyle/>
+                    <a:p>
+                      <a:r>
+                        <a:rPr sz="1050" b="1">
+                          <a:solidFill>
+                            <a:srgbClr val="000000"/>
+                          </a:solidFill>
+                          <a:latin typeface="Avenir Next LT Pro Demi"/>
+                        </a:rPr>
+                        <a:t>Operator</a:t>
+                      </a:r>
+                    </a:p>
+                  </a:txBody>
+                  <a:tcPr marL="82296" anchor="ctr">
+                    <a:solidFill>
+                      <a:srgbClr val="FFFFFF"/>
+                    </a:solidFill>
+                  </a:tcPr>
+                </a:tc>
+                <a:tc>
+                  <a:txBody>
+                    <a:bodyPr/>
+                    <a:lstStyle/>
+                    <a:p>
+                      <a:r>
+                        <a:rPr sz="1050" b="0">
+                          <a:solidFill>
+                            <a:srgbClr val="000000"/>
+                          </a:solidFill>
+                          <a:latin typeface="Avenir Next LT Pro"/>
+                        </a:rPr>
+                        <a:t>Friedman (Chair/CEO): grew Pottery Barn $50M→$1B; rebuilt RH from near-bankruptcy (2001)</a:t>
+                      </a:r>
+                    </a:p>
+                  </a:txBody>
+                  <a:tcPr marL="82296" anchor="ctr">
+                    <a:solidFill>
+                      <a:srgbClr val="FFFFFF"/>
+                    </a:solidFill>
+                  </a:tcPr>
+                </a:tc>
+                <a:tc>
+                  <a:txBody>
+                    <a:bodyPr/>
+                    <a:lstStyle/>
+                    <a:p>
+                      <a:r>
+                        <a:rPr sz="1050" b="0">
+                          <a:solidFill>
+                            <a:srgbClr val="000000"/>
+                          </a:solidFill>
+                          <a:latin typeface="Avenir Next LT Pro"/>
+                        </a:rPr>
+                        <a:t>Proven; key-man risk</a:t>
+                      </a:r>
+                    </a:p>
+                  </a:txBody>
+                  <a:tcPr marL="82296" anchor="ctr">
+                    <a:solidFill>
+                      <a:srgbClr val="FFFFFF"/>
+                    </a:solidFill>
+                  </a:tcPr>
+                </a:tc>
+              </a:tr>
+              <a:tr h="822960">
+                <a:tc>
+                  <a:txBody>
+                    <a:bodyPr/>
+                    <a:lstStyle/>
+                    <a:p>
+                      <a:r>
+                        <a:rPr sz="1050" b="1">
+                          <a:solidFill>
+                            <a:srgbClr val="000000"/>
+                          </a:solidFill>
+                          <a:latin typeface="Avenir Next LT Pro Demi"/>
+                        </a:rPr>
+                        <a:t>Ownership</a:t>
+                      </a:r>
+                    </a:p>
+                  </a:txBody>
+                  <a:tcPr marL="82296" anchor="ctr">
+                    <a:solidFill>
+                      <a:srgbClr val="F4F6F8"/>
+                    </a:solidFill>
+                  </a:tcPr>
+                </a:tc>
+                <a:tc>
+                  <a:txBody>
+                    <a:bodyPr/>
+                    <a:lstStyle/>
+                    <a:p>
+                      <a:r>
+                        <a:rPr sz="1050" b="0">
+                          <a:solidFill>
+                            <a:srgbClr val="000000"/>
+                          </a:solidFill>
+                          <a:latin typeface="Avenir Next LT Pro"/>
+                        </a:rPr>
+                        <a:t>~18% outright (~25% incl. options); bought ~$10M at ~$216 (Jun 2024)</a:t>
+                      </a:r>
+                    </a:p>
+                  </a:txBody>
+                  <a:tcPr marL="82296" anchor="ctr">
+                    <a:solidFill>
+                      <a:srgbClr val="F4F6F8"/>
+                    </a:solidFill>
+                  </a:tcPr>
+                </a:tc>
+                <a:tc>
+                  <a:txBody>
+                    <a:bodyPr/>
+                    <a:lstStyle/>
+                    <a:p>
+                      <a:r>
+                        <a:rPr sz="1050" b="0">
+                          <a:solidFill>
+                            <a:srgbClr val="000000"/>
+                          </a:solidFill>
+                          <a:latin typeface="Avenir Next LT Pro"/>
+                        </a:rPr>
+                        <a:t>Deep alignment</a:t>
+                      </a:r>
+                    </a:p>
+                  </a:txBody>
+                  <a:tcPr marL="82296" anchor="ctr">
+                    <a:solidFill>
+                      <a:srgbClr val="F4F6F8"/>
+                    </a:solidFill>
+                  </a:tcPr>
+                </a:tc>
+              </a:tr>
+              <a:tr h="822960">
+                <a:tc>
+                  <a:txBody>
+                    <a:bodyPr/>
+                    <a:lstStyle/>
+                    <a:p>
+                      <a:r>
+                        <a:rPr sz="1050" b="1">
+                          <a:solidFill>
+                            <a:srgbClr val="000000"/>
+                          </a:solidFill>
+                          <a:latin typeface="Avenir Next LT Pro Demi"/>
+                        </a:rPr>
+                        <a:t>Recent insider activity</a:t>
+                      </a:r>
+                    </a:p>
+                  </a:txBody>
+                  <a:tcPr marL="82296" anchor="ctr">
+                    <a:solidFill>
+                      <a:srgbClr val="FFFFFF"/>
+                    </a:solidFill>
+                  </a:tcPr>
+                </a:tc>
+                <a:tc>
+                  <a:txBody>
+                    <a:bodyPr/>
+                    <a:lstStyle/>
+                    <a:p>
+                      <a:r>
+                        <a:rPr sz="1050" b="0">
+                          <a:solidFill>
+                            <a:srgbClr val="000000"/>
+                          </a:solidFill>
+                          <a:latin typeface="Avenir Next LT Pro"/>
+                        </a:rPr>
+                        <a:t>Mixed — mostly sales (option/tax) + a recent director open-market buy</a:t>
+                      </a:r>
+                    </a:p>
+                  </a:txBody>
+                  <a:tcPr marL="82296" anchor="ctr">
+                    <a:solidFill>
+                      <a:srgbClr val="FFFFFF"/>
+                    </a:solidFill>
+                  </a:tcPr>
+                </a:tc>
+                <a:tc>
+                  <a:txBody>
+                    <a:bodyPr/>
+                    <a:lstStyle/>
+                    <a:p>
+                      <a:r>
+                        <a:rPr sz="1050" b="0">
+                          <a:solidFill>
+                            <a:srgbClr val="000000"/>
+                          </a:solidFill>
+                          <a:latin typeface="Avenir Next LT Pro"/>
+                        </a:rPr>
+                        <a:t>No strong signal</a:t>
+                      </a:r>
+                    </a:p>
+                  </a:txBody>
+                  <a:tcPr marL="82296" anchor="ctr">
+                    <a:solidFill>
+                      <a:srgbClr val="FFFFFF"/>
+                    </a:solidFill>
+                  </a:tcPr>
+                </a:tc>
+              </a:tr>
+              <a:tr h="822960">
+                <a:tc>
+                  <a:txBody>
+                    <a:bodyPr/>
+                    <a:lstStyle/>
+                    <a:p>
+                      <a:r>
+                        <a:rPr sz="1050" b="1">
+                          <a:solidFill>
+                            <a:srgbClr val="000000"/>
+                          </a:solidFill>
+                          <a:latin typeface="Avenir Next LT Pro Demi"/>
+                        </a:rPr>
+                        <a:t>Governance</a:t>
+                      </a:r>
+                    </a:p>
+                  </a:txBody>
+                  <a:tcPr marL="82296" anchor="ctr">
+                    <a:solidFill>
+                      <a:srgbClr val="F4F6F8"/>
+                    </a:solidFill>
+                  </a:tcPr>
+                </a:tc>
+                <a:tc>
+                  <a:txBody>
+                    <a:bodyPr/>
+                    <a:lstStyle/>
+                    <a:p>
+                      <a:r>
+                        <a:rPr sz="1050" b="0">
+                          <a:solidFill>
+                            <a:srgbClr val="000000"/>
+                          </a:solidFill>
+                          <a:latin typeface="Avenir Next LT Pro"/>
+                        </a:rPr>
+                        <a:t>Founder-led; Jun 2026 annual meeting routine; no activist involvement</a:t>
+                      </a:r>
+                    </a:p>
+                  </a:txBody>
+                  <a:tcPr marL="82296" anchor="ctr">
+                    <a:solidFill>
+                      <a:srgbClr val="F4F6F8"/>
+                    </a:solidFill>
+                  </a:tcPr>
+                </a:tc>
+                <a:tc>
+                  <a:txBody>
+                    <a:bodyPr/>
+                    <a:lstStyle/>
+                    <a:p>
+                      <a:r>
+                        <a:rPr sz="1050" b="0">
+                          <a:solidFill>
+                            <a:srgbClr val="000000"/>
+                          </a:solidFill>
+                          <a:latin typeface="Avenir Next LT Pro"/>
+                        </a:rPr>
+                        <a:t>Stable; no catalyst</a:t>
+                      </a:r>
+                    </a:p>
+                  </a:txBody>
+                  <a:tcPr marL="82296" anchor="ctr">
+                    <a:solidFill>
+                      <a:srgbClr val="F4F6F8"/>
+                    </a:solidFill>
+                  </a:tcPr>
+                </a:tc>
+              </a:tr>
+            </a:tbl>
+          </a:graphicData>
+        </a:graphic>
+      </p:graphicFrame>
+      <p:sp>
+        <p:nvSpPr>
+          <p:cNvPr id="5" name="TextBox 4"/>
+          <p:cNvSpPr txBox="1"/>
+          <p:nvPr/>
+        </p:nvSpPr>
+        <p:spPr>
+          <a:xfrm>
+            <a:off x="457200" y="5669280"/>
+            <a:ext cx="8229600" cy="365760"/>
+          </a:xfrm>
+          <a:prstGeom prst="rect">
+            <a:avLst/>
+          </a:prstGeom>
+          <a:noFill/>
+          <a:ln>
+            <a:noFill/>
+          </a:ln>
+        </p:spPr>
+        <p:txBody>
+          <a:bodyPr wrap="square">
+            <a:spAutoFit/>
+          </a:bodyPr>
+          <a:lstStyle/>
+          <a:p>
+            <a:r>
+              <a:rPr sz="1150" b="1" i="0">
+                <a:solidFill>
+                  <a:srgbClr val="000000"/>
+                </a:solidFill>
+                <a:latin typeface="Avenir Next LT Pro Demi"/>
+              </a:rPr>
+              <a:t>Aligned, proven operator — but no activist catalyst and no strong insider “buy” signal.</a:t>
+            </a:r>
+          </a:p>
+        </p:txBody>
+      </p:sp>
+      <p:sp>
+        <p:nvSpPr>
+          <p:cNvPr id="6" name="TextBox 5"/>
+          <p:cNvSpPr txBox="1"/>
+          <p:nvPr/>
+        </p:nvSpPr>
+        <p:spPr>
+          <a:xfrm>
+            <a:off x="457200" y="6309360"/>
+            <a:ext cx="8229600" cy="274320"/>
+          </a:xfrm>
+          <a:prstGeom prst="rect">
+            <a:avLst/>
+          </a:prstGeom>
+          <a:noFill/>
+          <a:ln>
+            <a:noFill/>
+          </a:ln>
+        </p:spPr>
+        <p:txBody>
+          <a:bodyPr wrap="square">
+            <a:spAutoFit/>
+          </a:bodyPr>
+          <a:lstStyle/>
+          <a:p>
+            <a:r>
+              <a:rPr sz="750" b="0" i="1">
+                <a:solidFill>
+                  <a:srgbClr val="707070"/>
+                </a:solidFill>
+                <a:latin typeface="Avenir Next LT Pro"/>
+              </a:rPr>
+              <a:t>Sources: RH DEF 14A proxy; SEC Form 4; RH 8-K (Jun 2026).</a:t>
+            </a:r>
+          </a:p>
+        </p:txBody>
+      </p:sp>
+    </p:spTree>
+  </p:cSld>
+  <p:clrMapOvr>
+    <a:masterClrMapping/>
+  </p:clrMapOvr>
+</p:sld>
+</file>
+
+<file path=ppt/slides/slide11.xml><?xml version="1.0" encoding="utf-8"?>
 <p:sld xmlns:a="http://schemas.openxmlformats.org/drawingml/2006/main" xmlns:r="http://schemas.openxmlformats.org/officeDocument/2006/relationships" xmlns:p="http://schemas.openxmlformats.org/presentationml/2006/main">
   <p:cSld>
     <p:spTree>
@@ -6733,7 +7273,7 @@
 </p:sld>
 </file>
 
-<file path=ppt/slides/slide15.xml><?xml version="1.0" encoding="utf-8"?>
+<file path=ppt/slides/slide12.xml><?xml version="1.0" encoding="utf-8"?>
 <p:sld xmlns:a="http://schemas.openxmlformats.org/drawingml/2006/main" xmlns:r="http://schemas.openxmlformats.org/officeDocument/2006/relationships" xmlns:p="http://schemas.openxmlformats.org/presentationml/2006/main">
   <p:cSld>
     <p:spTree>
@@ -6809,7 +7349,7 @@
 </p:sld>
 </file>
 
-<file path=ppt/slides/slide16.xml><?xml version="1.0" encoding="utf-8"?>
+<file path=ppt/slides/slide13.xml><?xml version="1.0" encoding="utf-8"?>
 <p:sld xmlns:a="http://schemas.openxmlformats.org/drawingml/2006/main" xmlns:r="http://schemas.openxmlformats.org/officeDocument/2006/relationships" xmlns:p="http://schemas.openxmlformats.org/presentationml/2006/main">
   <p:cSld>
     <p:spTree>
@@ -7940,7 +8480,1941 @@
 </p:sld>
 </file>
 
+<file path=ppt/slides/slide14.xml><?xml version="1.0" encoding="utf-8"?>
+<p:sld xmlns:a="http://schemas.openxmlformats.org/drawingml/2006/main" xmlns:r="http://schemas.openxmlformats.org/officeDocument/2006/relationships" xmlns:p="http://schemas.openxmlformats.org/presentationml/2006/main">
+  <p:cSld>
+    <p:spTree>
+      <p:nvGrpSpPr>
+        <p:cNvPr id="1" name=""/>
+        <p:cNvGrpSpPr/>
+        <p:nvPr/>
+      </p:nvGrpSpPr>
+      <p:grpSpPr>
+        <a:xfrm>
+          <a:off x="0" y="0"/>
+          <a:ext cx="0" cy="0"/>
+          <a:chOff x="0" y="0"/>
+          <a:chExt cx="0" cy="0"/>
+        </a:xfrm>
+      </p:grpSpPr>
+      <p:sp>
+        <p:nvSpPr>
+          <p:cNvPr id="2" name="Title 1">
+            <a:extLst>
+              <a:ext uri="{FF2B5EF4-FFF2-40B4-BE49-F238E27FC236}">
+                <a16:creationId xmlns:a16="http://schemas.microsoft.com/office/drawing/2014/main" id="{D640880E-3485-E4DD-E794-98A7729742E7}"/>
+              </a:ext>
+            </a:extLst>
+          </p:cNvPr>
+          <p:cNvSpPr>
+            <a:spLocks noGrp="1"/>
+          </p:cNvSpPr>
+          <p:nvPr>
+            <p:ph type="title"/>
+          </p:nvPr>
+        </p:nvSpPr>
+        <p:spPr>
+          <a:ln>
+            <a:solidFill/>
+          </a:ln>
+        </p:spPr>
+        <p:txBody>
+          <a:bodyPr/>
+          <a:lstStyle/>
+          <a:p>
+            <a:r>
+              <a:rPr lang="en-US">
+                <a:solidFill/>
+              </a:rPr>
+              <a:t>Competitive landscape</a:t>
+            </a:r>
+          </a:p>
+        </p:txBody>
+      </p:sp>
+    </p:spTree>
+    <p:extLst>
+      <p:ext uri="{BB962C8B-B14F-4D97-AF65-F5344CB8AC3E}">
+        <p14:creationId xmlns:p14="http://schemas.microsoft.com/office/powerpoint/2010/main" val="1829529172"/>
+      </p:ext>
+    </p:extLst>
+  </p:cSld>
+  <p:clrMapOvr>
+    <a:masterClrMapping/>
+  </p:clrMapOvr>
+  <mc:AlternateContent xmlns:mc="http://schemas.openxmlformats.org/markup-compatibility/2006" xmlns:p14="http://schemas.microsoft.com/office/powerpoint/2010/main">
+    <mc:Choice Requires="p14">
+      <p:transition spd="med" p14:dur="700">
+        <p:fade/>
+      </p:transition>
+    </mc:Choice>
+    <mc:Fallback xmlns="">
+      <p:transition spd="med">
+        <p:fade/>
+      </p:transition>
+    </mc:Fallback>
+  </mc:AlternateContent>
+</p:sld>
+</file>
+
+<file path=ppt/slides/slide15.xml><?xml version="1.0" encoding="utf-8"?>
+<p:sld xmlns:a="http://schemas.openxmlformats.org/drawingml/2006/main" xmlns:r="http://schemas.openxmlformats.org/officeDocument/2006/relationships" xmlns:p="http://schemas.openxmlformats.org/presentationml/2006/main">
+  <p:cSld>
+    <p:spTree>
+      <p:nvGrpSpPr>
+        <p:cNvPr id="1" name=""/>
+        <p:cNvGrpSpPr/>
+        <p:nvPr/>
+      </p:nvGrpSpPr>
+      <p:grpSpPr>
+        <a:xfrm>
+          <a:off x="0" y="0"/>
+          <a:ext cx="0" cy="0"/>
+          <a:chOff x="0" y="0"/>
+          <a:chExt cx="0" cy="0"/>
+        </a:xfrm>
+      </p:grpSpPr>
+      <p:sp>
+        <p:nvSpPr>
+          <p:cNvPr id="2" name="TextBox 1"/>
+          <p:cNvSpPr txBox="1"/>
+          <p:nvPr/>
+        </p:nvSpPr>
+        <p:spPr>
+          <a:xfrm>
+            <a:off x="457200" y="384048"/>
+            <a:ext cx="8229600" cy="446276"/>
+          </a:xfrm>
+          <a:prstGeom prst="rect">
+            <a:avLst/>
+          </a:prstGeom>
+          <a:noFill/>
+          <a:ln>
+            <a:noFill/>
+          </a:ln>
+        </p:spPr>
+        <p:txBody>
+          <a:bodyPr wrap="square">
+            <a:spAutoFit/>
+          </a:bodyPr>
+          <a:lstStyle/>
+          <a:p>
+            <a:r>
+              <a:rPr sz="2300" b="0" i="0" dirty="0">
+                <a:solidFill/>
+                <a:latin typeface="Avenir Next LT Pro Demi"/>
+              </a:rPr>
+              <a:t>Competitive Landscape</a:t>
+            </a:r>
+          </a:p>
+        </p:txBody>
+      </p:sp>
+      <p:sp>
+        <p:nvSpPr>
+          <p:cNvPr id="5" name="TextBox 4"/>
+          <p:cNvSpPr txBox="1"/>
+          <p:nvPr/>
+        </p:nvSpPr>
+        <p:spPr>
+          <a:xfrm>
+            <a:off x="457200" y="1051560"/>
+            <a:ext cx="8229600" cy="274320"/>
+          </a:xfrm>
+          <a:prstGeom prst="rect">
+            <a:avLst/>
+          </a:prstGeom>
+          <a:noFill/>
+          <a:ln>
+            <a:noFill/>
+          </a:ln>
+        </p:spPr>
+        <p:txBody>
+          <a:bodyPr wrap="none">
+            <a:spAutoFit/>
+          </a:bodyPr>
+          <a:lstStyle/>
+          <a:p>
+            <a:r>
+              <a:rPr sz="900" b="0" i="1">
+                <a:solidFill>
+                  <a:srgbClr val="B0B0B0"/>
+                </a:solidFill>
+                <a:latin typeface="Avenir Next LT Pro"/>
+              </a:rPr>
+              <a:t>[ narrative / commentary to be written ]</a:t>
+            </a:r>
+          </a:p>
+        </p:txBody>
+      </p:sp>
+      <p:graphicFrame>
+        <p:nvGraphicFramePr>
+          <p:cNvPr id="6" name="Table 5"/>
+          <p:cNvGraphicFramePr>
+            <a:graphicFrameLocks noGrp="1"/>
+          </p:cNvGraphicFramePr>
+          <p:nvPr>
+            <p:extLst>
+              <p:ext uri="{D42A27DB-BD31-4B8C-83A1-F6EECF244321}">
+                <p14:modId xmlns:p14="http://schemas.microsoft.com/office/powerpoint/2010/main" val="3484064200"/>
+              </p:ext>
+            </p:extLst>
+          </p:nvPr>
+        </p:nvGraphicFramePr>
+        <p:xfrm>
+          <a:off x="457200" y="1547854"/>
+          <a:ext cx="8229599" cy="2103120"/>
+        </p:xfrm>
+        <a:graphic>
+          <a:graphicData uri="http://schemas.openxmlformats.org/drawingml/2006/table">
+            <a:tbl>
+              <a:tblPr>
+                <a:tableStyleId>{5C22544A-7EE6-4342-B048-85BDC9FD1C3A}</a:tableStyleId>
+              </a:tblPr>
+              <a:tblGrid>
+                <a:gridCol w="952901">
+                  <a:extLst>
+                    <a:ext uri="{9D8B030D-6E8A-4147-A177-3AD203B41FA5}">
+                      <a16:colId xmlns:a16="http://schemas.microsoft.com/office/drawing/2014/main" val="20000"/>
+                    </a:ext>
+                  </a:extLst>
+                </a:gridCol>
+                <a:gridCol w="2165684">
+                  <a:extLst>
+                    <a:ext uri="{9D8B030D-6E8A-4147-A177-3AD203B41FA5}">
+                      <a16:colId xmlns:a16="http://schemas.microsoft.com/office/drawing/2014/main" val="20001"/>
+                    </a:ext>
+                  </a:extLst>
+                </a:gridCol>
+                <a:gridCol w="1386038">
+                  <a:extLst>
+                    <a:ext uri="{9D8B030D-6E8A-4147-A177-3AD203B41FA5}">
+                      <a16:colId xmlns:a16="http://schemas.microsoft.com/office/drawing/2014/main" val="20002"/>
+                    </a:ext>
+                  </a:extLst>
+                </a:gridCol>
+                <a:gridCol w="1169469">
+                  <a:extLst>
+                    <a:ext uri="{9D8B030D-6E8A-4147-A177-3AD203B41FA5}">
+                      <a16:colId xmlns:a16="http://schemas.microsoft.com/office/drawing/2014/main" val="20003"/>
+                    </a:ext>
+                  </a:extLst>
+                </a:gridCol>
+                <a:gridCol w="1169469">
+                  <a:extLst>
+                    <a:ext uri="{9D8B030D-6E8A-4147-A177-3AD203B41FA5}">
+                      <a16:colId xmlns:a16="http://schemas.microsoft.com/office/drawing/2014/main" val="20004"/>
+                    </a:ext>
+                  </a:extLst>
+                </a:gridCol>
+                <a:gridCol w="1386038">
+                  <a:extLst>
+                    <a:ext uri="{9D8B030D-6E8A-4147-A177-3AD203B41FA5}">
+                      <a16:colId xmlns:a16="http://schemas.microsoft.com/office/drawing/2014/main" val="20005"/>
+                    </a:ext>
+                  </a:extLst>
+                </a:gridCol>
+              </a:tblGrid>
+              <a:tr h="420624">
+                <a:tc>
+                  <a:txBody>
+                    <a:bodyPr/>
+                    <a:lstStyle/>
+                    <a:p>
+                      <a:pPr algn="l"/>
+                      <a:r>
+                        <a:rPr sz="950" b="1" i="0" dirty="0">
+                          <a:solidFill>
+                            <a:srgbClr val="FFFFFF"/>
+                          </a:solidFill>
+                          <a:latin typeface="Avenir Next LT Pro Demi"/>
+                        </a:rPr>
+                        <a:t>Ticker</a:t>
+                      </a:r>
+                    </a:p>
+                  </a:txBody>
+                  <a:tcPr marL="73152" marR="73152" marT="18288" marB="18288" anchor="ctr">
+                    <a:solidFill>
+                      <a:srgbClr val="9A7B44"/>
+                    </a:solidFill>
+                  </a:tcPr>
+                </a:tc>
+                <a:tc>
+                  <a:txBody>
+                    <a:bodyPr/>
+                    <a:lstStyle/>
+                    <a:p>
+                      <a:pPr algn="ctr"/>
+                      <a:r>
+                        <a:rPr sz="950" b="1" i="0" dirty="0">
+                          <a:solidFill>
+                            <a:srgbClr val="FFFFFF"/>
+                          </a:solidFill>
+                          <a:latin typeface="Avenir Next LT Pro Demi"/>
+                        </a:rPr>
+                        <a:t>Company</a:t>
+                      </a:r>
+                    </a:p>
+                  </a:txBody>
+                  <a:tcPr marL="73152" marR="73152" marT="18288" marB="18288" anchor="ctr">
+                    <a:solidFill>
+                      <a:srgbClr val="9A7B44"/>
+                    </a:solidFill>
+                  </a:tcPr>
+                </a:tc>
+                <a:tc>
+                  <a:txBody>
+                    <a:bodyPr/>
+                    <a:lstStyle/>
+                    <a:p>
+                      <a:pPr algn="ctr"/>
+                      <a:r>
+                        <a:rPr sz="950" b="1" i="0" dirty="0">
+                          <a:solidFill>
+                            <a:srgbClr val="FFFFFF"/>
+                          </a:solidFill>
+                          <a:latin typeface="Avenir Next LT Pro Demi"/>
+                        </a:rPr>
+                        <a:t>Rev CAGR (3y)</a:t>
+                      </a:r>
+                    </a:p>
+                  </a:txBody>
+                  <a:tcPr marL="73152" marR="73152" marT="18288" marB="18288" anchor="ctr">
+                    <a:solidFill>
+                      <a:srgbClr val="9A7B44"/>
+                    </a:solidFill>
+                  </a:tcPr>
+                </a:tc>
+                <a:tc>
+                  <a:txBody>
+                    <a:bodyPr/>
+                    <a:lstStyle/>
+                    <a:p>
+                      <a:pPr algn="ctr"/>
+                      <a:r>
+                        <a:rPr sz="950" b="1" i="0" dirty="0">
+                          <a:solidFill>
+                            <a:srgbClr val="FFFFFF"/>
+                          </a:solidFill>
+                          <a:latin typeface="Avenir Next LT Pro Demi"/>
+                        </a:rPr>
+                        <a:t>EBITDA </a:t>
+                      </a:r>
+                      <a:r>
+                        <a:rPr sz="950" b="1" i="0" dirty="0" err="1">
+                          <a:solidFill>
+                            <a:srgbClr val="FFFFFF"/>
+                          </a:solidFill>
+                          <a:latin typeface="Avenir Next LT Pro Demi"/>
+                        </a:rPr>
+                        <a:t>Mgn</a:t>
+                      </a:r>
+                      <a:endParaRPr sz="950" b="1" i="0" dirty="0">
+                        <a:solidFill>
+                          <a:srgbClr val="FFFFFF"/>
+                        </a:solidFill>
+                        <a:latin typeface="Avenir Next LT Pro Demi"/>
+                      </a:endParaRPr>
+                    </a:p>
+                  </a:txBody>
+                  <a:tcPr marL="73152" marR="73152" marT="18288" marB="18288" anchor="ctr">
+                    <a:solidFill>
+                      <a:srgbClr val="9A7B44"/>
+                    </a:solidFill>
+                  </a:tcPr>
+                </a:tc>
+                <a:tc>
+                  <a:txBody>
+                    <a:bodyPr/>
+                    <a:lstStyle/>
+                    <a:p>
+                      <a:pPr algn="ctr"/>
+                      <a:r>
+                        <a:rPr sz="950" b="1" i="0" dirty="0">
+                          <a:solidFill>
+                            <a:srgbClr val="FFFFFF"/>
+                          </a:solidFill>
+                          <a:latin typeface="Avenir Next LT Pro Demi"/>
+                        </a:rPr>
+                        <a:t>EV/EBITDA</a:t>
+                      </a:r>
+                    </a:p>
+                  </a:txBody>
+                  <a:tcPr marL="73152" marR="73152" marT="18288" marB="18288" anchor="ctr">
+                    <a:solidFill>
+                      <a:srgbClr val="9A7B44"/>
+                    </a:solidFill>
+                  </a:tcPr>
+                </a:tc>
+                <a:tc>
+                  <a:txBody>
+                    <a:bodyPr/>
+                    <a:lstStyle/>
+                    <a:p>
+                      <a:pPr algn="ctr"/>
+                      <a:r>
+                        <a:rPr sz="950" b="1" i="0" dirty="0">
+                          <a:solidFill>
+                            <a:srgbClr val="FFFFFF"/>
+                          </a:solidFill>
+                          <a:latin typeface="Avenir Next LT Pro Demi"/>
+                        </a:rPr>
+                        <a:t>Status</a:t>
+                      </a:r>
+                    </a:p>
+                  </a:txBody>
+                  <a:tcPr marL="73152" marR="73152" marT="18288" marB="18288" anchor="ctr">
+                    <a:solidFill>
+                      <a:srgbClr val="9A7B44"/>
+                    </a:solidFill>
+                  </a:tcPr>
+                </a:tc>
+                <a:extLst>
+                  <a:ext uri="{0D108BD9-81ED-4DB2-BD59-A6C34878D82A}">
+                    <a16:rowId xmlns:a16="http://schemas.microsoft.com/office/drawing/2014/main" val="10000"/>
+                  </a:ext>
+                </a:extLst>
+              </a:tr>
+              <a:tr h="420624">
+                <a:tc>
+                  <a:txBody>
+                    <a:bodyPr/>
+                    <a:lstStyle/>
+                    <a:p>
+                      <a:pPr algn="l"/>
+                      <a:r>
+                        <a:rPr sz="1050" b="1" i="0" dirty="0">
+                          <a:solidFill>
+                            <a:schemeClr val="tx1"/>
+                          </a:solidFill>
+                          <a:latin typeface="Avenir Next LT Pro Demi"/>
+                        </a:rPr>
+                        <a:t>ARHS</a:t>
+                      </a:r>
+                    </a:p>
+                  </a:txBody>
+                  <a:tcPr marL="73152" marR="73152" marT="18288" marB="18288" anchor="ctr">
+                    <a:solidFill>
+                      <a:srgbClr val="FFFFFF"/>
+                    </a:solidFill>
+                  </a:tcPr>
+                </a:tc>
+                <a:tc>
+                  <a:txBody>
+                    <a:bodyPr/>
+                    <a:lstStyle/>
+                    <a:p>
+                      <a:pPr algn="ctr"/>
+                      <a:r>
+                        <a:rPr sz="1050" b="0" i="0" dirty="0">
+                          <a:solidFill>
+                            <a:schemeClr val="tx1"/>
+                          </a:solidFill>
+                          <a:latin typeface="Avenir Next LT Pro"/>
+                        </a:rPr>
+                        <a:t>Arhaus</a:t>
+                      </a:r>
+                    </a:p>
+                  </a:txBody>
+                  <a:tcPr marL="73152" marR="73152" marT="18288" marB="18288" anchor="ctr">
+                    <a:solidFill>
+                      <a:srgbClr val="FFFFFF"/>
+                    </a:solidFill>
+                  </a:tcPr>
+                </a:tc>
+                <a:tc>
+                  <a:txBody>
+                    <a:bodyPr/>
+                    <a:lstStyle/>
+                    <a:p>
+                      <a:pPr algn="ctr"/>
+                      <a:r>
+                        <a:rPr sz="1050" b="0" i="0">
+                          <a:solidFill>
+                            <a:schemeClr val="tx1"/>
+                          </a:solidFill>
+                          <a:latin typeface="Avenir Next LT Pro"/>
+                        </a:rPr>
+                        <a:t>+11.4%</a:t>
+                      </a:r>
+                    </a:p>
+                  </a:txBody>
+                  <a:tcPr marL="73152" marR="73152" marT="18288" marB="18288" anchor="ctr">
+                    <a:solidFill>
+                      <a:srgbClr val="FFFFFF"/>
+                    </a:solidFill>
+                  </a:tcPr>
+                </a:tc>
+                <a:tc>
+                  <a:txBody>
+                    <a:bodyPr/>
+                    <a:lstStyle/>
+                    <a:p>
+                      <a:pPr algn="ctr"/>
+                      <a:r>
+                        <a:rPr sz="1050" b="0" i="0">
+                          <a:solidFill>
+                            <a:schemeClr val="tx1"/>
+                          </a:solidFill>
+                          <a:latin typeface="Avenir Next LT Pro"/>
+                        </a:rPr>
+                        <a:t>~14%</a:t>
+                      </a:r>
+                    </a:p>
+                  </a:txBody>
+                  <a:tcPr marL="73152" marR="73152" marT="18288" marB="18288" anchor="ctr">
+                    <a:solidFill>
+                      <a:srgbClr val="FFFFFF"/>
+                    </a:solidFill>
+                  </a:tcPr>
+                </a:tc>
+                <a:tc>
+                  <a:txBody>
+                    <a:bodyPr/>
+                    <a:lstStyle/>
+                    <a:p>
+                      <a:pPr algn="ctr"/>
+                      <a:r>
+                        <a:rPr sz="1050" b="0" i="0">
+                          <a:solidFill>
+                            <a:schemeClr val="tx1"/>
+                          </a:solidFill>
+                          <a:latin typeface="Avenir Next LT Pro"/>
+                        </a:rPr>
+                        <a:t>~11×</a:t>
+                      </a:r>
+                    </a:p>
+                  </a:txBody>
+                  <a:tcPr marL="73152" marR="73152" marT="18288" marB="18288" anchor="ctr">
+                    <a:solidFill>
+                      <a:srgbClr val="FFFFFF"/>
+                    </a:solidFill>
+                  </a:tcPr>
+                </a:tc>
+                <a:tc>
+                  <a:txBody>
+                    <a:bodyPr/>
+                    <a:lstStyle/>
+                    <a:p>
+                      <a:pPr algn="ctr"/>
+                      <a:r>
+                        <a:rPr sz="1050" b="0" i="0">
+                          <a:solidFill>
+                            <a:schemeClr val="tx1"/>
+                          </a:solidFill>
+                          <a:latin typeface="Avenir Next LT Pro"/>
+                        </a:rPr>
+                        <a:t>Outperforming</a:t>
+                      </a:r>
+                    </a:p>
+                  </a:txBody>
+                  <a:tcPr marL="73152" marR="73152" marT="18288" marB="18288" anchor="ctr">
+                    <a:solidFill>
+                      <a:srgbClr val="FFFFFF"/>
+                    </a:solidFill>
+                  </a:tcPr>
+                </a:tc>
+                <a:extLst>
+                  <a:ext uri="{0D108BD9-81ED-4DB2-BD59-A6C34878D82A}">
+                    <a16:rowId xmlns:a16="http://schemas.microsoft.com/office/drawing/2014/main" val="10001"/>
+                  </a:ext>
+                </a:extLst>
+              </a:tr>
+              <a:tr h="420624">
+                <a:tc>
+                  <a:txBody>
+                    <a:bodyPr/>
+                    <a:lstStyle/>
+                    <a:p>
+                      <a:pPr algn="l"/>
+                      <a:r>
+                        <a:rPr sz="1050" b="1" i="0">
+                          <a:solidFill>
+                            <a:schemeClr val="tx1"/>
+                          </a:solidFill>
+                          <a:latin typeface="Avenir Next LT Pro Demi"/>
+                        </a:rPr>
+                        <a:t>WSM</a:t>
+                      </a:r>
+                    </a:p>
+                  </a:txBody>
+                  <a:tcPr marL="73152" marR="73152" marT="18288" marB="18288" anchor="ctr">
+                    <a:solidFill>
+                      <a:srgbClr val="F4F6F8"/>
+                    </a:solidFill>
+                  </a:tcPr>
+                </a:tc>
+                <a:tc>
+                  <a:txBody>
+                    <a:bodyPr/>
+                    <a:lstStyle/>
+                    <a:p>
+                      <a:pPr algn="ctr"/>
+                      <a:r>
+                        <a:rPr sz="1050" b="0" i="0" dirty="0">
+                          <a:solidFill>
+                            <a:schemeClr val="tx1"/>
+                          </a:solidFill>
+                          <a:latin typeface="Avenir Next LT Pro"/>
+                        </a:rPr>
+                        <a:t>Williams-Sonoma</a:t>
+                      </a:r>
+                    </a:p>
+                  </a:txBody>
+                  <a:tcPr marL="73152" marR="73152" marT="18288" marB="18288" anchor="ctr">
+                    <a:solidFill>
+                      <a:srgbClr val="F4F6F8"/>
+                    </a:solidFill>
+                  </a:tcPr>
+                </a:tc>
+                <a:tc>
+                  <a:txBody>
+                    <a:bodyPr/>
+                    <a:lstStyle/>
+                    <a:p>
+                      <a:pPr algn="ctr"/>
+                      <a:r>
+                        <a:rPr sz="1050" b="0" i="0" dirty="0">
+                          <a:solidFill>
+                            <a:schemeClr val="tx1"/>
+                          </a:solidFill>
+                          <a:latin typeface="Avenir Next LT Pro"/>
+                        </a:rPr>
+                        <a:t>+7.2%</a:t>
+                      </a:r>
+                    </a:p>
+                  </a:txBody>
+                  <a:tcPr marL="73152" marR="73152" marT="18288" marB="18288" anchor="ctr">
+                    <a:solidFill>
+                      <a:srgbClr val="F4F6F8"/>
+                    </a:solidFill>
+                  </a:tcPr>
+                </a:tc>
+                <a:tc>
+                  <a:txBody>
+                    <a:bodyPr/>
+                    <a:lstStyle/>
+                    <a:p>
+                      <a:pPr algn="ctr"/>
+                      <a:r>
+                        <a:rPr sz="1050" b="0" i="0">
+                          <a:solidFill>
+                            <a:schemeClr val="tx1"/>
+                          </a:solidFill>
+                          <a:latin typeface="Avenir Next LT Pro"/>
+                        </a:rPr>
+                        <a:t>~18%</a:t>
+                      </a:r>
+                    </a:p>
+                  </a:txBody>
+                  <a:tcPr marL="73152" marR="73152" marT="18288" marB="18288" anchor="ctr">
+                    <a:solidFill>
+                      <a:srgbClr val="F4F6F8"/>
+                    </a:solidFill>
+                  </a:tcPr>
+                </a:tc>
+                <a:tc>
+                  <a:txBody>
+                    <a:bodyPr/>
+                    <a:lstStyle/>
+                    <a:p>
+                      <a:pPr algn="ctr"/>
+                      <a:r>
+                        <a:rPr sz="1050" b="0" i="0">
+                          <a:solidFill>
+                            <a:schemeClr val="tx1"/>
+                          </a:solidFill>
+                          <a:latin typeface="Avenir Next LT Pro"/>
+                        </a:rPr>
+                        <a:t>~15×</a:t>
+                      </a:r>
+                    </a:p>
+                  </a:txBody>
+                  <a:tcPr marL="73152" marR="73152" marT="18288" marB="18288" anchor="ctr">
+                    <a:solidFill>
+                      <a:srgbClr val="F4F6F8"/>
+                    </a:solidFill>
+                  </a:tcPr>
+                </a:tc>
+                <a:tc>
+                  <a:txBody>
+                    <a:bodyPr/>
+                    <a:lstStyle/>
+                    <a:p>
+                      <a:pPr algn="ctr"/>
+                      <a:r>
+                        <a:rPr sz="1050" b="0" i="0">
+                          <a:solidFill>
+                            <a:schemeClr val="tx1"/>
+                          </a:solidFill>
+                          <a:latin typeface="Avenir Next LT Pro"/>
+                        </a:rPr>
+                        <a:t>Outperforming</a:t>
+                      </a:r>
+                    </a:p>
+                  </a:txBody>
+                  <a:tcPr marL="73152" marR="73152" marT="18288" marB="18288" anchor="ctr">
+                    <a:solidFill>
+                      <a:srgbClr val="F4F6F8"/>
+                    </a:solidFill>
+                  </a:tcPr>
+                </a:tc>
+                <a:extLst>
+                  <a:ext uri="{0D108BD9-81ED-4DB2-BD59-A6C34878D82A}">
+                    <a16:rowId xmlns:a16="http://schemas.microsoft.com/office/drawing/2014/main" val="10002"/>
+                  </a:ext>
+                </a:extLst>
+              </a:tr>
+              <a:tr h="420624">
+                <a:tc>
+                  <a:txBody>
+                    <a:bodyPr/>
+                    <a:lstStyle/>
+                    <a:p>
+                      <a:pPr algn="l"/>
+                      <a:r>
+                        <a:rPr sz="1050" b="1" i="0">
+                          <a:solidFill>
+                            <a:schemeClr val="tx1"/>
+                          </a:solidFill>
+                          <a:latin typeface="Avenir Next LT Pro Demi"/>
+                        </a:rPr>
+                        <a:t>RH</a:t>
+                      </a:r>
+                    </a:p>
+                  </a:txBody>
+                  <a:tcPr marL="73152" marR="73152" marT="18288" marB="18288" anchor="ctr">
+                    <a:solidFill>
+                      <a:srgbClr val="FFFFFF"/>
+                    </a:solidFill>
+                  </a:tcPr>
+                </a:tc>
+                <a:tc>
+                  <a:txBody>
+                    <a:bodyPr/>
+                    <a:lstStyle/>
+                    <a:p>
+                      <a:pPr algn="ctr"/>
+                      <a:r>
+                        <a:rPr sz="1050" b="0" i="0">
+                          <a:solidFill>
+                            <a:schemeClr val="tx1"/>
+                          </a:solidFill>
+                          <a:latin typeface="Avenir Next LT Pro"/>
+                        </a:rPr>
+                        <a:t>Restoration Hardware</a:t>
+                      </a:r>
+                    </a:p>
+                  </a:txBody>
+                  <a:tcPr marL="73152" marR="73152" marT="18288" marB="18288" anchor="ctr">
+                    <a:solidFill>
+                      <a:srgbClr val="FFFFFF"/>
+                    </a:solidFill>
+                  </a:tcPr>
+                </a:tc>
+                <a:tc>
+                  <a:txBody>
+                    <a:bodyPr/>
+                    <a:lstStyle/>
+                    <a:p>
+                      <a:pPr algn="ctr"/>
+                      <a:r>
+                        <a:rPr sz="1050" b="0" i="0" dirty="0">
+                          <a:solidFill>
+                            <a:schemeClr val="tx1"/>
+                          </a:solidFill>
+                          <a:latin typeface="Avenir Next LT Pro"/>
+                        </a:rPr>
+                        <a:t>-1.4%</a:t>
+                      </a:r>
+                    </a:p>
+                  </a:txBody>
+                  <a:tcPr marL="73152" marR="73152" marT="18288" marB="18288" anchor="ctr">
+                    <a:solidFill>
+                      <a:srgbClr val="FFFFFF"/>
+                    </a:solidFill>
+                  </a:tcPr>
+                </a:tc>
+                <a:tc>
+                  <a:txBody>
+                    <a:bodyPr/>
+                    <a:lstStyle/>
+                    <a:p>
+                      <a:pPr algn="ctr"/>
+                      <a:r>
+                        <a:rPr sz="1050" b="0" i="0" dirty="0">
+                          <a:solidFill>
+                            <a:schemeClr val="tx1"/>
+                          </a:solidFill>
+                          <a:latin typeface="Avenir Next LT Pro"/>
+                        </a:rPr>
+                        <a:t>~17%</a:t>
+                      </a:r>
+                    </a:p>
+                  </a:txBody>
+                  <a:tcPr marL="73152" marR="73152" marT="18288" marB="18288" anchor="ctr">
+                    <a:solidFill>
+                      <a:srgbClr val="FFFFFF"/>
+                    </a:solidFill>
+                  </a:tcPr>
+                </a:tc>
+                <a:tc>
+                  <a:txBody>
+                    <a:bodyPr/>
+                    <a:lstStyle/>
+                    <a:p>
+                      <a:pPr algn="ctr"/>
+                      <a:r>
+                        <a:rPr sz="1050" b="0" i="0">
+                          <a:solidFill>
+                            <a:schemeClr val="tx1"/>
+                          </a:solidFill>
+                          <a:latin typeface="Avenir Next LT Pro"/>
+                        </a:rPr>
+                        <a:t>~9.3×</a:t>
+                      </a:r>
+                    </a:p>
+                  </a:txBody>
+                  <a:tcPr marL="73152" marR="73152" marT="18288" marB="18288" anchor="ctr">
+                    <a:solidFill>
+                      <a:srgbClr val="FFFFFF"/>
+                    </a:solidFill>
+                  </a:tcPr>
+                </a:tc>
+                <a:tc>
+                  <a:txBody>
+                    <a:bodyPr/>
+                    <a:lstStyle/>
+                    <a:p>
+                      <a:pPr algn="ctr"/>
+                      <a:r>
+                        <a:rPr sz="1050" b="0" i="0">
+                          <a:solidFill>
+                            <a:schemeClr val="tx1"/>
+                          </a:solidFill>
+                          <a:latin typeface="Avenir Next LT Pro"/>
+                        </a:rPr>
+                        <a:t>At Trough</a:t>
+                      </a:r>
+                    </a:p>
+                  </a:txBody>
+                  <a:tcPr marL="73152" marR="73152" marT="18288" marB="18288" anchor="ctr">
+                    <a:solidFill>
+                      <a:srgbClr val="FFFFFF"/>
+                    </a:solidFill>
+                  </a:tcPr>
+                </a:tc>
+                <a:extLst>
+                  <a:ext uri="{0D108BD9-81ED-4DB2-BD59-A6C34878D82A}">
+                    <a16:rowId xmlns:a16="http://schemas.microsoft.com/office/drawing/2014/main" val="10003"/>
+                  </a:ext>
+                </a:extLst>
+              </a:tr>
+              <a:tr h="420624">
+                <a:tc>
+                  <a:txBody>
+                    <a:bodyPr/>
+                    <a:lstStyle/>
+                    <a:p>
+                      <a:pPr algn="l"/>
+                      <a:r>
+                        <a:rPr sz="1050" b="1" i="0">
+                          <a:solidFill>
+                            <a:schemeClr val="tx1"/>
+                          </a:solidFill>
+                          <a:latin typeface="Avenir Next LT Pro Demi"/>
+                        </a:rPr>
+                        <a:t>W</a:t>
+                      </a:r>
+                    </a:p>
+                  </a:txBody>
+                  <a:tcPr marL="73152" marR="73152" marT="18288" marB="18288" anchor="ctr">
+                    <a:solidFill>
+                      <a:srgbClr val="F4F6F8"/>
+                    </a:solidFill>
+                  </a:tcPr>
+                </a:tc>
+                <a:tc>
+                  <a:txBody>
+                    <a:bodyPr/>
+                    <a:lstStyle/>
+                    <a:p>
+                      <a:pPr algn="ctr"/>
+                      <a:r>
+                        <a:rPr sz="1050" b="0" i="0">
+                          <a:solidFill>
+                            <a:schemeClr val="tx1"/>
+                          </a:solidFill>
+                          <a:latin typeface="Avenir Next LT Pro"/>
+                        </a:rPr>
+                        <a:t>Wayfair</a:t>
+                      </a:r>
+                    </a:p>
+                  </a:txBody>
+                  <a:tcPr marL="73152" marR="73152" marT="18288" marB="18288" anchor="ctr">
+                    <a:solidFill>
+                      <a:srgbClr val="F4F6F8"/>
+                    </a:solidFill>
+                  </a:tcPr>
+                </a:tc>
+                <a:tc>
+                  <a:txBody>
+                    <a:bodyPr/>
+                    <a:lstStyle/>
+                    <a:p>
+                      <a:pPr algn="ctr"/>
+                      <a:r>
+                        <a:rPr sz="1050" b="0" i="0">
+                          <a:solidFill>
+                            <a:schemeClr val="tx1"/>
+                          </a:solidFill>
+                          <a:latin typeface="Avenir Next LT Pro"/>
+                        </a:rPr>
+                        <a:t>-8.3%</a:t>
+                      </a:r>
+                    </a:p>
+                  </a:txBody>
+                  <a:tcPr marL="73152" marR="73152" marT="18288" marB="18288" anchor="ctr">
+                    <a:solidFill>
+                      <a:srgbClr val="F4F6F8"/>
+                    </a:solidFill>
+                  </a:tcPr>
+                </a:tc>
+                <a:tc>
+                  <a:txBody>
+                    <a:bodyPr/>
+                    <a:lstStyle/>
+                    <a:p>
+                      <a:pPr algn="ctr"/>
+                      <a:r>
+                        <a:rPr sz="1050" b="0" i="0">
+                          <a:solidFill>
+                            <a:schemeClr val="tx1"/>
+                          </a:solidFill>
+                          <a:latin typeface="Avenir Next LT Pro"/>
+                        </a:rPr>
+                        <a:t>~1%</a:t>
+                      </a:r>
+                    </a:p>
+                  </a:txBody>
+                  <a:tcPr marL="73152" marR="73152" marT="18288" marB="18288" anchor="ctr">
+                    <a:solidFill>
+                      <a:srgbClr val="F4F6F8"/>
+                    </a:solidFill>
+                  </a:tcPr>
+                </a:tc>
+                <a:tc>
+                  <a:txBody>
+                    <a:bodyPr/>
+                    <a:lstStyle/>
+                    <a:p>
+                      <a:pPr algn="ctr"/>
+                      <a:r>
+                        <a:rPr sz="1050" b="0" i="0" dirty="0">
+                          <a:solidFill>
+                            <a:schemeClr val="tx1"/>
+                          </a:solidFill>
+                          <a:latin typeface="Avenir Next LT Pro"/>
+                        </a:rPr>
+                        <a:t>NM</a:t>
+                      </a:r>
+                    </a:p>
+                  </a:txBody>
+                  <a:tcPr marL="73152" marR="73152" marT="18288" marB="18288" anchor="ctr">
+                    <a:solidFill>
+                      <a:srgbClr val="F4F6F8"/>
+                    </a:solidFill>
+                  </a:tcPr>
+                </a:tc>
+                <a:tc>
+                  <a:txBody>
+                    <a:bodyPr/>
+                    <a:lstStyle/>
+                    <a:p>
+                      <a:pPr algn="ctr"/>
+                      <a:r>
+                        <a:rPr sz="1050" b="0" i="0" dirty="0">
+                          <a:solidFill>
+                            <a:schemeClr val="tx1"/>
+                          </a:solidFill>
+                          <a:latin typeface="Avenir Next LT Pro"/>
+                        </a:rPr>
+                        <a:t>Underperforming</a:t>
+                      </a:r>
+                    </a:p>
+                  </a:txBody>
+                  <a:tcPr marL="73152" marR="73152" marT="18288" marB="18288" anchor="ctr">
+                    <a:solidFill>
+                      <a:srgbClr val="F4F6F8"/>
+                    </a:solidFill>
+                  </a:tcPr>
+                </a:tc>
+                <a:extLst>
+                  <a:ext uri="{0D108BD9-81ED-4DB2-BD59-A6C34878D82A}">
+                    <a16:rowId xmlns:a16="http://schemas.microsoft.com/office/drawing/2014/main" val="10004"/>
+                  </a:ext>
+                </a:extLst>
+              </a:tr>
+            </a:tbl>
+          </a:graphicData>
+        </a:graphic>
+      </p:graphicFrame>
+      <p:sp>
+        <p:nvSpPr>
+          <p:cNvPr id="7" name="TextBox 6"/>
+          <p:cNvSpPr txBox="1"/>
+          <p:nvPr/>
+        </p:nvSpPr>
+        <p:spPr>
+          <a:xfrm>
+            <a:off x="457200" y="3749039"/>
+            <a:ext cx="8229600" cy="415498"/>
+          </a:xfrm>
+          <a:prstGeom prst="rect">
+            <a:avLst/>
+          </a:prstGeom>
+          <a:noFill/>
+          <a:ln>
+            <a:noFill/>
+          </a:ln>
+        </p:spPr>
+        <p:txBody>
+          <a:bodyPr wrap="square">
+            <a:spAutoFit/>
+          </a:bodyPr>
+          <a:lstStyle/>
+          <a:p>
+            <a:r>
+              <a:rPr sz="1100" b="1" i="0" dirty="0">
+                <a:solidFill/>
+                <a:latin typeface="Avenir Next LT Pro Demi"/>
+              </a:rPr>
+              <a:t>The real competitor is Arhaus, not European luxury.</a:t>
+            </a:r>
+          </a:p>
+          <a:p>
+            <a:r>
+              <a:rPr sz="1000" b="0" i="0" dirty="0">
+                <a:solidFill/>
+                <a:latin typeface="Avenir Next LT Pro"/>
+              </a:rPr>
+              <a:t>RH's negative CAGR is self-inflicted + housing — not lost share. Estates moves RH up, out of Arhaus's tier</a:t>
+            </a:r>
+            <a:endParaRPr sz="1000" b="0" i="0" dirty="0">
+              <a:solidFill>
+                <a:srgbClr val="5A5A5A"/>
+              </a:solidFill>
+              <a:latin typeface="Avenir Next LT Pro"/>
+            </a:endParaRPr>
+          </a:p>
+        </p:txBody>
+      </p:sp>
+    </p:spTree>
+  </p:cSld>
+  <p:clrMapOvr>
+    <a:masterClrMapping/>
+  </p:clrMapOvr>
+</p:sld>
+</file>
+
+<file path=ppt/slides/slide16.xml><?xml version="1.0" encoding="utf-8"?>
+<p:sld xmlns:a="http://schemas.openxmlformats.org/drawingml/2006/main" xmlns:r="http://schemas.openxmlformats.org/officeDocument/2006/relationships" xmlns:p="http://schemas.openxmlformats.org/presentationml/2006/main">
+  <p:cSld>
+    <p:spTree>
+      <p:nvGrpSpPr>
+        <p:cNvPr id="1" name=""/>
+        <p:cNvGrpSpPr/>
+        <p:nvPr/>
+      </p:nvGrpSpPr>
+      <p:grpSpPr>
+        <a:xfrm>
+          <a:off x="0" y="0"/>
+          <a:ext cx="0" cy="0"/>
+          <a:chOff x="0" y="0"/>
+          <a:chExt cx="0" cy="0"/>
+        </a:xfrm>
+      </p:grpSpPr>
+      <p:sp>
+        <p:nvSpPr>
+          <p:cNvPr id="2" name="TextBox 1"/>
+          <p:cNvSpPr txBox="1"/>
+          <p:nvPr/>
+        </p:nvSpPr>
+        <p:spPr>
+          <a:xfrm>
+            <a:off x="457198" y="274320"/>
+            <a:ext cx="8229600" cy="446276"/>
+          </a:xfrm>
+          <a:prstGeom prst="rect">
+            <a:avLst/>
+          </a:prstGeom>
+          <a:noFill/>
+          <a:ln>
+            <a:noFill/>
+          </a:ln>
+        </p:spPr>
+        <p:txBody>
+          <a:bodyPr wrap="square">
+            <a:spAutoFit/>
+          </a:bodyPr>
+          <a:lstStyle/>
+          <a:p>
+            <a:r>
+              <a:rPr sz="2300" b="0" i="0" dirty="0">
+                <a:solidFill/>
+                <a:latin typeface="Avenir Next LT Pro Demi"/>
+              </a:rPr>
+              <a:t>Key Risks — What Has to Go Wrong</a:t>
+            </a:r>
+          </a:p>
+        </p:txBody>
+      </p:sp>
+      <p:sp>
+        <p:nvSpPr>
+          <p:cNvPr id="5" name="TextBox 4"/>
+          <p:cNvSpPr txBox="1"/>
+          <p:nvPr/>
+        </p:nvSpPr>
+        <p:spPr>
+          <a:xfrm>
+            <a:off x="457200" y="1051560"/>
+            <a:ext cx="8229600" cy="274320"/>
+          </a:xfrm>
+          <a:prstGeom prst="rect">
+            <a:avLst/>
+          </a:prstGeom>
+          <a:noFill/>
+          <a:ln>
+            <a:noFill/>
+          </a:ln>
+        </p:spPr>
+        <p:txBody>
+          <a:bodyPr wrap="none">
+            <a:spAutoFit/>
+          </a:bodyPr>
+          <a:lstStyle/>
+          <a:p>
+            <a:r>
+              <a:rPr sz="900" b="0" i="1">
+                <a:solidFill>
+                  <a:srgbClr val="B0B0B0"/>
+                </a:solidFill>
+                <a:latin typeface="Avenir Next LT Pro"/>
+              </a:rPr>
+              <a:t>[ narrative / commentary to be written ]</a:t>
+            </a:r>
+          </a:p>
+        </p:txBody>
+      </p:sp>
+      <p:sp>
+        <p:nvSpPr>
+          <p:cNvPr id="6" name="Rectangle 5"/>
+          <p:cNvSpPr/>
+          <p:nvPr/>
+        </p:nvSpPr>
+        <p:spPr>
+          <a:xfrm>
+            <a:off x="457200" y="1554480"/>
+            <a:ext cx="3977639" cy="960120"/>
+          </a:xfrm>
+          <a:prstGeom prst="rect">
+            <a:avLst/>
+          </a:prstGeom>
+          <a:solidFill>
+            <a:srgbClr val="FFFFFF"/>
+          </a:solidFill>
+          <a:ln w="12700">
+            <a:solidFill>
+              <a:srgbClr val="E8E8E8"/>
+            </a:solidFill>
+          </a:ln>
+        </p:spPr>
+        <p:style>
+          <a:lnRef idx="1">
+            <a:schemeClr val="accent1"/>
+          </a:lnRef>
+          <a:fillRef idx="3">
+            <a:schemeClr val="accent1"/>
+          </a:fillRef>
+          <a:effectRef idx="2">
+            <a:schemeClr val="accent1"/>
+          </a:effectRef>
+          <a:fontRef idx="minor">
+            <a:schemeClr val="lt1"/>
+          </a:fontRef>
+        </p:style>
+        <p:txBody>
+          <a:bodyPr wrap="square" lIns="182880" rtlCol="0" anchor="ctr"/>
+          <a:lstStyle/>
+          <a:p>
+            <a:pPr algn="ctr"/>
+            <a:r>
+              <a:rPr sz="1200" b="1" i="0" dirty="0">
+                <a:solidFill>
+                  <a:srgbClr val="0E2841"/>
+                </a:solidFill>
+                <a:latin typeface="Avenir Next LT Pro Demi"/>
+              </a:rPr>
+              <a:t>Housing stays depressed through 2027</a:t>
+            </a:r>
+          </a:p>
+          <a:p>
+            <a:r>
+              <a:rPr sz="950" b="1" i="0" dirty="0">
+                <a:solidFill>
+                  <a:srgbClr val="B03030"/>
+                </a:solidFill>
+                <a:latin typeface="Avenir Next LT Pro"/>
+              </a:rPr>
+              <a:t>Severity: HIGH   ·   Probability:</a:t>
+            </a:r>
+          </a:p>
+        </p:txBody>
+      </p:sp>
+      <p:sp>
+        <p:nvSpPr>
+          <p:cNvPr id="7" name="Rectangle 6"/>
+          <p:cNvSpPr/>
+          <p:nvPr/>
+        </p:nvSpPr>
+        <p:spPr>
+          <a:xfrm>
+            <a:off x="457200" y="1554480"/>
+            <a:ext cx="73152" cy="960120"/>
+          </a:xfrm>
+          <a:prstGeom prst="rect">
+            <a:avLst/>
+          </a:prstGeom>
+          <a:solidFill>
+            <a:srgbClr val="B03030"/>
+          </a:solidFill>
+          <a:ln>
+            <a:solidFill/>
+          </a:ln>
+        </p:spPr>
+        <p:style>
+          <a:lnRef idx="1">
+            <a:schemeClr val="accent1"/>
+          </a:lnRef>
+          <a:fillRef idx="3">
+            <a:schemeClr val="accent1"/>
+          </a:fillRef>
+          <a:effectRef idx="2">
+            <a:schemeClr val="accent1"/>
+          </a:effectRef>
+          <a:fontRef idx="minor">
+            <a:schemeClr val="lt1"/>
+          </a:fontRef>
+        </p:style>
+        <p:txBody>
+          <a:bodyPr rtlCol="0" anchor="ctr"/>
+          <a:lstStyle/>
+          <a:p>
+            <a:pPr algn="ctr"/>
+            <a:endParaRPr/>
+          </a:p>
+        </p:txBody>
+      </p:sp>
+      <p:sp>
+        <p:nvSpPr>
+          <p:cNvPr id="8" name="Rectangle 7"/>
+          <p:cNvSpPr/>
+          <p:nvPr/>
+        </p:nvSpPr>
+        <p:spPr>
+          <a:xfrm>
+            <a:off x="4709159" y="1554480"/>
+            <a:ext cx="3977639" cy="960120"/>
+          </a:xfrm>
+          <a:prstGeom prst="rect">
+            <a:avLst/>
+          </a:prstGeom>
+          <a:solidFill>
+            <a:srgbClr val="FFFFFF"/>
+          </a:solidFill>
+          <a:ln w="12700">
+            <a:solidFill>
+              <a:srgbClr val="E8E8E8"/>
+            </a:solidFill>
+          </a:ln>
+        </p:spPr>
+        <p:style>
+          <a:lnRef idx="1">
+            <a:schemeClr val="accent1"/>
+          </a:lnRef>
+          <a:fillRef idx="3">
+            <a:schemeClr val="accent1"/>
+          </a:fillRef>
+          <a:effectRef idx="2">
+            <a:schemeClr val="accent1"/>
+          </a:effectRef>
+          <a:fontRef idx="minor">
+            <a:schemeClr val="lt1"/>
+          </a:fontRef>
+        </p:style>
+        <p:txBody>
+          <a:bodyPr wrap="square" lIns="182880" rtlCol="0" anchor="ctr"/>
+          <a:lstStyle/>
+          <a:p>
+            <a:pPr algn="ctr"/>
+            <a:r>
+              <a:rPr sz="1200" b="1" i="0" dirty="0">
+                <a:solidFill>
+                  <a:srgbClr val="0E2841"/>
+                </a:solidFill>
+                <a:latin typeface="Avenir Next LT Pro Demi"/>
+              </a:rPr>
+              <a:t>Balance-sheet stress — ~4.0× levered, ~$225M/yr interest</a:t>
+            </a:r>
+          </a:p>
+          <a:p>
+            <a:r>
+              <a:rPr sz="950" b="1" i="0" dirty="0">
+                <a:solidFill>
+                  <a:srgbClr val="B03030"/>
+                </a:solidFill>
+                <a:latin typeface="Avenir Next LT Pro"/>
+              </a:rPr>
+              <a:t>Severity: HIGH   ·   Probability:</a:t>
+            </a:r>
+          </a:p>
+        </p:txBody>
+      </p:sp>
+      <p:sp>
+        <p:nvSpPr>
+          <p:cNvPr id="9" name="Rectangle 8"/>
+          <p:cNvSpPr/>
+          <p:nvPr/>
+        </p:nvSpPr>
+        <p:spPr>
+          <a:xfrm>
+            <a:off x="4709159" y="1554480"/>
+            <a:ext cx="73152" cy="960120"/>
+          </a:xfrm>
+          <a:prstGeom prst="rect">
+            <a:avLst/>
+          </a:prstGeom>
+          <a:solidFill>
+            <a:srgbClr val="B03030"/>
+          </a:solidFill>
+          <a:ln>
+            <a:solidFill/>
+          </a:ln>
+        </p:spPr>
+        <p:style>
+          <a:lnRef idx="1">
+            <a:schemeClr val="accent1"/>
+          </a:lnRef>
+          <a:fillRef idx="3">
+            <a:schemeClr val="accent1"/>
+          </a:fillRef>
+          <a:effectRef idx="2">
+            <a:schemeClr val="accent1"/>
+          </a:effectRef>
+          <a:fontRef idx="minor">
+            <a:schemeClr val="lt1"/>
+          </a:fontRef>
+        </p:style>
+        <p:txBody>
+          <a:bodyPr rtlCol="0" anchor="ctr"/>
+          <a:lstStyle/>
+          <a:p>
+            <a:pPr algn="ctr"/>
+            <a:endParaRPr/>
+          </a:p>
+        </p:txBody>
+      </p:sp>
+      <p:sp>
+        <p:nvSpPr>
+          <p:cNvPr id="10" name="Rectangle 9"/>
+          <p:cNvSpPr/>
+          <p:nvPr/>
+        </p:nvSpPr>
+        <p:spPr>
+          <a:xfrm>
+            <a:off x="457200" y="2679191"/>
+            <a:ext cx="3977639" cy="960120"/>
+          </a:xfrm>
+          <a:prstGeom prst="rect">
+            <a:avLst/>
+          </a:prstGeom>
+          <a:solidFill>
+            <a:srgbClr val="FFFFFF"/>
+          </a:solidFill>
+          <a:ln w="12700">
+            <a:solidFill>
+              <a:srgbClr val="E8E8E8"/>
+            </a:solidFill>
+          </a:ln>
+        </p:spPr>
+        <p:style>
+          <a:lnRef idx="1">
+            <a:schemeClr val="accent1"/>
+          </a:lnRef>
+          <a:fillRef idx="3">
+            <a:schemeClr val="accent1"/>
+          </a:fillRef>
+          <a:effectRef idx="2">
+            <a:schemeClr val="accent1"/>
+          </a:effectRef>
+          <a:fontRef idx="minor">
+            <a:schemeClr val="lt1"/>
+          </a:fontRef>
+        </p:style>
+        <p:txBody>
+          <a:bodyPr wrap="square" lIns="182880" rtlCol="0" anchor="ctr"/>
+          <a:lstStyle/>
+          <a:p>
+            <a:pPr algn="ctr"/>
+            <a:r>
+              <a:rPr sz="1200" b="1" i="0" dirty="0">
+                <a:solidFill>
+                  <a:srgbClr val="0E2841"/>
+                </a:solidFill>
+                <a:latin typeface="Avenir Next LT Pro Demi"/>
+              </a:rPr>
+              <a:t>International execution failure</a:t>
+            </a:r>
+          </a:p>
+          <a:p>
+            <a:r>
+              <a:rPr sz="950" b="1" i="0" dirty="0">
+                <a:solidFill>
+                  <a:srgbClr val="C88A12"/>
+                </a:solidFill>
+                <a:latin typeface="Avenir Next LT Pro"/>
+              </a:rPr>
+              <a:t>Severity: MED   ·   Probability:</a:t>
+            </a:r>
+          </a:p>
+        </p:txBody>
+      </p:sp>
+      <p:sp>
+        <p:nvSpPr>
+          <p:cNvPr id="11" name="Rectangle 10"/>
+          <p:cNvSpPr/>
+          <p:nvPr/>
+        </p:nvSpPr>
+        <p:spPr>
+          <a:xfrm>
+            <a:off x="457200" y="2679191"/>
+            <a:ext cx="73152" cy="960120"/>
+          </a:xfrm>
+          <a:prstGeom prst="rect">
+            <a:avLst/>
+          </a:prstGeom>
+          <a:solidFill>
+            <a:srgbClr val="C88A12"/>
+          </a:solidFill>
+          <a:ln>
+            <a:solidFill/>
+          </a:ln>
+        </p:spPr>
+        <p:style>
+          <a:lnRef idx="1">
+            <a:schemeClr val="accent1"/>
+          </a:lnRef>
+          <a:fillRef idx="3">
+            <a:schemeClr val="accent1"/>
+          </a:fillRef>
+          <a:effectRef idx="2">
+            <a:schemeClr val="accent1"/>
+          </a:effectRef>
+          <a:fontRef idx="minor">
+            <a:schemeClr val="lt1"/>
+          </a:fontRef>
+        </p:style>
+        <p:txBody>
+          <a:bodyPr rtlCol="0" anchor="ctr"/>
+          <a:lstStyle/>
+          <a:p>
+            <a:pPr algn="ctr"/>
+            <a:endParaRPr/>
+          </a:p>
+        </p:txBody>
+      </p:sp>
+      <p:sp>
+        <p:nvSpPr>
+          <p:cNvPr id="12" name="Rectangle 11"/>
+          <p:cNvSpPr/>
+          <p:nvPr/>
+        </p:nvSpPr>
+        <p:spPr>
+          <a:xfrm>
+            <a:off x="4709159" y="2679191"/>
+            <a:ext cx="3977639" cy="960120"/>
+          </a:xfrm>
+          <a:prstGeom prst="rect">
+            <a:avLst/>
+          </a:prstGeom>
+          <a:solidFill>
+            <a:srgbClr val="FFFFFF"/>
+          </a:solidFill>
+          <a:ln w="12700">
+            <a:solidFill>
+              <a:srgbClr val="E8E8E8"/>
+            </a:solidFill>
+          </a:ln>
+        </p:spPr>
+        <p:style>
+          <a:lnRef idx="1">
+            <a:schemeClr val="accent1"/>
+          </a:lnRef>
+          <a:fillRef idx="3">
+            <a:schemeClr val="accent1"/>
+          </a:fillRef>
+          <a:effectRef idx="2">
+            <a:schemeClr val="accent1"/>
+          </a:effectRef>
+          <a:fontRef idx="minor">
+            <a:schemeClr val="lt1"/>
+          </a:fontRef>
+        </p:style>
+        <p:txBody>
+          <a:bodyPr wrap="square" lIns="182880" rtlCol="0" anchor="ctr"/>
+          <a:lstStyle/>
+          <a:p>
+            <a:pPr algn="ctr"/>
+            <a:r>
+              <a:rPr sz="1200" b="1" i="0" dirty="0">
+                <a:solidFill>
+                  <a:srgbClr val="0E2841"/>
+                </a:solidFill>
+                <a:latin typeface="Avenir Next LT Pro Demi"/>
+              </a:rPr>
+              <a:t>Tariff / supply-chain disruption</a:t>
+            </a:r>
+          </a:p>
+          <a:p>
+            <a:r>
+              <a:rPr sz="950" b="1" i="0" dirty="0">
+                <a:solidFill>
+                  <a:srgbClr val="C88A12"/>
+                </a:solidFill>
+                <a:latin typeface="Avenir Next LT Pro"/>
+              </a:rPr>
+              <a:t>Severity: MED   ·   Probability:</a:t>
+            </a:r>
+          </a:p>
+        </p:txBody>
+      </p:sp>
+      <p:sp>
+        <p:nvSpPr>
+          <p:cNvPr id="13" name="Rectangle 12"/>
+          <p:cNvSpPr/>
+          <p:nvPr/>
+        </p:nvSpPr>
+        <p:spPr>
+          <a:xfrm>
+            <a:off x="4709159" y="2679191"/>
+            <a:ext cx="73152" cy="960120"/>
+          </a:xfrm>
+          <a:prstGeom prst="rect">
+            <a:avLst/>
+          </a:prstGeom>
+          <a:solidFill>
+            <a:srgbClr val="C88A12"/>
+          </a:solidFill>
+          <a:ln>
+            <a:solidFill/>
+          </a:ln>
+        </p:spPr>
+        <p:style>
+          <a:lnRef idx="1">
+            <a:schemeClr val="accent1"/>
+          </a:lnRef>
+          <a:fillRef idx="3">
+            <a:schemeClr val="accent1"/>
+          </a:fillRef>
+          <a:effectRef idx="2">
+            <a:schemeClr val="accent1"/>
+          </a:effectRef>
+          <a:fontRef idx="minor">
+            <a:schemeClr val="lt1"/>
+          </a:fontRef>
+        </p:style>
+        <p:txBody>
+          <a:bodyPr rtlCol="0" anchor="ctr"/>
+          <a:lstStyle/>
+          <a:p>
+            <a:pPr algn="ctr"/>
+            <a:endParaRPr/>
+          </a:p>
+        </p:txBody>
+      </p:sp>
+      <p:sp>
+        <p:nvSpPr>
+          <p:cNvPr id="14" name="Rectangle 13"/>
+          <p:cNvSpPr/>
+          <p:nvPr/>
+        </p:nvSpPr>
+        <p:spPr>
+          <a:xfrm>
+            <a:off x="457200" y="3803904"/>
+            <a:ext cx="3977639" cy="960120"/>
+          </a:xfrm>
+          <a:prstGeom prst="rect">
+            <a:avLst/>
+          </a:prstGeom>
+          <a:solidFill>
+            <a:srgbClr val="FFFFFF"/>
+          </a:solidFill>
+          <a:ln w="12700">
+            <a:solidFill>
+              <a:srgbClr val="E8E8E8"/>
+            </a:solidFill>
+          </a:ln>
+        </p:spPr>
+        <p:style>
+          <a:lnRef idx="1">
+            <a:schemeClr val="accent1"/>
+          </a:lnRef>
+          <a:fillRef idx="3">
+            <a:schemeClr val="accent1"/>
+          </a:fillRef>
+          <a:effectRef idx="2">
+            <a:schemeClr val="accent1"/>
+          </a:effectRef>
+          <a:fontRef idx="minor">
+            <a:schemeClr val="lt1"/>
+          </a:fontRef>
+        </p:style>
+        <p:txBody>
+          <a:bodyPr wrap="square" lIns="182880" rtlCol="0" anchor="ctr"/>
+          <a:lstStyle/>
+          <a:p>
+            <a:pPr algn="ctr"/>
+            <a:r>
+              <a:rPr sz="1200" b="1" i="0" dirty="0">
+                <a:solidFill>
+                  <a:srgbClr val="0E2841"/>
+                </a:solidFill>
+                <a:latin typeface="Avenir Next LT Pro Demi"/>
+              </a:rPr>
+              <a:t>Friedman key-man dependency</a:t>
+            </a:r>
+          </a:p>
+          <a:p>
+            <a:r>
+              <a:rPr sz="950" b="1" i="0" dirty="0">
+                <a:solidFill>
+                  <a:srgbClr val="B03030"/>
+                </a:solidFill>
+                <a:latin typeface="Avenir Next LT Pro"/>
+              </a:rPr>
+              <a:t>Severity: HIGH   ·   Probability:</a:t>
+            </a:r>
+          </a:p>
+        </p:txBody>
+      </p:sp>
+      <p:sp>
+        <p:nvSpPr>
+          <p:cNvPr id="15" name="Rectangle 14"/>
+          <p:cNvSpPr/>
+          <p:nvPr/>
+        </p:nvSpPr>
+        <p:spPr>
+          <a:xfrm>
+            <a:off x="457200" y="3803904"/>
+            <a:ext cx="73152" cy="960120"/>
+          </a:xfrm>
+          <a:prstGeom prst="rect">
+            <a:avLst/>
+          </a:prstGeom>
+          <a:solidFill>
+            <a:srgbClr val="B03030"/>
+          </a:solidFill>
+          <a:ln>
+            <a:solidFill/>
+          </a:ln>
+        </p:spPr>
+        <p:style>
+          <a:lnRef idx="1">
+            <a:schemeClr val="accent1"/>
+          </a:lnRef>
+          <a:fillRef idx="3">
+            <a:schemeClr val="accent1"/>
+          </a:fillRef>
+          <a:effectRef idx="2">
+            <a:schemeClr val="accent1"/>
+          </a:effectRef>
+          <a:fontRef idx="minor">
+            <a:schemeClr val="lt1"/>
+          </a:fontRef>
+        </p:style>
+        <p:txBody>
+          <a:bodyPr rtlCol="0" anchor="ctr"/>
+          <a:lstStyle/>
+          <a:p>
+            <a:pPr algn="ctr"/>
+            <a:endParaRPr/>
+          </a:p>
+        </p:txBody>
+      </p:sp>
+      <p:sp>
+        <p:nvSpPr>
+          <p:cNvPr id="16" name="Rectangle 15"/>
+          <p:cNvSpPr/>
+          <p:nvPr/>
+        </p:nvSpPr>
+        <p:spPr>
+          <a:xfrm>
+            <a:off x="4709159" y="3803904"/>
+            <a:ext cx="3977639" cy="960120"/>
+          </a:xfrm>
+          <a:prstGeom prst="rect">
+            <a:avLst/>
+          </a:prstGeom>
+          <a:solidFill>
+            <a:srgbClr val="FFFFFF"/>
+          </a:solidFill>
+          <a:ln w="12700">
+            <a:solidFill>
+              <a:srgbClr val="E8E8E8"/>
+            </a:solidFill>
+          </a:ln>
+        </p:spPr>
+        <p:style>
+          <a:lnRef idx="1">
+            <a:schemeClr val="accent1"/>
+          </a:lnRef>
+          <a:fillRef idx="3">
+            <a:schemeClr val="accent1"/>
+          </a:fillRef>
+          <a:effectRef idx="2">
+            <a:schemeClr val="accent1"/>
+          </a:effectRef>
+          <a:fontRef idx="minor">
+            <a:schemeClr val="lt1"/>
+          </a:fontRef>
+        </p:style>
+        <p:txBody>
+          <a:bodyPr wrap="square" lIns="182880" rtlCol="0" anchor="ctr"/>
+          <a:lstStyle/>
+          <a:p>
+            <a:pPr algn="ctr"/>
+            <a:r>
+              <a:rPr sz="1200" b="1" i="0" dirty="0">
+                <a:solidFill>
+                  <a:srgbClr val="0E2841"/>
+                </a:solidFill>
+                <a:latin typeface="Avenir Next LT Pro Demi"/>
+              </a:rPr>
+              <a:t>Broad consumer / discretionary recession</a:t>
+            </a:r>
+          </a:p>
+          <a:p>
+            <a:r>
+              <a:rPr sz="950" b="1" i="0" dirty="0">
+                <a:solidFill>
+                  <a:srgbClr val="C88A12"/>
+                </a:solidFill>
+                <a:latin typeface="Avenir Next LT Pro"/>
+              </a:rPr>
+              <a:t>Severity: MED   ·   Probability:</a:t>
+            </a:r>
+          </a:p>
+        </p:txBody>
+      </p:sp>
+      <p:sp>
+        <p:nvSpPr>
+          <p:cNvPr id="17" name="Rectangle 16"/>
+          <p:cNvSpPr/>
+          <p:nvPr/>
+        </p:nvSpPr>
+        <p:spPr>
+          <a:xfrm>
+            <a:off x="4709159" y="3803904"/>
+            <a:ext cx="73152" cy="960120"/>
+          </a:xfrm>
+          <a:prstGeom prst="rect">
+            <a:avLst/>
+          </a:prstGeom>
+          <a:solidFill>
+            <a:srgbClr val="C88A12"/>
+          </a:solidFill>
+          <a:ln>
+            <a:solidFill/>
+          </a:ln>
+        </p:spPr>
+        <p:style>
+          <a:lnRef idx="1">
+            <a:schemeClr val="accent1"/>
+          </a:lnRef>
+          <a:fillRef idx="3">
+            <a:schemeClr val="accent1"/>
+          </a:fillRef>
+          <a:effectRef idx="2">
+            <a:schemeClr val="accent1"/>
+          </a:effectRef>
+          <a:fontRef idx="minor">
+            <a:schemeClr val="lt1"/>
+          </a:fontRef>
+        </p:style>
+        <p:txBody>
+          <a:bodyPr rtlCol="0" anchor="ctr"/>
+          <a:lstStyle/>
+          <a:p>
+            <a:pPr algn="ctr"/>
+            <a:endParaRPr/>
+          </a:p>
+        </p:txBody>
+      </p:sp>
+      <p:sp>
+        <p:nvSpPr>
+          <p:cNvPr id="18" name="Rectangle 17"/>
+          <p:cNvSpPr/>
+          <p:nvPr/>
+        </p:nvSpPr>
+        <p:spPr>
+          <a:xfrm>
+            <a:off x="457200" y="4928616"/>
+            <a:ext cx="3977639" cy="960120"/>
+          </a:xfrm>
+          <a:prstGeom prst="rect">
+            <a:avLst/>
+          </a:prstGeom>
+          <a:solidFill>
+            <a:srgbClr val="FFFFFF"/>
+          </a:solidFill>
+          <a:ln w="12700">
+            <a:solidFill>
+              <a:srgbClr val="E8E8E8"/>
+            </a:solidFill>
+          </a:ln>
+        </p:spPr>
+        <p:style>
+          <a:lnRef idx="1">
+            <a:schemeClr val="accent1"/>
+          </a:lnRef>
+          <a:fillRef idx="3">
+            <a:schemeClr val="accent1"/>
+          </a:fillRef>
+          <a:effectRef idx="2">
+            <a:schemeClr val="accent1"/>
+          </a:effectRef>
+          <a:fontRef idx="minor">
+            <a:schemeClr val="lt1"/>
+          </a:fontRef>
+        </p:style>
+        <p:txBody>
+          <a:bodyPr wrap="square" lIns="182880" rtlCol="0" anchor="ctr"/>
+          <a:lstStyle/>
+          <a:p>
+            <a:pPr algn="ctr"/>
+            <a:r>
+              <a:rPr sz="1200" b="1">
+                <a:solidFill>
+                  <a:srgbClr val="0E2841"/>
+                </a:solidFill>
+                <a:latin typeface="Avenir Next LT Pro Demi"/>
+              </a:rPr>
+              <a:t>Fulfillment / delivery execution (moat risk at Estates tier)</a:t>
+            </a:r>
+          </a:p>
+          <a:p>
+            <a:r>
+              <a:rPr sz="950" b="1">
+                <a:solidFill>
+                  <a:srgbClr val="C88A12"/>
+                </a:solidFill>
+                <a:latin typeface="Avenir Next LT Pro"/>
+              </a:rPr>
+              <a:t>Severity: MED   ·   Probability: 30%</a:t>
+            </a:r>
+          </a:p>
+        </p:txBody>
+      </p:sp>
+      <p:sp>
+        <p:nvSpPr>
+          <p:cNvPr id="19" name="Rectangle 18"/>
+          <p:cNvSpPr/>
+          <p:nvPr/>
+        </p:nvSpPr>
+        <p:spPr>
+          <a:xfrm>
+            <a:off x="457200" y="4928616"/>
+            <a:ext cx="73152" cy="960120"/>
+          </a:xfrm>
+          <a:prstGeom prst="rect">
+            <a:avLst/>
+          </a:prstGeom>
+          <a:solidFill>
+            <a:srgbClr val="C88A12"/>
+          </a:solidFill>
+          <a:ln>
+            <a:solidFill/>
+          </a:ln>
+        </p:spPr>
+        <p:style>
+          <a:lnRef idx="1">
+            <a:schemeClr val="accent1"/>
+          </a:lnRef>
+          <a:fillRef idx="3">
+            <a:schemeClr val="accent1"/>
+          </a:fillRef>
+          <a:effectRef idx="2">
+            <a:schemeClr val="accent1"/>
+          </a:effectRef>
+          <a:fontRef idx="minor">
+            <a:schemeClr val="lt1"/>
+          </a:fontRef>
+        </p:style>
+        <p:txBody>
+          <a:bodyPr rtlCol="0" anchor="ctr"/>
+          <a:lstStyle/>
+          <a:p>
+            <a:pPr algn="ctr"/>
+            <a:endParaRPr/>
+          </a:p>
+        </p:txBody>
+      </p:sp>
+    </p:spTree>
+  </p:cSld>
+  <p:clrMapOvr>
+    <a:masterClrMapping/>
+  </p:clrMapOvr>
+</p:sld>
+</file>
+
 <file path=ppt/slides/slide17.xml><?xml version="1.0" encoding="utf-8"?>
+<p:sld xmlns:a="http://schemas.openxmlformats.org/drawingml/2006/main" xmlns:p="http://schemas.openxmlformats.org/presentationml/2006/main" xmlns:r="http://schemas.openxmlformats.org/officeDocument/2006/relationships">
+  <p:cSld>
+    <p:spTree>
+      <p:nvGrpSpPr>
+        <p:cNvPr id="1" name=""/>
+        <p:cNvGrpSpPr/>
+        <p:nvPr/>
+      </p:nvGrpSpPr>
+      <p:grpSpPr/>
+      <p:sp>
+        <p:nvSpPr>
+          <p:cNvPr id="2" name="Title 1"/>
+          <p:cNvSpPr>
+            <a:spLocks noGrp="1"/>
+          </p:cNvSpPr>
+          <p:nvPr>
+            <p:ph type="title"/>
+          </p:nvPr>
+        </p:nvSpPr>
+        <p:spPr/>
+        <p:txBody>
+          <a:bodyPr/>
+          <a:lstStyle/>
+          <a:p>
+            <a:r>
+              <a:t>Appendix</a:t>
+            </a:r>
+          </a:p>
+        </p:txBody>
+      </p:sp>
+    </p:spTree>
+  </p:cSld>
+  <p:clrMapOvr>
+    <a:masterClrMapping/>
+  </p:clrMapOvr>
+</p:sld>
+</file>
+
+<file path=ppt/slides/slide18.xml><?xml version="1.0" encoding="utf-8"?>
 <p:sld xmlns:a="http://schemas.openxmlformats.org/drawingml/2006/main" xmlns:r="http://schemas.openxmlformats.org/officeDocument/2006/relationships" xmlns:p="http://schemas.openxmlformats.org/presentationml/2006/main">
   <p:cSld>
     <p:spTree>
@@ -8871,8 +11345,8 @@
 </p:sld>
 </file>
 
-<file path=ppt/slides/slide18.xml><?xml version="1.0" encoding="utf-8"?>
-<p:sld xmlns:a="http://schemas.openxmlformats.org/drawingml/2006/main" xmlns:r="http://schemas.openxmlformats.org/officeDocument/2006/relationships" xmlns:p="http://schemas.openxmlformats.org/presentationml/2006/main">
+<file path=ppt/slides/slide19.xml><?xml version="1.0" encoding="utf-8"?>
+<p:sld xmlns:a="http://schemas.openxmlformats.org/drawingml/2006/main" xmlns:p="http://schemas.openxmlformats.org/presentationml/2006/main" xmlns:r="http://schemas.openxmlformats.org/officeDocument/2006/relationships">
   <p:cSld>
     <p:spTree>
       <p:nvGrpSpPr>
@@ -8880,90 +11354,7 @@
         <p:cNvGrpSpPr/>
         <p:nvPr/>
       </p:nvGrpSpPr>
-      <p:grpSpPr>
-        <a:xfrm>
-          <a:off x="0" y="0"/>
-          <a:ext cx="0" cy="0"/>
-          <a:chOff x="0" y="0"/>
-          <a:chExt cx="0" cy="0"/>
-        </a:xfrm>
-      </p:grpSpPr>
-      <p:sp>
-        <p:nvSpPr>
-          <p:cNvPr id="2" name="Title 1">
-            <a:extLst>
-              <a:ext uri="{FF2B5EF4-FFF2-40B4-BE49-F238E27FC236}">
-                <a16:creationId xmlns:a16="http://schemas.microsoft.com/office/drawing/2014/main" id="{D640880E-3485-E4DD-E794-98A7729742E7}"/>
-              </a:ext>
-            </a:extLst>
-          </p:cNvPr>
-          <p:cNvSpPr>
-            <a:spLocks noGrp="1"/>
-          </p:cNvSpPr>
-          <p:nvPr>
-            <p:ph type="title"/>
-          </p:nvPr>
-        </p:nvSpPr>
-        <p:spPr>
-          <a:ln>
-            <a:solidFill/>
-          </a:ln>
-        </p:spPr>
-        <p:txBody>
-          <a:bodyPr/>
-          <a:lstStyle/>
-          <a:p>
-            <a:r>
-              <a:rPr lang="en-US">
-                <a:solidFill/>
-              </a:rPr>
-              <a:t>Competitive landscape</a:t>
-            </a:r>
-          </a:p>
-        </p:txBody>
-      </p:sp>
-    </p:spTree>
-    <p:extLst>
-      <p:ext uri="{BB962C8B-B14F-4D97-AF65-F5344CB8AC3E}">
-        <p14:creationId xmlns:p14="http://schemas.microsoft.com/office/powerpoint/2010/main" val="1829529172"/>
-      </p:ext>
-    </p:extLst>
-  </p:cSld>
-  <p:clrMapOvr>
-    <a:masterClrMapping/>
-  </p:clrMapOvr>
-  <mc:AlternateContent xmlns:mc="http://schemas.openxmlformats.org/markup-compatibility/2006" xmlns:p14="http://schemas.microsoft.com/office/powerpoint/2010/main">
-    <mc:Choice Requires="p14">
-      <p:transition spd="med" p14:dur="700">
-        <p:fade/>
-      </p:transition>
-    </mc:Choice>
-    <mc:Fallback xmlns="">
-      <p:transition spd="med">
-        <p:fade/>
-      </p:transition>
-    </mc:Fallback>
-  </mc:AlternateContent>
-</p:sld>
-</file>
-
-<file path=ppt/slides/slide19.xml><?xml version="1.0" encoding="utf-8"?>
-<p:sld xmlns:a="http://schemas.openxmlformats.org/drawingml/2006/main" xmlns:r="http://schemas.openxmlformats.org/officeDocument/2006/relationships" xmlns:p="http://schemas.openxmlformats.org/presentationml/2006/main">
-  <p:cSld>
-    <p:spTree>
-      <p:nvGrpSpPr>
-        <p:cNvPr id="1" name=""/>
-        <p:cNvGrpSpPr/>
-        <p:nvPr/>
-      </p:nvGrpSpPr>
-      <p:grpSpPr>
-        <a:xfrm>
-          <a:off x="0" y="0"/>
-          <a:ext cx="0" cy="0"/>
-          <a:chOff x="0" y="0"/>
-          <a:chExt cx="0" cy="0"/>
-        </a:xfrm>
-      </p:grpSpPr>
+      <p:grpSpPr/>
       <p:sp>
         <p:nvSpPr>
           <p:cNvPr id="2" name="TextBox 1"/>
@@ -8972,8 +11363,8 @@
         </p:nvSpPr>
         <p:spPr>
           <a:xfrm>
-            <a:off x="457200" y="384048"/>
-            <a:ext cx="8229600" cy="446276"/>
+            <a:off x="457200" y="365760"/>
+            <a:ext cx="8229600" cy="548640"/>
           </a:xfrm>
           <a:prstGeom prst="rect">
             <a:avLst/>
@@ -8990,24 +11381,774 @@
           <a:lstStyle/>
           <a:p>
             <a:r>
-              <a:rPr sz="2300" b="0" i="0" dirty="0">
-                <a:solidFill/>
+              <a:rPr sz="2100">
+                <a:solidFill>
+                  <a:srgbClr val="000000"/>
+                </a:solidFill>
                 <a:latin typeface="Avenir Next LT Pro Demi"/>
               </a:rPr>
-              <a:t>Competitive Landscape</a:t>
+              <a:t>Company Background — RH at a Glance</a:t>
             </a:r>
           </a:p>
         </p:txBody>
       </p:sp>
       <p:sp>
         <p:nvSpPr>
-          <p:cNvPr id="5" name="TextBox 4"/>
+          <p:cNvPr id="3" name="Rectangle 2"/>
+          <p:cNvSpPr/>
+          <p:nvPr/>
+        </p:nvSpPr>
+        <p:spPr>
+          <a:xfrm>
+            <a:off x="457200" y="960120"/>
+            <a:ext cx="8229600" cy="25603"/>
+          </a:xfrm>
+          <a:prstGeom prst="rect">
+            <a:avLst/>
+          </a:prstGeom>
+          <a:solidFill>
+            <a:srgbClr val="000000"/>
+          </a:solidFill>
+          <a:ln>
+            <a:noFill/>
+          </a:ln>
+        </p:spPr>
+        <p:style>
+          <a:lnRef idx="1">
+            <a:schemeClr val="accent1"/>
+          </a:lnRef>
+          <a:fillRef idx="3">
+            <a:schemeClr val="accent1"/>
+          </a:fillRef>
+          <a:effectRef idx="2">
+            <a:schemeClr val="accent1"/>
+          </a:effectRef>
+          <a:fontRef idx="minor">
+            <a:schemeClr val="lt1"/>
+          </a:fontRef>
+        </p:style>
+        <p:txBody>
+          <a:bodyPr rtlCol="0" anchor="ctr"/>
+          <a:lstStyle/>
+          <a:p>
+            <a:pPr algn="ctr"/>
+          </a:p>
+        </p:txBody>
+      </p:sp>
+      <p:sp>
+        <p:nvSpPr>
+          <p:cNvPr id="4" name="TextBox 3"/>
           <p:cNvSpPr txBox="1"/>
           <p:nvPr/>
         </p:nvSpPr>
         <p:spPr>
           <a:xfrm>
-            <a:off x="457200" y="1051560"/>
+            <a:off x="457200" y="1097280"/>
+            <a:ext cx="8229600" cy="640080"/>
+          </a:xfrm>
+          <a:prstGeom prst="rect">
+            <a:avLst/>
+          </a:prstGeom>
+          <a:noFill/>
+          <a:ln>
+            <a:noFill/>
+          </a:ln>
+        </p:spPr>
+        <p:txBody>
+          <a:bodyPr wrap="square">
+            <a:spAutoFit/>
+          </a:bodyPr>
+          <a:lstStyle/>
+          <a:p>
+            <a:r>
+              <a:rPr sz="1100">
+                <a:solidFill>
+                  <a:srgbClr val="000000"/>
+                </a:solidFill>
+                <a:latin typeface="Avenir Next LT Pro"/>
+              </a:rPr>
+              <a:t>Fully direct-to-consumer luxury home-furnishings brand — design galleries, paid membership, integrated hospitality. Founder-led by Gary Friedman, who rebuilt RH from near-bankruptcy (2001) into a luxury platform across the US, Canada, UK &amp; Europe.</a:t>
+            </a:r>
+          </a:p>
+        </p:txBody>
+      </p:sp>
+      <p:graphicFrame>
+        <p:nvGraphicFramePr>
+          <p:cNvPr id="5" name="Table 4"/>
+          <p:cNvGraphicFramePr>
+            <a:graphicFrameLocks noGrp="1"/>
+          </p:cNvGraphicFramePr>
+          <p:nvPr/>
+        </p:nvGraphicFramePr>
+        <p:xfrm>
+          <a:off x="457200" y="1874519"/>
+          <a:ext cx="3977640" cy="3127248"/>
+        </p:xfrm>
+        <a:graphic>
+          <a:graphicData uri="http://schemas.openxmlformats.org/drawingml/2006/table">
+            <a:tbl>
+              <a:tblPr>
+                <a:tableStyleId>{5C22544A-7EE6-4342-B048-85BDC9FD1C3A}</a:tableStyleId>
+              </a:tblPr>
+              <a:tblGrid>
+                <a:gridCol w="1965960"/>
+                <a:gridCol w="2011680"/>
+              </a:tblGrid>
+              <a:tr h="384048">
+                <a:tc gridSpan="2">
+                  <a:txBody>
+                    <a:bodyPr/>
+                    <a:lstStyle/>
+                    <a:p>
+                      <a:r>
+                        <a:rPr sz="1100" b="1">
+                          <a:solidFill>
+                            <a:srgbClr val="FFFFFF"/>
+                          </a:solidFill>
+                          <a:latin typeface="Avenir Next LT Pro Demi"/>
+                        </a:rPr>
+                        <a:t>Market &amp; Valuation (Jul 2026)</a:t>
+                      </a:r>
+                    </a:p>
+                  </a:txBody>
+                  <a:tcPr anchor="ctr" marL="91440">
+                    <a:solidFill>
+                      <a:srgbClr val="9A7B44"/>
+                    </a:solidFill>
+                  </a:tcPr>
+                </a:tc>
+                <a:tc hMerge="1">
+                  <a:txBody>
+                    <a:bodyPr/>
+                    <a:lstStyle/>
+                    <a:p/>
+                  </a:txBody>
+                  <a:tcPr/>
+                </a:tc>
+              </a:tr>
+              <a:tr h="457200">
+                <a:tc>
+                  <a:txBody>
+                    <a:bodyPr/>
+                    <a:lstStyle/>
+                    <a:p>
+                      <a:r>
+                        <a:rPr sz="1050" b="1">
+                          <a:solidFill>
+                            <a:srgbClr val="000000"/>
+                          </a:solidFill>
+                          <a:latin typeface="Avenir Next LT Pro Demi"/>
+                        </a:rPr>
+                        <a:t>Ticker</a:t>
+                      </a:r>
+                    </a:p>
+                  </a:txBody>
+                  <a:tcPr marL="91440" anchor="ctr">
+                    <a:solidFill>
+                      <a:srgbClr val="FFFFFF"/>
+                    </a:solidFill>
+                  </a:tcPr>
+                </a:tc>
+                <a:tc>
+                  <a:txBody>
+                    <a:bodyPr/>
+                    <a:lstStyle/>
+                    <a:p>
+                      <a:r>
+                        <a:rPr sz="1050" b="0">
+                          <a:solidFill>
+                            <a:srgbClr val="000000"/>
+                          </a:solidFill>
+                          <a:latin typeface="Avenir Next LT Pro"/>
+                        </a:rPr>
+                        <a:t>NYSE: RH</a:t>
+                      </a:r>
+                    </a:p>
+                  </a:txBody>
+                  <a:tcPr marL="91440" anchor="ctr">
+                    <a:solidFill>
+                      <a:srgbClr val="FFFFFF"/>
+                    </a:solidFill>
+                  </a:tcPr>
+                </a:tc>
+              </a:tr>
+              <a:tr h="457200">
+                <a:tc>
+                  <a:txBody>
+                    <a:bodyPr/>
+                    <a:lstStyle/>
+                    <a:p>
+                      <a:r>
+                        <a:rPr sz="1050" b="1">
+                          <a:solidFill>
+                            <a:srgbClr val="000000"/>
+                          </a:solidFill>
+                          <a:latin typeface="Avenir Next LT Pro Demi"/>
+                        </a:rPr>
+                        <a:t>Share price</a:t>
+                      </a:r>
+                    </a:p>
+                  </a:txBody>
+                  <a:tcPr marL="91440" anchor="ctr">
+                    <a:solidFill>
+                      <a:srgbClr val="F4F6F8"/>
+                    </a:solidFill>
+                  </a:tcPr>
+                </a:tc>
+                <a:tc>
+                  <a:txBody>
+                    <a:bodyPr/>
+                    <a:lstStyle/>
+                    <a:p>
+                      <a:r>
+                        <a:rPr sz="1050" b="0">
+                          <a:solidFill>
+                            <a:srgbClr val="000000"/>
+                          </a:solidFill>
+                          <a:latin typeface="Avenir Next LT Pro"/>
+                        </a:rPr>
+                        <a:t>~$166</a:t>
+                      </a:r>
+                    </a:p>
+                  </a:txBody>
+                  <a:tcPr marL="91440" anchor="ctr">
+                    <a:solidFill>
+                      <a:srgbClr val="F4F6F8"/>
+                    </a:solidFill>
+                  </a:tcPr>
+                </a:tc>
+              </a:tr>
+              <a:tr h="457200">
+                <a:tc>
+                  <a:txBody>
+                    <a:bodyPr/>
+                    <a:lstStyle/>
+                    <a:p>
+                      <a:r>
+                        <a:rPr sz="1050" b="1">
+                          <a:solidFill>
+                            <a:srgbClr val="000000"/>
+                          </a:solidFill>
+                          <a:latin typeface="Avenir Next LT Pro Demi"/>
+                        </a:rPr>
+                        <a:t>Market cap</a:t>
+                      </a:r>
+                    </a:p>
+                  </a:txBody>
+                  <a:tcPr marL="91440" anchor="ctr">
+                    <a:solidFill>
+                      <a:srgbClr val="FFFFFF"/>
+                    </a:solidFill>
+                  </a:tcPr>
+                </a:tc>
+                <a:tc>
+                  <a:txBody>
+                    <a:bodyPr/>
+                    <a:lstStyle/>
+                    <a:p>
+                      <a:r>
+                        <a:rPr sz="1050" b="0">
+                          <a:solidFill>
+                            <a:srgbClr val="000000"/>
+                          </a:solidFill>
+                          <a:latin typeface="Avenir Next LT Pro"/>
+                        </a:rPr>
+                        <a:t>~$3.1B</a:t>
+                      </a:r>
+                    </a:p>
+                  </a:txBody>
+                  <a:tcPr marL="91440" anchor="ctr">
+                    <a:solidFill>
+                      <a:srgbClr val="FFFFFF"/>
+                    </a:solidFill>
+                  </a:tcPr>
+                </a:tc>
+              </a:tr>
+              <a:tr h="457200">
+                <a:tc>
+                  <a:txBody>
+                    <a:bodyPr/>
+                    <a:lstStyle/>
+                    <a:p>
+                      <a:r>
+                        <a:rPr sz="1050" b="1">
+                          <a:solidFill>
+                            <a:srgbClr val="000000"/>
+                          </a:solidFill>
+                          <a:latin typeface="Avenir Next LT Pro Demi"/>
+                        </a:rPr>
+                        <a:t>Net debt</a:t>
+                      </a:r>
+                    </a:p>
+                  </a:txBody>
+                  <a:tcPr marL="91440" anchor="ctr">
+                    <a:solidFill>
+                      <a:srgbClr val="F4F6F8"/>
+                    </a:solidFill>
+                  </a:tcPr>
+                </a:tc>
+                <a:tc>
+                  <a:txBody>
+                    <a:bodyPr/>
+                    <a:lstStyle/>
+                    <a:p>
+                      <a:r>
+                        <a:rPr sz="1050" b="0">
+                          <a:solidFill>
+                            <a:srgbClr val="000000"/>
+                          </a:solidFill>
+                          <a:latin typeface="Avenir Next LT Pro"/>
+                        </a:rPr>
+                        <a:t>~$2.4B</a:t>
+                      </a:r>
+                    </a:p>
+                  </a:txBody>
+                  <a:tcPr marL="91440" anchor="ctr">
+                    <a:solidFill>
+                      <a:srgbClr val="F4F6F8"/>
+                    </a:solidFill>
+                  </a:tcPr>
+                </a:tc>
+              </a:tr>
+              <a:tr h="457200">
+                <a:tc>
+                  <a:txBody>
+                    <a:bodyPr/>
+                    <a:lstStyle/>
+                    <a:p>
+                      <a:r>
+                        <a:rPr sz="1050" b="1">
+                          <a:solidFill>
+                            <a:srgbClr val="000000"/>
+                          </a:solidFill>
+                          <a:latin typeface="Avenir Next LT Pro Demi"/>
+                        </a:rPr>
+                        <a:t>Enterprise value</a:t>
+                      </a:r>
+                    </a:p>
+                  </a:txBody>
+                  <a:tcPr marL="91440" anchor="ctr">
+                    <a:solidFill>
+                      <a:srgbClr val="FFFFFF"/>
+                    </a:solidFill>
+                  </a:tcPr>
+                </a:tc>
+                <a:tc>
+                  <a:txBody>
+                    <a:bodyPr/>
+                    <a:lstStyle/>
+                    <a:p>
+                      <a:r>
+                        <a:rPr sz="1050" b="0">
+                          <a:solidFill>
+                            <a:srgbClr val="000000"/>
+                          </a:solidFill>
+                          <a:latin typeface="Avenir Next LT Pro"/>
+                        </a:rPr>
+                        <a:t>~$5.5B</a:t>
+                      </a:r>
+                    </a:p>
+                  </a:txBody>
+                  <a:tcPr marL="91440" anchor="ctr">
+                    <a:solidFill>
+                      <a:srgbClr val="FFFFFF"/>
+                    </a:solidFill>
+                  </a:tcPr>
+                </a:tc>
+              </a:tr>
+              <a:tr h="457200">
+                <a:tc>
+                  <a:txBody>
+                    <a:bodyPr/>
+                    <a:lstStyle/>
+                    <a:p>
+                      <a:r>
+                        <a:rPr sz="1050" b="1">
+                          <a:solidFill>
+                            <a:srgbClr val="000000"/>
+                          </a:solidFill>
+                          <a:latin typeface="Avenir Next LT Pro Demi"/>
+                        </a:rPr>
+                        <a:t>EV / EBITDA</a:t>
+                      </a:r>
+                    </a:p>
+                  </a:txBody>
+                  <a:tcPr marL="91440" anchor="ctr">
+                    <a:solidFill>
+                      <a:srgbClr val="F4F6F8"/>
+                    </a:solidFill>
+                  </a:tcPr>
+                </a:tc>
+                <a:tc>
+                  <a:txBody>
+                    <a:bodyPr/>
+                    <a:lstStyle/>
+                    <a:p>
+                      <a:r>
+                        <a:rPr sz="1050" b="0">
+                          <a:solidFill>
+                            <a:srgbClr val="000000"/>
+                          </a:solidFill>
+                          <a:latin typeface="Avenir Next LT Pro"/>
+                        </a:rPr>
+                        <a:t>~9.3×</a:t>
+                      </a:r>
+                    </a:p>
+                  </a:txBody>
+                  <a:tcPr marL="91440" anchor="ctr">
+                    <a:solidFill>
+                      <a:srgbClr val="F4F6F8"/>
+                    </a:solidFill>
+                  </a:tcPr>
+                </a:tc>
+              </a:tr>
+            </a:tbl>
+          </a:graphicData>
+        </a:graphic>
+      </p:graphicFrame>
+      <p:graphicFrame>
+        <p:nvGraphicFramePr>
+          <p:cNvPr id="6" name="Table 5"/>
+          <p:cNvGraphicFramePr>
+            <a:graphicFrameLocks noGrp="1"/>
+          </p:cNvGraphicFramePr>
+          <p:nvPr/>
+        </p:nvGraphicFramePr>
+        <p:xfrm>
+          <a:off x="4709160" y="1874519"/>
+          <a:ext cx="3977640" cy="3127248"/>
+        </p:xfrm>
+        <a:graphic>
+          <a:graphicData uri="http://schemas.openxmlformats.org/drawingml/2006/table">
+            <a:tbl>
+              <a:tblPr>
+                <a:tableStyleId>{5C22544A-7EE6-4342-B048-85BDC9FD1C3A}</a:tableStyleId>
+              </a:tblPr>
+              <a:tblGrid>
+                <a:gridCol w="1965960"/>
+                <a:gridCol w="2011680"/>
+              </a:tblGrid>
+              <a:tr h="384048">
+                <a:tc gridSpan="2">
+                  <a:txBody>
+                    <a:bodyPr/>
+                    <a:lstStyle/>
+                    <a:p>
+                      <a:r>
+                        <a:rPr sz="1100" b="1">
+                          <a:solidFill>
+                            <a:srgbClr val="FFFFFF"/>
+                          </a:solidFill>
+                          <a:latin typeface="Avenir Next LT Pro Demi"/>
+                        </a:rPr>
+                        <a:t>Business — FY2025 (ended Jan '26)</a:t>
+                      </a:r>
+                    </a:p>
+                  </a:txBody>
+                  <a:tcPr anchor="ctr" marL="91440">
+                    <a:solidFill>
+                      <a:srgbClr val="9A7B44"/>
+                    </a:solidFill>
+                  </a:tcPr>
+                </a:tc>
+                <a:tc hMerge="1">
+                  <a:txBody>
+                    <a:bodyPr/>
+                    <a:lstStyle/>
+                    <a:p/>
+                  </a:txBody>
+                  <a:tcPr/>
+                </a:tc>
+              </a:tr>
+              <a:tr h="457200">
+                <a:tc>
+                  <a:txBody>
+                    <a:bodyPr/>
+                    <a:lstStyle/>
+                    <a:p>
+                      <a:r>
+                        <a:rPr sz="1050" b="1">
+                          <a:solidFill>
+                            <a:srgbClr val="000000"/>
+                          </a:solidFill>
+                          <a:latin typeface="Avenir Next LT Pro Demi"/>
+                        </a:rPr>
+                        <a:t>Revenue</a:t>
+                      </a:r>
+                    </a:p>
+                  </a:txBody>
+                  <a:tcPr marL="91440" anchor="ctr">
+                    <a:solidFill>
+                      <a:srgbClr val="FFFFFF"/>
+                    </a:solidFill>
+                  </a:tcPr>
+                </a:tc>
+                <a:tc>
+                  <a:txBody>
+                    <a:bodyPr/>
+                    <a:lstStyle/>
+                    <a:p>
+                      <a:r>
+                        <a:rPr sz="1050" b="0">
+                          <a:solidFill>
+                            <a:srgbClr val="000000"/>
+                          </a:solidFill>
+                          <a:latin typeface="Avenir Next LT Pro"/>
+                        </a:rPr>
+                        <a:t>$3.44B</a:t>
+                      </a:r>
+                    </a:p>
+                  </a:txBody>
+                  <a:tcPr marL="91440" anchor="ctr">
+                    <a:solidFill>
+                      <a:srgbClr val="FFFFFF"/>
+                    </a:solidFill>
+                  </a:tcPr>
+                </a:tc>
+              </a:tr>
+              <a:tr h="457200">
+                <a:tc>
+                  <a:txBody>
+                    <a:bodyPr/>
+                    <a:lstStyle/>
+                    <a:p>
+                      <a:r>
+                        <a:rPr sz="1050" b="1">
+                          <a:solidFill>
+                            <a:srgbClr val="000000"/>
+                          </a:solidFill>
+                          <a:latin typeface="Avenir Next LT Pro Demi"/>
+                        </a:rPr>
+                        <a:t>Adj. EBITDA</a:t>
+                      </a:r>
+                    </a:p>
+                  </a:txBody>
+                  <a:tcPr marL="91440" anchor="ctr">
+                    <a:solidFill>
+                      <a:srgbClr val="F4F6F8"/>
+                    </a:solidFill>
+                  </a:tcPr>
+                </a:tc>
+                <a:tc>
+                  <a:txBody>
+                    <a:bodyPr/>
+                    <a:lstStyle/>
+                    <a:p>
+                      <a:r>
+                        <a:rPr sz="1050" b="0">
+                          <a:solidFill>
+                            <a:srgbClr val="000000"/>
+                          </a:solidFill>
+                          <a:latin typeface="Avenir Next LT Pro"/>
+                        </a:rPr>
+                        <a:t>$597M (17.3%)</a:t>
+                      </a:r>
+                    </a:p>
+                  </a:txBody>
+                  <a:tcPr marL="91440" anchor="ctr">
+                    <a:solidFill>
+                      <a:srgbClr val="F4F6F8"/>
+                    </a:solidFill>
+                  </a:tcPr>
+                </a:tc>
+              </a:tr>
+              <a:tr h="457200">
+                <a:tc>
+                  <a:txBody>
+                    <a:bodyPr/>
+                    <a:lstStyle/>
+                    <a:p>
+                      <a:r>
+                        <a:rPr sz="1050" b="1">
+                          <a:solidFill>
+                            <a:srgbClr val="000000"/>
+                          </a:solidFill>
+                          <a:latin typeface="Avenir Next LT Pro Demi"/>
+                        </a:rPr>
+                        <a:t>Gross margin</a:t>
+                      </a:r>
+                    </a:p>
+                  </a:txBody>
+                  <a:tcPr marL="91440" anchor="ctr">
+                    <a:solidFill>
+                      <a:srgbClr val="FFFFFF"/>
+                    </a:solidFill>
+                  </a:tcPr>
+                </a:tc>
+                <a:tc>
+                  <a:txBody>
+                    <a:bodyPr/>
+                    <a:lstStyle/>
+                    <a:p>
+                      <a:r>
+                        <a:rPr sz="1050" b="0">
+                          <a:solidFill>
+                            <a:srgbClr val="000000"/>
+                          </a:solidFill>
+                          <a:latin typeface="Avenir Next LT Pro"/>
+                        </a:rPr>
+                        <a:t>~44%</a:t>
+                      </a:r>
+                    </a:p>
+                  </a:txBody>
+                  <a:tcPr marL="91440" anchor="ctr">
+                    <a:solidFill>
+                      <a:srgbClr val="FFFFFF"/>
+                    </a:solidFill>
+                  </a:tcPr>
+                </a:tc>
+              </a:tr>
+              <a:tr h="457200">
+                <a:tc>
+                  <a:txBody>
+                    <a:bodyPr/>
+                    <a:lstStyle/>
+                    <a:p>
+                      <a:r>
+                        <a:rPr sz="1050" b="1">
+                          <a:solidFill>
+                            <a:srgbClr val="000000"/>
+                          </a:solidFill>
+                          <a:latin typeface="Avenir Next LT Pro Demi"/>
+                        </a:rPr>
+                        <a:t>Diluted EPS</a:t>
+                      </a:r>
+                    </a:p>
+                  </a:txBody>
+                  <a:tcPr marL="91440" anchor="ctr">
+                    <a:solidFill>
+                      <a:srgbClr val="F4F6F8"/>
+                    </a:solidFill>
+                  </a:tcPr>
+                </a:tc>
+                <a:tc>
+                  <a:txBody>
+                    <a:bodyPr/>
+                    <a:lstStyle/>
+                    <a:p>
+                      <a:r>
+                        <a:rPr sz="1050" b="0">
+                          <a:solidFill>
+                            <a:srgbClr val="000000"/>
+                          </a:solidFill>
+                          <a:latin typeface="Avenir Next LT Pro"/>
+                        </a:rPr>
+                        <a:t>$6.31</a:t>
+                      </a:r>
+                    </a:p>
+                  </a:txBody>
+                  <a:tcPr marL="91440" anchor="ctr">
+                    <a:solidFill>
+                      <a:srgbClr val="F4F6F8"/>
+                    </a:solidFill>
+                  </a:tcPr>
+                </a:tc>
+              </a:tr>
+              <a:tr h="457200">
+                <a:tc>
+                  <a:txBody>
+                    <a:bodyPr/>
+                    <a:lstStyle/>
+                    <a:p>
+                      <a:r>
+                        <a:rPr sz="1050" b="1">
+                          <a:solidFill>
+                            <a:srgbClr val="000000"/>
+                          </a:solidFill>
+                          <a:latin typeface="Avenir Next LT Pro Demi"/>
+                        </a:rPr>
+                        <a:t>Footprint</a:t>
+                      </a:r>
+                    </a:p>
+                  </a:txBody>
+                  <a:tcPr marL="91440" anchor="ctr">
+                    <a:solidFill>
+                      <a:srgbClr val="FFFFFF"/>
+                    </a:solidFill>
+                  </a:tcPr>
+                </a:tc>
+                <a:tc>
+                  <a:txBody>
+                    <a:bodyPr/>
+                    <a:lstStyle/>
+                    <a:p>
+                      <a:r>
+                        <a:rPr sz="1050" b="0">
+                          <a:solidFill>
+                            <a:srgbClr val="000000"/>
+                          </a:solidFill>
+                          <a:latin typeface="Avenir Next LT Pro"/>
+                        </a:rPr>
+                        <a:t>~68 galleries + 44 outlets</a:t>
+                      </a:r>
+                    </a:p>
+                  </a:txBody>
+                  <a:tcPr marL="91440" anchor="ctr">
+                    <a:solidFill>
+                      <a:srgbClr val="FFFFFF"/>
+                    </a:solidFill>
+                  </a:tcPr>
+                </a:tc>
+              </a:tr>
+              <a:tr h="457200">
+                <a:tc>
+                  <a:txBody>
+                    <a:bodyPr/>
+                    <a:lstStyle/>
+                    <a:p>
+                      <a:r>
+                        <a:rPr sz="1050" b="1">
+                          <a:solidFill>
+                            <a:srgbClr val="000000"/>
+                          </a:solidFill>
+                          <a:latin typeface="Avenir Next LT Pro Demi"/>
+                        </a:rPr>
+                        <a:t>Ownership</a:t>
+                      </a:r>
+                    </a:p>
+                  </a:txBody>
+                  <a:tcPr marL="91440" anchor="ctr">
+                    <a:solidFill>
+                      <a:srgbClr val="F4F6F8"/>
+                    </a:solidFill>
+                  </a:tcPr>
+                </a:tc>
+                <a:tc>
+                  <a:txBody>
+                    <a:bodyPr/>
+                    <a:lstStyle/>
+                    <a:p>
+                      <a:r>
+                        <a:rPr sz="1050" b="0">
+                          <a:solidFill>
+                            <a:srgbClr val="000000"/>
+                          </a:solidFill>
+                          <a:latin typeface="Avenir Next LT Pro"/>
+                        </a:rPr>
+                        <a:t>Founder-led; Friedman ~25%</a:t>
+                      </a:r>
+                    </a:p>
+                  </a:txBody>
+                  <a:tcPr marL="91440" anchor="ctr">
+                    <a:solidFill>
+                      <a:srgbClr val="F4F6F8"/>
+                    </a:solidFill>
+                  </a:tcPr>
+                </a:tc>
+              </a:tr>
+            </a:tbl>
+          </a:graphicData>
+        </a:graphic>
+      </p:graphicFrame>
+      <p:sp>
+        <p:nvSpPr>
+          <p:cNvPr id="7" name="TextBox 6"/>
+          <p:cNvSpPr txBox="1"/>
+          <p:nvPr/>
+        </p:nvSpPr>
+        <p:spPr>
+          <a:xfrm>
+            <a:off x="457200" y="6309360"/>
             <a:ext cx="8229600" cy="274320"/>
           </a:xfrm>
           <a:prstGeom prst="rect">
@@ -9025,876 +12166,14 @@
           <a:lstStyle/>
           <a:p>
             <a:r>
-              <a:rPr sz="900" b="0" i="1">
-                <a:solidFill>
-                  <a:srgbClr val="B0B0B0"/>
+              <a:rPr sz="750" i="1">
+                <a:solidFill>
+                  <a:srgbClr val="707070"/>
                 </a:solidFill>
                 <a:latin typeface="Avenir Next LT Pro"/>
               </a:rPr>
-              <a:t>[ narrative / commentary to be written ]</a:t>
-            </a:r>
-          </a:p>
-        </p:txBody>
-      </p:sp>
-      <p:graphicFrame>
-        <p:nvGraphicFramePr>
-          <p:cNvPr id="6" name="Table 5"/>
-          <p:cNvGraphicFramePr>
-            <a:graphicFrameLocks noGrp="1"/>
-          </p:cNvGraphicFramePr>
-          <p:nvPr>
-            <p:extLst>
-              <p:ext uri="{D42A27DB-BD31-4B8C-83A1-F6EECF244321}">
-                <p14:modId xmlns:p14="http://schemas.microsoft.com/office/powerpoint/2010/main" val="3484064200"/>
-              </p:ext>
-            </p:extLst>
-          </p:nvPr>
-        </p:nvGraphicFramePr>
-        <p:xfrm>
-          <a:off x="457200" y="1547854"/>
-          <a:ext cx="8229599" cy="2103120"/>
-        </p:xfrm>
-        <a:graphic>
-          <a:graphicData uri="http://schemas.openxmlformats.org/drawingml/2006/table">
-            <a:tbl>
-              <a:tblPr>
-                <a:tableStyleId>{5C22544A-7EE6-4342-B048-85BDC9FD1C3A}</a:tableStyleId>
-              </a:tblPr>
-              <a:tblGrid>
-                <a:gridCol w="952901">
-                  <a:extLst>
-                    <a:ext uri="{9D8B030D-6E8A-4147-A177-3AD203B41FA5}">
-                      <a16:colId xmlns:a16="http://schemas.microsoft.com/office/drawing/2014/main" val="20000"/>
-                    </a:ext>
-                  </a:extLst>
-                </a:gridCol>
-                <a:gridCol w="2165684">
-                  <a:extLst>
-                    <a:ext uri="{9D8B030D-6E8A-4147-A177-3AD203B41FA5}">
-                      <a16:colId xmlns:a16="http://schemas.microsoft.com/office/drawing/2014/main" val="20001"/>
-                    </a:ext>
-                  </a:extLst>
-                </a:gridCol>
-                <a:gridCol w="1386038">
-                  <a:extLst>
-                    <a:ext uri="{9D8B030D-6E8A-4147-A177-3AD203B41FA5}">
-                      <a16:colId xmlns:a16="http://schemas.microsoft.com/office/drawing/2014/main" val="20002"/>
-                    </a:ext>
-                  </a:extLst>
-                </a:gridCol>
-                <a:gridCol w="1169469">
-                  <a:extLst>
-                    <a:ext uri="{9D8B030D-6E8A-4147-A177-3AD203B41FA5}">
-                      <a16:colId xmlns:a16="http://schemas.microsoft.com/office/drawing/2014/main" val="20003"/>
-                    </a:ext>
-                  </a:extLst>
-                </a:gridCol>
-                <a:gridCol w="1169469">
-                  <a:extLst>
-                    <a:ext uri="{9D8B030D-6E8A-4147-A177-3AD203B41FA5}">
-                      <a16:colId xmlns:a16="http://schemas.microsoft.com/office/drawing/2014/main" val="20004"/>
-                    </a:ext>
-                  </a:extLst>
-                </a:gridCol>
-                <a:gridCol w="1386038">
-                  <a:extLst>
-                    <a:ext uri="{9D8B030D-6E8A-4147-A177-3AD203B41FA5}">
-                      <a16:colId xmlns:a16="http://schemas.microsoft.com/office/drawing/2014/main" val="20005"/>
-                    </a:ext>
-                  </a:extLst>
-                </a:gridCol>
-              </a:tblGrid>
-              <a:tr h="420624">
-                <a:tc>
-                  <a:txBody>
-                    <a:bodyPr/>
-                    <a:lstStyle/>
-                    <a:p>
-                      <a:pPr algn="l"/>
-                      <a:r>
-                        <a:rPr sz="950" b="1" i="0" dirty="0">
-                          <a:solidFill>
-                            <a:srgbClr val="FFFFFF"/>
-                          </a:solidFill>
-                          <a:latin typeface="Avenir Next LT Pro Demi"/>
-                        </a:rPr>
-                        <a:t>Ticker</a:t>
-                      </a:r>
-                    </a:p>
-                  </a:txBody>
-                  <a:tcPr marL="73152" marR="73152" marT="18288" marB="18288" anchor="ctr">
-                    <a:solidFill>
-                      <a:srgbClr val="9A7B44"/>
-                    </a:solidFill>
-                  </a:tcPr>
-                </a:tc>
-                <a:tc>
-                  <a:txBody>
-                    <a:bodyPr/>
-                    <a:lstStyle/>
-                    <a:p>
-                      <a:pPr algn="ctr"/>
-                      <a:r>
-                        <a:rPr sz="950" b="1" i="0" dirty="0">
-                          <a:solidFill>
-                            <a:srgbClr val="FFFFFF"/>
-                          </a:solidFill>
-                          <a:latin typeface="Avenir Next LT Pro Demi"/>
-                        </a:rPr>
-                        <a:t>Company</a:t>
-                      </a:r>
-                    </a:p>
-                  </a:txBody>
-                  <a:tcPr marL="73152" marR="73152" marT="18288" marB="18288" anchor="ctr">
-                    <a:solidFill>
-                      <a:srgbClr val="9A7B44"/>
-                    </a:solidFill>
-                  </a:tcPr>
-                </a:tc>
-                <a:tc>
-                  <a:txBody>
-                    <a:bodyPr/>
-                    <a:lstStyle/>
-                    <a:p>
-                      <a:pPr algn="ctr"/>
-                      <a:r>
-                        <a:rPr sz="950" b="1" i="0" dirty="0">
-                          <a:solidFill>
-                            <a:srgbClr val="FFFFFF"/>
-                          </a:solidFill>
-                          <a:latin typeface="Avenir Next LT Pro Demi"/>
-                        </a:rPr>
-                        <a:t>Rev CAGR (3y)</a:t>
-                      </a:r>
-                    </a:p>
-                  </a:txBody>
-                  <a:tcPr marL="73152" marR="73152" marT="18288" marB="18288" anchor="ctr">
-                    <a:solidFill>
-                      <a:srgbClr val="9A7B44"/>
-                    </a:solidFill>
-                  </a:tcPr>
-                </a:tc>
-                <a:tc>
-                  <a:txBody>
-                    <a:bodyPr/>
-                    <a:lstStyle/>
-                    <a:p>
-                      <a:pPr algn="ctr"/>
-                      <a:r>
-                        <a:rPr sz="950" b="1" i="0" dirty="0">
-                          <a:solidFill>
-                            <a:srgbClr val="FFFFFF"/>
-                          </a:solidFill>
-                          <a:latin typeface="Avenir Next LT Pro Demi"/>
-                        </a:rPr>
-                        <a:t>EBITDA </a:t>
-                      </a:r>
-                      <a:r>
-                        <a:rPr sz="950" b="1" i="0" dirty="0" err="1">
-                          <a:solidFill>
-                            <a:srgbClr val="FFFFFF"/>
-                          </a:solidFill>
-                          <a:latin typeface="Avenir Next LT Pro Demi"/>
-                        </a:rPr>
-                        <a:t>Mgn</a:t>
-                      </a:r>
-                      <a:endParaRPr sz="950" b="1" i="0" dirty="0">
-                        <a:solidFill>
-                          <a:srgbClr val="FFFFFF"/>
-                        </a:solidFill>
-                        <a:latin typeface="Avenir Next LT Pro Demi"/>
-                      </a:endParaRPr>
-                    </a:p>
-                  </a:txBody>
-                  <a:tcPr marL="73152" marR="73152" marT="18288" marB="18288" anchor="ctr">
-                    <a:solidFill>
-                      <a:srgbClr val="9A7B44"/>
-                    </a:solidFill>
-                  </a:tcPr>
-                </a:tc>
-                <a:tc>
-                  <a:txBody>
-                    <a:bodyPr/>
-                    <a:lstStyle/>
-                    <a:p>
-                      <a:pPr algn="ctr"/>
-                      <a:r>
-                        <a:rPr sz="950" b="1" i="0" dirty="0">
-                          <a:solidFill>
-                            <a:srgbClr val="FFFFFF"/>
-                          </a:solidFill>
-                          <a:latin typeface="Avenir Next LT Pro Demi"/>
-                        </a:rPr>
-                        <a:t>EV/EBITDA</a:t>
-                      </a:r>
-                    </a:p>
-                  </a:txBody>
-                  <a:tcPr marL="73152" marR="73152" marT="18288" marB="18288" anchor="ctr">
-                    <a:solidFill>
-                      <a:srgbClr val="9A7B44"/>
-                    </a:solidFill>
-                  </a:tcPr>
-                </a:tc>
-                <a:tc>
-                  <a:txBody>
-                    <a:bodyPr/>
-                    <a:lstStyle/>
-                    <a:p>
-                      <a:pPr algn="ctr"/>
-                      <a:r>
-                        <a:rPr sz="950" b="1" i="0" dirty="0">
-                          <a:solidFill>
-                            <a:srgbClr val="FFFFFF"/>
-                          </a:solidFill>
-                          <a:latin typeface="Avenir Next LT Pro Demi"/>
-                        </a:rPr>
-                        <a:t>Status</a:t>
-                      </a:r>
-                    </a:p>
-                  </a:txBody>
-                  <a:tcPr marL="73152" marR="73152" marT="18288" marB="18288" anchor="ctr">
-                    <a:solidFill>
-                      <a:srgbClr val="9A7B44"/>
-                    </a:solidFill>
-                  </a:tcPr>
-                </a:tc>
-                <a:extLst>
-                  <a:ext uri="{0D108BD9-81ED-4DB2-BD59-A6C34878D82A}">
-                    <a16:rowId xmlns:a16="http://schemas.microsoft.com/office/drawing/2014/main" val="10000"/>
-                  </a:ext>
-                </a:extLst>
-              </a:tr>
-              <a:tr h="420624">
-                <a:tc>
-                  <a:txBody>
-                    <a:bodyPr/>
-                    <a:lstStyle/>
-                    <a:p>
-                      <a:pPr algn="l"/>
-                      <a:r>
-                        <a:rPr sz="1050" b="1" i="0" dirty="0">
-                          <a:solidFill>
-                            <a:schemeClr val="tx1"/>
-                          </a:solidFill>
-                          <a:latin typeface="Avenir Next LT Pro Demi"/>
-                        </a:rPr>
-                        <a:t>ARHS</a:t>
-                      </a:r>
-                    </a:p>
-                  </a:txBody>
-                  <a:tcPr marL="73152" marR="73152" marT="18288" marB="18288" anchor="ctr">
-                    <a:solidFill>
-                      <a:srgbClr val="FFFFFF"/>
-                    </a:solidFill>
-                  </a:tcPr>
-                </a:tc>
-                <a:tc>
-                  <a:txBody>
-                    <a:bodyPr/>
-                    <a:lstStyle/>
-                    <a:p>
-                      <a:pPr algn="ctr"/>
-                      <a:r>
-                        <a:rPr sz="1050" b="0" i="0" dirty="0">
-                          <a:solidFill>
-                            <a:schemeClr val="tx1"/>
-                          </a:solidFill>
-                          <a:latin typeface="Avenir Next LT Pro"/>
-                        </a:rPr>
-                        <a:t>Arhaus</a:t>
-                      </a:r>
-                    </a:p>
-                  </a:txBody>
-                  <a:tcPr marL="73152" marR="73152" marT="18288" marB="18288" anchor="ctr">
-                    <a:solidFill>
-                      <a:srgbClr val="FFFFFF"/>
-                    </a:solidFill>
-                  </a:tcPr>
-                </a:tc>
-                <a:tc>
-                  <a:txBody>
-                    <a:bodyPr/>
-                    <a:lstStyle/>
-                    <a:p>
-                      <a:pPr algn="ctr"/>
-                      <a:r>
-                        <a:rPr sz="1050" b="0" i="0">
-                          <a:solidFill>
-                            <a:schemeClr val="tx1"/>
-                          </a:solidFill>
-                          <a:latin typeface="Avenir Next LT Pro"/>
-                        </a:rPr>
-                        <a:t>+11.4%</a:t>
-                      </a:r>
-                    </a:p>
-                  </a:txBody>
-                  <a:tcPr marL="73152" marR="73152" marT="18288" marB="18288" anchor="ctr">
-                    <a:solidFill>
-                      <a:srgbClr val="FFFFFF"/>
-                    </a:solidFill>
-                  </a:tcPr>
-                </a:tc>
-                <a:tc>
-                  <a:txBody>
-                    <a:bodyPr/>
-                    <a:lstStyle/>
-                    <a:p>
-                      <a:pPr algn="ctr"/>
-                      <a:r>
-                        <a:rPr sz="1050" b="0" i="0">
-                          <a:solidFill>
-                            <a:schemeClr val="tx1"/>
-                          </a:solidFill>
-                          <a:latin typeface="Avenir Next LT Pro"/>
-                        </a:rPr>
-                        <a:t>~14%</a:t>
-                      </a:r>
-                    </a:p>
-                  </a:txBody>
-                  <a:tcPr marL="73152" marR="73152" marT="18288" marB="18288" anchor="ctr">
-                    <a:solidFill>
-                      <a:srgbClr val="FFFFFF"/>
-                    </a:solidFill>
-                  </a:tcPr>
-                </a:tc>
-                <a:tc>
-                  <a:txBody>
-                    <a:bodyPr/>
-                    <a:lstStyle/>
-                    <a:p>
-                      <a:pPr algn="ctr"/>
-                      <a:r>
-                        <a:rPr sz="1050" b="0" i="0">
-                          <a:solidFill>
-                            <a:schemeClr val="tx1"/>
-                          </a:solidFill>
-                          <a:latin typeface="Avenir Next LT Pro"/>
-                        </a:rPr>
-                        <a:t>~11×</a:t>
-                      </a:r>
-                    </a:p>
-                  </a:txBody>
-                  <a:tcPr marL="73152" marR="73152" marT="18288" marB="18288" anchor="ctr">
-                    <a:solidFill>
-                      <a:srgbClr val="FFFFFF"/>
-                    </a:solidFill>
-                  </a:tcPr>
-                </a:tc>
-                <a:tc>
-                  <a:txBody>
-                    <a:bodyPr/>
-                    <a:lstStyle/>
-                    <a:p>
-                      <a:pPr algn="ctr"/>
-                      <a:r>
-                        <a:rPr sz="1050" b="0" i="0">
-                          <a:solidFill>
-                            <a:schemeClr val="tx1"/>
-                          </a:solidFill>
-                          <a:latin typeface="Avenir Next LT Pro"/>
-                        </a:rPr>
-                        <a:t>Outperforming</a:t>
-                      </a:r>
-                    </a:p>
-                  </a:txBody>
-                  <a:tcPr marL="73152" marR="73152" marT="18288" marB="18288" anchor="ctr">
-                    <a:solidFill>
-                      <a:srgbClr val="FFFFFF"/>
-                    </a:solidFill>
-                  </a:tcPr>
-                </a:tc>
-                <a:extLst>
-                  <a:ext uri="{0D108BD9-81ED-4DB2-BD59-A6C34878D82A}">
-                    <a16:rowId xmlns:a16="http://schemas.microsoft.com/office/drawing/2014/main" val="10001"/>
-                  </a:ext>
-                </a:extLst>
-              </a:tr>
-              <a:tr h="420624">
-                <a:tc>
-                  <a:txBody>
-                    <a:bodyPr/>
-                    <a:lstStyle/>
-                    <a:p>
-                      <a:pPr algn="l"/>
-                      <a:r>
-                        <a:rPr sz="1050" b="1" i="0">
-                          <a:solidFill>
-                            <a:schemeClr val="tx1"/>
-                          </a:solidFill>
-                          <a:latin typeface="Avenir Next LT Pro Demi"/>
-                        </a:rPr>
-                        <a:t>WSM</a:t>
-                      </a:r>
-                    </a:p>
-                  </a:txBody>
-                  <a:tcPr marL="73152" marR="73152" marT="18288" marB="18288" anchor="ctr">
-                    <a:solidFill>
-                      <a:srgbClr val="F4F6F8"/>
-                    </a:solidFill>
-                  </a:tcPr>
-                </a:tc>
-                <a:tc>
-                  <a:txBody>
-                    <a:bodyPr/>
-                    <a:lstStyle/>
-                    <a:p>
-                      <a:pPr algn="ctr"/>
-                      <a:r>
-                        <a:rPr sz="1050" b="0" i="0" dirty="0">
-                          <a:solidFill>
-                            <a:schemeClr val="tx1"/>
-                          </a:solidFill>
-                          <a:latin typeface="Avenir Next LT Pro"/>
-                        </a:rPr>
-                        <a:t>Williams-Sonoma</a:t>
-                      </a:r>
-                    </a:p>
-                  </a:txBody>
-                  <a:tcPr marL="73152" marR="73152" marT="18288" marB="18288" anchor="ctr">
-                    <a:solidFill>
-                      <a:srgbClr val="F4F6F8"/>
-                    </a:solidFill>
-                  </a:tcPr>
-                </a:tc>
-                <a:tc>
-                  <a:txBody>
-                    <a:bodyPr/>
-                    <a:lstStyle/>
-                    <a:p>
-                      <a:pPr algn="ctr"/>
-                      <a:r>
-                        <a:rPr sz="1050" b="0" i="0" dirty="0">
-                          <a:solidFill>
-                            <a:schemeClr val="tx1"/>
-                          </a:solidFill>
-                          <a:latin typeface="Avenir Next LT Pro"/>
-                        </a:rPr>
-                        <a:t>+7.2%</a:t>
-                      </a:r>
-                    </a:p>
-                  </a:txBody>
-                  <a:tcPr marL="73152" marR="73152" marT="18288" marB="18288" anchor="ctr">
-                    <a:solidFill>
-                      <a:srgbClr val="F4F6F8"/>
-                    </a:solidFill>
-                  </a:tcPr>
-                </a:tc>
-                <a:tc>
-                  <a:txBody>
-                    <a:bodyPr/>
-                    <a:lstStyle/>
-                    <a:p>
-                      <a:pPr algn="ctr"/>
-                      <a:r>
-                        <a:rPr sz="1050" b="0" i="0">
-                          <a:solidFill>
-                            <a:schemeClr val="tx1"/>
-                          </a:solidFill>
-                          <a:latin typeface="Avenir Next LT Pro"/>
-                        </a:rPr>
-                        <a:t>~18%</a:t>
-                      </a:r>
-                    </a:p>
-                  </a:txBody>
-                  <a:tcPr marL="73152" marR="73152" marT="18288" marB="18288" anchor="ctr">
-                    <a:solidFill>
-                      <a:srgbClr val="F4F6F8"/>
-                    </a:solidFill>
-                  </a:tcPr>
-                </a:tc>
-                <a:tc>
-                  <a:txBody>
-                    <a:bodyPr/>
-                    <a:lstStyle/>
-                    <a:p>
-                      <a:pPr algn="ctr"/>
-                      <a:r>
-                        <a:rPr sz="1050" b="0" i="0">
-                          <a:solidFill>
-                            <a:schemeClr val="tx1"/>
-                          </a:solidFill>
-                          <a:latin typeface="Avenir Next LT Pro"/>
-                        </a:rPr>
-                        <a:t>~15×</a:t>
-                      </a:r>
-                    </a:p>
-                  </a:txBody>
-                  <a:tcPr marL="73152" marR="73152" marT="18288" marB="18288" anchor="ctr">
-                    <a:solidFill>
-                      <a:srgbClr val="F4F6F8"/>
-                    </a:solidFill>
-                  </a:tcPr>
-                </a:tc>
-                <a:tc>
-                  <a:txBody>
-                    <a:bodyPr/>
-                    <a:lstStyle/>
-                    <a:p>
-                      <a:pPr algn="ctr"/>
-                      <a:r>
-                        <a:rPr sz="1050" b="0" i="0">
-                          <a:solidFill>
-                            <a:schemeClr val="tx1"/>
-                          </a:solidFill>
-                          <a:latin typeface="Avenir Next LT Pro"/>
-                        </a:rPr>
-                        <a:t>Outperforming</a:t>
-                      </a:r>
-                    </a:p>
-                  </a:txBody>
-                  <a:tcPr marL="73152" marR="73152" marT="18288" marB="18288" anchor="ctr">
-                    <a:solidFill>
-                      <a:srgbClr val="F4F6F8"/>
-                    </a:solidFill>
-                  </a:tcPr>
-                </a:tc>
-                <a:extLst>
-                  <a:ext uri="{0D108BD9-81ED-4DB2-BD59-A6C34878D82A}">
-                    <a16:rowId xmlns:a16="http://schemas.microsoft.com/office/drawing/2014/main" val="10002"/>
-                  </a:ext>
-                </a:extLst>
-              </a:tr>
-              <a:tr h="420624">
-                <a:tc>
-                  <a:txBody>
-                    <a:bodyPr/>
-                    <a:lstStyle/>
-                    <a:p>
-                      <a:pPr algn="l"/>
-                      <a:r>
-                        <a:rPr sz="1050" b="1" i="0">
-                          <a:solidFill>
-                            <a:schemeClr val="tx1"/>
-                          </a:solidFill>
-                          <a:latin typeface="Avenir Next LT Pro Demi"/>
-                        </a:rPr>
-                        <a:t>RH</a:t>
-                      </a:r>
-                    </a:p>
-                  </a:txBody>
-                  <a:tcPr marL="73152" marR="73152" marT="18288" marB="18288" anchor="ctr">
-                    <a:solidFill>
-                      <a:srgbClr val="FFFFFF"/>
-                    </a:solidFill>
-                  </a:tcPr>
-                </a:tc>
-                <a:tc>
-                  <a:txBody>
-                    <a:bodyPr/>
-                    <a:lstStyle/>
-                    <a:p>
-                      <a:pPr algn="ctr"/>
-                      <a:r>
-                        <a:rPr sz="1050" b="0" i="0">
-                          <a:solidFill>
-                            <a:schemeClr val="tx1"/>
-                          </a:solidFill>
-                          <a:latin typeface="Avenir Next LT Pro"/>
-                        </a:rPr>
-                        <a:t>Restoration Hardware</a:t>
-                      </a:r>
-                    </a:p>
-                  </a:txBody>
-                  <a:tcPr marL="73152" marR="73152" marT="18288" marB="18288" anchor="ctr">
-                    <a:solidFill>
-                      <a:srgbClr val="FFFFFF"/>
-                    </a:solidFill>
-                  </a:tcPr>
-                </a:tc>
-                <a:tc>
-                  <a:txBody>
-                    <a:bodyPr/>
-                    <a:lstStyle/>
-                    <a:p>
-                      <a:pPr algn="ctr"/>
-                      <a:r>
-                        <a:rPr sz="1050" b="0" i="0" dirty="0">
-                          <a:solidFill>
-                            <a:schemeClr val="tx1"/>
-                          </a:solidFill>
-                          <a:latin typeface="Avenir Next LT Pro"/>
-                        </a:rPr>
-                        <a:t>-1.4%</a:t>
-                      </a:r>
-                    </a:p>
-                  </a:txBody>
-                  <a:tcPr marL="73152" marR="73152" marT="18288" marB="18288" anchor="ctr">
-                    <a:solidFill>
-                      <a:srgbClr val="FFFFFF"/>
-                    </a:solidFill>
-                  </a:tcPr>
-                </a:tc>
-                <a:tc>
-                  <a:txBody>
-                    <a:bodyPr/>
-                    <a:lstStyle/>
-                    <a:p>
-                      <a:pPr algn="ctr"/>
-                      <a:r>
-                        <a:rPr sz="1050" b="0" i="0" dirty="0">
-                          <a:solidFill>
-                            <a:schemeClr val="tx1"/>
-                          </a:solidFill>
-                          <a:latin typeface="Avenir Next LT Pro"/>
-                        </a:rPr>
-                        <a:t>~17%</a:t>
-                      </a:r>
-                    </a:p>
-                  </a:txBody>
-                  <a:tcPr marL="73152" marR="73152" marT="18288" marB="18288" anchor="ctr">
-                    <a:solidFill>
-                      <a:srgbClr val="FFFFFF"/>
-                    </a:solidFill>
-                  </a:tcPr>
-                </a:tc>
-                <a:tc>
-                  <a:txBody>
-                    <a:bodyPr/>
-                    <a:lstStyle/>
-                    <a:p>
-                      <a:pPr algn="ctr"/>
-                      <a:r>
-                        <a:rPr sz="1050" b="0" i="0">
-                          <a:solidFill>
-                            <a:schemeClr val="tx1"/>
-                          </a:solidFill>
-                          <a:latin typeface="Avenir Next LT Pro"/>
-                        </a:rPr>
-                        <a:t>~9.3×</a:t>
-                      </a:r>
-                    </a:p>
-                  </a:txBody>
-                  <a:tcPr marL="73152" marR="73152" marT="18288" marB="18288" anchor="ctr">
-                    <a:solidFill>
-                      <a:srgbClr val="FFFFFF"/>
-                    </a:solidFill>
-                  </a:tcPr>
-                </a:tc>
-                <a:tc>
-                  <a:txBody>
-                    <a:bodyPr/>
-                    <a:lstStyle/>
-                    <a:p>
-                      <a:pPr algn="ctr"/>
-                      <a:r>
-                        <a:rPr sz="1050" b="0" i="0">
-                          <a:solidFill>
-                            <a:schemeClr val="tx1"/>
-                          </a:solidFill>
-                          <a:latin typeface="Avenir Next LT Pro"/>
-                        </a:rPr>
-                        <a:t>At Trough</a:t>
-                      </a:r>
-                    </a:p>
-                  </a:txBody>
-                  <a:tcPr marL="73152" marR="73152" marT="18288" marB="18288" anchor="ctr">
-                    <a:solidFill>
-                      <a:srgbClr val="FFFFFF"/>
-                    </a:solidFill>
-                  </a:tcPr>
-                </a:tc>
-                <a:extLst>
-                  <a:ext uri="{0D108BD9-81ED-4DB2-BD59-A6C34878D82A}">
-                    <a16:rowId xmlns:a16="http://schemas.microsoft.com/office/drawing/2014/main" val="10003"/>
-                  </a:ext>
-                </a:extLst>
-              </a:tr>
-              <a:tr h="420624">
-                <a:tc>
-                  <a:txBody>
-                    <a:bodyPr/>
-                    <a:lstStyle/>
-                    <a:p>
-                      <a:pPr algn="l"/>
-                      <a:r>
-                        <a:rPr sz="1050" b="1" i="0">
-                          <a:solidFill>
-                            <a:schemeClr val="tx1"/>
-                          </a:solidFill>
-                          <a:latin typeface="Avenir Next LT Pro Demi"/>
-                        </a:rPr>
-                        <a:t>W</a:t>
-                      </a:r>
-                    </a:p>
-                  </a:txBody>
-                  <a:tcPr marL="73152" marR="73152" marT="18288" marB="18288" anchor="ctr">
-                    <a:solidFill>
-                      <a:srgbClr val="F4F6F8"/>
-                    </a:solidFill>
-                  </a:tcPr>
-                </a:tc>
-                <a:tc>
-                  <a:txBody>
-                    <a:bodyPr/>
-                    <a:lstStyle/>
-                    <a:p>
-                      <a:pPr algn="ctr"/>
-                      <a:r>
-                        <a:rPr sz="1050" b="0" i="0">
-                          <a:solidFill>
-                            <a:schemeClr val="tx1"/>
-                          </a:solidFill>
-                          <a:latin typeface="Avenir Next LT Pro"/>
-                        </a:rPr>
-                        <a:t>Wayfair</a:t>
-                      </a:r>
-                    </a:p>
-                  </a:txBody>
-                  <a:tcPr marL="73152" marR="73152" marT="18288" marB="18288" anchor="ctr">
-                    <a:solidFill>
-                      <a:srgbClr val="F4F6F8"/>
-                    </a:solidFill>
-                  </a:tcPr>
-                </a:tc>
-                <a:tc>
-                  <a:txBody>
-                    <a:bodyPr/>
-                    <a:lstStyle/>
-                    <a:p>
-                      <a:pPr algn="ctr"/>
-                      <a:r>
-                        <a:rPr sz="1050" b="0" i="0">
-                          <a:solidFill>
-                            <a:schemeClr val="tx1"/>
-                          </a:solidFill>
-                          <a:latin typeface="Avenir Next LT Pro"/>
-                        </a:rPr>
-                        <a:t>-8.3%</a:t>
-                      </a:r>
-                    </a:p>
-                  </a:txBody>
-                  <a:tcPr marL="73152" marR="73152" marT="18288" marB="18288" anchor="ctr">
-                    <a:solidFill>
-                      <a:srgbClr val="F4F6F8"/>
-                    </a:solidFill>
-                  </a:tcPr>
-                </a:tc>
-                <a:tc>
-                  <a:txBody>
-                    <a:bodyPr/>
-                    <a:lstStyle/>
-                    <a:p>
-                      <a:pPr algn="ctr"/>
-                      <a:r>
-                        <a:rPr sz="1050" b="0" i="0">
-                          <a:solidFill>
-                            <a:schemeClr val="tx1"/>
-                          </a:solidFill>
-                          <a:latin typeface="Avenir Next LT Pro"/>
-                        </a:rPr>
-                        <a:t>~1%</a:t>
-                      </a:r>
-                    </a:p>
-                  </a:txBody>
-                  <a:tcPr marL="73152" marR="73152" marT="18288" marB="18288" anchor="ctr">
-                    <a:solidFill>
-                      <a:srgbClr val="F4F6F8"/>
-                    </a:solidFill>
-                  </a:tcPr>
-                </a:tc>
-                <a:tc>
-                  <a:txBody>
-                    <a:bodyPr/>
-                    <a:lstStyle/>
-                    <a:p>
-                      <a:pPr algn="ctr"/>
-                      <a:r>
-                        <a:rPr sz="1050" b="0" i="0" dirty="0">
-                          <a:solidFill>
-                            <a:schemeClr val="tx1"/>
-                          </a:solidFill>
-                          <a:latin typeface="Avenir Next LT Pro"/>
-                        </a:rPr>
-                        <a:t>NM</a:t>
-                      </a:r>
-                    </a:p>
-                  </a:txBody>
-                  <a:tcPr marL="73152" marR="73152" marT="18288" marB="18288" anchor="ctr">
-                    <a:solidFill>
-                      <a:srgbClr val="F4F6F8"/>
-                    </a:solidFill>
-                  </a:tcPr>
-                </a:tc>
-                <a:tc>
-                  <a:txBody>
-                    <a:bodyPr/>
-                    <a:lstStyle/>
-                    <a:p>
-                      <a:pPr algn="ctr"/>
-                      <a:r>
-                        <a:rPr sz="1050" b="0" i="0" dirty="0">
-                          <a:solidFill>
-                            <a:schemeClr val="tx1"/>
-                          </a:solidFill>
-                          <a:latin typeface="Avenir Next LT Pro"/>
-                        </a:rPr>
-                        <a:t>Underperforming</a:t>
-                      </a:r>
-                    </a:p>
-                  </a:txBody>
-                  <a:tcPr marL="73152" marR="73152" marT="18288" marB="18288" anchor="ctr">
-                    <a:solidFill>
-                      <a:srgbClr val="F4F6F8"/>
-                    </a:solidFill>
-                  </a:tcPr>
-                </a:tc>
-                <a:extLst>
-                  <a:ext uri="{0D108BD9-81ED-4DB2-BD59-A6C34878D82A}">
-                    <a16:rowId xmlns:a16="http://schemas.microsoft.com/office/drawing/2014/main" val="10004"/>
-                  </a:ext>
-                </a:extLst>
-              </a:tr>
-            </a:tbl>
-          </a:graphicData>
-        </a:graphic>
-      </p:graphicFrame>
-      <p:sp>
-        <p:nvSpPr>
-          <p:cNvPr id="7" name="TextBox 6"/>
-          <p:cNvSpPr txBox="1"/>
-          <p:nvPr/>
-        </p:nvSpPr>
-        <p:spPr>
-          <a:xfrm>
-            <a:off x="457200" y="3749039"/>
-            <a:ext cx="8229600" cy="415498"/>
-          </a:xfrm>
-          <a:prstGeom prst="rect">
-            <a:avLst/>
-          </a:prstGeom>
-          <a:noFill/>
-          <a:ln>
-            <a:noFill/>
-          </a:ln>
-        </p:spPr>
-        <p:txBody>
-          <a:bodyPr wrap="square">
-            <a:spAutoFit/>
-          </a:bodyPr>
-          <a:lstStyle/>
-          <a:p>
-            <a:r>
-              <a:rPr sz="1100" b="1" i="0" dirty="0">
-                <a:solidFill/>
-                <a:latin typeface="Avenir Next LT Pro Demi"/>
-              </a:rPr>
-              <a:t>The real competitor is Arhaus, not European luxury.</a:t>
-            </a:r>
-          </a:p>
-          <a:p>
-            <a:r>
-              <a:rPr sz="1000" b="0" i="0" dirty="0">
-                <a:solidFill/>
-                <a:latin typeface="Avenir Next LT Pro"/>
-              </a:rPr>
-              <a:t>RH's negative CAGR is self-inflicted + housing — not lost share. Estates moves RH up, out of Arhaus's tier</a:t>
-            </a:r>
-            <a:endParaRPr sz="1000" b="0" i="0" dirty="0">
-              <a:solidFill>
-                <a:srgbClr val="5A5A5A"/>
-              </a:solidFill>
-              <a:latin typeface="Avenir Next LT Pro"/>
-            </a:endParaRPr>
+              <a:t>Sources: RH FY2025 10-K &amp; Q1 FY2026 10-Q; market data as of Jul 2026.</a:t>
+            </a:r>
           </a:p>
         </p:txBody>
       </p:sp>
@@ -10707,2601 +12986,6 @@
       </p:transition>
     </mc:Fallback>
   </mc:AlternateContent>
-</p:sld>
-</file>
-
-<file path=ppt/slides/slide20.xml><?xml version="1.0" encoding="utf-8"?>
-<p:sld xmlns:a="http://schemas.openxmlformats.org/drawingml/2006/main" xmlns:r="http://schemas.openxmlformats.org/officeDocument/2006/relationships" xmlns:p="http://schemas.openxmlformats.org/presentationml/2006/main">
-  <p:cSld>
-    <p:spTree>
-      <p:nvGrpSpPr>
-        <p:cNvPr id="1" name=""/>
-        <p:cNvGrpSpPr/>
-        <p:nvPr/>
-      </p:nvGrpSpPr>
-      <p:grpSpPr>
-        <a:xfrm>
-          <a:off x="0" y="0"/>
-          <a:ext cx="0" cy="0"/>
-          <a:chOff x="0" y="0"/>
-          <a:chExt cx="0" cy="0"/>
-        </a:xfrm>
-      </p:grpSpPr>
-      <p:sp>
-        <p:nvSpPr>
-          <p:cNvPr id="2" name="TextBox 1"/>
-          <p:cNvSpPr txBox="1"/>
-          <p:nvPr/>
-        </p:nvSpPr>
-        <p:spPr>
-          <a:xfrm>
-            <a:off x="457198" y="274320"/>
-            <a:ext cx="8229600" cy="446276"/>
-          </a:xfrm>
-          <a:prstGeom prst="rect">
-            <a:avLst/>
-          </a:prstGeom>
-          <a:noFill/>
-          <a:ln>
-            <a:noFill/>
-          </a:ln>
-        </p:spPr>
-        <p:txBody>
-          <a:bodyPr wrap="square">
-            <a:spAutoFit/>
-          </a:bodyPr>
-          <a:lstStyle/>
-          <a:p>
-            <a:r>
-              <a:rPr sz="2300" b="0" i="0" dirty="0">
-                <a:solidFill/>
-                <a:latin typeface="Avenir Next LT Pro Demi"/>
-              </a:rPr>
-              <a:t>Key Risks — What Has to Go Wrong</a:t>
-            </a:r>
-          </a:p>
-        </p:txBody>
-      </p:sp>
-      <p:sp>
-        <p:nvSpPr>
-          <p:cNvPr id="5" name="TextBox 4"/>
-          <p:cNvSpPr txBox="1"/>
-          <p:nvPr/>
-        </p:nvSpPr>
-        <p:spPr>
-          <a:xfrm>
-            <a:off x="457200" y="1051560"/>
-            <a:ext cx="8229600" cy="274320"/>
-          </a:xfrm>
-          <a:prstGeom prst="rect">
-            <a:avLst/>
-          </a:prstGeom>
-          <a:noFill/>
-          <a:ln>
-            <a:noFill/>
-          </a:ln>
-        </p:spPr>
-        <p:txBody>
-          <a:bodyPr wrap="none">
-            <a:spAutoFit/>
-          </a:bodyPr>
-          <a:lstStyle/>
-          <a:p>
-            <a:r>
-              <a:rPr sz="900" b="0" i="1">
-                <a:solidFill>
-                  <a:srgbClr val="B0B0B0"/>
-                </a:solidFill>
-                <a:latin typeface="Avenir Next LT Pro"/>
-              </a:rPr>
-              <a:t>[ narrative / commentary to be written ]</a:t>
-            </a:r>
-          </a:p>
-        </p:txBody>
-      </p:sp>
-      <p:sp>
-        <p:nvSpPr>
-          <p:cNvPr id="6" name="Rectangle 5"/>
-          <p:cNvSpPr/>
-          <p:nvPr/>
-        </p:nvSpPr>
-        <p:spPr>
-          <a:xfrm>
-            <a:off x="457200" y="1554480"/>
-            <a:ext cx="3977639" cy="960120"/>
-          </a:xfrm>
-          <a:prstGeom prst="rect">
-            <a:avLst/>
-          </a:prstGeom>
-          <a:solidFill>
-            <a:srgbClr val="FFFFFF"/>
-          </a:solidFill>
-          <a:ln w="12700">
-            <a:solidFill>
-              <a:srgbClr val="E8E8E8"/>
-            </a:solidFill>
-          </a:ln>
-        </p:spPr>
-        <p:style>
-          <a:lnRef idx="1">
-            <a:schemeClr val="accent1"/>
-          </a:lnRef>
-          <a:fillRef idx="3">
-            <a:schemeClr val="accent1"/>
-          </a:fillRef>
-          <a:effectRef idx="2">
-            <a:schemeClr val="accent1"/>
-          </a:effectRef>
-          <a:fontRef idx="minor">
-            <a:schemeClr val="lt1"/>
-          </a:fontRef>
-        </p:style>
-        <p:txBody>
-          <a:bodyPr wrap="square" lIns="182880" rtlCol="0" anchor="ctr"/>
-          <a:lstStyle/>
-          <a:p>
-            <a:pPr algn="ctr"/>
-            <a:r>
-              <a:rPr sz="1200" b="1" i="0" dirty="0">
-                <a:solidFill>
-                  <a:srgbClr val="0E2841"/>
-                </a:solidFill>
-                <a:latin typeface="Avenir Next LT Pro Demi"/>
-              </a:rPr>
-              <a:t>Housing stays depressed through 2027</a:t>
-            </a:r>
-          </a:p>
-          <a:p>
-            <a:r>
-              <a:rPr sz="950" b="1" i="0" dirty="0">
-                <a:solidFill>
-                  <a:srgbClr val="B03030"/>
-                </a:solidFill>
-                <a:latin typeface="Avenir Next LT Pro"/>
-              </a:rPr>
-              <a:t>Severity: HIGH   ·   Probability:</a:t>
-            </a:r>
-          </a:p>
-        </p:txBody>
-      </p:sp>
-      <p:sp>
-        <p:nvSpPr>
-          <p:cNvPr id="7" name="Rectangle 6"/>
-          <p:cNvSpPr/>
-          <p:nvPr/>
-        </p:nvSpPr>
-        <p:spPr>
-          <a:xfrm>
-            <a:off x="457200" y="1554480"/>
-            <a:ext cx="73152" cy="960120"/>
-          </a:xfrm>
-          <a:prstGeom prst="rect">
-            <a:avLst/>
-          </a:prstGeom>
-          <a:solidFill>
-            <a:srgbClr val="B03030"/>
-          </a:solidFill>
-          <a:ln>
-            <a:solidFill/>
-          </a:ln>
-        </p:spPr>
-        <p:style>
-          <a:lnRef idx="1">
-            <a:schemeClr val="accent1"/>
-          </a:lnRef>
-          <a:fillRef idx="3">
-            <a:schemeClr val="accent1"/>
-          </a:fillRef>
-          <a:effectRef idx="2">
-            <a:schemeClr val="accent1"/>
-          </a:effectRef>
-          <a:fontRef idx="minor">
-            <a:schemeClr val="lt1"/>
-          </a:fontRef>
-        </p:style>
-        <p:txBody>
-          <a:bodyPr rtlCol="0" anchor="ctr"/>
-          <a:lstStyle/>
-          <a:p>
-            <a:pPr algn="ctr"/>
-            <a:endParaRPr/>
-          </a:p>
-        </p:txBody>
-      </p:sp>
-      <p:sp>
-        <p:nvSpPr>
-          <p:cNvPr id="8" name="Rectangle 7"/>
-          <p:cNvSpPr/>
-          <p:nvPr/>
-        </p:nvSpPr>
-        <p:spPr>
-          <a:xfrm>
-            <a:off x="4709159" y="1554480"/>
-            <a:ext cx="3977639" cy="960120"/>
-          </a:xfrm>
-          <a:prstGeom prst="rect">
-            <a:avLst/>
-          </a:prstGeom>
-          <a:solidFill>
-            <a:srgbClr val="FFFFFF"/>
-          </a:solidFill>
-          <a:ln w="12700">
-            <a:solidFill>
-              <a:srgbClr val="E8E8E8"/>
-            </a:solidFill>
-          </a:ln>
-        </p:spPr>
-        <p:style>
-          <a:lnRef idx="1">
-            <a:schemeClr val="accent1"/>
-          </a:lnRef>
-          <a:fillRef idx="3">
-            <a:schemeClr val="accent1"/>
-          </a:fillRef>
-          <a:effectRef idx="2">
-            <a:schemeClr val="accent1"/>
-          </a:effectRef>
-          <a:fontRef idx="minor">
-            <a:schemeClr val="lt1"/>
-          </a:fontRef>
-        </p:style>
-        <p:txBody>
-          <a:bodyPr wrap="square" lIns="182880" rtlCol="0" anchor="ctr"/>
-          <a:lstStyle/>
-          <a:p>
-            <a:pPr algn="ctr"/>
-            <a:r>
-              <a:rPr sz="1200" b="1" i="0" dirty="0">
-                <a:solidFill>
-                  <a:srgbClr val="0E2841"/>
-                </a:solidFill>
-                <a:latin typeface="Avenir Next LT Pro Demi"/>
-              </a:rPr>
-              <a:t>Balance-sheet stress — ~4.0× levered, ~$225M/yr interest</a:t>
-            </a:r>
-          </a:p>
-          <a:p>
-            <a:r>
-              <a:rPr sz="950" b="1" i="0" dirty="0">
-                <a:solidFill>
-                  <a:srgbClr val="B03030"/>
-                </a:solidFill>
-                <a:latin typeface="Avenir Next LT Pro"/>
-              </a:rPr>
-              <a:t>Severity: HIGH   ·   Probability:</a:t>
-            </a:r>
-          </a:p>
-        </p:txBody>
-      </p:sp>
-      <p:sp>
-        <p:nvSpPr>
-          <p:cNvPr id="9" name="Rectangle 8"/>
-          <p:cNvSpPr/>
-          <p:nvPr/>
-        </p:nvSpPr>
-        <p:spPr>
-          <a:xfrm>
-            <a:off x="4709159" y="1554480"/>
-            <a:ext cx="73152" cy="960120"/>
-          </a:xfrm>
-          <a:prstGeom prst="rect">
-            <a:avLst/>
-          </a:prstGeom>
-          <a:solidFill>
-            <a:srgbClr val="B03030"/>
-          </a:solidFill>
-          <a:ln>
-            <a:solidFill/>
-          </a:ln>
-        </p:spPr>
-        <p:style>
-          <a:lnRef idx="1">
-            <a:schemeClr val="accent1"/>
-          </a:lnRef>
-          <a:fillRef idx="3">
-            <a:schemeClr val="accent1"/>
-          </a:fillRef>
-          <a:effectRef idx="2">
-            <a:schemeClr val="accent1"/>
-          </a:effectRef>
-          <a:fontRef idx="minor">
-            <a:schemeClr val="lt1"/>
-          </a:fontRef>
-        </p:style>
-        <p:txBody>
-          <a:bodyPr rtlCol="0" anchor="ctr"/>
-          <a:lstStyle/>
-          <a:p>
-            <a:pPr algn="ctr"/>
-            <a:endParaRPr/>
-          </a:p>
-        </p:txBody>
-      </p:sp>
-      <p:sp>
-        <p:nvSpPr>
-          <p:cNvPr id="10" name="Rectangle 9"/>
-          <p:cNvSpPr/>
-          <p:nvPr/>
-        </p:nvSpPr>
-        <p:spPr>
-          <a:xfrm>
-            <a:off x="457200" y="2679191"/>
-            <a:ext cx="3977639" cy="960120"/>
-          </a:xfrm>
-          <a:prstGeom prst="rect">
-            <a:avLst/>
-          </a:prstGeom>
-          <a:solidFill>
-            <a:srgbClr val="FFFFFF"/>
-          </a:solidFill>
-          <a:ln w="12700">
-            <a:solidFill>
-              <a:srgbClr val="E8E8E8"/>
-            </a:solidFill>
-          </a:ln>
-        </p:spPr>
-        <p:style>
-          <a:lnRef idx="1">
-            <a:schemeClr val="accent1"/>
-          </a:lnRef>
-          <a:fillRef idx="3">
-            <a:schemeClr val="accent1"/>
-          </a:fillRef>
-          <a:effectRef idx="2">
-            <a:schemeClr val="accent1"/>
-          </a:effectRef>
-          <a:fontRef idx="minor">
-            <a:schemeClr val="lt1"/>
-          </a:fontRef>
-        </p:style>
-        <p:txBody>
-          <a:bodyPr wrap="square" lIns="182880" rtlCol="0" anchor="ctr"/>
-          <a:lstStyle/>
-          <a:p>
-            <a:pPr algn="ctr"/>
-            <a:r>
-              <a:rPr sz="1200" b="1" i="0" dirty="0">
-                <a:solidFill>
-                  <a:srgbClr val="0E2841"/>
-                </a:solidFill>
-                <a:latin typeface="Avenir Next LT Pro Demi"/>
-              </a:rPr>
-              <a:t>International execution failure</a:t>
-            </a:r>
-          </a:p>
-          <a:p>
-            <a:r>
-              <a:rPr sz="950" b="1" i="0" dirty="0">
-                <a:solidFill>
-                  <a:srgbClr val="C88A12"/>
-                </a:solidFill>
-                <a:latin typeface="Avenir Next LT Pro"/>
-              </a:rPr>
-              <a:t>Severity: MED   ·   Probability:</a:t>
-            </a:r>
-          </a:p>
-        </p:txBody>
-      </p:sp>
-      <p:sp>
-        <p:nvSpPr>
-          <p:cNvPr id="11" name="Rectangle 10"/>
-          <p:cNvSpPr/>
-          <p:nvPr/>
-        </p:nvSpPr>
-        <p:spPr>
-          <a:xfrm>
-            <a:off x="457200" y="2679191"/>
-            <a:ext cx="73152" cy="960120"/>
-          </a:xfrm>
-          <a:prstGeom prst="rect">
-            <a:avLst/>
-          </a:prstGeom>
-          <a:solidFill>
-            <a:srgbClr val="C88A12"/>
-          </a:solidFill>
-          <a:ln>
-            <a:solidFill/>
-          </a:ln>
-        </p:spPr>
-        <p:style>
-          <a:lnRef idx="1">
-            <a:schemeClr val="accent1"/>
-          </a:lnRef>
-          <a:fillRef idx="3">
-            <a:schemeClr val="accent1"/>
-          </a:fillRef>
-          <a:effectRef idx="2">
-            <a:schemeClr val="accent1"/>
-          </a:effectRef>
-          <a:fontRef idx="minor">
-            <a:schemeClr val="lt1"/>
-          </a:fontRef>
-        </p:style>
-        <p:txBody>
-          <a:bodyPr rtlCol="0" anchor="ctr"/>
-          <a:lstStyle/>
-          <a:p>
-            <a:pPr algn="ctr"/>
-            <a:endParaRPr/>
-          </a:p>
-        </p:txBody>
-      </p:sp>
-      <p:sp>
-        <p:nvSpPr>
-          <p:cNvPr id="12" name="Rectangle 11"/>
-          <p:cNvSpPr/>
-          <p:nvPr/>
-        </p:nvSpPr>
-        <p:spPr>
-          <a:xfrm>
-            <a:off x="4709159" y="2679191"/>
-            <a:ext cx="3977639" cy="960120"/>
-          </a:xfrm>
-          <a:prstGeom prst="rect">
-            <a:avLst/>
-          </a:prstGeom>
-          <a:solidFill>
-            <a:srgbClr val="FFFFFF"/>
-          </a:solidFill>
-          <a:ln w="12700">
-            <a:solidFill>
-              <a:srgbClr val="E8E8E8"/>
-            </a:solidFill>
-          </a:ln>
-        </p:spPr>
-        <p:style>
-          <a:lnRef idx="1">
-            <a:schemeClr val="accent1"/>
-          </a:lnRef>
-          <a:fillRef idx="3">
-            <a:schemeClr val="accent1"/>
-          </a:fillRef>
-          <a:effectRef idx="2">
-            <a:schemeClr val="accent1"/>
-          </a:effectRef>
-          <a:fontRef idx="minor">
-            <a:schemeClr val="lt1"/>
-          </a:fontRef>
-        </p:style>
-        <p:txBody>
-          <a:bodyPr wrap="square" lIns="182880" rtlCol="0" anchor="ctr"/>
-          <a:lstStyle/>
-          <a:p>
-            <a:pPr algn="ctr"/>
-            <a:r>
-              <a:rPr sz="1200" b="1" i="0" dirty="0">
-                <a:solidFill>
-                  <a:srgbClr val="0E2841"/>
-                </a:solidFill>
-                <a:latin typeface="Avenir Next LT Pro Demi"/>
-              </a:rPr>
-              <a:t>Tariff / supply-chain disruption</a:t>
-            </a:r>
-          </a:p>
-          <a:p>
-            <a:r>
-              <a:rPr sz="950" b="1" i="0" dirty="0">
-                <a:solidFill>
-                  <a:srgbClr val="C88A12"/>
-                </a:solidFill>
-                <a:latin typeface="Avenir Next LT Pro"/>
-              </a:rPr>
-              <a:t>Severity: MED   ·   Probability:</a:t>
-            </a:r>
-          </a:p>
-        </p:txBody>
-      </p:sp>
-      <p:sp>
-        <p:nvSpPr>
-          <p:cNvPr id="13" name="Rectangle 12"/>
-          <p:cNvSpPr/>
-          <p:nvPr/>
-        </p:nvSpPr>
-        <p:spPr>
-          <a:xfrm>
-            <a:off x="4709159" y="2679191"/>
-            <a:ext cx="73152" cy="960120"/>
-          </a:xfrm>
-          <a:prstGeom prst="rect">
-            <a:avLst/>
-          </a:prstGeom>
-          <a:solidFill>
-            <a:srgbClr val="C88A12"/>
-          </a:solidFill>
-          <a:ln>
-            <a:solidFill/>
-          </a:ln>
-        </p:spPr>
-        <p:style>
-          <a:lnRef idx="1">
-            <a:schemeClr val="accent1"/>
-          </a:lnRef>
-          <a:fillRef idx="3">
-            <a:schemeClr val="accent1"/>
-          </a:fillRef>
-          <a:effectRef idx="2">
-            <a:schemeClr val="accent1"/>
-          </a:effectRef>
-          <a:fontRef idx="minor">
-            <a:schemeClr val="lt1"/>
-          </a:fontRef>
-        </p:style>
-        <p:txBody>
-          <a:bodyPr rtlCol="0" anchor="ctr"/>
-          <a:lstStyle/>
-          <a:p>
-            <a:pPr algn="ctr"/>
-            <a:endParaRPr/>
-          </a:p>
-        </p:txBody>
-      </p:sp>
-      <p:sp>
-        <p:nvSpPr>
-          <p:cNvPr id="14" name="Rectangle 13"/>
-          <p:cNvSpPr/>
-          <p:nvPr/>
-        </p:nvSpPr>
-        <p:spPr>
-          <a:xfrm>
-            <a:off x="457200" y="3803904"/>
-            <a:ext cx="3977639" cy="960120"/>
-          </a:xfrm>
-          <a:prstGeom prst="rect">
-            <a:avLst/>
-          </a:prstGeom>
-          <a:solidFill>
-            <a:srgbClr val="FFFFFF"/>
-          </a:solidFill>
-          <a:ln w="12700">
-            <a:solidFill>
-              <a:srgbClr val="E8E8E8"/>
-            </a:solidFill>
-          </a:ln>
-        </p:spPr>
-        <p:style>
-          <a:lnRef idx="1">
-            <a:schemeClr val="accent1"/>
-          </a:lnRef>
-          <a:fillRef idx="3">
-            <a:schemeClr val="accent1"/>
-          </a:fillRef>
-          <a:effectRef idx="2">
-            <a:schemeClr val="accent1"/>
-          </a:effectRef>
-          <a:fontRef idx="minor">
-            <a:schemeClr val="lt1"/>
-          </a:fontRef>
-        </p:style>
-        <p:txBody>
-          <a:bodyPr wrap="square" lIns="182880" rtlCol="0" anchor="ctr"/>
-          <a:lstStyle/>
-          <a:p>
-            <a:pPr algn="ctr"/>
-            <a:r>
-              <a:rPr sz="1200" b="1" i="0" dirty="0">
-                <a:solidFill>
-                  <a:srgbClr val="0E2841"/>
-                </a:solidFill>
-                <a:latin typeface="Avenir Next LT Pro Demi"/>
-              </a:rPr>
-              <a:t>Friedman key-man dependency</a:t>
-            </a:r>
-          </a:p>
-          <a:p>
-            <a:r>
-              <a:rPr sz="950" b="1" i="0" dirty="0">
-                <a:solidFill>
-                  <a:srgbClr val="B03030"/>
-                </a:solidFill>
-                <a:latin typeface="Avenir Next LT Pro"/>
-              </a:rPr>
-              <a:t>Severity: HIGH   ·   Probability:</a:t>
-            </a:r>
-          </a:p>
-        </p:txBody>
-      </p:sp>
-      <p:sp>
-        <p:nvSpPr>
-          <p:cNvPr id="15" name="Rectangle 14"/>
-          <p:cNvSpPr/>
-          <p:nvPr/>
-        </p:nvSpPr>
-        <p:spPr>
-          <a:xfrm>
-            <a:off x="457200" y="3803904"/>
-            <a:ext cx="73152" cy="960120"/>
-          </a:xfrm>
-          <a:prstGeom prst="rect">
-            <a:avLst/>
-          </a:prstGeom>
-          <a:solidFill>
-            <a:srgbClr val="B03030"/>
-          </a:solidFill>
-          <a:ln>
-            <a:solidFill/>
-          </a:ln>
-        </p:spPr>
-        <p:style>
-          <a:lnRef idx="1">
-            <a:schemeClr val="accent1"/>
-          </a:lnRef>
-          <a:fillRef idx="3">
-            <a:schemeClr val="accent1"/>
-          </a:fillRef>
-          <a:effectRef idx="2">
-            <a:schemeClr val="accent1"/>
-          </a:effectRef>
-          <a:fontRef idx="minor">
-            <a:schemeClr val="lt1"/>
-          </a:fontRef>
-        </p:style>
-        <p:txBody>
-          <a:bodyPr rtlCol="0" anchor="ctr"/>
-          <a:lstStyle/>
-          <a:p>
-            <a:pPr algn="ctr"/>
-            <a:endParaRPr/>
-          </a:p>
-        </p:txBody>
-      </p:sp>
-      <p:sp>
-        <p:nvSpPr>
-          <p:cNvPr id="16" name="Rectangle 15"/>
-          <p:cNvSpPr/>
-          <p:nvPr/>
-        </p:nvSpPr>
-        <p:spPr>
-          <a:xfrm>
-            <a:off x="4709159" y="3803904"/>
-            <a:ext cx="3977639" cy="960120"/>
-          </a:xfrm>
-          <a:prstGeom prst="rect">
-            <a:avLst/>
-          </a:prstGeom>
-          <a:solidFill>
-            <a:srgbClr val="FFFFFF"/>
-          </a:solidFill>
-          <a:ln w="12700">
-            <a:solidFill>
-              <a:srgbClr val="E8E8E8"/>
-            </a:solidFill>
-          </a:ln>
-        </p:spPr>
-        <p:style>
-          <a:lnRef idx="1">
-            <a:schemeClr val="accent1"/>
-          </a:lnRef>
-          <a:fillRef idx="3">
-            <a:schemeClr val="accent1"/>
-          </a:fillRef>
-          <a:effectRef idx="2">
-            <a:schemeClr val="accent1"/>
-          </a:effectRef>
-          <a:fontRef idx="minor">
-            <a:schemeClr val="lt1"/>
-          </a:fontRef>
-        </p:style>
-        <p:txBody>
-          <a:bodyPr wrap="square" lIns="182880" rtlCol="0" anchor="ctr"/>
-          <a:lstStyle/>
-          <a:p>
-            <a:pPr algn="ctr"/>
-            <a:r>
-              <a:rPr sz="1200" b="1" i="0" dirty="0">
-                <a:solidFill>
-                  <a:srgbClr val="0E2841"/>
-                </a:solidFill>
-                <a:latin typeface="Avenir Next LT Pro Demi"/>
-              </a:rPr>
-              <a:t>Broad consumer / discretionary recession</a:t>
-            </a:r>
-          </a:p>
-          <a:p>
-            <a:r>
-              <a:rPr sz="950" b="1" i="0" dirty="0">
-                <a:solidFill>
-                  <a:srgbClr val="C88A12"/>
-                </a:solidFill>
-                <a:latin typeface="Avenir Next LT Pro"/>
-              </a:rPr>
-              <a:t>Severity: MED   ·   Probability:</a:t>
-            </a:r>
-          </a:p>
-        </p:txBody>
-      </p:sp>
-      <p:sp>
-        <p:nvSpPr>
-          <p:cNvPr id="17" name="Rectangle 16"/>
-          <p:cNvSpPr/>
-          <p:nvPr/>
-        </p:nvSpPr>
-        <p:spPr>
-          <a:xfrm>
-            <a:off x="4709159" y="3803904"/>
-            <a:ext cx="73152" cy="960120"/>
-          </a:xfrm>
-          <a:prstGeom prst="rect">
-            <a:avLst/>
-          </a:prstGeom>
-          <a:solidFill>
-            <a:srgbClr val="C88A12"/>
-          </a:solidFill>
-          <a:ln>
-            <a:solidFill/>
-          </a:ln>
-        </p:spPr>
-        <p:style>
-          <a:lnRef idx="1">
-            <a:schemeClr val="accent1"/>
-          </a:lnRef>
-          <a:fillRef idx="3">
-            <a:schemeClr val="accent1"/>
-          </a:fillRef>
-          <a:effectRef idx="2">
-            <a:schemeClr val="accent1"/>
-          </a:effectRef>
-          <a:fontRef idx="minor">
-            <a:schemeClr val="lt1"/>
-          </a:fontRef>
-        </p:style>
-        <p:txBody>
-          <a:bodyPr rtlCol="0" anchor="ctr"/>
-          <a:lstStyle/>
-          <a:p>
-            <a:pPr algn="ctr"/>
-            <a:endParaRPr/>
-          </a:p>
-        </p:txBody>
-      </p:sp>
-      <p:sp>
-        <p:nvSpPr>
-          <p:cNvPr id="18" name="Rectangle 17"/>
-          <p:cNvSpPr/>
-          <p:nvPr/>
-        </p:nvSpPr>
-        <p:spPr>
-          <a:xfrm>
-            <a:off x="457200" y="4928616"/>
-            <a:ext cx="3977639" cy="960120"/>
-          </a:xfrm>
-          <a:prstGeom prst="rect">
-            <a:avLst/>
-          </a:prstGeom>
-          <a:solidFill>
-            <a:srgbClr val="FFFFFF"/>
-          </a:solidFill>
-          <a:ln w="12700">
-            <a:solidFill>
-              <a:srgbClr val="E8E8E8"/>
-            </a:solidFill>
-          </a:ln>
-        </p:spPr>
-        <p:style>
-          <a:lnRef idx="1">
-            <a:schemeClr val="accent1"/>
-          </a:lnRef>
-          <a:fillRef idx="3">
-            <a:schemeClr val="accent1"/>
-          </a:fillRef>
-          <a:effectRef idx="2">
-            <a:schemeClr val="accent1"/>
-          </a:effectRef>
-          <a:fontRef idx="minor">
-            <a:schemeClr val="lt1"/>
-          </a:fontRef>
-        </p:style>
-        <p:txBody>
-          <a:bodyPr wrap="square" lIns="182880" rtlCol="0" anchor="ctr"/>
-          <a:lstStyle/>
-          <a:p>
-            <a:pPr algn="ctr"/>
-            <a:r>
-              <a:rPr sz="1200" b="1">
-                <a:solidFill>
-                  <a:srgbClr val="0E2841"/>
-                </a:solidFill>
-                <a:latin typeface="Avenir Next LT Pro Demi"/>
-              </a:rPr>
-              <a:t>Fulfillment / delivery execution (moat risk at Estates tier)</a:t>
-            </a:r>
-          </a:p>
-          <a:p>
-            <a:r>
-              <a:rPr sz="950" b="1">
-                <a:solidFill>
-                  <a:srgbClr val="C88A12"/>
-                </a:solidFill>
-                <a:latin typeface="Avenir Next LT Pro"/>
-              </a:rPr>
-              <a:t>Severity: MED   ·   Probability: 30%</a:t>
-            </a:r>
-          </a:p>
-        </p:txBody>
-      </p:sp>
-      <p:sp>
-        <p:nvSpPr>
-          <p:cNvPr id="19" name="Rectangle 18"/>
-          <p:cNvSpPr/>
-          <p:nvPr/>
-        </p:nvSpPr>
-        <p:spPr>
-          <a:xfrm>
-            <a:off x="457200" y="4928616"/>
-            <a:ext cx="73152" cy="960120"/>
-          </a:xfrm>
-          <a:prstGeom prst="rect">
-            <a:avLst/>
-          </a:prstGeom>
-          <a:solidFill>
-            <a:srgbClr val="C88A12"/>
-          </a:solidFill>
-          <a:ln>
-            <a:solidFill/>
-          </a:ln>
-        </p:spPr>
-        <p:style>
-          <a:lnRef idx="1">
-            <a:schemeClr val="accent1"/>
-          </a:lnRef>
-          <a:fillRef idx="3">
-            <a:schemeClr val="accent1"/>
-          </a:fillRef>
-          <a:effectRef idx="2">
-            <a:schemeClr val="accent1"/>
-          </a:effectRef>
-          <a:fontRef idx="minor">
-            <a:schemeClr val="lt1"/>
-          </a:fontRef>
-        </p:style>
-        <p:txBody>
-          <a:bodyPr rtlCol="0" anchor="ctr"/>
-          <a:lstStyle/>
-          <a:p>
-            <a:pPr algn="ctr"/>
-            <a:endParaRPr/>
-          </a:p>
-        </p:txBody>
-      </p:sp>
-    </p:spTree>
-  </p:cSld>
-  <p:clrMapOvr>
-    <a:masterClrMapping/>
-  </p:clrMapOvr>
-</p:sld>
-</file>
-
-<file path=ppt/slides/slide21.xml><?xml version="1.0" encoding="utf-8"?>
-<p:sld xmlns:a="http://schemas.openxmlformats.org/drawingml/2006/main" xmlns:p="http://schemas.openxmlformats.org/presentationml/2006/main" xmlns:r="http://schemas.openxmlformats.org/officeDocument/2006/relationships">
-  <p:cSld>
-    <p:spTree>
-      <p:nvGrpSpPr>
-        <p:cNvPr id="1" name=""/>
-        <p:cNvGrpSpPr/>
-        <p:nvPr/>
-      </p:nvGrpSpPr>
-      <p:grpSpPr/>
-      <p:sp>
-        <p:nvSpPr>
-          <p:cNvPr id="2" name="TextBox 1"/>
-          <p:cNvSpPr txBox="1"/>
-          <p:nvPr/>
-        </p:nvSpPr>
-        <p:spPr>
-          <a:xfrm>
-            <a:off x="457200" y="365760"/>
-            <a:ext cx="8229600" cy="548640"/>
-          </a:xfrm>
-          <a:prstGeom prst="rect">
-            <a:avLst/>
-          </a:prstGeom>
-          <a:noFill/>
-          <a:ln>
-            <a:noFill/>
-          </a:ln>
-        </p:spPr>
-        <p:txBody>
-          <a:bodyPr wrap="square">
-            <a:spAutoFit/>
-          </a:bodyPr>
-          <a:lstStyle/>
-          <a:p>
-            <a:r>
-              <a:rPr sz="2100">
-                <a:solidFill>
-                  <a:srgbClr val="000000"/>
-                </a:solidFill>
-                <a:latin typeface="Avenir Next LT Pro Demi"/>
-              </a:rPr>
-              <a:t>Trough → Recovery: Where RH Stands</a:t>
-            </a:r>
-          </a:p>
-        </p:txBody>
-      </p:sp>
-      <p:sp>
-        <p:nvSpPr>
-          <p:cNvPr id="3" name="Rectangle 2"/>
-          <p:cNvSpPr/>
-          <p:nvPr/>
-        </p:nvSpPr>
-        <p:spPr>
-          <a:xfrm>
-            <a:off x="457200" y="960120"/>
-            <a:ext cx="8229600" cy="25603"/>
-          </a:xfrm>
-          <a:prstGeom prst="rect">
-            <a:avLst/>
-          </a:prstGeom>
-          <a:solidFill>
-            <a:srgbClr val="000000"/>
-          </a:solidFill>
-          <a:ln>
-            <a:noFill/>
-          </a:ln>
-        </p:spPr>
-        <p:style>
-          <a:lnRef idx="1">
-            <a:schemeClr val="accent1"/>
-          </a:lnRef>
-          <a:fillRef idx="3">
-            <a:schemeClr val="accent1"/>
-          </a:fillRef>
-          <a:effectRef idx="2">
-            <a:schemeClr val="accent1"/>
-          </a:effectRef>
-          <a:fontRef idx="minor">
-            <a:schemeClr val="lt1"/>
-          </a:fontRef>
-        </p:style>
-        <p:txBody>
-          <a:bodyPr rtlCol="0" anchor="ctr"/>
-          <a:lstStyle/>
-          <a:p>
-            <a:pPr algn="ctr"/>
-          </a:p>
-        </p:txBody>
-      </p:sp>
-      <p:sp>
-        <p:nvSpPr>
-          <p:cNvPr id="4" name="TextBox 3"/>
-          <p:cNvSpPr txBox="1"/>
-          <p:nvPr/>
-        </p:nvSpPr>
-        <p:spPr>
-          <a:xfrm>
-            <a:off x="457200" y="1143000"/>
-            <a:ext cx="8229600" cy="548640"/>
-          </a:xfrm>
-          <a:prstGeom prst="rect">
-            <a:avLst/>
-          </a:prstGeom>
-          <a:noFill/>
-          <a:ln>
-            <a:noFill/>
-          </a:ln>
-        </p:spPr>
-        <p:txBody>
-          <a:bodyPr wrap="square">
-            <a:spAutoFit/>
-          </a:bodyPr>
-          <a:lstStyle/>
-          <a:p>
-            <a:r>
-              <a:rPr sz="1100" b="0" i="0">
-                <a:solidFill>
-                  <a:srgbClr val="000000"/>
-                </a:solidFill>
-                <a:latin typeface="Avenir Next LT Pro"/>
-              </a:rPr>
-              <a:t>Peaked ~$3.6B (FY22) on a housing boom + debt-funded buybacks; housing then froze — revenue fell to a ~$3.0B trough with ~$2.4B net debt.</a:t>
-            </a:r>
-          </a:p>
-        </p:txBody>
-      </p:sp>
-      <p:sp>
-        <p:nvSpPr>
-          <p:cNvPr id="5" name="Rectangle 4"/>
-          <p:cNvSpPr/>
-          <p:nvPr/>
-        </p:nvSpPr>
-        <p:spPr>
-          <a:xfrm>
-            <a:off x="457200" y="1874519"/>
-            <a:ext cx="3977639" cy="384048"/>
-          </a:xfrm>
-          <a:prstGeom prst="rect">
-            <a:avLst/>
-          </a:prstGeom>
-          <a:solidFill>
-            <a:srgbClr val="196B24"/>
-          </a:solidFill>
-          <a:ln>
-            <a:noFill/>
-          </a:ln>
-        </p:spPr>
-        <p:style>
-          <a:lnRef idx="1">
-            <a:schemeClr val="accent1"/>
-          </a:lnRef>
-          <a:fillRef idx="3">
-            <a:schemeClr val="accent1"/>
-          </a:fillRef>
-          <a:effectRef idx="2">
-            <a:schemeClr val="accent1"/>
-          </a:effectRef>
-          <a:fontRef idx="minor">
-            <a:schemeClr val="lt1"/>
-          </a:fontRef>
-        </p:style>
-        <p:txBody>
-          <a:bodyPr rtlCol="0" anchor="ctr" lIns="137160"/>
-          <a:lstStyle/>
-          <a:p>
-            <a:pPr algn="ctr"/>
-            <a:r>
-              <a:rPr sz="1250" b="1" i="0">
-                <a:solidFill>
-                  <a:srgbClr val="FFFFFF"/>
-                </a:solidFill>
-                <a:latin typeface="Avenir Next LT Pro Demi"/>
-              </a:rPr>
-              <a:t>WORKING</a:t>
-            </a:r>
-          </a:p>
-        </p:txBody>
-      </p:sp>
-      <p:sp>
-        <p:nvSpPr>
-          <p:cNvPr id="6" name="Rectangle 5"/>
-          <p:cNvSpPr/>
-          <p:nvPr/>
-        </p:nvSpPr>
-        <p:spPr>
-          <a:xfrm>
-            <a:off x="4709160" y="1874519"/>
-            <a:ext cx="3977639" cy="384048"/>
-          </a:xfrm>
-          <a:prstGeom prst="rect">
-            <a:avLst/>
-          </a:prstGeom>
-          <a:solidFill>
-            <a:srgbClr val="B03030"/>
-          </a:solidFill>
-          <a:ln>
-            <a:noFill/>
-          </a:ln>
-        </p:spPr>
-        <p:style>
-          <a:lnRef idx="1">
-            <a:schemeClr val="accent1"/>
-          </a:lnRef>
-          <a:fillRef idx="3">
-            <a:schemeClr val="accent1"/>
-          </a:fillRef>
-          <a:effectRef idx="2">
-            <a:schemeClr val="accent1"/>
-          </a:effectRef>
-          <a:fontRef idx="minor">
-            <a:schemeClr val="lt1"/>
-          </a:fontRef>
-        </p:style>
-        <p:txBody>
-          <a:bodyPr rtlCol="0" anchor="ctr" lIns="137160"/>
-          <a:lstStyle/>
-          <a:p>
-            <a:pPr algn="ctr"/>
-            <a:r>
-              <a:rPr sz="1250" b="1" i="0">
-                <a:solidFill>
-                  <a:srgbClr val="FFFFFF"/>
-                </a:solidFill>
-                <a:latin typeface="Avenir Next LT Pro Demi"/>
-              </a:rPr>
-              <a:t>WATCH</a:t>
-            </a:r>
-          </a:p>
-        </p:txBody>
-      </p:sp>
-      <p:sp>
-        <p:nvSpPr>
-          <p:cNvPr id="7" name="TextBox 6"/>
-          <p:cNvSpPr txBox="1"/>
-          <p:nvPr/>
-        </p:nvSpPr>
-        <p:spPr>
-          <a:xfrm>
-            <a:off x="457200" y="2423160"/>
-            <a:ext cx="3977639" cy="640080"/>
-          </a:xfrm>
-          <a:prstGeom prst="rect">
-            <a:avLst/>
-          </a:prstGeom>
-          <a:noFill/>
-          <a:ln>
-            <a:noFill/>
-          </a:ln>
-        </p:spPr>
-        <p:txBody>
-          <a:bodyPr wrap="square">
-            <a:spAutoFit/>
-          </a:bodyPr>
-          <a:lstStyle/>
-          <a:p>
-            <a:r>
-              <a:rPr sz="1200" b="1" i="0">
-                <a:solidFill>
-                  <a:srgbClr val="196B24"/>
-                </a:solidFill>
-                <a:latin typeface="Avenir Next LT Pro Demi"/>
-              </a:rPr>
-              <a:t>✓  </a:t>
-            </a:r>
-            <a:r>
-              <a:rPr sz="1100" b="0" i="0">
-                <a:solidFill>
-                  <a:srgbClr val="000000"/>
-                </a:solidFill>
-                <a:latin typeface="Avenir Next LT Pro"/>
-              </a:rPr>
-              <a:t>FCF inflected to +$252M in FY25 (from −$214M)</a:t>
-            </a:r>
-          </a:p>
-        </p:txBody>
-      </p:sp>
-      <p:sp>
-        <p:nvSpPr>
-          <p:cNvPr id="8" name="TextBox 7"/>
-          <p:cNvSpPr txBox="1"/>
-          <p:nvPr/>
-        </p:nvSpPr>
-        <p:spPr>
-          <a:xfrm>
-            <a:off x="457200" y="3081528"/>
-            <a:ext cx="3977639" cy="640080"/>
-          </a:xfrm>
-          <a:prstGeom prst="rect">
-            <a:avLst/>
-          </a:prstGeom>
-          <a:noFill/>
-          <a:ln>
-            <a:noFill/>
-          </a:ln>
-        </p:spPr>
-        <p:txBody>
-          <a:bodyPr wrap="square">
-            <a:spAutoFit/>
-          </a:bodyPr>
-          <a:lstStyle/>
-          <a:p>
-            <a:r>
-              <a:rPr sz="1200" b="1" i="0">
-                <a:solidFill>
-                  <a:srgbClr val="196B24"/>
-                </a:solidFill>
-                <a:latin typeface="Avenir Next LT Pro Demi"/>
-              </a:rPr>
-              <a:t>✓  </a:t>
-            </a:r>
-            <a:r>
-              <a:rPr sz="1100" b="0" i="0">
-                <a:solidFill>
-                  <a:srgbClr val="000000"/>
-                </a:solidFill>
-                <a:latin typeface="Avenir Next LT Pro"/>
-              </a:rPr>
-              <a:t>Inventory normalized $1.02B → $819M</a:t>
-            </a:r>
-          </a:p>
-        </p:txBody>
-      </p:sp>
-      <p:sp>
-        <p:nvSpPr>
-          <p:cNvPr id="9" name="TextBox 8"/>
-          <p:cNvSpPr txBox="1"/>
-          <p:nvPr/>
-        </p:nvSpPr>
-        <p:spPr>
-          <a:xfrm>
-            <a:off x="457200" y="3739896"/>
-            <a:ext cx="3977639" cy="640080"/>
-          </a:xfrm>
-          <a:prstGeom prst="rect">
-            <a:avLst/>
-          </a:prstGeom>
-          <a:noFill/>
-          <a:ln>
-            <a:noFill/>
-          </a:ln>
-        </p:spPr>
-        <p:txBody>
-          <a:bodyPr wrap="square">
-            <a:spAutoFit/>
-          </a:bodyPr>
-          <a:lstStyle/>
-          <a:p>
-            <a:r>
-              <a:rPr sz="1200" b="1" i="0">
-                <a:solidFill>
-                  <a:srgbClr val="196B24"/>
-                </a:solidFill>
-                <a:latin typeface="Avenir Next LT Pro Demi"/>
-              </a:rPr>
-              <a:t>✓  </a:t>
-            </a:r>
-            <a:r>
-              <a:rPr sz="1100" b="0" i="0">
-                <a:solidFill>
-                  <a:srgbClr val="000000"/>
-                </a:solidFill>
-                <a:latin typeface="Avenir Next LT Pro"/>
-              </a:rPr>
-              <a:t>Revenue re-accelerated +8.1% in FY25</a:t>
-            </a:r>
-          </a:p>
-        </p:txBody>
-      </p:sp>
-      <p:sp>
-        <p:nvSpPr>
-          <p:cNvPr id="10" name="TextBox 9"/>
-          <p:cNvSpPr txBox="1"/>
-          <p:nvPr/>
-        </p:nvSpPr>
-        <p:spPr>
-          <a:xfrm>
-            <a:off x="4709160" y="2423160"/>
-            <a:ext cx="3977639" cy="640080"/>
-          </a:xfrm>
-          <a:prstGeom prst="rect">
-            <a:avLst/>
-          </a:prstGeom>
-          <a:noFill/>
-          <a:ln>
-            <a:noFill/>
-          </a:ln>
-        </p:spPr>
-        <p:txBody>
-          <a:bodyPr wrap="square">
-            <a:spAutoFit/>
-          </a:bodyPr>
-          <a:lstStyle/>
-          <a:p>
-            <a:r>
-              <a:rPr sz="1200" b="1" i="0">
-                <a:solidFill>
-                  <a:srgbClr val="B03030"/>
-                </a:solidFill>
-                <a:latin typeface="Avenir Next LT Pro Demi"/>
-              </a:rPr>
-              <a:t>!  </a:t>
-            </a:r>
-            <a:r>
-              <a:rPr sz="1100" b="0" i="0">
-                <a:solidFill>
-                  <a:srgbClr val="000000"/>
-                </a:solidFill>
-                <a:latin typeface="Avenir Next LT Pro"/>
-              </a:rPr>
-              <a:t>Q1 FY26: revenue −1.7%, net loss</a:t>
-            </a:r>
-          </a:p>
-        </p:txBody>
-      </p:sp>
-      <p:sp>
-        <p:nvSpPr>
-          <p:cNvPr id="11" name="TextBox 10"/>
-          <p:cNvSpPr txBox="1"/>
-          <p:nvPr/>
-        </p:nvSpPr>
-        <p:spPr>
-          <a:xfrm>
-            <a:off x="4709160" y="3081528"/>
-            <a:ext cx="3977639" cy="640080"/>
-          </a:xfrm>
-          <a:prstGeom prst="rect">
-            <a:avLst/>
-          </a:prstGeom>
-          <a:noFill/>
-          <a:ln>
-            <a:noFill/>
-          </a:ln>
-        </p:spPr>
-        <p:txBody>
-          <a:bodyPr wrap="square">
-            <a:spAutoFit/>
-          </a:bodyPr>
-          <a:lstStyle/>
-          <a:p>
-            <a:r>
-              <a:rPr sz="1200" b="1" i="0">
-                <a:solidFill>
-                  <a:srgbClr val="B03030"/>
-                </a:solidFill>
-                <a:latin typeface="Avenir Next LT Pro Demi"/>
-              </a:rPr>
-              <a:t>!  </a:t>
-            </a:r>
-            <a:r>
-              <a:rPr sz="1100" b="0" i="0">
-                <a:solidFill>
-                  <a:srgbClr val="000000"/>
-                </a:solidFill>
-                <a:latin typeface="Avenir Next LT Pro"/>
-              </a:rPr>
-              <a:t>~$225M/yr interest keeps coverage thin</a:t>
-            </a:r>
-          </a:p>
-        </p:txBody>
-      </p:sp>
-      <p:sp>
-        <p:nvSpPr>
-          <p:cNvPr id="12" name="TextBox 11"/>
-          <p:cNvSpPr txBox="1"/>
-          <p:nvPr/>
-        </p:nvSpPr>
-        <p:spPr>
-          <a:xfrm>
-            <a:off x="4709160" y="3739896"/>
-            <a:ext cx="3977639" cy="640080"/>
-          </a:xfrm>
-          <a:prstGeom prst="rect">
-            <a:avLst/>
-          </a:prstGeom>
-          <a:noFill/>
-          <a:ln>
-            <a:noFill/>
-          </a:ln>
-        </p:spPr>
-        <p:txBody>
-          <a:bodyPr wrap="square">
-            <a:spAutoFit/>
-          </a:bodyPr>
-          <a:lstStyle/>
-          <a:p>
-            <a:r>
-              <a:rPr sz="1200" b="1" i="0">
-                <a:solidFill>
-                  <a:srgbClr val="B03030"/>
-                </a:solidFill>
-                <a:latin typeface="Avenir Next LT Pro Demi"/>
-              </a:rPr>
-              <a:t>!  </a:t>
-            </a:r>
-            <a:r>
-              <a:rPr sz="1100" b="0" i="0">
-                <a:solidFill>
-                  <a:srgbClr val="000000"/>
-                </a:solidFill>
-                <a:latin typeface="Avenir Next LT Pro"/>
-              </a:rPr>
-              <a:t>Guidance is back-half loaded</a:t>
-            </a:r>
-          </a:p>
-        </p:txBody>
-      </p:sp>
-      <p:sp>
-        <p:nvSpPr>
-          <p:cNvPr id="13" name="TextBox 12"/>
-          <p:cNvSpPr txBox="1"/>
-          <p:nvPr/>
-        </p:nvSpPr>
-        <p:spPr>
-          <a:xfrm>
-            <a:off x="457200" y="4663440"/>
-            <a:ext cx="8229600" cy="365760"/>
-          </a:xfrm>
-          <a:prstGeom prst="rect">
-            <a:avLst/>
-          </a:prstGeom>
-          <a:noFill/>
-          <a:ln>
-            <a:noFill/>
-          </a:ln>
-        </p:spPr>
-        <p:txBody>
-          <a:bodyPr wrap="square">
-            <a:spAutoFit/>
-          </a:bodyPr>
-          <a:lstStyle/>
-          <a:p>
-            <a:r>
-              <a:rPr sz="1150" b="1" i="0">
-                <a:solidFill>
-                  <a:srgbClr val="000000"/>
-                </a:solidFill>
-                <a:latin typeface="Avenir Next LT Pro Demi"/>
-              </a:rPr>
-              <a:t>Recovery is real but early — the next two quarters are the tell.</a:t>
-            </a:r>
-          </a:p>
-        </p:txBody>
-      </p:sp>
-      <p:sp>
-        <p:nvSpPr>
-          <p:cNvPr id="14" name="TextBox 13"/>
-          <p:cNvSpPr txBox="1"/>
-          <p:nvPr/>
-        </p:nvSpPr>
-        <p:spPr>
-          <a:xfrm>
-            <a:off x="457200" y="6309360"/>
-            <a:ext cx="8229600" cy="274320"/>
-          </a:xfrm>
-          <a:prstGeom prst="rect">
-            <a:avLst/>
-          </a:prstGeom>
-          <a:noFill/>
-          <a:ln>
-            <a:noFill/>
-          </a:ln>
-        </p:spPr>
-        <p:txBody>
-          <a:bodyPr wrap="square">
-            <a:spAutoFit/>
-          </a:bodyPr>
-          <a:lstStyle/>
-          <a:p>
-            <a:r>
-              <a:rPr sz="750" b="0" i="1">
-                <a:solidFill>
-                  <a:srgbClr val="707070"/>
-                </a:solidFill>
-                <a:latin typeface="Avenir Next LT Pro"/>
-              </a:rPr>
-              <a:t>Sources: RH FY2025 10-K; Q1 FY2026 10-Q.</a:t>
-            </a:r>
-          </a:p>
-        </p:txBody>
-      </p:sp>
-    </p:spTree>
-  </p:cSld>
-  <p:clrMapOvr>
-    <a:masterClrMapping/>
-  </p:clrMapOvr>
-</p:sld>
-</file>
-
-<file path=ppt/slides/slide22.xml><?xml version="1.0" encoding="utf-8"?>
-<p:sld xmlns:a="http://schemas.openxmlformats.org/drawingml/2006/main" xmlns:p="http://schemas.openxmlformats.org/presentationml/2006/main" xmlns:r="http://schemas.openxmlformats.org/officeDocument/2006/relationships">
-  <p:cSld>
-    <p:spTree>
-      <p:nvGrpSpPr>
-        <p:cNvPr id="1" name=""/>
-        <p:cNvGrpSpPr/>
-        <p:nvPr/>
-      </p:nvGrpSpPr>
-      <p:grpSpPr/>
-      <p:sp>
-        <p:nvSpPr>
-          <p:cNvPr id="2" name="TextBox 1"/>
-          <p:cNvSpPr txBox="1"/>
-          <p:nvPr/>
-        </p:nvSpPr>
-        <p:spPr>
-          <a:xfrm>
-            <a:off x="457200" y="365760"/>
-            <a:ext cx="8229600" cy="548640"/>
-          </a:xfrm>
-          <a:prstGeom prst="rect">
-            <a:avLst/>
-          </a:prstGeom>
-          <a:noFill/>
-          <a:ln>
-            <a:noFill/>
-          </a:ln>
-        </p:spPr>
-        <p:txBody>
-          <a:bodyPr wrap="square">
-            <a:spAutoFit/>
-          </a:bodyPr>
-          <a:lstStyle/>
-          <a:p>
-            <a:r>
-              <a:rPr sz="2100">
-                <a:solidFill>
-                  <a:srgbClr val="000000"/>
-                </a:solidFill>
-                <a:latin typeface="Avenir Next LT Pro Demi"/>
-              </a:rPr>
-              <a:t>Strategy &amp; Recent Execution</a:t>
-            </a:r>
-          </a:p>
-        </p:txBody>
-      </p:sp>
-      <p:sp>
-        <p:nvSpPr>
-          <p:cNvPr id="3" name="Rectangle 2"/>
-          <p:cNvSpPr/>
-          <p:nvPr/>
-        </p:nvSpPr>
-        <p:spPr>
-          <a:xfrm>
-            <a:off x="457200" y="960120"/>
-            <a:ext cx="8229600" cy="25603"/>
-          </a:xfrm>
-          <a:prstGeom prst="rect">
-            <a:avLst/>
-          </a:prstGeom>
-          <a:solidFill>
-            <a:srgbClr val="000000"/>
-          </a:solidFill>
-          <a:ln>
-            <a:noFill/>
-          </a:ln>
-        </p:spPr>
-        <p:style>
-          <a:lnRef idx="1">
-            <a:schemeClr val="accent1"/>
-          </a:lnRef>
-          <a:fillRef idx="3">
-            <a:schemeClr val="accent1"/>
-          </a:fillRef>
-          <a:effectRef idx="2">
-            <a:schemeClr val="accent1"/>
-          </a:effectRef>
-          <a:fontRef idx="minor">
-            <a:schemeClr val="lt1"/>
-          </a:fontRef>
-        </p:style>
-        <p:txBody>
-          <a:bodyPr rtlCol="0" anchor="ctr"/>
-          <a:lstStyle/>
-          <a:p>
-            <a:pPr algn="ctr"/>
-          </a:p>
-        </p:txBody>
-      </p:sp>
-      <p:sp>
-        <p:nvSpPr>
-          <p:cNvPr id="4" name="TextBox 3"/>
-          <p:cNvSpPr txBox="1"/>
-          <p:nvPr/>
-        </p:nvSpPr>
-        <p:spPr>
-          <a:xfrm>
-            <a:off x="457200" y="1143000"/>
-            <a:ext cx="3977639" cy="365760"/>
-          </a:xfrm>
-          <a:prstGeom prst="rect">
-            <a:avLst/>
-          </a:prstGeom>
-          <a:noFill/>
-          <a:ln>
-            <a:noFill/>
-          </a:ln>
-        </p:spPr>
-        <p:txBody>
-          <a:bodyPr wrap="square">
-            <a:spAutoFit/>
-          </a:bodyPr>
-          <a:lstStyle/>
-          <a:p>
-            <a:r>
-              <a:rPr sz="1100" b="1" i="0">
-                <a:solidFill>
-                  <a:srgbClr val="000000"/>
-                </a:solidFill>
-                <a:latin typeface="Avenir Next LT Pro Demi"/>
-              </a:rPr>
-              <a:t>THE PLAN</a:t>
-            </a:r>
-          </a:p>
-        </p:txBody>
-      </p:sp>
-      <p:sp>
-        <p:nvSpPr>
-          <p:cNvPr id="5" name="TextBox 4"/>
-          <p:cNvSpPr txBox="1"/>
-          <p:nvPr/>
-        </p:nvSpPr>
-        <p:spPr>
-          <a:xfrm>
-            <a:off x="457200" y="1554480"/>
-            <a:ext cx="3977639" cy="640080"/>
-          </a:xfrm>
-          <a:prstGeom prst="rect">
-            <a:avLst/>
-          </a:prstGeom>
-          <a:noFill/>
-          <a:ln>
-            <a:noFill/>
-          </a:ln>
-        </p:spPr>
-        <p:txBody>
-          <a:bodyPr wrap="square">
-            <a:spAutoFit/>
-          </a:bodyPr>
-          <a:lstStyle/>
-          <a:p>
-            <a:r>
-              <a:rPr sz="1100" b="1" i="0">
-                <a:solidFill>
-                  <a:srgbClr val="000000"/>
-                </a:solidFill>
-                <a:latin typeface="Avenir Next LT Pro"/>
-              </a:rPr>
-              <a:t>•  </a:t>
-            </a:r>
-            <a:r>
-              <a:rPr sz="1100" b="0" i="0">
-                <a:solidFill>
-                  <a:srgbClr val="000000"/>
-                </a:solidFill>
-                <a:latin typeface="Avenir Next LT Pro"/>
-              </a:rPr>
-              <a:t>Product transformation — new collections</a:t>
-            </a:r>
-          </a:p>
-        </p:txBody>
-      </p:sp>
-      <p:sp>
-        <p:nvSpPr>
-          <p:cNvPr id="6" name="TextBox 5"/>
-          <p:cNvSpPr txBox="1"/>
-          <p:nvPr/>
-        </p:nvSpPr>
-        <p:spPr>
-          <a:xfrm>
-            <a:off x="457200" y="2212848"/>
-            <a:ext cx="3977639" cy="640080"/>
-          </a:xfrm>
-          <a:prstGeom prst="rect">
-            <a:avLst/>
-          </a:prstGeom>
-          <a:noFill/>
-          <a:ln>
-            <a:noFill/>
-          </a:ln>
-        </p:spPr>
-        <p:txBody>
-          <a:bodyPr wrap="square">
-            <a:spAutoFit/>
-          </a:bodyPr>
-          <a:lstStyle/>
-          <a:p>
-            <a:r>
-              <a:rPr sz="1100" b="1" i="0">
-                <a:solidFill>
-                  <a:srgbClr val="000000"/>
-                </a:solidFill>
-                <a:latin typeface="Avenir Next LT Pro"/>
-              </a:rPr>
-              <a:t>•  </a:t>
-            </a:r>
-            <a:r>
-              <a:rPr sz="1100" b="0" i="0">
-                <a:solidFill>
-                  <a:srgbClr val="000000"/>
-                </a:solidFill>
-                <a:latin typeface="Avenir Next LT Pro"/>
-              </a:rPr>
-              <a:t>Gallery expansion → RH's ~$5–6B opportunity</a:t>
-            </a:r>
-          </a:p>
-        </p:txBody>
-      </p:sp>
-      <p:sp>
-        <p:nvSpPr>
-          <p:cNvPr id="7" name="TextBox 6"/>
-          <p:cNvSpPr txBox="1"/>
-          <p:nvPr/>
-        </p:nvSpPr>
-        <p:spPr>
-          <a:xfrm>
-            <a:off x="457200" y="2871215"/>
-            <a:ext cx="3977639" cy="640080"/>
-          </a:xfrm>
-          <a:prstGeom prst="rect">
-            <a:avLst/>
-          </a:prstGeom>
-          <a:noFill/>
-          <a:ln>
-            <a:noFill/>
-          </a:ln>
-        </p:spPr>
-        <p:txBody>
-          <a:bodyPr wrap="square">
-            <a:spAutoFit/>
-          </a:bodyPr>
-          <a:lstStyle/>
-          <a:p>
-            <a:r>
-              <a:rPr sz="1100" b="1" i="0">
-                <a:solidFill>
-                  <a:srgbClr val="000000"/>
-                </a:solidFill>
-                <a:latin typeface="Avenir Next LT Pro"/>
-              </a:rPr>
-              <a:t>•  </a:t>
-            </a:r>
-            <a:r>
-              <a:rPr sz="1100" b="0" i="0">
-                <a:solidFill>
-                  <a:srgbClr val="000000"/>
-                </a:solidFill>
-                <a:latin typeface="Avenir Next LT Pro"/>
-              </a:rPr>
-              <a:t>Move upmarket — Estates targets the rate-immune buyer</a:t>
-            </a:r>
-          </a:p>
-        </p:txBody>
-      </p:sp>
-      <p:sp>
-        <p:nvSpPr>
-          <p:cNvPr id="8" name="TextBox 7"/>
-          <p:cNvSpPr txBox="1"/>
-          <p:nvPr/>
-        </p:nvSpPr>
-        <p:spPr>
-          <a:xfrm>
-            <a:off x="457200" y="3529584"/>
-            <a:ext cx="3977639" cy="640080"/>
-          </a:xfrm>
-          <a:prstGeom prst="rect">
-            <a:avLst/>
-          </a:prstGeom>
-          <a:noFill/>
-          <a:ln>
-            <a:noFill/>
-          </a:ln>
-        </p:spPr>
-        <p:txBody>
-          <a:bodyPr wrap="square">
-            <a:spAutoFit/>
-          </a:bodyPr>
-          <a:lstStyle/>
-          <a:p>
-            <a:r>
-              <a:rPr sz="1100" b="1" i="0">
-                <a:solidFill>
-                  <a:srgbClr val="000000"/>
-                </a:solidFill>
-                <a:latin typeface="Avenir Next LT Pro"/>
-              </a:rPr>
-              <a:t>•  </a:t>
-            </a:r>
-            <a:r>
-              <a:rPr sz="1100" b="0" i="0">
-                <a:solidFill>
-                  <a:srgbClr val="000000"/>
-                </a:solidFill>
-                <a:latin typeface="Avenir Next LT Pro"/>
-              </a:rPr>
-              <a:t>Global + platform — hospitality, F&amp;B</a:t>
-            </a:r>
-          </a:p>
-        </p:txBody>
-      </p:sp>
-      <p:sp>
-        <p:nvSpPr>
-          <p:cNvPr id="9" name="TextBox 8"/>
-          <p:cNvSpPr txBox="1"/>
-          <p:nvPr/>
-        </p:nvSpPr>
-        <p:spPr>
-          <a:xfrm>
-            <a:off x="4709160" y="1143000"/>
-            <a:ext cx="3977639" cy="365760"/>
-          </a:xfrm>
-          <a:prstGeom prst="rect">
-            <a:avLst/>
-          </a:prstGeom>
-          <a:noFill/>
-          <a:ln>
-            <a:noFill/>
-          </a:ln>
-        </p:spPr>
-        <p:txBody>
-          <a:bodyPr wrap="square">
-            <a:spAutoFit/>
-          </a:bodyPr>
-          <a:lstStyle/>
-          <a:p>
-            <a:r>
-              <a:rPr sz="1100" b="1" i="0">
-                <a:solidFill>
-                  <a:srgbClr val="000000"/>
-                </a:solidFill>
-                <a:latin typeface="Avenir Next LT Pro Demi"/>
-              </a:rPr>
-              <a:t>RECENT MOVES  (watch, not yet catalysts)</a:t>
-            </a:r>
-          </a:p>
-        </p:txBody>
-      </p:sp>
-      <p:sp>
-        <p:nvSpPr>
-          <p:cNvPr id="10" name="TextBox 9"/>
-          <p:cNvSpPr txBox="1"/>
-          <p:nvPr/>
-        </p:nvSpPr>
-        <p:spPr>
-          <a:xfrm>
-            <a:off x="4709160" y="1554480"/>
-            <a:ext cx="3977639" cy="822960"/>
-          </a:xfrm>
-          <a:prstGeom prst="rect">
-            <a:avLst/>
-          </a:prstGeom>
-          <a:noFill/>
-          <a:ln>
-            <a:noFill/>
-          </a:ln>
-        </p:spPr>
-        <p:txBody>
-          <a:bodyPr wrap="square">
-            <a:spAutoFit/>
-          </a:bodyPr>
-          <a:lstStyle/>
-          <a:p>
-            <a:r>
-              <a:rPr sz="1100" b="1" i="0">
-                <a:solidFill>
-                  <a:srgbClr val="000000"/>
-                </a:solidFill>
-                <a:latin typeface="Avenir Next LT Pro"/>
-              </a:rPr>
-              <a:t>•  </a:t>
-            </a:r>
-            <a:r>
-              <a:rPr sz="1100" b="0" i="0">
-                <a:solidFill>
-                  <a:srgbClr val="000000"/>
-                </a:solidFill>
-                <a:latin typeface="Avenir Next LT Pro"/>
-              </a:rPr>
-              <a:t>Estates unveiled — acquired legendary ateliers (owned exclusivity); commercially unproven</a:t>
-            </a:r>
-          </a:p>
-        </p:txBody>
-      </p:sp>
-      <p:sp>
-        <p:nvSpPr>
-          <p:cNvPr id="11" name="TextBox 10"/>
-          <p:cNvSpPr txBox="1"/>
-          <p:nvPr/>
-        </p:nvSpPr>
-        <p:spPr>
-          <a:xfrm>
-            <a:off x="4709160" y="2395728"/>
-            <a:ext cx="3977639" cy="822960"/>
-          </a:xfrm>
-          <a:prstGeom prst="rect">
-            <a:avLst/>
-          </a:prstGeom>
-          <a:noFill/>
-          <a:ln>
-            <a:noFill/>
-          </a:ln>
-        </p:spPr>
-        <p:txBody>
-          <a:bodyPr wrap="square">
-            <a:spAutoFit/>
-          </a:bodyPr>
-          <a:lstStyle/>
-          <a:p>
-            <a:r>
-              <a:rPr sz="1100" b="1" i="0">
-                <a:solidFill>
-                  <a:srgbClr val="000000"/>
-                </a:solidFill>
-                <a:latin typeface="Avenir Next LT Pro"/>
-              </a:rPr>
-              <a:t>•  </a:t>
-            </a:r>
-            <a:r>
-              <a:rPr sz="1100" b="0" i="0">
-                <a:solidFill>
-                  <a:srgbClr val="000000"/>
-                </a:solidFill>
-                <a:latin typeface="Avenir Next LT Pro"/>
-              </a:rPr>
-              <a:t>Mercedes-AMG F1 hospitality partnership — brand halo</a:t>
-            </a:r>
-          </a:p>
-        </p:txBody>
-      </p:sp>
-      <p:sp>
-        <p:nvSpPr>
-          <p:cNvPr id="12" name="TextBox 11"/>
-          <p:cNvSpPr txBox="1"/>
-          <p:nvPr/>
-        </p:nvSpPr>
-        <p:spPr>
-          <a:xfrm>
-            <a:off x="4709160" y="3236976"/>
-            <a:ext cx="3977639" cy="822960"/>
-          </a:xfrm>
-          <a:prstGeom prst="rect">
-            <a:avLst/>
-          </a:prstGeom>
-          <a:noFill/>
-          <a:ln>
-            <a:noFill/>
-          </a:ln>
-        </p:spPr>
-        <p:txBody>
-          <a:bodyPr wrap="square">
-            <a:spAutoFit/>
-          </a:bodyPr>
-          <a:lstStyle/>
-          <a:p>
-            <a:r>
-              <a:rPr sz="1100" b="1" i="0">
-                <a:solidFill>
-                  <a:srgbClr val="000000"/>
-                </a:solidFill>
-                <a:latin typeface="Avenir Next LT Pro"/>
-              </a:rPr>
-              <a:t>•  </a:t>
-            </a:r>
-            <a:r>
-              <a:rPr sz="1100" b="0" i="0">
-                <a:solidFill>
-                  <a:srgbClr val="000000"/>
-                </a:solidFill>
-                <a:latin typeface="Avenir Next LT Pro"/>
-              </a:rPr>
-              <a:t>RH London Mayfair flagship — Europe doubling-down</a:t>
-            </a:r>
-          </a:p>
-        </p:txBody>
-      </p:sp>
-      <p:sp>
-        <p:nvSpPr>
-          <p:cNvPr id="13" name="TextBox 12"/>
-          <p:cNvSpPr txBox="1"/>
-          <p:nvPr/>
-        </p:nvSpPr>
-        <p:spPr>
-          <a:xfrm>
-            <a:off x="457200" y="4663440"/>
-            <a:ext cx="8229600" cy="457200"/>
-          </a:xfrm>
-          <a:prstGeom prst="rect">
-            <a:avLst/>
-          </a:prstGeom>
-          <a:noFill/>
-          <a:ln>
-            <a:noFill/>
-          </a:ln>
-        </p:spPr>
-        <p:txBody>
-          <a:bodyPr wrap="square">
-            <a:spAutoFit/>
-          </a:bodyPr>
-          <a:lstStyle/>
-          <a:p>
-            <a:r>
-              <a:rPr sz="1150" b="1" i="0">
-                <a:solidFill>
-                  <a:srgbClr val="000000"/>
-                </a:solidFill>
-                <a:latin typeface="Avenir Next LT Pro Demi"/>
-              </a:rPr>
-              <a:t>Differentiated and expanding — but unproven and capital-intensive during a levered stretch.</a:t>
-            </a:r>
-          </a:p>
-        </p:txBody>
-      </p:sp>
-      <p:sp>
-        <p:nvSpPr>
-          <p:cNvPr id="14" name="TextBox 13"/>
-          <p:cNvSpPr txBox="1"/>
-          <p:nvPr/>
-        </p:nvSpPr>
-        <p:spPr>
-          <a:xfrm>
-            <a:off x="457200" y="6309360"/>
-            <a:ext cx="8229600" cy="274320"/>
-          </a:xfrm>
-          <a:prstGeom prst="rect">
-            <a:avLst/>
-          </a:prstGeom>
-          <a:noFill/>
-          <a:ln>
-            <a:noFill/>
-          </a:ln>
-        </p:spPr>
-        <p:txBody>
-          <a:bodyPr wrap="square">
-            <a:spAutoFit/>
-          </a:bodyPr>
-          <a:lstStyle/>
-          <a:p>
-            <a:r>
-              <a:rPr sz="750" b="0" i="1">
-                <a:solidFill>
-                  <a:srgbClr val="707070"/>
-                </a:solidFill>
-                <a:latin typeface="Avenir Next LT Pro"/>
-              </a:rPr>
-              <a:t>Sources: RH FY2025 10-K; company announcements (2026).</a:t>
-            </a:r>
-          </a:p>
-        </p:txBody>
-      </p:sp>
-    </p:spTree>
-  </p:cSld>
-  <p:clrMapOvr>
-    <a:masterClrMapping/>
-  </p:clrMapOvr>
-</p:sld>
-</file>
-
-<file path=ppt/slides/slide23.xml><?xml version="1.0" encoding="utf-8"?>
-<p:sld xmlns:a="http://schemas.openxmlformats.org/drawingml/2006/main" xmlns:p="http://schemas.openxmlformats.org/presentationml/2006/main" xmlns:r="http://schemas.openxmlformats.org/officeDocument/2006/relationships">
-  <p:cSld>
-    <p:spTree>
-      <p:nvGrpSpPr>
-        <p:cNvPr id="1" name=""/>
-        <p:cNvGrpSpPr/>
-        <p:nvPr/>
-      </p:nvGrpSpPr>
-      <p:grpSpPr/>
-      <p:sp>
-        <p:nvSpPr>
-          <p:cNvPr id="2" name="TextBox 1"/>
-          <p:cNvSpPr txBox="1"/>
-          <p:nvPr/>
-        </p:nvSpPr>
-        <p:spPr>
-          <a:xfrm>
-            <a:off x="457200" y="365760"/>
-            <a:ext cx="8229600" cy="548640"/>
-          </a:xfrm>
-          <a:prstGeom prst="rect">
-            <a:avLst/>
-          </a:prstGeom>
-          <a:noFill/>
-          <a:ln>
-            <a:noFill/>
-          </a:ln>
-        </p:spPr>
-        <p:txBody>
-          <a:bodyPr wrap="square">
-            <a:spAutoFit/>
-          </a:bodyPr>
-          <a:lstStyle/>
-          <a:p>
-            <a:r>
-              <a:rPr sz="2100">
-                <a:solidFill>
-                  <a:srgbClr val="000000"/>
-                </a:solidFill>
-                <a:latin typeface="Avenir Next LT Pro Demi"/>
-              </a:rPr>
-              <a:t>Management &amp; Ownership</a:t>
-            </a:r>
-          </a:p>
-        </p:txBody>
-      </p:sp>
-      <p:sp>
-        <p:nvSpPr>
-          <p:cNvPr id="3" name="Rectangle 2"/>
-          <p:cNvSpPr/>
-          <p:nvPr/>
-        </p:nvSpPr>
-        <p:spPr>
-          <a:xfrm>
-            <a:off x="457200" y="960120"/>
-            <a:ext cx="8229600" cy="25603"/>
-          </a:xfrm>
-          <a:prstGeom prst="rect">
-            <a:avLst/>
-          </a:prstGeom>
-          <a:solidFill>
-            <a:srgbClr val="000000"/>
-          </a:solidFill>
-          <a:ln>
-            <a:noFill/>
-          </a:ln>
-        </p:spPr>
-        <p:style>
-          <a:lnRef idx="1">
-            <a:schemeClr val="accent1"/>
-          </a:lnRef>
-          <a:fillRef idx="3">
-            <a:schemeClr val="accent1"/>
-          </a:fillRef>
-          <a:effectRef idx="2">
-            <a:schemeClr val="accent1"/>
-          </a:effectRef>
-          <a:fontRef idx="minor">
-            <a:schemeClr val="lt1"/>
-          </a:fontRef>
-        </p:style>
-        <p:txBody>
-          <a:bodyPr rtlCol="0" anchor="ctr"/>
-          <a:lstStyle/>
-          <a:p>
-            <a:pPr algn="ctr"/>
-          </a:p>
-        </p:txBody>
-      </p:sp>
-      <p:graphicFrame>
-        <p:nvGraphicFramePr>
-          <p:cNvPr id="4" name="Table 3"/>
-          <p:cNvGraphicFramePr>
-            <a:graphicFrameLocks noGrp="1"/>
-          </p:cNvGraphicFramePr>
-          <p:nvPr/>
-        </p:nvGraphicFramePr>
-        <p:xfrm>
-          <a:off x="457200" y="1325880"/>
-          <a:ext cx="8229599" cy="4114800"/>
-        </p:xfrm>
-        <a:graphic>
-          <a:graphicData uri="http://schemas.openxmlformats.org/drawingml/2006/table">
-            <a:tbl>
-              <a:tblPr>
-                <a:tableStyleId>{5C22544A-7EE6-4342-B048-85BDC9FD1C3A}</a:tableStyleId>
-              </a:tblPr>
-              <a:tblGrid>
-                <a:gridCol w="1920240"/>
-                <a:gridCol w="3977639"/>
-                <a:gridCol w="2331720"/>
-              </a:tblGrid>
-              <a:tr h="822960">
-                <a:tc>
-                  <a:txBody>
-                    <a:bodyPr/>
-                    <a:lstStyle/>
-                    <a:p>
-                      <a:r>
-                        <a:rPr sz="1050" b="1">
-                          <a:solidFill>
-                            <a:srgbClr val="FFFFFF"/>
-                          </a:solidFill>
-                          <a:latin typeface="Avenir Next LT Pro Demi"/>
-                        </a:rPr>
-                        <a:t>Item</a:t>
-                      </a:r>
-                    </a:p>
-                  </a:txBody>
-                  <a:tcPr marL="82296" anchor="ctr">
-                    <a:solidFill>
-                      <a:srgbClr val="9A7B44"/>
-                    </a:solidFill>
-                  </a:tcPr>
-                </a:tc>
-                <a:tc>
-                  <a:txBody>
-                    <a:bodyPr/>
-                    <a:lstStyle/>
-                    <a:p>
-                      <a:r>
-                        <a:rPr sz="1050" b="1">
-                          <a:solidFill>
-                            <a:srgbClr val="FFFFFF"/>
-                          </a:solidFill>
-                          <a:latin typeface="Avenir Next LT Pro"/>
-                        </a:rPr>
-                        <a:t>Detail</a:t>
-                      </a:r>
-                    </a:p>
-                  </a:txBody>
-                  <a:tcPr marL="82296" anchor="ctr">
-                    <a:solidFill>
-                      <a:srgbClr val="9A7B44"/>
-                    </a:solidFill>
-                  </a:tcPr>
-                </a:tc>
-                <a:tc>
-                  <a:txBody>
-                    <a:bodyPr/>
-                    <a:lstStyle/>
-                    <a:p>
-                      <a:r>
-                        <a:rPr sz="1050" b="1">
-                          <a:solidFill>
-                            <a:srgbClr val="FFFFFF"/>
-                          </a:solidFill>
-                          <a:latin typeface="Avenir Next LT Pro"/>
-                        </a:rPr>
-                        <a:t>Read</a:t>
-                      </a:r>
-                    </a:p>
-                  </a:txBody>
-                  <a:tcPr marL="82296" anchor="ctr">
-                    <a:solidFill>
-                      <a:srgbClr val="9A7B44"/>
-                    </a:solidFill>
-                  </a:tcPr>
-                </a:tc>
-              </a:tr>
-              <a:tr h="822960">
-                <a:tc>
-                  <a:txBody>
-                    <a:bodyPr/>
-                    <a:lstStyle/>
-                    <a:p>
-                      <a:r>
-                        <a:rPr sz="1050" b="1">
-                          <a:solidFill>
-                            <a:srgbClr val="000000"/>
-                          </a:solidFill>
-                          <a:latin typeface="Avenir Next LT Pro Demi"/>
-                        </a:rPr>
-                        <a:t>Operator</a:t>
-                      </a:r>
-                    </a:p>
-                  </a:txBody>
-                  <a:tcPr marL="82296" anchor="ctr">
-                    <a:solidFill>
-                      <a:srgbClr val="FFFFFF"/>
-                    </a:solidFill>
-                  </a:tcPr>
-                </a:tc>
-                <a:tc>
-                  <a:txBody>
-                    <a:bodyPr/>
-                    <a:lstStyle/>
-                    <a:p>
-                      <a:r>
-                        <a:rPr sz="1050" b="0">
-                          <a:solidFill>
-                            <a:srgbClr val="000000"/>
-                          </a:solidFill>
-                          <a:latin typeface="Avenir Next LT Pro"/>
-                        </a:rPr>
-                        <a:t>Friedman (Chair/CEO): grew Pottery Barn $50M→$1B; rebuilt RH from near-bankruptcy (2001)</a:t>
-                      </a:r>
-                    </a:p>
-                  </a:txBody>
-                  <a:tcPr marL="82296" anchor="ctr">
-                    <a:solidFill>
-                      <a:srgbClr val="FFFFFF"/>
-                    </a:solidFill>
-                  </a:tcPr>
-                </a:tc>
-                <a:tc>
-                  <a:txBody>
-                    <a:bodyPr/>
-                    <a:lstStyle/>
-                    <a:p>
-                      <a:r>
-                        <a:rPr sz="1050" b="0">
-                          <a:solidFill>
-                            <a:srgbClr val="000000"/>
-                          </a:solidFill>
-                          <a:latin typeface="Avenir Next LT Pro"/>
-                        </a:rPr>
-                        <a:t>Proven; key-man risk</a:t>
-                      </a:r>
-                    </a:p>
-                  </a:txBody>
-                  <a:tcPr marL="82296" anchor="ctr">
-                    <a:solidFill>
-                      <a:srgbClr val="FFFFFF"/>
-                    </a:solidFill>
-                  </a:tcPr>
-                </a:tc>
-              </a:tr>
-              <a:tr h="822960">
-                <a:tc>
-                  <a:txBody>
-                    <a:bodyPr/>
-                    <a:lstStyle/>
-                    <a:p>
-                      <a:r>
-                        <a:rPr sz="1050" b="1">
-                          <a:solidFill>
-                            <a:srgbClr val="000000"/>
-                          </a:solidFill>
-                          <a:latin typeface="Avenir Next LT Pro Demi"/>
-                        </a:rPr>
-                        <a:t>Ownership</a:t>
-                      </a:r>
-                    </a:p>
-                  </a:txBody>
-                  <a:tcPr marL="82296" anchor="ctr">
-                    <a:solidFill>
-                      <a:srgbClr val="F4F6F8"/>
-                    </a:solidFill>
-                  </a:tcPr>
-                </a:tc>
-                <a:tc>
-                  <a:txBody>
-                    <a:bodyPr/>
-                    <a:lstStyle/>
-                    <a:p>
-                      <a:r>
-                        <a:rPr sz="1050" b="0">
-                          <a:solidFill>
-                            <a:srgbClr val="000000"/>
-                          </a:solidFill>
-                          <a:latin typeface="Avenir Next LT Pro"/>
-                        </a:rPr>
-                        <a:t>~18% outright (~25% incl. options); bought ~$10M at ~$216 (Jun 2024)</a:t>
-                      </a:r>
-                    </a:p>
-                  </a:txBody>
-                  <a:tcPr marL="82296" anchor="ctr">
-                    <a:solidFill>
-                      <a:srgbClr val="F4F6F8"/>
-                    </a:solidFill>
-                  </a:tcPr>
-                </a:tc>
-                <a:tc>
-                  <a:txBody>
-                    <a:bodyPr/>
-                    <a:lstStyle/>
-                    <a:p>
-                      <a:r>
-                        <a:rPr sz="1050" b="0">
-                          <a:solidFill>
-                            <a:srgbClr val="000000"/>
-                          </a:solidFill>
-                          <a:latin typeface="Avenir Next LT Pro"/>
-                        </a:rPr>
-                        <a:t>Deep alignment</a:t>
-                      </a:r>
-                    </a:p>
-                  </a:txBody>
-                  <a:tcPr marL="82296" anchor="ctr">
-                    <a:solidFill>
-                      <a:srgbClr val="F4F6F8"/>
-                    </a:solidFill>
-                  </a:tcPr>
-                </a:tc>
-              </a:tr>
-              <a:tr h="822960">
-                <a:tc>
-                  <a:txBody>
-                    <a:bodyPr/>
-                    <a:lstStyle/>
-                    <a:p>
-                      <a:r>
-                        <a:rPr sz="1050" b="1">
-                          <a:solidFill>
-                            <a:srgbClr val="000000"/>
-                          </a:solidFill>
-                          <a:latin typeface="Avenir Next LT Pro Demi"/>
-                        </a:rPr>
-                        <a:t>Recent insider activity</a:t>
-                      </a:r>
-                    </a:p>
-                  </a:txBody>
-                  <a:tcPr marL="82296" anchor="ctr">
-                    <a:solidFill>
-                      <a:srgbClr val="FFFFFF"/>
-                    </a:solidFill>
-                  </a:tcPr>
-                </a:tc>
-                <a:tc>
-                  <a:txBody>
-                    <a:bodyPr/>
-                    <a:lstStyle/>
-                    <a:p>
-                      <a:r>
-                        <a:rPr sz="1050" b="0">
-                          <a:solidFill>
-                            <a:srgbClr val="000000"/>
-                          </a:solidFill>
-                          <a:latin typeface="Avenir Next LT Pro"/>
-                        </a:rPr>
-                        <a:t>Mixed — mostly sales (option/tax) + a recent director open-market buy</a:t>
-                      </a:r>
-                    </a:p>
-                  </a:txBody>
-                  <a:tcPr marL="82296" anchor="ctr">
-                    <a:solidFill>
-                      <a:srgbClr val="FFFFFF"/>
-                    </a:solidFill>
-                  </a:tcPr>
-                </a:tc>
-                <a:tc>
-                  <a:txBody>
-                    <a:bodyPr/>
-                    <a:lstStyle/>
-                    <a:p>
-                      <a:r>
-                        <a:rPr sz="1050" b="0">
-                          <a:solidFill>
-                            <a:srgbClr val="000000"/>
-                          </a:solidFill>
-                          <a:latin typeface="Avenir Next LT Pro"/>
-                        </a:rPr>
-                        <a:t>No strong signal</a:t>
-                      </a:r>
-                    </a:p>
-                  </a:txBody>
-                  <a:tcPr marL="82296" anchor="ctr">
-                    <a:solidFill>
-                      <a:srgbClr val="FFFFFF"/>
-                    </a:solidFill>
-                  </a:tcPr>
-                </a:tc>
-              </a:tr>
-              <a:tr h="822960">
-                <a:tc>
-                  <a:txBody>
-                    <a:bodyPr/>
-                    <a:lstStyle/>
-                    <a:p>
-                      <a:r>
-                        <a:rPr sz="1050" b="1">
-                          <a:solidFill>
-                            <a:srgbClr val="000000"/>
-                          </a:solidFill>
-                          <a:latin typeface="Avenir Next LT Pro Demi"/>
-                        </a:rPr>
-                        <a:t>Governance</a:t>
-                      </a:r>
-                    </a:p>
-                  </a:txBody>
-                  <a:tcPr marL="82296" anchor="ctr">
-                    <a:solidFill>
-                      <a:srgbClr val="F4F6F8"/>
-                    </a:solidFill>
-                  </a:tcPr>
-                </a:tc>
-                <a:tc>
-                  <a:txBody>
-                    <a:bodyPr/>
-                    <a:lstStyle/>
-                    <a:p>
-                      <a:r>
-                        <a:rPr sz="1050" b="0">
-                          <a:solidFill>
-                            <a:srgbClr val="000000"/>
-                          </a:solidFill>
-                          <a:latin typeface="Avenir Next LT Pro"/>
-                        </a:rPr>
-                        <a:t>Founder-led; Jun 2026 annual meeting routine; no activist involvement</a:t>
-                      </a:r>
-                    </a:p>
-                  </a:txBody>
-                  <a:tcPr marL="82296" anchor="ctr">
-                    <a:solidFill>
-                      <a:srgbClr val="F4F6F8"/>
-                    </a:solidFill>
-                  </a:tcPr>
-                </a:tc>
-                <a:tc>
-                  <a:txBody>
-                    <a:bodyPr/>
-                    <a:lstStyle/>
-                    <a:p>
-                      <a:r>
-                        <a:rPr sz="1050" b="0">
-                          <a:solidFill>
-                            <a:srgbClr val="000000"/>
-                          </a:solidFill>
-                          <a:latin typeface="Avenir Next LT Pro"/>
-                        </a:rPr>
-                        <a:t>Stable; no catalyst</a:t>
-                      </a:r>
-                    </a:p>
-                  </a:txBody>
-                  <a:tcPr marL="82296" anchor="ctr">
-                    <a:solidFill>
-                      <a:srgbClr val="F4F6F8"/>
-                    </a:solidFill>
-                  </a:tcPr>
-                </a:tc>
-              </a:tr>
-            </a:tbl>
-          </a:graphicData>
-        </a:graphic>
-      </p:graphicFrame>
-      <p:sp>
-        <p:nvSpPr>
-          <p:cNvPr id="5" name="TextBox 4"/>
-          <p:cNvSpPr txBox="1"/>
-          <p:nvPr/>
-        </p:nvSpPr>
-        <p:spPr>
-          <a:xfrm>
-            <a:off x="457200" y="5669280"/>
-            <a:ext cx="8229600" cy="365760"/>
-          </a:xfrm>
-          <a:prstGeom prst="rect">
-            <a:avLst/>
-          </a:prstGeom>
-          <a:noFill/>
-          <a:ln>
-            <a:noFill/>
-          </a:ln>
-        </p:spPr>
-        <p:txBody>
-          <a:bodyPr wrap="square">
-            <a:spAutoFit/>
-          </a:bodyPr>
-          <a:lstStyle/>
-          <a:p>
-            <a:r>
-              <a:rPr sz="1150" b="1" i="0">
-                <a:solidFill>
-                  <a:srgbClr val="000000"/>
-                </a:solidFill>
-                <a:latin typeface="Avenir Next LT Pro Demi"/>
-              </a:rPr>
-              <a:t>Aligned, proven operator — but no activist catalyst and no strong insider “buy” signal.</a:t>
-            </a:r>
-          </a:p>
-        </p:txBody>
-      </p:sp>
-      <p:sp>
-        <p:nvSpPr>
-          <p:cNvPr id="6" name="TextBox 5"/>
-          <p:cNvSpPr txBox="1"/>
-          <p:nvPr/>
-        </p:nvSpPr>
-        <p:spPr>
-          <a:xfrm>
-            <a:off x="457200" y="6309360"/>
-            <a:ext cx="8229600" cy="274320"/>
-          </a:xfrm>
-          <a:prstGeom prst="rect">
-            <a:avLst/>
-          </a:prstGeom>
-          <a:noFill/>
-          <a:ln>
-            <a:noFill/>
-          </a:ln>
-        </p:spPr>
-        <p:txBody>
-          <a:bodyPr wrap="square">
-            <a:spAutoFit/>
-          </a:bodyPr>
-          <a:lstStyle/>
-          <a:p>
-            <a:r>
-              <a:rPr sz="750" b="0" i="1">
-                <a:solidFill>
-                  <a:srgbClr val="707070"/>
-                </a:solidFill>
-                <a:latin typeface="Avenir Next LT Pro"/>
-              </a:rPr>
-              <a:t>Sources: RH DEF 14A proxy; SEC Form 4; RH 8-K (Jun 2026).</a:t>
-            </a:r>
-          </a:p>
-        </p:txBody>
-      </p:sp>
-    </p:spTree>
-  </p:cSld>
-  <p:clrMapOvr>
-    <a:masterClrMapping/>
-  </p:clrMapOvr>
-</p:sld>
-</file>
-
-<file path=ppt/slides/slide24.xml><?xml version="1.0" encoding="utf-8"?>
-<p:sld xmlns:a="http://schemas.openxmlformats.org/drawingml/2006/main" xmlns:p="http://schemas.openxmlformats.org/presentationml/2006/main" xmlns:r="http://schemas.openxmlformats.org/officeDocument/2006/relationships">
-  <p:cSld>
-    <p:spTree>
-      <p:nvGrpSpPr>
-        <p:cNvPr id="1" name=""/>
-        <p:cNvGrpSpPr/>
-        <p:nvPr/>
-      </p:nvGrpSpPr>
-      <p:grpSpPr/>
-      <p:sp>
-        <p:nvSpPr>
-          <p:cNvPr id="2" name="Title 1"/>
-          <p:cNvSpPr>
-            <a:spLocks noGrp="1"/>
-          </p:cNvSpPr>
-          <p:nvPr>
-            <p:ph type="title"/>
-          </p:nvPr>
-        </p:nvSpPr>
-        <p:spPr/>
-        <p:txBody>
-          <a:bodyPr/>
-          <a:lstStyle/>
-          <a:p>
-            <a:r>
-              <a:t>Appendix</a:t>
-            </a:r>
-          </a:p>
-        </p:txBody>
-      </p:sp>
-    </p:spTree>
-  </p:cSld>
-  <p:clrMapOvr>
-    <a:masterClrMapping/>
-  </p:clrMapOvr>
 </p:sld>
 </file>
 
@@ -15501,6 +15185,1163 @@
       </p:transition>
     </mc:Fallback>
   </mc:AlternateContent>
+</p:sld>
+</file>
+
+<file path=ppt/slides/slide8.xml><?xml version="1.0" encoding="utf-8"?>
+<p:sld xmlns:a="http://schemas.openxmlformats.org/drawingml/2006/main" xmlns:p="http://schemas.openxmlformats.org/presentationml/2006/main" xmlns:r="http://schemas.openxmlformats.org/officeDocument/2006/relationships">
+  <p:cSld>
+    <p:spTree>
+      <p:nvGrpSpPr>
+        <p:cNvPr id="1" name=""/>
+        <p:cNvGrpSpPr/>
+        <p:nvPr/>
+      </p:nvGrpSpPr>
+      <p:grpSpPr/>
+      <p:sp>
+        <p:nvSpPr>
+          <p:cNvPr id="2" name="TextBox 1"/>
+          <p:cNvSpPr txBox="1"/>
+          <p:nvPr/>
+        </p:nvSpPr>
+        <p:spPr>
+          <a:xfrm>
+            <a:off x="457200" y="365760"/>
+            <a:ext cx="8229600" cy="548640"/>
+          </a:xfrm>
+          <a:prstGeom prst="rect">
+            <a:avLst/>
+          </a:prstGeom>
+          <a:noFill/>
+          <a:ln>
+            <a:noFill/>
+          </a:ln>
+        </p:spPr>
+        <p:txBody>
+          <a:bodyPr wrap="square">
+            <a:spAutoFit/>
+          </a:bodyPr>
+          <a:lstStyle/>
+          <a:p>
+            <a:r>
+              <a:rPr sz="2100">
+                <a:solidFill>
+                  <a:srgbClr val="000000"/>
+                </a:solidFill>
+                <a:latin typeface="Avenir Next LT Pro Demi"/>
+              </a:rPr>
+              <a:t>Trough → Recovery: Where RH Stands</a:t>
+            </a:r>
+          </a:p>
+        </p:txBody>
+      </p:sp>
+      <p:sp>
+        <p:nvSpPr>
+          <p:cNvPr id="3" name="Rectangle 2"/>
+          <p:cNvSpPr/>
+          <p:nvPr/>
+        </p:nvSpPr>
+        <p:spPr>
+          <a:xfrm>
+            <a:off x="457200" y="960120"/>
+            <a:ext cx="8229600" cy="25603"/>
+          </a:xfrm>
+          <a:prstGeom prst="rect">
+            <a:avLst/>
+          </a:prstGeom>
+          <a:solidFill>
+            <a:srgbClr val="000000"/>
+          </a:solidFill>
+          <a:ln>
+            <a:noFill/>
+          </a:ln>
+        </p:spPr>
+        <p:style>
+          <a:lnRef idx="1">
+            <a:schemeClr val="accent1"/>
+          </a:lnRef>
+          <a:fillRef idx="3">
+            <a:schemeClr val="accent1"/>
+          </a:fillRef>
+          <a:effectRef idx="2">
+            <a:schemeClr val="accent1"/>
+          </a:effectRef>
+          <a:fontRef idx="minor">
+            <a:schemeClr val="lt1"/>
+          </a:fontRef>
+        </p:style>
+        <p:txBody>
+          <a:bodyPr rtlCol="0" anchor="ctr"/>
+          <a:lstStyle/>
+          <a:p>
+            <a:pPr algn="ctr"/>
+          </a:p>
+        </p:txBody>
+      </p:sp>
+      <p:sp>
+        <p:nvSpPr>
+          <p:cNvPr id="4" name="TextBox 3"/>
+          <p:cNvSpPr txBox="1"/>
+          <p:nvPr/>
+        </p:nvSpPr>
+        <p:spPr>
+          <a:xfrm>
+            <a:off x="457200" y="1143000"/>
+            <a:ext cx="8229600" cy="548640"/>
+          </a:xfrm>
+          <a:prstGeom prst="rect">
+            <a:avLst/>
+          </a:prstGeom>
+          <a:noFill/>
+          <a:ln>
+            <a:noFill/>
+          </a:ln>
+        </p:spPr>
+        <p:txBody>
+          <a:bodyPr wrap="square">
+            <a:spAutoFit/>
+          </a:bodyPr>
+          <a:lstStyle/>
+          <a:p>
+            <a:r>
+              <a:rPr sz="1100" b="0" i="0">
+                <a:solidFill>
+                  <a:srgbClr val="000000"/>
+                </a:solidFill>
+                <a:latin typeface="Avenir Next LT Pro"/>
+              </a:rPr>
+              <a:t>Peaked ~$3.6B (FY22) on a housing boom + debt-funded buybacks; housing then froze — revenue fell to a ~$3.0B trough with ~$2.4B net debt.</a:t>
+            </a:r>
+          </a:p>
+        </p:txBody>
+      </p:sp>
+      <p:sp>
+        <p:nvSpPr>
+          <p:cNvPr id="5" name="Rectangle 4"/>
+          <p:cNvSpPr/>
+          <p:nvPr/>
+        </p:nvSpPr>
+        <p:spPr>
+          <a:xfrm>
+            <a:off x="457200" y="1874519"/>
+            <a:ext cx="3977639" cy="384048"/>
+          </a:xfrm>
+          <a:prstGeom prst="rect">
+            <a:avLst/>
+          </a:prstGeom>
+          <a:solidFill>
+            <a:srgbClr val="196B24"/>
+          </a:solidFill>
+          <a:ln>
+            <a:noFill/>
+          </a:ln>
+        </p:spPr>
+        <p:style>
+          <a:lnRef idx="1">
+            <a:schemeClr val="accent1"/>
+          </a:lnRef>
+          <a:fillRef idx="3">
+            <a:schemeClr val="accent1"/>
+          </a:fillRef>
+          <a:effectRef idx="2">
+            <a:schemeClr val="accent1"/>
+          </a:effectRef>
+          <a:fontRef idx="minor">
+            <a:schemeClr val="lt1"/>
+          </a:fontRef>
+        </p:style>
+        <p:txBody>
+          <a:bodyPr rtlCol="0" anchor="ctr" lIns="137160"/>
+          <a:lstStyle/>
+          <a:p>
+            <a:pPr algn="ctr"/>
+            <a:r>
+              <a:rPr sz="1250" b="1" i="0">
+                <a:solidFill>
+                  <a:srgbClr val="FFFFFF"/>
+                </a:solidFill>
+                <a:latin typeface="Avenir Next LT Pro Demi"/>
+              </a:rPr>
+              <a:t>WORKING</a:t>
+            </a:r>
+          </a:p>
+        </p:txBody>
+      </p:sp>
+      <p:sp>
+        <p:nvSpPr>
+          <p:cNvPr id="6" name="Rectangle 5"/>
+          <p:cNvSpPr/>
+          <p:nvPr/>
+        </p:nvSpPr>
+        <p:spPr>
+          <a:xfrm>
+            <a:off x="4709160" y="1874519"/>
+            <a:ext cx="3977639" cy="384048"/>
+          </a:xfrm>
+          <a:prstGeom prst="rect">
+            <a:avLst/>
+          </a:prstGeom>
+          <a:solidFill>
+            <a:srgbClr val="B03030"/>
+          </a:solidFill>
+          <a:ln>
+            <a:noFill/>
+          </a:ln>
+        </p:spPr>
+        <p:style>
+          <a:lnRef idx="1">
+            <a:schemeClr val="accent1"/>
+          </a:lnRef>
+          <a:fillRef idx="3">
+            <a:schemeClr val="accent1"/>
+          </a:fillRef>
+          <a:effectRef idx="2">
+            <a:schemeClr val="accent1"/>
+          </a:effectRef>
+          <a:fontRef idx="minor">
+            <a:schemeClr val="lt1"/>
+          </a:fontRef>
+        </p:style>
+        <p:txBody>
+          <a:bodyPr rtlCol="0" anchor="ctr" lIns="137160"/>
+          <a:lstStyle/>
+          <a:p>
+            <a:pPr algn="ctr"/>
+            <a:r>
+              <a:rPr sz="1250" b="1" i="0">
+                <a:solidFill>
+                  <a:srgbClr val="FFFFFF"/>
+                </a:solidFill>
+                <a:latin typeface="Avenir Next LT Pro Demi"/>
+              </a:rPr>
+              <a:t>WATCH</a:t>
+            </a:r>
+          </a:p>
+        </p:txBody>
+      </p:sp>
+      <p:sp>
+        <p:nvSpPr>
+          <p:cNvPr id="7" name="TextBox 6"/>
+          <p:cNvSpPr txBox="1"/>
+          <p:nvPr/>
+        </p:nvSpPr>
+        <p:spPr>
+          <a:xfrm>
+            <a:off x="457200" y="2423160"/>
+            <a:ext cx="3977639" cy="640080"/>
+          </a:xfrm>
+          <a:prstGeom prst="rect">
+            <a:avLst/>
+          </a:prstGeom>
+          <a:noFill/>
+          <a:ln>
+            <a:noFill/>
+          </a:ln>
+        </p:spPr>
+        <p:txBody>
+          <a:bodyPr wrap="square">
+            <a:spAutoFit/>
+          </a:bodyPr>
+          <a:lstStyle/>
+          <a:p>
+            <a:r>
+              <a:rPr sz="1200" b="1" i="0">
+                <a:solidFill>
+                  <a:srgbClr val="196B24"/>
+                </a:solidFill>
+                <a:latin typeface="Avenir Next LT Pro Demi"/>
+              </a:rPr>
+              <a:t>✓  </a:t>
+            </a:r>
+            <a:r>
+              <a:rPr sz="1100" b="0" i="0">
+                <a:solidFill>
+                  <a:srgbClr val="000000"/>
+                </a:solidFill>
+                <a:latin typeface="Avenir Next LT Pro"/>
+              </a:rPr>
+              <a:t>FCF inflected to +$252M in FY25 (from −$214M)</a:t>
+            </a:r>
+          </a:p>
+        </p:txBody>
+      </p:sp>
+      <p:sp>
+        <p:nvSpPr>
+          <p:cNvPr id="8" name="TextBox 7"/>
+          <p:cNvSpPr txBox="1"/>
+          <p:nvPr/>
+        </p:nvSpPr>
+        <p:spPr>
+          <a:xfrm>
+            <a:off x="457200" y="3081528"/>
+            <a:ext cx="3977639" cy="640080"/>
+          </a:xfrm>
+          <a:prstGeom prst="rect">
+            <a:avLst/>
+          </a:prstGeom>
+          <a:noFill/>
+          <a:ln>
+            <a:noFill/>
+          </a:ln>
+        </p:spPr>
+        <p:txBody>
+          <a:bodyPr wrap="square">
+            <a:spAutoFit/>
+          </a:bodyPr>
+          <a:lstStyle/>
+          <a:p>
+            <a:r>
+              <a:rPr sz="1200" b="1" i="0">
+                <a:solidFill>
+                  <a:srgbClr val="196B24"/>
+                </a:solidFill>
+                <a:latin typeface="Avenir Next LT Pro Demi"/>
+              </a:rPr>
+              <a:t>✓  </a:t>
+            </a:r>
+            <a:r>
+              <a:rPr sz="1100" b="0" i="0">
+                <a:solidFill>
+                  <a:srgbClr val="000000"/>
+                </a:solidFill>
+                <a:latin typeface="Avenir Next LT Pro"/>
+              </a:rPr>
+              <a:t>Inventory normalized $1.02B → $819M</a:t>
+            </a:r>
+          </a:p>
+        </p:txBody>
+      </p:sp>
+      <p:sp>
+        <p:nvSpPr>
+          <p:cNvPr id="9" name="TextBox 8"/>
+          <p:cNvSpPr txBox="1"/>
+          <p:nvPr/>
+        </p:nvSpPr>
+        <p:spPr>
+          <a:xfrm>
+            <a:off x="457200" y="3739896"/>
+            <a:ext cx="3977639" cy="640080"/>
+          </a:xfrm>
+          <a:prstGeom prst="rect">
+            <a:avLst/>
+          </a:prstGeom>
+          <a:noFill/>
+          <a:ln>
+            <a:noFill/>
+          </a:ln>
+        </p:spPr>
+        <p:txBody>
+          <a:bodyPr wrap="square">
+            <a:spAutoFit/>
+          </a:bodyPr>
+          <a:lstStyle/>
+          <a:p>
+            <a:r>
+              <a:rPr sz="1200" b="1" i="0">
+                <a:solidFill>
+                  <a:srgbClr val="196B24"/>
+                </a:solidFill>
+                <a:latin typeface="Avenir Next LT Pro Demi"/>
+              </a:rPr>
+              <a:t>✓  </a:t>
+            </a:r>
+            <a:r>
+              <a:rPr sz="1100" b="0" i="0">
+                <a:solidFill>
+                  <a:srgbClr val="000000"/>
+                </a:solidFill>
+                <a:latin typeface="Avenir Next LT Pro"/>
+              </a:rPr>
+              <a:t>Revenue re-accelerated +8.1% in FY25</a:t>
+            </a:r>
+          </a:p>
+        </p:txBody>
+      </p:sp>
+      <p:sp>
+        <p:nvSpPr>
+          <p:cNvPr id="10" name="TextBox 9"/>
+          <p:cNvSpPr txBox="1"/>
+          <p:nvPr/>
+        </p:nvSpPr>
+        <p:spPr>
+          <a:xfrm>
+            <a:off x="4709160" y="2423160"/>
+            <a:ext cx="3977639" cy="640080"/>
+          </a:xfrm>
+          <a:prstGeom prst="rect">
+            <a:avLst/>
+          </a:prstGeom>
+          <a:noFill/>
+          <a:ln>
+            <a:noFill/>
+          </a:ln>
+        </p:spPr>
+        <p:txBody>
+          <a:bodyPr wrap="square">
+            <a:spAutoFit/>
+          </a:bodyPr>
+          <a:lstStyle/>
+          <a:p>
+            <a:r>
+              <a:rPr sz="1200" b="1" i="0">
+                <a:solidFill>
+                  <a:srgbClr val="B03030"/>
+                </a:solidFill>
+                <a:latin typeface="Avenir Next LT Pro Demi"/>
+              </a:rPr>
+              <a:t>!  </a:t>
+            </a:r>
+            <a:r>
+              <a:rPr sz="1100" b="0" i="0">
+                <a:solidFill>
+                  <a:srgbClr val="000000"/>
+                </a:solidFill>
+                <a:latin typeface="Avenir Next LT Pro"/>
+              </a:rPr>
+              <a:t>Q1 FY26: revenue −1.7%, net loss</a:t>
+            </a:r>
+          </a:p>
+        </p:txBody>
+      </p:sp>
+      <p:sp>
+        <p:nvSpPr>
+          <p:cNvPr id="11" name="TextBox 10"/>
+          <p:cNvSpPr txBox="1"/>
+          <p:nvPr/>
+        </p:nvSpPr>
+        <p:spPr>
+          <a:xfrm>
+            <a:off x="4709160" y="3081528"/>
+            <a:ext cx="3977639" cy="640080"/>
+          </a:xfrm>
+          <a:prstGeom prst="rect">
+            <a:avLst/>
+          </a:prstGeom>
+          <a:noFill/>
+          <a:ln>
+            <a:noFill/>
+          </a:ln>
+        </p:spPr>
+        <p:txBody>
+          <a:bodyPr wrap="square">
+            <a:spAutoFit/>
+          </a:bodyPr>
+          <a:lstStyle/>
+          <a:p>
+            <a:r>
+              <a:rPr sz="1200" b="1" i="0">
+                <a:solidFill>
+                  <a:srgbClr val="B03030"/>
+                </a:solidFill>
+                <a:latin typeface="Avenir Next LT Pro Demi"/>
+              </a:rPr>
+              <a:t>!  </a:t>
+            </a:r>
+            <a:r>
+              <a:rPr sz="1100" b="0" i="0">
+                <a:solidFill>
+                  <a:srgbClr val="000000"/>
+                </a:solidFill>
+                <a:latin typeface="Avenir Next LT Pro"/>
+              </a:rPr>
+              <a:t>~$225M/yr interest keeps coverage thin</a:t>
+            </a:r>
+          </a:p>
+        </p:txBody>
+      </p:sp>
+      <p:sp>
+        <p:nvSpPr>
+          <p:cNvPr id="12" name="TextBox 11"/>
+          <p:cNvSpPr txBox="1"/>
+          <p:nvPr/>
+        </p:nvSpPr>
+        <p:spPr>
+          <a:xfrm>
+            <a:off x="4709160" y="3739896"/>
+            <a:ext cx="3977639" cy="640080"/>
+          </a:xfrm>
+          <a:prstGeom prst="rect">
+            <a:avLst/>
+          </a:prstGeom>
+          <a:noFill/>
+          <a:ln>
+            <a:noFill/>
+          </a:ln>
+        </p:spPr>
+        <p:txBody>
+          <a:bodyPr wrap="square">
+            <a:spAutoFit/>
+          </a:bodyPr>
+          <a:lstStyle/>
+          <a:p>
+            <a:r>
+              <a:rPr sz="1200" b="1" i="0">
+                <a:solidFill>
+                  <a:srgbClr val="B03030"/>
+                </a:solidFill>
+                <a:latin typeface="Avenir Next LT Pro Demi"/>
+              </a:rPr>
+              <a:t>!  </a:t>
+            </a:r>
+            <a:r>
+              <a:rPr sz="1100" b="0" i="0">
+                <a:solidFill>
+                  <a:srgbClr val="000000"/>
+                </a:solidFill>
+                <a:latin typeface="Avenir Next LT Pro"/>
+              </a:rPr>
+              <a:t>Guidance is back-half loaded</a:t>
+            </a:r>
+          </a:p>
+        </p:txBody>
+      </p:sp>
+      <p:sp>
+        <p:nvSpPr>
+          <p:cNvPr id="13" name="TextBox 12"/>
+          <p:cNvSpPr txBox="1"/>
+          <p:nvPr/>
+        </p:nvSpPr>
+        <p:spPr>
+          <a:xfrm>
+            <a:off x="457200" y="4663440"/>
+            <a:ext cx="8229600" cy="365760"/>
+          </a:xfrm>
+          <a:prstGeom prst="rect">
+            <a:avLst/>
+          </a:prstGeom>
+          <a:noFill/>
+          <a:ln>
+            <a:noFill/>
+          </a:ln>
+        </p:spPr>
+        <p:txBody>
+          <a:bodyPr wrap="square">
+            <a:spAutoFit/>
+          </a:bodyPr>
+          <a:lstStyle/>
+          <a:p>
+            <a:r>
+              <a:rPr sz="1150" b="1" i="0">
+                <a:solidFill>
+                  <a:srgbClr val="000000"/>
+                </a:solidFill>
+                <a:latin typeface="Avenir Next LT Pro Demi"/>
+              </a:rPr>
+              <a:t>Recovery is real but early — the next two quarters are the tell.</a:t>
+            </a:r>
+          </a:p>
+        </p:txBody>
+      </p:sp>
+      <p:sp>
+        <p:nvSpPr>
+          <p:cNvPr id="14" name="TextBox 13"/>
+          <p:cNvSpPr txBox="1"/>
+          <p:nvPr/>
+        </p:nvSpPr>
+        <p:spPr>
+          <a:xfrm>
+            <a:off x="457200" y="6309360"/>
+            <a:ext cx="8229600" cy="274320"/>
+          </a:xfrm>
+          <a:prstGeom prst="rect">
+            <a:avLst/>
+          </a:prstGeom>
+          <a:noFill/>
+          <a:ln>
+            <a:noFill/>
+          </a:ln>
+        </p:spPr>
+        <p:txBody>
+          <a:bodyPr wrap="square">
+            <a:spAutoFit/>
+          </a:bodyPr>
+          <a:lstStyle/>
+          <a:p>
+            <a:r>
+              <a:rPr sz="750" b="0" i="1">
+                <a:solidFill>
+                  <a:srgbClr val="707070"/>
+                </a:solidFill>
+                <a:latin typeface="Avenir Next LT Pro"/>
+              </a:rPr>
+              <a:t>Sources: RH FY2025 10-K; Q1 FY2026 10-Q.</a:t>
+            </a:r>
+          </a:p>
+        </p:txBody>
+      </p:sp>
+    </p:spTree>
+  </p:cSld>
+  <p:clrMapOvr>
+    <a:masterClrMapping/>
+  </p:clrMapOvr>
+</p:sld>
+</file>
+
+<file path=ppt/slides/slide9.xml><?xml version="1.0" encoding="utf-8"?>
+<p:sld xmlns:a="http://schemas.openxmlformats.org/drawingml/2006/main" xmlns:p="http://schemas.openxmlformats.org/presentationml/2006/main" xmlns:r="http://schemas.openxmlformats.org/officeDocument/2006/relationships">
+  <p:cSld>
+    <p:spTree>
+      <p:nvGrpSpPr>
+        <p:cNvPr id="1" name=""/>
+        <p:cNvGrpSpPr/>
+        <p:nvPr/>
+      </p:nvGrpSpPr>
+      <p:grpSpPr/>
+      <p:sp>
+        <p:nvSpPr>
+          <p:cNvPr id="2" name="TextBox 1"/>
+          <p:cNvSpPr txBox="1"/>
+          <p:nvPr/>
+        </p:nvSpPr>
+        <p:spPr>
+          <a:xfrm>
+            <a:off x="457200" y="365760"/>
+            <a:ext cx="8229600" cy="548640"/>
+          </a:xfrm>
+          <a:prstGeom prst="rect">
+            <a:avLst/>
+          </a:prstGeom>
+          <a:noFill/>
+          <a:ln>
+            <a:noFill/>
+          </a:ln>
+        </p:spPr>
+        <p:txBody>
+          <a:bodyPr wrap="square">
+            <a:spAutoFit/>
+          </a:bodyPr>
+          <a:lstStyle/>
+          <a:p>
+            <a:r>
+              <a:rPr sz="2100">
+                <a:solidFill>
+                  <a:srgbClr val="000000"/>
+                </a:solidFill>
+                <a:latin typeface="Avenir Next LT Pro Demi"/>
+              </a:rPr>
+              <a:t>Strategy &amp; Recent Execution</a:t>
+            </a:r>
+          </a:p>
+        </p:txBody>
+      </p:sp>
+      <p:sp>
+        <p:nvSpPr>
+          <p:cNvPr id="3" name="Rectangle 2"/>
+          <p:cNvSpPr/>
+          <p:nvPr/>
+        </p:nvSpPr>
+        <p:spPr>
+          <a:xfrm>
+            <a:off x="457200" y="960120"/>
+            <a:ext cx="8229600" cy="25603"/>
+          </a:xfrm>
+          <a:prstGeom prst="rect">
+            <a:avLst/>
+          </a:prstGeom>
+          <a:solidFill>
+            <a:srgbClr val="000000"/>
+          </a:solidFill>
+          <a:ln>
+            <a:noFill/>
+          </a:ln>
+        </p:spPr>
+        <p:style>
+          <a:lnRef idx="1">
+            <a:schemeClr val="accent1"/>
+          </a:lnRef>
+          <a:fillRef idx="3">
+            <a:schemeClr val="accent1"/>
+          </a:fillRef>
+          <a:effectRef idx="2">
+            <a:schemeClr val="accent1"/>
+          </a:effectRef>
+          <a:fontRef idx="minor">
+            <a:schemeClr val="lt1"/>
+          </a:fontRef>
+        </p:style>
+        <p:txBody>
+          <a:bodyPr rtlCol="0" anchor="ctr"/>
+          <a:lstStyle/>
+          <a:p>
+            <a:pPr algn="ctr"/>
+          </a:p>
+        </p:txBody>
+      </p:sp>
+      <p:sp>
+        <p:nvSpPr>
+          <p:cNvPr id="4" name="TextBox 3"/>
+          <p:cNvSpPr txBox="1"/>
+          <p:nvPr/>
+        </p:nvSpPr>
+        <p:spPr>
+          <a:xfrm>
+            <a:off x="457200" y="1143000"/>
+            <a:ext cx="3977639" cy="365760"/>
+          </a:xfrm>
+          <a:prstGeom prst="rect">
+            <a:avLst/>
+          </a:prstGeom>
+          <a:noFill/>
+          <a:ln>
+            <a:noFill/>
+          </a:ln>
+        </p:spPr>
+        <p:txBody>
+          <a:bodyPr wrap="square">
+            <a:spAutoFit/>
+          </a:bodyPr>
+          <a:lstStyle/>
+          <a:p>
+            <a:r>
+              <a:rPr sz="1100" b="1" i="0">
+                <a:solidFill>
+                  <a:srgbClr val="000000"/>
+                </a:solidFill>
+                <a:latin typeface="Avenir Next LT Pro Demi"/>
+              </a:rPr>
+              <a:t>THE PLAN</a:t>
+            </a:r>
+          </a:p>
+        </p:txBody>
+      </p:sp>
+      <p:sp>
+        <p:nvSpPr>
+          <p:cNvPr id="5" name="TextBox 4"/>
+          <p:cNvSpPr txBox="1"/>
+          <p:nvPr/>
+        </p:nvSpPr>
+        <p:spPr>
+          <a:xfrm>
+            <a:off x="457200" y="1554480"/>
+            <a:ext cx="3977639" cy="640080"/>
+          </a:xfrm>
+          <a:prstGeom prst="rect">
+            <a:avLst/>
+          </a:prstGeom>
+          <a:noFill/>
+          <a:ln>
+            <a:noFill/>
+          </a:ln>
+        </p:spPr>
+        <p:txBody>
+          <a:bodyPr wrap="square">
+            <a:spAutoFit/>
+          </a:bodyPr>
+          <a:lstStyle/>
+          <a:p>
+            <a:r>
+              <a:rPr sz="1100" b="1" i="0">
+                <a:solidFill>
+                  <a:srgbClr val="000000"/>
+                </a:solidFill>
+                <a:latin typeface="Avenir Next LT Pro"/>
+              </a:rPr>
+              <a:t>•  </a:t>
+            </a:r>
+            <a:r>
+              <a:rPr sz="1100" b="0" i="0">
+                <a:solidFill>
+                  <a:srgbClr val="000000"/>
+                </a:solidFill>
+                <a:latin typeface="Avenir Next LT Pro"/>
+              </a:rPr>
+              <a:t>Product transformation — new collections</a:t>
+            </a:r>
+          </a:p>
+        </p:txBody>
+      </p:sp>
+      <p:sp>
+        <p:nvSpPr>
+          <p:cNvPr id="6" name="TextBox 5"/>
+          <p:cNvSpPr txBox="1"/>
+          <p:nvPr/>
+        </p:nvSpPr>
+        <p:spPr>
+          <a:xfrm>
+            <a:off x="457200" y="2212848"/>
+            <a:ext cx="3977639" cy="640080"/>
+          </a:xfrm>
+          <a:prstGeom prst="rect">
+            <a:avLst/>
+          </a:prstGeom>
+          <a:noFill/>
+          <a:ln>
+            <a:noFill/>
+          </a:ln>
+        </p:spPr>
+        <p:txBody>
+          <a:bodyPr wrap="square">
+            <a:spAutoFit/>
+          </a:bodyPr>
+          <a:lstStyle/>
+          <a:p>
+            <a:r>
+              <a:rPr sz="1100" b="1" i="0">
+                <a:solidFill>
+                  <a:srgbClr val="000000"/>
+                </a:solidFill>
+                <a:latin typeface="Avenir Next LT Pro"/>
+              </a:rPr>
+              <a:t>•  </a:t>
+            </a:r>
+            <a:r>
+              <a:rPr sz="1100" b="0" i="0">
+                <a:solidFill>
+                  <a:srgbClr val="000000"/>
+                </a:solidFill>
+                <a:latin typeface="Avenir Next LT Pro"/>
+              </a:rPr>
+              <a:t>Gallery expansion → RH's ~$5–6B opportunity</a:t>
+            </a:r>
+          </a:p>
+        </p:txBody>
+      </p:sp>
+      <p:sp>
+        <p:nvSpPr>
+          <p:cNvPr id="7" name="TextBox 6"/>
+          <p:cNvSpPr txBox="1"/>
+          <p:nvPr/>
+        </p:nvSpPr>
+        <p:spPr>
+          <a:xfrm>
+            <a:off x="457200" y="2871215"/>
+            <a:ext cx="3977639" cy="640080"/>
+          </a:xfrm>
+          <a:prstGeom prst="rect">
+            <a:avLst/>
+          </a:prstGeom>
+          <a:noFill/>
+          <a:ln>
+            <a:noFill/>
+          </a:ln>
+        </p:spPr>
+        <p:txBody>
+          <a:bodyPr wrap="square">
+            <a:spAutoFit/>
+          </a:bodyPr>
+          <a:lstStyle/>
+          <a:p>
+            <a:r>
+              <a:rPr sz="1100" b="1" i="0">
+                <a:solidFill>
+                  <a:srgbClr val="000000"/>
+                </a:solidFill>
+                <a:latin typeface="Avenir Next LT Pro"/>
+              </a:rPr>
+              <a:t>•  </a:t>
+            </a:r>
+            <a:r>
+              <a:rPr sz="1100" b="0" i="0">
+                <a:solidFill>
+                  <a:srgbClr val="000000"/>
+                </a:solidFill>
+                <a:latin typeface="Avenir Next LT Pro"/>
+              </a:rPr>
+              <a:t>Move upmarket — Estates targets the rate-immune buyer</a:t>
+            </a:r>
+          </a:p>
+        </p:txBody>
+      </p:sp>
+      <p:sp>
+        <p:nvSpPr>
+          <p:cNvPr id="8" name="TextBox 7"/>
+          <p:cNvSpPr txBox="1"/>
+          <p:nvPr/>
+        </p:nvSpPr>
+        <p:spPr>
+          <a:xfrm>
+            <a:off x="457200" y="3529584"/>
+            <a:ext cx="3977639" cy="640080"/>
+          </a:xfrm>
+          <a:prstGeom prst="rect">
+            <a:avLst/>
+          </a:prstGeom>
+          <a:noFill/>
+          <a:ln>
+            <a:noFill/>
+          </a:ln>
+        </p:spPr>
+        <p:txBody>
+          <a:bodyPr wrap="square">
+            <a:spAutoFit/>
+          </a:bodyPr>
+          <a:lstStyle/>
+          <a:p>
+            <a:r>
+              <a:rPr sz="1100" b="1" i="0">
+                <a:solidFill>
+                  <a:srgbClr val="000000"/>
+                </a:solidFill>
+                <a:latin typeface="Avenir Next LT Pro"/>
+              </a:rPr>
+              <a:t>•  </a:t>
+            </a:r>
+            <a:r>
+              <a:rPr sz="1100" b="0" i="0">
+                <a:solidFill>
+                  <a:srgbClr val="000000"/>
+                </a:solidFill>
+                <a:latin typeface="Avenir Next LT Pro"/>
+              </a:rPr>
+              <a:t>Global + platform — hospitality, F&amp;B</a:t>
+            </a:r>
+          </a:p>
+        </p:txBody>
+      </p:sp>
+      <p:sp>
+        <p:nvSpPr>
+          <p:cNvPr id="9" name="TextBox 8"/>
+          <p:cNvSpPr txBox="1"/>
+          <p:nvPr/>
+        </p:nvSpPr>
+        <p:spPr>
+          <a:xfrm>
+            <a:off x="4709160" y="1143000"/>
+            <a:ext cx="3977639" cy="365760"/>
+          </a:xfrm>
+          <a:prstGeom prst="rect">
+            <a:avLst/>
+          </a:prstGeom>
+          <a:noFill/>
+          <a:ln>
+            <a:noFill/>
+          </a:ln>
+        </p:spPr>
+        <p:txBody>
+          <a:bodyPr wrap="square">
+            <a:spAutoFit/>
+          </a:bodyPr>
+          <a:lstStyle/>
+          <a:p>
+            <a:r>
+              <a:rPr sz="1100" b="1" i="0">
+                <a:solidFill>
+                  <a:srgbClr val="000000"/>
+                </a:solidFill>
+                <a:latin typeface="Avenir Next LT Pro Demi"/>
+              </a:rPr>
+              <a:t>RECENT MOVES  (watch, not yet catalysts)</a:t>
+            </a:r>
+          </a:p>
+        </p:txBody>
+      </p:sp>
+      <p:sp>
+        <p:nvSpPr>
+          <p:cNvPr id="10" name="TextBox 9"/>
+          <p:cNvSpPr txBox="1"/>
+          <p:nvPr/>
+        </p:nvSpPr>
+        <p:spPr>
+          <a:xfrm>
+            <a:off x="4709160" y="1554480"/>
+            <a:ext cx="3977639" cy="822960"/>
+          </a:xfrm>
+          <a:prstGeom prst="rect">
+            <a:avLst/>
+          </a:prstGeom>
+          <a:noFill/>
+          <a:ln>
+            <a:noFill/>
+          </a:ln>
+        </p:spPr>
+        <p:txBody>
+          <a:bodyPr wrap="square">
+            <a:spAutoFit/>
+          </a:bodyPr>
+          <a:lstStyle/>
+          <a:p>
+            <a:r>
+              <a:rPr sz="1100" b="1" i="0">
+                <a:solidFill>
+                  <a:srgbClr val="000000"/>
+                </a:solidFill>
+                <a:latin typeface="Avenir Next LT Pro"/>
+              </a:rPr>
+              <a:t>•  </a:t>
+            </a:r>
+            <a:r>
+              <a:rPr sz="1100" b="0" i="0">
+                <a:solidFill>
+                  <a:srgbClr val="000000"/>
+                </a:solidFill>
+                <a:latin typeface="Avenir Next LT Pro"/>
+              </a:rPr>
+              <a:t>Estates unveiled — acquired legendary ateliers (owned exclusivity); commercially unproven</a:t>
+            </a:r>
+          </a:p>
+        </p:txBody>
+      </p:sp>
+      <p:sp>
+        <p:nvSpPr>
+          <p:cNvPr id="11" name="TextBox 10"/>
+          <p:cNvSpPr txBox="1"/>
+          <p:nvPr/>
+        </p:nvSpPr>
+        <p:spPr>
+          <a:xfrm>
+            <a:off x="4709160" y="2395728"/>
+            <a:ext cx="3977639" cy="822960"/>
+          </a:xfrm>
+          <a:prstGeom prst="rect">
+            <a:avLst/>
+          </a:prstGeom>
+          <a:noFill/>
+          <a:ln>
+            <a:noFill/>
+          </a:ln>
+        </p:spPr>
+        <p:txBody>
+          <a:bodyPr wrap="square">
+            <a:spAutoFit/>
+          </a:bodyPr>
+          <a:lstStyle/>
+          <a:p>
+            <a:r>
+              <a:rPr sz="1100" b="1" i="0">
+                <a:solidFill>
+                  <a:srgbClr val="000000"/>
+                </a:solidFill>
+                <a:latin typeface="Avenir Next LT Pro"/>
+              </a:rPr>
+              <a:t>•  </a:t>
+            </a:r>
+            <a:r>
+              <a:rPr sz="1100" b="0" i="0">
+                <a:solidFill>
+                  <a:srgbClr val="000000"/>
+                </a:solidFill>
+                <a:latin typeface="Avenir Next LT Pro"/>
+              </a:rPr>
+              <a:t>Mercedes-AMG F1 hospitality partnership — brand halo</a:t>
+            </a:r>
+          </a:p>
+        </p:txBody>
+      </p:sp>
+      <p:sp>
+        <p:nvSpPr>
+          <p:cNvPr id="12" name="TextBox 11"/>
+          <p:cNvSpPr txBox="1"/>
+          <p:nvPr/>
+        </p:nvSpPr>
+        <p:spPr>
+          <a:xfrm>
+            <a:off x="4709160" y="3236976"/>
+            <a:ext cx="3977639" cy="822960"/>
+          </a:xfrm>
+          <a:prstGeom prst="rect">
+            <a:avLst/>
+          </a:prstGeom>
+          <a:noFill/>
+          <a:ln>
+            <a:noFill/>
+          </a:ln>
+        </p:spPr>
+        <p:txBody>
+          <a:bodyPr wrap="square">
+            <a:spAutoFit/>
+          </a:bodyPr>
+          <a:lstStyle/>
+          <a:p>
+            <a:r>
+              <a:rPr sz="1100" b="1" i="0">
+                <a:solidFill>
+                  <a:srgbClr val="000000"/>
+                </a:solidFill>
+                <a:latin typeface="Avenir Next LT Pro"/>
+              </a:rPr>
+              <a:t>•  </a:t>
+            </a:r>
+            <a:r>
+              <a:rPr sz="1100" b="0" i="0">
+                <a:solidFill>
+                  <a:srgbClr val="000000"/>
+                </a:solidFill>
+                <a:latin typeface="Avenir Next LT Pro"/>
+              </a:rPr>
+              <a:t>RH London Mayfair flagship — Europe doubling-down</a:t>
+            </a:r>
+          </a:p>
+        </p:txBody>
+      </p:sp>
+      <p:sp>
+        <p:nvSpPr>
+          <p:cNvPr id="13" name="TextBox 12"/>
+          <p:cNvSpPr txBox="1"/>
+          <p:nvPr/>
+        </p:nvSpPr>
+        <p:spPr>
+          <a:xfrm>
+            <a:off x="457200" y="4663440"/>
+            <a:ext cx="8229600" cy="457200"/>
+          </a:xfrm>
+          <a:prstGeom prst="rect">
+            <a:avLst/>
+          </a:prstGeom>
+          <a:noFill/>
+          <a:ln>
+            <a:noFill/>
+          </a:ln>
+        </p:spPr>
+        <p:txBody>
+          <a:bodyPr wrap="square">
+            <a:spAutoFit/>
+          </a:bodyPr>
+          <a:lstStyle/>
+          <a:p>
+            <a:r>
+              <a:rPr sz="1150" b="1" i="0">
+                <a:solidFill>
+                  <a:srgbClr val="000000"/>
+                </a:solidFill>
+                <a:latin typeface="Avenir Next LT Pro Demi"/>
+              </a:rPr>
+              <a:t>Differentiated and expanding — but unproven and capital-intensive during a levered stretch.</a:t>
+            </a:r>
+          </a:p>
+        </p:txBody>
+      </p:sp>
+      <p:sp>
+        <p:nvSpPr>
+          <p:cNvPr id="14" name="TextBox 13"/>
+          <p:cNvSpPr txBox="1"/>
+          <p:nvPr/>
+        </p:nvSpPr>
+        <p:spPr>
+          <a:xfrm>
+            <a:off x="457200" y="6309360"/>
+            <a:ext cx="8229600" cy="274320"/>
+          </a:xfrm>
+          <a:prstGeom prst="rect">
+            <a:avLst/>
+          </a:prstGeom>
+          <a:noFill/>
+          <a:ln>
+            <a:noFill/>
+          </a:ln>
+        </p:spPr>
+        <p:txBody>
+          <a:bodyPr wrap="square">
+            <a:spAutoFit/>
+          </a:bodyPr>
+          <a:lstStyle/>
+          <a:p>
+            <a:r>
+              <a:rPr sz="750" b="0" i="1">
+                <a:solidFill>
+                  <a:srgbClr val="707070"/>
+                </a:solidFill>
+                <a:latin typeface="Avenir Next LT Pro"/>
+              </a:rPr>
+              <a:t>Sources: RH FY2025 10-K; company announcements (2026).</a:t>
+            </a:r>
+          </a:p>
+        </p:txBody>
+      </p:sp>
+    </p:spTree>
+  </p:cSld>
+  <p:clrMapOvr>
+    <a:masterClrMapping/>
+  </p:clrMapOvr>
 </p:sld>
 </file>
 

--- a/RH_Stock_Pitch_updated.pptx
+++ b/RH_Stock_Pitch_updated.pptx
@@ -5247,7 +5247,7 @@
                 </a:solidFill>
                 <a:latin typeface="Avenir Next LT Pro Demi"/>
               </a:rPr>
-              <a:t>Management &amp; Ownership</a:t>
+              <a:t>Strategy &amp; Recent Execution</a:t>
             </a:r>
           </a:p>
         </p:txBody>
@@ -5295,383 +5295,16 @@
           </a:p>
         </p:txBody>
       </p:sp>
-      <p:graphicFrame>
-        <p:nvGraphicFramePr>
-          <p:cNvPr id="4" name="Table 3"/>
-          <p:cNvGraphicFramePr>
-            <a:graphicFrameLocks noGrp="1"/>
-          </p:cNvGraphicFramePr>
-          <p:nvPr/>
-        </p:nvGraphicFramePr>
-        <p:xfrm>
-          <a:off x="457200" y="1325880"/>
-          <a:ext cx="8229599" cy="4114800"/>
-        </p:xfrm>
-        <a:graphic>
-          <a:graphicData uri="http://schemas.openxmlformats.org/drawingml/2006/table">
-            <a:tbl>
-              <a:tblPr>
-                <a:tableStyleId>{5C22544A-7EE6-4342-B048-85BDC9FD1C3A}</a:tableStyleId>
-              </a:tblPr>
-              <a:tblGrid>
-                <a:gridCol w="1920240"/>
-                <a:gridCol w="3977639"/>
-                <a:gridCol w="2331720"/>
-              </a:tblGrid>
-              <a:tr h="822960">
-                <a:tc>
-                  <a:txBody>
-                    <a:bodyPr/>
-                    <a:lstStyle/>
-                    <a:p>
-                      <a:r>
-                        <a:rPr sz="1050" b="1">
-                          <a:solidFill>
-                            <a:srgbClr val="FFFFFF"/>
-                          </a:solidFill>
-                          <a:latin typeface="Avenir Next LT Pro Demi"/>
-                        </a:rPr>
-                        <a:t>Item</a:t>
-                      </a:r>
-                    </a:p>
-                  </a:txBody>
-                  <a:tcPr marL="82296" anchor="ctr">
-                    <a:solidFill>
-                      <a:srgbClr val="9A7B44"/>
-                    </a:solidFill>
-                  </a:tcPr>
-                </a:tc>
-                <a:tc>
-                  <a:txBody>
-                    <a:bodyPr/>
-                    <a:lstStyle/>
-                    <a:p>
-                      <a:r>
-                        <a:rPr sz="1050" b="1">
-                          <a:solidFill>
-                            <a:srgbClr val="FFFFFF"/>
-                          </a:solidFill>
-                          <a:latin typeface="Avenir Next LT Pro"/>
-                        </a:rPr>
-                        <a:t>Detail</a:t>
-                      </a:r>
-                    </a:p>
-                  </a:txBody>
-                  <a:tcPr marL="82296" anchor="ctr">
-                    <a:solidFill>
-                      <a:srgbClr val="9A7B44"/>
-                    </a:solidFill>
-                  </a:tcPr>
-                </a:tc>
-                <a:tc>
-                  <a:txBody>
-                    <a:bodyPr/>
-                    <a:lstStyle/>
-                    <a:p>
-                      <a:r>
-                        <a:rPr sz="1050" b="1">
-                          <a:solidFill>
-                            <a:srgbClr val="FFFFFF"/>
-                          </a:solidFill>
-                          <a:latin typeface="Avenir Next LT Pro"/>
-                        </a:rPr>
-                        <a:t>Read</a:t>
-                      </a:r>
-                    </a:p>
-                  </a:txBody>
-                  <a:tcPr marL="82296" anchor="ctr">
-                    <a:solidFill>
-                      <a:srgbClr val="9A7B44"/>
-                    </a:solidFill>
-                  </a:tcPr>
-                </a:tc>
-              </a:tr>
-              <a:tr h="822960">
-                <a:tc>
-                  <a:txBody>
-                    <a:bodyPr/>
-                    <a:lstStyle/>
-                    <a:p>
-                      <a:r>
-                        <a:rPr sz="1050" b="1">
-                          <a:solidFill>
-                            <a:srgbClr val="000000"/>
-                          </a:solidFill>
-                          <a:latin typeface="Avenir Next LT Pro Demi"/>
-                        </a:rPr>
-                        <a:t>Operator</a:t>
-                      </a:r>
-                    </a:p>
-                  </a:txBody>
-                  <a:tcPr marL="82296" anchor="ctr">
-                    <a:solidFill>
-                      <a:srgbClr val="FFFFFF"/>
-                    </a:solidFill>
-                  </a:tcPr>
-                </a:tc>
-                <a:tc>
-                  <a:txBody>
-                    <a:bodyPr/>
-                    <a:lstStyle/>
-                    <a:p>
-                      <a:r>
-                        <a:rPr sz="1050" b="0">
-                          <a:solidFill>
-                            <a:srgbClr val="000000"/>
-                          </a:solidFill>
-                          <a:latin typeface="Avenir Next LT Pro"/>
-                        </a:rPr>
-                        <a:t>Friedman (Chair/CEO): grew Pottery Barn $50M→$1B; rebuilt RH from near-bankruptcy (2001)</a:t>
-                      </a:r>
-                    </a:p>
-                  </a:txBody>
-                  <a:tcPr marL="82296" anchor="ctr">
-                    <a:solidFill>
-                      <a:srgbClr val="FFFFFF"/>
-                    </a:solidFill>
-                  </a:tcPr>
-                </a:tc>
-                <a:tc>
-                  <a:txBody>
-                    <a:bodyPr/>
-                    <a:lstStyle/>
-                    <a:p>
-                      <a:r>
-                        <a:rPr sz="1050" b="0">
-                          <a:solidFill>
-                            <a:srgbClr val="000000"/>
-                          </a:solidFill>
-                          <a:latin typeface="Avenir Next LT Pro"/>
-                        </a:rPr>
-                        <a:t>Proven; key-man risk</a:t>
-                      </a:r>
-                    </a:p>
-                  </a:txBody>
-                  <a:tcPr marL="82296" anchor="ctr">
-                    <a:solidFill>
-                      <a:srgbClr val="FFFFFF"/>
-                    </a:solidFill>
-                  </a:tcPr>
-                </a:tc>
-              </a:tr>
-              <a:tr h="822960">
-                <a:tc>
-                  <a:txBody>
-                    <a:bodyPr/>
-                    <a:lstStyle/>
-                    <a:p>
-                      <a:r>
-                        <a:rPr sz="1050" b="1">
-                          <a:solidFill>
-                            <a:srgbClr val="000000"/>
-                          </a:solidFill>
-                          <a:latin typeface="Avenir Next LT Pro Demi"/>
-                        </a:rPr>
-                        <a:t>Ownership</a:t>
-                      </a:r>
-                    </a:p>
-                  </a:txBody>
-                  <a:tcPr marL="82296" anchor="ctr">
-                    <a:solidFill>
-                      <a:srgbClr val="F4F6F8"/>
-                    </a:solidFill>
-                  </a:tcPr>
-                </a:tc>
-                <a:tc>
-                  <a:txBody>
-                    <a:bodyPr/>
-                    <a:lstStyle/>
-                    <a:p>
-                      <a:r>
-                        <a:rPr sz="1050" b="0">
-                          <a:solidFill>
-                            <a:srgbClr val="000000"/>
-                          </a:solidFill>
-                          <a:latin typeface="Avenir Next LT Pro"/>
-                        </a:rPr>
-                        <a:t>~18% outright (~25% incl. options); bought ~$10M at ~$216 (Jun 2024)</a:t>
-                      </a:r>
-                    </a:p>
-                  </a:txBody>
-                  <a:tcPr marL="82296" anchor="ctr">
-                    <a:solidFill>
-                      <a:srgbClr val="F4F6F8"/>
-                    </a:solidFill>
-                  </a:tcPr>
-                </a:tc>
-                <a:tc>
-                  <a:txBody>
-                    <a:bodyPr/>
-                    <a:lstStyle/>
-                    <a:p>
-                      <a:r>
-                        <a:rPr sz="1050" b="0">
-                          <a:solidFill>
-                            <a:srgbClr val="000000"/>
-                          </a:solidFill>
-                          <a:latin typeface="Avenir Next LT Pro"/>
-                        </a:rPr>
-                        <a:t>Deep alignment</a:t>
-                      </a:r>
-                    </a:p>
-                  </a:txBody>
-                  <a:tcPr marL="82296" anchor="ctr">
-                    <a:solidFill>
-                      <a:srgbClr val="F4F6F8"/>
-                    </a:solidFill>
-                  </a:tcPr>
-                </a:tc>
-              </a:tr>
-              <a:tr h="822960">
-                <a:tc>
-                  <a:txBody>
-                    <a:bodyPr/>
-                    <a:lstStyle/>
-                    <a:p>
-                      <a:r>
-                        <a:rPr sz="1050" b="1">
-                          <a:solidFill>
-                            <a:srgbClr val="000000"/>
-                          </a:solidFill>
-                          <a:latin typeface="Avenir Next LT Pro Demi"/>
-                        </a:rPr>
-                        <a:t>Recent insider activity</a:t>
-                      </a:r>
-                    </a:p>
-                  </a:txBody>
-                  <a:tcPr marL="82296" anchor="ctr">
-                    <a:solidFill>
-                      <a:srgbClr val="FFFFFF"/>
-                    </a:solidFill>
-                  </a:tcPr>
-                </a:tc>
-                <a:tc>
-                  <a:txBody>
-                    <a:bodyPr/>
-                    <a:lstStyle/>
-                    <a:p>
-                      <a:r>
-                        <a:rPr sz="1050" b="0">
-                          <a:solidFill>
-                            <a:srgbClr val="000000"/>
-                          </a:solidFill>
-                          <a:latin typeface="Avenir Next LT Pro"/>
-                        </a:rPr>
-                        <a:t>Mixed — mostly sales (option/tax) + a recent director open-market buy</a:t>
-                      </a:r>
-                    </a:p>
-                  </a:txBody>
-                  <a:tcPr marL="82296" anchor="ctr">
-                    <a:solidFill>
-                      <a:srgbClr val="FFFFFF"/>
-                    </a:solidFill>
-                  </a:tcPr>
-                </a:tc>
-                <a:tc>
-                  <a:txBody>
-                    <a:bodyPr/>
-                    <a:lstStyle/>
-                    <a:p>
-                      <a:r>
-                        <a:rPr sz="1050" b="0">
-                          <a:solidFill>
-                            <a:srgbClr val="000000"/>
-                          </a:solidFill>
-                          <a:latin typeface="Avenir Next LT Pro"/>
-                        </a:rPr>
-                        <a:t>No strong signal</a:t>
-                      </a:r>
-                    </a:p>
-                  </a:txBody>
-                  <a:tcPr marL="82296" anchor="ctr">
-                    <a:solidFill>
-                      <a:srgbClr val="FFFFFF"/>
-                    </a:solidFill>
-                  </a:tcPr>
-                </a:tc>
-              </a:tr>
-              <a:tr h="822960">
-                <a:tc>
-                  <a:txBody>
-                    <a:bodyPr/>
-                    <a:lstStyle/>
-                    <a:p>
-                      <a:r>
-                        <a:rPr sz="1050" b="1">
-                          <a:solidFill>
-                            <a:srgbClr val="000000"/>
-                          </a:solidFill>
-                          <a:latin typeface="Avenir Next LT Pro Demi"/>
-                        </a:rPr>
-                        <a:t>Governance</a:t>
-                      </a:r>
-                    </a:p>
-                  </a:txBody>
-                  <a:tcPr marL="82296" anchor="ctr">
-                    <a:solidFill>
-                      <a:srgbClr val="F4F6F8"/>
-                    </a:solidFill>
-                  </a:tcPr>
-                </a:tc>
-                <a:tc>
-                  <a:txBody>
-                    <a:bodyPr/>
-                    <a:lstStyle/>
-                    <a:p>
-                      <a:r>
-                        <a:rPr sz="1050" b="0">
-                          <a:solidFill>
-                            <a:srgbClr val="000000"/>
-                          </a:solidFill>
-                          <a:latin typeface="Avenir Next LT Pro"/>
-                        </a:rPr>
-                        <a:t>Founder-led; Jun 2026 annual meeting routine; no activist involvement</a:t>
-                      </a:r>
-                    </a:p>
-                  </a:txBody>
-                  <a:tcPr marL="82296" anchor="ctr">
-                    <a:solidFill>
-                      <a:srgbClr val="F4F6F8"/>
-                    </a:solidFill>
-                  </a:tcPr>
-                </a:tc>
-                <a:tc>
-                  <a:txBody>
-                    <a:bodyPr/>
-                    <a:lstStyle/>
-                    <a:p>
-                      <a:r>
-                        <a:rPr sz="1050" b="0">
-                          <a:solidFill>
-                            <a:srgbClr val="000000"/>
-                          </a:solidFill>
-                          <a:latin typeface="Avenir Next LT Pro"/>
-                        </a:rPr>
-                        <a:t>Stable; no catalyst</a:t>
-                      </a:r>
-                    </a:p>
-                  </a:txBody>
-                  <a:tcPr marL="82296" anchor="ctr">
-                    <a:solidFill>
-                      <a:srgbClr val="F4F6F8"/>
-                    </a:solidFill>
-                  </a:tcPr>
-                </a:tc>
-              </a:tr>
-            </a:tbl>
-          </a:graphicData>
-        </a:graphic>
-      </p:graphicFrame>
       <p:sp>
         <p:nvSpPr>
-          <p:cNvPr id="5" name="TextBox 4"/>
+          <p:cNvPr id="4" name="TextBox 3"/>
           <p:cNvSpPr txBox="1"/>
           <p:nvPr/>
         </p:nvSpPr>
         <p:spPr>
           <a:xfrm>
-            <a:off x="457200" y="5669280"/>
-            <a:ext cx="8229600" cy="365760"/>
+            <a:off x="457200" y="1143000"/>
+            <a:ext cx="3977639" cy="365760"/>
           </a:xfrm>
           <a:prstGeom prst="rect">
             <a:avLst/>
@@ -5688,13 +5321,59 @@
           <a:lstStyle/>
           <a:p>
             <a:r>
-              <a:rPr sz="1150" b="1" i="0">
+              <a:rPr sz="1100" b="1" i="0">
                 <a:solidFill>
                   <a:srgbClr val="000000"/>
                 </a:solidFill>
                 <a:latin typeface="Avenir Next LT Pro Demi"/>
               </a:rPr>
-              <a:t>Aligned, proven operator — but no activist catalyst and no strong insider “buy” signal.</a:t>
+              <a:t>THE PLAN</a:t>
+            </a:r>
+          </a:p>
+        </p:txBody>
+      </p:sp>
+      <p:sp>
+        <p:nvSpPr>
+          <p:cNvPr id="5" name="TextBox 4"/>
+          <p:cNvSpPr txBox="1"/>
+          <p:nvPr/>
+        </p:nvSpPr>
+        <p:spPr>
+          <a:xfrm>
+            <a:off x="457200" y="1554480"/>
+            <a:ext cx="3977639" cy="640080"/>
+          </a:xfrm>
+          <a:prstGeom prst="rect">
+            <a:avLst/>
+          </a:prstGeom>
+          <a:noFill/>
+          <a:ln>
+            <a:noFill/>
+          </a:ln>
+        </p:spPr>
+        <p:txBody>
+          <a:bodyPr wrap="square">
+            <a:spAutoFit/>
+          </a:bodyPr>
+          <a:lstStyle/>
+          <a:p>
+            <a:r>
+              <a:rPr sz="1100" b="1" i="0">
+                <a:solidFill>
+                  <a:srgbClr val="000000"/>
+                </a:solidFill>
+                <a:latin typeface="Avenir Next LT Pro"/>
+              </a:rPr>
+              <a:t>•  </a:t>
+            </a:r>
+            <a:r>
+              <a:rPr sz="1100" b="0" i="0">
+                <a:solidFill>
+                  <a:srgbClr val="000000"/>
+                </a:solidFill>
+                <a:latin typeface="Avenir Next LT Pro"/>
+              </a:rPr>
+              <a:t>Product transformation — new collections</a:t>
             </a:r>
           </a:p>
         </p:txBody>
@@ -5702,6 +5381,356 @@
       <p:sp>
         <p:nvSpPr>
           <p:cNvPr id="6" name="TextBox 5"/>
+          <p:cNvSpPr txBox="1"/>
+          <p:nvPr/>
+        </p:nvSpPr>
+        <p:spPr>
+          <a:xfrm>
+            <a:off x="457200" y="2212848"/>
+            <a:ext cx="3977639" cy="640080"/>
+          </a:xfrm>
+          <a:prstGeom prst="rect">
+            <a:avLst/>
+          </a:prstGeom>
+          <a:noFill/>
+          <a:ln>
+            <a:noFill/>
+          </a:ln>
+        </p:spPr>
+        <p:txBody>
+          <a:bodyPr wrap="square">
+            <a:spAutoFit/>
+          </a:bodyPr>
+          <a:lstStyle/>
+          <a:p>
+            <a:r>
+              <a:rPr sz="1100" b="1" i="0">
+                <a:solidFill>
+                  <a:srgbClr val="000000"/>
+                </a:solidFill>
+                <a:latin typeface="Avenir Next LT Pro"/>
+              </a:rPr>
+              <a:t>•  </a:t>
+            </a:r>
+            <a:r>
+              <a:rPr sz="1100" b="0" i="0">
+                <a:solidFill>
+                  <a:srgbClr val="000000"/>
+                </a:solidFill>
+                <a:latin typeface="Avenir Next LT Pro"/>
+              </a:rPr>
+              <a:t>Gallery expansion → RH's ~$5–6B opportunity</a:t>
+            </a:r>
+          </a:p>
+        </p:txBody>
+      </p:sp>
+      <p:sp>
+        <p:nvSpPr>
+          <p:cNvPr id="7" name="TextBox 6"/>
+          <p:cNvSpPr txBox="1"/>
+          <p:nvPr/>
+        </p:nvSpPr>
+        <p:spPr>
+          <a:xfrm>
+            <a:off x="457200" y="2871215"/>
+            <a:ext cx="3977639" cy="640080"/>
+          </a:xfrm>
+          <a:prstGeom prst="rect">
+            <a:avLst/>
+          </a:prstGeom>
+          <a:noFill/>
+          <a:ln>
+            <a:noFill/>
+          </a:ln>
+        </p:spPr>
+        <p:txBody>
+          <a:bodyPr wrap="square">
+            <a:spAutoFit/>
+          </a:bodyPr>
+          <a:lstStyle/>
+          <a:p>
+            <a:r>
+              <a:rPr sz="1100" b="1" i="0">
+                <a:solidFill>
+                  <a:srgbClr val="000000"/>
+                </a:solidFill>
+                <a:latin typeface="Avenir Next LT Pro"/>
+              </a:rPr>
+              <a:t>•  </a:t>
+            </a:r>
+            <a:r>
+              <a:rPr sz="1100" b="0" i="0">
+                <a:solidFill>
+                  <a:srgbClr val="000000"/>
+                </a:solidFill>
+                <a:latin typeface="Avenir Next LT Pro"/>
+              </a:rPr>
+              <a:t>Move upmarket — Estates targets the rate-immune buyer</a:t>
+            </a:r>
+          </a:p>
+        </p:txBody>
+      </p:sp>
+      <p:sp>
+        <p:nvSpPr>
+          <p:cNvPr id="8" name="TextBox 7"/>
+          <p:cNvSpPr txBox="1"/>
+          <p:nvPr/>
+        </p:nvSpPr>
+        <p:spPr>
+          <a:xfrm>
+            <a:off x="457200" y="3529584"/>
+            <a:ext cx="3977639" cy="640080"/>
+          </a:xfrm>
+          <a:prstGeom prst="rect">
+            <a:avLst/>
+          </a:prstGeom>
+          <a:noFill/>
+          <a:ln>
+            <a:noFill/>
+          </a:ln>
+        </p:spPr>
+        <p:txBody>
+          <a:bodyPr wrap="square">
+            <a:spAutoFit/>
+          </a:bodyPr>
+          <a:lstStyle/>
+          <a:p>
+            <a:r>
+              <a:rPr sz="1100" b="1" i="0">
+                <a:solidFill>
+                  <a:srgbClr val="000000"/>
+                </a:solidFill>
+                <a:latin typeface="Avenir Next LT Pro"/>
+              </a:rPr>
+              <a:t>•  </a:t>
+            </a:r>
+            <a:r>
+              <a:rPr sz="1100" b="0" i="0">
+                <a:solidFill>
+                  <a:srgbClr val="000000"/>
+                </a:solidFill>
+                <a:latin typeface="Avenir Next LT Pro"/>
+              </a:rPr>
+              <a:t>Global + platform — hospitality, F&amp;B</a:t>
+            </a:r>
+          </a:p>
+        </p:txBody>
+      </p:sp>
+      <p:sp>
+        <p:nvSpPr>
+          <p:cNvPr id="9" name="TextBox 8"/>
+          <p:cNvSpPr txBox="1"/>
+          <p:nvPr/>
+        </p:nvSpPr>
+        <p:spPr>
+          <a:xfrm>
+            <a:off x="4709160" y="1143000"/>
+            <a:ext cx="3977639" cy="365760"/>
+          </a:xfrm>
+          <a:prstGeom prst="rect">
+            <a:avLst/>
+          </a:prstGeom>
+          <a:noFill/>
+          <a:ln>
+            <a:noFill/>
+          </a:ln>
+        </p:spPr>
+        <p:txBody>
+          <a:bodyPr wrap="square">
+            <a:spAutoFit/>
+          </a:bodyPr>
+          <a:lstStyle/>
+          <a:p>
+            <a:r>
+              <a:rPr sz="1100" b="1" i="0">
+                <a:solidFill>
+                  <a:srgbClr val="000000"/>
+                </a:solidFill>
+                <a:latin typeface="Avenir Next LT Pro Demi"/>
+              </a:rPr>
+              <a:t>RECENT MOVES  (watch, not yet catalysts)</a:t>
+            </a:r>
+          </a:p>
+        </p:txBody>
+      </p:sp>
+      <p:sp>
+        <p:nvSpPr>
+          <p:cNvPr id="10" name="TextBox 9"/>
+          <p:cNvSpPr txBox="1"/>
+          <p:nvPr/>
+        </p:nvSpPr>
+        <p:spPr>
+          <a:xfrm>
+            <a:off x="4709160" y="1554480"/>
+            <a:ext cx="3977639" cy="822960"/>
+          </a:xfrm>
+          <a:prstGeom prst="rect">
+            <a:avLst/>
+          </a:prstGeom>
+          <a:noFill/>
+          <a:ln>
+            <a:noFill/>
+          </a:ln>
+        </p:spPr>
+        <p:txBody>
+          <a:bodyPr wrap="square">
+            <a:spAutoFit/>
+          </a:bodyPr>
+          <a:lstStyle/>
+          <a:p>
+            <a:r>
+              <a:rPr sz="1100" b="1" i="0">
+                <a:solidFill>
+                  <a:srgbClr val="000000"/>
+                </a:solidFill>
+                <a:latin typeface="Avenir Next LT Pro"/>
+              </a:rPr>
+              <a:t>•  </a:t>
+            </a:r>
+            <a:r>
+              <a:rPr sz="1100" b="0" i="0">
+                <a:solidFill>
+                  <a:srgbClr val="000000"/>
+                </a:solidFill>
+                <a:latin typeface="Avenir Next LT Pro"/>
+              </a:rPr>
+              <a:t>Estates unveiled — acquired legendary ateliers (owned exclusivity); commercially unproven</a:t>
+            </a:r>
+          </a:p>
+        </p:txBody>
+      </p:sp>
+      <p:sp>
+        <p:nvSpPr>
+          <p:cNvPr id="11" name="TextBox 10"/>
+          <p:cNvSpPr txBox="1"/>
+          <p:nvPr/>
+        </p:nvSpPr>
+        <p:spPr>
+          <a:xfrm>
+            <a:off x="4709160" y="2395728"/>
+            <a:ext cx="3977639" cy="822960"/>
+          </a:xfrm>
+          <a:prstGeom prst="rect">
+            <a:avLst/>
+          </a:prstGeom>
+          <a:noFill/>
+          <a:ln>
+            <a:noFill/>
+          </a:ln>
+        </p:spPr>
+        <p:txBody>
+          <a:bodyPr wrap="square">
+            <a:spAutoFit/>
+          </a:bodyPr>
+          <a:lstStyle/>
+          <a:p>
+            <a:r>
+              <a:rPr sz="1100" b="1" i="0">
+                <a:solidFill>
+                  <a:srgbClr val="000000"/>
+                </a:solidFill>
+                <a:latin typeface="Avenir Next LT Pro"/>
+              </a:rPr>
+              <a:t>•  </a:t>
+            </a:r>
+            <a:r>
+              <a:rPr sz="1100" b="0" i="0">
+                <a:solidFill>
+                  <a:srgbClr val="000000"/>
+                </a:solidFill>
+                <a:latin typeface="Avenir Next LT Pro"/>
+              </a:rPr>
+              <a:t>Mercedes-AMG F1 hospitality partnership — brand halo</a:t>
+            </a:r>
+          </a:p>
+        </p:txBody>
+      </p:sp>
+      <p:sp>
+        <p:nvSpPr>
+          <p:cNvPr id="12" name="TextBox 11"/>
+          <p:cNvSpPr txBox="1"/>
+          <p:nvPr/>
+        </p:nvSpPr>
+        <p:spPr>
+          <a:xfrm>
+            <a:off x="4709160" y="3236976"/>
+            <a:ext cx="3977639" cy="822960"/>
+          </a:xfrm>
+          <a:prstGeom prst="rect">
+            <a:avLst/>
+          </a:prstGeom>
+          <a:noFill/>
+          <a:ln>
+            <a:noFill/>
+          </a:ln>
+        </p:spPr>
+        <p:txBody>
+          <a:bodyPr wrap="square">
+            <a:spAutoFit/>
+          </a:bodyPr>
+          <a:lstStyle/>
+          <a:p>
+            <a:r>
+              <a:rPr sz="1100" b="1" i="0">
+                <a:solidFill>
+                  <a:srgbClr val="000000"/>
+                </a:solidFill>
+                <a:latin typeface="Avenir Next LT Pro"/>
+              </a:rPr>
+              <a:t>•  </a:t>
+            </a:r>
+            <a:r>
+              <a:rPr sz="1100" b="0" i="0">
+                <a:solidFill>
+                  <a:srgbClr val="000000"/>
+                </a:solidFill>
+                <a:latin typeface="Avenir Next LT Pro"/>
+              </a:rPr>
+              <a:t>RH London Mayfair flagship — Europe doubling-down</a:t>
+            </a:r>
+          </a:p>
+        </p:txBody>
+      </p:sp>
+      <p:sp>
+        <p:nvSpPr>
+          <p:cNvPr id="13" name="TextBox 12"/>
+          <p:cNvSpPr txBox="1"/>
+          <p:nvPr/>
+        </p:nvSpPr>
+        <p:spPr>
+          <a:xfrm>
+            <a:off x="457200" y="4663440"/>
+            <a:ext cx="8229600" cy="457200"/>
+          </a:xfrm>
+          <a:prstGeom prst="rect">
+            <a:avLst/>
+          </a:prstGeom>
+          <a:noFill/>
+          <a:ln>
+            <a:noFill/>
+          </a:ln>
+        </p:spPr>
+        <p:txBody>
+          <a:bodyPr wrap="square">
+            <a:spAutoFit/>
+          </a:bodyPr>
+          <a:lstStyle/>
+          <a:p>
+            <a:r>
+              <a:rPr sz="1150" b="1" i="0">
+                <a:solidFill>
+                  <a:srgbClr val="000000"/>
+                </a:solidFill>
+                <a:latin typeface="Avenir Next LT Pro Demi"/>
+              </a:rPr>
+              <a:t>Differentiated and expanding — but unproven and capital-intensive during a levered stretch.</a:t>
+            </a:r>
+          </a:p>
+        </p:txBody>
+      </p:sp>
+      <p:sp>
+        <p:nvSpPr>
+          <p:cNvPr id="14" name="TextBox 13"/>
           <p:cNvSpPr txBox="1"/>
           <p:nvPr/>
         </p:nvSpPr>
@@ -5731,7 +5760,7 @@
                 </a:solidFill>
                 <a:latin typeface="Avenir Next LT Pro"/>
               </a:rPr>
-              <a:t>Sources: RH DEF 14A proxy; SEC Form 4; RH 8-K (Jun 2026).</a:t>
+              <a:t>Sources: RH FY2025 10-K; company announcements (2026).</a:t>
             </a:r>
           </a:p>
         </p:txBody>
@@ -5745,6 +5774,565 @@
 </file>
 
 <file path=ppt/slides/slide11.xml><?xml version="1.0" encoding="utf-8"?>
+<p:sld xmlns:a="http://schemas.openxmlformats.org/drawingml/2006/main" xmlns:p="http://schemas.openxmlformats.org/presentationml/2006/main" xmlns:r="http://schemas.openxmlformats.org/officeDocument/2006/relationships">
+  <p:cSld>
+    <p:spTree>
+      <p:nvGrpSpPr>
+        <p:cNvPr id="1" name=""/>
+        <p:cNvGrpSpPr/>
+        <p:nvPr/>
+      </p:nvGrpSpPr>
+      <p:grpSpPr/>
+      <p:sp>
+        <p:nvSpPr>
+          <p:cNvPr id="2" name="TextBox 1"/>
+          <p:cNvSpPr txBox="1"/>
+          <p:nvPr/>
+        </p:nvSpPr>
+        <p:spPr>
+          <a:xfrm>
+            <a:off x="457200" y="365760"/>
+            <a:ext cx="8229600" cy="548640"/>
+          </a:xfrm>
+          <a:prstGeom prst="rect">
+            <a:avLst/>
+          </a:prstGeom>
+          <a:noFill/>
+          <a:ln>
+            <a:noFill/>
+          </a:ln>
+        </p:spPr>
+        <p:txBody>
+          <a:bodyPr wrap="square">
+            <a:spAutoFit/>
+          </a:bodyPr>
+          <a:lstStyle/>
+          <a:p>
+            <a:r>
+              <a:rPr sz="2100" b="0" i="0">
+                <a:solidFill>
+                  <a:srgbClr val="000000"/>
+                </a:solidFill>
+                <a:latin typeface="Avenir Next LT Pro Demi"/>
+              </a:rPr>
+              <a:t>The Operator Bet — Gary Friedman</a:t>
+            </a:r>
+          </a:p>
+        </p:txBody>
+      </p:sp>
+      <p:sp>
+        <p:nvSpPr>
+          <p:cNvPr id="3" name="Rectangle 2"/>
+          <p:cNvSpPr/>
+          <p:nvPr/>
+        </p:nvSpPr>
+        <p:spPr>
+          <a:xfrm>
+            <a:off x="457200" y="960120"/>
+            <a:ext cx="8229600" cy="25603"/>
+          </a:xfrm>
+          <a:prstGeom prst="rect">
+            <a:avLst/>
+          </a:prstGeom>
+          <a:solidFill>
+            <a:srgbClr val="000000"/>
+          </a:solidFill>
+          <a:ln>
+            <a:noFill/>
+          </a:ln>
+        </p:spPr>
+        <p:style>
+          <a:lnRef idx="1">
+            <a:schemeClr val="accent1"/>
+          </a:lnRef>
+          <a:fillRef idx="3">
+            <a:schemeClr val="accent1"/>
+          </a:fillRef>
+          <a:effectRef idx="2">
+            <a:schemeClr val="accent1"/>
+          </a:effectRef>
+          <a:fontRef idx="minor">
+            <a:schemeClr val="lt1"/>
+          </a:fontRef>
+        </p:style>
+        <p:txBody>
+          <a:bodyPr rtlCol="0" anchor="ctr"/>
+          <a:lstStyle/>
+          <a:p>
+            <a:pPr algn="ctr"/>
+          </a:p>
+        </p:txBody>
+      </p:sp>
+      <p:sp>
+        <p:nvSpPr>
+          <p:cNvPr id="4" name="TextBox 3"/>
+          <p:cNvSpPr txBox="1"/>
+          <p:nvPr/>
+        </p:nvSpPr>
+        <p:spPr>
+          <a:xfrm>
+            <a:off x="457200" y="1097280"/>
+            <a:ext cx="8229600" cy="365760"/>
+          </a:xfrm>
+          <a:prstGeom prst="rect">
+            <a:avLst/>
+          </a:prstGeom>
+          <a:noFill/>
+          <a:ln>
+            <a:noFill/>
+          </a:ln>
+        </p:spPr>
+        <p:txBody>
+          <a:bodyPr wrap="square">
+            <a:spAutoFit/>
+          </a:bodyPr>
+          <a:lstStyle/>
+          <a:p>
+            <a:r>
+              <a:rPr sz="1100" b="0" i="1">
+                <a:solidFill>
+                  <a:srgbClr val="000000"/>
+                </a:solidFill>
+                <a:latin typeface="Avenir Next LT Pro"/>
+              </a:rPr>
+              <a:t>The thesis is fundamentally a bet on the operator — here's the case for and against relying on him.</a:t>
+            </a:r>
+          </a:p>
+        </p:txBody>
+      </p:sp>
+      <p:sp>
+        <p:nvSpPr>
+          <p:cNvPr id="5" name="TextBox 4"/>
+          <p:cNvSpPr txBox="1"/>
+          <p:nvPr/>
+        </p:nvSpPr>
+        <p:spPr>
+          <a:xfrm>
+            <a:off x="457200" y="1600200"/>
+            <a:ext cx="3977639" cy="365760"/>
+          </a:xfrm>
+          <a:prstGeom prst="rect">
+            <a:avLst/>
+          </a:prstGeom>
+          <a:noFill/>
+          <a:ln>
+            <a:noFill/>
+          </a:ln>
+        </p:spPr>
+        <p:txBody>
+          <a:bodyPr wrap="square">
+            <a:spAutoFit/>
+          </a:bodyPr>
+          <a:lstStyle/>
+          <a:p>
+            <a:r>
+              <a:rPr sz="1250" b="1" i="0">
+                <a:solidFill>
+                  <a:srgbClr val="196B24"/>
+                </a:solidFill>
+                <a:latin typeface="Avenir Next LT Pro Demi"/>
+              </a:rPr>
+              <a:t>WHY BET ON HIM</a:t>
+            </a:r>
+          </a:p>
+        </p:txBody>
+      </p:sp>
+      <p:sp>
+        <p:nvSpPr>
+          <p:cNvPr id="6" name="TextBox 5"/>
+          <p:cNvSpPr txBox="1"/>
+          <p:nvPr/>
+        </p:nvSpPr>
+        <p:spPr>
+          <a:xfrm>
+            <a:off x="457200" y="2057400"/>
+            <a:ext cx="3977639" cy="777240"/>
+          </a:xfrm>
+          <a:prstGeom prst="rect">
+            <a:avLst/>
+          </a:prstGeom>
+          <a:noFill/>
+          <a:ln>
+            <a:noFill/>
+          </a:ln>
+        </p:spPr>
+        <p:txBody>
+          <a:bodyPr wrap="square">
+            <a:spAutoFit/>
+          </a:bodyPr>
+          <a:lstStyle/>
+          <a:p>
+            <a:r>
+              <a:rPr sz="1100" b="1" i="0">
+                <a:solidFill>
+                  <a:srgbClr val="196B24"/>
+                </a:solidFill>
+                <a:latin typeface="Avenir Next LT Pro"/>
+              </a:rPr>
+              <a:t>•  </a:t>
+            </a:r>
+            <a:r>
+              <a:rPr sz="1100" b="0" i="0">
+                <a:solidFill>
+                  <a:srgbClr val="000000"/>
+                </a:solidFill>
+                <a:latin typeface="Avenir Next LT Pro"/>
+              </a:rPr>
+              <a:t>Grew Pottery Barn $50M → $1B+; rebuilt RH from near-bankruptcy (2001)</a:t>
+            </a:r>
+          </a:p>
+        </p:txBody>
+      </p:sp>
+      <p:sp>
+        <p:nvSpPr>
+          <p:cNvPr id="7" name="TextBox 6"/>
+          <p:cNvSpPr txBox="1"/>
+          <p:nvPr/>
+        </p:nvSpPr>
+        <p:spPr>
+          <a:xfrm>
+            <a:off x="457200" y="2880360"/>
+            <a:ext cx="3977639" cy="777240"/>
+          </a:xfrm>
+          <a:prstGeom prst="rect">
+            <a:avLst/>
+          </a:prstGeom>
+          <a:noFill/>
+          <a:ln>
+            <a:noFill/>
+          </a:ln>
+        </p:spPr>
+        <p:txBody>
+          <a:bodyPr wrap="square">
+            <a:spAutoFit/>
+          </a:bodyPr>
+          <a:lstStyle/>
+          <a:p>
+            <a:r>
+              <a:rPr sz="1100" b="1" i="0">
+                <a:solidFill>
+                  <a:srgbClr val="196B24"/>
+                </a:solidFill>
+                <a:latin typeface="Avenir Next LT Pro"/>
+              </a:rPr>
+              <a:t>•  </a:t>
+            </a:r>
+            <a:r>
+              <a:rPr sz="1100" b="0" i="0">
+                <a:solidFill>
+                  <a:srgbClr val="000000"/>
+                </a:solidFill>
+                <a:latin typeface="Avenir Next LT Pro"/>
+              </a:rPr>
+              <a:t>Created the Gallery / luxury-platform model rivals now copy</a:t>
+            </a:r>
+          </a:p>
+        </p:txBody>
+      </p:sp>
+      <p:sp>
+        <p:nvSpPr>
+          <p:cNvPr id="8" name="TextBox 7"/>
+          <p:cNvSpPr txBox="1"/>
+          <p:nvPr/>
+        </p:nvSpPr>
+        <p:spPr>
+          <a:xfrm>
+            <a:off x="457200" y="3703320"/>
+            <a:ext cx="3977639" cy="777240"/>
+          </a:xfrm>
+          <a:prstGeom prst="rect">
+            <a:avLst/>
+          </a:prstGeom>
+          <a:noFill/>
+          <a:ln>
+            <a:noFill/>
+          </a:ln>
+        </p:spPr>
+        <p:txBody>
+          <a:bodyPr wrap="square">
+            <a:spAutoFit/>
+          </a:bodyPr>
+          <a:lstStyle/>
+          <a:p>
+            <a:r>
+              <a:rPr sz="1100" b="1" i="0">
+                <a:solidFill>
+                  <a:srgbClr val="196B24"/>
+                </a:solidFill>
+                <a:latin typeface="Avenir Next LT Pro"/>
+              </a:rPr>
+              <a:t>•  </a:t>
+            </a:r>
+            <a:r>
+              <a:rPr sz="1100" b="0" i="0">
+                <a:solidFill>
+                  <a:srgbClr val="000000"/>
+                </a:solidFill>
+                <a:latin typeface="Avenir Next LT Pro"/>
+              </a:rPr>
+              <a:t>~25% owner — his interests are shareholders' interests</a:t>
+            </a:r>
+          </a:p>
+        </p:txBody>
+      </p:sp>
+      <p:sp>
+        <p:nvSpPr>
+          <p:cNvPr id="9" name="TextBox 8"/>
+          <p:cNvSpPr txBox="1"/>
+          <p:nvPr/>
+        </p:nvSpPr>
+        <p:spPr>
+          <a:xfrm>
+            <a:off x="4709160" y="1600200"/>
+            <a:ext cx="3977639" cy="365760"/>
+          </a:xfrm>
+          <a:prstGeom prst="rect">
+            <a:avLst/>
+          </a:prstGeom>
+          <a:noFill/>
+          <a:ln>
+            <a:noFill/>
+          </a:ln>
+        </p:spPr>
+        <p:txBody>
+          <a:bodyPr wrap="square">
+            <a:spAutoFit/>
+          </a:bodyPr>
+          <a:lstStyle/>
+          <a:p>
+            <a:r>
+              <a:rPr sz="1250" b="1" i="0">
+                <a:solidFill>
+                  <a:srgbClr val="B03030"/>
+                </a:solidFill>
+                <a:latin typeface="Avenir Next LT Pro Demi"/>
+              </a:rPr>
+              <a:t>WHY IT'S A RISK</a:t>
+            </a:r>
+          </a:p>
+        </p:txBody>
+      </p:sp>
+      <p:sp>
+        <p:nvSpPr>
+          <p:cNvPr id="10" name="TextBox 9"/>
+          <p:cNvSpPr txBox="1"/>
+          <p:nvPr/>
+        </p:nvSpPr>
+        <p:spPr>
+          <a:xfrm>
+            <a:off x="4709160" y="2057400"/>
+            <a:ext cx="3977639" cy="777240"/>
+          </a:xfrm>
+          <a:prstGeom prst="rect">
+            <a:avLst/>
+          </a:prstGeom>
+          <a:noFill/>
+          <a:ln>
+            <a:noFill/>
+          </a:ln>
+        </p:spPr>
+        <p:txBody>
+          <a:bodyPr wrap="square">
+            <a:spAutoFit/>
+          </a:bodyPr>
+          <a:lstStyle/>
+          <a:p>
+            <a:r>
+              <a:rPr sz="1100" b="1" i="0">
+                <a:solidFill>
+                  <a:srgbClr val="B03030"/>
+                </a:solidFill>
+                <a:latin typeface="Avenir Next LT Pro"/>
+              </a:rPr>
+              <a:t>•  </a:t>
+            </a:r>
+            <a:r>
+              <a:rPr sz="1100" b="0" i="0">
+                <a:solidFill>
+                  <a:srgbClr val="000000"/>
+                </a:solidFill>
+                <a:latin typeface="Avenir Next LT Pro"/>
+              </a:rPr>
+              <a:t>Key-man: no obvious successor — a departure = instant de-rating</a:t>
+            </a:r>
+          </a:p>
+        </p:txBody>
+      </p:sp>
+      <p:sp>
+        <p:nvSpPr>
+          <p:cNvPr id="11" name="TextBox 10"/>
+          <p:cNvSpPr txBox="1"/>
+          <p:nvPr/>
+        </p:nvSpPr>
+        <p:spPr>
+          <a:xfrm>
+            <a:off x="4709160" y="2880360"/>
+            <a:ext cx="3977639" cy="777240"/>
+          </a:xfrm>
+          <a:prstGeom prst="rect">
+            <a:avLst/>
+          </a:prstGeom>
+          <a:noFill/>
+          <a:ln>
+            <a:noFill/>
+          </a:ln>
+        </p:spPr>
+        <p:txBody>
+          <a:bodyPr wrap="square">
+            <a:spAutoFit/>
+          </a:bodyPr>
+          <a:lstStyle/>
+          <a:p>
+            <a:r>
+              <a:rPr sz="1100" b="1" i="0">
+                <a:solidFill>
+                  <a:srgbClr val="B03030"/>
+                </a:solidFill>
+                <a:latin typeface="Avenir Next LT Pro"/>
+              </a:rPr>
+              <a:t>•  </a:t>
+            </a:r>
+            <a:r>
+              <a:rPr sz="1100" b="0" i="0">
+                <a:solidFill>
+                  <a:srgbClr val="000000"/>
+                </a:solidFill>
+                <a:latin typeface="Avenir Next LT Pro"/>
+              </a:rPr>
+              <a:t>Expansive vision (Estates, F1, global) while ~4× levered — focus / capital-allocation question</a:t>
+            </a:r>
+          </a:p>
+        </p:txBody>
+      </p:sp>
+      <p:sp>
+        <p:nvSpPr>
+          <p:cNvPr id="12" name="TextBox 11"/>
+          <p:cNvSpPr txBox="1"/>
+          <p:nvPr/>
+        </p:nvSpPr>
+        <p:spPr>
+          <a:xfrm>
+            <a:off x="4709160" y="3703320"/>
+            <a:ext cx="3977639" cy="777240"/>
+          </a:xfrm>
+          <a:prstGeom prst="rect">
+            <a:avLst/>
+          </a:prstGeom>
+          <a:noFill/>
+          <a:ln>
+            <a:noFill/>
+          </a:ln>
+        </p:spPr>
+        <p:txBody>
+          <a:bodyPr wrap="square">
+            <a:spAutoFit/>
+          </a:bodyPr>
+          <a:lstStyle/>
+          <a:p>
+            <a:r>
+              <a:rPr sz="1100" b="1" i="0">
+                <a:solidFill>
+                  <a:srgbClr val="B03030"/>
+                </a:solidFill>
+                <a:latin typeface="Avenir Next LT Pro"/>
+              </a:rPr>
+              <a:t>•  </a:t>
+            </a:r>
+            <a:r>
+              <a:rPr sz="1100" b="0" i="0">
+                <a:solidFill>
+                  <a:srgbClr val="000000"/>
+                </a:solidFill>
+                <a:latin typeface="Avenir Next LT Pro"/>
+              </a:rPr>
+              <a:t>Recent insider activity net selling; no activist to force discipline</a:t>
+            </a:r>
+          </a:p>
+        </p:txBody>
+      </p:sp>
+      <p:sp>
+        <p:nvSpPr>
+          <p:cNvPr id="13" name="TextBox 12"/>
+          <p:cNvSpPr txBox="1"/>
+          <p:nvPr/>
+        </p:nvSpPr>
+        <p:spPr>
+          <a:xfrm>
+            <a:off x="457200" y="4892040"/>
+            <a:ext cx="8229600" cy="640080"/>
+          </a:xfrm>
+          <a:prstGeom prst="rect">
+            <a:avLst/>
+          </a:prstGeom>
+          <a:noFill/>
+          <a:ln>
+            <a:noFill/>
+          </a:ln>
+        </p:spPr>
+        <p:txBody>
+          <a:bodyPr wrap="square">
+            <a:spAutoFit/>
+          </a:bodyPr>
+          <a:lstStyle/>
+          <a:p>
+            <a:r>
+              <a:rPr sz="1150" b="1" i="0">
+                <a:solidFill>
+                  <a:srgbClr val="000000"/>
+                </a:solidFill>
+                <a:latin typeface="Avenir Next LT Pro Demi"/>
+              </a:rPr>
+              <a:t>The thesis is Friedman: his track record makes the recovery credible — his leverage-era ambition is the risk. That duality is why I hold rather than commit.</a:t>
+            </a:r>
+          </a:p>
+        </p:txBody>
+      </p:sp>
+      <p:sp>
+        <p:nvSpPr>
+          <p:cNvPr id="14" name="TextBox 13"/>
+          <p:cNvSpPr txBox="1"/>
+          <p:nvPr/>
+        </p:nvSpPr>
+        <p:spPr>
+          <a:xfrm>
+            <a:off x="457200" y="6309360"/>
+            <a:ext cx="8229600" cy="274320"/>
+          </a:xfrm>
+          <a:prstGeom prst="rect">
+            <a:avLst/>
+          </a:prstGeom>
+          <a:noFill/>
+          <a:ln>
+            <a:noFill/>
+          </a:ln>
+        </p:spPr>
+        <p:txBody>
+          <a:bodyPr wrap="square">
+            <a:spAutoFit/>
+          </a:bodyPr>
+          <a:lstStyle/>
+          <a:p>
+            <a:r>
+              <a:rPr sz="750" b="0" i="1">
+                <a:solidFill>
+                  <a:srgbClr val="707070"/>
+                </a:solidFill>
+                <a:latin typeface="Avenir Next LT Pro"/>
+              </a:rPr>
+              <a:t>Sources: RH FY2025 10-K &amp; DEF 14A proxy; SEC Form 4; company bios.</a:t>
+            </a:r>
+          </a:p>
+        </p:txBody>
+      </p:sp>
+    </p:spTree>
+  </p:cSld>
+  <p:clrMapOvr>
+    <a:masterClrMapping/>
+  </p:clrMapOvr>
+</p:sld>
+</file>
+
+<file path=ppt/slides/slide12.xml><?xml version="1.0" encoding="utf-8"?>
 <p:sld xmlns:a="http://schemas.openxmlformats.org/drawingml/2006/main" xmlns:r="http://schemas.openxmlformats.org/officeDocument/2006/relationships" xmlns:p="http://schemas.openxmlformats.org/presentationml/2006/main">
   <p:cSld>
     <p:spTree>
@@ -7273,7 +7861,7 @@
 </p:sld>
 </file>
 
-<file path=ppt/slides/slide12.xml><?xml version="1.0" encoding="utf-8"?>
+<file path=ppt/slides/slide13.xml><?xml version="1.0" encoding="utf-8"?>
 <p:sld xmlns:a="http://schemas.openxmlformats.org/drawingml/2006/main" xmlns:r="http://schemas.openxmlformats.org/officeDocument/2006/relationships" xmlns:p="http://schemas.openxmlformats.org/presentationml/2006/main">
   <p:cSld>
     <p:spTree>
@@ -7349,7 +7937,7 @@
 </p:sld>
 </file>
 
-<file path=ppt/slides/slide13.xml><?xml version="1.0" encoding="utf-8"?>
+<file path=ppt/slides/slide14.xml><?xml version="1.0" encoding="utf-8"?>
 <p:sld xmlns:a="http://schemas.openxmlformats.org/drawingml/2006/main" xmlns:r="http://schemas.openxmlformats.org/officeDocument/2006/relationships" xmlns:p="http://schemas.openxmlformats.org/presentationml/2006/main">
   <p:cSld>
     <p:spTree>
@@ -8480,7 +9068,7 @@
 </p:sld>
 </file>
 
-<file path=ppt/slides/slide14.xml><?xml version="1.0" encoding="utf-8"?>
+<file path=ppt/slides/slide15.xml><?xml version="1.0" encoding="utf-8"?>
 <p:sld xmlns:a="http://schemas.openxmlformats.org/drawingml/2006/main" xmlns:r="http://schemas.openxmlformats.org/officeDocument/2006/relationships" xmlns:p="http://schemas.openxmlformats.org/presentationml/2006/main">
   <p:cSld>
     <p:spTree>
@@ -8556,7 +9144,7 @@
 </p:sld>
 </file>
 
-<file path=ppt/slides/slide15.xml><?xml version="1.0" encoding="utf-8"?>
+<file path=ppt/slides/slide16.xml><?xml version="1.0" encoding="utf-8"?>
 <p:sld xmlns:a="http://schemas.openxmlformats.org/drawingml/2006/main" xmlns:r="http://schemas.openxmlformats.org/officeDocument/2006/relationships" xmlns:p="http://schemas.openxmlformats.org/presentationml/2006/main">
   <p:cSld>
     <p:spTree>
@@ -9515,7 +10103,7 @@
 </p:sld>
 </file>
 
-<file path=ppt/slides/slide16.xml><?xml version="1.0" encoding="utf-8"?>
+<file path=ppt/slides/slide17.xml><?xml version="1.0" encoding="utf-8"?>
 <p:sld xmlns:a="http://schemas.openxmlformats.org/drawingml/2006/main" xmlns:r="http://schemas.openxmlformats.org/officeDocument/2006/relationships" xmlns:p="http://schemas.openxmlformats.org/presentationml/2006/main">
   <p:cSld>
     <p:spTree>
@@ -10375,7 +10963,7 @@
 </p:sld>
 </file>
 
-<file path=ppt/slides/slide17.xml><?xml version="1.0" encoding="utf-8"?>
+<file path=ppt/slides/slide18.xml><?xml version="1.0" encoding="utf-8"?>
 <p:sld xmlns:a="http://schemas.openxmlformats.org/drawingml/2006/main" xmlns:p="http://schemas.openxmlformats.org/presentationml/2006/main" xmlns:r="http://schemas.openxmlformats.org/officeDocument/2006/relationships">
   <p:cSld>
     <p:spTree>
@@ -10414,7 +11002,7 @@
 </p:sld>
 </file>
 
-<file path=ppt/slides/slide18.xml><?xml version="1.0" encoding="utf-8"?>
+<file path=ppt/slides/slide19.xml><?xml version="1.0" encoding="utf-8"?>
 <p:sld xmlns:a="http://schemas.openxmlformats.org/drawingml/2006/main" xmlns:r="http://schemas.openxmlformats.org/officeDocument/2006/relationships" xmlns:p="http://schemas.openxmlformats.org/presentationml/2006/main">
   <p:cSld>
     <p:spTree>
@@ -11345,846 +11933,6 @@
 </p:sld>
 </file>
 
-<file path=ppt/slides/slide19.xml><?xml version="1.0" encoding="utf-8"?>
-<p:sld xmlns:a="http://schemas.openxmlformats.org/drawingml/2006/main" xmlns:p="http://schemas.openxmlformats.org/presentationml/2006/main" xmlns:r="http://schemas.openxmlformats.org/officeDocument/2006/relationships">
-  <p:cSld>
-    <p:spTree>
-      <p:nvGrpSpPr>
-        <p:cNvPr id="1" name=""/>
-        <p:cNvGrpSpPr/>
-        <p:nvPr/>
-      </p:nvGrpSpPr>
-      <p:grpSpPr/>
-      <p:sp>
-        <p:nvSpPr>
-          <p:cNvPr id="2" name="TextBox 1"/>
-          <p:cNvSpPr txBox="1"/>
-          <p:nvPr/>
-        </p:nvSpPr>
-        <p:spPr>
-          <a:xfrm>
-            <a:off x="457200" y="365760"/>
-            <a:ext cx="8229600" cy="548640"/>
-          </a:xfrm>
-          <a:prstGeom prst="rect">
-            <a:avLst/>
-          </a:prstGeom>
-          <a:noFill/>
-          <a:ln>
-            <a:noFill/>
-          </a:ln>
-        </p:spPr>
-        <p:txBody>
-          <a:bodyPr wrap="square">
-            <a:spAutoFit/>
-          </a:bodyPr>
-          <a:lstStyle/>
-          <a:p>
-            <a:r>
-              <a:rPr sz="2100">
-                <a:solidFill>
-                  <a:srgbClr val="000000"/>
-                </a:solidFill>
-                <a:latin typeface="Avenir Next LT Pro Demi"/>
-              </a:rPr>
-              <a:t>Company Background — RH at a Glance</a:t>
-            </a:r>
-          </a:p>
-        </p:txBody>
-      </p:sp>
-      <p:sp>
-        <p:nvSpPr>
-          <p:cNvPr id="3" name="Rectangle 2"/>
-          <p:cNvSpPr/>
-          <p:nvPr/>
-        </p:nvSpPr>
-        <p:spPr>
-          <a:xfrm>
-            <a:off x="457200" y="960120"/>
-            <a:ext cx="8229600" cy="25603"/>
-          </a:xfrm>
-          <a:prstGeom prst="rect">
-            <a:avLst/>
-          </a:prstGeom>
-          <a:solidFill>
-            <a:srgbClr val="000000"/>
-          </a:solidFill>
-          <a:ln>
-            <a:noFill/>
-          </a:ln>
-        </p:spPr>
-        <p:style>
-          <a:lnRef idx="1">
-            <a:schemeClr val="accent1"/>
-          </a:lnRef>
-          <a:fillRef idx="3">
-            <a:schemeClr val="accent1"/>
-          </a:fillRef>
-          <a:effectRef idx="2">
-            <a:schemeClr val="accent1"/>
-          </a:effectRef>
-          <a:fontRef idx="minor">
-            <a:schemeClr val="lt1"/>
-          </a:fontRef>
-        </p:style>
-        <p:txBody>
-          <a:bodyPr rtlCol="0" anchor="ctr"/>
-          <a:lstStyle/>
-          <a:p>
-            <a:pPr algn="ctr"/>
-          </a:p>
-        </p:txBody>
-      </p:sp>
-      <p:sp>
-        <p:nvSpPr>
-          <p:cNvPr id="4" name="TextBox 3"/>
-          <p:cNvSpPr txBox="1"/>
-          <p:nvPr/>
-        </p:nvSpPr>
-        <p:spPr>
-          <a:xfrm>
-            <a:off x="457200" y="1097280"/>
-            <a:ext cx="8229600" cy="640080"/>
-          </a:xfrm>
-          <a:prstGeom prst="rect">
-            <a:avLst/>
-          </a:prstGeom>
-          <a:noFill/>
-          <a:ln>
-            <a:noFill/>
-          </a:ln>
-        </p:spPr>
-        <p:txBody>
-          <a:bodyPr wrap="square">
-            <a:spAutoFit/>
-          </a:bodyPr>
-          <a:lstStyle/>
-          <a:p>
-            <a:r>
-              <a:rPr sz="1100">
-                <a:solidFill>
-                  <a:srgbClr val="000000"/>
-                </a:solidFill>
-                <a:latin typeface="Avenir Next LT Pro"/>
-              </a:rPr>
-              <a:t>Fully direct-to-consumer luxury home-furnishings brand — design galleries, paid membership, integrated hospitality. Founder-led by Gary Friedman, who rebuilt RH from near-bankruptcy (2001) into a luxury platform across the US, Canada, UK &amp; Europe.</a:t>
-            </a:r>
-          </a:p>
-        </p:txBody>
-      </p:sp>
-      <p:graphicFrame>
-        <p:nvGraphicFramePr>
-          <p:cNvPr id="5" name="Table 4"/>
-          <p:cNvGraphicFramePr>
-            <a:graphicFrameLocks noGrp="1"/>
-          </p:cNvGraphicFramePr>
-          <p:nvPr/>
-        </p:nvGraphicFramePr>
-        <p:xfrm>
-          <a:off x="457200" y="1874519"/>
-          <a:ext cx="3977640" cy="3127248"/>
-        </p:xfrm>
-        <a:graphic>
-          <a:graphicData uri="http://schemas.openxmlformats.org/drawingml/2006/table">
-            <a:tbl>
-              <a:tblPr>
-                <a:tableStyleId>{5C22544A-7EE6-4342-B048-85BDC9FD1C3A}</a:tableStyleId>
-              </a:tblPr>
-              <a:tblGrid>
-                <a:gridCol w="1965960"/>
-                <a:gridCol w="2011680"/>
-              </a:tblGrid>
-              <a:tr h="384048">
-                <a:tc gridSpan="2">
-                  <a:txBody>
-                    <a:bodyPr/>
-                    <a:lstStyle/>
-                    <a:p>
-                      <a:r>
-                        <a:rPr sz="1100" b="1">
-                          <a:solidFill>
-                            <a:srgbClr val="FFFFFF"/>
-                          </a:solidFill>
-                          <a:latin typeface="Avenir Next LT Pro Demi"/>
-                        </a:rPr>
-                        <a:t>Market &amp; Valuation (Jul 2026)</a:t>
-                      </a:r>
-                    </a:p>
-                  </a:txBody>
-                  <a:tcPr anchor="ctr" marL="91440">
-                    <a:solidFill>
-                      <a:srgbClr val="9A7B44"/>
-                    </a:solidFill>
-                  </a:tcPr>
-                </a:tc>
-                <a:tc hMerge="1">
-                  <a:txBody>
-                    <a:bodyPr/>
-                    <a:lstStyle/>
-                    <a:p/>
-                  </a:txBody>
-                  <a:tcPr/>
-                </a:tc>
-              </a:tr>
-              <a:tr h="457200">
-                <a:tc>
-                  <a:txBody>
-                    <a:bodyPr/>
-                    <a:lstStyle/>
-                    <a:p>
-                      <a:r>
-                        <a:rPr sz="1050" b="1">
-                          <a:solidFill>
-                            <a:srgbClr val="000000"/>
-                          </a:solidFill>
-                          <a:latin typeface="Avenir Next LT Pro Demi"/>
-                        </a:rPr>
-                        <a:t>Ticker</a:t>
-                      </a:r>
-                    </a:p>
-                  </a:txBody>
-                  <a:tcPr marL="91440" anchor="ctr">
-                    <a:solidFill>
-                      <a:srgbClr val="FFFFFF"/>
-                    </a:solidFill>
-                  </a:tcPr>
-                </a:tc>
-                <a:tc>
-                  <a:txBody>
-                    <a:bodyPr/>
-                    <a:lstStyle/>
-                    <a:p>
-                      <a:r>
-                        <a:rPr sz="1050" b="0">
-                          <a:solidFill>
-                            <a:srgbClr val="000000"/>
-                          </a:solidFill>
-                          <a:latin typeface="Avenir Next LT Pro"/>
-                        </a:rPr>
-                        <a:t>NYSE: RH</a:t>
-                      </a:r>
-                    </a:p>
-                  </a:txBody>
-                  <a:tcPr marL="91440" anchor="ctr">
-                    <a:solidFill>
-                      <a:srgbClr val="FFFFFF"/>
-                    </a:solidFill>
-                  </a:tcPr>
-                </a:tc>
-              </a:tr>
-              <a:tr h="457200">
-                <a:tc>
-                  <a:txBody>
-                    <a:bodyPr/>
-                    <a:lstStyle/>
-                    <a:p>
-                      <a:r>
-                        <a:rPr sz="1050" b="1">
-                          <a:solidFill>
-                            <a:srgbClr val="000000"/>
-                          </a:solidFill>
-                          <a:latin typeface="Avenir Next LT Pro Demi"/>
-                        </a:rPr>
-                        <a:t>Share price</a:t>
-                      </a:r>
-                    </a:p>
-                  </a:txBody>
-                  <a:tcPr marL="91440" anchor="ctr">
-                    <a:solidFill>
-                      <a:srgbClr val="F4F6F8"/>
-                    </a:solidFill>
-                  </a:tcPr>
-                </a:tc>
-                <a:tc>
-                  <a:txBody>
-                    <a:bodyPr/>
-                    <a:lstStyle/>
-                    <a:p>
-                      <a:r>
-                        <a:rPr sz="1050" b="0">
-                          <a:solidFill>
-                            <a:srgbClr val="000000"/>
-                          </a:solidFill>
-                          <a:latin typeface="Avenir Next LT Pro"/>
-                        </a:rPr>
-                        <a:t>~$166</a:t>
-                      </a:r>
-                    </a:p>
-                  </a:txBody>
-                  <a:tcPr marL="91440" anchor="ctr">
-                    <a:solidFill>
-                      <a:srgbClr val="F4F6F8"/>
-                    </a:solidFill>
-                  </a:tcPr>
-                </a:tc>
-              </a:tr>
-              <a:tr h="457200">
-                <a:tc>
-                  <a:txBody>
-                    <a:bodyPr/>
-                    <a:lstStyle/>
-                    <a:p>
-                      <a:r>
-                        <a:rPr sz="1050" b="1">
-                          <a:solidFill>
-                            <a:srgbClr val="000000"/>
-                          </a:solidFill>
-                          <a:latin typeface="Avenir Next LT Pro Demi"/>
-                        </a:rPr>
-                        <a:t>Market cap</a:t>
-                      </a:r>
-                    </a:p>
-                  </a:txBody>
-                  <a:tcPr marL="91440" anchor="ctr">
-                    <a:solidFill>
-                      <a:srgbClr val="FFFFFF"/>
-                    </a:solidFill>
-                  </a:tcPr>
-                </a:tc>
-                <a:tc>
-                  <a:txBody>
-                    <a:bodyPr/>
-                    <a:lstStyle/>
-                    <a:p>
-                      <a:r>
-                        <a:rPr sz="1050" b="0">
-                          <a:solidFill>
-                            <a:srgbClr val="000000"/>
-                          </a:solidFill>
-                          <a:latin typeface="Avenir Next LT Pro"/>
-                        </a:rPr>
-                        <a:t>~$3.1B</a:t>
-                      </a:r>
-                    </a:p>
-                  </a:txBody>
-                  <a:tcPr marL="91440" anchor="ctr">
-                    <a:solidFill>
-                      <a:srgbClr val="FFFFFF"/>
-                    </a:solidFill>
-                  </a:tcPr>
-                </a:tc>
-              </a:tr>
-              <a:tr h="457200">
-                <a:tc>
-                  <a:txBody>
-                    <a:bodyPr/>
-                    <a:lstStyle/>
-                    <a:p>
-                      <a:r>
-                        <a:rPr sz="1050" b="1">
-                          <a:solidFill>
-                            <a:srgbClr val="000000"/>
-                          </a:solidFill>
-                          <a:latin typeface="Avenir Next LT Pro Demi"/>
-                        </a:rPr>
-                        <a:t>Net debt</a:t>
-                      </a:r>
-                    </a:p>
-                  </a:txBody>
-                  <a:tcPr marL="91440" anchor="ctr">
-                    <a:solidFill>
-                      <a:srgbClr val="F4F6F8"/>
-                    </a:solidFill>
-                  </a:tcPr>
-                </a:tc>
-                <a:tc>
-                  <a:txBody>
-                    <a:bodyPr/>
-                    <a:lstStyle/>
-                    <a:p>
-                      <a:r>
-                        <a:rPr sz="1050" b="0">
-                          <a:solidFill>
-                            <a:srgbClr val="000000"/>
-                          </a:solidFill>
-                          <a:latin typeface="Avenir Next LT Pro"/>
-                        </a:rPr>
-                        <a:t>~$2.4B</a:t>
-                      </a:r>
-                    </a:p>
-                  </a:txBody>
-                  <a:tcPr marL="91440" anchor="ctr">
-                    <a:solidFill>
-                      <a:srgbClr val="F4F6F8"/>
-                    </a:solidFill>
-                  </a:tcPr>
-                </a:tc>
-              </a:tr>
-              <a:tr h="457200">
-                <a:tc>
-                  <a:txBody>
-                    <a:bodyPr/>
-                    <a:lstStyle/>
-                    <a:p>
-                      <a:r>
-                        <a:rPr sz="1050" b="1">
-                          <a:solidFill>
-                            <a:srgbClr val="000000"/>
-                          </a:solidFill>
-                          <a:latin typeface="Avenir Next LT Pro Demi"/>
-                        </a:rPr>
-                        <a:t>Enterprise value</a:t>
-                      </a:r>
-                    </a:p>
-                  </a:txBody>
-                  <a:tcPr marL="91440" anchor="ctr">
-                    <a:solidFill>
-                      <a:srgbClr val="FFFFFF"/>
-                    </a:solidFill>
-                  </a:tcPr>
-                </a:tc>
-                <a:tc>
-                  <a:txBody>
-                    <a:bodyPr/>
-                    <a:lstStyle/>
-                    <a:p>
-                      <a:r>
-                        <a:rPr sz="1050" b="0">
-                          <a:solidFill>
-                            <a:srgbClr val="000000"/>
-                          </a:solidFill>
-                          <a:latin typeface="Avenir Next LT Pro"/>
-                        </a:rPr>
-                        <a:t>~$5.5B</a:t>
-                      </a:r>
-                    </a:p>
-                  </a:txBody>
-                  <a:tcPr marL="91440" anchor="ctr">
-                    <a:solidFill>
-                      <a:srgbClr val="FFFFFF"/>
-                    </a:solidFill>
-                  </a:tcPr>
-                </a:tc>
-              </a:tr>
-              <a:tr h="457200">
-                <a:tc>
-                  <a:txBody>
-                    <a:bodyPr/>
-                    <a:lstStyle/>
-                    <a:p>
-                      <a:r>
-                        <a:rPr sz="1050" b="1">
-                          <a:solidFill>
-                            <a:srgbClr val="000000"/>
-                          </a:solidFill>
-                          <a:latin typeface="Avenir Next LT Pro Demi"/>
-                        </a:rPr>
-                        <a:t>EV / EBITDA</a:t>
-                      </a:r>
-                    </a:p>
-                  </a:txBody>
-                  <a:tcPr marL="91440" anchor="ctr">
-                    <a:solidFill>
-                      <a:srgbClr val="F4F6F8"/>
-                    </a:solidFill>
-                  </a:tcPr>
-                </a:tc>
-                <a:tc>
-                  <a:txBody>
-                    <a:bodyPr/>
-                    <a:lstStyle/>
-                    <a:p>
-                      <a:r>
-                        <a:rPr sz="1050" b="0">
-                          <a:solidFill>
-                            <a:srgbClr val="000000"/>
-                          </a:solidFill>
-                          <a:latin typeface="Avenir Next LT Pro"/>
-                        </a:rPr>
-                        <a:t>~9.3×</a:t>
-                      </a:r>
-                    </a:p>
-                  </a:txBody>
-                  <a:tcPr marL="91440" anchor="ctr">
-                    <a:solidFill>
-                      <a:srgbClr val="F4F6F8"/>
-                    </a:solidFill>
-                  </a:tcPr>
-                </a:tc>
-              </a:tr>
-            </a:tbl>
-          </a:graphicData>
-        </a:graphic>
-      </p:graphicFrame>
-      <p:graphicFrame>
-        <p:nvGraphicFramePr>
-          <p:cNvPr id="6" name="Table 5"/>
-          <p:cNvGraphicFramePr>
-            <a:graphicFrameLocks noGrp="1"/>
-          </p:cNvGraphicFramePr>
-          <p:nvPr/>
-        </p:nvGraphicFramePr>
-        <p:xfrm>
-          <a:off x="4709160" y="1874519"/>
-          <a:ext cx="3977640" cy="3127248"/>
-        </p:xfrm>
-        <a:graphic>
-          <a:graphicData uri="http://schemas.openxmlformats.org/drawingml/2006/table">
-            <a:tbl>
-              <a:tblPr>
-                <a:tableStyleId>{5C22544A-7EE6-4342-B048-85BDC9FD1C3A}</a:tableStyleId>
-              </a:tblPr>
-              <a:tblGrid>
-                <a:gridCol w="1965960"/>
-                <a:gridCol w="2011680"/>
-              </a:tblGrid>
-              <a:tr h="384048">
-                <a:tc gridSpan="2">
-                  <a:txBody>
-                    <a:bodyPr/>
-                    <a:lstStyle/>
-                    <a:p>
-                      <a:r>
-                        <a:rPr sz="1100" b="1">
-                          <a:solidFill>
-                            <a:srgbClr val="FFFFFF"/>
-                          </a:solidFill>
-                          <a:latin typeface="Avenir Next LT Pro Demi"/>
-                        </a:rPr>
-                        <a:t>Business — FY2025 (ended Jan '26)</a:t>
-                      </a:r>
-                    </a:p>
-                  </a:txBody>
-                  <a:tcPr anchor="ctr" marL="91440">
-                    <a:solidFill>
-                      <a:srgbClr val="9A7B44"/>
-                    </a:solidFill>
-                  </a:tcPr>
-                </a:tc>
-                <a:tc hMerge="1">
-                  <a:txBody>
-                    <a:bodyPr/>
-                    <a:lstStyle/>
-                    <a:p/>
-                  </a:txBody>
-                  <a:tcPr/>
-                </a:tc>
-              </a:tr>
-              <a:tr h="457200">
-                <a:tc>
-                  <a:txBody>
-                    <a:bodyPr/>
-                    <a:lstStyle/>
-                    <a:p>
-                      <a:r>
-                        <a:rPr sz="1050" b="1">
-                          <a:solidFill>
-                            <a:srgbClr val="000000"/>
-                          </a:solidFill>
-                          <a:latin typeface="Avenir Next LT Pro Demi"/>
-                        </a:rPr>
-                        <a:t>Revenue</a:t>
-                      </a:r>
-                    </a:p>
-                  </a:txBody>
-                  <a:tcPr marL="91440" anchor="ctr">
-                    <a:solidFill>
-                      <a:srgbClr val="FFFFFF"/>
-                    </a:solidFill>
-                  </a:tcPr>
-                </a:tc>
-                <a:tc>
-                  <a:txBody>
-                    <a:bodyPr/>
-                    <a:lstStyle/>
-                    <a:p>
-                      <a:r>
-                        <a:rPr sz="1050" b="0">
-                          <a:solidFill>
-                            <a:srgbClr val="000000"/>
-                          </a:solidFill>
-                          <a:latin typeface="Avenir Next LT Pro"/>
-                        </a:rPr>
-                        <a:t>$3.44B</a:t>
-                      </a:r>
-                    </a:p>
-                  </a:txBody>
-                  <a:tcPr marL="91440" anchor="ctr">
-                    <a:solidFill>
-                      <a:srgbClr val="FFFFFF"/>
-                    </a:solidFill>
-                  </a:tcPr>
-                </a:tc>
-              </a:tr>
-              <a:tr h="457200">
-                <a:tc>
-                  <a:txBody>
-                    <a:bodyPr/>
-                    <a:lstStyle/>
-                    <a:p>
-                      <a:r>
-                        <a:rPr sz="1050" b="1">
-                          <a:solidFill>
-                            <a:srgbClr val="000000"/>
-                          </a:solidFill>
-                          <a:latin typeface="Avenir Next LT Pro Demi"/>
-                        </a:rPr>
-                        <a:t>Adj. EBITDA</a:t>
-                      </a:r>
-                    </a:p>
-                  </a:txBody>
-                  <a:tcPr marL="91440" anchor="ctr">
-                    <a:solidFill>
-                      <a:srgbClr val="F4F6F8"/>
-                    </a:solidFill>
-                  </a:tcPr>
-                </a:tc>
-                <a:tc>
-                  <a:txBody>
-                    <a:bodyPr/>
-                    <a:lstStyle/>
-                    <a:p>
-                      <a:r>
-                        <a:rPr sz="1050" b="0">
-                          <a:solidFill>
-                            <a:srgbClr val="000000"/>
-                          </a:solidFill>
-                          <a:latin typeface="Avenir Next LT Pro"/>
-                        </a:rPr>
-                        <a:t>$597M (17.3%)</a:t>
-                      </a:r>
-                    </a:p>
-                  </a:txBody>
-                  <a:tcPr marL="91440" anchor="ctr">
-                    <a:solidFill>
-                      <a:srgbClr val="F4F6F8"/>
-                    </a:solidFill>
-                  </a:tcPr>
-                </a:tc>
-              </a:tr>
-              <a:tr h="457200">
-                <a:tc>
-                  <a:txBody>
-                    <a:bodyPr/>
-                    <a:lstStyle/>
-                    <a:p>
-                      <a:r>
-                        <a:rPr sz="1050" b="1">
-                          <a:solidFill>
-                            <a:srgbClr val="000000"/>
-                          </a:solidFill>
-                          <a:latin typeface="Avenir Next LT Pro Demi"/>
-                        </a:rPr>
-                        <a:t>Gross margin</a:t>
-                      </a:r>
-                    </a:p>
-                  </a:txBody>
-                  <a:tcPr marL="91440" anchor="ctr">
-                    <a:solidFill>
-                      <a:srgbClr val="FFFFFF"/>
-                    </a:solidFill>
-                  </a:tcPr>
-                </a:tc>
-                <a:tc>
-                  <a:txBody>
-                    <a:bodyPr/>
-                    <a:lstStyle/>
-                    <a:p>
-                      <a:r>
-                        <a:rPr sz="1050" b="0">
-                          <a:solidFill>
-                            <a:srgbClr val="000000"/>
-                          </a:solidFill>
-                          <a:latin typeface="Avenir Next LT Pro"/>
-                        </a:rPr>
-                        <a:t>~44%</a:t>
-                      </a:r>
-                    </a:p>
-                  </a:txBody>
-                  <a:tcPr marL="91440" anchor="ctr">
-                    <a:solidFill>
-                      <a:srgbClr val="FFFFFF"/>
-                    </a:solidFill>
-                  </a:tcPr>
-                </a:tc>
-              </a:tr>
-              <a:tr h="457200">
-                <a:tc>
-                  <a:txBody>
-                    <a:bodyPr/>
-                    <a:lstStyle/>
-                    <a:p>
-                      <a:r>
-                        <a:rPr sz="1050" b="1">
-                          <a:solidFill>
-                            <a:srgbClr val="000000"/>
-                          </a:solidFill>
-                          <a:latin typeface="Avenir Next LT Pro Demi"/>
-                        </a:rPr>
-                        <a:t>Diluted EPS</a:t>
-                      </a:r>
-                    </a:p>
-                  </a:txBody>
-                  <a:tcPr marL="91440" anchor="ctr">
-                    <a:solidFill>
-                      <a:srgbClr val="F4F6F8"/>
-                    </a:solidFill>
-                  </a:tcPr>
-                </a:tc>
-                <a:tc>
-                  <a:txBody>
-                    <a:bodyPr/>
-                    <a:lstStyle/>
-                    <a:p>
-                      <a:r>
-                        <a:rPr sz="1050" b="0">
-                          <a:solidFill>
-                            <a:srgbClr val="000000"/>
-                          </a:solidFill>
-                          <a:latin typeface="Avenir Next LT Pro"/>
-                        </a:rPr>
-                        <a:t>$6.31</a:t>
-                      </a:r>
-                    </a:p>
-                  </a:txBody>
-                  <a:tcPr marL="91440" anchor="ctr">
-                    <a:solidFill>
-                      <a:srgbClr val="F4F6F8"/>
-                    </a:solidFill>
-                  </a:tcPr>
-                </a:tc>
-              </a:tr>
-              <a:tr h="457200">
-                <a:tc>
-                  <a:txBody>
-                    <a:bodyPr/>
-                    <a:lstStyle/>
-                    <a:p>
-                      <a:r>
-                        <a:rPr sz="1050" b="1">
-                          <a:solidFill>
-                            <a:srgbClr val="000000"/>
-                          </a:solidFill>
-                          <a:latin typeface="Avenir Next LT Pro Demi"/>
-                        </a:rPr>
-                        <a:t>Footprint</a:t>
-                      </a:r>
-                    </a:p>
-                  </a:txBody>
-                  <a:tcPr marL="91440" anchor="ctr">
-                    <a:solidFill>
-                      <a:srgbClr val="FFFFFF"/>
-                    </a:solidFill>
-                  </a:tcPr>
-                </a:tc>
-                <a:tc>
-                  <a:txBody>
-                    <a:bodyPr/>
-                    <a:lstStyle/>
-                    <a:p>
-                      <a:r>
-                        <a:rPr sz="1050" b="0">
-                          <a:solidFill>
-                            <a:srgbClr val="000000"/>
-                          </a:solidFill>
-                          <a:latin typeface="Avenir Next LT Pro"/>
-                        </a:rPr>
-                        <a:t>~68 galleries + 44 outlets</a:t>
-                      </a:r>
-                    </a:p>
-                  </a:txBody>
-                  <a:tcPr marL="91440" anchor="ctr">
-                    <a:solidFill>
-                      <a:srgbClr val="FFFFFF"/>
-                    </a:solidFill>
-                  </a:tcPr>
-                </a:tc>
-              </a:tr>
-              <a:tr h="457200">
-                <a:tc>
-                  <a:txBody>
-                    <a:bodyPr/>
-                    <a:lstStyle/>
-                    <a:p>
-                      <a:r>
-                        <a:rPr sz="1050" b="1">
-                          <a:solidFill>
-                            <a:srgbClr val="000000"/>
-                          </a:solidFill>
-                          <a:latin typeface="Avenir Next LT Pro Demi"/>
-                        </a:rPr>
-                        <a:t>Ownership</a:t>
-                      </a:r>
-                    </a:p>
-                  </a:txBody>
-                  <a:tcPr marL="91440" anchor="ctr">
-                    <a:solidFill>
-                      <a:srgbClr val="F4F6F8"/>
-                    </a:solidFill>
-                  </a:tcPr>
-                </a:tc>
-                <a:tc>
-                  <a:txBody>
-                    <a:bodyPr/>
-                    <a:lstStyle/>
-                    <a:p>
-                      <a:r>
-                        <a:rPr sz="1050" b="0">
-                          <a:solidFill>
-                            <a:srgbClr val="000000"/>
-                          </a:solidFill>
-                          <a:latin typeface="Avenir Next LT Pro"/>
-                        </a:rPr>
-                        <a:t>Founder-led; Friedman ~25%</a:t>
-                      </a:r>
-                    </a:p>
-                  </a:txBody>
-                  <a:tcPr marL="91440" anchor="ctr">
-                    <a:solidFill>
-                      <a:srgbClr val="F4F6F8"/>
-                    </a:solidFill>
-                  </a:tcPr>
-                </a:tc>
-              </a:tr>
-            </a:tbl>
-          </a:graphicData>
-        </a:graphic>
-      </p:graphicFrame>
-      <p:sp>
-        <p:nvSpPr>
-          <p:cNvPr id="7" name="TextBox 6"/>
-          <p:cNvSpPr txBox="1"/>
-          <p:nvPr/>
-        </p:nvSpPr>
-        <p:spPr>
-          <a:xfrm>
-            <a:off x="457200" y="6309360"/>
-            <a:ext cx="8229600" cy="274320"/>
-          </a:xfrm>
-          <a:prstGeom prst="rect">
-            <a:avLst/>
-          </a:prstGeom>
-          <a:noFill/>
-          <a:ln>
-            <a:noFill/>
-          </a:ln>
-        </p:spPr>
-        <p:txBody>
-          <a:bodyPr wrap="none">
-            <a:spAutoFit/>
-          </a:bodyPr>
-          <a:lstStyle/>
-          <a:p>
-            <a:r>
-              <a:rPr sz="750" i="1">
-                <a:solidFill>
-                  <a:srgbClr val="707070"/>
-                </a:solidFill>
-                <a:latin typeface="Avenir Next LT Pro"/>
-              </a:rPr>
-              <a:t>Sources: RH FY2025 10-K &amp; Q1 FY2026 10-Q; market data as of Jul 2026.</a:t>
-            </a:r>
-          </a:p>
-        </p:txBody>
-      </p:sp>
-    </p:spTree>
-  </p:cSld>
-  <p:clrMapOvr>
-    <a:masterClrMapping/>
-  </p:clrMapOvr>
-</p:sld>
-</file>
-
 <file path=ppt/slides/slide2.xml><?xml version="1.0" encoding="utf-8"?>
 <p:sld xmlns:a="http://schemas.openxmlformats.org/drawingml/2006/main" xmlns:r="http://schemas.openxmlformats.org/officeDocument/2006/relationships" xmlns:p="http://schemas.openxmlformats.org/presentationml/2006/main">
   <p:cSld>
@@ -15230,7 +14978,7 @@
                 </a:solidFill>
                 <a:latin typeface="Avenir Next LT Pro Demi"/>
               </a:rPr>
-              <a:t>Trough → Recovery: Where RH Stands</a:t>
+              <a:t>Company Background — RH at a Glance</a:t>
             </a:r>
           </a:p>
         </p:txBody>
@@ -15286,8 +15034,8 @@
         </p:nvSpPr>
         <p:spPr>
           <a:xfrm>
-            <a:off x="457200" y="1143000"/>
-            <a:ext cx="8229600" cy="548640"/>
+            <a:off x="457200" y="1097280"/>
+            <a:ext cx="8229600" cy="640080"/>
           </a:xfrm>
           <a:prstGeom prst="rect">
             <a:avLst/>
@@ -15304,437 +15052,688 @@
           <a:lstStyle/>
           <a:p>
             <a:r>
-              <a:rPr sz="1100" b="0" i="0">
+              <a:rPr sz="1100">
                 <a:solidFill>
                   <a:srgbClr val="000000"/>
                 </a:solidFill>
                 <a:latin typeface="Avenir Next LT Pro"/>
               </a:rPr>
-              <a:t>Peaked ~$3.6B (FY22) on a housing boom + debt-funded buybacks; housing then froze — revenue fell to a ~$3.0B trough with ~$2.4B net debt.</a:t>
+              <a:t>Fully direct-to-consumer luxury home-furnishings brand — design galleries, paid membership, integrated hospitality. Founder-led by Gary Friedman, who rebuilt RH from near-bankruptcy (2001) into a luxury platform across the US, Canada, UK &amp; Europe.</a:t>
             </a:r>
           </a:p>
         </p:txBody>
       </p:sp>
-      <p:sp>
-        <p:nvSpPr>
-          <p:cNvPr id="5" name="Rectangle 4"/>
-          <p:cNvSpPr/>
+      <p:graphicFrame>
+        <p:nvGraphicFramePr>
+          <p:cNvPr id="5" name="Table 4"/>
+          <p:cNvGraphicFramePr>
+            <a:graphicFrameLocks noGrp="1"/>
+          </p:cNvGraphicFramePr>
           <p:nvPr/>
-        </p:nvSpPr>
-        <p:spPr>
-          <a:xfrm>
-            <a:off x="457200" y="1874519"/>
-            <a:ext cx="3977639" cy="384048"/>
-          </a:xfrm>
-          <a:prstGeom prst="rect">
-            <a:avLst/>
-          </a:prstGeom>
-          <a:solidFill>
-            <a:srgbClr val="196B24"/>
-          </a:solidFill>
-          <a:ln>
-            <a:noFill/>
-          </a:ln>
-        </p:spPr>
-        <p:style>
-          <a:lnRef idx="1">
-            <a:schemeClr val="accent1"/>
-          </a:lnRef>
-          <a:fillRef idx="3">
-            <a:schemeClr val="accent1"/>
-          </a:fillRef>
-          <a:effectRef idx="2">
-            <a:schemeClr val="accent1"/>
-          </a:effectRef>
-          <a:fontRef idx="minor">
-            <a:schemeClr val="lt1"/>
-          </a:fontRef>
-        </p:style>
-        <p:txBody>
-          <a:bodyPr rtlCol="0" anchor="ctr" lIns="137160"/>
-          <a:lstStyle/>
-          <a:p>
-            <a:pPr algn="ctr"/>
-            <a:r>
-              <a:rPr sz="1250" b="1" i="0">
-                <a:solidFill>
-                  <a:srgbClr val="FFFFFF"/>
-                </a:solidFill>
-                <a:latin typeface="Avenir Next LT Pro Demi"/>
-              </a:rPr>
-              <a:t>WORKING</a:t>
-            </a:r>
-          </a:p>
-        </p:txBody>
-      </p:sp>
-      <p:sp>
-        <p:nvSpPr>
-          <p:cNvPr id="6" name="Rectangle 5"/>
-          <p:cNvSpPr/>
+        </p:nvGraphicFramePr>
+        <p:xfrm>
+          <a:off x="457200" y="1874519"/>
+          <a:ext cx="3977640" cy="3127248"/>
+        </p:xfrm>
+        <a:graphic>
+          <a:graphicData uri="http://schemas.openxmlformats.org/drawingml/2006/table">
+            <a:tbl>
+              <a:tblPr>
+                <a:tableStyleId>{5C22544A-7EE6-4342-B048-85BDC9FD1C3A}</a:tableStyleId>
+              </a:tblPr>
+              <a:tblGrid>
+                <a:gridCol w="1965960"/>
+                <a:gridCol w="2011680"/>
+              </a:tblGrid>
+              <a:tr h="384048">
+                <a:tc gridSpan="2">
+                  <a:txBody>
+                    <a:bodyPr/>
+                    <a:lstStyle/>
+                    <a:p>
+                      <a:r>
+                        <a:rPr sz="1100" b="1">
+                          <a:solidFill>
+                            <a:srgbClr val="FFFFFF"/>
+                          </a:solidFill>
+                          <a:latin typeface="Avenir Next LT Pro Demi"/>
+                        </a:rPr>
+                        <a:t>Market &amp; Valuation (Jul 2026)</a:t>
+                      </a:r>
+                    </a:p>
+                  </a:txBody>
+                  <a:tcPr anchor="ctr" marL="91440">
+                    <a:solidFill>
+                      <a:srgbClr val="9A7B44"/>
+                    </a:solidFill>
+                  </a:tcPr>
+                </a:tc>
+                <a:tc hMerge="1">
+                  <a:txBody>
+                    <a:bodyPr/>
+                    <a:lstStyle/>
+                    <a:p/>
+                  </a:txBody>
+                  <a:tcPr/>
+                </a:tc>
+              </a:tr>
+              <a:tr h="457200">
+                <a:tc>
+                  <a:txBody>
+                    <a:bodyPr/>
+                    <a:lstStyle/>
+                    <a:p>
+                      <a:r>
+                        <a:rPr sz="1050" b="1">
+                          <a:solidFill>
+                            <a:srgbClr val="000000"/>
+                          </a:solidFill>
+                          <a:latin typeface="Avenir Next LT Pro Demi"/>
+                        </a:rPr>
+                        <a:t>Ticker</a:t>
+                      </a:r>
+                    </a:p>
+                  </a:txBody>
+                  <a:tcPr marL="91440" anchor="ctr">
+                    <a:solidFill>
+                      <a:srgbClr val="FFFFFF"/>
+                    </a:solidFill>
+                  </a:tcPr>
+                </a:tc>
+                <a:tc>
+                  <a:txBody>
+                    <a:bodyPr/>
+                    <a:lstStyle/>
+                    <a:p>
+                      <a:r>
+                        <a:rPr sz="1050" b="0">
+                          <a:solidFill>
+                            <a:srgbClr val="000000"/>
+                          </a:solidFill>
+                          <a:latin typeface="Avenir Next LT Pro"/>
+                        </a:rPr>
+                        <a:t>NYSE: RH</a:t>
+                      </a:r>
+                    </a:p>
+                  </a:txBody>
+                  <a:tcPr marL="91440" anchor="ctr">
+                    <a:solidFill>
+                      <a:srgbClr val="FFFFFF"/>
+                    </a:solidFill>
+                  </a:tcPr>
+                </a:tc>
+              </a:tr>
+              <a:tr h="457200">
+                <a:tc>
+                  <a:txBody>
+                    <a:bodyPr/>
+                    <a:lstStyle/>
+                    <a:p>
+                      <a:r>
+                        <a:rPr sz="1050" b="1">
+                          <a:solidFill>
+                            <a:srgbClr val="000000"/>
+                          </a:solidFill>
+                          <a:latin typeface="Avenir Next LT Pro Demi"/>
+                        </a:rPr>
+                        <a:t>Share price</a:t>
+                      </a:r>
+                    </a:p>
+                  </a:txBody>
+                  <a:tcPr marL="91440" anchor="ctr">
+                    <a:solidFill>
+                      <a:srgbClr val="F4F6F8"/>
+                    </a:solidFill>
+                  </a:tcPr>
+                </a:tc>
+                <a:tc>
+                  <a:txBody>
+                    <a:bodyPr/>
+                    <a:lstStyle/>
+                    <a:p>
+                      <a:r>
+                        <a:rPr sz="1050" b="0">
+                          <a:solidFill>
+                            <a:srgbClr val="000000"/>
+                          </a:solidFill>
+                          <a:latin typeface="Avenir Next LT Pro"/>
+                        </a:rPr>
+                        <a:t>~$166</a:t>
+                      </a:r>
+                    </a:p>
+                  </a:txBody>
+                  <a:tcPr marL="91440" anchor="ctr">
+                    <a:solidFill>
+                      <a:srgbClr val="F4F6F8"/>
+                    </a:solidFill>
+                  </a:tcPr>
+                </a:tc>
+              </a:tr>
+              <a:tr h="457200">
+                <a:tc>
+                  <a:txBody>
+                    <a:bodyPr/>
+                    <a:lstStyle/>
+                    <a:p>
+                      <a:r>
+                        <a:rPr sz="1050" b="1">
+                          <a:solidFill>
+                            <a:srgbClr val="000000"/>
+                          </a:solidFill>
+                          <a:latin typeface="Avenir Next LT Pro Demi"/>
+                        </a:rPr>
+                        <a:t>Market cap</a:t>
+                      </a:r>
+                    </a:p>
+                  </a:txBody>
+                  <a:tcPr marL="91440" anchor="ctr">
+                    <a:solidFill>
+                      <a:srgbClr val="FFFFFF"/>
+                    </a:solidFill>
+                  </a:tcPr>
+                </a:tc>
+                <a:tc>
+                  <a:txBody>
+                    <a:bodyPr/>
+                    <a:lstStyle/>
+                    <a:p>
+                      <a:r>
+                        <a:rPr sz="1050" b="0">
+                          <a:solidFill>
+                            <a:srgbClr val="000000"/>
+                          </a:solidFill>
+                          <a:latin typeface="Avenir Next LT Pro"/>
+                        </a:rPr>
+                        <a:t>~$3.1B</a:t>
+                      </a:r>
+                    </a:p>
+                  </a:txBody>
+                  <a:tcPr marL="91440" anchor="ctr">
+                    <a:solidFill>
+                      <a:srgbClr val="FFFFFF"/>
+                    </a:solidFill>
+                  </a:tcPr>
+                </a:tc>
+              </a:tr>
+              <a:tr h="457200">
+                <a:tc>
+                  <a:txBody>
+                    <a:bodyPr/>
+                    <a:lstStyle/>
+                    <a:p>
+                      <a:r>
+                        <a:rPr sz="1050" b="1">
+                          <a:solidFill>
+                            <a:srgbClr val="000000"/>
+                          </a:solidFill>
+                          <a:latin typeface="Avenir Next LT Pro Demi"/>
+                        </a:rPr>
+                        <a:t>Net debt</a:t>
+                      </a:r>
+                    </a:p>
+                  </a:txBody>
+                  <a:tcPr marL="91440" anchor="ctr">
+                    <a:solidFill>
+                      <a:srgbClr val="F4F6F8"/>
+                    </a:solidFill>
+                  </a:tcPr>
+                </a:tc>
+                <a:tc>
+                  <a:txBody>
+                    <a:bodyPr/>
+                    <a:lstStyle/>
+                    <a:p>
+                      <a:r>
+                        <a:rPr sz="1050" b="0">
+                          <a:solidFill>
+                            <a:srgbClr val="000000"/>
+                          </a:solidFill>
+                          <a:latin typeface="Avenir Next LT Pro"/>
+                        </a:rPr>
+                        <a:t>~$2.4B</a:t>
+                      </a:r>
+                    </a:p>
+                  </a:txBody>
+                  <a:tcPr marL="91440" anchor="ctr">
+                    <a:solidFill>
+                      <a:srgbClr val="F4F6F8"/>
+                    </a:solidFill>
+                  </a:tcPr>
+                </a:tc>
+              </a:tr>
+              <a:tr h="457200">
+                <a:tc>
+                  <a:txBody>
+                    <a:bodyPr/>
+                    <a:lstStyle/>
+                    <a:p>
+                      <a:r>
+                        <a:rPr sz="1050" b="1">
+                          <a:solidFill>
+                            <a:srgbClr val="000000"/>
+                          </a:solidFill>
+                          <a:latin typeface="Avenir Next LT Pro Demi"/>
+                        </a:rPr>
+                        <a:t>Enterprise value</a:t>
+                      </a:r>
+                    </a:p>
+                  </a:txBody>
+                  <a:tcPr marL="91440" anchor="ctr">
+                    <a:solidFill>
+                      <a:srgbClr val="FFFFFF"/>
+                    </a:solidFill>
+                  </a:tcPr>
+                </a:tc>
+                <a:tc>
+                  <a:txBody>
+                    <a:bodyPr/>
+                    <a:lstStyle/>
+                    <a:p>
+                      <a:r>
+                        <a:rPr sz="1050" b="0">
+                          <a:solidFill>
+                            <a:srgbClr val="000000"/>
+                          </a:solidFill>
+                          <a:latin typeface="Avenir Next LT Pro"/>
+                        </a:rPr>
+                        <a:t>~$5.5B</a:t>
+                      </a:r>
+                    </a:p>
+                  </a:txBody>
+                  <a:tcPr marL="91440" anchor="ctr">
+                    <a:solidFill>
+                      <a:srgbClr val="FFFFFF"/>
+                    </a:solidFill>
+                  </a:tcPr>
+                </a:tc>
+              </a:tr>
+              <a:tr h="457200">
+                <a:tc>
+                  <a:txBody>
+                    <a:bodyPr/>
+                    <a:lstStyle/>
+                    <a:p>
+                      <a:r>
+                        <a:rPr sz="1050" b="1">
+                          <a:solidFill>
+                            <a:srgbClr val="000000"/>
+                          </a:solidFill>
+                          <a:latin typeface="Avenir Next LT Pro Demi"/>
+                        </a:rPr>
+                        <a:t>EV / EBITDA</a:t>
+                      </a:r>
+                    </a:p>
+                  </a:txBody>
+                  <a:tcPr marL="91440" anchor="ctr">
+                    <a:solidFill>
+                      <a:srgbClr val="F4F6F8"/>
+                    </a:solidFill>
+                  </a:tcPr>
+                </a:tc>
+                <a:tc>
+                  <a:txBody>
+                    <a:bodyPr/>
+                    <a:lstStyle/>
+                    <a:p>
+                      <a:r>
+                        <a:rPr sz="1050" b="0">
+                          <a:solidFill>
+                            <a:srgbClr val="000000"/>
+                          </a:solidFill>
+                          <a:latin typeface="Avenir Next LT Pro"/>
+                        </a:rPr>
+                        <a:t>~9.3×</a:t>
+                      </a:r>
+                    </a:p>
+                  </a:txBody>
+                  <a:tcPr marL="91440" anchor="ctr">
+                    <a:solidFill>
+                      <a:srgbClr val="F4F6F8"/>
+                    </a:solidFill>
+                  </a:tcPr>
+                </a:tc>
+              </a:tr>
+            </a:tbl>
+          </a:graphicData>
+        </a:graphic>
+      </p:graphicFrame>
+      <p:graphicFrame>
+        <p:nvGraphicFramePr>
+          <p:cNvPr id="6" name="Table 5"/>
+          <p:cNvGraphicFramePr>
+            <a:graphicFrameLocks noGrp="1"/>
+          </p:cNvGraphicFramePr>
           <p:nvPr/>
-        </p:nvSpPr>
-        <p:spPr>
-          <a:xfrm>
-            <a:off x="4709160" y="1874519"/>
-            <a:ext cx="3977639" cy="384048"/>
-          </a:xfrm>
-          <a:prstGeom prst="rect">
-            <a:avLst/>
-          </a:prstGeom>
-          <a:solidFill>
-            <a:srgbClr val="B03030"/>
-          </a:solidFill>
-          <a:ln>
-            <a:noFill/>
-          </a:ln>
-        </p:spPr>
-        <p:style>
-          <a:lnRef idx="1">
-            <a:schemeClr val="accent1"/>
-          </a:lnRef>
-          <a:fillRef idx="3">
-            <a:schemeClr val="accent1"/>
-          </a:fillRef>
-          <a:effectRef idx="2">
-            <a:schemeClr val="accent1"/>
-          </a:effectRef>
-          <a:fontRef idx="minor">
-            <a:schemeClr val="lt1"/>
-          </a:fontRef>
-        </p:style>
-        <p:txBody>
-          <a:bodyPr rtlCol="0" anchor="ctr" lIns="137160"/>
-          <a:lstStyle/>
-          <a:p>
-            <a:pPr algn="ctr"/>
-            <a:r>
-              <a:rPr sz="1250" b="1" i="0">
-                <a:solidFill>
-                  <a:srgbClr val="FFFFFF"/>
-                </a:solidFill>
-                <a:latin typeface="Avenir Next LT Pro Demi"/>
-              </a:rPr>
-              <a:t>WATCH</a:t>
-            </a:r>
-          </a:p>
-        </p:txBody>
-      </p:sp>
+        </p:nvGraphicFramePr>
+        <p:xfrm>
+          <a:off x="4709160" y="1874519"/>
+          <a:ext cx="3977640" cy="3127248"/>
+        </p:xfrm>
+        <a:graphic>
+          <a:graphicData uri="http://schemas.openxmlformats.org/drawingml/2006/table">
+            <a:tbl>
+              <a:tblPr>
+                <a:tableStyleId>{5C22544A-7EE6-4342-B048-85BDC9FD1C3A}</a:tableStyleId>
+              </a:tblPr>
+              <a:tblGrid>
+                <a:gridCol w="1965960"/>
+                <a:gridCol w="2011680"/>
+              </a:tblGrid>
+              <a:tr h="384048">
+                <a:tc gridSpan="2">
+                  <a:txBody>
+                    <a:bodyPr/>
+                    <a:lstStyle/>
+                    <a:p>
+                      <a:r>
+                        <a:rPr sz="1100" b="1">
+                          <a:solidFill>
+                            <a:srgbClr val="FFFFFF"/>
+                          </a:solidFill>
+                          <a:latin typeface="Avenir Next LT Pro Demi"/>
+                        </a:rPr>
+                        <a:t>Business — FY2025 (ended Jan '26)</a:t>
+                      </a:r>
+                    </a:p>
+                  </a:txBody>
+                  <a:tcPr anchor="ctr" marL="91440">
+                    <a:solidFill>
+                      <a:srgbClr val="9A7B44"/>
+                    </a:solidFill>
+                  </a:tcPr>
+                </a:tc>
+                <a:tc hMerge="1">
+                  <a:txBody>
+                    <a:bodyPr/>
+                    <a:lstStyle/>
+                    <a:p/>
+                  </a:txBody>
+                  <a:tcPr/>
+                </a:tc>
+              </a:tr>
+              <a:tr h="457200">
+                <a:tc>
+                  <a:txBody>
+                    <a:bodyPr/>
+                    <a:lstStyle/>
+                    <a:p>
+                      <a:r>
+                        <a:rPr sz="1050" b="1">
+                          <a:solidFill>
+                            <a:srgbClr val="000000"/>
+                          </a:solidFill>
+                          <a:latin typeface="Avenir Next LT Pro Demi"/>
+                        </a:rPr>
+                        <a:t>Revenue</a:t>
+                      </a:r>
+                    </a:p>
+                  </a:txBody>
+                  <a:tcPr marL="91440" anchor="ctr">
+                    <a:solidFill>
+                      <a:srgbClr val="FFFFFF"/>
+                    </a:solidFill>
+                  </a:tcPr>
+                </a:tc>
+                <a:tc>
+                  <a:txBody>
+                    <a:bodyPr/>
+                    <a:lstStyle/>
+                    <a:p>
+                      <a:r>
+                        <a:rPr sz="1050" b="0">
+                          <a:solidFill>
+                            <a:srgbClr val="000000"/>
+                          </a:solidFill>
+                          <a:latin typeface="Avenir Next LT Pro"/>
+                        </a:rPr>
+                        <a:t>$3.44B</a:t>
+                      </a:r>
+                    </a:p>
+                  </a:txBody>
+                  <a:tcPr marL="91440" anchor="ctr">
+                    <a:solidFill>
+                      <a:srgbClr val="FFFFFF"/>
+                    </a:solidFill>
+                  </a:tcPr>
+                </a:tc>
+              </a:tr>
+              <a:tr h="457200">
+                <a:tc>
+                  <a:txBody>
+                    <a:bodyPr/>
+                    <a:lstStyle/>
+                    <a:p>
+                      <a:r>
+                        <a:rPr sz="1050" b="1">
+                          <a:solidFill>
+                            <a:srgbClr val="000000"/>
+                          </a:solidFill>
+                          <a:latin typeface="Avenir Next LT Pro Demi"/>
+                        </a:rPr>
+                        <a:t>Adj. EBITDA</a:t>
+                      </a:r>
+                    </a:p>
+                  </a:txBody>
+                  <a:tcPr marL="91440" anchor="ctr">
+                    <a:solidFill>
+                      <a:srgbClr val="F4F6F8"/>
+                    </a:solidFill>
+                  </a:tcPr>
+                </a:tc>
+                <a:tc>
+                  <a:txBody>
+                    <a:bodyPr/>
+                    <a:lstStyle/>
+                    <a:p>
+                      <a:r>
+                        <a:rPr sz="1050" b="0">
+                          <a:solidFill>
+                            <a:srgbClr val="000000"/>
+                          </a:solidFill>
+                          <a:latin typeface="Avenir Next LT Pro"/>
+                        </a:rPr>
+                        <a:t>$597M (17.3%)</a:t>
+                      </a:r>
+                    </a:p>
+                  </a:txBody>
+                  <a:tcPr marL="91440" anchor="ctr">
+                    <a:solidFill>
+                      <a:srgbClr val="F4F6F8"/>
+                    </a:solidFill>
+                  </a:tcPr>
+                </a:tc>
+              </a:tr>
+              <a:tr h="457200">
+                <a:tc>
+                  <a:txBody>
+                    <a:bodyPr/>
+                    <a:lstStyle/>
+                    <a:p>
+                      <a:r>
+                        <a:rPr sz="1050" b="1">
+                          <a:solidFill>
+                            <a:srgbClr val="000000"/>
+                          </a:solidFill>
+                          <a:latin typeface="Avenir Next LT Pro Demi"/>
+                        </a:rPr>
+                        <a:t>Gross margin</a:t>
+                      </a:r>
+                    </a:p>
+                  </a:txBody>
+                  <a:tcPr marL="91440" anchor="ctr">
+                    <a:solidFill>
+                      <a:srgbClr val="FFFFFF"/>
+                    </a:solidFill>
+                  </a:tcPr>
+                </a:tc>
+                <a:tc>
+                  <a:txBody>
+                    <a:bodyPr/>
+                    <a:lstStyle/>
+                    <a:p>
+                      <a:r>
+                        <a:rPr sz="1050" b="0">
+                          <a:solidFill>
+                            <a:srgbClr val="000000"/>
+                          </a:solidFill>
+                          <a:latin typeface="Avenir Next LT Pro"/>
+                        </a:rPr>
+                        <a:t>~44%</a:t>
+                      </a:r>
+                    </a:p>
+                  </a:txBody>
+                  <a:tcPr marL="91440" anchor="ctr">
+                    <a:solidFill>
+                      <a:srgbClr val="FFFFFF"/>
+                    </a:solidFill>
+                  </a:tcPr>
+                </a:tc>
+              </a:tr>
+              <a:tr h="457200">
+                <a:tc>
+                  <a:txBody>
+                    <a:bodyPr/>
+                    <a:lstStyle/>
+                    <a:p>
+                      <a:r>
+                        <a:rPr sz="1050" b="1">
+                          <a:solidFill>
+                            <a:srgbClr val="000000"/>
+                          </a:solidFill>
+                          <a:latin typeface="Avenir Next LT Pro Demi"/>
+                        </a:rPr>
+                        <a:t>Diluted EPS</a:t>
+                      </a:r>
+                    </a:p>
+                  </a:txBody>
+                  <a:tcPr marL="91440" anchor="ctr">
+                    <a:solidFill>
+                      <a:srgbClr val="F4F6F8"/>
+                    </a:solidFill>
+                  </a:tcPr>
+                </a:tc>
+                <a:tc>
+                  <a:txBody>
+                    <a:bodyPr/>
+                    <a:lstStyle/>
+                    <a:p>
+                      <a:r>
+                        <a:rPr sz="1050" b="0">
+                          <a:solidFill>
+                            <a:srgbClr val="000000"/>
+                          </a:solidFill>
+                          <a:latin typeface="Avenir Next LT Pro"/>
+                        </a:rPr>
+                        <a:t>$6.31</a:t>
+                      </a:r>
+                    </a:p>
+                  </a:txBody>
+                  <a:tcPr marL="91440" anchor="ctr">
+                    <a:solidFill>
+                      <a:srgbClr val="F4F6F8"/>
+                    </a:solidFill>
+                  </a:tcPr>
+                </a:tc>
+              </a:tr>
+              <a:tr h="457200">
+                <a:tc>
+                  <a:txBody>
+                    <a:bodyPr/>
+                    <a:lstStyle/>
+                    <a:p>
+                      <a:r>
+                        <a:rPr sz="1050" b="1">
+                          <a:solidFill>
+                            <a:srgbClr val="000000"/>
+                          </a:solidFill>
+                          <a:latin typeface="Avenir Next LT Pro Demi"/>
+                        </a:rPr>
+                        <a:t>Footprint</a:t>
+                      </a:r>
+                    </a:p>
+                  </a:txBody>
+                  <a:tcPr marL="91440" anchor="ctr">
+                    <a:solidFill>
+                      <a:srgbClr val="FFFFFF"/>
+                    </a:solidFill>
+                  </a:tcPr>
+                </a:tc>
+                <a:tc>
+                  <a:txBody>
+                    <a:bodyPr/>
+                    <a:lstStyle/>
+                    <a:p>
+                      <a:r>
+                        <a:rPr sz="1050" b="0">
+                          <a:solidFill>
+                            <a:srgbClr val="000000"/>
+                          </a:solidFill>
+                          <a:latin typeface="Avenir Next LT Pro"/>
+                        </a:rPr>
+                        <a:t>~68 galleries + 44 outlets</a:t>
+                      </a:r>
+                    </a:p>
+                  </a:txBody>
+                  <a:tcPr marL="91440" anchor="ctr">
+                    <a:solidFill>
+                      <a:srgbClr val="FFFFFF"/>
+                    </a:solidFill>
+                  </a:tcPr>
+                </a:tc>
+              </a:tr>
+              <a:tr h="457200">
+                <a:tc>
+                  <a:txBody>
+                    <a:bodyPr/>
+                    <a:lstStyle/>
+                    <a:p>
+                      <a:r>
+                        <a:rPr sz="1050" b="1">
+                          <a:solidFill>
+                            <a:srgbClr val="000000"/>
+                          </a:solidFill>
+                          <a:latin typeface="Avenir Next LT Pro Demi"/>
+                        </a:rPr>
+                        <a:t>Ownership</a:t>
+                      </a:r>
+                    </a:p>
+                  </a:txBody>
+                  <a:tcPr marL="91440" anchor="ctr">
+                    <a:solidFill>
+                      <a:srgbClr val="F4F6F8"/>
+                    </a:solidFill>
+                  </a:tcPr>
+                </a:tc>
+                <a:tc>
+                  <a:txBody>
+                    <a:bodyPr/>
+                    <a:lstStyle/>
+                    <a:p>
+                      <a:r>
+                        <a:rPr sz="1050" b="0">
+                          <a:solidFill>
+                            <a:srgbClr val="000000"/>
+                          </a:solidFill>
+                          <a:latin typeface="Avenir Next LT Pro"/>
+                        </a:rPr>
+                        <a:t>Founder-led; Friedman ~25%</a:t>
+                      </a:r>
+                    </a:p>
+                  </a:txBody>
+                  <a:tcPr marL="91440" anchor="ctr">
+                    <a:solidFill>
+                      <a:srgbClr val="F4F6F8"/>
+                    </a:solidFill>
+                  </a:tcPr>
+                </a:tc>
+              </a:tr>
+            </a:tbl>
+          </a:graphicData>
+        </a:graphic>
+      </p:graphicFrame>
       <p:sp>
         <p:nvSpPr>
           <p:cNvPr id="7" name="TextBox 6"/>
-          <p:cNvSpPr txBox="1"/>
-          <p:nvPr/>
-        </p:nvSpPr>
-        <p:spPr>
-          <a:xfrm>
-            <a:off x="457200" y="2423160"/>
-            <a:ext cx="3977639" cy="640080"/>
-          </a:xfrm>
-          <a:prstGeom prst="rect">
-            <a:avLst/>
-          </a:prstGeom>
-          <a:noFill/>
-          <a:ln>
-            <a:noFill/>
-          </a:ln>
-        </p:spPr>
-        <p:txBody>
-          <a:bodyPr wrap="square">
-            <a:spAutoFit/>
-          </a:bodyPr>
-          <a:lstStyle/>
-          <a:p>
-            <a:r>
-              <a:rPr sz="1200" b="1" i="0">
-                <a:solidFill>
-                  <a:srgbClr val="196B24"/>
-                </a:solidFill>
-                <a:latin typeface="Avenir Next LT Pro Demi"/>
-              </a:rPr>
-              <a:t>✓  </a:t>
-            </a:r>
-            <a:r>
-              <a:rPr sz="1100" b="0" i="0">
-                <a:solidFill>
-                  <a:srgbClr val="000000"/>
-                </a:solidFill>
-                <a:latin typeface="Avenir Next LT Pro"/>
-              </a:rPr>
-              <a:t>FCF inflected to +$252M in FY25 (from −$214M)</a:t>
-            </a:r>
-          </a:p>
-        </p:txBody>
-      </p:sp>
-      <p:sp>
-        <p:nvSpPr>
-          <p:cNvPr id="8" name="TextBox 7"/>
-          <p:cNvSpPr txBox="1"/>
-          <p:nvPr/>
-        </p:nvSpPr>
-        <p:spPr>
-          <a:xfrm>
-            <a:off x="457200" y="3081528"/>
-            <a:ext cx="3977639" cy="640080"/>
-          </a:xfrm>
-          <a:prstGeom prst="rect">
-            <a:avLst/>
-          </a:prstGeom>
-          <a:noFill/>
-          <a:ln>
-            <a:noFill/>
-          </a:ln>
-        </p:spPr>
-        <p:txBody>
-          <a:bodyPr wrap="square">
-            <a:spAutoFit/>
-          </a:bodyPr>
-          <a:lstStyle/>
-          <a:p>
-            <a:r>
-              <a:rPr sz="1200" b="1" i="0">
-                <a:solidFill>
-                  <a:srgbClr val="196B24"/>
-                </a:solidFill>
-                <a:latin typeface="Avenir Next LT Pro Demi"/>
-              </a:rPr>
-              <a:t>✓  </a:t>
-            </a:r>
-            <a:r>
-              <a:rPr sz="1100" b="0" i="0">
-                <a:solidFill>
-                  <a:srgbClr val="000000"/>
-                </a:solidFill>
-                <a:latin typeface="Avenir Next LT Pro"/>
-              </a:rPr>
-              <a:t>Inventory normalized $1.02B → $819M</a:t>
-            </a:r>
-          </a:p>
-        </p:txBody>
-      </p:sp>
-      <p:sp>
-        <p:nvSpPr>
-          <p:cNvPr id="9" name="TextBox 8"/>
-          <p:cNvSpPr txBox="1"/>
-          <p:nvPr/>
-        </p:nvSpPr>
-        <p:spPr>
-          <a:xfrm>
-            <a:off x="457200" y="3739896"/>
-            <a:ext cx="3977639" cy="640080"/>
-          </a:xfrm>
-          <a:prstGeom prst="rect">
-            <a:avLst/>
-          </a:prstGeom>
-          <a:noFill/>
-          <a:ln>
-            <a:noFill/>
-          </a:ln>
-        </p:spPr>
-        <p:txBody>
-          <a:bodyPr wrap="square">
-            <a:spAutoFit/>
-          </a:bodyPr>
-          <a:lstStyle/>
-          <a:p>
-            <a:r>
-              <a:rPr sz="1200" b="1" i="0">
-                <a:solidFill>
-                  <a:srgbClr val="196B24"/>
-                </a:solidFill>
-                <a:latin typeface="Avenir Next LT Pro Demi"/>
-              </a:rPr>
-              <a:t>✓  </a:t>
-            </a:r>
-            <a:r>
-              <a:rPr sz="1100" b="0" i="0">
-                <a:solidFill>
-                  <a:srgbClr val="000000"/>
-                </a:solidFill>
-                <a:latin typeface="Avenir Next LT Pro"/>
-              </a:rPr>
-              <a:t>Revenue re-accelerated +8.1% in FY25</a:t>
-            </a:r>
-          </a:p>
-        </p:txBody>
-      </p:sp>
-      <p:sp>
-        <p:nvSpPr>
-          <p:cNvPr id="10" name="TextBox 9"/>
-          <p:cNvSpPr txBox="1"/>
-          <p:nvPr/>
-        </p:nvSpPr>
-        <p:spPr>
-          <a:xfrm>
-            <a:off x="4709160" y="2423160"/>
-            <a:ext cx="3977639" cy="640080"/>
-          </a:xfrm>
-          <a:prstGeom prst="rect">
-            <a:avLst/>
-          </a:prstGeom>
-          <a:noFill/>
-          <a:ln>
-            <a:noFill/>
-          </a:ln>
-        </p:spPr>
-        <p:txBody>
-          <a:bodyPr wrap="square">
-            <a:spAutoFit/>
-          </a:bodyPr>
-          <a:lstStyle/>
-          <a:p>
-            <a:r>
-              <a:rPr sz="1200" b="1" i="0">
-                <a:solidFill>
-                  <a:srgbClr val="B03030"/>
-                </a:solidFill>
-                <a:latin typeface="Avenir Next LT Pro Demi"/>
-              </a:rPr>
-              <a:t>!  </a:t>
-            </a:r>
-            <a:r>
-              <a:rPr sz="1100" b="0" i="0">
-                <a:solidFill>
-                  <a:srgbClr val="000000"/>
-                </a:solidFill>
-                <a:latin typeface="Avenir Next LT Pro"/>
-              </a:rPr>
-              <a:t>Q1 FY26: revenue −1.7%, net loss</a:t>
-            </a:r>
-          </a:p>
-        </p:txBody>
-      </p:sp>
-      <p:sp>
-        <p:nvSpPr>
-          <p:cNvPr id="11" name="TextBox 10"/>
-          <p:cNvSpPr txBox="1"/>
-          <p:nvPr/>
-        </p:nvSpPr>
-        <p:spPr>
-          <a:xfrm>
-            <a:off x="4709160" y="3081528"/>
-            <a:ext cx="3977639" cy="640080"/>
-          </a:xfrm>
-          <a:prstGeom prst="rect">
-            <a:avLst/>
-          </a:prstGeom>
-          <a:noFill/>
-          <a:ln>
-            <a:noFill/>
-          </a:ln>
-        </p:spPr>
-        <p:txBody>
-          <a:bodyPr wrap="square">
-            <a:spAutoFit/>
-          </a:bodyPr>
-          <a:lstStyle/>
-          <a:p>
-            <a:r>
-              <a:rPr sz="1200" b="1" i="0">
-                <a:solidFill>
-                  <a:srgbClr val="B03030"/>
-                </a:solidFill>
-                <a:latin typeface="Avenir Next LT Pro Demi"/>
-              </a:rPr>
-              <a:t>!  </a:t>
-            </a:r>
-            <a:r>
-              <a:rPr sz="1100" b="0" i="0">
-                <a:solidFill>
-                  <a:srgbClr val="000000"/>
-                </a:solidFill>
-                <a:latin typeface="Avenir Next LT Pro"/>
-              </a:rPr>
-              <a:t>~$225M/yr interest keeps coverage thin</a:t>
-            </a:r>
-          </a:p>
-        </p:txBody>
-      </p:sp>
-      <p:sp>
-        <p:nvSpPr>
-          <p:cNvPr id="12" name="TextBox 11"/>
-          <p:cNvSpPr txBox="1"/>
-          <p:nvPr/>
-        </p:nvSpPr>
-        <p:spPr>
-          <a:xfrm>
-            <a:off x="4709160" y="3739896"/>
-            <a:ext cx="3977639" cy="640080"/>
-          </a:xfrm>
-          <a:prstGeom prst="rect">
-            <a:avLst/>
-          </a:prstGeom>
-          <a:noFill/>
-          <a:ln>
-            <a:noFill/>
-          </a:ln>
-        </p:spPr>
-        <p:txBody>
-          <a:bodyPr wrap="square">
-            <a:spAutoFit/>
-          </a:bodyPr>
-          <a:lstStyle/>
-          <a:p>
-            <a:r>
-              <a:rPr sz="1200" b="1" i="0">
-                <a:solidFill>
-                  <a:srgbClr val="B03030"/>
-                </a:solidFill>
-                <a:latin typeface="Avenir Next LT Pro Demi"/>
-              </a:rPr>
-              <a:t>!  </a:t>
-            </a:r>
-            <a:r>
-              <a:rPr sz="1100" b="0" i="0">
-                <a:solidFill>
-                  <a:srgbClr val="000000"/>
-                </a:solidFill>
-                <a:latin typeface="Avenir Next LT Pro"/>
-              </a:rPr>
-              <a:t>Guidance is back-half loaded</a:t>
-            </a:r>
-          </a:p>
-        </p:txBody>
-      </p:sp>
-      <p:sp>
-        <p:nvSpPr>
-          <p:cNvPr id="13" name="TextBox 12"/>
-          <p:cNvSpPr txBox="1"/>
-          <p:nvPr/>
-        </p:nvSpPr>
-        <p:spPr>
-          <a:xfrm>
-            <a:off x="457200" y="4663440"/>
-            <a:ext cx="8229600" cy="365760"/>
-          </a:xfrm>
-          <a:prstGeom prst="rect">
-            <a:avLst/>
-          </a:prstGeom>
-          <a:noFill/>
-          <a:ln>
-            <a:noFill/>
-          </a:ln>
-        </p:spPr>
-        <p:txBody>
-          <a:bodyPr wrap="square">
-            <a:spAutoFit/>
-          </a:bodyPr>
-          <a:lstStyle/>
-          <a:p>
-            <a:r>
-              <a:rPr sz="1150" b="1" i="0">
-                <a:solidFill>
-                  <a:srgbClr val="000000"/>
-                </a:solidFill>
-                <a:latin typeface="Avenir Next LT Pro Demi"/>
-              </a:rPr>
-              <a:t>Recovery is real but early — the next two quarters are the tell.</a:t>
-            </a:r>
-          </a:p>
-        </p:txBody>
-      </p:sp>
-      <p:sp>
-        <p:nvSpPr>
-          <p:cNvPr id="14" name="TextBox 13"/>
           <p:cNvSpPr txBox="1"/>
           <p:nvPr/>
         </p:nvSpPr>
@@ -15752,19 +15751,19 @@
           </a:ln>
         </p:spPr>
         <p:txBody>
-          <a:bodyPr wrap="square">
+          <a:bodyPr wrap="none">
             <a:spAutoFit/>
           </a:bodyPr>
           <a:lstStyle/>
           <a:p>
             <a:r>
-              <a:rPr sz="750" b="0" i="1">
+              <a:rPr sz="750" i="1">
                 <a:solidFill>
                   <a:srgbClr val="707070"/>
                 </a:solidFill>
                 <a:latin typeface="Avenir Next LT Pro"/>
               </a:rPr>
-              <a:t>Sources: RH FY2025 10-K; Q1 FY2026 10-Q.</a:t>
+              <a:t>Sources: RH FY2025 10-K &amp; Q1 FY2026 10-Q; market data as of Jul 2026.</a:t>
             </a:r>
           </a:p>
         </p:txBody>
@@ -15819,7 +15818,7 @@
                 </a:solidFill>
                 <a:latin typeface="Avenir Next LT Pro Demi"/>
               </a:rPr>
-              <a:t>Strategy &amp; Recent Execution</a:t>
+              <a:t>Trough → Recovery: Where RH Stands</a:t>
             </a:r>
           </a:p>
         </p:txBody>
@@ -15876,7 +15875,7 @@
         <p:spPr>
           <a:xfrm>
             <a:off x="457200" y="1143000"/>
-            <a:ext cx="3977639" cy="365760"/>
+            <a:ext cx="8229600" cy="548640"/>
           </a:xfrm>
           <a:prstGeom prst="rect">
             <a:avLst/>
@@ -15893,26 +15892,130 @@
           <a:lstStyle/>
           <a:p>
             <a:r>
-              <a:rPr sz="1100" b="1" i="0">
+              <a:rPr sz="1100" b="0" i="0">
                 <a:solidFill>
                   <a:srgbClr val="000000"/>
                 </a:solidFill>
-                <a:latin typeface="Avenir Next LT Pro Demi"/>
-              </a:rPr>
-              <a:t>THE PLAN</a:t>
+                <a:latin typeface="Avenir Next LT Pro"/>
+              </a:rPr>
+              <a:t>Peaked ~$3.6B (FY22) on a housing boom + debt-funded buybacks; housing then froze — revenue fell to a ~$3.0B trough with ~$2.4B net debt.</a:t>
             </a:r>
           </a:p>
         </p:txBody>
       </p:sp>
       <p:sp>
         <p:nvSpPr>
-          <p:cNvPr id="5" name="TextBox 4"/>
+          <p:cNvPr id="5" name="Rectangle 4"/>
+          <p:cNvSpPr/>
+          <p:nvPr/>
+        </p:nvSpPr>
+        <p:spPr>
+          <a:xfrm>
+            <a:off x="457200" y="1874519"/>
+            <a:ext cx="3977639" cy="384048"/>
+          </a:xfrm>
+          <a:prstGeom prst="rect">
+            <a:avLst/>
+          </a:prstGeom>
+          <a:solidFill>
+            <a:srgbClr val="196B24"/>
+          </a:solidFill>
+          <a:ln>
+            <a:noFill/>
+          </a:ln>
+        </p:spPr>
+        <p:style>
+          <a:lnRef idx="1">
+            <a:schemeClr val="accent1"/>
+          </a:lnRef>
+          <a:fillRef idx="3">
+            <a:schemeClr val="accent1"/>
+          </a:fillRef>
+          <a:effectRef idx="2">
+            <a:schemeClr val="accent1"/>
+          </a:effectRef>
+          <a:fontRef idx="minor">
+            <a:schemeClr val="lt1"/>
+          </a:fontRef>
+        </p:style>
+        <p:txBody>
+          <a:bodyPr rtlCol="0" anchor="ctr" lIns="137160"/>
+          <a:lstStyle/>
+          <a:p>
+            <a:pPr algn="ctr"/>
+            <a:r>
+              <a:rPr sz="1250" b="1" i="0">
+                <a:solidFill>
+                  <a:srgbClr val="FFFFFF"/>
+                </a:solidFill>
+                <a:latin typeface="Avenir Next LT Pro Demi"/>
+              </a:rPr>
+              <a:t>WORKING</a:t>
+            </a:r>
+          </a:p>
+        </p:txBody>
+      </p:sp>
+      <p:sp>
+        <p:nvSpPr>
+          <p:cNvPr id="6" name="Rectangle 5"/>
+          <p:cNvSpPr/>
+          <p:nvPr/>
+        </p:nvSpPr>
+        <p:spPr>
+          <a:xfrm>
+            <a:off x="4709160" y="1874519"/>
+            <a:ext cx="3977639" cy="384048"/>
+          </a:xfrm>
+          <a:prstGeom prst="rect">
+            <a:avLst/>
+          </a:prstGeom>
+          <a:solidFill>
+            <a:srgbClr val="B03030"/>
+          </a:solidFill>
+          <a:ln>
+            <a:noFill/>
+          </a:ln>
+        </p:spPr>
+        <p:style>
+          <a:lnRef idx="1">
+            <a:schemeClr val="accent1"/>
+          </a:lnRef>
+          <a:fillRef idx="3">
+            <a:schemeClr val="accent1"/>
+          </a:fillRef>
+          <a:effectRef idx="2">
+            <a:schemeClr val="accent1"/>
+          </a:effectRef>
+          <a:fontRef idx="minor">
+            <a:schemeClr val="lt1"/>
+          </a:fontRef>
+        </p:style>
+        <p:txBody>
+          <a:bodyPr rtlCol="0" anchor="ctr" lIns="137160"/>
+          <a:lstStyle/>
+          <a:p>
+            <a:pPr algn="ctr"/>
+            <a:r>
+              <a:rPr sz="1250" b="1" i="0">
+                <a:solidFill>
+                  <a:srgbClr val="FFFFFF"/>
+                </a:solidFill>
+                <a:latin typeface="Avenir Next LT Pro Demi"/>
+              </a:rPr>
+              <a:t>WATCH</a:t>
+            </a:r>
+          </a:p>
+        </p:txBody>
+      </p:sp>
+      <p:sp>
+        <p:nvSpPr>
+          <p:cNvPr id="7" name="TextBox 6"/>
           <p:cNvSpPr txBox="1"/>
           <p:nvPr/>
         </p:nvSpPr>
         <p:spPr>
           <a:xfrm>
-            <a:off x="457200" y="1554480"/>
+            <a:off x="457200" y="2423160"/>
             <a:ext cx="3977639" cy="640080"/>
           </a:xfrm>
           <a:prstGeom prst="rect">
@@ -15930,35 +16033,35 @@
           <a:lstStyle/>
           <a:p>
             <a:r>
-              <a:rPr sz="1100" b="1" i="0">
+              <a:rPr sz="1200" b="1" i="0">
+                <a:solidFill>
+                  <a:srgbClr val="196B24"/>
+                </a:solidFill>
+                <a:latin typeface="Avenir Next LT Pro Demi"/>
+              </a:rPr>
+              <a:t>✓  </a:t>
+            </a:r>
+            <a:r>
+              <a:rPr sz="1100" b="0" i="0">
                 <a:solidFill>
                   <a:srgbClr val="000000"/>
                 </a:solidFill>
                 <a:latin typeface="Avenir Next LT Pro"/>
               </a:rPr>
-              <a:t>•  </a:t>
-            </a:r>
-            <a:r>
-              <a:rPr sz="1100" b="0" i="0">
-                <a:solidFill>
-                  <a:srgbClr val="000000"/>
-                </a:solidFill>
-                <a:latin typeface="Avenir Next LT Pro"/>
-              </a:rPr>
-              <a:t>Product transformation — new collections</a:t>
+              <a:t>FCF inflected to +$252M in FY25 (from −$214M)</a:t>
             </a:r>
           </a:p>
         </p:txBody>
       </p:sp>
       <p:sp>
         <p:nvSpPr>
-          <p:cNvPr id="6" name="TextBox 5"/>
+          <p:cNvPr id="8" name="TextBox 7"/>
           <p:cNvSpPr txBox="1"/>
           <p:nvPr/>
         </p:nvSpPr>
         <p:spPr>
           <a:xfrm>
-            <a:off x="457200" y="2212848"/>
+            <a:off x="457200" y="3081528"/>
             <a:ext cx="3977639" cy="640080"/>
           </a:xfrm>
           <a:prstGeom prst="rect">
@@ -15976,35 +16079,35 @@
           <a:lstStyle/>
           <a:p>
             <a:r>
-              <a:rPr sz="1100" b="1" i="0">
+              <a:rPr sz="1200" b="1" i="0">
+                <a:solidFill>
+                  <a:srgbClr val="196B24"/>
+                </a:solidFill>
+                <a:latin typeface="Avenir Next LT Pro Demi"/>
+              </a:rPr>
+              <a:t>✓  </a:t>
+            </a:r>
+            <a:r>
+              <a:rPr sz="1100" b="0" i="0">
                 <a:solidFill>
                   <a:srgbClr val="000000"/>
                 </a:solidFill>
                 <a:latin typeface="Avenir Next LT Pro"/>
               </a:rPr>
-              <a:t>•  </a:t>
-            </a:r>
-            <a:r>
-              <a:rPr sz="1100" b="0" i="0">
-                <a:solidFill>
-                  <a:srgbClr val="000000"/>
-                </a:solidFill>
-                <a:latin typeface="Avenir Next LT Pro"/>
-              </a:rPr>
-              <a:t>Gallery expansion → RH's ~$5–6B opportunity</a:t>
+              <a:t>Inventory normalized $1.02B → $819M</a:t>
             </a:r>
           </a:p>
         </p:txBody>
       </p:sp>
       <p:sp>
         <p:nvSpPr>
-          <p:cNvPr id="7" name="TextBox 6"/>
+          <p:cNvPr id="9" name="TextBox 8"/>
           <p:cNvSpPr txBox="1"/>
           <p:nvPr/>
         </p:nvSpPr>
         <p:spPr>
           <a:xfrm>
-            <a:off x="457200" y="2871215"/>
+            <a:off x="457200" y="3739896"/>
             <a:ext cx="3977639" cy="640080"/>
           </a:xfrm>
           <a:prstGeom prst="rect">
@@ -16022,35 +16125,35 @@
           <a:lstStyle/>
           <a:p>
             <a:r>
-              <a:rPr sz="1100" b="1" i="0">
+              <a:rPr sz="1200" b="1" i="0">
+                <a:solidFill>
+                  <a:srgbClr val="196B24"/>
+                </a:solidFill>
+                <a:latin typeface="Avenir Next LT Pro Demi"/>
+              </a:rPr>
+              <a:t>✓  </a:t>
+            </a:r>
+            <a:r>
+              <a:rPr sz="1100" b="0" i="0">
                 <a:solidFill>
                   <a:srgbClr val="000000"/>
                 </a:solidFill>
                 <a:latin typeface="Avenir Next LT Pro"/>
               </a:rPr>
-              <a:t>•  </a:t>
-            </a:r>
-            <a:r>
-              <a:rPr sz="1100" b="0" i="0">
-                <a:solidFill>
-                  <a:srgbClr val="000000"/>
-                </a:solidFill>
-                <a:latin typeface="Avenir Next LT Pro"/>
-              </a:rPr>
-              <a:t>Move upmarket — Estates targets the rate-immune buyer</a:t>
+              <a:t>Revenue re-accelerated +8.1% in FY25</a:t>
             </a:r>
           </a:p>
         </p:txBody>
       </p:sp>
       <p:sp>
         <p:nvSpPr>
-          <p:cNvPr id="8" name="TextBox 7"/>
+          <p:cNvPr id="10" name="TextBox 9"/>
           <p:cNvSpPr txBox="1"/>
           <p:nvPr/>
         </p:nvSpPr>
         <p:spPr>
           <a:xfrm>
-            <a:off x="457200" y="3529584"/>
+            <a:off x="4709160" y="2423160"/>
             <a:ext cx="3977639" cy="640080"/>
           </a:xfrm>
           <a:prstGeom prst="rect">
@@ -16068,36 +16171,36 @@
           <a:lstStyle/>
           <a:p>
             <a:r>
-              <a:rPr sz="1100" b="1" i="0">
+              <a:rPr sz="1200" b="1" i="0">
+                <a:solidFill>
+                  <a:srgbClr val="B03030"/>
+                </a:solidFill>
+                <a:latin typeface="Avenir Next LT Pro Demi"/>
+              </a:rPr>
+              <a:t>!  </a:t>
+            </a:r>
+            <a:r>
+              <a:rPr sz="1100" b="0" i="0">
                 <a:solidFill>
                   <a:srgbClr val="000000"/>
                 </a:solidFill>
                 <a:latin typeface="Avenir Next LT Pro"/>
               </a:rPr>
-              <a:t>•  </a:t>
-            </a:r>
-            <a:r>
-              <a:rPr sz="1100" b="0" i="0">
-                <a:solidFill>
-                  <a:srgbClr val="000000"/>
-                </a:solidFill>
-                <a:latin typeface="Avenir Next LT Pro"/>
-              </a:rPr>
-              <a:t>Global + platform — hospitality, F&amp;B</a:t>
+              <a:t>Q1 FY26: revenue −1.7%, net loss</a:t>
             </a:r>
           </a:p>
         </p:txBody>
       </p:sp>
       <p:sp>
         <p:nvSpPr>
-          <p:cNvPr id="9" name="TextBox 8"/>
+          <p:cNvPr id="11" name="TextBox 10"/>
           <p:cNvSpPr txBox="1"/>
           <p:nvPr/>
         </p:nvSpPr>
         <p:spPr>
           <a:xfrm>
-            <a:off x="4709160" y="1143000"/>
-            <a:ext cx="3977639" cy="365760"/>
+            <a:off x="4709160" y="3081528"/>
+            <a:ext cx="3977639" cy="640080"/>
           </a:xfrm>
           <a:prstGeom prst="rect">
             <a:avLst/>
@@ -16114,27 +16217,36 @@
           <a:lstStyle/>
           <a:p>
             <a:r>
-              <a:rPr sz="1100" b="1" i="0">
+              <a:rPr sz="1200" b="1" i="0">
+                <a:solidFill>
+                  <a:srgbClr val="B03030"/>
+                </a:solidFill>
+                <a:latin typeface="Avenir Next LT Pro Demi"/>
+              </a:rPr>
+              <a:t>!  </a:t>
+            </a:r>
+            <a:r>
+              <a:rPr sz="1100" b="0" i="0">
                 <a:solidFill>
                   <a:srgbClr val="000000"/>
                 </a:solidFill>
-                <a:latin typeface="Avenir Next LT Pro Demi"/>
-              </a:rPr>
-              <a:t>RECENT MOVES  (watch, not yet catalysts)</a:t>
+                <a:latin typeface="Avenir Next LT Pro"/>
+              </a:rPr>
+              <a:t>~$225M/yr interest keeps coverage thin</a:t>
             </a:r>
           </a:p>
         </p:txBody>
       </p:sp>
       <p:sp>
         <p:nvSpPr>
-          <p:cNvPr id="10" name="TextBox 9"/>
+          <p:cNvPr id="12" name="TextBox 11"/>
           <p:cNvSpPr txBox="1"/>
           <p:nvPr/>
         </p:nvSpPr>
         <p:spPr>
           <a:xfrm>
-            <a:off x="4709160" y="1554480"/>
-            <a:ext cx="3977639" cy="822960"/>
+            <a:off x="4709160" y="3739896"/>
+            <a:ext cx="3977639" cy="640080"/>
           </a:xfrm>
           <a:prstGeom prst="rect">
             <a:avLst/>
@@ -16151,36 +16263,36 @@
           <a:lstStyle/>
           <a:p>
             <a:r>
-              <a:rPr sz="1100" b="1" i="0">
+              <a:rPr sz="1200" b="1" i="0">
+                <a:solidFill>
+                  <a:srgbClr val="B03030"/>
+                </a:solidFill>
+                <a:latin typeface="Avenir Next LT Pro Demi"/>
+              </a:rPr>
+              <a:t>!  </a:t>
+            </a:r>
+            <a:r>
+              <a:rPr sz="1100" b="0" i="0">
                 <a:solidFill>
                   <a:srgbClr val="000000"/>
                 </a:solidFill>
                 <a:latin typeface="Avenir Next LT Pro"/>
               </a:rPr>
-              <a:t>•  </a:t>
-            </a:r>
-            <a:r>
-              <a:rPr sz="1100" b="0" i="0">
-                <a:solidFill>
-                  <a:srgbClr val="000000"/>
-                </a:solidFill>
-                <a:latin typeface="Avenir Next LT Pro"/>
-              </a:rPr>
-              <a:t>Estates unveiled — acquired legendary ateliers (owned exclusivity); commercially unproven</a:t>
+              <a:t>Guidance is back-half loaded</a:t>
             </a:r>
           </a:p>
         </p:txBody>
       </p:sp>
       <p:sp>
         <p:nvSpPr>
-          <p:cNvPr id="11" name="TextBox 10"/>
+          <p:cNvPr id="13" name="TextBox 12"/>
           <p:cNvSpPr txBox="1"/>
           <p:nvPr/>
         </p:nvSpPr>
         <p:spPr>
           <a:xfrm>
-            <a:off x="4709160" y="2395728"/>
-            <a:ext cx="3977639" cy="822960"/>
+            <a:off x="457200" y="4663440"/>
+            <a:ext cx="8229600" cy="365760"/>
           </a:xfrm>
           <a:prstGeom prst="rect">
             <a:avLst/>
@@ -16197,105 +16309,13 @@
           <a:lstStyle/>
           <a:p>
             <a:r>
-              <a:rPr sz="1100" b="1" i="0">
+              <a:rPr sz="1150" b="1" i="0">
                 <a:solidFill>
                   <a:srgbClr val="000000"/>
                 </a:solidFill>
-                <a:latin typeface="Avenir Next LT Pro"/>
-              </a:rPr>
-              <a:t>•  </a:t>
-            </a:r>
-            <a:r>
-              <a:rPr sz="1100" b="0" i="0">
-                <a:solidFill>
-                  <a:srgbClr val="000000"/>
-                </a:solidFill>
-                <a:latin typeface="Avenir Next LT Pro"/>
-              </a:rPr>
-              <a:t>Mercedes-AMG F1 hospitality partnership — brand halo</a:t>
-            </a:r>
-          </a:p>
-        </p:txBody>
-      </p:sp>
-      <p:sp>
-        <p:nvSpPr>
-          <p:cNvPr id="12" name="TextBox 11"/>
-          <p:cNvSpPr txBox="1"/>
-          <p:nvPr/>
-        </p:nvSpPr>
-        <p:spPr>
-          <a:xfrm>
-            <a:off x="4709160" y="3236976"/>
-            <a:ext cx="3977639" cy="822960"/>
-          </a:xfrm>
-          <a:prstGeom prst="rect">
-            <a:avLst/>
-          </a:prstGeom>
-          <a:noFill/>
-          <a:ln>
-            <a:noFill/>
-          </a:ln>
-        </p:spPr>
-        <p:txBody>
-          <a:bodyPr wrap="square">
-            <a:spAutoFit/>
-          </a:bodyPr>
-          <a:lstStyle/>
-          <a:p>
-            <a:r>
-              <a:rPr sz="1100" b="1" i="0">
-                <a:solidFill>
-                  <a:srgbClr val="000000"/>
-                </a:solidFill>
-                <a:latin typeface="Avenir Next LT Pro"/>
-              </a:rPr>
-              <a:t>•  </a:t>
-            </a:r>
-            <a:r>
-              <a:rPr sz="1100" b="0" i="0">
-                <a:solidFill>
-                  <a:srgbClr val="000000"/>
-                </a:solidFill>
-                <a:latin typeface="Avenir Next LT Pro"/>
-              </a:rPr>
-              <a:t>RH London Mayfair flagship — Europe doubling-down</a:t>
-            </a:r>
-          </a:p>
-        </p:txBody>
-      </p:sp>
-      <p:sp>
-        <p:nvSpPr>
-          <p:cNvPr id="13" name="TextBox 12"/>
-          <p:cNvSpPr txBox="1"/>
-          <p:nvPr/>
-        </p:nvSpPr>
-        <p:spPr>
-          <a:xfrm>
-            <a:off x="457200" y="4663440"/>
-            <a:ext cx="8229600" cy="457200"/>
-          </a:xfrm>
-          <a:prstGeom prst="rect">
-            <a:avLst/>
-          </a:prstGeom>
-          <a:noFill/>
-          <a:ln>
-            <a:noFill/>
-          </a:ln>
-        </p:spPr>
-        <p:txBody>
-          <a:bodyPr wrap="square">
-            <a:spAutoFit/>
-          </a:bodyPr>
-          <a:lstStyle/>
-          <a:p>
-            <a:r>
-              <a:rPr sz="1150" b="1" i="0">
-                <a:solidFill>
-                  <a:srgbClr val="000000"/>
-                </a:solidFill>
                 <a:latin typeface="Avenir Next LT Pro Demi"/>
               </a:rPr>
-              <a:t>Differentiated and expanding — but unproven and capital-intensive during a levered stretch.</a:t>
+              <a:t>Recovery is real but early — the next two quarters are the tell.</a:t>
             </a:r>
           </a:p>
         </p:txBody>
@@ -16332,7 +16352,7 @@
                 </a:solidFill>
                 <a:latin typeface="Avenir Next LT Pro"/>
               </a:rPr>
-              <a:t>Sources: RH FY2025 10-K; company announcements (2026).</a:t>
+              <a:t>Sources: RH FY2025 10-K; Q1 FY2026 10-Q.</a:t>
             </a:r>
           </a:p>
         </p:txBody>

--- a/RH_Stock_Pitch_updated.pptx
+++ b/RH_Stock_Pitch_updated.pptx
@@ -5809,13 +5809,13 @@
           <a:lstStyle/>
           <a:p>
             <a:r>
-              <a:rPr sz="2100" b="0" i="0">
+              <a:rPr sz="2000" b="0" i="0">
                 <a:solidFill>
                   <a:srgbClr val="000000"/>
                 </a:solidFill>
                 <a:latin typeface="Avenir Next LT Pro Demi"/>
               </a:rPr>
-              <a:t>The Operator Bet — Gary Friedman</a:t>
+              <a:t>Management: A Credible Operator — But Proof Comes First</a:t>
             </a:r>
           </a:p>
         </p:txBody>
@@ -5895,7 +5895,7 @@
                 </a:solidFill>
                 <a:latin typeface="Avenir Next LT Pro"/>
               </a:rPr>
-              <a:t>The thesis is fundamentally a bet on the operator — here's the case for and against relying on him.</a:t>
+              <a:t>Friedman makes the recovery plausible — but the decision hinges on evidence, not on his reputation.</a:t>
             </a:r>
           </a:p>
         </p:txBody>
@@ -5909,7 +5909,7 @@
         <p:spPr>
           <a:xfrm>
             <a:off x="457200" y="1600200"/>
-            <a:ext cx="3977639" cy="365760"/>
+            <a:ext cx="3977639" cy="457200"/>
           </a:xfrm>
           <a:prstGeom prst="rect">
             <a:avLst/>
@@ -5926,13 +5926,13 @@
           <a:lstStyle/>
           <a:p>
             <a:r>
-              <a:rPr sz="1250" b="1" i="0">
+              <a:rPr sz="1200" b="1" i="0">
                 <a:solidFill>
                   <a:srgbClr val="196B24"/>
                 </a:solidFill>
                 <a:latin typeface="Avenir Next LT Pro Demi"/>
               </a:rPr>
-              <a:t>WHY BET ON HIM</a:t>
+              <a:t>THE STRENGTH — credible, aligned operator</a:t>
             </a:r>
           </a:p>
         </p:txBody>
@@ -5945,8 +5945,8 @@
         </p:nvSpPr>
         <p:spPr>
           <a:xfrm>
-            <a:off x="457200" y="2057400"/>
-            <a:ext cx="3977639" cy="777240"/>
+            <a:off x="457200" y="2148840"/>
+            <a:ext cx="3977639" cy="822960"/>
           </a:xfrm>
           <a:prstGeom prst="rect">
             <a:avLst/>
@@ -5972,13 +5972,13 @@
               <a:t>•  </a:t>
             </a:r>
             <a:r>
-              <a:rPr sz="1100" b="0" i="0">
+              <a:rPr sz="1050" b="0" i="0">
                 <a:solidFill>
                   <a:srgbClr val="000000"/>
                 </a:solidFill>
                 <a:latin typeface="Avenir Next LT Pro"/>
               </a:rPr>
-              <a:t>Grew Pottery Barn $50M → $1B+; rebuilt RH from near-bankruptcy (2001)</a:t>
+              <a:t>Proven turnaround: Pottery Barn $50M→$1B; RH rebuilt from near-bankruptcy (2001)</a:t>
             </a:r>
           </a:p>
         </p:txBody>
@@ -5991,8 +5991,8 @@
         </p:nvSpPr>
         <p:spPr>
           <a:xfrm>
-            <a:off x="457200" y="2880360"/>
-            <a:ext cx="3977639" cy="777240"/>
+            <a:off x="457200" y="2990088"/>
+            <a:ext cx="3977639" cy="822960"/>
           </a:xfrm>
           <a:prstGeom prst="rect">
             <a:avLst/>
@@ -6018,13 +6018,13 @@
               <a:t>•  </a:t>
             </a:r>
             <a:r>
-              <a:rPr sz="1100" b="0" i="0">
+              <a:rPr sz="1050" b="0" i="0">
                 <a:solidFill>
                   <a:srgbClr val="000000"/>
                 </a:solidFill>
                 <a:latin typeface="Avenir Next LT Pro"/>
               </a:rPr>
-              <a:t>Created the Gallery / luxury-platform model rivals now copy</a:t>
+              <a:t>~25% owner — deeply aligned with shareholders</a:t>
             </a:r>
           </a:p>
         </p:txBody>
@@ -6037,8 +6037,8 @@
         </p:nvSpPr>
         <p:spPr>
           <a:xfrm>
-            <a:off x="457200" y="3703320"/>
-            <a:ext cx="3977639" cy="777240"/>
+            <a:off x="457200" y="3831336"/>
+            <a:ext cx="3977639" cy="822960"/>
           </a:xfrm>
           <a:prstGeom prst="rect">
             <a:avLst/>
@@ -6064,13 +6064,13 @@
               <a:t>•  </a:t>
             </a:r>
             <a:r>
-              <a:rPr sz="1100" b="0" i="0">
+              <a:rPr sz="1050" b="0" i="0">
                 <a:solidFill>
                   <a:srgbClr val="000000"/>
                 </a:solidFill>
                 <a:latin typeface="Avenir Next LT Pro"/>
               </a:rPr>
-              <a:t>~25% owner — his interests are shareholders' interests</a:t>
+              <a:t>Built the luxury-platform model rivals now copy</a:t>
             </a:r>
           </a:p>
         </p:txBody>
@@ -6084,7 +6084,7 @@
         <p:spPr>
           <a:xfrm>
             <a:off x="4709160" y="1600200"/>
-            <a:ext cx="3977639" cy="365760"/>
+            <a:ext cx="3977639" cy="457200"/>
           </a:xfrm>
           <a:prstGeom prst="rect">
             <a:avLst/>
@@ -6101,13 +6101,13 @@
           <a:lstStyle/>
           <a:p>
             <a:r>
-              <a:rPr sz="1250" b="1" i="0">
+              <a:rPr sz="1200" b="1" i="0">
                 <a:solidFill>
                   <a:srgbClr val="B03030"/>
                 </a:solidFill>
                 <a:latin typeface="Avenir Next LT Pro Demi"/>
               </a:rPr>
-              <a:t>WHY IT'S A RISK</a:t>
+              <a:t>BUT THE CALL HINGES ON PROOF — not reputation</a:t>
             </a:r>
           </a:p>
         </p:txBody>
@@ -6120,8 +6120,8 @@
         </p:nvSpPr>
         <p:spPr>
           <a:xfrm>
-            <a:off x="4709160" y="2057400"/>
-            <a:ext cx="3977639" cy="777240"/>
+            <a:off x="4709160" y="2148840"/>
+            <a:ext cx="3977639" cy="822960"/>
           </a:xfrm>
           <a:prstGeom prst="rect">
             <a:avLst/>
@@ -6147,13 +6147,13 @@
               <a:t>•  </a:t>
             </a:r>
             <a:r>
-              <a:rPr sz="1100" b="0" i="0">
+              <a:rPr sz="1050" b="0" i="0">
                 <a:solidFill>
                   <a:srgbClr val="000000"/>
                 </a:solidFill>
                 <a:latin typeface="Avenir Next LT Pro"/>
               </a:rPr>
-              <a:t>Key-man: no obvious successor — a departure = instant de-rating</a:t>
+              <a:t>Balance-sheet recovery — net debt falling on real FCF, toward debt-free by 2029</a:t>
             </a:r>
           </a:p>
         </p:txBody>
@@ -6166,8 +6166,8 @@
         </p:nvSpPr>
         <p:spPr>
           <a:xfrm>
-            <a:off x="4709160" y="2880360"/>
-            <a:ext cx="3977639" cy="777240"/>
+            <a:off x="4709160" y="2990088"/>
+            <a:ext cx="3977639" cy="822960"/>
           </a:xfrm>
           <a:prstGeom prst="rect">
             <a:avLst/>
@@ -6193,13 +6193,13 @@
               <a:t>•  </a:t>
             </a:r>
             <a:r>
-              <a:rPr sz="1100" b="0" i="0">
+              <a:rPr sz="1050" b="0" i="0">
                 <a:solidFill>
                   <a:srgbClr val="000000"/>
                 </a:solidFill>
                 <a:latin typeface="Avenir Next LT Pro"/>
               </a:rPr>
-              <a:t>Expansive vision (Estates, F1, global) while ~4× levered — focus / capital-allocation question</a:t>
+              <a:t>Estates — real revenue traction, not just a launch</a:t>
             </a:r>
           </a:p>
         </p:txBody>
@@ -6212,8 +6212,8 @@
         </p:nvSpPr>
         <p:spPr>
           <a:xfrm>
-            <a:off x="4709160" y="3703320"/>
-            <a:ext cx="3977639" cy="777240"/>
+            <a:off x="4709160" y="3831336"/>
+            <a:ext cx="3977639" cy="822960"/>
           </a:xfrm>
           <a:prstGeom prst="rect">
             <a:avLst/>
@@ -6239,13 +6239,13 @@
               <a:t>•  </a:t>
             </a:r>
             <a:r>
-              <a:rPr sz="1100" b="0" i="0">
+              <a:rPr sz="1050" b="0" i="0">
                 <a:solidFill>
                   <a:srgbClr val="000000"/>
                 </a:solidFill>
                 <a:latin typeface="Avenir Next LT Pro"/>
               </a:rPr>
-              <a:t>Recent insider activity net selling; no activist to force discipline</a:t>
+              <a:t>Watch-outs: key-man risk; expansive vision while ~4× levered; net insider selling</a:t>
             </a:r>
           </a:p>
         </p:txBody>
@@ -6258,7 +6258,7 @@
         </p:nvSpPr>
         <p:spPr>
           <a:xfrm>
-            <a:off x="457200" y="4892040"/>
+            <a:off x="457200" y="4983480"/>
             <a:ext cx="8229600" cy="640080"/>
           </a:xfrm>
           <a:prstGeom prst="rect">
@@ -6282,7 +6282,7 @@
                 </a:solidFill>
                 <a:latin typeface="Avenir Next LT Pro Demi"/>
               </a:rPr>
-              <a:t>The thesis is Friedman: his track record makes the recovery credible — his leverage-era ambition is the risk. That duality is why I hold rather than commit.</a:t>
+              <a:t>A credible, aligned operator lowers execution risk — but on a ~4× levered balance sheet with an unproven Estates bet, we underwrite the evidence, not the man. Proof comes first.</a:t>
             </a:r>
           </a:p>
         </p:txBody>
@@ -6319,7 +6319,7 @@
                 </a:solidFill>
                 <a:latin typeface="Avenir Next LT Pro"/>
               </a:rPr>
-              <a:t>Sources: RH FY2025 10-K &amp; DEF 14A proxy; SEC Form 4; company bios.</a:t>
+              <a:t>Sources: RH FY2025 10-K &amp; DEF 14A proxy; SEC Form 4.</a:t>
             </a:r>
           </a:p>
         </p:txBody>

--- a/RH_Stock_Pitch_updated.pptx
+++ b/RH_Stock_Pitch_updated.pptx
@@ -10128,8 +10128,8 @@
         </p:nvSpPr>
         <p:spPr>
           <a:xfrm>
-            <a:off x="457198" y="274320"/>
-            <a:ext cx="8229600" cy="446276"/>
+            <a:off x="457200" y="365760"/>
+            <a:ext cx="8229600" cy="548640"/>
           </a:xfrm>
           <a:prstGeom prst="rect">
             <a:avLst/>
@@ -10146,136 +10146,36 @@
           <a:lstStyle/>
           <a:p>
             <a:r>
-              <a:rPr sz="2300" b="0" i="0" dirty="0">
-                <a:solidFill/>
+              <a:rPr sz="2100" b="0" i="0">
+                <a:solidFill>
+                  <a:srgbClr val="000000"/>
+                </a:solidFill>
                 <a:latin typeface="Avenir Next LT Pro Demi"/>
               </a:rPr>
-              <a:t>Key Risks — What Has to Go Wrong</a:t>
+              <a:t>Key Risks — and How They're Managed</a:t>
             </a:r>
           </a:p>
         </p:txBody>
       </p:sp>
       <p:sp>
         <p:nvSpPr>
-          <p:cNvPr id="5" name="TextBox 4"/>
-          <p:cNvSpPr txBox="1"/>
-          <p:nvPr/>
-        </p:nvSpPr>
-        <p:spPr>
-          <a:xfrm>
-            <a:off x="457200" y="1051560"/>
-            <a:ext cx="8229600" cy="274320"/>
-          </a:xfrm>
-          <a:prstGeom prst="rect">
-            <a:avLst/>
-          </a:prstGeom>
-          <a:noFill/>
-          <a:ln>
-            <a:noFill/>
-          </a:ln>
-        </p:spPr>
-        <p:txBody>
-          <a:bodyPr wrap="none">
-            <a:spAutoFit/>
-          </a:bodyPr>
-          <a:lstStyle/>
-          <a:p>
-            <a:r>
-              <a:rPr sz="900" b="0" i="1">
-                <a:solidFill>
-                  <a:srgbClr val="B0B0B0"/>
-                </a:solidFill>
-                <a:latin typeface="Avenir Next LT Pro"/>
-              </a:rPr>
-              <a:t>[ narrative / commentary to be written ]</a:t>
-            </a:r>
-          </a:p>
-        </p:txBody>
-      </p:sp>
-      <p:sp>
-        <p:nvSpPr>
-          <p:cNvPr id="6" name="Rectangle 5"/>
+          <p:cNvPr id="3" name="Rectangle 2"/>
           <p:cNvSpPr/>
           <p:nvPr/>
         </p:nvSpPr>
         <p:spPr>
           <a:xfrm>
-            <a:off x="457200" y="1554480"/>
-            <a:ext cx="3977639" cy="960120"/>
+            <a:off x="457200" y="960120"/>
+            <a:ext cx="8229600" cy="25603"/>
           </a:xfrm>
           <a:prstGeom prst="rect">
             <a:avLst/>
           </a:prstGeom>
           <a:solidFill>
-            <a:srgbClr val="FFFFFF"/>
-          </a:solidFill>
-          <a:ln w="12700">
-            <a:solidFill>
-              <a:srgbClr val="E8E8E8"/>
-            </a:solidFill>
-          </a:ln>
-        </p:spPr>
-        <p:style>
-          <a:lnRef idx="1">
-            <a:schemeClr val="accent1"/>
-          </a:lnRef>
-          <a:fillRef idx="3">
-            <a:schemeClr val="accent1"/>
-          </a:fillRef>
-          <a:effectRef idx="2">
-            <a:schemeClr val="accent1"/>
-          </a:effectRef>
-          <a:fontRef idx="minor">
-            <a:schemeClr val="lt1"/>
-          </a:fontRef>
-        </p:style>
-        <p:txBody>
-          <a:bodyPr wrap="square" lIns="182880" rtlCol="0" anchor="ctr"/>
-          <a:lstStyle/>
-          <a:p>
-            <a:pPr algn="ctr"/>
-            <a:r>
-              <a:rPr sz="1200" b="1" i="0" dirty="0">
-                <a:solidFill>
-                  <a:srgbClr val="0E2841"/>
-                </a:solidFill>
-                <a:latin typeface="Avenir Next LT Pro Demi"/>
-              </a:rPr>
-              <a:t>Housing stays depressed through 2027</a:t>
-            </a:r>
-          </a:p>
-          <a:p>
-            <a:r>
-              <a:rPr sz="950" b="1" i="0" dirty="0">
-                <a:solidFill>
-                  <a:srgbClr val="B03030"/>
-                </a:solidFill>
-                <a:latin typeface="Avenir Next LT Pro"/>
-              </a:rPr>
-              <a:t>Severity: HIGH   ·   Probability:</a:t>
-            </a:r>
-          </a:p>
-        </p:txBody>
-      </p:sp>
-      <p:sp>
-        <p:nvSpPr>
-          <p:cNvPr id="7" name="Rectangle 6"/>
-          <p:cNvSpPr/>
-          <p:nvPr/>
-        </p:nvSpPr>
-        <p:spPr>
-          <a:xfrm>
-            <a:off x="457200" y="1554480"/>
-            <a:ext cx="73152" cy="960120"/>
-          </a:xfrm>
-          <a:prstGeom prst="rect">
-            <a:avLst/>
-          </a:prstGeom>
-          <a:solidFill>
-            <a:srgbClr val="B03030"/>
+            <a:srgbClr val="000000"/>
           </a:solidFill>
           <a:ln>
-            <a:solidFill/>
+            <a:noFill/>
           </a:ln>
         </p:spPr>
         <p:style>
@@ -10297,85 +10197,19 @@
           <a:lstStyle/>
           <a:p>
             <a:pPr algn="ctr"/>
-            <a:endParaRPr/>
           </a:p>
         </p:txBody>
       </p:sp>
       <p:sp>
         <p:nvSpPr>
-          <p:cNvPr id="8" name="Rectangle 7"/>
+          <p:cNvPr id="4" name="Rectangle 3"/>
           <p:cNvSpPr/>
           <p:nvPr/>
         </p:nvSpPr>
         <p:spPr>
           <a:xfrm>
-            <a:off x="4709159" y="1554480"/>
-            <a:ext cx="3977639" cy="960120"/>
-          </a:xfrm>
-          <a:prstGeom prst="rect">
-            <a:avLst/>
-          </a:prstGeom>
-          <a:solidFill>
-            <a:srgbClr val="FFFFFF"/>
-          </a:solidFill>
-          <a:ln w="12700">
-            <a:solidFill>
-              <a:srgbClr val="E8E8E8"/>
-            </a:solidFill>
-          </a:ln>
-        </p:spPr>
-        <p:style>
-          <a:lnRef idx="1">
-            <a:schemeClr val="accent1"/>
-          </a:lnRef>
-          <a:fillRef idx="3">
-            <a:schemeClr val="accent1"/>
-          </a:fillRef>
-          <a:effectRef idx="2">
-            <a:schemeClr val="accent1"/>
-          </a:effectRef>
-          <a:fontRef idx="minor">
-            <a:schemeClr val="lt1"/>
-          </a:fontRef>
-        </p:style>
-        <p:txBody>
-          <a:bodyPr wrap="square" lIns="182880" rtlCol="0" anchor="ctr"/>
-          <a:lstStyle/>
-          <a:p>
-            <a:pPr algn="ctr"/>
-            <a:r>
-              <a:rPr sz="1200" b="1" i="0" dirty="0">
-                <a:solidFill>
-                  <a:srgbClr val="0E2841"/>
-                </a:solidFill>
-                <a:latin typeface="Avenir Next LT Pro Demi"/>
-              </a:rPr>
-              <a:t>Balance-sheet stress — ~4.0× levered, ~$225M/yr interest</a:t>
-            </a:r>
-          </a:p>
-          <a:p>
-            <a:r>
-              <a:rPr sz="950" b="1" i="0" dirty="0">
-                <a:solidFill>
-                  <a:srgbClr val="B03030"/>
-                </a:solidFill>
-                <a:latin typeface="Avenir Next LT Pro"/>
-              </a:rPr>
-              <a:t>Severity: HIGH   ·   Probability:</a:t>
-            </a:r>
-          </a:p>
-        </p:txBody>
-      </p:sp>
-      <p:sp>
-        <p:nvSpPr>
-          <p:cNvPr id="9" name="Rectangle 8"/>
-          <p:cNvSpPr/>
-          <p:nvPr/>
-        </p:nvSpPr>
-        <p:spPr>
-          <a:xfrm>
-            <a:off x="4709159" y="1554480"/>
-            <a:ext cx="73152" cy="960120"/>
+            <a:off x="457200" y="1234440"/>
+            <a:ext cx="82296" cy="1024128"/>
           </a:xfrm>
           <a:prstGeom prst="rect">
             <a:avLst/>
@@ -10384,7 +10218,7 @@
             <a:srgbClr val="B03030"/>
           </a:solidFill>
           <a:ln>
-            <a:solidFill/>
+            <a:noFill/>
           </a:ln>
         </p:spPr>
         <p:style>
@@ -10406,94 +10240,105 @@
           <a:lstStyle/>
           <a:p>
             <a:pPr algn="ctr"/>
-            <a:endParaRPr/>
           </a:p>
         </p:txBody>
       </p:sp>
       <p:sp>
         <p:nvSpPr>
-          <p:cNvPr id="10" name="Rectangle 9"/>
+          <p:cNvPr id="5" name="TextBox 4"/>
+          <p:cNvSpPr txBox="1"/>
+          <p:nvPr/>
+        </p:nvSpPr>
+        <p:spPr>
+          <a:xfrm>
+            <a:off x="658368" y="1234440"/>
+            <a:ext cx="8028431" cy="1024128"/>
+          </a:xfrm>
+          <a:prstGeom prst="rect">
+            <a:avLst/>
+          </a:prstGeom>
+          <a:noFill/>
+          <a:ln>
+            <a:noFill/>
+          </a:ln>
+        </p:spPr>
+        <p:txBody>
+          <a:bodyPr wrap="square">
+            <a:spAutoFit/>
+          </a:bodyPr>
+          <a:lstStyle/>
+          <a:p>
+            <a:r>
+              <a:rPr sz="1250" b="1" i="0">
+                <a:solidFill>
+                  <a:srgbClr val="000000"/>
+                </a:solidFill>
+                <a:latin typeface="Avenir Next LT Pro Demi"/>
+              </a:rPr>
+              <a:t>Balance-sheet leverage  </a:t>
+            </a:r>
+            <a:r>
+              <a:rPr sz="1100" b="1" i="0">
+                <a:solidFill>
+                  <a:srgbClr val="B03030"/>
+                </a:solidFill>
+                <a:latin typeface="Avenir Next LT Pro Demi"/>
+              </a:rPr>
+              <a:t>(HIGH)</a:t>
+            </a:r>
+          </a:p>
+          <a:p>
+            <a:r>
+              <a:rPr sz="1050" b="0" i="0">
+                <a:solidFill>
+                  <a:srgbClr val="000000"/>
+                </a:solidFill>
+                <a:latin typeface="Avenir Next LT Pro"/>
+              </a:rPr>
+              <a:t>~4× levered, ~$225M/yr interest; Q1 FY26 already a net loss.</a:t>
+            </a:r>
+          </a:p>
+          <a:p>
+            <a:r>
+              <a:rPr sz="1050" b="1" i="0">
+                <a:solidFill>
+                  <a:srgbClr val="B03030"/>
+                </a:solidFill>
+                <a:latin typeface="Avenir Next LT Pro"/>
+              </a:rPr>
+              <a:t>Mitigant: </a:t>
+            </a:r>
+            <a:r>
+              <a:rPr sz="1050" b="0" i="0">
+                <a:solidFill>
+                  <a:srgbClr val="000000"/>
+                </a:solidFill>
+                <a:latin typeface="Avenir Next LT Pro"/>
+              </a:rPr>
+              <a:t>Term loan not due until Oct 2028 (~2-yr runway); ~$443M liquidity; debt-free-by-2029 plan.</a:t>
+            </a:r>
+          </a:p>
+        </p:txBody>
+      </p:sp>
+      <p:sp>
+        <p:nvSpPr>
+          <p:cNvPr id="6" name="Rectangle 5"/>
           <p:cNvSpPr/>
           <p:nvPr/>
         </p:nvSpPr>
         <p:spPr>
           <a:xfrm>
-            <a:off x="457200" y="2679191"/>
-            <a:ext cx="3977639" cy="960120"/>
+            <a:off x="457200" y="2350008"/>
+            <a:ext cx="82296" cy="1024128"/>
           </a:xfrm>
           <a:prstGeom prst="rect">
             <a:avLst/>
           </a:prstGeom>
           <a:solidFill>
-            <a:srgbClr val="FFFFFF"/>
-          </a:solidFill>
-          <a:ln w="12700">
-            <a:solidFill>
-              <a:srgbClr val="E8E8E8"/>
-            </a:solidFill>
-          </a:ln>
-        </p:spPr>
-        <p:style>
-          <a:lnRef idx="1">
-            <a:schemeClr val="accent1"/>
-          </a:lnRef>
-          <a:fillRef idx="3">
-            <a:schemeClr val="accent1"/>
-          </a:fillRef>
-          <a:effectRef idx="2">
-            <a:schemeClr val="accent1"/>
-          </a:effectRef>
-          <a:fontRef idx="minor">
-            <a:schemeClr val="lt1"/>
-          </a:fontRef>
-        </p:style>
-        <p:txBody>
-          <a:bodyPr wrap="square" lIns="182880" rtlCol="0" anchor="ctr"/>
-          <a:lstStyle/>
-          <a:p>
-            <a:pPr algn="ctr"/>
-            <a:r>
-              <a:rPr sz="1200" b="1" i="0" dirty="0">
-                <a:solidFill>
-                  <a:srgbClr val="0E2841"/>
-                </a:solidFill>
-                <a:latin typeface="Avenir Next LT Pro Demi"/>
-              </a:rPr>
-              <a:t>International execution failure</a:t>
-            </a:r>
-          </a:p>
-          <a:p>
-            <a:r>
-              <a:rPr sz="950" b="1" i="0" dirty="0">
-                <a:solidFill>
-                  <a:srgbClr val="C88A12"/>
-                </a:solidFill>
-                <a:latin typeface="Avenir Next LT Pro"/>
-              </a:rPr>
-              <a:t>Severity: MED   ·   Probability:</a:t>
-            </a:r>
-          </a:p>
-        </p:txBody>
-      </p:sp>
-      <p:sp>
-        <p:nvSpPr>
-          <p:cNvPr id="11" name="Rectangle 10"/>
-          <p:cNvSpPr/>
-          <p:nvPr/>
-        </p:nvSpPr>
-        <p:spPr>
-          <a:xfrm>
-            <a:off x="457200" y="2679191"/>
-            <a:ext cx="73152" cy="960120"/>
-          </a:xfrm>
-          <a:prstGeom prst="rect">
-            <a:avLst/>
-          </a:prstGeom>
-          <a:solidFill>
-            <a:srgbClr val="C88A12"/>
+            <a:srgbClr val="B03030"/>
           </a:solidFill>
           <a:ln>
-            <a:solidFill/>
+            <a:noFill/>
           </a:ln>
         </p:spPr>
         <p:style>
@@ -10515,94 +10360,105 @@
           <a:lstStyle/>
           <a:p>
             <a:pPr algn="ctr"/>
-            <a:endParaRPr/>
           </a:p>
         </p:txBody>
       </p:sp>
       <p:sp>
         <p:nvSpPr>
-          <p:cNvPr id="12" name="Rectangle 11"/>
+          <p:cNvPr id="7" name="TextBox 6"/>
+          <p:cNvSpPr txBox="1"/>
+          <p:nvPr/>
+        </p:nvSpPr>
+        <p:spPr>
+          <a:xfrm>
+            <a:off x="658368" y="2350008"/>
+            <a:ext cx="8028431" cy="1024128"/>
+          </a:xfrm>
+          <a:prstGeom prst="rect">
+            <a:avLst/>
+          </a:prstGeom>
+          <a:noFill/>
+          <a:ln>
+            <a:noFill/>
+          </a:ln>
+        </p:spPr>
+        <p:txBody>
+          <a:bodyPr wrap="square">
+            <a:spAutoFit/>
+          </a:bodyPr>
+          <a:lstStyle/>
+          <a:p>
+            <a:r>
+              <a:rPr sz="1250" b="1" i="0">
+                <a:solidFill>
+                  <a:srgbClr val="000000"/>
+                </a:solidFill>
+                <a:latin typeface="Avenir Next LT Pro Demi"/>
+              </a:rPr>
+              <a:t>Recovery stalls  </a:t>
+            </a:r>
+            <a:r>
+              <a:rPr sz="1100" b="1" i="0">
+                <a:solidFill>
+                  <a:srgbClr val="B03030"/>
+                </a:solidFill>
+                <a:latin typeface="Avenir Next LT Pro Demi"/>
+              </a:rPr>
+              <a:t>(HIGH)</a:t>
+            </a:r>
+          </a:p>
+          <a:p>
+            <a:r>
+              <a:rPr sz="1050" b="0" i="0">
+                <a:solidFill>
+                  <a:srgbClr val="000000"/>
+                </a:solidFill>
+                <a:latin typeface="Avenir Next LT Pro"/>
+              </a:rPr>
+              <a:t>Core stays soft and Estates fails to scale — the leverage bites.</a:t>
+            </a:r>
+          </a:p>
+          <a:p>
+            <a:r>
+              <a:rPr sz="1050" b="1" i="0">
+                <a:solidFill>
+                  <a:srgbClr val="B03030"/>
+                </a:solidFill>
+                <a:latin typeface="Avenir Next LT Pro"/>
+              </a:rPr>
+              <a:t>Mitigant: </a:t>
+            </a:r>
+            <a:r>
+              <a:rPr sz="1050" b="0" i="0">
+                <a:solidFill>
+                  <a:srgbClr val="000000"/>
+                </a:solidFill>
+                <a:latin typeface="Avenir Next LT Pro"/>
+              </a:rPr>
+              <a:t>Base case doesn't require a housing recovery; Estates targets rate-immune buyers; first read Q2 FY2026.</a:t>
+            </a:r>
+          </a:p>
+        </p:txBody>
+      </p:sp>
+      <p:sp>
+        <p:nvSpPr>
+          <p:cNvPr id="8" name="Rectangle 7"/>
           <p:cNvSpPr/>
           <p:nvPr/>
         </p:nvSpPr>
         <p:spPr>
           <a:xfrm>
-            <a:off x="4709159" y="2679191"/>
-            <a:ext cx="3977639" cy="960120"/>
+            <a:off x="457200" y="3465576"/>
+            <a:ext cx="82296" cy="1024128"/>
           </a:xfrm>
           <a:prstGeom prst="rect">
             <a:avLst/>
           </a:prstGeom>
           <a:solidFill>
-            <a:srgbClr val="FFFFFF"/>
-          </a:solidFill>
-          <a:ln w="12700">
-            <a:solidFill>
-              <a:srgbClr val="E8E8E8"/>
-            </a:solidFill>
-          </a:ln>
-        </p:spPr>
-        <p:style>
-          <a:lnRef idx="1">
-            <a:schemeClr val="accent1"/>
-          </a:lnRef>
-          <a:fillRef idx="3">
-            <a:schemeClr val="accent1"/>
-          </a:fillRef>
-          <a:effectRef idx="2">
-            <a:schemeClr val="accent1"/>
-          </a:effectRef>
-          <a:fontRef idx="minor">
-            <a:schemeClr val="lt1"/>
-          </a:fontRef>
-        </p:style>
-        <p:txBody>
-          <a:bodyPr wrap="square" lIns="182880" rtlCol="0" anchor="ctr"/>
-          <a:lstStyle/>
-          <a:p>
-            <a:pPr algn="ctr"/>
-            <a:r>
-              <a:rPr sz="1200" b="1" i="0" dirty="0">
-                <a:solidFill>
-                  <a:srgbClr val="0E2841"/>
-                </a:solidFill>
-                <a:latin typeface="Avenir Next LT Pro Demi"/>
-              </a:rPr>
-              <a:t>Tariff / supply-chain disruption</a:t>
-            </a:r>
-          </a:p>
-          <a:p>
-            <a:r>
-              <a:rPr sz="950" b="1" i="0" dirty="0">
-                <a:solidFill>
-                  <a:srgbClr val="C88A12"/>
-                </a:solidFill>
-                <a:latin typeface="Avenir Next LT Pro"/>
-              </a:rPr>
-              <a:t>Severity: MED   ·   Probability:</a:t>
-            </a:r>
-          </a:p>
-        </p:txBody>
-      </p:sp>
-      <p:sp>
-        <p:nvSpPr>
-          <p:cNvPr id="13" name="Rectangle 12"/>
-          <p:cNvSpPr/>
-          <p:nvPr/>
-        </p:nvSpPr>
-        <p:spPr>
-          <a:xfrm>
-            <a:off x="4709159" y="2679191"/>
-            <a:ext cx="73152" cy="960120"/>
-          </a:xfrm>
-          <a:prstGeom prst="rect">
-            <a:avLst/>
-          </a:prstGeom>
-          <a:solidFill>
-            <a:srgbClr val="C88A12"/>
+            <a:srgbClr val="B03030"/>
           </a:solidFill>
           <a:ln>
-            <a:solidFill/>
+            <a:noFill/>
           </a:ln>
         </p:spPr>
         <p:style>
@@ -10624,94 +10480,105 @@
           <a:lstStyle/>
           <a:p>
             <a:pPr algn="ctr"/>
-            <a:endParaRPr/>
           </a:p>
         </p:txBody>
       </p:sp>
       <p:sp>
         <p:nvSpPr>
-          <p:cNvPr id="14" name="Rectangle 13"/>
+          <p:cNvPr id="9" name="TextBox 8"/>
+          <p:cNvSpPr txBox="1"/>
+          <p:nvPr/>
+        </p:nvSpPr>
+        <p:spPr>
+          <a:xfrm>
+            <a:off x="658368" y="3465576"/>
+            <a:ext cx="8028431" cy="1024128"/>
+          </a:xfrm>
+          <a:prstGeom prst="rect">
+            <a:avLst/>
+          </a:prstGeom>
+          <a:noFill/>
+          <a:ln>
+            <a:noFill/>
+          </a:ln>
+        </p:spPr>
+        <p:txBody>
+          <a:bodyPr wrap="square">
+            <a:spAutoFit/>
+          </a:bodyPr>
+          <a:lstStyle/>
+          <a:p>
+            <a:r>
+              <a:rPr sz="1250" b="1" i="0">
+                <a:solidFill>
+                  <a:srgbClr val="000000"/>
+                </a:solidFill>
+                <a:latin typeface="Avenir Next LT Pro Demi"/>
+              </a:rPr>
+              <a:t>Key-man / Friedman  </a:t>
+            </a:r>
+            <a:r>
+              <a:rPr sz="1100" b="1" i="0">
+                <a:solidFill>
+                  <a:srgbClr val="B03030"/>
+                </a:solidFill>
+                <a:latin typeface="Avenir Next LT Pro Demi"/>
+              </a:rPr>
+              <a:t>(HIGH)</a:t>
+            </a:r>
+          </a:p>
+          <a:p>
+            <a:r>
+              <a:rPr sz="1050" b="0" i="0">
+                <a:solidFill>
+                  <a:srgbClr val="000000"/>
+                </a:solidFill>
+                <a:latin typeface="Avenir Next LT Pro"/>
+              </a:rPr>
+              <a:t>No obvious successor; an unexpected departure = instant de-rating.</a:t>
+            </a:r>
+          </a:p>
+          <a:p>
+            <a:r>
+              <a:rPr sz="1050" b="1" i="0">
+                <a:solidFill>
+                  <a:srgbClr val="B03030"/>
+                </a:solidFill>
+                <a:latin typeface="Avenir Next LT Pro"/>
+              </a:rPr>
+              <a:t>Mitigant: </a:t>
+            </a:r>
+            <a:r>
+              <a:rPr sz="1050" b="0" i="0">
+                <a:solidFill>
+                  <a:srgbClr val="000000"/>
+                </a:solidFill>
+                <a:latin typeface="Avenir Next LT Pro"/>
+              </a:rPr>
+              <a:t>~25% owner, deeply aligned; no departure signals.</a:t>
+            </a:r>
+          </a:p>
+        </p:txBody>
+      </p:sp>
+      <p:sp>
+        <p:nvSpPr>
+          <p:cNvPr id="10" name="Rectangle 9"/>
           <p:cNvSpPr/>
           <p:nvPr/>
         </p:nvSpPr>
         <p:spPr>
           <a:xfrm>
-            <a:off x="457200" y="3803904"/>
-            <a:ext cx="3977639" cy="960120"/>
+            <a:off x="457200" y="4581144"/>
+            <a:ext cx="82296" cy="1024128"/>
           </a:xfrm>
           <a:prstGeom prst="rect">
             <a:avLst/>
           </a:prstGeom>
           <a:solidFill>
-            <a:srgbClr val="FFFFFF"/>
-          </a:solidFill>
-          <a:ln w="12700">
-            <a:solidFill>
-              <a:srgbClr val="E8E8E8"/>
-            </a:solidFill>
-          </a:ln>
-        </p:spPr>
-        <p:style>
-          <a:lnRef idx="1">
-            <a:schemeClr val="accent1"/>
-          </a:lnRef>
-          <a:fillRef idx="3">
-            <a:schemeClr val="accent1"/>
-          </a:fillRef>
-          <a:effectRef idx="2">
-            <a:schemeClr val="accent1"/>
-          </a:effectRef>
-          <a:fontRef idx="minor">
-            <a:schemeClr val="lt1"/>
-          </a:fontRef>
-        </p:style>
-        <p:txBody>
-          <a:bodyPr wrap="square" lIns="182880" rtlCol="0" anchor="ctr"/>
-          <a:lstStyle/>
-          <a:p>
-            <a:pPr algn="ctr"/>
-            <a:r>
-              <a:rPr sz="1200" b="1" i="0" dirty="0">
-                <a:solidFill>
-                  <a:srgbClr val="0E2841"/>
-                </a:solidFill>
-                <a:latin typeface="Avenir Next LT Pro Demi"/>
-              </a:rPr>
-              <a:t>Friedman key-man dependency</a:t>
-            </a:r>
-          </a:p>
-          <a:p>
-            <a:r>
-              <a:rPr sz="950" b="1" i="0" dirty="0">
-                <a:solidFill>
-                  <a:srgbClr val="B03030"/>
-                </a:solidFill>
-                <a:latin typeface="Avenir Next LT Pro"/>
-              </a:rPr>
-              <a:t>Severity: HIGH   ·   Probability:</a:t>
-            </a:r>
-          </a:p>
-        </p:txBody>
-      </p:sp>
-      <p:sp>
-        <p:nvSpPr>
-          <p:cNvPr id="15" name="Rectangle 14"/>
-          <p:cNvSpPr/>
-          <p:nvPr/>
-        </p:nvSpPr>
-        <p:spPr>
-          <a:xfrm>
-            <a:off x="457200" y="3803904"/>
-            <a:ext cx="73152" cy="960120"/>
-          </a:xfrm>
-          <a:prstGeom prst="rect">
-            <a:avLst/>
-          </a:prstGeom>
-          <a:solidFill>
-            <a:srgbClr val="B03030"/>
+            <a:srgbClr val="C88A12"/>
           </a:solidFill>
           <a:ln>
-            <a:solidFill/>
+            <a:noFill/>
           </a:ln>
         </p:spPr>
         <p:style>
@@ -10733,225 +10600,157 @@
           <a:lstStyle/>
           <a:p>
             <a:pPr algn="ctr"/>
-            <a:endParaRPr/>
           </a:p>
         </p:txBody>
       </p:sp>
       <p:sp>
         <p:nvSpPr>
-          <p:cNvPr id="16" name="Rectangle 15"/>
-          <p:cNvSpPr/>
+          <p:cNvPr id="11" name="TextBox 10"/>
+          <p:cNvSpPr txBox="1"/>
           <p:nvPr/>
         </p:nvSpPr>
         <p:spPr>
           <a:xfrm>
-            <a:off x="4709159" y="3803904"/>
-            <a:ext cx="3977639" cy="960120"/>
+            <a:off x="658368" y="4581144"/>
+            <a:ext cx="8028431" cy="1024128"/>
           </a:xfrm>
           <a:prstGeom prst="rect">
             <a:avLst/>
           </a:prstGeom>
-          <a:solidFill>
-            <a:srgbClr val="FFFFFF"/>
-          </a:solidFill>
-          <a:ln w="12700">
-            <a:solidFill>
-              <a:srgbClr val="E8E8E8"/>
-            </a:solidFill>
+          <a:noFill/>
+          <a:ln>
+            <a:noFill/>
           </a:ln>
         </p:spPr>
-        <p:style>
-          <a:lnRef idx="1">
-            <a:schemeClr val="accent1"/>
-          </a:lnRef>
-          <a:fillRef idx="3">
-            <a:schemeClr val="accent1"/>
-          </a:fillRef>
-          <a:effectRef idx="2">
-            <a:schemeClr val="accent1"/>
-          </a:effectRef>
-          <a:fontRef idx="minor">
-            <a:schemeClr val="lt1"/>
-          </a:fontRef>
-        </p:style>
         <p:txBody>
-          <a:bodyPr wrap="square" lIns="182880" rtlCol="0" anchor="ctr"/>
+          <a:bodyPr wrap="square">
+            <a:spAutoFit/>
+          </a:bodyPr>
           <a:lstStyle/>
           <a:p>
-            <a:pPr algn="ctr"/>
-            <a:r>
-              <a:rPr sz="1200" b="1" i="0" dirty="0">
-                <a:solidFill>
-                  <a:srgbClr val="0E2841"/>
+            <a:r>
+              <a:rPr sz="1250" b="1" i="0">
+                <a:solidFill>
+                  <a:srgbClr val="000000"/>
                 </a:solidFill>
                 <a:latin typeface="Avenir Next LT Pro Demi"/>
               </a:rPr>
-              <a:t>Broad consumer / discretionary recession</a:t>
-            </a:r>
-          </a:p>
-          <a:p>
-            <a:r>
-              <a:rPr sz="950" b="1" i="0" dirty="0">
+              <a:t>Fulfillment at the Estates tier  </a:t>
+            </a:r>
+            <a:r>
+              <a:rPr sz="1100" b="1" i="0">
                 <a:solidFill>
                   <a:srgbClr val="C88A12"/>
                 </a:solidFill>
+                <a:latin typeface="Avenir Next LT Pro Demi"/>
+              </a:rPr>
+              <a:t>(MED)</a:t>
+            </a:r>
+          </a:p>
+          <a:p>
+            <a:r>
+              <a:rPr sz="1050" b="0" i="0">
+                <a:solidFill>
+                  <a:srgbClr val="000000"/>
+                </a:solidFill>
                 <a:latin typeface="Avenir Next LT Pro"/>
               </a:rPr>
-              <a:t>Severity: MED   ·   Probability:</a:t>
+              <a:t>Spotty delivery reputation could undercut premium pricing power.</a:t>
+            </a:r>
+          </a:p>
+          <a:p>
+            <a:r>
+              <a:rPr sz="1050" b="1" i="0">
+                <a:solidFill>
+                  <a:srgbClr val="C88A12"/>
+                </a:solidFill>
+                <a:latin typeface="Avenir Next LT Pro"/>
+              </a:rPr>
+              <a:t>Mitigant: </a:t>
+            </a:r>
+            <a:r>
+              <a:rPr sz="1050" b="0" i="0">
+                <a:solidFill>
+                  <a:srgbClr val="000000"/>
+                </a:solidFill>
+                <a:latin typeface="Avenir Next LT Pro"/>
+              </a:rPr>
+              <a:t>Owned, fully-DTC delivery network; monitor service / NPS as Estates scales.</a:t>
             </a:r>
           </a:p>
         </p:txBody>
       </p:sp>
       <p:sp>
         <p:nvSpPr>
-          <p:cNvPr id="17" name="Rectangle 16"/>
-          <p:cNvSpPr/>
+          <p:cNvPr id="12" name="TextBox 11"/>
+          <p:cNvSpPr txBox="1"/>
           <p:nvPr/>
         </p:nvSpPr>
         <p:spPr>
           <a:xfrm>
-            <a:off x="4709159" y="3803904"/>
-            <a:ext cx="73152" cy="960120"/>
+            <a:off x="457200" y="5623560"/>
+            <a:ext cx="8229600" cy="457200"/>
           </a:xfrm>
           <a:prstGeom prst="rect">
             <a:avLst/>
           </a:prstGeom>
-          <a:solidFill>
-            <a:srgbClr val="C88A12"/>
-          </a:solidFill>
+          <a:noFill/>
           <a:ln>
-            <a:solidFill/>
+            <a:noFill/>
           </a:ln>
         </p:spPr>
-        <p:style>
-          <a:lnRef idx="1">
-            <a:schemeClr val="accent1"/>
-          </a:lnRef>
-          <a:fillRef idx="3">
-            <a:schemeClr val="accent1"/>
-          </a:fillRef>
-          <a:effectRef idx="2">
-            <a:schemeClr val="accent1"/>
-          </a:effectRef>
-          <a:fontRef idx="minor">
-            <a:schemeClr val="lt1"/>
-          </a:fontRef>
-        </p:style>
         <p:txBody>
-          <a:bodyPr rtlCol="0" anchor="ctr"/>
+          <a:bodyPr wrap="square">
+            <a:spAutoFit/>
+          </a:bodyPr>
           <a:lstStyle/>
           <a:p>
-            <a:pPr algn="ctr"/>
-            <a:endParaRPr/>
+            <a:r>
+              <a:rPr sz="900" b="0" i="1">
+                <a:solidFill>
+                  <a:srgbClr val="707070"/>
+                </a:solidFill>
+                <a:latin typeface="Avenir Next LT Pro"/>
+              </a:rPr>
+              <a:t>Other, lower-impact risks: tariffs (~15% China COGS), broad consumer recession, international underperformance — not thesis-critical given conservative modeling.</a:t>
+            </a:r>
           </a:p>
         </p:txBody>
       </p:sp>
       <p:sp>
         <p:nvSpPr>
-          <p:cNvPr id="18" name="Rectangle 17"/>
-          <p:cNvSpPr/>
+          <p:cNvPr id="13" name="TextBox 12"/>
+          <p:cNvSpPr txBox="1"/>
           <p:nvPr/>
         </p:nvSpPr>
         <p:spPr>
           <a:xfrm>
-            <a:off x="457200" y="4928616"/>
-            <a:ext cx="3977639" cy="960120"/>
+            <a:off x="457200" y="6309360"/>
+            <a:ext cx="8229600" cy="274320"/>
           </a:xfrm>
           <a:prstGeom prst="rect">
             <a:avLst/>
           </a:prstGeom>
-          <a:solidFill>
-            <a:srgbClr val="FFFFFF"/>
-          </a:solidFill>
-          <a:ln w="12700">
-            <a:solidFill>
-              <a:srgbClr val="E8E8E8"/>
-            </a:solidFill>
+          <a:noFill/>
+          <a:ln>
+            <a:noFill/>
           </a:ln>
         </p:spPr>
-        <p:style>
-          <a:lnRef idx="1">
-            <a:schemeClr val="accent1"/>
-          </a:lnRef>
-          <a:fillRef idx="3">
-            <a:schemeClr val="accent1"/>
-          </a:fillRef>
-          <a:effectRef idx="2">
-            <a:schemeClr val="accent1"/>
-          </a:effectRef>
-          <a:fontRef idx="minor">
-            <a:schemeClr val="lt1"/>
-          </a:fontRef>
-        </p:style>
         <p:txBody>
-          <a:bodyPr wrap="square" lIns="182880" rtlCol="0" anchor="ctr"/>
+          <a:bodyPr wrap="square">
+            <a:spAutoFit/>
+          </a:bodyPr>
           <a:lstStyle/>
           <a:p>
-            <a:pPr algn="ctr"/>
-            <a:r>
-              <a:rPr sz="1200" b="1">
-                <a:solidFill>
-                  <a:srgbClr val="0E2841"/>
-                </a:solidFill>
-                <a:latin typeface="Avenir Next LT Pro Demi"/>
-              </a:rPr>
-              <a:t>Fulfillment / delivery execution (moat risk at Estates tier)</a:t>
-            </a:r>
-          </a:p>
-          <a:p>
-            <a:r>
-              <a:rPr sz="950" b="1">
-                <a:solidFill>
-                  <a:srgbClr val="C88A12"/>
+            <a:r>
+              <a:rPr sz="750" b="0" i="1">
+                <a:solidFill>
+                  <a:srgbClr val="707070"/>
                 </a:solidFill>
                 <a:latin typeface="Avenir Next LT Pro"/>
               </a:rPr>
-              <a:t>Severity: MED   ·   Probability: 30%</a:t>
-            </a:r>
-          </a:p>
-        </p:txBody>
-      </p:sp>
-      <p:sp>
-        <p:nvSpPr>
-          <p:cNvPr id="19" name="Rectangle 18"/>
-          <p:cNvSpPr/>
-          <p:nvPr/>
-        </p:nvSpPr>
-        <p:spPr>
-          <a:xfrm>
-            <a:off x="457200" y="4928616"/>
-            <a:ext cx="73152" cy="960120"/>
-          </a:xfrm>
-          <a:prstGeom prst="rect">
-            <a:avLst/>
-          </a:prstGeom>
-          <a:solidFill>
-            <a:srgbClr val="C88A12"/>
-          </a:solidFill>
-          <a:ln>
-            <a:solidFill/>
-          </a:ln>
-        </p:spPr>
-        <p:style>
-          <a:lnRef idx="1">
-            <a:schemeClr val="accent1"/>
-          </a:lnRef>
-          <a:fillRef idx="3">
-            <a:schemeClr val="accent1"/>
-          </a:fillRef>
-          <a:effectRef idx="2">
-            <a:schemeClr val="accent1"/>
-          </a:effectRef>
-          <a:fontRef idx="minor">
-            <a:schemeClr val="lt1"/>
-          </a:fontRef>
-        </p:style>
-        <p:txBody>
-          <a:bodyPr rtlCol="0" anchor="ctr"/>
-          <a:lstStyle/>
-          <a:p>
-            <a:pPr algn="ctr"/>
-            <a:endParaRPr/>
+              <a:t>Sources: RH FY2025 10-K &amp; Q1 FY2026 10-Q.</a:t>
+            </a:r>
           </a:p>
         </p:txBody>
       </p:sp>
